--- a/results/pptx/AWS_MSK_Expert_Intro.pptx
+++ b/results/pptx/AWS_MSK_Expert_Intro.pptx
@@ -3762,7 +3762,7 @@
                 </a:solidFill>
                 <a:latin typeface="프리젠테이션 7 Bold"/>
               </a:rPr>
-              <a:t>L05. Phased</a:t>
+              <a:t>L05.</a:t>
             </a:r>
           </a:p>
           <a:p>
@@ -3773,7 +3773,7 @@
                 </a:solidFill>
                 <a:latin typeface="프리젠테이션 7 Bold"/>
               </a:rPr>
-              <a:t>Columns</a:t>
+              <a:t>Phased Columns</a:t>
             </a:r>
           </a:p>
         </p:txBody>
@@ -4628,8 +4628,80 @@
         </p:blipFill>
         <p:spPr>
           <a:xfrm>
-            <a:off x="9601200" y="5669280"/>
-            <a:ext cx="548640" cy="548640"/>
+            <a:off x="2510790" y="5806920"/>
+            <a:ext cx="411480" cy="411480"/>
+          </a:xfrm>
+          <a:prstGeom prst="rect">
+            <a:avLst/>
+          </a:prstGeom>
+        </p:spPr>
+      </p:pic>
+      <p:pic>
+        <p:nvPicPr>
+          <p:cNvPr id="24" name="Picture 23" descr="image.png"/>
+          <p:cNvPicPr>
+            <a:picLocks noChangeAspect="1"/>
+          </p:cNvPicPr>
+          <p:nvPr/>
+        </p:nvPicPr>
+        <p:blipFill>
+          <a:blip r:embed="rId3"/>
+          <a:stretch>
+            <a:fillRect/>
+          </a:stretch>
+        </p:blipFill>
+        <p:spPr>
+          <a:xfrm>
+            <a:off x="5387340" y="5806920"/>
+            <a:ext cx="411480" cy="411480"/>
+          </a:xfrm>
+          <a:prstGeom prst="rect">
+            <a:avLst/>
+          </a:prstGeom>
+        </p:spPr>
+      </p:pic>
+      <p:pic>
+        <p:nvPicPr>
+          <p:cNvPr id="25" name="Picture 24" descr="image.png"/>
+          <p:cNvPicPr>
+            <a:picLocks noChangeAspect="1"/>
+          </p:cNvPicPr>
+          <p:nvPr/>
+        </p:nvPicPr>
+        <p:blipFill>
+          <a:blip r:embed="rId4"/>
+          <a:stretch>
+            <a:fillRect/>
+          </a:stretch>
+        </p:blipFill>
+        <p:spPr>
+          <a:xfrm>
+            <a:off x="8263890" y="5806920"/>
+            <a:ext cx="411480" cy="411480"/>
+          </a:xfrm>
+          <a:prstGeom prst="rect">
+            <a:avLst/>
+          </a:prstGeom>
+        </p:spPr>
+      </p:pic>
+      <p:pic>
+        <p:nvPicPr>
+          <p:cNvPr id="26" name="Picture 25" descr="image.png"/>
+          <p:cNvPicPr>
+            <a:picLocks noChangeAspect="1"/>
+          </p:cNvPicPr>
+          <p:nvPr/>
+        </p:nvPicPr>
+        <p:blipFill>
+          <a:blip r:embed="rId5"/>
+          <a:stretch>
+            <a:fillRect/>
+          </a:stretch>
+        </p:blipFill>
+        <p:spPr>
+          <a:xfrm>
+            <a:off x="11140440" y="5806920"/>
+            <a:ext cx="411480" cy="411480"/>
           </a:xfrm>
           <a:prstGeom prst="rect">
             <a:avLst/>
@@ -8604,7 +8676,19 @@
                 </a:solidFill>
                 <a:latin typeface="프리젠테이션 7 Bold"/>
               </a:rPr>
-              <a:t>L01. Bento Grid</a:t>
+              <a:t>L01. Bento</a:t>
+            </a:r>
+          </a:p>
+          <a:p>
+            <a:pPr algn="l"/>
+            <a:r>
+              <a:rPr sz="2800" b="1">
+                <a:solidFill>
+                  <a:srgbClr val="0043DA"/>
+                </a:solidFill>
+                <a:latin typeface="프리젠테이션 7 Bold"/>
+              </a:rPr>
+              <a:t>Grid</a:t>
             </a:r>
           </a:p>
         </p:txBody>
@@ -9552,7 +9636,7 @@
           <a:p>
             <a:pPr algn="ctr"/>
             <a:r>
-              <a:rPr sz="900" b="0">
+              <a:rPr sz="1000" b="0">
                 <a:solidFill>
                   <a:srgbClr val="EE8150"/>
                 </a:solidFill>
@@ -9587,7 +9671,7 @@
           <a:p>
             <a:pPr algn="ctr"/>
             <a:r>
-              <a:rPr sz="900" b="0">
+              <a:rPr sz="1000" b="0">
                 <a:solidFill>
                   <a:srgbClr val="0043DA"/>
                 </a:solidFill>
@@ -9622,7 +9706,7 @@
           <a:p>
             <a:pPr algn="ctr"/>
             <a:r>
-              <a:rPr sz="900" b="0">
+              <a:rPr sz="1000" b="0">
                 <a:solidFill>
                   <a:srgbClr val="4CB88F"/>
                 </a:solidFill>
@@ -9706,7 +9790,7 @@
                 </a:solidFill>
                 <a:latin typeface="프리젠테이션 7 Bold"/>
               </a:rPr>
-              <a:t>L02. Three</a:t>
+              <a:t>L02.</a:t>
             </a:r>
           </a:p>
           <a:p>
@@ -9717,7 +9801,7 @@
                 </a:solidFill>
                 <a:latin typeface="프리젠테이션 7 Bold"/>
               </a:rPr>
-              <a:t>Cards</a:t>
+              <a:t xml:space="preserve">Three Cards</a:t>
             </a:r>
           </a:p>
         </p:txBody>
@@ -10755,6 +10839,275 @@
                 <a:latin typeface="Freesentation"/>
               </a:rPr>
               <a:t>• 보존 기간별 계층화 전략</a:t>
+            </a:r>
+          </a:p>
+        </p:txBody>
+      </p:sp>
+      <p:sp>
+        <p:nvSpPr>
+          <p:cNvPr id="25" name="Rounded Rectangle 24"/>
+          <p:cNvSpPr/>
+          <p:nvPr/>
+        </p:nvSpPr>
+        <p:spPr>
+          <a:xfrm>
+            <a:off x="457200" y="2116195"/>
+            <a:ext cx="11277295" cy="820582"/>
+          </a:xfrm>
+          <a:prstGeom prst="roundRect">
+            <a:avLst/>
+          </a:prstGeom>
+          <a:solidFill>
+            <a:srgbClr val="F8F9FA"/>
+          </a:solidFill>
+          <a:ln>
+            <a:solidFill>
+              <a:srgbClr val="0043DA"/>
+            </a:solidFill>
+          </a:ln>
+        </p:spPr>
+        <p:style>
+          <a:lnRef idx="1">
+            <a:schemeClr val="accent1"/>
+          </a:lnRef>
+          <a:fillRef idx="3">
+            <a:schemeClr val="accent1"/>
+          </a:fillRef>
+          <a:effectRef idx="2">
+            <a:schemeClr val="accent1"/>
+          </a:effectRef>
+          <a:fontRef idx="minor">
+            <a:schemeClr val="lt1"/>
+          </a:fontRef>
+        </p:style>
+        <p:txBody>
+          <a:bodyPr rtlCol="0" anchor="ctr"/>
+          <a:lstStyle/>
+          <a:p>
+            <a:pPr algn="ctr"/>
+          </a:p>
+        </p:txBody>
+      </p:sp>
+      <p:sp>
+        <p:nvSpPr>
+          <p:cNvPr id="26" name="Rounded Rectangle 25"/>
+          <p:cNvSpPr/>
+          <p:nvPr/>
+        </p:nvSpPr>
+        <p:spPr>
+          <a:xfrm>
+            <a:off x="1249984" y="2275027"/>
+            <a:ext cx="2926080" cy="502920"/>
+          </a:xfrm>
+          <a:prstGeom prst="roundRect">
+            <a:avLst/>
+          </a:prstGeom>
+          <a:solidFill>
+            <a:srgbClr val="EE8150"/>
+          </a:solidFill>
+          <a:ln>
+            <a:solidFill>
+              <a:srgbClr val="EE8150"/>
+            </a:solidFill>
+          </a:ln>
+        </p:spPr>
+        <p:style>
+          <a:lnRef idx="1">
+            <a:schemeClr val="accent1"/>
+          </a:lnRef>
+          <a:fillRef idx="3">
+            <a:schemeClr val="accent1"/>
+          </a:fillRef>
+          <a:effectRef idx="2">
+            <a:schemeClr val="accent1"/>
+          </a:effectRef>
+          <a:fontRef idx="minor">
+            <a:schemeClr val="lt1"/>
+          </a:fontRef>
+        </p:style>
+        <p:txBody>
+          <a:bodyPr rtlCol="0" anchor="ctr"/>
+          <a:lstStyle/>
+          <a:p>
+            <a:r>
+              <a:rPr sz="1300" b="1">
+                <a:solidFill>
+                  <a:srgbClr val="FFFFFF"/>
+                </a:solidFill>
+              </a:rPr>
+              <a:t>Data Source</a:t>
+            </a:r>
+          </a:p>
+        </p:txBody>
+      </p:sp>
+      <p:sp>
+        <p:nvSpPr>
+          <p:cNvPr id="27" name="Rounded Rectangle 26"/>
+          <p:cNvSpPr/>
+          <p:nvPr/>
+        </p:nvSpPr>
+        <p:spPr>
+          <a:xfrm>
+            <a:off x="4633264" y="2275027"/>
+            <a:ext cx="2926080" cy="502920"/>
+          </a:xfrm>
+          <a:prstGeom prst="roundRect">
+            <a:avLst/>
+          </a:prstGeom>
+          <a:solidFill>
+            <a:srgbClr val="0043DA"/>
+          </a:solidFill>
+          <a:ln>
+            <a:solidFill>
+              <a:srgbClr val="0043DA"/>
+            </a:solidFill>
+          </a:ln>
+        </p:spPr>
+        <p:style>
+          <a:lnRef idx="1">
+            <a:schemeClr val="accent1"/>
+          </a:lnRef>
+          <a:fillRef idx="3">
+            <a:schemeClr val="accent1"/>
+          </a:fillRef>
+          <a:effectRef idx="2">
+            <a:schemeClr val="accent1"/>
+          </a:effectRef>
+          <a:fontRef idx="minor">
+            <a:schemeClr val="lt1"/>
+          </a:fontRef>
+        </p:style>
+        <p:txBody>
+          <a:bodyPr rtlCol="0" anchor="ctr"/>
+          <a:lstStyle/>
+          <a:p>
+            <a:r>
+              <a:rPr sz="1300" b="1">
+                <a:solidFill>
+                  <a:srgbClr val="FFFFFF"/>
+                </a:solidFill>
+              </a:rPr>
+              <a:t>Processing</a:t>
+            </a:r>
+          </a:p>
+        </p:txBody>
+      </p:sp>
+      <p:sp>
+        <p:nvSpPr>
+          <p:cNvPr id="28" name="Rounded Rectangle 27"/>
+          <p:cNvSpPr/>
+          <p:nvPr/>
+        </p:nvSpPr>
+        <p:spPr>
+          <a:xfrm>
+            <a:off x="8016544" y="2275027"/>
+            <a:ext cx="2926080" cy="502920"/>
+          </a:xfrm>
+          <a:prstGeom prst="roundRect">
+            <a:avLst/>
+          </a:prstGeom>
+          <a:solidFill>
+            <a:srgbClr val="4CB88F"/>
+          </a:solidFill>
+          <a:ln>
+            <a:solidFill>
+              <a:srgbClr val="4CB88F"/>
+            </a:solidFill>
+          </a:ln>
+        </p:spPr>
+        <p:style>
+          <a:lnRef idx="1">
+            <a:schemeClr val="accent1"/>
+          </a:lnRef>
+          <a:fillRef idx="3">
+            <a:schemeClr val="accent1"/>
+          </a:fillRef>
+          <a:effectRef idx="2">
+            <a:schemeClr val="accent1"/>
+          </a:effectRef>
+          <a:fontRef idx="minor">
+            <a:schemeClr val="lt1"/>
+          </a:fontRef>
+        </p:style>
+        <p:txBody>
+          <a:bodyPr rtlCol="0" anchor="ctr"/>
+          <a:lstStyle/>
+          <a:p>
+            <a:r>
+              <a:rPr sz="1300" b="1">
+                <a:solidFill>
+                  <a:srgbClr val="FFFFFF"/>
+                </a:solidFill>
+              </a:rPr>
+              <a:t>Output</a:t>
+            </a:r>
+          </a:p>
+        </p:txBody>
+      </p:sp>
+      <p:sp>
+        <p:nvSpPr>
+          <p:cNvPr id="29" name="TextBox 28"/>
+          <p:cNvSpPr txBox="1"/>
+          <p:nvPr/>
+        </p:nvSpPr>
+        <p:spPr>
+          <a:xfrm>
+            <a:off x="4176064" y="2435047"/>
+            <a:ext cx="457200" cy="182880"/>
+          </a:xfrm>
+          <a:prstGeom prst="rect">
+            <a:avLst/>
+          </a:prstGeom>
+          <a:noFill/>
+        </p:spPr>
+        <p:txBody>
+          <a:bodyPr wrap="square">
+            <a:spAutoFit/>
+          </a:bodyPr>
+          <a:lstStyle/>
+          <a:p>
+            <a:pPr algn="ctr"/>
+            <a:r>
+              <a:rPr sz="1800" b="1">
+                <a:solidFill>
+                  <a:srgbClr val="0043DA"/>
+                </a:solidFill>
+              </a:rPr>
+              <a:t>→</a:t>
+            </a:r>
+          </a:p>
+        </p:txBody>
+      </p:sp>
+      <p:sp>
+        <p:nvSpPr>
+          <p:cNvPr id="30" name="TextBox 29"/>
+          <p:cNvSpPr txBox="1"/>
+          <p:nvPr/>
+        </p:nvSpPr>
+        <p:spPr>
+          <a:xfrm>
+            <a:off x="7559344" y="2435047"/>
+            <a:ext cx="457200" cy="182880"/>
+          </a:xfrm>
+          <a:prstGeom prst="rect">
+            <a:avLst/>
+          </a:prstGeom>
+          <a:noFill/>
+        </p:spPr>
+        <p:txBody>
+          <a:bodyPr wrap="square">
+            <a:spAutoFit/>
+          </a:bodyPr>
+          <a:lstStyle/>
+          <a:p>
+            <a:pPr algn="ctr"/>
+            <a:r>
+              <a:rPr sz="1800" b="1">
+                <a:solidFill>
+                  <a:srgbClr val="0043DA"/>
+                </a:solidFill>
+              </a:rPr>
+              <a:t>→</a:t>
             </a:r>
           </a:p>
         </p:txBody>
@@ -11681,7 +12034,7 @@
                 </a:solidFill>
                 <a:latin typeface="프리젠테이션 7 Bold"/>
               </a:rPr>
-              <a:t>L04. Process</a:t>
+              <a:t>L04.</a:t>
             </a:r>
           </a:p>
           <a:p>
@@ -11692,7 +12045,7 @@
                 </a:solidFill>
                 <a:latin typeface="프리젠테이션 7 Bold"/>
               </a:rPr>
-              <a:t>Arrow</a:t>
+              <a:t>Process Arrow</a:t>
             </a:r>
           </a:p>
         </p:txBody>
@@ -12547,15 +12900,87 @@
           <p:nvPr/>
         </p:nvPicPr>
         <p:blipFill>
-          <a:blip r:embed="rId2"/>
+          <a:blip r:embed="rId6"/>
           <a:stretch>
             <a:fillRect/>
           </a:stretch>
         </p:blipFill>
         <p:spPr>
           <a:xfrm>
-            <a:off x="9601200" y="5669280"/>
-            <a:ext cx="548640" cy="548640"/>
+            <a:off x="2514600" y="5806440"/>
+            <a:ext cx="411480" cy="411480"/>
+          </a:xfrm>
+          <a:prstGeom prst="rect">
+            <a:avLst/>
+          </a:prstGeom>
+        </p:spPr>
+      </p:pic>
+      <p:pic>
+        <p:nvPicPr>
+          <p:cNvPr id="24" name="Picture 23" descr="image.png"/>
+          <p:cNvPicPr>
+            <a:picLocks noChangeAspect="1"/>
+          </p:cNvPicPr>
+          <p:nvPr/>
+        </p:nvPicPr>
+        <p:blipFill>
+          <a:blip r:embed="rId7"/>
+          <a:stretch>
+            <a:fillRect/>
+          </a:stretch>
+        </p:blipFill>
+        <p:spPr>
+          <a:xfrm>
+            <a:off x="5394959" y="5806440"/>
+            <a:ext cx="411480" cy="411480"/>
+          </a:xfrm>
+          <a:prstGeom prst="rect">
+            <a:avLst/>
+          </a:prstGeom>
+        </p:spPr>
+      </p:pic>
+      <p:pic>
+        <p:nvPicPr>
+          <p:cNvPr id="25" name="Picture 24" descr="image.png"/>
+          <p:cNvPicPr>
+            <a:picLocks noChangeAspect="1"/>
+          </p:cNvPicPr>
+          <p:nvPr/>
+        </p:nvPicPr>
+        <p:blipFill>
+          <a:blip r:embed="rId4"/>
+          <a:stretch>
+            <a:fillRect/>
+          </a:stretch>
+        </p:blipFill>
+        <p:spPr>
+          <a:xfrm>
+            <a:off x="8266175" y="5806440"/>
+            <a:ext cx="411480" cy="411480"/>
+          </a:xfrm>
+          <a:prstGeom prst="rect">
+            <a:avLst/>
+          </a:prstGeom>
+        </p:spPr>
+      </p:pic>
+      <p:pic>
+        <p:nvPicPr>
+          <p:cNvPr id="26" name="Picture 25" descr="image.png"/>
+          <p:cNvPicPr>
+            <a:picLocks noChangeAspect="1"/>
+          </p:cNvPicPr>
+          <p:nvPr/>
+        </p:nvPicPr>
+        <p:blipFill>
+          <a:blip r:embed="rId5"/>
+          <a:stretch>
+            <a:fillRect/>
+          </a:stretch>
+        </p:blipFill>
+        <p:spPr>
+          <a:xfrm>
+            <a:off x="11146536" y="5806440"/>
+            <a:ext cx="411480" cy="411480"/>
           </a:xfrm>
           <a:prstGeom prst="rect">
             <a:avLst/>

--- a/results/pptx/AWS_MSK_Expert_Intro.pptx
+++ b/results/pptx/AWS_MSK_Expert_Intro.pptx
@@ -2969,66 +2969,19 @@
           </a:bodyPr>
           <a:lstStyle/>
           <a:p>
-            <a:pPr latinLnBrk="0"/>
-            <a:r>
-              <a:rPr lang="en-US" altLang="ko-KR" sz="5000" dirty="0">
-                <a:ln>
-                  <a:solidFill>
-                    <a:schemeClr val="accent1">
-                      <a:alpha val="0"/>
-                    </a:schemeClr>
-                  </a:solidFill>
-                </a:ln>
-                <a:solidFill>
-                  <a:schemeClr val="bg1"/>
-                </a:solidFill>
-                <a:latin typeface="프리젠테이션 7 Bold" pitchFamily="2" charset="-127"/>
-                <a:ea typeface="프리젠테이션 7 Bold" pitchFamily="2" charset="-127"/>
-                <a:cs typeface="Pretendard" panose="02000503000000020004" pitchFamily="2" charset="-127"/>
+            <a:pPr latinLnBrk="0" algn="ctr"/>
+            <a:r>
+              <a:rPr sz="5000" b="0">
+                <a:latin typeface="Freesentation"/>
               </a:rPr>
               <a:t>Amazon Managed Streaming</a:t>
             </a:r>
-          </a:p>
-          <a:p>
-            <a:pPr latinLnBrk="0"/>
-            <a:r>
-              <a:rPr lang="en-US" altLang="ko-KR" sz="5000" dirty="0">
-                <a:ln>
-                  <a:solidFill>
-                    <a:schemeClr val="accent1">
-                      <a:alpha val="0"/>
-                    </a:schemeClr>
-                  </a:solidFill>
-                </a:ln>
-                <a:solidFill>
-                  <a:schemeClr val="bg1"/>
-                </a:solidFill>
-                <a:latin typeface="프리젠테이션 7 Bold" pitchFamily="2" charset="-127"/>
-                <a:ea typeface="프리젠테이션 7 Bold" pitchFamily="2" charset="-127"/>
-                <a:cs typeface="Pretendard" panose="02000503000000020004" pitchFamily="2" charset="-127"/>
-              </a:rPr>
-              <a:t>for Apache Kafka</a:t>
-            </a:r>
-          </a:p>
-          <a:p>
-            <a:pPr latinLnBrk="0"/>
-            <a:r>
-              <a:rPr lang="en-US" altLang="ko-KR" sz="5000" dirty="0">
-                <a:ln>
-                  <a:solidFill>
-                    <a:schemeClr val="accent1">
-                      <a:alpha val="0"/>
-                    </a:schemeClr>
-                  </a:solidFill>
-                </a:ln>
-                <a:solidFill>
-                  <a:schemeClr val="bg1"/>
-                </a:solidFill>
-                <a:latin typeface="프리젠테이션 7 Bold" pitchFamily="2" charset="-127"/>
-                <a:ea typeface="프리젠테이션 7 Bold" pitchFamily="2" charset="-127"/>
-                <a:cs typeface="Pretendard" panose="02000503000000020004" pitchFamily="2" charset="-127"/>
-              </a:rPr>
-              <a:t>(MSK)</a:t>
+            <a:br/>
+            <a:r>
+              <a:rPr sz="5000" b="0">
+                <a:latin typeface="Freesentation"/>
+              </a:rPr>
+              <a:t>for Apache Kafka (MSK)</a:t>
             </a:r>
           </a:p>
         </p:txBody>
@@ -3624,7 +3577,7 @@
                     <a:alpha val="80000"/>
                   </a:schemeClr>
                 </a:solidFill>
-                <a:latin typeface="프리젠테이션 7 Bold" pitchFamily="2" charset="-127"/>
+                <a:latin typeface="Freesentation 7 Bold" pitchFamily="2" charset="-127"/>
                 <a:ea typeface="프리젠테이션 7 Bold" pitchFamily="2" charset="-127"/>
                 <a:cs typeface="Pretendard" panose="02000503000000020004" pitchFamily="2" charset="-127"/>
               </a:rPr>
@@ -3674,7 +3627,7 @@
                     <a:alpha val="80000"/>
                   </a:schemeClr>
                 </a:solidFill>
-                <a:latin typeface="프리젠테이션 7 Bold" pitchFamily="2" charset="-127"/>
+                <a:latin typeface="Freesentation 7 Bold" pitchFamily="2" charset="-127"/>
                 <a:ea typeface="프리젠테이션 7 Bold" pitchFamily="2" charset="-127"/>
                 <a:cs typeface="Pretendard" panose="02000503000000020004" pitchFamily="2" charset="-127"/>
               </a:rPr>
@@ -3757,23 +3710,9 @@
             <a:pPr algn="l"/>
             <a:r>
               <a:rPr sz="2800" b="1">
-                <a:solidFill>
-                  <a:srgbClr val="0043DA"/>
-                </a:solidFill>
-                <a:latin typeface="프리젠테이션 7 Bold"/>
-              </a:rPr>
-              <a:t>L05.</a:t>
-            </a:r>
-          </a:p>
-          <a:p>
-            <a:r>
-              <a:rPr sz="2800" b="1">
-                <a:solidFill>
-                  <a:srgbClr val="0043DA"/>
-                </a:solidFill>
-                <a:latin typeface="프리젠테이션 7 Bold"/>
-              </a:rPr>
-              <a:t>Phased Columns</a:t>
+                <a:latin typeface="Freesentation"/>
+              </a:rPr>
+              <a:t>L05. Phased Columns</a:t>
             </a:r>
           </a:p>
         </p:txBody>
@@ -3883,11 +3822,11 @@
           <a:p>
             <a:pPr algn="ctr"/>
             <a:r>
-              <a:rPr sz="1300" b="1">
-                <a:solidFill>
-                  <a:srgbClr val="FFFFFF"/>
-                </a:solidFill>
-                <a:latin typeface="프리젠테이션 7 Bold"/>
+              <a:rPr sz="1300" b="0">
+                <a:solidFill>
+                  <a:srgbClr val="212121"/>
+                </a:solidFill>
+                <a:latin typeface="Freesentation"/>
               </a:rPr>
               <a:t>Phase 1: 평가</a:t>
             </a:r>
@@ -3903,7 +3842,7 @@
         <p:spPr>
           <a:xfrm>
             <a:off x="457200" y="3200400"/>
-            <a:ext cx="2647950" cy="3200880"/>
+            <a:ext cx="2647950" cy="3154680"/>
           </a:xfrm>
           <a:prstGeom prst="roundRect">
             <a:avLst/>
@@ -3949,7 +3888,7 @@
         <p:spPr>
           <a:xfrm>
             <a:off x="594360" y="3337560"/>
-            <a:ext cx="2373630" cy="3063720"/>
+            <a:ext cx="2373630" cy="3017520"/>
           </a:xfrm>
           <a:noFill/>
         </p:spPr>
@@ -4066,11 +4005,11 @@
           <a:p>
             <a:pPr algn="ctr"/>
             <a:r>
-              <a:rPr sz="1300" b="1">
-                <a:solidFill>
-                  <a:srgbClr val="FFFFFF"/>
-                </a:solidFill>
-                <a:latin typeface="프리젠테이션 7 Bold"/>
+              <a:rPr sz="1300" b="0">
+                <a:solidFill>
+                  <a:srgbClr val="212121"/>
+                </a:solidFill>
+                <a:latin typeface="Freesentation"/>
               </a:rPr>
               <a:t>Phase 2: 설계</a:t>
             </a:r>
@@ -4086,7 +4025,7 @@
         <p:spPr>
           <a:xfrm>
             <a:off x="3333750" y="3200400"/>
-            <a:ext cx="2647950" cy="3200880"/>
+            <a:ext cx="2647950" cy="3154680"/>
           </a:xfrm>
           <a:prstGeom prst="roundRect">
             <a:avLst/>
@@ -4132,7 +4071,7 @@
         <p:spPr>
           <a:xfrm>
             <a:off x="3470910" y="3337560"/>
-            <a:ext cx="2373630" cy="3063720"/>
+            <a:ext cx="2373630" cy="3017520"/>
           </a:xfrm>
           <a:noFill/>
         </p:spPr>
@@ -4249,11 +4188,11 @@
           <a:p>
             <a:pPr algn="ctr"/>
             <a:r>
-              <a:rPr sz="1300" b="1">
-                <a:solidFill>
-                  <a:srgbClr val="000000"/>
-                </a:solidFill>
-                <a:latin typeface="프리젠테이션 7 Bold"/>
+              <a:rPr sz="1300" b="0">
+                <a:solidFill>
+                  <a:srgbClr val="212121"/>
+                </a:solidFill>
+                <a:latin typeface="Freesentation"/>
               </a:rPr>
               <a:t>Phase 3: 구축</a:t>
             </a:r>
@@ -4269,7 +4208,7 @@
         <p:spPr>
           <a:xfrm>
             <a:off x="6210300" y="3200400"/>
-            <a:ext cx="2647950" cy="3200880"/>
+            <a:ext cx="2647950" cy="3154680"/>
           </a:xfrm>
           <a:prstGeom prst="roundRect">
             <a:avLst/>
@@ -4315,7 +4254,7 @@
         <p:spPr>
           <a:xfrm>
             <a:off x="6347460" y="3337560"/>
-            <a:ext cx="2373630" cy="3063720"/>
+            <a:ext cx="2373630" cy="3017520"/>
           </a:xfrm>
           <a:noFill/>
         </p:spPr>
@@ -4432,11 +4371,11 @@
           <a:p>
             <a:pPr algn="ctr"/>
             <a:r>
-              <a:rPr sz="1300" b="1">
-                <a:solidFill>
-                  <a:srgbClr val="000000"/>
-                </a:solidFill>
-                <a:latin typeface="프리젠테이션 7 Bold"/>
+              <a:rPr sz="1300" b="0">
+                <a:solidFill>
+                  <a:srgbClr val="212121"/>
+                </a:solidFill>
+                <a:latin typeface="Freesentation"/>
               </a:rPr>
               <a:t>Phase 4: 운영</a:t>
             </a:r>
@@ -4452,7 +4391,7 @@
         <p:spPr>
           <a:xfrm>
             <a:off x="9086850" y="3200400"/>
-            <a:ext cx="2647950" cy="3200880"/>
+            <a:ext cx="2647950" cy="3154680"/>
           </a:xfrm>
           <a:prstGeom prst="roundRect">
             <a:avLst/>
@@ -4498,7 +4437,7 @@
         <p:spPr>
           <a:xfrm>
             <a:off x="9224010" y="3337560"/>
-            <a:ext cx="2373630" cy="3063720"/>
+            <a:ext cx="2373630" cy="3017520"/>
           </a:xfrm>
           <a:noFill/>
         </p:spPr>
@@ -4628,80 +4567,8 @@
         </p:blipFill>
         <p:spPr>
           <a:xfrm>
-            <a:off x="2510790" y="5806920"/>
-            <a:ext cx="411480" cy="411480"/>
-          </a:xfrm>
-          <a:prstGeom prst="rect">
-            <a:avLst/>
-          </a:prstGeom>
-        </p:spPr>
-      </p:pic>
-      <p:pic>
-        <p:nvPicPr>
-          <p:cNvPr id="24" name="Picture 23" descr="image.png"/>
-          <p:cNvPicPr>
-            <a:picLocks noChangeAspect="1"/>
-          </p:cNvPicPr>
-          <p:nvPr/>
-        </p:nvPicPr>
-        <p:blipFill>
-          <a:blip r:embed="rId3"/>
-          <a:stretch>
-            <a:fillRect/>
-          </a:stretch>
-        </p:blipFill>
-        <p:spPr>
-          <a:xfrm>
-            <a:off x="5387340" y="5806920"/>
-            <a:ext cx="411480" cy="411480"/>
-          </a:xfrm>
-          <a:prstGeom prst="rect">
-            <a:avLst/>
-          </a:prstGeom>
-        </p:spPr>
-      </p:pic>
-      <p:pic>
-        <p:nvPicPr>
-          <p:cNvPr id="25" name="Picture 24" descr="image.png"/>
-          <p:cNvPicPr>
-            <a:picLocks noChangeAspect="1"/>
-          </p:cNvPicPr>
-          <p:nvPr/>
-        </p:nvPicPr>
-        <p:blipFill>
-          <a:blip r:embed="rId4"/>
-          <a:stretch>
-            <a:fillRect/>
-          </a:stretch>
-        </p:blipFill>
-        <p:spPr>
-          <a:xfrm>
-            <a:off x="8263890" y="5806920"/>
-            <a:ext cx="411480" cy="411480"/>
-          </a:xfrm>
-          <a:prstGeom prst="rect">
-            <a:avLst/>
-          </a:prstGeom>
-        </p:spPr>
-      </p:pic>
-      <p:pic>
-        <p:nvPicPr>
-          <p:cNvPr id="26" name="Picture 25" descr="image.png"/>
-          <p:cNvPicPr>
-            <a:picLocks noChangeAspect="1"/>
-          </p:cNvPicPr>
-          <p:nvPr/>
-        </p:nvPicPr>
-        <p:blipFill>
-          <a:blip r:embed="rId5"/>
-          <a:stretch>
-            <a:fillRect/>
-          </a:stretch>
-        </p:blipFill>
-        <p:spPr>
-          <a:xfrm>
-            <a:off x="11140440" y="5806920"/>
-            <a:ext cx="411480" cy="411480"/>
+            <a:off x="9601200" y="5669280"/>
+            <a:ext cx="548640" cy="548640"/>
           </a:xfrm>
           <a:prstGeom prst="rect">
             <a:avLst/>
@@ -4938,7 +4805,7 @@
                 <a:solidFill>
                   <a:schemeClr val="bg1"/>
                 </a:solidFill>
-                <a:latin typeface="프리젠테이션 7 Bold" pitchFamily="2" charset="-127"/>
+                <a:latin typeface="Freesentation 7 Bold" pitchFamily="2" charset="-127"/>
                 <a:ea typeface="프리젠테이션 7 Bold" pitchFamily="2" charset="-127"/>
               </a:rPr>
               <a:t>Thank You</a:t>
@@ -5208,7 +5075,7 @@
                 <a:solidFill>
                   <a:srgbClr val="0043DA"/>
                 </a:solidFill>
-                <a:latin typeface="프리젠테이션 7 Bold" pitchFamily="2" charset="-127"/>
+                <a:latin typeface="Freesentation 7 Bold" pitchFamily="2" charset="-127"/>
                 <a:ea typeface="프리젠테이션 7 Bold" pitchFamily="2" charset="-127"/>
                 <a:cs typeface="Pretendard ExtraBold" panose="02000903000000020004" pitchFamily="2" charset="-127"/>
               </a:rPr>
@@ -5253,7 +5120,7 @@
                     </a:schemeClr>
                   </a:solidFill>
                 </a:ln>
-                <a:latin typeface="프리젠테이션 7 Bold" pitchFamily="2" charset="-127"/>
+                <a:latin typeface="Freesentation 7 Bold" pitchFamily="2" charset="-127"/>
                 <a:ea typeface="프리젠테이션 7 Bold" pitchFamily="2" charset="-127"/>
                 <a:cs typeface="Pretendard" panose="02000503000000020004" pitchFamily="2" charset="-127"/>
               </a:rPr>
@@ -5275,7 +5142,7 @@
                     </a:schemeClr>
                   </a:solidFill>
                 </a:ln>
-                <a:latin typeface="프리젠테이션 7 Bold" pitchFamily="2" charset="-127"/>
+                <a:latin typeface="Freesentation 7 Bold" pitchFamily="2" charset="-127"/>
                 <a:ea typeface="프리젠테이션 7 Bold" pitchFamily="2" charset="-127"/>
                 <a:cs typeface="Pretendard" panose="02000503000000020004" pitchFamily="2" charset="-127"/>
               </a:rPr>
@@ -5297,7 +5164,7 @@
                     </a:schemeClr>
                   </a:solidFill>
                 </a:ln>
-                <a:latin typeface="프리젠테이션 7 Bold" pitchFamily="2" charset="-127"/>
+                <a:latin typeface="Freesentation 7 Bold" pitchFamily="2" charset="-127"/>
                 <a:ea typeface="프리젠테이션 7 Bold" pitchFamily="2" charset="-127"/>
                 <a:cs typeface="Pretendard" panose="02000503000000020004" pitchFamily="2" charset="-127"/>
               </a:rPr>
@@ -5389,7 +5256,7 @@
                     <a:lumOff val="25000"/>
                   </a:schemeClr>
                 </a:solidFill>
-                <a:latin typeface="프리젠테이션 7 Bold" pitchFamily="2" charset="-127"/>
+                <a:latin typeface="Freesentation 7 Bold" pitchFamily="2" charset="-127"/>
                 <a:ea typeface="프리젠테이션 7 Bold" pitchFamily="2" charset="-127"/>
                 <a:cs typeface="Pretendard" panose="02000503000000020004" pitchFamily="2" charset="-127"/>
               </a:rPr>
@@ -5438,7 +5305,7 @@
                     <a:lumOff val="25000"/>
                   </a:schemeClr>
                 </a:solidFill>
-                <a:latin typeface="프리젠테이션 7 Bold" pitchFamily="2" charset="-127"/>
+                <a:latin typeface="Freesentation 7 Bold" pitchFamily="2" charset="-127"/>
                 <a:ea typeface="프리젠테이션 7 Bold" pitchFamily="2" charset="-127"/>
                 <a:cs typeface="Pretendard" panose="02000503000000020004" pitchFamily="2" charset="-127"/>
               </a:rPr>
@@ -5487,7 +5354,7 @@
                     <a:lumOff val="25000"/>
                   </a:schemeClr>
                 </a:solidFill>
-                <a:latin typeface="프리젠테이션 7 Bold" pitchFamily="2" charset="-127"/>
+                <a:latin typeface="Freesentation 7 Bold" pitchFamily="2" charset="-127"/>
                 <a:ea typeface="프리젠테이션 7 Bold" pitchFamily="2" charset="-127"/>
                 <a:cs typeface="Pretendard" panose="02000503000000020004" pitchFamily="2" charset="-127"/>
               </a:rPr>
@@ -5833,13 +5700,10 @@
           <a:p>
             <a:pPr algn="l" eaLnBrk="0" latinLnBrk="0" hangingPunct="0"/>
             <a:r>
-              <a:rPr sz="2800" b="1" dirty="0">
-                <a:solidFill>
-                  <a:srgbClr val="0043DA"/>
-                </a:solidFill>
-                <a:latin typeface="프리젠테이션 7 Bold"/>
-              </a:rPr>
-              <a:t>1-1. MSK</a:t>
+              <a:rPr sz="2800" b="1">
+                <a:latin typeface="Freesentation"/>
+              </a:rPr>
+              <a:t>1-1. MSK 아키텍처 개요</a:t>
             </a:r>
             <a:endParaRPr lang="ko-KR" altLang="en-US" sz="2800" b="1" dirty="0">
               <a:solidFill>
@@ -5848,17 +5712,6 @@
               <a:latin typeface="프리젠테이션 7 Bold"/>
             </a:endParaRPr>
           </a:p>
-          <a:p>
-            <a:r>
-              <a:rPr lang="ko-KR" altLang="en-US" sz="2800" b="1" dirty="0">
-                <a:solidFill>
-                  <a:srgbClr val="0043DA"/>
-                </a:solidFill>
-                <a:latin typeface="프리젠테이션 7 Bold"/>
-              </a:rPr>
-              <a:t>아키텍처 개요</a:t>
-            </a:r>
-          </a:p>
         </p:txBody>
       </p:sp>
       <p:sp>
@@ -5869,8 +5722,8 @@
         </p:nvSpPr>
         <p:spPr>
           <a:xfrm>
-            <a:off x="4606766" y="558800"/>
-            <a:ext cx="6708417" cy="937918"/>
+            <a:off x="3763700" y="558800"/>
+            <a:ext cx="7551483" cy="937918"/>
           </a:xfrm>
           <a:prstGeom prst="rect">
             <a:avLst/>
@@ -5981,7 +5834,7 @@
             <a:avLst/>
           </a:prstGeom>
           <a:solidFill>
-            <a:srgbClr val="0043DA"/>
+            <a:srgbClr val="EE8150"/>
           </a:solidFill>
           <a:ln>
             <a:noFill/>
@@ -6013,9 +5866,9 @@
             <a:r>
               <a:rPr sz="1400" b="1">
                 <a:solidFill>
-                  <a:srgbClr val="FFFFFF"/>
-                </a:solidFill>
-                <a:latin typeface="프리젠테이션 7 Bold"/>
+                  <a:srgbClr val="0043DA"/>
+                </a:solidFill>
+                <a:latin typeface="Freesentation 7 Bold"/>
               </a:rPr>
               <a:t>Producer</a:t>
             </a:r>
@@ -6037,7 +5890,7 @@
             <a:avLst/>
           </a:prstGeom>
           <a:solidFill>
-            <a:srgbClr val="0043DA"/>
+            <a:srgbClr val="EE8150"/>
           </a:solidFill>
           <a:ln>
             <a:noFill/>
@@ -6140,7 +5993,7 @@
                 <a:solidFill>
                   <a:srgbClr val="0043DA"/>
                 </a:solidFill>
-                <a:latin typeface="프리젠테이션 7 Bold"/>
+                <a:latin typeface="Freesentation 7 Bold"/>
               </a:rPr>
               <a:t>MSK Cluster (Multi-AZ Brokers)</a:t>
             </a:r>
@@ -6192,11 +6045,11 @@
               </a:spcBef>
             </a:pPr>
             <a:r>
-              <a:rPr sz="1200" b="1">
-                <a:solidFill>
-                  <a:srgbClr val="FFFFFF"/>
-                </a:solidFill>
-                <a:latin typeface="프리젠테이션 7 Bold"/>
+              <a:rPr sz="1300" b="0">
+                <a:solidFill>
+                  <a:srgbClr val="212121"/>
+                </a:solidFill>
+                <a:latin typeface="Freesentation"/>
               </a:rPr>
               <a:t>Broker (AZ-a)</a:t>
             </a:r>
@@ -6248,11 +6101,11 @@
               </a:spcBef>
             </a:pPr>
             <a:r>
-              <a:rPr sz="1200" b="1">
-                <a:solidFill>
-                  <a:srgbClr val="FFFFFF"/>
-                </a:solidFill>
-                <a:latin typeface="프리젠테이션 7 Bold"/>
+              <a:rPr sz="1300" b="0">
+                <a:solidFill>
+                  <a:srgbClr val="212121"/>
+                </a:solidFill>
+                <a:latin typeface="Freesentation"/>
               </a:rPr>
               <a:t>Broker (AZ-b)</a:t>
             </a:r>
@@ -6304,11 +6157,11 @@
               </a:spcBef>
             </a:pPr>
             <a:r>
-              <a:rPr sz="1200" b="1">
-                <a:solidFill>
-                  <a:srgbClr val="FFFFFF"/>
-                </a:solidFill>
-                <a:latin typeface="프리젠테이션 7 Bold"/>
+              <a:rPr sz="1300" b="0">
+                <a:solidFill>
+                  <a:srgbClr val="212121"/>
+                </a:solidFill>
+                <a:latin typeface="Freesentation"/>
               </a:rPr>
               <a:t>Broker (AZ-c)</a:t>
             </a:r>
@@ -6374,7 +6227,7 @@
             <a:avLst/>
           </a:prstGeom>
           <a:solidFill>
-            <a:srgbClr val="0043DA"/>
+            <a:srgbClr val="4CB88F"/>
           </a:solidFill>
           <a:ln>
             <a:noFill/>
@@ -6406,9 +6259,9 @@
             <a:r>
               <a:rPr sz="1400" b="1">
                 <a:solidFill>
-                  <a:srgbClr val="FFFFFF"/>
-                </a:solidFill>
-                <a:latin typeface="프리젠테이션 7 Bold"/>
+                  <a:srgbClr val="0043DA"/>
+                </a:solidFill>
+                <a:latin typeface="Freesentation 7 Bold"/>
               </a:rPr>
               <a:t>Consumer</a:t>
             </a:r>
@@ -6424,6 +6277,190 @@
         <p:spPr>
           <a:xfrm>
             <a:off x="457200" y="4023360"/>
+            <a:ext cx="3606800" cy="2286000"/>
+          </a:xfrm>
+          <a:prstGeom prst="roundRect">
+            <a:avLst/>
+          </a:prstGeom>
+          <a:solidFill>
+            <a:srgbClr val="EE8150"/>
+          </a:solidFill>
+          <a:ln w="6350">
+            <a:solidFill>
+              <a:srgbClr val="DCDCDC"/>
+            </a:solidFill>
+          </a:ln>
+        </p:spPr>
+        <p:style>
+          <a:lnRef idx="1">
+            <a:schemeClr val="accent1"/>
+          </a:lnRef>
+          <a:fillRef idx="3">
+            <a:schemeClr val="accent1"/>
+          </a:fillRef>
+          <a:effectRef idx="2">
+            <a:schemeClr val="accent1"/>
+          </a:effectRef>
+          <a:fontRef idx="minor">
+            <a:schemeClr val="lt1"/>
+          </a:fontRef>
+        </p:style>
+        <p:txBody>
+          <a:bodyPr rtlCol="0" anchor="ctr"/>
+          <a:lstStyle/>
+          <a:p>
+            <a:pPr algn="ctr"/>
+            <a:endParaRPr/>
+          </a:p>
+        </p:txBody>
+      </p:sp>
+      <p:sp>
+        <p:nvSpPr>
+          <p:cNvPr id="17" name="TextBox 16"/>
+          <p:cNvSpPr txBox="1"/>
+          <p:nvPr/>
+        </p:nvSpPr>
+        <p:spPr>
+          <a:xfrm>
+            <a:off x="640080" y="4160520"/>
+            <a:ext cx="3241040" cy="320040"/>
+          </a:xfrm>
+          <a:prstGeom prst="rect">
+            <a:avLst/>
+          </a:prstGeom>
+          <a:noFill/>
+        </p:spPr>
+        <p:txBody>
+          <a:bodyPr wrap="square">
+            <a:spAutoFit/>
+          </a:bodyPr>
+          <a:lstStyle/>
+          <a:p>
+            <a:pPr algn="l"/>
+            <a:r>
+              <a:rPr sz="1400" b="1">
+                <a:solidFill>
+                  <a:srgbClr val="0043DA"/>
+                </a:solidFill>
+                <a:latin typeface="Freesentation 7 Bold"/>
+              </a:rPr>
+              <a:t>핵심 구성요소</a:t>
+            </a:r>
+          </a:p>
+        </p:txBody>
+      </p:sp>
+      <p:sp>
+        <p:nvSpPr>
+          <p:cNvPr id="18" name="TextBox 17"/>
+          <p:cNvSpPr txBox="1"/>
+          <p:nvPr/>
+        </p:nvSpPr>
+        <p:spPr>
+          <a:xfrm>
+            <a:off x="640080" y="4526280"/>
+            <a:ext cx="3241040" cy="1645920"/>
+          </a:xfrm>
+          <a:prstGeom prst="rect">
+            <a:avLst/>
+          </a:prstGeom>
+          <a:noFill/>
+        </p:spPr>
+        <p:txBody>
+          <a:bodyPr wrap="square">
+            <a:spAutoFit/>
+          </a:bodyPr>
+          <a:lstStyle/>
+          <a:p>
+            <a:pPr algn="l">
+              <a:spcBef>
+                <a:spcPts val="0"/>
+              </a:spcBef>
+            </a:pPr>
+            <a:r>
+              <a:rPr sz="1300" b="0">
+                <a:solidFill>
+                  <a:srgbClr val="212121"/>
+                </a:solidFill>
+                <a:latin typeface="Freesentation"/>
+              </a:rPr>
+              <a:t>• Broker: 메시지 저장/전달 노드</a:t>
+            </a:r>
+          </a:p>
+          <a:p>
+            <a:pPr algn="l">
+              <a:spcBef>
+                <a:spcPts val="200"/>
+              </a:spcBef>
+            </a:pPr>
+            <a:r>
+              <a:rPr sz="1300" b="0">
+                <a:solidFill>
+                  <a:srgbClr val="212121"/>
+                </a:solidFill>
+                <a:latin typeface="Freesentation"/>
+              </a:rPr>
+              <a:t>• Topic: 메시지 카테고리 단위</a:t>
+            </a:r>
+          </a:p>
+          <a:p>
+            <a:pPr algn="l">
+              <a:spcBef>
+                <a:spcPts val="200"/>
+              </a:spcBef>
+            </a:pPr>
+            <a:r>
+              <a:rPr sz="1300" b="0">
+                <a:solidFill>
+                  <a:srgbClr val="212121"/>
+                </a:solidFill>
+                <a:latin typeface="Freesentation"/>
+              </a:rPr>
+              <a:t>• Partition: 병렬 처리 단위</a:t>
+            </a:r>
+          </a:p>
+          <a:p>
+            <a:pPr algn="l">
+              <a:spcBef>
+                <a:spcPts val="200"/>
+              </a:spcBef>
+            </a:pPr>
+            <a:r>
+              <a:rPr sz="1300" b="0">
+                <a:solidFill>
+                  <a:srgbClr val="212121"/>
+                </a:solidFill>
+                <a:latin typeface="Freesentation"/>
+              </a:rPr>
+              <a:t>• Replication Factor: 데이터 복제 수</a:t>
+            </a:r>
+          </a:p>
+          <a:p>
+            <a:pPr algn="l">
+              <a:spcBef>
+                <a:spcPts val="200"/>
+              </a:spcBef>
+            </a:pPr>
+            <a:r>
+              <a:rPr sz="1300" b="0">
+                <a:solidFill>
+                  <a:srgbClr val="212121"/>
+                </a:solidFill>
+                <a:latin typeface="Freesentation"/>
+              </a:rPr>
+              <a:t>• ZooKeeper / KRaft: 메타데이터 관리</a:t>
+            </a:r>
+          </a:p>
+        </p:txBody>
+      </p:sp>
+      <p:sp>
+        <p:nvSpPr>
+          <p:cNvPr id="19" name="Rounded Rectangle 18"/>
+          <p:cNvSpPr/>
+          <p:nvPr/>
+        </p:nvSpPr>
+        <p:spPr>
+          <a:xfrm>
+            <a:off x="4292600" y="4023360"/>
             <a:ext cx="3606800" cy="2286000"/>
           </a:xfrm>
           <a:prstGeom prst="roundRect">
@@ -6463,13 +6500,13 @@
       </p:sp>
       <p:sp>
         <p:nvSpPr>
-          <p:cNvPr id="17" name="TextBox 16"/>
+          <p:cNvPr id="20" name="TextBox 19"/>
           <p:cNvSpPr txBox="1"/>
           <p:nvPr/>
         </p:nvSpPr>
         <p:spPr>
           <a:xfrm>
-            <a:off x="640080" y="4160520"/>
+            <a:off x="4475480" y="4160520"/>
             <a:ext cx="3241040" cy="320040"/>
           </a:xfrm>
           <a:prstGeom prst="rect">
@@ -6489,22 +6526,22 @@
                 <a:solidFill>
                   <a:srgbClr val="0043DA"/>
                 </a:solidFill>
-                <a:latin typeface="프리젠테이션 7 Bold"/>
-              </a:rPr>
-              <a:t>핵심 구성요소</a:t>
-            </a:r>
-          </a:p>
-        </p:txBody>
-      </p:sp>
-      <p:sp>
-        <p:nvSpPr>
-          <p:cNvPr id="18" name="TextBox 17"/>
+                <a:latin typeface="Freesentation 7 Bold"/>
+              </a:rPr>
+              <a:t>네트워크 구성</a:t>
+            </a:r>
+          </a:p>
+        </p:txBody>
+      </p:sp>
+      <p:sp>
+        <p:nvSpPr>
+          <p:cNvPr id="21" name="TextBox 20"/>
           <p:cNvSpPr txBox="1"/>
           <p:nvPr/>
         </p:nvSpPr>
         <p:spPr>
           <a:xfrm>
-            <a:off x="640080" y="4526280"/>
+            <a:off x="4475480" y="4526280"/>
             <a:ext cx="3241040" cy="1645920"/>
           </a:xfrm>
           <a:prstGeom prst="rect">
@@ -6530,7 +6567,7 @@
                 </a:solidFill>
                 <a:latin typeface="Freesentation"/>
               </a:rPr>
-              <a:t>• Broker: 메시지 저장/전달 노드</a:t>
+              <a:t>• VPC 내 Private Subnet 배치</a:t>
             </a:r>
           </a:p>
           <a:p>
@@ -6546,7 +6583,7 @@
                 </a:solidFill>
                 <a:latin typeface="Freesentation"/>
               </a:rPr>
-              <a:t>• Topic: 메시지 카테고리 단위</a:t>
+              <a:t>• Security Group 기반 접근 제어</a:t>
             </a:r>
           </a:p>
           <a:p>
@@ -6562,7 +6599,7 @@
                 </a:solidFill>
                 <a:latin typeface="Freesentation"/>
               </a:rPr>
-              <a:t>• Partition: 병렬 처리 단위</a:t>
+              <a:t>• ENI: 브로커별 네트워크 인터페이스</a:t>
             </a:r>
           </a:p>
           <a:p>
@@ -6578,7 +6615,7 @@
                 </a:solidFill>
                 <a:latin typeface="Freesentation"/>
               </a:rPr>
-              <a:t>• Replication Factor: 데이터 복제 수</a:t>
+              <a:t>• PrivateLink: Cross-VPC 연결</a:t>
             </a:r>
           </a:p>
           <a:p>
@@ -6594,20 +6631,20 @@
                 </a:solidFill>
                 <a:latin typeface="Freesentation"/>
               </a:rPr>
-              <a:t>• ZooKeeper / KRaft: 메타데이터 관리</a:t>
-            </a:r>
-          </a:p>
-        </p:txBody>
-      </p:sp>
-      <p:sp>
-        <p:nvSpPr>
-          <p:cNvPr id="19" name="Rounded Rectangle 18"/>
+              <a:t>• Multi-AZ 자동 분산 배치</a:t>
+            </a:r>
+          </a:p>
+        </p:txBody>
+      </p:sp>
+      <p:sp>
+        <p:nvSpPr>
+          <p:cNvPr id="22" name="Rounded Rectangle 21"/>
           <p:cNvSpPr/>
           <p:nvPr/>
         </p:nvSpPr>
         <p:spPr>
           <a:xfrm>
-            <a:off x="4292600" y="4023360"/>
+            <a:off x="8128000" y="4023360"/>
             <a:ext cx="3606800" cy="2286000"/>
           </a:xfrm>
           <a:prstGeom prst="roundRect">
@@ -6647,13 +6684,13 @@
       </p:sp>
       <p:sp>
         <p:nvSpPr>
-          <p:cNvPr id="20" name="TextBox 19"/>
+          <p:cNvPr id="23" name="TextBox 22"/>
           <p:cNvSpPr txBox="1"/>
           <p:nvPr/>
         </p:nvSpPr>
         <p:spPr>
           <a:xfrm>
-            <a:off x="4475480" y="4160520"/>
+            <a:off x="8310880" y="4160520"/>
             <a:ext cx="3241040" cy="320040"/>
           </a:xfrm>
           <a:prstGeom prst="rect">
@@ -6673,22 +6710,22 @@
                 <a:solidFill>
                   <a:srgbClr val="0043DA"/>
                 </a:solidFill>
-                <a:latin typeface="프리젠테이션 7 Bold"/>
-              </a:rPr>
-              <a:t>네트워크 구성</a:t>
-            </a:r>
-          </a:p>
-        </p:txBody>
-      </p:sp>
-      <p:sp>
-        <p:nvSpPr>
-          <p:cNvPr id="21" name="TextBox 20"/>
+                <a:latin typeface="Freesentation 7 Bold"/>
+              </a:rPr>
+              <a:t>스토리지</a:t>
+            </a:r>
+          </a:p>
+        </p:txBody>
+      </p:sp>
+      <p:sp>
+        <p:nvSpPr>
+          <p:cNvPr id="24" name="TextBox 23"/>
           <p:cNvSpPr txBox="1"/>
           <p:nvPr/>
         </p:nvSpPr>
         <p:spPr>
           <a:xfrm>
-            <a:off x="4475480" y="4526280"/>
+            <a:off x="8310880" y="4526280"/>
             <a:ext cx="3241040" cy="1645920"/>
           </a:xfrm>
           <a:prstGeom prst="rect">
@@ -6714,7 +6751,7 @@
                 </a:solidFill>
                 <a:latin typeface="Freesentation"/>
               </a:rPr>
-              <a:t>• VPC 내 Private Subnet 배치</a:t>
+              <a:t>• EBS gp3: 기본 브로커 스토리지</a:t>
             </a:r>
           </a:p>
           <a:p>
@@ -6730,7 +6767,7 @@
                 </a:solidFill>
                 <a:latin typeface="Freesentation"/>
               </a:rPr>
-              <a:t>• Security Group 기반 접근 제어</a:t>
+              <a:t>• Provisioned IOPS: 고성능 워크로드</a:t>
             </a:r>
           </a:p>
           <a:p>
@@ -6746,7 +6783,7 @@
                 </a:solidFill>
                 <a:latin typeface="Freesentation"/>
               </a:rPr>
-              <a:t>• ENI: 브로커별 네트워크 인터페이스</a:t>
+              <a:t>• Tiered Storage: S3 기반 장기 보관</a:t>
             </a:r>
           </a:p>
           <a:p>
@@ -6762,7 +6799,7 @@
                 </a:solidFill>
                 <a:latin typeface="Freesentation"/>
               </a:rPr>
-              <a:t>• PrivateLink: Cross-VPC 연결</a:t>
+              <a:t>• 자동 확장: 디스크 용량 자동 증설</a:t>
             </a:r>
           </a:p>
           <a:p>
@@ -6778,195 +6815,83 @@
                 </a:solidFill>
                 <a:latin typeface="Freesentation"/>
               </a:rPr>
-              <a:t>• Multi-AZ 자동 분산 배치</a:t>
-            </a:r>
-          </a:p>
-        </p:txBody>
-      </p:sp>
-      <p:sp>
-        <p:nvSpPr>
-          <p:cNvPr id="22" name="Rounded Rectangle 21"/>
-          <p:cNvSpPr/>
-          <p:nvPr/>
-        </p:nvSpPr>
-        <p:spPr>
-          <a:xfrm>
-            <a:off x="8128000" y="4023360"/>
-            <a:ext cx="3606800" cy="2286000"/>
-          </a:xfrm>
-          <a:prstGeom prst="roundRect">
-            <a:avLst/>
-          </a:prstGeom>
-          <a:solidFill>
-            <a:srgbClr val="F8F9FA"/>
-          </a:solidFill>
-          <a:ln w="6350">
-            <a:solidFill>
-              <a:srgbClr val="DCDCDC"/>
-            </a:solidFill>
-          </a:ln>
-        </p:spPr>
-        <p:style>
-          <a:lnRef idx="1">
-            <a:schemeClr val="accent1"/>
-          </a:lnRef>
-          <a:fillRef idx="3">
-            <a:schemeClr val="accent1"/>
-          </a:fillRef>
-          <a:effectRef idx="2">
-            <a:schemeClr val="accent1"/>
-          </a:effectRef>
-          <a:fontRef idx="minor">
-            <a:schemeClr val="lt1"/>
-          </a:fontRef>
-        </p:style>
-        <p:txBody>
-          <a:bodyPr rtlCol="0" anchor="ctr"/>
-          <a:lstStyle/>
-          <a:p>
-            <a:pPr algn="ctr"/>
-            <a:endParaRPr/>
-          </a:p>
-        </p:txBody>
-      </p:sp>
-      <p:sp>
-        <p:nvSpPr>
-          <p:cNvPr id="23" name="TextBox 22"/>
-          <p:cNvSpPr txBox="1"/>
-          <p:nvPr/>
-        </p:nvSpPr>
-        <p:spPr>
-          <a:xfrm>
-            <a:off x="8310880" y="4160520"/>
-            <a:ext cx="3241040" cy="320040"/>
-          </a:xfrm>
-          <a:prstGeom prst="rect">
-            <a:avLst/>
-          </a:prstGeom>
-          <a:noFill/>
-        </p:spPr>
-        <p:txBody>
-          <a:bodyPr wrap="square">
-            <a:spAutoFit/>
-          </a:bodyPr>
-          <a:lstStyle/>
-          <a:p>
-            <a:pPr algn="l"/>
-            <a:r>
-              <a:rPr sz="1400" b="1">
-                <a:solidFill>
-                  <a:srgbClr val="0043DA"/>
-                </a:solidFill>
-                <a:latin typeface="프리젠테이션 7 Bold"/>
-              </a:rPr>
-              <a:t>스토리지</a:t>
-            </a:r>
-          </a:p>
-        </p:txBody>
-      </p:sp>
-      <p:sp>
-        <p:nvSpPr>
-          <p:cNvPr id="24" name="TextBox 23"/>
-          <p:cNvSpPr txBox="1"/>
-          <p:nvPr/>
-        </p:nvSpPr>
-        <p:spPr>
-          <a:xfrm>
-            <a:off x="8310880" y="4526280"/>
-            <a:ext cx="3241040" cy="1645920"/>
-          </a:xfrm>
-          <a:prstGeom prst="rect">
-            <a:avLst/>
-          </a:prstGeom>
-          <a:noFill/>
-        </p:spPr>
-        <p:txBody>
-          <a:bodyPr wrap="square">
-            <a:spAutoFit/>
-          </a:bodyPr>
-          <a:lstStyle/>
-          <a:p>
-            <a:pPr algn="l">
-              <a:spcBef>
-                <a:spcPts val="0"/>
-              </a:spcBef>
-            </a:pPr>
-            <a:r>
-              <a:rPr sz="1300" b="0">
-                <a:solidFill>
-                  <a:srgbClr val="212121"/>
-                </a:solidFill>
-                <a:latin typeface="Freesentation"/>
-              </a:rPr>
-              <a:t>• EBS gp3: 기본 브로커 스토리지</a:t>
-            </a:r>
-          </a:p>
-          <a:p>
-            <a:pPr algn="l">
-              <a:spcBef>
-                <a:spcPts val="200"/>
-              </a:spcBef>
-            </a:pPr>
-            <a:r>
-              <a:rPr sz="1300" b="0">
-                <a:solidFill>
-                  <a:srgbClr val="212121"/>
-                </a:solidFill>
-                <a:latin typeface="Freesentation"/>
-              </a:rPr>
-              <a:t>• Provisioned IOPS: 고성능 워크로드</a:t>
-            </a:r>
-          </a:p>
-          <a:p>
-            <a:pPr algn="l">
-              <a:spcBef>
-                <a:spcPts val="200"/>
-              </a:spcBef>
-            </a:pPr>
-            <a:r>
-              <a:rPr sz="1300" b="0">
-                <a:solidFill>
-                  <a:srgbClr val="212121"/>
-                </a:solidFill>
-                <a:latin typeface="Freesentation"/>
-              </a:rPr>
-              <a:t>• Tiered Storage: S3 기반 장기 보관</a:t>
-            </a:r>
-          </a:p>
-          <a:p>
-            <a:pPr algn="l">
-              <a:spcBef>
-                <a:spcPts val="200"/>
-              </a:spcBef>
-            </a:pPr>
-            <a:r>
-              <a:rPr sz="1300" b="0">
-                <a:solidFill>
-                  <a:srgbClr val="212121"/>
-                </a:solidFill>
-                <a:latin typeface="Freesentation"/>
-              </a:rPr>
-              <a:t>• 자동 확장: 디스크 용량 자동 증설</a:t>
-            </a:r>
-          </a:p>
-          <a:p>
-            <a:pPr algn="l">
-              <a:spcBef>
-                <a:spcPts val="200"/>
-              </a:spcBef>
-            </a:pPr>
-            <a:r>
-              <a:rPr sz="1300" b="0">
-                <a:solidFill>
-                  <a:srgbClr val="212121"/>
-                </a:solidFill>
-                <a:latin typeface="Freesentation"/>
-              </a:rPr>
               <a:t>• 보존 기간별 계층화 전략</a:t>
             </a:r>
           </a:p>
         </p:txBody>
       </p:sp>
+      <p:pic>
+        <p:nvPicPr>
+          <p:cNvPr id="28" name="Picture 27" descr="image.png"/>
+          <p:cNvPicPr>
+            <a:picLocks noChangeAspect="1"/>
+          </p:cNvPicPr>
+          <p:nvPr/>
+        </p:nvPicPr>
+        <p:blipFill>
+          <a:blip r:embed="rId2"/>
+          <a:stretch>
+            <a:fillRect/>
+          </a:stretch>
+        </p:blipFill>
+        <p:spPr>
+          <a:xfrm>
+            <a:off x="3469640" y="4160520"/>
+            <a:ext cx="411480" cy="411480"/>
+          </a:xfrm>
+          <a:prstGeom prst="rect">
+            <a:avLst/>
+          </a:prstGeom>
+        </p:spPr>
+      </p:pic>
+      <p:pic>
+        <p:nvPicPr>
+          <p:cNvPr id="29" name="Picture 28" descr="image.png"/>
+          <p:cNvPicPr>
+            <a:picLocks noChangeAspect="1"/>
+          </p:cNvPicPr>
+          <p:nvPr/>
+        </p:nvPicPr>
+        <p:blipFill>
+          <a:blip r:embed="rId3"/>
+          <a:stretch>
+            <a:fillRect/>
+          </a:stretch>
+        </p:blipFill>
+        <p:spPr>
+          <a:xfrm>
+            <a:off x="7305040" y="4160520"/>
+            <a:ext cx="411480" cy="411480"/>
+          </a:xfrm>
+          <a:prstGeom prst="rect">
+            <a:avLst/>
+          </a:prstGeom>
+        </p:spPr>
+      </p:pic>
+      <p:pic>
+        <p:nvPicPr>
+          <p:cNvPr id="30" name="Picture 29" descr="image.png"/>
+          <p:cNvPicPr>
+            <a:picLocks noChangeAspect="1"/>
+          </p:cNvPicPr>
+          <p:nvPr/>
+        </p:nvPicPr>
+        <p:blipFill>
+          <a:blip r:embed="rId4"/>
+          <a:stretch>
+            <a:fillRect/>
+          </a:stretch>
+        </p:blipFill>
+        <p:spPr>
+          <a:xfrm>
+            <a:off x="11140440" y="4160520"/>
+            <a:ext cx="411480" cy="411480"/>
+          </a:xfrm>
+          <a:prstGeom prst="rect">
+            <a:avLst/>
+          </a:prstGeom>
+        </p:spPr>
+      </p:pic>
     </p:spTree>
   </p:cSld>
   <p:clrMapOvr>
@@ -7199,14 +7124,14 @@
       </p:sp>
       <p:pic>
         <p:nvPicPr>
-          <p:cNvPr id="8" name="Picture 7" descr="cluster.png"/>
+          <p:cNvPr id="23" name="Picture 22" descr="image.png"/>
           <p:cNvPicPr>
             <a:picLocks noChangeAspect="1"/>
           </p:cNvPicPr>
           <p:nvPr/>
         </p:nvPicPr>
         <p:blipFill>
-          <a:blip r:embed="rId2"/>
+          <a:blip r:embed="rId6"/>
           <a:stretch>
             <a:fillRect/>
           </a:stretch>
@@ -7249,7 +7174,7 @@
                 <a:solidFill>
                   <a:srgbClr val="0043DA"/>
                 </a:solidFill>
-                <a:latin typeface="프리젠테이션 7 Bold"/>
+                <a:latin typeface="Freesentation 7 Bold"/>
               </a:rPr>
               <a:t>클러스터 유형</a:t>
             </a:r>
@@ -7375,7 +7300,7 @@
       </p:sp>
       <p:pic>
         <p:nvPicPr>
-          <p:cNvPr id="12" name="Picture 11" descr="security.png"/>
+          <p:cNvPr id="24" name="Picture 23" descr="image.png"/>
           <p:cNvPicPr>
             <a:picLocks noChangeAspect="1"/>
           </p:cNvPicPr>
@@ -7425,7 +7350,7 @@
                 <a:solidFill>
                   <a:srgbClr val="0043DA"/>
                 </a:solidFill>
-                <a:latin typeface="프리젠테이션 7 Bold"/>
+                <a:latin typeface="Freesentation 7 Bold"/>
               </a:rPr>
               <a:t>보안 체계</a:t>
             </a:r>
@@ -7512,7 +7437,7 @@
         <p:spPr>
           <a:xfrm>
             <a:off x="563880" y="4663440"/>
-            <a:ext cx="5394960" cy="1828800"/>
+            <a:ext cx="5394960" cy="1691640"/>
           </a:xfrm>
           <a:prstGeom prst="roundRect">
             <a:avLst/>
@@ -7551,7 +7476,7 @@
       </p:sp>
       <p:pic>
         <p:nvPicPr>
-          <p:cNvPr id="16" name="Picture 15" descr="monitoring.png"/>
+          <p:cNvPr id="25" name="Picture 24" descr="image.png"/>
           <p:cNvPicPr>
             <a:picLocks noChangeAspect="1"/>
           </p:cNvPicPr>
@@ -7601,7 +7526,7 @@
                 <a:solidFill>
                   <a:srgbClr val="0043DA"/>
                 </a:solidFill>
-                <a:latin typeface="프리젠테이션 7 Bold"/>
+                <a:latin typeface="Freesentation 7 Bold"/>
               </a:rPr>
               <a:t>모니터링</a:t>
             </a:r>
@@ -7688,7 +7613,7 @@
         <p:spPr>
           <a:xfrm>
             <a:off x="6233160" y="4663440"/>
-            <a:ext cx="5394960" cy="1828800"/>
+            <a:ext cx="5394960" cy="1691640"/>
           </a:xfrm>
           <a:prstGeom prst="roundRect">
             <a:avLst/>
@@ -7727,7 +7652,7 @@
       </p:sp>
       <p:pic>
         <p:nvPicPr>
-          <p:cNvPr id="20" name="Picture 19" descr="connect.png"/>
+          <p:cNvPr id="26" name="Picture 25" descr="image.png"/>
           <p:cNvPicPr>
             <a:picLocks noChangeAspect="1"/>
           </p:cNvPicPr>
@@ -7777,7 +7702,7 @@
                 <a:solidFill>
                   <a:srgbClr val="0043DA"/>
                 </a:solidFill>
-                <a:latin typeface="프리젠테이션 7 Bold"/>
+                <a:latin typeface="Freesentation 7 Bold"/>
               </a:rPr>
               <a:t>MSK Connect</a:t>
             </a:r>
@@ -7924,21 +7849,14 @@
             <a:pPr algn="l" eaLnBrk="0" latinLnBrk="0" hangingPunct="0"/>
             <a:r>
               <a:rPr sz="2800" b="1">
-                <a:solidFill>
-                  <a:srgbClr val="0043DA"/>
-                </a:solidFill>
-                <a:latin typeface="프리젠테이션 7 Bold"/>
+                <a:latin typeface="Freesentation"/>
               </a:rPr>
               <a:t>3-1. 운영 전략 및</a:t>
             </a:r>
-          </a:p>
-          <a:p>
+            <a:br/>
             <a:r>
               <a:rPr sz="2800" b="1">
-                <a:solidFill>
-                  <a:srgbClr val="0043DA"/>
-                </a:solidFill>
-                <a:latin typeface="프리젠테이션 7 Bold"/>
+                <a:latin typeface="Freesentation"/>
               </a:rPr>
               <a:t>Best Practices</a:t>
             </a:r>
@@ -7953,8 +7871,8 @@
         </p:nvSpPr>
         <p:spPr>
           <a:xfrm>
-            <a:off x="4606766" y="558800"/>
-            <a:ext cx="6708417" cy="937918"/>
+            <a:off x="3763700" y="558800"/>
+            <a:ext cx="7551483" cy="937918"/>
           </a:xfrm>
           <a:prstGeom prst="rect">
             <a:avLst/>
@@ -8097,7 +8015,7 @@
                 <a:solidFill>
                   <a:srgbClr val="0043DA"/>
                 </a:solidFill>
-                <a:latin typeface="프리젠테이션 7 Bold"/>
+                <a:latin typeface="Freesentation 7 Bold"/>
               </a:rPr>
               <a:t>클러스터 사이징</a:t>
             </a:r>
@@ -8132,58 +8050,6 @@
                 <a:latin typeface="Freesentation"/>
               </a:rPr>
               <a:t>kafka.m5.large 이상 권장, EBS gp3 기본</a:t>
-            </a:r>
-          </a:p>
-        </p:txBody>
-      </p:sp>
-      <p:sp>
-        <p:nvSpPr>
-          <p:cNvPr id="8" name="Oval 7"/>
-          <p:cNvSpPr/>
-          <p:nvPr/>
-        </p:nvSpPr>
-        <p:spPr>
-          <a:xfrm>
-            <a:off x="975360" y="2720340"/>
-            <a:ext cx="457200" cy="457200"/>
-          </a:xfrm>
-          <a:prstGeom prst="ellipse">
-            <a:avLst/>
-          </a:prstGeom>
-          <a:solidFill>
-            <a:srgbClr val="0043DA"/>
-          </a:solidFill>
-          <a:ln>
-            <a:noFill/>
-          </a:ln>
-        </p:spPr>
-        <p:style>
-          <a:lnRef idx="1">
-            <a:schemeClr val="accent1"/>
-          </a:lnRef>
-          <a:fillRef idx="3">
-            <a:schemeClr val="accent1"/>
-          </a:fillRef>
-          <a:effectRef idx="2">
-            <a:schemeClr val="accent1"/>
-          </a:effectRef>
-          <a:fontRef idx="minor">
-            <a:schemeClr val="lt1"/>
-          </a:fontRef>
-        </p:style>
-        <p:txBody>
-          <a:bodyPr wrap="square" rtlCol="0" anchor="ctr"/>
-          <a:lstStyle/>
-          <a:p>
-            <a:pPr algn="ctr"/>
-            <a:r>
-              <a:rPr sz="1400" b="1">
-                <a:solidFill>
-                  <a:srgbClr val="FFFFFF"/>
-                </a:solidFill>
-                <a:latin typeface="프리젠테이션 7 Bold"/>
-              </a:rPr>
-              <a:t>1</a:t>
             </a:r>
           </a:p>
         </p:txBody>
@@ -8235,7 +8101,7 @@
                 <a:solidFill>
                   <a:srgbClr val="0043DA"/>
                 </a:solidFill>
-                <a:latin typeface="프리젠테이션 7 Bold"/>
+                <a:latin typeface="Freesentation 7 Bold"/>
               </a:rPr>
               <a:t>파티션 설계</a:t>
             </a:r>
@@ -8270,58 +8136,6 @@
                 <a:latin typeface="Freesentation"/>
               </a:rPr>
               <a:t>브로커당 4,000개 이하 권장</a:t>
-            </a:r>
-          </a:p>
-        </p:txBody>
-      </p:sp>
-      <p:sp>
-        <p:nvSpPr>
-          <p:cNvPr id="10" name="Oval 9"/>
-          <p:cNvSpPr/>
-          <p:nvPr/>
-        </p:nvSpPr>
-        <p:spPr>
-          <a:xfrm>
-            <a:off x="975360" y="3680460"/>
-            <a:ext cx="457200" cy="457200"/>
-          </a:xfrm>
-          <a:prstGeom prst="ellipse">
-            <a:avLst/>
-          </a:prstGeom>
-          <a:solidFill>
-            <a:srgbClr val="0043DA"/>
-          </a:solidFill>
-          <a:ln>
-            <a:noFill/>
-          </a:ln>
-        </p:spPr>
-        <p:style>
-          <a:lnRef idx="1">
-            <a:schemeClr val="accent1"/>
-          </a:lnRef>
-          <a:fillRef idx="3">
-            <a:schemeClr val="accent1"/>
-          </a:fillRef>
-          <a:effectRef idx="2">
-            <a:schemeClr val="accent1"/>
-          </a:effectRef>
-          <a:fontRef idx="minor">
-            <a:schemeClr val="lt1"/>
-          </a:fontRef>
-        </p:style>
-        <p:txBody>
-          <a:bodyPr wrap="square" rtlCol="0" anchor="ctr"/>
-          <a:lstStyle/>
-          <a:p>
-            <a:pPr algn="ctr"/>
-            <a:r>
-              <a:rPr sz="1400" b="1">
-                <a:solidFill>
-                  <a:srgbClr val="FFFFFF"/>
-                </a:solidFill>
-                <a:latin typeface="프리젠테이션 7 Bold"/>
-              </a:rPr>
-              <a:t>2</a:t>
             </a:r>
           </a:p>
         </p:txBody>
@@ -8373,7 +8187,7 @@
                 <a:solidFill>
                   <a:srgbClr val="0043DA"/>
                 </a:solidFill>
-                <a:latin typeface="프리젠테이션 7 Bold"/>
+                <a:latin typeface="Freesentation 7 Bold"/>
               </a:rPr>
               <a:t>장애 대응</a:t>
             </a:r>
@@ -8408,58 +8222,6 @@
                 <a:latin typeface="Freesentation"/>
               </a:rPr>
               <a:t>unclean.leader.election=false, 브로커 장애 시 자동 복구</a:t>
-            </a:r>
-          </a:p>
-        </p:txBody>
-      </p:sp>
-      <p:sp>
-        <p:nvSpPr>
-          <p:cNvPr id="12" name="Oval 11"/>
-          <p:cNvSpPr/>
-          <p:nvPr/>
-        </p:nvSpPr>
-        <p:spPr>
-          <a:xfrm>
-            <a:off x="975360" y="4640580"/>
-            <a:ext cx="457200" cy="457200"/>
-          </a:xfrm>
-          <a:prstGeom prst="ellipse">
-            <a:avLst/>
-          </a:prstGeom>
-          <a:solidFill>
-            <a:srgbClr val="0043DA"/>
-          </a:solidFill>
-          <a:ln>
-            <a:noFill/>
-          </a:ln>
-        </p:spPr>
-        <p:style>
-          <a:lnRef idx="1">
-            <a:schemeClr val="accent1"/>
-          </a:lnRef>
-          <a:fillRef idx="3">
-            <a:schemeClr val="accent1"/>
-          </a:fillRef>
-          <a:effectRef idx="2">
-            <a:schemeClr val="accent1"/>
-          </a:effectRef>
-          <a:fontRef idx="minor">
-            <a:schemeClr val="lt1"/>
-          </a:fontRef>
-        </p:style>
-        <p:txBody>
-          <a:bodyPr wrap="square" rtlCol="0" anchor="ctr"/>
-          <a:lstStyle/>
-          <a:p>
-            <a:pPr algn="ctr"/>
-            <a:r>
-              <a:rPr sz="1400" b="1">
-                <a:solidFill>
-                  <a:srgbClr val="FFFFFF"/>
-                </a:solidFill>
-                <a:latin typeface="프리젠테이션 7 Bold"/>
-              </a:rPr>
-              <a:t>3</a:t>
             </a:r>
           </a:p>
         </p:txBody>
@@ -8511,7 +8273,7 @@
                 <a:solidFill>
                   <a:srgbClr val="0043DA"/>
                 </a:solidFill>
-                <a:latin typeface="프리젠테이션 7 Bold"/>
+                <a:latin typeface="Freesentation 7 Bold"/>
               </a:rPr>
               <a:t>비용 최적화</a:t>
             </a:r>
@@ -8550,58 +8312,102 @@
           </a:p>
         </p:txBody>
       </p:sp>
-      <p:sp>
-        <p:nvSpPr>
-          <p:cNvPr id="14" name="Oval 13"/>
-          <p:cNvSpPr/>
-          <p:nvPr/>
-        </p:nvSpPr>
+      <p:pic>
+        <p:nvPicPr>
+          <p:cNvPr id="18" name="Picture 17" descr="settings.png"/>
+          <p:cNvPicPr>
+            <a:picLocks noChangeAspect="1"/>
+          </p:cNvPicPr>
+          <p:nvPr/>
+        </p:nvPicPr>
+        <p:blipFill>
+          <a:blip r:embed="rId6"/>
+          <a:stretch>
+            <a:fillRect/>
+          </a:stretch>
+        </p:blipFill>
+        <p:spPr>
+          <a:xfrm>
+            <a:off x="975360" y="2720340"/>
+            <a:ext cx="411480" cy="411480"/>
+          </a:xfrm>
+          <a:prstGeom prst="rect">
+            <a:avLst/>
+          </a:prstGeom>
+        </p:spPr>
+      </p:pic>
+      <p:pic>
+        <p:nvPicPr>
+          <p:cNvPr id="19" name="Picture 18" descr="image.png"/>
+          <p:cNvPicPr>
+            <a:picLocks noChangeAspect="1"/>
+          </p:cNvPicPr>
+          <p:nvPr/>
+        </p:nvPicPr>
+        <p:blipFill>
+          <a:blip r:embed="rId3"/>
+          <a:stretch>
+            <a:fillRect/>
+          </a:stretch>
+        </p:blipFill>
+        <p:spPr>
+          <a:xfrm>
+            <a:off x="975360" y="3680460"/>
+            <a:ext cx="411480" cy="411480"/>
+          </a:xfrm>
+          <a:prstGeom prst="rect">
+            <a:avLst/>
+          </a:prstGeom>
+        </p:spPr>
+      </p:pic>
+      <p:pic>
+        <p:nvPicPr>
+          <p:cNvPr id="20" name="Picture 19" descr="warning.png"/>
+          <p:cNvPicPr>
+            <a:picLocks noChangeAspect="1"/>
+          </p:cNvPicPr>
+          <p:nvPr/>
+        </p:nvPicPr>
+        <p:blipFill>
+          <a:blip r:embed="rId7"/>
+          <a:stretch>
+            <a:fillRect/>
+          </a:stretch>
+        </p:blipFill>
+        <p:spPr>
+          <a:xfrm>
+            <a:off x="975360" y="4640580"/>
+            <a:ext cx="411480" cy="411480"/>
+          </a:xfrm>
+          <a:prstGeom prst="rect">
+            <a:avLst/>
+          </a:prstGeom>
+        </p:spPr>
+      </p:pic>
+      <p:pic>
+        <p:nvPicPr>
+          <p:cNvPr id="21" name="Picture 20" descr="image.png"/>
+          <p:cNvPicPr>
+            <a:picLocks noChangeAspect="1"/>
+          </p:cNvPicPr>
+          <p:nvPr/>
+        </p:nvPicPr>
+        <p:blipFill>
+          <a:blip r:embed="rId5"/>
+          <a:stretch>
+            <a:fillRect/>
+          </a:stretch>
+        </p:blipFill>
         <p:spPr>
           <a:xfrm>
             <a:off x="975360" y="5600700"/>
-            <a:ext cx="457200" cy="457200"/>
-          </a:xfrm>
-          <a:prstGeom prst="ellipse">
-            <a:avLst/>
-          </a:prstGeom>
-          <a:solidFill>
-            <a:srgbClr val="0043DA"/>
-          </a:solidFill>
-          <a:ln>
-            <a:noFill/>
-          </a:ln>
-        </p:spPr>
-        <p:style>
-          <a:lnRef idx="1">
-            <a:schemeClr val="accent1"/>
-          </a:lnRef>
-          <a:fillRef idx="3">
-            <a:schemeClr val="accent1"/>
-          </a:fillRef>
-          <a:effectRef idx="2">
-            <a:schemeClr val="accent1"/>
-          </a:effectRef>
-          <a:fontRef idx="minor">
-            <a:schemeClr val="lt1"/>
-          </a:fontRef>
-        </p:style>
-        <p:txBody>
-          <a:bodyPr wrap="square" rtlCol="0" anchor="ctr"/>
-          <a:lstStyle/>
-          <a:p>
-            <a:pPr algn="ctr"/>
-            <a:r>
-              <a:rPr sz="1400" b="1">
-                <a:solidFill>
-                  <a:srgbClr val="FFFFFF"/>
-                </a:solidFill>
-                <a:latin typeface="프리젠테이션 7 Bold"/>
-              </a:rPr>
-              <a:t>4</a:t>
-            </a:r>
-          </a:p>
-        </p:txBody>
-      </p:sp>
+            <a:ext cx="411480" cy="411480"/>
+          </a:xfrm>
+          <a:prstGeom prst="rect">
+            <a:avLst/>
+          </a:prstGeom>
+        </p:spPr>
+      </p:pic>
     </p:spTree>
   </p:cSld>
   <p:clrMapOvr>
@@ -8676,19 +8482,7 @@
                 </a:solidFill>
                 <a:latin typeface="프리젠테이션 7 Bold"/>
               </a:rPr>
-              <a:t>L01. Bento</a:t>
-            </a:r>
-          </a:p>
-          <a:p>
-            <a:pPr algn="l"/>
-            <a:r>
-              <a:rPr sz="2800" b="1">
-                <a:solidFill>
-                  <a:srgbClr val="0043DA"/>
-                </a:solidFill>
-                <a:latin typeface="프리젠테이션 7 Bold"/>
-              </a:rPr>
-              <a:t>Grid</a:t>
+              <a:t>L01. Bento Grid</a:t>
             </a:r>
           </a:p>
         </p:txBody>
@@ -8737,7 +8531,7 @@
         <p:spPr>
           <a:xfrm>
             <a:off x="457200" y="2560320"/>
-            <a:ext cx="5394960" cy="3840960"/>
+            <a:ext cx="5394960" cy="3794760"/>
           </a:xfrm>
           <a:prstGeom prst="roundRect">
             <a:avLst/>
@@ -8971,7 +8765,7 @@
                 <a:solidFill>
                   <a:srgbClr val="0043DA"/>
                 </a:solidFill>
-                <a:latin typeface="프리젠테이션 7 Bold"/>
+                <a:latin typeface="Freesentation 7 Bold"/>
               </a:rPr>
               <a:t>클러스터 유형</a:t>
             </a:r>
@@ -9045,8 +8839,8 @@
         </p:nvSpPr>
         <p:spPr>
           <a:xfrm>
-            <a:off x="6080760" y="4892040"/>
-            <a:ext cx="5650992" cy="1509240"/>
+            <a:off x="5899072" y="4892040"/>
+            <a:ext cx="5650992" cy="1463040"/>
           </a:xfrm>
           <a:prstGeom prst="roundRect">
             <a:avLst/>
@@ -9091,7 +8885,7 @@
         </p:nvSpPr>
         <p:spPr>
           <a:xfrm>
-            <a:off x="6217920" y="5001768"/>
+            <a:off x="6036232" y="5001768"/>
             <a:ext cx="5376672" cy="320040"/>
           </a:xfrm>
           <a:prstGeom prst="rect">
@@ -9111,7 +8905,7 @@
                 <a:solidFill>
                   <a:srgbClr val="0043DA"/>
                 </a:solidFill>
-                <a:latin typeface="프리젠테이션 7 Bold"/>
+                <a:latin typeface="Freesentation 7 Bold"/>
               </a:rPr>
               <a:t>보안 체계</a:t>
             </a:r>
@@ -9126,8 +8920,8 @@
         </p:nvSpPr>
         <p:spPr>
           <a:xfrm>
-            <a:off x="6217920" y="5394960"/>
-            <a:ext cx="5376672" cy="1006320"/>
+            <a:off x="5967652" y="5394960"/>
+            <a:ext cx="5376672" cy="960120"/>
           </a:xfrm>
           <a:prstGeom prst="rect">
             <a:avLst/>
@@ -9255,7 +9049,7 @@
         </p:nvSpPr>
         <p:spPr>
           <a:xfrm>
-            <a:off x="823320" y="4796280"/>
+            <a:off x="641632" y="4796280"/>
             <a:ext cx="4846080" cy="1371600"/>
           </a:xfrm>
           <a:prstGeom prst="roundRect">
@@ -9300,7 +9094,7 @@
         </p:nvSpPr>
         <p:spPr>
           <a:xfrm>
-            <a:off x="1097640" y="5070600"/>
+            <a:off x="915952" y="5070600"/>
             <a:ext cx="1097280" cy="457200"/>
           </a:xfrm>
           <a:prstGeom prst="roundRect">
@@ -9343,7 +9137,7 @@
         </p:nvSpPr>
         <p:spPr>
           <a:xfrm>
-            <a:off x="1097640" y="5070600"/>
+            <a:off x="915952" y="5070600"/>
             <a:ext cx="1097280" cy="457200"/>
           </a:xfrm>
           <a:prstGeom prst="rect">
@@ -9359,9 +9153,9 @@
           <a:p>
             <a:pPr algn="ctr"/>
             <a:r>
-              <a:rPr sz="1100" b="1">
-                <a:solidFill>
-                  <a:srgbClr val="FFFFFF"/>
+              <a:rPr sz="1300" b="0">
+                <a:solidFill>
+                  <a:srgbClr val="212121"/>
                 </a:solidFill>
                 <a:latin typeface="Freesentation"/>
               </a:rPr>
@@ -9378,7 +9172,7 @@
         </p:nvSpPr>
         <p:spPr>
           <a:xfrm>
-            <a:off x="2469240" y="5070600"/>
+            <a:off x="2287552" y="5070600"/>
             <a:ext cx="1097280" cy="457200"/>
           </a:xfrm>
           <a:prstGeom prst="roundRect">
@@ -9421,7 +9215,7 @@
         </p:nvSpPr>
         <p:spPr>
           <a:xfrm>
-            <a:off x="2469240" y="5070600"/>
+            <a:off x="2287552" y="5070600"/>
             <a:ext cx="1097280" cy="457200"/>
           </a:xfrm>
           <a:prstGeom prst="rect">
@@ -9437,9 +9231,9 @@
           <a:p>
             <a:pPr algn="ctr"/>
             <a:r>
-              <a:rPr sz="1100" b="1">
-                <a:solidFill>
-                  <a:srgbClr val="FFFFFF"/>
+              <a:rPr sz="1300" b="0">
+                <a:solidFill>
+                  <a:srgbClr val="212121"/>
                 </a:solidFill>
                 <a:latin typeface="Freesentation"/>
               </a:rPr>
@@ -9456,7 +9250,7 @@
         </p:nvSpPr>
         <p:spPr>
           <a:xfrm>
-            <a:off x="3840840" y="5070600"/>
+            <a:off x="3659152" y="5070600"/>
             <a:ext cx="1097280" cy="457200"/>
           </a:xfrm>
           <a:prstGeom prst="roundRect">
@@ -9499,7 +9293,7 @@
         </p:nvSpPr>
         <p:spPr>
           <a:xfrm>
-            <a:off x="3840840" y="5070600"/>
+            <a:off x="3659152" y="5070600"/>
             <a:ext cx="1097280" cy="457200"/>
           </a:xfrm>
           <a:prstGeom prst="rect">
@@ -9515,9 +9309,9 @@
           <a:p>
             <a:pPr algn="ctr"/>
             <a:r>
-              <a:rPr sz="1100" b="1">
-                <a:solidFill>
-                  <a:srgbClr val="FFFFFF"/>
+              <a:rPr sz="1300" b="0">
+                <a:solidFill>
+                  <a:srgbClr val="212121"/>
                 </a:solidFill>
                 <a:latin typeface="Freesentation"/>
               </a:rPr>
@@ -9534,7 +9328,7 @@
         </p:nvSpPr>
         <p:spPr>
           <a:xfrm>
-            <a:off x="2194920" y="5184900"/>
+            <a:off x="2013232" y="5184900"/>
             <a:ext cx="274320" cy="228600"/>
           </a:xfrm>
           <a:prstGeom prst="can">
@@ -9577,7 +9371,7 @@
         </p:nvSpPr>
         <p:spPr>
           <a:xfrm>
-            <a:off x="3566520" y="5184900"/>
+            <a:off x="3384832" y="5184900"/>
             <a:ext cx="274320" cy="228600"/>
           </a:xfrm>
           <a:prstGeom prst="can">
@@ -9620,7 +9414,7 @@
         </p:nvSpPr>
         <p:spPr>
           <a:xfrm>
-            <a:off x="1097640" y="5619240"/>
+            <a:off x="847372" y="5619240"/>
             <a:ext cx="1097280" cy="228600"/>
           </a:xfrm>
           <a:prstGeom prst="rect">
@@ -9636,9 +9430,9 @@
           <a:p>
             <a:pPr algn="ctr"/>
             <a:r>
-              <a:rPr sz="1000" b="0">
-                <a:solidFill>
-                  <a:srgbClr val="EE8150"/>
+              <a:rPr sz="1300" b="0">
+                <a:solidFill>
+                  <a:srgbClr val="212121"/>
                 </a:solidFill>
                 <a:latin typeface="Freesentation"/>
               </a:rPr>
@@ -9655,7 +9449,7 @@
         </p:nvSpPr>
         <p:spPr>
           <a:xfrm>
-            <a:off x="2469240" y="5619240"/>
+            <a:off x="2218972" y="5619240"/>
             <a:ext cx="1097280" cy="228600"/>
           </a:xfrm>
           <a:prstGeom prst="rect">
@@ -9671,9 +9465,9 @@
           <a:p>
             <a:pPr algn="ctr"/>
             <a:r>
-              <a:rPr sz="1000" b="0">
-                <a:solidFill>
-                  <a:srgbClr val="0043DA"/>
+              <a:rPr sz="1300" b="0">
+                <a:solidFill>
+                  <a:srgbClr val="212121"/>
                 </a:solidFill>
                 <a:latin typeface="Freesentation"/>
               </a:rPr>
@@ -9690,7 +9484,7 @@
         </p:nvSpPr>
         <p:spPr>
           <a:xfrm>
-            <a:off x="3840840" y="5619240"/>
+            <a:off x="3590572" y="5619240"/>
             <a:ext cx="1097280" cy="228600"/>
           </a:xfrm>
           <a:prstGeom prst="rect">
@@ -9706,9 +9500,9 @@
           <a:p>
             <a:pPr algn="ctr"/>
             <a:r>
-              <a:rPr sz="1000" b="0">
-                <a:solidFill>
-                  <a:srgbClr val="4CB88F"/>
+              <a:rPr sz="1300" b="0">
+                <a:solidFill>
+                  <a:srgbClr val="212121"/>
                 </a:solidFill>
                 <a:latin typeface="Freesentation"/>
               </a:rPr>
@@ -9783,25 +9577,12 @@
           </a:bodyPr>
           <a:lstStyle/>
           <a:p>
+            <a:pPr algn="l"/>
             <a:r>
               <a:rPr sz="2800" b="1">
-                <a:solidFill>
-                  <a:srgbClr val="0043DA"/>
-                </a:solidFill>
-                <a:latin typeface="프리젠테이션 7 Bold"/>
-              </a:rPr>
-              <a:t>L02.</a:t>
-            </a:r>
-          </a:p>
-          <a:p>
-            <a:r>
-              <a:rPr sz="2800" b="1">
-                <a:solidFill>
-                  <a:srgbClr val="0043DA"/>
-                </a:solidFill>
-                <a:latin typeface="프리젠테이션 7 Bold"/>
-              </a:rPr>
-              <a:t xml:space="preserve">Three Cards</a:t>
+                <a:latin typeface="Freesentation"/>
+              </a:rPr>
+              <a:t>L02. Three Cards</a:t>
             </a:r>
           </a:p>
         </p:txBody>
@@ -9958,9 +9739,9 @@
             <a:r>
               <a:rPr sz="1400" b="1">
                 <a:solidFill>
-                  <a:srgbClr val="FFFFFF"/>
-                </a:solidFill>
-                <a:latin typeface="프리젠테이션 7 Bold"/>
+                  <a:srgbClr val="0043DA"/>
+                </a:solidFill>
+                <a:latin typeface="Freesentation 7 Bold"/>
               </a:rPr>
               <a:t>Producer</a:t>
             </a:r>
@@ -10085,7 +9866,7 @@
                 <a:solidFill>
                   <a:srgbClr val="0043DA"/>
                 </a:solidFill>
-                <a:latin typeface="프리젠테이션 7 Bold"/>
+                <a:latin typeface="Freesentation 7 Bold"/>
               </a:rPr>
               <a:t>MSK Cluster (Multi-AZ Brokers)</a:t>
             </a:r>
@@ -10137,11 +9918,11 @@
               </a:spcBef>
             </a:pPr>
             <a:r>
-              <a:rPr sz="1200" b="1">
-                <a:solidFill>
-                  <a:srgbClr val="FFFFFF"/>
-                </a:solidFill>
-                <a:latin typeface="프리젠테이션 7 Bold"/>
+              <a:rPr sz="1300" b="0">
+                <a:solidFill>
+                  <a:srgbClr val="212121"/>
+                </a:solidFill>
+                <a:latin typeface="Freesentation"/>
               </a:rPr>
               <a:t>Broker (AZ-a)</a:t>
             </a:r>
@@ -10193,11 +9974,11 @@
               </a:spcBef>
             </a:pPr>
             <a:r>
-              <a:rPr sz="1200" b="1">
-                <a:solidFill>
-                  <a:srgbClr val="FFFFFF"/>
-                </a:solidFill>
-                <a:latin typeface="프리젠테이션 7 Bold"/>
+              <a:rPr sz="1300" b="0">
+                <a:solidFill>
+                  <a:srgbClr val="212121"/>
+                </a:solidFill>
+                <a:latin typeface="Freesentation"/>
               </a:rPr>
               <a:t>Broker (AZ-b)</a:t>
             </a:r>
@@ -10249,11 +10030,11 @@
               </a:spcBef>
             </a:pPr>
             <a:r>
-              <a:rPr sz="1200" b="1">
-                <a:solidFill>
-                  <a:srgbClr val="FFFFFF"/>
-                </a:solidFill>
-                <a:latin typeface="프리젠테이션 7 Bold"/>
+              <a:rPr sz="1300" b="0">
+                <a:solidFill>
+                  <a:srgbClr val="212121"/>
+                </a:solidFill>
+                <a:latin typeface="Freesentation"/>
               </a:rPr>
               <a:t>Broker (AZ-c)</a:t>
             </a:r>
@@ -10351,9 +10132,9 @@
             <a:r>
               <a:rPr sz="1400" b="1">
                 <a:solidFill>
-                  <a:srgbClr val="FFFFFF"/>
-                </a:solidFill>
-                <a:latin typeface="프리젠테이션 7 Bold"/>
+                  <a:srgbClr val="0043DA"/>
+                </a:solidFill>
+                <a:latin typeface="Freesentation 7 Bold"/>
               </a:rPr>
               <a:t>Consumer</a:t>
             </a:r>
@@ -10843,275 +10624,78 @@
           </a:p>
         </p:txBody>
       </p:sp>
-      <p:sp>
-        <p:nvSpPr>
-          <p:cNvPr id="25" name="Rounded Rectangle 24"/>
-          <p:cNvSpPr/>
-          <p:nvPr/>
-        </p:nvSpPr>
-        <p:spPr>
-          <a:xfrm>
-            <a:off x="457200" y="2116195"/>
-            <a:ext cx="11277295" cy="820582"/>
-          </a:xfrm>
-          <a:prstGeom prst="roundRect">
-            <a:avLst/>
-          </a:prstGeom>
-          <a:solidFill>
-            <a:srgbClr val="F8F9FA"/>
-          </a:solidFill>
-          <a:ln>
-            <a:solidFill>
-              <a:srgbClr val="0043DA"/>
-            </a:solidFill>
-          </a:ln>
-        </p:spPr>
-        <p:style>
-          <a:lnRef idx="1">
-            <a:schemeClr val="accent1"/>
-          </a:lnRef>
-          <a:fillRef idx="3">
-            <a:schemeClr val="accent1"/>
-          </a:fillRef>
-          <a:effectRef idx="2">
-            <a:schemeClr val="accent1"/>
-          </a:effectRef>
-          <a:fontRef idx="minor">
-            <a:schemeClr val="lt1"/>
-          </a:fontRef>
-        </p:style>
-        <p:txBody>
-          <a:bodyPr rtlCol="0" anchor="ctr"/>
-          <a:lstStyle/>
-          <a:p>
-            <a:pPr algn="ctr"/>
-          </a:p>
-        </p:txBody>
-      </p:sp>
-      <p:sp>
-        <p:nvSpPr>
-          <p:cNvPr id="26" name="Rounded Rectangle 25"/>
-          <p:cNvSpPr/>
-          <p:nvPr/>
-        </p:nvSpPr>
-        <p:spPr>
-          <a:xfrm>
-            <a:off x="1249984" y="2275027"/>
-            <a:ext cx="2926080" cy="502920"/>
-          </a:xfrm>
-          <a:prstGeom prst="roundRect">
-            <a:avLst/>
-          </a:prstGeom>
-          <a:solidFill>
-            <a:srgbClr val="EE8150"/>
-          </a:solidFill>
-          <a:ln>
-            <a:solidFill>
-              <a:srgbClr val="EE8150"/>
-            </a:solidFill>
-          </a:ln>
-        </p:spPr>
-        <p:style>
-          <a:lnRef idx="1">
-            <a:schemeClr val="accent1"/>
-          </a:lnRef>
-          <a:fillRef idx="3">
-            <a:schemeClr val="accent1"/>
-          </a:fillRef>
-          <a:effectRef idx="2">
-            <a:schemeClr val="accent1"/>
-          </a:effectRef>
-          <a:fontRef idx="minor">
-            <a:schemeClr val="lt1"/>
-          </a:fontRef>
-        </p:style>
-        <p:txBody>
-          <a:bodyPr rtlCol="0" anchor="ctr"/>
-          <a:lstStyle/>
-          <a:p>
-            <a:r>
-              <a:rPr sz="1300" b="1">
-                <a:solidFill>
-                  <a:srgbClr val="FFFFFF"/>
-                </a:solidFill>
-              </a:rPr>
-              <a:t>Data Source</a:t>
-            </a:r>
-          </a:p>
-        </p:txBody>
-      </p:sp>
-      <p:sp>
-        <p:nvSpPr>
-          <p:cNvPr id="27" name="Rounded Rectangle 26"/>
-          <p:cNvSpPr/>
-          <p:nvPr/>
-        </p:nvSpPr>
-        <p:spPr>
-          <a:xfrm>
-            <a:off x="4633264" y="2275027"/>
-            <a:ext cx="2926080" cy="502920"/>
-          </a:xfrm>
-          <a:prstGeom prst="roundRect">
-            <a:avLst/>
-          </a:prstGeom>
-          <a:solidFill>
-            <a:srgbClr val="0043DA"/>
-          </a:solidFill>
-          <a:ln>
-            <a:solidFill>
-              <a:srgbClr val="0043DA"/>
-            </a:solidFill>
-          </a:ln>
-        </p:spPr>
-        <p:style>
-          <a:lnRef idx="1">
-            <a:schemeClr val="accent1"/>
-          </a:lnRef>
-          <a:fillRef idx="3">
-            <a:schemeClr val="accent1"/>
-          </a:fillRef>
-          <a:effectRef idx="2">
-            <a:schemeClr val="accent1"/>
-          </a:effectRef>
-          <a:fontRef idx="minor">
-            <a:schemeClr val="lt1"/>
-          </a:fontRef>
-        </p:style>
-        <p:txBody>
-          <a:bodyPr rtlCol="0" anchor="ctr"/>
-          <a:lstStyle/>
-          <a:p>
-            <a:r>
-              <a:rPr sz="1300" b="1">
-                <a:solidFill>
-                  <a:srgbClr val="FFFFFF"/>
-                </a:solidFill>
-              </a:rPr>
-              <a:t>Processing</a:t>
-            </a:r>
-          </a:p>
-        </p:txBody>
-      </p:sp>
-      <p:sp>
-        <p:nvSpPr>
-          <p:cNvPr id="28" name="Rounded Rectangle 27"/>
-          <p:cNvSpPr/>
-          <p:nvPr/>
-        </p:nvSpPr>
-        <p:spPr>
-          <a:xfrm>
-            <a:off x="8016544" y="2275027"/>
-            <a:ext cx="2926080" cy="502920"/>
-          </a:xfrm>
-          <a:prstGeom prst="roundRect">
-            <a:avLst/>
-          </a:prstGeom>
-          <a:solidFill>
-            <a:srgbClr val="4CB88F"/>
-          </a:solidFill>
-          <a:ln>
-            <a:solidFill>
-              <a:srgbClr val="4CB88F"/>
-            </a:solidFill>
-          </a:ln>
-        </p:spPr>
-        <p:style>
-          <a:lnRef idx="1">
-            <a:schemeClr val="accent1"/>
-          </a:lnRef>
-          <a:fillRef idx="3">
-            <a:schemeClr val="accent1"/>
-          </a:fillRef>
-          <a:effectRef idx="2">
-            <a:schemeClr val="accent1"/>
-          </a:effectRef>
-          <a:fontRef idx="minor">
-            <a:schemeClr val="lt1"/>
-          </a:fontRef>
-        </p:style>
-        <p:txBody>
-          <a:bodyPr rtlCol="0" anchor="ctr"/>
-          <a:lstStyle/>
-          <a:p>
-            <a:r>
-              <a:rPr sz="1300" b="1">
-                <a:solidFill>
-                  <a:srgbClr val="FFFFFF"/>
-                </a:solidFill>
-              </a:rPr>
-              <a:t>Output</a:t>
-            </a:r>
-          </a:p>
-        </p:txBody>
-      </p:sp>
-      <p:sp>
-        <p:nvSpPr>
-          <p:cNvPr id="29" name="TextBox 28"/>
-          <p:cNvSpPr txBox="1"/>
-          <p:nvPr/>
-        </p:nvSpPr>
-        <p:spPr>
-          <a:xfrm>
-            <a:off x="4176064" y="2435047"/>
-            <a:ext cx="457200" cy="182880"/>
-          </a:xfrm>
-          <a:prstGeom prst="rect">
-            <a:avLst/>
-          </a:prstGeom>
-          <a:noFill/>
-        </p:spPr>
-        <p:txBody>
-          <a:bodyPr wrap="square">
-            <a:spAutoFit/>
-          </a:bodyPr>
-          <a:lstStyle/>
-          <a:p>
-            <a:pPr algn="ctr"/>
-            <a:r>
-              <a:rPr sz="1800" b="1">
-                <a:solidFill>
-                  <a:srgbClr val="0043DA"/>
-                </a:solidFill>
-              </a:rPr>
-              <a:t>→</a:t>
-            </a:r>
-          </a:p>
-        </p:txBody>
-      </p:sp>
-      <p:sp>
-        <p:nvSpPr>
-          <p:cNvPr id="30" name="TextBox 29"/>
-          <p:cNvSpPr txBox="1"/>
-          <p:nvPr/>
-        </p:nvSpPr>
-        <p:spPr>
-          <a:xfrm>
-            <a:off x="7559344" y="2435047"/>
-            <a:ext cx="457200" cy="182880"/>
-          </a:xfrm>
-          <a:prstGeom prst="rect">
-            <a:avLst/>
-          </a:prstGeom>
-          <a:noFill/>
-        </p:spPr>
-        <p:txBody>
-          <a:bodyPr wrap="square">
-            <a:spAutoFit/>
-          </a:bodyPr>
-          <a:lstStyle/>
-          <a:p>
-            <a:pPr algn="ctr"/>
-            <a:r>
-              <a:rPr sz="1800" b="1">
-                <a:solidFill>
-                  <a:srgbClr val="0043DA"/>
-                </a:solidFill>
-              </a:rPr>
-              <a:t>→</a:t>
-            </a:r>
-          </a:p>
-        </p:txBody>
-      </p:sp>
+      <p:pic>
+        <p:nvPicPr>
+          <p:cNvPr id="28" name="Picture 27" descr="image.png"/>
+          <p:cNvPicPr>
+            <a:picLocks noChangeAspect="1"/>
+          </p:cNvPicPr>
+          <p:nvPr/>
+        </p:nvPicPr>
+        <p:blipFill>
+          <a:blip r:embed="rId2"/>
+          <a:stretch>
+            <a:fillRect/>
+          </a:stretch>
+        </p:blipFill>
+        <p:spPr>
+          <a:xfrm>
+            <a:off x="3469640" y="4160520"/>
+            <a:ext cx="411480" cy="411480"/>
+          </a:xfrm>
+          <a:prstGeom prst="rect">
+            <a:avLst/>
+          </a:prstGeom>
+        </p:spPr>
+      </p:pic>
+      <p:pic>
+        <p:nvPicPr>
+          <p:cNvPr id="29" name="Picture 28" descr="image.png"/>
+          <p:cNvPicPr>
+            <a:picLocks noChangeAspect="1"/>
+          </p:cNvPicPr>
+          <p:nvPr/>
+        </p:nvPicPr>
+        <p:blipFill>
+          <a:blip r:embed="rId3"/>
+          <a:stretch>
+            <a:fillRect/>
+          </a:stretch>
+        </p:blipFill>
+        <p:spPr>
+          <a:xfrm>
+            <a:off x="7305040" y="4160520"/>
+            <a:ext cx="411480" cy="411480"/>
+          </a:xfrm>
+          <a:prstGeom prst="rect">
+            <a:avLst/>
+          </a:prstGeom>
+        </p:spPr>
+      </p:pic>
+      <p:pic>
+        <p:nvPicPr>
+          <p:cNvPr id="30" name="Picture 29" descr="image.png"/>
+          <p:cNvPicPr>
+            <a:picLocks noChangeAspect="1"/>
+          </p:cNvPicPr>
+          <p:nvPr/>
+        </p:nvPicPr>
+        <p:blipFill>
+          <a:blip r:embed="rId4"/>
+          <a:stretch>
+            <a:fillRect/>
+          </a:stretch>
+        </p:blipFill>
+        <p:spPr>
+          <a:xfrm>
+            <a:off x="11140440" y="4160520"/>
+            <a:ext cx="411480" cy="411480"/>
+          </a:xfrm>
+          <a:prstGeom prst="rect">
+            <a:avLst/>
+          </a:prstGeom>
+        </p:spPr>
+      </p:pic>
     </p:spTree>
   </p:cSld>
   <p:clrMapOvr>
@@ -11401,7 +10985,7 @@
         <p:spPr>
           <a:xfrm>
             <a:off x="563880" y="4663440"/>
-            <a:ext cx="5394960" cy="1737840"/>
+            <a:ext cx="5394960" cy="1691640"/>
           </a:xfrm>
           <a:prstGeom prst="roundRect">
             <a:avLst>
@@ -11449,7 +11033,7 @@
         <p:spPr>
           <a:xfrm>
             <a:off x="6233160" y="4663440"/>
-            <a:ext cx="5394960" cy="1737840"/>
+            <a:ext cx="5394960" cy="1691640"/>
           </a:xfrm>
           <a:prstGeom prst="roundRect">
             <a:avLst>
@@ -11516,7 +11100,7 @@
                 <a:solidFill>
                   <a:srgbClr val="0043DA"/>
                 </a:solidFill>
-                <a:latin typeface="프리젠테이션 7 Bold"/>
+                <a:latin typeface="Freesentation 7 Bold"/>
               </a:rPr>
               <a:t>브로커 관리</a:t>
             </a:r>
@@ -11551,7 +11135,7 @@
                 <a:solidFill>
                   <a:srgbClr val="0043DA"/>
                 </a:solidFill>
-                <a:latin typeface="프리젠테이션 7 Bold"/>
+                <a:latin typeface="Freesentation 7 Bold"/>
               </a:rPr>
               <a:t>스토리지</a:t>
             </a:r>
@@ -11586,7 +11170,7 @@
                 <a:solidFill>
                   <a:srgbClr val="0043DA"/>
                 </a:solidFill>
-                <a:latin typeface="프리젠테이션 7 Bold"/>
+                <a:latin typeface="Freesentation 7 Bold"/>
               </a:rPr>
               <a:t>모니터링</a:t>
             </a:r>
@@ -11621,7 +11205,7 @@
                 <a:solidFill>
                   <a:srgbClr val="0043DA"/>
                 </a:solidFill>
-                <a:latin typeface="프리젠테이션 7 Bold"/>
+                <a:latin typeface="Freesentation 7 Bold"/>
               </a:rPr>
               <a:t>MSK Connect</a:t>
             </a:r>
@@ -11866,7 +11450,7 @@
       </p:sp>
       <p:pic>
         <p:nvPicPr>
-          <p:cNvPr id="19" name="Picture 18" descr="image.png"/>
+          <p:cNvPr id="23" name="Picture 22" descr="image.png"/>
           <p:cNvPicPr>
             <a:picLocks noChangeAspect="1"/>
           </p:cNvPicPr>
@@ -11890,7 +11474,7 @@
       </p:pic>
       <p:pic>
         <p:nvPicPr>
-          <p:cNvPr id="20" name="Picture 19" descr="image.png"/>
+          <p:cNvPr id="24" name="Picture 23" descr="image.png"/>
           <p:cNvPicPr>
             <a:picLocks noChangeAspect="1"/>
           </p:cNvPicPr>
@@ -11914,7 +11498,7 @@
       </p:pic>
       <p:pic>
         <p:nvPicPr>
-          <p:cNvPr id="21" name="Picture 20" descr="image.png"/>
+          <p:cNvPr id="25" name="Picture 24" descr="image.png"/>
           <p:cNvPicPr>
             <a:picLocks noChangeAspect="1"/>
           </p:cNvPicPr>
@@ -11938,7 +11522,7 @@
       </p:pic>
       <p:pic>
         <p:nvPicPr>
-          <p:cNvPr id="22" name="Picture 21" descr="image.png"/>
+          <p:cNvPr id="26" name="Picture 25" descr="image.png"/>
           <p:cNvPicPr>
             <a:picLocks noChangeAspect="1"/>
           </p:cNvPicPr>
@@ -12029,23 +11613,9 @@
             <a:pPr algn="l"/>
             <a:r>
               <a:rPr sz="2800" b="1">
-                <a:solidFill>
-                  <a:srgbClr val="0043DA"/>
-                </a:solidFill>
-                <a:latin typeface="프리젠테이션 7 Bold"/>
-              </a:rPr>
-              <a:t>L04.</a:t>
-            </a:r>
-          </a:p>
-          <a:p>
-            <a:r>
-              <a:rPr sz="2800" b="1">
-                <a:solidFill>
-                  <a:srgbClr val="0043DA"/>
-                </a:solidFill>
-                <a:latin typeface="프리젠테이션 7 Bold"/>
-              </a:rPr>
-              <a:t>Process Arrow</a:t>
+                <a:latin typeface="Freesentation"/>
+              </a:rPr>
+              <a:t>L04. Process Arrow</a:t>
             </a:r>
           </a:p>
         </p:txBody>
@@ -12155,9 +11725,9 @@
             <a:r>
               <a:rPr sz="1400" b="1">
                 <a:solidFill>
-                  <a:srgbClr val="FFFFFF"/>
-                </a:solidFill>
-                <a:latin typeface="프리젠테이션 7 Bold"/>
+                  <a:srgbClr val="0043DA"/>
+                </a:solidFill>
+                <a:latin typeface="Freesentation 7 Bold"/>
               </a:rPr>
               <a:t>1. 설계</a:t>
             </a:r>
@@ -12173,7 +11743,7 @@
         <p:spPr>
           <a:xfrm>
             <a:off x="457200" y="3383280"/>
-            <a:ext cx="2647950" cy="3018000"/>
+            <a:ext cx="2647950" cy="2971800"/>
           </a:xfrm>
           <a:prstGeom prst="roundRect">
             <a:avLst/>
@@ -12219,7 +11789,7 @@
         <p:spPr>
           <a:xfrm>
             <a:off x="594360" y="3520440"/>
-            <a:ext cx="2373630" cy="2880840"/>
+            <a:ext cx="2373630" cy="2834640"/>
           </a:xfrm>
           <a:prstGeom prst="rect">
             <a:avLst/>
@@ -12339,9 +11909,9 @@
             <a:r>
               <a:rPr sz="1400" b="1">
                 <a:solidFill>
-                  <a:srgbClr val="FFFFFF"/>
-                </a:solidFill>
-                <a:latin typeface="프리젠테이션 7 Bold"/>
+                  <a:srgbClr val="0043DA"/>
+                </a:solidFill>
+                <a:latin typeface="Freesentation 7 Bold"/>
               </a:rPr>
               <a:t>2. 생성</a:t>
             </a:r>
@@ -12357,7 +11927,7 @@
         <p:spPr>
           <a:xfrm>
             <a:off x="3333750" y="3383280"/>
-            <a:ext cx="2647950" cy="3018000"/>
+            <a:ext cx="2647950" cy="2971800"/>
           </a:xfrm>
           <a:prstGeom prst="roundRect">
             <a:avLst/>
@@ -12403,7 +11973,7 @@
         <p:spPr>
           <a:xfrm>
             <a:off x="3470910" y="3520440"/>
-            <a:ext cx="2373630" cy="2880840"/>
+            <a:ext cx="2373630" cy="2834640"/>
           </a:xfrm>
           <a:prstGeom prst="rect">
             <a:avLst/>
@@ -12523,9 +12093,9 @@
             <a:r>
               <a:rPr sz="1400" b="1">
                 <a:solidFill>
-                  <a:srgbClr val="FFFFFF"/>
-                </a:solidFill>
-                <a:latin typeface="프리젠테이션 7 Bold"/>
+                  <a:srgbClr val="0043DA"/>
+                </a:solidFill>
+                <a:latin typeface="Freesentation 7 Bold"/>
               </a:rPr>
               <a:t>3. 연결</a:t>
             </a:r>
@@ -12541,7 +12111,7 @@
         <p:spPr>
           <a:xfrm>
             <a:off x="6210300" y="3383280"/>
-            <a:ext cx="2647950" cy="3018000"/>
+            <a:ext cx="2647950" cy="2971800"/>
           </a:xfrm>
           <a:prstGeom prst="roundRect">
             <a:avLst/>
@@ -12587,7 +12157,7 @@
         <p:spPr>
           <a:xfrm>
             <a:off x="6347460" y="3520440"/>
-            <a:ext cx="2373630" cy="2880840"/>
+            <a:ext cx="2373630" cy="2834640"/>
           </a:xfrm>
           <a:prstGeom prst="rect">
             <a:avLst/>
@@ -12707,9 +12277,9 @@
             <a:r>
               <a:rPr sz="1400" b="1">
                 <a:solidFill>
-                  <a:srgbClr val="FFFFFF"/>
-                </a:solidFill>
-                <a:latin typeface="프리젠테이션 7 Bold"/>
+                  <a:srgbClr val="0043DA"/>
+                </a:solidFill>
+                <a:latin typeface="Freesentation 7 Bold"/>
               </a:rPr>
               <a:t>4. 운영</a:t>
             </a:r>
@@ -12725,7 +12295,7 @@
         <p:spPr>
           <a:xfrm>
             <a:off x="9086850" y="3383280"/>
-            <a:ext cx="2647950" cy="3018000"/>
+            <a:ext cx="2647950" cy="2971800"/>
           </a:xfrm>
           <a:prstGeom prst="roundRect">
             <a:avLst/>
@@ -12771,7 +12341,7 @@
         <p:spPr>
           <a:xfrm>
             <a:off x="9224010" y="3520440"/>
-            <a:ext cx="2373630" cy="2880840"/>
+            <a:ext cx="2373630" cy="2834640"/>
           </a:xfrm>
           <a:prstGeom prst="rect">
             <a:avLst/>
@@ -12900,87 +12470,15 @@
           <p:nvPr/>
         </p:nvPicPr>
         <p:blipFill>
-          <a:blip r:embed="rId6"/>
+          <a:blip r:embed="rId2"/>
           <a:stretch>
             <a:fillRect/>
           </a:stretch>
         </p:blipFill>
         <p:spPr>
           <a:xfrm>
-            <a:off x="2514600" y="5806440"/>
-            <a:ext cx="411480" cy="411480"/>
-          </a:xfrm>
-          <a:prstGeom prst="rect">
-            <a:avLst/>
-          </a:prstGeom>
-        </p:spPr>
-      </p:pic>
-      <p:pic>
-        <p:nvPicPr>
-          <p:cNvPr id="24" name="Picture 23" descr="image.png"/>
-          <p:cNvPicPr>
-            <a:picLocks noChangeAspect="1"/>
-          </p:cNvPicPr>
-          <p:nvPr/>
-        </p:nvPicPr>
-        <p:blipFill>
-          <a:blip r:embed="rId7"/>
-          <a:stretch>
-            <a:fillRect/>
-          </a:stretch>
-        </p:blipFill>
-        <p:spPr>
-          <a:xfrm>
-            <a:off x="5394959" y="5806440"/>
-            <a:ext cx="411480" cy="411480"/>
-          </a:xfrm>
-          <a:prstGeom prst="rect">
-            <a:avLst/>
-          </a:prstGeom>
-        </p:spPr>
-      </p:pic>
-      <p:pic>
-        <p:nvPicPr>
-          <p:cNvPr id="25" name="Picture 24" descr="image.png"/>
-          <p:cNvPicPr>
-            <a:picLocks noChangeAspect="1"/>
-          </p:cNvPicPr>
-          <p:nvPr/>
-        </p:nvPicPr>
-        <p:blipFill>
-          <a:blip r:embed="rId4"/>
-          <a:stretch>
-            <a:fillRect/>
-          </a:stretch>
-        </p:blipFill>
-        <p:spPr>
-          <a:xfrm>
-            <a:off x="8266175" y="5806440"/>
-            <a:ext cx="411480" cy="411480"/>
-          </a:xfrm>
-          <a:prstGeom prst="rect">
-            <a:avLst/>
-          </a:prstGeom>
-        </p:spPr>
-      </p:pic>
-      <p:pic>
-        <p:nvPicPr>
-          <p:cNvPr id="26" name="Picture 25" descr="image.png"/>
-          <p:cNvPicPr>
-            <a:picLocks noChangeAspect="1"/>
-          </p:cNvPicPr>
-          <p:nvPr/>
-        </p:nvPicPr>
-        <p:blipFill>
-          <a:blip r:embed="rId5"/>
-          <a:stretch>
-            <a:fillRect/>
-          </a:stretch>
-        </p:blipFill>
-        <p:spPr>
-          <a:xfrm>
-            <a:off x="11146536" y="5806440"/>
-            <a:ext cx="411480" cy="411480"/>
+            <a:off x="9601200" y="5669280"/>
+            <a:ext cx="548640" cy="548640"/>
           </a:xfrm>
           <a:prstGeom prst="rect">
             <a:avLst/>

--- a/results/pptx/AWS_MSK_Expert_Intro.pptx
+++ b/results/pptx/AWS_MSK_Expert_Intro.pptx
@@ -6822,7 +6822,7 @@
       </p:sp>
       <p:pic>
         <p:nvPicPr>
-          <p:cNvPr id="28" name="Picture 27" descr="image.png"/>
+          <p:cNvPr id="25" name="Picture 24" descr="image.png"/>
           <p:cNvPicPr>
             <a:picLocks noChangeAspect="1"/>
           </p:cNvPicPr>
@@ -6846,7 +6846,7 @@
       </p:pic>
       <p:pic>
         <p:nvPicPr>
-          <p:cNvPr id="29" name="Picture 28" descr="image.png"/>
+          <p:cNvPr id="26" name="Picture 25" descr="network.png"/>
           <p:cNvPicPr>
             <a:picLocks noChangeAspect="1"/>
           </p:cNvPicPr>
@@ -6870,7 +6870,7 @@
       </p:pic>
       <p:pic>
         <p:nvPicPr>
-          <p:cNvPr id="30" name="Picture 29" descr="image.png"/>
+          <p:cNvPr id="27" name="Picture 26" descr="image.png"/>
           <p:cNvPicPr>
             <a:picLocks noChangeAspect="1"/>
           </p:cNvPicPr>
@@ -7124,14 +7124,14 @@
       </p:sp>
       <p:pic>
         <p:nvPicPr>
-          <p:cNvPr id="23" name="Picture 22" descr="image.png"/>
+          <p:cNvPr id="8" name="Picture 7" descr="cluster.png"/>
           <p:cNvPicPr>
             <a:picLocks noChangeAspect="1"/>
           </p:cNvPicPr>
           <p:nvPr/>
         </p:nvPicPr>
         <p:blipFill>
-          <a:blip r:embed="rId6"/>
+          <a:blip r:embed="rId2"/>
           <a:stretch>
             <a:fillRect/>
           </a:stretch>
@@ -7300,7 +7300,7 @@
       </p:sp>
       <p:pic>
         <p:nvPicPr>
-          <p:cNvPr id="24" name="Picture 23" descr="image.png"/>
+          <p:cNvPr id="12" name="Picture 11" descr="security.png"/>
           <p:cNvPicPr>
             <a:picLocks noChangeAspect="1"/>
           </p:cNvPicPr>
@@ -7476,7 +7476,7 @@
       </p:sp>
       <p:pic>
         <p:nvPicPr>
-          <p:cNvPr id="25" name="Picture 24" descr="image.png"/>
+          <p:cNvPr id="16" name="Picture 15" descr="monitoring.png"/>
           <p:cNvPicPr>
             <a:picLocks noChangeAspect="1"/>
           </p:cNvPicPr>
@@ -7652,7 +7652,7 @@
       </p:sp>
       <p:pic>
         <p:nvPicPr>
-          <p:cNvPr id="26" name="Picture 25" descr="image.png"/>
+          <p:cNvPr id="20" name="Picture 19" descr="connect.png"/>
           <p:cNvPicPr>
             <a:picLocks noChangeAspect="1"/>
           </p:cNvPicPr>
@@ -8314,14 +8314,14 @@
       </p:sp>
       <p:pic>
         <p:nvPicPr>
-          <p:cNvPr id="18" name="Picture 17" descr="settings.png"/>
+          <p:cNvPr id="14" name="Picture 13" descr="image.png"/>
           <p:cNvPicPr>
             <a:picLocks noChangeAspect="1"/>
           </p:cNvPicPr>
           <p:nvPr/>
         </p:nvPicPr>
         <p:blipFill>
-          <a:blip r:embed="rId6"/>
+          <a:blip r:embed="rId2"/>
           <a:stretch>
             <a:fillRect/>
           </a:stretch>
@@ -8338,7 +8338,7 @@
       </p:pic>
       <p:pic>
         <p:nvPicPr>
-          <p:cNvPr id="19" name="Picture 18" descr="image.png"/>
+          <p:cNvPr id="15" name="Picture 14" descr="database.png"/>
           <p:cNvPicPr>
             <a:picLocks noChangeAspect="1"/>
           </p:cNvPicPr>
@@ -8362,14 +8362,14 @@
       </p:pic>
       <p:pic>
         <p:nvPicPr>
-          <p:cNvPr id="20" name="Picture 19" descr="warning.png"/>
+          <p:cNvPr id="16" name="Picture 15" descr="image.png"/>
           <p:cNvPicPr>
             <a:picLocks noChangeAspect="1"/>
           </p:cNvPicPr>
           <p:nvPr/>
         </p:nvPicPr>
         <p:blipFill>
-          <a:blip r:embed="rId7"/>
+          <a:blip r:embed="rId4"/>
           <a:stretch>
             <a:fillRect/>
           </a:stretch>
@@ -8386,7 +8386,7 @@
       </p:pic>
       <p:pic>
         <p:nvPicPr>
-          <p:cNvPr id="21" name="Picture 20" descr="image.png"/>
+          <p:cNvPr id="17" name="Picture 16" descr="cost.png"/>
           <p:cNvPicPr>
             <a:picLocks noChangeAspect="1"/>
           </p:cNvPicPr>
@@ -10626,7 +10626,7 @@
       </p:sp>
       <p:pic>
         <p:nvPicPr>
-          <p:cNvPr id="28" name="Picture 27" descr="image.png"/>
+          <p:cNvPr id="25" name="Picture 24" descr="image.png"/>
           <p:cNvPicPr>
             <a:picLocks noChangeAspect="1"/>
           </p:cNvPicPr>
@@ -10650,7 +10650,7 @@
       </p:pic>
       <p:pic>
         <p:nvPicPr>
-          <p:cNvPr id="29" name="Picture 28" descr="image.png"/>
+          <p:cNvPr id="26" name="Picture 25" descr="network.png"/>
           <p:cNvPicPr>
             <a:picLocks noChangeAspect="1"/>
           </p:cNvPicPr>
@@ -10674,7 +10674,7 @@
       </p:pic>
       <p:pic>
         <p:nvPicPr>
-          <p:cNvPr id="30" name="Picture 29" descr="image.png"/>
+          <p:cNvPr id="27" name="Picture 26" descr="image.png"/>
           <p:cNvPicPr>
             <a:picLocks noChangeAspect="1"/>
           </p:cNvPicPr>
@@ -11450,7 +11450,7 @@
       </p:sp>
       <p:pic>
         <p:nvPicPr>
-          <p:cNvPr id="23" name="Picture 22" descr="image.png"/>
+          <p:cNvPr id="19" name="Picture 18" descr="image.png"/>
           <p:cNvPicPr>
             <a:picLocks noChangeAspect="1"/>
           </p:cNvPicPr>
@@ -11474,7 +11474,7 @@
       </p:pic>
       <p:pic>
         <p:nvPicPr>
-          <p:cNvPr id="24" name="Picture 23" descr="image.png"/>
+          <p:cNvPr id="20" name="Picture 19" descr="image.png"/>
           <p:cNvPicPr>
             <a:picLocks noChangeAspect="1"/>
           </p:cNvPicPr>
@@ -11498,7 +11498,7 @@
       </p:pic>
       <p:pic>
         <p:nvPicPr>
-          <p:cNvPr id="25" name="Picture 24" descr="image.png"/>
+          <p:cNvPr id="21" name="Picture 20" descr="image.png"/>
           <p:cNvPicPr>
             <a:picLocks noChangeAspect="1"/>
           </p:cNvPicPr>
@@ -11522,7 +11522,7 @@
       </p:pic>
       <p:pic>
         <p:nvPicPr>
-          <p:cNvPr id="26" name="Picture 25" descr="image.png"/>
+          <p:cNvPr id="22" name="Picture 21" descr="image.png"/>
           <p:cNvPicPr>
             <a:picLocks noChangeAspect="1"/>
           </p:cNvPicPr>

--- a/results/pptx/AWS_MSK_Expert_Intro.pptx
+++ b/results/pptx/AWS_MSK_Expert_Intro.pptx
@@ -4358,9 +4358,7 @@
             <a:srgbClr val="F8F9FA"/>
           </a:solidFill>
           <a:ln>
-            <a:solidFill>
-              <a:srgbClr val="DCDCDC"/>
-            </a:solidFill>
+            <a:noFill/>
           </a:ln>
         </p:spPr>
         <p:style>
@@ -4404,9 +4402,7 @@
             <a:srgbClr val="F8F9FA"/>
           </a:solidFill>
           <a:ln>
-            <a:solidFill>
-              <a:srgbClr val="DCDCDC"/>
-            </a:solidFill>
+            <a:noFill/>
           </a:ln>
         </p:spPr>
         <p:style>
@@ -4450,9 +4446,7 @@
             <a:srgbClr val="F8F9FA"/>
           </a:solidFill>
           <a:ln>
-            <a:solidFill>
-              <a:srgbClr val="DCDCDC"/>
-            </a:solidFill>
+            <a:noFill/>
           </a:ln>
         </p:spPr>
         <p:style>
@@ -4496,9 +4490,7 @@
             <a:srgbClr val="F8F9FA"/>
           </a:solidFill>
           <a:ln>
-            <a:solidFill>
-              <a:srgbClr val="0043DA"/>
-            </a:solidFill>
+            <a:noFill/>
           </a:ln>
         </p:spPr>
         <p:style>
@@ -4541,6 +4533,9 @@
           <a:solidFill>
             <a:srgbClr val="EE8150"/>
           </a:solidFill>
+          <a:ln>
+            <a:noFill/>
+          </a:ln>
         </p:spPr>
         <p:style>
           <a:lnRef idx="1">
@@ -4582,6 +4577,9 @@
           <a:solidFill>
             <a:srgbClr val="0043DA"/>
           </a:solidFill>
+          <a:ln>
+            <a:noFill/>
+          </a:ln>
         </p:spPr>
         <p:style>
           <a:lnRef idx="1">
@@ -4623,6 +4621,9 @@
           <a:solidFill>
             <a:srgbClr val="4CB88F"/>
           </a:solidFill>
+          <a:ln>
+            <a:noFill/>
+          </a:ln>
         </p:spPr>
         <p:style>
           <a:lnRef idx="1">
@@ -4664,6 +4665,9 @@
           <a:solidFill>
             <a:srgbClr val="969696"/>
           </a:solidFill>
+          <a:ln>
+            <a:noFill/>
+          </a:ln>
         </p:spPr>
         <p:style>
           <a:lnRef idx="1">
@@ -4705,6 +4709,9 @@
           <a:solidFill>
             <a:srgbClr val="969696"/>
           </a:solidFill>
+          <a:ln>
+            <a:noFill/>
+          </a:ln>
         </p:spPr>
         <p:style>
           <a:lnRef idx="1">
@@ -5457,6 +5464,9 @@
           <a:solidFill>
             <a:srgbClr val="EE8150"/>
           </a:solidFill>
+          <a:ln>
+            <a:noFill/>
+          </a:ln>
         </p:spPr>
         <p:style>
           <a:lnRef idx="1">
@@ -5502,10 +5512,11 @@
           <a:prstGeom prst="rightArrow">
             <a:avLst/>
           </a:prstGeom>
+          <a:solidFill>
+            <a:srgbClr val="EE8150"/>
+          </a:solidFill>
           <a:ln>
-            <a:solidFill>
-              <a:srgbClr val="EE8150"/>
-            </a:solidFill>
+            <a:noFill/>
           </a:ln>
         </p:spPr>
         <p:style>
@@ -5548,6 +5559,11 @@
           <a:solidFill>
             <a:srgbClr val="E6F0FF"/>
           </a:solidFill>
+          <a:ln w="12700">
+            <a:solidFill>
+              <a:srgbClr val="0043DA"/>
+            </a:solidFill>
+          </a:ln>
         </p:spPr>
         <p:style>
           <a:lnRef idx="1">
@@ -5624,6 +5640,9 @@
           <a:solidFill>
             <a:srgbClr val="0043DA"/>
           </a:solidFill>
+          <a:ln>
+            <a:noFill/>
+          </a:ln>
         </p:spPr>
         <p:style>
           <a:lnRef idx="1">
@@ -5671,6 +5690,9 @@
           <a:solidFill>
             <a:srgbClr val="0043DA"/>
           </a:solidFill>
+          <a:ln>
+            <a:noFill/>
+          </a:ln>
         </p:spPr>
         <p:style>
           <a:lnRef idx="1">
@@ -5718,6 +5740,9 @@
           <a:solidFill>
             <a:srgbClr val="0043DA"/>
           </a:solidFill>
+          <a:ln>
+            <a:noFill/>
+          </a:ln>
         </p:spPr>
         <p:style>
           <a:lnRef idx="1">
@@ -5762,10 +5787,11 @@
           <a:prstGeom prst="rightArrow">
             <a:avLst/>
           </a:prstGeom>
+          <a:solidFill>
+            <a:srgbClr val="4CB88F"/>
+          </a:solidFill>
           <a:ln>
-            <a:solidFill>
-              <a:srgbClr val="4CB88F"/>
-            </a:solidFill>
+            <a:noFill/>
           </a:ln>
         </p:spPr>
         <p:style>
@@ -5808,6 +5834,9 @@
           <a:solidFill>
             <a:srgbClr val="4CB88F"/>
           </a:solidFill>
+          <a:ln>
+            <a:noFill/>
+          </a:ln>
         </p:spPr>
         <p:style>
           <a:lnRef idx="1">
@@ -5856,6 +5885,9 @@
           <a:solidFill>
             <a:srgbClr val="F8F9FA"/>
           </a:solidFill>
+          <a:ln>
+            <a:noFill/>
+          </a:ln>
         </p:spPr>
         <p:style>
           <a:lnRef idx="1">
@@ -5897,6 +5929,9 @@
           <a:solidFill>
             <a:srgbClr val="F8F9FA"/>
           </a:solidFill>
+          <a:ln>
+            <a:noFill/>
+          </a:ln>
         </p:spPr>
         <p:style>
           <a:lnRef idx="1">
@@ -5938,6 +5973,9 @@
           <a:solidFill>
             <a:srgbClr val="F8F9FA"/>
           </a:solidFill>
+          <a:ln>
+            <a:noFill/>
+          </a:ln>
         </p:spPr>
         <p:style>
           <a:lnRef idx="1">
@@ -6509,9 +6547,7 @@
             <a:srgbClr val="F8F9FA"/>
           </a:solidFill>
           <a:ln>
-            <a:solidFill>
-              <a:srgbClr val="DCDCDC"/>
-            </a:solidFill>
+            <a:noFill/>
           </a:ln>
         </p:spPr>
         <p:style>
@@ -6555,9 +6591,7 @@
             <a:srgbClr val="F8F9FA"/>
           </a:solidFill>
           <a:ln>
-            <a:solidFill>
-              <a:srgbClr val="DCDCDC"/>
-            </a:solidFill>
+            <a:noFill/>
           </a:ln>
         </p:spPr>
         <p:style>
@@ -6601,9 +6635,7 @@
             <a:srgbClr val="F8F9FA"/>
           </a:solidFill>
           <a:ln>
-            <a:solidFill>
-              <a:srgbClr val="DCDCDC"/>
-            </a:solidFill>
+            <a:noFill/>
           </a:ln>
         </p:spPr>
         <p:style>
@@ -6647,9 +6679,7 @@
             <a:srgbClr val="F8F9FA"/>
           </a:solidFill>
           <a:ln>
-            <a:solidFill>
-              <a:srgbClr val="DCDCDC"/>
-            </a:solidFill>
+            <a:noFill/>
           </a:ln>
         </p:spPr>
         <p:style>
@@ -7333,6 +7363,9 @@
           <a:solidFill>
             <a:srgbClr val="0043DA"/>
           </a:solidFill>
+          <a:ln>
+            <a:noFill/>
+          </a:ln>
         </p:spPr>
         <p:style>
           <a:lnRef idx="1">
@@ -7382,6 +7415,9 @@
           <a:solidFill>
             <a:srgbClr val="0043DA"/>
           </a:solidFill>
+          <a:ln>
+            <a:noFill/>
+          </a:ln>
         </p:spPr>
         <p:style>
           <a:lnRef idx="1">
@@ -7431,6 +7467,9 @@
           <a:solidFill>
             <a:srgbClr val="0043DA"/>
           </a:solidFill>
+          <a:ln>
+            <a:noFill/>
+          </a:ln>
         </p:spPr>
         <p:style>
           <a:lnRef idx="1">
@@ -7480,6 +7519,9 @@
           <a:solidFill>
             <a:srgbClr val="0043DA"/>
           </a:solidFill>
+          <a:ln>
+            <a:noFill/>
+          </a:ln>
         </p:spPr>
         <p:style>
           <a:lnRef idx="1">
@@ -7528,9 +7570,7 @@
             <a:srgbClr val="F8F9FA"/>
           </a:solidFill>
           <a:ln>
-            <a:solidFill>
-              <a:srgbClr val="DCDCDC"/>
-            </a:solidFill>
+            <a:noFill/>
           </a:ln>
         </p:spPr>
         <p:style>
@@ -7574,9 +7614,7 @@
             <a:srgbClr val="F8F9FA"/>
           </a:solidFill>
           <a:ln>
-            <a:solidFill>
-              <a:srgbClr val="DCDCDC"/>
-            </a:solidFill>
+            <a:noFill/>
           </a:ln>
         </p:spPr>
         <p:style>
@@ -7620,9 +7658,7 @@
             <a:srgbClr val="F8F9FA"/>
           </a:solidFill>
           <a:ln>
-            <a:solidFill>
-              <a:srgbClr val="DCDCDC"/>
-            </a:solidFill>
+            <a:noFill/>
           </a:ln>
         </p:spPr>
         <p:style>
@@ -7666,9 +7702,7 @@
             <a:srgbClr val="F8F9FA"/>
           </a:solidFill>
           <a:ln>
-            <a:solidFill>
-              <a:srgbClr val="DCDCDC"/>
-            </a:solidFill>
+            <a:noFill/>
           </a:ln>
         </p:spPr>
         <p:style>
@@ -8225,6 +8259,9 @@
           <a:solidFill>
             <a:srgbClr val="001B5E"/>
           </a:solidFill>
+          <a:ln>
+            <a:noFill/>
+          </a:ln>
         </p:spPr>
         <p:style>
           <a:lnRef idx="1">
@@ -8272,6 +8309,9 @@
           <a:solidFill>
             <a:srgbClr val="0043DA"/>
           </a:solidFill>
+          <a:ln>
+            <a:noFill/>
+          </a:ln>
         </p:spPr>
         <p:style>
           <a:lnRef idx="1">
@@ -8319,6 +8359,9 @@
           <a:solidFill>
             <a:srgbClr val="EE8150"/>
           </a:solidFill>
+          <a:ln>
+            <a:noFill/>
+          </a:ln>
         </p:spPr>
         <p:style>
           <a:lnRef idx="1">
@@ -8341,7 +8384,7 @@
             <a:r>
               <a:rPr sz="1300">
                 <a:solidFill>
-                  <a:srgbClr val="FFFFFF"/>
+                  <a:srgbClr val="000000"/>
                 </a:solidFill>
               </a:rPr>
               <a:t>Phase 3: 구축</a:t>
@@ -8366,6 +8409,9 @@
           <a:solidFill>
             <a:srgbClr val="4CB88F"/>
           </a:solidFill>
+          <a:ln>
+            <a:noFill/>
+          </a:ln>
         </p:spPr>
         <p:style>
           <a:lnRef idx="1">
@@ -8388,7 +8434,7 @@
             <a:r>
               <a:rPr sz="1300">
                 <a:solidFill>
-                  <a:srgbClr val="FFFFFF"/>
+                  <a:srgbClr val="000000"/>
                 </a:solidFill>
               </a:rPr>
               <a:t>Phase 4: 운영</a:t>
@@ -8414,9 +8460,7 @@
             <a:srgbClr val="F8F9FA"/>
           </a:solidFill>
           <a:ln>
-            <a:solidFill>
-              <a:srgbClr val="DCDCDC"/>
-            </a:solidFill>
+            <a:noFill/>
           </a:ln>
         </p:spPr>
         <p:style>
@@ -8460,9 +8504,7 @@
             <a:srgbClr val="F8F9FA"/>
           </a:solidFill>
           <a:ln>
-            <a:solidFill>
-              <a:srgbClr val="DCDCDC"/>
-            </a:solidFill>
+            <a:noFill/>
           </a:ln>
         </p:spPr>
         <p:style>
@@ -8506,9 +8548,7 @@
             <a:srgbClr val="F8F9FA"/>
           </a:solidFill>
           <a:ln>
-            <a:solidFill>
-              <a:srgbClr val="DCDCDC"/>
-            </a:solidFill>
+            <a:noFill/>
           </a:ln>
         </p:spPr>
         <p:style>
@@ -8552,9 +8592,7 @@
             <a:srgbClr val="F8F9FA"/>
           </a:solidFill>
           <a:ln>
-            <a:solidFill>
-              <a:srgbClr val="DCDCDC"/>
-            </a:solidFill>
+            <a:noFill/>
           </a:ln>
         </p:spPr>
         <p:style>

--- a/results/pptx/AWS_MSK_Expert_Intro.pptx
+++ b/results/pptx/AWS_MSK_Expert_Intro.pptx
@@ -4331,7 +4331,11 @@
             <p:ph type="body" sz="quarter" idx="10"/>
           </p:nvPr>
         </p:nvSpPr>
-        <p:spPr/>
+        <p:spPr>
+          <a:ln>
+            <a:noFill/>
+          </a:ln>
+        </p:spPr>
         <p:txBody>
           <a:bodyPr/>
           <a:lstStyle/>
@@ -4357,8 +4361,10 @@
           <a:solidFill>
             <a:srgbClr val="F8F9FA"/>
           </a:solidFill>
-          <a:ln>
-            <a:noFill/>
+          <a:ln w="6350">
+            <a:solidFill>
+              <a:srgbClr val="DCDCDC"/>
+            </a:solidFill>
           </a:ln>
         </p:spPr>
         <p:style>
@@ -4401,8 +4407,10 @@
           <a:solidFill>
             <a:srgbClr val="F8F9FA"/>
           </a:solidFill>
-          <a:ln>
-            <a:noFill/>
+          <a:ln w="6350">
+            <a:solidFill>
+              <a:srgbClr val="DCDCDC"/>
+            </a:solidFill>
           </a:ln>
         </p:spPr>
         <p:style>
@@ -4445,8 +4453,10 @@
           <a:solidFill>
             <a:srgbClr val="F8F9FA"/>
           </a:solidFill>
-          <a:ln>
-            <a:noFill/>
+          <a:ln w="6350">
+            <a:solidFill>
+              <a:srgbClr val="DCDCDC"/>
+            </a:solidFill>
           </a:ln>
         </p:spPr>
         <p:style>
@@ -4489,8 +4499,10 @@
           <a:solidFill>
             <a:srgbClr val="F8F9FA"/>
           </a:solidFill>
-          <a:ln>
-            <a:noFill/>
+          <a:ln w="6350">
+            <a:solidFill>
+              <a:srgbClr val="DCDCDC"/>
+            </a:solidFill>
           </a:ln>
         </p:spPr>
         <p:style>
@@ -4665,8 +4677,10 @@
           <a:solidFill>
             <a:srgbClr val="969696"/>
           </a:solidFill>
-          <a:ln>
-            <a:noFill/>
+          <a:ln w="6350">
+            <a:solidFill>
+              <a:srgbClr val="DCDCDC"/>
+            </a:solidFill>
           </a:ln>
         </p:spPr>
         <p:style>
@@ -4709,8 +4723,10 @@
           <a:solidFill>
             <a:srgbClr val="969696"/>
           </a:solidFill>
-          <a:ln>
-            <a:noFill/>
+          <a:ln w="6350">
+            <a:solidFill>
+              <a:srgbClr val="DCDCDC"/>
+            </a:solidFill>
           </a:ln>
         </p:spPr>
         <p:style>
@@ -4751,6 +4767,9 @@
             <a:avLst/>
           </a:prstGeom>
           <a:noFill/>
+          <a:ln>
+            <a:noFill/>
+          </a:ln>
         </p:spPr>
         <p:txBody>
           <a:bodyPr wrap="square">
@@ -4798,6 +4817,9 @@
             <a:avLst/>
           </a:prstGeom>
           <a:noFill/>
+          <a:ln>
+            <a:noFill/>
+          </a:ln>
         </p:spPr>
         <p:txBody>
           <a:bodyPr wrap="square">
@@ -4832,6 +4854,9 @@
             <a:avLst/>
           </a:prstGeom>
           <a:noFill/>
+          <a:ln>
+            <a:noFill/>
+          </a:ln>
         </p:spPr>
         <p:txBody>
           <a:bodyPr wrap="square">
@@ -4867,6 +4892,9 @@
             <a:avLst/>
           </a:prstGeom>
           <a:noFill/>
+          <a:ln>
+            <a:noFill/>
+          </a:ln>
         </p:spPr>
         <p:txBody>
           <a:bodyPr wrap="square">
@@ -4895,13 +4923,16 @@
         </p:nvSpPr>
         <p:spPr>
           <a:xfrm>
-            <a:off x="594360" y="2670048"/>
-            <a:ext cx="5120640" cy="320040"/>
+            <a:off x="637200" y="2791402"/>
+            <a:ext cx="5034960" cy="320040"/>
           </a:xfrm>
           <a:prstGeom prst="rect">
             <a:avLst/>
           </a:prstGeom>
           <a:noFill/>
+          <a:ln>
+            <a:noFill/>
+          </a:ln>
         </p:spPr>
         <p:txBody>
           <a:bodyPr wrap="square">
@@ -4930,13 +4961,16 @@
         </p:nvSpPr>
         <p:spPr>
           <a:xfrm>
-            <a:off x="594360" y="3063240"/>
-            <a:ext cx="5120640" cy="1554480"/>
+            <a:off x="637200" y="3219442"/>
+            <a:ext cx="5034960" cy="1554480"/>
           </a:xfrm>
           <a:prstGeom prst="rect">
             <a:avLst/>
           </a:prstGeom>
           <a:noFill/>
+          <a:ln>
+            <a:noFill/>
+          </a:ln>
         </p:spPr>
         <p:txBody>
           <a:bodyPr wrap="square">
@@ -5013,13 +5047,16 @@
         </p:nvSpPr>
         <p:spPr>
           <a:xfrm>
-            <a:off x="6217920" y="2670048"/>
-            <a:ext cx="5375757" cy="320040"/>
+            <a:off x="6261308" y="2637487"/>
+            <a:ext cx="5290992" cy="320040"/>
           </a:xfrm>
           <a:prstGeom prst="rect">
             <a:avLst/>
           </a:prstGeom>
           <a:noFill/>
+          <a:ln>
+            <a:noFill/>
+          </a:ln>
         </p:spPr>
         <p:txBody>
           <a:bodyPr wrap="square">
@@ -5048,13 +5085,16 @@
         </p:nvSpPr>
         <p:spPr>
           <a:xfrm>
-            <a:off x="6217920" y="3063240"/>
-            <a:ext cx="5375757" cy="1371600"/>
+            <a:off x="6261308" y="3065527"/>
+            <a:ext cx="5290992" cy="1371600"/>
           </a:xfrm>
           <a:prstGeom prst="rect">
             <a:avLst/>
           </a:prstGeom>
           <a:noFill/>
+          <a:ln>
+            <a:noFill/>
+          </a:ln>
         </p:spPr>
         <p:txBody>
           <a:bodyPr wrap="square">
@@ -5107,13 +5147,16 @@
         </p:nvSpPr>
         <p:spPr>
           <a:xfrm>
-            <a:off x="6217920" y="5002682"/>
-            <a:ext cx="5375757" cy="320040"/>
+            <a:off x="6261308" y="4938408"/>
+            <a:ext cx="5290992" cy="320040"/>
           </a:xfrm>
           <a:prstGeom prst="rect">
             <a:avLst/>
           </a:prstGeom>
           <a:noFill/>
+          <a:ln>
+            <a:noFill/>
+          </a:ln>
         </p:spPr>
         <p:txBody>
           <a:bodyPr wrap="square">
@@ -5142,13 +5185,16 @@
         </p:nvSpPr>
         <p:spPr>
           <a:xfrm>
-            <a:off x="6217920" y="5394960"/>
-            <a:ext cx="5375757" cy="1005840"/>
+            <a:off x="6261308" y="5366448"/>
+            <a:ext cx="5290992" cy="1005840"/>
           </a:xfrm>
           <a:prstGeom prst="rect">
             <a:avLst/>
           </a:prstGeom>
           <a:noFill/>
+          <a:ln>
+            <a:noFill/>
+          </a:ln>
         </p:spPr>
         <p:txBody>
           <a:bodyPr wrap="square">
@@ -5208,6 +5254,123 @@
             <a:avLst/>
           </a:prstGeom>
           <a:noFill/>
+          <a:ln>
+            <a:noFill/>
+          </a:ln>
+        </p:spPr>
+        <p:txBody>
+          <a:bodyPr wrap="square" anchor="ctr">
+            <a:spAutoFit/>
+          </a:bodyPr>
+          <a:lstStyle/>
+          <a:p>
+            <a:pPr algn="ctr"/>
+            <a:r>
+              <a:rPr sz="1100" b="1">
+                <a:solidFill>
+                  <a:srgbClr val="FFFFFF"/>
+                </a:solidFill>
+                <a:latin typeface="Freesentation"/>
+              </a:rPr>
+              <a:t>Producer</a:t>
+            </a:r>
+          </a:p>
+        </p:txBody>
+      </p:sp>
+      <p:sp>
+        <p:nvSpPr>
+          <p:cNvPr id="23" name="TextBox 22"/>
+          <p:cNvSpPr txBox="1"/>
+          <p:nvPr/>
+        </p:nvSpPr>
+        <p:spPr>
+          <a:xfrm>
+            <a:off x="2468880" y="5070348"/>
+            <a:ext cx="1097280" cy="457200"/>
+          </a:xfrm>
+          <a:prstGeom prst="rect">
+            <a:avLst/>
+          </a:prstGeom>
+          <a:noFill/>
+          <a:ln>
+            <a:noFill/>
+          </a:ln>
+        </p:spPr>
+        <p:txBody>
+          <a:bodyPr wrap="square" anchor="ctr">
+            <a:spAutoFit/>
+          </a:bodyPr>
+          <a:lstStyle/>
+          <a:p>
+            <a:pPr algn="ctr"/>
+            <a:r>
+              <a:rPr sz="1100" b="1">
+                <a:solidFill>
+                  <a:srgbClr val="FFFFFF"/>
+                </a:solidFill>
+                <a:latin typeface="Freesentation"/>
+              </a:rPr>
+              <a:t>MSK</a:t>
+            </a:r>
+          </a:p>
+        </p:txBody>
+      </p:sp>
+      <p:sp>
+        <p:nvSpPr>
+          <p:cNvPr id="24" name="TextBox 23"/>
+          <p:cNvSpPr txBox="1"/>
+          <p:nvPr/>
+        </p:nvSpPr>
+        <p:spPr>
+          <a:xfrm>
+            <a:off x="3840480" y="5070348"/>
+            <a:ext cx="1097280" cy="457200"/>
+          </a:xfrm>
+          <a:prstGeom prst="rect">
+            <a:avLst/>
+          </a:prstGeom>
+          <a:noFill/>
+          <a:ln>
+            <a:noFill/>
+          </a:ln>
+        </p:spPr>
+        <p:txBody>
+          <a:bodyPr wrap="square" anchor="ctr">
+            <a:spAutoFit/>
+          </a:bodyPr>
+          <a:lstStyle/>
+          <a:p>
+            <a:pPr algn="ctr"/>
+            <a:r>
+              <a:rPr sz="1100" b="1">
+                <a:solidFill>
+                  <a:srgbClr val="FFFFFF"/>
+                </a:solidFill>
+                <a:latin typeface="Freesentation"/>
+              </a:rPr>
+              <a:t>Consumer</a:t>
+            </a:r>
+          </a:p>
+        </p:txBody>
+      </p:sp>
+      <p:sp>
+        <p:nvSpPr>
+          <p:cNvPr id="25" name="TextBox 24"/>
+          <p:cNvSpPr txBox="1"/>
+          <p:nvPr/>
+        </p:nvSpPr>
+        <p:spPr>
+          <a:xfrm>
+            <a:off x="1098000" y="5619600"/>
+            <a:ext cx="1098000" cy="228600"/>
+          </a:xfrm>
+          <a:prstGeom prst="rect">
+            <a:avLst/>
+          </a:prstGeom>
+          <a:noFill/>
+          <a:ln>
+            <a:noFill/>
+          </a:ln>
         </p:spPr>
         <p:txBody>
           <a:bodyPr wrap="square">
@@ -5217,32 +5380,35 @@
           <a:p>
             <a:pPr algn="ctr"/>
             <a:r>
-              <a:rPr sz="1100" b="1">
-                <a:solidFill>
-                  <a:srgbClr val="FFFFFF"/>
+              <a:rPr sz="1000">
+                <a:solidFill>
+                  <a:srgbClr val="4A4A4A"/>
                 </a:solidFill>
                 <a:latin typeface="Freesentation"/>
               </a:rPr>
-              <a:t>Producer</a:t>
-            </a:r>
-          </a:p>
-        </p:txBody>
-      </p:sp>
-      <p:sp>
-        <p:nvSpPr>
-          <p:cNvPr id="23" name="TextBox 22"/>
+              <a:t>App / SDK</a:t>
+            </a:r>
+          </a:p>
+        </p:txBody>
+      </p:sp>
+      <p:sp>
+        <p:nvSpPr>
+          <p:cNvPr id="26" name="TextBox 25"/>
           <p:cNvSpPr txBox="1"/>
           <p:nvPr/>
         </p:nvSpPr>
         <p:spPr>
           <a:xfrm>
-            <a:off x="2468880" y="5070348"/>
-            <a:ext cx="1097280" cy="457200"/>
+            <a:off x="2469600" y="5619600"/>
+            <a:ext cx="1098000" cy="228600"/>
           </a:xfrm>
           <a:prstGeom prst="rect">
             <a:avLst/>
           </a:prstGeom>
           <a:noFill/>
+          <a:ln>
+            <a:noFill/>
+          </a:ln>
         </p:spPr>
         <p:txBody>
           <a:bodyPr wrap="square">
@@ -5252,111 +5418,6 @@
           <a:p>
             <a:pPr algn="ctr"/>
             <a:r>
-              <a:rPr sz="1100" b="1">
-                <a:solidFill>
-                  <a:srgbClr val="FFFFFF"/>
-                </a:solidFill>
-                <a:latin typeface="Freesentation"/>
-              </a:rPr>
-              <a:t>MSK</a:t>
-            </a:r>
-          </a:p>
-        </p:txBody>
-      </p:sp>
-      <p:sp>
-        <p:nvSpPr>
-          <p:cNvPr id="24" name="TextBox 23"/>
-          <p:cNvSpPr txBox="1"/>
-          <p:nvPr/>
-        </p:nvSpPr>
-        <p:spPr>
-          <a:xfrm>
-            <a:off x="3840480" y="5070348"/>
-            <a:ext cx="1097280" cy="457200"/>
-          </a:xfrm>
-          <a:prstGeom prst="rect">
-            <a:avLst/>
-          </a:prstGeom>
-          <a:noFill/>
-        </p:spPr>
-        <p:txBody>
-          <a:bodyPr wrap="square">
-            <a:spAutoFit/>
-          </a:bodyPr>
-          <a:lstStyle/>
-          <a:p>
-            <a:pPr algn="ctr"/>
-            <a:r>
-              <a:rPr sz="1100" b="1">
-                <a:solidFill>
-                  <a:srgbClr val="FFFFFF"/>
-                </a:solidFill>
-                <a:latin typeface="Freesentation"/>
-              </a:rPr>
-              <a:t>Consumer</a:t>
-            </a:r>
-          </a:p>
-        </p:txBody>
-      </p:sp>
-      <p:sp>
-        <p:nvSpPr>
-          <p:cNvPr id="25" name="TextBox 24"/>
-          <p:cNvSpPr txBox="1"/>
-          <p:nvPr/>
-        </p:nvSpPr>
-        <p:spPr>
-          <a:xfrm>
-            <a:off x="1097280" y="5618988"/>
-            <a:ext cx="1097280" cy="228600"/>
-          </a:xfrm>
-          <a:prstGeom prst="rect">
-            <a:avLst/>
-          </a:prstGeom>
-          <a:noFill/>
-        </p:spPr>
-        <p:txBody>
-          <a:bodyPr wrap="square">
-            <a:spAutoFit/>
-          </a:bodyPr>
-          <a:lstStyle/>
-          <a:p>
-            <a:pPr algn="ctr"/>
-            <a:r>
-              <a:rPr sz="1000">
-                <a:solidFill>
-                  <a:srgbClr val="4A4A4A"/>
-                </a:solidFill>
-                <a:latin typeface="Freesentation"/>
-              </a:rPr>
-              <a:t>App / SDK</a:t>
-            </a:r>
-          </a:p>
-        </p:txBody>
-      </p:sp>
-      <p:sp>
-        <p:nvSpPr>
-          <p:cNvPr id="26" name="TextBox 25"/>
-          <p:cNvSpPr txBox="1"/>
-          <p:nvPr/>
-        </p:nvSpPr>
-        <p:spPr>
-          <a:xfrm>
-            <a:off x="2468880" y="5618988"/>
-            <a:ext cx="1097280" cy="228600"/>
-          </a:xfrm>
-          <a:prstGeom prst="rect">
-            <a:avLst/>
-          </a:prstGeom>
-          <a:noFill/>
-        </p:spPr>
-        <p:txBody>
-          <a:bodyPr wrap="square">
-            <a:spAutoFit/>
-          </a:bodyPr>
-          <a:lstStyle/>
-          <a:p>
-            <a:pPr algn="ctr"/>
-            <a:r>
               <a:rPr sz="1000">
                 <a:solidFill>
                   <a:srgbClr val="4A4A4A"/>
@@ -5376,13 +5437,16 @@
         </p:nvSpPr>
         <p:spPr>
           <a:xfrm>
-            <a:off x="3840480" y="5618988"/>
-            <a:ext cx="1097280" cy="228600"/>
+            <a:off x="3841200" y="5619600"/>
+            <a:ext cx="1098000" cy="228600"/>
           </a:xfrm>
           <a:prstGeom prst="rect">
             <a:avLst/>
           </a:prstGeom>
           <a:noFill/>
+          <a:ln>
+            <a:noFill/>
+          </a:ln>
         </p:spPr>
         <p:txBody>
           <a:bodyPr wrap="square">
@@ -5438,7 +5502,11 @@
             <p:ph type="body" sz="quarter" idx="10"/>
           </p:nvPr>
         </p:nvSpPr>
-        <p:spPr/>
+        <p:spPr>
+          <a:ln>
+            <a:noFill/>
+          </a:ln>
+        </p:spPr>
         <p:txBody>
           <a:bodyPr/>
           <a:lstStyle/>
@@ -5559,9 +5627,9 @@
           <a:solidFill>
             <a:srgbClr val="E6F0FF"/>
           </a:solidFill>
-          <a:ln w="12700">
+          <a:ln w="6350">
             <a:solidFill>
-              <a:srgbClr val="0043DA"/>
+              <a:srgbClr val="DCDCDC"/>
             </a:solidFill>
           </a:ln>
         </p:spPr>
@@ -5596,13 +5664,16 @@
         </p:nvSpPr>
         <p:spPr>
           <a:xfrm>
-            <a:off x="3535710" y="2651760"/>
-            <a:ext cx="5120640" cy="320040"/>
+            <a:off x="3715710" y="2597150"/>
+            <a:ext cx="4760640" cy="320040"/>
           </a:xfrm>
           <a:prstGeom prst="rect">
             <a:avLst/>
           </a:prstGeom>
           <a:noFill/>
+          <a:ln>
+            <a:noFill/>
+          </a:ln>
         </p:spPr>
         <p:txBody>
           <a:bodyPr wrap="square">
@@ -5612,11 +5683,11 @@
           <a:p>
             <a:pPr algn="ctr"/>
             <a:r>
-              <a:rPr sz="1200" b="1">
-                <a:solidFill>
-                  <a:srgbClr val="FFFFFF"/>
-                </a:solidFill>
+              <a:rPr sz="1300" b="1">
                 <a:latin typeface="Freesentation"/>
+                <a:solidFill>
+                  <a:srgbClr val="1B3A5C"/>
+                </a:solidFill>
               </a:rPr>
               <a:t>MSK Cluster (Multi-AZ Brokers)</a:t>
             </a:r>
@@ -5662,6 +5733,7 @@
           <a:bodyPr rtlCol="0" anchor="ctr"/>
           <a:lstStyle/>
           <a:p>
+            <a:pPr algn="ctr"/>
             <a:r>
               <a:rPr sz="1000">
                 <a:solidFill>
@@ -5712,6 +5784,7 @@
           <a:bodyPr rtlCol="0" anchor="ctr"/>
           <a:lstStyle/>
           <a:p>
+            <a:pPr algn="ctr"/>
             <a:r>
               <a:rPr sz="1000">
                 <a:solidFill>
@@ -5762,6 +5835,7 @@
           <a:bodyPr rtlCol="0" anchor="ctr"/>
           <a:lstStyle/>
           <a:p>
+            <a:pPr algn="ctr"/>
             <a:r>
               <a:rPr sz="1000">
                 <a:solidFill>
@@ -5885,8 +5959,10 @@
           <a:solidFill>
             <a:srgbClr val="F8F9FA"/>
           </a:solidFill>
-          <a:ln>
-            <a:noFill/>
+          <a:ln w="6350">
+            <a:solidFill>
+              <a:srgbClr val="DCDCDC"/>
+            </a:solidFill>
           </a:ln>
         </p:spPr>
         <p:style>
@@ -5929,8 +6005,10 @@
           <a:solidFill>
             <a:srgbClr val="F8F9FA"/>
           </a:solidFill>
-          <a:ln>
-            <a:noFill/>
+          <a:ln w="6350">
+            <a:solidFill>
+              <a:srgbClr val="DCDCDC"/>
+            </a:solidFill>
           </a:ln>
         </p:spPr>
         <p:style>
@@ -5973,8 +6051,10 @@
           <a:solidFill>
             <a:srgbClr val="F8F9FA"/>
           </a:solidFill>
-          <a:ln>
-            <a:noFill/>
+          <a:ln w="6350">
+            <a:solidFill>
+              <a:srgbClr val="DCDCDC"/>
+            </a:solidFill>
           </a:ln>
         </p:spPr>
         <p:style>
@@ -6008,13 +6088,16 @@
         </p:nvSpPr>
         <p:spPr>
           <a:xfrm>
-            <a:off x="548640" y="4160520"/>
-            <a:ext cx="3424428" cy="304495"/>
+            <a:off x="637200" y="4116696"/>
+            <a:ext cx="3245479" cy="304495"/>
           </a:xfrm>
           <a:prstGeom prst="rect">
             <a:avLst/>
           </a:prstGeom>
           <a:noFill/>
+          <a:ln>
+            <a:noFill/>
+          </a:ln>
         </p:spPr>
         <p:txBody>
           <a:bodyPr wrap="square">
@@ -6042,13 +6125,16 @@
         </p:nvSpPr>
         <p:spPr>
           <a:xfrm>
-            <a:off x="548640" y="4526280"/>
-            <a:ext cx="3424428" cy="1645920"/>
+            <a:off x="637200" y="4529191"/>
+            <a:ext cx="3245479" cy="1645920"/>
           </a:xfrm>
           <a:prstGeom prst="rect">
             <a:avLst/>
           </a:prstGeom>
           <a:noFill/>
+          <a:ln>
+            <a:noFill/>
+          </a:ln>
         </p:spPr>
         <p:txBody>
           <a:bodyPr wrap="square">
@@ -6057,7 +6143,7 @@
           <a:lstStyle/>
           <a:p>
             <a:r>
-              <a:rPr sz="1200">
+              <a:rPr sz="1300">
                 <a:solidFill>
                   <a:srgbClr val="4A4A4A"/>
                 </a:solidFill>
@@ -6068,7 +6154,7 @@
           </a:p>
           <a:p>
             <a:r>
-              <a:rPr sz="1200">
+              <a:rPr sz="1300">
                 <a:solidFill>
                   <a:srgbClr val="4A4A4A"/>
                 </a:solidFill>
@@ -6079,7 +6165,7 @@
           </a:p>
           <a:p>
             <a:r>
-              <a:rPr sz="1200">
+              <a:rPr sz="1300">
                 <a:solidFill>
                   <a:srgbClr val="4A4A4A"/>
                 </a:solidFill>
@@ -6090,7 +6176,7 @@
           </a:p>
           <a:p>
             <a:r>
-              <a:rPr sz="1200">
+              <a:rPr sz="1300">
                 <a:solidFill>
                   <a:srgbClr val="4A4A4A"/>
                 </a:solidFill>
@@ -6101,7 +6187,7 @@
           </a:p>
           <a:p>
             <a:r>
-              <a:rPr sz="1200">
+              <a:rPr sz="1300">
                 <a:solidFill>
                   <a:srgbClr val="4A4A4A"/>
                 </a:solidFill>
@@ -6120,13 +6206,16 @@
         </p:nvSpPr>
         <p:spPr>
           <a:xfrm>
-            <a:off x="4384548" y="4160520"/>
-            <a:ext cx="3424428" cy="304495"/>
+            <a:off x="4473108" y="4116696"/>
+            <a:ext cx="3245479" cy="304495"/>
           </a:xfrm>
           <a:prstGeom prst="rect">
             <a:avLst/>
           </a:prstGeom>
           <a:noFill/>
+          <a:ln>
+            <a:noFill/>
+          </a:ln>
         </p:spPr>
         <p:txBody>
           <a:bodyPr wrap="square">
@@ -6154,13 +6243,16 @@
         </p:nvSpPr>
         <p:spPr>
           <a:xfrm>
-            <a:off x="4384548" y="4526280"/>
-            <a:ext cx="3424428" cy="1645920"/>
+            <a:off x="4473108" y="4529191"/>
+            <a:ext cx="3245479" cy="1645920"/>
           </a:xfrm>
           <a:prstGeom prst="rect">
             <a:avLst/>
           </a:prstGeom>
           <a:noFill/>
+          <a:ln>
+            <a:noFill/>
+          </a:ln>
         </p:spPr>
         <p:txBody>
           <a:bodyPr wrap="square">
@@ -6169,7 +6261,7 @@
           <a:lstStyle/>
           <a:p>
             <a:r>
-              <a:rPr sz="1200">
+              <a:rPr sz="1300">
                 <a:solidFill>
                   <a:srgbClr val="4A4A4A"/>
                 </a:solidFill>
@@ -6180,7 +6272,7 @@
           </a:p>
           <a:p>
             <a:r>
-              <a:rPr sz="1200">
+              <a:rPr sz="1300">
                 <a:solidFill>
                   <a:srgbClr val="4A4A4A"/>
                 </a:solidFill>
@@ -6191,7 +6283,7 @@
           </a:p>
           <a:p>
             <a:r>
-              <a:rPr sz="1200">
+              <a:rPr sz="1300">
                 <a:solidFill>
                   <a:srgbClr val="4A4A4A"/>
                 </a:solidFill>
@@ -6202,7 +6294,7 @@
           </a:p>
           <a:p>
             <a:r>
-              <a:rPr sz="1200">
+              <a:rPr sz="1300">
                 <a:solidFill>
                   <a:srgbClr val="4A4A4A"/>
                 </a:solidFill>
@@ -6213,7 +6305,7 @@
           </a:p>
           <a:p>
             <a:r>
-              <a:rPr sz="1200">
+              <a:rPr sz="1300">
                 <a:solidFill>
                   <a:srgbClr val="4A4A4A"/>
                 </a:solidFill>
@@ -6232,13 +6324,16 @@
         </p:nvSpPr>
         <p:spPr>
           <a:xfrm>
-            <a:off x="8220456" y="4160520"/>
-            <a:ext cx="3424428" cy="304495"/>
+            <a:off x="8309016" y="4116696"/>
+            <a:ext cx="3245479" cy="304495"/>
           </a:xfrm>
           <a:prstGeom prst="rect">
             <a:avLst/>
           </a:prstGeom>
           <a:noFill/>
+          <a:ln>
+            <a:noFill/>
+          </a:ln>
         </p:spPr>
         <p:txBody>
           <a:bodyPr wrap="square">
@@ -6266,13 +6361,16 @@
         </p:nvSpPr>
         <p:spPr>
           <a:xfrm>
-            <a:off x="8220456" y="4526280"/>
-            <a:ext cx="3424428" cy="1645920"/>
+            <a:off x="8309016" y="4529191"/>
+            <a:ext cx="3245479" cy="1645920"/>
           </a:xfrm>
           <a:prstGeom prst="rect">
             <a:avLst/>
           </a:prstGeom>
           <a:noFill/>
+          <a:ln>
+            <a:noFill/>
+          </a:ln>
         </p:spPr>
         <p:txBody>
           <a:bodyPr wrap="square">
@@ -6281,7 +6379,7 @@
           <a:lstStyle/>
           <a:p>
             <a:r>
-              <a:rPr sz="1200">
+              <a:rPr sz="1300">
                 <a:solidFill>
                   <a:srgbClr val="4A4A4A"/>
                 </a:solidFill>
@@ -6292,7 +6390,7 @@
           </a:p>
           <a:p>
             <a:r>
-              <a:rPr sz="1200">
+              <a:rPr sz="1300">
                 <a:solidFill>
                   <a:srgbClr val="4A4A4A"/>
                 </a:solidFill>
@@ -6303,7 +6401,7 @@
           </a:p>
           <a:p>
             <a:r>
-              <a:rPr sz="1200">
+              <a:rPr sz="1300">
                 <a:solidFill>
                   <a:srgbClr val="4A4A4A"/>
                 </a:solidFill>
@@ -6314,7 +6412,7 @@
           </a:p>
           <a:p>
             <a:r>
-              <a:rPr sz="1200">
+              <a:rPr sz="1300">
                 <a:solidFill>
                   <a:srgbClr val="4A4A4A"/>
                 </a:solidFill>
@@ -6325,7 +6423,7 @@
           </a:p>
           <a:p>
             <a:r>
-              <a:rPr sz="1200">
+              <a:rPr sz="1300">
                 <a:solidFill>
                   <a:srgbClr val="4A4A4A"/>
                 </a:solidFill>
@@ -6351,6 +6449,9 @@
             <a:avLst/>
           </a:prstGeom>
           <a:noFill/>
+          <a:ln>
+            <a:noFill/>
+          </a:ln>
         </p:spPr>
         <p:txBody>
           <a:bodyPr wrap="square">
@@ -6396,6 +6497,9 @@
             <a:avLst/>
           </a:prstGeom>
           <a:noFill/>
+          <a:ln>
+            <a:noFill/>
+          </a:ln>
         </p:spPr>
         <p:txBody>
           <a:bodyPr wrap="square">
@@ -6430,6 +6534,9 @@
             <a:avLst/>
           </a:prstGeom>
           <a:noFill/>
+          <a:ln>
+            <a:noFill/>
+          </a:ln>
         </p:spPr>
         <p:txBody>
           <a:bodyPr wrap="square">
@@ -6465,6 +6572,9 @@
             <a:avLst/>
           </a:prstGeom>
           <a:noFill/>
+          <a:ln>
+            <a:noFill/>
+          </a:ln>
         </p:spPr>
         <p:txBody>
           <a:bodyPr wrap="square">
@@ -6520,7 +6630,11 @@
             <p:ph type="body" sz="quarter" idx="10"/>
           </p:nvPr>
         </p:nvSpPr>
-        <p:spPr/>
+        <p:spPr>
+          <a:ln>
+            <a:noFill/>
+          </a:ln>
+        </p:spPr>
         <p:txBody>
           <a:bodyPr/>
           <a:lstStyle/>
@@ -6546,8 +6660,10 @@
           <a:solidFill>
             <a:srgbClr val="F8F9FA"/>
           </a:solidFill>
-          <a:ln>
-            <a:noFill/>
+          <a:ln w="6350">
+            <a:solidFill>
+              <a:srgbClr val="DCDCDC"/>
+            </a:solidFill>
           </a:ln>
         </p:spPr>
         <p:style>
@@ -6590,8 +6706,10 @@
           <a:solidFill>
             <a:srgbClr val="F8F9FA"/>
           </a:solidFill>
-          <a:ln>
-            <a:noFill/>
+          <a:ln w="6350">
+            <a:solidFill>
+              <a:srgbClr val="DCDCDC"/>
+            </a:solidFill>
           </a:ln>
         </p:spPr>
         <p:style>
@@ -6634,8 +6752,10 @@
           <a:solidFill>
             <a:srgbClr val="F8F9FA"/>
           </a:solidFill>
-          <a:ln>
-            <a:noFill/>
+          <a:ln w="6350">
+            <a:solidFill>
+              <a:srgbClr val="DCDCDC"/>
+            </a:solidFill>
           </a:ln>
         </p:spPr>
         <p:style>
@@ -6678,8 +6798,10 @@
           <a:solidFill>
             <a:srgbClr val="F8F9FA"/>
           </a:solidFill>
-          <a:ln>
-            <a:noFill/>
+          <a:ln w="6350">
+            <a:solidFill>
+              <a:srgbClr val="DCDCDC"/>
+            </a:solidFill>
           </a:ln>
         </p:spPr>
         <p:style>
@@ -6713,13 +6835,16 @@
         </p:nvSpPr>
         <p:spPr>
           <a:xfrm>
-            <a:off x="792784" y="2697480"/>
-            <a:ext cx="4480560" cy="365760"/>
+            <a:off x="744093" y="2623042"/>
+            <a:ext cx="5034960" cy="365760"/>
           </a:xfrm>
           <a:prstGeom prst="rect">
             <a:avLst/>
           </a:prstGeom>
           <a:noFill/>
+          <a:ln>
+            <a:noFill/>
+          </a:ln>
         </p:spPr>
         <p:txBody>
           <a:bodyPr wrap="square">
@@ -6747,13 +6872,16 @@
         </p:nvSpPr>
         <p:spPr>
           <a:xfrm>
-            <a:off x="6462064" y="2697480"/>
-            <a:ext cx="4480560" cy="365760"/>
+            <a:off x="6413190" y="2623042"/>
+            <a:ext cx="5034960" cy="365760"/>
           </a:xfrm>
           <a:prstGeom prst="rect">
             <a:avLst/>
           </a:prstGeom>
           <a:noFill/>
+          <a:ln>
+            <a:noFill/>
+          </a:ln>
         </p:spPr>
         <p:txBody>
           <a:bodyPr wrap="square">
@@ -6781,13 +6909,16 @@
         </p:nvSpPr>
         <p:spPr>
           <a:xfrm>
-            <a:off x="792784" y="4800600"/>
-            <a:ext cx="4480560" cy="365760"/>
+            <a:off x="744093" y="4720968"/>
+            <a:ext cx="5034960" cy="365760"/>
           </a:xfrm>
           <a:prstGeom prst="rect">
             <a:avLst/>
           </a:prstGeom>
           <a:noFill/>
+          <a:ln>
+            <a:noFill/>
+          </a:ln>
         </p:spPr>
         <p:txBody>
           <a:bodyPr wrap="square">
@@ -6815,13 +6946,16 @@
         </p:nvSpPr>
         <p:spPr>
           <a:xfrm>
-            <a:off x="6462064" y="4800600"/>
-            <a:ext cx="4480560" cy="365760"/>
+            <a:off x="6413190" y="4720968"/>
+            <a:ext cx="5034960" cy="365760"/>
           </a:xfrm>
           <a:prstGeom prst="rect">
             <a:avLst/>
           </a:prstGeom>
           <a:noFill/>
+          <a:ln>
+            <a:noFill/>
+          </a:ln>
         </p:spPr>
         <p:txBody>
           <a:bodyPr wrap="square">
@@ -6849,13 +6983,16 @@
         </p:nvSpPr>
         <p:spPr>
           <a:xfrm>
-            <a:off x="792784" y="3108960"/>
-            <a:ext cx="4937760" cy="1097280"/>
+            <a:off x="744093" y="3096802"/>
+            <a:ext cx="5034960" cy="1097280"/>
           </a:xfrm>
           <a:prstGeom prst="rect">
             <a:avLst/>
           </a:prstGeom>
           <a:noFill/>
+          <a:ln>
+            <a:noFill/>
+          </a:ln>
         </p:spPr>
         <p:txBody>
           <a:bodyPr wrap="square">
@@ -6905,13 +7042,16 @@
         </p:nvSpPr>
         <p:spPr>
           <a:xfrm>
-            <a:off x="6462064" y="3108960"/>
-            <a:ext cx="4937760" cy="1097280"/>
+            <a:off x="6413190" y="3096802"/>
+            <a:ext cx="5034960" cy="1097280"/>
           </a:xfrm>
           <a:prstGeom prst="rect">
             <a:avLst/>
           </a:prstGeom>
           <a:noFill/>
+          <a:ln>
+            <a:noFill/>
+          </a:ln>
         </p:spPr>
         <p:txBody>
           <a:bodyPr wrap="square">
@@ -6961,13 +7101,16 @@
         </p:nvSpPr>
         <p:spPr>
           <a:xfrm>
-            <a:off x="792784" y="5212080"/>
-            <a:ext cx="4937760" cy="1097280"/>
+            <a:off x="744093" y="5194728"/>
+            <a:ext cx="5034960" cy="1097280"/>
           </a:xfrm>
           <a:prstGeom prst="rect">
             <a:avLst/>
           </a:prstGeom>
           <a:noFill/>
+          <a:ln>
+            <a:noFill/>
+          </a:ln>
         </p:spPr>
         <p:txBody>
           <a:bodyPr wrap="square">
@@ -7017,13 +7160,16 @@
         </p:nvSpPr>
         <p:spPr>
           <a:xfrm>
-            <a:off x="6462064" y="5212080"/>
-            <a:ext cx="4937760" cy="1097280"/>
+            <a:off x="6413190" y="5194728"/>
+            <a:ext cx="5034960" cy="1097280"/>
           </a:xfrm>
           <a:prstGeom prst="rect">
             <a:avLst/>
           </a:prstGeom>
           <a:noFill/>
+          <a:ln>
+            <a:noFill/>
+          </a:ln>
         </p:spPr>
         <p:txBody>
           <a:bodyPr wrap="square">
@@ -7176,6 +7322,9 @@
             <a:avLst/>
           </a:prstGeom>
           <a:noFill/>
+          <a:ln>
+            <a:noFill/>
+          </a:ln>
         </p:spPr>
         <p:txBody>
           <a:bodyPr wrap="square">
@@ -7211,6 +7360,9 @@
             <a:avLst/>
           </a:prstGeom>
           <a:noFill/>
+          <a:ln>
+            <a:noFill/>
+          </a:ln>
         </p:spPr>
         <p:txBody>
           <a:bodyPr wrap="square">
@@ -7245,6 +7397,9 @@
             <a:avLst/>
           </a:prstGeom>
           <a:noFill/>
+          <a:ln>
+            <a:noFill/>
+          </a:ln>
         </p:spPr>
         <p:txBody>
           <a:bodyPr wrap="square">
@@ -7280,6 +7435,9 @@
             <a:avLst/>
           </a:prstGeom>
           <a:noFill/>
+          <a:ln>
+            <a:noFill/>
+          </a:ln>
         </p:spPr>
         <p:txBody>
           <a:bodyPr wrap="square">
@@ -7335,7 +7493,11 @@
             <p:ph type="body" sz="quarter" idx="10"/>
           </p:nvPr>
         </p:nvSpPr>
-        <p:spPr/>
+        <p:spPr>
+          <a:ln>
+            <a:noFill/>
+          </a:ln>
+        </p:spPr>
         <p:txBody>
           <a:bodyPr/>
           <a:lstStyle/>
@@ -7385,6 +7547,7 @@
           <a:bodyPr rtlCol="0" anchor="ctr"/>
           <a:lstStyle/>
           <a:p>
+            <a:pPr algn="ctr"/>
             <a:r>
               <a:rPr sz="1400">
                 <a:solidFill>
@@ -7437,6 +7600,7 @@
           <a:bodyPr rtlCol="0" anchor="ctr"/>
           <a:lstStyle/>
           <a:p>
+            <a:pPr algn="ctr"/>
             <a:r>
               <a:rPr sz="1400">
                 <a:solidFill>
@@ -7489,6 +7653,7 @@
           <a:bodyPr rtlCol="0" anchor="ctr"/>
           <a:lstStyle/>
           <a:p>
+            <a:pPr algn="ctr"/>
             <a:r>
               <a:rPr sz="1400">
                 <a:solidFill>
@@ -7541,6 +7706,7 @@
           <a:bodyPr rtlCol="0" anchor="ctr"/>
           <a:lstStyle/>
           <a:p>
+            <a:pPr algn="ctr"/>
             <a:r>
               <a:rPr sz="1400">
                 <a:solidFill>
@@ -7569,8 +7735,10 @@
           <a:solidFill>
             <a:srgbClr val="F8F9FA"/>
           </a:solidFill>
-          <a:ln>
-            <a:noFill/>
+          <a:ln w="6350">
+            <a:solidFill>
+              <a:srgbClr val="DCDCDC"/>
+            </a:solidFill>
           </a:ln>
         </p:spPr>
         <p:style>
@@ -7613,8 +7781,10 @@
           <a:solidFill>
             <a:srgbClr val="F8F9FA"/>
           </a:solidFill>
-          <a:ln>
-            <a:noFill/>
+          <a:ln w="6350">
+            <a:solidFill>
+              <a:srgbClr val="DCDCDC"/>
+            </a:solidFill>
           </a:ln>
         </p:spPr>
         <p:style>
@@ -7657,8 +7827,10 @@
           <a:solidFill>
             <a:srgbClr val="F8F9FA"/>
           </a:solidFill>
-          <a:ln>
-            <a:noFill/>
+          <a:ln w="6350">
+            <a:solidFill>
+              <a:srgbClr val="DCDCDC"/>
+            </a:solidFill>
           </a:ln>
         </p:spPr>
         <p:style>
@@ -7701,8 +7873,10 @@
           <a:solidFill>
             <a:srgbClr val="F8F9FA"/>
           </a:solidFill>
-          <a:ln>
-            <a:noFill/>
+          <a:ln w="6350">
+            <a:solidFill>
+              <a:srgbClr val="DCDCDC"/>
+            </a:solidFill>
           </a:ln>
         </p:spPr>
         <p:style>
@@ -7736,13 +7910,16 @@
         </p:nvSpPr>
         <p:spPr>
           <a:xfrm>
-            <a:off x="594360" y="3520440"/>
-            <a:ext cx="2372868" cy="2880360"/>
+            <a:off x="637200" y="3504835"/>
+            <a:ext cx="2286273" cy="2880360"/>
           </a:xfrm>
           <a:prstGeom prst="rect">
             <a:avLst/>
           </a:prstGeom>
           <a:noFill/>
+          <a:ln>
+            <a:noFill/>
+          </a:ln>
         </p:spPr>
         <p:txBody>
           <a:bodyPr wrap="square">
@@ -7792,13 +7969,16 @@
         </p:nvSpPr>
         <p:spPr>
           <a:xfrm>
-            <a:off x="3470148" y="3520440"/>
-            <a:ext cx="2372868" cy="2880360"/>
+            <a:off x="3512988" y="3504835"/>
+            <a:ext cx="2286273" cy="2880360"/>
           </a:xfrm>
           <a:prstGeom prst="rect">
             <a:avLst/>
           </a:prstGeom>
           <a:noFill/>
+          <a:ln>
+            <a:noFill/>
+          </a:ln>
         </p:spPr>
         <p:txBody>
           <a:bodyPr wrap="square">
@@ -7848,13 +8028,16 @@
         </p:nvSpPr>
         <p:spPr>
           <a:xfrm>
-            <a:off x="6345936" y="3520440"/>
-            <a:ext cx="2372868" cy="2880360"/>
+            <a:off x="6388776" y="3504835"/>
+            <a:ext cx="2286273" cy="2880360"/>
           </a:xfrm>
           <a:prstGeom prst="rect">
             <a:avLst/>
           </a:prstGeom>
           <a:noFill/>
+          <a:ln>
+            <a:noFill/>
+          </a:ln>
         </p:spPr>
         <p:txBody>
           <a:bodyPr wrap="square">
@@ -7904,13 +8087,16 @@
         </p:nvSpPr>
         <p:spPr>
           <a:xfrm>
-            <a:off x="9221724" y="3520440"/>
-            <a:ext cx="2372868" cy="2880360"/>
+            <a:off x="9263649" y="3504835"/>
+            <a:ext cx="2286273" cy="2880360"/>
           </a:xfrm>
           <a:prstGeom prst="rect">
             <a:avLst/>
           </a:prstGeom>
           <a:noFill/>
+          <a:ln>
+            <a:noFill/>
+          </a:ln>
         </p:spPr>
         <p:txBody>
           <a:bodyPr wrap="square">
@@ -7967,6 +8153,9 @@
             <a:avLst/>
           </a:prstGeom>
           <a:noFill/>
+          <a:ln>
+            <a:noFill/>
+          </a:ln>
         </p:spPr>
         <p:txBody>
           <a:bodyPr wrap="square">
@@ -8013,6 +8202,9 @@
             <a:avLst/>
           </a:prstGeom>
           <a:noFill/>
+          <a:ln>
+            <a:noFill/>
+          </a:ln>
         </p:spPr>
         <p:txBody>
           <a:bodyPr wrap="square">
@@ -8047,6 +8239,9 @@
             <a:avLst/>
           </a:prstGeom>
           <a:noFill/>
+          <a:ln>
+            <a:noFill/>
+          </a:ln>
         </p:spPr>
         <p:txBody>
           <a:bodyPr wrap="square">
@@ -8082,6 +8277,9 @@
             <a:avLst/>
           </a:prstGeom>
           <a:noFill/>
+          <a:ln>
+            <a:noFill/>
+          </a:ln>
         </p:spPr>
         <p:txBody>
           <a:bodyPr wrap="square">
@@ -8233,7 +8431,11 @@
             <p:ph type="body" sz="quarter" idx="10"/>
           </p:nvPr>
         </p:nvSpPr>
-        <p:spPr/>
+        <p:spPr>
+          <a:ln>
+            <a:noFill/>
+          </a:ln>
+        </p:spPr>
         <p:txBody>
           <a:bodyPr/>
           <a:lstStyle/>
@@ -8281,6 +8483,7 @@
           <a:bodyPr rtlCol="0" anchor="ctr"/>
           <a:lstStyle/>
           <a:p>
+            <a:pPr algn="ctr"/>
             <a:r>
               <a:rPr sz="1300">
                 <a:solidFill>
@@ -8331,6 +8534,7 @@
           <a:bodyPr rtlCol="0" anchor="ctr"/>
           <a:lstStyle/>
           <a:p>
+            <a:pPr algn="ctr"/>
             <a:r>
               <a:rPr sz="1300">
                 <a:solidFill>
@@ -8381,6 +8585,7 @@
           <a:bodyPr rtlCol="0" anchor="ctr"/>
           <a:lstStyle/>
           <a:p>
+            <a:pPr algn="ctr"/>
             <a:r>
               <a:rPr sz="1300">
                 <a:solidFill>
@@ -8431,6 +8636,7 @@
           <a:bodyPr rtlCol="0" anchor="ctr"/>
           <a:lstStyle/>
           <a:p>
+            <a:pPr algn="ctr"/>
             <a:r>
               <a:rPr sz="1300">
                 <a:solidFill>
@@ -8459,8 +8665,10 @@
           <a:solidFill>
             <a:srgbClr val="F8F9FA"/>
           </a:solidFill>
-          <a:ln>
-            <a:noFill/>
+          <a:ln w="6350">
+            <a:solidFill>
+              <a:srgbClr val="DCDCDC"/>
+            </a:solidFill>
           </a:ln>
         </p:spPr>
         <p:style>
@@ -8503,8 +8711,10 @@
           <a:solidFill>
             <a:srgbClr val="F8F9FA"/>
           </a:solidFill>
-          <a:ln>
-            <a:noFill/>
+          <a:ln w="6350">
+            <a:solidFill>
+              <a:srgbClr val="DCDCDC"/>
+            </a:solidFill>
           </a:ln>
         </p:spPr>
         <p:style>
@@ -8547,8 +8757,10 @@
           <a:solidFill>
             <a:srgbClr val="F8F9FA"/>
           </a:solidFill>
-          <a:ln>
-            <a:noFill/>
+          <a:ln w="6350">
+            <a:solidFill>
+              <a:srgbClr val="DCDCDC"/>
+            </a:solidFill>
           </a:ln>
         </p:spPr>
         <p:style>
@@ -8591,8 +8803,10 @@
           <a:solidFill>
             <a:srgbClr val="F8F9FA"/>
           </a:solidFill>
-          <a:ln>
-            <a:noFill/>
+          <a:ln w="6350">
+            <a:solidFill>
+              <a:srgbClr val="DCDCDC"/>
+            </a:solidFill>
           </a:ln>
         </p:spPr>
         <p:style>
@@ -8626,13 +8840,16 @@
         </p:nvSpPr>
         <p:spPr>
           <a:xfrm>
-            <a:off x="594360" y="3337560"/>
-            <a:ext cx="2372868" cy="3063240"/>
+            <a:off x="637200" y="3321955"/>
+            <a:ext cx="2286273" cy="3063240"/>
           </a:xfrm>
           <a:prstGeom prst="rect">
             <a:avLst/>
           </a:prstGeom>
           <a:noFill/>
+          <a:ln>
+            <a:noFill/>
+          </a:ln>
         </p:spPr>
         <p:txBody>
           <a:bodyPr wrap="square">
@@ -8682,13 +8899,16 @@
         </p:nvSpPr>
         <p:spPr>
           <a:xfrm>
-            <a:off x="3470148" y="3337560"/>
-            <a:ext cx="2372868" cy="3063240"/>
+            <a:off x="3512988" y="3321955"/>
+            <a:ext cx="2286273" cy="3063240"/>
           </a:xfrm>
           <a:prstGeom prst="rect">
             <a:avLst/>
           </a:prstGeom>
           <a:noFill/>
+          <a:ln>
+            <a:noFill/>
+          </a:ln>
         </p:spPr>
         <p:txBody>
           <a:bodyPr wrap="square">
@@ -8738,13 +8958,16 @@
         </p:nvSpPr>
         <p:spPr>
           <a:xfrm>
-            <a:off x="6345936" y="3337560"/>
-            <a:ext cx="2372868" cy="3063240"/>
+            <a:off x="6388776" y="3321955"/>
+            <a:ext cx="2286273" cy="3063240"/>
           </a:xfrm>
           <a:prstGeom prst="rect">
             <a:avLst/>
           </a:prstGeom>
           <a:noFill/>
+          <a:ln>
+            <a:noFill/>
+          </a:ln>
         </p:spPr>
         <p:txBody>
           <a:bodyPr wrap="square">
@@ -8794,13 +9017,16 @@
         </p:nvSpPr>
         <p:spPr>
           <a:xfrm>
-            <a:off x="9221724" y="3337560"/>
-            <a:ext cx="2372868" cy="3063240"/>
+            <a:off x="9263649" y="3321955"/>
+            <a:ext cx="2286273" cy="3063240"/>
           </a:xfrm>
           <a:prstGeom prst="rect">
             <a:avLst/>
           </a:prstGeom>
           <a:noFill/>
+          <a:ln>
+            <a:noFill/>
+          </a:ln>
         </p:spPr>
         <p:txBody>
           <a:bodyPr wrap="square">
@@ -8857,6 +9083,9 @@
             <a:avLst/>
           </a:prstGeom>
           <a:noFill/>
+          <a:ln>
+            <a:noFill/>
+          </a:ln>
         </p:spPr>
         <p:txBody>
           <a:bodyPr wrap="square">
@@ -8903,6 +9132,9 @@
             <a:avLst/>
           </a:prstGeom>
           <a:noFill/>
+          <a:ln>
+            <a:noFill/>
+          </a:ln>
         </p:spPr>
         <p:txBody>
           <a:bodyPr wrap="square">
@@ -8937,6 +9169,9 @@
             <a:avLst/>
           </a:prstGeom>
           <a:noFill/>
+          <a:ln>
+            <a:noFill/>
+          </a:ln>
         </p:spPr>
         <p:txBody>
           <a:bodyPr wrap="square">
@@ -8972,6 +9207,9 @@
             <a:avLst/>
           </a:prstGeom>
           <a:noFill/>
+          <a:ln>
+            <a:noFill/>
+          </a:ln>
         </p:spPr>
         <p:txBody>
           <a:bodyPr wrap="square">

--- a/results/pptx/AWS_MSK_Expert_Intro.pptx
+++ b/results/pptx/AWS_MSK_Expert_Intro.pptx
@@ -18,6 +18,10 @@
     <p:sldId id="365" r:id="rId6"/>
     <p:sldId id="366" r:id="rId7"/>
     <p:sldId id="367" r:id="rId8"/>
+    <p:sldId id="369" r:id="rId16"/>
+    <p:sldId id="371" r:id="rId18"/>
+    <p:sldId id="372" r:id="rId17"/>
+    <p:sldId id="373" r:id="rId19"/>
     <p:sldId id="356" r:id="rId9"/>
   </p:sldIdLst>
   <p:sldSz cx="12192000" cy="6858000"/>
@@ -3690,6 +3694,1851 @@
 </p:sld>
 </file>
 
+<file path=ppt/slides/slide10.xml><?xml version="1.0" encoding="utf-8"?>
+<p:sld xmlns:a="http://schemas.openxmlformats.org/drawingml/2006/main" xmlns:p="http://schemas.openxmlformats.org/presentationml/2006/main" xmlns:r="http://schemas.openxmlformats.org/officeDocument/2006/relationships">
+  <p:cSld>
+    <p:spTree>
+      <p:grpSpPr/>
+      <p:nvGrpSpPr>
+        <p:cNvPr id="1" name=""/>
+        <p:cNvGrpSpPr/>
+        <p:nvPr/>
+      </p:nvGrpSpPr>
+      <p:sp>
+        <p:nvSpPr>
+          <p:cNvPr id="2" name="Title 1"/>
+          <p:cNvSpPr>
+            <a:spLocks noGrp="1"/>
+          </p:cNvSpPr>
+          <p:nvPr>
+            <p:ph type="title"/>
+          </p:nvPr>
+        </p:nvSpPr>
+        <p:spPr/>
+        <p:txBody>
+          <a:bodyPr/>
+          <a:lstStyle/>
+          <a:p/>
+        </p:txBody>
+      </p:sp>
+      <p:sp>
+        <p:nvSpPr>
+          <p:cNvPr id="3" name="Content Placeholder 2"/>
+          <p:cNvSpPr>
+            <a:spLocks noGrp="1"/>
+          </p:cNvSpPr>
+          <p:nvPr>
+            <p:ph idx="1"/>
+          </p:nvPr>
+        </p:nvSpPr>
+        <p:spPr/>
+        <p:txBody>
+          <a:bodyPr/>
+          <a:lstStyle/>
+          <a:p/>
+        </p:txBody>
+      </p:sp>
+      <p:sp>
+        <p:nvSpPr>
+          <p:cNvPr id="4" name="Rounded Rectangle 3"/>
+          <p:cNvSpPr/>
+          <p:nvPr/>
+        </p:nvSpPr>
+        <p:spPr>
+          <a:xfrm>
+            <a:off x="457200" y="2560320"/>
+            <a:ext cx="5303520" cy="4023360"/>
+          </a:xfrm>
+          <a:prstGeom prst="roundRect">
+            <a:avLst/>
+          </a:prstGeom>
+          <a:solidFill>
+            <a:srgbClr val="F8F9FA"/>
+          </a:solidFill>
+          <a:ln>
+            <a:solidFill>
+              <a:srgbClr val="F8F9FA"/>
+            </a:solidFill>
+          </a:ln>
+        </p:spPr>
+        <p:style>
+          <a:lnRef idx="1">
+            <a:schemeClr val="accent1"/>
+          </a:lnRef>
+          <a:fillRef idx="3">
+            <a:schemeClr val="accent1"/>
+          </a:fillRef>
+          <a:effectRef idx="2">
+            <a:schemeClr val="accent1"/>
+          </a:effectRef>
+          <a:fontRef idx="minor">
+            <a:schemeClr val="lt1"/>
+          </a:fontRef>
+        </p:style>
+        <p:txBody>
+          <a:bodyPr rtlCol="0" anchor="ctr"/>
+          <a:lstStyle/>
+          <a:p>
+            <a:pPr algn="ctr"/>
+          </a:p>
+        </p:txBody>
+      </p:sp>
+      <p:sp>
+        <p:nvSpPr>
+          <p:cNvPr id="5" name="Rounded Rectangle 4"/>
+          <p:cNvSpPr/>
+          <p:nvPr/>
+        </p:nvSpPr>
+        <p:spPr>
+          <a:xfrm>
+            <a:off x="6431280" y="2560320"/>
+            <a:ext cx="5303520" cy="4023360"/>
+          </a:xfrm>
+          <a:prstGeom prst="roundRect">
+            <a:avLst/>
+          </a:prstGeom>
+          <a:solidFill>
+            <a:srgbClr val="E6F0FF"/>
+          </a:solidFill>
+          <a:ln>
+            <a:solidFill>
+              <a:srgbClr val="E6F0FF"/>
+            </a:solidFill>
+          </a:ln>
+        </p:spPr>
+        <p:style>
+          <a:lnRef idx="1">
+            <a:schemeClr val="accent1"/>
+          </a:lnRef>
+          <a:fillRef idx="3">
+            <a:schemeClr val="accent1"/>
+          </a:fillRef>
+          <a:effectRef idx="2">
+            <a:schemeClr val="accent1"/>
+          </a:effectRef>
+          <a:fontRef idx="minor">
+            <a:schemeClr val="lt1"/>
+          </a:fontRef>
+        </p:style>
+        <p:txBody>
+          <a:bodyPr rtlCol="0" anchor="ctr"/>
+          <a:lstStyle/>
+          <a:p>
+            <a:pPr algn="ctr"/>
+          </a:p>
+        </p:txBody>
+      </p:sp>
+      <p:sp>
+        <p:nvSpPr>
+          <p:cNvPr id="6" name="Right Arrow 5"/>
+          <p:cNvSpPr/>
+          <p:nvPr/>
+        </p:nvSpPr>
+        <p:spPr>
+          <a:xfrm>
+            <a:off x="5944440" y="4480680"/>
+            <a:ext cx="411480" cy="274320"/>
+          </a:xfrm>
+          <a:prstGeom prst="rightArrow">
+            <a:avLst/>
+          </a:prstGeom>
+          <a:solidFill>
+            <a:srgbClr val="0043DA"/>
+          </a:solidFill>
+          <a:ln>
+            <a:solidFill>
+              <a:srgbClr val="0043DA"/>
+            </a:solidFill>
+          </a:ln>
+        </p:spPr>
+        <p:style>
+          <a:lnRef idx="1">
+            <a:schemeClr val="accent1"/>
+          </a:lnRef>
+          <a:fillRef idx="3">
+            <a:schemeClr val="accent1"/>
+          </a:fillRef>
+          <a:effectRef idx="2">
+            <a:schemeClr val="accent1"/>
+          </a:effectRef>
+          <a:fontRef idx="minor">
+            <a:schemeClr val="lt1"/>
+          </a:fontRef>
+        </p:style>
+        <p:txBody>
+          <a:bodyPr rtlCol="0" anchor="ctr"/>
+          <a:lstStyle/>
+          <a:p>
+            <a:pPr algn="ctr"/>
+          </a:p>
+        </p:txBody>
+      </p:sp>
+      <p:sp>
+        <p:nvSpPr>
+          <p:cNvPr id="7" name="Rounded Rectangle 6"/>
+          <p:cNvSpPr/>
+          <p:nvPr/>
+        </p:nvSpPr>
+        <p:spPr>
+          <a:xfrm>
+            <a:off x="637160" y="2651760"/>
+            <a:ext cx="1371600" cy="274320"/>
+          </a:xfrm>
+          <a:prstGeom prst="roundRect">
+            <a:avLst/>
+          </a:prstGeom>
+          <a:solidFill>
+            <a:srgbClr val="212121"/>
+          </a:solidFill>
+          <a:ln>
+            <a:solidFill>
+              <a:srgbClr val="212121"/>
+            </a:solidFill>
+          </a:ln>
+        </p:spPr>
+        <p:style>
+          <a:lnRef idx="1">
+            <a:schemeClr val="accent1"/>
+          </a:lnRef>
+          <a:fillRef idx="3">
+            <a:schemeClr val="accent1"/>
+          </a:fillRef>
+          <a:effectRef idx="2">
+            <a:schemeClr val="accent1"/>
+          </a:effectRef>
+          <a:fontRef idx="minor">
+            <a:schemeClr val="lt1"/>
+          </a:fontRef>
+        </p:style>
+        <p:txBody>
+          <a:bodyPr rtlCol="0" anchor="ctr"/>
+          <a:lstStyle/>
+          <a:p>
+            <a:pPr algn="ctr"/>
+          </a:p>
+        </p:txBody>
+      </p:sp>
+      <p:sp>
+        <p:nvSpPr>
+          <p:cNvPr id="8" name="Rounded Rectangle 7"/>
+          <p:cNvSpPr/>
+          <p:nvPr/>
+        </p:nvSpPr>
+        <p:spPr>
+          <a:xfrm>
+            <a:off x="6611040" y="2651760"/>
+            <a:ext cx="1371600" cy="274320"/>
+          </a:xfrm>
+          <a:prstGeom prst="roundRect">
+            <a:avLst/>
+          </a:prstGeom>
+          <a:solidFill>
+            <a:srgbClr val="0043DA"/>
+          </a:solidFill>
+          <a:ln>
+            <a:solidFill>
+              <a:srgbClr val="0043DA"/>
+            </a:solidFill>
+          </a:ln>
+        </p:spPr>
+        <p:style>
+          <a:lnRef idx="1">
+            <a:schemeClr val="accent1"/>
+          </a:lnRef>
+          <a:fillRef idx="3">
+            <a:schemeClr val="accent1"/>
+          </a:fillRef>
+          <a:effectRef idx="2">
+            <a:schemeClr val="accent1"/>
+          </a:effectRef>
+          <a:fontRef idx="minor">
+            <a:schemeClr val="lt1"/>
+          </a:fontRef>
+        </p:style>
+        <p:txBody>
+          <a:bodyPr rtlCol="0" anchor="ctr"/>
+          <a:lstStyle/>
+          <a:p>
+            <a:pPr algn="ctr"/>
+          </a:p>
+        </p:txBody>
+      </p:sp>
+      <p:sp>
+        <p:nvSpPr>
+          <p:cNvPr id="9" name="TextBox 8"/>
+          <p:cNvSpPr txBox="1"/>
+          <p:nvPr/>
+        </p:nvSpPr>
+        <p:spPr>
+          <a:xfrm>
+            <a:off x="354806" y="557906"/>
+            <a:ext cx="2719850" cy="932614"/>
+          </a:xfrm>
+          <a:prstGeom prst="rect">
+            <a:avLst/>
+          </a:prstGeom>
+          <a:noFill/>
+        </p:spPr>
+        <p:txBody>
+          <a:bodyPr wrap="square">
+            <a:spAutoFit/>
+          </a:bodyPr>
+          <a:lstStyle/>
+          <a:p>
+            <a:r>
+              <a:rPr sz="2000" b="1">
+                <a:solidFill>
+                  <a:srgbClr val="212121"/>
+                </a:solidFill>
+                <a:latin typeface="Freesentation"/>
+              </a:rPr>
+              <a:t>1-1. As-Is / To-Be</a:t>
+            </a:r>
+          </a:p>
+        </p:txBody>
+      </p:sp>
+      <p:sp>
+        <p:nvSpPr>
+          <p:cNvPr id="10" name="TextBox 9"/>
+          <p:cNvSpPr txBox="1"/>
+          <p:nvPr/>
+        </p:nvSpPr>
+        <p:spPr>
+          <a:xfrm>
+            <a:off x="3763700" y="558800"/>
+            <a:ext cx="7551483" cy="937918"/>
+          </a:xfrm>
+          <a:prstGeom prst="rect">
+            <a:avLst/>
+          </a:prstGeom>
+          <a:noFill/>
+        </p:spPr>
+        <p:txBody>
+          <a:bodyPr wrap="square">
+            <a:spAutoFit/>
+          </a:bodyPr>
+          <a:lstStyle/>
+          <a:p>
+            <a:r>
+              <a:rPr sz="1200" b="0">
+                <a:solidFill>
+                  <a:srgbClr val="212121"/>
+                </a:solidFill>
+                <a:latin typeface="Freesentation"/>
+              </a:rPr>
+              <a:t>온프레미스 Kafka에서 AWS MSK로의 전환 근거를 현황과 개선안으로 대비</a:t>
+            </a:r>
+          </a:p>
+        </p:txBody>
+      </p:sp>
+      <p:sp>
+        <p:nvSpPr>
+          <p:cNvPr id="11" name="TextBox 10"/>
+          <p:cNvSpPr txBox="1"/>
+          <p:nvPr/>
+        </p:nvSpPr>
+        <p:spPr>
+          <a:xfrm>
+            <a:off x="457200" y="1600200"/>
+            <a:ext cx="11277600" cy="320040"/>
+          </a:xfrm>
+          <a:prstGeom prst="rect">
+            <a:avLst/>
+          </a:prstGeom>
+          <a:noFill/>
+        </p:spPr>
+        <p:txBody>
+          <a:bodyPr wrap="square">
+            <a:spAutoFit/>
+          </a:bodyPr>
+          <a:lstStyle/>
+          <a:p>
+            <a:r>
+              <a:rPr sz="1600" b="1">
+                <a:solidFill>
+                  <a:srgbClr val="0043DA"/>
+                </a:solidFill>
+                <a:latin typeface="Freesentation"/>
+              </a:rPr>
+              <a:t>온프레미스 Kafka의 운영 한계와 MSK 전환 효과</a:t>
+            </a:r>
+          </a:p>
+        </p:txBody>
+      </p:sp>
+      <p:sp>
+        <p:nvSpPr>
+          <p:cNvPr id="12" name="TextBox 11"/>
+          <p:cNvSpPr txBox="1"/>
+          <p:nvPr/>
+        </p:nvSpPr>
+        <p:spPr>
+          <a:xfrm>
+            <a:off x="457200" y="1965960"/>
+            <a:ext cx="11277600" cy="274320"/>
+          </a:xfrm>
+          <a:prstGeom prst="rect">
+            <a:avLst/>
+          </a:prstGeom>
+          <a:noFill/>
+        </p:spPr>
+        <p:txBody>
+          <a:bodyPr wrap="square">
+            <a:spAutoFit/>
+          </a:bodyPr>
+          <a:lstStyle/>
+          <a:p>
+            <a:r>
+              <a:rPr sz="1300" b="0">
+                <a:solidFill>
+                  <a:srgbClr val="212121"/>
+                </a:solidFill>
+                <a:latin typeface="Freesentation"/>
+              </a:rPr>
+              <a:t>관리 복잡도·확장성·비용 3가지 핵심 문제를 AWS MSK 완전 관리형으로 해소</a:t>
+            </a:r>
+          </a:p>
+        </p:txBody>
+      </p:sp>
+      <p:sp>
+        <p:nvSpPr>
+          <p:cNvPr id="13" name="TextBox 12"/>
+          <p:cNvSpPr txBox="1"/>
+          <p:nvPr/>
+        </p:nvSpPr>
+        <p:spPr>
+          <a:xfrm>
+            <a:off x="637160" y="2651760"/>
+            <a:ext cx="1371600" cy="274320"/>
+          </a:xfrm>
+          <a:prstGeom prst="rect">
+            <a:avLst/>
+          </a:prstGeom>
+          <a:noFill/>
+        </p:spPr>
+        <p:txBody>
+          <a:bodyPr wrap="square">
+            <a:spAutoFit/>
+          </a:bodyPr>
+          <a:lstStyle/>
+          <a:p>
+            <a:pPr algn="ctr"/>
+            <a:r>
+              <a:rPr sz="1100" b="1">
+                <a:solidFill>
+                  <a:srgbClr val="FFFFFF"/>
+                </a:solidFill>
+                <a:latin typeface="Freesentation"/>
+              </a:rPr>
+              <a:t>⚠ As-Is</a:t>
+            </a:r>
+          </a:p>
+        </p:txBody>
+      </p:sp>
+      <p:sp>
+        <p:nvSpPr>
+          <p:cNvPr id="14" name="TextBox 13"/>
+          <p:cNvSpPr txBox="1"/>
+          <p:nvPr/>
+        </p:nvSpPr>
+        <p:spPr>
+          <a:xfrm>
+            <a:off x="6611040" y="2651760"/>
+            <a:ext cx="1371600" cy="274320"/>
+          </a:xfrm>
+          <a:prstGeom prst="rect">
+            <a:avLst/>
+          </a:prstGeom>
+          <a:noFill/>
+        </p:spPr>
+        <p:txBody>
+          <a:bodyPr wrap="square">
+            <a:spAutoFit/>
+          </a:bodyPr>
+          <a:lstStyle/>
+          <a:p>
+            <a:pPr algn="ctr"/>
+            <a:r>
+              <a:rPr sz="1100" b="1">
+                <a:solidFill>
+                  <a:srgbClr val="FFFFFF"/>
+                </a:solidFill>
+                <a:latin typeface="Freesentation"/>
+              </a:rPr>
+              <a:t>✓ To-Be</a:t>
+            </a:r>
+          </a:p>
+        </p:txBody>
+      </p:sp>
+      <p:sp>
+        <p:nvSpPr>
+          <p:cNvPr id="15" name="TextBox 14"/>
+          <p:cNvSpPr txBox="1"/>
+          <p:nvPr/>
+        </p:nvSpPr>
+        <p:spPr>
+          <a:xfrm>
+            <a:off x="637160" y="3017520"/>
+            <a:ext cx="4941840" cy="365760"/>
+          </a:xfrm>
+          <a:prstGeom prst="rect">
+            <a:avLst/>
+          </a:prstGeom>
+          <a:noFill/>
+        </p:spPr>
+        <p:txBody>
+          <a:bodyPr wrap="square">
+            <a:spAutoFit/>
+          </a:bodyPr>
+          <a:lstStyle/>
+          <a:p>
+            <a:r>
+              <a:rPr sz="1400" b="1">
+                <a:solidFill>
+                  <a:srgbClr val="212121"/>
+                </a:solidFill>
+                <a:latin typeface="Freesentation"/>
+              </a:rPr>
+              <a:t>온프레미스 Kafka 한계</a:t>
+            </a:r>
+          </a:p>
+        </p:txBody>
+      </p:sp>
+      <p:sp>
+        <p:nvSpPr>
+          <p:cNvPr id="16" name="TextBox 15"/>
+          <p:cNvSpPr txBox="1"/>
+          <p:nvPr/>
+        </p:nvSpPr>
+        <p:spPr>
+          <a:xfrm>
+            <a:off x="6611040" y="3017520"/>
+            <a:ext cx="4941840" cy="365760"/>
+          </a:xfrm>
+          <a:prstGeom prst="rect">
+            <a:avLst/>
+          </a:prstGeom>
+          <a:noFill/>
+        </p:spPr>
+        <p:txBody>
+          <a:bodyPr wrap="square">
+            <a:spAutoFit/>
+          </a:bodyPr>
+          <a:lstStyle/>
+          <a:p>
+            <a:r>
+              <a:rPr sz="1400" b="1">
+                <a:solidFill>
+                  <a:srgbClr val="0043DA"/>
+                </a:solidFill>
+                <a:latin typeface="Freesentation"/>
+              </a:rPr>
+              <a:t>AWS MSK 도입 효과</a:t>
+            </a:r>
+          </a:p>
+        </p:txBody>
+      </p:sp>
+      <p:sp>
+        <p:nvSpPr>
+          <p:cNvPr id="17" name="TextBox 16"/>
+          <p:cNvSpPr txBox="1"/>
+          <p:nvPr/>
+        </p:nvSpPr>
+        <p:spPr>
+          <a:xfrm>
+            <a:off x="637160" y="3474720"/>
+            <a:ext cx="4484640" cy="2926560"/>
+          </a:xfrm>
+          <a:prstGeom prst="rect">
+            <a:avLst/>
+          </a:prstGeom>
+          <a:noFill/>
+        </p:spPr>
+        <p:txBody>
+          <a:bodyPr wrap="square">
+            <a:spAutoFit/>
+          </a:bodyPr>
+          <a:lstStyle/>
+          <a:p>
+            <a:r>
+              <a:rPr sz="1300" b="0">
+                <a:solidFill>
+                  <a:srgbClr val="212121"/>
+                </a:solidFill>
+                <a:latin typeface="Freesentation"/>
+              </a:rPr>
+              <a:t>• 브로커 패치·업그레이드 전담 인력 2~3명 상시 필요</a:t>
+            </a:r>
+          </a:p>
+          <a:p>
+            <a:r>
+              <a:rPr sz="1300" b="0">
+                <a:solidFill>
+                  <a:srgbClr val="212121"/>
+                </a:solidFill>
+                <a:latin typeface="Freesentation"/>
+              </a:rPr>
+              <a:t>• 피크 트래픽 대비 서버 과잉 프로비저닝 — 비용 비효율</a:t>
+            </a:r>
+          </a:p>
+          <a:p>
+            <a:r>
+              <a:rPr sz="1300" b="0">
+                <a:solidFill>
+                  <a:srgbClr val="212121"/>
+                </a:solidFill>
+                <a:latin typeface="Freesentation"/>
+              </a:rPr>
+              <a:t>• ZooKeeper 의존성으로 운영 복잡도 가중</a:t>
+            </a:r>
+          </a:p>
+          <a:p>
+            <a:r>
+              <a:rPr sz="1300" b="0">
+                <a:solidFill>
+                  <a:srgbClr val="212121"/>
+                </a:solidFill>
+                <a:latin typeface="Freesentation"/>
+              </a:rPr>
+              <a:t>• 장애 복구 수동 처리 — MTTR 평균 4시간 이상</a:t>
+            </a:r>
+          </a:p>
+        </p:txBody>
+      </p:sp>
+      <p:sp>
+        <p:nvSpPr>
+          <p:cNvPr id="18" name="TextBox 17"/>
+          <p:cNvSpPr txBox="1"/>
+          <p:nvPr/>
+        </p:nvSpPr>
+        <p:spPr>
+          <a:xfrm>
+            <a:off x="6611040" y="3474720"/>
+            <a:ext cx="4484640" cy="2926560"/>
+          </a:xfrm>
+          <a:prstGeom prst="rect">
+            <a:avLst/>
+          </a:prstGeom>
+          <a:noFill/>
+        </p:spPr>
+        <p:txBody>
+          <a:bodyPr wrap="square">
+            <a:spAutoFit/>
+          </a:bodyPr>
+          <a:lstStyle/>
+          <a:p>
+            <a:r>
+              <a:rPr sz="1300" b="0">
+                <a:solidFill>
+                  <a:srgbClr val="212121"/>
+                </a:solidFill>
+                <a:latin typeface="Freesentation"/>
+              </a:rPr>
+              <a:t>• AWS 완전 관리형 — 패치·모니터링 자동화</a:t>
+            </a:r>
+          </a:p>
+          <a:p>
+            <a:r>
+              <a:rPr sz="1300" b="0">
+                <a:solidFill>
+                  <a:srgbClr val="212121"/>
+                </a:solidFill>
+                <a:latin typeface="Freesentation"/>
+              </a:rPr>
+              <a:t>• Serverless 옵션으로 수분 내 자동 스케일</a:t>
+            </a:r>
+          </a:p>
+          <a:p>
+            <a:r>
+              <a:rPr sz="1300" b="0">
+                <a:solidFill>
+                  <a:srgbClr val="212121"/>
+                </a:solidFill>
+                <a:latin typeface="Freesentation"/>
+              </a:rPr>
+              <a:t>• KRaft 모드 지원 — ZooKeeper 의존성 제거</a:t>
+            </a:r>
+          </a:p>
+          <a:p>
+            <a:r>
+              <a:rPr sz="1300" b="0">
+                <a:solidFill>
+                  <a:srgbClr val="212121"/>
+                </a:solidFill>
+                <a:latin typeface="Freesentation"/>
+              </a:rPr>
+              <a:t>• Multi-AZ 자동 복구 — MTTR 99% 단축</a:t>
+            </a:r>
+          </a:p>
+        </p:txBody>
+      </p:sp>
+      <p:pic>
+        <p:nvPicPr>
+          <p:cNvPr id="19" name="Picture 18" descr="warning.png"/>
+          <p:cNvPicPr>
+            <a:picLocks noChangeAspect="1"/>
+          </p:cNvPicPr>
+          <p:nvPr/>
+        </p:nvPicPr>
+        <p:blipFill>
+          <a:blip r:embed="rId2"/>
+          <a:stretch>
+            <a:fillRect/>
+          </a:stretch>
+        </p:blipFill>
+        <p:spPr>
+          <a:xfrm>
+            <a:off x="5166720" y="6172200"/>
+            <a:ext cx="411480" cy="411480"/>
+          </a:xfrm>
+          <a:prstGeom prst="rect">
+            <a:avLst/>
+          </a:prstGeom>
+        </p:spPr>
+      </p:pic>
+      <p:pic>
+        <p:nvPicPr>
+          <p:cNvPr id="20" name="Picture 19" descr="deploy.png"/>
+          <p:cNvPicPr>
+            <a:picLocks noChangeAspect="1"/>
+          </p:cNvPicPr>
+          <p:nvPr/>
+        </p:nvPicPr>
+        <p:blipFill>
+          <a:blip r:embed="rId3"/>
+          <a:stretch>
+            <a:fillRect/>
+          </a:stretch>
+        </p:blipFill>
+        <p:spPr>
+          <a:xfrm>
+            <a:off x="11140800" y="6172200"/>
+            <a:ext cx="411480" cy="411480"/>
+          </a:xfrm>
+          <a:prstGeom prst="rect">
+            <a:avLst/>
+          </a:prstGeom>
+        </p:spPr>
+      </p:pic>
+    </p:spTree>
+  </p:cSld>
+  <p:clrMapOvr>
+    <a:masterClrMapping/>
+  </p:clrMapOvr>
+</p:sld>
+</file>
+
+<file path=ppt/slides/slide11.xml><?xml version="1.0" encoding="utf-8"?>
+<p:sld xmlns:a="http://schemas.openxmlformats.org/drawingml/2006/main" xmlns:p="http://schemas.openxmlformats.org/presentationml/2006/main" xmlns:r="http://schemas.openxmlformats.org/officeDocument/2006/relationships">
+  <p:cSld>
+    <p:spTree>
+      <p:grpSpPr/>
+      <p:nvGrpSpPr>
+        <p:cNvPr id="1" name=""/>
+        <p:cNvGrpSpPr/>
+        <p:nvPr/>
+      </p:nvGrpSpPr>
+      <p:sp>
+        <p:nvSpPr>
+          <p:cNvPr id="2" name="Text Placeholder 1"/>
+          <p:cNvSpPr>
+            <a:spLocks noGrp="1"/>
+          </p:cNvSpPr>
+          <p:nvPr>
+            <p:ph type="body" idx="10" sz="quarter"/>
+          </p:nvPr>
+        </p:nvSpPr>
+        <p:spPr/>
+        <p:txBody>
+          <a:bodyPr/>
+          <a:lstStyle/>
+          <a:p>
+            <a:r>
+              <a:rPr lang="ko-KR" altLang="en-US" dirty="0" b="1"/>
+              <a:t>1-2. 비용 비교</a:t>
+            </a:r>
+          </a:p>
+        </p:txBody>
+      </p:sp>
+      <p:sp>
+        <p:nvSpPr>
+          <p:cNvPr id="3" name="TextBox 2"/>
+          <p:cNvSpPr txBox="1"/>
+          <p:nvPr/>
+        </p:nvSpPr>
+        <p:spPr>
+          <a:xfrm>
+            <a:off x="435254" y="1524304"/>
+            <a:ext cx="10742371" cy="304495"/>
+          </a:xfrm>
+          <a:prstGeom prst="rect">
+            <a:avLst/>
+          </a:prstGeom>
+          <a:noFill/>
+        </p:spPr>
+        <p:txBody>
+          <a:bodyPr wrap="square">
+            <a:spAutoFit/>
+          </a:bodyPr>
+          <a:lstStyle/>
+          <a:p>
+            <a:pPr algn="l"/>
+            <a:r>
+              <a:rPr sz="1600" b="1">
+                <a:solidFill>
+                  <a:srgbClr val="0043DA"/>
+                </a:solidFill>
+                <a:latin typeface="Freesentation"/>
+              </a:rPr>
+              <a:t>On-Premises Kafka vs AWS MSK — TCO 직접 비교</a:t>
+            </a:r>
+          </a:p>
+        </p:txBody>
+      </p:sp>
+      <p:sp>
+        <p:nvSpPr>
+          <p:cNvPr id="4" name="TextBox 3"/>
+          <p:cNvSpPr txBox="1"/>
+          <p:nvPr/>
+        </p:nvSpPr>
+        <p:spPr>
+          <a:xfrm>
+            <a:off x="435254" y="1872691"/>
+            <a:ext cx="10742371" cy="261518"/>
+          </a:xfrm>
+          <a:prstGeom prst="rect">
+            <a:avLst/>
+          </a:prstGeom>
+          <a:noFill/>
+        </p:spPr>
+        <p:txBody>
+          <a:bodyPr wrap="square">
+            <a:spAutoFit/>
+          </a:bodyPr>
+          <a:lstStyle/>
+          <a:p>
+            <a:pPr algn="l"/>
+            <a:r>
+              <a:rPr sz="1300" b="0">
+                <a:solidFill>
+                  <a:srgbClr val="212121"/>
+                </a:solidFill>
+                <a:latin typeface="Freesentation"/>
+              </a:rPr>
+              <a:t>비용·관리·가용성·확장성 4개 항목 기준 직접 비교 (2026년 4월 기준)</a:t>
+            </a:r>
+          </a:p>
+        </p:txBody>
+      </p:sp>
+      <p:sp>
+        <p:nvSpPr>
+          <p:cNvPr id="5" name="Rounded Rectangle 4"/>
+          <p:cNvSpPr/>
+          <p:nvPr/>
+        </p:nvSpPr>
+        <p:spPr>
+          <a:xfrm>
+            <a:off x="457200" y="2560320"/>
+            <a:ext cx="5577840" cy="4023360"/>
+          </a:xfrm>
+          <a:prstGeom prst="roundRect">
+            <a:avLst/>
+          </a:prstGeom>
+          <a:solidFill>
+            <a:srgbClr val="F8F9FA"/>
+          </a:solidFill>
+          <a:ln w="9525">
+            <a:solidFill>
+              <a:srgbClr val="DCDCDC"/>
+            </a:solidFill>
+          </a:ln>
+        </p:spPr>
+        <p:style>
+          <a:lnRef idx="1">
+            <a:schemeClr val="accent1"/>
+          </a:lnRef>
+          <a:fillRef idx="3">
+            <a:schemeClr val="accent1"/>
+          </a:fillRef>
+          <a:effectRef idx="2">
+            <a:schemeClr val="accent1"/>
+          </a:effectRef>
+          <a:fontRef idx="minor">
+            <a:schemeClr val="lt1"/>
+          </a:fontRef>
+        </p:style>
+        <p:txBody>
+          <a:bodyPr rtlCol="0" anchor="ctr"/>
+          <a:lstStyle/>
+          <a:p>
+            <a:pPr algn="ctr"/>
+          </a:p>
+        </p:txBody>
+      </p:sp>
+      <p:sp>
+        <p:nvSpPr>
+          <p:cNvPr id="6" name="Rounded Rectangle 5"/>
+          <p:cNvSpPr/>
+          <p:nvPr/>
+        </p:nvSpPr>
+        <p:spPr>
+          <a:xfrm>
+            <a:off x="6156960" y="2560320"/>
+            <a:ext cx="5577840" cy="4023360"/>
+          </a:xfrm>
+          <a:prstGeom prst="roundRect">
+            <a:avLst/>
+          </a:prstGeom>
+          <a:solidFill>
+            <a:srgbClr val="E6F0FF"/>
+          </a:solidFill>
+          <a:ln w="9525">
+            <a:solidFill>
+              <a:srgbClr val="DCDCDC"/>
+            </a:solidFill>
+          </a:ln>
+        </p:spPr>
+        <p:style>
+          <a:lnRef idx="1">
+            <a:schemeClr val="accent1"/>
+          </a:lnRef>
+          <a:fillRef idx="3">
+            <a:schemeClr val="accent1"/>
+          </a:fillRef>
+          <a:effectRef idx="2">
+            <a:schemeClr val="accent1"/>
+          </a:effectRef>
+          <a:fontRef idx="minor">
+            <a:schemeClr val="lt1"/>
+          </a:fontRef>
+        </p:style>
+        <p:txBody>
+          <a:bodyPr rtlCol="0" anchor="ctr"/>
+          <a:lstStyle/>
+          <a:p>
+            <a:pPr algn="ctr"/>
+          </a:p>
+        </p:txBody>
+      </p:sp>
+      <p:sp>
+        <p:nvSpPr>
+          <p:cNvPr id="7" name="Rectangle 6"/>
+          <p:cNvSpPr/>
+          <p:nvPr/>
+        </p:nvSpPr>
+        <p:spPr>
+          <a:xfrm>
+            <a:off x="5917680" y="2651760"/>
+            <a:ext cx="9144" cy="3840480"/>
+          </a:xfrm>
+          <a:prstGeom prst="rect">
+            <a:avLst/>
+          </a:prstGeom>
+          <a:solidFill>
+            <a:srgbClr val="DCDCDC"/>
+          </a:solidFill>
+          <a:ln>
+            <a:solidFill>
+              <a:srgbClr val="DCDCDC"/>
+            </a:solidFill>
+          </a:ln>
+        </p:spPr>
+        <p:style>
+          <a:lnRef idx="1">
+            <a:schemeClr val="accent1"/>
+          </a:lnRef>
+          <a:fillRef idx="3">
+            <a:schemeClr val="accent1"/>
+          </a:fillRef>
+          <a:effectRef idx="2">
+            <a:schemeClr val="accent1"/>
+          </a:effectRef>
+          <a:fontRef idx="minor">
+            <a:schemeClr val="lt1"/>
+          </a:fontRef>
+        </p:style>
+        <p:txBody>
+          <a:bodyPr rtlCol="0" anchor="ctr"/>
+          <a:lstStyle/>
+          <a:p>
+            <a:pPr algn="ctr"/>
+          </a:p>
+        </p:txBody>
+      </p:sp>
+      <p:sp>
+        <p:nvSpPr>
+          <p:cNvPr id="8" name="Rounded Rectangle 7"/>
+          <p:cNvSpPr/>
+          <p:nvPr/>
+        </p:nvSpPr>
+        <p:spPr>
+          <a:xfrm>
+            <a:off x="637160" y="2651760"/>
+            <a:ext cx="1554480" cy="274320"/>
+          </a:xfrm>
+          <a:prstGeom prst="roundRect">
+            <a:avLst/>
+          </a:prstGeom>
+          <a:solidFill>
+            <a:srgbClr val="F8F9FA"/>
+          </a:solidFill>
+          <a:ln w="9525">
+            <a:solidFill>
+              <a:srgbClr val="DCDCDC"/>
+            </a:solidFill>
+          </a:ln>
+        </p:spPr>
+        <p:style>
+          <a:lnRef idx="1">
+            <a:schemeClr val="accent1"/>
+          </a:lnRef>
+          <a:fillRef idx="3">
+            <a:schemeClr val="accent1"/>
+          </a:fillRef>
+          <a:effectRef idx="2">
+            <a:schemeClr val="accent1"/>
+          </a:effectRef>
+          <a:fontRef idx="minor">
+            <a:schemeClr val="lt1"/>
+          </a:fontRef>
+        </p:style>
+        <p:txBody>
+          <a:bodyPr rtlCol="0" anchor="ctr"/>
+          <a:lstStyle/>
+          <a:p>
+            <a:r>
+              <a:rPr sz="1300">
+                <a:solidFill>
+                  <a:srgbClr val="212121"/>
+                </a:solidFill>
+              </a:rPr>
+              <a:t>On-Premises</a:t>
+            </a:r>
+          </a:p>
+        </p:txBody>
+      </p:sp>
+      <p:sp>
+        <p:nvSpPr>
+          <p:cNvPr id="9" name="Rounded Rectangle 8"/>
+          <p:cNvSpPr/>
+          <p:nvPr/>
+        </p:nvSpPr>
+        <p:spPr>
+          <a:xfrm>
+            <a:off x="6337720" y="2651760"/>
+            <a:ext cx="1554480" cy="274320"/>
+          </a:xfrm>
+          <a:prstGeom prst="roundRect">
+            <a:avLst/>
+          </a:prstGeom>
+          <a:solidFill>
+            <a:srgbClr val="0043DA"/>
+          </a:solidFill>
+          <a:ln>
+            <a:solidFill>
+              <a:srgbClr val="0043DA"/>
+            </a:solidFill>
+          </a:ln>
+        </p:spPr>
+        <p:style>
+          <a:lnRef idx="1">
+            <a:schemeClr val="accent1"/>
+          </a:lnRef>
+          <a:fillRef idx="3">
+            <a:schemeClr val="accent1"/>
+          </a:fillRef>
+          <a:effectRef idx="2">
+            <a:schemeClr val="accent1"/>
+          </a:effectRef>
+          <a:fontRef idx="minor">
+            <a:schemeClr val="lt1"/>
+          </a:fontRef>
+        </p:style>
+        <p:txBody>
+          <a:bodyPr rtlCol="0" anchor="ctr"/>
+          <a:lstStyle/>
+          <a:p>
+            <a:r>
+              <a:rPr sz="1300">
+                <a:solidFill>
+                  <a:srgbClr val="FFFFFF"/>
+                </a:solidFill>
+              </a:rPr>
+              <a:t>✓ AWS MSK</a:t>
+            </a:r>
+          </a:p>
+        </p:txBody>
+      </p:sp>
+      <p:sp>
+        <p:nvSpPr>
+          <p:cNvPr id="10" name="TextBox 9"/>
+          <p:cNvSpPr txBox="1"/>
+          <p:nvPr/>
+        </p:nvSpPr>
+        <p:spPr>
+          <a:xfrm>
+            <a:off x="607161" y="2873959"/>
+            <a:ext cx="4967020" cy="3136392"/>
+          </a:xfrm>
+          <a:prstGeom prst="rect">
+            <a:avLst/>
+          </a:prstGeom>
+          <a:noFill/>
+        </p:spPr>
+        <p:txBody>
+          <a:bodyPr wrap="square">
+            <a:spAutoFit/>
+          </a:bodyPr>
+          <a:lstStyle/>
+          <a:p>
+            <a:pPr algn="l"/>
+            <a:r>
+              <a:rPr sz="1100" b="0">
+                <a:solidFill>
+                  <a:srgbClr val="505050"/>
+                </a:solidFill>
+                <a:latin typeface="Freesentation"/>
+              </a:rPr>
+              <a:t>초기 비용</a:t>
+            </a:r>
+            <a:defRPr sz="1100" b="0"/>
+          </a:p>
+          <a:p>
+            <a:pPr algn="l"/>
+            <a:r>
+              <a:rPr sz="1400" b="1">
+                <a:solidFill>
+                  <a:srgbClr val="212121"/>
+                </a:solidFill>
+                <a:latin typeface="Freesentation"/>
+              </a:rPr>
+              <a:t>서버 구매 ₩5억+</a:t>
+            </a:r>
+            <a:defRPr sz="1400" b="1"/>
+          </a:p>
+          <a:p>
+            <a:pPr algn="l"/>
+          </a:p>
+          <a:p>
+            <a:pPr algn="l"/>
+            <a:r>
+              <a:rPr sz="1100" b="0">
+                <a:solidFill>
+                  <a:srgbClr val="505050"/>
+                </a:solidFill>
+                <a:latin typeface="Freesentation"/>
+              </a:rPr>
+              <a:t>운영 관리</a:t>
+            </a:r>
+            <a:defRPr sz="1100" b="0"/>
+          </a:p>
+          <a:p>
+            <a:pPr algn="l"/>
+            <a:r>
+              <a:rPr sz="1400" b="1">
+                <a:solidFill>
+                  <a:srgbClr val="212121"/>
+                </a:solidFill>
+                <a:latin typeface="Freesentation"/>
+              </a:rPr>
+              <a:t>전담 인력 2~3명 필요</a:t>
+            </a:r>
+            <a:defRPr sz="1400" b="1"/>
+          </a:p>
+          <a:p>
+            <a:pPr algn="l"/>
+          </a:p>
+          <a:p>
+            <a:pPr algn="l"/>
+            <a:r>
+              <a:rPr sz="1100" b="0">
+                <a:solidFill>
+                  <a:srgbClr val="505050"/>
+                </a:solidFill>
+                <a:latin typeface="Freesentation"/>
+              </a:rPr>
+              <a:t>가용성</a:t>
+            </a:r>
+            <a:defRPr sz="1100" b="0"/>
+          </a:p>
+          <a:p>
+            <a:pPr algn="l"/>
+            <a:r>
+              <a:rPr sz="1400" b="1">
+                <a:solidFill>
+                  <a:srgbClr val="212121"/>
+                </a:solidFill>
+                <a:latin typeface="Freesentation"/>
+              </a:rPr>
+              <a:t>자체 HA 구성 필요</a:t>
+            </a:r>
+            <a:defRPr sz="1400" b="1"/>
+          </a:p>
+          <a:p>
+            <a:pPr algn="l"/>
+          </a:p>
+          <a:p>
+            <a:pPr algn="l"/>
+            <a:r>
+              <a:rPr sz="1100" b="0">
+                <a:solidFill>
+                  <a:srgbClr val="505050"/>
+                </a:solidFill>
+                <a:latin typeface="Freesentation"/>
+              </a:rPr>
+              <a:t>확장성</a:t>
+            </a:r>
+            <a:defRPr sz="1100" b="0"/>
+          </a:p>
+          <a:p>
+            <a:pPr algn="l"/>
+            <a:r>
+              <a:rPr sz="1400" b="1">
+                <a:solidFill>
+                  <a:srgbClr val="212121"/>
+                </a:solidFill>
+                <a:latin typeface="Freesentation"/>
+              </a:rPr>
+              <a:t>용량 증설에 수 주 소요</a:t>
+            </a:r>
+            <a:defRPr sz="1400" b="1"/>
+          </a:p>
+        </p:txBody>
+      </p:sp>
+      <p:sp>
+        <p:nvSpPr>
+          <p:cNvPr id="11" name="TextBox 10"/>
+          <p:cNvSpPr txBox="1"/>
+          <p:nvPr/>
+        </p:nvSpPr>
+        <p:spPr>
+          <a:xfrm>
+            <a:off x="6035954" y="2873959"/>
+            <a:ext cx="4967020" cy="3136392"/>
+          </a:xfrm>
+          <a:prstGeom prst="rect">
+            <a:avLst/>
+          </a:prstGeom>
+          <a:noFill/>
+        </p:spPr>
+        <p:txBody>
+          <a:bodyPr wrap="square">
+            <a:spAutoFit/>
+          </a:bodyPr>
+          <a:lstStyle/>
+          <a:p>
+            <a:pPr algn="l"/>
+            <a:r>
+              <a:rPr sz="1100" b="0">
+                <a:solidFill>
+                  <a:srgbClr val="505050"/>
+                </a:solidFill>
+                <a:latin typeface="Freesentation"/>
+              </a:rPr>
+              <a:t>초기 비용</a:t>
+            </a:r>
+            <a:defRPr sz="1100" b="0"/>
+          </a:p>
+          <a:p>
+            <a:pPr algn="l"/>
+            <a:r>
+              <a:rPr sz="1400" b="1">
+                <a:solidFill>
+                  <a:srgbClr val="0043DA"/>
+                </a:solidFill>
+                <a:latin typeface="Freesentation"/>
+              </a:rPr>
+              <a:t>초기 투자 0원</a:t>
+            </a:r>
+            <a:defRPr sz="1400" b="1"/>
+          </a:p>
+          <a:p>
+            <a:pPr algn="l"/>
+          </a:p>
+          <a:p>
+            <a:pPr algn="l"/>
+            <a:r>
+              <a:rPr sz="1100" b="0">
+                <a:solidFill>
+                  <a:srgbClr val="505050"/>
+                </a:solidFill>
+                <a:latin typeface="Freesentation"/>
+              </a:rPr>
+              <a:t>운영 관리</a:t>
+            </a:r>
+            <a:defRPr sz="1100" b="0"/>
+          </a:p>
+          <a:p>
+            <a:pPr algn="l"/>
+            <a:r>
+              <a:rPr sz="1400" b="1">
+                <a:solidFill>
+                  <a:srgbClr val="0043DA"/>
+                </a:solidFill>
+                <a:latin typeface="Freesentation"/>
+              </a:rPr>
+              <a:t>AWS 완전 관리형</a:t>
+            </a:r>
+            <a:defRPr sz="1400" b="1"/>
+          </a:p>
+          <a:p>
+            <a:pPr algn="l"/>
+          </a:p>
+          <a:p>
+            <a:pPr algn="l"/>
+            <a:r>
+              <a:rPr sz="1100" b="0">
+                <a:solidFill>
+                  <a:srgbClr val="505050"/>
+                </a:solidFill>
+                <a:latin typeface="Freesentation"/>
+              </a:rPr>
+              <a:t>가용성</a:t>
+            </a:r>
+            <a:defRPr sz="1100" b="0"/>
+          </a:p>
+          <a:p>
+            <a:pPr algn="l"/>
+            <a:r>
+              <a:rPr sz="1400" b="1">
+                <a:solidFill>
+                  <a:srgbClr val="0043DA"/>
+                </a:solidFill>
+                <a:latin typeface="Freesentation"/>
+              </a:rPr>
+              <a:t>99.9% SLA 보장</a:t>
+            </a:r>
+            <a:defRPr sz="1400" b="1"/>
+          </a:p>
+          <a:p>
+            <a:pPr algn="l"/>
+          </a:p>
+          <a:p>
+            <a:pPr algn="l"/>
+            <a:r>
+              <a:rPr sz="1100" b="0">
+                <a:solidFill>
+                  <a:srgbClr val="505050"/>
+                </a:solidFill>
+                <a:latin typeface="Freesentation"/>
+              </a:rPr>
+              <a:t>확장성</a:t>
+            </a:r>
+            <a:defRPr sz="1100" b="0"/>
+          </a:p>
+          <a:p>
+            <a:pPr algn="l"/>
+            <a:r>
+              <a:rPr sz="1400" b="1">
+                <a:solidFill>
+                  <a:srgbClr val="0043DA"/>
+                </a:solidFill>
+                <a:latin typeface="Freesentation"/>
+              </a:rPr>
+              <a:t>수분 내 스케일 아웃</a:t>
+            </a:r>
+            <a:defRPr sz="1400" b="1"/>
+          </a:p>
+        </p:txBody>
+      </p:sp>
+      <p:pic>
+        <p:nvPicPr>
+          <p:cNvPr id="12" name="Picture 11" descr="server.png"/>
+          <p:cNvPicPr>
+            <a:picLocks noChangeAspect="1"/>
+          </p:cNvPicPr>
+          <p:nvPr/>
+        </p:nvPicPr>
+        <p:blipFill>
+          <a:blip r:embed="rId2"/>
+          <a:stretch>
+            <a:fillRect/>
+          </a:stretch>
+        </p:blipFill>
+        <p:spPr>
+          <a:xfrm>
+            <a:off x="5181904" y="5878677"/>
+            <a:ext cx="411480" cy="411480"/>
+          </a:xfrm>
+          <a:prstGeom prst="rect">
+            <a:avLst/>
+          </a:prstGeom>
+        </p:spPr>
+      </p:pic>
+      <p:pic>
+        <p:nvPicPr>
+          <p:cNvPr id="13" name="Picture 12" descr="cluster.png"/>
+          <p:cNvPicPr>
+            <a:picLocks noChangeAspect="1"/>
+          </p:cNvPicPr>
+          <p:nvPr/>
+        </p:nvPicPr>
+        <p:blipFill>
+          <a:blip r:embed="rId3"/>
+          <a:stretch>
+            <a:fillRect/>
+          </a:stretch>
+        </p:blipFill>
+        <p:spPr>
+          <a:xfrm>
+            <a:off x="10611612" y="5878677"/>
+            <a:ext cx="411480" cy="411480"/>
+          </a:xfrm>
+          <a:prstGeom prst="rect">
+            <a:avLst/>
+          </a:prstGeom>
+        </p:spPr>
+      </p:pic>
+    </p:spTree>
+  </p:cSld>
+  <p:clrMapOvr>
+    <a:masterClrMapping/>
+  </p:clrMapOvr>
+</p:sld>
+</file>
+
+<file path=ppt/slides/slide12.xml><?xml version="1.0" encoding="utf-8"?>
+<p:sld xmlns:a="http://schemas.openxmlformats.org/drawingml/2006/main" xmlns:r="http://schemas.openxmlformats.org/officeDocument/2006/relationships" xmlns:p="http://schemas.openxmlformats.org/presentationml/2006/main">
+  <p:cSld>
+    <p:spTree>
+      <p:nvGrpSpPr>
+        <p:cNvPr id="1" name=""/>
+        <p:cNvGrpSpPr/>
+        <p:nvPr/>
+      </p:nvGrpSpPr>
+      <p:grpSpPr>
+        <a:xfrm>
+          <a:off x="0" y="0"/>
+          <a:ext cx="0" cy="0"/>
+          <a:chOff x="0" y="0"/>
+          <a:chExt cx="0" cy="0"/>
+        </a:xfrm>
+      </p:grpSpPr>
+      <p:sp>
+        <p:nvSpPr>
+          <p:cNvPr id="2" name="Google Shape;679;p32"/>
+          <p:cNvSpPr txBox="1">
+            <a:spLocks/>
+          </p:cNvSpPr>
+          <p:nvPr/>
+        </p:nvSpPr>
+        <p:spPr>
+          <a:xfrm>
+            <a:off x="0" y="2699114"/>
+            <a:ext cx="12192000" cy="1019175"/>
+          </a:xfrm>
+          <a:prstGeom prst="rect">
+            <a:avLst/>
+          </a:prstGeom>
+          <a:noFill/>
+          <a:ln>
+            <a:noFill/>
+          </a:ln>
+        </p:spPr>
+        <p:txBody>
+          <a:bodyPr spcFirstLastPara="1" wrap="square" lIns="91425" tIns="45700" rIns="91425" bIns="45700" anchor="ctr" anchorCtr="0">
+            <a:normAutofit/>
+          </a:bodyPr>
+          <a:lstStyle>
+            <a:lvl1pPr marL="228600" indent="-228600" algn="l" defTabSz="914400" rtl="0" eaLnBrk="1" latinLnBrk="1" hangingPunct="1">
+              <a:lnSpc>
+                <a:spcPct val="90000"/>
+              </a:lnSpc>
+              <a:spcBef>
+                <a:spcPts val="1000"/>
+              </a:spcBef>
+              <a:buFont typeface="Arial" panose="020B0604020202020204" pitchFamily="34" charset="0"/>
+              <a:buChar char="•"/>
+              <a:defRPr sz="2800" kern="1200">
+                <a:solidFill>
+                  <a:schemeClr val="tx1"/>
+                </a:solidFill>
+                <a:latin typeface="+mn-lt"/>
+                <a:ea typeface="+mn-ea"/>
+                <a:cs typeface="+mn-cs"/>
+              </a:defRPr>
+            </a:lvl1pPr>
+            <a:lvl2pPr marL="685800" indent="-228600" algn="l" defTabSz="914400" rtl="0" eaLnBrk="1" latinLnBrk="1" hangingPunct="1">
+              <a:lnSpc>
+                <a:spcPct val="90000"/>
+              </a:lnSpc>
+              <a:spcBef>
+                <a:spcPts val="500"/>
+              </a:spcBef>
+              <a:buFont typeface="Arial" panose="020B0604020202020204" pitchFamily="34" charset="0"/>
+              <a:buChar char="•"/>
+              <a:defRPr sz="2400" kern="1200">
+                <a:solidFill>
+                  <a:schemeClr val="tx1"/>
+                </a:solidFill>
+                <a:latin typeface="+mn-lt"/>
+                <a:ea typeface="+mn-ea"/>
+                <a:cs typeface="+mn-cs"/>
+              </a:defRPr>
+            </a:lvl2pPr>
+            <a:lvl3pPr marL="1143000" indent="-228600" algn="l" defTabSz="914400" rtl="0" eaLnBrk="1" latinLnBrk="1" hangingPunct="1">
+              <a:lnSpc>
+                <a:spcPct val="90000"/>
+              </a:lnSpc>
+              <a:spcBef>
+                <a:spcPts val="500"/>
+              </a:spcBef>
+              <a:buFont typeface="Arial" panose="020B0604020202020204" pitchFamily="34" charset="0"/>
+              <a:buChar char="•"/>
+              <a:defRPr sz="2000" kern="1200">
+                <a:solidFill>
+                  <a:schemeClr val="tx1"/>
+                </a:solidFill>
+                <a:latin typeface="+mn-lt"/>
+                <a:ea typeface="+mn-ea"/>
+                <a:cs typeface="+mn-cs"/>
+              </a:defRPr>
+            </a:lvl3pPr>
+            <a:lvl4pPr marL="1600200" indent="-228600" algn="l" defTabSz="914400" rtl="0" eaLnBrk="1" latinLnBrk="1" hangingPunct="1">
+              <a:lnSpc>
+                <a:spcPct val="90000"/>
+              </a:lnSpc>
+              <a:spcBef>
+                <a:spcPts val="500"/>
+              </a:spcBef>
+              <a:buFont typeface="Arial" panose="020B0604020202020204" pitchFamily="34" charset="0"/>
+              <a:buChar char="•"/>
+              <a:defRPr sz="1800" kern="1200">
+                <a:solidFill>
+                  <a:schemeClr val="tx1"/>
+                </a:solidFill>
+                <a:latin typeface="+mn-lt"/>
+                <a:ea typeface="+mn-ea"/>
+                <a:cs typeface="+mn-cs"/>
+              </a:defRPr>
+            </a:lvl4pPr>
+            <a:lvl5pPr marL="2057400" indent="-228600" algn="l" defTabSz="914400" rtl="0" eaLnBrk="1" latinLnBrk="1" hangingPunct="1">
+              <a:lnSpc>
+                <a:spcPct val="90000"/>
+              </a:lnSpc>
+              <a:spcBef>
+                <a:spcPts val="500"/>
+              </a:spcBef>
+              <a:buFont typeface="Arial" panose="020B0604020202020204" pitchFamily="34" charset="0"/>
+              <a:buChar char="•"/>
+              <a:defRPr sz="1800" kern="1200">
+                <a:solidFill>
+                  <a:schemeClr val="tx1"/>
+                </a:solidFill>
+                <a:latin typeface="+mn-lt"/>
+                <a:ea typeface="+mn-ea"/>
+                <a:cs typeface="+mn-cs"/>
+              </a:defRPr>
+            </a:lvl5pPr>
+            <a:lvl6pPr marL="2514600" indent="-228600" algn="l" defTabSz="914400" rtl="0" eaLnBrk="1" latinLnBrk="1" hangingPunct="1">
+              <a:lnSpc>
+                <a:spcPct val="90000"/>
+              </a:lnSpc>
+              <a:spcBef>
+                <a:spcPts val="500"/>
+              </a:spcBef>
+              <a:buFont typeface="Arial" panose="020B0604020202020204" pitchFamily="34" charset="0"/>
+              <a:buChar char="•"/>
+              <a:defRPr sz="1800" kern="1200">
+                <a:solidFill>
+                  <a:schemeClr val="tx1"/>
+                </a:solidFill>
+                <a:latin typeface="+mn-lt"/>
+                <a:ea typeface="+mn-ea"/>
+                <a:cs typeface="+mn-cs"/>
+              </a:defRPr>
+            </a:lvl6pPr>
+            <a:lvl7pPr marL="2971800" indent="-228600" algn="l" defTabSz="914400" rtl="0" eaLnBrk="1" latinLnBrk="1" hangingPunct="1">
+              <a:lnSpc>
+                <a:spcPct val="90000"/>
+              </a:lnSpc>
+              <a:spcBef>
+                <a:spcPts val="500"/>
+              </a:spcBef>
+              <a:buFont typeface="Arial" panose="020B0604020202020204" pitchFamily="34" charset="0"/>
+              <a:buChar char="•"/>
+              <a:defRPr sz="1800" kern="1200">
+                <a:solidFill>
+                  <a:schemeClr val="tx1"/>
+                </a:solidFill>
+                <a:latin typeface="+mn-lt"/>
+                <a:ea typeface="+mn-ea"/>
+                <a:cs typeface="+mn-cs"/>
+              </a:defRPr>
+            </a:lvl7pPr>
+            <a:lvl8pPr marL="3429000" indent="-228600" algn="l" defTabSz="914400" rtl="0" eaLnBrk="1" latinLnBrk="1" hangingPunct="1">
+              <a:lnSpc>
+                <a:spcPct val="90000"/>
+              </a:lnSpc>
+              <a:spcBef>
+                <a:spcPts val="500"/>
+              </a:spcBef>
+              <a:buFont typeface="Arial" panose="020B0604020202020204" pitchFamily="34" charset="0"/>
+              <a:buChar char="•"/>
+              <a:defRPr sz="1800" kern="1200">
+                <a:solidFill>
+                  <a:schemeClr val="tx1"/>
+                </a:solidFill>
+                <a:latin typeface="+mn-lt"/>
+                <a:ea typeface="+mn-ea"/>
+                <a:cs typeface="+mn-cs"/>
+              </a:defRPr>
+            </a:lvl8pPr>
+            <a:lvl9pPr marL="3886200" indent="-228600" algn="l" defTabSz="914400" rtl="0" eaLnBrk="1" latinLnBrk="1" hangingPunct="1">
+              <a:lnSpc>
+                <a:spcPct val="90000"/>
+              </a:lnSpc>
+              <a:spcBef>
+                <a:spcPts val="500"/>
+              </a:spcBef>
+              <a:buFont typeface="Arial" panose="020B0604020202020204" pitchFamily="34" charset="0"/>
+              <a:buChar char="•"/>
+              <a:defRPr sz="1800" kern="1200">
+                <a:solidFill>
+                  <a:schemeClr val="tx1"/>
+                </a:solidFill>
+                <a:latin typeface="+mn-lt"/>
+                <a:ea typeface="+mn-ea"/>
+                <a:cs typeface="+mn-cs"/>
+              </a:defRPr>
+            </a:lvl9pPr>
+          </a:lstStyle>
+          <a:p>
+            <a:pPr marL="0" indent="0" algn="ctr">
+              <a:spcBef>
+                <a:spcPts val="0"/>
+              </a:spcBef>
+              <a:buClr>
+                <a:schemeClr val="lt1"/>
+              </a:buClr>
+              <a:buSzPts val="4000"/>
+              <a:buNone/>
+            </a:pPr>
+            <a:r>
+              <a:rPr lang="en-US" altLang="ko-KR" sz="6000" dirty="0">
+                <a:solidFill>
+                  <a:schemeClr val="bg1"/>
+                </a:solidFill>
+                <a:latin typeface="프리젠테이션 7 Bold" pitchFamily="2" charset="-127"/>
+                <a:ea typeface="프리젠테이션 7 Bold" pitchFamily="2" charset="-127"/>
+              </a:rPr>
+              <a:t>Thank You</a:t>
+            </a:r>
+          </a:p>
+        </p:txBody>
+      </p:sp>
+      <p:pic>
+        <p:nvPicPr>
+          <p:cNvPr id="28" name="그림 27"/>
+          <p:cNvPicPr>
+            <a:picLocks noChangeAspect="1"/>
+          </p:cNvPicPr>
+          <p:nvPr/>
+        </p:nvPicPr>
+        <p:blipFill>
+          <a:blip r:embed="rId2" cstate="print">
+            <a:extLst>
+              <a:ext uri="{28A0092B-C50C-407E-A947-70E740481C1C}">
+                <a14:useLocalDpi xmlns:a14="http://schemas.microsoft.com/office/drawing/2010/main" val="0"/>
+              </a:ext>
+            </a:extLst>
+          </a:blip>
+          <a:stretch>
+            <a:fillRect/>
+          </a:stretch>
+        </p:blipFill>
+        <p:spPr>
+          <a:xfrm>
+            <a:off x="5402036" y="378400"/>
+            <a:ext cx="1329872" cy="330546"/>
+          </a:xfrm>
+          <a:prstGeom prst="rect">
+            <a:avLst/>
+          </a:prstGeom>
+        </p:spPr>
+      </p:pic>
+      <p:sp>
+        <p:nvSpPr>
+          <p:cNvPr id="35" name="TextBox 34"/>
+          <p:cNvSpPr txBox="1"/>
+          <p:nvPr/>
+        </p:nvSpPr>
+        <p:spPr>
+          <a:xfrm>
+            <a:off x="3398157" y="3870726"/>
+            <a:ext cx="5395685" cy="543635"/>
+          </a:xfrm>
+          <a:prstGeom prst="rect">
+            <a:avLst/>
+          </a:prstGeom>
+          <a:noFill/>
+        </p:spPr>
+        <p:txBody>
+          <a:bodyPr wrap="square" lIns="0" tIns="0" rIns="0" bIns="0" rtlCol="0" anchor="ctr" anchorCtr="0">
+            <a:noAutofit/>
+          </a:bodyPr>
+          <a:lstStyle/>
+          <a:p>
+            <a:pPr latinLnBrk="0"/>
+            <a:r>
+              <a:rPr lang="en-US" altLang="ko-KR" sz="1600" dirty="0">
+                <a:ln>
+                  <a:solidFill>
+                    <a:schemeClr val="accent1">
+                      <a:alpha val="0"/>
+                    </a:schemeClr>
+                  </a:solidFill>
+                </a:ln>
+                <a:solidFill>
+                  <a:schemeClr val="bg1"/>
+                </a:solidFill>
+                <a:latin typeface="프리젠테이션 4 Regular" pitchFamily="2" charset="-127"/>
+                <a:ea typeface="프리젠테이션 4 Regular" pitchFamily="2" charset="-127"/>
+                <a:cs typeface="Pretendard" panose="02000503000000020004" pitchFamily="2" charset="-127"/>
+              </a:rPr>
+              <a:t>GS</a:t>
+            </a:r>
+            <a:r>
+              <a:rPr lang="ko-KR" altLang="en-US" sz="1600" dirty="0" err="1">
+                <a:ln>
+                  <a:solidFill>
+                    <a:schemeClr val="accent1">
+                      <a:alpha val="0"/>
+                    </a:schemeClr>
+                  </a:solidFill>
+                </a:ln>
+                <a:solidFill>
+                  <a:schemeClr val="bg1"/>
+                </a:solidFill>
+                <a:latin typeface="프리젠테이션 4 Regular" pitchFamily="2" charset="-127"/>
+                <a:ea typeface="프리젠테이션 4 Regular" pitchFamily="2" charset="-127"/>
+                <a:cs typeface="Pretendard" panose="02000503000000020004" pitchFamily="2" charset="-127"/>
+              </a:rPr>
+              <a:t>네오텍의</a:t>
+            </a:r>
+            <a:r>
+              <a:rPr lang="ko-KR" altLang="en-US" sz="1600" dirty="0">
+                <a:ln>
+                  <a:solidFill>
+                    <a:schemeClr val="accent1">
+                      <a:alpha val="0"/>
+                    </a:schemeClr>
+                  </a:solidFill>
+                </a:ln>
+                <a:solidFill>
+                  <a:schemeClr val="bg1"/>
+                </a:solidFill>
+                <a:latin typeface="프리젠테이션 4 Regular" pitchFamily="2" charset="-127"/>
+                <a:ea typeface="프리젠테이션 4 Regular" pitchFamily="2" charset="-127"/>
+                <a:cs typeface="Pretendard" panose="02000503000000020004" pitchFamily="2" charset="-127"/>
+              </a:rPr>
+              <a:t> </a:t>
+            </a:r>
+            <a:r>
+              <a:rPr lang="en-US" altLang="ko-KR" sz="1600" dirty="0">
+                <a:ln>
+                  <a:solidFill>
+                    <a:schemeClr val="accent1">
+                      <a:alpha val="0"/>
+                    </a:schemeClr>
+                  </a:solidFill>
+                </a:ln>
+                <a:solidFill>
+                  <a:schemeClr val="bg1"/>
+                </a:solidFill>
+                <a:latin typeface="프리젠테이션 4 Regular" pitchFamily="2" charset="-127"/>
+                <a:ea typeface="프리젠테이션 4 Regular" pitchFamily="2" charset="-127"/>
+                <a:cs typeface="Pretendard" panose="02000503000000020004" pitchFamily="2" charset="-127"/>
+              </a:rPr>
+              <a:t>IT</a:t>
+            </a:r>
+            <a:r>
+              <a:rPr lang="ko-KR" altLang="en-US" sz="1600" dirty="0">
+                <a:ln>
+                  <a:solidFill>
+                    <a:schemeClr val="accent1">
+                      <a:alpha val="0"/>
+                    </a:schemeClr>
+                  </a:solidFill>
+                </a:ln>
+                <a:solidFill>
+                  <a:schemeClr val="bg1"/>
+                </a:solidFill>
+                <a:latin typeface="프리젠테이션 4 Regular" pitchFamily="2" charset="-127"/>
+                <a:ea typeface="프리젠테이션 4 Regular" pitchFamily="2" charset="-127"/>
+                <a:cs typeface="Pretendard" panose="02000503000000020004" pitchFamily="2" charset="-127"/>
+              </a:rPr>
+              <a:t>서비스 브랜드 </a:t>
+            </a:r>
+            <a:r>
+              <a:rPr lang="en-US" altLang="ko-KR" sz="1600" dirty="0" err="1">
+                <a:ln>
+                  <a:solidFill>
+                    <a:schemeClr val="accent1">
+                      <a:alpha val="0"/>
+                    </a:schemeClr>
+                  </a:solidFill>
+                </a:ln>
+                <a:solidFill>
+                  <a:schemeClr val="bg1"/>
+                </a:solidFill>
+                <a:latin typeface="프리젠테이션 4 Regular" pitchFamily="2" charset="-127"/>
+                <a:ea typeface="프리젠테이션 4 Regular" pitchFamily="2" charset="-127"/>
+                <a:cs typeface="Pretendard" panose="02000503000000020004" pitchFamily="2" charset="-127"/>
+              </a:rPr>
+              <a:t>WiseN</a:t>
+            </a:r>
+            <a:r>
+              <a:rPr lang="ko-KR" altLang="en-US" sz="1600" dirty="0">
+                <a:ln>
+                  <a:solidFill>
+                    <a:schemeClr val="accent1">
+                      <a:alpha val="0"/>
+                    </a:schemeClr>
+                  </a:solidFill>
+                </a:ln>
+                <a:solidFill>
+                  <a:schemeClr val="bg1"/>
+                </a:solidFill>
+                <a:latin typeface="프리젠테이션 4 Regular" pitchFamily="2" charset="-127"/>
+                <a:ea typeface="프리젠테이션 4 Regular" pitchFamily="2" charset="-127"/>
+                <a:cs typeface="Pretendard" panose="02000503000000020004" pitchFamily="2" charset="-127"/>
+              </a:rPr>
+              <a:t>으로 진정한 프리미엄을 경험하세요</a:t>
+            </a:r>
+            <a:r>
+              <a:rPr lang="en-US" altLang="ko-KR" sz="1600" dirty="0">
+                <a:ln>
+                  <a:solidFill>
+                    <a:schemeClr val="accent1">
+                      <a:alpha val="0"/>
+                    </a:schemeClr>
+                  </a:solidFill>
+                </a:ln>
+                <a:solidFill>
+                  <a:schemeClr val="bg1"/>
+                </a:solidFill>
+                <a:latin typeface="프리젠테이션 4 Regular" pitchFamily="2" charset="-127"/>
+                <a:ea typeface="프리젠테이션 4 Regular" pitchFamily="2" charset="-127"/>
+                <a:cs typeface="Pretendard" panose="02000503000000020004" pitchFamily="2" charset="-127"/>
+              </a:rPr>
+              <a:t>.</a:t>
+            </a:r>
+          </a:p>
+        </p:txBody>
+      </p:sp>
+    </p:spTree>
+    <p:extLst>
+      <p:ext uri="{BB962C8B-B14F-4D97-AF65-F5344CB8AC3E}">
+        <p14:creationId xmlns:p14="http://schemas.microsoft.com/office/powerpoint/2010/main" val="3722360403"/>
+      </p:ext>
+    </p:extLst>
+  </p:cSld>
+  <p:clrMapOvr>
+    <a:masterClrMapping/>
+  </p:clrMapOvr>
+</p:sld>
+</file>
+
 <file path=ppt/slides/slide2.xml><?xml version="1.0" encoding="utf-8"?>
 <p:sld xmlns:a="http://schemas.openxmlformats.org/drawingml/2006/main" xmlns:r="http://schemas.openxmlformats.org/officeDocument/2006/relationships" xmlns:p="http://schemas.openxmlformats.org/presentationml/2006/main">
   <p:cSld>
@@ -4352,7 +6201,7 @@
         </p:nvSpPr>
         <p:spPr>
           <a:xfrm>
-            <a:off x="457200" y="2560320"/>
+            <a:off x="457200" y="2628900"/>
             <a:ext cx="5394960" cy="3840480"/>
           </a:xfrm>
           <a:prstGeom prst="roundRect">
@@ -4398,7 +6247,7 @@
         </p:nvSpPr>
         <p:spPr>
           <a:xfrm>
-            <a:off x="6081308" y="2560320"/>
+            <a:off x="6081308" y="2628900"/>
             <a:ext cx="5650992" cy="2057400"/>
           </a:xfrm>
           <a:prstGeom prst="roundRect">
@@ -4444,7 +6293,7 @@
         </p:nvSpPr>
         <p:spPr>
           <a:xfrm>
-            <a:off x="6081308" y="4892040"/>
+            <a:off x="6081308" y="4960620"/>
             <a:ext cx="5650992" cy="1508760"/>
           </a:xfrm>
           <a:prstGeom prst="roundRect">
@@ -4490,8 +6339,8 @@
         </p:nvSpPr>
         <p:spPr>
           <a:xfrm>
-            <a:off x="822960" y="4796028"/>
-            <a:ext cx="4846320" cy="1371600"/>
+            <a:off x="822960" y="4979662"/>
+            <a:ext cx="4663440" cy="1256546"/>
           </a:xfrm>
           <a:prstGeom prst="roundRect">
             <a:avLst/>
@@ -4536,7 +6385,7 @@
         </p:nvSpPr>
         <p:spPr>
           <a:xfrm>
-            <a:off x="1097280" y="5070348"/>
+            <a:off x="1234440" y="5242175"/>
             <a:ext cx="1097280" cy="457200"/>
           </a:xfrm>
           <a:prstGeom prst="roundRect">
@@ -4580,7 +6429,7 @@
         </p:nvSpPr>
         <p:spPr>
           <a:xfrm>
-            <a:off x="2468880" y="5070348"/>
+            <a:off x="2606040" y="5242175"/>
             <a:ext cx="1097280" cy="457200"/>
           </a:xfrm>
           <a:prstGeom prst="roundRect">
@@ -4624,7 +6473,7 @@
         </p:nvSpPr>
         <p:spPr>
           <a:xfrm>
-            <a:off x="3840480" y="5070348"/>
+            <a:off x="3977640" y="5242175"/>
             <a:ext cx="1097280" cy="457200"/>
           </a:xfrm>
           <a:prstGeom prst="roundRect">
@@ -4668,7 +6517,7 @@
         </p:nvSpPr>
         <p:spPr>
           <a:xfrm>
-            <a:off x="2194560" y="5185562"/>
+            <a:off x="2331720" y="5356475"/>
             <a:ext cx="274320" cy="228600"/>
           </a:xfrm>
           <a:prstGeom prst="rightArrow">
@@ -4714,7 +6563,7 @@
         </p:nvSpPr>
         <p:spPr>
           <a:xfrm>
-            <a:off x="3566160" y="5185562"/>
+            <a:off x="3703320" y="5356475"/>
             <a:ext cx="274320" cy="228600"/>
           </a:xfrm>
           <a:prstGeom prst="rightArrow">
@@ -4772,46 +6621,68 @@
           </a:ln>
         </p:spPr>
         <p:txBody>
+          <a:bodyPr anchor="t" lIns="0" tIns="0" rIns="0" bIns="0"/>
+          <a:lstStyle/>
+          <a:p>
+            <a:r>
+              <a:rPr sz="2000" b="1" dirty="0">
+                <a:latin typeface="프리젠테이션 7 Bold"/>
+              </a:rPr>
+              <a:t>L01. Bento Grid</a:t>
+            </a:r>
+          </a:p>
+        </p:txBody>
+      </p:sp>
+      <p:sp>
+        <p:nvSpPr>
+          <p:cNvPr id="13" name="TextBox 12"/>
+          <p:cNvSpPr txBox="1"/>
+          <p:nvPr/>
+        </p:nvSpPr>
+        <p:spPr>
+          <a:xfrm>
+            <a:off x="3762756" y="558698"/>
+            <a:ext cx="7550200" cy="938174"/>
+          </a:xfrm>
+          <a:prstGeom prst="rect">
+            <a:avLst/>
+          </a:prstGeom>
+          <a:noFill/>
+          <a:ln>
+            <a:noFill/>
+          </a:ln>
+        </p:spPr>
+        <p:txBody>
           <a:bodyPr wrap="square">
             <a:spAutoFit/>
           </a:bodyPr>
           <a:lstStyle/>
           <a:p>
-            <a:pPr algn="l"/>
-            <a:r>
-              <a:rPr sz="2800" b="1">
-                <a:solidFill>
-                  <a:srgbClr val="0043DA"/>
-                </a:solidFill>
-                <a:latin typeface="Freesentation"/>
-              </a:rPr>
-              <a:t>L01. Bento</a:t>
-            </a:r>
-          </a:p>
-          <a:p>
-            <a:pPr algn="l"/>
-            <a:r>
-              <a:rPr sz="2800" b="1">
-                <a:solidFill>
-                  <a:srgbClr val="0043DA"/>
-                </a:solidFill>
-                <a:latin typeface="Freesentation"/>
-              </a:rPr>
-              <a:t>Grid</a:t>
-            </a:r>
-          </a:p>
-        </p:txBody>
-      </p:sp>
-      <p:sp>
-        <p:nvSpPr>
-          <p:cNvPr id="13" name="TextBox 12"/>
+            <a:r>
+              <a:rPr sz="1200" dirty="0">
+                <a:latin typeface="프리젠테이션 5 Medium"/>
+                <a:solidFill>
+                  <a:schemeClr val="tx1">
+                    <a:lumMod val="75000"/>
+                    <a:lumOff val="25000"/>
+                  </a:schemeClr>
+                </a:solidFill>
+              </a:rPr>
+              <a:t>좌 50% + 우 2분할 레이아웃 테스트</a:t>
+            </a:r>
+          </a:p>
+        </p:txBody>
+      </p:sp>
+      <p:sp>
+        <p:nvSpPr>
+          <p:cNvPr id="14" name="TextBox 13"/>
           <p:cNvSpPr txBox="1"/>
           <p:nvPr/>
         </p:nvSpPr>
         <p:spPr>
           <a:xfrm>
-            <a:off x="3762756" y="558698"/>
-            <a:ext cx="7550200" cy="938174"/>
+            <a:off x="457200" y="1600200"/>
+            <a:ext cx="11277295" cy="320040"/>
           </a:xfrm>
           <a:prstGeom prst="rect">
             <a:avLst/>
@@ -4827,28 +6698,29 @@
           </a:bodyPr>
           <a:lstStyle/>
           <a:p>
-            <a:r>
-              <a:rPr sz="1400">
-                <a:solidFill>
-                  <a:srgbClr val="4A4A4A"/>
+            <a:pPr algn="l"/>
+            <a:r>
+              <a:rPr sz="1600" b="1">
+                <a:solidFill>
+                  <a:srgbClr val="0043DA"/>
                 </a:solidFill>
                 <a:latin typeface="Freesentation"/>
               </a:rPr>
-              <a:t>좌 50% + 우 2분할 레이아웃 테스트</a:t>
-            </a:r>
-          </a:p>
-        </p:txBody>
-      </p:sp>
-      <p:sp>
-        <p:nvSpPr>
-          <p:cNvPr id="14" name="TextBox 13"/>
+              <a:t>MSK 핵심 아키텍처와 클러스터 유형별 특성</a:t>
+            </a:r>
+          </a:p>
+        </p:txBody>
+      </p:sp>
+      <p:sp>
+        <p:nvSpPr>
+          <p:cNvPr id="15" name="TextBox 14"/>
           <p:cNvSpPr txBox="1"/>
           <p:nvPr/>
         </p:nvSpPr>
         <p:spPr>
           <a:xfrm>
-            <a:off x="457200" y="1600200"/>
-            <a:ext cx="11277295" cy="320040"/>
+            <a:off x="457200" y="1965960"/>
+            <a:ext cx="11277295" cy="274320"/>
           </a:xfrm>
           <a:prstGeom prst="rect">
             <a:avLst/>
@@ -4866,27 +6738,27 @@
           <a:p>
             <a:pPr algn="l"/>
             <a:r>
-              <a:rPr sz="1600" b="1">
-                <a:solidFill>
-                  <a:srgbClr val="0043DA"/>
+              <a:rPr sz="1300">
+                <a:solidFill>
+                  <a:srgbClr val="4A4A4A"/>
                 </a:solidFill>
                 <a:latin typeface="Freesentation"/>
               </a:rPr>
-              <a:t>MSK 핵심 아키텍처와 클러스터 유형별 특성</a:t>
-            </a:r>
-          </a:p>
-        </p:txBody>
-      </p:sp>
-      <p:sp>
-        <p:nvSpPr>
-          <p:cNvPr id="15" name="TextBox 14"/>
+              <a:t>아키텍처 개요, 클러스터 유형(Provisioned/Serverless/Express), 보안 체계 비교</a:t>
+            </a:r>
+          </a:p>
+        </p:txBody>
+      </p:sp>
+      <p:sp>
+        <p:nvSpPr>
+          <p:cNvPr id="16" name="TextBox 15"/>
           <p:cNvSpPr txBox="1"/>
           <p:nvPr/>
         </p:nvSpPr>
         <p:spPr>
           <a:xfrm>
-            <a:off x="457200" y="1965960"/>
-            <a:ext cx="11277295" cy="274320"/>
+            <a:off x="637200" y="2859982"/>
+            <a:ext cx="5034960" cy="320040"/>
           </a:xfrm>
           <a:prstGeom prst="rect">
             <a:avLst/>
@@ -4904,27 +6776,27 @@
           <a:p>
             <a:pPr algn="l"/>
             <a:r>
-              <a:rPr sz="1300">
-                <a:solidFill>
-                  <a:srgbClr val="4A4A4A"/>
+              <a:rPr sz="1400" b="1">
+                <a:solidFill>
+                  <a:srgbClr val="0043DA"/>
                 </a:solidFill>
                 <a:latin typeface="Freesentation"/>
               </a:rPr>
-              <a:t>아키텍처 개요, 클러스터 유형(Provisioned/Serverless/Express), 보안 체계 비교</a:t>
-            </a:r>
-          </a:p>
-        </p:txBody>
-      </p:sp>
-      <p:sp>
-        <p:nvSpPr>
-          <p:cNvPr id="16" name="TextBox 15"/>
+              <a:t>MSK 아키텍처 개요</a:t>
+            </a:r>
+          </a:p>
+        </p:txBody>
+      </p:sp>
+      <p:sp>
+        <p:nvSpPr>
+          <p:cNvPr id="17" name="TextBox 16"/>
           <p:cNvSpPr txBox="1"/>
           <p:nvPr/>
         </p:nvSpPr>
         <p:spPr>
           <a:xfrm>
-            <a:off x="637200" y="2791402"/>
-            <a:ext cx="5034960" cy="320040"/>
+            <a:off x="637200" y="3288022"/>
+            <a:ext cx="5034960" cy="1554480"/>
           </a:xfrm>
           <a:prstGeom prst="rect">
             <a:avLst/>
@@ -4942,27 +6814,75 @@
           <a:p>
             <a:pPr algn="l"/>
             <a:r>
-              <a:rPr sz="1400" b="1">
-                <a:solidFill>
-                  <a:srgbClr val="0043DA"/>
+              <a:rPr sz="1300">
+                <a:solidFill>
+                  <a:srgbClr val="4A4A4A"/>
                 </a:solidFill>
                 <a:latin typeface="Freesentation"/>
               </a:rPr>
-              <a:t>MSK 아키텍처 개요</a:t>
-            </a:r>
-          </a:p>
-        </p:txBody>
-      </p:sp>
-      <p:sp>
-        <p:nvSpPr>
-          <p:cNvPr id="17" name="TextBox 16"/>
+              <a:t>• 완전관리형 Apache Kafka 서비스</a:t>
+            </a:r>
+          </a:p>
+          <a:p>
+            <a:pPr algn="l"/>
+            <a:r>
+              <a:rPr sz="1300">
+                <a:solidFill>
+                  <a:srgbClr val="4A4A4A"/>
+                </a:solidFill>
+                <a:latin typeface="Freesentation"/>
+              </a:rPr>
+              <a:t>• Multi-AZ 자동 복제 및 고가용성</a:t>
+            </a:r>
+          </a:p>
+          <a:p>
+            <a:pPr algn="l"/>
+            <a:r>
+              <a:rPr sz="1300">
+                <a:solidFill>
+                  <a:srgbClr val="4A4A4A"/>
+                </a:solidFill>
+                <a:latin typeface="Freesentation"/>
+              </a:rPr>
+              <a:t>• 브로커/파티션 자동 스케일링</a:t>
+            </a:r>
+          </a:p>
+          <a:p>
+            <a:pPr algn="l"/>
+            <a:r>
+              <a:rPr sz="1300">
+                <a:solidFill>
+                  <a:srgbClr val="4A4A4A"/>
+                </a:solidFill>
+                <a:latin typeface="Freesentation"/>
+              </a:rPr>
+              <a:t>• AWS 서비스 네이티브 통합 (Lambda, Kinesis, Glue, S3)</a:t>
+            </a:r>
+          </a:p>
+          <a:p>
+            <a:pPr algn="l"/>
+            <a:r>
+              <a:rPr sz="1300">
+                <a:solidFill>
+                  <a:srgbClr val="4A4A4A"/>
+                </a:solidFill>
+                <a:latin typeface="Freesentation"/>
+              </a:rPr>
+              <a:t>• 오픈소스 호환 — 코드 변경 불필요</a:t>
+            </a:r>
+          </a:p>
+        </p:txBody>
+      </p:sp>
+      <p:sp>
+        <p:nvSpPr>
+          <p:cNvPr id="18" name="TextBox 17"/>
           <p:cNvSpPr txBox="1"/>
           <p:nvPr/>
         </p:nvSpPr>
         <p:spPr>
           <a:xfrm>
-            <a:off x="637200" y="3219442"/>
-            <a:ext cx="5034960" cy="1554480"/>
+            <a:off x="6261308" y="2706067"/>
+            <a:ext cx="5290992" cy="320040"/>
           </a:xfrm>
           <a:prstGeom prst="rect">
             <a:avLst/>
@@ -4980,75 +6900,27 @@
           <a:p>
             <a:pPr algn="l"/>
             <a:r>
-              <a:rPr sz="1300">
-                <a:solidFill>
-                  <a:srgbClr val="4A4A4A"/>
+              <a:rPr sz="1400" b="1">
+                <a:solidFill>
+                  <a:srgbClr val="0043DA"/>
                 </a:solidFill>
                 <a:latin typeface="Freesentation"/>
               </a:rPr>
-              <a:t>• 완전관리형 Apache Kafka 서비스</a:t>
-            </a:r>
-          </a:p>
-          <a:p>
-            <a:pPr algn="l"/>
-            <a:r>
-              <a:rPr sz="1300">
-                <a:solidFill>
-                  <a:srgbClr val="4A4A4A"/>
-                </a:solidFill>
-                <a:latin typeface="Freesentation"/>
-              </a:rPr>
-              <a:t>• Multi-AZ 자동 복제 및 고가용성</a:t>
-            </a:r>
-          </a:p>
-          <a:p>
-            <a:pPr algn="l"/>
-            <a:r>
-              <a:rPr sz="1300">
-                <a:solidFill>
-                  <a:srgbClr val="4A4A4A"/>
-                </a:solidFill>
-                <a:latin typeface="Freesentation"/>
-              </a:rPr>
-              <a:t>• 브로커/파티션 자동 스케일링</a:t>
-            </a:r>
-          </a:p>
-          <a:p>
-            <a:pPr algn="l"/>
-            <a:r>
-              <a:rPr sz="1300">
-                <a:solidFill>
-                  <a:srgbClr val="4A4A4A"/>
-                </a:solidFill>
-                <a:latin typeface="Freesentation"/>
-              </a:rPr>
-              <a:t>• AWS 서비스 네이티브 통합 (Lambda, Kinesis, Glue, S3)</a:t>
-            </a:r>
-          </a:p>
-          <a:p>
-            <a:pPr algn="l"/>
-            <a:r>
-              <a:rPr sz="1300">
-                <a:solidFill>
-                  <a:srgbClr val="4A4A4A"/>
-                </a:solidFill>
-                <a:latin typeface="Freesentation"/>
-              </a:rPr>
-              <a:t>• 오픈소스 호환 — 코드 변경 불필요</a:t>
-            </a:r>
-          </a:p>
-        </p:txBody>
-      </p:sp>
-      <p:sp>
-        <p:nvSpPr>
-          <p:cNvPr id="18" name="TextBox 17"/>
+              <a:t>클러스터 유형</a:t>
+            </a:r>
+          </a:p>
+        </p:txBody>
+      </p:sp>
+      <p:sp>
+        <p:nvSpPr>
+          <p:cNvPr id="19" name="TextBox 18"/>
           <p:cNvSpPr txBox="1"/>
           <p:nvPr/>
         </p:nvSpPr>
         <p:spPr>
           <a:xfrm>
-            <a:off x="6261308" y="2637487"/>
-            <a:ext cx="5290992" cy="320040"/>
+            <a:off x="6261308" y="3134107"/>
+            <a:ext cx="5290992" cy="1371600"/>
           </a:xfrm>
           <a:prstGeom prst="rect">
             <a:avLst/>
@@ -5066,27 +6938,51 @@
           <a:p>
             <a:pPr algn="l"/>
             <a:r>
-              <a:rPr sz="1400" b="1">
-                <a:solidFill>
-                  <a:srgbClr val="0043DA"/>
+              <a:rPr sz="1300">
+                <a:solidFill>
+                  <a:srgbClr val="4A4A4A"/>
                 </a:solidFill>
                 <a:latin typeface="Freesentation"/>
               </a:rPr>
-              <a:t>클러스터 유형</a:t>
-            </a:r>
-          </a:p>
-        </p:txBody>
-      </p:sp>
-      <p:sp>
-        <p:nvSpPr>
-          <p:cNvPr id="19" name="TextBox 18"/>
+              <a:t>• Provisioned: 직접 지정</a:t>
+            </a:r>
+          </a:p>
+          <a:p>
+            <a:pPr algn="l"/>
+            <a:r>
+              <a:rPr sz="1300">
+                <a:solidFill>
+                  <a:srgbClr val="4A4A4A"/>
+                </a:solidFill>
+                <a:latin typeface="Freesentation"/>
+              </a:rPr>
+              <a:t>• Serverless: 자동 스케일링</a:t>
+            </a:r>
+          </a:p>
+          <a:p>
+            <a:pPr algn="l"/>
+            <a:r>
+              <a:rPr sz="1300">
+                <a:solidFill>
+                  <a:srgbClr val="4A4A4A"/>
+                </a:solidFill>
+                <a:latin typeface="Freesentation"/>
+              </a:rPr>
+              <a:t>• Express: 고성능</a:t>
+            </a:r>
+          </a:p>
+        </p:txBody>
+      </p:sp>
+      <p:sp>
+        <p:nvSpPr>
+          <p:cNvPr id="20" name="TextBox 19"/>
           <p:cNvSpPr txBox="1"/>
           <p:nvPr/>
         </p:nvSpPr>
         <p:spPr>
           <a:xfrm>
-            <a:off x="6261308" y="3065527"/>
-            <a:ext cx="5290992" cy="1371600"/>
+            <a:off x="6261308" y="5006988"/>
+            <a:ext cx="5290992" cy="320040"/>
           </a:xfrm>
           <a:prstGeom prst="rect">
             <a:avLst/>
@@ -5104,51 +7000,27 @@
           <a:p>
             <a:pPr algn="l"/>
             <a:r>
-              <a:rPr sz="1300">
-                <a:solidFill>
-                  <a:srgbClr val="4A4A4A"/>
+              <a:rPr sz="1400" b="1">
+                <a:solidFill>
+                  <a:srgbClr val="0043DA"/>
                 </a:solidFill>
                 <a:latin typeface="Freesentation"/>
               </a:rPr>
-              <a:t>• Provisioned: 직접 지정</a:t>
-            </a:r>
-          </a:p>
-          <a:p>
-            <a:pPr algn="l"/>
-            <a:r>
-              <a:rPr sz="1300">
-                <a:solidFill>
-                  <a:srgbClr val="4A4A4A"/>
-                </a:solidFill>
-                <a:latin typeface="Freesentation"/>
-              </a:rPr>
-              <a:t>• Serverless: 자동 스케일링</a:t>
-            </a:r>
-          </a:p>
-          <a:p>
-            <a:pPr algn="l"/>
-            <a:r>
-              <a:rPr sz="1300">
-                <a:solidFill>
-                  <a:srgbClr val="4A4A4A"/>
-                </a:solidFill>
-                <a:latin typeface="Freesentation"/>
-              </a:rPr>
-              <a:t>• Express: 고성능</a:t>
-            </a:r>
-          </a:p>
-        </p:txBody>
-      </p:sp>
-      <p:sp>
-        <p:nvSpPr>
-          <p:cNvPr id="20" name="TextBox 19"/>
+              <a:t>보안 체계</a:t>
+            </a:r>
+          </a:p>
+        </p:txBody>
+      </p:sp>
+      <p:sp>
+        <p:nvSpPr>
+          <p:cNvPr id="21" name="TextBox 20"/>
           <p:cNvSpPr txBox="1"/>
           <p:nvPr/>
         </p:nvSpPr>
         <p:spPr>
           <a:xfrm>
-            <a:off x="6261308" y="4938408"/>
-            <a:ext cx="5290992" cy="320040"/>
+            <a:off x="6261308" y="5435028"/>
+            <a:ext cx="5290992" cy="1005840"/>
           </a:xfrm>
           <a:prstGeom prst="rect">
             <a:avLst/>
@@ -5166,27 +7038,51 @@
           <a:p>
             <a:pPr algn="l"/>
             <a:r>
-              <a:rPr sz="1400" b="1">
-                <a:solidFill>
-                  <a:srgbClr val="0043DA"/>
+              <a:rPr sz="1300">
+                <a:solidFill>
+                  <a:srgbClr val="4A4A4A"/>
                 </a:solidFill>
                 <a:latin typeface="Freesentation"/>
               </a:rPr>
-              <a:t>보안 체계</a:t>
-            </a:r>
-          </a:p>
-        </p:txBody>
-      </p:sp>
-      <p:sp>
-        <p:nvSpPr>
-          <p:cNvPr id="21" name="TextBox 20"/>
+              <a:t>• IAM / SASL-SCRAM / mTLS</a:t>
+            </a:r>
+          </a:p>
+          <a:p>
+            <a:pPr algn="l"/>
+            <a:r>
+              <a:rPr sz="1300">
+                <a:solidFill>
+                  <a:srgbClr val="4A4A4A"/>
+                </a:solidFill>
+                <a:latin typeface="Freesentation"/>
+              </a:rPr>
+              <a:t>• TLS + KMS 암호화</a:t>
+            </a:r>
+          </a:p>
+          <a:p>
+            <a:pPr algn="l"/>
+            <a:r>
+              <a:rPr sz="1300">
+                <a:solidFill>
+                  <a:srgbClr val="4A4A4A"/>
+                </a:solidFill>
+                <a:latin typeface="Freesentation"/>
+              </a:rPr>
+              <a:t>• Security Group 접근 제어</a:t>
+            </a:r>
+          </a:p>
+        </p:txBody>
+      </p:sp>
+      <p:sp>
+        <p:nvSpPr>
+          <p:cNvPr id="22" name="TextBox 21"/>
           <p:cNvSpPr txBox="1"/>
           <p:nvPr/>
         </p:nvSpPr>
         <p:spPr>
           <a:xfrm>
-            <a:off x="6261308" y="5366448"/>
-            <a:ext cx="5290992" cy="1005840"/>
+            <a:off x="1234440" y="5242175"/>
+            <a:ext cx="1097280" cy="457200"/>
           </a:xfrm>
           <a:prstGeom prst="rect">
             <a:avLst/>
@@ -5197,58 +7093,148 @@
           </a:ln>
         </p:spPr>
         <p:txBody>
+          <a:bodyPr wrap="square" anchor="ctr">
+            <a:spAutoFit/>
+          </a:bodyPr>
+          <a:lstStyle/>
+          <a:p>
+            <a:pPr algn="ctr"/>
+            <a:r>
+              <a:rPr sz="1100" b="1">
+                <a:solidFill>
+                  <a:srgbClr val="FFFFFF"/>
+                </a:solidFill>
+                <a:latin typeface="Freesentation"/>
+              </a:rPr>
+              <a:t>Producer</a:t>
+            </a:r>
+          </a:p>
+        </p:txBody>
+      </p:sp>
+      <p:sp>
+        <p:nvSpPr>
+          <p:cNvPr id="23" name="TextBox 22"/>
+          <p:cNvSpPr txBox="1"/>
+          <p:nvPr/>
+        </p:nvSpPr>
+        <p:spPr>
+          <a:xfrm>
+            <a:off x="2606040" y="5242175"/>
+            <a:ext cx="1097280" cy="457200"/>
+          </a:xfrm>
+          <a:prstGeom prst="rect">
+            <a:avLst/>
+          </a:prstGeom>
+          <a:noFill/>
+          <a:ln>
+            <a:noFill/>
+          </a:ln>
+        </p:spPr>
+        <p:txBody>
+          <a:bodyPr wrap="square" anchor="ctr">
+            <a:spAutoFit/>
+          </a:bodyPr>
+          <a:lstStyle/>
+          <a:p>
+            <a:pPr algn="ctr"/>
+            <a:r>
+              <a:rPr sz="1100" b="1">
+                <a:solidFill>
+                  <a:srgbClr val="FFFFFF"/>
+                </a:solidFill>
+                <a:latin typeface="Freesentation"/>
+              </a:rPr>
+              <a:t>MSK</a:t>
+            </a:r>
+          </a:p>
+        </p:txBody>
+      </p:sp>
+      <p:sp>
+        <p:nvSpPr>
+          <p:cNvPr id="24" name="TextBox 23"/>
+          <p:cNvSpPr txBox="1"/>
+          <p:nvPr/>
+        </p:nvSpPr>
+        <p:spPr>
+          <a:xfrm>
+            <a:off x="3977640" y="5242175"/>
+            <a:ext cx="1097280" cy="457200"/>
+          </a:xfrm>
+          <a:prstGeom prst="rect">
+            <a:avLst/>
+          </a:prstGeom>
+          <a:noFill/>
+          <a:ln>
+            <a:noFill/>
+          </a:ln>
+        </p:spPr>
+        <p:txBody>
+          <a:bodyPr wrap="square" anchor="ctr">
+            <a:spAutoFit/>
+          </a:bodyPr>
+          <a:lstStyle/>
+          <a:p>
+            <a:pPr algn="ctr"/>
+            <a:r>
+              <a:rPr sz="1100" b="1">
+                <a:solidFill>
+                  <a:srgbClr val="FFFFFF"/>
+                </a:solidFill>
+                <a:latin typeface="Freesentation"/>
+              </a:rPr>
+              <a:t>Consumer</a:t>
+            </a:r>
+          </a:p>
+        </p:txBody>
+      </p:sp>
+      <p:sp>
+        <p:nvSpPr>
+          <p:cNvPr id="25" name="TextBox 24"/>
+          <p:cNvSpPr txBox="1"/>
+          <p:nvPr/>
+        </p:nvSpPr>
+        <p:spPr>
+          <a:xfrm>
+            <a:off x="1234440" y="5745095"/>
+            <a:ext cx="1098000" cy="228600"/>
+          </a:xfrm>
+          <a:prstGeom prst="rect">
+            <a:avLst/>
+          </a:prstGeom>
+          <a:noFill/>
+          <a:ln>
+            <a:noFill/>
+          </a:ln>
+        </p:spPr>
+        <p:txBody>
           <a:bodyPr wrap="square">
             <a:spAutoFit/>
           </a:bodyPr>
           <a:lstStyle/>
           <a:p>
-            <a:pPr algn="l"/>
-            <a:r>
-              <a:rPr sz="1300">
+            <a:pPr algn="ctr"/>
+            <a:r>
+              <a:rPr sz="1000">
                 <a:solidFill>
                   <a:srgbClr val="4A4A4A"/>
                 </a:solidFill>
                 <a:latin typeface="Freesentation"/>
               </a:rPr>
-              <a:t>• IAM / SASL-SCRAM / mTLS</a:t>
-            </a:r>
-          </a:p>
-          <a:p>
-            <a:pPr algn="l"/>
-            <a:r>
-              <a:rPr sz="1300">
-                <a:solidFill>
-                  <a:srgbClr val="4A4A4A"/>
-                </a:solidFill>
-                <a:latin typeface="Freesentation"/>
-              </a:rPr>
-              <a:t>• TLS + KMS 암호화</a:t>
-            </a:r>
-          </a:p>
-          <a:p>
-            <a:pPr algn="l"/>
-            <a:r>
-              <a:rPr sz="1300">
-                <a:solidFill>
-                  <a:srgbClr val="4A4A4A"/>
-                </a:solidFill>
-                <a:latin typeface="Freesentation"/>
-              </a:rPr>
-              <a:t>• Security Group 접근 제어</a:t>
-            </a:r>
-          </a:p>
-        </p:txBody>
-      </p:sp>
-      <p:sp>
-        <p:nvSpPr>
-          <p:cNvPr id="22" name="TextBox 21"/>
+              <a:t>App / SDK</a:t>
+            </a:r>
+          </a:p>
+        </p:txBody>
+      </p:sp>
+      <p:sp>
+        <p:nvSpPr>
+          <p:cNvPr id="26" name="TextBox 25"/>
           <p:cNvSpPr txBox="1"/>
           <p:nvPr/>
         </p:nvSpPr>
         <p:spPr>
           <a:xfrm>
-            <a:off x="1097280" y="5070348"/>
-            <a:ext cx="1097280" cy="457200"/>
+            <a:off x="2606040" y="5745095"/>
+            <a:ext cx="1098000" cy="228600"/>
           </a:xfrm>
           <a:prstGeom prst="rect">
             <a:avLst/>
@@ -5259,120 +7245,6 @@
           </a:ln>
         </p:spPr>
         <p:txBody>
-          <a:bodyPr wrap="square" anchor="ctr">
-            <a:spAutoFit/>
-          </a:bodyPr>
-          <a:lstStyle/>
-          <a:p>
-            <a:pPr algn="ctr"/>
-            <a:r>
-              <a:rPr sz="1100" b="1">
-                <a:solidFill>
-                  <a:srgbClr val="FFFFFF"/>
-                </a:solidFill>
-                <a:latin typeface="Freesentation"/>
-              </a:rPr>
-              <a:t>Producer</a:t>
-            </a:r>
-          </a:p>
-        </p:txBody>
-      </p:sp>
-      <p:sp>
-        <p:nvSpPr>
-          <p:cNvPr id="23" name="TextBox 22"/>
-          <p:cNvSpPr txBox="1"/>
-          <p:nvPr/>
-        </p:nvSpPr>
-        <p:spPr>
-          <a:xfrm>
-            <a:off x="2468880" y="5070348"/>
-            <a:ext cx="1097280" cy="457200"/>
-          </a:xfrm>
-          <a:prstGeom prst="rect">
-            <a:avLst/>
-          </a:prstGeom>
-          <a:noFill/>
-          <a:ln>
-            <a:noFill/>
-          </a:ln>
-        </p:spPr>
-        <p:txBody>
-          <a:bodyPr wrap="square" anchor="ctr">
-            <a:spAutoFit/>
-          </a:bodyPr>
-          <a:lstStyle/>
-          <a:p>
-            <a:pPr algn="ctr"/>
-            <a:r>
-              <a:rPr sz="1100" b="1">
-                <a:solidFill>
-                  <a:srgbClr val="FFFFFF"/>
-                </a:solidFill>
-                <a:latin typeface="Freesentation"/>
-              </a:rPr>
-              <a:t>MSK</a:t>
-            </a:r>
-          </a:p>
-        </p:txBody>
-      </p:sp>
-      <p:sp>
-        <p:nvSpPr>
-          <p:cNvPr id="24" name="TextBox 23"/>
-          <p:cNvSpPr txBox="1"/>
-          <p:nvPr/>
-        </p:nvSpPr>
-        <p:spPr>
-          <a:xfrm>
-            <a:off x="3840480" y="5070348"/>
-            <a:ext cx="1097280" cy="457200"/>
-          </a:xfrm>
-          <a:prstGeom prst="rect">
-            <a:avLst/>
-          </a:prstGeom>
-          <a:noFill/>
-          <a:ln>
-            <a:noFill/>
-          </a:ln>
-        </p:spPr>
-        <p:txBody>
-          <a:bodyPr wrap="square" anchor="ctr">
-            <a:spAutoFit/>
-          </a:bodyPr>
-          <a:lstStyle/>
-          <a:p>
-            <a:pPr algn="ctr"/>
-            <a:r>
-              <a:rPr sz="1100" b="1">
-                <a:solidFill>
-                  <a:srgbClr val="FFFFFF"/>
-                </a:solidFill>
-                <a:latin typeface="Freesentation"/>
-              </a:rPr>
-              <a:t>Consumer</a:t>
-            </a:r>
-          </a:p>
-        </p:txBody>
-      </p:sp>
-      <p:sp>
-        <p:nvSpPr>
-          <p:cNvPr id="25" name="TextBox 24"/>
-          <p:cNvSpPr txBox="1"/>
-          <p:nvPr/>
-        </p:nvSpPr>
-        <p:spPr>
-          <a:xfrm>
-            <a:off x="1098000" y="5619600"/>
-            <a:ext cx="1098000" cy="228600"/>
-          </a:xfrm>
-          <a:prstGeom prst="rect">
-            <a:avLst/>
-          </a:prstGeom>
-          <a:noFill/>
-          <a:ln>
-            <a:noFill/>
-          </a:ln>
-        </p:spPr>
-        <p:txBody>
           <a:bodyPr wrap="square">
             <a:spAutoFit/>
           </a:bodyPr>
@@ -5386,44 +7258,6 @@
                 </a:solidFill>
                 <a:latin typeface="Freesentation"/>
               </a:rPr>
-              <a:t>App / SDK</a:t>
-            </a:r>
-          </a:p>
-        </p:txBody>
-      </p:sp>
-      <p:sp>
-        <p:nvSpPr>
-          <p:cNvPr id="26" name="TextBox 25"/>
-          <p:cNvSpPr txBox="1"/>
-          <p:nvPr/>
-        </p:nvSpPr>
-        <p:spPr>
-          <a:xfrm>
-            <a:off x="2469600" y="5619600"/>
-            <a:ext cx="1098000" cy="228600"/>
-          </a:xfrm>
-          <a:prstGeom prst="rect">
-            <a:avLst/>
-          </a:prstGeom>
-          <a:noFill/>
-          <a:ln>
-            <a:noFill/>
-          </a:ln>
-        </p:spPr>
-        <p:txBody>
-          <a:bodyPr wrap="square">
-            <a:spAutoFit/>
-          </a:bodyPr>
-          <a:lstStyle/>
-          <a:p>
-            <a:pPr algn="ctr"/>
-            <a:r>
-              <a:rPr sz="1000">
-                <a:solidFill>
-                  <a:srgbClr val="4A4A4A"/>
-                </a:solidFill>
-                <a:latin typeface="Freesentation"/>
-              </a:rPr>
               <a:t>Topic/Part.</a:t>
             </a:r>
           </a:p>
@@ -5437,7 +7271,7 @@
         </p:nvSpPr>
         <p:spPr>
           <a:xfrm>
-            <a:off x="3841200" y="5619600"/>
+            <a:off x="3977640" y="5745095"/>
             <a:ext cx="1098000" cy="228600"/>
           </a:xfrm>
           <a:prstGeom prst="rect">
@@ -5523,7 +7357,7 @@
         </p:nvSpPr>
         <p:spPr>
           <a:xfrm>
-            <a:off x="884133" y="2560320"/>
+            <a:off x="884133" y="2674620"/>
             <a:ext cx="1828800" cy="1188720"/>
           </a:xfrm>
           <a:prstGeom prst="roundRect">
@@ -5574,7 +7408,7 @@
         </p:nvSpPr>
         <p:spPr>
           <a:xfrm>
-            <a:off x="2895630" y="2972074"/>
+            <a:off x="2895630" y="3086374"/>
             <a:ext cx="457200" cy="365760"/>
           </a:xfrm>
           <a:prstGeom prst="rightArrow">
@@ -5618,7 +7452,7 @@
         </p:nvSpPr>
         <p:spPr>
           <a:xfrm>
-            <a:off x="3535710" y="2560320"/>
+            <a:off x="3535710" y="2674620"/>
             <a:ext cx="5120640" cy="1188720"/>
           </a:xfrm>
           <a:prstGeom prst="roundRect">
@@ -5664,7 +7498,7 @@
         </p:nvSpPr>
         <p:spPr>
           <a:xfrm>
-            <a:off x="3715710" y="2597150"/>
+            <a:off x="3715710" y="2711450"/>
             <a:ext cx="4760640" cy="320040"/>
           </a:xfrm>
           <a:prstGeom prst="rect">
@@ -5702,7 +7536,7 @@
         </p:nvSpPr>
         <p:spPr>
           <a:xfrm>
-            <a:off x="3718590" y="3154680"/>
+            <a:off x="3718590" y="3268980"/>
             <a:ext cx="1494129" cy="411480"/>
           </a:xfrm>
           <a:prstGeom prst="roundRect">
@@ -5753,7 +7587,7 @@
         </p:nvSpPr>
         <p:spPr>
           <a:xfrm>
-            <a:off x="5349880" y="3154680"/>
+            <a:off x="5349880" y="3268980"/>
             <a:ext cx="1494129" cy="411480"/>
           </a:xfrm>
           <a:prstGeom prst="roundRect">
@@ -5804,7 +7638,7 @@
         </p:nvSpPr>
         <p:spPr>
           <a:xfrm>
-            <a:off x="6981169" y="3154680"/>
+            <a:off x="6981169" y="3268980"/>
             <a:ext cx="1494129" cy="411480"/>
           </a:xfrm>
           <a:prstGeom prst="roundRect">
@@ -5855,7 +7689,7 @@
         </p:nvSpPr>
         <p:spPr>
           <a:xfrm>
-            <a:off x="8839230" y="2972074"/>
+            <a:off x="8839230" y="3086374"/>
             <a:ext cx="457200" cy="365760"/>
           </a:xfrm>
           <a:prstGeom prst="rightArrow">
@@ -5899,7 +7733,7 @@
         </p:nvSpPr>
         <p:spPr>
           <a:xfrm>
-            <a:off x="9479310" y="2560320"/>
+            <a:off x="9479310" y="2674620"/>
             <a:ext cx="1828800" cy="1188720"/>
           </a:xfrm>
           <a:prstGeom prst="roundRect">
@@ -5950,7 +7784,7 @@
         </p:nvSpPr>
         <p:spPr>
           <a:xfrm>
-            <a:off x="457200" y="4023360"/>
+            <a:off x="457200" y="4137660"/>
             <a:ext cx="3605479" cy="2286000"/>
           </a:xfrm>
           <a:prstGeom prst="roundRect">
@@ -5996,7 +7830,7 @@
         </p:nvSpPr>
         <p:spPr>
           <a:xfrm>
-            <a:off x="4293108" y="4023360"/>
+            <a:off x="4293108" y="4137660"/>
             <a:ext cx="3605479" cy="2286000"/>
           </a:xfrm>
           <a:prstGeom prst="roundRect">
@@ -6042,7 +7876,7 @@
         </p:nvSpPr>
         <p:spPr>
           <a:xfrm>
-            <a:off x="8129016" y="4023360"/>
+            <a:off x="8129016" y="4137660"/>
             <a:ext cx="3605479" cy="2286000"/>
           </a:xfrm>
           <a:prstGeom prst="roundRect">
@@ -6088,7 +7922,7 @@
         </p:nvSpPr>
         <p:spPr>
           <a:xfrm>
-            <a:off x="637200" y="4116696"/>
+            <a:off x="637200" y="4230996"/>
             <a:ext cx="3245479" cy="304495"/>
           </a:xfrm>
           <a:prstGeom prst="rect">
@@ -6125,7 +7959,7 @@
         </p:nvSpPr>
         <p:spPr>
           <a:xfrm>
-            <a:off x="637200" y="4529191"/>
+            <a:off x="637200" y="4643491"/>
             <a:ext cx="3245479" cy="1645920"/>
           </a:xfrm>
           <a:prstGeom prst="rect">
@@ -6206,7 +8040,7 @@
         </p:nvSpPr>
         <p:spPr>
           <a:xfrm>
-            <a:off x="4473108" y="4116696"/>
+            <a:off x="4473108" y="4230996"/>
             <a:ext cx="3245479" cy="304495"/>
           </a:xfrm>
           <a:prstGeom prst="rect">
@@ -6243,7 +8077,7 @@
         </p:nvSpPr>
         <p:spPr>
           <a:xfrm>
-            <a:off x="4473108" y="4529191"/>
+            <a:off x="4473108" y="4643491"/>
             <a:ext cx="3245479" cy="1645920"/>
           </a:xfrm>
           <a:prstGeom prst="rect">
@@ -6324,7 +8158,7 @@
         </p:nvSpPr>
         <p:spPr>
           <a:xfrm>
-            <a:off x="8309016" y="4116696"/>
+            <a:off x="8309016" y="4230996"/>
             <a:ext cx="3245479" cy="304495"/>
           </a:xfrm>
           <a:prstGeom prst="rect">
@@ -6361,7 +8195,7 @@
         </p:nvSpPr>
         <p:spPr>
           <a:xfrm>
-            <a:off x="8309016" y="4529191"/>
+            <a:off x="8309016" y="4643491"/>
             <a:ext cx="3245479" cy="1645920"/>
           </a:xfrm>
           <a:prstGeom prst="rect">
@@ -6454,65 +8288,52 @@
           </a:ln>
         </p:spPr>
         <p:txBody>
+          <a:bodyPr anchor="t" lIns="0" tIns="0" rIns="0" bIns="0"/>
+          <a:lstStyle/>
+          <a:p>
+            <a:r>
+              <a:rPr sz="2000" b="1" dirty="0">
+                <a:latin typeface="프리젠테이션 7 Bold"/>
+              </a:rPr>
+              <a:t>L02. Three Cards</a:t>
+            </a:r>
+          </a:p>
+        </p:txBody>
+      </p:sp>
+      <p:sp>
+        <p:nvSpPr>
+          <p:cNvPr id="22" name="TextBox 21"/>
+          <p:cNvSpPr txBox="1"/>
+          <p:nvPr/>
+        </p:nvSpPr>
+        <p:spPr>
+          <a:xfrm>
+            <a:off x="3762756" y="558698"/>
+            <a:ext cx="7550200" cy="938174"/>
+          </a:xfrm>
+          <a:prstGeom prst="rect">
+            <a:avLst/>
+          </a:prstGeom>
+          <a:noFill/>
+          <a:ln>
+            <a:noFill/>
+          </a:ln>
+        </p:spPr>
+        <p:txBody>
           <a:bodyPr wrap="square">
             <a:spAutoFit/>
           </a:bodyPr>
           <a:lstStyle/>
           <a:p>
             <a:r>
-              <a:rPr sz="2800" b="1">
-                <a:solidFill>
-                  <a:srgbClr val="0043DA"/>
-                </a:solidFill>
-                <a:latin typeface="Freesentation"/>
-              </a:rPr>
-              <a:t>L02.</a:t>
-            </a:r>
-          </a:p>
-          <a:p>
-            <a:r>
-              <a:rPr sz="2800" b="1">
-                <a:solidFill>
-                  <a:srgbClr val="0043DA"/>
-                </a:solidFill>
-                <a:latin typeface="Freesentation"/>
-              </a:rPr>
-              <a:t>Three Cards</a:t>
-            </a:r>
-          </a:p>
-        </p:txBody>
-      </p:sp>
-      <p:sp>
-        <p:nvSpPr>
-          <p:cNvPr id="22" name="TextBox 21"/>
-          <p:cNvSpPr txBox="1"/>
-          <p:nvPr/>
-        </p:nvSpPr>
-        <p:spPr>
-          <a:xfrm>
-            <a:off x="3762756" y="558698"/>
-            <a:ext cx="7550200" cy="938174"/>
-          </a:xfrm>
-          <a:prstGeom prst="rect">
-            <a:avLst/>
-          </a:prstGeom>
-          <a:noFill/>
-          <a:ln>
-            <a:noFill/>
-          </a:ln>
-        </p:spPr>
-        <p:txBody>
-          <a:bodyPr wrap="square">
-            <a:spAutoFit/>
-          </a:bodyPr>
-          <a:lstStyle/>
-          <a:p>
-            <a:r>
-              <a:rPr sz="1400">
-                <a:solidFill>
-                  <a:srgbClr val="4A4A4A"/>
-                </a:solidFill>
-                <a:latin typeface="Freesentation"/>
+              <a:rPr sz="1200" dirty="0">
+                <a:latin typeface="프리젠테이션 5 Medium"/>
+                <a:solidFill>
+                  <a:schemeClr val="tx1">
+                    <a:lumMod val="75000"/>
+                    <a:lumOff val="25000"/>
+                  </a:schemeClr>
+                </a:solidFill>
               </a:rPr>
               <a:t>3열 카드 레이아웃 테스트</a:t>
             </a:r>
@@ -6651,7 +8472,7 @@
         </p:nvSpPr>
         <p:spPr>
           <a:xfrm>
-            <a:off x="564093" y="2560320"/>
+            <a:off x="564093" y="2628900"/>
             <a:ext cx="5394960" cy="1828800"/>
           </a:xfrm>
           <a:prstGeom prst="roundRect">
@@ -6697,7 +8518,7 @@
         </p:nvSpPr>
         <p:spPr>
           <a:xfrm>
-            <a:off x="6233190" y="2560320"/>
+            <a:off x="6233190" y="2628900"/>
             <a:ext cx="5394960" cy="1828800"/>
           </a:xfrm>
           <a:prstGeom prst="roundRect">
@@ -6743,7 +8564,7 @@
         </p:nvSpPr>
         <p:spPr>
           <a:xfrm>
-            <a:off x="564093" y="4663440"/>
+            <a:off x="564093" y="4732020"/>
             <a:ext cx="5394960" cy="1737360"/>
           </a:xfrm>
           <a:prstGeom prst="roundRect">
@@ -6789,7 +8610,7 @@
         </p:nvSpPr>
         <p:spPr>
           <a:xfrm>
-            <a:off x="6233190" y="4663440"/>
+            <a:off x="6233190" y="4732020"/>
             <a:ext cx="5394960" cy="1737360"/>
           </a:xfrm>
           <a:prstGeom prst="roundRect">
@@ -6835,7 +8656,7 @@
         </p:nvSpPr>
         <p:spPr>
           <a:xfrm>
-            <a:off x="744093" y="2623042"/>
+            <a:off x="744093" y="2691622"/>
             <a:ext cx="5034960" cy="365760"/>
           </a:xfrm>
           <a:prstGeom prst="rect">
@@ -6872,7 +8693,7 @@
         </p:nvSpPr>
         <p:spPr>
           <a:xfrm>
-            <a:off x="6413190" y="2623042"/>
+            <a:off x="6413190" y="2691622"/>
             <a:ext cx="5034960" cy="365760"/>
           </a:xfrm>
           <a:prstGeom prst="rect">
@@ -6909,7 +8730,7 @@
         </p:nvSpPr>
         <p:spPr>
           <a:xfrm>
-            <a:off x="744093" y="4720968"/>
+            <a:off x="744093" y="4789548"/>
             <a:ext cx="5034960" cy="365760"/>
           </a:xfrm>
           <a:prstGeom prst="rect">
@@ -6946,7 +8767,7 @@
         </p:nvSpPr>
         <p:spPr>
           <a:xfrm>
-            <a:off x="6413190" y="4720968"/>
+            <a:off x="6413190" y="4789548"/>
             <a:ext cx="5034960" cy="365760"/>
           </a:xfrm>
           <a:prstGeom prst="rect">
@@ -6983,7 +8804,7 @@
         </p:nvSpPr>
         <p:spPr>
           <a:xfrm>
-            <a:off x="744093" y="3096802"/>
+            <a:off x="744093" y="3165382"/>
             <a:ext cx="5034960" cy="1097280"/>
           </a:xfrm>
           <a:prstGeom prst="rect">
@@ -7042,7 +8863,7 @@
         </p:nvSpPr>
         <p:spPr>
           <a:xfrm>
-            <a:off x="6413190" y="3096802"/>
+            <a:off x="6413190" y="3165382"/>
             <a:ext cx="5034960" cy="1097280"/>
           </a:xfrm>
           <a:prstGeom prst="rect">
@@ -7101,7 +8922,7 @@
         </p:nvSpPr>
         <p:spPr>
           <a:xfrm>
-            <a:off x="744093" y="5194728"/>
+            <a:off x="744093" y="5263308"/>
             <a:ext cx="5034960" cy="1097280"/>
           </a:xfrm>
           <a:prstGeom prst="rect">
@@ -7160,7 +8981,7 @@
         </p:nvSpPr>
         <p:spPr>
           <a:xfrm>
-            <a:off x="6413190" y="5194728"/>
+            <a:off x="6413190" y="5263308"/>
             <a:ext cx="5034960" cy="1097280"/>
           </a:xfrm>
           <a:prstGeom prst="rect">
@@ -7227,7 +9048,7 @@
         </p:blipFill>
         <p:spPr>
           <a:xfrm>
-            <a:off x="5364784" y="2697480"/>
+            <a:off x="5364784" y="2766060"/>
             <a:ext cx="411480" cy="411480"/>
           </a:xfrm>
           <a:prstGeom prst="rect">
@@ -7251,7 +9072,7 @@
         </p:blipFill>
         <p:spPr>
           <a:xfrm>
-            <a:off x="11034064" y="2697480"/>
+            <a:off x="11034064" y="2766060"/>
             <a:ext cx="411480" cy="411480"/>
           </a:xfrm>
           <a:prstGeom prst="rect">
@@ -7275,7 +9096,7 @@
         </p:blipFill>
         <p:spPr>
           <a:xfrm>
-            <a:off x="5364784" y="4800600"/>
+            <a:off x="5364784" y="4869180"/>
             <a:ext cx="411480" cy="411480"/>
           </a:xfrm>
           <a:prstGeom prst="rect">
@@ -7299,7 +9120,7 @@
         </p:blipFill>
         <p:spPr>
           <a:xfrm>
-            <a:off x="11034064" y="4800600"/>
+            <a:off x="11034064" y="4869180"/>
             <a:ext cx="411480" cy="411480"/>
           </a:xfrm>
           <a:prstGeom prst="rect">
@@ -7327,55 +9148,52 @@
           </a:ln>
         </p:spPr>
         <p:txBody>
+          <a:bodyPr anchor="t" lIns="0" tIns="0" rIns="0" bIns="0"/>
+          <a:lstStyle/>
+          <a:p>
+            <a:r>
+              <a:rPr sz="2000" b="1" dirty="0">
+                <a:latin typeface="프리젠테이션 7 Bold"/>
+              </a:rPr>
+              <a:t>L03. Grid 2x2</a:t>
+            </a:r>
+          </a:p>
+        </p:txBody>
+      </p:sp>
+      <p:sp>
+        <p:nvSpPr>
+          <p:cNvPr id="20" name="TextBox 19"/>
+          <p:cNvSpPr txBox="1"/>
+          <p:nvPr/>
+        </p:nvSpPr>
+        <p:spPr>
+          <a:xfrm>
+            <a:off x="3762756" y="558698"/>
+            <a:ext cx="7550200" cy="938174"/>
+          </a:xfrm>
+          <a:prstGeom prst="rect">
+            <a:avLst/>
+          </a:prstGeom>
+          <a:noFill/>
+          <a:ln>
+            <a:noFill/>
+          </a:ln>
+        </p:spPr>
+        <p:txBody>
           <a:bodyPr wrap="square">
             <a:spAutoFit/>
           </a:bodyPr>
           <a:lstStyle/>
           <a:p>
-            <a:pPr algn="l"/>
-            <a:r>
-              <a:rPr sz="2800" b="1">
-                <a:solidFill>
-                  <a:srgbClr val="0043DA"/>
-                </a:solidFill>
-                <a:latin typeface="Freesentation"/>
-              </a:rPr>
-              <a:t>L03. Grid 2x2</a:t>
-            </a:r>
-          </a:p>
-        </p:txBody>
-      </p:sp>
-      <p:sp>
-        <p:nvSpPr>
-          <p:cNvPr id="20" name="TextBox 19"/>
-          <p:cNvSpPr txBox="1"/>
-          <p:nvPr/>
-        </p:nvSpPr>
-        <p:spPr>
-          <a:xfrm>
-            <a:off x="3762756" y="558698"/>
-            <a:ext cx="7550200" cy="938174"/>
-          </a:xfrm>
-          <a:prstGeom prst="rect">
-            <a:avLst/>
-          </a:prstGeom>
-          <a:noFill/>
-          <a:ln>
-            <a:noFill/>
-          </a:ln>
-        </p:spPr>
-        <p:txBody>
-          <a:bodyPr wrap="square">
-            <a:spAutoFit/>
-          </a:bodyPr>
-          <a:lstStyle/>
-          <a:p>
-            <a:r>
-              <a:rPr sz="1400">
-                <a:solidFill>
-                  <a:srgbClr val="4A4A4A"/>
-                </a:solidFill>
-                <a:latin typeface="Freesentation"/>
+            <a:r>
+              <a:rPr sz="1200" dirty="0">
+                <a:latin typeface="프리젠테이션 5 Medium"/>
+                <a:solidFill>
+                  <a:schemeClr val="tx1">
+                    <a:lumMod val="75000"/>
+                    <a:lumOff val="25000"/>
+                  </a:schemeClr>
+                </a:solidFill>
               </a:rPr>
               <a:t>2x2 카드 그리드 레이아웃 테스트</a:t>
             </a:r>
@@ -7514,7 +9332,7 @@
         </p:nvSpPr>
         <p:spPr>
           <a:xfrm>
-            <a:off x="457200" y="2560320"/>
+            <a:off x="457200" y="2628900"/>
             <a:ext cx="2647950" cy="548640"/>
           </a:xfrm>
           <a:prstGeom prst="chevron">
@@ -7567,7 +9385,7 @@
         </p:nvSpPr>
         <p:spPr>
           <a:xfrm>
-            <a:off x="3332988" y="2560320"/>
+            <a:off x="3332988" y="2628900"/>
             <a:ext cx="2647950" cy="548640"/>
           </a:xfrm>
           <a:prstGeom prst="chevron">
@@ -7620,7 +9438,7 @@
         </p:nvSpPr>
         <p:spPr>
           <a:xfrm>
-            <a:off x="6208776" y="2560320"/>
+            <a:off x="6208776" y="2628900"/>
             <a:ext cx="2647950" cy="548640"/>
           </a:xfrm>
           <a:prstGeom prst="chevron">
@@ -7673,7 +9491,7 @@
         </p:nvSpPr>
         <p:spPr>
           <a:xfrm>
-            <a:off x="9083649" y="2560320"/>
+            <a:off x="9083649" y="2628900"/>
             <a:ext cx="2647950" cy="548640"/>
           </a:xfrm>
           <a:prstGeom prst="chevron">
@@ -7726,7 +9544,7 @@
         </p:nvSpPr>
         <p:spPr>
           <a:xfrm>
-            <a:off x="457200" y="3383280"/>
+            <a:off x="457200" y="3451860"/>
             <a:ext cx="2646273" cy="3017520"/>
           </a:xfrm>
           <a:prstGeom prst="roundRect">
@@ -7772,7 +9590,7 @@
         </p:nvSpPr>
         <p:spPr>
           <a:xfrm>
-            <a:off x="3332988" y="3383280"/>
+            <a:off x="3332988" y="3451860"/>
             <a:ext cx="2646273" cy="3017520"/>
           </a:xfrm>
           <a:prstGeom prst="roundRect">
@@ -7818,7 +9636,7 @@
         </p:nvSpPr>
         <p:spPr>
           <a:xfrm>
-            <a:off x="6208776" y="3383280"/>
+            <a:off x="6208776" y="3451860"/>
             <a:ext cx="2646273" cy="3017520"/>
           </a:xfrm>
           <a:prstGeom prst="roundRect">
@@ -7864,7 +9682,7 @@
         </p:nvSpPr>
         <p:spPr>
           <a:xfrm>
-            <a:off x="9083649" y="3383280"/>
+            <a:off x="9083649" y="3451860"/>
             <a:ext cx="2646273" cy="3017520"/>
           </a:xfrm>
           <a:prstGeom prst="roundRect">
@@ -7910,7 +9728,7 @@
         </p:nvSpPr>
         <p:spPr>
           <a:xfrm>
-            <a:off x="637200" y="3504835"/>
+            <a:off x="637200" y="3573415"/>
             <a:ext cx="2286273" cy="2880360"/>
           </a:xfrm>
           <a:prstGeom prst="rect">
@@ -7969,7 +9787,7 @@
         </p:nvSpPr>
         <p:spPr>
           <a:xfrm>
-            <a:off x="3512988" y="3504835"/>
+            <a:off x="3512988" y="3573415"/>
             <a:ext cx="2286273" cy="2880360"/>
           </a:xfrm>
           <a:prstGeom prst="rect">
@@ -8028,7 +9846,7 @@
         </p:nvSpPr>
         <p:spPr>
           <a:xfrm>
-            <a:off x="6388776" y="3504835"/>
+            <a:off x="6388776" y="3573415"/>
             <a:ext cx="2286273" cy="2880360"/>
           </a:xfrm>
           <a:prstGeom prst="rect">
@@ -8087,7 +9905,7 @@
         </p:nvSpPr>
         <p:spPr>
           <a:xfrm>
-            <a:off x="9263649" y="3504835"/>
+            <a:off x="9263649" y="3573415"/>
             <a:ext cx="2286273" cy="2880360"/>
           </a:xfrm>
           <a:prstGeom prst="rect">
@@ -8158,66 +9976,52 @@
           </a:ln>
         </p:spPr>
         <p:txBody>
+          <a:bodyPr anchor="t" lIns="0" tIns="0" rIns="0" bIns="0"/>
+          <a:lstStyle/>
+          <a:p>
+            <a:r>
+              <a:rPr sz="2000" b="1" dirty="0">
+                <a:latin typeface="프리젠테이션 7 Bold"/>
+              </a:rPr>
+              <a:t>L04. Process Arrow</a:t>
+            </a:r>
+          </a:p>
+        </p:txBody>
+      </p:sp>
+      <p:sp>
+        <p:nvSpPr>
+          <p:cNvPr id="16" name="TextBox 15"/>
+          <p:cNvSpPr txBox="1"/>
+          <p:nvPr/>
+        </p:nvSpPr>
+        <p:spPr>
+          <a:xfrm>
+            <a:off x="3762756" y="558698"/>
+            <a:ext cx="7550200" cy="938174"/>
+          </a:xfrm>
+          <a:prstGeom prst="rect">
+            <a:avLst/>
+          </a:prstGeom>
+          <a:noFill/>
+          <a:ln>
+            <a:noFill/>
+          </a:ln>
+        </p:spPr>
+        <p:txBody>
           <a:bodyPr wrap="square">
             <a:spAutoFit/>
           </a:bodyPr>
           <a:lstStyle/>
           <a:p>
-            <a:pPr algn="l"/>
-            <a:r>
-              <a:rPr sz="2800" b="1">
-                <a:solidFill>
-                  <a:srgbClr val="0043DA"/>
-                </a:solidFill>
-                <a:latin typeface="Freesentation"/>
-              </a:rPr>
-              <a:t>L04. Process</a:t>
-            </a:r>
-          </a:p>
-          <a:p>
-            <a:r>
-              <a:rPr sz="2800" b="1">
-                <a:solidFill>
-                  <a:srgbClr val="0043DA"/>
-                </a:solidFill>
-                <a:latin typeface="Freesentation"/>
-              </a:rPr>
-              <a:t>Arrow</a:t>
-            </a:r>
-          </a:p>
-        </p:txBody>
-      </p:sp>
-      <p:sp>
-        <p:nvSpPr>
-          <p:cNvPr id="16" name="TextBox 15"/>
-          <p:cNvSpPr txBox="1"/>
-          <p:nvPr/>
-        </p:nvSpPr>
-        <p:spPr>
-          <a:xfrm>
-            <a:off x="3762756" y="558698"/>
-            <a:ext cx="7550200" cy="938174"/>
-          </a:xfrm>
-          <a:prstGeom prst="rect">
-            <a:avLst/>
-          </a:prstGeom>
-          <a:noFill/>
-          <a:ln>
-            <a:noFill/>
-          </a:ln>
-        </p:spPr>
-        <p:txBody>
-          <a:bodyPr wrap="square">
-            <a:spAutoFit/>
-          </a:bodyPr>
-          <a:lstStyle/>
-          <a:p>
-            <a:r>
-              <a:rPr sz="1400">
-                <a:solidFill>
-                  <a:srgbClr val="4A4A4A"/>
-                </a:solidFill>
-                <a:latin typeface="Freesentation"/>
+            <a:r>
+              <a:rPr sz="1200" dirty="0">
+                <a:latin typeface="프리젠테이션 5 Medium"/>
+                <a:solidFill>
+                  <a:schemeClr val="tx1">
+                    <a:lumMod val="75000"/>
+                    <a:lumOff val="25000"/>
+                  </a:schemeClr>
+                </a:solidFill>
               </a:rPr>
               <a:t>4단계 프로세스 화살표 레이아웃 테스트</a:t>
             </a:r>
@@ -8316,7 +10120,7 @@
         </p:blipFill>
         <p:spPr>
           <a:xfrm>
-            <a:off x="2514600" y="5806440"/>
+            <a:off x="2514600" y="5875020"/>
             <a:ext cx="411480" cy="411480"/>
           </a:xfrm>
           <a:prstGeom prst="rect">
@@ -8340,7 +10144,7 @@
         </p:blipFill>
         <p:spPr>
           <a:xfrm>
-            <a:off x="5394960" y="5806440"/>
+            <a:off x="5394960" y="5875020"/>
             <a:ext cx="411480" cy="411480"/>
           </a:xfrm>
           <a:prstGeom prst="rect">
@@ -8364,7 +10168,7 @@
         </p:blipFill>
         <p:spPr>
           <a:xfrm>
-            <a:off x="8266175" y="5806440"/>
+            <a:off x="8266175" y="5875020"/>
             <a:ext cx="411480" cy="411480"/>
           </a:xfrm>
           <a:prstGeom prst="rect">
@@ -8388,7 +10192,7 @@
         </p:blipFill>
         <p:spPr>
           <a:xfrm>
-            <a:off x="11146536" y="5806440"/>
+            <a:off x="11146536" y="5875020"/>
             <a:ext cx="411480" cy="411480"/>
           </a:xfrm>
           <a:prstGeom prst="rect">
@@ -8452,7 +10256,7 @@
         </p:nvSpPr>
         <p:spPr>
           <a:xfrm>
-            <a:off x="457200" y="2560320"/>
+            <a:off x="457200" y="2628900"/>
             <a:ext cx="2646273" cy="457200"/>
           </a:xfrm>
           <a:prstGeom prst="roundRect">
@@ -8503,7 +10307,7 @@
         </p:nvSpPr>
         <p:spPr>
           <a:xfrm>
-            <a:off x="3332988" y="2560320"/>
+            <a:off x="3332988" y="2628900"/>
             <a:ext cx="2646273" cy="457200"/>
           </a:xfrm>
           <a:prstGeom prst="roundRect">
@@ -8554,7 +10358,7 @@
         </p:nvSpPr>
         <p:spPr>
           <a:xfrm>
-            <a:off x="6208776" y="2560320"/>
+            <a:off x="6208776" y="2628900"/>
             <a:ext cx="2646273" cy="457200"/>
           </a:xfrm>
           <a:prstGeom prst="roundRect">
@@ -8605,7 +10409,7 @@
         </p:nvSpPr>
         <p:spPr>
           <a:xfrm>
-            <a:off x="9083649" y="2560320"/>
+            <a:off x="9083649" y="2628900"/>
             <a:ext cx="2646273" cy="457200"/>
           </a:xfrm>
           <a:prstGeom prst="roundRect">
@@ -8656,7 +10460,7 @@
         </p:nvSpPr>
         <p:spPr>
           <a:xfrm>
-            <a:off x="457200" y="3200400"/>
+            <a:off x="457200" y="3268980"/>
             <a:ext cx="2646273" cy="3200400"/>
           </a:xfrm>
           <a:prstGeom prst="roundRect">
@@ -8702,7 +10506,7 @@
         </p:nvSpPr>
         <p:spPr>
           <a:xfrm>
-            <a:off x="3332988" y="3200400"/>
+            <a:off x="3332988" y="3268980"/>
             <a:ext cx="2646273" cy="3200400"/>
           </a:xfrm>
           <a:prstGeom prst="roundRect">
@@ -8748,7 +10552,7 @@
         </p:nvSpPr>
         <p:spPr>
           <a:xfrm>
-            <a:off x="6208776" y="3200400"/>
+            <a:off x="6208776" y="3268980"/>
             <a:ext cx="2646273" cy="3200400"/>
           </a:xfrm>
           <a:prstGeom prst="roundRect">
@@ -8794,7 +10598,7 @@
         </p:nvSpPr>
         <p:spPr>
           <a:xfrm>
-            <a:off x="9083649" y="3200400"/>
+            <a:off x="9083649" y="3268980"/>
             <a:ext cx="2646273" cy="3200400"/>
           </a:xfrm>
           <a:prstGeom prst="roundRect">
@@ -8840,7 +10644,7 @@
         </p:nvSpPr>
         <p:spPr>
           <a:xfrm>
-            <a:off x="637200" y="3321955"/>
+            <a:off x="637200" y="3390535"/>
             <a:ext cx="2286273" cy="3063240"/>
           </a:xfrm>
           <a:prstGeom prst="rect">
@@ -8899,7 +10703,7 @@
         </p:nvSpPr>
         <p:spPr>
           <a:xfrm>
-            <a:off x="3512988" y="3321955"/>
+            <a:off x="3512988" y="3390535"/>
             <a:ext cx="2286273" cy="3063240"/>
           </a:xfrm>
           <a:prstGeom prst="rect">
@@ -8958,7 +10762,7 @@
         </p:nvSpPr>
         <p:spPr>
           <a:xfrm>
-            <a:off x="6388776" y="3321955"/>
+            <a:off x="6388776" y="3390535"/>
             <a:ext cx="2286273" cy="3063240"/>
           </a:xfrm>
           <a:prstGeom prst="rect">
@@ -9017,7 +10821,7 @@
         </p:nvSpPr>
         <p:spPr>
           <a:xfrm>
-            <a:off x="9263649" y="3321955"/>
+            <a:off x="9263649" y="3390535"/>
             <a:ext cx="2286273" cy="3063240"/>
           </a:xfrm>
           <a:prstGeom prst="rect">
@@ -9088,66 +10892,52 @@
           </a:ln>
         </p:spPr>
         <p:txBody>
+          <a:bodyPr anchor="t" lIns="0" tIns="0" rIns="0" bIns="0"/>
+          <a:lstStyle/>
+          <a:p>
+            <a:r>
+              <a:rPr sz="2000" b="1" dirty="0">
+                <a:latin typeface="프리젠테이션 7 Bold"/>
+              </a:rPr>
+              <a:t>L05. Phased Columns</a:t>
+            </a:r>
+          </a:p>
+        </p:txBody>
+      </p:sp>
+      <p:sp>
+        <p:nvSpPr>
+          <p:cNvPr id="16" name="TextBox 15"/>
+          <p:cNvSpPr txBox="1"/>
+          <p:nvPr/>
+        </p:nvSpPr>
+        <p:spPr>
+          <a:xfrm>
+            <a:off x="3762756" y="558698"/>
+            <a:ext cx="7550200" cy="938174"/>
+          </a:xfrm>
+          <a:prstGeom prst="rect">
+            <a:avLst/>
+          </a:prstGeom>
+          <a:noFill/>
+          <a:ln>
+            <a:noFill/>
+          </a:ln>
+        </p:spPr>
+        <p:txBody>
           <a:bodyPr wrap="square">
             <a:spAutoFit/>
           </a:bodyPr>
           <a:lstStyle/>
           <a:p>
-            <a:pPr algn="l"/>
-            <a:r>
-              <a:rPr sz="2800" b="1">
-                <a:solidFill>
-                  <a:srgbClr val="0043DA"/>
-                </a:solidFill>
-                <a:latin typeface="Freesentation"/>
-              </a:rPr>
-              <a:t>L05. Phased</a:t>
-            </a:r>
-          </a:p>
-          <a:p>
-            <a:r>
-              <a:rPr sz="2800" b="1">
-                <a:solidFill>
-                  <a:srgbClr val="0043DA"/>
-                </a:solidFill>
-                <a:latin typeface="Freesentation"/>
-              </a:rPr>
-              <a:t>Columns</a:t>
-            </a:r>
-          </a:p>
-        </p:txBody>
-      </p:sp>
-      <p:sp>
-        <p:nvSpPr>
-          <p:cNvPr id="16" name="TextBox 15"/>
-          <p:cNvSpPr txBox="1"/>
-          <p:nvPr/>
-        </p:nvSpPr>
-        <p:spPr>
-          <a:xfrm>
-            <a:off x="3762756" y="558698"/>
-            <a:ext cx="7550200" cy="938174"/>
-          </a:xfrm>
-          <a:prstGeom prst="rect">
-            <a:avLst/>
-          </a:prstGeom>
-          <a:noFill/>
-          <a:ln>
-            <a:noFill/>
-          </a:ln>
-        </p:spPr>
-        <p:txBody>
-          <a:bodyPr wrap="square">
-            <a:spAutoFit/>
-          </a:bodyPr>
-          <a:lstStyle/>
-          <a:p>
-            <a:r>
-              <a:rPr sz="1400">
-                <a:solidFill>
-                  <a:srgbClr val="4A4A4A"/>
-                </a:solidFill>
-                <a:latin typeface="Freesentation"/>
+            <a:r>
+              <a:rPr sz="1200" dirty="0">
+                <a:latin typeface="프리젠테이션 5 Medium"/>
+                <a:solidFill>
+                  <a:schemeClr val="tx1">
+                    <a:lumMod val="75000"/>
+                    <a:lumOff val="25000"/>
+                  </a:schemeClr>
+                </a:solidFill>
               </a:rPr>
               <a:t>단계별 그라데이션 컬럼 레이아웃 테스트</a:t>
             </a:r>
@@ -9246,7 +11036,7 @@
         </p:blipFill>
         <p:spPr>
           <a:xfrm>
-            <a:off x="2510942" y="5807354"/>
+            <a:off x="2510942" y="5875934"/>
             <a:ext cx="411480" cy="411480"/>
           </a:xfrm>
           <a:prstGeom prst="rect">
@@ -9270,7 +11060,7 @@
         </p:blipFill>
         <p:spPr>
           <a:xfrm>
-            <a:off x="5387644" y="5807354"/>
+            <a:off x="5387644" y="5875934"/>
             <a:ext cx="411480" cy="411480"/>
           </a:xfrm>
           <a:prstGeom prst="rect">
@@ -9294,7 +11084,7 @@
         </p:blipFill>
         <p:spPr>
           <a:xfrm>
-            <a:off x="8263432" y="5807354"/>
+            <a:off x="8263432" y="5875934"/>
             <a:ext cx="411480" cy="411480"/>
           </a:xfrm>
           <a:prstGeom prst="rect">
@@ -9318,7 +11108,7 @@
         </p:blipFill>
         <p:spPr>
           <a:xfrm>
-            <a:off x="11140135" y="5807354"/>
+            <a:off x="11140135" y="5875934"/>
             <a:ext cx="411480" cy="411480"/>
           </a:xfrm>
           <a:prstGeom prst="rect">
@@ -9335,7 +11125,7 @@
 </file>
 
 <file path=ppt/slides/slide8.xml><?xml version="1.0" encoding="utf-8"?>
-<p:sld xmlns:a="http://schemas.openxmlformats.org/drawingml/2006/main" xmlns:r="http://schemas.openxmlformats.org/officeDocument/2006/relationships" xmlns:p="http://schemas.openxmlformats.org/presentationml/2006/main">
+<p:sld xmlns:a="http://schemas.openxmlformats.org/drawingml/2006/main" xmlns:p="http://schemas.openxmlformats.org/presentationml/2006/main" xmlns:r="http://schemas.openxmlformats.org/officeDocument/2006/relationships">
   <p:cSld>
     <p:spTree>
       <p:nvGrpSpPr>
@@ -9343,267 +11133,996 @@
         <p:cNvGrpSpPr/>
         <p:nvPr/>
       </p:nvGrpSpPr>
-      <p:grpSpPr>
-        <a:xfrm>
-          <a:off x="0" y="0"/>
-          <a:ext cx="0" cy="0"/>
-          <a:chOff x="0" y="0"/>
-          <a:chExt cx="0" cy="0"/>
-        </a:xfrm>
-      </p:grpSpPr>
-      <p:sp>
-        <p:nvSpPr>
-          <p:cNvPr id="2" name="Google Shape;679;p32"/>
-          <p:cNvSpPr txBox="1">
-            <a:spLocks/>
+      <p:grpSpPr/>
+      <p:sp>
+        <p:nvSpPr>
+          <p:cNvPr id="2" name="Text Placeholder 1"/>
+          <p:cNvSpPr>
+            <a:spLocks noGrp="1"/>
           </p:cNvSpPr>
-          <p:nvPr/>
-        </p:nvSpPr>
-        <p:spPr>
-          <a:xfrm>
-            <a:off x="0" y="2699114"/>
-            <a:ext cx="12192000" cy="1019175"/>
+          <p:nvPr>
+            <p:ph type="body" idx="10" sz="quarter"/>
+          </p:nvPr>
+        </p:nvSpPr>
+        <p:spPr/>
+        <p:txBody>
+          <a:bodyPr/>
+          <a:lstStyle/>
+          <a:p/>
+        </p:txBody>
+      </p:sp>
+      <p:sp>
+        <p:nvSpPr>
+          <p:cNvPr id="3" name="TextBox 2"/>
+          <p:cNvSpPr txBox="1"/>
+          <p:nvPr/>
+        </p:nvSpPr>
+        <p:spPr>
+          <a:xfrm>
+            <a:off x="355610" y="557509"/>
+            <a:ext cx="3291840" cy="932688"/>
           </a:xfrm>
           <a:prstGeom prst="rect">
             <a:avLst/>
           </a:prstGeom>
           <a:noFill/>
+        </p:spPr>
+        <p:txBody>
+          <a:bodyPr wrap="square">
+            <a:spAutoFit/>
+          </a:bodyPr>
+          <a:lstStyle/>
+          <a:p>
+            <a:r>
+              <a:rPr sz="2000" b="1">
+                <a:solidFill>
+                  <a:srgbClr val="0043DA"/>
+                </a:solidFill>
+                <a:latin typeface="프리젠테이션 7 Bold"/>
+              </a:rPr>
+              <a:t>L07. Roadmap Timeline</a:t>
+            </a:r>
+          </a:p>
+        </p:txBody>
+      </p:sp>
+      <p:sp>
+        <p:nvSpPr>
+          <p:cNvPr id="4" name="TextBox 3"/>
+          <p:cNvSpPr txBox="1"/>
+          <p:nvPr/>
+        </p:nvSpPr>
+        <p:spPr>
+          <a:xfrm>
+            <a:off x="3760927" y="557509"/>
+            <a:ext cx="8430768" cy="932688"/>
+          </a:xfrm>
+          <a:prstGeom prst="rect">
+            <a:avLst/>
+          </a:prstGeom>
+          <a:noFill/>
+        </p:spPr>
+        <p:txBody>
+          <a:bodyPr wrap="square">
+            <a:spAutoFit/>
+          </a:bodyPr>
+          <a:lstStyle/>
+          <a:p>
+            <a:r>
+              <a:rPr sz="1200" b="0">
+                <a:solidFill>
+                  <a:srgbClr val="212121"/>
+                </a:solidFill>
+                <a:latin typeface="프리젠테이션 5 Medium"/>
+              </a:rPr>
+              <a:t>수영장 레인 구조 — 복수 워크스트림 병렬 진행</a:t>
+            </a:r>
+          </a:p>
+        </p:txBody>
+      </p:sp>
+      <p:sp>
+        <p:nvSpPr>
+          <p:cNvPr id="5" name="Rectangle 4"/>
+          <p:cNvSpPr/>
+          <p:nvPr/>
+        </p:nvSpPr>
+        <p:spPr>
+          <a:xfrm>
+            <a:off x="355610" y="1496689"/>
+            <a:ext cx="11480292" cy="9144"/>
+          </a:xfrm>
+          <a:prstGeom prst="rect">
+            <a:avLst/>
+          </a:prstGeom>
+          <a:solidFill>
+            <a:srgbClr val="DCDCDC"/>
+          </a:solidFill>
           <a:ln>
-            <a:noFill/>
-          </a:ln>
-        </p:spPr>
-        <p:txBody>
-          <a:bodyPr spcFirstLastPara="1" wrap="square" lIns="91425" tIns="45700" rIns="91425" bIns="45700" anchor="ctr" anchorCtr="0">
-            <a:normAutofit/>
+            <a:solidFill>
+              <a:srgbClr val="DCDCDC"/>
+            </a:solidFill>
+          </a:ln>
+        </p:spPr>
+        <p:style>
+          <a:lnRef idx="1">
+            <a:schemeClr val="accent1"/>
+          </a:lnRef>
+          <a:fillRef idx="3">
+            <a:schemeClr val="accent1"/>
+          </a:fillRef>
+          <a:effectRef idx="2">
+            <a:schemeClr val="accent1"/>
+          </a:effectRef>
+          <a:fontRef idx="minor">
+            <a:schemeClr val="lt1"/>
+          </a:fontRef>
+        </p:style>
+        <p:txBody>
+          <a:bodyPr rtlCol="0" anchor="ctr"/>
+          <a:lstStyle/>
+          <a:p>
+            <a:pPr algn="ctr"/>
+          </a:p>
+        </p:txBody>
+      </p:sp>
+      <p:sp>
+        <p:nvSpPr>
+          <p:cNvPr id="8" name="Rounded Rectangle 7"/>
+          <p:cNvSpPr/>
+          <p:nvPr/>
+        </p:nvSpPr>
+        <p:spPr>
+          <a:xfrm>
+            <a:off x="1920240" y="1984157"/>
+            <a:ext cx="2453335" cy="365760"/>
+          </a:xfrm>
+          <a:prstGeom prst="roundRect">
+            <a:avLst/>
+          </a:prstGeom>
+          <a:solidFill>
+            <a:srgbClr val="E6F0FF"/>
+          </a:solidFill>
+          <a:ln w="9525">
+            <a:solidFill>
+              <a:srgbClr val="DCDCDC"/>
+            </a:solidFill>
+          </a:ln>
+        </p:spPr>
+        <p:style>
+          <a:lnRef idx="1">
+            <a:schemeClr val="accent1"/>
+          </a:lnRef>
+          <a:fillRef idx="3">
+            <a:schemeClr val="accent1"/>
+          </a:fillRef>
+          <a:effectRef idx="2">
+            <a:schemeClr val="accent1"/>
+          </a:effectRef>
+          <a:fontRef idx="minor">
+            <a:schemeClr val="lt1"/>
+          </a:fontRef>
+        </p:style>
+        <p:txBody>
+          <a:bodyPr rtlCol="0" anchor="ctr"/>
+          <a:lstStyle/>
+          <a:p>
+            <a:r>
+              <a:rPr sz="1200">
+                <a:solidFill>
+                  <a:srgbClr val="0043DA"/>
+                </a:solidFill>
+              </a:rPr>
+              <a:t>Q1 2026</a:t>
+            </a:r>
+          </a:p>
+        </p:txBody>
+      </p:sp>
+      <p:sp>
+        <p:nvSpPr>
+          <p:cNvPr id="9" name="Rounded Rectangle 8"/>
+          <p:cNvSpPr/>
+          <p:nvPr/>
+        </p:nvSpPr>
+        <p:spPr>
+          <a:xfrm>
+            <a:off x="4373575" y="1984157"/>
+            <a:ext cx="2453335" cy="365760"/>
+          </a:xfrm>
+          <a:prstGeom prst="roundRect">
+            <a:avLst/>
+          </a:prstGeom>
+          <a:solidFill>
+            <a:srgbClr val="E6F0FF"/>
+          </a:solidFill>
+          <a:ln w="9525">
+            <a:solidFill>
+              <a:srgbClr val="DCDCDC"/>
+            </a:solidFill>
+          </a:ln>
+        </p:spPr>
+        <p:style>
+          <a:lnRef idx="1">
+            <a:schemeClr val="accent1"/>
+          </a:lnRef>
+          <a:fillRef idx="3">
+            <a:schemeClr val="accent1"/>
+          </a:fillRef>
+          <a:effectRef idx="2">
+            <a:schemeClr val="accent1"/>
+          </a:effectRef>
+          <a:fontRef idx="minor">
+            <a:schemeClr val="lt1"/>
+          </a:fontRef>
+        </p:style>
+        <p:txBody>
+          <a:bodyPr rtlCol="0" anchor="ctr"/>
+          <a:lstStyle/>
+          <a:p>
+            <a:r>
+              <a:rPr sz="1200">
+                <a:solidFill>
+                  <a:srgbClr val="0043DA"/>
+                </a:solidFill>
+              </a:rPr>
+              <a:t>Q2 2026</a:t>
+            </a:r>
+          </a:p>
+        </p:txBody>
+      </p:sp>
+      <p:sp>
+        <p:nvSpPr>
+          <p:cNvPr id="10" name="Rounded Rectangle 9"/>
+          <p:cNvSpPr/>
+          <p:nvPr/>
+        </p:nvSpPr>
+        <p:spPr>
+          <a:xfrm>
+            <a:off x="6826910" y="1984157"/>
+            <a:ext cx="2453335" cy="365760"/>
+          </a:xfrm>
+          <a:prstGeom prst="roundRect">
+            <a:avLst/>
+          </a:prstGeom>
+          <a:solidFill>
+            <a:srgbClr val="E6F0FF"/>
+          </a:solidFill>
+          <a:ln w="9525">
+            <a:solidFill>
+              <a:srgbClr val="DCDCDC"/>
+            </a:solidFill>
+          </a:ln>
+        </p:spPr>
+        <p:style>
+          <a:lnRef idx="1">
+            <a:schemeClr val="accent1"/>
+          </a:lnRef>
+          <a:fillRef idx="3">
+            <a:schemeClr val="accent1"/>
+          </a:fillRef>
+          <a:effectRef idx="2">
+            <a:schemeClr val="accent1"/>
+          </a:effectRef>
+          <a:fontRef idx="minor">
+            <a:schemeClr val="lt1"/>
+          </a:fontRef>
+        </p:style>
+        <p:txBody>
+          <a:bodyPr rtlCol="0" anchor="ctr"/>
+          <a:lstStyle/>
+          <a:p>
+            <a:r>
+              <a:rPr sz="1200">
+                <a:solidFill>
+                  <a:srgbClr val="0043DA"/>
+                </a:solidFill>
+              </a:rPr>
+              <a:t>Q3 2026</a:t>
+            </a:r>
+          </a:p>
+        </p:txBody>
+      </p:sp>
+      <p:sp>
+        <p:nvSpPr>
+          <p:cNvPr id="11" name="Rounded Rectangle 10"/>
+          <p:cNvSpPr/>
+          <p:nvPr/>
+        </p:nvSpPr>
+        <p:spPr>
+          <a:xfrm>
+            <a:off x="9280245" y="1984157"/>
+            <a:ext cx="2453335" cy="365760"/>
+          </a:xfrm>
+          <a:prstGeom prst="roundRect">
+            <a:avLst/>
+          </a:prstGeom>
+          <a:solidFill>
+            <a:srgbClr val="E6F0FF"/>
+          </a:solidFill>
+          <a:ln w="9525">
+            <a:solidFill>
+              <a:srgbClr val="DCDCDC"/>
+            </a:solidFill>
+          </a:ln>
+        </p:spPr>
+        <p:style>
+          <a:lnRef idx="1">
+            <a:schemeClr val="accent1"/>
+          </a:lnRef>
+          <a:fillRef idx="3">
+            <a:schemeClr val="accent1"/>
+          </a:fillRef>
+          <a:effectRef idx="2">
+            <a:schemeClr val="accent1"/>
+          </a:effectRef>
+          <a:fontRef idx="minor">
+            <a:schemeClr val="lt1"/>
+          </a:fontRef>
+        </p:style>
+        <p:txBody>
+          <a:bodyPr rtlCol="0" anchor="ctr"/>
+          <a:lstStyle/>
+          <a:p>
+            <a:r>
+              <a:rPr sz="1200">
+                <a:solidFill>
+                  <a:srgbClr val="0043DA"/>
+                </a:solidFill>
+              </a:rPr>
+              <a:t>Q4 2026</a:t>
+            </a:r>
+          </a:p>
+        </p:txBody>
+      </p:sp>
+      <p:sp>
+        <p:nvSpPr>
+          <p:cNvPr id="12" name="Rounded Rectangle 11"/>
+          <p:cNvSpPr/>
+          <p:nvPr/>
+        </p:nvSpPr>
+        <p:spPr>
+          <a:xfrm>
+            <a:off x="457200" y="2440442"/>
+            <a:ext cx="1371600" cy="914400"/>
+          </a:xfrm>
+          <a:prstGeom prst="roundRect">
+            <a:avLst/>
+          </a:prstGeom>
+          <a:solidFill>
+            <a:srgbClr val="DCDCDC"/>
+          </a:solidFill>
+          <a:ln w="9525">
+            <a:solidFill>
+              <a:srgbClr val="B4B4B4"/>
+            </a:solidFill>
+          </a:ln>
+        </p:spPr>
+        <p:style>
+          <a:lnRef idx="1">
+            <a:schemeClr val="accent1"/>
+          </a:lnRef>
+          <a:fillRef idx="3">
+            <a:schemeClr val="accent1"/>
+          </a:fillRef>
+          <a:effectRef idx="2">
+            <a:schemeClr val="accent1"/>
+          </a:effectRef>
+          <a:fontRef idx="minor">
+            <a:schemeClr val="lt1"/>
+          </a:fontRef>
+        </p:style>
+        <p:txBody>
+          <a:bodyPr rtlCol="0" anchor="ctr"/>
+          <a:lstStyle/>
+          <a:p>
+            <a:r>
+              <a:rPr sz="1300">
+                <a:solidFill>
+                  <a:srgbClr val="404040"/>
+                </a:solidFill>
+              </a:rPr>
+              <a:t>인프라 구축</a:t>
+            </a:r>
+          </a:p>
+        </p:txBody>
+      </p:sp>
+      <p:sp>
+        <p:nvSpPr>
+          <p:cNvPr id="13" name="Rounded Rectangle 12"/>
+          <p:cNvSpPr/>
+          <p:nvPr/>
+        </p:nvSpPr>
+        <p:spPr>
+          <a:xfrm>
+            <a:off x="457200" y="3445368"/>
+            <a:ext cx="1371600" cy="914400"/>
+          </a:xfrm>
+          <a:prstGeom prst="roundRect">
+            <a:avLst/>
+          </a:prstGeom>
+          <a:solidFill>
+            <a:srgbClr val="DCDCDC"/>
+          </a:solidFill>
+          <a:ln w="9525">
+            <a:solidFill>
+              <a:srgbClr val="B4B4B4"/>
+            </a:solidFill>
+          </a:ln>
+        </p:spPr>
+        <p:style>
+          <a:lnRef idx="1">
+            <a:schemeClr val="accent1"/>
+          </a:lnRef>
+          <a:fillRef idx="3">
+            <a:schemeClr val="accent1"/>
+          </a:fillRef>
+          <a:effectRef idx="2">
+            <a:schemeClr val="accent1"/>
+          </a:effectRef>
+          <a:fontRef idx="minor">
+            <a:schemeClr val="lt1"/>
+          </a:fontRef>
+        </p:style>
+        <p:txBody>
+          <a:bodyPr rtlCol="0" anchor="ctr"/>
+          <a:lstStyle/>
+          <a:p>
+            <a:r>
+              <a:rPr sz="1300">
+                <a:solidFill>
+                  <a:srgbClr val="404040"/>
+                </a:solidFill>
+              </a:rPr>
+              <a:t>마이그레이션</a:t>
+            </a:r>
+          </a:p>
+        </p:txBody>
+      </p:sp>
+      <p:sp>
+        <p:nvSpPr>
+          <p:cNvPr id="14" name="Rounded Rectangle 13"/>
+          <p:cNvSpPr/>
+          <p:nvPr/>
+        </p:nvSpPr>
+        <p:spPr>
+          <a:xfrm>
+            <a:off x="457200" y="4450293"/>
+            <a:ext cx="1371600" cy="914400"/>
+          </a:xfrm>
+          <a:prstGeom prst="roundRect">
+            <a:avLst/>
+          </a:prstGeom>
+          <a:solidFill>
+            <a:srgbClr val="DCDCDC"/>
+          </a:solidFill>
+          <a:ln w="9525">
+            <a:solidFill>
+              <a:srgbClr val="B4B4B4"/>
+            </a:solidFill>
+          </a:ln>
+        </p:spPr>
+        <p:style>
+          <a:lnRef idx="1">
+            <a:schemeClr val="accent1"/>
+          </a:lnRef>
+          <a:fillRef idx="3">
+            <a:schemeClr val="accent1"/>
+          </a:fillRef>
+          <a:effectRef idx="2">
+            <a:schemeClr val="accent1"/>
+          </a:effectRef>
+          <a:fontRef idx="minor">
+            <a:schemeClr val="lt1"/>
+          </a:fontRef>
+        </p:style>
+        <p:txBody>
+          <a:bodyPr rtlCol="0" anchor="ctr"/>
+          <a:lstStyle/>
+          <a:p>
+            <a:r>
+              <a:rPr sz="1300">
+                <a:solidFill>
+                  <a:srgbClr val="404040"/>
+                </a:solidFill>
+              </a:rPr>
+              <a:t>운영 준비</a:t>
+            </a:r>
+          </a:p>
+        </p:txBody>
+      </p:sp>
+      <p:sp>
+        <p:nvSpPr>
+          <p:cNvPr id="15" name="Rounded Rectangle 14"/>
+          <p:cNvSpPr/>
+          <p:nvPr/>
+        </p:nvSpPr>
+        <p:spPr>
+          <a:xfrm>
+            <a:off x="457200" y="5456133"/>
+            <a:ext cx="1371600" cy="914400"/>
+          </a:xfrm>
+          <a:prstGeom prst="roundRect">
+            <a:avLst/>
+          </a:prstGeom>
+          <a:solidFill>
+            <a:srgbClr val="DCDCDC"/>
+          </a:solidFill>
+          <a:ln w="9525">
+            <a:solidFill>
+              <a:srgbClr val="B4B4B4"/>
+            </a:solidFill>
+          </a:ln>
+        </p:spPr>
+        <p:style>
+          <a:lnRef idx="1">
+            <a:schemeClr val="accent1"/>
+          </a:lnRef>
+          <a:fillRef idx="3">
+            <a:schemeClr val="accent1"/>
+          </a:fillRef>
+          <a:effectRef idx="2">
+            <a:schemeClr val="accent1"/>
+          </a:effectRef>
+          <a:fontRef idx="minor">
+            <a:schemeClr val="lt1"/>
+          </a:fontRef>
+        </p:style>
+        <p:txBody>
+          <a:bodyPr rtlCol="0" anchor="ctr"/>
+          <a:lstStyle/>
+          <a:p>
+            <a:r>
+              <a:rPr sz="1100">
+                <a:solidFill>
+                  <a:srgbClr val="404040"/>
+                </a:solidFill>
+              </a:rPr>
+              <a:t>보안/컴플라이언스</a:t>
+            </a:r>
+          </a:p>
+        </p:txBody>
+      </p:sp>
+      <p:sp>
+        <p:nvSpPr>
+          <p:cNvPr id="16" name="Rounded Rectangle 15"/>
+          <p:cNvSpPr/>
+          <p:nvPr/>
+        </p:nvSpPr>
+        <p:spPr>
+          <a:xfrm>
+            <a:off x="1920240" y="2623322"/>
+            <a:ext cx="2453335" cy="548640"/>
+          </a:xfrm>
+          <a:prstGeom prst="roundRect">
+            <a:avLst/>
+          </a:prstGeom>
+          <a:solidFill>
+            <a:srgbClr val="0043DA"/>
+          </a:solidFill>
+          <a:ln>
+            <a:solidFill>
+              <a:srgbClr val="0043DA"/>
+            </a:solidFill>
+          </a:ln>
+        </p:spPr>
+        <p:style>
+          <a:lnRef idx="1">
+            <a:schemeClr val="accent1"/>
+          </a:lnRef>
+          <a:fillRef idx="3">
+            <a:schemeClr val="accent1"/>
+          </a:fillRef>
+          <a:effectRef idx="2">
+            <a:schemeClr val="accent1"/>
+          </a:effectRef>
+          <a:fontRef idx="minor">
+            <a:schemeClr val="lt1"/>
+          </a:fontRef>
+        </p:style>
+        <p:txBody>
+          <a:bodyPr rtlCol="0" anchor="ctr"/>
+          <a:lstStyle/>
+          <a:p>
+            <a:r>
+              <a:rPr sz="1100">
+                <a:solidFill>
+                  <a:srgbClr val="FFFFFF"/>
+                </a:solidFill>
+              </a:rPr>
+              <a:t>VPC/네트워크 설계</a:t>
+            </a:r>
+          </a:p>
+        </p:txBody>
+      </p:sp>
+      <p:sp>
+        <p:nvSpPr>
+          <p:cNvPr id="17" name="Rounded Rectangle 16"/>
+          <p:cNvSpPr/>
+          <p:nvPr/>
+        </p:nvSpPr>
+        <p:spPr>
+          <a:xfrm>
+            <a:off x="4373575" y="2623322"/>
+            <a:ext cx="4906670" cy="548640"/>
+          </a:xfrm>
+          <a:prstGeom prst="roundRect">
+            <a:avLst/>
+          </a:prstGeom>
+          <a:solidFill>
+            <a:srgbClr val="0043DA"/>
+          </a:solidFill>
+          <a:ln>
+            <a:solidFill>
+              <a:srgbClr val="0043DA"/>
+            </a:solidFill>
+          </a:ln>
+        </p:spPr>
+        <p:style>
+          <a:lnRef idx="1">
+            <a:schemeClr val="accent1"/>
+          </a:lnRef>
+          <a:fillRef idx="3">
+            <a:schemeClr val="accent1"/>
+          </a:fillRef>
+          <a:effectRef idx="2">
+            <a:schemeClr val="accent1"/>
+          </a:effectRef>
+          <a:fontRef idx="minor">
+            <a:schemeClr val="lt1"/>
+          </a:fontRef>
+        </p:style>
+        <p:txBody>
+          <a:bodyPr rtlCol="0" anchor="ctr"/>
+          <a:lstStyle/>
+          <a:p>
+            <a:r>
+              <a:rPr sz="1100">
+                <a:solidFill>
+                  <a:srgbClr val="FFFFFF"/>
+                </a:solidFill>
+              </a:rPr>
+              <a:t>MSK 클러스터 구성</a:t>
+            </a:r>
+          </a:p>
+        </p:txBody>
+      </p:sp>
+      <p:sp>
+        <p:nvSpPr>
+          <p:cNvPr id="18" name="Rounded Rectangle 17"/>
+          <p:cNvSpPr/>
+          <p:nvPr/>
+        </p:nvSpPr>
+        <p:spPr>
+          <a:xfrm>
+            <a:off x="5599785" y="3628248"/>
+            <a:ext cx="2453335" cy="548640"/>
+          </a:xfrm>
+          <a:prstGeom prst="roundRect">
+            <a:avLst/>
+          </a:prstGeom>
+          <a:solidFill>
+            <a:srgbClr val="3A7BD5"/>
+          </a:solidFill>
+          <a:ln>
+            <a:solidFill>
+              <a:srgbClr val="3A7BD5"/>
+            </a:solidFill>
+          </a:ln>
+        </p:spPr>
+        <p:style>
+          <a:lnRef idx="1">
+            <a:schemeClr val="accent1"/>
+          </a:lnRef>
+          <a:fillRef idx="3">
+            <a:schemeClr val="accent1"/>
+          </a:fillRef>
+          <a:effectRef idx="2">
+            <a:schemeClr val="accent1"/>
+          </a:effectRef>
+          <a:fontRef idx="minor">
+            <a:schemeClr val="lt1"/>
+          </a:fontRef>
+        </p:style>
+        <p:txBody>
+          <a:bodyPr rtlCol="0" anchor="ctr"/>
+          <a:lstStyle/>
+          <a:p>
+            <a:r>
+              <a:rPr sz="1100">
+                <a:solidFill>
+                  <a:srgbClr val="FFFFFF"/>
+                </a:solidFill>
+              </a:rPr>
+              <a:t>파일럿 테스트</a:t>
+            </a:r>
+          </a:p>
+        </p:txBody>
+      </p:sp>
+      <p:sp>
+        <p:nvSpPr>
+          <p:cNvPr id="19" name="Rounded Rectangle 18"/>
+          <p:cNvSpPr/>
+          <p:nvPr/>
+        </p:nvSpPr>
+        <p:spPr>
+          <a:xfrm>
+            <a:off x="8053120" y="3628248"/>
+            <a:ext cx="3680460" cy="548640"/>
+          </a:xfrm>
+          <a:prstGeom prst="roundRect">
+            <a:avLst/>
+          </a:prstGeom>
+          <a:solidFill>
+            <a:srgbClr val="3A7BD5"/>
+          </a:solidFill>
+          <a:ln>
+            <a:solidFill>
+              <a:srgbClr val="3A7BD5"/>
+            </a:solidFill>
+          </a:ln>
+        </p:spPr>
+        <p:style>
+          <a:lnRef idx="1">
+            <a:schemeClr val="accent1"/>
+          </a:lnRef>
+          <a:fillRef idx="3">
+            <a:schemeClr val="accent1"/>
+          </a:fillRef>
+          <a:effectRef idx="2">
+            <a:schemeClr val="accent1"/>
+          </a:effectRef>
+          <a:fontRef idx="minor">
+            <a:schemeClr val="lt1"/>
+          </a:fontRef>
+        </p:style>
+        <p:txBody>
+          <a:bodyPr rtlCol="0" anchor="ctr"/>
+          <a:lstStyle/>
+          <a:p>
+            <a:r>
+              <a:rPr sz="1100">
+                <a:solidFill>
+                  <a:srgbClr val="FFFFFF"/>
+                </a:solidFill>
+              </a:rPr>
+              <a:t>데이터 이전</a:t>
+            </a:r>
+          </a:p>
+        </p:txBody>
+      </p:sp>
+      <p:sp>
+        <p:nvSpPr>
+          <p:cNvPr id="20" name="Rounded Rectangle 19"/>
+          <p:cNvSpPr/>
+          <p:nvPr/>
+        </p:nvSpPr>
+        <p:spPr>
+          <a:xfrm>
+            <a:off x="8053120" y="4633173"/>
+            <a:ext cx="1839772" cy="548640"/>
+          </a:xfrm>
+          <a:prstGeom prst="roundRect">
+            <a:avLst/>
+          </a:prstGeom>
+          <a:solidFill>
+            <a:srgbClr val="6B9FFF"/>
+          </a:solidFill>
+          <a:ln>
+            <a:solidFill>
+              <a:srgbClr val="6B9FFF"/>
+            </a:solidFill>
+          </a:ln>
+        </p:spPr>
+        <p:style>
+          <a:lnRef idx="1">
+            <a:schemeClr val="accent1"/>
+          </a:lnRef>
+          <a:fillRef idx="3">
+            <a:schemeClr val="accent1"/>
+          </a:fillRef>
+          <a:effectRef idx="2">
+            <a:schemeClr val="accent1"/>
+          </a:effectRef>
+          <a:fontRef idx="minor">
+            <a:schemeClr val="lt1"/>
+          </a:fontRef>
+        </p:style>
+        <p:txBody>
+          <a:bodyPr rtlCol="0" anchor="ctr"/>
+          <a:lstStyle/>
+          <a:p>
+            <a:r>
+              <a:rPr sz="1100">
+                <a:solidFill>
+                  <a:srgbClr val="FFFFFF"/>
+                </a:solidFill>
+              </a:rPr>
+              <a:t>모니터링 구성</a:t>
+            </a:r>
+          </a:p>
+        </p:txBody>
+      </p:sp>
+      <p:sp>
+        <p:nvSpPr>
+          <p:cNvPr id="21" name="Rounded Rectangle 20"/>
+          <p:cNvSpPr/>
+          <p:nvPr/>
+        </p:nvSpPr>
+        <p:spPr>
+          <a:xfrm>
+            <a:off x="9280245" y="4633173"/>
+            <a:ext cx="2453335" cy="548640"/>
+          </a:xfrm>
+          <a:prstGeom prst="roundRect">
+            <a:avLst/>
+          </a:prstGeom>
+          <a:solidFill>
+            <a:srgbClr val="6B9FFF"/>
+          </a:solidFill>
+          <a:ln>
+            <a:solidFill>
+              <a:srgbClr val="6B9FFF"/>
+            </a:solidFill>
+          </a:ln>
+        </p:spPr>
+        <p:style>
+          <a:lnRef idx="1">
+            <a:schemeClr val="accent1"/>
+          </a:lnRef>
+          <a:fillRef idx="3">
+            <a:schemeClr val="accent1"/>
+          </a:fillRef>
+          <a:effectRef idx="2">
+            <a:schemeClr val="accent1"/>
+          </a:effectRef>
+          <a:fontRef idx="minor">
+            <a:schemeClr val="lt1"/>
+          </a:fontRef>
+        </p:style>
+        <p:txBody>
+          <a:bodyPr rtlCol="0" anchor="ctr"/>
+          <a:lstStyle/>
+          <a:p>
+            <a:r>
+              <a:rPr sz="1100">
+                <a:solidFill>
+                  <a:srgbClr val="FFFFFF"/>
+                </a:solidFill>
+              </a:rPr>
+              <a:t>운영팀 이관</a:t>
+            </a:r>
+          </a:p>
+        </p:txBody>
+      </p:sp>
+      <p:sp>
+        <p:nvSpPr>
+          <p:cNvPr id="22" name="Rounded Rectangle 21"/>
+          <p:cNvSpPr/>
+          <p:nvPr/>
+        </p:nvSpPr>
+        <p:spPr>
+          <a:xfrm>
+            <a:off x="1920240" y="5639013"/>
+            <a:ext cx="9813340" cy="548640"/>
+          </a:xfrm>
+          <a:prstGeom prst="roundRect">
+            <a:avLst/>
+          </a:prstGeom>
+          <a:solidFill>
+            <a:srgbClr val="8AB4F8"/>
+          </a:solidFill>
+          <a:ln>
+            <a:solidFill>
+              <a:srgbClr val="8AB4F8"/>
+            </a:solidFill>
+          </a:ln>
+        </p:spPr>
+        <p:style>
+          <a:lnRef idx="1">
+            <a:schemeClr val="accent1"/>
+          </a:lnRef>
+          <a:fillRef idx="3">
+            <a:schemeClr val="accent1"/>
+          </a:fillRef>
+          <a:effectRef idx="2">
+            <a:schemeClr val="accent1"/>
+          </a:effectRef>
+          <a:fontRef idx="minor">
+            <a:schemeClr val="lt1"/>
+          </a:fontRef>
+        </p:style>
+        <p:txBody>
+          <a:bodyPr rtlCol="0" anchor="ctr"/>
+          <a:lstStyle/>
+          <a:p>
+            <a:r>
+              <a:rPr sz="1100">
+                <a:solidFill>
+                  <a:srgbClr val="FFFFFF"/>
+                </a:solidFill>
+              </a:rPr>
+              <a:t>IAM/암호화/VPC 검증</a:t>
+            </a:r>
+          </a:p>
+        </p:txBody>
+      </p:sp>
+    </p:spTree>
+  </p:cSld>
+  <p:clrMapOvr>
+    <a:masterClrMapping/>
+  </p:clrMapOvr>
+</p:sld>
+</file>
+
+<file path=ppt/slides/slide9.xml><?xml version="1.0" encoding="utf-8"?>
+<p:sld xmlns:a="http://schemas.openxmlformats.org/drawingml/2006/main" xmlns:p="http://schemas.openxmlformats.org/presentationml/2006/main" xmlns:r="http://schemas.openxmlformats.org/officeDocument/2006/relationships">
+  <p:cSld>
+    <p:spTree>
+      <p:nvGrpSpPr>
+        <p:cNvPr id="1" name=""/>
+        <p:cNvGrpSpPr/>
+        <p:nvPr/>
+      </p:nvGrpSpPr>
+      <p:grpSpPr/>
+      <p:sp>
+        <p:nvSpPr>
+          <p:cNvPr id="2" name="Text Placeholder 1"/>
+          <p:cNvSpPr>
+            <a:spLocks noGrp="1"/>
+          </p:cNvSpPr>
+          <p:nvPr>
+            <p:ph type="body" idx="10" sz="quarter"/>
+          </p:nvPr>
+        </p:nvSpPr>
+        <p:spPr/>
+        <p:txBody>
+          <a:bodyPr/>
+          <a:lstStyle/>
+          <a:p/>
+        </p:txBody>
+      </p:sp>
+      <p:sp>
+        <p:nvSpPr>
+          <p:cNvPr id="3" name="TextBox 2"/>
+          <p:cNvSpPr txBox="1"/>
+          <p:nvPr/>
+        </p:nvSpPr>
+        <p:spPr>
+          <a:xfrm>
+            <a:off x="355701" y="557784"/>
+            <a:ext cx="3291840" cy="932688"/>
+          </a:xfrm>
+          <a:prstGeom prst="rect">
+            <a:avLst/>
+          </a:prstGeom>
+          <a:noFill/>
+        </p:spPr>
+        <p:txBody>
+          <a:bodyPr wrap="square">
+            <a:spAutoFit/>
           </a:bodyPr>
-          <a:lstStyle>
-            <a:lvl1pPr marL="228600" indent="-228600" algn="l" defTabSz="914400" rtl="0" eaLnBrk="1" latinLnBrk="1" hangingPunct="1">
-              <a:lnSpc>
-                <a:spcPct val="90000"/>
-              </a:lnSpc>
-              <a:spcBef>
-                <a:spcPts val="1000"/>
-              </a:spcBef>
-              <a:buFont typeface="Arial" panose="020B0604020202020204" pitchFamily="34" charset="0"/>
-              <a:buChar char="•"/>
-              <a:defRPr sz="2800" kern="1200">
-                <a:solidFill>
-                  <a:schemeClr val="tx1"/>
-                </a:solidFill>
-                <a:latin typeface="+mn-lt"/>
-                <a:ea typeface="+mn-ea"/>
-                <a:cs typeface="+mn-cs"/>
-              </a:defRPr>
-            </a:lvl1pPr>
-            <a:lvl2pPr marL="685800" indent="-228600" algn="l" defTabSz="914400" rtl="0" eaLnBrk="1" latinLnBrk="1" hangingPunct="1">
-              <a:lnSpc>
-                <a:spcPct val="90000"/>
-              </a:lnSpc>
-              <a:spcBef>
-                <a:spcPts val="500"/>
-              </a:spcBef>
-              <a:buFont typeface="Arial" panose="020B0604020202020204" pitchFamily="34" charset="0"/>
-              <a:buChar char="•"/>
-              <a:defRPr sz="2400" kern="1200">
-                <a:solidFill>
-                  <a:schemeClr val="tx1"/>
-                </a:solidFill>
-                <a:latin typeface="+mn-lt"/>
-                <a:ea typeface="+mn-ea"/>
-                <a:cs typeface="+mn-cs"/>
-              </a:defRPr>
-            </a:lvl2pPr>
-            <a:lvl3pPr marL="1143000" indent="-228600" algn="l" defTabSz="914400" rtl="0" eaLnBrk="1" latinLnBrk="1" hangingPunct="1">
-              <a:lnSpc>
-                <a:spcPct val="90000"/>
-              </a:lnSpc>
-              <a:spcBef>
-                <a:spcPts val="500"/>
-              </a:spcBef>
-              <a:buFont typeface="Arial" panose="020B0604020202020204" pitchFamily="34" charset="0"/>
-              <a:buChar char="•"/>
-              <a:defRPr sz="2000" kern="1200">
-                <a:solidFill>
-                  <a:schemeClr val="tx1"/>
-                </a:solidFill>
-                <a:latin typeface="+mn-lt"/>
-                <a:ea typeface="+mn-ea"/>
-                <a:cs typeface="+mn-cs"/>
-              </a:defRPr>
-            </a:lvl3pPr>
-            <a:lvl4pPr marL="1600200" indent="-228600" algn="l" defTabSz="914400" rtl="0" eaLnBrk="1" latinLnBrk="1" hangingPunct="1">
-              <a:lnSpc>
-                <a:spcPct val="90000"/>
-              </a:lnSpc>
-              <a:spcBef>
-                <a:spcPts val="500"/>
-              </a:spcBef>
-              <a:buFont typeface="Arial" panose="020B0604020202020204" pitchFamily="34" charset="0"/>
-              <a:buChar char="•"/>
-              <a:defRPr sz="1800" kern="1200">
-                <a:solidFill>
-                  <a:schemeClr val="tx1"/>
-                </a:solidFill>
-                <a:latin typeface="+mn-lt"/>
-                <a:ea typeface="+mn-ea"/>
-                <a:cs typeface="+mn-cs"/>
-              </a:defRPr>
-            </a:lvl4pPr>
-            <a:lvl5pPr marL="2057400" indent="-228600" algn="l" defTabSz="914400" rtl="0" eaLnBrk="1" latinLnBrk="1" hangingPunct="1">
-              <a:lnSpc>
-                <a:spcPct val="90000"/>
-              </a:lnSpc>
-              <a:spcBef>
-                <a:spcPts val="500"/>
-              </a:spcBef>
-              <a:buFont typeface="Arial" panose="020B0604020202020204" pitchFamily="34" charset="0"/>
-              <a:buChar char="•"/>
-              <a:defRPr sz="1800" kern="1200">
-                <a:solidFill>
-                  <a:schemeClr val="tx1"/>
-                </a:solidFill>
-                <a:latin typeface="+mn-lt"/>
-                <a:ea typeface="+mn-ea"/>
-                <a:cs typeface="+mn-cs"/>
-              </a:defRPr>
-            </a:lvl5pPr>
-            <a:lvl6pPr marL="2514600" indent="-228600" algn="l" defTabSz="914400" rtl="0" eaLnBrk="1" latinLnBrk="1" hangingPunct="1">
-              <a:lnSpc>
-                <a:spcPct val="90000"/>
-              </a:lnSpc>
-              <a:spcBef>
-                <a:spcPts val="500"/>
-              </a:spcBef>
-              <a:buFont typeface="Arial" panose="020B0604020202020204" pitchFamily="34" charset="0"/>
-              <a:buChar char="•"/>
-              <a:defRPr sz="1800" kern="1200">
-                <a:solidFill>
-                  <a:schemeClr val="tx1"/>
-                </a:solidFill>
-                <a:latin typeface="+mn-lt"/>
-                <a:ea typeface="+mn-ea"/>
-                <a:cs typeface="+mn-cs"/>
-              </a:defRPr>
-            </a:lvl6pPr>
-            <a:lvl7pPr marL="2971800" indent="-228600" algn="l" defTabSz="914400" rtl="0" eaLnBrk="1" latinLnBrk="1" hangingPunct="1">
-              <a:lnSpc>
-                <a:spcPct val="90000"/>
-              </a:lnSpc>
-              <a:spcBef>
-                <a:spcPts val="500"/>
-              </a:spcBef>
-              <a:buFont typeface="Arial" panose="020B0604020202020204" pitchFamily="34" charset="0"/>
-              <a:buChar char="•"/>
-              <a:defRPr sz="1800" kern="1200">
-                <a:solidFill>
-                  <a:schemeClr val="tx1"/>
-                </a:solidFill>
-                <a:latin typeface="+mn-lt"/>
-                <a:ea typeface="+mn-ea"/>
-                <a:cs typeface="+mn-cs"/>
-              </a:defRPr>
-            </a:lvl7pPr>
-            <a:lvl8pPr marL="3429000" indent="-228600" algn="l" defTabSz="914400" rtl="0" eaLnBrk="1" latinLnBrk="1" hangingPunct="1">
-              <a:lnSpc>
-                <a:spcPct val="90000"/>
-              </a:lnSpc>
-              <a:spcBef>
-                <a:spcPts val="500"/>
-              </a:spcBef>
-              <a:buFont typeface="Arial" panose="020B0604020202020204" pitchFamily="34" charset="0"/>
-              <a:buChar char="•"/>
-              <a:defRPr sz="1800" kern="1200">
-                <a:solidFill>
-                  <a:schemeClr val="tx1"/>
-                </a:solidFill>
-                <a:latin typeface="+mn-lt"/>
-                <a:ea typeface="+mn-ea"/>
-                <a:cs typeface="+mn-cs"/>
-              </a:defRPr>
-            </a:lvl8pPr>
-            <a:lvl9pPr marL="3886200" indent="-228600" algn="l" defTabSz="914400" rtl="0" eaLnBrk="1" latinLnBrk="1" hangingPunct="1">
-              <a:lnSpc>
-                <a:spcPct val="90000"/>
-              </a:lnSpc>
-              <a:spcBef>
-                <a:spcPts val="500"/>
-              </a:spcBef>
-              <a:buFont typeface="Arial" panose="020B0604020202020204" pitchFamily="34" charset="0"/>
-              <a:buChar char="•"/>
-              <a:defRPr sz="1800" kern="1200">
-                <a:solidFill>
-                  <a:schemeClr val="tx1"/>
-                </a:solidFill>
-                <a:latin typeface="+mn-lt"/>
-                <a:ea typeface="+mn-ea"/>
-                <a:cs typeface="+mn-cs"/>
-              </a:defRPr>
-            </a:lvl9pPr>
-          </a:lstStyle>
-          <a:p>
-            <a:pPr marL="0" indent="0" algn="ctr">
-              <a:spcBef>
-                <a:spcPts val="0"/>
-              </a:spcBef>
-              <a:buClr>
-                <a:schemeClr val="lt1"/>
-              </a:buClr>
-              <a:buSzPts val="4000"/>
-              <a:buNone/>
-            </a:pPr>
-            <a:r>
-              <a:rPr lang="en-US" altLang="ko-KR" sz="6000" dirty="0">
-                <a:solidFill>
-                  <a:schemeClr val="bg1"/>
-                </a:solidFill>
-                <a:latin typeface="프리젠테이션 7 Bold" pitchFamily="2" charset="-127"/>
-                <a:ea typeface="프리젠테이션 7 Bold" pitchFamily="2" charset="-127"/>
-              </a:rPr>
-              <a:t>Thank You</a:t>
-            </a:r>
-          </a:p>
-        </p:txBody>
-      </p:sp>
-      <p:pic>
-        <p:nvPicPr>
-          <p:cNvPr id="28" name="그림 27"/>
-          <p:cNvPicPr>
-            <a:picLocks noChangeAspect="1"/>
-          </p:cNvPicPr>
-          <p:nvPr/>
-        </p:nvPicPr>
-        <p:blipFill>
-          <a:blip r:embed="rId2" cstate="print">
-            <a:extLst>
-              <a:ext uri="{28A0092B-C50C-407E-A947-70E740481C1C}">
-                <a14:useLocalDpi xmlns:a14="http://schemas.microsoft.com/office/drawing/2010/main" val="0"/>
-              </a:ext>
-            </a:extLst>
-          </a:blip>
-          <a:stretch>
-            <a:fillRect/>
-          </a:stretch>
-        </p:blipFill>
-        <p:spPr>
-          <a:xfrm>
-            <a:off x="5402036" y="378400"/>
-            <a:ext cx="1329872" cy="330546"/>
-          </a:xfrm>
-          <a:prstGeom prst="rect">
-            <a:avLst/>
-          </a:prstGeom>
-        </p:spPr>
-      </p:pic>
-      <p:sp>
-        <p:nvSpPr>
-          <p:cNvPr id="35" name="TextBox 34"/>
+          <a:lstStyle/>
+          <a:p>
+            <a:r>
+              <a:rPr sz="2000" b="1">
+                <a:solidFill>
+                  <a:srgbClr val="0043DA"/>
+                </a:solidFill>
+                <a:latin typeface="프리젠테이션 7"/>
+              </a:rPr>
+              <a:t>L08. Funnel</a:t>
+            </a:r>
+          </a:p>
+        </p:txBody>
+      </p:sp>
+      <p:sp>
+        <p:nvSpPr>
+          <p:cNvPr id="4" name="TextBox 3"/>
           <p:cNvSpPr txBox="1"/>
           <p:nvPr/>
         </p:nvSpPr>
         <p:spPr>
           <a:xfrm>
-            <a:off x="3398157" y="3870726"/>
-            <a:ext cx="5395685" cy="543635"/>
+            <a:off x="3760927" y="557784"/>
+            <a:ext cx="8431042" cy="932688"/>
           </a:xfrm>
           <a:prstGeom prst="rect">
             <a:avLst/>
@@ -9611,165 +12130,722 @@
           <a:noFill/>
         </p:spPr>
         <p:txBody>
-          <a:bodyPr wrap="square" lIns="0" tIns="0" rIns="0" bIns="0" rtlCol="0" anchor="ctr" anchorCtr="0">
-            <a:noAutofit/>
+          <a:bodyPr wrap="square">
+            <a:spAutoFit/>
           </a:bodyPr>
           <a:lstStyle/>
           <a:p>
-            <a:pPr latinLnBrk="0"/>
-            <a:r>
-              <a:rPr lang="en-US" altLang="ko-KR" sz="1600" dirty="0">
-                <a:ln>
-                  <a:solidFill>
-                    <a:schemeClr val="accent1">
-                      <a:alpha val="0"/>
-                    </a:schemeClr>
-                  </a:solidFill>
-                </a:ln>
-                <a:solidFill>
-                  <a:schemeClr val="bg1"/>
-                </a:solidFill>
-                <a:latin typeface="프리젠테이션 4 Regular" pitchFamily="2" charset="-127"/>
-                <a:ea typeface="프리젠테이션 4 Regular" pitchFamily="2" charset="-127"/>
-                <a:cs typeface="Pretendard" panose="02000503000000020004" pitchFamily="2" charset="-127"/>
-              </a:rPr>
-              <a:t>GS</a:t>
-            </a:r>
-            <a:r>
-              <a:rPr lang="ko-KR" altLang="en-US" sz="1600" dirty="0" err="1">
-                <a:ln>
-                  <a:solidFill>
-                    <a:schemeClr val="accent1">
-                      <a:alpha val="0"/>
-                    </a:schemeClr>
-                  </a:solidFill>
-                </a:ln>
-                <a:solidFill>
-                  <a:schemeClr val="bg1"/>
-                </a:solidFill>
-                <a:latin typeface="프리젠테이션 4 Regular" pitchFamily="2" charset="-127"/>
-                <a:ea typeface="프리젠테이션 4 Regular" pitchFamily="2" charset="-127"/>
-                <a:cs typeface="Pretendard" panose="02000503000000020004" pitchFamily="2" charset="-127"/>
-              </a:rPr>
-              <a:t>네오텍의</a:t>
-            </a:r>
-            <a:r>
-              <a:rPr lang="ko-KR" altLang="en-US" sz="1600" dirty="0">
-                <a:ln>
-                  <a:solidFill>
-                    <a:schemeClr val="accent1">
-                      <a:alpha val="0"/>
-                    </a:schemeClr>
-                  </a:solidFill>
-                </a:ln>
-                <a:solidFill>
-                  <a:schemeClr val="bg1"/>
-                </a:solidFill>
-                <a:latin typeface="프리젠테이션 4 Regular" pitchFamily="2" charset="-127"/>
-                <a:ea typeface="프리젠테이션 4 Regular" pitchFamily="2" charset="-127"/>
-                <a:cs typeface="Pretendard" panose="02000503000000020004" pitchFamily="2" charset="-127"/>
-              </a:rPr>
-              <a:t> </a:t>
-            </a:r>
-            <a:r>
-              <a:rPr lang="en-US" altLang="ko-KR" sz="1600" dirty="0">
-                <a:ln>
-                  <a:solidFill>
-                    <a:schemeClr val="accent1">
-                      <a:alpha val="0"/>
-                    </a:schemeClr>
-                  </a:solidFill>
-                </a:ln>
-                <a:solidFill>
-                  <a:schemeClr val="bg1"/>
-                </a:solidFill>
-                <a:latin typeface="프리젠테이션 4 Regular" pitchFamily="2" charset="-127"/>
-                <a:ea typeface="프리젠테이션 4 Regular" pitchFamily="2" charset="-127"/>
-                <a:cs typeface="Pretendard" panose="02000503000000020004" pitchFamily="2" charset="-127"/>
-              </a:rPr>
-              <a:t>IT</a:t>
-            </a:r>
-            <a:r>
-              <a:rPr lang="ko-KR" altLang="en-US" sz="1600" dirty="0">
-                <a:ln>
-                  <a:solidFill>
-                    <a:schemeClr val="accent1">
-                      <a:alpha val="0"/>
-                    </a:schemeClr>
-                  </a:solidFill>
-                </a:ln>
-                <a:solidFill>
-                  <a:schemeClr val="bg1"/>
-                </a:solidFill>
-                <a:latin typeface="프리젠테이션 4 Regular" pitchFamily="2" charset="-127"/>
-                <a:ea typeface="프리젠테이션 4 Regular" pitchFamily="2" charset="-127"/>
-                <a:cs typeface="Pretendard" panose="02000503000000020004" pitchFamily="2" charset="-127"/>
-              </a:rPr>
-              <a:t>서비스 브랜드 </a:t>
-            </a:r>
-            <a:r>
-              <a:rPr lang="en-US" altLang="ko-KR" sz="1600" dirty="0" err="1">
-                <a:ln>
-                  <a:solidFill>
-                    <a:schemeClr val="accent1">
-                      <a:alpha val="0"/>
-                    </a:schemeClr>
-                  </a:solidFill>
-                </a:ln>
-                <a:solidFill>
-                  <a:schemeClr val="bg1"/>
-                </a:solidFill>
-                <a:latin typeface="프리젠테이션 4 Regular" pitchFamily="2" charset="-127"/>
-                <a:ea typeface="프리젠테이션 4 Regular" pitchFamily="2" charset="-127"/>
-                <a:cs typeface="Pretendard" panose="02000503000000020004" pitchFamily="2" charset="-127"/>
-              </a:rPr>
-              <a:t>WiseN</a:t>
-            </a:r>
-            <a:r>
-              <a:rPr lang="ko-KR" altLang="en-US" sz="1600" dirty="0">
-                <a:ln>
-                  <a:solidFill>
-                    <a:schemeClr val="accent1">
-                      <a:alpha val="0"/>
-                    </a:schemeClr>
-                  </a:solidFill>
-                </a:ln>
-                <a:solidFill>
-                  <a:schemeClr val="bg1"/>
-                </a:solidFill>
-                <a:latin typeface="프리젠테이션 4 Regular" pitchFamily="2" charset="-127"/>
-                <a:ea typeface="프리젠테이션 4 Regular" pitchFamily="2" charset="-127"/>
-                <a:cs typeface="Pretendard" panose="02000503000000020004" pitchFamily="2" charset="-127"/>
-              </a:rPr>
-              <a:t>으로 진정한 프리미엄을 경험하세요</a:t>
-            </a:r>
-            <a:r>
-              <a:rPr lang="en-US" altLang="ko-KR" sz="1600" dirty="0">
-                <a:ln>
-                  <a:solidFill>
-                    <a:schemeClr val="accent1">
-                      <a:alpha val="0"/>
-                    </a:schemeClr>
-                  </a:solidFill>
-                </a:ln>
-                <a:solidFill>
-                  <a:schemeClr val="bg1"/>
-                </a:solidFill>
-                <a:latin typeface="프리젠테이션 4 Regular" pitchFamily="2" charset="-127"/>
-                <a:ea typeface="프리젠테이션 4 Regular" pitchFamily="2" charset="-127"/>
-                <a:cs typeface="Pretendard" panose="02000503000000020004" pitchFamily="2" charset="-127"/>
-              </a:rPr>
-              <a:t>.</a:t>
+            <a:r>
+              <a:rPr sz="1200" b="0">
+                <a:solidFill>
+                  <a:srgbClr val="000000"/>
+                </a:solidFill>
+                <a:latin typeface="프리젠테이션 5"/>
+              </a:rPr>
+              <a:t>깔때기 다이어그램 — 단계별 필터링으로 최적 기술 선택</a:t>
+            </a:r>
+          </a:p>
+        </p:txBody>
+      </p:sp>
+      <p:sp>
+        <p:nvSpPr>
+          <p:cNvPr id="5" name="TextBox 4"/>
+          <p:cNvSpPr txBox="1"/>
+          <p:nvPr/>
+        </p:nvSpPr>
+        <p:spPr>
+          <a:xfrm>
+            <a:off x="457200" y="1600200"/>
+            <a:ext cx="11734495" cy="320040"/>
+          </a:xfrm>
+          <a:prstGeom prst="rect">
+            <a:avLst/>
+          </a:prstGeom>
+          <a:noFill/>
+        </p:spPr>
+        <p:txBody>
+          <a:bodyPr wrap="square">
+            <a:spAutoFit/>
+          </a:bodyPr>
+          <a:lstStyle/>
+          <a:p>
+            <a:r>
+              <a:rPr sz="1600" b="1">
+                <a:solidFill>
+                  <a:srgbClr val="0043DA"/>
+                </a:solidFill>
+                <a:latin typeface="프리젠테이션 7"/>
+              </a:rPr>
+              <a:t>MSK 도입 의사결정 깔때기</a:t>
+            </a:r>
+          </a:p>
+        </p:txBody>
+      </p:sp>
+      <p:sp>
+        <p:nvSpPr>
+          <p:cNvPr id="6" name="TextBox 5"/>
+          <p:cNvSpPr txBox="1"/>
+          <p:nvPr/>
+        </p:nvSpPr>
+        <p:spPr>
+          <a:xfrm>
+            <a:off x="457200" y="1966874"/>
+            <a:ext cx="11734495" cy="274320"/>
+          </a:xfrm>
+          <a:prstGeom prst="rect">
+            <a:avLst/>
+          </a:prstGeom>
+          <a:noFill/>
+        </p:spPr>
+        <p:txBody>
+          <a:bodyPr wrap="square">
+            <a:spAutoFit/>
+          </a:bodyPr>
+          <a:lstStyle/>
+          <a:p>
+            <a:r>
+              <a:rPr sz="1300" b="0">
+                <a:solidFill>
+                  <a:srgbClr val="404040"/>
+                </a:solidFill>
+                <a:latin typeface="프리젠테이션 5"/>
+              </a:rPr>
+              <a:t>후보 기술부터 최종 선택까지 4가지 평가 기준으로 필터링</a:t>
+            </a:r>
+          </a:p>
+        </p:txBody>
+      </p:sp>
+      <p:sp>
+        <p:nvSpPr>
+          <p:cNvPr id="7" name="Rounded Rectangle 6"/>
+          <p:cNvSpPr/>
+          <p:nvPr/>
+        </p:nvSpPr>
+        <p:spPr>
+          <a:xfrm>
+            <a:off x="457200" y="2702052"/>
+            <a:ext cx="7315200" cy="694944"/>
+          </a:xfrm>
+          <a:prstGeom prst="roundRect">
+            <a:avLst/>
+          </a:prstGeom>
+          <a:solidFill>
+            <a:srgbClr val="E6F0FF"/>
+          </a:solidFill>
+          <a:ln>
+            <a:solidFill>
+              <a:srgbClr val="E6F0FF"/>
+            </a:solidFill>
+          </a:ln>
+        </p:spPr>
+        <p:style>
+          <a:lnRef idx="1">
+            <a:schemeClr val="accent1"/>
+          </a:lnRef>
+          <a:fillRef idx="3">
+            <a:schemeClr val="accent1"/>
+          </a:fillRef>
+          <a:effectRef idx="2">
+            <a:schemeClr val="accent1"/>
+          </a:effectRef>
+          <a:fontRef idx="minor">
+            <a:schemeClr val="lt1"/>
+          </a:fontRef>
+        </p:style>
+        <p:txBody>
+          <a:bodyPr rtlCol="0" anchor="ctr"/>
+          <a:lstStyle/>
+          <a:p>
+            <a:pPr algn="ctr"/>
+          </a:p>
+        </p:txBody>
+      </p:sp>
+      <p:sp>
+        <p:nvSpPr>
+          <p:cNvPr id="8" name="Rounded Rectangle 7"/>
+          <p:cNvSpPr/>
+          <p:nvPr/>
+        </p:nvSpPr>
+        <p:spPr>
+          <a:xfrm>
+            <a:off x="1005840" y="3451860"/>
+            <a:ext cx="6217920" cy="694944"/>
+          </a:xfrm>
+          <a:prstGeom prst="roundRect">
+            <a:avLst/>
+          </a:prstGeom>
+          <a:solidFill>
+            <a:srgbClr val="C8DCFF"/>
+          </a:solidFill>
+          <a:ln>
+            <a:solidFill>
+              <a:srgbClr val="C8DCFF"/>
+            </a:solidFill>
+          </a:ln>
+        </p:spPr>
+        <p:style>
+          <a:lnRef idx="1">
+            <a:schemeClr val="accent1"/>
+          </a:lnRef>
+          <a:fillRef idx="3">
+            <a:schemeClr val="accent1"/>
+          </a:fillRef>
+          <a:effectRef idx="2">
+            <a:schemeClr val="accent1"/>
+          </a:effectRef>
+          <a:fontRef idx="minor">
+            <a:schemeClr val="lt1"/>
+          </a:fontRef>
+        </p:style>
+        <p:txBody>
+          <a:bodyPr rtlCol="0" anchor="ctr"/>
+          <a:lstStyle/>
+          <a:p>
+            <a:pPr algn="ctr"/>
+          </a:p>
+        </p:txBody>
+      </p:sp>
+      <p:sp>
+        <p:nvSpPr>
+          <p:cNvPr id="9" name="Rounded Rectangle 8"/>
+          <p:cNvSpPr/>
+          <p:nvPr/>
+        </p:nvSpPr>
+        <p:spPr>
+          <a:xfrm>
+            <a:off x="1554480" y="4200753"/>
+            <a:ext cx="5120640" cy="694944"/>
+          </a:xfrm>
+          <a:prstGeom prst="roundRect">
+            <a:avLst/>
+          </a:prstGeom>
+          <a:solidFill>
+            <a:srgbClr val="8AB4F8"/>
+          </a:solidFill>
+          <a:ln>
+            <a:solidFill>
+              <a:srgbClr val="8AB4F8"/>
+            </a:solidFill>
+          </a:ln>
+        </p:spPr>
+        <p:style>
+          <a:lnRef idx="1">
+            <a:schemeClr val="accent1"/>
+          </a:lnRef>
+          <a:fillRef idx="3">
+            <a:schemeClr val="accent1"/>
+          </a:fillRef>
+          <a:effectRef idx="2">
+            <a:schemeClr val="accent1"/>
+          </a:effectRef>
+          <a:fontRef idx="minor">
+            <a:schemeClr val="lt1"/>
+          </a:fontRef>
+        </p:style>
+        <p:txBody>
+          <a:bodyPr rtlCol="0" anchor="ctr"/>
+          <a:lstStyle/>
+          <a:p>
+            <a:pPr algn="ctr"/>
+          </a:p>
+        </p:txBody>
+      </p:sp>
+      <p:sp>
+        <p:nvSpPr>
+          <p:cNvPr id="10" name="Rounded Rectangle 9"/>
+          <p:cNvSpPr/>
+          <p:nvPr/>
+        </p:nvSpPr>
+        <p:spPr>
+          <a:xfrm>
+            <a:off x="2103120" y="4950561"/>
+            <a:ext cx="4023360" cy="694944"/>
+          </a:xfrm>
+          <a:prstGeom prst="roundRect">
+            <a:avLst/>
+          </a:prstGeom>
+          <a:solidFill>
+            <a:srgbClr val="3571F5"/>
+          </a:solidFill>
+          <a:ln>
+            <a:solidFill>
+              <a:srgbClr val="3571F5"/>
+            </a:solidFill>
+          </a:ln>
+        </p:spPr>
+        <p:style>
+          <a:lnRef idx="1">
+            <a:schemeClr val="accent1"/>
+          </a:lnRef>
+          <a:fillRef idx="3">
+            <a:schemeClr val="accent1"/>
+          </a:fillRef>
+          <a:effectRef idx="2">
+            <a:schemeClr val="accent1"/>
+          </a:effectRef>
+          <a:fontRef idx="minor">
+            <a:schemeClr val="lt1"/>
+          </a:fontRef>
+        </p:style>
+        <p:txBody>
+          <a:bodyPr rtlCol="0" anchor="ctr"/>
+          <a:lstStyle/>
+          <a:p>
+            <a:pPr algn="ctr"/>
+          </a:p>
+        </p:txBody>
+      </p:sp>
+      <p:sp>
+        <p:nvSpPr>
+          <p:cNvPr id="11" name="Rounded Rectangle 10"/>
+          <p:cNvSpPr/>
+          <p:nvPr/>
+        </p:nvSpPr>
+        <p:spPr>
+          <a:xfrm>
+            <a:off x="2651760" y="5700369"/>
+            <a:ext cx="2926080" cy="694944"/>
+          </a:xfrm>
+          <a:prstGeom prst="roundRect">
+            <a:avLst/>
+          </a:prstGeom>
+          <a:solidFill>
+            <a:srgbClr val="0043DA"/>
+          </a:solidFill>
+          <a:ln>
+            <a:solidFill>
+              <a:srgbClr val="0043DA"/>
+            </a:solidFill>
+          </a:ln>
+        </p:spPr>
+        <p:style>
+          <a:lnRef idx="1">
+            <a:schemeClr val="accent1"/>
+          </a:lnRef>
+          <a:fillRef idx="3">
+            <a:schemeClr val="accent1"/>
+          </a:fillRef>
+          <a:effectRef idx="2">
+            <a:schemeClr val="accent1"/>
+          </a:effectRef>
+          <a:fontRef idx="minor">
+            <a:schemeClr val="lt1"/>
+          </a:fontRef>
+        </p:style>
+        <p:txBody>
+          <a:bodyPr rtlCol="0" anchor="ctr"/>
+          <a:lstStyle/>
+          <a:p>
+            <a:pPr algn="ctr"/>
+          </a:p>
+        </p:txBody>
+      </p:sp>
+      <p:sp>
+        <p:nvSpPr>
+          <p:cNvPr id="12" name="TextBox 11"/>
+          <p:cNvSpPr txBox="1"/>
+          <p:nvPr/>
+        </p:nvSpPr>
+        <p:spPr>
+          <a:xfrm>
+            <a:off x="457200" y="2702052"/>
+            <a:ext cx="7315200" cy="694944"/>
+          </a:xfrm>
+          <a:prstGeom prst="rect">
+            <a:avLst/>
+          </a:prstGeom>
+          <a:noFill/>
+        </p:spPr>
+        <p:txBody>
+          <a:bodyPr wrap="square">
+            <a:spAutoFit/>
+          </a:bodyPr>
+          <a:lstStyle/>
+          <a:p>
+            <a:pPr algn="ctr"/>
+            <a:r>
+              <a:rPr sz="1300" b="1">
+                <a:solidFill>
+                  <a:srgbClr val="0043DA"/>
+                </a:solidFill>
+                <a:latin typeface="프리젠테이션 7"/>
+              </a:rPr>
+              <a:t>후보 기술 평가</a:t>
+            </a:r>
+          </a:p>
+          <a:p>
+            <a:pPr algn="ctr"/>
+            <a:r>
+              <a:rPr sz="1300" b="1">
+                <a:solidFill>
+                  <a:srgbClr val="0043DA"/>
+                </a:solidFill>
+                <a:latin typeface="프리젠테이션 7"/>
+              </a:rPr>
+              <a:t>Kafka · Kinesis · RabbitMQ · Pulsar</a:t>
+            </a:r>
+          </a:p>
+        </p:txBody>
+      </p:sp>
+      <p:sp>
+        <p:nvSpPr>
+          <p:cNvPr id="13" name="TextBox 12"/>
+          <p:cNvSpPr txBox="1"/>
+          <p:nvPr/>
+        </p:nvSpPr>
+        <p:spPr>
+          <a:xfrm>
+            <a:off x="1005840" y="3451860"/>
+            <a:ext cx="6217920" cy="694944"/>
+          </a:xfrm>
+          <a:prstGeom prst="rect">
+            <a:avLst/>
+          </a:prstGeom>
+          <a:noFill/>
+        </p:spPr>
+        <p:txBody>
+          <a:bodyPr wrap="square">
+            <a:spAutoFit/>
+          </a:bodyPr>
+          <a:lstStyle/>
+          <a:p>
+            <a:pPr algn="ctr"/>
+            <a:r>
+              <a:rPr sz="1300" b="1">
+                <a:solidFill>
+                  <a:srgbClr val="0043DA"/>
+                </a:solidFill>
+                <a:latin typeface="프리젠테이션 7"/>
+              </a:rPr>
+              <a:t>기술 적합성</a:t>
+            </a:r>
+          </a:p>
+          <a:p>
+            <a:pPr algn="ctr"/>
+            <a:r>
+              <a:rPr sz="1300" b="1">
+                <a:solidFill>
+                  <a:srgbClr val="0043DA"/>
+                </a:solidFill>
+                <a:latin typeface="프리젠테이션 7"/>
+              </a:rPr>
+              <a:t>처리량 100MB/s · 지연 10ms · 내구성 99.99%</a:t>
+            </a:r>
+          </a:p>
+        </p:txBody>
+      </p:sp>
+      <p:sp>
+        <p:nvSpPr>
+          <p:cNvPr id="14" name="TextBox 13"/>
+          <p:cNvSpPr txBox="1"/>
+          <p:nvPr/>
+        </p:nvSpPr>
+        <p:spPr>
+          <a:xfrm>
+            <a:off x="1554480" y="4200753"/>
+            <a:ext cx="5120640" cy="694944"/>
+          </a:xfrm>
+          <a:prstGeom prst="rect">
+            <a:avLst/>
+          </a:prstGeom>
+          <a:noFill/>
+        </p:spPr>
+        <p:txBody>
+          <a:bodyPr wrap="square">
+            <a:spAutoFit/>
+          </a:bodyPr>
+          <a:lstStyle/>
+          <a:p>
+            <a:pPr algn="ctr"/>
+            <a:r>
+              <a:rPr sz="1300" b="1">
+                <a:solidFill>
+                  <a:srgbClr val="FFFFFF"/>
+                </a:solidFill>
+                <a:latin typeface="프리젠테이션 7"/>
+              </a:rPr>
+              <a:t>운영 효율성</a:t>
+            </a:r>
+          </a:p>
+          <a:p>
+            <a:pPr algn="ctr"/>
+            <a:r>
+              <a:rPr sz="1300" b="1">
+                <a:solidFill>
+                  <a:srgbClr val="FFFFFF"/>
+                </a:solidFill>
+                <a:latin typeface="프리젠테이션 7"/>
+              </a:rPr>
+              <a:t>관리형 서비스 · AWS 통합 · 비용 최적화</a:t>
+            </a:r>
+          </a:p>
+        </p:txBody>
+      </p:sp>
+      <p:sp>
+        <p:nvSpPr>
+          <p:cNvPr id="15" name="TextBox 14"/>
+          <p:cNvSpPr txBox="1"/>
+          <p:nvPr/>
+        </p:nvSpPr>
+        <p:spPr>
+          <a:xfrm>
+            <a:off x="2103120" y="4950561"/>
+            <a:ext cx="4023360" cy="694944"/>
+          </a:xfrm>
+          <a:prstGeom prst="rect">
+            <a:avLst/>
+          </a:prstGeom>
+          <a:noFill/>
+        </p:spPr>
+        <p:txBody>
+          <a:bodyPr wrap="square">
+            <a:spAutoFit/>
+          </a:bodyPr>
+          <a:lstStyle/>
+          <a:p>
+            <a:pPr algn="ctr"/>
+            <a:r>
+              <a:rPr sz="1300" b="1">
+                <a:solidFill>
+                  <a:srgbClr val="FFFFFF"/>
+                </a:solidFill>
+                <a:latin typeface="프리젠테이션 7"/>
+              </a:rPr>
+              <a:t>보안/컴플라이언스</a:t>
+            </a:r>
+          </a:p>
+          <a:p>
+            <a:pPr algn="ctr"/>
+            <a:r>
+              <a:rPr sz="1300" b="1">
+                <a:solidFill>
+                  <a:srgbClr val="FFFFFF"/>
+                </a:solidFill>
+                <a:latin typeface="프리젠테이션 7"/>
+              </a:rPr>
+              <a:t>IAM · TLS 암호화 · VPC 격리 · FIPS 140-2</a:t>
+            </a:r>
+          </a:p>
+        </p:txBody>
+      </p:sp>
+      <p:sp>
+        <p:nvSpPr>
+          <p:cNvPr id="16" name="TextBox 15"/>
+          <p:cNvSpPr txBox="1"/>
+          <p:nvPr/>
+        </p:nvSpPr>
+        <p:spPr>
+          <a:xfrm>
+            <a:off x="2651760" y="5700369"/>
+            <a:ext cx="2926080" cy="694944"/>
+          </a:xfrm>
+          <a:prstGeom prst="rect">
+            <a:avLst/>
+          </a:prstGeom>
+          <a:noFill/>
+        </p:spPr>
+        <p:txBody>
+          <a:bodyPr wrap="square">
+            <a:spAutoFit/>
+          </a:bodyPr>
+          <a:lstStyle/>
+          <a:p>
+            <a:pPr algn="ctr"/>
+            <a:r>
+              <a:rPr sz="1300" b="1">
+                <a:solidFill>
+                  <a:srgbClr val="FFFFFF"/>
+                </a:solidFill>
+                <a:latin typeface="프리젠테이션 7"/>
+              </a:rPr>
+              <a:t>Amazon MSK 선택</a:t>
+            </a:r>
+          </a:p>
+          <a:p>
+            <a:pPr algn="ctr"/>
+            <a:r>
+              <a:rPr sz="1300" b="1">
+                <a:solidFill>
+                  <a:srgbClr val="FFFFFF"/>
+                </a:solidFill>
+                <a:latin typeface="프리젠테이션 7"/>
+              </a:rPr>
+              <a:t>완전관리형 Kafka · 멀티AZ · AWS 네이티브</a:t>
+            </a:r>
+          </a:p>
+        </p:txBody>
+      </p:sp>
+      <p:sp>
+        <p:nvSpPr>
+          <p:cNvPr id="17" name="TextBox 16"/>
+          <p:cNvSpPr txBox="1"/>
+          <p:nvPr/>
+        </p:nvSpPr>
+        <p:spPr>
+          <a:xfrm>
+            <a:off x="8046720" y="2702052"/>
+            <a:ext cx="3687775" cy="694944"/>
+          </a:xfrm>
+          <a:prstGeom prst="rect">
+            <a:avLst/>
+          </a:prstGeom>
+          <a:noFill/>
+        </p:spPr>
+        <p:txBody>
+          <a:bodyPr wrap="square">
+            <a:spAutoFit/>
+          </a:bodyPr>
+          <a:lstStyle/>
+          <a:p>
+            <a:r>
+              <a:rPr sz="1100" b="0">
+                <a:solidFill>
+                  <a:srgbClr val="404040"/>
+                </a:solidFill>
+                <a:latin typeface="프리젠테이션 5"/>
+              </a:rPr>
+              <a:t>4개 기술 초기 검토</a:t>
+            </a:r>
+          </a:p>
+        </p:txBody>
+      </p:sp>
+      <p:sp>
+        <p:nvSpPr>
+          <p:cNvPr id="18" name="TextBox 17"/>
+          <p:cNvSpPr txBox="1"/>
+          <p:nvPr/>
+        </p:nvSpPr>
+        <p:spPr>
+          <a:xfrm>
+            <a:off x="8046720" y="3451860"/>
+            <a:ext cx="3687775" cy="694944"/>
+          </a:xfrm>
+          <a:prstGeom prst="rect">
+            <a:avLst/>
+          </a:prstGeom>
+          <a:noFill/>
+        </p:spPr>
+        <p:txBody>
+          <a:bodyPr wrap="square">
+            <a:spAutoFit/>
+          </a:bodyPr>
+          <a:lstStyle/>
+          <a:p>
+            <a:r>
+              <a:rPr sz="1100" b="0">
+                <a:solidFill>
+                  <a:srgbClr val="404040"/>
+                </a:solidFill>
+                <a:latin typeface="프리젠테이션 5"/>
+              </a:rPr>
+              <a:t>Kafka · Kinesis 통과</a:t>
+            </a:r>
+          </a:p>
+        </p:txBody>
+      </p:sp>
+      <p:sp>
+        <p:nvSpPr>
+          <p:cNvPr id="19" name="TextBox 18"/>
+          <p:cNvSpPr txBox="1"/>
+          <p:nvPr/>
+        </p:nvSpPr>
+        <p:spPr>
+          <a:xfrm>
+            <a:off x="8046720" y="4200753"/>
+            <a:ext cx="3687775" cy="694944"/>
+          </a:xfrm>
+          <a:prstGeom prst="rect">
+            <a:avLst/>
+          </a:prstGeom>
+          <a:noFill/>
+        </p:spPr>
+        <p:txBody>
+          <a:bodyPr wrap="square">
+            <a:spAutoFit/>
+          </a:bodyPr>
+          <a:lstStyle/>
+          <a:p>
+            <a:r>
+              <a:rPr sz="1100" b="0">
+                <a:solidFill>
+                  <a:srgbClr val="404040"/>
+                </a:solidFill>
+                <a:latin typeface="프리젠테이션 5"/>
+              </a:rPr>
+              <a:t>Amazon MSK · Kinesis 잔류</a:t>
+            </a:r>
+          </a:p>
+        </p:txBody>
+      </p:sp>
+      <p:sp>
+        <p:nvSpPr>
+          <p:cNvPr id="20" name="TextBox 19"/>
+          <p:cNvSpPr txBox="1"/>
+          <p:nvPr/>
+        </p:nvSpPr>
+        <p:spPr>
+          <a:xfrm>
+            <a:off x="8046720" y="4950561"/>
+            <a:ext cx="3687775" cy="694944"/>
+          </a:xfrm>
+          <a:prstGeom prst="rect">
+            <a:avLst/>
+          </a:prstGeom>
+          <a:noFill/>
+        </p:spPr>
+        <p:txBody>
+          <a:bodyPr wrap="square">
+            <a:spAutoFit/>
+          </a:bodyPr>
+          <a:lstStyle/>
+          <a:p>
+            <a:r>
+              <a:rPr sz="1100" b="0">
+                <a:solidFill>
+                  <a:srgbClr val="404040"/>
+                </a:solidFill>
+                <a:latin typeface="프리젠테이션 5"/>
+              </a:rPr>
+              <a:t>MSK 단독 충족</a:t>
+            </a:r>
+          </a:p>
+        </p:txBody>
+      </p:sp>
+      <p:sp>
+        <p:nvSpPr>
+          <p:cNvPr id="21" name="TextBox 20"/>
+          <p:cNvSpPr txBox="1"/>
+          <p:nvPr/>
+        </p:nvSpPr>
+        <p:spPr>
+          <a:xfrm>
+            <a:off x="8046720" y="5700369"/>
+            <a:ext cx="3687775" cy="694944"/>
+          </a:xfrm>
+          <a:prstGeom prst="rect">
+            <a:avLst/>
+          </a:prstGeom>
+          <a:noFill/>
+        </p:spPr>
+        <p:txBody>
+          <a:bodyPr wrap="square">
+            <a:spAutoFit/>
+          </a:bodyPr>
+          <a:lstStyle/>
+          <a:p>
+            <a:r>
+              <a:rPr sz="1200" b="1">
+                <a:solidFill>
+                  <a:srgbClr val="0043DA"/>
+                </a:solidFill>
+                <a:latin typeface="프리젠테이션 7"/>
+              </a:rPr>
+              <a:t>최종 채택 결정</a:t>
             </a:r>
           </a:p>
         </p:txBody>
       </p:sp>
     </p:spTree>
-    <p:extLst>
-      <p:ext uri="{BB962C8B-B14F-4D97-AF65-F5344CB8AC3E}">
-        <p14:creationId xmlns:p14="http://schemas.microsoft.com/office/powerpoint/2010/main" val="3722360403"/>
-      </p:ext>
-    </p:extLst>
   </p:cSld>
   <p:clrMapOvr>
     <a:masterClrMapping/>

--- a/results/pptx/AWS_MSK_Expert_Intro.pptx
+++ b/results/pptx/AWS_MSK_Expert_Intro.pptx
@@ -3698,12 +3698,12 @@
 <p:sld xmlns:a="http://schemas.openxmlformats.org/drawingml/2006/main" xmlns:p="http://schemas.openxmlformats.org/presentationml/2006/main" xmlns:r="http://schemas.openxmlformats.org/officeDocument/2006/relationships">
   <p:cSld>
     <p:spTree>
-      <p:grpSpPr/>
       <p:nvGrpSpPr>
         <p:cNvPr id="1" name=""/>
         <p:cNvGrpSpPr/>
         <p:nvPr/>
       </p:nvGrpSpPr>
+      <p:grpSpPr/>
       <p:sp>
         <p:nvSpPr>
           <p:cNvPr id="2" name="Title 1"/>
@@ -4431,12 +4431,12 @@
 <p:sld xmlns:a="http://schemas.openxmlformats.org/drawingml/2006/main" xmlns:p="http://schemas.openxmlformats.org/presentationml/2006/main" xmlns:r="http://schemas.openxmlformats.org/officeDocument/2006/relationships">
   <p:cSld>
     <p:spTree>
-      <p:grpSpPr/>
       <p:nvGrpSpPr>
         <p:cNvPr id="1" name=""/>
         <p:cNvGrpSpPr/>
         <p:nvPr/>
       </p:nvGrpSpPr>
+      <p:grpSpPr/>
       <p:sp>
         <p:nvSpPr>
           <p:cNvPr id="2" name="Text Placeholder 1"/>

--- a/results/pptx/AWS_MSK_Expert_Intro.pptx
+++ b/results/pptx/AWS_MSK_Expert_Intro.pptx
@@ -18,6 +18,7 @@
     <p:sldId id="365" r:id="rId6"/>
     <p:sldId id="366" r:id="rId7"/>
     <p:sldId id="367" r:id="rId8"/>
+    <p:sldId id="374" r:id="rId20"/>
     <p:sldId id="369" r:id="rId16"/>
     <p:sldId id="371" r:id="rId18"/>
     <p:sldId id="372" r:id="rId17"/>
@@ -5539,6 +5540,1338 @@
 </p:sld>
 </file>
 
+<file path=ppt/slides/slide13.xml><?xml version="1.0" encoding="utf-8"?>
+<p:sld xmlns:a="http://schemas.openxmlformats.org/drawingml/2006/main" xmlns:p="http://schemas.openxmlformats.org/presentationml/2006/main" xmlns:r="http://schemas.openxmlformats.org/officeDocument/2006/relationships">
+  <p:cSld>
+    <p:spTree>
+      <p:nvGrpSpPr>
+        <p:cNvPr id="1" name=""/>
+        <p:cNvGrpSpPr/>
+        <p:nvPr/>
+      </p:nvGrpSpPr>
+      <p:grpSpPr/>
+      <p:sp>
+        <p:nvSpPr>
+          <p:cNvPr id="2" name="Title 1"/>
+          <p:cNvSpPr>
+            <a:spLocks noGrp="1"/>
+          </p:cNvSpPr>
+          <p:nvPr>
+            <p:ph type="ctrTitle"/>
+          </p:nvPr>
+        </p:nvSpPr>
+        <p:spPr/>
+        <p:txBody>
+          <a:bodyPr/>
+          <a:lstStyle/>
+          <a:p>
+            <a:r>
+              <a:t>L06 Zigzag Timeline</a:t>
+            </a:r>
+          </a:p>
+        </p:txBody>
+      </p:sp>
+      <p:sp>
+        <p:nvSpPr>
+          <p:cNvPr id="3" name="Subtitle 2"/>
+          <p:cNvSpPr>
+            <a:spLocks noGrp="1"/>
+          </p:cNvSpPr>
+          <p:nvPr>
+            <p:ph type="subTitle" idx="1"/>
+          </p:nvPr>
+        </p:nvSpPr>
+        <p:spPr/>
+        <p:txBody>
+          <a:bodyPr/>
+          <a:lstStyle/>
+          <a:p/>
+        </p:txBody>
+      </p:sp>
+      <p:sp>
+        <p:nvSpPr>
+          <p:cNvPr id="4" name="TextBox 3"/>
+          <p:cNvSpPr txBox="1"/>
+          <p:nvPr/>
+        </p:nvSpPr>
+        <p:spPr>
+          <a:xfrm>
+            <a:off x="354787" y="557784"/>
+            <a:ext cx="2720340" cy="932688"/>
+          </a:xfrm>
+          <a:prstGeom prst="rect">
+            <a:avLst/>
+          </a:prstGeom>
+          <a:noFill/>
+        </p:spPr>
+        <p:txBody>
+          <a:bodyPr wrap="square">
+            <a:spAutoFit/>
+          </a:bodyPr>
+          <a:lstStyle/>
+          <a:p>
+            <a:r>
+              <a:rPr sz="2000" b="1">
+                <a:solidFill>
+                  <a:srgbClr val="000000"/>
+                </a:solidFill>
+                <a:latin typeface="Freesentation 7 Bold"/>
+              </a:rPr>
+              <a:t>L06. Zigzag Timeline</a:t>
+            </a:r>
+          </a:p>
+        </p:txBody>
+      </p:sp>
+      <p:sp>
+        <p:nvSpPr>
+          <p:cNvPr id="5" name="TextBox 4"/>
+          <p:cNvSpPr txBox="1"/>
+          <p:nvPr/>
+        </p:nvSpPr>
+        <p:spPr>
+          <a:xfrm>
+            <a:off x="3762756" y="558698"/>
+            <a:ext cx="7550200" cy="938174"/>
+          </a:xfrm>
+          <a:prstGeom prst="rect">
+            <a:avLst/>
+          </a:prstGeom>
+          <a:noFill/>
+        </p:spPr>
+        <p:txBody>
+          <a:bodyPr wrap="square">
+            <a:spAutoFit/>
+          </a:bodyPr>
+          <a:lstStyle/>
+          <a:p>
+            <a:r>
+              <a:rPr sz="1200">
+                <a:solidFill>
+                  <a:srgbClr val="4A4A4A"/>
+                </a:solidFill>
+                <a:latin typeface="Freesentation 5 Medium"/>
+              </a:rPr>
+              <a:t>S자 지그재그 타임라인 — 시간 흐름 시각화</a:t>
+            </a:r>
+          </a:p>
+        </p:txBody>
+      </p:sp>
+      <p:sp>
+        <p:nvSpPr>
+          <p:cNvPr id="6" name="Rectangle 5"/>
+          <p:cNvSpPr/>
+          <p:nvPr/>
+        </p:nvSpPr>
+        <p:spPr>
+          <a:xfrm>
+            <a:off x="355701" y="1496872"/>
+            <a:ext cx="11481206" cy="9144"/>
+          </a:xfrm>
+          <a:prstGeom prst="rect">
+            <a:avLst/>
+          </a:prstGeom>
+          <a:solidFill>
+            <a:srgbClr val="DCDCDC"/>
+          </a:solidFill>
+          <a:ln>
+            <a:solidFill>
+              <a:srgbClr val="DCDCDC"/>
+            </a:solidFill>
+          </a:ln>
+        </p:spPr>
+        <p:style>
+          <a:lnRef idx="1">
+            <a:schemeClr val="accent1"/>
+          </a:lnRef>
+          <a:fillRef idx="3">
+            <a:schemeClr val="accent1"/>
+          </a:fillRef>
+          <a:effectRef idx="2">
+            <a:schemeClr val="accent1"/>
+          </a:effectRef>
+          <a:fontRef idx="minor">
+            <a:schemeClr val="lt1"/>
+          </a:fontRef>
+        </p:style>
+        <p:txBody>
+          <a:bodyPr rtlCol="0" anchor="ctr"/>
+          <a:lstStyle/>
+          <a:p>
+            <a:pPr algn="ctr"/>
+          </a:p>
+        </p:txBody>
+      </p:sp>
+      <p:sp>
+        <p:nvSpPr>
+          <p:cNvPr id="7" name="TextBox 6"/>
+          <p:cNvSpPr txBox="1"/>
+          <p:nvPr/>
+        </p:nvSpPr>
+        <p:spPr>
+          <a:xfrm>
+            <a:off x="457200" y="1600200"/>
+            <a:ext cx="11277295" cy="320040"/>
+          </a:xfrm>
+          <a:prstGeom prst="rect">
+            <a:avLst/>
+          </a:prstGeom>
+          <a:noFill/>
+        </p:spPr>
+        <p:txBody>
+          <a:bodyPr wrap="square">
+            <a:spAutoFit/>
+          </a:bodyPr>
+          <a:lstStyle/>
+          <a:p>
+            <a:r>
+              <a:rPr sz="1600" b="0">
+                <a:solidFill>
+                  <a:srgbClr val="0043DA"/>
+                </a:solidFill>
+                <a:latin typeface="Freesentation"/>
+              </a:rPr>
+              <a:t>온프레미스 Kafka → AWS MSK 전환 로드맵</a:t>
+            </a:r>
+          </a:p>
+        </p:txBody>
+      </p:sp>
+      <p:sp>
+        <p:nvSpPr>
+          <p:cNvPr id="8" name="TextBox 7"/>
+          <p:cNvSpPr txBox="1"/>
+          <p:nvPr/>
+        </p:nvSpPr>
+        <p:spPr>
+          <a:xfrm>
+            <a:off x="457200" y="1965960"/>
+            <a:ext cx="11277295" cy="274320"/>
+          </a:xfrm>
+          <a:prstGeom prst="rect">
+            <a:avLst/>
+          </a:prstGeom>
+          <a:noFill/>
+        </p:spPr>
+        <p:txBody>
+          <a:bodyPr wrap="square">
+            <a:spAutoFit/>
+          </a:bodyPr>
+          <a:lstStyle/>
+          <a:p>
+            <a:r>
+              <a:rPr sz="1300">
+                <a:solidFill>
+                  <a:srgbClr val="4A4A4A"/>
+                </a:solidFill>
+                <a:latin typeface="Freesentation"/>
+              </a:rPr>
+              <a:t>현황 분석부터 안정화까지 5분기 전환 타임라인</a:t>
+            </a:r>
+          </a:p>
+        </p:txBody>
+      </p:sp>
+      <p:sp>
+        <p:nvSpPr>
+          <p:cNvPr id="9" name="Rectangle 8"/>
+          <p:cNvSpPr/>
+          <p:nvPr/>
+        </p:nvSpPr>
+        <p:spPr>
+          <a:xfrm>
+            <a:off x="457200" y="4114800"/>
+            <a:ext cx="11277295" cy="36576"/>
+          </a:xfrm>
+          <a:prstGeom prst="rect">
+            <a:avLst/>
+          </a:prstGeom>
+          <a:solidFill>
+            <a:srgbClr val="0043DA"/>
+          </a:solidFill>
+          <a:ln>
+            <a:solidFill>
+              <a:srgbClr val="0043DA"/>
+            </a:solidFill>
+          </a:ln>
+        </p:spPr>
+        <p:style>
+          <a:lnRef idx="1">
+            <a:schemeClr val="accent1"/>
+          </a:lnRef>
+          <a:fillRef idx="3">
+            <a:schemeClr val="accent1"/>
+          </a:fillRef>
+          <a:effectRef idx="2">
+            <a:schemeClr val="accent1"/>
+          </a:effectRef>
+          <a:fontRef idx="minor">
+            <a:schemeClr val="lt1"/>
+          </a:fontRef>
+        </p:style>
+        <p:txBody>
+          <a:bodyPr rtlCol="0" anchor="ctr"/>
+          <a:lstStyle/>
+          <a:p>
+            <a:pPr algn="ctr"/>
+          </a:p>
+        </p:txBody>
+      </p:sp>
+      <p:sp>
+        <p:nvSpPr>
+          <p:cNvPr id="10" name="Rectangle 9"/>
+          <p:cNvSpPr/>
+          <p:nvPr/>
+        </p:nvSpPr>
+        <p:spPr>
+          <a:xfrm>
+            <a:off x="15544" y="2286000"/>
+            <a:ext cx="2011680" cy="1645920"/>
+          </a:xfrm>
+          <a:prstGeom prst="rect">
+            <a:avLst/>
+          </a:prstGeom>
+          <a:solidFill>
+            <a:srgbClr val="F8F9FA"/>
+          </a:solidFill>
+          <a:ln>
+            <a:solidFill>
+              <a:srgbClr val="DCDCDC"/>
+            </a:solidFill>
+          </a:ln>
+        </p:spPr>
+        <p:style>
+          <a:lnRef idx="1">
+            <a:schemeClr val="accent1"/>
+          </a:lnRef>
+          <a:fillRef idx="3">
+            <a:schemeClr val="accent1"/>
+          </a:fillRef>
+          <a:effectRef idx="2">
+            <a:schemeClr val="accent1"/>
+          </a:effectRef>
+          <a:fontRef idx="minor">
+            <a:schemeClr val="lt1"/>
+          </a:fontRef>
+        </p:style>
+        <p:txBody>
+          <a:bodyPr rtlCol="0" anchor="ctr"/>
+          <a:lstStyle/>
+          <a:p>
+            <a:pPr algn="ctr"/>
+          </a:p>
+        </p:txBody>
+      </p:sp>
+      <p:sp>
+        <p:nvSpPr>
+          <p:cNvPr id="11" name="Rectangle 10"/>
+          <p:cNvSpPr/>
+          <p:nvPr/>
+        </p:nvSpPr>
+        <p:spPr>
+          <a:xfrm>
+            <a:off x="2270455" y="4297680"/>
+            <a:ext cx="2011680" cy="1645920"/>
+          </a:xfrm>
+          <a:prstGeom prst="rect">
+            <a:avLst/>
+          </a:prstGeom>
+          <a:solidFill>
+            <a:srgbClr val="F8F9FA"/>
+          </a:solidFill>
+          <a:ln>
+            <a:solidFill>
+              <a:srgbClr val="DCDCDC"/>
+            </a:solidFill>
+          </a:ln>
+        </p:spPr>
+        <p:style>
+          <a:lnRef idx="1">
+            <a:schemeClr val="accent1"/>
+          </a:lnRef>
+          <a:fillRef idx="3">
+            <a:schemeClr val="accent1"/>
+          </a:fillRef>
+          <a:effectRef idx="2">
+            <a:schemeClr val="accent1"/>
+          </a:effectRef>
+          <a:fontRef idx="minor">
+            <a:schemeClr val="lt1"/>
+          </a:fontRef>
+        </p:style>
+        <p:txBody>
+          <a:bodyPr rtlCol="0" anchor="ctr"/>
+          <a:lstStyle/>
+          <a:p>
+            <a:pPr algn="ctr"/>
+          </a:p>
+        </p:txBody>
+      </p:sp>
+      <p:sp>
+        <p:nvSpPr>
+          <p:cNvPr id="12" name="Rectangle 11"/>
+          <p:cNvSpPr/>
+          <p:nvPr/>
+        </p:nvSpPr>
+        <p:spPr>
+          <a:xfrm>
+            <a:off x="4526280" y="2286000"/>
+            <a:ext cx="2011680" cy="1645920"/>
+          </a:xfrm>
+          <a:prstGeom prst="rect">
+            <a:avLst/>
+          </a:prstGeom>
+          <a:solidFill>
+            <a:srgbClr val="F8F9FA"/>
+          </a:solidFill>
+          <a:ln>
+            <a:solidFill>
+              <a:srgbClr val="DCDCDC"/>
+            </a:solidFill>
+          </a:ln>
+        </p:spPr>
+        <p:style>
+          <a:lnRef idx="1">
+            <a:schemeClr val="accent1"/>
+          </a:lnRef>
+          <a:fillRef idx="3">
+            <a:schemeClr val="accent1"/>
+          </a:fillRef>
+          <a:effectRef idx="2">
+            <a:schemeClr val="accent1"/>
+          </a:effectRef>
+          <a:fontRef idx="minor">
+            <a:schemeClr val="lt1"/>
+          </a:fontRef>
+        </p:style>
+        <p:txBody>
+          <a:bodyPr rtlCol="0" anchor="ctr"/>
+          <a:lstStyle/>
+          <a:p>
+            <a:pPr algn="ctr"/>
+          </a:p>
+        </p:txBody>
+      </p:sp>
+      <p:sp>
+        <p:nvSpPr>
+          <p:cNvPr id="13" name="Rectangle 12"/>
+          <p:cNvSpPr/>
+          <p:nvPr/>
+        </p:nvSpPr>
+        <p:spPr>
+          <a:xfrm>
+            <a:off x="6782104" y="4297680"/>
+            <a:ext cx="2011680" cy="1645920"/>
+          </a:xfrm>
+          <a:prstGeom prst="rect">
+            <a:avLst/>
+          </a:prstGeom>
+          <a:solidFill>
+            <a:srgbClr val="F8F9FA"/>
+          </a:solidFill>
+          <a:ln>
+            <a:solidFill>
+              <a:srgbClr val="DCDCDC"/>
+            </a:solidFill>
+          </a:ln>
+        </p:spPr>
+        <p:style>
+          <a:lnRef idx="1">
+            <a:schemeClr val="accent1"/>
+          </a:lnRef>
+          <a:fillRef idx="3">
+            <a:schemeClr val="accent1"/>
+          </a:fillRef>
+          <a:effectRef idx="2">
+            <a:schemeClr val="accent1"/>
+          </a:effectRef>
+          <a:fontRef idx="minor">
+            <a:schemeClr val="lt1"/>
+          </a:fontRef>
+        </p:style>
+        <p:txBody>
+          <a:bodyPr rtlCol="0" anchor="ctr"/>
+          <a:lstStyle/>
+          <a:p>
+            <a:pPr algn="ctr"/>
+          </a:p>
+        </p:txBody>
+      </p:sp>
+      <p:sp>
+        <p:nvSpPr>
+          <p:cNvPr id="14" name="Rectangle 13"/>
+          <p:cNvSpPr/>
+          <p:nvPr/>
+        </p:nvSpPr>
+        <p:spPr>
+          <a:xfrm>
+            <a:off x="9037015" y="2286000"/>
+            <a:ext cx="2011680" cy="1645920"/>
+          </a:xfrm>
+          <a:prstGeom prst="rect">
+            <a:avLst/>
+          </a:prstGeom>
+          <a:solidFill>
+            <a:srgbClr val="F8F9FA"/>
+          </a:solidFill>
+          <a:ln>
+            <a:solidFill>
+              <a:srgbClr val="DCDCDC"/>
+            </a:solidFill>
+          </a:ln>
+        </p:spPr>
+        <p:style>
+          <a:lnRef idx="1">
+            <a:schemeClr val="accent1"/>
+          </a:lnRef>
+          <a:fillRef idx="3">
+            <a:schemeClr val="accent1"/>
+          </a:fillRef>
+          <a:effectRef idx="2">
+            <a:schemeClr val="accent1"/>
+          </a:effectRef>
+          <a:fontRef idx="minor">
+            <a:schemeClr val="lt1"/>
+          </a:fontRef>
+        </p:style>
+        <p:txBody>
+          <a:bodyPr rtlCol="0" anchor="ctr"/>
+          <a:lstStyle/>
+          <a:p>
+            <a:pPr algn="ctr"/>
+          </a:p>
+        </p:txBody>
+      </p:sp>
+      <p:sp>
+        <p:nvSpPr>
+          <p:cNvPr id="15" name="Oval 14"/>
+          <p:cNvSpPr/>
+          <p:nvPr/>
+        </p:nvSpPr>
+        <p:spPr>
+          <a:xfrm>
+            <a:off x="929944" y="4023360"/>
+            <a:ext cx="182880" cy="182880"/>
+          </a:xfrm>
+          <a:prstGeom prst="ellipse">
+            <a:avLst/>
+          </a:prstGeom>
+          <a:solidFill>
+            <a:srgbClr val="0043DA"/>
+          </a:solidFill>
+          <a:ln/>
+        </p:spPr>
+        <p:style>
+          <a:lnRef idx="1">
+            <a:schemeClr val="accent1"/>
+          </a:lnRef>
+          <a:fillRef idx="3">
+            <a:schemeClr val="accent1"/>
+          </a:fillRef>
+          <a:effectRef idx="2">
+            <a:schemeClr val="accent1"/>
+          </a:effectRef>
+          <a:fontRef idx="minor">
+            <a:schemeClr val="lt1"/>
+          </a:fontRef>
+        </p:style>
+        <p:txBody>
+          <a:bodyPr rtlCol="0" anchor="ctr"/>
+          <a:lstStyle/>
+          <a:p>
+            <a:pPr algn="ctr"/>
+          </a:p>
+        </p:txBody>
+      </p:sp>
+      <p:sp>
+        <p:nvSpPr>
+          <p:cNvPr id="16" name="Oval 15"/>
+          <p:cNvSpPr/>
+          <p:nvPr/>
+        </p:nvSpPr>
+        <p:spPr>
+          <a:xfrm>
+            <a:off x="3184855" y="4023360"/>
+            <a:ext cx="182880" cy="182880"/>
+          </a:xfrm>
+          <a:prstGeom prst="ellipse">
+            <a:avLst/>
+          </a:prstGeom>
+          <a:solidFill>
+            <a:srgbClr val="0043DA"/>
+          </a:solidFill>
+          <a:ln/>
+        </p:spPr>
+        <p:style>
+          <a:lnRef idx="1">
+            <a:schemeClr val="accent1"/>
+          </a:lnRef>
+          <a:fillRef idx="3">
+            <a:schemeClr val="accent1"/>
+          </a:fillRef>
+          <a:effectRef idx="2">
+            <a:schemeClr val="accent1"/>
+          </a:effectRef>
+          <a:fontRef idx="minor">
+            <a:schemeClr val="lt1"/>
+          </a:fontRef>
+        </p:style>
+        <p:txBody>
+          <a:bodyPr rtlCol="0" anchor="ctr"/>
+          <a:lstStyle/>
+          <a:p>
+            <a:pPr algn="ctr"/>
+          </a:p>
+        </p:txBody>
+      </p:sp>
+      <p:sp>
+        <p:nvSpPr>
+          <p:cNvPr id="17" name="Oval 16"/>
+          <p:cNvSpPr/>
+          <p:nvPr/>
+        </p:nvSpPr>
+        <p:spPr>
+          <a:xfrm>
+            <a:off x="5440680" y="4023360"/>
+            <a:ext cx="182880" cy="182880"/>
+          </a:xfrm>
+          <a:prstGeom prst="ellipse">
+            <a:avLst/>
+          </a:prstGeom>
+          <a:solidFill>
+            <a:srgbClr val="0043DA"/>
+          </a:solidFill>
+          <a:ln/>
+        </p:spPr>
+        <p:style>
+          <a:lnRef idx="1">
+            <a:schemeClr val="accent1"/>
+          </a:lnRef>
+          <a:fillRef idx="3">
+            <a:schemeClr val="accent1"/>
+          </a:fillRef>
+          <a:effectRef idx="2">
+            <a:schemeClr val="accent1"/>
+          </a:effectRef>
+          <a:fontRef idx="minor">
+            <a:schemeClr val="lt1"/>
+          </a:fontRef>
+        </p:style>
+        <p:txBody>
+          <a:bodyPr rtlCol="0" anchor="ctr"/>
+          <a:lstStyle/>
+          <a:p>
+            <a:pPr algn="ctr"/>
+          </a:p>
+        </p:txBody>
+      </p:sp>
+      <p:sp>
+        <p:nvSpPr>
+          <p:cNvPr id="18" name="Oval 17"/>
+          <p:cNvSpPr/>
+          <p:nvPr/>
+        </p:nvSpPr>
+        <p:spPr>
+          <a:xfrm>
+            <a:off x="7696504" y="4023360"/>
+            <a:ext cx="182880" cy="182880"/>
+          </a:xfrm>
+          <a:prstGeom prst="ellipse">
+            <a:avLst/>
+          </a:prstGeom>
+          <a:solidFill>
+            <a:srgbClr val="0043DA"/>
+          </a:solidFill>
+          <a:ln/>
+        </p:spPr>
+        <p:style>
+          <a:lnRef idx="1">
+            <a:schemeClr val="accent1"/>
+          </a:lnRef>
+          <a:fillRef idx="3">
+            <a:schemeClr val="accent1"/>
+          </a:fillRef>
+          <a:effectRef idx="2">
+            <a:schemeClr val="accent1"/>
+          </a:effectRef>
+          <a:fontRef idx="minor">
+            <a:schemeClr val="lt1"/>
+          </a:fontRef>
+        </p:style>
+        <p:txBody>
+          <a:bodyPr rtlCol="0" anchor="ctr"/>
+          <a:lstStyle/>
+          <a:p>
+            <a:pPr algn="ctr"/>
+          </a:p>
+        </p:txBody>
+      </p:sp>
+      <p:sp>
+        <p:nvSpPr>
+          <p:cNvPr id="19" name="Oval 18"/>
+          <p:cNvSpPr/>
+          <p:nvPr/>
+        </p:nvSpPr>
+        <p:spPr>
+          <a:xfrm>
+            <a:off x="9951415" y="4023360"/>
+            <a:ext cx="182880" cy="182880"/>
+          </a:xfrm>
+          <a:prstGeom prst="ellipse">
+            <a:avLst/>
+          </a:prstGeom>
+          <a:solidFill>
+            <a:srgbClr val="0043DA"/>
+          </a:solidFill>
+          <a:ln/>
+        </p:spPr>
+        <p:style>
+          <a:lnRef idx="1">
+            <a:schemeClr val="accent1"/>
+          </a:lnRef>
+          <a:fillRef idx="3">
+            <a:schemeClr val="accent1"/>
+          </a:fillRef>
+          <a:effectRef idx="2">
+            <a:schemeClr val="accent1"/>
+          </a:effectRef>
+          <a:fontRef idx="minor">
+            <a:schemeClr val="lt1"/>
+          </a:fontRef>
+        </p:style>
+        <p:txBody>
+          <a:bodyPr rtlCol="0" anchor="ctr"/>
+          <a:lstStyle/>
+          <a:p>
+            <a:pPr algn="ctr"/>
+          </a:p>
+        </p:txBody>
+      </p:sp>
+      <p:sp>
+        <p:nvSpPr>
+          <p:cNvPr id="20" name="TextBox 19"/>
+          <p:cNvSpPr txBox="1"/>
+          <p:nvPr/>
+        </p:nvSpPr>
+        <p:spPr>
+          <a:xfrm>
+            <a:off x="15544" y="2286000"/>
+            <a:ext cx="2011680" cy="228600"/>
+          </a:xfrm>
+          <a:prstGeom prst="rect">
+            <a:avLst/>
+          </a:prstGeom>
+          <a:noFill/>
+        </p:spPr>
+        <p:txBody>
+          <a:bodyPr wrap="square">
+            <a:spAutoFit/>
+          </a:bodyPr>
+          <a:lstStyle/>
+          <a:p>
+            <a:r>
+              <a:rPr sz="1200">
+                <a:solidFill>
+                  <a:srgbClr val="0043DA"/>
+                </a:solidFill>
+                <a:latin typeface="Freesentation"/>
+              </a:rPr>
+              <a:t>Q1 2026</a:t>
+            </a:r>
+          </a:p>
+        </p:txBody>
+      </p:sp>
+      <p:sp>
+        <p:nvSpPr>
+          <p:cNvPr id="21" name="TextBox 20"/>
+          <p:cNvSpPr txBox="1"/>
+          <p:nvPr/>
+        </p:nvSpPr>
+        <p:spPr>
+          <a:xfrm>
+            <a:off x="15544" y="2514600"/>
+            <a:ext cx="2011680" cy="274320"/>
+          </a:xfrm>
+          <a:prstGeom prst="rect">
+            <a:avLst/>
+          </a:prstGeom>
+          <a:noFill/>
+        </p:spPr>
+        <p:txBody>
+          <a:bodyPr wrap="square">
+            <a:spAutoFit/>
+          </a:bodyPr>
+          <a:lstStyle/>
+          <a:p>
+            <a:r>
+              <a:rPr sz="1400" b="1">
+                <a:solidFill>
+                  <a:srgbClr val="0043DA"/>
+                </a:solidFill>
+                <a:latin typeface="Freesentation"/>
+              </a:rPr>
+              <a:t>현황 분석</a:t>
+            </a:r>
+          </a:p>
+        </p:txBody>
+      </p:sp>
+      <p:sp>
+        <p:nvSpPr>
+          <p:cNvPr id="22" name="TextBox 21"/>
+          <p:cNvSpPr txBox="1"/>
+          <p:nvPr/>
+        </p:nvSpPr>
+        <p:spPr>
+          <a:xfrm>
+            <a:off x="15544" y="2788920"/>
+            <a:ext cx="2011680" cy="1097280"/>
+          </a:xfrm>
+          <a:prstGeom prst="rect">
+            <a:avLst/>
+          </a:prstGeom>
+          <a:noFill/>
+        </p:spPr>
+        <p:txBody>
+          <a:bodyPr wrap="square">
+            <a:spAutoFit/>
+          </a:bodyPr>
+          <a:lstStyle/>
+          <a:p>
+            <a:r>
+              <a:rPr sz="1300">
+                <a:solidFill>
+                  <a:srgbClr val="4A4A4A"/>
+                </a:solidFill>
+                <a:latin typeface="Freesentation"/>
+              </a:rPr>
+              <a:t>• 온프레미스 Kafka 현황 파악</a:t>
+            </a:r>
+          </a:p>
+          <a:p>
+            <a:r>
+              <a:rPr sz="1300">
+                <a:solidFill>
+                  <a:srgbClr val="4A4A4A"/>
+                </a:solidFill>
+                <a:latin typeface="Freesentation"/>
+              </a:rPr>
+              <a:t>• 운영 문제점 정리</a:t>
+            </a:r>
+          </a:p>
+          <a:p>
+            <a:r>
+              <a:rPr sz="1300">
+                <a:solidFill>
+                  <a:srgbClr val="4A4A4A"/>
+                </a:solidFill>
+                <a:latin typeface="Freesentation"/>
+              </a:rPr>
+              <a:t>• 비용·성능 기준 수립</a:t>
+            </a:r>
+          </a:p>
+        </p:txBody>
+      </p:sp>
+      <p:sp>
+        <p:nvSpPr>
+          <p:cNvPr id="23" name="TextBox 22"/>
+          <p:cNvSpPr txBox="1"/>
+          <p:nvPr/>
+        </p:nvSpPr>
+        <p:spPr>
+          <a:xfrm>
+            <a:off x="2270455" y="4297680"/>
+            <a:ext cx="2011680" cy="228600"/>
+          </a:xfrm>
+          <a:prstGeom prst="rect">
+            <a:avLst/>
+          </a:prstGeom>
+          <a:noFill/>
+        </p:spPr>
+        <p:txBody>
+          <a:bodyPr wrap="square">
+            <a:spAutoFit/>
+          </a:bodyPr>
+          <a:lstStyle/>
+          <a:p>
+            <a:r>
+              <a:rPr sz="1200">
+                <a:solidFill>
+                  <a:srgbClr val="0043DA"/>
+                </a:solidFill>
+                <a:latin typeface="Freesentation"/>
+              </a:rPr>
+              <a:t>Q2 2026</a:t>
+            </a:r>
+          </a:p>
+        </p:txBody>
+      </p:sp>
+      <p:sp>
+        <p:nvSpPr>
+          <p:cNvPr id="24" name="TextBox 23"/>
+          <p:cNvSpPr txBox="1"/>
+          <p:nvPr/>
+        </p:nvSpPr>
+        <p:spPr>
+          <a:xfrm>
+            <a:off x="2270455" y="4526280"/>
+            <a:ext cx="2011680" cy="274320"/>
+          </a:xfrm>
+          <a:prstGeom prst="rect">
+            <a:avLst/>
+          </a:prstGeom>
+          <a:noFill/>
+        </p:spPr>
+        <p:txBody>
+          <a:bodyPr wrap="square">
+            <a:spAutoFit/>
+          </a:bodyPr>
+          <a:lstStyle/>
+          <a:p>
+            <a:r>
+              <a:rPr sz="1400" b="1">
+                <a:solidFill>
+                  <a:srgbClr val="0043DA"/>
+                </a:solidFill>
+                <a:latin typeface="Freesentation"/>
+              </a:rPr>
+              <a:t>아키텍처 설계</a:t>
+            </a:r>
+          </a:p>
+        </p:txBody>
+      </p:sp>
+      <p:sp>
+        <p:nvSpPr>
+          <p:cNvPr id="25" name="TextBox 24"/>
+          <p:cNvSpPr txBox="1"/>
+          <p:nvPr/>
+        </p:nvSpPr>
+        <p:spPr>
+          <a:xfrm>
+            <a:off x="2270455" y="4800600"/>
+            <a:ext cx="2011680" cy="1097280"/>
+          </a:xfrm>
+          <a:prstGeom prst="rect">
+            <a:avLst/>
+          </a:prstGeom>
+          <a:noFill/>
+        </p:spPr>
+        <p:txBody>
+          <a:bodyPr wrap="square">
+            <a:spAutoFit/>
+          </a:bodyPr>
+          <a:lstStyle/>
+          <a:p>
+            <a:r>
+              <a:rPr sz="1300">
+                <a:solidFill>
+                  <a:srgbClr val="4A4A4A"/>
+                </a:solidFill>
+                <a:latin typeface="Freesentation"/>
+              </a:rPr>
+              <a:t>• MSK 클러스터 유형 선택</a:t>
+            </a:r>
+          </a:p>
+          <a:p>
+            <a:r>
+              <a:rPr sz="1300">
+                <a:solidFill>
+                  <a:srgbClr val="4A4A4A"/>
+                </a:solidFill>
+                <a:latin typeface="Freesentation"/>
+              </a:rPr>
+              <a:t>• 네트워크/보안 설계</a:t>
+            </a:r>
+          </a:p>
+          <a:p>
+            <a:r>
+              <a:rPr sz="1300">
+                <a:solidFill>
+                  <a:srgbClr val="4A4A4A"/>
+                </a:solidFill>
+                <a:latin typeface="Freesentation"/>
+              </a:rPr>
+              <a:t>• 마이그레이션 계획 수립</a:t>
+            </a:r>
+          </a:p>
+        </p:txBody>
+      </p:sp>
+      <p:sp>
+        <p:nvSpPr>
+          <p:cNvPr id="26" name="TextBox 25"/>
+          <p:cNvSpPr txBox="1"/>
+          <p:nvPr/>
+        </p:nvSpPr>
+        <p:spPr>
+          <a:xfrm>
+            <a:off x="4526280" y="2286000"/>
+            <a:ext cx="2011680" cy="228600"/>
+          </a:xfrm>
+          <a:prstGeom prst="rect">
+            <a:avLst/>
+          </a:prstGeom>
+          <a:noFill/>
+        </p:spPr>
+        <p:txBody>
+          <a:bodyPr wrap="square">
+            <a:spAutoFit/>
+          </a:bodyPr>
+          <a:lstStyle/>
+          <a:p>
+            <a:r>
+              <a:rPr sz="1200">
+                <a:solidFill>
+                  <a:srgbClr val="0043DA"/>
+                </a:solidFill>
+                <a:latin typeface="Freesentation"/>
+              </a:rPr>
+              <a:t>Q3 2026</a:t>
+            </a:r>
+          </a:p>
+        </p:txBody>
+      </p:sp>
+      <p:sp>
+        <p:nvSpPr>
+          <p:cNvPr id="27" name="TextBox 26"/>
+          <p:cNvSpPr txBox="1"/>
+          <p:nvPr/>
+        </p:nvSpPr>
+        <p:spPr>
+          <a:xfrm>
+            <a:off x="4526280" y="2514600"/>
+            <a:ext cx="2011680" cy="274320"/>
+          </a:xfrm>
+          <a:prstGeom prst="rect">
+            <a:avLst/>
+          </a:prstGeom>
+          <a:noFill/>
+        </p:spPr>
+        <p:txBody>
+          <a:bodyPr wrap="square">
+            <a:spAutoFit/>
+          </a:bodyPr>
+          <a:lstStyle/>
+          <a:p>
+            <a:r>
+              <a:rPr sz="1400" b="1">
+                <a:solidFill>
+                  <a:srgbClr val="0043DA"/>
+                </a:solidFill>
+                <a:latin typeface="Freesentation"/>
+              </a:rPr>
+              <a:t>파일럿 구축</a:t>
+            </a:r>
+          </a:p>
+        </p:txBody>
+      </p:sp>
+      <p:sp>
+        <p:nvSpPr>
+          <p:cNvPr id="28" name="TextBox 27"/>
+          <p:cNvSpPr txBox="1"/>
+          <p:nvPr/>
+        </p:nvSpPr>
+        <p:spPr>
+          <a:xfrm>
+            <a:off x="4526280" y="2788920"/>
+            <a:ext cx="2011680" cy="1097280"/>
+          </a:xfrm>
+          <a:prstGeom prst="rect">
+            <a:avLst/>
+          </a:prstGeom>
+          <a:noFill/>
+        </p:spPr>
+        <p:txBody>
+          <a:bodyPr wrap="square">
+            <a:spAutoFit/>
+          </a:bodyPr>
+          <a:lstStyle/>
+          <a:p>
+            <a:r>
+              <a:rPr sz="1300">
+                <a:solidFill>
+                  <a:srgbClr val="4A4A4A"/>
+                </a:solidFill>
+                <a:latin typeface="Freesentation"/>
+              </a:rPr>
+              <a:t>• 개발 환경 MSK 구축</a:t>
+            </a:r>
+          </a:p>
+          <a:p>
+            <a:r>
+              <a:rPr sz="1300">
+                <a:solidFill>
+                  <a:srgbClr val="4A4A4A"/>
+                </a:solidFill>
+                <a:latin typeface="Freesentation"/>
+              </a:rPr>
+              <a:t>• MirrorMaker 2 설정</a:t>
+            </a:r>
+          </a:p>
+          <a:p>
+            <a:r>
+              <a:rPr sz="1300">
+                <a:solidFill>
+                  <a:srgbClr val="4A4A4A"/>
+                </a:solidFill>
+                <a:latin typeface="Freesentation"/>
+              </a:rPr>
+              <a:t>• 데이터 동기화 검증</a:t>
+            </a:r>
+          </a:p>
+        </p:txBody>
+      </p:sp>
+      <p:sp>
+        <p:nvSpPr>
+          <p:cNvPr id="29" name="TextBox 28"/>
+          <p:cNvSpPr txBox="1"/>
+          <p:nvPr/>
+        </p:nvSpPr>
+        <p:spPr>
+          <a:xfrm>
+            <a:off x="6782104" y="4297680"/>
+            <a:ext cx="2011680" cy="228600"/>
+          </a:xfrm>
+          <a:prstGeom prst="rect">
+            <a:avLst/>
+          </a:prstGeom>
+          <a:noFill/>
+        </p:spPr>
+        <p:txBody>
+          <a:bodyPr wrap="square">
+            <a:spAutoFit/>
+          </a:bodyPr>
+          <a:lstStyle/>
+          <a:p>
+            <a:r>
+              <a:rPr sz="1200">
+                <a:solidFill>
+                  <a:srgbClr val="0043DA"/>
+                </a:solidFill>
+                <a:latin typeface="Freesentation"/>
+              </a:rPr>
+              <a:t>Q4 2026</a:t>
+            </a:r>
+          </a:p>
+        </p:txBody>
+      </p:sp>
+      <p:sp>
+        <p:nvSpPr>
+          <p:cNvPr id="30" name="TextBox 29"/>
+          <p:cNvSpPr txBox="1"/>
+          <p:nvPr/>
+        </p:nvSpPr>
+        <p:spPr>
+          <a:xfrm>
+            <a:off x="6782104" y="4526280"/>
+            <a:ext cx="2011680" cy="274320"/>
+          </a:xfrm>
+          <a:prstGeom prst="rect">
+            <a:avLst/>
+          </a:prstGeom>
+          <a:noFill/>
+        </p:spPr>
+        <p:txBody>
+          <a:bodyPr wrap="square">
+            <a:spAutoFit/>
+          </a:bodyPr>
+          <a:lstStyle/>
+          <a:p>
+            <a:r>
+              <a:rPr sz="1400" b="1">
+                <a:solidFill>
+                  <a:srgbClr val="0043DA"/>
+                </a:solidFill>
+                <a:latin typeface="Freesentation"/>
+              </a:rPr>
+              <a:t>전환 실행</a:t>
+            </a:r>
+          </a:p>
+        </p:txBody>
+      </p:sp>
+      <p:sp>
+        <p:nvSpPr>
+          <p:cNvPr id="31" name="TextBox 30"/>
+          <p:cNvSpPr txBox="1"/>
+          <p:nvPr/>
+        </p:nvSpPr>
+        <p:spPr>
+          <a:xfrm>
+            <a:off x="6782104" y="4800600"/>
+            <a:ext cx="2011680" cy="1097280"/>
+          </a:xfrm>
+          <a:prstGeom prst="rect">
+            <a:avLst/>
+          </a:prstGeom>
+          <a:noFill/>
+        </p:spPr>
+        <p:txBody>
+          <a:bodyPr wrap="square">
+            <a:spAutoFit/>
+          </a:bodyPr>
+          <a:lstStyle/>
+          <a:p>
+            <a:r>
+              <a:rPr sz="1300">
+                <a:solidFill>
+                  <a:srgbClr val="4A4A4A"/>
+                </a:solidFill>
+                <a:latin typeface="Freesentation"/>
+              </a:rPr>
+              <a:t>• 프로덕션 전환 실행</a:t>
+            </a:r>
+          </a:p>
+          <a:p>
+            <a:r>
+              <a:rPr sz="1300">
+                <a:solidFill>
+                  <a:srgbClr val="4A4A4A"/>
+                </a:solidFill>
+                <a:latin typeface="Freesentation"/>
+              </a:rPr>
+              <a:t>• 데이터 마이그레이션</a:t>
+            </a:r>
+          </a:p>
+          <a:p>
+            <a:r>
+              <a:rPr sz="1300">
+                <a:solidFill>
+                  <a:srgbClr val="4A4A4A"/>
+                </a:solidFill>
+                <a:latin typeface="Freesentation"/>
+              </a:rPr>
+              <a:t>• 롤백 계획 준비</a:t>
+            </a:r>
+          </a:p>
+        </p:txBody>
+      </p:sp>
+      <p:sp>
+        <p:nvSpPr>
+          <p:cNvPr id="32" name="TextBox 31"/>
+          <p:cNvSpPr txBox="1"/>
+          <p:nvPr/>
+        </p:nvSpPr>
+        <p:spPr>
+          <a:xfrm>
+            <a:off x="9037015" y="2286000"/>
+            <a:ext cx="2011680" cy="228600"/>
+          </a:xfrm>
+          <a:prstGeom prst="rect">
+            <a:avLst/>
+          </a:prstGeom>
+          <a:noFill/>
+        </p:spPr>
+        <p:txBody>
+          <a:bodyPr wrap="square">
+            <a:spAutoFit/>
+          </a:bodyPr>
+          <a:lstStyle/>
+          <a:p>
+            <a:r>
+              <a:rPr sz="1200">
+                <a:solidFill>
+                  <a:srgbClr val="0043DA"/>
+                </a:solidFill>
+                <a:latin typeface="Freesentation"/>
+              </a:rPr>
+              <a:t>Q1 2027</a:t>
+            </a:r>
+          </a:p>
+        </p:txBody>
+      </p:sp>
+      <p:sp>
+        <p:nvSpPr>
+          <p:cNvPr id="33" name="TextBox 32"/>
+          <p:cNvSpPr txBox="1"/>
+          <p:nvPr/>
+        </p:nvSpPr>
+        <p:spPr>
+          <a:xfrm>
+            <a:off x="9037015" y="2514600"/>
+            <a:ext cx="2011680" cy="274320"/>
+          </a:xfrm>
+          <a:prstGeom prst="rect">
+            <a:avLst/>
+          </a:prstGeom>
+          <a:noFill/>
+        </p:spPr>
+        <p:txBody>
+          <a:bodyPr wrap="square">
+            <a:spAutoFit/>
+          </a:bodyPr>
+          <a:lstStyle/>
+          <a:p>
+            <a:r>
+              <a:rPr sz="1400" b="1">
+                <a:solidFill>
+                  <a:srgbClr val="0043DA"/>
+                </a:solidFill>
+                <a:latin typeface="Freesentation"/>
+              </a:rPr>
+              <a:t>안정화</a:t>
+            </a:r>
+          </a:p>
+        </p:txBody>
+      </p:sp>
+      <p:sp>
+        <p:nvSpPr>
+          <p:cNvPr id="34" name="TextBox 33"/>
+          <p:cNvSpPr txBox="1"/>
+          <p:nvPr/>
+        </p:nvSpPr>
+        <p:spPr>
+          <a:xfrm>
+            <a:off x="9037015" y="2788920"/>
+            <a:ext cx="2011680" cy="1097280"/>
+          </a:xfrm>
+          <a:prstGeom prst="rect">
+            <a:avLst/>
+          </a:prstGeom>
+          <a:noFill/>
+        </p:spPr>
+        <p:txBody>
+          <a:bodyPr wrap="square">
+            <a:spAutoFit/>
+          </a:bodyPr>
+          <a:lstStyle/>
+          <a:p>
+            <a:r>
+              <a:rPr sz="1300">
+                <a:solidFill>
+                  <a:srgbClr val="4A4A4A"/>
+                </a:solidFill>
+                <a:latin typeface="Freesentation"/>
+              </a:rPr>
+              <a:t>• 모니터링 체계 수립</a:t>
+            </a:r>
+          </a:p>
+          <a:p>
+            <a:r>
+              <a:rPr sz="1300">
+                <a:solidFill>
+                  <a:srgbClr val="4A4A4A"/>
+                </a:solidFill>
+                <a:latin typeface="Freesentation"/>
+              </a:rPr>
+              <a:t>• 비용 최적화</a:t>
+            </a:r>
+          </a:p>
+          <a:p>
+            <a:r>
+              <a:rPr sz="1300">
+                <a:solidFill>
+                  <a:srgbClr val="4A4A4A"/>
+                </a:solidFill>
+                <a:latin typeface="Freesentation"/>
+              </a:rPr>
+              <a:t>• 운영 매뉴얼 완성</a:t>
+            </a:r>
+          </a:p>
+        </p:txBody>
+      </p:sp>
+    </p:spTree>
+  </p:cSld>
+  <p:clrMapOvr>
+    <a:masterClrMapping/>
+  </p:clrMapOvr>
+</p:sld>
+</file>
+
 <file path=ppt/slides/slide2.xml><?xml version="1.0" encoding="utf-8"?>
 <p:sld xmlns:a="http://schemas.openxmlformats.org/drawingml/2006/main" xmlns:r="http://schemas.openxmlformats.org/officeDocument/2006/relationships" xmlns:p="http://schemas.openxmlformats.org/presentationml/2006/main">
   <p:cSld>
@@ -12076,7 +13409,12 @@
         <p:txBody>
           <a:bodyPr/>
           <a:lstStyle/>
-          <a:p/>
+          <a:p>
+            <a:r>
+              <a:rPr lang="ko-KR" altLang="en-US" dirty="0"/>
+              <a:t>L08. Funnel</a:t>
+            </a:r>
+          </a:p>
         </p:txBody>
       </p:sp>
       <p:sp>

--- a/results/pptx/AWS_MSK_Expert_Intro.pptx
+++ b/results/pptx/AWS_MSK_Expert_Intro.pptx
@@ -3719,7 +3719,12 @@
         <p:txBody>
           <a:bodyPr/>
           <a:lstStyle/>
-          <a:p/>
+          <a:p>
+            <a:r>
+              <a:rPr lang="ko-KR" altLang="en-US" dirty="0"/>
+              <a:t>1-1. As-Is / To-Be</a:t>
+            </a:r>
+          </a:p>
         </p:txBody>
       </p:sp>
       <p:sp>

--- a/results/pptx/AWS_MSK_Expert_Intro.pptx
+++ b/results/pptx/AWS_MSK_Expert_Intro.pptx
@@ -3719,12 +3719,7 @@
         <p:txBody>
           <a:bodyPr/>
           <a:lstStyle/>
-          <a:p>
-            <a:r>
-              <a:rPr lang="ko-KR" altLang="en-US" dirty="0"/>
-              <a:t>1-1. As-Is / To-Be</a:t>
-            </a:r>
-          </a:p>
+          <a:p/>
         </p:txBody>
       </p:sp>
       <p:sp>
@@ -5538,1338 +5533,6 @@
         <p14:creationId xmlns:p14="http://schemas.microsoft.com/office/powerpoint/2010/main" val="3722360403"/>
       </p:ext>
     </p:extLst>
-  </p:cSld>
-  <p:clrMapOvr>
-    <a:masterClrMapping/>
-  </p:clrMapOvr>
-</p:sld>
-</file>
-
-<file path=ppt/slides/slide13.xml><?xml version="1.0" encoding="utf-8"?>
-<p:sld xmlns:a="http://schemas.openxmlformats.org/drawingml/2006/main" xmlns:p="http://schemas.openxmlformats.org/presentationml/2006/main" xmlns:r="http://schemas.openxmlformats.org/officeDocument/2006/relationships">
-  <p:cSld>
-    <p:spTree>
-      <p:nvGrpSpPr>
-        <p:cNvPr id="1" name=""/>
-        <p:cNvGrpSpPr/>
-        <p:nvPr/>
-      </p:nvGrpSpPr>
-      <p:grpSpPr/>
-      <p:sp>
-        <p:nvSpPr>
-          <p:cNvPr id="2" name="Title 1"/>
-          <p:cNvSpPr>
-            <a:spLocks noGrp="1"/>
-          </p:cNvSpPr>
-          <p:nvPr>
-            <p:ph type="ctrTitle"/>
-          </p:nvPr>
-        </p:nvSpPr>
-        <p:spPr/>
-        <p:txBody>
-          <a:bodyPr/>
-          <a:lstStyle/>
-          <a:p>
-            <a:r>
-              <a:t>L06 Zigzag Timeline</a:t>
-            </a:r>
-          </a:p>
-        </p:txBody>
-      </p:sp>
-      <p:sp>
-        <p:nvSpPr>
-          <p:cNvPr id="3" name="Subtitle 2"/>
-          <p:cNvSpPr>
-            <a:spLocks noGrp="1"/>
-          </p:cNvSpPr>
-          <p:nvPr>
-            <p:ph type="subTitle" idx="1"/>
-          </p:nvPr>
-        </p:nvSpPr>
-        <p:spPr/>
-        <p:txBody>
-          <a:bodyPr/>
-          <a:lstStyle/>
-          <a:p/>
-        </p:txBody>
-      </p:sp>
-      <p:sp>
-        <p:nvSpPr>
-          <p:cNvPr id="4" name="TextBox 3"/>
-          <p:cNvSpPr txBox="1"/>
-          <p:nvPr/>
-        </p:nvSpPr>
-        <p:spPr>
-          <a:xfrm>
-            <a:off x="354787" y="557784"/>
-            <a:ext cx="2720340" cy="932688"/>
-          </a:xfrm>
-          <a:prstGeom prst="rect">
-            <a:avLst/>
-          </a:prstGeom>
-          <a:noFill/>
-        </p:spPr>
-        <p:txBody>
-          <a:bodyPr wrap="square">
-            <a:spAutoFit/>
-          </a:bodyPr>
-          <a:lstStyle/>
-          <a:p>
-            <a:r>
-              <a:rPr sz="2000" b="1">
-                <a:solidFill>
-                  <a:srgbClr val="000000"/>
-                </a:solidFill>
-                <a:latin typeface="Freesentation 7 Bold"/>
-              </a:rPr>
-              <a:t>L06. Zigzag Timeline</a:t>
-            </a:r>
-          </a:p>
-        </p:txBody>
-      </p:sp>
-      <p:sp>
-        <p:nvSpPr>
-          <p:cNvPr id="5" name="TextBox 4"/>
-          <p:cNvSpPr txBox="1"/>
-          <p:nvPr/>
-        </p:nvSpPr>
-        <p:spPr>
-          <a:xfrm>
-            <a:off x="3762756" y="558698"/>
-            <a:ext cx="7550200" cy="938174"/>
-          </a:xfrm>
-          <a:prstGeom prst="rect">
-            <a:avLst/>
-          </a:prstGeom>
-          <a:noFill/>
-        </p:spPr>
-        <p:txBody>
-          <a:bodyPr wrap="square">
-            <a:spAutoFit/>
-          </a:bodyPr>
-          <a:lstStyle/>
-          <a:p>
-            <a:r>
-              <a:rPr sz="1200">
-                <a:solidFill>
-                  <a:srgbClr val="4A4A4A"/>
-                </a:solidFill>
-                <a:latin typeface="Freesentation 5 Medium"/>
-              </a:rPr>
-              <a:t>S자 지그재그 타임라인 — 시간 흐름 시각화</a:t>
-            </a:r>
-          </a:p>
-        </p:txBody>
-      </p:sp>
-      <p:sp>
-        <p:nvSpPr>
-          <p:cNvPr id="6" name="Rectangle 5"/>
-          <p:cNvSpPr/>
-          <p:nvPr/>
-        </p:nvSpPr>
-        <p:spPr>
-          <a:xfrm>
-            <a:off x="355701" y="1496872"/>
-            <a:ext cx="11481206" cy="9144"/>
-          </a:xfrm>
-          <a:prstGeom prst="rect">
-            <a:avLst/>
-          </a:prstGeom>
-          <a:solidFill>
-            <a:srgbClr val="DCDCDC"/>
-          </a:solidFill>
-          <a:ln>
-            <a:solidFill>
-              <a:srgbClr val="DCDCDC"/>
-            </a:solidFill>
-          </a:ln>
-        </p:spPr>
-        <p:style>
-          <a:lnRef idx="1">
-            <a:schemeClr val="accent1"/>
-          </a:lnRef>
-          <a:fillRef idx="3">
-            <a:schemeClr val="accent1"/>
-          </a:fillRef>
-          <a:effectRef idx="2">
-            <a:schemeClr val="accent1"/>
-          </a:effectRef>
-          <a:fontRef idx="minor">
-            <a:schemeClr val="lt1"/>
-          </a:fontRef>
-        </p:style>
-        <p:txBody>
-          <a:bodyPr rtlCol="0" anchor="ctr"/>
-          <a:lstStyle/>
-          <a:p>
-            <a:pPr algn="ctr"/>
-          </a:p>
-        </p:txBody>
-      </p:sp>
-      <p:sp>
-        <p:nvSpPr>
-          <p:cNvPr id="7" name="TextBox 6"/>
-          <p:cNvSpPr txBox="1"/>
-          <p:nvPr/>
-        </p:nvSpPr>
-        <p:spPr>
-          <a:xfrm>
-            <a:off x="457200" y="1600200"/>
-            <a:ext cx="11277295" cy="320040"/>
-          </a:xfrm>
-          <a:prstGeom prst="rect">
-            <a:avLst/>
-          </a:prstGeom>
-          <a:noFill/>
-        </p:spPr>
-        <p:txBody>
-          <a:bodyPr wrap="square">
-            <a:spAutoFit/>
-          </a:bodyPr>
-          <a:lstStyle/>
-          <a:p>
-            <a:r>
-              <a:rPr sz="1600" b="0">
-                <a:solidFill>
-                  <a:srgbClr val="0043DA"/>
-                </a:solidFill>
-                <a:latin typeface="Freesentation"/>
-              </a:rPr>
-              <a:t>온프레미스 Kafka → AWS MSK 전환 로드맵</a:t>
-            </a:r>
-          </a:p>
-        </p:txBody>
-      </p:sp>
-      <p:sp>
-        <p:nvSpPr>
-          <p:cNvPr id="8" name="TextBox 7"/>
-          <p:cNvSpPr txBox="1"/>
-          <p:nvPr/>
-        </p:nvSpPr>
-        <p:spPr>
-          <a:xfrm>
-            <a:off x="457200" y="1965960"/>
-            <a:ext cx="11277295" cy="274320"/>
-          </a:xfrm>
-          <a:prstGeom prst="rect">
-            <a:avLst/>
-          </a:prstGeom>
-          <a:noFill/>
-        </p:spPr>
-        <p:txBody>
-          <a:bodyPr wrap="square">
-            <a:spAutoFit/>
-          </a:bodyPr>
-          <a:lstStyle/>
-          <a:p>
-            <a:r>
-              <a:rPr sz="1300">
-                <a:solidFill>
-                  <a:srgbClr val="4A4A4A"/>
-                </a:solidFill>
-                <a:latin typeface="Freesentation"/>
-              </a:rPr>
-              <a:t>현황 분석부터 안정화까지 5분기 전환 타임라인</a:t>
-            </a:r>
-          </a:p>
-        </p:txBody>
-      </p:sp>
-      <p:sp>
-        <p:nvSpPr>
-          <p:cNvPr id="9" name="Rectangle 8"/>
-          <p:cNvSpPr/>
-          <p:nvPr/>
-        </p:nvSpPr>
-        <p:spPr>
-          <a:xfrm>
-            <a:off x="457200" y="4114800"/>
-            <a:ext cx="11277295" cy="36576"/>
-          </a:xfrm>
-          <a:prstGeom prst="rect">
-            <a:avLst/>
-          </a:prstGeom>
-          <a:solidFill>
-            <a:srgbClr val="0043DA"/>
-          </a:solidFill>
-          <a:ln>
-            <a:solidFill>
-              <a:srgbClr val="0043DA"/>
-            </a:solidFill>
-          </a:ln>
-        </p:spPr>
-        <p:style>
-          <a:lnRef idx="1">
-            <a:schemeClr val="accent1"/>
-          </a:lnRef>
-          <a:fillRef idx="3">
-            <a:schemeClr val="accent1"/>
-          </a:fillRef>
-          <a:effectRef idx="2">
-            <a:schemeClr val="accent1"/>
-          </a:effectRef>
-          <a:fontRef idx="minor">
-            <a:schemeClr val="lt1"/>
-          </a:fontRef>
-        </p:style>
-        <p:txBody>
-          <a:bodyPr rtlCol="0" anchor="ctr"/>
-          <a:lstStyle/>
-          <a:p>
-            <a:pPr algn="ctr"/>
-          </a:p>
-        </p:txBody>
-      </p:sp>
-      <p:sp>
-        <p:nvSpPr>
-          <p:cNvPr id="10" name="Rectangle 9"/>
-          <p:cNvSpPr/>
-          <p:nvPr/>
-        </p:nvSpPr>
-        <p:spPr>
-          <a:xfrm>
-            <a:off x="15544" y="2286000"/>
-            <a:ext cx="2011680" cy="1645920"/>
-          </a:xfrm>
-          <a:prstGeom prst="rect">
-            <a:avLst/>
-          </a:prstGeom>
-          <a:solidFill>
-            <a:srgbClr val="F8F9FA"/>
-          </a:solidFill>
-          <a:ln>
-            <a:solidFill>
-              <a:srgbClr val="DCDCDC"/>
-            </a:solidFill>
-          </a:ln>
-        </p:spPr>
-        <p:style>
-          <a:lnRef idx="1">
-            <a:schemeClr val="accent1"/>
-          </a:lnRef>
-          <a:fillRef idx="3">
-            <a:schemeClr val="accent1"/>
-          </a:fillRef>
-          <a:effectRef idx="2">
-            <a:schemeClr val="accent1"/>
-          </a:effectRef>
-          <a:fontRef idx="minor">
-            <a:schemeClr val="lt1"/>
-          </a:fontRef>
-        </p:style>
-        <p:txBody>
-          <a:bodyPr rtlCol="0" anchor="ctr"/>
-          <a:lstStyle/>
-          <a:p>
-            <a:pPr algn="ctr"/>
-          </a:p>
-        </p:txBody>
-      </p:sp>
-      <p:sp>
-        <p:nvSpPr>
-          <p:cNvPr id="11" name="Rectangle 10"/>
-          <p:cNvSpPr/>
-          <p:nvPr/>
-        </p:nvSpPr>
-        <p:spPr>
-          <a:xfrm>
-            <a:off x="2270455" y="4297680"/>
-            <a:ext cx="2011680" cy="1645920"/>
-          </a:xfrm>
-          <a:prstGeom prst="rect">
-            <a:avLst/>
-          </a:prstGeom>
-          <a:solidFill>
-            <a:srgbClr val="F8F9FA"/>
-          </a:solidFill>
-          <a:ln>
-            <a:solidFill>
-              <a:srgbClr val="DCDCDC"/>
-            </a:solidFill>
-          </a:ln>
-        </p:spPr>
-        <p:style>
-          <a:lnRef idx="1">
-            <a:schemeClr val="accent1"/>
-          </a:lnRef>
-          <a:fillRef idx="3">
-            <a:schemeClr val="accent1"/>
-          </a:fillRef>
-          <a:effectRef idx="2">
-            <a:schemeClr val="accent1"/>
-          </a:effectRef>
-          <a:fontRef idx="minor">
-            <a:schemeClr val="lt1"/>
-          </a:fontRef>
-        </p:style>
-        <p:txBody>
-          <a:bodyPr rtlCol="0" anchor="ctr"/>
-          <a:lstStyle/>
-          <a:p>
-            <a:pPr algn="ctr"/>
-          </a:p>
-        </p:txBody>
-      </p:sp>
-      <p:sp>
-        <p:nvSpPr>
-          <p:cNvPr id="12" name="Rectangle 11"/>
-          <p:cNvSpPr/>
-          <p:nvPr/>
-        </p:nvSpPr>
-        <p:spPr>
-          <a:xfrm>
-            <a:off x="4526280" y="2286000"/>
-            <a:ext cx="2011680" cy="1645920"/>
-          </a:xfrm>
-          <a:prstGeom prst="rect">
-            <a:avLst/>
-          </a:prstGeom>
-          <a:solidFill>
-            <a:srgbClr val="F8F9FA"/>
-          </a:solidFill>
-          <a:ln>
-            <a:solidFill>
-              <a:srgbClr val="DCDCDC"/>
-            </a:solidFill>
-          </a:ln>
-        </p:spPr>
-        <p:style>
-          <a:lnRef idx="1">
-            <a:schemeClr val="accent1"/>
-          </a:lnRef>
-          <a:fillRef idx="3">
-            <a:schemeClr val="accent1"/>
-          </a:fillRef>
-          <a:effectRef idx="2">
-            <a:schemeClr val="accent1"/>
-          </a:effectRef>
-          <a:fontRef idx="minor">
-            <a:schemeClr val="lt1"/>
-          </a:fontRef>
-        </p:style>
-        <p:txBody>
-          <a:bodyPr rtlCol="0" anchor="ctr"/>
-          <a:lstStyle/>
-          <a:p>
-            <a:pPr algn="ctr"/>
-          </a:p>
-        </p:txBody>
-      </p:sp>
-      <p:sp>
-        <p:nvSpPr>
-          <p:cNvPr id="13" name="Rectangle 12"/>
-          <p:cNvSpPr/>
-          <p:nvPr/>
-        </p:nvSpPr>
-        <p:spPr>
-          <a:xfrm>
-            <a:off x="6782104" y="4297680"/>
-            <a:ext cx="2011680" cy="1645920"/>
-          </a:xfrm>
-          <a:prstGeom prst="rect">
-            <a:avLst/>
-          </a:prstGeom>
-          <a:solidFill>
-            <a:srgbClr val="F8F9FA"/>
-          </a:solidFill>
-          <a:ln>
-            <a:solidFill>
-              <a:srgbClr val="DCDCDC"/>
-            </a:solidFill>
-          </a:ln>
-        </p:spPr>
-        <p:style>
-          <a:lnRef idx="1">
-            <a:schemeClr val="accent1"/>
-          </a:lnRef>
-          <a:fillRef idx="3">
-            <a:schemeClr val="accent1"/>
-          </a:fillRef>
-          <a:effectRef idx="2">
-            <a:schemeClr val="accent1"/>
-          </a:effectRef>
-          <a:fontRef idx="minor">
-            <a:schemeClr val="lt1"/>
-          </a:fontRef>
-        </p:style>
-        <p:txBody>
-          <a:bodyPr rtlCol="0" anchor="ctr"/>
-          <a:lstStyle/>
-          <a:p>
-            <a:pPr algn="ctr"/>
-          </a:p>
-        </p:txBody>
-      </p:sp>
-      <p:sp>
-        <p:nvSpPr>
-          <p:cNvPr id="14" name="Rectangle 13"/>
-          <p:cNvSpPr/>
-          <p:nvPr/>
-        </p:nvSpPr>
-        <p:spPr>
-          <a:xfrm>
-            <a:off x="9037015" y="2286000"/>
-            <a:ext cx="2011680" cy="1645920"/>
-          </a:xfrm>
-          <a:prstGeom prst="rect">
-            <a:avLst/>
-          </a:prstGeom>
-          <a:solidFill>
-            <a:srgbClr val="F8F9FA"/>
-          </a:solidFill>
-          <a:ln>
-            <a:solidFill>
-              <a:srgbClr val="DCDCDC"/>
-            </a:solidFill>
-          </a:ln>
-        </p:spPr>
-        <p:style>
-          <a:lnRef idx="1">
-            <a:schemeClr val="accent1"/>
-          </a:lnRef>
-          <a:fillRef idx="3">
-            <a:schemeClr val="accent1"/>
-          </a:fillRef>
-          <a:effectRef idx="2">
-            <a:schemeClr val="accent1"/>
-          </a:effectRef>
-          <a:fontRef idx="minor">
-            <a:schemeClr val="lt1"/>
-          </a:fontRef>
-        </p:style>
-        <p:txBody>
-          <a:bodyPr rtlCol="0" anchor="ctr"/>
-          <a:lstStyle/>
-          <a:p>
-            <a:pPr algn="ctr"/>
-          </a:p>
-        </p:txBody>
-      </p:sp>
-      <p:sp>
-        <p:nvSpPr>
-          <p:cNvPr id="15" name="Oval 14"/>
-          <p:cNvSpPr/>
-          <p:nvPr/>
-        </p:nvSpPr>
-        <p:spPr>
-          <a:xfrm>
-            <a:off x="929944" y="4023360"/>
-            <a:ext cx="182880" cy="182880"/>
-          </a:xfrm>
-          <a:prstGeom prst="ellipse">
-            <a:avLst/>
-          </a:prstGeom>
-          <a:solidFill>
-            <a:srgbClr val="0043DA"/>
-          </a:solidFill>
-          <a:ln/>
-        </p:spPr>
-        <p:style>
-          <a:lnRef idx="1">
-            <a:schemeClr val="accent1"/>
-          </a:lnRef>
-          <a:fillRef idx="3">
-            <a:schemeClr val="accent1"/>
-          </a:fillRef>
-          <a:effectRef idx="2">
-            <a:schemeClr val="accent1"/>
-          </a:effectRef>
-          <a:fontRef idx="minor">
-            <a:schemeClr val="lt1"/>
-          </a:fontRef>
-        </p:style>
-        <p:txBody>
-          <a:bodyPr rtlCol="0" anchor="ctr"/>
-          <a:lstStyle/>
-          <a:p>
-            <a:pPr algn="ctr"/>
-          </a:p>
-        </p:txBody>
-      </p:sp>
-      <p:sp>
-        <p:nvSpPr>
-          <p:cNvPr id="16" name="Oval 15"/>
-          <p:cNvSpPr/>
-          <p:nvPr/>
-        </p:nvSpPr>
-        <p:spPr>
-          <a:xfrm>
-            <a:off x="3184855" y="4023360"/>
-            <a:ext cx="182880" cy="182880"/>
-          </a:xfrm>
-          <a:prstGeom prst="ellipse">
-            <a:avLst/>
-          </a:prstGeom>
-          <a:solidFill>
-            <a:srgbClr val="0043DA"/>
-          </a:solidFill>
-          <a:ln/>
-        </p:spPr>
-        <p:style>
-          <a:lnRef idx="1">
-            <a:schemeClr val="accent1"/>
-          </a:lnRef>
-          <a:fillRef idx="3">
-            <a:schemeClr val="accent1"/>
-          </a:fillRef>
-          <a:effectRef idx="2">
-            <a:schemeClr val="accent1"/>
-          </a:effectRef>
-          <a:fontRef idx="minor">
-            <a:schemeClr val="lt1"/>
-          </a:fontRef>
-        </p:style>
-        <p:txBody>
-          <a:bodyPr rtlCol="0" anchor="ctr"/>
-          <a:lstStyle/>
-          <a:p>
-            <a:pPr algn="ctr"/>
-          </a:p>
-        </p:txBody>
-      </p:sp>
-      <p:sp>
-        <p:nvSpPr>
-          <p:cNvPr id="17" name="Oval 16"/>
-          <p:cNvSpPr/>
-          <p:nvPr/>
-        </p:nvSpPr>
-        <p:spPr>
-          <a:xfrm>
-            <a:off x="5440680" y="4023360"/>
-            <a:ext cx="182880" cy="182880"/>
-          </a:xfrm>
-          <a:prstGeom prst="ellipse">
-            <a:avLst/>
-          </a:prstGeom>
-          <a:solidFill>
-            <a:srgbClr val="0043DA"/>
-          </a:solidFill>
-          <a:ln/>
-        </p:spPr>
-        <p:style>
-          <a:lnRef idx="1">
-            <a:schemeClr val="accent1"/>
-          </a:lnRef>
-          <a:fillRef idx="3">
-            <a:schemeClr val="accent1"/>
-          </a:fillRef>
-          <a:effectRef idx="2">
-            <a:schemeClr val="accent1"/>
-          </a:effectRef>
-          <a:fontRef idx="minor">
-            <a:schemeClr val="lt1"/>
-          </a:fontRef>
-        </p:style>
-        <p:txBody>
-          <a:bodyPr rtlCol="0" anchor="ctr"/>
-          <a:lstStyle/>
-          <a:p>
-            <a:pPr algn="ctr"/>
-          </a:p>
-        </p:txBody>
-      </p:sp>
-      <p:sp>
-        <p:nvSpPr>
-          <p:cNvPr id="18" name="Oval 17"/>
-          <p:cNvSpPr/>
-          <p:nvPr/>
-        </p:nvSpPr>
-        <p:spPr>
-          <a:xfrm>
-            <a:off x="7696504" y="4023360"/>
-            <a:ext cx="182880" cy="182880"/>
-          </a:xfrm>
-          <a:prstGeom prst="ellipse">
-            <a:avLst/>
-          </a:prstGeom>
-          <a:solidFill>
-            <a:srgbClr val="0043DA"/>
-          </a:solidFill>
-          <a:ln/>
-        </p:spPr>
-        <p:style>
-          <a:lnRef idx="1">
-            <a:schemeClr val="accent1"/>
-          </a:lnRef>
-          <a:fillRef idx="3">
-            <a:schemeClr val="accent1"/>
-          </a:fillRef>
-          <a:effectRef idx="2">
-            <a:schemeClr val="accent1"/>
-          </a:effectRef>
-          <a:fontRef idx="minor">
-            <a:schemeClr val="lt1"/>
-          </a:fontRef>
-        </p:style>
-        <p:txBody>
-          <a:bodyPr rtlCol="0" anchor="ctr"/>
-          <a:lstStyle/>
-          <a:p>
-            <a:pPr algn="ctr"/>
-          </a:p>
-        </p:txBody>
-      </p:sp>
-      <p:sp>
-        <p:nvSpPr>
-          <p:cNvPr id="19" name="Oval 18"/>
-          <p:cNvSpPr/>
-          <p:nvPr/>
-        </p:nvSpPr>
-        <p:spPr>
-          <a:xfrm>
-            <a:off x="9951415" y="4023360"/>
-            <a:ext cx="182880" cy="182880"/>
-          </a:xfrm>
-          <a:prstGeom prst="ellipse">
-            <a:avLst/>
-          </a:prstGeom>
-          <a:solidFill>
-            <a:srgbClr val="0043DA"/>
-          </a:solidFill>
-          <a:ln/>
-        </p:spPr>
-        <p:style>
-          <a:lnRef idx="1">
-            <a:schemeClr val="accent1"/>
-          </a:lnRef>
-          <a:fillRef idx="3">
-            <a:schemeClr val="accent1"/>
-          </a:fillRef>
-          <a:effectRef idx="2">
-            <a:schemeClr val="accent1"/>
-          </a:effectRef>
-          <a:fontRef idx="minor">
-            <a:schemeClr val="lt1"/>
-          </a:fontRef>
-        </p:style>
-        <p:txBody>
-          <a:bodyPr rtlCol="0" anchor="ctr"/>
-          <a:lstStyle/>
-          <a:p>
-            <a:pPr algn="ctr"/>
-          </a:p>
-        </p:txBody>
-      </p:sp>
-      <p:sp>
-        <p:nvSpPr>
-          <p:cNvPr id="20" name="TextBox 19"/>
-          <p:cNvSpPr txBox="1"/>
-          <p:nvPr/>
-        </p:nvSpPr>
-        <p:spPr>
-          <a:xfrm>
-            <a:off x="15544" y="2286000"/>
-            <a:ext cx="2011680" cy="228600"/>
-          </a:xfrm>
-          <a:prstGeom prst="rect">
-            <a:avLst/>
-          </a:prstGeom>
-          <a:noFill/>
-        </p:spPr>
-        <p:txBody>
-          <a:bodyPr wrap="square">
-            <a:spAutoFit/>
-          </a:bodyPr>
-          <a:lstStyle/>
-          <a:p>
-            <a:r>
-              <a:rPr sz="1200">
-                <a:solidFill>
-                  <a:srgbClr val="0043DA"/>
-                </a:solidFill>
-                <a:latin typeface="Freesentation"/>
-              </a:rPr>
-              <a:t>Q1 2026</a:t>
-            </a:r>
-          </a:p>
-        </p:txBody>
-      </p:sp>
-      <p:sp>
-        <p:nvSpPr>
-          <p:cNvPr id="21" name="TextBox 20"/>
-          <p:cNvSpPr txBox="1"/>
-          <p:nvPr/>
-        </p:nvSpPr>
-        <p:spPr>
-          <a:xfrm>
-            <a:off x="15544" y="2514600"/>
-            <a:ext cx="2011680" cy="274320"/>
-          </a:xfrm>
-          <a:prstGeom prst="rect">
-            <a:avLst/>
-          </a:prstGeom>
-          <a:noFill/>
-        </p:spPr>
-        <p:txBody>
-          <a:bodyPr wrap="square">
-            <a:spAutoFit/>
-          </a:bodyPr>
-          <a:lstStyle/>
-          <a:p>
-            <a:r>
-              <a:rPr sz="1400" b="1">
-                <a:solidFill>
-                  <a:srgbClr val="0043DA"/>
-                </a:solidFill>
-                <a:latin typeface="Freesentation"/>
-              </a:rPr>
-              <a:t>현황 분석</a:t>
-            </a:r>
-          </a:p>
-        </p:txBody>
-      </p:sp>
-      <p:sp>
-        <p:nvSpPr>
-          <p:cNvPr id="22" name="TextBox 21"/>
-          <p:cNvSpPr txBox="1"/>
-          <p:nvPr/>
-        </p:nvSpPr>
-        <p:spPr>
-          <a:xfrm>
-            <a:off x="15544" y="2788920"/>
-            <a:ext cx="2011680" cy="1097280"/>
-          </a:xfrm>
-          <a:prstGeom prst="rect">
-            <a:avLst/>
-          </a:prstGeom>
-          <a:noFill/>
-        </p:spPr>
-        <p:txBody>
-          <a:bodyPr wrap="square">
-            <a:spAutoFit/>
-          </a:bodyPr>
-          <a:lstStyle/>
-          <a:p>
-            <a:r>
-              <a:rPr sz="1300">
-                <a:solidFill>
-                  <a:srgbClr val="4A4A4A"/>
-                </a:solidFill>
-                <a:latin typeface="Freesentation"/>
-              </a:rPr>
-              <a:t>• 온프레미스 Kafka 현황 파악</a:t>
-            </a:r>
-          </a:p>
-          <a:p>
-            <a:r>
-              <a:rPr sz="1300">
-                <a:solidFill>
-                  <a:srgbClr val="4A4A4A"/>
-                </a:solidFill>
-                <a:latin typeface="Freesentation"/>
-              </a:rPr>
-              <a:t>• 운영 문제점 정리</a:t>
-            </a:r>
-          </a:p>
-          <a:p>
-            <a:r>
-              <a:rPr sz="1300">
-                <a:solidFill>
-                  <a:srgbClr val="4A4A4A"/>
-                </a:solidFill>
-                <a:latin typeface="Freesentation"/>
-              </a:rPr>
-              <a:t>• 비용·성능 기준 수립</a:t>
-            </a:r>
-          </a:p>
-        </p:txBody>
-      </p:sp>
-      <p:sp>
-        <p:nvSpPr>
-          <p:cNvPr id="23" name="TextBox 22"/>
-          <p:cNvSpPr txBox="1"/>
-          <p:nvPr/>
-        </p:nvSpPr>
-        <p:spPr>
-          <a:xfrm>
-            <a:off x="2270455" y="4297680"/>
-            <a:ext cx="2011680" cy="228600"/>
-          </a:xfrm>
-          <a:prstGeom prst="rect">
-            <a:avLst/>
-          </a:prstGeom>
-          <a:noFill/>
-        </p:spPr>
-        <p:txBody>
-          <a:bodyPr wrap="square">
-            <a:spAutoFit/>
-          </a:bodyPr>
-          <a:lstStyle/>
-          <a:p>
-            <a:r>
-              <a:rPr sz="1200">
-                <a:solidFill>
-                  <a:srgbClr val="0043DA"/>
-                </a:solidFill>
-                <a:latin typeface="Freesentation"/>
-              </a:rPr>
-              <a:t>Q2 2026</a:t>
-            </a:r>
-          </a:p>
-        </p:txBody>
-      </p:sp>
-      <p:sp>
-        <p:nvSpPr>
-          <p:cNvPr id="24" name="TextBox 23"/>
-          <p:cNvSpPr txBox="1"/>
-          <p:nvPr/>
-        </p:nvSpPr>
-        <p:spPr>
-          <a:xfrm>
-            <a:off x="2270455" y="4526280"/>
-            <a:ext cx="2011680" cy="274320"/>
-          </a:xfrm>
-          <a:prstGeom prst="rect">
-            <a:avLst/>
-          </a:prstGeom>
-          <a:noFill/>
-        </p:spPr>
-        <p:txBody>
-          <a:bodyPr wrap="square">
-            <a:spAutoFit/>
-          </a:bodyPr>
-          <a:lstStyle/>
-          <a:p>
-            <a:r>
-              <a:rPr sz="1400" b="1">
-                <a:solidFill>
-                  <a:srgbClr val="0043DA"/>
-                </a:solidFill>
-                <a:latin typeface="Freesentation"/>
-              </a:rPr>
-              <a:t>아키텍처 설계</a:t>
-            </a:r>
-          </a:p>
-        </p:txBody>
-      </p:sp>
-      <p:sp>
-        <p:nvSpPr>
-          <p:cNvPr id="25" name="TextBox 24"/>
-          <p:cNvSpPr txBox="1"/>
-          <p:nvPr/>
-        </p:nvSpPr>
-        <p:spPr>
-          <a:xfrm>
-            <a:off x="2270455" y="4800600"/>
-            <a:ext cx="2011680" cy="1097280"/>
-          </a:xfrm>
-          <a:prstGeom prst="rect">
-            <a:avLst/>
-          </a:prstGeom>
-          <a:noFill/>
-        </p:spPr>
-        <p:txBody>
-          <a:bodyPr wrap="square">
-            <a:spAutoFit/>
-          </a:bodyPr>
-          <a:lstStyle/>
-          <a:p>
-            <a:r>
-              <a:rPr sz="1300">
-                <a:solidFill>
-                  <a:srgbClr val="4A4A4A"/>
-                </a:solidFill>
-                <a:latin typeface="Freesentation"/>
-              </a:rPr>
-              <a:t>• MSK 클러스터 유형 선택</a:t>
-            </a:r>
-          </a:p>
-          <a:p>
-            <a:r>
-              <a:rPr sz="1300">
-                <a:solidFill>
-                  <a:srgbClr val="4A4A4A"/>
-                </a:solidFill>
-                <a:latin typeface="Freesentation"/>
-              </a:rPr>
-              <a:t>• 네트워크/보안 설계</a:t>
-            </a:r>
-          </a:p>
-          <a:p>
-            <a:r>
-              <a:rPr sz="1300">
-                <a:solidFill>
-                  <a:srgbClr val="4A4A4A"/>
-                </a:solidFill>
-                <a:latin typeface="Freesentation"/>
-              </a:rPr>
-              <a:t>• 마이그레이션 계획 수립</a:t>
-            </a:r>
-          </a:p>
-        </p:txBody>
-      </p:sp>
-      <p:sp>
-        <p:nvSpPr>
-          <p:cNvPr id="26" name="TextBox 25"/>
-          <p:cNvSpPr txBox="1"/>
-          <p:nvPr/>
-        </p:nvSpPr>
-        <p:spPr>
-          <a:xfrm>
-            <a:off x="4526280" y="2286000"/>
-            <a:ext cx="2011680" cy="228600"/>
-          </a:xfrm>
-          <a:prstGeom prst="rect">
-            <a:avLst/>
-          </a:prstGeom>
-          <a:noFill/>
-        </p:spPr>
-        <p:txBody>
-          <a:bodyPr wrap="square">
-            <a:spAutoFit/>
-          </a:bodyPr>
-          <a:lstStyle/>
-          <a:p>
-            <a:r>
-              <a:rPr sz="1200">
-                <a:solidFill>
-                  <a:srgbClr val="0043DA"/>
-                </a:solidFill>
-                <a:latin typeface="Freesentation"/>
-              </a:rPr>
-              <a:t>Q3 2026</a:t>
-            </a:r>
-          </a:p>
-        </p:txBody>
-      </p:sp>
-      <p:sp>
-        <p:nvSpPr>
-          <p:cNvPr id="27" name="TextBox 26"/>
-          <p:cNvSpPr txBox="1"/>
-          <p:nvPr/>
-        </p:nvSpPr>
-        <p:spPr>
-          <a:xfrm>
-            <a:off x="4526280" y="2514600"/>
-            <a:ext cx="2011680" cy="274320"/>
-          </a:xfrm>
-          <a:prstGeom prst="rect">
-            <a:avLst/>
-          </a:prstGeom>
-          <a:noFill/>
-        </p:spPr>
-        <p:txBody>
-          <a:bodyPr wrap="square">
-            <a:spAutoFit/>
-          </a:bodyPr>
-          <a:lstStyle/>
-          <a:p>
-            <a:r>
-              <a:rPr sz="1400" b="1">
-                <a:solidFill>
-                  <a:srgbClr val="0043DA"/>
-                </a:solidFill>
-                <a:latin typeface="Freesentation"/>
-              </a:rPr>
-              <a:t>파일럿 구축</a:t>
-            </a:r>
-          </a:p>
-        </p:txBody>
-      </p:sp>
-      <p:sp>
-        <p:nvSpPr>
-          <p:cNvPr id="28" name="TextBox 27"/>
-          <p:cNvSpPr txBox="1"/>
-          <p:nvPr/>
-        </p:nvSpPr>
-        <p:spPr>
-          <a:xfrm>
-            <a:off x="4526280" y="2788920"/>
-            <a:ext cx="2011680" cy="1097280"/>
-          </a:xfrm>
-          <a:prstGeom prst="rect">
-            <a:avLst/>
-          </a:prstGeom>
-          <a:noFill/>
-        </p:spPr>
-        <p:txBody>
-          <a:bodyPr wrap="square">
-            <a:spAutoFit/>
-          </a:bodyPr>
-          <a:lstStyle/>
-          <a:p>
-            <a:r>
-              <a:rPr sz="1300">
-                <a:solidFill>
-                  <a:srgbClr val="4A4A4A"/>
-                </a:solidFill>
-                <a:latin typeface="Freesentation"/>
-              </a:rPr>
-              <a:t>• 개발 환경 MSK 구축</a:t>
-            </a:r>
-          </a:p>
-          <a:p>
-            <a:r>
-              <a:rPr sz="1300">
-                <a:solidFill>
-                  <a:srgbClr val="4A4A4A"/>
-                </a:solidFill>
-                <a:latin typeface="Freesentation"/>
-              </a:rPr>
-              <a:t>• MirrorMaker 2 설정</a:t>
-            </a:r>
-          </a:p>
-          <a:p>
-            <a:r>
-              <a:rPr sz="1300">
-                <a:solidFill>
-                  <a:srgbClr val="4A4A4A"/>
-                </a:solidFill>
-                <a:latin typeface="Freesentation"/>
-              </a:rPr>
-              <a:t>• 데이터 동기화 검증</a:t>
-            </a:r>
-          </a:p>
-        </p:txBody>
-      </p:sp>
-      <p:sp>
-        <p:nvSpPr>
-          <p:cNvPr id="29" name="TextBox 28"/>
-          <p:cNvSpPr txBox="1"/>
-          <p:nvPr/>
-        </p:nvSpPr>
-        <p:spPr>
-          <a:xfrm>
-            <a:off x="6782104" y="4297680"/>
-            <a:ext cx="2011680" cy="228600"/>
-          </a:xfrm>
-          <a:prstGeom prst="rect">
-            <a:avLst/>
-          </a:prstGeom>
-          <a:noFill/>
-        </p:spPr>
-        <p:txBody>
-          <a:bodyPr wrap="square">
-            <a:spAutoFit/>
-          </a:bodyPr>
-          <a:lstStyle/>
-          <a:p>
-            <a:r>
-              <a:rPr sz="1200">
-                <a:solidFill>
-                  <a:srgbClr val="0043DA"/>
-                </a:solidFill>
-                <a:latin typeface="Freesentation"/>
-              </a:rPr>
-              <a:t>Q4 2026</a:t>
-            </a:r>
-          </a:p>
-        </p:txBody>
-      </p:sp>
-      <p:sp>
-        <p:nvSpPr>
-          <p:cNvPr id="30" name="TextBox 29"/>
-          <p:cNvSpPr txBox="1"/>
-          <p:nvPr/>
-        </p:nvSpPr>
-        <p:spPr>
-          <a:xfrm>
-            <a:off x="6782104" y="4526280"/>
-            <a:ext cx="2011680" cy="274320"/>
-          </a:xfrm>
-          <a:prstGeom prst="rect">
-            <a:avLst/>
-          </a:prstGeom>
-          <a:noFill/>
-        </p:spPr>
-        <p:txBody>
-          <a:bodyPr wrap="square">
-            <a:spAutoFit/>
-          </a:bodyPr>
-          <a:lstStyle/>
-          <a:p>
-            <a:r>
-              <a:rPr sz="1400" b="1">
-                <a:solidFill>
-                  <a:srgbClr val="0043DA"/>
-                </a:solidFill>
-                <a:latin typeface="Freesentation"/>
-              </a:rPr>
-              <a:t>전환 실행</a:t>
-            </a:r>
-          </a:p>
-        </p:txBody>
-      </p:sp>
-      <p:sp>
-        <p:nvSpPr>
-          <p:cNvPr id="31" name="TextBox 30"/>
-          <p:cNvSpPr txBox="1"/>
-          <p:nvPr/>
-        </p:nvSpPr>
-        <p:spPr>
-          <a:xfrm>
-            <a:off x="6782104" y="4800600"/>
-            <a:ext cx="2011680" cy="1097280"/>
-          </a:xfrm>
-          <a:prstGeom prst="rect">
-            <a:avLst/>
-          </a:prstGeom>
-          <a:noFill/>
-        </p:spPr>
-        <p:txBody>
-          <a:bodyPr wrap="square">
-            <a:spAutoFit/>
-          </a:bodyPr>
-          <a:lstStyle/>
-          <a:p>
-            <a:r>
-              <a:rPr sz="1300">
-                <a:solidFill>
-                  <a:srgbClr val="4A4A4A"/>
-                </a:solidFill>
-                <a:latin typeface="Freesentation"/>
-              </a:rPr>
-              <a:t>• 프로덕션 전환 실행</a:t>
-            </a:r>
-          </a:p>
-          <a:p>
-            <a:r>
-              <a:rPr sz="1300">
-                <a:solidFill>
-                  <a:srgbClr val="4A4A4A"/>
-                </a:solidFill>
-                <a:latin typeface="Freesentation"/>
-              </a:rPr>
-              <a:t>• 데이터 마이그레이션</a:t>
-            </a:r>
-          </a:p>
-          <a:p>
-            <a:r>
-              <a:rPr sz="1300">
-                <a:solidFill>
-                  <a:srgbClr val="4A4A4A"/>
-                </a:solidFill>
-                <a:latin typeface="Freesentation"/>
-              </a:rPr>
-              <a:t>• 롤백 계획 준비</a:t>
-            </a:r>
-          </a:p>
-        </p:txBody>
-      </p:sp>
-      <p:sp>
-        <p:nvSpPr>
-          <p:cNvPr id="32" name="TextBox 31"/>
-          <p:cNvSpPr txBox="1"/>
-          <p:nvPr/>
-        </p:nvSpPr>
-        <p:spPr>
-          <a:xfrm>
-            <a:off x="9037015" y="2286000"/>
-            <a:ext cx="2011680" cy="228600"/>
-          </a:xfrm>
-          <a:prstGeom prst="rect">
-            <a:avLst/>
-          </a:prstGeom>
-          <a:noFill/>
-        </p:spPr>
-        <p:txBody>
-          <a:bodyPr wrap="square">
-            <a:spAutoFit/>
-          </a:bodyPr>
-          <a:lstStyle/>
-          <a:p>
-            <a:r>
-              <a:rPr sz="1200">
-                <a:solidFill>
-                  <a:srgbClr val="0043DA"/>
-                </a:solidFill>
-                <a:latin typeface="Freesentation"/>
-              </a:rPr>
-              <a:t>Q1 2027</a:t>
-            </a:r>
-          </a:p>
-        </p:txBody>
-      </p:sp>
-      <p:sp>
-        <p:nvSpPr>
-          <p:cNvPr id="33" name="TextBox 32"/>
-          <p:cNvSpPr txBox="1"/>
-          <p:nvPr/>
-        </p:nvSpPr>
-        <p:spPr>
-          <a:xfrm>
-            <a:off x="9037015" y="2514600"/>
-            <a:ext cx="2011680" cy="274320"/>
-          </a:xfrm>
-          <a:prstGeom prst="rect">
-            <a:avLst/>
-          </a:prstGeom>
-          <a:noFill/>
-        </p:spPr>
-        <p:txBody>
-          <a:bodyPr wrap="square">
-            <a:spAutoFit/>
-          </a:bodyPr>
-          <a:lstStyle/>
-          <a:p>
-            <a:r>
-              <a:rPr sz="1400" b="1">
-                <a:solidFill>
-                  <a:srgbClr val="0043DA"/>
-                </a:solidFill>
-                <a:latin typeface="Freesentation"/>
-              </a:rPr>
-              <a:t>안정화</a:t>
-            </a:r>
-          </a:p>
-        </p:txBody>
-      </p:sp>
-      <p:sp>
-        <p:nvSpPr>
-          <p:cNvPr id="34" name="TextBox 33"/>
-          <p:cNvSpPr txBox="1"/>
-          <p:nvPr/>
-        </p:nvSpPr>
-        <p:spPr>
-          <a:xfrm>
-            <a:off x="9037015" y="2788920"/>
-            <a:ext cx="2011680" cy="1097280"/>
-          </a:xfrm>
-          <a:prstGeom prst="rect">
-            <a:avLst/>
-          </a:prstGeom>
-          <a:noFill/>
-        </p:spPr>
-        <p:txBody>
-          <a:bodyPr wrap="square">
-            <a:spAutoFit/>
-          </a:bodyPr>
-          <a:lstStyle/>
-          <a:p>
-            <a:r>
-              <a:rPr sz="1300">
-                <a:solidFill>
-                  <a:srgbClr val="4A4A4A"/>
-                </a:solidFill>
-                <a:latin typeface="Freesentation"/>
-              </a:rPr>
-              <a:t>• 모니터링 체계 수립</a:t>
-            </a:r>
-          </a:p>
-          <a:p>
-            <a:r>
-              <a:rPr sz="1300">
-                <a:solidFill>
-                  <a:srgbClr val="4A4A4A"/>
-                </a:solidFill>
-                <a:latin typeface="Freesentation"/>
-              </a:rPr>
-              <a:t>• 비용 최적화</a:t>
-            </a:r>
-          </a:p>
-          <a:p>
-            <a:r>
-              <a:rPr sz="1300">
-                <a:solidFill>
-                  <a:srgbClr val="4A4A4A"/>
-                </a:solidFill>
-                <a:latin typeface="Freesentation"/>
-              </a:rPr>
-              <a:t>• 운영 매뉴얼 완성</a:t>
-            </a:r>
-          </a:p>
-        </p:txBody>
-      </p:sp>
-    </p:spTree>
   </p:cSld>
   <p:clrMapOvr>
     <a:masterClrMapping/>
@@ -13414,12 +12077,7 @@
         <p:txBody>
           <a:bodyPr/>
           <a:lstStyle/>
-          <a:p>
-            <a:r>
-              <a:rPr lang="ko-KR" altLang="en-US" dirty="0"/>
-              <a:t>L08. Funnel</a:t>
-            </a:r>
-          </a:p>
+          <a:p/>
         </p:txBody>
       </p:sp>
       <p:sp>

--- a/results/pptx/AWS_MSK_Expert_Intro.pptx
+++ b/results/pptx/AWS_MSK_Expert_Intro.pptx
@@ -3707,36 +3707,25 @@
       <p:grpSpPr/>
       <p:sp>
         <p:nvSpPr>
-          <p:cNvPr id="2" name="Title 1"/>
+          <p:cNvPr id="2" name="Text Placeholder 1"/>
           <p:cNvSpPr>
             <a:spLocks noGrp="1"/>
           </p:cNvSpPr>
           <p:nvPr>
-            <p:ph type="title"/>
+            <p:ph type="body" sz="quarter" idx="10"/>
           </p:nvPr>
         </p:nvSpPr>
-        <p:spPr/>
+        <p:spPr>
+          <a:ln>
+            <a:noFill/>
+          </a:ln>
+        </p:spPr>
         <p:txBody>
           <a:bodyPr/>
           <a:lstStyle/>
-          <a:p/>
-        </p:txBody>
-      </p:sp>
-      <p:sp>
-        <p:nvSpPr>
-          <p:cNvPr id="3" name="Content Placeholder 2"/>
-          <p:cNvSpPr>
-            <a:spLocks noGrp="1"/>
-          </p:cNvSpPr>
-          <p:nvPr>
-            <p:ph idx="1"/>
-          </p:nvPr>
-        </p:nvSpPr>
-        <p:spPr/>
-        <p:txBody>
-          <a:bodyPr/>
-          <a:lstStyle/>
-          <a:p/>
+          <a:p>
+            <a:endParaRPr/>
+          </a:p>
         </p:txBody>
       </p:sp>
       <p:sp>
@@ -5533,6 +5522,1338 @@
         <p14:creationId xmlns:p14="http://schemas.microsoft.com/office/powerpoint/2010/main" val="3722360403"/>
       </p:ext>
     </p:extLst>
+  </p:cSld>
+  <p:clrMapOvr>
+    <a:masterClrMapping/>
+  </p:clrMapOvr>
+</p:sld>
+</file>
+
+<file path=ppt/slides/slide13.xml><?xml version="1.0" encoding="utf-8"?>
+<p:sld xmlns:a="http://schemas.openxmlformats.org/drawingml/2006/main" xmlns:p="http://schemas.openxmlformats.org/presentationml/2006/main" xmlns:r="http://schemas.openxmlformats.org/officeDocument/2006/relationships">
+  <p:cSld>
+    <p:spTree>
+      <p:nvGrpSpPr>
+        <p:cNvPr id="1" name=""/>
+        <p:cNvGrpSpPr/>
+        <p:nvPr/>
+      </p:nvGrpSpPr>
+      <p:grpSpPr/>
+      <p:sp>
+        <p:nvSpPr>
+          <p:cNvPr id="2" name="Title 1"/>
+          <p:cNvSpPr>
+            <a:spLocks noGrp="1"/>
+          </p:cNvSpPr>
+          <p:nvPr>
+            <p:ph type="ctrTitle"/>
+          </p:nvPr>
+        </p:nvSpPr>
+        <p:spPr/>
+        <p:txBody>
+          <a:bodyPr/>
+          <a:lstStyle/>
+          <a:p>
+            <a:r>
+              <a:t>L06 Zigzag Timeline</a:t>
+            </a:r>
+          </a:p>
+        </p:txBody>
+      </p:sp>
+      <p:sp>
+        <p:nvSpPr>
+          <p:cNvPr id="3" name="Subtitle 2"/>
+          <p:cNvSpPr>
+            <a:spLocks noGrp="1"/>
+          </p:cNvSpPr>
+          <p:nvPr>
+            <p:ph type="subTitle" idx="1"/>
+          </p:nvPr>
+        </p:nvSpPr>
+        <p:spPr/>
+        <p:txBody>
+          <a:bodyPr/>
+          <a:lstStyle/>
+          <a:p/>
+        </p:txBody>
+      </p:sp>
+      <p:sp>
+        <p:nvSpPr>
+          <p:cNvPr id="4" name="TextBox 3"/>
+          <p:cNvSpPr txBox="1"/>
+          <p:nvPr/>
+        </p:nvSpPr>
+        <p:spPr>
+          <a:xfrm>
+            <a:off x="354787" y="557784"/>
+            <a:ext cx="2720340" cy="932688"/>
+          </a:xfrm>
+          <a:prstGeom prst="rect">
+            <a:avLst/>
+          </a:prstGeom>
+          <a:noFill/>
+        </p:spPr>
+        <p:txBody>
+          <a:bodyPr wrap="square">
+            <a:spAutoFit/>
+          </a:bodyPr>
+          <a:lstStyle/>
+          <a:p>
+            <a:r>
+              <a:rPr sz="2000" b="1">
+                <a:solidFill>
+                  <a:srgbClr val="000000"/>
+                </a:solidFill>
+                <a:latin typeface="Freesentation 7 Bold"/>
+              </a:rPr>
+              <a:t>L06. Zigzag Timeline</a:t>
+            </a:r>
+          </a:p>
+        </p:txBody>
+      </p:sp>
+      <p:sp>
+        <p:nvSpPr>
+          <p:cNvPr id="5" name="TextBox 4"/>
+          <p:cNvSpPr txBox="1"/>
+          <p:nvPr/>
+        </p:nvSpPr>
+        <p:spPr>
+          <a:xfrm>
+            <a:off x="3762756" y="558698"/>
+            <a:ext cx="7550200" cy="938174"/>
+          </a:xfrm>
+          <a:prstGeom prst="rect">
+            <a:avLst/>
+          </a:prstGeom>
+          <a:noFill/>
+        </p:spPr>
+        <p:txBody>
+          <a:bodyPr wrap="square">
+            <a:spAutoFit/>
+          </a:bodyPr>
+          <a:lstStyle/>
+          <a:p>
+            <a:r>
+              <a:rPr sz="1200">
+                <a:solidFill>
+                  <a:srgbClr val="4A4A4A"/>
+                </a:solidFill>
+                <a:latin typeface="Freesentation 5 Medium"/>
+              </a:rPr>
+              <a:t>S자 지그재그 타임라인 — 시간 흐름 시각화</a:t>
+            </a:r>
+          </a:p>
+        </p:txBody>
+      </p:sp>
+      <p:sp>
+        <p:nvSpPr>
+          <p:cNvPr id="6" name="Rectangle 5"/>
+          <p:cNvSpPr/>
+          <p:nvPr/>
+        </p:nvSpPr>
+        <p:spPr>
+          <a:xfrm>
+            <a:off x="355701" y="1496872"/>
+            <a:ext cx="11481206" cy="9144"/>
+          </a:xfrm>
+          <a:prstGeom prst="rect">
+            <a:avLst/>
+          </a:prstGeom>
+          <a:solidFill>
+            <a:srgbClr val="DCDCDC"/>
+          </a:solidFill>
+          <a:ln>
+            <a:solidFill>
+              <a:srgbClr val="DCDCDC"/>
+            </a:solidFill>
+          </a:ln>
+        </p:spPr>
+        <p:style>
+          <a:lnRef idx="1">
+            <a:schemeClr val="accent1"/>
+          </a:lnRef>
+          <a:fillRef idx="3">
+            <a:schemeClr val="accent1"/>
+          </a:fillRef>
+          <a:effectRef idx="2">
+            <a:schemeClr val="accent1"/>
+          </a:effectRef>
+          <a:fontRef idx="minor">
+            <a:schemeClr val="lt1"/>
+          </a:fontRef>
+        </p:style>
+        <p:txBody>
+          <a:bodyPr rtlCol="0" anchor="ctr"/>
+          <a:lstStyle/>
+          <a:p>
+            <a:pPr algn="ctr"/>
+          </a:p>
+        </p:txBody>
+      </p:sp>
+      <p:sp>
+        <p:nvSpPr>
+          <p:cNvPr id="7" name="TextBox 6"/>
+          <p:cNvSpPr txBox="1"/>
+          <p:nvPr/>
+        </p:nvSpPr>
+        <p:spPr>
+          <a:xfrm>
+            <a:off x="457200" y="1600200"/>
+            <a:ext cx="11277295" cy="320040"/>
+          </a:xfrm>
+          <a:prstGeom prst="rect">
+            <a:avLst/>
+          </a:prstGeom>
+          <a:noFill/>
+        </p:spPr>
+        <p:txBody>
+          <a:bodyPr wrap="square">
+            <a:spAutoFit/>
+          </a:bodyPr>
+          <a:lstStyle/>
+          <a:p>
+            <a:r>
+              <a:rPr sz="1600" b="0">
+                <a:solidFill>
+                  <a:srgbClr val="0043DA"/>
+                </a:solidFill>
+                <a:latin typeface="Freesentation"/>
+              </a:rPr>
+              <a:t>온프레미스 Kafka → AWS MSK 전환 로드맵</a:t>
+            </a:r>
+          </a:p>
+        </p:txBody>
+      </p:sp>
+      <p:sp>
+        <p:nvSpPr>
+          <p:cNvPr id="8" name="TextBox 7"/>
+          <p:cNvSpPr txBox="1"/>
+          <p:nvPr/>
+        </p:nvSpPr>
+        <p:spPr>
+          <a:xfrm>
+            <a:off x="457200" y="1965960"/>
+            <a:ext cx="11277295" cy="274320"/>
+          </a:xfrm>
+          <a:prstGeom prst="rect">
+            <a:avLst/>
+          </a:prstGeom>
+          <a:noFill/>
+        </p:spPr>
+        <p:txBody>
+          <a:bodyPr wrap="square">
+            <a:spAutoFit/>
+          </a:bodyPr>
+          <a:lstStyle/>
+          <a:p>
+            <a:r>
+              <a:rPr sz="1300">
+                <a:solidFill>
+                  <a:srgbClr val="4A4A4A"/>
+                </a:solidFill>
+                <a:latin typeface="Freesentation"/>
+              </a:rPr>
+              <a:t>현황 분석부터 안정화까지 5분기 전환 타임라인</a:t>
+            </a:r>
+          </a:p>
+        </p:txBody>
+      </p:sp>
+      <p:sp>
+        <p:nvSpPr>
+          <p:cNvPr id="9" name="Rectangle 8"/>
+          <p:cNvSpPr/>
+          <p:nvPr/>
+        </p:nvSpPr>
+        <p:spPr>
+          <a:xfrm>
+            <a:off x="457200" y="4114800"/>
+            <a:ext cx="11277295" cy="36576"/>
+          </a:xfrm>
+          <a:prstGeom prst="rect">
+            <a:avLst/>
+          </a:prstGeom>
+          <a:solidFill>
+            <a:srgbClr val="0043DA"/>
+          </a:solidFill>
+          <a:ln>
+            <a:solidFill>
+              <a:srgbClr val="0043DA"/>
+            </a:solidFill>
+          </a:ln>
+        </p:spPr>
+        <p:style>
+          <a:lnRef idx="1">
+            <a:schemeClr val="accent1"/>
+          </a:lnRef>
+          <a:fillRef idx="3">
+            <a:schemeClr val="accent1"/>
+          </a:fillRef>
+          <a:effectRef idx="2">
+            <a:schemeClr val="accent1"/>
+          </a:effectRef>
+          <a:fontRef idx="minor">
+            <a:schemeClr val="lt1"/>
+          </a:fontRef>
+        </p:style>
+        <p:txBody>
+          <a:bodyPr rtlCol="0" anchor="ctr"/>
+          <a:lstStyle/>
+          <a:p>
+            <a:pPr algn="ctr"/>
+          </a:p>
+        </p:txBody>
+      </p:sp>
+      <p:sp>
+        <p:nvSpPr>
+          <p:cNvPr id="10" name="Rectangle 9"/>
+          <p:cNvSpPr/>
+          <p:nvPr/>
+        </p:nvSpPr>
+        <p:spPr>
+          <a:xfrm>
+            <a:off x="15544" y="2286000"/>
+            <a:ext cx="2011680" cy="1645920"/>
+          </a:xfrm>
+          <a:prstGeom prst="rect">
+            <a:avLst/>
+          </a:prstGeom>
+          <a:solidFill>
+            <a:srgbClr val="F8F9FA"/>
+          </a:solidFill>
+          <a:ln>
+            <a:solidFill>
+              <a:srgbClr val="DCDCDC"/>
+            </a:solidFill>
+          </a:ln>
+        </p:spPr>
+        <p:style>
+          <a:lnRef idx="1">
+            <a:schemeClr val="accent1"/>
+          </a:lnRef>
+          <a:fillRef idx="3">
+            <a:schemeClr val="accent1"/>
+          </a:fillRef>
+          <a:effectRef idx="2">
+            <a:schemeClr val="accent1"/>
+          </a:effectRef>
+          <a:fontRef idx="minor">
+            <a:schemeClr val="lt1"/>
+          </a:fontRef>
+        </p:style>
+        <p:txBody>
+          <a:bodyPr rtlCol="0" anchor="ctr"/>
+          <a:lstStyle/>
+          <a:p>
+            <a:pPr algn="ctr"/>
+          </a:p>
+        </p:txBody>
+      </p:sp>
+      <p:sp>
+        <p:nvSpPr>
+          <p:cNvPr id="11" name="Rectangle 10"/>
+          <p:cNvSpPr/>
+          <p:nvPr/>
+        </p:nvSpPr>
+        <p:spPr>
+          <a:xfrm>
+            <a:off x="2270455" y="4297680"/>
+            <a:ext cx="2011680" cy="1645920"/>
+          </a:xfrm>
+          <a:prstGeom prst="rect">
+            <a:avLst/>
+          </a:prstGeom>
+          <a:solidFill>
+            <a:srgbClr val="F8F9FA"/>
+          </a:solidFill>
+          <a:ln>
+            <a:solidFill>
+              <a:srgbClr val="DCDCDC"/>
+            </a:solidFill>
+          </a:ln>
+        </p:spPr>
+        <p:style>
+          <a:lnRef idx="1">
+            <a:schemeClr val="accent1"/>
+          </a:lnRef>
+          <a:fillRef idx="3">
+            <a:schemeClr val="accent1"/>
+          </a:fillRef>
+          <a:effectRef idx="2">
+            <a:schemeClr val="accent1"/>
+          </a:effectRef>
+          <a:fontRef idx="minor">
+            <a:schemeClr val="lt1"/>
+          </a:fontRef>
+        </p:style>
+        <p:txBody>
+          <a:bodyPr rtlCol="0" anchor="ctr"/>
+          <a:lstStyle/>
+          <a:p>
+            <a:pPr algn="ctr"/>
+          </a:p>
+        </p:txBody>
+      </p:sp>
+      <p:sp>
+        <p:nvSpPr>
+          <p:cNvPr id="12" name="Rectangle 11"/>
+          <p:cNvSpPr/>
+          <p:nvPr/>
+        </p:nvSpPr>
+        <p:spPr>
+          <a:xfrm>
+            <a:off x="4526280" y="2286000"/>
+            <a:ext cx="2011680" cy="1645920"/>
+          </a:xfrm>
+          <a:prstGeom prst="rect">
+            <a:avLst/>
+          </a:prstGeom>
+          <a:solidFill>
+            <a:srgbClr val="F8F9FA"/>
+          </a:solidFill>
+          <a:ln>
+            <a:solidFill>
+              <a:srgbClr val="DCDCDC"/>
+            </a:solidFill>
+          </a:ln>
+        </p:spPr>
+        <p:style>
+          <a:lnRef idx="1">
+            <a:schemeClr val="accent1"/>
+          </a:lnRef>
+          <a:fillRef idx="3">
+            <a:schemeClr val="accent1"/>
+          </a:fillRef>
+          <a:effectRef idx="2">
+            <a:schemeClr val="accent1"/>
+          </a:effectRef>
+          <a:fontRef idx="minor">
+            <a:schemeClr val="lt1"/>
+          </a:fontRef>
+        </p:style>
+        <p:txBody>
+          <a:bodyPr rtlCol="0" anchor="ctr"/>
+          <a:lstStyle/>
+          <a:p>
+            <a:pPr algn="ctr"/>
+          </a:p>
+        </p:txBody>
+      </p:sp>
+      <p:sp>
+        <p:nvSpPr>
+          <p:cNvPr id="13" name="Rectangle 12"/>
+          <p:cNvSpPr/>
+          <p:nvPr/>
+        </p:nvSpPr>
+        <p:spPr>
+          <a:xfrm>
+            <a:off x="6782104" y="4297680"/>
+            <a:ext cx="2011680" cy="1645920"/>
+          </a:xfrm>
+          <a:prstGeom prst="rect">
+            <a:avLst/>
+          </a:prstGeom>
+          <a:solidFill>
+            <a:srgbClr val="F8F9FA"/>
+          </a:solidFill>
+          <a:ln>
+            <a:solidFill>
+              <a:srgbClr val="DCDCDC"/>
+            </a:solidFill>
+          </a:ln>
+        </p:spPr>
+        <p:style>
+          <a:lnRef idx="1">
+            <a:schemeClr val="accent1"/>
+          </a:lnRef>
+          <a:fillRef idx="3">
+            <a:schemeClr val="accent1"/>
+          </a:fillRef>
+          <a:effectRef idx="2">
+            <a:schemeClr val="accent1"/>
+          </a:effectRef>
+          <a:fontRef idx="minor">
+            <a:schemeClr val="lt1"/>
+          </a:fontRef>
+        </p:style>
+        <p:txBody>
+          <a:bodyPr rtlCol="0" anchor="ctr"/>
+          <a:lstStyle/>
+          <a:p>
+            <a:pPr algn="ctr"/>
+          </a:p>
+        </p:txBody>
+      </p:sp>
+      <p:sp>
+        <p:nvSpPr>
+          <p:cNvPr id="14" name="Rectangle 13"/>
+          <p:cNvSpPr/>
+          <p:nvPr/>
+        </p:nvSpPr>
+        <p:spPr>
+          <a:xfrm>
+            <a:off x="9037015" y="2286000"/>
+            <a:ext cx="2011680" cy="1645920"/>
+          </a:xfrm>
+          <a:prstGeom prst="rect">
+            <a:avLst/>
+          </a:prstGeom>
+          <a:solidFill>
+            <a:srgbClr val="F8F9FA"/>
+          </a:solidFill>
+          <a:ln>
+            <a:solidFill>
+              <a:srgbClr val="DCDCDC"/>
+            </a:solidFill>
+          </a:ln>
+        </p:spPr>
+        <p:style>
+          <a:lnRef idx="1">
+            <a:schemeClr val="accent1"/>
+          </a:lnRef>
+          <a:fillRef idx="3">
+            <a:schemeClr val="accent1"/>
+          </a:fillRef>
+          <a:effectRef idx="2">
+            <a:schemeClr val="accent1"/>
+          </a:effectRef>
+          <a:fontRef idx="minor">
+            <a:schemeClr val="lt1"/>
+          </a:fontRef>
+        </p:style>
+        <p:txBody>
+          <a:bodyPr rtlCol="0" anchor="ctr"/>
+          <a:lstStyle/>
+          <a:p>
+            <a:pPr algn="ctr"/>
+          </a:p>
+        </p:txBody>
+      </p:sp>
+      <p:sp>
+        <p:nvSpPr>
+          <p:cNvPr id="15" name="Oval 14"/>
+          <p:cNvSpPr/>
+          <p:nvPr/>
+        </p:nvSpPr>
+        <p:spPr>
+          <a:xfrm>
+            <a:off x="929944" y="4023360"/>
+            <a:ext cx="182880" cy="182880"/>
+          </a:xfrm>
+          <a:prstGeom prst="ellipse">
+            <a:avLst/>
+          </a:prstGeom>
+          <a:solidFill>
+            <a:srgbClr val="0043DA"/>
+          </a:solidFill>
+          <a:ln/>
+        </p:spPr>
+        <p:style>
+          <a:lnRef idx="1">
+            <a:schemeClr val="accent1"/>
+          </a:lnRef>
+          <a:fillRef idx="3">
+            <a:schemeClr val="accent1"/>
+          </a:fillRef>
+          <a:effectRef idx="2">
+            <a:schemeClr val="accent1"/>
+          </a:effectRef>
+          <a:fontRef idx="minor">
+            <a:schemeClr val="lt1"/>
+          </a:fontRef>
+        </p:style>
+        <p:txBody>
+          <a:bodyPr rtlCol="0" anchor="ctr"/>
+          <a:lstStyle/>
+          <a:p>
+            <a:pPr algn="ctr"/>
+          </a:p>
+        </p:txBody>
+      </p:sp>
+      <p:sp>
+        <p:nvSpPr>
+          <p:cNvPr id="16" name="Oval 15"/>
+          <p:cNvSpPr/>
+          <p:nvPr/>
+        </p:nvSpPr>
+        <p:spPr>
+          <a:xfrm>
+            <a:off x="3184855" y="4023360"/>
+            <a:ext cx="182880" cy="182880"/>
+          </a:xfrm>
+          <a:prstGeom prst="ellipse">
+            <a:avLst/>
+          </a:prstGeom>
+          <a:solidFill>
+            <a:srgbClr val="0043DA"/>
+          </a:solidFill>
+          <a:ln/>
+        </p:spPr>
+        <p:style>
+          <a:lnRef idx="1">
+            <a:schemeClr val="accent1"/>
+          </a:lnRef>
+          <a:fillRef idx="3">
+            <a:schemeClr val="accent1"/>
+          </a:fillRef>
+          <a:effectRef idx="2">
+            <a:schemeClr val="accent1"/>
+          </a:effectRef>
+          <a:fontRef idx="minor">
+            <a:schemeClr val="lt1"/>
+          </a:fontRef>
+        </p:style>
+        <p:txBody>
+          <a:bodyPr rtlCol="0" anchor="ctr"/>
+          <a:lstStyle/>
+          <a:p>
+            <a:pPr algn="ctr"/>
+          </a:p>
+        </p:txBody>
+      </p:sp>
+      <p:sp>
+        <p:nvSpPr>
+          <p:cNvPr id="17" name="Oval 16"/>
+          <p:cNvSpPr/>
+          <p:nvPr/>
+        </p:nvSpPr>
+        <p:spPr>
+          <a:xfrm>
+            <a:off x="5440680" y="4023360"/>
+            <a:ext cx="182880" cy="182880"/>
+          </a:xfrm>
+          <a:prstGeom prst="ellipse">
+            <a:avLst/>
+          </a:prstGeom>
+          <a:solidFill>
+            <a:srgbClr val="0043DA"/>
+          </a:solidFill>
+          <a:ln/>
+        </p:spPr>
+        <p:style>
+          <a:lnRef idx="1">
+            <a:schemeClr val="accent1"/>
+          </a:lnRef>
+          <a:fillRef idx="3">
+            <a:schemeClr val="accent1"/>
+          </a:fillRef>
+          <a:effectRef idx="2">
+            <a:schemeClr val="accent1"/>
+          </a:effectRef>
+          <a:fontRef idx="minor">
+            <a:schemeClr val="lt1"/>
+          </a:fontRef>
+        </p:style>
+        <p:txBody>
+          <a:bodyPr rtlCol="0" anchor="ctr"/>
+          <a:lstStyle/>
+          <a:p>
+            <a:pPr algn="ctr"/>
+          </a:p>
+        </p:txBody>
+      </p:sp>
+      <p:sp>
+        <p:nvSpPr>
+          <p:cNvPr id="18" name="Oval 17"/>
+          <p:cNvSpPr/>
+          <p:nvPr/>
+        </p:nvSpPr>
+        <p:spPr>
+          <a:xfrm>
+            <a:off x="7696504" y="4023360"/>
+            <a:ext cx="182880" cy="182880"/>
+          </a:xfrm>
+          <a:prstGeom prst="ellipse">
+            <a:avLst/>
+          </a:prstGeom>
+          <a:solidFill>
+            <a:srgbClr val="0043DA"/>
+          </a:solidFill>
+          <a:ln/>
+        </p:spPr>
+        <p:style>
+          <a:lnRef idx="1">
+            <a:schemeClr val="accent1"/>
+          </a:lnRef>
+          <a:fillRef idx="3">
+            <a:schemeClr val="accent1"/>
+          </a:fillRef>
+          <a:effectRef idx="2">
+            <a:schemeClr val="accent1"/>
+          </a:effectRef>
+          <a:fontRef idx="minor">
+            <a:schemeClr val="lt1"/>
+          </a:fontRef>
+        </p:style>
+        <p:txBody>
+          <a:bodyPr rtlCol="0" anchor="ctr"/>
+          <a:lstStyle/>
+          <a:p>
+            <a:pPr algn="ctr"/>
+          </a:p>
+        </p:txBody>
+      </p:sp>
+      <p:sp>
+        <p:nvSpPr>
+          <p:cNvPr id="19" name="Oval 18"/>
+          <p:cNvSpPr/>
+          <p:nvPr/>
+        </p:nvSpPr>
+        <p:spPr>
+          <a:xfrm>
+            <a:off x="9951415" y="4023360"/>
+            <a:ext cx="182880" cy="182880"/>
+          </a:xfrm>
+          <a:prstGeom prst="ellipse">
+            <a:avLst/>
+          </a:prstGeom>
+          <a:solidFill>
+            <a:srgbClr val="0043DA"/>
+          </a:solidFill>
+          <a:ln/>
+        </p:spPr>
+        <p:style>
+          <a:lnRef idx="1">
+            <a:schemeClr val="accent1"/>
+          </a:lnRef>
+          <a:fillRef idx="3">
+            <a:schemeClr val="accent1"/>
+          </a:fillRef>
+          <a:effectRef idx="2">
+            <a:schemeClr val="accent1"/>
+          </a:effectRef>
+          <a:fontRef idx="minor">
+            <a:schemeClr val="lt1"/>
+          </a:fontRef>
+        </p:style>
+        <p:txBody>
+          <a:bodyPr rtlCol="0" anchor="ctr"/>
+          <a:lstStyle/>
+          <a:p>
+            <a:pPr algn="ctr"/>
+          </a:p>
+        </p:txBody>
+      </p:sp>
+      <p:sp>
+        <p:nvSpPr>
+          <p:cNvPr id="20" name="TextBox 19"/>
+          <p:cNvSpPr txBox="1"/>
+          <p:nvPr/>
+        </p:nvSpPr>
+        <p:spPr>
+          <a:xfrm>
+            <a:off x="15544" y="2286000"/>
+            <a:ext cx="2011680" cy="228600"/>
+          </a:xfrm>
+          <a:prstGeom prst="rect">
+            <a:avLst/>
+          </a:prstGeom>
+          <a:noFill/>
+        </p:spPr>
+        <p:txBody>
+          <a:bodyPr wrap="square">
+            <a:spAutoFit/>
+          </a:bodyPr>
+          <a:lstStyle/>
+          <a:p>
+            <a:r>
+              <a:rPr sz="1200">
+                <a:solidFill>
+                  <a:srgbClr val="0043DA"/>
+                </a:solidFill>
+                <a:latin typeface="Freesentation"/>
+              </a:rPr>
+              <a:t>Q1 2026</a:t>
+            </a:r>
+          </a:p>
+        </p:txBody>
+      </p:sp>
+      <p:sp>
+        <p:nvSpPr>
+          <p:cNvPr id="21" name="TextBox 20"/>
+          <p:cNvSpPr txBox="1"/>
+          <p:nvPr/>
+        </p:nvSpPr>
+        <p:spPr>
+          <a:xfrm>
+            <a:off x="15544" y="2514600"/>
+            <a:ext cx="2011680" cy="274320"/>
+          </a:xfrm>
+          <a:prstGeom prst="rect">
+            <a:avLst/>
+          </a:prstGeom>
+          <a:noFill/>
+        </p:spPr>
+        <p:txBody>
+          <a:bodyPr wrap="square">
+            <a:spAutoFit/>
+          </a:bodyPr>
+          <a:lstStyle/>
+          <a:p>
+            <a:r>
+              <a:rPr sz="1400" b="1">
+                <a:solidFill>
+                  <a:srgbClr val="0043DA"/>
+                </a:solidFill>
+                <a:latin typeface="Freesentation"/>
+              </a:rPr>
+              <a:t>현황 분석</a:t>
+            </a:r>
+          </a:p>
+        </p:txBody>
+      </p:sp>
+      <p:sp>
+        <p:nvSpPr>
+          <p:cNvPr id="22" name="TextBox 21"/>
+          <p:cNvSpPr txBox="1"/>
+          <p:nvPr/>
+        </p:nvSpPr>
+        <p:spPr>
+          <a:xfrm>
+            <a:off x="15544" y="2788920"/>
+            <a:ext cx="2011680" cy="1097280"/>
+          </a:xfrm>
+          <a:prstGeom prst="rect">
+            <a:avLst/>
+          </a:prstGeom>
+          <a:noFill/>
+        </p:spPr>
+        <p:txBody>
+          <a:bodyPr wrap="square">
+            <a:spAutoFit/>
+          </a:bodyPr>
+          <a:lstStyle/>
+          <a:p>
+            <a:r>
+              <a:rPr sz="1300">
+                <a:solidFill>
+                  <a:srgbClr val="4A4A4A"/>
+                </a:solidFill>
+                <a:latin typeface="Freesentation"/>
+              </a:rPr>
+              <a:t>• 온프레미스 Kafka 현황 파악</a:t>
+            </a:r>
+          </a:p>
+          <a:p>
+            <a:r>
+              <a:rPr sz="1300">
+                <a:solidFill>
+                  <a:srgbClr val="4A4A4A"/>
+                </a:solidFill>
+                <a:latin typeface="Freesentation"/>
+              </a:rPr>
+              <a:t>• 운영 문제점 정리</a:t>
+            </a:r>
+          </a:p>
+          <a:p>
+            <a:r>
+              <a:rPr sz="1300">
+                <a:solidFill>
+                  <a:srgbClr val="4A4A4A"/>
+                </a:solidFill>
+                <a:latin typeface="Freesentation"/>
+              </a:rPr>
+              <a:t>• 비용·성능 기준 수립</a:t>
+            </a:r>
+          </a:p>
+        </p:txBody>
+      </p:sp>
+      <p:sp>
+        <p:nvSpPr>
+          <p:cNvPr id="23" name="TextBox 22"/>
+          <p:cNvSpPr txBox="1"/>
+          <p:nvPr/>
+        </p:nvSpPr>
+        <p:spPr>
+          <a:xfrm>
+            <a:off x="2270455" y="4297680"/>
+            <a:ext cx="2011680" cy="228600"/>
+          </a:xfrm>
+          <a:prstGeom prst="rect">
+            <a:avLst/>
+          </a:prstGeom>
+          <a:noFill/>
+        </p:spPr>
+        <p:txBody>
+          <a:bodyPr wrap="square">
+            <a:spAutoFit/>
+          </a:bodyPr>
+          <a:lstStyle/>
+          <a:p>
+            <a:r>
+              <a:rPr sz="1200">
+                <a:solidFill>
+                  <a:srgbClr val="0043DA"/>
+                </a:solidFill>
+                <a:latin typeface="Freesentation"/>
+              </a:rPr>
+              <a:t>Q2 2026</a:t>
+            </a:r>
+          </a:p>
+        </p:txBody>
+      </p:sp>
+      <p:sp>
+        <p:nvSpPr>
+          <p:cNvPr id="24" name="TextBox 23"/>
+          <p:cNvSpPr txBox="1"/>
+          <p:nvPr/>
+        </p:nvSpPr>
+        <p:spPr>
+          <a:xfrm>
+            <a:off x="2270455" y="4526280"/>
+            <a:ext cx="2011680" cy="274320"/>
+          </a:xfrm>
+          <a:prstGeom prst="rect">
+            <a:avLst/>
+          </a:prstGeom>
+          <a:noFill/>
+        </p:spPr>
+        <p:txBody>
+          <a:bodyPr wrap="square">
+            <a:spAutoFit/>
+          </a:bodyPr>
+          <a:lstStyle/>
+          <a:p>
+            <a:r>
+              <a:rPr sz="1400" b="1">
+                <a:solidFill>
+                  <a:srgbClr val="0043DA"/>
+                </a:solidFill>
+                <a:latin typeface="Freesentation"/>
+              </a:rPr>
+              <a:t>아키텍처 설계</a:t>
+            </a:r>
+          </a:p>
+        </p:txBody>
+      </p:sp>
+      <p:sp>
+        <p:nvSpPr>
+          <p:cNvPr id="25" name="TextBox 24"/>
+          <p:cNvSpPr txBox="1"/>
+          <p:nvPr/>
+        </p:nvSpPr>
+        <p:spPr>
+          <a:xfrm>
+            <a:off x="2270455" y="4800600"/>
+            <a:ext cx="2011680" cy="1097280"/>
+          </a:xfrm>
+          <a:prstGeom prst="rect">
+            <a:avLst/>
+          </a:prstGeom>
+          <a:noFill/>
+        </p:spPr>
+        <p:txBody>
+          <a:bodyPr wrap="square">
+            <a:spAutoFit/>
+          </a:bodyPr>
+          <a:lstStyle/>
+          <a:p>
+            <a:r>
+              <a:rPr sz="1300">
+                <a:solidFill>
+                  <a:srgbClr val="4A4A4A"/>
+                </a:solidFill>
+                <a:latin typeface="Freesentation"/>
+              </a:rPr>
+              <a:t>• MSK 클러스터 유형 선택</a:t>
+            </a:r>
+          </a:p>
+          <a:p>
+            <a:r>
+              <a:rPr sz="1300">
+                <a:solidFill>
+                  <a:srgbClr val="4A4A4A"/>
+                </a:solidFill>
+                <a:latin typeface="Freesentation"/>
+              </a:rPr>
+              <a:t>• 네트워크/보안 설계</a:t>
+            </a:r>
+          </a:p>
+          <a:p>
+            <a:r>
+              <a:rPr sz="1300">
+                <a:solidFill>
+                  <a:srgbClr val="4A4A4A"/>
+                </a:solidFill>
+                <a:latin typeface="Freesentation"/>
+              </a:rPr>
+              <a:t>• 마이그레이션 계획 수립</a:t>
+            </a:r>
+          </a:p>
+        </p:txBody>
+      </p:sp>
+      <p:sp>
+        <p:nvSpPr>
+          <p:cNvPr id="26" name="TextBox 25"/>
+          <p:cNvSpPr txBox="1"/>
+          <p:nvPr/>
+        </p:nvSpPr>
+        <p:spPr>
+          <a:xfrm>
+            <a:off x="4526280" y="2286000"/>
+            <a:ext cx="2011680" cy="228600"/>
+          </a:xfrm>
+          <a:prstGeom prst="rect">
+            <a:avLst/>
+          </a:prstGeom>
+          <a:noFill/>
+        </p:spPr>
+        <p:txBody>
+          <a:bodyPr wrap="square">
+            <a:spAutoFit/>
+          </a:bodyPr>
+          <a:lstStyle/>
+          <a:p>
+            <a:r>
+              <a:rPr sz="1200">
+                <a:solidFill>
+                  <a:srgbClr val="0043DA"/>
+                </a:solidFill>
+                <a:latin typeface="Freesentation"/>
+              </a:rPr>
+              <a:t>Q3 2026</a:t>
+            </a:r>
+          </a:p>
+        </p:txBody>
+      </p:sp>
+      <p:sp>
+        <p:nvSpPr>
+          <p:cNvPr id="27" name="TextBox 26"/>
+          <p:cNvSpPr txBox="1"/>
+          <p:nvPr/>
+        </p:nvSpPr>
+        <p:spPr>
+          <a:xfrm>
+            <a:off x="4526280" y="2514600"/>
+            <a:ext cx="2011680" cy="274320"/>
+          </a:xfrm>
+          <a:prstGeom prst="rect">
+            <a:avLst/>
+          </a:prstGeom>
+          <a:noFill/>
+        </p:spPr>
+        <p:txBody>
+          <a:bodyPr wrap="square">
+            <a:spAutoFit/>
+          </a:bodyPr>
+          <a:lstStyle/>
+          <a:p>
+            <a:r>
+              <a:rPr sz="1400" b="1">
+                <a:solidFill>
+                  <a:srgbClr val="0043DA"/>
+                </a:solidFill>
+                <a:latin typeface="Freesentation"/>
+              </a:rPr>
+              <a:t>파일럿 구축</a:t>
+            </a:r>
+          </a:p>
+        </p:txBody>
+      </p:sp>
+      <p:sp>
+        <p:nvSpPr>
+          <p:cNvPr id="28" name="TextBox 27"/>
+          <p:cNvSpPr txBox="1"/>
+          <p:nvPr/>
+        </p:nvSpPr>
+        <p:spPr>
+          <a:xfrm>
+            <a:off x="4526280" y="2788920"/>
+            <a:ext cx="2011680" cy="1097280"/>
+          </a:xfrm>
+          <a:prstGeom prst="rect">
+            <a:avLst/>
+          </a:prstGeom>
+          <a:noFill/>
+        </p:spPr>
+        <p:txBody>
+          <a:bodyPr wrap="square">
+            <a:spAutoFit/>
+          </a:bodyPr>
+          <a:lstStyle/>
+          <a:p>
+            <a:r>
+              <a:rPr sz="1300">
+                <a:solidFill>
+                  <a:srgbClr val="4A4A4A"/>
+                </a:solidFill>
+                <a:latin typeface="Freesentation"/>
+              </a:rPr>
+              <a:t>• 개발 환경 MSK 구축</a:t>
+            </a:r>
+          </a:p>
+          <a:p>
+            <a:r>
+              <a:rPr sz="1300">
+                <a:solidFill>
+                  <a:srgbClr val="4A4A4A"/>
+                </a:solidFill>
+                <a:latin typeface="Freesentation"/>
+              </a:rPr>
+              <a:t>• MirrorMaker 2 설정</a:t>
+            </a:r>
+          </a:p>
+          <a:p>
+            <a:r>
+              <a:rPr sz="1300">
+                <a:solidFill>
+                  <a:srgbClr val="4A4A4A"/>
+                </a:solidFill>
+                <a:latin typeface="Freesentation"/>
+              </a:rPr>
+              <a:t>• 데이터 동기화 검증</a:t>
+            </a:r>
+          </a:p>
+        </p:txBody>
+      </p:sp>
+      <p:sp>
+        <p:nvSpPr>
+          <p:cNvPr id="29" name="TextBox 28"/>
+          <p:cNvSpPr txBox="1"/>
+          <p:nvPr/>
+        </p:nvSpPr>
+        <p:spPr>
+          <a:xfrm>
+            <a:off x="6782104" y="4297680"/>
+            <a:ext cx="2011680" cy="228600"/>
+          </a:xfrm>
+          <a:prstGeom prst="rect">
+            <a:avLst/>
+          </a:prstGeom>
+          <a:noFill/>
+        </p:spPr>
+        <p:txBody>
+          <a:bodyPr wrap="square">
+            <a:spAutoFit/>
+          </a:bodyPr>
+          <a:lstStyle/>
+          <a:p>
+            <a:r>
+              <a:rPr sz="1200">
+                <a:solidFill>
+                  <a:srgbClr val="0043DA"/>
+                </a:solidFill>
+                <a:latin typeface="Freesentation"/>
+              </a:rPr>
+              <a:t>Q4 2026</a:t>
+            </a:r>
+          </a:p>
+        </p:txBody>
+      </p:sp>
+      <p:sp>
+        <p:nvSpPr>
+          <p:cNvPr id="30" name="TextBox 29"/>
+          <p:cNvSpPr txBox="1"/>
+          <p:nvPr/>
+        </p:nvSpPr>
+        <p:spPr>
+          <a:xfrm>
+            <a:off x="6782104" y="4526280"/>
+            <a:ext cx="2011680" cy="274320"/>
+          </a:xfrm>
+          <a:prstGeom prst="rect">
+            <a:avLst/>
+          </a:prstGeom>
+          <a:noFill/>
+        </p:spPr>
+        <p:txBody>
+          <a:bodyPr wrap="square">
+            <a:spAutoFit/>
+          </a:bodyPr>
+          <a:lstStyle/>
+          <a:p>
+            <a:r>
+              <a:rPr sz="1400" b="1">
+                <a:solidFill>
+                  <a:srgbClr val="0043DA"/>
+                </a:solidFill>
+                <a:latin typeface="Freesentation"/>
+              </a:rPr>
+              <a:t>전환 실행</a:t>
+            </a:r>
+          </a:p>
+        </p:txBody>
+      </p:sp>
+      <p:sp>
+        <p:nvSpPr>
+          <p:cNvPr id="31" name="TextBox 30"/>
+          <p:cNvSpPr txBox="1"/>
+          <p:nvPr/>
+        </p:nvSpPr>
+        <p:spPr>
+          <a:xfrm>
+            <a:off x="6782104" y="4800600"/>
+            <a:ext cx="2011680" cy="1097280"/>
+          </a:xfrm>
+          <a:prstGeom prst="rect">
+            <a:avLst/>
+          </a:prstGeom>
+          <a:noFill/>
+        </p:spPr>
+        <p:txBody>
+          <a:bodyPr wrap="square">
+            <a:spAutoFit/>
+          </a:bodyPr>
+          <a:lstStyle/>
+          <a:p>
+            <a:r>
+              <a:rPr sz="1300">
+                <a:solidFill>
+                  <a:srgbClr val="4A4A4A"/>
+                </a:solidFill>
+                <a:latin typeface="Freesentation"/>
+              </a:rPr>
+              <a:t>• 프로덕션 전환 실행</a:t>
+            </a:r>
+          </a:p>
+          <a:p>
+            <a:r>
+              <a:rPr sz="1300">
+                <a:solidFill>
+                  <a:srgbClr val="4A4A4A"/>
+                </a:solidFill>
+                <a:latin typeface="Freesentation"/>
+              </a:rPr>
+              <a:t>• 데이터 마이그레이션</a:t>
+            </a:r>
+          </a:p>
+          <a:p>
+            <a:r>
+              <a:rPr sz="1300">
+                <a:solidFill>
+                  <a:srgbClr val="4A4A4A"/>
+                </a:solidFill>
+                <a:latin typeface="Freesentation"/>
+              </a:rPr>
+              <a:t>• 롤백 계획 준비</a:t>
+            </a:r>
+          </a:p>
+        </p:txBody>
+      </p:sp>
+      <p:sp>
+        <p:nvSpPr>
+          <p:cNvPr id="32" name="TextBox 31"/>
+          <p:cNvSpPr txBox="1"/>
+          <p:nvPr/>
+        </p:nvSpPr>
+        <p:spPr>
+          <a:xfrm>
+            <a:off x="9037015" y="2286000"/>
+            <a:ext cx="2011680" cy="228600"/>
+          </a:xfrm>
+          <a:prstGeom prst="rect">
+            <a:avLst/>
+          </a:prstGeom>
+          <a:noFill/>
+        </p:spPr>
+        <p:txBody>
+          <a:bodyPr wrap="square">
+            <a:spAutoFit/>
+          </a:bodyPr>
+          <a:lstStyle/>
+          <a:p>
+            <a:r>
+              <a:rPr sz="1200">
+                <a:solidFill>
+                  <a:srgbClr val="0043DA"/>
+                </a:solidFill>
+                <a:latin typeface="Freesentation"/>
+              </a:rPr>
+              <a:t>Q1 2027</a:t>
+            </a:r>
+          </a:p>
+        </p:txBody>
+      </p:sp>
+      <p:sp>
+        <p:nvSpPr>
+          <p:cNvPr id="33" name="TextBox 32"/>
+          <p:cNvSpPr txBox="1"/>
+          <p:nvPr/>
+        </p:nvSpPr>
+        <p:spPr>
+          <a:xfrm>
+            <a:off x="9037015" y="2514600"/>
+            <a:ext cx="2011680" cy="274320"/>
+          </a:xfrm>
+          <a:prstGeom prst="rect">
+            <a:avLst/>
+          </a:prstGeom>
+          <a:noFill/>
+        </p:spPr>
+        <p:txBody>
+          <a:bodyPr wrap="square">
+            <a:spAutoFit/>
+          </a:bodyPr>
+          <a:lstStyle/>
+          <a:p>
+            <a:r>
+              <a:rPr sz="1400" b="1">
+                <a:solidFill>
+                  <a:srgbClr val="0043DA"/>
+                </a:solidFill>
+                <a:latin typeface="Freesentation"/>
+              </a:rPr>
+              <a:t>안정화</a:t>
+            </a:r>
+          </a:p>
+        </p:txBody>
+      </p:sp>
+      <p:sp>
+        <p:nvSpPr>
+          <p:cNvPr id="34" name="TextBox 33"/>
+          <p:cNvSpPr txBox="1"/>
+          <p:nvPr/>
+        </p:nvSpPr>
+        <p:spPr>
+          <a:xfrm>
+            <a:off x="9037015" y="2788920"/>
+            <a:ext cx="2011680" cy="1097280"/>
+          </a:xfrm>
+          <a:prstGeom prst="rect">
+            <a:avLst/>
+          </a:prstGeom>
+          <a:noFill/>
+        </p:spPr>
+        <p:txBody>
+          <a:bodyPr wrap="square">
+            <a:spAutoFit/>
+          </a:bodyPr>
+          <a:lstStyle/>
+          <a:p>
+            <a:r>
+              <a:rPr sz="1300">
+                <a:solidFill>
+                  <a:srgbClr val="4A4A4A"/>
+                </a:solidFill>
+                <a:latin typeface="Freesentation"/>
+              </a:rPr>
+              <a:t>• 모니터링 체계 수립</a:t>
+            </a:r>
+          </a:p>
+          <a:p>
+            <a:r>
+              <a:rPr sz="1300">
+                <a:solidFill>
+                  <a:srgbClr val="4A4A4A"/>
+                </a:solidFill>
+                <a:latin typeface="Freesentation"/>
+              </a:rPr>
+              <a:t>• 비용 최적화</a:t>
+            </a:r>
+          </a:p>
+          <a:p>
+            <a:r>
+              <a:rPr sz="1300">
+                <a:solidFill>
+                  <a:srgbClr val="4A4A4A"/>
+                </a:solidFill>
+                <a:latin typeface="Freesentation"/>
+              </a:rPr>
+              <a:t>• 운영 매뉴얼 완성</a:t>
+            </a:r>
+          </a:p>
+        </p:txBody>
+      </p:sp>
+    </p:spTree>
   </p:cSld>
   <p:clrMapOvr>
     <a:masterClrMapping/>
@@ -12077,7 +13398,12 @@
         <p:txBody>
           <a:bodyPr/>
           <a:lstStyle/>
-          <a:p/>
+          <a:p>
+            <a:r>
+              <a:rPr lang="ko-KR" altLang="en-US" dirty="0"/>
+              <a:t>L08. Funnel</a:t>
+            </a:r>
+          </a:p>
         </p:txBody>
       </p:sp>
       <p:sp>

--- a/results/pptx/AWS_MSK_Expert_Intro.pptx
+++ b/results/pptx/AWS_MSK_Expert_Intro.pptx
@@ -3712,77 +3712,162 @@
             <a:spLocks noGrp="1"/>
           </p:cNvSpPr>
           <p:nvPr>
-            <p:ph type="body" sz="quarter" idx="10"/>
+            <p:ph type="body" idx="10" sz="quarter"/>
           </p:nvPr>
         </p:nvSpPr>
-        <p:spPr>
-          <a:ln>
-            <a:noFill/>
-          </a:ln>
-        </p:spPr>
+        <p:spPr/>
         <p:txBody>
           <a:bodyPr/>
           <a:lstStyle/>
-          <a:p>
-            <a:endParaRPr/>
-          </a:p>
-        </p:txBody>
-      </p:sp>
-      <p:sp>
-        <p:nvSpPr>
-          <p:cNvPr id="4" name="Rounded Rectangle 3"/>
+          <a:p/>
+        </p:txBody>
+      </p:sp>
+      <p:sp>
+        <p:nvSpPr>
+          <p:cNvPr id="3" name="TextBox 2"/>
+          <p:cNvSpPr txBox="1"/>
+          <p:nvPr/>
+        </p:nvSpPr>
+        <p:spPr>
+          <a:xfrm>
+            <a:off x="355701" y="557784"/>
+            <a:ext cx="3291840" cy="932688"/>
+          </a:xfrm>
+          <a:prstGeom prst="rect">
+            <a:avLst/>
+          </a:prstGeom>
+          <a:noFill/>
+        </p:spPr>
+        <p:txBody>
+          <a:bodyPr wrap="square">
+            <a:spAutoFit/>
+          </a:bodyPr>
+          <a:lstStyle/>
+          <a:p>
+            <a:r>
+              <a:rPr sz="2000" b="1">
+                <a:solidFill>
+                  <a:srgbClr val="0043DA"/>
+                </a:solidFill>
+                <a:latin typeface="프리젠테이션 7"/>
+              </a:rPr>
+              <a:t>L08. Funnel</a:t>
+            </a:r>
+          </a:p>
+        </p:txBody>
+      </p:sp>
+      <p:sp>
+        <p:nvSpPr>
+          <p:cNvPr id="4" name="TextBox 3"/>
+          <p:cNvSpPr txBox="1"/>
+          <p:nvPr/>
+        </p:nvSpPr>
+        <p:spPr>
+          <a:xfrm>
+            <a:off x="3760927" y="557784"/>
+            <a:ext cx="8431042" cy="932688"/>
+          </a:xfrm>
+          <a:prstGeom prst="rect">
+            <a:avLst/>
+          </a:prstGeom>
+          <a:noFill/>
+        </p:spPr>
+        <p:txBody>
+          <a:bodyPr wrap="square">
+            <a:spAutoFit/>
+          </a:bodyPr>
+          <a:lstStyle/>
+          <a:p>
+            <a:r>
+              <a:rPr sz="1200" b="0">
+                <a:solidFill>
+                  <a:srgbClr val="000000"/>
+                </a:solidFill>
+                <a:latin typeface="프리젠테이션 5"/>
+              </a:rPr>
+              <a:t>깔때기 다이어그램 — 단계별 필터링으로 최적 기술 선택</a:t>
+            </a:r>
+          </a:p>
+        </p:txBody>
+      </p:sp>
+      <p:sp>
+        <p:nvSpPr>
+          <p:cNvPr id="5" name="TextBox 4"/>
+          <p:cNvSpPr txBox="1"/>
+          <p:nvPr/>
+        </p:nvSpPr>
+        <p:spPr>
+          <a:xfrm>
+            <a:off x="457200" y="1600200"/>
+            <a:ext cx="11734495" cy="320040"/>
+          </a:xfrm>
+          <a:prstGeom prst="rect">
+            <a:avLst/>
+          </a:prstGeom>
+          <a:noFill/>
+        </p:spPr>
+        <p:txBody>
+          <a:bodyPr wrap="square">
+            <a:spAutoFit/>
+          </a:bodyPr>
+          <a:lstStyle/>
+          <a:p>
+            <a:r>
+              <a:rPr sz="1600" b="1">
+                <a:solidFill>
+                  <a:srgbClr val="0043DA"/>
+                </a:solidFill>
+                <a:latin typeface="프리젠테이션 7"/>
+              </a:rPr>
+              <a:t>MSK 도입 의사결정 깔때기</a:t>
+            </a:r>
+          </a:p>
+        </p:txBody>
+      </p:sp>
+      <p:sp>
+        <p:nvSpPr>
+          <p:cNvPr id="6" name="TextBox 5"/>
+          <p:cNvSpPr txBox="1"/>
+          <p:nvPr/>
+        </p:nvSpPr>
+        <p:spPr>
+          <a:xfrm>
+            <a:off x="457200" y="1966874"/>
+            <a:ext cx="11734495" cy="274320"/>
+          </a:xfrm>
+          <a:prstGeom prst="rect">
+            <a:avLst/>
+          </a:prstGeom>
+          <a:noFill/>
+        </p:spPr>
+        <p:txBody>
+          <a:bodyPr wrap="square">
+            <a:spAutoFit/>
+          </a:bodyPr>
+          <a:lstStyle/>
+          <a:p>
+            <a:r>
+              <a:rPr sz="1300" b="0">
+                <a:solidFill>
+                  <a:srgbClr val="404040"/>
+                </a:solidFill>
+                <a:latin typeface="프리젠테이션 5"/>
+              </a:rPr>
+              <a:t>후보 기술부터 최종 선택까지 4가지 평가 기준으로 필터링</a:t>
+            </a:r>
+          </a:p>
+        </p:txBody>
+      </p:sp>
+      <p:sp>
+        <p:nvSpPr>
+          <p:cNvPr id="7" name="Rounded Rectangle 6"/>
           <p:cNvSpPr/>
           <p:nvPr/>
         </p:nvSpPr>
         <p:spPr>
           <a:xfrm>
-            <a:off x="457200" y="2560320"/>
-            <a:ext cx="5303520" cy="4023360"/>
-          </a:xfrm>
-          <a:prstGeom prst="roundRect">
-            <a:avLst/>
-          </a:prstGeom>
-          <a:solidFill>
-            <a:srgbClr val="F8F9FA"/>
-          </a:solidFill>
-          <a:ln>
-            <a:solidFill>
-              <a:srgbClr val="F8F9FA"/>
-            </a:solidFill>
-          </a:ln>
-        </p:spPr>
-        <p:style>
-          <a:lnRef idx="1">
-            <a:schemeClr val="accent1"/>
-          </a:lnRef>
-          <a:fillRef idx="3">
-            <a:schemeClr val="accent1"/>
-          </a:fillRef>
-          <a:effectRef idx="2">
-            <a:schemeClr val="accent1"/>
-          </a:effectRef>
-          <a:fontRef idx="minor">
-            <a:schemeClr val="lt1"/>
-          </a:fontRef>
-        </p:style>
-        <p:txBody>
-          <a:bodyPr rtlCol="0" anchor="ctr"/>
-          <a:lstStyle/>
-          <a:p>
-            <a:pPr algn="ctr"/>
-          </a:p>
-        </p:txBody>
-      </p:sp>
-      <p:sp>
-        <p:nvSpPr>
-          <p:cNvPr id="5" name="Rounded Rectangle 4"/>
-          <p:cNvSpPr/>
-          <p:nvPr/>
-        </p:nvSpPr>
-        <p:spPr>
-          <a:xfrm>
-            <a:off x="6431280" y="2560320"/>
-            <a:ext cx="5303520" cy="4023360"/>
+            <a:off x="457200" y="2702052"/>
+            <a:ext cx="7315200" cy="694944"/>
           </a:xfrm>
           <a:prstGeom prst="roundRect">
             <a:avLst/>
@@ -3820,16 +3905,151 @@
       </p:sp>
       <p:sp>
         <p:nvSpPr>
-          <p:cNvPr id="6" name="Right Arrow 5"/>
+          <p:cNvPr id="8" name="Rounded Rectangle 7"/>
           <p:cNvSpPr/>
           <p:nvPr/>
         </p:nvSpPr>
         <p:spPr>
           <a:xfrm>
-            <a:off x="5944440" y="4480680"/>
-            <a:ext cx="411480" cy="274320"/>
-          </a:xfrm>
-          <a:prstGeom prst="rightArrow">
+            <a:off x="1005840" y="3451860"/>
+            <a:ext cx="6217920" cy="694944"/>
+          </a:xfrm>
+          <a:prstGeom prst="roundRect">
+            <a:avLst/>
+          </a:prstGeom>
+          <a:solidFill>
+            <a:srgbClr val="C8DCFF"/>
+          </a:solidFill>
+          <a:ln>
+            <a:solidFill>
+              <a:srgbClr val="C8DCFF"/>
+            </a:solidFill>
+          </a:ln>
+        </p:spPr>
+        <p:style>
+          <a:lnRef idx="1">
+            <a:schemeClr val="accent1"/>
+          </a:lnRef>
+          <a:fillRef idx="3">
+            <a:schemeClr val="accent1"/>
+          </a:fillRef>
+          <a:effectRef idx="2">
+            <a:schemeClr val="accent1"/>
+          </a:effectRef>
+          <a:fontRef idx="minor">
+            <a:schemeClr val="lt1"/>
+          </a:fontRef>
+        </p:style>
+        <p:txBody>
+          <a:bodyPr rtlCol="0" anchor="ctr"/>
+          <a:lstStyle/>
+          <a:p>
+            <a:pPr algn="ctr"/>
+          </a:p>
+        </p:txBody>
+      </p:sp>
+      <p:sp>
+        <p:nvSpPr>
+          <p:cNvPr id="9" name="Rounded Rectangle 8"/>
+          <p:cNvSpPr/>
+          <p:nvPr/>
+        </p:nvSpPr>
+        <p:spPr>
+          <a:xfrm>
+            <a:off x="1554480" y="4200753"/>
+            <a:ext cx="5120640" cy="694944"/>
+          </a:xfrm>
+          <a:prstGeom prst="roundRect">
+            <a:avLst/>
+          </a:prstGeom>
+          <a:solidFill>
+            <a:srgbClr val="8AB4F8"/>
+          </a:solidFill>
+          <a:ln>
+            <a:solidFill>
+              <a:srgbClr val="8AB4F8"/>
+            </a:solidFill>
+          </a:ln>
+        </p:spPr>
+        <p:style>
+          <a:lnRef idx="1">
+            <a:schemeClr val="accent1"/>
+          </a:lnRef>
+          <a:fillRef idx="3">
+            <a:schemeClr val="accent1"/>
+          </a:fillRef>
+          <a:effectRef idx="2">
+            <a:schemeClr val="accent1"/>
+          </a:effectRef>
+          <a:fontRef idx="minor">
+            <a:schemeClr val="lt1"/>
+          </a:fontRef>
+        </p:style>
+        <p:txBody>
+          <a:bodyPr rtlCol="0" anchor="ctr"/>
+          <a:lstStyle/>
+          <a:p>
+            <a:pPr algn="ctr"/>
+          </a:p>
+        </p:txBody>
+      </p:sp>
+      <p:sp>
+        <p:nvSpPr>
+          <p:cNvPr id="10" name="Rounded Rectangle 9"/>
+          <p:cNvSpPr/>
+          <p:nvPr/>
+        </p:nvSpPr>
+        <p:spPr>
+          <a:xfrm>
+            <a:off x="2103120" y="4950561"/>
+            <a:ext cx="4023360" cy="694944"/>
+          </a:xfrm>
+          <a:prstGeom prst="roundRect">
+            <a:avLst/>
+          </a:prstGeom>
+          <a:solidFill>
+            <a:srgbClr val="3571F5"/>
+          </a:solidFill>
+          <a:ln>
+            <a:solidFill>
+              <a:srgbClr val="3571F5"/>
+            </a:solidFill>
+          </a:ln>
+        </p:spPr>
+        <p:style>
+          <a:lnRef idx="1">
+            <a:schemeClr val="accent1"/>
+          </a:lnRef>
+          <a:fillRef idx="3">
+            <a:schemeClr val="accent1"/>
+          </a:fillRef>
+          <a:effectRef idx="2">
+            <a:schemeClr val="accent1"/>
+          </a:effectRef>
+          <a:fontRef idx="minor">
+            <a:schemeClr val="lt1"/>
+          </a:fontRef>
+        </p:style>
+        <p:txBody>
+          <a:bodyPr rtlCol="0" anchor="ctr"/>
+          <a:lstStyle/>
+          <a:p>
+            <a:pPr algn="ctr"/>
+          </a:p>
+        </p:txBody>
+      </p:sp>
+      <p:sp>
+        <p:nvSpPr>
+          <p:cNvPr id="11" name="Rounded Rectangle 10"/>
+          <p:cNvSpPr/>
+          <p:nvPr/>
+        </p:nvSpPr>
+        <p:spPr>
+          <a:xfrm>
+            <a:off x="2651760" y="5700369"/>
+            <a:ext cx="2926080" cy="694944"/>
+          </a:xfrm>
+          <a:prstGeom prst="roundRect">
             <a:avLst/>
           </a:prstGeom>
           <a:solidFill>
@@ -3865,104 +4085,14 @@
       </p:sp>
       <p:sp>
         <p:nvSpPr>
-          <p:cNvPr id="7" name="Rounded Rectangle 6"/>
-          <p:cNvSpPr/>
-          <p:nvPr/>
-        </p:nvSpPr>
-        <p:spPr>
-          <a:xfrm>
-            <a:off x="637160" y="2651760"/>
-            <a:ext cx="1371600" cy="274320"/>
-          </a:xfrm>
-          <a:prstGeom prst="roundRect">
-            <a:avLst/>
-          </a:prstGeom>
-          <a:solidFill>
-            <a:srgbClr val="212121"/>
-          </a:solidFill>
-          <a:ln>
-            <a:solidFill>
-              <a:srgbClr val="212121"/>
-            </a:solidFill>
-          </a:ln>
-        </p:spPr>
-        <p:style>
-          <a:lnRef idx="1">
-            <a:schemeClr val="accent1"/>
-          </a:lnRef>
-          <a:fillRef idx="3">
-            <a:schemeClr val="accent1"/>
-          </a:fillRef>
-          <a:effectRef idx="2">
-            <a:schemeClr val="accent1"/>
-          </a:effectRef>
-          <a:fontRef idx="minor">
-            <a:schemeClr val="lt1"/>
-          </a:fontRef>
-        </p:style>
-        <p:txBody>
-          <a:bodyPr rtlCol="0" anchor="ctr"/>
-          <a:lstStyle/>
-          <a:p>
-            <a:pPr algn="ctr"/>
-          </a:p>
-        </p:txBody>
-      </p:sp>
-      <p:sp>
-        <p:nvSpPr>
-          <p:cNvPr id="8" name="Rounded Rectangle 7"/>
-          <p:cNvSpPr/>
-          <p:nvPr/>
-        </p:nvSpPr>
-        <p:spPr>
-          <a:xfrm>
-            <a:off x="6611040" y="2651760"/>
-            <a:ext cx="1371600" cy="274320"/>
-          </a:xfrm>
-          <a:prstGeom prst="roundRect">
-            <a:avLst/>
-          </a:prstGeom>
-          <a:solidFill>
-            <a:srgbClr val="0043DA"/>
-          </a:solidFill>
-          <a:ln>
-            <a:solidFill>
-              <a:srgbClr val="0043DA"/>
-            </a:solidFill>
-          </a:ln>
-        </p:spPr>
-        <p:style>
-          <a:lnRef idx="1">
-            <a:schemeClr val="accent1"/>
-          </a:lnRef>
-          <a:fillRef idx="3">
-            <a:schemeClr val="accent1"/>
-          </a:fillRef>
-          <a:effectRef idx="2">
-            <a:schemeClr val="accent1"/>
-          </a:effectRef>
-          <a:fontRef idx="minor">
-            <a:schemeClr val="lt1"/>
-          </a:fontRef>
-        </p:style>
-        <p:txBody>
-          <a:bodyPr rtlCol="0" anchor="ctr"/>
-          <a:lstStyle/>
-          <a:p>
-            <a:pPr algn="ctr"/>
-          </a:p>
-        </p:txBody>
-      </p:sp>
-      <p:sp>
-        <p:nvSpPr>
-          <p:cNvPr id="9" name="TextBox 8"/>
+          <p:cNvPr id="12" name="TextBox 11"/>
           <p:cNvSpPr txBox="1"/>
           <p:nvPr/>
         </p:nvSpPr>
         <p:spPr>
           <a:xfrm>
-            <a:off x="354806" y="557906"/>
-            <a:ext cx="2719850" cy="932614"/>
+            <a:off x="457200" y="2702052"/>
+            <a:ext cx="7315200" cy="694944"/>
           </a:xfrm>
           <a:prstGeom prst="rect">
             <a:avLst/>
@@ -3975,28 +4105,41 @@
           </a:bodyPr>
           <a:lstStyle/>
           <a:p>
-            <a:r>
-              <a:rPr sz="2000" b="1">
-                <a:solidFill>
-                  <a:srgbClr val="212121"/>
-                </a:solidFill>
-                <a:latin typeface="Freesentation"/>
-              </a:rPr>
-              <a:t>1-1. As-Is / To-Be</a:t>
-            </a:r>
-          </a:p>
-        </p:txBody>
-      </p:sp>
-      <p:sp>
-        <p:nvSpPr>
-          <p:cNvPr id="10" name="TextBox 9"/>
+            <a:pPr algn="ctr"/>
+            <a:r>
+              <a:rPr sz="1300" b="1">
+                <a:solidFill>
+                  <a:srgbClr val="0043DA"/>
+                </a:solidFill>
+                <a:latin typeface="프리젠테이션 7"/>
+              </a:rPr>
+              <a:t>후보 기술 평가</a:t>
+            </a:r>
+          </a:p>
+          <a:p>
+            <a:pPr algn="ctr"/>
+            <a:r>
+              <a:rPr sz="1300" b="1">
+                <a:solidFill>
+                  <a:srgbClr val="0043DA"/>
+                </a:solidFill>
+                <a:latin typeface="프리젠테이션 7"/>
+              </a:rPr>
+              <a:t>Kafka · Kinesis · RabbitMQ · Pulsar</a:t>
+            </a:r>
+          </a:p>
+        </p:txBody>
+      </p:sp>
+      <p:sp>
+        <p:nvSpPr>
+          <p:cNvPr id="13" name="TextBox 12"/>
           <p:cNvSpPr txBox="1"/>
           <p:nvPr/>
         </p:nvSpPr>
         <p:spPr>
           <a:xfrm>
-            <a:off x="3763700" y="558800"/>
-            <a:ext cx="7551483" cy="937918"/>
+            <a:off x="1005840" y="3451860"/>
+            <a:ext cx="6217920" cy="694944"/>
           </a:xfrm>
           <a:prstGeom prst="rect">
             <a:avLst/>
@@ -4009,28 +4152,41 @@
           </a:bodyPr>
           <a:lstStyle/>
           <a:p>
-            <a:r>
-              <a:rPr sz="1200" b="0">
-                <a:solidFill>
-                  <a:srgbClr val="212121"/>
-                </a:solidFill>
-                <a:latin typeface="Freesentation"/>
-              </a:rPr>
-              <a:t>온프레미스 Kafka에서 AWS MSK로의 전환 근거를 현황과 개선안으로 대비</a:t>
-            </a:r>
-          </a:p>
-        </p:txBody>
-      </p:sp>
-      <p:sp>
-        <p:nvSpPr>
-          <p:cNvPr id="11" name="TextBox 10"/>
+            <a:pPr algn="ctr"/>
+            <a:r>
+              <a:rPr sz="1300" b="1">
+                <a:solidFill>
+                  <a:srgbClr val="0043DA"/>
+                </a:solidFill>
+                <a:latin typeface="프리젠테이션 7"/>
+              </a:rPr>
+              <a:t>기술 적합성</a:t>
+            </a:r>
+          </a:p>
+          <a:p>
+            <a:pPr algn="ctr"/>
+            <a:r>
+              <a:rPr sz="1300" b="1">
+                <a:solidFill>
+                  <a:srgbClr val="0043DA"/>
+                </a:solidFill>
+                <a:latin typeface="프리젠테이션 7"/>
+              </a:rPr>
+              <a:t>처리량 100MB/s · 지연 10ms · 내구성 99.99%</a:t>
+            </a:r>
+          </a:p>
+        </p:txBody>
+      </p:sp>
+      <p:sp>
+        <p:nvSpPr>
+          <p:cNvPr id="14" name="TextBox 13"/>
           <p:cNvSpPr txBox="1"/>
           <p:nvPr/>
         </p:nvSpPr>
         <p:spPr>
           <a:xfrm>
-            <a:off x="457200" y="1600200"/>
-            <a:ext cx="11277600" cy="320040"/>
+            <a:off x="1554480" y="4200753"/>
+            <a:ext cx="5120640" cy="694944"/>
           </a:xfrm>
           <a:prstGeom prst="rect">
             <a:avLst/>
@@ -4043,28 +4199,41 @@
           </a:bodyPr>
           <a:lstStyle/>
           <a:p>
-            <a:r>
-              <a:rPr sz="1600" b="1">
-                <a:solidFill>
-                  <a:srgbClr val="0043DA"/>
-                </a:solidFill>
-                <a:latin typeface="Freesentation"/>
-              </a:rPr>
-              <a:t>온프레미스 Kafka의 운영 한계와 MSK 전환 효과</a:t>
-            </a:r>
-          </a:p>
-        </p:txBody>
-      </p:sp>
-      <p:sp>
-        <p:nvSpPr>
-          <p:cNvPr id="12" name="TextBox 11"/>
+            <a:pPr algn="ctr"/>
+            <a:r>
+              <a:rPr sz="1300" b="1">
+                <a:solidFill>
+                  <a:srgbClr val="FFFFFF"/>
+                </a:solidFill>
+                <a:latin typeface="프리젠테이션 7"/>
+              </a:rPr>
+              <a:t>운영 효율성</a:t>
+            </a:r>
+          </a:p>
+          <a:p>
+            <a:pPr algn="ctr"/>
+            <a:r>
+              <a:rPr sz="1300" b="1">
+                <a:solidFill>
+                  <a:srgbClr val="FFFFFF"/>
+                </a:solidFill>
+                <a:latin typeface="프리젠테이션 7"/>
+              </a:rPr>
+              <a:t>관리형 서비스 · AWS 통합 · 비용 최적화</a:t>
+            </a:r>
+          </a:p>
+        </p:txBody>
+      </p:sp>
+      <p:sp>
+        <p:nvSpPr>
+          <p:cNvPr id="15" name="TextBox 14"/>
           <p:cNvSpPr txBox="1"/>
           <p:nvPr/>
         </p:nvSpPr>
         <p:spPr>
           <a:xfrm>
-            <a:off x="457200" y="1965960"/>
-            <a:ext cx="11277600" cy="274320"/>
+            <a:off x="2103120" y="4950561"/>
+            <a:ext cx="4023360" cy="694944"/>
           </a:xfrm>
           <a:prstGeom prst="rect">
             <a:avLst/>
@@ -4077,28 +4246,41 @@
           </a:bodyPr>
           <a:lstStyle/>
           <a:p>
-            <a:r>
-              <a:rPr sz="1300" b="0">
-                <a:solidFill>
-                  <a:srgbClr val="212121"/>
-                </a:solidFill>
-                <a:latin typeface="Freesentation"/>
-              </a:rPr>
-              <a:t>관리 복잡도·확장성·비용 3가지 핵심 문제를 AWS MSK 완전 관리형으로 해소</a:t>
-            </a:r>
-          </a:p>
-        </p:txBody>
-      </p:sp>
-      <p:sp>
-        <p:nvSpPr>
-          <p:cNvPr id="13" name="TextBox 12"/>
+            <a:pPr algn="ctr"/>
+            <a:r>
+              <a:rPr sz="1300" b="1">
+                <a:solidFill>
+                  <a:srgbClr val="FFFFFF"/>
+                </a:solidFill>
+                <a:latin typeface="프리젠테이션 7"/>
+              </a:rPr>
+              <a:t>보안/컴플라이언스</a:t>
+            </a:r>
+          </a:p>
+          <a:p>
+            <a:pPr algn="ctr"/>
+            <a:r>
+              <a:rPr sz="1300" b="1">
+                <a:solidFill>
+                  <a:srgbClr val="FFFFFF"/>
+                </a:solidFill>
+                <a:latin typeface="프리젠테이션 7"/>
+              </a:rPr>
+              <a:t>IAM · TLS 암호화 · VPC 격리 · FIPS 140-2</a:t>
+            </a:r>
+          </a:p>
+        </p:txBody>
+      </p:sp>
+      <p:sp>
+        <p:nvSpPr>
+          <p:cNvPr id="16" name="TextBox 15"/>
           <p:cNvSpPr txBox="1"/>
           <p:nvPr/>
         </p:nvSpPr>
         <p:spPr>
           <a:xfrm>
-            <a:off x="637160" y="2651760"/>
-            <a:ext cx="1371600" cy="274320"/>
+            <a:off x="2651760" y="5700369"/>
+            <a:ext cx="2926080" cy="694944"/>
           </a:xfrm>
           <a:prstGeom prst="rect">
             <a:avLst/>
@@ -4113,27 +4295,39 @@
           <a:p>
             <a:pPr algn="ctr"/>
             <a:r>
-              <a:rPr sz="1100" b="1">
+              <a:rPr sz="1300" b="1">
                 <a:solidFill>
                   <a:srgbClr val="FFFFFF"/>
                 </a:solidFill>
-                <a:latin typeface="Freesentation"/>
-              </a:rPr>
-              <a:t>⚠ As-Is</a:t>
-            </a:r>
-          </a:p>
-        </p:txBody>
-      </p:sp>
-      <p:sp>
-        <p:nvSpPr>
-          <p:cNvPr id="14" name="TextBox 13"/>
+                <a:latin typeface="프리젠테이션 7"/>
+              </a:rPr>
+              <a:t>Amazon MSK 선택</a:t>
+            </a:r>
+          </a:p>
+          <a:p>
+            <a:pPr algn="ctr"/>
+            <a:r>
+              <a:rPr sz="1300" b="1">
+                <a:solidFill>
+                  <a:srgbClr val="FFFFFF"/>
+                </a:solidFill>
+                <a:latin typeface="프리젠테이션 7"/>
+              </a:rPr>
+              <a:t>완전관리형 Kafka · 멀티AZ · AWS 네이티브</a:t>
+            </a:r>
+          </a:p>
+        </p:txBody>
+      </p:sp>
+      <p:sp>
+        <p:nvSpPr>
+          <p:cNvPr id="17" name="TextBox 16"/>
           <p:cNvSpPr txBox="1"/>
           <p:nvPr/>
         </p:nvSpPr>
         <p:spPr>
           <a:xfrm>
-            <a:off x="6611040" y="2651760"/>
-            <a:ext cx="1371600" cy="274320"/>
+            <a:off x="8046720" y="2702052"/>
+            <a:ext cx="3687775" cy="694944"/>
           </a:xfrm>
           <a:prstGeom prst="rect">
             <a:avLst/>
@@ -4146,29 +4340,28 @@
           </a:bodyPr>
           <a:lstStyle/>
           <a:p>
-            <a:pPr algn="ctr"/>
-            <a:r>
-              <a:rPr sz="1100" b="1">
-                <a:solidFill>
-                  <a:srgbClr val="FFFFFF"/>
-                </a:solidFill>
-                <a:latin typeface="Freesentation"/>
-              </a:rPr>
-              <a:t>✓ To-Be</a:t>
-            </a:r>
-          </a:p>
-        </p:txBody>
-      </p:sp>
-      <p:sp>
-        <p:nvSpPr>
-          <p:cNvPr id="15" name="TextBox 14"/>
+            <a:r>
+              <a:rPr sz="1100" b="0">
+                <a:solidFill>
+                  <a:srgbClr val="404040"/>
+                </a:solidFill>
+                <a:latin typeface="프리젠테이션 5"/>
+              </a:rPr>
+              <a:t>4개 기술 초기 검토</a:t>
+            </a:r>
+          </a:p>
+        </p:txBody>
+      </p:sp>
+      <p:sp>
+        <p:nvSpPr>
+          <p:cNvPr id="18" name="TextBox 17"/>
           <p:cNvSpPr txBox="1"/>
           <p:nvPr/>
         </p:nvSpPr>
         <p:spPr>
           <a:xfrm>
-            <a:off x="637160" y="3017520"/>
-            <a:ext cx="4941840" cy="365760"/>
+            <a:off x="8046720" y="3451860"/>
+            <a:ext cx="3687775" cy="694944"/>
           </a:xfrm>
           <a:prstGeom prst="rect">
             <a:avLst/>
@@ -4182,27 +4375,27 @@
           <a:lstStyle/>
           <a:p>
             <a:r>
-              <a:rPr sz="1400" b="1">
-                <a:solidFill>
-                  <a:srgbClr val="212121"/>
-                </a:solidFill>
-                <a:latin typeface="Freesentation"/>
-              </a:rPr>
-              <a:t>온프레미스 Kafka 한계</a:t>
-            </a:r>
-          </a:p>
-        </p:txBody>
-      </p:sp>
-      <p:sp>
-        <p:nvSpPr>
-          <p:cNvPr id="16" name="TextBox 15"/>
+              <a:rPr sz="1100" b="0">
+                <a:solidFill>
+                  <a:srgbClr val="404040"/>
+                </a:solidFill>
+                <a:latin typeface="프리젠테이션 5"/>
+              </a:rPr>
+              <a:t>Kafka · Kinesis 통과</a:t>
+            </a:r>
+          </a:p>
+        </p:txBody>
+      </p:sp>
+      <p:sp>
+        <p:nvSpPr>
+          <p:cNvPr id="19" name="TextBox 18"/>
           <p:cNvSpPr txBox="1"/>
           <p:nvPr/>
         </p:nvSpPr>
         <p:spPr>
           <a:xfrm>
-            <a:off x="6611040" y="3017520"/>
-            <a:ext cx="4941840" cy="365760"/>
+            <a:off x="8046720" y="4200753"/>
+            <a:ext cx="3687775" cy="694944"/>
           </a:xfrm>
           <a:prstGeom prst="rect">
             <a:avLst/>
@@ -4216,27 +4409,27 @@
           <a:lstStyle/>
           <a:p>
             <a:r>
-              <a:rPr sz="1400" b="1">
-                <a:solidFill>
-                  <a:srgbClr val="0043DA"/>
-                </a:solidFill>
-                <a:latin typeface="Freesentation"/>
-              </a:rPr>
-              <a:t>AWS MSK 도입 효과</a:t>
-            </a:r>
-          </a:p>
-        </p:txBody>
-      </p:sp>
-      <p:sp>
-        <p:nvSpPr>
-          <p:cNvPr id="17" name="TextBox 16"/>
+              <a:rPr sz="1100" b="0">
+                <a:solidFill>
+                  <a:srgbClr val="404040"/>
+                </a:solidFill>
+                <a:latin typeface="프리젠테이션 5"/>
+              </a:rPr>
+              <a:t>Amazon MSK · Kinesis 잔류</a:t>
+            </a:r>
+          </a:p>
+        </p:txBody>
+      </p:sp>
+      <p:sp>
+        <p:nvSpPr>
+          <p:cNvPr id="20" name="TextBox 19"/>
           <p:cNvSpPr txBox="1"/>
           <p:nvPr/>
         </p:nvSpPr>
         <p:spPr>
           <a:xfrm>
-            <a:off x="637160" y="3474720"/>
-            <a:ext cx="4484640" cy="2926560"/>
+            <a:off x="8046720" y="4950561"/>
+            <a:ext cx="3687775" cy="694944"/>
           </a:xfrm>
           <a:prstGeom prst="rect">
             <a:avLst/>
@@ -4250,60 +4443,27 @@
           <a:lstStyle/>
           <a:p>
             <a:r>
-              <a:rPr sz="1300" b="0">
-                <a:solidFill>
-                  <a:srgbClr val="212121"/>
-                </a:solidFill>
-                <a:latin typeface="Freesentation"/>
-              </a:rPr>
-              <a:t>• 브로커 패치·업그레이드 전담 인력 2~3명 상시 필요</a:t>
-            </a:r>
-          </a:p>
-          <a:p>
-            <a:r>
-              <a:rPr sz="1300" b="0">
-                <a:solidFill>
-                  <a:srgbClr val="212121"/>
-                </a:solidFill>
-                <a:latin typeface="Freesentation"/>
-              </a:rPr>
-              <a:t>• 피크 트래픽 대비 서버 과잉 프로비저닝 — 비용 비효율</a:t>
-            </a:r>
-          </a:p>
-          <a:p>
-            <a:r>
-              <a:rPr sz="1300" b="0">
-                <a:solidFill>
-                  <a:srgbClr val="212121"/>
-                </a:solidFill>
-                <a:latin typeface="Freesentation"/>
-              </a:rPr>
-              <a:t>• ZooKeeper 의존성으로 운영 복잡도 가중</a:t>
-            </a:r>
-          </a:p>
-          <a:p>
-            <a:r>
-              <a:rPr sz="1300" b="0">
-                <a:solidFill>
-                  <a:srgbClr val="212121"/>
-                </a:solidFill>
-                <a:latin typeface="Freesentation"/>
-              </a:rPr>
-              <a:t>• 장애 복구 수동 처리 — MTTR 평균 4시간 이상</a:t>
-            </a:r>
-          </a:p>
-        </p:txBody>
-      </p:sp>
-      <p:sp>
-        <p:nvSpPr>
-          <p:cNvPr id="18" name="TextBox 17"/>
+              <a:rPr sz="1100" b="0">
+                <a:solidFill>
+                  <a:srgbClr val="404040"/>
+                </a:solidFill>
+                <a:latin typeface="프리젠테이션 5"/>
+              </a:rPr>
+              <a:t>MSK 단독 충족</a:t>
+            </a:r>
+          </a:p>
+        </p:txBody>
+      </p:sp>
+      <p:sp>
+        <p:nvSpPr>
+          <p:cNvPr id="21" name="TextBox 20"/>
           <p:cNvSpPr txBox="1"/>
           <p:nvPr/>
         </p:nvSpPr>
         <p:spPr>
           <a:xfrm>
-            <a:off x="6611040" y="3474720"/>
-            <a:ext cx="4484640" cy="2926560"/>
+            <a:off x="8046720" y="5700369"/>
+            <a:ext cx="3687775" cy="694944"/>
           </a:xfrm>
           <a:prstGeom prst="rect">
             <a:avLst/>
@@ -4317,98 +4477,17 @@
           <a:lstStyle/>
           <a:p>
             <a:r>
-              <a:rPr sz="1300" b="0">
-                <a:solidFill>
-                  <a:srgbClr val="212121"/>
-                </a:solidFill>
-                <a:latin typeface="Freesentation"/>
-              </a:rPr>
-              <a:t>• AWS 완전 관리형 — 패치·모니터링 자동화</a:t>
-            </a:r>
-          </a:p>
-          <a:p>
-            <a:r>
-              <a:rPr sz="1300" b="0">
-                <a:solidFill>
-                  <a:srgbClr val="212121"/>
-                </a:solidFill>
-                <a:latin typeface="Freesentation"/>
-              </a:rPr>
-              <a:t>• Serverless 옵션으로 수분 내 자동 스케일</a:t>
-            </a:r>
-          </a:p>
-          <a:p>
-            <a:r>
-              <a:rPr sz="1300" b="0">
-                <a:solidFill>
-                  <a:srgbClr val="212121"/>
-                </a:solidFill>
-                <a:latin typeface="Freesentation"/>
-              </a:rPr>
-              <a:t>• KRaft 모드 지원 — ZooKeeper 의존성 제거</a:t>
-            </a:r>
-          </a:p>
-          <a:p>
-            <a:r>
-              <a:rPr sz="1300" b="0">
-                <a:solidFill>
-                  <a:srgbClr val="212121"/>
-                </a:solidFill>
-                <a:latin typeface="Freesentation"/>
-              </a:rPr>
-              <a:t>• Multi-AZ 자동 복구 — MTTR 99% 단축</a:t>
-            </a:r>
-          </a:p>
-        </p:txBody>
-      </p:sp>
-      <p:pic>
-        <p:nvPicPr>
-          <p:cNvPr id="19" name="Picture 18" descr="warning.png"/>
-          <p:cNvPicPr>
-            <a:picLocks noChangeAspect="1"/>
-          </p:cNvPicPr>
-          <p:nvPr/>
-        </p:nvPicPr>
-        <p:blipFill>
-          <a:blip r:embed="rId2"/>
-          <a:stretch>
-            <a:fillRect/>
-          </a:stretch>
-        </p:blipFill>
-        <p:spPr>
-          <a:xfrm>
-            <a:off x="5166720" y="6172200"/>
-            <a:ext cx="411480" cy="411480"/>
-          </a:xfrm>
-          <a:prstGeom prst="rect">
-            <a:avLst/>
-          </a:prstGeom>
-        </p:spPr>
-      </p:pic>
-      <p:pic>
-        <p:nvPicPr>
-          <p:cNvPr id="20" name="Picture 19" descr="deploy.png"/>
-          <p:cNvPicPr>
-            <a:picLocks noChangeAspect="1"/>
-          </p:cNvPicPr>
-          <p:nvPr/>
-        </p:nvPicPr>
-        <p:blipFill>
-          <a:blip r:embed="rId3"/>
-          <a:stretch>
-            <a:fillRect/>
-          </a:stretch>
-        </p:blipFill>
-        <p:spPr>
-          <a:xfrm>
-            <a:off x="11140800" y="6172200"/>
-            <a:ext cx="411480" cy="411480"/>
-          </a:xfrm>
-          <a:prstGeom prst="rect">
-            <a:avLst/>
-          </a:prstGeom>
-        </p:spPr>
-      </p:pic>
+              <a:rPr sz="1200" b="1">
+                <a:solidFill>
+                  <a:srgbClr val="0043DA"/>
+                </a:solidFill>
+                <a:latin typeface="프리젠테이션 7"/>
+              </a:rPr>
+              <a:t>최종 채택 결정</a:t>
+            </a:r>
+          </a:p>
+        </p:txBody>
+      </p:sp>
     </p:spTree>
   </p:cSld>
   <p:clrMapOvr>
@@ -4434,101 +4513,32 @@
             <a:spLocks noGrp="1"/>
           </p:cNvSpPr>
           <p:nvPr>
-            <p:ph type="body" idx="10" sz="quarter"/>
+            <p:ph type="body" sz="quarter" idx="10"/>
           </p:nvPr>
         </p:nvSpPr>
-        <p:spPr/>
+        <p:spPr>
+          <a:ln>
+            <a:noFill/>
+          </a:ln>
+        </p:spPr>
         <p:txBody>
           <a:bodyPr/>
           <a:lstStyle/>
           <a:p>
-            <a:r>
-              <a:rPr lang="ko-KR" altLang="en-US" dirty="0" b="1"/>
-              <a:t>1-2. 비용 비교</a:t>
-            </a:r>
-          </a:p>
-        </p:txBody>
-      </p:sp>
-      <p:sp>
-        <p:nvSpPr>
-          <p:cNvPr id="3" name="TextBox 2"/>
-          <p:cNvSpPr txBox="1"/>
-          <p:nvPr/>
-        </p:nvSpPr>
-        <p:spPr>
-          <a:xfrm>
-            <a:off x="435254" y="1524304"/>
-            <a:ext cx="10742371" cy="304495"/>
-          </a:xfrm>
-          <a:prstGeom prst="rect">
-            <a:avLst/>
-          </a:prstGeom>
-          <a:noFill/>
-        </p:spPr>
-        <p:txBody>
-          <a:bodyPr wrap="square">
-            <a:spAutoFit/>
-          </a:bodyPr>
-          <a:lstStyle/>
-          <a:p>
-            <a:pPr algn="l"/>
-            <a:r>
-              <a:rPr sz="1600" b="1">
-                <a:solidFill>
-                  <a:srgbClr val="0043DA"/>
-                </a:solidFill>
-                <a:latin typeface="Freesentation"/>
-              </a:rPr>
-              <a:t>On-Premises Kafka vs AWS MSK — TCO 직접 비교</a:t>
-            </a:r>
-          </a:p>
-        </p:txBody>
-      </p:sp>
-      <p:sp>
-        <p:nvSpPr>
-          <p:cNvPr id="4" name="TextBox 3"/>
-          <p:cNvSpPr txBox="1"/>
-          <p:nvPr/>
-        </p:nvSpPr>
-        <p:spPr>
-          <a:xfrm>
-            <a:off x="435254" y="1872691"/>
-            <a:ext cx="10742371" cy="261518"/>
-          </a:xfrm>
-          <a:prstGeom prst="rect">
-            <a:avLst/>
-          </a:prstGeom>
-          <a:noFill/>
-        </p:spPr>
-        <p:txBody>
-          <a:bodyPr wrap="square">
-            <a:spAutoFit/>
-          </a:bodyPr>
-          <a:lstStyle/>
-          <a:p>
-            <a:pPr algn="l"/>
-            <a:r>
-              <a:rPr sz="1300" b="0">
-                <a:solidFill>
-                  <a:srgbClr val="212121"/>
-                </a:solidFill>
-                <a:latin typeface="Freesentation"/>
-              </a:rPr>
-              <a:t>비용·관리·가용성·확장성 4개 항목 기준 직접 비교 (2026년 4월 기준)</a:t>
-            </a:r>
-          </a:p>
-        </p:txBody>
-      </p:sp>
-      <p:sp>
-        <p:nvSpPr>
-          <p:cNvPr id="5" name="Rounded Rectangle 4"/>
+            <a:endParaRPr/>
+          </a:p>
+        </p:txBody>
+      </p:sp>
+      <p:sp>
+        <p:nvSpPr>
+          <p:cNvPr id="4" name="Rounded Rectangle 3"/>
           <p:cNvSpPr/>
           <p:nvPr/>
         </p:nvSpPr>
         <p:spPr>
           <a:xfrm>
             <a:off x="457200" y="2560320"/>
-            <a:ext cx="5577840" cy="4023360"/>
+            <a:ext cx="5303520" cy="4023360"/>
           </a:xfrm>
           <a:prstGeom prst="roundRect">
             <a:avLst/>
@@ -4536,9 +4546,9 @@
           <a:solidFill>
             <a:srgbClr val="F8F9FA"/>
           </a:solidFill>
-          <a:ln w="9525">
+          <a:ln>
             <a:solidFill>
-              <a:srgbClr val="DCDCDC"/>
+              <a:srgbClr val="F8F9FA"/>
             </a:solidFill>
           </a:ln>
         </p:spPr>
@@ -4566,14 +4576,14 @@
       </p:sp>
       <p:sp>
         <p:nvSpPr>
-          <p:cNvPr id="6" name="Rounded Rectangle 5"/>
+          <p:cNvPr id="5" name="Rounded Rectangle 4"/>
           <p:cNvSpPr/>
           <p:nvPr/>
         </p:nvSpPr>
         <p:spPr>
           <a:xfrm>
-            <a:off x="6156960" y="2560320"/>
-            <a:ext cx="5577840" cy="4023360"/>
+            <a:off x="6431280" y="2560320"/>
+            <a:ext cx="5303520" cy="4023360"/>
           </a:xfrm>
           <a:prstGeom prst="roundRect">
             <a:avLst/>
@@ -4581,9 +4591,9 @@
           <a:solidFill>
             <a:srgbClr val="E6F0FF"/>
           </a:solidFill>
-          <a:ln w="9525">
+          <a:ln>
             <a:solidFill>
-              <a:srgbClr val="DCDCDC"/>
+              <a:srgbClr val="E6F0FF"/>
             </a:solidFill>
           </a:ln>
         </p:spPr>
@@ -4611,113 +4621,16 @@
       </p:sp>
       <p:sp>
         <p:nvSpPr>
-          <p:cNvPr id="7" name="Rectangle 6"/>
+          <p:cNvPr id="6" name="Right Arrow 5"/>
           <p:cNvSpPr/>
           <p:nvPr/>
         </p:nvSpPr>
         <p:spPr>
           <a:xfrm>
-            <a:off x="5917680" y="2651760"/>
-            <a:ext cx="9144" cy="3840480"/>
-          </a:xfrm>
-          <a:prstGeom prst="rect">
-            <a:avLst/>
-          </a:prstGeom>
-          <a:solidFill>
-            <a:srgbClr val="DCDCDC"/>
-          </a:solidFill>
-          <a:ln>
-            <a:solidFill>
-              <a:srgbClr val="DCDCDC"/>
-            </a:solidFill>
-          </a:ln>
-        </p:spPr>
-        <p:style>
-          <a:lnRef idx="1">
-            <a:schemeClr val="accent1"/>
-          </a:lnRef>
-          <a:fillRef idx="3">
-            <a:schemeClr val="accent1"/>
-          </a:fillRef>
-          <a:effectRef idx="2">
-            <a:schemeClr val="accent1"/>
-          </a:effectRef>
-          <a:fontRef idx="minor">
-            <a:schemeClr val="lt1"/>
-          </a:fontRef>
-        </p:style>
-        <p:txBody>
-          <a:bodyPr rtlCol="0" anchor="ctr"/>
-          <a:lstStyle/>
-          <a:p>
-            <a:pPr algn="ctr"/>
-          </a:p>
-        </p:txBody>
-      </p:sp>
-      <p:sp>
-        <p:nvSpPr>
-          <p:cNvPr id="8" name="Rounded Rectangle 7"/>
-          <p:cNvSpPr/>
-          <p:nvPr/>
-        </p:nvSpPr>
-        <p:spPr>
-          <a:xfrm>
-            <a:off x="637160" y="2651760"/>
-            <a:ext cx="1554480" cy="274320"/>
-          </a:xfrm>
-          <a:prstGeom prst="roundRect">
-            <a:avLst/>
-          </a:prstGeom>
-          <a:solidFill>
-            <a:srgbClr val="F8F9FA"/>
-          </a:solidFill>
-          <a:ln w="9525">
-            <a:solidFill>
-              <a:srgbClr val="DCDCDC"/>
-            </a:solidFill>
-          </a:ln>
-        </p:spPr>
-        <p:style>
-          <a:lnRef idx="1">
-            <a:schemeClr val="accent1"/>
-          </a:lnRef>
-          <a:fillRef idx="3">
-            <a:schemeClr val="accent1"/>
-          </a:fillRef>
-          <a:effectRef idx="2">
-            <a:schemeClr val="accent1"/>
-          </a:effectRef>
-          <a:fontRef idx="minor">
-            <a:schemeClr val="lt1"/>
-          </a:fontRef>
-        </p:style>
-        <p:txBody>
-          <a:bodyPr rtlCol="0" anchor="ctr"/>
-          <a:lstStyle/>
-          <a:p>
-            <a:r>
-              <a:rPr sz="1300">
-                <a:solidFill>
-                  <a:srgbClr val="212121"/>
-                </a:solidFill>
-              </a:rPr>
-              <a:t>On-Premises</a:t>
-            </a:r>
-          </a:p>
-        </p:txBody>
-      </p:sp>
-      <p:sp>
-        <p:nvSpPr>
-          <p:cNvPr id="9" name="Rounded Rectangle 8"/>
-          <p:cNvSpPr/>
-          <p:nvPr/>
-        </p:nvSpPr>
-        <p:spPr>
-          <a:xfrm>
-            <a:off x="6337720" y="2651760"/>
-            <a:ext cx="1554480" cy="274320"/>
-          </a:xfrm>
-          <a:prstGeom prst="roundRect">
+            <a:off x="5944440" y="4480680"/>
+            <a:ext cx="411480" cy="274320"/>
+          </a:xfrm>
+          <a:prstGeom prst="rightArrow">
             <a:avLst/>
           </a:prstGeom>
           <a:solidFill>
@@ -4747,27 +4660,110 @@
           <a:bodyPr rtlCol="0" anchor="ctr"/>
           <a:lstStyle/>
           <a:p>
-            <a:r>
-              <a:rPr sz="1300">
-                <a:solidFill>
-                  <a:srgbClr val="FFFFFF"/>
-                </a:solidFill>
-              </a:rPr>
-              <a:t>✓ AWS MSK</a:t>
-            </a:r>
-          </a:p>
-        </p:txBody>
-      </p:sp>
-      <p:sp>
-        <p:nvSpPr>
-          <p:cNvPr id="10" name="TextBox 9"/>
+            <a:pPr algn="ctr"/>
+          </a:p>
+        </p:txBody>
+      </p:sp>
+      <p:sp>
+        <p:nvSpPr>
+          <p:cNvPr id="7" name="Rounded Rectangle 6"/>
+          <p:cNvSpPr/>
+          <p:nvPr/>
+        </p:nvSpPr>
+        <p:spPr>
+          <a:xfrm>
+            <a:off x="637160" y="2651760"/>
+            <a:ext cx="1371600" cy="274320"/>
+          </a:xfrm>
+          <a:prstGeom prst="roundRect">
+            <a:avLst/>
+          </a:prstGeom>
+          <a:solidFill>
+            <a:srgbClr val="212121"/>
+          </a:solidFill>
+          <a:ln>
+            <a:solidFill>
+              <a:srgbClr val="212121"/>
+            </a:solidFill>
+          </a:ln>
+        </p:spPr>
+        <p:style>
+          <a:lnRef idx="1">
+            <a:schemeClr val="accent1"/>
+          </a:lnRef>
+          <a:fillRef idx="3">
+            <a:schemeClr val="accent1"/>
+          </a:fillRef>
+          <a:effectRef idx="2">
+            <a:schemeClr val="accent1"/>
+          </a:effectRef>
+          <a:fontRef idx="minor">
+            <a:schemeClr val="lt1"/>
+          </a:fontRef>
+        </p:style>
+        <p:txBody>
+          <a:bodyPr rtlCol="0" anchor="ctr"/>
+          <a:lstStyle/>
+          <a:p>
+            <a:pPr algn="ctr"/>
+          </a:p>
+        </p:txBody>
+      </p:sp>
+      <p:sp>
+        <p:nvSpPr>
+          <p:cNvPr id="8" name="Rounded Rectangle 7"/>
+          <p:cNvSpPr/>
+          <p:nvPr/>
+        </p:nvSpPr>
+        <p:spPr>
+          <a:xfrm>
+            <a:off x="6611040" y="2651760"/>
+            <a:ext cx="1371600" cy="274320"/>
+          </a:xfrm>
+          <a:prstGeom prst="roundRect">
+            <a:avLst/>
+          </a:prstGeom>
+          <a:solidFill>
+            <a:srgbClr val="0043DA"/>
+          </a:solidFill>
+          <a:ln>
+            <a:solidFill>
+              <a:srgbClr val="0043DA"/>
+            </a:solidFill>
+          </a:ln>
+        </p:spPr>
+        <p:style>
+          <a:lnRef idx="1">
+            <a:schemeClr val="accent1"/>
+          </a:lnRef>
+          <a:fillRef idx="3">
+            <a:schemeClr val="accent1"/>
+          </a:fillRef>
+          <a:effectRef idx="2">
+            <a:schemeClr val="accent1"/>
+          </a:effectRef>
+          <a:fontRef idx="minor">
+            <a:schemeClr val="lt1"/>
+          </a:fontRef>
+        </p:style>
+        <p:txBody>
+          <a:bodyPr rtlCol="0" anchor="ctr"/>
+          <a:lstStyle/>
+          <a:p>
+            <a:pPr algn="ctr"/>
+          </a:p>
+        </p:txBody>
+      </p:sp>
+      <p:sp>
+        <p:nvSpPr>
+          <p:cNvPr id="9" name="TextBox 8"/>
           <p:cNvSpPr txBox="1"/>
           <p:nvPr/>
         </p:nvSpPr>
         <p:spPr>
           <a:xfrm>
-            <a:off x="607161" y="2873959"/>
-            <a:ext cx="4967020" cy="3136392"/>
+            <a:off x="354806" y="557906"/>
+            <a:ext cx="2719850" cy="932614"/>
           </a:xfrm>
           <a:prstGeom prst="rect">
             <a:avLst/>
@@ -4780,130 +4776,28 @@
           </a:bodyPr>
           <a:lstStyle/>
           <a:p>
-            <a:pPr algn="l"/>
-            <a:r>
-              <a:rPr sz="1100" b="0">
-                <a:solidFill>
-                  <a:srgbClr val="505050"/>
+            <a:r>
+              <a:rPr sz="2000" b="1">
+                <a:solidFill>
+                  <a:srgbClr val="212121"/>
                 </a:solidFill>
                 <a:latin typeface="Freesentation"/>
               </a:rPr>
-              <a:t>초기 비용</a:t>
-            </a:r>
-            <a:defRPr sz="1100" b="0"/>
-          </a:p>
-          <a:p>
-            <a:pPr algn="l"/>
-            <a:r>
-              <a:rPr sz="1400" b="1">
-                <a:solidFill>
-                  <a:srgbClr val="212121"/>
-                </a:solidFill>
-                <a:latin typeface="Freesentation"/>
-              </a:rPr>
-              <a:t>서버 구매 ₩5억+</a:t>
-            </a:r>
-            <a:defRPr sz="1400" b="1"/>
-          </a:p>
-          <a:p>
-            <a:pPr algn="l"/>
-          </a:p>
-          <a:p>
-            <a:pPr algn="l"/>
-            <a:r>
-              <a:rPr sz="1100" b="0">
-                <a:solidFill>
-                  <a:srgbClr val="505050"/>
-                </a:solidFill>
-                <a:latin typeface="Freesentation"/>
-              </a:rPr>
-              <a:t>운영 관리</a:t>
-            </a:r>
-            <a:defRPr sz="1100" b="0"/>
-          </a:p>
-          <a:p>
-            <a:pPr algn="l"/>
-            <a:r>
-              <a:rPr sz="1400" b="1">
-                <a:solidFill>
-                  <a:srgbClr val="212121"/>
-                </a:solidFill>
-                <a:latin typeface="Freesentation"/>
-              </a:rPr>
-              <a:t>전담 인력 2~3명 필요</a:t>
-            </a:r>
-            <a:defRPr sz="1400" b="1"/>
-          </a:p>
-          <a:p>
-            <a:pPr algn="l"/>
-          </a:p>
-          <a:p>
-            <a:pPr algn="l"/>
-            <a:r>
-              <a:rPr sz="1100" b="0">
-                <a:solidFill>
-                  <a:srgbClr val="505050"/>
-                </a:solidFill>
-                <a:latin typeface="Freesentation"/>
-              </a:rPr>
-              <a:t>가용성</a:t>
-            </a:r>
-            <a:defRPr sz="1100" b="0"/>
-          </a:p>
-          <a:p>
-            <a:pPr algn="l"/>
-            <a:r>
-              <a:rPr sz="1400" b="1">
-                <a:solidFill>
-                  <a:srgbClr val="212121"/>
-                </a:solidFill>
-                <a:latin typeface="Freesentation"/>
-              </a:rPr>
-              <a:t>자체 HA 구성 필요</a:t>
-            </a:r>
-            <a:defRPr sz="1400" b="1"/>
-          </a:p>
-          <a:p>
-            <a:pPr algn="l"/>
-          </a:p>
-          <a:p>
-            <a:pPr algn="l"/>
-            <a:r>
-              <a:rPr sz="1100" b="0">
-                <a:solidFill>
-                  <a:srgbClr val="505050"/>
-                </a:solidFill>
-                <a:latin typeface="Freesentation"/>
-              </a:rPr>
-              <a:t>확장성</a:t>
-            </a:r>
-            <a:defRPr sz="1100" b="0"/>
-          </a:p>
-          <a:p>
-            <a:pPr algn="l"/>
-            <a:r>
-              <a:rPr sz="1400" b="1">
-                <a:solidFill>
-                  <a:srgbClr val="212121"/>
-                </a:solidFill>
-                <a:latin typeface="Freesentation"/>
-              </a:rPr>
-              <a:t>용량 증설에 수 주 소요</a:t>
-            </a:r>
-            <a:defRPr sz="1400" b="1"/>
-          </a:p>
-        </p:txBody>
-      </p:sp>
-      <p:sp>
-        <p:nvSpPr>
-          <p:cNvPr id="11" name="TextBox 10"/>
+              <a:t>1-1. As-Is / To-Be</a:t>
+            </a:r>
+          </a:p>
+        </p:txBody>
+      </p:sp>
+      <p:sp>
+        <p:nvSpPr>
+          <p:cNvPr id="10" name="TextBox 9"/>
           <p:cNvSpPr txBox="1"/>
           <p:nvPr/>
         </p:nvSpPr>
         <p:spPr>
           <a:xfrm>
-            <a:off x="6035954" y="2873959"/>
-            <a:ext cx="4967020" cy="3136392"/>
+            <a:off x="3763700" y="558800"/>
+            <a:ext cx="7551483" cy="937918"/>
           </a:xfrm>
           <a:prstGeom prst="rect">
             <a:avLst/>
@@ -4916,123 +4810,361 @@
           </a:bodyPr>
           <a:lstStyle/>
           <a:p>
-            <a:pPr algn="l"/>
-            <a:r>
-              <a:rPr sz="1100" b="0">
-                <a:solidFill>
-                  <a:srgbClr val="505050"/>
+            <a:r>
+              <a:rPr sz="1200" b="0">
+                <a:solidFill>
+                  <a:srgbClr val="212121"/>
                 </a:solidFill>
                 <a:latin typeface="Freesentation"/>
               </a:rPr>
-              <a:t>초기 비용</a:t>
-            </a:r>
-            <a:defRPr sz="1100" b="0"/>
-          </a:p>
-          <a:p>
-            <a:pPr algn="l"/>
+              <a:t>온프레미스 Kafka에서 AWS MSK로의 전환 근거를 현황과 개선안으로 대비</a:t>
+            </a:r>
+          </a:p>
+        </p:txBody>
+      </p:sp>
+      <p:sp>
+        <p:nvSpPr>
+          <p:cNvPr id="11" name="TextBox 10"/>
+          <p:cNvSpPr txBox="1"/>
+          <p:nvPr/>
+        </p:nvSpPr>
+        <p:spPr>
+          <a:xfrm>
+            <a:off x="457200" y="1600200"/>
+            <a:ext cx="11277600" cy="320040"/>
+          </a:xfrm>
+          <a:prstGeom prst="rect">
+            <a:avLst/>
+          </a:prstGeom>
+          <a:noFill/>
+        </p:spPr>
+        <p:txBody>
+          <a:bodyPr wrap="square">
+            <a:spAutoFit/>
+          </a:bodyPr>
+          <a:lstStyle/>
+          <a:p>
+            <a:r>
+              <a:rPr sz="1600" b="1">
+                <a:solidFill>
+                  <a:srgbClr val="0043DA"/>
+                </a:solidFill>
+                <a:latin typeface="Freesentation"/>
+              </a:rPr>
+              <a:t>온프레미스 Kafka의 운영 한계와 MSK 전환 효과</a:t>
+            </a:r>
+          </a:p>
+        </p:txBody>
+      </p:sp>
+      <p:sp>
+        <p:nvSpPr>
+          <p:cNvPr id="12" name="TextBox 11"/>
+          <p:cNvSpPr txBox="1"/>
+          <p:nvPr/>
+        </p:nvSpPr>
+        <p:spPr>
+          <a:xfrm>
+            <a:off x="457200" y="1965960"/>
+            <a:ext cx="11277600" cy="274320"/>
+          </a:xfrm>
+          <a:prstGeom prst="rect">
+            <a:avLst/>
+          </a:prstGeom>
+          <a:noFill/>
+        </p:spPr>
+        <p:txBody>
+          <a:bodyPr wrap="square">
+            <a:spAutoFit/>
+          </a:bodyPr>
+          <a:lstStyle/>
+          <a:p>
+            <a:r>
+              <a:rPr sz="1300" b="0">
+                <a:solidFill>
+                  <a:srgbClr val="212121"/>
+                </a:solidFill>
+                <a:latin typeface="Freesentation"/>
+              </a:rPr>
+              <a:t>관리 복잡도·확장성·비용 3가지 핵심 문제를 AWS MSK 완전 관리형으로 해소</a:t>
+            </a:r>
+          </a:p>
+        </p:txBody>
+      </p:sp>
+      <p:sp>
+        <p:nvSpPr>
+          <p:cNvPr id="13" name="TextBox 12"/>
+          <p:cNvSpPr txBox="1"/>
+          <p:nvPr/>
+        </p:nvSpPr>
+        <p:spPr>
+          <a:xfrm>
+            <a:off x="637160" y="2651760"/>
+            <a:ext cx="1371600" cy="274320"/>
+          </a:xfrm>
+          <a:prstGeom prst="rect">
+            <a:avLst/>
+          </a:prstGeom>
+          <a:noFill/>
+        </p:spPr>
+        <p:txBody>
+          <a:bodyPr wrap="square">
+            <a:spAutoFit/>
+          </a:bodyPr>
+          <a:lstStyle/>
+          <a:p>
+            <a:pPr algn="ctr"/>
+            <a:r>
+              <a:rPr sz="1100" b="1">
+                <a:solidFill>
+                  <a:srgbClr val="FFFFFF"/>
+                </a:solidFill>
+                <a:latin typeface="Freesentation"/>
+              </a:rPr>
+              <a:t>⚠ As-Is</a:t>
+            </a:r>
+          </a:p>
+        </p:txBody>
+      </p:sp>
+      <p:sp>
+        <p:nvSpPr>
+          <p:cNvPr id="14" name="TextBox 13"/>
+          <p:cNvSpPr txBox="1"/>
+          <p:nvPr/>
+        </p:nvSpPr>
+        <p:spPr>
+          <a:xfrm>
+            <a:off x="6611040" y="2651760"/>
+            <a:ext cx="1371600" cy="274320"/>
+          </a:xfrm>
+          <a:prstGeom prst="rect">
+            <a:avLst/>
+          </a:prstGeom>
+          <a:noFill/>
+        </p:spPr>
+        <p:txBody>
+          <a:bodyPr wrap="square">
+            <a:spAutoFit/>
+          </a:bodyPr>
+          <a:lstStyle/>
+          <a:p>
+            <a:pPr algn="ctr"/>
+            <a:r>
+              <a:rPr sz="1100" b="1">
+                <a:solidFill>
+                  <a:srgbClr val="FFFFFF"/>
+                </a:solidFill>
+                <a:latin typeface="Freesentation"/>
+              </a:rPr>
+              <a:t>✓ To-Be</a:t>
+            </a:r>
+          </a:p>
+        </p:txBody>
+      </p:sp>
+      <p:sp>
+        <p:nvSpPr>
+          <p:cNvPr id="15" name="TextBox 14"/>
+          <p:cNvSpPr txBox="1"/>
+          <p:nvPr/>
+        </p:nvSpPr>
+        <p:spPr>
+          <a:xfrm>
+            <a:off x="637160" y="3017520"/>
+            <a:ext cx="4941840" cy="365760"/>
+          </a:xfrm>
+          <a:prstGeom prst="rect">
+            <a:avLst/>
+          </a:prstGeom>
+          <a:noFill/>
+        </p:spPr>
+        <p:txBody>
+          <a:bodyPr wrap="square">
+            <a:spAutoFit/>
+          </a:bodyPr>
+          <a:lstStyle/>
+          <a:p>
             <a:r>
               <a:rPr sz="1400" b="1">
                 <a:solidFill>
+                  <a:srgbClr val="212121"/>
+                </a:solidFill>
+                <a:latin typeface="Freesentation"/>
+              </a:rPr>
+              <a:t>온프레미스 Kafka 한계</a:t>
+            </a:r>
+          </a:p>
+        </p:txBody>
+      </p:sp>
+      <p:sp>
+        <p:nvSpPr>
+          <p:cNvPr id="16" name="TextBox 15"/>
+          <p:cNvSpPr txBox="1"/>
+          <p:nvPr/>
+        </p:nvSpPr>
+        <p:spPr>
+          <a:xfrm>
+            <a:off x="6611040" y="3017520"/>
+            <a:ext cx="4941840" cy="365760"/>
+          </a:xfrm>
+          <a:prstGeom prst="rect">
+            <a:avLst/>
+          </a:prstGeom>
+          <a:noFill/>
+        </p:spPr>
+        <p:txBody>
+          <a:bodyPr wrap="square">
+            <a:spAutoFit/>
+          </a:bodyPr>
+          <a:lstStyle/>
+          <a:p>
+            <a:r>
+              <a:rPr sz="1400" b="1">
+                <a:solidFill>
                   <a:srgbClr val="0043DA"/>
                 </a:solidFill>
                 <a:latin typeface="Freesentation"/>
               </a:rPr>
-              <a:t>초기 투자 0원</a:t>
-            </a:r>
-            <a:defRPr sz="1400" b="1"/>
-          </a:p>
-          <a:p>
-            <a:pPr algn="l"/>
-          </a:p>
-          <a:p>
-            <a:pPr algn="l"/>
-            <a:r>
-              <a:rPr sz="1100" b="0">
-                <a:solidFill>
-                  <a:srgbClr val="505050"/>
+              <a:t>AWS MSK 도입 효과</a:t>
+            </a:r>
+          </a:p>
+        </p:txBody>
+      </p:sp>
+      <p:sp>
+        <p:nvSpPr>
+          <p:cNvPr id="17" name="TextBox 16"/>
+          <p:cNvSpPr txBox="1"/>
+          <p:nvPr/>
+        </p:nvSpPr>
+        <p:spPr>
+          <a:xfrm>
+            <a:off x="637160" y="3474720"/>
+            <a:ext cx="4484640" cy="2926560"/>
+          </a:xfrm>
+          <a:prstGeom prst="rect">
+            <a:avLst/>
+          </a:prstGeom>
+          <a:noFill/>
+        </p:spPr>
+        <p:txBody>
+          <a:bodyPr wrap="square">
+            <a:spAutoFit/>
+          </a:bodyPr>
+          <a:lstStyle/>
+          <a:p>
+            <a:r>
+              <a:rPr sz="1300" b="0">
+                <a:solidFill>
+                  <a:srgbClr val="212121"/>
                 </a:solidFill>
                 <a:latin typeface="Freesentation"/>
               </a:rPr>
-              <a:t>운영 관리</a:t>
-            </a:r>
-            <a:defRPr sz="1100" b="0"/>
-          </a:p>
-          <a:p>
-            <a:pPr algn="l"/>
-            <a:r>
-              <a:rPr sz="1400" b="1">
-                <a:solidFill>
-                  <a:srgbClr val="0043DA"/>
+              <a:t>• 브로커 패치·업그레이드 전담 인력 2~3명 상시 필요</a:t>
+            </a:r>
+          </a:p>
+          <a:p>
+            <a:r>
+              <a:rPr sz="1300" b="0">
+                <a:solidFill>
+                  <a:srgbClr val="212121"/>
                 </a:solidFill>
                 <a:latin typeface="Freesentation"/>
               </a:rPr>
-              <a:t>AWS 완전 관리형</a:t>
-            </a:r>
-            <a:defRPr sz="1400" b="1"/>
-          </a:p>
-          <a:p>
-            <a:pPr algn="l"/>
-          </a:p>
-          <a:p>
-            <a:pPr algn="l"/>
-            <a:r>
-              <a:rPr sz="1100" b="0">
-                <a:solidFill>
-                  <a:srgbClr val="505050"/>
+              <a:t>• 피크 트래픽 대비 서버 과잉 프로비저닝 — 비용 비효율</a:t>
+            </a:r>
+          </a:p>
+          <a:p>
+            <a:r>
+              <a:rPr sz="1300" b="0">
+                <a:solidFill>
+                  <a:srgbClr val="212121"/>
                 </a:solidFill>
                 <a:latin typeface="Freesentation"/>
               </a:rPr>
-              <a:t>가용성</a:t>
-            </a:r>
-            <a:defRPr sz="1100" b="0"/>
-          </a:p>
-          <a:p>
-            <a:pPr algn="l"/>
-            <a:r>
-              <a:rPr sz="1400" b="1">
-                <a:solidFill>
-                  <a:srgbClr val="0043DA"/>
+              <a:t>• ZooKeeper 의존성으로 운영 복잡도 가중</a:t>
+            </a:r>
+          </a:p>
+          <a:p>
+            <a:r>
+              <a:rPr sz="1300" b="0">
+                <a:solidFill>
+                  <a:srgbClr val="212121"/>
                 </a:solidFill>
                 <a:latin typeface="Freesentation"/>
               </a:rPr>
-              <a:t>99.9% SLA 보장</a:t>
-            </a:r>
-            <a:defRPr sz="1400" b="1"/>
-          </a:p>
-          <a:p>
-            <a:pPr algn="l"/>
-          </a:p>
-          <a:p>
-            <a:pPr algn="l"/>
-            <a:r>
-              <a:rPr sz="1100" b="0">
-                <a:solidFill>
-                  <a:srgbClr val="505050"/>
+              <a:t>• 장애 복구 수동 처리 — MTTR 평균 4시간 이상</a:t>
+            </a:r>
+          </a:p>
+        </p:txBody>
+      </p:sp>
+      <p:sp>
+        <p:nvSpPr>
+          <p:cNvPr id="18" name="TextBox 17"/>
+          <p:cNvSpPr txBox="1"/>
+          <p:nvPr/>
+        </p:nvSpPr>
+        <p:spPr>
+          <a:xfrm>
+            <a:off x="6611040" y="3474720"/>
+            <a:ext cx="4484640" cy="2926560"/>
+          </a:xfrm>
+          <a:prstGeom prst="rect">
+            <a:avLst/>
+          </a:prstGeom>
+          <a:noFill/>
+        </p:spPr>
+        <p:txBody>
+          <a:bodyPr wrap="square">
+            <a:spAutoFit/>
+          </a:bodyPr>
+          <a:lstStyle/>
+          <a:p>
+            <a:r>
+              <a:rPr sz="1300" b="0">
+                <a:solidFill>
+                  <a:srgbClr val="212121"/>
                 </a:solidFill>
                 <a:latin typeface="Freesentation"/>
               </a:rPr>
-              <a:t>확장성</a:t>
-            </a:r>
-            <a:defRPr sz="1100" b="0"/>
-          </a:p>
-          <a:p>
-            <a:pPr algn="l"/>
-            <a:r>
-              <a:rPr sz="1400" b="1">
-                <a:solidFill>
-                  <a:srgbClr val="0043DA"/>
+              <a:t>• AWS 완전 관리형 — 패치·모니터링 자동화</a:t>
+            </a:r>
+          </a:p>
+          <a:p>
+            <a:r>
+              <a:rPr sz="1300" b="0">
+                <a:solidFill>
+                  <a:srgbClr val="212121"/>
                 </a:solidFill>
                 <a:latin typeface="Freesentation"/>
               </a:rPr>
-              <a:t>수분 내 스케일 아웃</a:t>
-            </a:r>
-            <a:defRPr sz="1400" b="1"/>
+              <a:t>• Serverless 옵션으로 수분 내 자동 스케일</a:t>
+            </a:r>
+          </a:p>
+          <a:p>
+            <a:r>
+              <a:rPr sz="1300" b="0">
+                <a:solidFill>
+                  <a:srgbClr val="212121"/>
+                </a:solidFill>
+                <a:latin typeface="Freesentation"/>
+              </a:rPr>
+              <a:t>• KRaft 모드 지원 — ZooKeeper 의존성 제거</a:t>
+            </a:r>
+          </a:p>
+          <a:p>
+            <a:r>
+              <a:rPr sz="1300" b="0">
+                <a:solidFill>
+                  <a:srgbClr val="212121"/>
+                </a:solidFill>
+                <a:latin typeface="Freesentation"/>
+              </a:rPr>
+              <a:t>• Multi-AZ 자동 복구 — MTTR 99% 단축</a:t>
+            </a:r>
           </a:p>
         </p:txBody>
       </p:sp>
       <p:pic>
         <p:nvPicPr>
-          <p:cNvPr id="12" name="Picture 11" descr="server.png"/>
+          <p:cNvPr id="19" name="Picture 18" descr="warning.png"/>
           <p:cNvPicPr>
             <a:picLocks noChangeAspect="1"/>
           </p:cNvPicPr>
@@ -5046,7 +5178,7 @@
         </p:blipFill>
         <p:spPr>
           <a:xfrm>
-            <a:off x="5181904" y="5878677"/>
+            <a:off x="5166720" y="6172200"/>
             <a:ext cx="411480" cy="411480"/>
           </a:xfrm>
           <a:prstGeom prst="rect">
@@ -5056,7 +5188,7 @@
       </p:pic>
       <p:pic>
         <p:nvPicPr>
-          <p:cNvPr id="13" name="Picture 12" descr="cluster.png"/>
+          <p:cNvPr id="20" name="Picture 19" descr="deploy.png"/>
           <p:cNvPicPr>
             <a:picLocks noChangeAspect="1"/>
           </p:cNvPicPr>
@@ -5070,7 +5202,7 @@
         </p:blipFill>
         <p:spPr>
           <a:xfrm>
-            <a:off x="10611612" y="5878677"/>
+            <a:off x="11140800" y="6172200"/>
             <a:ext cx="411480" cy="411480"/>
           </a:xfrm>
           <a:prstGeom prst="rect">
@@ -5087,6 +5219,675 @@
 </file>
 
 <file path=ppt/slides/slide12.xml><?xml version="1.0" encoding="utf-8"?>
+<p:sld xmlns:a="http://schemas.openxmlformats.org/drawingml/2006/main" xmlns:p="http://schemas.openxmlformats.org/presentationml/2006/main" xmlns:r="http://schemas.openxmlformats.org/officeDocument/2006/relationships">
+  <p:cSld>
+    <p:spTree>
+      <p:nvGrpSpPr>
+        <p:cNvPr id="1" name=""/>
+        <p:cNvGrpSpPr/>
+        <p:nvPr/>
+      </p:nvGrpSpPr>
+      <p:grpSpPr/>
+      <p:sp>
+        <p:nvSpPr>
+          <p:cNvPr id="2" name="Text Placeholder 1"/>
+          <p:cNvSpPr>
+            <a:spLocks noGrp="1"/>
+          </p:cNvSpPr>
+          <p:nvPr>
+            <p:ph type="body" idx="10" sz="quarter"/>
+          </p:nvPr>
+        </p:nvSpPr>
+        <p:spPr/>
+        <p:txBody>
+          <a:bodyPr/>
+          <a:lstStyle/>
+          <a:p>
+            <a:r>
+              <a:rPr lang="ko-KR" altLang="en-US" dirty="0" b="1"/>
+              <a:t>1-2. 비용 비교</a:t>
+            </a:r>
+          </a:p>
+        </p:txBody>
+      </p:sp>
+      <p:sp>
+        <p:nvSpPr>
+          <p:cNvPr id="3" name="TextBox 2"/>
+          <p:cNvSpPr txBox="1"/>
+          <p:nvPr/>
+        </p:nvSpPr>
+        <p:spPr>
+          <a:xfrm>
+            <a:off x="435254" y="1524304"/>
+            <a:ext cx="10742371" cy="304495"/>
+          </a:xfrm>
+          <a:prstGeom prst="rect">
+            <a:avLst/>
+          </a:prstGeom>
+          <a:noFill/>
+        </p:spPr>
+        <p:txBody>
+          <a:bodyPr wrap="square">
+            <a:spAutoFit/>
+          </a:bodyPr>
+          <a:lstStyle/>
+          <a:p>
+            <a:pPr algn="l"/>
+            <a:r>
+              <a:rPr sz="1600" b="1">
+                <a:solidFill>
+                  <a:srgbClr val="0043DA"/>
+                </a:solidFill>
+                <a:latin typeface="Freesentation"/>
+              </a:rPr>
+              <a:t>On-Premises Kafka vs AWS MSK — TCO 직접 비교</a:t>
+            </a:r>
+          </a:p>
+        </p:txBody>
+      </p:sp>
+      <p:sp>
+        <p:nvSpPr>
+          <p:cNvPr id="4" name="TextBox 3"/>
+          <p:cNvSpPr txBox="1"/>
+          <p:nvPr/>
+        </p:nvSpPr>
+        <p:spPr>
+          <a:xfrm>
+            <a:off x="435254" y="1872691"/>
+            <a:ext cx="10742371" cy="261518"/>
+          </a:xfrm>
+          <a:prstGeom prst="rect">
+            <a:avLst/>
+          </a:prstGeom>
+          <a:noFill/>
+        </p:spPr>
+        <p:txBody>
+          <a:bodyPr wrap="square">
+            <a:spAutoFit/>
+          </a:bodyPr>
+          <a:lstStyle/>
+          <a:p>
+            <a:pPr algn="l"/>
+            <a:r>
+              <a:rPr sz="1300" b="0">
+                <a:solidFill>
+                  <a:srgbClr val="212121"/>
+                </a:solidFill>
+                <a:latin typeface="Freesentation"/>
+              </a:rPr>
+              <a:t>비용·관리·가용성·확장성 4개 항목 기준 직접 비교 (2026년 4월 기준)</a:t>
+            </a:r>
+          </a:p>
+        </p:txBody>
+      </p:sp>
+      <p:sp>
+        <p:nvSpPr>
+          <p:cNvPr id="5" name="Rounded Rectangle 4"/>
+          <p:cNvSpPr/>
+          <p:nvPr/>
+        </p:nvSpPr>
+        <p:spPr>
+          <a:xfrm>
+            <a:off x="457200" y="2560320"/>
+            <a:ext cx="5577840" cy="4023360"/>
+          </a:xfrm>
+          <a:prstGeom prst="roundRect">
+            <a:avLst/>
+          </a:prstGeom>
+          <a:solidFill>
+            <a:srgbClr val="F8F9FA"/>
+          </a:solidFill>
+          <a:ln w="9525">
+            <a:solidFill>
+              <a:srgbClr val="DCDCDC"/>
+            </a:solidFill>
+          </a:ln>
+        </p:spPr>
+        <p:style>
+          <a:lnRef idx="1">
+            <a:schemeClr val="accent1"/>
+          </a:lnRef>
+          <a:fillRef idx="3">
+            <a:schemeClr val="accent1"/>
+          </a:fillRef>
+          <a:effectRef idx="2">
+            <a:schemeClr val="accent1"/>
+          </a:effectRef>
+          <a:fontRef idx="minor">
+            <a:schemeClr val="lt1"/>
+          </a:fontRef>
+        </p:style>
+        <p:txBody>
+          <a:bodyPr rtlCol="0" anchor="ctr"/>
+          <a:lstStyle/>
+          <a:p>
+            <a:pPr algn="ctr"/>
+          </a:p>
+        </p:txBody>
+      </p:sp>
+      <p:sp>
+        <p:nvSpPr>
+          <p:cNvPr id="6" name="Rounded Rectangle 5"/>
+          <p:cNvSpPr/>
+          <p:nvPr/>
+        </p:nvSpPr>
+        <p:spPr>
+          <a:xfrm>
+            <a:off x="6156960" y="2560320"/>
+            <a:ext cx="5577840" cy="4023360"/>
+          </a:xfrm>
+          <a:prstGeom prst="roundRect">
+            <a:avLst/>
+          </a:prstGeom>
+          <a:solidFill>
+            <a:srgbClr val="E6F0FF"/>
+          </a:solidFill>
+          <a:ln w="9525">
+            <a:solidFill>
+              <a:srgbClr val="DCDCDC"/>
+            </a:solidFill>
+          </a:ln>
+        </p:spPr>
+        <p:style>
+          <a:lnRef idx="1">
+            <a:schemeClr val="accent1"/>
+          </a:lnRef>
+          <a:fillRef idx="3">
+            <a:schemeClr val="accent1"/>
+          </a:fillRef>
+          <a:effectRef idx="2">
+            <a:schemeClr val="accent1"/>
+          </a:effectRef>
+          <a:fontRef idx="minor">
+            <a:schemeClr val="lt1"/>
+          </a:fontRef>
+        </p:style>
+        <p:txBody>
+          <a:bodyPr rtlCol="0" anchor="ctr"/>
+          <a:lstStyle/>
+          <a:p>
+            <a:pPr algn="ctr"/>
+          </a:p>
+        </p:txBody>
+      </p:sp>
+      <p:sp>
+        <p:nvSpPr>
+          <p:cNvPr id="7" name="Rectangle 6"/>
+          <p:cNvSpPr/>
+          <p:nvPr/>
+        </p:nvSpPr>
+        <p:spPr>
+          <a:xfrm>
+            <a:off x="5917680" y="2651760"/>
+            <a:ext cx="9144" cy="3840480"/>
+          </a:xfrm>
+          <a:prstGeom prst="rect">
+            <a:avLst/>
+          </a:prstGeom>
+          <a:solidFill>
+            <a:srgbClr val="DCDCDC"/>
+          </a:solidFill>
+          <a:ln>
+            <a:solidFill>
+              <a:srgbClr val="DCDCDC"/>
+            </a:solidFill>
+          </a:ln>
+        </p:spPr>
+        <p:style>
+          <a:lnRef idx="1">
+            <a:schemeClr val="accent1"/>
+          </a:lnRef>
+          <a:fillRef idx="3">
+            <a:schemeClr val="accent1"/>
+          </a:fillRef>
+          <a:effectRef idx="2">
+            <a:schemeClr val="accent1"/>
+          </a:effectRef>
+          <a:fontRef idx="minor">
+            <a:schemeClr val="lt1"/>
+          </a:fontRef>
+        </p:style>
+        <p:txBody>
+          <a:bodyPr rtlCol="0" anchor="ctr"/>
+          <a:lstStyle/>
+          <a:p>
+            <a:pPr algn="ctr"/>
+          </a:p>
+        </p:txBody>
+      </p:sp>
+      <p:sp>
+        <p:nvSpPr>
+          <p:cNvPr id="8" name="Rounded Rectangle 7"/>
+          <p:cNvSpPr/>
+          <p:nvPr/>
+        </p:nvSpPr>
+        <p:spPr>
+          <a:xfrm>
+            <a:off x="637160" y="2651760"/>
+            <a:ext cx="1554480" cy="274320"/>
+          </a:xfrm>
+          <a:prstGeom prst="roundRect">
+            <a:avLst/>
+          </a:prstGeom>
+          <a:solidFill>
+            <a:srgbClr val="F8F9FA"/>
+          </a:solidFill>
+          <a:ln w="9525">
+            <a:solidFill>
+              <a:srgbClr val="DCDCDC"/>
+            </a:solidFill>
+          </a:ln>
+        </p:spPr>
+        <p:style>
+          <a:lnRef idx="1">
+            <a:schemeClr val="accent1"/>
+          </a:lnRef>
+          <a:fillRef idx="3">
+            <a:schemeClr val="accent1"/>
+          </a:fillRef>
+          <a:effectRef idx="2">
+            <a:schemeClr val="accent1"/>
+          </a:effectRef>
+          <a:fontRef idx="minor">
+            <a:schemeClr val="lt1"/>
+          </a:fontRef>
+        </p:style>
+        <p:txBody>
+          <a:bodyPr rtlCol="0" anchor="ctr"/>
+          <a:lstStyle/>
+          <a:p>
+            <a:r>
+              <a:rPr sz="1300">
+                <a:solidFill>
+                  <a:srgbClr val="212121"/>
+                </a:solidFill>
+              </a:rPr>
+              <a:t>On-Premises</a:t>
+            </a:r>
+          </a:p>
+        </p:txBody>
+      </p:sp>
+      <p:sp>
+        <p:nvSpPr>
+          <p:cNvPr id="9" name="Rounded Rectangle 8"/>
+          <p:cNvSpPr/>
+          <p:nvPr/>
+        </p:nvSpPr>
+        <p:spPr>
+          <a:xfrm>
+            <a:off x="6337720" y="2651760"/>
+            <a:ext cx="1554480" cy="274320"/>
+          </a:xfrm>
+          <a:prstGeom prst="roundRect">
+            <a:avLst/>
+          </a:prstGeom>
+          <a:solidFill>
+            <a:srgbClr val="0043DA"/>
+          </a:solidFill>
+          <a:ln>
+            <a:solidFill>
+              <a:srgbClr val="0043DA"/>
+            </a:solidFill>
+          </a:ln>
+        </p:spPr>
+        <p:style>
+          <a:lnRef idx="1">
+            <a:schemeClr val="accent1"/>
+          </a:lnRef>
+          <a:fillRef idx="3">
+            <a:schemeClr val="accent1"/>
+          </a:fillRef>
+          <a:effectRef idx="2">
+            <a:schemeClr val="accent1"/>
+          </a:effectRef>
+          <a:fontRef idx="minor">
+            <a:schemeClr val="lt1"/>
+          </a:fontRef>
+        </p:style>
+        <p:txBody>
+          <a:bodyPr rtlCol="0" anchor="ctr"/>
+          <a:lstStyle/>
+          <a:p>
+            <a:r>
+              <a:rPr sz="1300">
+                <a:solidFill>
+                  <a:srgbClr val="FFFFFF"/>
+                </a:solidFill>
+              </a:rPr>
+              <a:t>✓ AWS MSK</a:t>
+            </a:r>
+          </a:p>
+        </p:txBody>
+      </p:sp>
+      <p:sp>
+        <p:nvSpPr>
+          <p:cNvPr id="10" name="TextBox 9"/>
+          <p:cNvSpPr txBox="1"/>
+          <p:nvPr/>
+        </p:nvSpPr>
+        <p:spPr>
+          <a:xfrm>
+            <a:off x="607161" y="2873959"/>
+            <a:ext cx="4967020" cy="3136392"/>
+          </a:xfrm>
+          <a:prstGeom prst="rect">
+            <a:avLst/>
+          </a:prstGeom>
+          <a:noFill/>
+        </p:spPr>
+        <p:txBody>
+          <a:bodyPr wrap="square">
+            <a:spAutoFit/>
+          </a:bodyPr>
+          <a:lstStyle/>
+          <a:p>
+            <a:pPr algn="l"/>
+            <a:r>
+              <a:rPr sz="1100" b="0">
+                <a:solidFill>
+                  <a:srgbClr val="505050"/>
+                </a:solidFill>
+                <a:latin typeface="Freesentation"/>
+              </a:rPr>
+              <a:t>초기 비용</a:t>
+            </a:r>
+            <a:defRPr sz="1100" b="0"/>
+          </a:p>
+          <a:p>
+            <a:pPr algn="l"/>
+            <a:r>
+              <a:rPr sz="1400" b="1">
+                <a:solidFill>
+                  <a:srgbClr val="212121"/>
+                </a:solidFill>
+                <a:latin typeface="Freesentation"/>
+              </a:rPr>
+              <a:t>서버 구매 ₩5억+</a:t>
+            </a:r>
+            <a:defRPr sz="1400" b="1"/>
+          </a:p>
+          <a:p>
+            <a:pPr algn="l"/>
+          </a:p>
+          <a:p>
+            <a:pPr algn="l"/>
+            <a:r>
+              <a:rPr sz="1100" b="0">
+                <a:solidFill>
+                  <a:srgbClr val="505050"/>
+                </a:solidFill>
+                <a:latin typeface="Freesentation"/>
+              </a:rPr>
+              <a:t>운영 관리</a:t>
+            </a:r>
+            <a:defRPr sz="1100" b="0"/>
+          </a:p>
+          <a:p>
+            <a:pPr algn="l"/>
+            <a:r>
+              <a:rPr sz="1400" b="1">
+                <a:solidFill>
+                  <a:srgbClr val="212121"/>
+                </a:solidFill>
+                <a:latin typeface="Freesentation"/>
+              </a:rPr>
+              <a:t>전담 인력 2~3명 필요</a:t>
+            </a:r>
+            <a:defRPr sz="1400" b="1"/>
+          </a:p>
+          <a:p>
+            <a:pPr algn="l"/>
+          </a:p>
+          <a:p>
+            <a:pPr algn="l"/>
+            <a:r>
+              <a:rPr sz="1100" b="0">
+                <a:solidFill>
+                  <a:srgbClr val="505050"/>
+                </a:solidFill>
+                <a:latin typeface="Freesentation"/>
+              </a:rPr>
+              <a:t>가용성</a:t>
+            </a:r>
+            <a:defRPr sz="1100" b="0"/>
+          </a:p>
+          <a:p>
+            <a:pPr algn="l"/>
+            <a:r>
+              <a:rPr sz="1400" b="1">
+                <a:solidFill>
+                  <a:srgbClr val="212121"/>
+                </a:solidFill>
+                <a:latin typeface="Freesentation"/>
+              </a:rPr>
+              <a:t>자체 HA 구성 필요</a:t>
+            </a:r>
+            <a:defRPr sz="1400" b="1"/>
+          </a:p>
+          <a:p>
+            <a:pPr algn="l"/>
+          </a:p>
+          <a:p>
+            <a:pPr algn="l"/>
+            <a:r>
+              <a:rPr sz="1100" b="0">
+                <a:solidFill>
+                  <a:srgbClr val="505050"/>
+                </a:solidFill>
+                <a:latin typeface="Freesentation"/>
+              </a:rPr>
+              <a:t>확장성</a:t>
+            </a:r>
+            <a:defRPr sz="1100" b="0"/>
+          </a:p>
+          <a:p>
+            <a:pPr algn="l"/>
+            <a:r>
+              <a:rPr sz="1400" b="1">
+                <a:solidFill>
+                  <a:srgbClr val="212121"/>
+                </a:solidFill>
+                <a:latin typeface="Freesentation"/>
+              </a:rPr>
+              <a:t>용량 증설에 수 주 소요</a:t>
+            </a:r>
+            <a:defRPr sz="1400" b="1"/>
+          </a:p>
+        </p:txBody>
+      </p:sp>
+      <p:sp>
+        <p:nvSpPr>
+          <p:cNvPr id="11" name="TextBox 10"/>
+          <p:cNvSpPr txBox="1"/>
+          <p:nvPr/>
+        </p:nvSpPr>
+        <p:spPr>
+          <a:xfrm>
+            <a:off x="6035954" y="2873959"/>
+            <a:ext cx="4967020" cy="3136392"/>
+          </a:xfrm>
+          <a:prstGeom prst="rect">
+            <a:avLst/>
+          </a:prstGeom>
+          <a:noFill/>
+        </p:spPr>
+        <p:txBody>
+          <a:bodyPr wrap="square">
+            <a:spAutoFit/>
+          </a:bodyPr>
+          <a:lstStyle/>
+          <a:p>
+            <a:pPr algn="l"/>
+            <a:r>
+              <a:rPr sz="1100" b="0">
+                <a:solidFill>
+                  <a:srgbClr val="505050"/>
+                </a:solidFill>
+                <a:latin typeface="Freesentation"/>
+              </a:rPr>
+              <a:t>초기 비용</a:t>
+            </a:r>
+            <a:defRPr sz="1100" b="0"/>
+          </a:p>
+          <a:p>
+            <a:pPr algn="l"/>
+            <a:r>
+              <a:rPr sz="1400" b="1">
+                <a:solidFill>
+                  <a:srgbClr val="0043DA"/>
+                </a:solidFill>
+                <a:latin typeface="Freesentation"/>
+              </a:rPr>
+              <a:t>초기 투자 0원</a:t>
+            </a:r>
+            <a:defRPr sz="1400" b="1"/>
+          </a:p>
+          <a:p>
+            <a:pPr algn="l"/>
+          </a:p>
+          <a:p>
+            <a:pPr algn="l"/>
+            <a:r>
+              <a:rPr sz="1100" b="0">
+                <a:solidFill>
+                  <a:srgbClr val="505050"/>
+                </a:solidFill>
+                <a:latin typeface="Freesentation"/>
+              </a:rPr>
+              <a:t>운영 관리</a:t>
+            </a:r>
+            <a:defRPr sz="1100" b="0"/>
+          </a:p>
+          <a:p>
+            <a:pPr algn="l"/>
+            <a:r>
+              <a:rPr sz="1400" b="1">
+                <a:solidFill>
+                  <a:srgbClr val="0043DA"/>
+                </a:solidFill>
+                <a:latin typeface="Freesentation"/>
+              </a:rPr>
+              <a:t>AWS 완전 관리형</a:t>
+            </a:r>
+            <a:defRPr sz="1400" b="1"/>
+          </a:p>
+          <a:p>
+            <a:pPr algn="l"/>
+          </a:p>
+          <a:p>
+            <a:pPr algn="l"/>
+            <a:r>
+              <a:rPr sz="1100" b="0">
+                <a:solidFill>
+                  <a:srgbClr val="505050"/>
+                </a:solidFill>
+                <a:latin typeface="Freesentation"/>
+              </a:rPr>
+              <a:t>가용성</a:t>
+            </a:r>
+            <a:defRPr sz="1100" b="0"/>
+          </a:p>
+          <a:p>
+            <a:pPr algn="l"/>
+            <a:r>
+              <a:rPr sz="1400" b="1">
+                <a:solidFill>
+                  <a:srgbClr val="0043DA"/>
+                </a:solidFill>
+                <a:latin typeface="Freesentation"/>
+              </a:rPr>
+              <a:t>99.9% SLA 보장</a:t>
+            </a:r>
+            <a:defRPr sz="1400" b="1"/>
+          </a:p>
+          <a:p>
+            <a:pPr algn="l"/>
+          </a:p>
+          <a:p>
+            <a:pPr algn="l"/>
+            <a:r>
+              <a:rPr sz="1100" b="0">
+                <a:solidFill>
+                  <a:srgbClr val="505050"/>
+                </a:solidFill>
+                <a:latin typeface="Freesentation"/>
+              </a:rPr>
+              <a:t>확장성</a:t>
+            </a:r>
+            <a:defRPr sz="1100" b="0"/>
+          </a:p>
+          <a:p>
+            <a:pPr algn="l"/>
+            <a:r>
+              <a:rPr sz="1400" b="1">
+                <a:solidFill>
+                  <a:srgbClr val="0043DA"/>
+                </a:solidFill>
+                <a:latin typeface="Freesentation"/>
+              </a:rPr>
+              <a:t>수분 내 스케일 아웃</a:t>
+            </a:r>
+            <a:defRPr sz="1400" b="1"/>
+          </a:p>
+        </p:txBody>
+      </p:sp>
+      <p:pic>
+        <p:nvPicPr>
+          <p:cNvPr id="12" name="Picture 11" descr="server.png"/>
+          <p:cNvPicPr>
+            <a:picLocks noChangeAspect="1"/>
+          </p:cNvPicPr>
+          <p:nvPr/>
+        </p:nvPicPr>
+        <p:blipFill>
+          <a:blip r:embed="rId2"/>
+          <a:stretch>
+            <a:fillRect/>
+          </a:stretch>
+        </p:blipFill>
+        <p:spPr>
+          <a:xfrm>
+            <a:off x="5181904" y="5878677"/>
+            <a:ext cx="411480" cy="411480"/>
+          </a:xfrm>
+          <a:prstGeom prst="rect">
+            <a:avLst/>
+          </a:prstGeom>
+        </p:spPr>
+      </p:pic>
+      <p:pic>
+        <p:nvPicPr>
+          <p:cNvPr id="13" name="Picture 12" descr="cluster.png"/>
+          <p:cNvPicPr>
+            <a:picLocks noChangeAspect="1"/>
+          </p:cNvPicPr>
+          <p:nvPr/>
+        </p:nvPicPr>
+        <p:blipFill>
+          <a:blip r:embed="rId3"/>
+          <a:stretch>
+            <a:fillRect/>
+          </a:stretch>
+        </p:blipFill>
+        <p:spPr>
+          <a:xfrm>
+            <a:off x="10611612" y="5878677"/>
+            <a:ext cx="411480" cy="411480"/>
+          </a:xfrm>
+          <a:prstGeom prst="rect">
+            <a:avLst/>
+          </a:prstGeom>
+        </p:spPr>
+      </p:pic>
+    </p:spTree>
+  </p:cSld>
+  <p:clrMapOvr>
+    <a:masterClrMapping/>
+  </p:clrMapOvr>
+</p:sld>
+</file>
+
+<file path=ppt/slides/slide13.xml><?xml version="1.0" encoding="utf-8"?>
 <p:sld xmlns:a="http://schemas.openxmlformats.org/drawingml/2006/main" xmlns:r="http://schemas.openxmlformats.org/officeDocument/2006/relationships" xmlns:p="http://schemas.openxmlformats.org/presentationml/2006/main">
   <p:cSld>
     <p:spTree>
@@ -5522,1338 +6323,6 @@
         <p14:creationId xmlns:p14="http://schemas.microsoft.com/office/powerpoint/2010/main" val="3722360403"/>
       </p:ext>
     </p:extLst>
-  </p:cSld>
-  <p:clrMapOvr>
-    <a:masterClrMapping/>
-  </p:clrMapOvr>
-</p:sld>
-</file>
-
-<file path=ppt/slides/slide13.xml><?xml version="1.0" encoding="utf-8"?>
-<p:sld xmlns:a="http://schemas.openxmlformats.org/drawingml/2006/main" xmlns:p="http://schemas.openxmlformats.org/presentationml/2006/main" xmlns:r="http://schemas.openxmlformats.org/officeDocument/2006/relationships">
-  <p:cSld>
-    <p:spTree>
-      <p:nvGrpSpPr>
-        <p:cNvPr id="1" name=""/>
-        <p:cNvGrpSpPr/>
-        <p:nvPr/>
-      </p:nvGrpSpPr>
-      <p:grpSpPr/>
-      <p:sp>
-        <p:nvSpPr>
-          <p:cNvPr id="2" name="Title 1"/>
-          <p:cNvSpPr>
-            <a:spLocks noGrp="1"/>
-          </p:cNvSpPr>
-          <p:nvPr>
-            <p:ph type="ctrTitle"/>
-          </p:nvPr>
-        </p:nvSpPr>
-        <p:spPr/>
-        <p:txBody>
-          <a:bodyPr/>
-          <a:lstStyle/>
-          <a:p>
-            <a:r>
-              <a:t>L06 Zigzag Timeline</a:t>
-            </a:r>
-          </a:p>
-        </p:txBody>
-      </p:sp>
-      <p:sp>
-        <p:nvSpPr>
-          <p:cNvPr id="3" name="Subtitle 2"/>
-          <p:cNvSpPr>
-            <a:spLocks noGrp="1"/>
-          </p:cNvSpPr>
-          <p:nvPr>
-            <p:ph type="subTitle" idx="1"/>
-          </p:nvPr>
-        </p:nvSpPr>
-        <p:spPr/>
-        <p:txBody>
-          <a:bodyPr/>
-          <a:lstStyle/>
-          <a:p/>
-        </p:txBody>
-      </p:sp>
-      <p:sp>
-        <p:nvSpPr>
-          <p:cNvPr id="4" name="TextBox 3"/>
-          <p:cNvSpPr txBox="1"/>
-          <p:nvPr/>
-        </p:nvSpPr>
-        <p:spPr>
-          <a:xfrm>
-            <a:off x="354787" y="557784"/>
-            <a:ext cx="2720340" cy="932688"/>
-          </a:xfrm>
-          <a:prstGeom prst="rect">
-            <a:avLst/>
-          </a:prstGeom>
-          <a:noFill/>
-        </p:spPr>
-        <p:txBody>
-          <a:bodyPr wrap="square">
-            <a:spAutoFit/>
-          </a:bodyPr>
-          <a:lstStyle/>
-          <a:p>
-            <a:r>
-              <a:rPr sz="2000" b="1">
-                <a:solidFill>
-                  <a:srgbClr val="000000"/>
-                </a:solidFill>
-                <a:latin typeface="Freesentation 7 Bold"/>
-              </a:rPr>
-              <a:t>L06. Zigzag Timeline</a:t>
-            </a:r>
-          </a:p>
-        </p:txBody>
-      </p:sp>
-      <p:sp>
-        <p:nvSpPr>
-          <p:cNvPr id="5" name="TextBox 4"/>
-          <p:cNvSpPr txBox="1"/>
-          <p:nvPr/>
-        </p:nvSpPr>
-        <p:spPr>
-          <a:xfrm>
-            <a:off x="3762756" y="558698"/>
-            <a:ext cx="7550200" cy="938174"/>
-          </a:xfrm>
-          <a:prstGeom prst="rect">
-            <a:avLst/>
-          </a:prstGeom>
-          <a:noFill/>
-        </p:spPr>
-        <p:txBody>
-          <a:bodyPr wrap="square">
-            <a:spAutoFit/>
-          </a:bodyPr>
-          <a:lstStyle/>
-          <a:p>
-            <a:r>
-              <a:rPr sz="1200">
-                <a:solidFill>
-                  <a:srgbClr val="4A4A4A"/>
-                </a:solidFill>
-                <a:latin typeface="Freesentation 5 Medium"/>
-              </a:rPr>
-              <a:t>S자 지그재그 타임라인 — 시간 흐름 시각화</a:t>
-            </a:r>
-          </a:p>
-        </p:txBody>
-      </p:sp>
-      <p:sp>
-        <p:nvSpPr>
-          <p:cNvPr id="6" name="Rectangle 5"/>
-          <p:cNvSpPr/>
-          <p:nvPr/>
-        </p:nvSpPr>
-        <p:spPr>
-          <a:xfrm>
-            <a:off x="355701" y="1496872"/>
-            <a:ext cx="11481206" cy="9144"/>
-          </a:xfrm>
-          <a:prstGeom prst="rect">
-            <a:avLst/>
-          </a:prstGeom>
-          <a:solidFill>
-            <a:srgbClr val="DCDCDC"/>
-          </a:solidFill>
-          <a:ln>
-            <a:solidFill>
-              <a:srgbClr val="DCDCDC"/>
-            </a:solidFill>
-          </a:ln>
-        </p:spPr>
-        <p:style>
-          <a:lnRef idx="1">
-            <a:schemeClr val="accent1"/>
-          </a:lnRef>
-          <a:fillRef idx="3">
-            <a:schemeClr val="accent1"/>
-          </a:fillRef>
-          <a:effectRef idx="2">
-            <a:schemeClr val="accent1"/>
-          </a:effectRef>
-          <a:fontRef idx="minor">
-            <a:schemeClr val="lt1"/>
-          </a:fontRef>
-        </p:style>
-        <p:txBody>
-          <a:bodyPr rtlCol="0" anchor="ctr"/>
-          <a:lstStyle/>
-          <a:p>
-            <a:pPr algn="ctr"/>
-          </a:p>
-        </p:txBody>
-      </p:sp>
-      <p:sp>
-        <p:nvSpPr>
-          <p:cNvPr id="7" name="TextBox 6"/>
-          <p:cNvSpPr txBox="1"/>
-          <p:nvPr/>
-        </p:nvSpPr>
-        <p:spPr>
-          <a:xfrm>
-            <a:off x="457200" y="1600200"/>
-            <a:ext cx="11277295" cy="320040"/>
-          </a:xfrm>
-          <a:prstGeom prst="rect">
-            <a:avLst/>
-          </a:prstGeom>
-          <a:noFill/>
-        </p:spPr>
-        <p:txBody>
-          <a:bodyPr wrap="square">
-            <a:spAutoFit/>
-          </a:bodyPr>
-          <a:lstStyle/>
-          <a:p>
-            <a:r>
-              <a:rPr sz="1600" b="0">
-                <a:solidFill>
-                  <a:srgbClr val="0043DA"/>
-                </a:solidFill>
-                <a:latin typeface="Freesentation"/>
-              </a:rPr>
-              <a:t>온프레미스 Kafka → AWS MSK 전환 로드맵</a:t>
-            </a:r>
-          </a:p>
-        </p:txBody>
-      </p:sp>
-      <p:sp>
-        <p:nvSpPr>
-          <p:cNvPr id="8" name="TextBox 7"/>
-          <p:cNvSpPr txBox="1"/>
-          <p:nvPr/>
-        </p:nvSpPr>
-        <p:spPr>
-          <a:xfrm>
-            <a:off x="457200" y="1965960"/>
-            <a:ext cx="11277295" cy="274320"/>
-          </a:xfrm>
-          <a:prstGeom prst="rect">
-            <a:avLst/>
-          </a:prstGeom>
-          <a:noFill/>
-        </p:spPr>
-        <p:txBody>
-          <a:bodyPr wrap="square">
-            <a:spAutoFit/>
-          </a:bodyPr>
-          <a:lstStyle/>
-          <a:p>
-            <a:r>
-              <a:rPr sz="1300">
-                <a:solidFill>
-                  <a:srgbClr val="4A4A4A"/>
-                </a:solidFill>
-                <a:latin typeface="Freesentation"/>
-              </a:rPr>
-              <a:t>현황 분석부터 안정화까지 5분기 전환 타임라인</a:t>
-            </a:r>
-          </a:p>
-        </p:txBody>
-      </p:sp>
-      <p:sp>
-        <p:nvSpPr>
-          <p:cNvPr id="9" name="Rectangle 8"/>
-          <p:cNvSpPr/>
-          <p:nvPr/>
-        </p:nvSpPr>
-        <p:spPr>
-          <a:xfrm>
-            <a:off x="457200" y="4114800"/>
-            <a:ext cx="11277295" cy="36576"/>
-          </a:xfrm>
-          <a:prstGeom prst="rect">
-            <a:avLst/>
-          </a:prstGeom>
-          <a:solidFill>
-            <a:srgbClr val="0043DA"/>
-          </a:solidFill>
-          <a:ln>
-            <a:solidFill>
-              <a:srgbClr val="0043DA"/>
-            </a:solidFill>
-          </a:ln>
-        </p:spPr>
-        <p:style>
-          <a:lnRef idx="1">
-            <a:schemeClr val="accent1"/>
-          </a:lnRef>
-          <a:fillRef idx="3">
-            <a:schemeClr val="accent1"/>
-          </a:fillRef>
-          <a:effectRef idx="2">
-            <a:schemeClr val="accent1"/>
-          </a:effectRef>
-          <a:fontRef idx="minor">
-            <a:schemeClr val="lt1"/>
-          </a:fontRef>
-        </p:style>
-        <p:txBody>
-          <a:bodyPr rtlCol="0" anchor="ctr"/>
-          <a:lstStyle/>
-          <a:p>
-            <a:pPr algn="ctr"/>
-          </a:p>
-        </p:txBody>
-      </p:sp>
-      <p:sp>
-        <p:nvSpPr>
-          <p:cNvPr id="10" name="Rectangle 9"/>
-          <p:cNvSpPr/>
-          <p:nvPr/>
-        </p:nvSpPr>
-        <p:spPr>
-          <a:xfrm>
-            <a:off x="15544" y="2286000"/>
-            <a:ext cx="2011680" cy="1645920"/>
-          </a:xfrm>
-          <a:prstGeom prst="rect">
-            <a:avLst/>
-          </a:prstGeom>
-          <a:solidFill>
-            <a:srgbClr val="F8F9FA"/>
-          </a:solidFill>
-          <a:ln>
-            <a:solidFill>
-              <a:srgbClr val="DCDCDC"/>
-            </a:solidFill>
-          </a:ln>
-        </p:spPr>
-        <p:style>
-          <a:lnRef idx="1">
-            <a:schemeClr val="accent1"/>
-          </a:lnRef>
-          <a:fillRef idx="3">
-            <a:schemeClr val="accent1"/>
-          </a:fillRef>
-          <a:effectRef idx="2">
-            <a:schemeClr val="accent1"/>
-          </a:effectRef>
-          <a:fontRef idx="minor">
-            <a:schemeClr val="lt1"/>
-          </a:fontRef>
-        </p:style>
-        <p:txBody>
-          <a:bodyPr rtlCol="0" anchor="ctr"/>
-          <a:lstStyle/>
-          <a:p>
-            <a:pPr algn="ctr"/>
-          </a:p>
-        </p:txBody>
-      </p:sp>
-      <p:sp>
-        <p:nvSpPr>
-          <p:cNvPr id="11" name="Rectangle 10"/>
-          <p:cNvSpPr/>
-          <p:nvPr/>
-        </p:nvSpPr>
-        <p:spPr>
-          <a:xfrm>
-            <a:off x="2270455" y="4297680"/>
-            <a:ext cx="2011680" cy="1645920"/>
-          </a:xfrm>
-          <a:prstGeom prst="rect">
-            <a:avLst/>
-          </a:prstGeom>
-          <a:solidFill>
-            <a:srgbClr val="F8F9FA"/>
-          </a:solidFill>
-          <a:ln>
-            <a:solidFill>
-              <a:srgbClr val="DCDCDC"/>
-            </a:solidFill>
-          </a:ln>
-        </p:spPr>
-        <p:style>
-          <a:lnRef idx="1">
-            <a:schemeClr val="accent1"/>
-          </a:lnRef>
-          <a:fillRef idx="3">
-            <a:schemeClr val="accent1"/>
-          </a:fillRef>
-          <a:effectRef idx="2">
-            <a:schemeClr val="accent1"/>
-          </a:effectRef>
-          <a:fontRef idx="minor">
-            <a:schemeClr val="lt1"/>
-          </a:fontRef>
-        </p:style>
-        <p:txBody>
-          <a:bodyPr rtlCol="0" anchor="ctr"/>
-          <a:lstStyle/>
-          <a:p>
-            <a:pPr algn="ctr"/>
-          </a:p>
-        </p:txBody>
-      </p:sp>
-      <p:sp>
-        <p:nvSpPr>
-          <p:cNvPr id="12" name="Rectangle 11"/>
-          <p:cNvSpPr/>
-          <p:nvPr/>
-        </p:nvSpPr>
-        <p:spPr>
-          <a:xfrm>
-            <a:off x="4526280" y="2286000"/>
-            <a:ext cx="2011680" cy="1645920"/>
-          </a:xfrm>
-          <a:prstGeom prst="rect">
-            <a:avLst/>
-          </a:prstGeom>
-          <a:solidFill>
-            <a:srgbClr val="F8F9FA"/>
-          </a:solidFill>
-          <a:ln>
-            <a:solidFill>
-              <a:srgbClr val="DCDCDC"/>
-            </a:solidFill>
-          </a:ln>
-        </p:spPr>
-        <p:style>
-          <a:lnRef idx="1">
-            <a:schemeClr val="accent1"/>
-          </a:lnRef>
-          <a:fillRef idx="3">
-            <a:schemeClr val="accent1"/>
-          </a:fillRef>
-          <a:effectRef idx="2">
-            <a:schemeClr val="accent1"/>
-          </a:effectRef>
-          <a:fontRef idx="minor">
-            <a:schemeClr val="lt1"/>
-          </a:fontRef>
-        </p:style>
-        <p:txBody>
-          <a:bodyPr rtlCol="0" anchor="ctr"/>
-          <a:lstStyle/>
-          <a:p>
-            <a:pPr algn="ctr"/>
-          </a:p>
-        </p:txBody>
-      </p:sp>
-      <p:sp>
-        <p:nvSpPr>
-          <p:cNvPr id="13" name="Rectangle 12"/>
-          <p:cNvSpPr/>
-          <p:nvPr/>
-        </p:nvSpPr>
-        <p:spPr>
-          <a:xfrm>
-            <a:off x="6782104" y="4297680"/>
-            <a:ext cx="2011680" cy="1645920"/>
-          </a:xfrm>
-          <a:prstGeom prst="rect">
-            <a:avLst/>
-          </a:prstGeom>
-          <a:solidFill>
-            <a:srgbClr val="F8F9FA"/>
-          </a:solidFill>
-          <a:ln>
-            <a:solidFill>
-              <a:srgbClr val="DCDCDC"/>
-            </a:solidFill>
-          </a:ln>
-        </p:spPr>
-        <p:style>
-          <a:lnRef idx="1">
-            <a:schemeClr val="accent1"/>
-          </a:lnRef>
-          <a:fillRef idx="3">
-            <a:schemeClr val="accent1"/>
-          </a:fillRef>
-          <a:effectRef idx="2">
-            <a:schemeClr val="accent1"/>
-          </a:effectRef>
-          <a:fontRef idx="minor">
-            <a:schemeClr val="lt1"/>
-          </a:fontRef>
-        </p:style>
-        <p:txBody>
-          <a:bodyPr rtlCol="0" anchor="ctr"/>
-          <a:lstStyle/>
-          <a:p>
-            <a:pPr algn="ctr"/>
-          </a:p>
-        </p:txBody>
-      </p:sp>
-      <p:sp>
-        <p:nvSpPr>
-          <p:cNvPr id="14" name="Rectangle 13"/>
-          <p:cNvSpPr/>
-          <p:nvPr/>
-        </p:nvSpPr>
-        <p:spPr>
-          <a:xfrm>
-            <a:off x="9037015" y="2286000"/>
-            <a:ext cx="2011680" cy="1645920"/>
-          </a:xfrm>
-          <a:prstGeom prst="rect">
-            <a:avLst/>
-          </a:prstGeom>
-          <a:solidFill>
-            <a:srgbClr val="F8F9FA"/>
-          </a:solidFill>
-          <a:ln>
-            <a:solidFill>
-              <a:srgbClr val="DCDCDC"/>
-            </a:solidFill>
-          </a:ln>
-        </p:spPr>
-        <p:style>
-          <a:lnRef idx="1">
-            <a:schemeClr val="accent1"/>
-          </a:lnRef>
-          <a:fillRef idx="3">
-            <a:schemeClr val="accent1"/>
-          </a:fillRef>
-          <a:effectRef idx="2">
-            <a:schemeClr val="accent1"/>
-          </a:effectRef>
-          <a:fontRef idx="minor">
-            <a:schemeClr val="lt1"/>
-          </a:fontRef>
-        </p:style>
-        <p:txBody>
-          <a:bodyPr rtlCol="0" anchor="ctr"/>
-          <a:lstStyle/>
-          <a:p>
-            <a:pPr algn="ctr"/>
-          </a:p>
-        </p:txBody>
-      </p:sp>
-      <p:sp>
-        <p:nvSpPr>
-          <p:cNvPr id="15" name="Oval 14"/>
-          <p:cNvSpPr/>
-          <p:nvPr/>
-        </p:nvSpPr>
-        <p:spPr>
-          <a:xfrm>
-            <a:off x="929944" y="4023360"/>
-            <a:ext cx="182880" cy="182880"/>
-          </a:xfrm>
-          <a:prstGeom prst="ellipse">
-            <a:avLst/>
-          </a:prstGeom>
-          <a:solidFill>
-            <a:srgbClr val="0043DA"/>
-          </a:solidFill>
-          <a:ln/>
-        </p:spPr>
-        <p:style>
-          <a:lnRef idx="1">
-            <a:schemeClr val="accent1"/>
-          </a:lnRef>
-          <a:fillRef idx="3">
-            <a:schemeClr val="accent1"/>
-          </a:fillRef>
-          <a:effectRef idx="2">
-            <a:schemeClr val="accent1"/>
-          </a:effectRef>
-          <a:fontRef idx="minor">
-            <a:schemeClr val="lt1"/>
-          </a:fontRef>
-        </p:style>
-        <p:txBody>
-          <a:bodyPr rtlCol="0" anchor="ctr"/>
-          <a:lstStyle/>
-          <a:p>
-            <a:pPr algn="ctr"/>
-          </a:p>
-        </p:txBody>
-      </p:sp>
-      <p:sp>
-        <p:nvSpPr>
-          <p:cNvPr id="16" name="Oval 15"/>
-          <p:cNvSpPr/>
-          <p:nvPr/>
-        </p:nvSpPr>
-        <p:spPr>
-          <a:xfrm>
-            <a:off x="3184855" y="4023360"/>
-            <a:ext cx="182880" cy="182880"/>
-          </a:xfrm>
-          <a:prstGeom prst="ellipse">
-            <a:avLst/>
-          </a:prstGeom>
-          <a:solidFill>
-            <a:srgbClr val="0043DA"/>
-          </a:solidFill>
-          <a:ln/>
-        </p:spPr>
-        <p:style>
-          <a:lnRef idx="1">
-            <a:schemeClr val="accent1"/>
-          </a:lnRef>
-          <a:fillRef idx="3">
-            <a:schemeClr val="accent1"/>
-          </a:fillRef>
-          <a:effectRef idx="2">
-            <a:schemeClr val="accent1"/>
-          </a:effectRef>
-          <a:fontRef idx="minor">
-            <a:schemeClr val="lt1"/>
-          </a:fontRef>
-        </p:style>
-        <p:txBody>
-          <a:bodyPr rtlCol="0" anchor="ctr"/>
-          <a:lstStyle/>
-          <a:p>
-            <a:pPr algn="ctr"/>
-          </a:p>
-        </p:txBody>
-      </p:sp>
-      <p:sp>
-        <p:nvSpPr>
-          <p:cNvPr id="17" name="Oval 16"/>
-          <p:cNvSpPr/>
-          <p:nvPr/>
-        </p:nvSpPr>
-        <p:spPr>
-          <a:xfrm>
-            <a:off x="5440680" y="4023360"/>
-            <a:ext cx="182880" cy="182880"/>
-          </a:xfrm>
-          <a:prstGeom prst="ellipse">
-            <a:avLst/>
-          </a:prstGeom>
-          <a:solidFill>
-            <a:srgbClr val="0043DA"/>
-          </a:solidFill>
-          <a:ln/>
-        </p:spPr>
-        <p:style>
-          <a:lnRef idx="1">
-            <a:schemeClr val="accent1"/>
-          </a:lnRef>
-          <a:fillRef idx="3">
-            <a:schemeClr val="accent1"/>
-          </a:fillRef>
-          <a:effectRef idx="2">
-            <a:schemeClr val="accent1"/>
-          </a:effectRef>
-          <a:fontRef idx="minor">
-            <a:schemeClr val="lt1"/>
-          </a:fontRef>
-        </p:style>
-        <p:txBody>
-          <a:bodyPr rtlCol="0" anchor="ctr"/>
-          <a:lstStyle/>
-          <a:p>
-            <a:pPr algn="ctr"/>
-          </a:p>
-        </p:txBody>
-      </p:sp>
-      <p:sp>
-        <p:nvSpPr>
-          <p:cNvPr id="18" name="Oval 17"/>
-          <p:cNvSpPr/>
-          <p:nvPr/>
-        </p:nvSpPr>
-        <p:spPr>
-          <a:xfrm>
-            <a:off x="7696504" y="4023360"/>
-            <a:ext cx="182880" cy="182880"/>
-          </a:xfrm>
-          <a:prstGeom prst="ellipse">
-            <a:avLst/>
-          </a:prstGeom>
-          <a:solidFill>
-            <a:srgbClr val="0043DA"/>
-          </a:solidFill>
-          <a:ln/>
-        </p:spPr>
-        <p:style>
-          <a:lnRef idx="1">
-            <a:schemeClr val="accent1"/>
-          </a:lnRef>
-          <a:fillRef idx="3">
-            <a:schemeClr val="accent1"/>
-          </a:fillRef>
-          <a:effectRef idx="2">
-            <a:schemeClr val="accent1"/>
-          </a:effectRef>
-          <a:fontRef idx="minor">
-            <a:schemeClr val="lt1"/>
-          </a:fontRef>
-        </p:style>
-        <p:txBody>
-          <a:bodyPr rtlCol="0" anchor="ctr"/>
-          <a:lstStyle/>
-          <a:p>
-            <a:pPr algn="ctr"/>
-          </a:p>
-        </p:txBody>
-      </p:sp>
-      <p:sp>
-        <p:nvSpPr>
-          <p:cNvPr id="19" name="Oval 18"/>
-          <p:cNvSpPr/>
-          <p:nvPr/>
-        </p:nvSpPr>
-        <p:spPr>
-          <a:xfrm>
-            <a:off x="9951415" y="4023360"/>
-            <a:ext cx="182880" cy="182880"/>
-          </a:xfrm>
-          <a:prstGeom prst="ellipse">
-            <a:avLst/>
-          </a:prstGeom>
-          <a:solidFill>
-            <a:srgbClr val="0043DA"/>
-          </a:solidFill>
-          <a:ln/>
-        </p:spPr>
-        <p:style>
-          <a:lnRef idx="1">
-            <a:schemeClr val="accent1"/>
-          </a:lnRef>
-          <a:fillRef idx="3">
-            <a:schemeClr val="accent1"/>
-          </a:fillRef>
-          <a:effectRef idx="2">
-            <a:schemeClr val="accent1"/>
-          </a:effectRef>
-          <a:fontRef idx="minor">
-            <a:schemeClr val="lt1"/>
-          </a:fontRef>
-        </p:style>
-        <p:txBody>
-          <a:bodyPr rtlCol="0" anchor="ctr"/>
-          <a:lstStyle/>
-          <a:p>
-            <a:pPr algn="ctr"/>
-          </a:p>
-        </p:txBody>
-      </p:sp>
-      <p:sp>
-        <p:nvSpPr>
-          <p:cNvPr id="20" name="TextBox 19"/>
-          <p:cNvSpPr txBox="1"/>
-          <p:nvPr/>
-        </p:nvSpPr>
-        <p:spPr>
-          <a:xfrm>
-            <a:off x="15544" y="2286000"/>
-            <a:ext cx="2011680" cy="228600"/>
-          </a:xfrm>
-          <a:prstGeom prst="rect">
-            <a:avLst/>
-          </a:prstGeom>
-          <a:noFill/>
-        </p:spPr>
-        <p:txBody>
-          <a:bodyPr wrap="square">
-            <a:spAutoFit/>
-          </a:bodyPr>
-          <a:lstStyle/>
-          <a:p>
-            <a:r>
-              <a:rPr sz="1200">
-                <a:solidFill>
-                  <a:srgbClr val="0043DA"/>
-                </a:solidFill>
-                <a:latin typeface="Freesentation"/>
-              </a:rPr>
-              <a:t>Q1 2026</a:t>
-            </a:r>
-          </a:p>
-        </p:txBody>
-      </p:sp>
-      <p:sp>
-        <p:nvSpPr>
-          <p:cNvPr id="21" name="TextBox 20"/>
-          <p:cNvSpPr txBox="1"/>
-          <p:nvPr/>
-        </p:nvSpPr>
-        <p:spPr>
-          <a:xfrm>
-            <a:off x="15544" y="2514600"/>
-            <a:ext cx="2011680" cy="274320"/>
-          </a:xfrm>
-          <a:prstGeom prst="rect">
-            <a:avLst/>
-          </a:prstGeom>
-          <a:noFill/>
-        </p:spPr>
-        <p:txBody>
-          <a:bodyPr wrap="square">
-            <a:spAutoFit/>
-          </a:bodyPr>
-          <a:lstStyle/>
-          <a:p>
-            <a:r>
-              <a:rPr sz="1400" b="1">
-                <a:solidFill>
-                  <a:srgbClr val="0043DA"/>
-                </a:solidFill>
-                <a:latin typeface="Freesentation"/>
-              </a:rPr>
-              <a:t>현황 분석</a:t>
-            </a:r>
-          </a:p>
-        </p:txBody>
-      </p:sp>
-      <p:sp>
-        <p:nvSpPr>
-          <p:cNvPr id="22" name="TextBox 21"/>
-          <p:cNvSpPr txBox="1"/>
-          <p:nvPr/>
-        </p:nvSpPr>
-        <p:spPr>
-          <a:xfrm>
-            <a:off x="15544" y="2788920"/>
-            <a:ext cx="2011680" cy="1097280"/>
-          </a:xfrm>
-          <a:prstGeom prst="rect">
-            <a:avLst/>
-          </a:prstGeom>
-          <a:noFill/>
-        </p:spPr>
-        <p:txBody>
-          <a:bodyPr wrap="square">
-            <a:spAutoFit/>
-          </a:bodyPr>
-          <a:lstStyle/>
-          <a:p>
-            <a:r>
-              <a:rPr sz="1300">
-                <a:solidFill>
-                  <a:srgbClr val="4A4A4A"/>
-                </a:solidFill>
-                <a:latin typeface="Freesentation"/>
-              </a:rPr>
-              <a:t>• 온프레미스 Kafka 현황 파악</a:t>
-            </a:r>
-          </a:p>
-          <a:p>
-            <a:r>
-              <a:rPr sz="1300">
-                <a:solidFill>
-                  <a:srgbClr val="4A4A4A"/>
-                </a:solidFill>
-                <a:latin typeface="Freesentation"/>
-              </a:rPr>
-              <a:t>• 운영 문제점 정리</a:t>
-            </a:r>
-          </a:p>
-          <a:p>
-            <a:r>
-              <a:rPr sz="1300">
-                <a:solidFill>
-                  <a:srgbClr val="4A4A4A"/>
-                </a:solidFill>
-                <a:latin typeface="Freesentation"/>
-              </a:rPr>
-              <a:t>• 비용·성능 기준 수립</a:t>
-            </a:r>
-          </a:p>
-        </p:txBody>
-      </p:sp>
-      <p:sp>
-        <p:nvSpPr>
-          <p:cNvPr id="23" name="TextBox 22"/>
-          <p:cNvSpPr txBox="1"/>
-          <p:nvPr/>
-        </p:nvSpPr>
-        <p:spPr>
-          <a:xfrm>
-            <a:off x="2270455" y="4297680"/>
-            <a:ext cx="2011680" cy="228600"/>
-          </a:xfrm>
-          <a:prstGeom prst="rect">
-            <a:avLst/>
-          </a:prstGeom>
-          <a:noFill/>
-        </p:spPr>
-        <p:txBody>
-          <a:bodyPr wrap="square">
-            <a:spAutoFit/>
-          </a:bodyPr>
-          <a:lstStyle/>
-          <a:p>
-            <a:r>
-              <a:rPr sz="1200">
-                <a:solidFill>
-                  <a:srgbClr val="0043DA"/>
-                </a:solidFill>
-                <a:latin typeface="Freesentation"/>
-              </a:rPr>
-              <a:t>Q2 2026</a:t>
-            </a:r>
-          </a:p>
-        </p:txBody>
-      </p:sp>
-      <p:sp>
-        <p:nvSpPr>
-          <p:cNvPr id="24" name="TextBox 23"/>
-          <p:cNvSpPr txBox="1"/>
-          <p:nvPr/>
-        </p:nvSpPr>
-        <p:spPr>
-          <a:xfrm>
-            <a:off x="2270455" y="4526280"/>
-            <a:ext cx="2011680" cy="274320"/>
-          </a:xfrm>
-          <a:prstGeom prst="rect">
-            <a:avLst/>
-          </a:prstGeom>
-          <a:noFill/>
-        </p:spPr>
-        <p:txBody>
-          <a:bodyPr wrap="square">
-            <a:spAutoFit/>
-          </a:bodyPr>
-          <a:lstStyle/>
-          <a:p>
-            <a:r>
-              <a:rPr sz="1400" b="1">
-                <a:solidFill>
-                  <a:srgbClr val="0043DA"/>
-                </a:solidFill>
-                <a:latin typeface="Freesentation"/>
-              </a:rPr>
-              <a:t>아키텍처 설계</a:t>
-            </a:r>
-          </a:p>
-        </p:txBody>
-      </p:sp>
-      <p:sp>
-        <p:nvSpPr>
-          <p:cNvPr id="25" name="TextBox 24"/>
-          <p:cNvSpPr txBox="1"/>
-          <p:nvPr/>
-        </p:nvSpPr>
-        <p:spPr>
-          <a:xfrm>
-            <a:off x="2270455" y="4800600"/>
-            <a:ext cx="2011680" cy="1097280"/>
-          </a:xfrm>
-          <a:prstGeom prst="rect">
-            <a:avLst/>
-          </a:prstGeom>
-          <a:noFill/>
-        </p:spPr>
-        <p:txBody>
-          <a:bodyPr wrap="square">
-            <a:spAutoFit/>
-          </a:bodyPr>
-          <a:lstStyle/>
-          <a:p>
-            <a:r>
-              <a:rPr sz="1300">
-                <a:solidFill>
-                  <a:srgbClr val="4A4A4A"/>
-                </a:solidFill>
-                <a:latin typeface="Freesentation"/>
-              </a:rPr>
-              <a:t>• MSK 클러스터 유형 선택</a:t>
-            </a:r>
-          </a:p>
-          <a:p>
-            <a:r>
-              <a:rPr sz="1300">
-                <a:solidFill>
-                  <a:srgbClr val="4A4A4A"/>
-                </a:solidFill>
-                <a:latin typeface="Freesentation"/>
-              </a:rPr>
-              <a:t>• 네트워크/보안 설계</a:t>
-            </a:r>
-          </a:p>
-          <a:p>
-            <a:r>
-              <a:rPr sz="1300">
-                <a:solidFill>
-                  <a:srgbClr val="4A4A4A"/>
-                </a:solidFill>
-                <a:latin typeface="Freesentation"/>
-              </a:rPr>
-              <a:t>• 마이그레이션 계획 수립</a:t>
-            </a:r>
-          </a:p>
-        </p:txBody>
-      </p:sp>
-      <p:sp>
-        <p:nvSpPr>
-          <p:cNvPr id="26" name="TextBox 25"/>
-          <p:cNvSpPr txBox="1"/>
-          <p:nvPr/>
-        </p:nvSpPr>
-        <p:spPr>
-          <a:xfrm>
-            <a:off x="4526280" y="2286000"/>
-            <a:ext cx="2011680" cy="228600"/>
-          </a:xfrm>
-          <a:prstGeom prst="rect">
-            <a:avLst/>
-          </a:prstGeom>
-          <a:noFill/>
-        </p:spPr>
-        <p:txBody>
-          <a:bodyPr wrap="square">
-            <a:spAutoFit/>
-          </a:bodyPr>
-          <a:lstStyle/>
-          <a:p>
-            <a:r>
-              <a:rPr sz="1200">
-                <a:solidFill>
-                  <a:srgbClr val="0043DA"/>
-                </a:solidFill>
-                <a:latin typeface="Freesentation"/>
-              </a:rPr>
-              <a:t>Q3 2026</a:t>
-            </a:r>
-          </a:p>
-        </p:txBody>
-      </p:sp>
-      <p:sp>
-        <p:nvSpPr>
-          <p:cNvPr id="27" name="TextBox 26"/>
-          <p:cNvSpPr txBox="1"/>
-          <p:nvPr/>
-        </p:nvSpPr>
-        <p:spPr>
-          <a:xfrm>
-            <a:off x="4526280" y="2514600"/>
-            <a:ext cx="2011680" cy="274320"/>
-          </a:xfrm>
-          <a:prstGeom prst="rect">
-            <a:avLst/>
-          </a:prstGeom>
-          <a:noFill/>
-        </p:spPr>
-        <p:txBody>
-          <a:bodyPr wrap="square">
-            <a:spAutoFit/>
-          </a:bodyPr>
-          <a:lstStyle/>
-          <a:p>
-            <a:r>
-              <a:rPr sz="1400" b="1">
-                <a:solidFill>
-                  <a:srgbClr val="0043DA"/>
-                </a:solidFill>
-                <a:latin typeface="Freesentation"/>
-              </a:rPr>
-              <a:t>파일럿 구축</a:t>
-            </a:r>
-          </a:p>
-        </p:txBody>
-      </p:sp>
-      <p:sp>
-        <p:nvSpPr>
-          <p:cNvPr id="28" name="TextBox 27"/>
-          <p:cNvSpPr txBox="1"/>
-          <p:nvPr/>
-        </p:nvSpPr>
-        <p:spPr>
-          <a:xfrm>
-            <a:off x="4526280" y="2788920"/>
-            <a:ext cx="2011680" cy="1097280"/>
-          </a:xfrm>
-          <a:prstGeom prst="rect">
-            <a:avLst/>
-          </a:prstGeom>
-          <a:noFill/>
-        </p:spPr>
-        <p:txBody>
-          <a:bodyPr wrap="square">
-            <a:spAutoFit/>
-          </a:bodyPr>
-          <a:lstStyle/>
-          <a:p>
-            <a:r>
-              <a:rPr sz="1300">
-                <a:solidFill>
-                  <a:srgbClr val="4A4A4A"/>
-                </a:solidFill>
-                <a:latin typeface="Freesentation"/>
-              </a:rPr>
-              <a:t>• 개발 환경 MSK 구축</a:t>
-            </a:r>
-          </a:p>
-          <a:p>
-            <a:r>
-              <a:rPr sz="1300">
-                <a:solidFill>
-                  <a:srgbClr val="4A4A4A"/>
-                </a:solidFill>
-                <a:latin typeface="Freesentation"/>
-              </a:rPr>
-              <a:t>• MirrorMaker 2 설정</a:t>
-            </a:r>
-          </a:p>
-          <a:p>
-            <a:r>
-              <a:rPr sz="1300">
-                <a:solidFill>
-                  <a:srgbClr val="4A4A4A"/>
-                </a:solidFill>
-                <a:latin typeface="Freesentation"/>
-              </a:rPr>
-              <a:t>• 데이터 동기화 검증</a:t>
-            </a:r>
-          </a:p>
-        </p:txBody>
-      </p:sp>
-      <p:sp>
-        <p:nvSpPr>
-          <p:cNvPr id="29" name="TextBox 28"/>
-          <p:cNvSpPr txBox="1"/>
-          <p:nvPr/>
-        </p:nvSpPr>
-        <p:spPr>
-          <a:xfrm>
-            <a:off x="6782104" y="4297680"/>
-            <a:ext cx="2011680" cy="228600"/>
-          </a:xfrm>
-          <a:prstGeom prst="rect">
-            <a:avLst/>
-          </a:prstGeom>
-          <a:noFill/>
-        </p:spPr>
-        <p:txBody>
-          <a:bodyPr wrap="square">
-            <a:spAutoFit/>
-          </a:bodyPr>
-          <a:lstStyle/>
-          <a:p>
-            <a:r>
-              <a:rPr sz="1200">
-                <a:solidFill>
-                  <a:srgbClr val="0043DA"/>
-                </a:solidFill>
-                <a:latin typeface="Freesentation"/>
-              </a:rPr>
-              <a:t>Q4 2026</a:t>
-            </a:r>
-          </a:p>
-        </p:txBody>
-      </p:sp>
-      <p:sp>
-        <p:nvSpPr>
-          <p:cNvPr id="30" name="TextBox 29"/>
-          <p:cNvSpPr txBox="1"/>
-          <p:nvPr/>
-        </p:nvSpPr>
-        <p:spPr>
-          <a:xfrm>
-            <a:off x="6782104" y="4526280"/>
-            <a:ext cx="2011680" cy="274320"/>
-          </a:xfrm>
-          <a:prstGeom prst="rect">
-            <a:avLst/>
-          </a:prstGeom>
-          <a:noFill/>
-        </p:spPr>
-        <p:txBody>
-          <a:bodyPr wrap="square">
-            <a:spAutoFit/>
-          </a:bodyPr>
-          <a:lstStyle/>
-          <a:p>
-            <a:r>
-              <a:rPr sz="1400" b="1">
-                <a:solidFill>
-                  <a:srgbClr val="0043DA"/>
-                </a:solidFill>
-                <a:latin typeface="Freesentation"/>
-              </a:rPr>
-              <a:t>전환 실행</a:t>
-            </a:r>
-          </a:p>
-        </p:txBody>
-      </p:sp>
-      <p:sp>
-        <p:nvSpPr>
-          <p:cNvPr id="31" name="TextBox 30"/>
-          <p:cNvSpPr txBox="1"/>
-          <p:nvPr/>
-        </p:nvSpPr>
-        <p:spPr>
-          <a:xfrm>
-            <a:off x="6782104" y="4800600"/>
-            <a:ext cx="2011680" cy="1097280"/>
-          </a:xfrm>
-          <a:prstGeom prst="rect">
-            <a:avLst/>
-          </a:prstGeom>
-          <a:noFill/>
-        </p:spPr>
-        <p:txBody>
-          <a:bodyPr wrap="square">
-            <a:spAutoFit/>
-          </a:bodyPr>
-          <a:lstStyle/>
-          <a:p>
-            <a:r>
-              <a:rPr sz="1300">
-                <a:solidFill>
-                  <a:srgbClr val="4A4A4A"/>
-                </a:solidFill>
-                <a:latin typeface="Freesentation"/>
-              </a:rPr>
-              <a:t>• 프로덕션 전환 실행</a:t>
-            </a:r>
-          </a:p>
-          <a:p>
-            <a:r>
-              <a:rPr sz="1300">
-                <a:solidFill>
-                  <a:srgbClr val="4A4A4A"/>
-                </a:solidFill>
-                <a:latin typeface="Freesentation"/>
-              </a:rPr>
-              <a:t>• 데이터 마이그레이션</a:t>
-            </a:r>
-          </a:p>
-          <a:p>
-            <a:r>
-              <a:rPr sz="1300">
-                <a:solidFill>
-                  <a:srgbClr val="4A4A4A"/>
-                </a:solidFill>
-                <a:latin typeface="Freesentation"/>
-              </a:rPr>
-              <a:t>• 롤백 계획 준비</a:t>
-            </a:r>
-          </a:p>
-        </p:txBody>
-      </p:sp>
-      <p:sp>
-        <p:nvSpPr>
-          <p:cNvPr id="32" name="TextBox 31"/>
-          <p:cNvSpPr txBox="1"/>
-          <p:nvPr/>
-        </p:nvSpPr>
-        <p:spPr>
-          <a:xfrm>
-            <a:off x="9037015" y="2286000"/>
-            <a:ext cx="2011680" cy="228600"/>
-          </a:xfrm>
-          <a:prstGeom prst="rect">
-            <a:avLst/>
-          </a:prstGeom>
-          <a:noFill/>
-        </p:spPr>
-        <p:txBody>
-          <a:bodyPr wrap="square">
-            <a:spAutoFit/>
-          </a:bodyPr>
-          <a:lstStyle/>
-          <a:p>
-            <a:r>
-              <a:rPr sz="1200">
-                <a:solidFill>
-                  <a:srgbClr val="0043DA"/>
-                </a:solidFill>
-                <a:latin typeface="Freesentation"/>
-              </a:rPr>
-              <a:t>Q1 2027</a:t>
-            </a:r>
-          </a:p>
-        </p:txBody>
-      </p:sp>
-      <p:sp>
-        <p:nvSpPr>
-          <p:cNvPr id="33" name="TextBox 32"/>
-          <p:cNvSpPr txBox="1"/>
-          <p:nvPr/>
-        </p:nvSpPr>
-        <p:spPr>
-          <a:xfrm>
-            <a:off x="9037015" y="2514600"/>
-            <a:ext cx="2011680" cy="274320"/>
-          </a:xfrm>
-          <a:prstGeom prst="rect">
-            <a:avLst/>
-          </a:prstGeom>
-          <a:noFill/>
-        </p:spPr>
-        <p:txBody>
-          <a:bodyPr wrap="square">
-            <a:spAutoFit/>
-          </a:bodyPr>
-          <a:lstStyle/>
-          <a:p>
-            <a:r>
-              <a:rPr sz="1400" b="1">
-                <a:solidFill>
-                  <a:srgbClr val="0043DA"/>
-                </a:solidFill>
-                <a:latin typeface="Freesentation"/>
-              </a:rPr>
-              <a:t>안정화</a:t>
-            </a:r>
-          </a:p>
-        </p:txBody>
-      </p:sp>
-      <p:sp>
-        <p:nvSpPr>
-          <p:cNvPr id="34" name="TextBox 33"/>
-          <p:cNvSpPr txBox="1"/>
-          <p:nvPr/>
-        </p:nvSpPr>
-        <p:spPr>
-          <a:xfrm>
-            <a:off x="9037015" y="2788920"/>
-            <a:ext cx="2011680" cy="1097280"/>
-          </a:xfrm>
-          <a:prstGeom prst="rect">
-            <a:avLst/>
-          </a:prstGeom>
-          <a:noFill/>
-        </p:spPr>
-        <p:txBody>
-          <a:bodyPr wrap="square">
-            <a:spAutoFit/>
-          </a:bodyPr>
-          <a:lstStyle/>
-          <a:p>
-            <a:r>
-              <a:rPr sz="1300">
-                <a:solidFill>
-                  <a:srgbClr val="4A4A4A"/>
-                </a:solidFill>
-                <a:latin typeface="Freesentation"/>
-              </a:rPr>
-              <a:t>• 모니터링 체계 수립</a:t>
-            </a:r>
-          </a:p>
-          <a:p>
-            <a:r>
-              <a:rPr sz="1300">
-                <a:solidFill>
-                  <a:srgbClr val="4A4A4A"/>
-                </a:solidFill>
-                <a:latin typeface="Freesentation"/>
-              </a:rPr>
-              <a:t>• 비용 최적화</a:t>
-            </a:r>
-          </a:p>
-          <a:p>
-            <a:r>
-              <a:rPr sz="1300">
-                <a:solidFill>
-                  <a:srgbClr val="4A4A4A"/>
-                </a:solidFill>
-                <a:latin typeface="Freesentation"/>
-              </a:rPr>
-              <a:t>• 운영 매뉴얼 완성</a:t>
-            </a:r>
-          </a:p>
-        </p:txBody>
-      </p:sp>
-    </p:spTree>
   </p:cSld>
   <p:clrMapOvr>
     <a:masterClrMapping/>
@@ -12447,7 +11916,7 @@
 </file>
 
 <file path=ppt/slides/slide8.xml><?xml version="1.0" encoding="utf-8"?>
-<p:sld xmlns:a="http://schemas.openxmlformats.org/drawingml/2006/main" xmlns:p="http://schemas.openxmlformats.org/presentationml/2006/main" xmlns:r="http://schemas.openxmlformats.org/officeDocument/2006/relationships">
+<p:sld xmlns:a="http://schemas.openxmlformats.org/drawingml/2006/main" xmlns:r="http://schemas.openxmlformats.org/officeDocument/2006/relationships" xmlns:p="http://schemas.openxmlformats.org/presentationml/2006/main">
   <p:cSld>
     <p:spTree>
       <p:nvGrpSpPr>
@@ -12455,34 +11924,125 @@
         <p:cNvGrpSpPr/>
         <p:nvPr/>
       </p:nvGrpSpPr>
-      <p:grpSpPr/>
-      <p:sp>
-        <p:nvSpPr>
-          <p:cNvPr id="2" name="Text Placeholder 1"/>
+      <p:grpSpPr>
+        <a:xfrm>
+          <a:off x="0" y="0"/>
+          <a:ext cx="0" cy="0"/>
+          <a:chOff x="0" y="0"/>
+          <a:chExt cx="0" cy="0"/>
+        </a:xfrm>
+      </p:grpSpPr>
+      <p:sp>
+        <p:nvSpPr>
+          <p:cNvPr id="3" name="텍스트 개체 틀 2"/>
           <p:cNvSpPr>
             <a:spLocks noGrp="1"/>
           </p:cNvSpPr>
           <p:nvPr>
-            <p:ph type="body" idx="10" sz="quarter"/>
+            <p:ph type="body" sz="quarter" idx="10"/>
           </p:nvPr>
         </p:nvSpPr>
         <p:spPr/>
         <p:txBody>
           <a:bodyPr/>
           <a:lstStyle/>
-          <a:p/>
-        </p:txBody>
-      </p:sp>
-      <p:sp>
-        <p:nvSpPr>
-          <p:cNvPr id="3" name="TextBox 2"/>
+          <a:p>
+            <a:endParaRPr lang="ko-KR" altLang="en-US"/>
+          </a:p>
+        </p:txBody>
+      </p:sp>
+      <p:sp>
+        <p:nvSpPr>
+          <p:cNvPr id="18" name="TextBox 17"/>
           <p:cNvSpPr txBox="1"/>
           <p:nvPr/>
         </p:nvSpPr>
         <p:spPr>
           <a:xfrm>
-            <a:off x="355610" y="557509"/>
-            <a:ext cx="3291840" cy="932688"/>
+            <a:off x="354806" y="557906"/>
+            <a:ext cx="2720317" cy="932614"/>
+          </a:xfrm>
+          <a:prstGeom prst="rect">
+            <a:avLst/>
+          </a:prstGeom>
+          <a:noFill/>
+        </p:spPr>
+        <p:txBody>
+          <a:bodyPr wrap="square" lIns="0" tIns="0" rIns="0" bIns="0" rtlCol="0" anchor="t" anchorCtr="0">
+            <a:noAutofit/>
+          </a:bodyPr>
+          <a:lstStyle/>
+          <a:p>
+            <a:pPr>
+              <a:lnSpc>
+                <a:spcPct val="120000"/>
+              </a:lnSpc>
+            </a:pPr>
+            <a:r>
+              <a:rPr lang="ko-KR" altLang="en-US" sz="2000" b="1" dirty="0">
+                <a:solidFill>
+                  <a:srgbClr val="000000"/>
+                </a:solidFill>
+                <a:latin typeface="프리젠테이션 7 Bold" pitchFamily="2" charset="-127"/>
+                <a:ea typeface="프리젠테이션 7 Bold" pitchFamily="2" charset="-127"/>
+              </a:rPr>
+              <a:t>L06. Zigzag Timeline</a:t>
+            </a:r>
+            <a:endParaRPr lang="ko-KR" altLang="en-US" dirty="0"/>
+          </a:p>
+        </p:txBody>
+      </p:sp>
+      <p:sp>
+        <p:nvSpPr>
+          <p:cNvPr id="19" name="TextBox 18"/>
+          <p:cNvSpPr txBox="1"/>
+          <p:nvPr/>
+        </p:nvSpPr>
+        <p:spPr>
+          <a:xfrm>
+            <a:off x="3763700" y="558800"/>
+            <a:ext cx="7551483" cy="937918"/>
+          </a:xfrm>
+          <a:prstGeom prst="rect">
+            <a:avLst/>
+          </a:prstGeom>
+          <a:noFill/>
+        </p:spPr>
+        <p:txBody>
+          <a:bodyPr wrap="square" lIns="0" tIns="0" rIns="0" bIns="0" rtlCol="0" anchor="t" anchorCtr="0">
+            <a:noAutofit/>
+          </a:bodyPr>
+          <a:lstStyle/>
+          <a:p>
+            <a:pPr>
+              <a:lnSpc>
+                <a:spcPct val="120000"/>
+              </a:lnSpc>
+            </a:pPr>
+            <a:r>
+              <a:rPr lang="ko-KR" altLang="en-US" sz="1200" dirty="0">
+                <a:solidFill>
+                  <a:srgbClr val="000000"/>
+                </a:solidFill>
+                <a:latin typeface="프리젠테이션 5 Medium" pitchFamily="2" charset="-127"/>
+                <a:ea typeface="프리젠테이션 5 Medium" pitchFamily="2" charset="-127"/>
+              </a:rPr>
+              <a:t>S자 지그재그 타임라인 — MSK 도입 4단계 로드맵</a:t>
+            </a:r>
+            <a:endParaRPr lang="ko-KR" altLang="en-US" dirty="0"/>
+          </a:p>
+        </p:txBody>
+      </p:sp>
+      <p:sp>
+        <p:nvSpPr>
+          <p:cNvPr id="20" name="TextBox 19"/>
+          <p:cNvSpPr txBox="1"/>
+          <p:nvPr/>
+        </p:nvSpPr>
+        <p:spPr>
+          <a:xfrm>
+            <a:off x="457200" y="1600200"/>
+            <a:ext cx="11277295" cy="320040"/>
           </a:xfrm>
           <a:prstGeom prst="rect">
             <a:avLst/>
@@ -12496,27 +12056,27 @@
           <a:lstStyle/>
           <a:p>
             <a:r>
-              <a:rPr sz="2000" b="1">
+              <a:rPr sz="1600" b="0">
                 <a:solidFill>
                   <a:srgbClr val="0043DA"/>
                 </a:solidFill>
-                <a:latin typeface="프리젠테이션 7 Bold"/>
-              </a:rPr>
-              <a:t>L07. Roadmap Timeline</a:t>
-            </a:r>
-          </a:p>
-        </p:txBody>
-      </p:sp>
-      <p:sp>
-        <p:nvSpPr>
-          <p:cNvPr id="4" name="TextBox 3"/>
+                <a:latin typeface="Freesentation"/>
+              </a:rPr>
+              <a:t>온프레미스 Kafka → AWS MSK 전환 4단계</a:t>
+            </a:r>
+          </a:p>
+        </p:txBody>
+      </p:sp>
+      <p:sp>
+        <p:nvSpPr>
+          <p:cNvPr id="21" name="TextBox 20"/>
           <p:cNvSpPr txBox="1"/>
           <p:nvPr/>
         </p:nvSpPr>
         <p:spPr>
           <a:xfrm>
-            <a:off x="3760927" y="557509"/>
-            <a:ext cx="8430768" cy="932688"/>
+            <a:off x="457200" y="1965960"/>
+            <a:ext cx="11277295" cy="274320"/>
           </a:xfrm>
           <a:prstGeom prst="rect">
             <a:avLst/>
@@ -12530,490 +12090,29 @@
           <a:lstStyle/>
           <a:p>
             <a:r>
-              <a:rPr sz="1200" b="0">
-                <a:solidFill>
-                  <a:srgbClr val="212121"/>
-                </a:solidFill>
-                <a:latin typeface="프리젠테이션 5 Medium"/>
-              </a:rPr>
-              <a:t>수영장 레인 구조 — 복수 워크스트림 병렬 진행</a:t>
-            </a:r>
-          </a:p>
-        </p:txBody>
-      </p:sp>
-      <p:sp>
-        <p:nvSpPr>
-          <p:cNvPr id="5" name="Rectangle 4"/>
+              <a:rPr sz="1300">
+                <a:solidFill>
+                  <a:srgbClr val="4A4A4A"/>
+                </a:solidFill>
+                <a:latin typeface="Freesentation"/>
+              </a:rPr>
+              <a:t>환경 설계부터 운영 안정화까지 2024년 로드맵</a:t>
+            </a:r>
+          </a:p>
+        </p:txBody>
+      </p:sp>
+      <p:sp>
+        <p:nvSpPr>
+          <p:cNvPr id="22" name="Rectangle 21"/>
           <p:cNvSpPr/>
           <p:nvPr/>
         </p:nvSpPr>
         <p:spPr>
           <a:xfrm>
-            <a:off x="355610" y="1496689"/>
-            <a:ext cx="11480292" cy="9144"/>
-          </a:xfrm>
-          <a:prstGeom prst="rect">
-            <a:avLst/>
-          </a:prstGeom>
-          <a:solidFill>
-            <a:srgbClr val="DCDCDC"/>
-          </a:solidFill>
-          <a:ln>
-            <a:solidFill>
-              <a:srgbClr val="DCDCDC"/>
-            </a:solidFill>
-          </a:ln>
-        </p:spPr>
-        <p:style>
-          <a:lnRef idx="1">
-            <a:schemeClr val="accent1"/>
-          </a:lnRef>
-          <a:fillRef idx="3">
-            <a:schemeClr val="accent1"/>
-          </a:fillRef>
-          <a:effectRef idx="2">
-            <a:schemeClr val="accent1"/>
-          </a:effectRef>
-          <a:fontRef idx="minor">
-            <a:schemeClr val="lt1"/>
-          </a:fontRef>
-        </p:style>
-        <p:txBody>
-          <a:bodyPr rtlCol="0" anchor="ctr"/>
-          <a:lstStyle/>
-          <a:p>
-            <a:pPr algn="ctr"/>
-          </a:p>
-        </p:txBody>
-      </p:sp>
-      <p:sp>
-        <p:nvSpPr>
-          <p:cNvPr id="8" name="Rounded Rectangle 7"/>
-          <p:cNvSpPr/>
-          <p:nvPr/>
-        </p:nvSpPr>
-        <p:spPr>
-          <a:xfrm>
-            <a:off x="1920240" y="1984157"/>
-            <a:ext cx="2453335" cy="365760"/>
-          </a:xfrm>
-          <a:prstGeom prst="roundRect">
-            <a:avLst/>
-          </a:prstGeom>
-          <a:solidFill>
-            <a:srgbClr val="E6F0FF"/>
-          </a:solidFill>
-          <a:ln w="9525">
-            <a:solidFill>
-              <a:srgbClr val="DCDCDC"/>
-            </a:solidFill>
-          </a:ln>
-        </p:spPr>
-        <p:style>
-          <a:lnRef idx="1">
-            <a:schemeClr val="accent1"/>
-          </a:lnRef>
-          <a:fillRef idx="3">
-            <a:schemeClr val="accent1"/>
-          </a:fillRef>
-          <a:effectRef idx="2">
-            <a:schemeClr val="accent1"/>
-          </a:effectRef>
-          <a:fontRef idx="minor">
-            <a:schemeClr val="lt1"/>
-          </a:fontRef>
-        </p:style>
-        <p:txBody>
-          <a:bodyPr rtlCol="0" anchor="ctr"/>
-          <a:lstStyle/>
-          <a:p>
-            <a:r>
-              <a:rPr sz="1200">
-                <a:solidFill>
-                  <a:srgbClr val="0043DA"/>
-                </a:solidFill>
-              </a:rPr>
-              <a:t>Q1 2026</a:t>
-            </a:r>
-          </a:p>
-        </p:txBody>
-      </p:sp>
-      <p:sp>
-        <p:nvSpPr>
-          <p:cNvPr id="9" name="Rounded Rectangle 8"/>
-          <p:cNvSpPr/>
-          <p:nvPr/>
-        </p:nvSpPr>
-        <p:spPr>
-          <a:xfrm>
-            <a:off x="4373575" y="1984157"/>
-            <a:ext cx="2453335" cy="365760"/>
-          </a:xfrm>
-          <a:prstGeom prst="roundRect">
-            <a:avLst/>
-          </a:prstGeom>
-          <a:solidFill>
-            <a:srgbClr val="E6F0FF"/>
-          </a:solidFill>
-          <a:ln w="9525">
-            <a:solidFill>
-              <a:srgbClr val="DCDCDC"/>
-            </a:solidFill>
-          </a:ln>
-        </p:spPr>
-        <p:style>
-          <a:lnRef idx="1">
-            <a:schemeClr val="accent1"/>
-          </a:lnRef>
-          <a:fillRef idx="3">
-            <a:schemeClr val="accent1"/>
-          </a:fillRef>
-          <a:effectRef idx="2">
-            <a:schemeClr val="accent1"/>
-          </a:effectRef>
-          <a:fontRef idx="minor">
-            <a:schemeClr val="lt1"/>
-          </a:fontRef>
-        </p:style>
-        <p:txBody>
-          <a:bodyPr rtlCol="0" anchor="ctr"/>
-          <a:lstStyle/>
-          <a:p>
-            <a:r>
-              <a:rPr sz="1200">
-                <a:solidFill>
-                  <a:srgbClr val="0043DA"/>
-                </a:solidFill>
-              </a:rPr>
-              <a:t>Q2 2026</a:t>
-            </a:r>
-          </a:p>
-        </p:txBody>
-      </p:sp>
-      <p:sp>
-        <p:nvSpPr>
-          <p:cNvPr id="10" name="Rounded Rectangle 9"/>
-          <p:cNvSpPr/>
-          <p:nvPr/>
-        </p:nvSpPr>
-        <p:spPr>
-          <a:xfrm>
-            <a:off x="6826910" y="1984157"/>
-            <a:ext cx="2453335" cy="365760"/>
-          </a:xfrm>
-          <a:prstGeom prst="roundRect">
-            <a:avLst/>
-          </a:prstGeom>
-          <a:solidFill>
-            <a:srgbClr val="E6F0FF"/>
-          </a:solidFill>
-          <a:ln w="9525">
-            <a:solidFill>
-              <a:srgbClr val="DCDCDC"/>
-            </a:solidFill>
-          </a:ln>
-        </p:spPr>
-        <p:style>
-          <a:lnRef idx="1">
-            <a:schemeClr val="accent1"/>
-          </a:lnRef>
-          <a:fillRef idx="3">
-            <a:schemeClr val="accent1"/>
-          </a:fillRef>
-          <a:effectRef idx="2">
-            <a:schemeClr val="accent1"/>
-          </a:effectRef>
-          <a:fontRef idx="minor">
-            <a:schemeClr val="lt1"/>
-          </a:fontRef>
-        </p:style>
-        <p:txBody>
-          <a:bodyPr rtlCol="0" anchor="ctr"/>
-          <a:lstStyle/>
-          <a:p>
-            <a:r>
-              <a:rPr sz="1200">
-                <a:solidFill>
-                  <a:srgbClr val="0043DA"/>
-                </a:solidFill>
-              </a:rPr>
-              <a:t>Q3 2026</a:t>
-            </a:r>
-          </a:p>
-        </p:txBody>
-      </p:sp>
-      <p:sp>
-        <p:nvSpPr>
-          <p:cNvPr id="11" name="Rounded Rectangle 10"/>
-          <p:cNvSpPr/>
-          <p:nvPr/>
-        </p:nvSpPr>
-        <p:spPr>
-          <a:xfrm>
-            <a:off x="9280245" y="1984157"/>
-            <a:ext cx="2453335" cy="365760"/>
-          </a:xfrm>
-          <a:prstGeom prst="roundRect">
-            <a:avLst/>
-          </a:prstGeom>
-          <a:solidFill>
-            <a:srgbClr val="E6F0FF"/>
-          </a:solidFill>
-          <a:ln w="9525">
-            <a:solidFill>
-              <a:srgbClr val="DCDCDC"/>
-            </a:solidFill>
-          </a:ln>
-        </p:spPr>
-        <p:style>
-          <a:lnRef idx="1">
-            <a:schemeClr val="accent1"/>
-          </a:lnRef>
-          <a:fillRef idx="3">
-            <a:schemeClr val="accent1"/>
-          </a:fillRef>
-          <a:effectRef idx="2">
-            <a:schemeClr val="accent1"/>
-          </a:effectRef>
-          <a:fontRef idx="minor">
-            <a:schemeClr val="lt1"/>
-          </a:fontRef>
-        </p:style>
-        <p:txBody>
-          <a:bodyPr rtlCol="0" anchor="ctr"/>
-          <a:lstStyle/>
-          <a:p>
-            <a:r>
-              <a:rPr sz="1200">
-                <a:solidFill>
-                  <a:srgbClr val="0043DA"/>
-                </a:solidFill>
-              </a:rPr>
-              <a:t>Q4 2026</a:t>
-            </a:r>
-          </a:p>
-        </p:txBody>
-      </p:sp>
-      <p:sp>
-        <p:nvSpPr>
-          <p:cNvPr id="12" name="Rounded Rectangle 11"/>
-          <p:cNvSpPr/>
-          <p:nvPr/>
-        </p:nvSpPr>
-        <p:spPr>
-          <a:xfrm>
-            <a:off x="457200" y="2440442"/>
-            <a:ext cx="1371600" cy="914400"/>
-          </a:xfrm>
-          <a:prstGeom prst="roundRect">
-            <a:avLst/>
-          </a:prstGeom>
-          <a:solidFill>
-            <a:srgbClr val="DCDCDC"/>
-          </a:solidFill>
-          <a:ln w="9525">
-            <a:solidFill>
-              <a:srgbClr val="B4B4B4"/>
-            </a:solidFill>
-          </a:ln>
-        </p:spPr>
-        <p:style>
-          <a:lnRef idx="1">
-            <a:schemeClr val="accent1"/>
-          </a:lnRef>
-          <a:fillRef idx="3">
-            <a:schemeClr val="accent1"/>
-          </a:fillRef>
-          <a:effectRef idx="2">
-            <a:schemeClr val="accent1"/>
-          </a:effectRef>
-          <a:fontRef idx="minor">
-            <a:schemeClr val="lt1"/>
-          </a:fontRef>
-        </p:style>
-        <p:txBody>
-          <a:bodyPr rtlCol="0" anchor="ctr"/>
-          <a:lstStyle/>
-          <a:p>
-            <a:r>
-              <a:rPr sz="1300">
-                <a:solidFill>
-                  <a:srgbClr val="404040"/>
-                </a:solidFill>
-              </a:rPr>
-              <a:t>인프라 구축</a:t>
-            </a:r>
-          </a:p>
-        </p:txBody>
-      </p:sp>
-      <p:sp>
-        <p:nvSpPr>
-          <p:cNvPr id="13" name="Rounded Rectangle 12"/>
-          <p:cNvSpPr/>
-          <p:nvPr/>
-        </p:nvSpPr>
-        <p:spPr>
-          <a:xfrm>
-            <a:off x="457200" y="3445368"/>
-            <a:ext cx="1371600" cy="914400"/>
-          </a:xfrm>
-          <a:prstGeom prst="roundRect">
-            <a:avLst/>
-          </a:prstGeom>
-          <a:solidFill>
-            <a:srgbClr val="DCDCDC"/>
-          </a:solidFill>
-          <a:ln w="9525">
-            <a:solidFill>
-              <a:srgbClr val="B4B4B4"/>
-            </a:solidFill>
-          </a:ln>
-        </p:spPr>
-        <p:style>
-          <a:lnRef idx="1">
-            <a:schemeClr val="accent1"/>
-          </a:lnRef>
-          <a:fillRef idx="3">
-            <a:schemeClr val="accent1"/>
-          </a:fillRef>
-          <a:effectRef idx="2">
-            <a:schemeClr val="accent1"/>
-          </a:effectRef>
-          <a:fontRef idx="minor">
-            <a:schemeClr val="lt1"/>
-          </a:fontRef>
-        </p:style>
-        <p:txBody>
-          <a:bodyPr rtlCol="0" anchor="ctr"/>
-          <a:lstStyle/>
-          <a:p>
-            <a:r>
-              <a:rPr sz="1300">
-                <a:solidFill>
-                  <a:srgbClr val="404040"/>
-                </a:solidFill>
-              </a:rPr>
-              <a:t>마이그레이션</a:t>
-            </a:r>
-          </a:p>
-        </p:txBody>
-      </p:sp>
-      <p:sp>
-        <p:nvSpPr>
-          <p:cNvPr id="14" name="Rounded Rectangle 13"/>
-          <p:cNvSpPr/>
-          <p:nvPr/>
-        </p:nvSpPr>
-        <p:spPr>
-          <a:xfrm>
-            <a:off x="457200" y="4450293"/>
-            <a:ext cx="1371600" cy="914400"/>
-          </a:xfrm>
-          <a:prstGeom prst="roundRect">
-            <a:avLst/>
-          </a:prstGeom>
-          <a:solidFill>
-            <a:srgbClr val="DCDCDC"/>
-          </a:solidFill>
-          <a:ln w="9525">
-            <a:solidFill>
-              <a:srgbClr val="B4B4B4"/>
-            </a:solidFill>
-          </a:ln>
-        </p:spPr>
-        <p:style>
-          <a:lnRef idx="1">
-            <a:schemeClr val="accent1"/>
-          </a:lnRef>
-          <a:fillRef idx="3">
-            <a:schemeClr val="accent1"/>
-          </a:fillRef>
-          <a:effectRef idx="2">
-            <a:schemeClr val="accent1"/>
-          </a:effectRef>
-          <a:fontRef idx="minor">
-            <a:schemeClr val="lt1"/>
-          </a:fontRef>
-        </p:style>
-        <p:txBody>
-          <a:bodyPr rtlCol="0" anchor="ctr"/>
-          <a:lstStyle/>
-          <a:p>
-            <a:r>
-              <a:rPr sz="1300">
-                <a:solidFill>
-                  <a:srgbClr val="404040"/>
-                </a:solidFill>
-              </a:rPr>
-              <a:t>운영 준비</a:t>
-            </a:r>
-          </a:p>
-        </p:txBody>
-      </p:sp>
-      <p:sp>
-        <p:nvSpPr>
-          <p:cNvPr id="15" name="Rounded Rectangle 14"/>
-          <p:cNvSpPr/>
-          <p:nvPr/>
-        </p:nvSpPr>
-        <p:spPr>
-          <a:xfrm>
-            <a:off x="457200" y="5456133"/>
-            <a:ext cx="1371600" cy="914400"/>
-          </a:xfrm>
-          <a:prstGeom prst="roundRect">
-            <a:avLst/>
-          </a:prstGeom>
-          <a:solidFill>
-            <a:srgbClr val="DCDCDC"/>
-          </a:solidFill>
-          <a:ln w="9525">
-            <a:solidFill>
-              <a:srgbClr val="B4B4B4"/>
-            </a:solidFill>
-          </a:ln>
-        </p:spPr>
-        <p:style>
-          <a:lnRef idx="1">
-            <a:schemeClr val="accent1"/>
-          </a:lnRef>
-          <a:fillRef idx="3">
-            <a:schemeClr val="accent1"/>
-          </a:fillRef>
-          <a:effectRef idx="2">
-            <a:schemeClr val="accent1"/>
-          </a:effectRef>
-          <a:fontRef idx="minor">
-            <a:schemeClr val="lt1"/>
-          </a:fontRef>
-        </p:style>
-        <p:txBody>
-          <a:bodyPr rtlCol="0" anchor="ctr"/>
-          <a:lstStyle/>
-          <a:p>
-            <a:r>
-              <a:rPr sz="1100">
-                <a:solidFill>
-                  <a:srgbClr val="404040"/>
-                </a:solidFill>
-              </a:rPr>
-              <a:t>보안/컴플라이언스</a:t>
-            </a:r>
-          </a:p>
-        </p:txBody>
-      </p:sp>
-      <p:sp>
-        <p:nvSpPr>
-          <p:cNvPr id="16" name="Rounded Rectangle 15"/>
-          <p:cNvSpPr/>
-          <p:nvPr/>
-        </p:nvSpPr>
-        <p:spPr>
-          <a:xfrm>
-            <a:off x="1920240" y="2623322"/>
-            <a:ext cx="2453335" cy="548640"/>
-          </a:xfrm>
-          <a:prstGeom prst="roundRect">
+            <a:off x="457200" y="3145536"/>
+            <a:ext cx="11274552" cy="18288"/>
+          </a:xfrm>
+          <a:prstGeom prst="rect">
             <a:avLst/>
           </a:prstGeom>
           <a:solidFill>
@@ -13043,39 +12142,27 @@
           <a:bodyPr rtlCol="0" anchor="ctr"/>
           <a:lstStyle/>
           <a:p>
-            <a:r>
-              <a:rPr sz="1100">
-                <a:solidFill>
-                  <a:srgbClr val="FFFFFF"/>
-                </a:solidFill>
-              </a:rPr>
-              <a:t>VPC/네트워크 설계</a:t>
-            </a:r>
-          </a:p>
-        </p:txBody>
-      </p:sp>
-      <p:sp>
-        <p:nvSpPr>
-          <p:cNvPr id="17" name="Rounded Rectangle 16"/>
+            <a:pPr algn="ctr"/>
+          </a:p>
+        </p:txBody>
+      </p:sp>
+      <p:sp>
+        <p:nvSpPr>
+          <p:cNvPr id="23" name="Oval 22"/>
           <p:cNvSpPr/>
           <p:nvPr/>
         </p:nvSpPr>
         <p:spPr>
           <a:xfrm>
-            <a:off x="4373575" y="2623322"/>
-            <a:ext cx="4906670" cy="548640"/>
-          </a:xfrm>
-          <a:prstGeom prst="roundRect">
+            <a:off x="1444752" y="2926080"/>
+            <a:ext cx="548640" cy="548640"/>
+          </a:xfrm>
+          <a:prstGeom prst="ellipse">
             <a:avLst/>
           </a:prstGeom>
           <a:solidFill>
             <a:srgbClr val="0043DA"/>
           </a:solidFill>
-          <a:ln>
-            <a:solidFill>
-              <a:srgbClr val="0043DA"/>
-            </a:solidFill>
-          </a:ln>
         </p:spPr>
         <p:style>
           <a:lnRef idx="1">
@@ -13096,38 +12183,33 @@
           <a:lstStyle/>
           <a:p>
             <a:r>
-              <a:rPr sz="1100">
+              <a:rPr sz="1400">
                 <a:solidFill>
                   <a:srgbClr val="FFFFFF"/>
                 </a:solidFill>
               </a:rPr>
-              <a:t>MSK 클러스터 구성</a:t>
-            </a:r>
-          </a:p>
-        </p:txBody>
-      </p:sp>
-      <p:sp>
-        <p:nvSpPr>
-          <p:cNvPr id="18" name="Rounded Rectangle 17"/>
+              <a:t>1</a:t>
+            </a:r>
+          </a:p>
+        </p:txBody>
+      </p:sp>
+      <p:sp>
+        <p:nvSpPr>
+          <p:cNvPr id="24" name="Oval 23"/>
           <p:cNvSpPr/>
           <p:nvPr/>
         </p:nvSpPr>
         <p:spPr>
           <a:xfrm>
-            <a:off x="5599785" y="3628248"/>
-            <a:ext cx="2453335" cy="548640"/>
-          </a:xfrm>
-          <a:prstGeom prst="roundRect">
+            <a:off x="4288536" y="2926080"/>
+            <a:ext cx="548640" cy="548640"/>
+          </a:xfrm>
+          <a:prstGeom prst="ellipse">
             <a:avLst/>
           </a:prstGeom>
           <a:solidFill>
-            <a:srgbClr val="3A7BD5"/>
+            <a:srgbClr val="0043DA"/>
           </a:solidFill>
-          <a:ln>
-            <a:solidFill>
-              <a:srgbClr val="3A7BD5"/>
-            </a:solidFill>
-          </a:ln>
         </p:spPr>
         <p:style>
           <a:lnRef idx="1">
@@ -13148,38 +12230,33 @@
           <a:lstStyle/>
           <a:p>
             <a:r>
-              <a:rPr sz="1100">
+              <a:rPr sz="1400">
                 <a:solidFill>
                   <a:srgbClr val="FFFFFF"/>
                 </a:solidFill>
               </a:rPr>
-              <a:t>파일럿 테스트</a:t>
-            </a:r>
-          </a:p>
-        </p:txBody>
-      </p:sp>
-      <p:sp>
-        <p:nvSpPr>
-          <p:cNvPr id="19" name="Rounded Rectangle 18"/>
+              <a:t>2</a:t>
+            </a:r>
+          </a:p>
+        </p:txBody>
+      </p:sp>
+      <p:sp>
+        <p:nvSpPr>
+          <p:cNvPr id="25" name="Oval 24"/>
           <p:cNvSpPr/>
           <p:nvPr/>
         </p:nvSpPr>
         <p:spPr>
           <a:xfrm>
-            <a:off x="8053120" y="3628248"/>
-            <a:ext cx="3680460" cy="548640"/>
-          </a:xfrm>
-          <a:prstGeom prst="roundRect">
+            <a:off x="7141464" y="2926080"/>
+            <a:ext cx="548640" cy="548640"/>
+          </a:xfrm>
+          <a:prstGeom prst="ellipse">
             <a:avLst/>
           </a:prstGeom>
           <a:solidFill>
-            <a:srgbClr val="3A7BD5"/>
+            <a:srgbClr val="0043DA"/>
           </a:solidFill>
-          <a:ln>
-            <a:solidFill>
-              <a:srgbClr val="3A7BD5"/>
-            </a:solidFill>
-          </a:ln>
         </p:spPr>
         <p:style>
           <a:lnRef idx="1">
@@ -13200,38 +12277,33 @@
           <a:lstStyle/>
           <a:p>
             <a:r>
-              <a:rPr sz="1100">
+              <a:rPr sz="1400">
                 <a:solidFill>
                   <a:srgbClr val="FFFFFF"/>
                 </a:solidFill>
               </a:rPr>
-              <a:t>데이터 이전</a:t>
-            </a:r>
-          </a:p>
-        </p:txBody>
-      </p:sp>
-      <p:sp>
-        <p:nvSpPr>
-          <p:cNvPr id="20" name="Rounded Rectangle 19"/>
+              <a:t>3</a:t>
+            </a:r>
+          </a:p>
+        </p:txBody>
+      </p:sp>
+      <p:sp>
+        <p:nvSpPr>
+          <p:cNvPr id="26" name="Oval 25"/>
           <p:cNvSpPr/>
           <p:nvPr/>
         </p:nvSpPr>
         <p:spPr>
           <a:xfrm>
-            <a:off x="8053120" y="4633173"/>
-            <a:ext cx="1839772" cy="548640"/>
-          </a:xfrm>
-          <a:prstGeom prst="roundRect">
+            <a:off x="9985248" y="2926080"/>
+            <a:ext cx="548640" cy="548640"/>
+          </a:xfrm>
+          <a:prstGeom prst="ellipse">
             <a:avLst/>
           </a:prstGeom>
           <a:solidFill>
-            <a:srgbClr val="6B9FFF"/>
+            <a:srgbClr val="0043DA"/>
           </a:solidFill>
-          <a:ln>
-            <a:solidFill>
-              <a:srgbClr val="6B9FFF"/>
-            </a:solidFill>
-          </a:ln>
         </p:spPr>
         <p:style>
           <a:lnRef idx="1">
@@ -13252,38 +12324,33 @@
           <a:lstStyle/>
           <a:p>
             <a:r>
-              <a:rPr sz="1100">
+              <a:rPr sz="1400">
                 <a:solidFill>
                   <a:srgbClr val="FFFFFF"/>
                 </a:solidFill>
               </a:rPr>
-              <a:t>모니터링 구성</a:t>
-            </a:r>
-          </a:p>
-        </p:txBody>
-      </p:sp>
-      <p:sp>
-        <p:nvSpPr>
-          <p:cNvPr id="21" name="Rounded Rectangle 20"/>
+              <a:t>4</a:t>
+            </a:r>
+          </a:p>
+        </p:txBody>
+      </p:sp>
+      <p:sp>
+        <p:nvSpPr>
+          <p:cNvPr id="27" name="Rounded Rectangle 26"/>
           <p:cNvSpPr/>
           <p:nvPr/>
         </p:nvSpPr>
         <p:spPr>
           <a:xfrm>
-            <a:off x="9280245" y="4633173"/>
-            <a:ext cx="2453335" cy="548640"/>
+            <a:off x="1261872" y="2395728"/>
+            <a:ext cx="914400" cy="384048"/>
           </a:xfrm>
           <a:prstGeom prst="roundRect">
             <a:avLst/>
           </a:prstGeom>
           <a:solidFill>
-            <a:srgbClr val="6B9FFF"/>
+            <a:srgbClr val="0043DA"/>
           </a:solidFill>
-          <a:ln>
-            <a:solidFill>
-              <a:srgbClr val="6B9FFF"/>
-            </a:solidFill>
-          </a:ln>
         </p:spPr>
         <p:style>
           <a:lnRef idx="1">
@@ -13309,33 +12376,28 @@
                   <a:srgbClr val="FFFFFF"/>
                 </a:solidFill>
               </a:rPr>
-              <a:t>운영팀 이관</a:t>
-            </a:r>
-          </a:p>
-        </p:txBody>
-      </p:sp>
-      <p:sp>
-        <p:nvSpPr>
-          <p:cNvPr id="22" name="Rounded Rectangle 21"/>
+              <a:t>2024.01</a:t>
+            </a:r>
+          </a:p>
+        </p:txBody>
+      </p:sp>
+      <p:sp>
+        <p:nvSpPr>
+          <p:cNvPr id="28" name="Rounded Rectangle 27"/>
           <p:cNvSpPr/>
           <p:nvPr/>
         </p:nvSpPr>
         <p:spPr>
           <a:xfrm>
-            <a:off x="1920240" y="5639013"/>
-            <a:ext cx="9813340" cy="548640"/>
+            <a:off x="4105656" y="3630168"/>
+            <a:ext cx="914400" cy="384048"/>
           </a:xfrm>
           <a:prstGeom prst="roundRect">
             <a:avLst/>
           </a:prstGeom>
           <a:solidFill>
-            <a:srgbClr val="8AB4F8"/>
+            <a:srgbClr val="0043DA"/>
           </a:solidFill>
-          <a:ln>
-            <a:solidFill>
-              <a:srgbClr val="8AB4F8"/>
-            </a:solidFill>
-          </a:ln>
         </p:spPr>
         <p:style>
           <a:lnRef idx="1">
@@ -13361,16 +12423,727 @@
                   <a:srgbClr val="FFFFFF"/>
                 </a:solidFill>
               </a:rPr>
-              <a:t>IAM/암호화/VPC 검증</a:t>
-            </a:r>
-          </a:p>
-        </p:txBody>
-      </p:sp>
+              <a:t>2024.04</a:t>
+            </a:r>
+          </a:p>
+        </p:txBody>
+      </p:sp>
+      <p:sp>
+        <p:nvSpPr>
+          <p:cNvPr id="29" name="Rounded Rectangle 28"/>
+          <p:cNvSpPr/>
+          <p:nvPr/>
+        </p:nvSpPr>
+        <p:spPr>
+          <a:xfrm>
+            <a:off x="6958584" y="2395728"/>
+            <a:ext cx="914400" cy="384048"/>
+          </a:xfrm>
+          <a:prstGeom prst="roundRect">
+            <a:avLst/>
+          </a:prstGeom>
+          <a:solidFill>
+            <a:srgbClr val="0043DA"/>
+          </a:solidFill>
+        </p:spPr>
+        <p:style>
+          <a:lnRef idx="1">
+            <a:schemeClr val="accent1"/>
+          </a:lnRef>
+          <a:fillRef idx="3">
+            <a:schemeClr val="accent1"/>
+          </a:fillRef>
+          <a:effectRef idx="2">
+            <a:schemeClr val="accent1"/>
+          </a:effectRef>
+          <a:fontRef idx="minor">
+            <a:schemeClr val="lt1"/>
+          </a:fontRef>
+        </p:style>
+        <p:txBody>
+          <a:bodyPr rtlCol="0" anchor="ctr"/>
+          <a:lstStyle/>
+          <a:p>
+            <a:r>
+              <a:rPr sz="1100">
+                <a:solidFill>
+                  <a:srgbClr val="FFFFFF"/>
+                </a:solidFill>
+              </a:rPr>
+              <a:t>2024.07</a:t>
+            </a:r>
+          </a:p>
+        </p:txBody>
+      </p:sp>
+      <p:sp>
+        <p:nvSpPr>
+          <p:cNvPr id="30" name="Rounded Rectangle 29"/>
+          <p:cNvSpPr/>
+          <p:nvPr/>
+        </p:nvSpPr>
+        <p:spPr>
+          <a:xfrm>
+            <a:off x="9802368" y="3630168"/>
+            <a:ext cx="914400" cy="384048"/>
+          </a:xfrm>
+          <a:prstGeom prst="roundRect">
+            <a:avLst/>
+          </a:prstGeom>
+          <a:solidFill>
+            <a:srgbClr val="0043DA"/>
+          </a:solidFill>
+        </p:spPr>
+        <p:style>
+          <a:lnRef idx="1">
+            <a:schemeClr val="accent1"/>
+          </a:lnRef>
+          <a:fillRef idx="3">
+            <a:schemeClr val="accent1"/>
+          </a:fillRef>
+          <a:effectRef idx="2">
+            <a:schemeClr val="accent1"/>
+          </a:effectRef>
+          <a:fontRef idx="minor">
+            <a:schemeClr val="lt1"/>
+          </a:fontRef>
+        </p:style>
+        <p:txBody>
+          <a:bodyPr rtlCol="0" anchor="ctr"/>
+          <a:lstStyle/>
+          <a:p>
+            <a:r>
+              <a:rPr sz="1100">
+                <a:solidFill>
+                  <a:srgbClr val="FFFFFF"/>
+                </a:solidFill>
+              </a:rPr>
+              <a:t>2024.10</a:t>
+            </a:r>
+          </a:p>
+        </p:txBody>
+      </p:sp>
+      <p:sp>
+        <p:nvSpPr>
+          <p:cNvPr id="31" name="Rounded Rectangle 30"/>
+          <p:cNvSpPr/>
+          <p:nvPr/>
+        </p:nvSpPr>
+        <p:spPr>
+          <a:xfrm>
+            <a:off x="621792" y="1325880"/>
+            <a:ext cx="2194560" cy="1508760"/>
+          </a:xfrm>
+          <a:prstGeom prst="roundRect">
+            <a:avLst/>
+          </a:prstGeom>
+          <a:solidFill>
+            <a:srgbClr val="F2F6FC"/>
+          </a:solidFill>
+          <a:ln w="19050">
+            <a:solidFill>
+              <a:srgbClr val="0043DA"/>
+            </a:solidFill>
+          </a:ln>
+        </p:spPr>
+        <p:style>
+          <a:lnRef idx="1">
+            <a:schemeClr val="accent1"/>
+          </a:lnRef>
+          <a:fillRef idx="3">
+            <a:schemeClr val="accent1"/>
+          </a:fillRef>
+          <a:effectRef idx="2">
+            <a:schemeClr val="accent1"/>
+          </a:effectRef>
+          <a:fontRef idx="minor">
+            <a:schemeClr val="lt1"/>
+          </a:fontRef>
+        </p:style>
+        <p:txBody>
+          <a:bodyPr rtlCol="0" anchor="ctr"/>
+          <a:lstStyle/>
+          <a:p>
+            <a:pPr algn="ctr"/>
+          </a:p>
+        </p:txBody>
+      </p:sp>
+      <p:sp>
+        <p:nvSpPr>
+          <p:cNvPr id="32" name="Rounded Rectangle 31"/>
+          <p:cNvSpPr/>
+          <p:nvPr/>
+        </p:nvSpPr>
+        <p:spPr>
+          <a:xfrm>
+            <a:off x="3465576" y="4114800"/>
+            <a:ext cx="2194560" cy="1600200"/>
+          </a:xfrm>
+          <a:prstGeom prst="roundRect">
+            <a:avLst/>
+          </a:prstGeom>
+          <a:solidFill>
+            <a:srgbClr val="F2F6FC"/>
+          </a:solidFill>
+          <a:ln w="19050">
+            <a:solidFill>
+              <a:srgbClr val="0043DA"/>
+            </a:solidFill>
+          </a:ln>
+        </p:spPr>
+        <p:style>
+          <a:lnRef idx="1">
+            <a:schemeClr val="accent1"/>
+          </a:lnRef>
+          <a:fillRef idx="3">
+            <a:schemeClr val="accent1"/>
+          </a:fillRef>
+          <a:effectRef idx="2">
+            <a:schemeClr val="accent1"/>
+          </a:effectRef>
+          <a:fontRef idx="minor">
+            <a:schemeClr val="lt1"/>
+          </a:fontRef>
+        </p:style>
+        <p:txBody>
+          <a:bodyPr rtlCol="0" anchor="ctr"/>
+          <a:lstStyle/>
+          <a:p>
+            <a:pPr algn="ctr"/>
+          </a:p>
+        </p:txBody>
+      </p:sp>
+      <p:sp>
+        <p:nvSpPr>
+          <p:cNvPr id="33" name="Rounded Rectangle 32"/>
+          <p:cNvSpPr/>
+          <p:nvPr/>
+        </p:nvSpPr>
+        <p:spPr>
+          <a:xfrm>
+            <a:off x="6318504" y="1325880"/>
+            <a:ext cx="2194560" cy="1508760"/>
+          </a:xfrm>
+          <a:prstGeom prst="roundRect">
+            <a:avLst/>
+          </a:prstGeom>
+          <a:solidFill>
+            <a:srgbClr val="F2F6FC"/>
+          </a:solidFill>
+          <a:ln w="19050">
+            <a:solidFill>
+              <a:srgbClr val="0043DA"/>
+            </a:solidFill>
+          </a:ln>
+        </p:spPr>
+        <p:style>
+          <a:lnRef idx="1">
+            <a:schemeClr val="accent1"/>
+          </a:lnRef>
+          <a:fillRef idx="3">
+            <a:schemeClr val="accent1"/>
+          </a:fillRef>
+          <a:effectRef idx="2">
+            <a:schemeClr val="accent1"/>
+          </a:effectRef>
+          <a:fontRef idx="minor">
+            <a:schemeClr val="lt1"/>
+          </a:fontRef>
+        </p:style>
+        <p:txBody>
+          <a:bodyPr rtlCol="0" anchor="ctr"/>
+          <a:lstStyle/>
+          <a:p>
+            <a:pPr algn="ctr"/>
+          </a:p>
+        </p:txBody>
+      </p:sp>
+      <p:sp>
+        <p:nvSpPr>
+          <p:cNvPr id="34" name="Rounded Rectangle 33"/>
+          <p:cNvSpPr/>
+          <p:nvPr/>
+        </p:nvSpPr>
+        <p:spPr>
+          <a:xfrm>
+            <a:off x="9162288" y="4114800"/>
+            <a:ext cx="2194560" cy="1600200"/>
+          </a:xfrm>
+          <a:prstGeom prst="roundRect">
+            <a:avLst/>
+          </a:prstGeom>
+          <a:solidFill>
+            <a:srgbClr val="F2F6FC"/>
+          </a:solidFill>
+          <a:ln w="19050">
+            <a:solidFill>
+              <a:srgbClr val="0043DA"/>
+            </a:solidFill>
+          </a:ln>
+        </p:spPr>
+        <p:style>
+          <a:lnRef idx="1">
+            <a:schemeClr val="accent1"/>
+          </a:lnRef>
+          <a:fillRef idx="3">
+            <a:schemeClr val="accent1"/>
+          </a:fillRef>
+          <a:effectRef idx="2">
+            <a:schemeClr val="accent1"/>
+          </a:effectRef>
+          <a:fontRef idx="minor">
+            <a:schemeClr val="lt1"/>
+          </a:fontRef>
+        </p:style>
+        <p:txBody>
+          <a:bodyPr rtlCol="0" anchor="ctr"/>
+          <a:lstStyle/>
+          <a:p>
+            <a:pPr algn="ctr"/>
+          </a:p>
+        </p:txBody>
+      </p:sp>
+      <p:sp>
+        <p:nvSpPr>
+          <p:cNvPr id="35" name="TextBox 34"/>
+          <p:cNvSpPr txBox="1"/>
+          <p:nvPr/>
+        </p:nvSpPr>
+        <p:spPr>
+          <a:xfrm>
+            <a:off x="713232" y="1417320"/>
+            <a:ext cx="2011680" cy="320040"/>
+          </a:xfrm>
+          <a:prstGeom prst="rect">
+            <a:avLst/>
+          </a:prstGeom>
+          <a:noFill/>
+        </p:spPr>
+        <p:txBody>
+          <a:bodyPr wrap="square">
+            <a:spAutoFit/>
+          </a:bodyPr>
+          <a:lstStyle/>
+          <a:p>
+            <a:r>
+              <a:rPr sz="1300" b="1">
+                <a:solidFill>
+                  <a:srgbClr val="0043DA"/>
+                </a:solidFill>
+              </a:rPr>
+              <a:t>환경 설계</a:t>
+            </a:r>
+          </a:p>
+        </p:txBody>
+      </p:sp>
+      <p:sp>
+        <p:nvSpPr>
+          <p:cNvPr id="36" name="TextBox 35"/>
+          <p:cNvSpPr txBox="1"/>
+          <p:nvPr/>
+        </p:nvSpPr>
+        <p:spPr>
+          <a:xfrm>
+            <a:off x="3557016" y="4206240"/>
+            <a:ext cx="2011680" cy="320040"/>
+          </a:xfrm>
+          <a:prstGeom prst="rect">
+            <a:avLst/>
+          </a:prstGeom>
+          <a:noFill/>
+        </p:spPr>
+        <p:txBody>
+          <a:bodyPr wrap="square">
+            <a:spAutoFit/>
+          </a:bodyPr>
+          <a:lstStyle/>
+          <a:p>
+            <a:r>
+              <a:rPr sz="1300" b="1">
+                <a:solidFill>
+                  <a:srgbClr val="0043DA"/>
+                </a:solidFill>
+              </a:rPr>
+              <a:t>클러스터 구축</a:t>
+            </a:r>
+          </a:p>
+        </p:txBody>
+      </p:sp>
+      <p:sp>
+        <p:nvSpPr>
+          <p:cNvPr id="37" name="TextBox 36"/>
+          <p:cNvSpPr txBox="1"/>
+          <p:nvPr/>
+        </p:nvSpPr>
+        <p:spPr>
+          <a:xfrm>
+            <a:off x="6409944" y="1417320"/>
+            <a:ext cx="2011680" cy="320040"/>
+          </a:xfrm>
+          <a:prstGeom prst="rect">
+            <a:avLst/>
+          </a:prstGeom>
+          <a:noFill/>
+        </p:spPr>
+        <p:txBody>
+          <a:bodyPr wrap="square">
+            <a:spAutoFit/>
+          </a:bodyPr>
+          <a:lstStyle/>
+          <a:p>
+            <a:r>
+              <a:rPr sz="1300" b="1">
+                <a:solidFill>
+                  <a:srgbClr val="0043DA"/>
+                </a:solidFill>
+              </a:rPr>
+              <a:t>검증 및 최적화</a:t>
+            </a:r>
+          </a:p>
+        </p:txBody>
+      </p:sp>
+      <p:sp>
+        <p:nvSpPr>
+          <p:cNvPr id="38" name="TextBox 37"/>
+          <p:cNvSpPr txBox="1"/>
+          <p:nvPr/>
+        </p:nvSpPr>
+        <p:spPr>
+          <a:xfrm>
+            <a:off x="9253728" y="4206240"/>
+            <a:ext cx="2011680" cy="320040"/>
+          </a:xfrm>
+          <a:prstGeom prst="rect">
+            <a:avLst/>
+          </a:prstGeom>
+          <a:noFill/>
+        </p:spPr>
+        <p:txBody>
+          <a:bodyPr wrap="square">
+            <a:spAutoFit/>
+          </a:bodyPr>
+          <a:lstStyle/>
+          <a:p>
+            <a:r>
+              <a:rPr sz="1300" b="1">
+                <a:solidFill>
+                  <a:srgbClr val="0043DA"/>
+                </a:solidFill>
+              </a:rPr>
+              <a:t>운영 안정화</a:t>
+            </a:r>
+          </a:p>
+        </p:txBody>
+      </p:sp>
+      <p:sp>
+        <p:nvSpPr>
+          <p:cNvPr id="39" name="TextBox 38"/>
+          <p:cNvSpPr txBox="1"/>
+          <p:nvPr/>
+        </p:nvSpPr>
+        <p:spPr>
+          <a:xfrm>
+            <a:off x="713232" y="1764792"/>
+            <a:ext cx="2011680" cy="1005840"/>
+          </a:xfrm>
+          <a:prstGeom prst="rect">
+            <a:avLst/>
+          </a:prstGeom>
+          <a:noFill/>
+        </p:spPr>
+        <p:txBody>
+          <a:bodyPr wrap="square">
+            <a:spAutoFit/>
+          </a:bodyPr>
+          <a:lstStyle/>
+          <a:p>
+            <a:r>
+              <a:rPr sz="1000">
+                <a:solidFill>
+                  <a:srgbClr val="4A4A4A"/>
+                </a:solidFill>
+              </a:rPr>
+              <a:t>• VPC/서브넷 설계</a:t>
+            </a:r>
+          </a:p>
+          <a:p>
+            <a:r>
+              <a:rPr sz="1000">
+                <a:solidFill>
+                  <a:srgbClr val="4A4A4A"/>
+                </a:solidFill>
+              </a:rPr>
+              <a:t>• 브로커 수 산정</a:t>
+            </a:r>
+          </a:p>
+          <a:p>
+            <a:r>
+              <a:rPr sz="1000">
+                <a:solidFill>
+                  <a:srgbClr val="4A4A4A"/>
+                </a:solidFill>
+              </a:rPr>
+              <a:t>• 인증 방식 결정</a:t>
+            </a:r>
+          </a:p>
+        </p:txBody>
+      </p:sp>
+      <p:sp>
+        <p:nvSpPr>
+          <p:cNvPr id="40" name="TextBox 39"/>
+          <p:cNvSpPr txBox="1"/>
+          <p:nvPr/>
+        </p:nvSpPr>
+        <p:spPr>
+          <a:xfrm>
+            <a:off x="3557016" y="4553712"/>
+            <a:ext cx="2011680" cy="1005840"/>
+          </a:xfrm>
+          <a:prstGeom prst="rect">
+            <a:avLst/>
+          </a:prstGeom>
+          <a:noFill/>
+        </p:spPr>
+        <p:txBody>
+          <a:bodyPr wrap="square">
+            <a:spAutoFit/>
+          </a:bodyPr>
+          <a:lstStyle/>
+          <a:p>
+            <a:r>
+              <a:rPr sz="1000">
+                <a:solidFill>
+                  <a:srgbClr val="4A4A4A"/>
+                </a:solidFill>
+              </a:rPr>
+              <a:t>• MSK 클러스터 프로비저닝</a:t>
+            </a:r>
+          </a:p>
+          <a:p>
+            <a:r>
+              <a:rPr sz="1000">
+                <a:solidFill>
+                  <a:srgbClr val="4A4A4A"/>
+                </a:solidFill>
+              </a:rPr>
+              <a:t>• IAM 정책 설정</a:t>
+            </a:r>
+          </a:p>
+          <a:p>
+            <a:r>
+              <a:rPr sz="1000">
+                <a:solidFill>
+                  <a:srgbClr val="4A4A4A"/>
+                </a:solidFill>
+              </a:rPr>
+              <a:t>• 모니터링 에이전트 배포</a:t>
+            </a:r>
+          </a:p>
+        </p:txBody>
+      </p:sp>
+      <p:sp>
+        <p:nvSpPr>
+          <p:cNvPr id="41" name="TextBox 40"/>
+          <p:cNvSpPr txBox="1"/>
+          <p:nvPr/>
+        </p:nvSpPr>
+        <p:spPr>
+          <a:xfrm>
+            <a:off x="6409944" y="1764792"/>
+            <a:ext cx="2011680" cy="1005840"/>
+          </a:xfrm>
+          <a:prstGeom prst="rect">
+            <a:avLst/>
+          </a:prstGeom>
+          <a:noFill/>
+        </p:spPr>
+        <p:txBody>
+          <a:bodyPr wrap="square">
+            <a:spAutoFit/>
+          </a:bodyPr>
+          <a:lstStyle/>
+          <a:p>
+            <a:r>
+              <a:rPr sz="1000">
+                <a:solidFill>
+                  <a:srgbClr val="4A4A4A"/>
+                </a:solidFill>
+              </a:rPr>
+              <a:t>• 성능 벤치마크</a:t>
+            </a:r>
+          </a:p>
+          <a:p>
+            <a:r>
+              <a:rPr sz="1000">
+                <a:solidFill>
+                  <a:srgbClr val="4A4A4A"/>
+                </a:solidFill>
+              </a:rPr>
+              <a:t>• 장애 복구 테스트</a:t>
+            </a:r>
+          </a:p>
+          <a:p>
+            <a:r>
+              <a:rPr sz="1000">
+                <a:solidFill>
+                  <a:srgbClr val="4A4A4A"/>
+                </a:solidFill>
+              </a:rPr>
+              <a:t>• 파티션 최적화</a:t>
+            </a:r>
+          </a:p>
+        </p:txBody>
+      </p:sp>
+      <p:sp>
+        <p:nvSpPr>
+          <p:cNvPr id="42" name="TextBox 41"/>
+          <p:cNvSpPr txBox="1"/>
+          <p:nvPr/>
+        </p:nvSpPr>
+        <p:spPr>
+          <a:xfrm>
+            <a:off x="9253728" y="4553712"/>
+            <a:ext cx="2011680" cy="1005840"/>
+          </a:xfrm>
+          <a:prstGeom prst="rect">
+            <a:avLst/>
+          </a:prstGeom>
+          <a:noFill/>
+        </p:spPr>
+        <p:txBody>
+          <a:bodyPr wrap="square">
+            <a:spAutoFit/>
+          </a:bodyPr>
+          <a:lstStyle/>
+          <a:p>
+            <a:r>
+              <a:rPr sz="1000">
+                <a:solidFill>
+                  <a:srgbClr val="4A4A4A"/>
+                </a:solidFill>
+              </a:rPr>
+              <a:t>• 24/7 모니터링 구성</a:t>
+            </a:r>
+          </a:p>
+          <a:p>
+            <a:r>
+              <a:rPr sz="1000">
+                <a:solidFill>
+                  <a:srgbClr val="4A4A4A"/>
+                </a:solidFill>
+              </a:rPr>
+              <a:t>• 알람 임계값 튜닝</a:t>
+            </a:r>
+          </a:p>
+          <a:p>
+            <a:r>
+              <a:rPr sz="1000">
+                <a:solidFill>
+                  <a:srgbClr val="4A4A4A"/>
+                </a:solidFill>
+              </a:rPr>
+              <a:t>• 스케일링 정책 수립</a:t>
+            </a:r>
+          </a:p>
+        </p:txBody>
+      </p:sp>
+      <p:pic>
+        <p:nvPicPr>
+          <p:cNvPr id="43" name="Picture 42" descr="deploy.png"/>
+          <p:cNvPicPr>
+            <a:picLocks noChangeAspect="1"/>
+          </p:cNvPicPr>
+          <p:nvPr/>
+        </p:nvPicPr>
+        <p:blipFill>
+          <a:blip r:embed="rId2"/>
+          <a:stretch>
+            <a:fillRect/>
+          </a:stretch>
+        </p:blipFill>
+        <p:spPr>
+          <a:xfrm>
+            <a:off x="2441448" y="1417320"/>
+            <a:ext cx="365760" cy="365760"/>
+          </a:xfrm>
+          <a:prstGeom prst="rect">
+            <a:avLst/>
+          </a:prstGeom>
+        </p:spPr>
+      </p:pic>
+      <p:pic>
+        <p:nvPicPr>
+          <p:cNvPr id="44" name="Picture 43" descr="cluster.png"/>
+          <p:cNvPicPr>
+            <a:picLocks noChangeAspect="1"/>
+          </p:cNvPicPr>
+          <p:nvPr/>
+        </p:nvPicPr>
+        <p:blipFill>
+          <a:blip r:embed="rId3"/>
+          <a:stretch>
+            <a:fillRect/>
+          </a:stretch>
+        </p:blipFill>
+        <p:spPr>
+          <a:xfrm>
+            <a:off x="5285232" y="4206240"/>
+            <a:ext cx="365760" cy="365760"/>
+          </a:xfrm>
+          <a:prstGeom prst="rect">
+            <a:avLst/>
+          </a:prstGeom>
+        </p:spPr>
+      </p:pic>
+      <p:pic>
+        <p:nvPicPr>
+          <p:cNvPr id="45" name="Picture 44" descr="performance.png"/>
+          <p:cNvPicPr>
+            <a:picLocks noChangeAspect="1"/>
+          </p:cNvPicPr>
+          <p:nvPr/>
+        </p:nvPicPr>
+        <p:blipFill>
+          <a:blip r:embed="rId4"/>
+          <a:stretch>
+            <a:fillRect/>
+          </a:stretch>
+        </p:blipFill>
+        <p:spPr>
+          <a:xfrm>
+            <a:off x="8138160" y="1417320"/>
+            <a:ext cx="365760" cy="365760"/>
+          </a:xfrm>
+          <a:prstGeom prst="rect">
+            <a:avLst/>
+          </a:prstGeom>
+        </p:spPr>
+      </p:pic>
+      <p:pic>
+        <p:nvPicPr>
+          <p:cNvPr id="46" name="Picture 45" descr="monitoring.png"/>
+          <p:cNvPicPr>
+            <a:picLocks noChangeAspect="1"/>
+          </p:cNvPicPr>
+          <p:nvPr/>
+        </p:nvPicPr>
+        <p:blipFill>
+          <a:blip r:embed="rId5"/>
+          <a:stretch>
+            <a:fillRect/>
+          </a:stretch>
+        </p:blipFill>
+        <p:spPr>
+          <a:xfrm>
+            <a:off x="10981944" y="4206240"/>
+            <a:ext cx="365760" cy="365760"/>
+          </a:xfrm>
+          <a:prstGeom prst="rect">
+            <a:avLst/>
+          </a:prstGeom>
+        </p:spPr>
+      </p:pic>
     </p:spTree>
   </p:cSld>
-  <p:clrMapOvr>
-    <a:masterClrMapping/>
-  </p:clrMapOvr>
 </p:sld>
 </file>
 
@@ -13398,12 +13171,7 @@
         <p:txBody>
           <a:bodyPr/>
           <a:lstStyle/>
-          <a:p>
-            <a:r>
-              <a:rPr lang="ko-KR" altLang="en-US" dirty="0"/>
-              <a:t>L08. Funnel</a:t>
-            </a:r>
-          </a:p>
+          <a:p/>
         </p:txBody>
       </p:sp>
       <p:sp>
@@ -13414,7 +13182,7 @@
         </p:nvSpPr>
         <p:spPr>
           <a:xfrm>
-            <a:off x="355701" y="557784"/>
+            <a:off x="355610" y="557509"/>
             <a:ext cx="3291840" cy="932688"/>
           </a:xfrm>
           <a:prstGeom prst="rect">
@@ -13433,9 +13201,9 @@
                 <a:solidFill>
                   <a:srgbClr val="0043DA"/>
                 </a:solidFill>
-                <a:latin typeface="프리젠테이션 7"/>
-              </a:rPr>
-              <a:t>L08. Funnel</a:t>
+                <a:latin typeface="프리젠테이션 7 Bold"/>
+              </a:rPr>
+              <a:t>L07. Roadmap Timeline</a:t>
             </a:r>
           </a:p>
         </p:txBody>
@@ -13448,8 +13216,8 @@
         </p:nvSpPr>
         <p:spPr>
           <a:xfrm>
-            <a:off x="3760927" y="557784"/>
-            <a:ext cx="8431042" cy="932688"/>
+            <a:off x="3760927" y="557509"/>
+            <a:ext cx="8430768" cy="932688"/>
           </a:xfrm>
           <a:prstGeom prst="rect">
             <a:avLst/>
@@ -13465,103 +13233,35 @@
             <a:r>
               <a:rPr sz="1200" b="0">
                 <a:solidFill>
-                  <a:srgbClr val="000000"/>
-                </a:solidFill>
-                <a:latin typeface="프리젠테이션 5"/>
-              </a:rPr>
-              <a:t>깔때기 다이어그램 — 단계별 필터링으로 최적 기술 선택</a:t>
-            </a:r>
-          </a:p>
-        </p:txBody>
-      </p:sp>
-      <p:sp>
-        <p:nvSpPr>
-          <p:cNvPr id="5" name="TextBox 4"/>
-          <p:cNvSpPr txBox="1"/>
-          <p:nvPr/>
-        </p:nvSpPr>
-        <p:spPr>
-          <a:xfrm>
-            <a:off x="457200" y="1600200"/>
-            <a:ext cx="11734495" cy="320040"/>
-          </a:xfrm>
-          <a:prstGeom prst="rect">
-            <a:avLst/>
-          </a:prstGeom>
-          <a:noFill/>
-        </p:spPr>
-        <p:txBody>
-          <a:bodyPr wrap="square">
-            <a:spAutoFit/>
-          </a:bodyPr>
-          <a:lstStyle/>
-          <a:p>
-            <a:r>
-              <a:rPr sz="1600" b="1">
-                <a:solidFill>
-                  <a:srgbClr val="0043DA"/>
-                </a:solidFill>
-                <a:latin typeface="프리젠테이션 7"/>
-              </a:rPr>
-              <a:t>MSK 도입 의사결정 깔때기</a:t>
-            </a:r>
-          </a:p>
-        </p:txBody>
-      </p:sp>
-      <p:sp>
-        <p:nvSpPr>
-          <p:cNvPr id="6" name="TextBox 5"/>
-          <p:cNvSpPr txBox="1"/>
-          <p:nvPr/>
-        </p:nvSpPr>
-        <p:spPr>
-          <a:xfrm>
-            <a:off x="457200" y="1966874"/>
-            <a:ext cx="11734495" cy="274320"/>
-          </a:xfrm>
-          <a:prstGeom prst="rect">
-            <a:avLst/>
-          </a:prstGeom>
-          <a:noFill/>
-        </p:spPr>
-        <p:txBody>
-          <a:bodyPr wrap="square">
-            <a:spAutoFit/>
-          </a:bodyPr>
-          <a:lstStyle/>
-          <a:p>
-            <a:r>
-              <a:rPr sz="1300" b="0">
-                <a:solidFill>
-                  <a:srgbClr val="404040"/>
-                </a:solidFill>
-                <a:latin typeface="프리젠테이션 5"/>
-              </a:rPr>
-              <a:t>후보 기술부터 최종 선택까지 4가지 평가 기준으로 필터링</a:t>
-            </a:r>
-          </a:p>
-        </p:txBody>
-      </p:sp>
-      <p:sp>
-        <p:nvSpPr>
-          <p:cNvPr id="7" name="Rounded Rectangle 6"/>
+                  <a:srgbClr val="212121"/>
+                </a:solidFill>
+                <a:latin typeface="프리젠테이션 5 Medium"/>
+              </a:rPr>
+              <a:t>수영장 레인 구조 — 복수 워크스트림 병렬 진행</a:t>
+            </a:r>
+          </a:p>
+        </p:txBody>
+      </p:sp>
+      <p:sp>
+        <p:nvSpPr>
+          <p:cNvPr id="5" name="Rectangle 4"/>
           <p:cNvSpPr/>
           <p:nvPr/>
         </p:nvSpPr>
         <p:spPr>
           <a:xfrm>
-            <a:off x="457200" y="2702052"/>
-            <a:ext cx="7315200" cy="694944"/>
-          </a:xfrm>
-          <a:prstGeom prst="roundRect">
+            <a:off x="355610" y="1496689"/>
+            <a:ext cx="11480292" cy="9144"/>
+          </a:xfrm>
+          <a:prstGeom prst="rect">
             <a:avLst/>
           </a:prstGeom>
           <a:solidFill>
-            <a:srgbClr val="E6F0FF"/>
+            <a:srgbClr val="DCDCDC"/>
           </a:solidFill>
           <a:ln>
             <a:solidFill>
-              <a:srgbClr val="E6F0FF"/>
+              <a:srgbClr val="DCDCDC"/>
             </a:solidFill>
           </a:ln>
         </p:spPr>
@@ -13595,18 +13295,18 @@
         </p:nvSpPr>
         <p:spPr>
           <a:xfrm>
-            <a:off x="1005840" y="3451860"/>
-            <a:ext cx="6217920" cy="694944"/>
+            <a:off x="1920240" y="1984157"/>
+            <a:ext cx="2453335" cy="365760"/>
           </a:xfrm>
           <a:prstGeom prst="roundRect">
             <a:avLst/>
           </a:prstGeom>
           <a:solidFill>
-            <a:srgbClr val="C8DCFF"/>
+            <a:srgbClr val="E6F0FF"/>
           </a:solidFill>
-          <a:ln>
+          <a:ln w="9525">
             <a:solidFill>
-              <a:srgbClr val="C8DCFF"/>
+              <a:srgbClr val="DCDCDC"/>
             </a:solidFill>
           </a:ln>
         </p:spPr>
@@ -13628,7 +13328,14 @@
           <a:bodyPr rtlCol="0" anchor="ctr"/>
           <a:lstStyle/>
           <a:p>
-            <a:pPr algn="ctr"/>
+            <a:r>
+              <a:rPr sz="1200">
+                <a:solidFill>
+                  <a:srgbClr val="0043DA"/>
+                </a:solidFill>
+              </a:rPr>
+              <a:t>Q1 2026</a:t>
+            </a:r>
           </a:p>
         </p:txBody>
       </p:sp>
@@ -13640,8 +13347,684 @@
         </p:nvSpPr>
         <p:spPr>
           <a:xfrm>
-            <a:off x="1554480" y="4200753"/>
-            <a:ext cx="5120640" cy="694944"/>
+            <a:off x="4373575" y="1984157"/>
+            <a:ext cx="2453335" cy="365760"/>
+          </a:xfrm>
+          <a:prstGeom prst="roundRect">
+            <a:avLst/>
+          </a:prstGeom>
+          <a:solidFill>
+            <a:srgbClr val="E6F0FF"/>
+          </a:solidFill>
+          <a:ln w="9525">
+            <a:solidFill>
+              <a:srgbClr val="DCDCDC"/>
+            </a:solidFill>
+          </a:ln>
+        </p:spPr>
+        <p:style>
+          <a:lnRef idx="1">
+            <a:schemeClr val="accent1"/>
+          </a:lnRef>
+          <a:fillRef idx="3">
+            <a:schemeClr val="accent1"/>
+          </a:fillRef>
+          <a:effectRef idx="2">
+            <a:schemeClr val="accent1"/>
+          </a:effectRef>
+          <a:fontRef idx="minor">
+            <a:schemeClr val="lt1"/>
+          </a:fontRef>
+        </p:style>
+        <p:txBody>
+          <a:bodyPr rtlCol="0" anchor="ctr"/>
+          <a:lstStyle/>
+          <a:p>
+            <a:r>
+              <a:rPr sz="1200">
+                <a:solidFill>
+                  <a:srgbClr val="0043DA"/>
+                </a:solidFill>
+              </a:rPr>
+              <a:t>Q2 2026</a:t>
+            </a:r>
+          </a:p>
+        </p:txBody>
+      </p:sp>
+      <p:sp>
+        <p:nvSpPr>
+          <p:cNvPr id="10" name="Rounded Rectangle 9"/>
+          <p:cNvSpPr/>
+          <p:nvPr/>
+        </p:nvSpPr>
+        <p:spPr>
+          <a:xfrm>
+            <a:off x="6826910" y="1984157"/>
+            <a:ext cx="2453335" cy="365760"/>
+          </a:xfrm>
+          <a:prstGeom prst="roundRect">
+            <a:avLst/>
+          </a:prstGeom>
+          <a:solidFill>
+            <a:srgbClr val="E6F0FF"/>
+          </a:solidFill>
+          <a:ln w="9525">
+            <a:solidFill>
+              <a:srgbClr val="DCDCDC"/>
+            </a:solidFill>
+          </a:ln>
+        </p:spPr>
+        <p:style>
+          <a:lnRef idx="1">
+            <a:schemeClr val="accent1"/>
+          </a:lnRef>
+          <a:fillRef idx="3">
+            <a:schemeClr val="accent1"/>
+          </a:fillRef>
+          <a:effectRef idx="2">
+            <a:schemeClr val="accent1"/>
+          </a:effectRef>
+          <a:fontRef idx="minor">
+            <a:schemeClr val="lt1"/>
+          </a:fontRef>
+        </p:style>
+        <p:txBody>
+          <a:bodyPr rtlCol="0" anchor="ctr"/>
+          <a:lstStyle/>
+          <a:p>
+            <a:r>
+              <a:rPr sz="1200">
+                <a:solidFill>
+                  <a:srgbClr val="0043DA"/>
+                </a:solidFill>
+              </a:rPr>
+              <a:t>Q3 2026</a:t>
+            </a:r>
+          </a:p>
+        </p:txBody>
+      </p:sp>
+      <p:sp>
+        <p:nvSpPr>
+          <p:cNvPr id="11" name="Rounded Rectangle 10"/>
+          <p:cNvSpPr/>
+          <p:nvPr/>
+        </p:nvSpPr>
+        <p:spPr>
+          <a:xfrm>
+            <a:off x="9280245" y="1984157"/>
+            <a:ext cx="2453335" cy="365760"/>
+          </a:xfrm>
+          <a:prstGeom prst="roundRect">
+            <a:avLst/>
+          </a:prstGeom>
+          <a:solidFill>
+            <a:srgbClr val="E6F0FF"/>
+          </a:solidFill>
+          <a:ln w="9525">
+            <a:solidFill>
+              <a:srgbClr val="DCDCDC"/>
+            </a:solidFill>
+          </a:ln>
+        </p:spPr>
+        <p:style>
+          <a:lnRef idx="1">
+            <a:schemeClr val="accent1"/>
+          </a:lnRef>
+          <a:fillRef idx="3">
+            <a:schemeClr val="accent1"/>
+          </a:fillRef>
+          <a:effectRef idx="2">
+            <a:schemeClr val="accent1"/>
+          </a:effectRef>
+          <a:fontRef idx="minor">
+            <a:schemeClr val="lt1"/>
+          </a:fontRef>
+        </p:style>
+        <p:txBody>
+          <a:bodyPr rtlCol="0" anchor="ctr"/>
+          <a:lstStyle/>
+          <a:p>
+            <a:r>
+              <a:rPr sz="1200">
+                <a:solidFill>
+                  <a:srgbClr val="0043DA"/>
+                </a:solidFill>
+              </a:rPr>
+              <a:t>Q4 2026</a:t>
+            </a:r>
+          </a:p>
+        </p:txBody>
+      </p:sp>
+      <p:sp>
+        <p:nvSpPr>
+          <p:cNvPr id="12" name="Rounded Rectangle 11"/>
+          <p:cNvSpPr/>
+          <p:nvPr/>
+        </p:nvSpPr>
+        <p:spPr>
+          <a:xfrm>
+            <a:off x="457200" y="2440442"/>
+            <a:ext cx="1371600" cy="914400"/>
+          </a:xfrm>
+          <a:prstGeom prst="roundRect">
+            <a:avLst/>
+          </a:prstGeom>
+          <a:solidFill>
+            <a:srgbClr val="DCDCDC"/>
+          </a:solidFill>
+          <a:ln w="9525">
+            <a:solidFill>
+              <a:srgbClr val="B4B4B4"/>
+            </a:solidFill>
+          </a:ln>
+        </p:spPr>
+        <p:style>
+          <a:lnRef idx="1">
+            <a:schemeClr val="accent1"/>
+          </a:lnRef>
+          <a:fillRef idx="3">
+            <a:schemeClr val="accent1"/>
+          </a:fillRef>
+          <a:effectRef idx="2">
+            <a:schemeClr val="accent1"/>
+          </a:effectRef>
+          <a:fontRef idx="minor">
+            <a:schemeClr val="lt1"/>
+          </a:fontRef>
+        </p:style>
+        <p:txBody>
+          <a:bodyPr rtlCol="0" anchor="ctr"/>
+          <a:lstStyle/>
+          <a:p>
+            <a:r>
+              <a:rPr sz="1300">
+                <a:solidFill>
+                  <a:srgbClr val="404040"/>
+                </a:solidFill>
+              </a:rPr>
+              <a:t>인프라 구축</a:t>
+            </a:r>
+          </a:p>
+        </p:txBody>
+      </p:sp>
+      <p:sp>
+        <p:nvSpPr>
+          <p:cNvPr id="13" name="Rounded Rectangle 12"/>
+          <p:cNvSpPr/>
+          <p:nvPr/>
+        </p:nvSpPr>
+        <p:spPr>
+          <a:xfrm>
+            <a:off x="457200" y="3445368"/>
+            <a:ext cx="1371600" cy="914400"/>
+          </a:xfrm>
+          <a:prstGeom prst="roundRect">
+            <a:avLst/>
+          </a:prstGeom>
+          <a:solidFill>
+            <a:srgbClr val="DCDCDC"/>
+          </a:solidFill>
+          <a:ln w="9525">
+            <a:solidFill>
+              <a:srgbClr val="B4B4B4"/>
+            </a:solidFill>
+          </a:ln>
+        </p:spPr>
+        <p:style>
+          <a:lnRef idx="1">
+            <a:schemeClr val="accent1"/>
+          </a:lnRef>
+          <a:fillRef idx="3">
+            <a:schemeClr val="accent1"/>
+          </a:fillRef>
+          <a:effectRef idx="2">
+            <a:schemeClr val="accent1"/>
+          </a:effectRef>
+          <a:fontRef idx="minor">
+            <a:schemeClr val="lt1"/>
+          </a:fontRef>
+        </p:style>
+        <p:txBody>
+          <a:bodyPr rtlCol="0" anchor="ctr"/>
+          <a:lstStyle/>
+          <a:p>
+            <a:r>
+              <a:rPr sz="1300">
+                <a:solidFill>
+                  <a:srgbClr val="404040"/>
+                </a:solidFill>
+              </a:rPr>
+              <a:t>마이그레이션</a:t>
+            </a:r>
+          </a:p>
+        </p:txBody>
+      </p:sp>
+      <p:sp>
+        <p:nvSpPr>
+          <p:cNvPr id="14" name="Rounded Rectangle 13"/>
+          <p:cNvSpPr/>
+          <p:nvPr/>
+        </p:nvSpPr>
+        <p:spPr>
+          <a:xfrm>
+            <a:off x="457200" y="4450293"/>
+            <a:ext cx="1371600" cy="914400"/>
+          </a:xfrm>
+          <a:prstGeom prst="roundRect">
+            <a:avLst/>
+          </a:prstGeom>
+          <a:solidFill>
+            <a:srgbClr val="DCDCDC"/>
+          </a:solidFill>
+          <a:ln w="9525">
+            <a:solidFill>
+              <a:srgbClr val="B4B4B4"/>
+            </a:solidFill>
+          </a:ln>
+        </p:spPr>
+        <p:style>
+          <a:lnRef idx="1">
+            <a:schemeClr val="accent1"/>
+          </a:lnRef>
+          <a:fillRef idx="3">
+            <a:schemeClr val="accent1"/>
+          </a:fillRef>
+          <a:effectRef idx="2">
+            <a:schemeClr val="accent1"/>
+          </a:effectRef>
+          <a:fontRef idx="minor">
+            <a:schemeClr val="lt1"/>
+          </a:fontRef>
+        </p:style>
+        <p:txBody>
+          <a:bodyPr rtlCol="0" anchor="ctr"/>
+          <a:lstStyle/>
+          <a:p>
+            <a:r>
+              <a:rPr sz="1300">
+                <a:solidFill>
+                  <a:srgbClr val="404040"/>
+                </a:solidFill>
+              </a:rPr>
+              <a:t>운영 준비</a:t>
+            </a:r>
+          </a:p>
+        </p:txBody>
+      </p:sp>
+      <p:sp>
+        <p:nvSpPr>
+          <p:cNvPr id="15" name="Rounded Rectangle 14"/>
+          <p:cNvSpPr/>
+          <p:nvPr/>
+        </p:nvSpPr>
+        <p:spPr>
+          <a:xfrm>
+            <a:off x="457200" y="5456133"/>
+            <a:ext cx="1371600" cy="914400"/>
+          </a:xfrm>
+          <a:prstGeom prst="roundRect">
+            <a:avLst/>
+          </a:prstGeom>
+          <a:solidFill>
+            <a:srgbClr val="DCDCDC"/>
+          </a:solidFill>
+          <a:ln w="9525">
+            <a:solidFill>
+              <a:srgbClr val="B4B4B4"/>
+            </a:solidFill>
+          </a:ln>
+        </p:spPr>
+        <p:style>
+          <a:lnRef idx="1">
+            <a:schemeClr val="accent1"/>
+          </a:lnRef>
+          <a:fillRef idx="3">
+            <a:schemeClr val="accent1"/>
+          </a:fillRef>
+          <a:effectRef idx="2">
+            <a:schemeClr val="accent1"/>
+          </a:effectRef>
+          <a:fontRef idx="minor">
+            <a:schemeClr val="lt1"/>
+          </a:fontRef>
+        </p:style>
+        <p:txBody>
+          <a:bodyPr rtlCol="0" anchor="ctr"/>
+          <a:lstStyle/>
+          <a:p>
+            <a:r>
+              <a:rPr sz="1100">
+                <a:solidFill>
+                  <a:srgbClr val="404040"/>
+                </a:solidFill>
+              </a:rPr>
+              <a:t>보안/컴플라이언스</a:t>
+            </a:r>
+          </a:p>
+        </p:txBody>
+      </p:sp>
+      <p:sp>
+        <p:nvSpPr>
+          <p:cNvPr id="16" name="Rounded Rectangle 15"/>
+          <p:cNvSpPr/>
+          <p:nvPr/>
+        </p:nvSpPr>
+        <p:spPr>
+          <a:xfrm>
+            <a:off x="1920240" y="2623322"/>
+            <a:ext cx="2453335" cy="548640"/>
+          </a:xfrm>
+          <a:prstGeom prst="roundRect">
+            <a:avLst/>
+          </a:prstGeom>
+          <a:solidFill>
+            <a:srgbClr val="0043DA"/>
+          </a:solidFill>
+          <a:ln>
+            <a:solidFill>
+              <a:srgbClr val="0043DA"/>
+            </a:solidFill>
+          </a:ln>
+        </p:spPr>
+        <p:style>
+          <a:lnRef idx="1">
+            <a:schemeClr val="accent1"/>
+          </a:lnRef>
+          <a:fillRef idx="3">
+            <a:schemeClr val="accent1"/>
+          </a:fillRef>
+          <a:effectRef idx="2">
+            <a:schemeClr val="accent1"/>
+          </a:effectRef>
+          <a:fontRef idx="minor">
+            <a:schemeClr val="lt1"/>
+          </a:fontRef>
+        </p:style>
+        <p:txBody>
+          <a:bodyPr rtlCol="0" anchor="ctr"/>
+          <a:lstStyle/>
+          <a:p>
+            <a:r>
+              <a:rPr sz="1100">
+                <a:solidFill>
+                  <a:srgbClr val="FFFFFF"/>
+                </a:solidFill>
+              </a:rPr>
+              <a:t>VPC/네트워크 설계</a:t>
+            </a:r>
+          </a:p>
+        </p:txBody>
+      </p:sp>
+      <p:sp>
+        <p:nvSpPr>
+          <p:cNvPr id="17" name="Rounded Rectangle 16"/>
+          <p:cNvSpPr/>
+          <p:nvPr/>
+        </p:nvSpPr>
+        <p:spPr>
+          <a:xfrm>
+            <a:off x="4373575" y="2623322"/>
+            <a:ext cx="4906670" cy="548640"/>
+          </a:xfrm>
+          <a:prstGeom prst="roundRect">
+            <a:avLst/>
+          </a:prstGeom>
+          <a:solidFill>
+            <a:srgbClr val="0043DA"/>
+          </a:solidFill>
+          <a:ln>
+            <a:solidFill>
+              <a:srgbClr val="0043DA"/>
+            </a:solidFill>
+          </a:ln>
+        </p:spPr>
+        <p:style>
+          <a:lnRef idx="1">
+            <a:schemeClr val="accent1"/>
+          </a:lnRef>
+          <a:fillRef idx="3">
+            <a:schemeClr val="accent1"/>
+          </a:fillRef>
+          <a:effectRef idx="2">
+            <a:schemeClr val="accent1"/>
+          </a:effectRef>
+          <a:fontRef idx="minor">
+            <a:schemeClr val="lt1"/>
+          </a:fontRef>
+        </p:style>
+        <p:txBody>
+          <a:bodyPr rtlCol="0" anchor="ctr"/>
+          <a:lstStyle/>
+          <a:p>
+            <a:r>
+              <a:rPr sz="1100">
+                <a:solidFill>
+                  <a:srgbClr val="FFFFFF"/>
+                </a:solidFill>
+              </a:rPr>
+              <a:t>MSK 클러스터 구성</a:t>
+            </a:r>
+          </a:p>
+        </p:txBody>
+      </p:sp>
+      <p:sp>
+        <p:nvSpPr>
+          <p:cNvPr id="18" name="Rounded Rectangle 17"/>
+          <p:cNvSpPr/>
+          <p:nvPr/>
+        </p:nvSpPr>
+        <p:spPr>
+          <a:xfrm>
+            <a:off x="5599785" y="3628248"/>
+            <a:ext cx="2453335" cy="548640"/>
+          </a:xfrm>
+          <a:prstGeom prst="roundRect">
+            <a:avLst/>
+          </a:prstGeom>
+          <a:solidFill>
+            <a:srgbClr val="3A7BD5"/>
+          </a:solidFill>
+          <a:ln>
+            <a:solidFill>
+              <a:srgbClr val="3A7BD5"/>
+            </a:solidFill>
+          </a:ln>
+        </p:spPr>
+        <p:style>
+          <a:lnRef idx="1">
+            <a:schemeClr val="accent1"/>
+          </a:lnRef>
+          <a:fillRef idx="3">
+            <a:schemeClr val="accent1"/>
+          </a:fillRef>
+          <a:effectRef idx="2">
+            <a:schemeClr val="accent1"/>
+          </a:effectRef>
+          <a:fontRef idx="minor">
+            <a:schemeClr val="lt1"/>
+          </a:fontRef>
+        </p:style>
+        <p:txBody>
+          <a:bodyPr rtlCol="0" anchor="ctr"/>
+          <a:lstStyle/>
+          <a:p>
+            <a:r>
+              <a:rPr sz="1100">
+                <a:solidFill>
+                  <a:srgbClr val="FFFFFF"/>
+                </a:solidFill>
+              </a:rPr>
+              <a:t>파일럿 테스트</a:t>
+            </a:r>
+          </a:p>
+        </p:txBody>
+      </p:sp>
+      <p:sp>
+        <p:nvSpPr>
+          <p:cNvPr id="19" name="Rounded Rectangle 18"/>
+          <p:cNvSpPr/>
+          <p:nvPr/>
+        </p:nvSpPr>
+        <p:spPr>
+          <a:xfrm>
+            <a:off x="8053120" y="3628248"/>
+            <a:ext cx="3680460" cy="548640"/>
+          </a:xfrm>
+          <a:prstGeom prst="roundRect">
+            <a:avLst/>
+          </a:prstGeom>
+          <a:solidFill>
+            <a:srgbClr val="3A7BD5"/>
+          </a:solidFill>
+          <a:ln>
+            <a:solidFill>
+              <a:srgbClr val="3A7BD5"/>
+            </a:solidFill>
+          </a:ln>
+        </p:spPr>
+        <p:style>
+          <a:lnRef idx="1">
+            <a:schemeClr val="accent1"/>
+          </a:lnRef>
+          <a:fillRef idx="3">
+            <a:schemeClr val="accent1"/>
+          </a:fillRef>
+          <a:effectRef idx="2">
+            <a:schemeClr val="accent1"/>
+          </a:effectRef>
+          <a:fontRef idx="minor">
+            <a:schemeClr val="lt1"/>
+          </a:fontRef>
+        </p:style>
+        <p:txBody>
+          <a:bodyPr rtlCol="0" anchor="ctr"/>
+          <a:lstStyle/>
+          <a:p>
+            <a:r>
+              <a:rPr sz="1100">
+                <a:solidFill>
+                  <a:srgbClr val="FFFFFF"/>
+                </a:solidFill>
+              </a:rPr>
+              <a:t>데이터 이전</a:t>
+            </a:r>
+          </a:p>
+        </p:txBody>
+      </p:sp>
+      <p:sp>
+        <p:nvSpPr>
+          <p:cNvPr id="20" name="Rounded Rectangle 19"/>
+          <p:cNvSpPr/>
+          <p:nvPr/>
+        </p:nvSpPr>
+        <p:spPr>
+          <a:xfrm>
+            <a:off x="8053120" y="4633173"/>
+            <a:ext cx="1839772" cy="548640"/>
+          </a:xfrm>
+          <a:prstGeom prst="roundRect">
+            <a:avLst/>
+          </a:prstGeom>
+          <a:solidFill>
+            <a:srgbClr val="6B9FFF"/>
+          </a:solidFill>
+          <a:ln>
+            <a:solidFill>
+              <a:srgbClr val="6B9FFF"/>
+            </a:solidFill>
+          </a:ln>
+        </p:spPr>
+        <p:style>
+          <a:lnRef idx="1">
+            <a:schemeClr val="accent1"/>
+          </a:lnRef>
+          <a:fillRef idx="3">
+            <a:schemeClr val="accent1"/>
+          </a:fillRef>
+          <a:effectRef idx="2">
+            <a:schemeClr val="accent1"/>
+          </a:effectRef>
+          <a:fontRef idx="minor">
+            <a:schemeClr val="lt1"/>
+          </a:fontRef>
+        </p:style>
+        <p:txBody>
+          <a:bodyPr rtlCol="0" anchor="ctr"/>
+          <a:lstStyle/>
+          <a:p>
+            <a:r>
+              <a:rPr sz="1100">
+                <a:solidFill>
+                  <a:srgbClr val="FFFFFF"/>
+                </a:solidFill>
+              </a:rPr>
+              <a:t>모니터링 구성</a:t>
+            </a:r>
+          </a:p>
+        </p:txBody>
+      </p:sp>
+      <p:sp>
+        <p:nvSpPr>
+          <p:cNvPr id="21" name="Rounded Rectangle 20"/>
+          <p:cNvSpPr/>
+          <p:nvPr/>
+        </p:nvSpPr>
+        <p:spPr>
+          <a:xfrm>
+            <a:off x="9280245" y="4633173"/>
+            <a:ext cx="2453335" cy="548640"/>
+          </a:xfrm>
+          <a:prstGeom prst="roundRect">
+            <a:avLst/>
+          </a:prstGeom>
+          <a:solidFill>
+            <a:srgbClr val="6B9FFF"/>
+          </a:solidFill>
+          <a:ln>
+            <a:solidFill>
+              <a:srgbClr val="6B9FFF"/>
+            </a:solidFill>
+          </a:ln>
+        </p:spPr>
+        <p:style>
+          <a:lnRef idx="1">
+            <a:schemeClr val="accent1"/>
+          </a:lnRef>
+          <a:fillRef idx="3">
+            <a:schemeClr val="accent1"/>
+          </a:fillRef>
+          <a:effectRef idx="2">
+            <a:schemeClr val="accent1"/>
+          </a:effectRef>
+          <a:fontRef idx="minor">
+            <a:schemeClr val="lt1"/>
+          </a:fontRef>
+        </p:style>
+        <p:txBody>
+          <a:bodyPr rtlCol="0" anchor="ctr"/>
+          <a:lstStyle/>
+          <a:p>
+            <a:r>
+              <a:rPr sz="1100">
+                <a:solidFill>
+                  <a:srgbClr val="FFFFFF"/>
+                </a:solidFill>
+              </a:rPr>
+              <a:t>운영팀 이관</a:t>
+            </a:r>
+          </a:p>
+        </p:txBody>
+      </p:sp>
+      <p:sp>
+        <p:nvSpPr>
+          <p:cNvPr id="22" name="Rounded Rectangle 21"/>
+          <p:cNvSpPr/>
+          <p:nvPr/>
+        </p:nvSpPr>
+        <p:spPr>
+          <a:xfrm>
+            <a:off x="1920240" y="5639013"/>
+            <a:ext cx="9813340" cy="548640"/>
           </a:xfrm>
           <a:prstGeom prst="roundRect">
             <a:avLst/>
@@ -13673,501 +14056,13 @@
           <a:bodyPr rtlCol="0" anchor="ctr"/>
           <a:lstStyle/>
           <a:p>
-            <a:pPr algn="ctr"/>
-          </a:p>
-        </p:txBody>
-      </p:sp>
-      <p:sp>
-        <p:nvSpPr>
-          <p:cNvPr id="10" name="Rounded Rectangle 9"/>
-          <p:cNvSpPr/>
-          <p:nvPr/>
-        </p:nvSpPr>
-        <p:spPr>
-          <a:xfrm>
-            <a:off x="2103120" y="4950561"/>
-            <a:ext cx="4023360" cy="694944"/>
-          </a:xfrm>
-          <a:prstGeom prst="roundRect">
-            <a:avLst/>
-          </a:prstGeom>
-          <a:solidFill>
-            <a:srgbClr val="3571F5"/>
-          </a:solidFill>
-          <a:ln>
-            <a:solidFill>
-              <a:srgbClr val="3571F5"/>
-            </a:solidFill>
-          </a:ln>
-        </p:spPr>
-        <p:style>
-          <a:lnRef idx="1">
-            <a:schemeClr val="accent1"/>
-          </a:lnRef>
-          <a:fillRef idx="3">
-            <a:schemeClr val="accent1"/>
-          </a:fillRef>
-          <a:effectRef idx="2">
-            <a:schemeClr val="accent1"/>
-          </a:effectRef>
-          <a:fontRef idx="minor">
-            <a:schemeClr val="lt1"/>
-          </a:fontRef>
-        </p:style>
-        <p:txBody>
-          <a:bodyPr rtlCol="0" anchor="ctr"/>
-          <a:lstStyle/>
-          <a:p>
-            <a:pPr algn="ctr"/>
-          </a:p>
-        </p:txBody>
-      </p:sp>
-      <p:sp>
-        <p:nvSpPr>
-          <p:cNvPr id="11" name="Rounded Rectangle 10"/>
-          <p:cNvSpPr/>
-          <p:nvPr/>
-        </p:nvSpPr>
-        <p:spPr>
-          <a:xfrm>
-            <a:off x="2651760" y="5700369"/>
-            <a:ext cx="2926080" cy="694944"/>
-          </a:xfrm>
-          <a:prstGeom prst="roundRect">
-            <a:avLst/>
-          </a:prstGeom>
-          <a:solidFill>
-            <a:srgbClr val="0043DA"/>
-          </a:solidFill>
-          <a:ln>
-            <a:solidFill>
-              <a:srgbClr val="0043DA"/>
-            </a:solidFill>
-          </a:ln>
-        </p:spPr>
-        <p:style>
-          <a:lnRef idx="1">
-            <a:schemeClr val="accent1"/>
-          </a:lnRef>
-          <a:fillRef idx="3">
-            <a:schemeClr val="accent1"/>
-          </a:fillRef>
-          <a:effectRef idx="2">
-            <a:schemeClr val="accent1"/>
-          </a:effectRef>
-          <a:fontRef idx="minor">
-            <a:schemeClr val="lt1"/>
-          </a:fontRef>
-        </p:style>
-        <p:txBody>
-          <a:bodyPr rtlCol="0" anchor="ctr"/>
-          <a:lstStyle/>
-          <a:p>
-            <a:pPr algn="ctr"/>
-          </a:p>
-        </p:txBody>
-      </p:sp>
-      <p:sp>
-        <p:nvSpPr>
-          <p:cNvPr id="12" name="TextBox 11"/>
-          <p:cNvSpPr txBox="1"/>
-          <p:nvPr/>
-        </p:nvSpPr>
-        <p:spPr>
-          <a:xfrm>
-            <a:off x="457200" y="2702052"/>
-            <a:ext cx="7315200" cy="694944"/>
-          </a:xfrm>
-          <a:prstGeom prst="rect">
-            <a:avLst/>
-          </a:prstGeom>
-          <a:noFill/>
-        </p:spPr>
-        <p:txBody>
-          <a:bodyPr wrap="square">
-            <a:spAutoFit/>
-          </a:bodyPr>
-          <a:lstStyle/>
-          <a:p>
-            <a:pPr algn="ctr"/>
-            <a:r>
-              <a:rPr sz="1300" b="1">
-                <a:solidFill>
-                  <a:srgbClr val="0043DA"/>
-                </a:solidFill>
-                <a:latin typeface="프리젠테이션 7"/>
-              </a:rPr>
-              <a:t>후보 기술 평가</a:t>
-            </a:r>
-          </a:p>
-          <a:p>
-            <a:pPr algn="ctr"/>
-            <a:r>
-              <a:rPr sz="1300" b="1">
-                <a:solidFill>
-                  <a:srgbClr val="0043DA"/>
-                </a:solidFill>
-                <a:latin typeface="프리젠테이션 7"/>
-              </a:rPr>
-              <a:t>Kafka · Kinesis · RabbitMQ · Pulsar</a:t>
-            </a:r>
-          </a:p>
-        </p:txBody>
-      </p:sp>
-      <p:sp>
-        <p:nvSpPr>
-          <p:cNvPr id="13" name="TextBox 12"/>
-          <p:cNvSpPr txBox="1"/>
-          <p:nvPr/>
-        </p:nvSpPr>
-        <p:spPr>
-          <a:xfrm>
-            <a:off x="1005840" y="3451860"/>
-            <a:ext cx="6217920" cy="694944"/>
-          </a:xfrm>
-          <a:prstGeom prst="rect">
-            <a:avLst/>
-          </a:prstGeom>
-          <a:noFill/>
-        </p:spPr>
-        <p:txBody>
-          <a:bodyPr wrap="square">
-            <a:spAutoFit/>
-          </a:bodyPr>
-          <a:lstStyle/>
-          <a:p>
-            <a:pPr algn="ctr"/>
-            <a:r>
-              <a:rPr sz="1300" b="1">
-                <a:solidFill>
-                  <a:srgbClr val="0043DA"/>
-                </a:solidFill>
-                <a:latin typeface="프리젠테이션 7"/>
-              </a:rPr>
-              <a:t>기술 적합성</a:t>
-            </a:r>
-          </a:p>
-          <a:p>
-            <a:pPr algn="ctr"/>
-            <a:r>
-              <a:rPr sz="1300" b="1">
-                <a:solidFill>
-                  <a:srgbClr val="0043DA"/>
-                </a:solidFill>
-                <a:latin typeface="프리젠테이션 7"/>
-              </a:rPr>
-              <a:t>처리량 100MB/s · 지연 10ms · 내구성 99.99%</a:t>
-            </a:r>
-          </a:p>
-        </p:txBody>
-      </p:sp>
-      <p:sp>
-        <p:nvSpPr>
-          <p:cNvPr id="14" name="TextBox 13"/>
-          <p:cNvSpPr txBox="1"/>
-          <p:nvPr/>
-        </p:nvSpPr>
-        <p:spPr>
-          <a:xfrm>
-            <a:off x="1554480" y="4200753"/>
-            <a:ext cx="5120640" cy="694944"/>
-          </a:xfrm>
-          <a:prstGeom prst="rect">
-            <a:avLst/>
-          </a:prstGeom>
-          <a:noFill/>
-        </p:spPr>
-        <p:txBody>
-          <a:bodyPr wrap="square">
-            <a:spAutoFit/>
-          </a:bodyPr>
-          <a:lstStyle/>
-          <a:p>
-            <a:pPr algn="ctr"/>
-            <a:r>
-              <a:rPr sz="1300" b="1">
+            <a:r>
+              <a:rPr sz="1100">
                 <a:solidFill>
                   <a:srgbClr val="FFFFFF"/>
                 </a:solidFill>
-                <a:latin typeface="프리젠테이션 7"/>
-              </a:rPr>
-              <a:t>운영 효율성</a:t>
-            </a:r>
-          </a:p>
-          <a:p>
-            <a:pPr algn="ctr"/>
-            <a:r>
-              <a:rPr sz="1300" b="1">
-                <a:solidFill>
-                  <a:srgbClr val="FFFFFF"/>
-                </a:solidFill>
-                <a:latin typeface="프리젠테이션 7"/>
-              </a:rPr>
-              <a:t>관리형 서비스 · AWS 통합 · 비용 최적화</a:t>
-            </a:r>
-          </a:p>
-        </p:txBody>
-      </p:sp>
-      <p:sp>
-        <p:nvSpPr>
-          <p:cNvPr id="15" name="TextBox 14"/>
-          <p:cNvSpPr txBox="1"/>
-          <p:nvPr/>
-        </p:nvSpPr>
-        <p:spPr>
-          <a:xfrm>
-            <a:off x="2103120" y="4950561"/>
-            <a:ext cx="4023360" cy="694944"/>
-          </a:xfrm>
-          <a:prstGeom prst="rect">
-            <a:avLst/>
-          </a:prstGeom>
-          <a:noFill/>
-        </p:spPr>
-        <p:txBody>
-          <a:bodyPr wrap="square">
-            <a:spAutoFit/>
-          </a:bodyPr>
-          <a:lstStyle/>
-          <a:p>
-            <a:pPr algn="ctr"/>
-            <a:r>
-              <a:rPr sz="1300" b="1">
-                <a:solidFill>
-                  <a:srgbClr val="FFFFFF"/>
-                </a:solidFill>
-                <a:latin typeface="프리젠테이션 7"/>
-              </a:rPr>
-              <a:t>보안/컴플라이언스</a:t>
-            </a:r>
-          </a:p>
-          <a:p>
-            <a:pPr algn="ctr"/>
-            <a:r>
-              <a:rPr sz="1300" b="1">
-                <a:solidFill>
-                  <a:srgbClr val="FFFFFF"/>
-                </a:solidFill>
-                <a:latin typeface="프리젠테이션 7"/>
-              </a:rPr>
-              <a:t>IAM · TLS 암호화 · VPC 격리 · FIPS 140-2</a:t>
-            </a:r>
-          </a:p>
-        </p:txBody>
-      </p:sp>
-      <p:sp>
-        <p:nvSpPr>
-          <p:cNvPr id="16" name="TextBox 15"/>
-          <p:cNvSpPr txBox="1"/>
-          <p:nvPr/>
-        </p:nvSpPr>
-        <p:spPr>
-          <a:xfrm>
-            <a:off x="2651760" y="5700369"/>
-            <a:ext cx="2926080" cy="694944"/>
-          </a:xfrm>
-          <a:prstGeom prst="rect">
-            <a:avLst/>
-          </a:prstGeom>
-          <a:noFill/>
-        </p:spPr>
-        <p:txBody>
-          <a:bodyPr wrap="square">
-            <a:spAutoFit/>
-          </a:bodyPr>
-          <a:lstStyle/>
-          <a:p>
-            <a:pPr algn="ctr"/>
-            <a:r>
-              <a:rPr sz="1300" b="1">
-                <a:solidFill>
-                  <a:srgbClr val="FFFFFF"/>
-                </a:solidFill>
-                <a:latin typeface="프리젠테이션 7"/>
-              </a:rPr>
-              <a:t>Amazon MSK 선택</a:t>
-            </a:r>
-          </a:p>
-          <a:p>
-            <a:pPr algn="ctr"/>
-            <a:r>
-              <a:rPr sz="1300" b="1">
-                <a:solidFill>
-                  <a:srgbClr val="FFFFFF"/>
-                </a:solidFill>
-                <a:latin typeface="프리젠테이션 7"/>
-              </a:rPr>
-              <a:t>완전관리형 Kafka · 멀티AZ · AWS 네이티브</a:t>
-            </a:r>
-          </a:p>
-        </p:txBody>
-      </p:sp>
-      <p:sp>
-        <p:nvSpPr>
-          <p:cNvPr id="17" name="TextBox 16"/>
-          <p:cNvSpPr txBox="1"/>
-          <p:nvPr/>
-        </p:nvSpPr>
-        <p:spPr>
-          <a:xfrm>
-            <a:off x="8046720" y="2702052"/>
-            <a:ext cx="3687775" cy="694944"/>
-          </a:xfrm>
-          <a:prstGeom prst="rect">
-            <a:avLst/>
-          </a:prstGeom>
-          <a:noFill/>
-        </p:spPr>
-        <p:txBody>
-          <a:bodyPr wrap="square">
-            <a:spAutoFit/>
-          </a:bodyPr>
-          <a:lstStyle/>
-          <a:p>
-            <a:r>
-              <a:rPr sz="1100" b="0">
-                <a:solidFill>
-                  <a:srgbClr val="404040"/>
-                </a:solidFill>
-                <a:latin typeface="프리젠테이션 5"/>
-              </a:rPr>
-              <a:t>4개 기술 초기 검토</a:t>
-            </a:r>
-          </a:p>
-        </p:txBody>
-      </p:sp>
-      <p:sp>
-        <p:nvSpPr>
-          <p:cNvPr id="18" name="TextBox 17"/>
-          <p:cNvSpPr txBox="1"/>
-          <p:nvPr/>
-        </p:nvSpPr>
-        <p:spPr>
-          <a:xfrm>
-            <a:off x="8046720" y="3451860"/>
-            <a:ext cx="3687775" cy="694944"/>
-          </a:xfrm>
-          <a:prstGeom prst="rect">
-            <a:avLst/>
-          </a:prstGeom>
-          <a:noFill/>
-        </p:spPr>
-        <p:txBody>
-          <a:bodyPr wrap="square">
-            <a:spAutoFit/>
-          </a:bodyPr>
-          <a:lstStyle/>
-          <a:p>
-            <a:r>
-              <a:rPr sz="1100" b="0">
-                <a:solidFill>
-                  <a:srgbClr val="404040"/>
-                </a:solidFill>
-                <a:latin typeface="프리젠테이션 5"/>
-              </a:rPr>
-              <a:t>Kafka · Kinesis 통과</a:t>
-            </a:r>
-          </a:p>
-        </p:txBody>
-      </p:sp>
-      <p:sp>
-        <p:nvSpPr>
-          <p:cNvPr id="19" name="TextBox 18"/>
-          <p:cNvSpPr txBox="1"/>
-          <p:nvPr/>
-        </p:nvSpPr>
-        <p:spPr>
-          <a:xfrm>
-            <a:off x="8046720" y="4200753"/>
-            <a:ext cx="3687775" cy="694944"/>
-          </a:xfrm>
-          <a:prstGeom prst="rect">
-            <a:avLst/>
-          </a:prstGeom>
-          <a:noFill/>
-        </p:spPr>
-        <p:txBody>
-          <a:bodyPr wrap="square">
-            <a:spAutoFit/>
-          </a:bodyPr>
-          <a:lstStyle/>
-          <a:p>
-            <a:r>
-              <a:rPr sz="1100" b="0">
-                <a:solidFill>
-                  <a:srgbClr val="404040"/>
-                </a:solidFill>
-                <a:latin typeface="프리젠테이션 5"/>
-              </a:rPr>
-              <a:t>Amazon MSK · Kinesis 잔류</a:t>
-            </a:r>
-          </a:p>
-        </p:txBody>
-      </p:sp>
-      <p:sp>
-        <p:nvSpPr>
-          <p:cNvPr id="20" name="TextBox 19"/>
-          <p:cNvSpPr txBox="1"/>
-          <p:nvPr/>
-        </p:nvSpPr>
-        <p:spPr>
-          <a:xfrm>
-            <a:off x="8046720" y="4950561"/>
-            <a:ext cx="3687775" cy="694944"/>
-          </a:xfrm>
-          <a:prstGeom prst="rect">
-            <a:avLst/>
-          </a:prstGeom>
-          <a:noFill/>
-        </p:spPr>
-        <p:txBody>
-          <a:bodyPr wrap="square">
-            <a:spAutoFit/>
-          </a:bodyPr>
-          <a:lstStyle/>
-          <a:p>
-            <a:r>
-              <a:rPr sz="1100" b="0">
-                <a:solidFill>
-                  <a:srgbClr val="404040"/>
-                </a:solidFill>
-                <a:latin typeface="프리젠테이션 5"/>
-              </a:rPr>
-              <a:t>MSK 단독 충족</a:t>
-            </a:r>
-          </a:p>
-        </p:txBody>
-      </p:sp>
-      <p:sp>
-        <p:nvSpPr>
-          <p:cNvPr id="21" name="TextBox 20"/>
-          <p:cNvSpPr txBox="1"/>
-          <p:nvPr/>
-        </p:nvSpPr>
-        <p:spPr>
-          <a:xfrm>
-            <a:off x="8046720" y="5700369"/>
-            <a:ext cx="3687775" cy="694944"/>
-          </a:xfrm>
-          <a:prstGeom prst="rect">
-            <a:avLst/>
-          </a:prstGeom>
-          <a:noFill/>
-        </p:spPr>
-        <p:txBody>
-          <a:bodyPr wrap="square">
-            <a:spAutoFit/>
-          </a:bodyPr>
-          <a:lstStyle/>
-          <a:p>
-            <a:r>
-              <a:rPr sz="1200" b="1">
-                <a:solidFill>
-                  <a:srgbClr val="0043DA"/>
-                </a:solidFill>
-                <a:latin typeface="프리젠테이션 7"/>
-              </a:rPr>
-              <a:t>최종 채택 결정</a:t>
+              </a:rPr>
+              <a:t>IAM/암호화/VPC 검증</a:t>
             </a:r>
           </a:p>
         </p:txBody>

--- a/results/pptx/AWS_MSK_Expert_Intro.pptx
+++ b/results/pptx/AWS_MSK_Expert_Intro.pptx
@@ -3739,33 +3739,62 @@
           <a:noFill/>
         </p:spPr>
         <p:txBody>
+          <a:bodyPr anchor="t" lIns="0" tIns="0" rIns="0" bIns="0"/>
+          <a:lstStyle/>
+          <a:p>
+            <a:r>
+              <a:rPr sz="2000" b="1" dirty="0">
+                <a:solidFill>
+                  <a:srgbClr val="000000"/>
+                </a:solidFill>
+                <a:latin typeface="Freesentation"/>
+              </a:rPr>
+              <a:t>L08. Funnel</a:t>
+            </a:r>
+          </a:p>
+        </p:txBody>
+      </p:sp>
+      <p:sp>
+        <p:nvSpPr>
+          <p:cNvPr id="4" name="TextBox 3"/>
+          <p:cNvSpPr txBox="1"/>
+          <p:nvPr/>
+        </p:nvSpPr>
+        <p:spPr>
+          <a:xfrm>
+            <a:off x="3760927" y="557784"/>
+            <a:ext cx="8431042" cy="932688"/>
+          </a:xfrm>
+          <a:prstGeom prst="rect">
+            <a:avLst/>
+          </a:prstGeom>
+          <a:noFill/>
+        </p:spPr>
+        <p:txBody>
           <a:bodyPr wrap="square">
             <a:spAutoFit/>
           </a:bodyPr>
           <a:lstStyle/>
           <a:p>
             <a:r>
-              <a:rPr sz="2000" b="1">
-                <a:solidFill>
-                  <a:srgbClr val="0043DA"/>
-                </a:solidFill>
-                <a:latin typeface="프리젠테이션 7"/>
-              </a:rPr>
-              <a:t>L08. Funnel</a:t>
-            </a:r>
-          </a:p>
-        </p:txBody>
-      </p:sp>
-      <p:sp>
-        <p:nvSpPr>
-          <p:cNvPr id="4" name="TextBox 3"/>
+              <a:rPr sz="1200" b="0">
+                <a:latin typeface="Freesentation"/>
+              </a:rPr>
+              <a:t>깔때기 다이어그램 — 단계별 필터링으로 최적 기술 선택</a:t>
+            </a:r>
+          </a:p>
+        </p:txBody>
+      </p:sp>
+      <p:sp>
+        <p:nvSpPr>
+          <p:cNvPr id="5" name="TextBox 4"/>
           <p:cNvSpPr txBox="1"/>
           <p:nvPr/>
         </p:nvSpPr>
         <p:spPr>
           <a:xfrm>
-            <a:off x="3760927" y="557784"/>
-            <a:ext cx="8431042" cy="932688"/>
+            <a:off x="457200" y="1600200"/>
+            <a:ext cx="11734495" cy="320040"/>
           </a:xfrm>
           <a:prstGeom prst="rect">
             <a:avLst/>
@@ -3779,27 +3808,27 @@
           <a:lstStyle/>
           <a:p>
             <a:r>
-              <a:rPr sz="1200" b="0">
-                <a:solidFill>
-                  <a:srgbClr val="000000"/>
-                </a:solidFill>
-                <a:latin typeface="프리젠테이션 5"/>
-              </a:rPr>
-              <a:t>깔때기 다이어그램 — 단계별 필터링으로 최적 기술 선택</a:t>
-            </a:r>
-          </a:p>
-        </p:txBody>
-      </p:sp>
-      <p:sp>
-        <p:nvSpPr>
-          <p:cNvPr id="5" name="TextBox 4"/>
+              <a:rPr sz="1600" b="1">
+                <a:solidFill>
+                  <a:srgbClr val="0043DA"/>
+                </a:solidFill>
+                <a:latin typeface="Freesentation"/>
+              </a:rPr>
+              <a:t>MSK 도입 의사결정 깔때기</a:t>
+            </a:r>
+          </a:p>
+        </p:txBody>
+      </p:sp>
+      <p:sp>
+        <p:nvSpPr>
+          <p:cNvPr id="6" name="TextBox 5"/>
           <p:cNvSpPr txBox="1"/>
           <p:nvPr/>
         </p:nvSpPr>
         <p:spPr>
           <a:xfrm>
-            <a:off x="457200" y="1600200"/>
-            <a:ext cx="11734495" cy="320040"/>
+            <a:off x="457200" y="1966874"/>
+            <a:ext cx="11734495" cy="274320"/>
           </a:xfrm>
           <a:prstGeom prst="rect">
             <a:avLst/>
@@ -3813,45 +3842,11 @@
           <a:lstStyle/>
           <a:p>
             <a:r>
-              <a:rPr sz="1600" b="1">
-                <a:solidFill>
-                  <a:srgbClr val="0043DA"/>
-                </a:solidFill>
-                <a:latin typeface="프리젠테이션 7"/>
-              </a:rPr>
-              <a:t>MSK 도입 의사결정 깔때기</a:t>
-            </a:r>
-          </a:p>
-        </p:txBody>
-      </p:sp>
-      <p:sp>
-        <p:nvSpPr>
-          <p:cNvPr id="6" name="TextBox 5"/>
-          <p:cNvSpPr txBox="1"/>
-          <p:nvPr/>
-        </p:nvSpPr>
-        <p:spPr>
-          <a:xfrm>
-            <a:off x="457200" y="1966874"/>
-            <a:ext cx="11734495" cy="274320"/>
-          </a:xfrm>
-          <a:prstGeom prst="rect">
-            <a:avLst/>
-          </a:prstGeom>
-          <a:noFill/>
-        </p:spPr>
-        <p:txBody>
-          <a:bodyPr wrap="square">
-            <a:spAutoFit/>
-          </a:bodyPr>
-          <a:lstStyle/>
-          <a:p>
-            <a:r>
               <a:rPr sz="1300" b="0">
                 <a:solidFill>
                   <a:srgbClr val="404040"/>
                 </a:solidFill>
-                <a:latin typeface="프리젠테이션 5"/>
+                <a:latin typeface="Freesentation"/>
               </a:rPr>
               <a:t>후보 기술부터 최종 선택까지 4가지 평가 기준으로 필터링</a:t>
             </a:r>
@@ -4537,8 +4532,8 @@
         </p:nvSpPr>
         <p:spPr>
           <a:xfrm>
-            <a:off x="457200" y="2560320"/>
-            <a:ext cx="5303520" cy="4023360"/>
+            <a:off x="457200" y="2788920"/>
+            <a:ext cx="5303520" cy="3886200"/>
           </a:xfrm>
           <a:prstGeom prst="roundRect">
             <a:avLst/>
@@ -4582,8 +4577,8 @@
         </p:nvSpPr>
         <p:spPr>
           <a:xfrm>
-            <a:off x="6431280" y="2560320"/>
-            <a:ext cx="5303520" cy="4023360"/>
+            <a:off x="6431280" y="2788920"/>
+            <a:ext cx="5303520" cy="3886200"/>
           </a:xfrm>
           <a:prstGeom prst="roundRect">
             <a:avLst/>
@@ -4627,7 +4622,7 @@
         </p:nvSpPr>
         <p:spPr>
           <a:xfrm>
-            <a:off x="5944440" y="4480680"/>
+            <a:off x="5944440" y="4594859"/>
             <a:ext cx="411480" cy="274320"/>
           </a:xfrm>
           <a:prstGeom prst="rightArrow">
@@ -4672,7 +4667,7 @@
         </p:nvSpPr>
         <p:spPr>
           <a:xfrm>
-            <a:off x="637160" y="2651760"/>
+            <a:off x="637160" y="2423160"/>
             <a:ext cx="1371600" cy="274320"/>
           </a:xfrm>
           <a:prstGeom prst="roundRect">
@@ -4717,7 +4712,7 @@
         </p:nvSpPr>
         <p:spPr>
           <a:xfrm>
-            <a:off x="6611040" y="2651760"/>
+            <a:off x="6611040" y="2423160"/>
             <a:ext cx="1371600" cy="274320"/>
           </a:xfrm>
           <a:prstGeom prst="roundRect">
@@ -4771,33 +4766,68 @@
           <a:noFill/>
         </p:spPr>
         <p:txBody>
+          <a:bodyPr anchor="t" lIns="0" tIns="0" rIns="0" bIns="0"/>
+          <a:lstStyle/>
+          <a:p>
+            <a:r>
+              <a:rPr sz="2000" b="1" dirty="0">
+                <a:solidFill>
+                  <a:srgbClr val="000000"/>
+                </a:solidFill>
+                <a:latin typeface="Freesentation"/>
+              </a:rPr>
+              <a:t>L09. As-Is / To-Be</a:t>
+            </a:r>
+          </a:p>
+        </p:txBody>
+      </p:sp>
+      <p:sp>
+        <p:nvSpPr>
+          <p:cNvPr id="10" name="TextBox 9"/>
+          <p:cNvSpPr txBox="1"/>
+          <p:nvPr/>
+        </p:nvSpPr>
+        <p:spPr>
+          <a:xfrm>
+            <a:off x="3763700" y="558800"/>
+            <a:ext cx="7551483" cy="937918"/>
+          </a:xfrm>
+          <a:prstGeom prst="rect">
+            <a:avLst/>
+          </a:prstGeom>
+          <a:noFill/>
+        </p:spPr>
+        <p:txBody>
           <a:bodyPr wrap="square">
             <a:spAutoFit/>
           </a:bodyPr>
           <a:lstStyle/>
           <a:p>
             <a:r>
-              <a:rPr sz="2000" b="1">
-                <a:solidFill>
-                  <a:srgbClr val="212121"/>
-                </a:solidFill>
+              <a:rPr sz="1200" b="0">
                 <a:latin typeface="Freesentation"/>
-              </a:rPr>
-              <a:t>1-1. As-Is / To-Be</a:t>
-            </a:r>
-          </a:p>
-        </p:txBody>
-      </p:sp>
-      <p:sp>
-        <p:nvSpPr>
-          <p:cNvPr id="10" name="TextBox 9"/>
+                <a:solidFill>
+                  <a:schemeClr val="tx1">
+                    <a:lumMod val="75000"/>
+                    <a:lumOff val="25000"/>
+                  </a:schemeClr>
+                </a:solidFill>
+              </a:rPr>
+              <a:t>현황/문제 → 개선/해결 대비 레이아웃 — 2컬럼 챌린지·솔루션 구조</a:t>
+            </a:r>
+          </a:p>
+        </p:txBody>
+      </p:sp>
+      <p:sp>
+        <p:nvSpPr>
+          <p:cNvPr id="13" name="TextBox 12"/>
           <p:cNvSpPr txBox="1"/>
           <p:nvPr/>
         </p:nvSpPr>
         <p:spPr>
           <a:xfrm>
-            <a:off x="3763700" y="558800"/>
-            <a:ext cx="7551483" cy="937918"/>
+            <a:off x="637160" y="2423160"/>
+            <a:ext cx="1371600" cy="274320"/>
           </a:xfrm>
           <a:prstGeom prst="rect">
             <a:avLst/>
@@ -4810,28 +4840,29 @@
           </a:bodyPr>
           <a:lstStyle/>
           <a:p>
-            <a:r>
-              <a:rPr sz="1200" b="0">
-                <a:solidFill>
-                  <a:srgbClr val="212121"/>
+            <a:pPr algn="ctr"/>
+            <a:r>
+              <a:rPr sz="1100" b="1">
+                <a:solidFill>
+                  <a:srgbClr val="FFFFFF"/>
                 </a:solidFill>
                 <a:latin typeface="Freesentation"/>
               </a:rPr>
-              <a:t>온프레미스 Kafka에서 AWS MSK로의 전환 근거를 현황과 개선안으로 대비</a:t>
-            </a:r>
-          </a:p>
-        </p:txBody>
-      </p:sp>
-      <p:sp>
-        <p:nvSpPr>
-          <p:cNvPr id="11" name="TextBox 10"/>
+              <a:t>⚠ As-Is</a:t>
+            </a:r>
+          </a:p>
+        </p:txBody>
+      </p:sp>
+      <p:sp>
+        <p:nvSpPr>
+          <p:cNvPr id="14" name="TextBox 13"/>
           <p:cNvSpPr txBox="1"/>
           <p:nvPr/>
         </p:nvSpPr>
         <p:spPr>
           <a:xfrm>
-            <a:off x="457200" y="1600200"/>
-            <a:ext cx="11277600" cy="320040"/>
+            <a:off x="6611040" y="2423160"/>
+            <a:ext cx="1371600" cy="274320"/>
           </a:xfrm>
           <a:prstGeom prst="rect">
             <a:avLst/>
@@ -4844,28 +4875,29 @@
           </a:bodyPr>
           <a:lstStyle/>
           <a:p>
-            <a:r>
-              <a:rPr sz="1600" b="1">
-                <a:solidFill>
-                  <a:srgbClr val="0043DA"/>
+            <a:pPr algn="ctr"/>
+            <a:r>
+              <a:rPr sz="1100" b="1">
+                <a:solidFill>
+                  <a:srgbClr val="FFFFFF"/>
                 </a:solidFill>
                 <a:latin typeface="Freesentation"/>
               </a:rPr>
-              <a:t>온프레미스 Kafka의 운영 한계와 MSK 전환 효과</a:t>
-            </a:r>
-          </a:p>
-        </p:txBody>
-      </p:sp>
-      <p:sp>
-        <p:nvSpPr>
-          <p:cNvPr id="12" name="TextBox 11"/>
+              <a:t>✓ To-Be</a:t>
+            </a:r>
+          </a:p>
+        </p:txBody>
+      </p:sp>
+      <p:sp>
+        <p:nvSpPr>
+          <p:cNvPr id="15" name="TextBox 14"/>
           <p:cNvSpPr txBox="1"/>
           <p:nvPr/>
         </p:nvSpPr>
         <p:spPr>
           <a:xfrm>
-            <a:off x="457200" y="1965960"/>
-            <a:ext cx="11277600" cy="274320"/>
+            <a:off x="637160" y="2898648"/>
+            <a:ext cx="4941840" cy="365760"/>
           </a:xfrm>
           <a:prstGeom prst="rect">
             <a:avLst/>
@@ -4879,27 +4911,27 @@
           <a:lstStyle/>
           <a:p>
             <a:r>
-              <a:rPr sz="1300" b="0">
+              <a:rPr sz="1400" b="1">
                 <a:solidFill>
                   <a:srgbClr val="212121"/>
                 </a:solidFill>
                 <a:latin typeface="Freesentation"/>
               </a:rPr>
-              <a:t>관리 복잡도·확장성·비용 3가지 핵심 문제를 AWS MSK 완전 관리형으로 해소</a:t>
-            </a:r>
-          </a:p>
-        </p:txBody>
-      </p:sp>
-      <p:sp>
-        <p:nvSpPr>
-          <p:cNvPr id="13" name="TextBox 12"/>
+              <a:t>온프레미스 Kafka 한계</a:t>
+            </a:r>
+          </a:p>
+        </p:txBody>
+      </p:sp>
+      <p:sp>
+        <p:nvSpPr>
+          <p:cNvPr id="16" name="TextBox 15"/>
           <p:cNvSpPr txBox="1"/>
           <p:nvPr/>
         </p:nvSpPr>
         <p:spPr>
           <a:xfrm>
-            <a:off x="637160" y="2651760"/>
-            <a:ext cx="1371600" cy="274320"/>
+            <a:off x="6611040" y="2898648"/>
+            <a:ext cx="4941840" cy="365760"/>
           </a:xfrm>
           <a:prstGeom prst="rect">
             <a:avLst/>
@@ -4912,29 +4944,28 @@
           </a:bodyPr>
           <a:lstStyle/>
           <a:p>
-            <a:pPr algn="ctr"/>
-            <a:r>
-              <a:rPr sz="1100" b="1">
-                <a:solidFill>
-                  <a:srgbClr val="FFFFFF"/>
+            <a:r>
+              <a:rPr sz="1400" b="1">
+                <a:solidFill>
+                  <a:srgbClr val="0043DA"/>
                 </a:solidFill>
                 <a:latin typeface="Freesentation"/>
               </a:rPr>
-              <a:t>⚠ As-Is</a:t>
-            </a:r>
-          </a:p>
-        </p:txBody>
-      </p:sp>
-      <p:sp>
-        <p:nvSpPr>
-          <p:cNvPr id="14" name="TextBox 13"/>
+              <a:t>AWS MSK 도입 효과</a:t>
+            </a:r>
+          </a:p>
+        </p:txBody>
+      </p:sp>
+      <p:sp>
+        <p:nvSpPr>
+          <p:cNvPr id="17" name="TextBox 16"/>
           <p:cNvSpPr txBox="1"/>
           <p:nvPr/>
         </p:nvSpPr>
         <p:spPr>
           <a:xfrm>
-            <a:off x="6611040" y="2651760"/>
-            <a:ext cx="1371600" cy="274320"/>
+            <a:off x="637160" y="3264408"/>
+            <a:ext cx="4484640" cy="2450592"/>
           </a:xfrm>
           <a:prstGeom prst="rect">
             <a:avLst/>
@@ -4947,109 +4978,6 @@
           </a:bodyPr>
           <a:lstStyle/>
           <a:p>
-            <a:pPr algn="ctr"/>
-            <a:r>
-              <a:rPr sz="1100" b="1">
-                <a:solidFill>
-                  <a:srgbClr val="FFFFFF"/>
-                </a:solidFill>
-                <a:latin typeface="Freesentation"/>
-              </a:rPr>
-              <a:t>✓ To-Be</a:t>
-            </a:r>
-          </a:p>
-        </p:txBody>
-      </p:sp>
-      <p:sp>
-        <p:nvSpPr>
-          <p:cNvPr id="15" name="TextBox 14"/>
-          <p:cNvSpPr txBox="1"/>
-          <p:nvPr/>
-        </p:nvSpPr>
-        <p:spPr>
-          <a:xfrm>
-            <a:off x="637160" y="3017520"/>
-            <a:ext cx="4941840" cy="365760"/>
-          </a:xfrm>
-          <a:prstGeom prst="rect">
-            <a:avLst/>
-          </a:prstGeom>
-          <a:noFill/>
-        </p:spPr>
-        <p:txBody>
-          <a:bodyPr wrap="square">
-            <a:spAutoFit/>
-          </a:bodyPr>
-          <a:lstStyle/>
-          <a:p>
-            <a:r>
-              <a:rPr sz="1400" b="1">
-                <a:solidFill>
-                  <a:srgbClr val="212121"/>
-                </a:solidFill>
-                <a:latin typeface="Freesentation"/>
-              </a:rPr>
-              <a:t>온프레미스 Kafka 한계</a:t>
-            </a:r>
-          </a:p>
-        </p:txBody>
-      </p:sp>
-      <p:sp>
-        <p:nvSpPr>
-          <p:cNvPr id="16" name="TextBox 15"/>
-          <p:cNvSpPr txBox="1"/>
-          <p:nvPr/>
-        </p:nvSpPr>
-        <p:spPr>
-          <a:xfrm>
-            <a:off x="6611040" y="3017520"/>
-            <a:ext cx="4941840" cy="365760"/>
-          </a:xfrm>
-          <a:prstGeom prst="rect">
-            <a:avLst/>
-          </a:prstGeom>
-          <a:noFill/>
-        </p:spPr>
-        <p:txBody>
-          <a:bodyPr wrap="square">
-            <a:spAutoFit/>
-          </a:bodyPr>
-          <a:lstStyle/>
-          <a:p>
-            <a:r>
-              <a:rPr sz="1400" b="1">
-                <a:solidFill>
-                  <a:srgbClr val="0043DA"/>
-                </a:solidFill>
-                <a:latin typeface="Freesentation"/>
-              </a:rPr>
-              <a:t>AWS MSK 도입 효과</a:t>
-            </a:r>
-          </a:p>
-        </p:txBody>
-      </p:sp>
-      <p:sp>
-        <p:nvSpPr>
-          <p:cNvPr id="17" name="TextBox 16"/>
-          <p:cNvSpPr txBox="1"/>
-          <p:nvPr/>
-        </p:nvSpPr>
-        <p:spPr>
-          <a:xfrm>
-            <a:off x="637160" y="3474720"/>
-            <a:ext cx="4484640" cy="2926560"/>
-          </a:xfrm>
-          <a:prstGeom prst="rect">
-            <a:avLst/>
-          </a:prstGeom>
-          <a:noFill/>
-        </p:spPr>
-        <p:txBody>
-          <a:bodyPr wrap="square">
-            <a:spAutoFit/>
-          </a:bodyPr>
-          <a:lstStyle/>
-          <a:p>
             <a:r>
               <a:rPr sz="1300" b="0">
                 <a:solidFill>
@@ -5103,8 +5031,8 @@
         </p:nvSpPr>
         <p:spPr>
           <a:xfrm>
-            <a:off x="6611040" y="3474720"/>
-            <a:ext cx="4484640" cy="2926560"/>
+            <a:off x="6611040" y="3264408"/>
+            <a:ext cx="4484640" cy="2450592"/>
           </a:xfrm>
           <a:prstGeom prst="rect">
             <a:avLst/>
@@ -5178,7 +5106,7 @@
         </p:blipFill>
         <p:spPr>
           <a:xfrm>
-            <a:off x="5166720" y="6172200"/>
+            <a:off x="4917600" y="5900400"/>
             <a:ext cx="411480" cy="411480"/>
           </a:xfrm>
           <a:prstGeom prst="rect">
@@ -5202,7 +5130,7 @@
         </p:blipFill>
         <p:spPr>
           <a:xfrm>
-            <a:off x="11140800" y="6172200"/>
+            <a:off x="10891375" y="5900400"/>
             <a:ext cx="411480" cy="411480"/>
           </a:xfrm>
           <a:prstGeom prst="rect">
@@ -5210,6 +5138,74 @@
           </a:prstGeom>
         </p:spPr>
       </p:pic>
+      <p:sp>
+        <p:nvSpPr>
+          <p:cNvPr id="11" name="TextBox 10"/>
+          <p:cNvSpPr txBox="1"/>
+          <p:nvPr/>
+        </p:nvSpPr>
+        <p:spPr>
+          <a:xfrm>
+            <a:off x="457200" y="1600200"/>
+            <a:ext cx="11277600" cy="320040"/>
+          </a:xfrm>
+          <a:prstGeom prst="rect">
+            <a:avLst/>
+          </a:prstGeom>
+          <a:noFill/>
+        </p:spPr>
+        <p:txBody>
+          <a:bodyPr wrap="square">
+            <a:spAutoFit/>
+          </a:bodyPr>
+          <a:lstStyle/>
+          <a:p>
+            <a:r>
+              <a:rPr sz="1600" b="1">
+                <a:solidFill>
+                  <a:srgbClr val="0043DA"/>
+                </a:solidFill>
+                <a:latin typeface="Freesentation"/>
+              </a:rPr>
+              <a:t>온프레미스 Kafka의 운영 한계와 MSK 전환 효과</a:t>
+            </a:r>
+          </a:p>
+        </p:txBody>
+      </p:sp>
+      <p:sp>
+        <p:nvSpPr>
+          <p:cNvPr id="12" name="TextBox 11"/>
+          <p:cNvSpPr txBox="1"/>
+          <p:nvPr/>
+        </p:nvSpPr>
+        <p:spPr>
+          <a:xfrm>
+            <a:off x="457200" y="1965960"/>
+            <a:ext cx="11277600" cy="274320"/>
+          </a:xfrm>
+          <a:prstGeom prst="rect">
+            <a:avLst/>
+          </a:prstGeom>
+          <a:noFill/>
+        </p:spPr>
+        <p:txBody>
+          <a:bodyPr wrap="square">
+            <a:spAutoFit/>
+          </a:bodyPr>
+          <a:lstStyle/>
+          <a:p>
+            <a:r>
+              <a:rPr sz="1300" b="0">
+                <a:solidFill>
+                  <a:srgbClr val="212121"/>
+                </a:solidFill>
+                <a:latin typeface="Freesentation"/>
+              </a:rPr>
+              <a:t>관리 복잡도·확장성·비용 3가지 핵심 문제를 AWS MSK 완전 관리형으로 해소</a:t>
+            </a:r>
+          </a:p>
+        </p:txBody>
+      </p:sp>
     </p:spTree>
   </p:cSld>
   <p:clrMapOvr>
@@ -5245,77 +5241,7 @@
           <a:p>
             <a:r>
               <a:rPr lang="ko-KR" altLang="en-US" dirty="0" b="1"/>
-              <a:t>1-2. 비용 비교</a:t>
-            </a:r>
-          </a:p>
-        </p:txBody>
-      </p:sp>
-      <p:sp>
-        <p:nvSpPr>
-          <p:cNvPr id="3" name="TextBox 2"/>
-          <p:cNvSpPr txBox="1"/>
-          <p:nvPr/>
-        </p:nvSpPr>
-        <p:spPr>
-          <a:xfrm>
-            <a:off x="435254" y="1524304"/>
-            <a:ext cx="10742371" cy="304495"/>
-          </a:xfrm>
-          <a:prstGeom prst="rect">
-            <a:avLst/>
-          </a:prstGeom>
-          <a:noFill/>
-        </p:spPr>
-        <p:txBody>
-          <a:bodyPr wrap="square">
-            <a:spAutoFit/>
-          </a:bodyPr>
-          <a:lstStyle/>
-          <a:p>
-            <a:pPr algn="l"/>
-            <a:r>
-              <a:rPr sz="1600" b="1">
-                <a:solidFill>
-                  <a:srgbClr val="0043DA"/>
-                </a:solidFill>
-                <a:latin typeface="Freesentation"/>
-              </a:rPr>
-              <a:t>On-Premises Kafka vs AWS MSK — TCO 직접 비교</a:t>
-            </a:r>
-          </a:p>
-        </p:txBody>
-      </p:sp>
-      <p:sp>
-        <p:nvSpPr>
-          <p:cNvPr id="4" name="TextBox 3"/>
-          <p:cNvSpPr txBox="1"/>
-          <p:nvPr/>
-        </p:nvSpPr>
-        <p:spPr>
-          <a:xfrm>
-            <a:off x="435254" y="1872691"/>
-            <a:ext cx="10742371" cy="261518"/>
-          </a:xfrm>
-          <a:prstGeom prst="rect">
-            <a:avLst/>
-          </a:prstGeom>
-          <a:noFill/>
-        </p:spPr>
-        <p:txBody>
-          <a:bodyPr wrap="square">
-            <a:spAutoFit/>
-          </a:bodyPr>
-          <a:lstStyle/>
-          <a:p>
-            <a:pPr algn="l"/>
-            <a:r>
-              <a:rPr sz="1300" b="0">
-                <a:solidFill>
-                  <a:srgbClr val="212121"/>
-                </a:solidFill>
-                <a:latin typeface="Freesentation"/>
-              </a:rPr>
-              <a:t>비용·관리·가용성·확장성 4개 항목 기준 직접 비교 (2026년 4월 기준)</a:t>
+              <a:t/>
             </a:r>
           </a:p>
         </p:txBody>
@@ -5328,8 +5254,8 @@
         </p:nvSpPr>
         <p:spPr>
           <a:xfrm>
-            <a:off x="457200" y="2560320"/>
-            <a:ext cx="5577840" cy="4023360"/>
+            <a:off x="457200" y="2788920"/>
+            <a:ext cx="5577840" cy="3886200"/>
           </a:xfrm>
           <a:prstGeom prst="roundRect">
             <a:avLst/>
@@ -5373,8 +5299,8 @@
         </p:nvSpPr>
         <p:spPr>
           <a:xfrm>
-            <a:off x="6156960" y="2560320"/>
-            <a:ext cx="5577840" cy="4023360"/>
+            <a:off x="6156960" y="2788920"/>
+            <a:ext cx="5577840" cy="3886200"/>
           </a:xfrm>
           <a:prstGeom prst="roundRect">
             <a:avLst/>
@@ -5384,7 +5310,7 @@
           </a:solidFill>
           <a:ln w="9525">
             <a:solidFill>
-              <a:srgbClr val="DCDCDC"/>
+              <a:srgbClr val="E6F0FF"/>
             </a:solidFill>
           </a:ln>
         </p:spPr>
@@ -5412,24 +5338,24 @@
       </p:sp>
       <p:sp>
         <p:nvSpPr>
-          <p:cNvPr id="7" name="Rectangle 6"/>
+          <p:cNvPr id="8" name="Rounded Rectangle 7"/>
           <p:cNvSpPr/>
           <p:nvPr/>
         </p:nvSpPr>
         <p:spPr>
           <a:xfrm>
-            <a:off x="5917680" y="2651760"/>
-            <a:ext cx="9144" cy="3840480"/>
-          </a:xfrm>
-          <a:prstGeom prst="rect">
+            <a:off x="637160" y="2423160"/>
+            <a:ext cx="1554480" cy="274320"/>
+          </a:xfrm>
+          <a:prstGeom prst="roundRect">
             <a:avLst/>
           </a:prstGeom>
           <a:solidFill>
-            <a:srgbClr val="DCDCDC"/>
+            <a:srgbClr val="212121"/>
           </a:solidFill>
-          <a:ln>
+          <a:ln w="9525">
             <a:solidFill>
-              <a:srgbClr val="DCDCDC"/>
+              <a:srgbClr val="212121"/>
             </a:solidFill>
           </a:ln>
         </p:spPr>
@@ -5451,55 +5377,10 @@
           <a:bodyPr rtlCol="0" anchor="ctr"/>
           <a:lstStyle/>
           <a:p>
-            <a:pPr algn="ctr"/>
-          </a:p>
-        </p:txBody>
-      </p:sp>
-      <p:sp>
-        <p:nvSpPr>
-          <p:cNvPr id="8" name="Rounded Rectangle 7"/>
-          <p:cNvSpPr/>
-          <p:nvPr/>
-        </p:nvSpPr>
-        <p:spPr>
-          <a:xfrm>
-            <a:off x="637160" y="2651760"/>
-            <a:ext cx="1554480" cy="274320"/>
-          </a:xfrm>
-          <a:prstGeom prst="roundRect">
-            <a:avLst/>
-          </a:prstGeom>
-          <a:solidFill>
-            <a:srgbClr val="F8F9FA"/>
-          </a:solidFill>
-          <a:ln w="9525">
-            <a:solidFill>
-              <a:srgbClr val="DCDCDC"/>
-            </a:solidFill>
-          </a:ln>
-        </p:spPr>
-        <p:style>
-          <a:lnRef idx="1">
-            <a:schemeClr val="accent1"/>
-          </a:lnRef>
-          <a:fillRef idx="3">
-            <a:schemeClr val="accent1"/>
-          </a:fillRef>
-          <a:effectRef idx="2">
-            <a:schemeClr val="accent1"/>
-          </a:effectRef>
-          <a:fontRef idx="minor">
-            <a:schemeClr val="lt1"/>
-          </a:fontRef>
-        </p:style>
-        <p:txBody>
-          <a:bodyPr rtlCol="0" anchor="ctr"/>
-          <a:lstStyle/>
-          <a:p>
             <a:r>
               <a:rPr sz="1300">
                 <a:solidFill>
-                  <a:srgbClr val="212121"/>
+                  <a:srgbClr val="FFFFFF"/>
                 </a:solidFill>
               </a:rPr>
               <a:t>On-Premises</a:t>
@@ -5515,7 +5396,7 @@
         </p:nvSpPr>
         <p:spPr>
           <a:xfrm>
-            <a:off x="6337720" y="2651760"/>
+            <a:off x="6337720" y="2423160"/>
             <a:ext cx="1554480" cy="274320"/>
           </a:xfrm>
           <a:prstGeom prst="roundRect">
@@ -5567,8 +5448,8 @@
         </p:nvSpPr>
         <p:spPr>
           <a:xfrm>
-            <a:off x="607161" y="2873959"/>
-            <a:ext cx="4967020" cy="3136392"/>
+            <a:off x="607161" y="3264408"/>
+            <a:ext cx="5214960" cy="2697480"/>
           </a:xfrm>
           <a:prstGeom prst="rect">
             <a:avLst/>
@@ -5703,8 +5584,8 @@
         </p:nvSpPr>
         <p:spPr>
           <a:xfrm>
-            <a:off x="6035954" y="2873959"/>
-            <a:ext cx="4967020" cy="3136392"/>
+            <a:off x="6337720" y="3264408"/>
+            <a:ext cx="5214960" cy="2697480"/>
           </a:xfrm>
           <a:prstGeom prst="rect">
             <a:avLst/>
@@ -5847,7 +5728,7 @@
         </p:blipFill>
         <p:spPr>
           <a:xfrm>
-            <a:off x="5181904" y="5878677"/>
+            <a:off x="4917600" y="5900400"/>
             <a:ext cx="411480" cy="411480"/>
           </a:xfrm>
           <a:prstGeom prst="rect">
@@ -5871,7 +5752,7 @@
         </p:blipFill>
         <p:spPr>
           <a:xfrm>
-            <a:off x="10611612" y="5878677"/>
+            <a:off x="10585051" y="5900400"/>
             <a:ext cx="411480" cy="411480"/>
           </a:xfrm>
           <a:prstGeom prst="rect">
@@ -5879,6 +5760,145 @@
           </a:prstGeom>
         </p:spPr>
       </p:pic>
+      <p:sp>
+        <p:nvSpPr>
+          <p:cNvPr id="14" name="TextBox 13"/>
+          <p:cNvSpPr txBox="1"/>
+          <p:nvPr/>
+        </p:nvSpPr>
+        <p:spPr>
+          <a:xfrm>
+            <a:off x="354787" y="557784"/>
+            <a:ext cx="2720340" cy="932688"/>
+          </a:xfrm>
+          <a:prstGeom prst="rect">
+            <a:avLst/>
+          </a:prstGeom>
+          <a:noFill/>
+        </p:spPr>
+        <p:txBody>
+          <a:bodyPr anchor="t" lIns="0" tIns="0" rIns="0" bIns="0"/>
+          <a:lstStyle/>
+          <a:p>
+            <a:r>
+              <a:rPr sz="2000" b="1" dirty="0">
+                <a:solidFill>
+                  <a:srgbClr val="000000"/>
+                </a:solidFill>
+                <a:latin typeface="Freesentation"/>
+              </a:rPr>
+              <a:t>L10. Comparison VS</a:t>
+            </a:r>
+          </a:p>
+        </p:txBody>
+      </p:sp>
+      <p:sp>
+        <p:nvSpPr>
+          <p:cNvPr id="15" name="TextBox 14"/>
+          <p:cNvSpPr txBox="1"/>
+          <p:nvPr/>
+        </p:nvSpPr>
+        <p:spPr>
+          <a:xfrm>
+            <a:off x="3760927" y="558698"/>
+            <a:ext cx="7550200" cy="932688"/>
+          </a:xfrm>
+          <a:prstGeom prst="rect">
+            <a:avLst/>
+          </a:prstGeom>
+          <a:noFill/>
+        </p:spPr>
+        <p:txBody>
+          <a:bodyPr wrap="square">
+            <a:spAutoFit/>
+          </a:bodyPr>
+          <a:lstStyle/>
+          <a:p>
+            <a:r>
+              <a:rPr sz="1200" b="0">
+                <a:solidFill>
+                  <a:schemeClr val="tx1">
+                    <a:lumMod val="75000"/>
+                    <a:lumOff val="25000"/>
+                  </a:schemeClr>
+                </a:solidFill>
+                <a:latin typeface="Freesentation"/>
+              </a:rPr>
+              <a:t>2컬럼 병렬 비교 레이아웃 — 옵션A vs 옵션B 항목별 대비</a:t>
+            </a:r>
+          </a:p>
+        </p:txBody>
+      </p:sp>
+      <p:sp>
+        <p:nvSpPr>
+          <p:cNvPr id="3" name="TextBox 2"/>
+          <p:cNvSpPr txBox="1"/>
+          <p:nvPr/>
+        </p:nvSpPr>
+        <p:spPr>
+          <a:xfrm>
+            <a:off x="457200" y="1600200"/>
+            <a:ext cx="11277600" cy="320040"/>
+          </a:xfrm>
+          <a:prstGeom prst="rect">
+            <a:avLst/>
+          </a:prstGeom>
+          <a:noFill/>
+        </p:spPr>
+        <p:txBody>
+          <a:bodyPr wrap="square">
+            <a:spAutoFit/>
+          </a:bodyPr>
+          <a:lstStyle/>
+          <a:p>
+            <a:pPr algn="l"/>
+            <a:r>
+              <a:rPr sz="1600" b="1">
+                <a:solidFill>
+                  <a:srgbClr val="0043DA"/>
+                </a:solidFill>
+                <a:latin typeface="Freesentation"/>
+              </a:rPr>
+              <a:t>On-Premises Kafka vs AWS MSK — TCO 직접 비교</a:t>
+            </a:r>
+          </a:p>
+        </p:txBody>
+      </p:sp>
+      <p:sp>
+        <p:nvSpPr>
+          <p:cNvPr id="4" name="TextBox 3"/>
+          <p:cNvSpPr txBox="1"/>
+          <p:nvPr/>
+        </p:nvSpPr>
+        <p:spPr>
+          <a:xfrm>
+            <a:off x="457200" y="1965960"/>
+            <a:ext cx="11277600" cy="274320"/>
+          </a:xfrm>
+          <a:prstGeom prst="rect">
+            <a:avLst/>
+          </a:prstGeom>
+          <a:noFill/>
+        </p:spPr>
+        <p:txBody>
+          <a:bodyPr wrap="square">
+            <a:spAutoFit/>
+          </a:bodyPr>
+          <a:lstStyle/>
+          <a:p>
+            <a:pPr algn="l"/>
+            <a:r>
+              <a:rPr sz="1300" b="0">
+                <a:solidFill>
+                  <a:srgbClr val="212121"/>
+                </a:solidFill>
+                <a:latin typeface="Freesentation"/>
+              </a:rPr>
+              <a:t>비용·관리·가용성·확장성 4개 항목 기준 직접 비교 (2026년 4월 기준)</a:t>
+            </a:r>
+          </a:p>
+        </p:txBody>
+      </p:sp>
     </p:spTree>
   </p:cSld>
   <p:clrMapOvr>
@@ -7417,7 +7437,10 @@
           <a:p>
             <a:r>
               <a:rPr sz="2000" b="1" dirty="0">
-                <a:latin typeface="프리젠테이션 7 Bold"/>
+                <a:solidFill>
+                  <a:srgbClr val="000000"/>
+                </a:solidFill>
+                <a:latin typeface="Freesentation"/>
               </a:rPr>
               <a:t>L01. Bento Grid</a:t>
             </a:r>
@@ -7451,7 +7474,7 @@
           <a:p>
             <a:r>
               <a:rPr sz="1200" dirty="0">
-                <a:latin typeface="프리젠테이션 5 Medium"/>
+                <a:latin typeface="Freesentation"/>
                 <a:solidFill>
                   <a:schemeClr val="tx1">
                     <a:lumMod val="75000"/>
@@ -9084,7 +9107,10 @@
           <a:p>
             <a:r>
               <a:rPr sz="2000" b="1" dirty="0">
-                <a:latin typeface="프리젠테이션 7 Bold"/>
+                <a:solidFill>
+                  <a:srgbClr val="000000"/>
+                </a:solidFill>
+                <a:latin typeface="Freesentation"/>
               </a:rPr>
               <a:t>L02. Three Cards</a:t>
             </a:r>
@@ -9118,7 +9144,7 @@
           <a:p>
             <a:r>
               <a:rPr sz="1200" dirty="0">
-                <a:latin typeface="프리젠테이션 5 Medium"/>
+                <a:latin typeface="Freesentation"/>
                 <a:solidFill>
                   <a:schemeClr val="tx1">
                     <a:lumMod val="75000"/>
@@ -9944,7 +9970,10 @@
           <a:p>
             <a:r>
               <a:rPr sz="2000" b="1" dirty="0">
-                <a:latin typeface="프리젠테이션 7 Bold"/>
+                <a:solidFill>
+                  <a:srgbClr val="000000"/>
+                </a:solidFill>
+                <a:latin typeface="Freesentation"/>
               </a:rPr>
               <a:t>L03. Grid 2x2</a:t>
             </a:r>
@@ -9978,7 +10007,7 @@
           <a:p>
             <a:r>
               <a:rPr sz="1200" dirty="0">
-                <a:latin typeface="프리젠테이션 5 Medium"/>
+                <a:latin typeface="Freesentation"/>
                 <a:solidFill>
                   <a:schemeClr val="tx1">
                     <a:lumMod val="75000"/>
@@ -10772,7 +10801,10 @@
           <a:p>
             <a:r>
               <a:rPr sz="2000" b="1" dirty="0">
-                <a:latin typeface="프리젠테이션 7 Bold"/>
+                <a:solidFill>
+                  <a:srgbClr val="000000"/>
+                </a:solidFill>
+                <a:latin typeface="Freesentation"/>
               </a:rPr>
               <a:t>L04. Process Arrow</a:t>
             </a:r>
@@ -10806,7 +10838,7 @@
           <a:p>
             <a:r>
               <a:rPr sz="1200" dirty="0">
-                <a:latin typeface="프리젠테이션 5 Medium"/>
+                <a:latin typeface="Freesentation"/>
                 <a:solidFill>
                   <a:schemeClr val="tx1">
                     <a:lumMod val="75000"/>
@@ -11688,7 +11720,10 @@
           <a:p>
             <a:r>
               <a:rPr sz="2000" b="1" dirty="0">
-                <a:latin typeface="프리젠테이션 7 Bold"/>
+                <a:solidFill>
+                  <a:srgbClr val="000000"/>
+                </a:solidFill>
+                <a:latin typeface="Freesentation"/>
               </a:rPr>
               <a:t>L05. Phased Columns</a:t>
             </a:r>
@@ -11722,7 +11757,7 @@
           <a:p>
             <a:r>
               <a:rPr sz="1200" dirty="0">
-                <a:latin typeface="프리젠테이션 5 Medium"/>
+                <a:latin typeface="Freesentation"/>
                 <a:solidFill>
                   <a:schemeClr val="tx1">
                     <a:lumMod val="75000"/>
@@ -11968,9 +12003,7 @@
           <a:noFill/>
         </p:spPr>
         <p:txBody>
-          <a:bodyPr wrap="square" lIns="0" tIns="0" rIns="0" bIns="0" rtlCol="0" anchor="t" anchorCtr="0">
-            <a:noAutofit/>
-          </a:bodyPr>
+          <a:bodyPr anchor="t" lIns="0" tIns="0" rIns="0" bIns="0"/>
           <a:lstStyle/>
           <a:p>
             <a:pPr>
@@ -11979,12 +12012,11 @@
               </a:lnSpc>
             </a:pPr>
             <a:r>
-              <a:rPr lang="ko-KR" altLang="en-US" sz="2000" b="1" dirty="0">
+              <a:rPr sz="2000" b="1" dirty="0">
                 <a:solidFill>
                   <a:srgbClr val="000000"/>
                 </a:solidFill>
-                <a:latin typeface="프리젠테이션 7 Bold" pitchFamily="2" charset="-127"/>
-                <a:ea typeface="프리젠테이션 7 Bold" pitchFamily="2" charset="-127"/>
+                <a:latin typeface="Freesentation"/>
               </a:rPr>
               <a:t>L06. Zigzag Timeline</a:t>
             </a:r>
@@ -12009,9 +12041,7 @@
           <a:noFill/>
         </p:spPr>
         <p:txBody>
-          <a:bodyPr wrap="square" lIns="0" tIns="0" rIns="0" bIns="0" rtlCol="0" anchor="t" anchorCtr="0">
-            <a:noAutofit/>
-          </a:bodyPr>
+          <a:bodyPr anchor="t" lIns="0" tIns="0" rIns="0" bIns="0"/>
           <a:lstStyle/>
           <a:p>
             <a:pPr>
@@ -12020,12 +12050,14 @@
               </a:lnSpc>
             </a:pPr>
             <a:r>
-              <a:rPr lang="ko-KR" altLang="en-US" sz="1200" dirty="0">
-                <a:solidFill>
-                  <a:srgbClr val="000000"/>
-                </a:solidFill>
-                <a:latin typeface="프리젠테이션 5 Medium" pitchFamily="2" charset="-127"/>
-                <a:ea typeface="프리젠테이션 5 Medium" pitchFamily="2" charset="-127"/>
+              <a:rPr sz="1200" dirty="0">
+                <a:solidFill>
+                  <a:schemeClr val="tx1">
+                    <a:lumMod val="75000"/>
+                    <a:lumOff val="25000"/>
+                  </a:schemeClr>
+                </a:solidFill>
+                <a:latin typeface="Freesentation"/>
               </a:rPr>
               <a:t>S자 지그재그 타임라인 — MSK 도입 4단계 로드맵</a:t>
             </a:r>
@@ -12035,8 +12067,10 @@
       </p:sp>
       <p:sp>
         <p:nvSpPr>
-          <p:cNvPr id="20" name="TextBox 19"/>
-          <p:cNvSpPr txBox="1"/>
+          <p:cNvPr id="190" name="TextBox 19"/>
+          <p:cNvSpPr txBox="1">
+            <a:spLocks noGrp="1"/>
+          </p:cNvSpPr>
           <p:nvPr/>
         </p:nvSpPr>
         <p:spPr>
@@ -12048,15 +12082,16 @@
             <a:avLst/>
           </a:prstGeom>
           <a:noFill/>
-        </p:spPr>
-        <p:txBody>
-          <a:bodyPr wrap="square">
-            <a:spAutoFit/>
-          </a:bodyPr>
-          <a:lstStyle/>
-          <a:p>
-            <a:r>
-              <a:rPr sz="1600" b="0">
+          <a:ln>
+            <a:noFill/>
+          </a:ln>
+        </p:spPr>
+        <p:txBody>
+          <a:bodyPr wrap="square" lIns="0" rIns="0" tIns="0" bIns="0"/>
+          <a:lstStyle/>
+          <a:p>
+            <a:r>
+              <a:rPr sz="1600" b="1">
                 <a:solidFill>
                   <a:srgbClr val="0043DA"/>
                 </a:solidFill>
@@ -12069,8 +12104,10 @@
       </p:sp>
       <p:sp>
         <p:nvSpPr>
-          <p:cNvPr id="21" name="TextBox 20"/>
-          <p:cNvSpPr txBox="1"/>
+          <p:cNvPr id="200" name="TextBox 20"/>
+          <p:cNvSpPr txBox="1">
+            <a:spLocks noGrp="1"/>
+          </p:cNvSpPr>
           <p:nvPr/>
         </p:nvSpPr>
         <p:spPr>
@@ -12082,15 +12119,16 @@
             <a:avLst/>
           </a:prstGeom>
           <a:noFill/>
-        </p:spPr>
-        <p:txBody>
-          <a:bodyPr wrap="square">
-            <a:spAutoFit/>
-          </a:bodyPr>
-          <a:lstStyle/>
-          <a:p>
-            <a:r>
-              <a:rPr sz="1300">
+          <a:ln>
+            <a:noFill/>
+          </a:ln>
+        </p:spPr>
+        <p:txBody>
+          <a:bodyPr wrap="square" lIns="0" rIns="0" tIns="0" bIns="0"/>
+          <a:lstStyle/>
+          <a:p>
+            <a:r>
+              <a:rPr sz="1300" b="0">
                 <a:solidFill>
                   <a:srgbClr val="4A4A4A"/>
                 </a:solidFill>
@@ -12109,8 +12147,8 @@
         </p:nvSpPr>
         <p:spPr>
           <a:xfrm>
-            <a:off x="457200" y="3145536"/>
-            <a:ext cx="11274552" cy="18288"/>
+            <a:off x="457200" y="4640220"/>
+            <a:ext cx="11277295" cy="18288"/>
           </a:xfrm>
           <a:prstGeom prst="rect">
             <a:avLst/>
@@ -12148,390 +12186,14 @@
       </p:sp>
       <p:sp>
         <p:nvSpPr>
-          <p:cNvPr id="23" name="Oval 22"/>
-          <p:cNvSpPr/>
-          <p:nvPr/>
-        </p:nvSpPr>
-        <p:spPr>
-          <a:xfrm>
-            <a:off x="1444752" y="2926080"/>
-            <a:ext cx="548640" cy="548640"/>
-          </a:xfrm>
-          <a:prstGeom prst="ellipse">
-            <a:avLst/>
-          </a:prstGeom>
-          <a:solidFill>
-            <a:srgbClr val="0043DA"/>
-          </a:solidFill>
-        </p:spPr>
-        <p:style>
-          <a:lnRef idx="1">
-            <a:schemeClr val="accent1"/>
-          </a:lnRef>
-          <a:fillRef idx="3">
-            <a:schemeClr val="accent1"/>
-          </a:fillRef>
-          <a:effectRef idx="2">
-            <a:schemeClr val="accent1"/>
-          </a:effectRef>
-          <a:fontRef idx="minor">
-            <a:schemeClr val="lt1"/>
-          </a:fontRef>
-        </p:style>
-        <p:txBody>
-          <a:bodyPr rtlCol="0" anchor="ctr"/>
-          <a:lstStyle/>
-          <a:p>
-            <a:r>
-              <a:rPr sz="1400">
-                <a:solidFill>
-                  <a:srgbClr val="FFFFFF"/>
-                </a:solidFill>
-              </a:rPr>
-              <a:t>1</a:t>
-            </a:r>
-          </a:p>
-        </p:txBody>
-      </p:sp>
-      <p:sp>
-        <p:nvSpPr>
-          <p:cNvPr id="24" name="Oval 23"/>
-          <p:cNvSpPr/>
-          <p:nvPr/>
-        </p:nvSpPr>
-        <p:spPr>
-          <a:xfrm>
-            <a:off x="4288536" y="2926080"/>
-            <a:ext cx="548640" cy="548640"/>
-          </a:xfrm>
-          <a:prstGeom prst="ellipse">
-            <a:avLst/>
-          </a:prstGeom>
-          <a:solidFill>
-            <a:srgbClr val="0043DA"/>
-          </a:solidFill>
-        </p:spPr>
-        <p:style>
-          <a:lnRef idx="1">
-            <a:schemeClr val="accent1"/>
-          </a:lnRef>
-          <a:fillRef idx="3">
-            <a:schemeClr val="accent1"/>
-          </a:fillRef>
-          <a:effectRef idx="2">
-            <a:schemeClr val="accent1"/>
-          </a:effectRef>
-          <a:fontRef idx="minor">
-            <a:schemeClr val="lt1"/>
-          </a:fontRef>
-        </p:style>
-        <p:txBody>
-          <a:bodyPr rtlCol="0" anchor="ctr"/>
-          <a:lstStyle/>
-          <a:p>
-            <a:r>
-              <a:rPr sz="1400">
-                <a:solidFill>
-                  <a:srgbClr val="FFFFFF"/>
-                </a:solidFill>
-              </a:rPr>
-              <a:t>2</a:t>
-            </a:r>
-          </a:p>
-        </p:txBody>
-      </p:sp>
-      <p:sp>
-        <p:nvSpPr>
-          <p:cNvPr id="25" name="Oval 24"/>
-          <p:cNvSpPr/>
-          <p:nvPr/>
-        </p:nvSpPr>
-        <p:spPr>
-          <a:xfrm>
-            <a:off x="7141464" y="2926080"/>
-            <a:ext cx="548640" cy="548640"/>
-          </a:xfrm>
-          <a:prstGeom prst="ellipse">
-            <a:avLst/>
-          </a:prstGeom>
-          <a:solidFill>
-            <a:srgbClr val="0043DA"/>
-          </a:solidFill>
-        </p:spPr>
-        <p:style>
-          <a:lnRef idx="1">
-            <a:schemeClr val="accent1"/>
-          </a:lnRef>
-          <a:fillRef idx="3">
-            <a:schemeClr val="accent1"/>
-          </a:fillRef>
-          <a:effectRef idx="2">
-            <a:schemeClr val="accent1"/>
-          </a:effectRef>
-          <a:fontRef idx="minor">
-            <a:schemeClr val="lt1"/>
-          </a:fontRef>
-        </p:style>
-        <p:txBody>
-          <a:bodyPr rtlCol="0" anchor="ctr"/>
-          <a:lstStyle/>
-          <a:p>
-            <a:r>
-              <a:rPr sz="1400">
-                <a:solidFill>
-                  <a:srgbClr val="FFFFFF"/>
-                </a:solidFill>
-              </a:rPr>
-              <a:t>3</a:t>
-            </a:r>
-          </a:p>
-        </p:txBody>
-      </p:sp>
-      <p:sp>
-        <p:nvSpPr>
-          <p:cNvPr id="26" name="Oval 25"/>
-          <p:cNvSpPr/>
-          <p:nvPr/>
-        </p:nvSpPr>
-        <p:spPr>
-          <a:xfrm>
-            <a:off x="9985248" y="2926080"/>
-            <a:ext cx="548640" cy="548640"/>
-          </a:xfrm>
-          <a:prstGeom prst="ellipse">
-            <a:avLst/>
-          </a:prstGeom>
-          <a:solidFill>
-            <a:srgbClr val="0043DA"/>
-          </a:solidFill>
-        </p:spPr>
-        <p:style>
-          <a:lnRef idx="1">
-            <a:schemeClr val="accent1"/>
-          </a:lnRef>
-          <a:fillRef idx="3">
-            <a:schemeClr val="accent1"/>
-          </a:fillRef>
-          <a:effectRef idx="2">
-            <a:schemeClr val="accent1"/>
-          </a:effectRef>
-          <a:fontRef idx="minor">
-            <a:schemeClr val="lt1"/>
-          </a:fontRef>
-        </p:style>
-        <p:txBody>
-          <a:bodyPr rtlCol="0" anchor="ctr"/>
-          <a:lstStyle/>
-          <a:p>
-            <a:r>
-              <a:rPr sz="1400">
-                <a:solidFill>
-                  <a:srgbClr val="FFFFFF"/>
-                </a:solidFill>
-              </a:rPr>
-              <a:t>4</a:t>
-            </a:r>
-          </a:p>
-        </p:txBody>
-      </p:sp>
-      <p:sp>
-        <p:nvSpPr>
-          <p:cNvPr id="27" name="Rounded Rectangle 26"/>
-          <p:cNvSpPr/>
-          <p:nvPr/>
-        </p:nvSpPr>
-        <p:spPr>
-          <a:xfrm>
-            <a:off x="1261872" y="2395728"/>
-            <a:ext cx="914400" cy="384048"/>
-          </a:xfrm>
-          <a:prstGeom prst="roundRect">
-            <a:avLst/>
-          </a:prstGeom>
-          <a:solidFill>
-            <a:srgbClr val="0043DA"/>
-          </a:solidFill>
-        </p:spPr>
-        <p:style>
-          <a:lnRef idx="1">
-            <a:schemeClr val="accent1"/>
-          </a:lnRef>
-          <a:fillRef idx="3">
-            <a:schemeClr val="accent1"/>
-          </a:fillRef>
-          <a:effectRef idx="2">
-            <a:schemeClr val="accent1"/>
-          </a:effectRef>
-          <a:fontRef idx="minor">
-            <a:schemeClr val="lt1"/>
-          </a:fontRef>
-        </p:style>
-        <p:txBody>
-          <a:bodyPr rtlCol="0" anchor="ctr"/>
-          <a:lstStyle/>
-          <a:p>
-            <a:r>
-              <a:rPr sz="1100">
-                <a:solidFill>
-                  <a:srgbClr val="FFFFFF"/>
-                </a:solidFill>
-              </a:rPr>
-              <a:t>2024.01</a:t>
-            </a:r>
-          </a:p>
-        </p:txBody>
-      </p:sp>
-      <p:sp>
-        <p:nvSpPr>
-          <p:cNvPr id="28" name="Rounded Rectangle 27"/>
-          <p:cNvSpPr/>
-          <p:nvPr/>
-        </p:nvSpPr>
-        <p:spPr>
-          <a:xfrm>
-            <a:off x="4105656" y="3630168"/>
-            <a:ext cx="914400" cy="384048"/>
-          </a:xfrm>
-          <a:prstGeom prst="roundRect">
-            <a:avLst/>
-          </a:prstGeom>
-          <a:solidFill>
-            <a:srgbClr val="0043DA"/>
-          </a:solidFill>
-        </p:spPr>
-        <p:style>
-          <a:lnRef idx="1">
-            <a:schemeClr val="accent1"/>
-          </a:lnRef>
-          <a:fillRef idx="3">
-            <a:schemeClr val="accent1"/>
-          </a:fillRef>
-          <a:effectRef idx="2">
-            <a:schemeClr val="accent1"/>
-          </a:effectRef>
-          <a:fontRef idx="minor">
-            <a:schemeClr val="lt1"/>
-          </a:fontRef>
-        </p:style>
-        <p:txBody>
-          <a:bodyPr rtlCol="0" anchor="ctr"/>
-          <a:lstStyle/>
-          <a:p>
-            <a:r>
-              <a:rPr sz="1100">
-                <a:solidFill>
-                  <a:srgbClr val="FFFFFF"/>
-                </a:solidFill>
-              </a:rPr>
-              <a:t>2024.04</a:t>
-            </a:r>
-          </a:p>
-        </p:txBody>
-      </p:sp>
-      <p:sp>
-        <p:nvSpPr>
-          <p:cNvPr id="29" name="Rounded Rectangle 28"/>
-          <p:cNvSpPr/>
-          <p:nvPr/>
-        </p:nvSpPr>
-        <p:spPr>
-          <a:xfrm>
-            <a:off x="6958584" y="2395728"/>
-            <a:ext cx="914400" cy="384048"/>
-          </a:xfrm>
-          <a:prstGeom prst="roundRect">
-            <a:avLst/>
-          </a:prstGeom>
-          <a:solidFill>
-            <a:srgbClr val="0043DA"/>
-          </a:solidFill>
-        </p:spPr>
-        <p:style>
-          <a:lnRef idx="1">
-            <a:schemeClr val="accent1"/>
-          </a:lnRef>
-          <a:fillRef idx="3">
-            <a:schemeClr val="accent1"/>
-          </a:fillRef>
-          <a:effectRef idx="2">
-            <a:schemeClr val="accent1"/>
-          </a:effectRef>
-          <a:fontRef idx="minor">
-            <a:schemeClr val="lt1"/>
-          </a:fontRef>
-        </p:style>
-        <p:txBody>
-          <a:bodyPr rtlCol="0" anchor="ctr"/>
-          <a:lstStyle/>
-          <a:p>
-            <a:r>
-              <a:rPr sz="1100">
-                <a:solidFill>
-                  <a:srgbClr val="FFFFFF"/>
-                </a:solidFill>
-              </a:rPr>
-              <a:t>2024.07</a:t>
-            </a:r>
-          </a:p>
-        </p:txBody>
-      </p:sp>
-      <p:sp>
-        <p:nvSpPr>
-          <p:cNvPr id="30" name="Rounded Rectangle 29"/>
-          <p:cNvSpPr/>
-          <p:nvPr/>
-        </p:nvSpPr>
-        <p:spPr>
-          <a:xfrm>
-            <a:off x="9802368" y="3630168"/>
-            <a:ext cx="914400" cy="384048"/>
-          </a:xfrm>
-          <a:prstGeom prst="roundRect">
-            <a:avLst/>
-          </a:prstGeom>
-          <a:solidFill>
-            <a:srgbClr val="0043DA"/>
-          </a:solidFill>
-        </p:spPr>
-        <p:style>
-          <a:lnRef idx="1">
-            <a:schemeClr val="accent1"/>
-          </a:lnRef>
-          <a:fillRef idx="3">
-            <a:schemeClr val="accent1"/>
-          </a:fillRef>
-          <a:effectRef idx="2">
-            <a:schemeClr val="accent1"/>
-          </a:effectRef>
-          <a:fontRef idx="minor">
-            <a:schemeClr val="lt1"/>
-          </a:fontRef>
-        </p:style>
-        <p:txBody>
-          <a:bodyPr rtlCol="0" anchor="ctr"/>
-          <a:lstStyle/>
-          <a:p>
-            <a:r>
-              <a:rPr sz="1100">
-                <a:solidFill>
-                  <a:srgbClr val="FFFFFF"/>
-                </a:solidFill>
-              </a:rPr>
-              <a:t>2024.10</a:t>
-            </a:r>
-          </a:p>
-        </p:txBody>
-      </p:sp>
-      <p:sp>
-        <p:nvSpPr>
           <p:cNvPr id="31" name="Rounded Rectangle 30"/>
           <p:cNvSpPr/>
           <p:nvPr/>
         </p:nvSpPr>
         <p:spPr>
           <a:xfrm>
-            <a:off x="621792" y="1325880"/>
-            <a:ext cx="2194560" cy="1508760"/>
+            <a:off x="1798625" y="2628900"/>
+            <a:ext cx="1828800" cy="1143000"/>
           </a:xfrm>
           <a:prstGeom prst="roundRect">
             <a:avLst/>
@@ -12575,8 +12237,8 @@
         </p:nvSpPr>
         <p:spPr>
           <a:xfrm>
-            <a:off x="3465576" y="4114800"/>
-            <a:ext cx="2194560" cy="1600200"/>
+            <a:off x="4053535" y="5509260"/>
+            <a:ext cx="1828800" cy="1143000"/>
           </a:xfrm>
           <a:prstGeom prst="roundRect">
             <a:avLst/>
@@ -12620,19 +12282,17 @@
         </p:nvSpPr>
         <p:spPr>
           <a:xfrm>
-            <a:off x="6318504" y="1325880"/>
-            <a:ext cx="2194560" cy="1508760"/>
+            <a:off x="6309360" y="2628900"/>
+            <a:ext cx="1828800" cy="1143000"/>
           </a:xfrm>
           <a:prstGeom prst="roundRect">
             <a:avLst/>
           </a:prstGeom>
           <a:solidFill>
-            <a:srgbClr val="F2F6FC"/>
+            <a:srgbClr val="E8E8E8"/>
           </a:solidFill>
-          <a:ln w="19050">
-            <a:solidFill>
-              <a:srgbClr val="0043DA"/>
-            </a:solidFill>
+          <a:ln>
+            <a:noFill/>
           </a:ln>
         </p:spPr>
         <p:style>
@@ -12665,19 +12325,17 @@
         </p:nvSpPr>
         <p:spPr>
           <a:xfrm>
-            <a:off x="9162288" y="4114800"/>
-            <a:ext cx="2194560" cy="1600200"/>
+            <a:off x="8564270" y="5509260"/>
+            <a:ext cx="1828800" cy="1143000"/>
           </a:xfrm>
           <a:prstGeom prst="roundRect">
             <a:avLst/>
           </a:prstGeom>
           <a:solidFill>
-            <a:srgbClr val="F2F6FC"/>
+            <a:srgbClr val="E8E8E8"/>
           </a:solidFill>
-          <a:ln w="19050">
-            <a:solidFill>
-              <a:srgbClr val="0043DA"/>
-            </a:solidFill>
+          <a:ln>
+            <a:noFill/>
           </a:ln>
         </p:spPr>
         <p:style>
@@ -12710,8 +12368,8 @@
         </p:nvSpPr>
         <p:spPr>
           <a:xfrm>
-            <a:off x="713232" y="1417320"/>
-            <a:ext cx="2011680" cy="320040"/>
+            <a:off x="1890065" y="2720340"/>
+            <a:ext cx="1234440" cy="320040"/>
           </a:xfrm>
           <a:prstGeom prst="rect">
             <a:avLst/>
@@ -12743,8 +12401,8 @@
         </p:nvSpPr>
         <p:spPr>
           <a:xfrm>
-            <a:off x="3557016" y="4206240"/>
-            <a:ext cx="2011680" cy="320040"/>
+            <a:off x="4144975" y="5600700"/>
+            <a:ext cx="1234440" cy="320040"/>
           </a:xfrm>
           <a:prstGeom prst="rect">
             <a:avLst/>
@@ -12776,8 +12434,8 @@
         </p:nvSpPr>
         <p:spPr>
           <a:xfrm>
-            <a:off x="6409944" y="1417320"/>
-            <a:ext cx="2011680" cy="320040"/>
+            <a:off x="6400800" y="2720340"/>
+            <a:ext cx="1234440" cy="320040"/>
           </a:xfrm>
           <a:prstGeom prst="rect">
             <a:avLst/>
@@ -12793,7 +12451,7 @@
             <a:r>
               <a:rPr sz="1300" b="1">
                 <a:solidFill>
-                  <a:srgbClr val="0043DA"/>
+                  <a:srgbClr val="9E9E9E"/>
                 </a:solidFill>
               </a:rPr>
               <a:t>검증 및 최적화</a:t>
@@ -12809,8 +12467,8 @@
         </p:nvSpPr>
         <p:spPr>
           <a:xfrm>
-            <a:off x="9253728" y="4206240"/>
-            <a:ext cx="2011680" cy="320040"/>
+            <a:off x="8655710" y="5600700"/>
+            <a:ext cx="1234440" cy="320040"/>
           </a:xfrm>
           <a:prstGeom prst="rect">
             <a:avLst/>
@@ -12826,7 +12484,7 @@
             <a:r>
               <a:rPr sz="1300" b="1">
                 <a:solidFill>
-                  <a:srgbClr val="0043DA"/>
+                  <a:srgbClr val="9E9E9E"/>
                 </a:solidFill>
               </a:rPr>
               <a:t>운영 안정화</a:t>
@@ -12842,8 +12500,8 @@
         </p:nvSpPr>
         <p:spPr>
           <a:xfrm>
-            <a:off x="713232" y="1764792"/>
-            <a:ext cx="2011680" cy="1005840"/>
+            <a:off x="1890065" y="3086100"/>
+            <a:ext cx="1645920" cy="640080"/>
           </a:xfrm>
           <a:prstGeom prst="rect">
             <a:avLst/>
@@ -12895,8 +12553,8 @@
         </p:nvSpPr>
         <p:spPr>
           <a:xfrm>
-            <a:off x="3557016" y="4553712"/>
-            <a:ext cx="2011680" cy="1005840"/>
+            <a:off x="4144975" y="5966460"/>
+            <a:ext cx="1645920" cy="640080"/>
           </a:xfrm>
           <a:prstGeom prst="rect">
             <a:avLst/>
@@ -12948,8 +12606,8 @@
         </p:nvSpPr>
         <p:spPr>
           <a:xfrm>
-            <a:off x="6409944" y="1764792"/>
-            <a:ext cx="2011680" cy="1005840"/>
+            <a:off x="6400800" y="3086100"/>
+            <a:ext cx="1645920" cy="640080"/>
           </a:xfrm>
           <a:prstGeom prst="rect">
             <a:avLst/>
@@ -12965,7 +12623,7 @@
             <a:r>
               <a:rPr sz="1000">
                 <a:solidFill>
-                  <a:srgbClr val="4A4A4A"/>
+                  <a:srgbClr val="9E9E9E"/>
                 </a:solidFill>
               </a:rPr>
               <a:t>• 성능 벤치마크</a:t>
@@ -12975,7 +12633,7 @@
             <a:r>
               <a:rPr sz="1000">
                 <a:solidFill>
-                  <a:srgbClr val="4A4A4A"/>
+                  <a:srgbClr val="9E9E9E"/>
                 </a:solidFill>
               </a:rPr>
               <a:t>• 장애 복구 테스트</a:t>
@@ -12985,7 +12643,7 @@
             <a:r>
               <a:rPr sz="1000">
                 <a:solidFill>
-                  <a:srgbClr val="4A4A4A"/>
+                  <a:srgbClr val="9E9E9E"/>
                 </a:solidFill>
               </a:rPr>
               <a:t>• 파티션 최적화</a:t>
@@ -13001,8 +12659,8 @@
         </p:nvSpPr>
         <p:spPr>
           <a:xfrm>
-            <a:off x="9253728" y="4553712"/>
-            <a:ext cx="2011680" cy="1005840"/>
+            <a:off x="8655710" y="5966460"/>
+            <a:ext cx="1645920" cy="640080"/>
           </a:xfrm>
           <a:prstGeom prst="rect">
             <a:avLst/>
@@ -13018,7 +12676,7 @@
             <a:r>
               <a:rPr sz="1000">
                 <a:solidFill>
-                  <a:srgbClr val="4A4A4A"/>
+                  <a:srgbClr val="9E9E9E"/>
                 </a:solidFill>
               </a:rPr>
               <a:t>• 24/7 모니터링 구성</a:t>
@@ -13028,7 +12686,7 @@
             <a:r>
               <a:rPr sz="1000">
                 <a:solidFill>
-                  <a:srgbClr val="4A4A4A"/>
+                  <a:srgbClr val="9E9E9E"/>
                 </a:solidFill>
               </a:rPr>
               <a:t>• 알람 임계값 튜닝</a:t>
@@ -13038,7 +12696,7 @@
             <a:r>
               <a:rPr sz="1000">
                 <a:solidFill>
-                  <a:srgbClr val="4A4A4A"/>
+                  <a:srgbClr val="9E9E9E"/>
                 </a:solidFill>
               </a:rPr>
               <a:t>• 스케일링 정책 수립</a:t>
@@ -13062,7 +12720,7 @@
         </p:blipFill>
         <p:spPr>
           <a:xfrm>
-            <a:off x="2441448" y="1417320"/>
+            <a:off x="3170225" y="2720340"/>
             <a:ext cx="365760" cy="365760"/>
           </a:xfrm>
           <a:prstGeom prst="rect">
@@ -13086,7 +12744,7 @@
         </p:blipFill>
         <p:spPr>
           <a:xfrm>
-            <a:off x="5285232" y="4206240"/>
+            <a:off x="5425135" y="5600700"/>
             <a:ext cx="365760" cy="365760"/>
           </a:xfrm>
           <a:prstGeom prst="rect">
@@ -13110,7 +12768,7 @@
         </p:blipFill>
         <p:spPr>
           <a:xfrm>
-            <a:off x="8138160" y="1417320"/>
+            <a:off x="7680960" y="2720340"/>
             <a:ext cx="365760" cy="365760"/>
           </a:xfrm>
           <a:prstGeom prst="rect">
@@ -13134,7 +12792,7 @@
         </p:blipFill>
         <p:spPr>
           <a:xfrm>
-            <a:off x="10981944" y="4206240"/>
+            <a:off x="9935870" y="5600700"/>
             <a:ext cx="365760" cy="365760"/>
           </a:xfrm>
           <a:prstGeom prst="rect">
@@ -13142,6 +12800,390 @@
           </a:prstGeom>
         </p:spPr>
       </p:pic>
+      <p:sp>
+        <p:nvSpPr>
+          <p:cNvPr id="97" name="Badge Node2"/>
+          <p:cNvSpPr/>
+          <p:nvPr/>
+        </p:nvSpPr>
+        <p:spPr>
+          <a:xfrm>
+            <a:off x="4510918" y="5052060"/>
+            <a:ext cx="914400" cy="320040"/>
+          </a:xfrm>
+          <a:prstGeom prst="roundRect">
+            <a:avLst/>
+          </a:prstGeom>
+          <a:solidFill>
+            <a:srgbClr val="0043DA"/>
+          </a:solidFill>
+        </p:spPr>
+        <p:style>
+          <a:lnRef idx="1">
+            <a:schemeClr val="accent1"/>
+          </a:lnRef>
+          <a:fillRef idx="3">
+            <a:schemeClr val="accent1"/>
+          </a:fillRef>
+          <a:effectRef idx="2">
+            <a:schemeClr val="accent1"/>
+          </a:effectRef>
+          <a:fontRef idx="minor">
+            <a:schemeClr val="lt1"/>
+          </a:fontRef>
+        </p:style>
+        <p:txBody>
+          <a:bodyPr rtlCol="0" anchor="ctr"/>
+          <a:lstStyle/>
+          <a:p>
+            <a:pPr algn="ctr"/>
+            <a:r>
+              <a:rPr sz="1100">
+                <a:solidFill>
+                  <a:srgbClr val="FFFFFF"/>
+                </a:solidFill>
+              </a:rPr>
+              <a:t>2024.04</a:t>
+            </a:r>
+          </a:p>
+        </p:txBody>
+      </p:sp>
+      <p:sp>
+        <p:nvSpPr>
+          <p:cNvPr id="98" name="Badge Node4"/>
+          <p:cNvSpPr/>
+          <p:nvPr/>
+        </p:nvSpPr>
+        <p:spPr>
+          <a:xfrm>
+            <a:off x="9021836" y="5052060"/>
+            <a:ext cx="914400" cy="320040"/>
+          </a:xfrm>
+          <a:prstGeom prst="roundRect">
+            <a:avLst/>
+          </a:prstGeom>
+          <a:solidFill>
+            <a:srgbClr val="9E9E9E"/>
+          </a:solidFill>
+        </p:spPr>
+        <p:style>
+          <a:lnRef idx="0">
+            <a:schemeClr val="accent1"/>
+          </a:lnRef>
+          <a:fillRef idx="0">
+            <a:schemeClr val="accent1"/>
+          </a:fillRef>
+          <a:effectRef idx="2">
+            <a:schemeClr val="accent1"/>
+          </a:effectRef>
+          <a:fontRef idx="minor">
+            <a:schemeClr val="lt1"/>
+          </a:fontRef>
+        </p:style>
+        <p:txBody>
+          <a:bodyPr rtlCol="0" anchor="ctr"/>
+          <a:lstStyle/>
+          <a:p>
+            <a:pPr algn="ctr"/>
+            <a:r>
+              <a:rPr sz="1100">
+                <a:solidFill>
+                  <a:srgbClr val="FFFFFF"/>
+                </a:solidFill>
+              </a:rPr>
+              <a:t>2024.10</a:t>
+            </a:r>
+          </a:p>
+        </p:txBody>
+      </p:sp>
+      <p:sp>
+        <p:nvSpPr>
+          <p:cNvPr id="95" name="Badge Node1"/>
+          <p:cNvSpPr/>
+          <p:nvPr/>
+        </p:nvSpPr>
+        <p:spPr>
+          <a:xfrm>
+            <a:off x="2255459" y="3909060"/>
+            <a:ext cx="914400" cy="320040"/>
+          </a:xfrm>
+          <a:prstGeom prst="roundRect">
+            <a:avLst/>
+          </a:prstGeom>
+          <a:solidFill>
+            <a:srgbClr val="0043DA"/>
+          </a:solidFill>
+        </p:spPr>
+        <p:style>
+          <a:lnRef idx="1">
+            <a:schemeClr val="accent1"/>
+          </a:lnRef>
+          <a:fillRef idx="3">
+            <a:schemeClr val="accent1"/>
+          </a:fillRef>
+          <a:effectRef idx="2">
+            <a:schemeClr val="accent1"/>
+          </a:effectRef>
+          <a:fontRef idx="minor">
+            <a:schemeClr val="lt1"/>
+          </a:fontRef>
+        </p:style>
+        <p:txBody>
+          <a:bodyPr rtlCol="0" anchor="ctr"/>
+          <a:lstStyle/>
+          <a:p>
+            <a:pPr algn="ctr"/>
+            <a:r>
+              <a:rPr sz="1100">
+                <a:solidFill>
+                  <a:srgbClr val="FFFFFF"/>
+                </a:solidFill>
+              </a:rPr>
+              <a:t>2024.01</a:t>
+            </a:r>
+          </a:p>
+        </p:txBody>
+      </p:sp>
+      <p:sp>
+        <p:nvSpPr>
+          <p:cNvPr id="96" name="Badge Node3"/>
+          <p:cNvSpPr/>
+          <p:nvPr/>
+        </p:nvSpPr>
+        <p:spPr>
+          <a:xfrm>
+            <a:off x="6766377" y="3909060"/>
+            <a:ext cx="914400" cy="320040"/>
+          </a:xfrm>
+          <a:prstGeom prst="roundRect">
+            <a:avLst/>
+          </a:prstGeom>
+          <a:solidFill>
+            <a:srgbClr val="9E9E9E"/>
+          </a:solidFill>
+        </p:spPr>
+        <p:style>
+          <a:lnRef idx="0">
+            <a:schemeClr val="accent1"/>
+          </a:lnRef>
+          <a:fillRef idx="0">
+            <a:schemeClr val="accent1"/>
+          </a:fillRef>
+          <a:effectRef idx="2">
+            <a:schemeClr val="accent1"/>
+          </a:effectRef>
+          <a:fontRef idx="minor">
+            <a:schemeClr val="lt1"/>
+          </a:fontRef>
+        </p:style>
+        <p:txBody>
+          <a:bodyPr rtlCol="0" anchor="ctr"/>
+          <a:lstStyle/>
+          <a:p>
+            <a:pPr algn="ctr"/>
+            <a:r>
+              <a:rPr sz="1100">
+                <a:solidFill>
+                  <a:srgbClr val="FFFFFF"/>
+                </a:solidFill>
+              </a:rPr>
+              <a:t>2024.07</a:t>
+            </a:r>
+          </a:p>
+        </p:txBody>
+      </p:sp>
+      <p:sp>
+        <p:nvSpPr>
+          <p:cNvPr id="23" name="Oval 22"/>
+          <p:cNvSpPr/>
+          <p:nvPr/>
+        </p:nvSpPr>
+        <p:spPr>
+          <a:xfrm>
+            <a:off x="2511857" y="4439412"/>
+            <a:ext cx="402336" cy="402336"/>
+          </a:xfrm>
+          <a:prstGeom prst="ellipse">
+            <a:avLst/>
+          </a:prstGeom>
+          <a:solidFill>
+            <a:srgbClr val="0043DA"/>
+          </a:solidFill>
+        </p:spPr>
+        <p:style>
+          <a:lnRef idx="1">
+            <a:schemeClr val="accent1"/>
+          </a:lnRef>
+          <a:fillRef idx="3">
+            <a:schemeClr val="accent1"/>
+          </a:fillRef>
+          <a:effectRef idx="2">
+            <a:schemeClr val="accent1"/>
+          </a:effectRef>
+          <a:fontRef idx="minor">
+            <a:schemeClr val="lt1"/>
+          </a:fontRef>
+        </p:style>
+        <p:txBody>
+          <a:bodyPr rtlCol="0" anchor="ctr"/>
+          <a:lstStyle/>
+          <a:p>
+            <a:pPr algn="ctr"/>
+            <a:r>
+              <a:rPr sz="1400">
+                <a:solidFill>
+                  <a:srgbClr val="FFFFFF"/>
+                </a:solidFill>
+              </a:rPr>
+              <a:t>1</a:t>
+            </a:r>
+          </a:p>
+        </p:txBody>
+      </p:sp>
+      <p:sp>
+        <p:nvSpPr>
+          <p:cNvPr id="24" name="Oval 23"/>
+          <p:cNvSpPr/>
+          <p:nvPr/>
+        </p:nvSpPr>
+        <p:spPr>
+          <a:xfrm>
+            <a:off x="4766767" y="4439412"/>
+            <a:ext cx="402336" cy="402336"/>
+          </a:xfrm>
+          <a:prstGeom prst="ellipse">
+            <a:avLst/>
+          </a:prstGeom>
+          <a:solidFill>
+            <a:srgbClr val="0043DA"/>
+          </a:solidFill>
+        </p:spPr>
+        <p:style>
+          <a:lnRef idx="1">
+            <a:schemeClr val="accent1"/>
+          </a:lnRef>
+          <a:fillRef idx="3">
+            <a:schemeClr val="accent1"/>
+          </a:fillRef>
+          <a:effectRef idx="2">
+            <a:schemeClr val="accent1"/>
+          </a:effectRef>
+          <a:fontRef idx="minor">
+            <a:schemeClr val="lt1"/>
+          </a:fontRef>
+        </p:style>
+        <p:txBody>
+          <a:bodyPr rtlCol="0" anchor="ctr"/>
+          <a:lstStyle/>
+          <a:p>
+            <a:pPr algn="ctr"/>
+            <a:r>
+              <a:rPr sz="1400">
+                <a:solidFill>
+                  <a:srgbClr val="FFFFFF"/>
+                </a:solidFill>
+              </a:rPr>
+              <a:t>2</a:t>
+            </a:r>
+          </a:p>
+        </p:txBody>
+      </p:sp>
+      <p:sp>
+        <p:nvSpPr>
+          <p:cNvPr id="25" name="Oval 24"/>
+          <p:cNvSpPr/>
+          <p:nvPr/>
+        </p:nvSpPr>
+        <p:spPr>
+          <a:xfrm>
+            <a:off x="7022592" y="4439412"/>
+            <a:ext cx="402336" cy="402336"/>
+          </a:xfrm>
+          <a:prstGeom prst="ellipse">
+            <a:avLst/>
+          </a:prstGeom>
+          <a:solidFill>
+            <a:srgbClr val="9E9E9E"/>
+          </a:solidFill>
+        </p:spPr>
+        <p:style>
+          <a:lnRef idx="0">
+            <a:schemeClr val="accent1"/>
+          </a:lnRef>
+          <a:fillRef idx="0">
+            <a:schemeClr val="accent1"/>
+          </a:fillRef>
+          <a:effectRef idx="2">
+            <a:schemeClr val="accent1"/>
+          </a:effectRef>
+          <a:fontRef idx="minor">
+            <a:schemeClr val="lt1"/>
+          </a:fontRef>
+        </p:style>
+        <p:txBody>
+          <a:bodyPr rtlCol="0" anchor="ctr"/>
+          <a:lstStyle/>
+          <a:p>
+            <a:pPr algn="ctr"/>
+            <a:r>
+              <a:rPr sz="1400">
+                <a:solidFill>
+                  <a:srgbClr val="FFFFFF"/>
+                </a:solidFill>
+              </a:rPr>
+              <a:t>3</a:t>
+            </a:r>
+          </a:p>
+        </p:txBody>
+      </p:sp>
+      <p:sp>
+        <p:nvSpPr>
+          <p:cNvPr id="26" name="Oval 25"/>
+          <p:cNvSpPr/>
+          <p:nvPr/>
+        </p:nvSpPr>
+        <p:spPr>
+          <a:xfrm>
+            <a:off x="9277502" y="4439412"/>
+            <a:ext cx="402336" cy="402336"/>
+          </a:xfrm>
+          <a:prstGeom prst="ellipse">
+            <a:avLst/>
+          </a:prstGeom>
+          <a:solidFill>
+            <a:srgbClr val="9E9E9E"/>
+          </a:solidFill>
+        </p:spPr>
+        <p:style>
+          <a:lnRef idx="0">
+            <a:schemeClr val="accent1"/>
+          </a:lnRef>
+          <a:fillRef idx="0">
+            <a:schemeClr val="accent1"/>
+          </a:fillRef>
+          <a:effectRef idx="2">
+            <a:schemeClr val="accent1"/>
+          </a:effectRef>
+          <a:fontRef idx="minor">
+            <a:schemeClr val="lt1"/>
+          </a:fontRef>
+        </p:style>
+        <p:txBody>
+          <a:bodyPr rtlCol="0" anchor="ctr"/>
+          <a:lstStyle/>
+          <a:p>
+            <a:pPr algn="ctr"/>
+            <a:r>
+              <a:rPr sz="1400">
+                <a:solidFill>
+                  <a:srgbClr val="FFFFFF"/>
+                </a:solidFill>
+              </a:rPr>
+              <a:t>4</a:t>
+            </a:r>
+          </a:p>
+        </p:txBody>
+      </p:sp>
     </p:spTree>
   </p:cSld>
 </p:sld>
@@ -13191,51 +13233,46 @@
           <a:noFill/>
         </p:spPr>
         <p:txBody>
+          <a:bodyPr anchor="t" lIns="0" tIns="0" rIns="0" bIns="0"/>
+          <a:lstStyle/>
+          <a:p>
+            <a:r>
+              <a:rPr sz="2000" b="1" dirty="0">
+                <a:solidFill>
+                  <a:srgbClr val="000000"/>
+                </a:solidFill>
+                <a:latin typeface="Freesentation"/>
+              </a:rPr>
+              <a:t>L07. Roadmap Timeline</a:t>
+            </a:r>
+          </a:p>
+        </p:txBody>
+      </p:sp>
+      <p:sp>
+        <p:nvSpPr>
+          <p:cNvPr id="4" name="TextBox 3"/>
+          <p:cNvSpPr txBox="1"/>
+          <p:nvPr/>
+        </p:nvSpPr>
+        <p:spPr>
+          <a:xfrm>
+            <a:off x="3760927" y="557509"/>
+            <a:ext cx="8430768" cy="932688"/>
+          </a:xfrm>
+          <a:prstGeom prst="rect">
+            <a:avLst/>
+          </a:prstGeom>
+          <a:noFill/>
+        </p:spPr>
+        <p:txBody>
           <a:bodyPr wrap="square">
             <a:spAutoFit/>
           </a:bodyPr>
           <a:lstStyle/>
           <a:p>
             <a:r>
-              <a:rPr sz="2000" b="1">
-                <a:solidFill>
-                  <a:srgbClr val="0043DA"/>
-                </a:solidFill>
-                <a:latin typeface="프리젠테이션 7 Bold"/>
-              </a:rPr>
-              <a:t>L07. Roadmap Timeline</a:t>
-            </a:r>
-          </a:p>
-        </p:txBody>
-      </p:sp>
-      <p:sp>
-        <p:nvSpPr>
-          <p:cNvPr id="4" name="TextBox 3"/>
-          <p:cNvSpPr txBox="1"/>
-          <p:nvPr/>
-        </p:nvSpPr>
-        <p:spPr>
-          <a:xfrm>
-            <a:off x="3760927" y="557509"/>
-            <a:ext cx="8430768" cy="932688"/>
-          </a:xfrm>
-          <a:prstGeom prst="rect">
-            <a:avLst/>
-          </a:prstGeom>
-          <a:noFill/>
-        </p:spPr>
-        <p:txBody>
-          <a:bodyPr wrap="square">
-            <a:spAutoFit/>
-          </a:bodyPr>
-          <a:lstStyle/>
-          <a:p>
-            <a:r>
               <a:rPr sz="1200" b="0">
-                <a:solidFill>
-                  <a:srgbClr val="212121"/>
-                </a:solidFill>
-                <a:latin typeface="프리젠테이션 5 Medium"/>
+                <a:latin typeface="Freesentation"/>
               </a:rPr>
               <a:t>수영장 레인 구조 — 복수 워크스트림 병렬 진행</a:t>
             </a:r>
@@ -13329,10 +13366,11 @@
           <a:lstStyle/>
           <a:p>
             <a:r>
-              <a:rPr sz="1200">
+              <a:rPr sz="1300">
                 <a:solidFill>
                   <a:srgbClr val="0043DA"/>
                 </a:solidFill>
+                <a:latin typeface="Freesentation"/>
               </a:rPr>
               <a:t>Q1 2026</a:t>
             </a:r>
@@ -13381,10 +13419,11 @@
           <a:lstStyle/>
           <a:p>
             <a:r>
-              <a:rPr sz="1200">
+              <a:rPr sz="1300">
                 <a:solidFill>
                   <a:srgbClr val="0043DA"/>
                 </a:solidFill>
+                <a:latin typeface="Freesentation"/>
               </a:rPr>
               <a:t>Q2 2026</a:t>
             </a:r>
@@ -13433,10 +13472,11 @@
           <a:lstStyle/>
           <a:p>
             <a:r>
-              <a:rPr sz="1200">
+              <a:rPr sz="1300">
                 <a:solidFill>
                   <a:srgbClr val="0043DA"/>
                 </a:solidFill>
+                <a:latin typeface="Freesentation"/>
               </a:rPr>
               <a:t>Q3 2026</a:t>
             </a:r>
@@ -13485,10 +13525,11 @@
           <a:lstStyle/>
           <a:p>
             <a:r>
-              <a:rPr sz="1200">
+              <a:rPr sz="1300">
                 <a:solidFill>
                   <a:srgbClr val="0043DA"/>
                 </a:solidFill>
+                <a:latin typeface="Freesentation"/>
               </a:rPr>
               <a:t>Q4 2026</a:t>
             </a:r>

--- a/results/pptx/AWS_MSK_Expert_Intro.pptx
+++ b/results/pptx/AWS_MSK_Expert_Intro.pptx
@@ -5106,7 +5106,7 @@
         </p:blipFill>
         <p:spPr>
           <a:xfrm>
-            <a:off x="4917600" y="5900400"/>
+            <a:off x="5047200" y="6087600"/>
             <a:ext cx="411480" cy="411480"/>
           </a:xfrm>
           <a:prstGeom prst="rect">
@@ -5130,7 +5130,7 @@
         </p:blipFill>
         <p:spPr>
           <a:xfrm>
-            <a:off x="10891375" y="5900400"/>
+            <a:off x="11021280" y="6087600"/>
             <a:ext cx="411480" cy="411480"/>
           </a:xfrm>
           <a:prstGeom prst="rect">
@@ -5728,8 +5728,8 @@
         </p:blipFill>
         <p:spPr>
           <a:xfrm>
-            <a:off x="4917600" y="5900400"/>
-            <a:ext cx="411480" cy="411480"/>
+            <a:off x="4935600" y="5605200"/>
+            <a:ext cx="849600" cy="849600"/>
           </a:xfrm>
           <a:prstGeom prst="rect">
             <a:avLst/>
@@ -5752,8 +5752,8 @@
         </p:blipFill>
         <p:spPr>
           <a:xfrm>
-            <a:off x="10585051" y="5900400"/>
-            <a:ext cx="411480" cy="411480"/>
+            <a:off x="10635360" y="5605200"/>
+            <a:ext cx="849600" cy="849600"/>
           </a:xfrm>
           <a:prstGeom prst="rect">
             <a:avLst/>

--- a/results/pptx/AWS_MSK_Expert_Intro.pptx
+++ b/results/pptx/AWS_MSK_Expert_Intro.pptx
@@ -23,6 +23,8 @@
     <p:sldId id="371" r:id="rId18"/>
     <p:sldId id="372" r:id="rId17"/>
     <p:sldId id="373" r:id="rId19"/>
+    <p:sldId id="375" r:id="rId21"/>
+    <p:sldId id="376" r:id="rId24"/>
     <p:sldId id="356" r:id="rId9"/>
   </p:sldIdLst>
   <p:sldSz cx="12192000" cy="6858000"/>
@@ -3771,7 +3773,7 @@
           <a:noFill/>
         </p:spPr>
         <p:txBody>
-          <a:bodyPr wrap="square">
+          <a:bodyPr wrap="square" lIns="0" rIns="0" tIns="0" bIns="0">
             <a:spAutoFit/>
           </a:bodyPr>
           <a:lstStyle/>
@@ -4798,7 +4800,7 @@
           <a:noFill/>
         </p:spPr>
         <p:txBody>
-          <a:bodyPr wrap="square">
+          <a:bodyPr wrap="square" lIns="0" rIns="0" tIns="0" bIns="0">
             <a:spAutoFit/>
           </a:bodyPr>
           <a:lstStyle/>
@@ -5809,7 +5811,7 @@
           <a:noFill/>
         </p:spPr>
         <p:txBody>
-          <a:bodyPr wrap="square">
+          <a:bodyPr wrap="square" lIns="0" rIns="0" tIns="0" bIns="0">
             <a:spAutoFit/>
           </a:bodyPr>
           <a:lstStyle/>
@@ -5908,6 +5910,2107 @@
 </file>
 
 <file path=ppt/slides/slide13.xml><?xml version="1.0" encoding="utf-8"?>
+<p:sld xmlns:p="http://schemas.openxmlformats.org/presentationml/2006/main" xmlns:a="http://schemas.openxmlformats.org/drawingml/2006/main" xmlns:r="http://schemas.openxmlformats.org/officeDocument/2006/relationships">
+  <p:cSld>
+    <p:spTree>
+      <p:nvGrpSpPr>
+        <p:cNvPr id="1" name=""/>
+        <p:cNvGrpSpPr/>
+        <p:nvPr/>
+      </p:nvGrpSpPr>
+      <p:grpSpPr/>
+      <p:sp>
+        <p:nvSpPr>
+          <p:cNvPr id="2" name="Text Placeholder 1"/>
+          <p:cNvSpPr>
+            <a:spLocks noGrp="1"/>
+          </p:cNvSpPr>
+          <p:nvPr>
+            <p:ph type="body" idx="10" sz="quarter"/>
+          </p:nvPr>
+        </p:nvSpPr>
+        <p:spPr/>
+        <p:txBody>
+          <a:bodyPr/>
+          <a:lstStyle/>
+          <a:p/>
+        </p:txBody>
+      </p:sp>
+      <p:sp>
+        <p:nvSpPr>
+          <p:cNvPr id="10" name="TextBox L11 Title"/>
+          <p:cNvSpPr txBox="1"/>
+          <p:nvPr/>
+        </p:nvSpPr>
+        <p:spPr>
+          <a:xfrm>
+            <a:off x="457200" y="1600200"/>
+            <a:ext cx="11277600" cy="320040"/>
+          </a:xfrm>
+          <a:prstGeom prst="rect">
+            <a:avLst/>
+          </a:prstGeom>
+          <a:noFill/>
+          <a:ln>
+            <a:noFill/>
+          </a:ln>
+        </p:spPr>
+        <p:txBody>
+          <a:bodyPr wrap="square">
+            <a:spAutoFit/>
+          </a:bodyPr>
+          <a:lstStyle/>
+          <a:p>
+            <a:pPr algn="l"/>
+            <a:r>
+              <a:rPr sz="1600" b="1">
+                <a:solidFill>
+                  <a:srgbClr val="0043DA"/>
+                </a:solidFill>
+                <a:latin typeface="Freesentation"/>
+              </a:rPr>
+              <a:t>클라우드 메시징 솔루션 비교</a:t>
+            </a:r>
+          </a:p>
+        </p:txBody>
+      </p:sp>
+      <p:sp>
+        <p:nvSpPr>
+          <p:cNvPr id="11" name="TextBox L11 Desc"/>
+          <p:cNvSpPr txBox="1"/>
+          <p:nvPr/>
+        </p:nvSpPr>
+        <p:spPr>
+          <a:xfrm>
+            <a:off x="457200" y="1965960"/>
+            <a:ext cx="11277600" cy="274320"/>
+          </a:xfrm>
+          <a:prstGeom prst="rect">
+            <a:avLst/>
+          </a:prstGeom>
+          <a:noFill/>
+          <a:ln>
+            <a:noFill/>
+          </a:ln>
+        </p:spPr>
+        <p:txBody>
+          <a:bodyPr wrap="square">
+            <a:spAutoFit/>
+          </a:bodyPr>
+          <a:lstStyle/>
+          <a:p>
+            <a:pPr algn="l"/>
+            <a:r>
+              <a:rPr sz="1300" b="0">
+                <a:solidFill>
+                  <a:srgbClr val="212121"/>
+                </a:solidFill>
+                <a:latin typeface="Freesentation"/>
+              </a:rPr>
+              <a:t>AWS MSK · Confluent Cloud · 자체 구축 Kafka 3개 옵션 비교 (2026년 4월 기준)</a:t>
+            </a:r>
+          </a:p>
+        </p:txBody>
+      </p:sp>
+      <p:graphicFrame>
+        <p:nvGraphicFramePr>
+          <p:cNvPr id="20" name="Table L11"/>
+          <p:cNvGraphicFramePr>
+            <a:graphicFrameLocks noGrp="1"/>
+          </p:cNvGraphicFramePr>
+          <p:nvPr/>
+        </p:nvGraphicFramePr>
+        <p:xfrm>
+          <a:off x="457200" y="2423160"/>
+          <a:ext cx="11277600" cy="4252320"/>
+        </p:xfrm>
+        <a:graphic>
+          <a:graphicData uri="http://schemas.openxmlformats.org/drawingml/2006/table">
+            <a:tbl>
+              <a:tblPr firstRow="1" bandRow="0">
+                <a:noFill/>
+                <a:tableStyleId>{5C22544A-7EE6-4342-B048-85BDC9FD1C3A}</a:tableStyleId>
+              </a:tblPr>
+              <a:tblGrid>
+                <a:gridCol w="2560320"/>
+                <a:gridCol w="2905760"/>
+                <a:gridCol w="2905760"/>
+                <a:gridCol w="2905760"/>
+              </a:tblGrid>
+              <a:tr h="457200">
+                <a:tc>
+                  <a:txBody>
+                    <a:bodyPr anchor="ctr"/>
+                    <a:lstStyle/>
+                    <a:p>
+                      <a:pPr algn="ctr"/>
+                      <a:r>
+                        <a:rPr lang="ko-KR" sz="1100" b="1">
+                          <a:solidFill>
+                            <a:srgbClr val="FFFFFF"/>
+                          </a:solidFill>
+                          <a:latin typeface="프리젠테이션 7 Bold"/>
+                        </a:rPr>
+                        <a:t>항목</a:t>
+                      </a:r>
+                    </a:p>
+                  </a:txBody>
+                  <a:tcPr>
+                    <a:lnL w="12700" cap="flat" cmpd="sng">
+                      <a:solidFill>
+                        <a:srgbClr val="DCDCDC"/>
+                      </a:solidFill>
+                    </a:lnL>
+                    <a:lnR w="12700" cap="flat" cmpd="sng">
+                      <a:solidFill>
+                        <a:srgbClr val="DCDCDC"/>
+                      </a:solidFill>
+                    </a:lnR>
+                    <a:lnT w="12700" cap="flat" cmpd="sng">
+                      <a:solidFill>
+                        <a:srgbClr val="DCDCDC"/>
+                      </a:solidFill>
+                    </a:lnT>
+                    <a:lnB w="12700" cap="flat" cmpd="sng">
+                      <a:solidFill>
+                        <a:srgbClr val="DCDCDC"/>
+                      </a:solidFill>
+                    </a:lnB>
+                    <a:solidFill>
+                      <a:srgbClr val="0043DA"/>
+                    </a:solidFill>
+                  </a:tcPr>
+                </a:tc>
+                <a:tc>
+                  <a:txBody>
+                    <a:bodyPr anchor="ctr"/>
+                    <a:lstStyle/>
+                    <a:p>
+                      <a:pPr algn="ctr"/>
+                      <a:r>
+                        <a:rPr lang="ko-KR" sz="1100" b="1">
+                          <a:solidFill>
+                            <a:srgbClr val="FFFFFF"/>
+                          </a:solidFill>
+                          <a:latin typeface="프리젠테이션 7 Bold"/>
+                        </a:rPr>
+                        <a:t>자체 구축 Kafka</a:t>
+                      </a:r>
+                    </a:p>
+                  </a:txBody>
+                  <a:tcPr>
+                    <a:lnL w="12700" cap="flat" cmpd="sng">
+                      <a:solidFill>
+                        <a:srgbClr val="DCDCDC"/>
+                      </a:solidFill>
+                    </a:lnL>
+                    <a:lnR w="12700" cap="flat" cmpd="sng">
+                      <a:solidFill>
+                        <a:srgbClr val="DCDCDC"/>
+                      </a:solidFill>
+                    </a:lnR>
+                    <a:lnT w="12700" cap="flat" cmpd="sng">
+                      <a:solidFill>
+                        <a:srgbClr val="DCDCDC"/>
+                      </a:solidFill>
+                    </a:lnT>
+                    <a:lnB w="12700" cap="flat" cmpd="sng">
+                      <a:solidFill>
+                        <a:srgbClr val="DCDCDC"/>
+                      </a:solidFill>
+                    </a:lnB>
+                    <a:solidFill>
+                      <a:srgbClr val="0043DA"/>
+                    </a:solidFill>
+                  </a:tcPr>
+                </a:tc>
+                <a:tc>
+                  <a:txBody>
+                    <a:bodyPr anchor="ctr"/>
+                    <a:lstStyle/>
+                    <a:p>
+                      <a:pPr algn="ctr"/>
+                      <a:r>
+                        <a:rPr lang="ko-KR" sz="1100" b="1">
+                          <a:solidFill>
+                            <a:srgbClr val="FFFFFF"/>
+                          </a:solidFill>
+                          <a:latin typeface="프리젠테이션 7 Bold"/>
+                        </a:rPr>
+                        <a:t>✓ AWS MSK</a:t>
+                      </a:r>
+                    </a:p>
+                  </a:txBody>
+                  <a:tcPr>
+                    <a:lnL w="12700" cap="flat" cmpd="sng">
+                      <a:solidFill>
+                        <a:srgbClr val="DCDCDC"/>
+                      </a:solidFill>
+                    </a:lnL>
+                    <a:lnR w="12700" cap="flat" cmpd="sng">
+                      <a:solidFill>
+                        <a:srgbClr val="DCDCDC"/>
+                      </a:solidFill>
+                    </a:lnR>
+                    <a:lnT w="12700" cap="flat" cmpd="sng">
+                      <a:solidFill>
+                        <a:srgbClr val="DCDCDC"/>
+                      </a:solidFill>
+                    </a:lnT>
+                    <a:lnB w="12700" cap="flat" cmpd="sng">
+                      <a:solidFill>
+                        <a:srgbClr val="DCDCDC"/>
+                      </a:solidFill>
+                    </a:lnB>
+                    <a:solidFill>
+                      <a:srgbClr val="0043DA"/>
+                    </a:solidFill>
+                  </a:tcPr>
+                </a:tc>
+                <a:tc>
+                  <a:txBody>
+                    <a:bodyPr anchor="ctr"/>
+                    <a:lstStyle/>
+                    <a:p>
+                      <a:pPr algn="ctr"/>
+                      <a:r>
+                        <a:rPr lang="ko-KR" sz="1100" b="1">
+                          <a:solidFill>
+                            <a:srgbClr val="FFFFFF"/>
+                          </a:solidFill>
+                          <a:latin typeface="프리젠테이션 7 Bold"/>
+                        </a:rPr>
+                        <a:t>Confluent Cloud</a:t>
+                      </a:r>
+                    </a:p>
+                  </a:txBody>
+                  <a:tcPr>
+                    <a:lnL w="12700" cap="flat" cmpd="sng">
+                      <a:solidFill>
+                        <a:srgbClr val="DCDCDC"/>
+                      </a:solidFill>
+                    </a:lnL>
+                    <a:lnR w="12700" cap="flat" cmpd="sng">
+                      <a:solidFill>
+                        <a:srgbClr val="DCDCDC"/>
+                      </a:solidFill>
+                    </a:lnR>
+                    <a:lnT w="12700" cap="flat" cmpd="sng">
+                      <a:solidFill>
+                        <a:srgbClr val="DCDCDC"/>
+                      </a:solidFill>
+                    </a:lnT>
+                    <a:lnB w="12700" cap="flat" cmpd="sng">
+                      <a:solidFill>
+                        <a:srgbClr val="DCDCDC"/>
+                      </a:solidFill>
+                    </a:lnB>
+                    <a:solidFill>
+                      <a:srgbClr val="0043DA"/>
+                    </a:solidFill>
+                  </a:tcPr>
+                </a:tc>
+              </a:tr>
+              <a:tr h="759024">
+                <a:tc>
+                  <a:txBody>
+                    <a:bodyPr anchor="ctr"/>
+                    <a:lstStyle/>
+                    <a:p>
+                      <a:pPr algn="l"/>
+                      <a:r>
+                        <a:rPr lang="ko-KR" sz="1300" b="1">
+                          <a:solidFill>
+                            <a:srgbClr val="212121"/>
+                          </a:solidFill>
+                          <a:latin typeface="프리젠테이션 7 Bold"/>
+                        </a:rPr>
+                        <a:t>초기 비용</a:t>
+                      </a:r>
+                    </a:p>
+                  </a:txBody>
+                  <a:tcPr>
+                    <a:lnL w="12700" cap="flat" cmpd="sng">
+                      <a:solidFill>
+                        <a:srgbClr val="DCDCDC"/>
+                      </a:solidFill>
+                    </a:lnL>
+                    <a:lnR w="12700" cap="flat" cmpd="sng">
+                      <a:solidFill>
+                        <a:srgbClr val="DCDCDC"/>
+                      </a:solidFill>
+                    </a:lnR>
+                    <a:lnT w="12700" cap="flat" cmpd="sng">
+                      <a:solidFill>
+                        <a:srgbClr val="DCDCDC"/>
+                      </a:solidFill>
+                    </a:lnT>
+                    <a:lnB w="12700" cap="flat" cmpd="sng">
+                      <a:solidFill>
+                        <a:srgbClr val="DCDCDC"/>
+                      </a:solidFill>
+                    </a:lnB>
+                    <a:solidFill>
+                      <a:srgbClr val="F8F9FA"/>
+                    </a:solidFill>
+                  </a:tcPr>
+                </a:tc>
+                <a:tc>
+                  <a:txBody>
+                    <a:bodyPr anchor="ctr"/>
+                    <a:lstStyle/>
+                    <a:p>
+                      <a:pPr algn="ctr"/>
+                      <a:r>
+                        <a:rPr lang="ko-KR" sz="1300" b="0">
+                          <a:solidFill>
+                            <a:srgbClr val="212121"/>
+                          </a:solidFill>
+                          <a:latin typeface="Freesentation"/>
+                        </a:rPr>
+                        <a:t>₩5억+ 서버 구매</a:t>
+                      </a:r>
+                    </a:p>
+                  </a:txBody>
+                  <a:tcPr>
+                    <a:lnL w="12700" cap="flat" cmpd="sng">
+                      <a:solidFill>
+                        <a:srgbClr val="DCDCDC"/>
+                      </a:solidFill>
+                    </a:lnL>
+                    <a:lnR w="12700" cap="flat" cmpd="sng">
+                      <a:solidFill>
+                        <a:srgbClr val="DCDCDC"/>
+                      </a:solidFill>
+                    </a:lnR>
+                    <a:lnT w="12700" cap="flat" cmpd="sng">
+                      <a:solidFill>
+                        <a:srgbClr val="DCDCDC"/>
+                      </a:solidFill>
+                    </a:lnT>
+                    <a:lnB w="12700" cap="flat" cmpd="sng">
+                      <a:solidFill>
+                        <a:srgbClr val="DCDCDC"/>
+                      </a:solidFill>
+                    </a:lnB>
+                    <a:solidFill>
+                      <a:srgbClr val="FFFFFF"/>
+                    </a:solidFill>
+                  </a:tcPr>
+                </a:tc>
+                <a:tc>
+                  <a:txBody>
+                    <a:bodyPr anchor="ctr"/>
+                    <a:lstStyle/>
+                    <a:p>
+                      <a:pPr algn="ctr"/>
+                      <a:r>
+                        <a:rPr lang="ko-KR" sz="1300" b="1">
+                          <a:solidFill>
+                            <a:srgbClr val="0043DA"/>
+                          </a:solidFill>
+                          <a:latin typeface="Freesentation"/>
+                        </a:rPr>
+                        <a:t>초기 투자 0원</a:t>
+                      </a:r>
+                    </a:p>
+                  </a:txBody>
+                  <a:tcPr>
+                    <a:lnL w="12700" cap="flat" cmpd="sng">
+                      <a:solidFill>
+                        <a:srgbClr val="DCDCDC"/>
+                      </a:solidFill>
+                    </a:lnL>
+                    <a:lnR w="12700" cap="flat" cmpd="sng">
+                      <a:solidFill>
+                        <a:srgbClr val="DCDCDC"/>
+                      </a:solidFill>
+                    </a:lnR>
+                    <a:lnT w="12700" cap="flat" cmpd="sng">
+                      <a:solidFill>
+                        <a:srgbClr val="DCDCDC"/>
+                      </a:solidFill>
+                    </a:lnT>
+                    <a:lnB w="12700" cap="flat" cmpd="sng">
+                      <a:solidFill>
+                        <a:srgbClr val="DCDCDC"/>
+                      </a:solidFill>
+                    </a:lnB>
+                    <a:solidFill>
+                      <a:srgbClr val="FFFFFF"/>
+                    </a:solidFill>
+                  </a:tcPr>
+                </a:tc>
+                <a:tc>
+                  <a:txBody>
+                    <a:bodyPr anchor="ctr"/>
+                    <a:lstStyle/>
+                    <a:p>
+                      <a:pPr algn="ctr"/>
+                      <a:r>
+                        <a:rPr lang="ko-KR" sz="1300" b="0">
+                          <a:solidFill>
+                            <a:srgbClr val="212121"/>
+                          </a:solidFill>
+                          <a:latin typeface="Freesentation"/>
+                        </a:rPr>
+                        <a:t>초기 투자 0원</a:t>
+                      </a:r>
+                    </a:p>
+                  </a:txBody>
+                  <a:tcPr>
+                    <a:lnL w="12700" cap="flat" cmpd="sng">
+                      <a:solidFill>
+                        <a:srgbClr val="DCDCDC"/>
+                      </a:solidFill>
+                    </a:lnL>
+                    <a:lnR w="12700" cap="flat" cmpd="sng">
+                      <a:solidFill>
+                        <a:srgbClr val="DCDCDC"/>
+                      </a:solidFill>
+                    </a:lnR>
+                    <a:lnT w="12700" cap="flat" cmpd="sng">
+                      <a:solidFill>
+                        <a:srgbClr val="DCDCDC"/>
+                      </a:solidFill>
+                    </a:lnT>
+                    <a:lnB w="12700" cap="flat" cmpd="sng">
+                      <a:solidFill>
+                        <a:srgbClr val="DCDCDC"/>
+                      </a:solidFill>
+                    </a:lnB>
+                    <a:solidFill>
+                      <a:srgbClr val="FFFFFF"/>
+                    </a:solidFill>
+                  </a:tcPr>
+                </a:tc>
+              </a:tr>
+              <a:tr h="759024">
+                <a:tc>
+                  <a:txBody>
+                    <a:bodyPr anchor="ctr"/>
+                    <a:lstStyle/>
+                    <a:p>
+                      <a:pPr algn="l"/>
+                      <a:r>
+                        <a:rPr lang="ko-KR" sz="1300" b="1">
+                          <a:solidFill>
+                            <a:srgbClr val="212121"/>
+                          </a:solidFill>
+                          <a:latin typeface="프리젠테이션 7 Bold"/>
+                        </a:rPr>
+                        <a:t>운영 인력</a:t>
+                      </a:r>
+                    </a:p>
+                  </a:txBody>
+                  <a:tcPr>
+                    <a:lnL w="12700" cap="flat" cmpd="sng">
+                      <a:solidFill>
+                        <a:srgbClr val="DCDCDC"/>
+                      </a:solidFill>
+                    </a:lnL>
+                    <a:lnR w="12700" cap="flat" cmpd="sng">
+                      <a:solidFill>
+                        <a:srgbClr val="DCDCDC"/>
+                      </a:solidFill>
+                    </a:lnR>
+                    <a:lnT w="12700" cap="flat" cmpd="sng">
+                      <a:solidFill>
+                        <a:srgbClr val="DCDCDC"/>
+                      </a:solidFill>
+                    </a:lnT>
+                    <a:lnB w="12700" cap="flat" cmpd="sng">
+                      <a:solidFill>
+                        <a:srgbClr val="DCDCDC"/>
+                      </a:solidFill>
+                    </a:lnB>
+                    <a:solidFill>
+                      <a:srgbClr val="F8F9FA"/>
+                    </a:solidFill>
+                  </a:tcPr>
+                </a:tc>
+                <a:tc>
+                  <a:txBody>
+                    <a:bodyPr anchor="ctr"/>
+                    <a:lstStyle/>
+                    <a:p>
+                      <a:pPr algn="ctr"/>
+                      <a:r>
+                        <a:rPr lang="ko-KR" sz="1300" b="0">
+                          <a:solidFill>
+                            <a:srgbClr val="212121"/>
+                          </a:solidFill>
+                          <a:latin typeface="Freesentation"/>
+                        </a:rPr>
+                        <a:t>전담 2~3명</a:t>
+                      </a:r>
+                    </a:p>
+                  </a:txBody>
+                  <a:tcPr>
+                    <a:lnL w="12700" cap="flat" cmpd="sng">
+                      <a:solidFill>
+                        <a:srgbClr val="DCDCDC"/>
+                      </a:solidFill>
+                    </a:lnL>
+                    <a:lnR w="12700" cap="flat" cmpd="sng">
+                      <a:solidFill>
+                        <a:srgbClr val="DCDCDC"/>
+                      </a:solidFill>
+                    </a:lnR>
+                    <a:lnT w="12700" cap="flat" cmpd="sng">
+                      <a:solidFill>
+                        <a:srgbClr val="DCDCDC"/>
+                      </a:solidFill>
+                    </a:lnT>
+                    <a:lnB w="12700" cap="flat" cmpd="sng">
+                      <a:solidFill>
+                        <a:srgbClr val="DCDCDC"/>
+                      </a:solidFill>
+                    </a:lnB>
+                    <a:solidFill>
+                      <a:srgbClr val="F8F9FA"/>
+                    </a:solidFill>
+                  </a:tcPr>
+                </a:tc>
+                <a:tc>
+                  <a:txBody>
+                    <a:bodyPr anchor="ctr"/>
+                    <a:lstStyle/>
+                    <a:p>
+                      <a:pPr algn="ctr"/>
+                      <a:r>
+                        <a:rPr lang="ko-KR" sz="1300" b="1">
+                          <a:solidFill>
+                            <a:srgbClr val="0043DA"/>
+                          </a:solidFill>
+                          <a:latin typeface="Freesentation"/>
+                        </a:rPr>
+                        <a:t>0.5명 (모니터링)</a:t>
+                      </a:r>
+                    </a:p>
+                  </a:txBody>
+                  <a:tcPr>
+                    <a:lnL w="12700" cap="flat" cmpd="sng">
+                      <a:solidFill>
+                        <a:srgbClr val="DCDCDC"/>
+                      </a:solidFill>
+                    </a:lnL>
+                    <a:lnR w="12700" cap="flat" cmpd="sng">
+                      <a:solidFill>
+                        <a:srgbClr val="DCDCDC"/>
+                      </a:solidFill>
+                    </a:lnR>
+                    <a:lnT w="12700" cap="flat" cmpd="sng">
+                      <a:solidFill>
+                        <a:srgbClr val="DCDCDC"/>
+                      </a:solidFill>
+                    </a:lnT>
+                    <a:lnB w="12700" cap="flat" cmpd="sng">
+                      <a:solidFill>
+                        <a:srgbClr val="DCDCDC"/>
+                      </a:solidFill>
+                    </a:lnB>
+                    <a:solidFill>
+                      <a:srgbClr val="F8F9FA"/>
+                    </a:solidFill>
+                  </a:tcPr>
+                </a:tc>
+                <a:tc>
+                  <a:txBody>
+                    <a:bodyPr anchor="ctr"/>
+                    <a:lstStyle/>
+                    <a:p>
+                      <a:pPr algn="ctr"/>
+                      <a:r>
+                        <a:rPr lang="ko-KR" sz="1300" b="0">
+                          <a:solidFill>
+                            <a:srgbClr val="212121"/>
+                          </a:solidFill>
+                          <a:latin typeface="Freesentation"/>
+                        </a:rPr>
+                        <a:t>0명 (완전 관리)</a:t>
+                      </a:r>
+                    </a:p>
+                  </a:txBody>
+                  <a:tcPr>
+                    <a:lnL w="12700" cap="flat" cmpd="sng">
+                      <a:solidFill>
+                        <a:srgbClr val="DCDCDC"/>
+                      </a:solidFill>
+                    </a:lnL>
+                    <a:lnR w="12700" cap="flat" cmpd="sng">
+                      <a:solidFill>
+                        <a:srgbClr val="DCDCDC"/>
+                      </a:solidFill>
+                    </a:lnR>
+                    <a:lnT w="12700" cap="flat" cmpd="sng">
+                      <a:solidFill>
+                        <a:srgbClr val="DCDCDC"/>
+                      </a:solidFill>
+                    </a:lnT>
+                    <a:lnB w="12700" cap="flat" cmpd="sng">
+                      <a:solidFill>
+                        <a:srgbClr val="DCDCDC"/>
+                      </a:solidFill>
+                    </a:lnB>
+                    <a:solidFill>
+                      <a:srgbClr val="F8F9FA"/>
+                    </a:solidFill>
+                  </a:tcPr>
+                </a:tc>
+              </a:tr>
+              <a:tr h="759024">
+                <a:tc>
+                  <a:txBody>
+                    <a:bodyPr anchor="ctr"/>
+                    <a:lstStyle/>
+                    <a:p>
+                      <a:pPr algn="l"/>
+                      <a:r>
+                        <a:rPr lang="ko-KR" sz="1300" b="1">
+                          <a:solidFill>
+                            <a:srgbClr val="212121"/>
+                          </a:solidFill>
+                          <a:latin typeface="프리젠테이션 7 Bold"/>
+                        </a:rPr>
+                        <a:t>가용성 SLA</a:t>
+                      </a:r>
+                    </a:p>
+                  </a:txBody>
+                  <a:tcPr>
+                    <a:lnL w="12700" cap="flat" cmpd="sng">
+                      <a:solidFill>
+                        <a:srgbClr val="DCDCDC"/>
+                      </a:solidFill>
+                    </a:lnL>
+                    <a:lnR w="12700" cap="flat" cmpd="sng">
+                      <a:solidFill>
+                        <a:srgbClr val="DCDCDC"/>
+                      </a:solidFill>
+                    </a:lnR>
+                    <a:lnT w="12700" cap="flat" cmpd="sng">
+                      <a:solidFill>
+                        <a:srgbClr val="DCDCDC"/>
+                      </a:solidFill>
+                    </a:lnT>
+                    <a:lnB w="12700" cap="flat" cmpd="sng">
+                      <a:solidFill>
+                        <a:srgbClr val="DCDCDC"/>
+                      </a:solidFill>
+                    </a:lnB>
+                    <a:solidFill>
+                      <a:srgbClr val="F8F9FA"/>
+                    </a:solidFill>
+                  </a:tcPr>
+                </a:tc>
+                <a:tc>
+                  <a:txBody>
+                    <a:bodyPr anchor="ctr"/>
+                    <a:lstStyle/>
+                    <a:p>
+                      <a:pPr algn="ctr"/>
+                      <a:r>
+                        <a:rPr lang="ko-KR" sz="1300" b="0">
+                          <a:solidFill>
+                            <a:srgbClr val="212121"/>
+                          </a:solidFill>
+                          <a:latin typeface="Freesentation"/>
+                        </a:rPr>
+                        <a:t>자체 HA 구성</a:t>
+                      </a:r>
+                    </a:p>
+                  </a:txBody>
+                  <a:tcPr>
+                    <a:lnL w="12700" cap="flat" cmpd="sng">
+                      <a:solidFill>
+                        <a:srgbClr val="DCDCDC"/>
+                      </a:solidFill>
+                    </a:lnL>
+                    <a:lnR w="12700" cap="flat" cmpd="sng">
+                      <a:solidFill>
+                        <a:srgbClr val="DCDCDC"/>
+                      </a:solidFill>
+                    </a:lnR>
+                    <a:lnT w="12700" cap="flat" cmpd="sng">
+                      <a:solidFill>
+                        <a:srgbClr val="DCDCDC"/>
+                      </a:solidFill>
+                    </a:lnT>
+                    <a:lnB w="12700" cap="flat" cmpd="sng">
+                      <a:solidFill>
+                        <a:srgbClr val="DCDCDC"/>
+                      </a:solidFill>
+                    </a:lnB>
+                    <a:solidFill>
+                      <a:srgbClr val="FFFFFF"/>
+                    </a:solidFill>
+                  </a:tcPr>
+                </a:tc>
+                <a:tc>
+                  <a:txBody>
+                    <a:bodyPr anchor="ctr"/>
+                    <a:lstStyle/>
+                    <a:p>
+                      <a:pPr algn="ctr"/>
+                      <a:r>
+                        <a:rPr lang="ko-KR" sz="1300" b="1">
+                          <a:solidFill>
+                            <a:srgbClr val="0043DA"/>
+                          </a:solidFill>
+                          <a:latin typeface="Freesentation"/>
+                        </a:rPr>
+                        <a:t>99.9% 보장</a:t>
+                      </a:r>
+                    </a:p>
+                  </a:txBody>
+                  <a:tcPr>
+                    <a:lnL w="12700" cap="flat" cmpd="sng">
+                      <a:solidFill>
+                        <a:srgbClr val="DCDCDC"/>
+                      </a:solidFill>
+                    </a:lnL>
+                    <a:lnR w="12700" cap="flat" cmpd="sng">
+                      <a:solidFill>
+                        <a:srgbClr val="DCDCDC"/>
+                      </a:solidFill>
+                    </a:lnR>
+                    <a:lnT w="12700" cap="flat" cmpd="sng">
+                      <a:solidFill>
+                        <a:srgbClr val="DCDCDC"/>
+                      </a:solidFill>
+                    </a:lnT>
+                    <a:lnB w="12700" cap="flat" cmpd="sng">
+                      <a:solidFill>
+                        <a:srgbClr val="DCDCDC"/>
+                      </a:solidFill>
+                    </a:lnB>
+                    <a:solidFill>
+                      <a:srgbClr val="FFFFFF"/>
+                    </a:solidFill>
+                  </a:tcPr>
+                </a:tc>
+                <a:tc>
+                  <a:txBody>
+                    <a:bodyPr anchor="ctr"/>
+                    <a:lstStyle/>
+                    <a:p>
+                      <a:pPr algn="ctr"/>
+                      <a:r>
+                        <a:rPr lang="ko-KR" sz="1300" b="0">
+                          <a:solidFill>
+                            <a:srgbClr val="212121"/>
+                          </a:solidFill>
+                          <a:latin typeface="Freesentation"/>
+                        </a:rPr>
+                        <a:t>99.95% 보장</a:t>
+                      </a:r>
+                    </a:p>
+                  </a:txBody>
+                  <a:tcPr>
+                    <a:lnL w="12700" cap="flat" cmpd="sng">
+                      <a:solidFill>
+                        <a:srgbClr val="DCDCDC"/>
+                      </a:solidFill>
+                    </a:lnL>
+                    <a:lnR w="12700" cap="flat" cmpd="sng">
+                      <a:solidFill>
+                        <a:srgbClr val="DCDCDC"/>
+                      </a:solidFill>
+                    </a:lnR>
+                    <a:lnT w="12700" cap="flat" cmpd="sng">
+                      <a:solidFill>
+                        <a:srgbClr val="DCDCDC"/>
+                      </a:solidFill>
+                    </a:lnT>
+                    <a:lnB w="12700" cap="flat" cmpd="sng">
+                      <a:solidFill>
+                        <a:srgbClr val="DCDCDC"/>
+                      </a:solidFill>
+                    </a:lnB>
+                    <a:solidFill>
+                      <a:srgbClr val="FFFFFF"/>
+                    </a:solidFill>
+                  </a:tcPr>
+                </a:tc>
+              </a:tr>
+              <a:tr h="759024">
+                <a:tc>
+                  <a:txBody>
+                    <a:bodyPr anchor="ctr"/>
+                    <a:lstStyle/>
+                    <a:p>
+                      <a:pPr algn="l"/>
+                      <a:r>
+                        <a:rPr lang="ko-KR" sz="1300" b="1">
+                          <a:solidFill>
+                            <a:srgbClr val="212121"/>
+                          </a:solidFill>
+                          <a:latin typeface="프리젠테이션 7 Bold"/>
+                        </a:rPr>
+                        <a:t>확장 소요</a:t>
+                      </a:r>
+                    </a:p>
+                  </a:txBody>
+                  <a:tcPr>
+                    <a:lnL w="12700" cap="flat" cmpd="sng">
+                      <a:solidFill>
+                        <a:srgbClr val="DCDCDC"/>
+                      </a:solidFill>
+                    </a:lnL>
+                    <a:lnR w="12700" cap="flat" cmpd="sng">
+                      <a:solidFill>
+                        <a:srgbClr val="DCDCDC"/>
+                      </a:solidFill>
+                    </a:lnR>
+                    <a:lnT w="12700" cap="flat" cmpd="sng">
+                      <a:solidFill>
+                        <a:srgbClr val="DCDCDC"/>
+                      </a:solidFill>
+                    </a:lnT>
+                    <a:lnB w="12700" cap="flat" cmpd="sng">
+                      <a:solidFill>
+                        <a:srgbClr val="DCDCDC"/>
+                      </a:solidFill>
+                    </a:lnB>
+                    <a:solidFill>
+                      <a:srgbClr val="F8F9FA"/>
+                    </a:solidFill>
+                  </a:tcPr>
+                </a:tc>
+                <a:tc>
+                  <a:txBody>
+                    <a:bodyPr anchor="ctr"/>
+                    <a:lstStyle/>
+                    <a:p>
+                      <a:pPr algn="ctr"/>
+                      <a:r>
+                        <a:rPr lang="ko-KR" sz="1300" b="0">
+                          <a:solidFill>
+                            <a:srgbClr val="212121"/>
+                          </a:solidFill>
+                          <a:latin typeface="Freesentation"/>
+                        </a:rPr>
+                        <a:t>2~4주</a:t>
+                      </a:r>
+                    </a:p>
+                  </a:txBody>
+                  <a:tcPr>
+                    <a:lnL w="12700" cap="flat" cmpd="sng">
+                      <a:solidFill>
+                        <a:srgbClr val="DCDCDC"/>
+                      </a:solidFill>
+                    </a:lnL>
+                    <a:lnR w="12700" cap="flat" cmpd="sng">
+                      <a:solidFill>
+                        <a:srgbClr val="DCDCDC"/>
+                      </a:solidFill>
+                    </a:lnR>
+                    <a:lnT w="12700" cap="flat" cmpd="sng">
+                      <a:solidFill>
+                        <a:srgbClr val="DCDCDC"/>
+                      </a:solidFill>
+                    </a:lnT>
+                    <a:lnB w="12700" cap="flat" cmpd="sng">
+                      <a:solidFill>
+                        <a:srgbClr val="DCDCDC"/>
+                      </a:solidFill>
+                    </a:lnB>
+                    <a:solidFill>
+                      <a:srgbClr val="F8F9FA"/>
+                    </a:solidFill>
+                  </a:tcPr>
+                </a:tc>
+                <a:tc>
+                  <a:txBody>
+                    <a:bodyPr anchor="ctr"/>
+                    <a:lstStyle/>
+                    <a:p>
+                      <a:pPr algn="ctr"/>
+                      <a:r>
+                        <a:rPr lang="ko-KR" sz="1300" b="1">
+                          <a:solidFill>
+                            <a:srgbClr val="0043DA"/>
+                          </a:solidFill>
+                          <a:latin typeface="Freesentation"/>
+                        </a:rPr>
+                        <a:t>수분 내</a:t>
+                      </a:r>
+                    </a:p>
+                  </a:txBody>
+                  <a:tcPr>
+                    <a:lnL w="12700" cap="flat" cmpd="sng">
+                      <a:solidFill>
+                        <a:srgbClr val="DCDCDC"/>
+                      </a:solidFill>
+                    </a:lnL>
+                    <a:lnR w="12700" cap="flat" cmpd="sng">
+                      <a:solidFill>
+                        <a:srgbClr val="DCDCDC"/>
+                      </a:solidFill>
+                    </a:lnR>
+                    <a:lnT w="12700" cap="flat" cmpd="sng">
+                      <a:solidFill>
+                        <a:srgbClr val="DCDCDC"/>
+                      </a:solidFill>
+                    </a:lnT>
+                    <a:lnB w="12700" cap="flat" cmpd="sng">
+                      <a:solidFill>
+                        <a:srgbClr val="DCDCDC"/>
+                      </a:solidFill>
+                    </a:lnB>
+                    <a:solidFill>
+                      <a:srgbClr val="F8F9FA"/>
+                    </a:solidFill>
+                  </a:tcPr>
+                </a:tc>
+                <a:tc>
+                  <a:txBody>
+                    <a:bodyPr anchor="ctr"/>
+                    <a:lstStyle/>
+                    <a:p>
+                      <a:pPr algn="ctr"/>
+                      <a:r>
+                        <a:rPr lang="ko-KR" sz="1300" b="0">
+                          <a:solidFill>
+                            <a:srgbClr val="212121"/>
+                          </a:solidFill>
+                          <a:latin typeface="Freesentation"/>
+                        </a:rPr>
+                        <a:t>수분 내</a:t>
+                      </a:r>
+                    </a:p>
+                  </a:txBody>
+                  <a:tcPr>
+                    <a:lnL w="12700" cap="flat" cmpd="sng">
+                      <a:solidFill>
+                        <a:srgbClr val="DCDCDC"/>
+                      </a:solidFill>
+                    </a:lnL>
+                    <a:lnR w="12700" cap="flat" cmpd="sng">
+                      <a:solidFill>
+                        <a:srgbClr val="DCDCDC"/>
+                      </a:solidFill>
+                    </a:lnR>
+                    <a:lnT w="12700" cap="flat" cmpd="sng">
+                      <a:solidFill>
+                        <a:srgbClr val="DCDCDC"/>
+                      </a:solidFill>
+                    </a:lnT>
+                    <a:lnB w="12700" cap="flat" cmpd="sng">
+                      <a:solidFill>
+                        <a:srgbClr val="DCDCDC"/>
+                      </a:solidFill>
+                    </a:lnB>
+                    <a:solidFill>
+                      <a:srgbClr val="F8F9FA"/>
+                    </a:solidFill>
+                  </a:tcPr>
+                </a:tc>
+              </a:tr>
+              <a:tr h="759024">
+                <a:tc>
+                  <a:txBody>
+                    <a:bodyPr anchor="ctr"/>
+                    <a:lstStyle/>
+                    <a:p>
+                      <a:pPr algn="l"/>
+                      <a:r>
+                        <a:rPr lang="ko-KR" sz="1300" b="1">
+                          <a:solidFill>
+                            <a:srgbClr val="212121"/>
+                          </a:solidFill>
+                          <a:latin typeface="프리젠테이션 7 Bold"/>
+                        </a:rPr>
+                        <a:t>월 운영비</a:t>
+                      </a:r>
+                    </a:p>
+                  </a:txBody>
+                  <a:tcPr>
+                    <a:lnL w="12700" cap="flat" cmpd="sng">
+                      <a:solidFill>
+                        <a:srgbClr val="DCDCDC"/>
+                      </a:solidFill>
+                    </a:lnL>
+                    <a:lnR w="12700" cap="flat" cmpd="sng">
+                      <a:solidFill>
+                        <a:srgbClr val="DCDCDC"/>
+                      </a:solidFill>
+                    </a:lnR>
+                    <a:lnT w="12700" cap="flat" cmpd="sng">
+                      <a:solidFill>
+                        <a:srgbClr val="DCDCDC"/>
+                      </a:solidFill>
+                    </a:lnT>
+                    <a:lnB w="12700" cap="flat" cmpd="sng">
+                      <a:solidFill>
+                        <a:srgbClr val="DCDCDC"/>
+                      </a:solidFill>
+                    </a:lnB>
+                    <a:solidFill>
+                      <a:srgbClr val="F8F9FA"/>
+                    </a:solidFill>
+                  </a:tcPr>
+                </a:tc>
+                <a:tc>
+                  <a:txBody>
+                    <a:bodyPr anchor="ctr"/>
+                    <a:lstStyle/>
+                    <a:p>
+                      <a:pPr algn="ctr"/>
+                      <a:r>
+                        <a:rPr lang="ko-KR" sz="1300" b="0">
+                          <a:solidFill>
+                            <a:srgbClr val="212121"/>
+                          </a:solidFill>
+                          <a:latin typeface="Freesentation"/>
+                        </a:rPr>
+                        <a:t>₩3,000만+</a:t>
+                      </a:r>
+                    </a:p>
+                  </a:txBody>
+                  <a:tcPr>
+                    <a:lnL w="12700" cap="flat" cmpd="sng">
+                      <a:solidFill>
+                        <a:srgbClr val="DCDCDC"/>
+                      </a:solidFill>
+                    </a:lnL>
+                    <a:lnR w="12700" cap="flat" cmpd="sng">
+                      <a:solidFill>
+                        <a:srgbClr val="DCDCDC"/>
+                      </a:solidFill>
+                    </a:lnR>
+                    <a:lnT w="12700" cap="flat" cmpd="sng">
+                      <a:solidFill>
+                        <a:srgbClr val="DCDCDC"/>
+                      </a:solidFill>
+                    </a:lnT>
+                    <a:lnB w="12700" cap="flat" cmpd="sng">
+                      <a:solidFill>
+                        <a:srgbClr val="DCDCDC"/>
+                      </a:solidFill>
+                    </a:lnB>
+                    <a:solidFill>
+                      <a:srgbClr val="FFFFFF"/>
+                    </a:solidFill>
+                  </a:tcPr>
+                </a:tc>
+                <a:tc>
+                  <a:txBody>
+                    <a:bodyPr anchor="ctr"/>
+                    <a:lstStyle/>
+                    <a:p>
+                      <a:pPr algn="ctr"/>
+                      <a:r>
+                        <a:rPr lang="ko-KR" sz="1300" b="1">
+                          <a:solidFill>
+                            <a:srgbClr val="0043DA"/>
+                          </a:solidFill>
+                          <a:latin typeface="Freesentation"/>
+                        </a:rPr>
+                        <a:t>₩800만~</a:t>
+                      </a:r>
+                    </a:p>
+                  </a:txBody>
+                  <a:tcPr>
+                    <a:lnL w="12700" cap="flat" cmpd="sng">
+                      <a:solidFill>
+                        <a:srgbClr val="DCDCDC"/>
+                      </a:solidFill>
+                    </a:lnL>
+                    <a:lnR w="12700" cap="flat" cmpd="sng">
+                      <a:solidFill>
+                        <a:srgbClr val="DCDCDC"/>
+                      </a:solidFill>
+                    </a:lnR>
+                    <a:lnT w="12700" cap="flat" cmpd="sng">
+                      <a:solidFill>
+                        <a:srgbClr val="DCDCDC"/>
+                      </a:solidFill>
+                    </a:lnT>
+                    <a:lnB w="12700" cap="flat" cmpd="sng">
+                      <a:solidFill>
+                        <a:srgbClr val="DCDCDC"/>
+                      </a:solidFill>
+                    </a:lnB>
+                    <a:solidFill>
+                      <a:srgbClr val="FFFFFF"/>
+                    </a:solidFill>
+                  </a:tcPr>
+                </a:tc>
+                <a:tc>
+                  <a:txBody>
+                    <a:bodyPr anchor="ctr"/>
+                    <a:lstStyle/>
+                    <a:p>
+                      <a:pPr algn="ctr"/>
+                      <a:r>
+                        <a:rPr lang="ko-KR" sz="1300" b="0">
+                          <a:solidFill>
+                            <a:srgbClr val="212121"/>
+                          </a:solidFill>
+                          <a:latin typeface="Freesentation"/>
+                        </a:rPr>
+                        <a:t>₩1,200만~</a:t>
+                      </a:r>
+                    </a:p>
+                  </a:txBody>
+                  <a:tcPr>
+                    <a:lnL w="12700" cap="flat" cmpd="sng">
+                      <a:solidFill>
+                        <a:srgbClr val="DCDCDC"/>
+                      </a:solidFill>
+                    </a:lnL>
+                    <a:lnR w="12700" cap="flat" cmpd="sng">
+                      <a:solidFill>
+                        <a:srgbClr val="DCDCDC"/>
+                      </a:solidFill>
+                    </a:lnR>
+                    <a:lnT w="12700" cap="flat" cmpd="sng">
+                      <a:solidFill>
+                        <a:srgbClr val="DCDCDC"/>
+                      </a:solidFill>
+                    </a:lnT>
+                    <a:lnB w="12700" cap="flat" cmpd="sng">
+                      <a:solidFill>
+                        <a:srgbClr val="DCDCDC"/>
+                      </a:solidFill>
+                    </a:lnB>
+                    <a:solidFill>
+                      <a:srgbClr val="FFFFFF"/>
+                    </a:solidFill>
+                  </a:tcPr>
+                </a:tc>
+              </a:tr>
+            </a:tbl>
+          </a:graphicData>
+        </a:graphic>
+      </p:graphicFrame>
+      <p:sp>
+        <p:nvSpPr>
+          <p:cNvPr id="21" name="TextBox 20"/>
+          <p:cNvSpPr txBox="1"/>
+          <p:nvPr/>
+        </p:nvSpPr>
+        <p:spPr>
+          <a:xfrm>
+            <a:off x="354787" y="557784"/>
+            <a:ext cx="2720340" cy="932688"/>
+          </a:xfrm>
+          <a:prstGeom prst="rect">
+            <a:avLst/>
+          </a:prstGeom>
+          <a:noFill/>
+        </p:spPr>
+        <p:txBody>
+          <a:bodyPr wrap="none" lIns="0" rIns="0" tIns="0" bIns="0">
+            <a:spAutoFit/>
+          </a:bodyPr>
+          <a:lstStyle/>
+          <a:p>
+            <a:r>
+              <a:rPr sz="2000" b="1">
+                <a:latin typeface="Freesentation"/>
+              </a:rPr>
+              <a:t>L11. Comparison Table</a:t>
+            </a:r>
+          </a:p>
+        </p:txBody>
+      </p:sp>
+      <p:sp>
+        <p:nvSpPr>
+          <p:cNvPr id="22" name="TextBox 21"/>
+          <p:cNvSpPr txBox="1"/>
+          <p:nvPr/>
+        </p:nvSpPr>
+        <p:spPr>
+          <a:xfrm>
+            <a:off x="3762756" y="558698"/>
+            <a:ext cx="7550200" cy="938174"/>
+          </a:xfrm>
+          <a:prstGeom prst="rect">
+            <a:avLst/>
+          </a:prstGeom>
+          <a:noFill/>
+        </p:spPr>
+        <p:txBody>
+          <a:bodyPr wrap="none" lIns="0" rIns="0" tIns="0" bIns="0">
+            <a:spAutoFit/>
+          </a:bodyPr>
+          <a:lstStyle/>
+          <a:p>
+            <a:r>
+              <a:rPr sz="1300">
+                <a:latin typeface="Freesentation"/>
+              </a:rPr>
+              <a:t>3+ 옵션 비교 테이블 — 항목별 교차 평가</a:t>
+            </a:r>
+          </a:p>
+        </p:txBody>
+      </p:sp>
+    </p:spTree>
+  </p:cSld>
+  <p:clrMapOvr>
+    <a:masterClrMapping/>
+  </p:clrMapOvr>
+</p:sld>
+</file>
+
+<file path=ppt/slides/slide14.xml><?xml version="1.0" encoding="utf-8"?>
+<p:sld xmlns:p="http://schemas.openxmlformats.org/presentationml/2006/main" xmlns:a="http://schemas.openxmlformats.org/drawingml/2006/main" xmlns:r="http://schemas.openxmlformats.org/officeDocument/2006/relationships">
+  <p:cSld>
+    <p:spTree>
+      <p:nvGrpSpPr>
+        <p:cNvPr id="1" name=""/>
+        <p:cNvGrpSpPr/>
+        <p:nvPr/>
+      </p:nvGrpSpPr>
+      <p:grpSpPr/>
+      <p:sp>
+        <p:nvSpPr>
+          <p:cNvPr id="2" name="Text Placeholder 1"/>
+          <p:cNvSpPr>
+            <a:spLocks noGrp="1"/>
+          </p:cNvSpPr>
+          <p:nvPr>
+            <p:ph type="body" idx="10" sz="quarter"/>
+          </p:nvPr>
+        </p:nvSpPr>
+        <p:spPr/>
+        <p:txBody>
+          <a:bodyPr/>
+          <a:lstStyle/>
+          <a:p/>
+        </p:txBody>
+      </p:sp>
+      <p:sp>
+        <p:nvSpPr>
+          <p:cNvPr id="10" name="TextBox L12 Title"/>
+          <p:cNvSpPr txBox="1"/>
+          <p:nvPr/>
+        </p:nvSpPr>
+        <p:spPr>
+          <a:xfrm>
+            <a:off x="457200" y="1600200"/>
+            <a:ext cx="11277600" cy="320040"/>
+          </a:xfrm>
+          <a:prstGeom prst="rect">
+            <a:avLst/>
+          </a:prstGeom>
+          <a:noFill/>
+          <a:ln>
+            <a:noFill/>
+          </a:ln>
+        </p:spPr>
+        <p:txBody>
+          <a:bodyPr wrap="square">
+            <a:spAutoFit/>
+          </a:bodyPr>
+          <a:lstStyle/>
+          <a:p>
+            <a:pPr algn="l"/>
+            <a:r>
+              <a:rPr lang="ko-KR" sz="1600" b="1">
+                <a:solidFill>
+                  <a:srgbClr val="0043DA"/>
+                </a:solidFill>
+                <a:latin typeface="Freesentation"/>
+              </a:rPr>
+              <a:t>API 응답 시간 개선 — MSK 이벤트 기반 아키텍처 전환 효과</a:t>
+            </a:r>
+          </a:p>
+        </p:txBody>
+      </p:sp>
+      <p:sp>
+        <p:nvSpPr>
+          <p:cNvPr id="11" name="TextBox L12 Desc"/>
+          <p:cNvSpPr txBox="1"/>
+          <p:nvPr/>
+        </p:nvSpPr>
+        <p:spPr>
+          <a:xfrm>
+            <a:off x="457200" y="1965960"/>
+            <a:ext cx="11277600" cy="274320"/>
+          </a:xfrm>
+          <a:prstGeom prst="rect">
+            <a:avLst/>
+          </a:prstGeom>
+          <a:noFill/>
+          <a:ln>
+            <a:noFill/>
+          </a:ln>
+        </p:spPr>
+        <p:txBody>
+          <a:bodyPr wrap="square">
+            <a:spAutoFit/>
+          </a:bodyPr>
+          <a:lstStyle/>
+          <a:p>
+            <a:pPr algn="l"/>
+            <a:r>
+              <a:rPr lang="ko-KR" sz="1300" b="0">
+                <a:solidFill>
+                  <a:srgbClr val="212121"/>
+                </a:solidFill>
+                <a:latin typeface="Freesentation"/>
+              </a:rPr>
+              <a:t>2026년 1분기 실측 기준. 동일 트래픽(10K RPS) 조건 A/B 테스트 결과</a:t>
+            </a:r>
+          </a:p>
+        </p:txBody>
+      </p:sp>
+      <p:sp>
+        <p:nvSpPr>
+          <p:cNvPr id="12" name="RRect L12 Badge Before"/>
+          <p:cNvSpPr/>
+          <p:nvPr/>
+        </p:nvSpPr>
+        <p:spPr>
+          <a:xfrm>
+            <a:off x="637160" y="2423160"/>
+            <a:ext cx="1371600" cy="274320"/>
+          </a:xfrm>
+          <a:prstGeom prst="roundRect">
+            <a:avLst>
+              <a:gd name="adj" fmla="val 16667"/>
+            </a:avLst>
+          </a:prstGeom>
+          <a:solidFill>
+            <a:srgbClr val="212121"/>
+          </a:solidFill>
+          <a:ln>
+            <a:solidFill>
+              <a:srgbClr val="212121"/>
+            </a:solidFill>
+          </a:ln>
+        </p:spPr>
+        <p:txBody>
+          <a:bodyPr anchor="ctr"/>
+          <a:lstStyle/>
+          <a:p/>
+        </p:txBody>
+      </p:sp>
+      <p:sp>
+        <p:nvSpPr>
+          <p:cNvPr id="13" name="RRect L12 Badge After"/>
+          <p:cNvSpPr/>
+          <p:nvPr/>
+        </p:nvSpPr>
+        <p:spPr>
+          <a:xfrm>
+            <a:off x="6611040" y="2423160"/>
+            <a:ext cx="1371600" cy="274320"/>
+          </a:xfrm>
+          <a:prstGeom prst="roundRect">
+            <a:avLst>
+              <a:gd name="adj" fmla="val 16667"/>
+            </a:avLst>
+          </a:prstGeom>
+          <a:solidFill>
+            <a:srgbClr val="0043DA"/>
+          </a:solidFill>
+          <a:ln>
+            <a:solidFill>
+              <a:srgbClr val="0043DA"/>
+            </a:solidFill>
+          </a:ln>
+        </p:spPr>
+        <p:txBody>
+          <a:bodyPr anchor="ctr"/>
+          <a:lstStyle/>
+          <a:p/>
+        </p:txBody>
+      </p:sp>
+      <p:sp>
+        <p:nvSpPr>
+          <p:cNvPr id="14" name="TextBox L12 Badge Before Text"/>
+          <p:cNvSpPr txBox="1"/>
+          <p:nvPr/>
+        </p:nvSpPr>
+        <p:spPr>
+          <a:xfrm>
+            <a:off x="637160" y="2423160"/>
+            <a:ext cx="1371600" cy="274320"/>
+          </a:xfrm>
+          <a:prstGeom prst="rect">
+            <a:avLst/>
+          </a:prstGeom>
+          <a:noFill/>
+          <a:ln>
+            <a:noFill/>
+          </a:ln>
+        </p:spPr>
+        <p:txBody>
+          <a:bodyPr wrap="square">
+            <a:spAutoFit/>
+          </a:bodyPr>
+          <a:lstStyle/>
+          <a:p>
+            <a:pPr algn="ctr"/>
+            <a:r>
+              <a:rPr lang="ko-KR" sz="1100" b="1">
+                <a:solidFill>
+                  <a:srgbClr val="FFFFFF"/>
+                </a:solidFill>
+                <a:latin typeface="Freesentation"/>
+              </a:rPr>
+              <a:t>BEFORE</a:t>
+            </a:r>
+          </a:p>
+        </p:txBody>
+      </p:sp>
+      <p:sp>
+        <p:nvSpPr>
+          <p:cNvPr id="15" name="TextBox L12 Badge After Text"/>
+          <p:cNvSpPr txBox="1"/>
+          <p:nvPr/>
+        </p:nvSpPr>
+        <p:spPr>
+          <a:xfrm>
+            <a:off x="6611040" y="2423160"/>
+            <a:ext cx="1371600" cy="274320"/>
+          </a:xfrm>
+          <a:prstGeom prst="rect">
+            <a:avLst/>
+          </a:prstGeom>
+          <a:noFill/>
+          <a:ln>
+            <a:noFill/>
+          </a:ln>
+        </p:spPr>
+        <p:txBody>
+          <a:bodyPr wrap="square">
+            <a:spAutoFit/>
+          </a:bodyPr>
+          <a:lstStyle/>
+          <a:p>
+            <a:pPr algn="ctr"/>
+            <a:r>
+              <a:rPr lang="ko-KR" sz="1100" b="1">
+                <a:solidFill>
+                  <a:srgbClr val="FFFFFF"/>
+                </a:solidFill>
+                <a:latin typeface="Freesentation"/>
+              </a:rPr>
+              <a:t>AFTER</a:t>
+            </a:r>
+          </a:p>
+        </p:txBody>
+      </p:sp>
+      <p:sp>
+        <p:nvSpPr>
+          <p:cNvPr id="16" name="RRect L12 Panel Before"/>
+          <p:cNvSpPr/>
+          <p:nvPr/>
+        </p:nvSpPr>
+        <p:spPr>
+          <a:xfrm>
+            <a:off x="457200" y="2789820"/>
+            <a:ext cx="5303520" cy="3885660"/>
+          </a:xfrm>
+          <a:prstGeom prst="roundRect">
+            <a:avLst>
+              <a:gd name="adj" fmla="val 16667"/>
+            </a:avLst>
+          </a:prstGeom>
+          <a:solidFill>
+            <a:srgbClr val="F8F9FA"/>
+          </a:solidFill>
+          <a:ln>
+            <a:solidFill>
+              <a:srgbClr val="F8F9FA"/>
+            </a:solidFill>
+          </a:ln>
+        </p:spPr>
+        <p:txBody>
+          <a:bodyPr anchor="ctr"/>
+          <a:lstStyle/>
+          <a:p/>
+        </p:txBody>
+      </p:sp>
+      <p:sp>
+        <p:nvSpPr>
+          <p:cNvPr id="17" name="RRect L12 Panel After"/>
+          <p:cNvSpPr/>
+          <p:nvPr/>
+        </p:nvSpPr>
+        <p:spPr>
+          <a:xfrm>
+            <a:off x="6431280" y="2789820"/>
+            <a:ext cx="5303520" cy="3885660"/>
+          </a:xfrm>
+          <a:prstGeom prst="roundRect">
+            <a:avLst>
+              <a:gd name="adj" fmla="val 16667"/>
+            </a:avLst>
+          </a:prstGeom>
+          <a:solidFill>
+            <a:srgbClr val="E6F0FF"/>
+          </a:solidFill>
+          <a:ln>
+            <a:solidFill>
+              <a:srgbClr val="E6F0FF"/>
+            </a:solidFill>
+          </a:ln>
+        </p:spPr>
+        <p:txBody>
+          <a:bodyPr anchor="ctr"/>
+          <a:lstStyle/>
+          <a:p/>
+        </p:txBody>
+      </p:sp>
+      <p:sp>
+        <p:nvSpPr>
+          <p:cNvPr id="18" name="Arrow L12 Transition"/>
+          <p:cNvSpPr/>
+          <p:nvPr/>
+        </p:nvSpPr>
+        <p:spPr>
+          <a:xfrm>
+            <a:off x="5944440" y="4594980"/>
+            <a:ext cx="411480" cy="274320"/>
+          </a:xfrm>
+          <a:prstGeom prst="rightArrow">
+            <a:avLst/>
+          </a:prstGeom>
+          <a:solidFill>
+            <a:srgbClr val="0043DA"/>
+          </a:solidFill>
+          <a:ln>
+            <a:solidFill>
+              <a:srgbClr val="0043DA"/>
+            </a:solidFill>
+          </a:ln>
+        </p:spPr>
+        <p:txBody>
+          <a:bodyPr/>
+          <a:lstStyle/>
+          <a:p/>
+        </p:txBody>
+      </p:sp>
+      <p:sp>
+        <p:nvSpPr>
+          <p:cNvPr id="19" name="TextBox L12 KPI Before Value"/>
+          <p:cNvSpPr txBox="1"/>
+          <p:nvPr/>
+        </p:nvSpPr>
+        <p:spPr>
+          <a:xfrm>
+            <a:off x="637160" y="2897580"/>
+            <a:ext cx="4941840" cy="457200"/>
+          </a:xfrm>
+          <a:prstGeom prst="rect">
+            <a:avLst/>
+          </a:prstGeom>
+          <a:noFill/>
+          <a:ln>
+            <a:noFill/>
+          </a:ln>
+        </p:spPr>
+        <p:txBody>
+          <a:bodyPr wrap="square">
+            <a:spAutoFit/>
+          </a:bodyPr>
+          <a:lstStyle/>
+          <a:p>
+            <a:pPr algn="ctr"/>
+            <a:r>
+              <a:rPr lang="ko-KR" sz="2400" b="1">
+                <a:solidFill>
+                  <a:srgbClr val="212121"/>
+                </a:solidFill>
+                <a:latin typeface="프리젠테이션 7 Bold"/>
+              </a:rPr>
+              <a:t>3.2초</a:t>
+            </a:r>
+          </a:p>
+        </p:txBody>
+      </p:sp>
+      <p:sp>
+        <p:nvSpPr>
+          <p:cNvPr id="20" name="TextBox L12 KPI After Value"/>
+          <p:cNvSpPr txBox="1"/>
+          <p:nvPr/>
+        </p:nvSpPr>
+        <p:spPr>
+          <a:xfrm>
+            <a:off x="6611040" y="2897580"/>
+            <a:ext cx="4941840" cy="457200"/>
+          </a:xfrm>
+          <a:prstGeom prst="rect">
+            <a:avLst/>
+          </a:prstGeom>
+          <a:noFill/>
+          <a:ln>
+            <a:noFill/>
+          </a:ln>
+        </p:spPr>
+        <p:txBody>
+          <a:bodyPr wrap="square">
+            <a:spAutoFit/>
+          </a:bodyPr>
+          <a:lstStyle/>
+          <a:p>
+            <a:pPr algn="ctr"/>
+            <a:r>
+              <a:rPr lang="ko-KR" sz="2400" b="1">
+                <a:solidFill>
+                  <a:srgbClr val="0043DA"/>
+                </a:solidFill>
+                <a:latin typeface="프리젠테이션 7 Bold"/>
+              </a:rPr>
+              <a:t>0.8초</a:t>
+            </a:r>
+          </a:p>
+        </p:txBody>
+      </p:sp>
+      <p:sp>
+        <p:nvSpPr>
+          <p:cNvPr id="21" name="TextBox L12 KPI Before Label"/>
+          <p:cNvSpPr txBox="1"/>
+          <p:nvPr/>
+        </p:nvSpPr>
+        <p:spPr>
+          <a:xfrm>
+            <a:off x="637160" y="3354780"/>
+            <a:ext cx="4941840" cy="228600"/>
+          </a:xfrm>
+          <a:prstGeom prst="rect">
+            <a:avLst/>
+          </a:prstGeom>
+          <a:noFill/>
+          <a:ln>
+            <a:noFill/>
+          </a:ln>
+        </p:spPr>
+        <p:txBody>
+          <a:bodyPr wrap="square">
+            <a:spAutoFit/>
+          </a:bodyPr>
+          <a:lstStyle/>
+          <a:p>
+            <a:pPr algn="ctr"/>
+            <a:r>
+              <a:rPr lang="ko-KR" sz="1100" b="0">
+                <a:solidFill>
+                  <a:srgbClr val="505050"/>
+                </a:solidFill>
+                <a:latin typeface="Freesentation"/>
+              </a:rPr>
+              <a:t>평균 응답 시간</a:t>
+            </a:r>
+          </a:p>
+        </p:txBody>
+      </p:sp>
+      <p:sp>
+        <p:nvSpPr>
+          <p:cNvPr id="22" name="TextBox L12 KPI After Label"/>
+          <p:cNvSpPr txBox="1"/>
+          <p:nvPr/>
+        </p:nvSpPr>
+        <p:spPr>
+          <a:xfrm>
+            <a:off x="6611040" y="3354780"/>
+            <a:ext cx="4941840" cy="228600"/>
+          </a:xfrm>
+          <a:prstGeom prst="rect">
+            <a:avLst/>
+          </a:prstGeom>
+          <a:noFill/>
+          <a:ln>
+            <a:noFill/>
+          </a:ln>
+        </p:spPr>
+        <p:txBody>
+          <a:bodyPr wrap="square">
+            <a:spAutoFit/>
+          </a:bodyPr>
+          <a:lstStyle/>
+          <a:p>
+            <a:pPr algn="ctr"/>
+            <a:r>
+              <a:rPr lang="ko-KR" sz="1100" b="0">
+                <a:solidFill>
+                  <a:srgbClr val="505050"/>
+                </a:solidFill>
+                <a:latin typeface="Freesentation"/>
+              </a:rPr>
+              <a:t>평균 응답 시간</a:t>
+            </a:r>
+          </a:p>
+        </p:txBody>
+      </p:sp>
+      <p:sp>
+        <p:nvSpPr>
+          <p:cNvPr id="23" name="Line L12 Divider Before"/>
+          <p:cNvSpPr txBox="0"/>
+          <p:nvPr/>
+        </p:nvSpPr>
+        <p:spPr>
+          <a:xfrm>
+            <a:off x="637160" y="3674820"/>
+            <a:ext cx="4941840" cy="0"/>
+          </a:xfrm>
+          <a:prstGeom prst="line">
+            <a:avLst/>
+          </a:prstGeom>
+          <a:noFill/>
+          <a:ln w="12700">
+            <a:solidFill>
+              <a:srgbClr val="DCDCDC"/>
+            </a:solidFill>
+          </a:ln>
+        </p:spPr>
+        <p:txBody>
+          <a:bodyPr/>
+          <a:lstStyle/>
+          <a:p/>
+        </p:txBody>
+      </p:sp>
+      <p:sp>
+        <p:nvSpPr>
+          <p:cNvPr id="24" name="Line L12 Divider After"/>
+          <p:cNvSpPr txBox="0"/>
+          <p:nvPr/>
+        </p:nvSpPr>
+        <p:spPr>
+          <a:xfrm>
+            <a:off x="6611040" y="3674820"/>
+            <a:ext cx="4941840" cy="0"/>
+          </a:xfrm>
+          <a:prstGeom prst="line">
+            <a:avLst/>
+          </a:prstGeom>
+          <a:noFill/>
+          <a:ln w="12700">
+            <a:solidFill>
+              <a:srgbClr val="DCDCDC"/>
+            </a:solidFill>
+          </a:ln>
+        </p:spPr>
+        <p:txBody>
+          <a:bodyPr/>
+          <a:lstStyle/>
+          <a:p/>
+        </p:txBody>
+      </p:sp>
+      <p:sp>
+        <p:nvSpPr>
+          <p:cNvPr id="25" name="TextBox L12 Content Before"/>
+          <p:cNvSpPr txBox="1"/>
+          <p:nvPr/>
+        </p:nvSpPr>
+        <p:spPr>
+          <a:xfrm>
+            <a:off x="637160" y="3766260"/>
+            <a:ext cx="4484640" cy="1947040"/>
+          </a:xfrm>
+          <a:prstGeom prst="rect">
+            <a:avLst/>
+          </a:prstGeom>
+          <a:noFill/>
+          <a:ln>
+            <a:noFill/>
+          </a:ln>
+        </p:spPr>
+        <p:txBody>
+          <a:bodyPr wrap="square">
+            <a:spAutoFit/>
+          </a:bodyPr>
+          <a:lstStyle/>
+          <a:p>
+            <a:pPr algn="l"/>
+            <a:r>
+              <a:rPr lang="ko-KR" sz="1300" b="0">
+                <a:solidFill>
+                  <a:srgbClr val="212121"/>
+                </a:solidFill>
+                <a:latin typeface="Freesentation"/>
+              </a:rPr>
+              <a:t>• 단일 서버 동기 처리</a:t>
+            </a:r>
+          </a:p>
+          <a:p>
+            <a:pPr algn="l"/>
+            <a:r>
+              <a:rPr lang="ko-KR" sz="1300" b="0">
+                <a:solidFill>
+                  <a:srgbClr val="212121"/>
+                </a:solidFill>
+                <a:latin typeface="Freesentation"/>
+              </a:rPr>
+              <a:t>• REST API 직접 호출</a:t>
+            </a:r>
+          </a:p>
+          <a:p>
+            <a:pPr algn="l"/>
+            <a:r>
+              <a:rPr lang="ko-KR" sz="1300" b="0">
+                <a:solidFill>
+                  <a:srgbClr val="212121"/>
+                </a:solidFill>
+                <a:latin typeface="Freesentation"/>
+              </a:rPr>
+              <a:t>• 무중단 배포 미지원</a:t>
+            </a:r>
+          </a:p>
+        </p:txBody>
+      </p:sp>
+      <p:sp>
+        <p:nvSpPr>
+          <p:cNvPr id="26" name="TextBox L12 Content After"/>
+          <p:cNvSpPr txBox="1"/>
+          <p:nvPr/>
+        </p:nvSpPr>
+        <p:spPr>
+          <a:xfrm>
+            <a:off x="6611040" y="3766260"/>
+            <a:ext cx="4484640" cy="1947040"/>
+          </a:xfrm>
+          <a:prstGeom prst="rect">
+            <a:avLst/>
+          </a:prstGeom>
+          <a:noFill/>
+          <a:ln>
+            <a:noFill/>
+          </a:ln>
+        </p:spPr>
+        <p:txBody>
+          <a:bodyPr wrap="square">
+            <a:spAutoFit/>
+          </a:bodyPr>
+          <a:lstStyle/>
+          <a:p>
+            <a:pPr algn="l"/>
+            <a:r>
+              <a:rPr lang="ko-KR" sz="1300" b="0">
+                <a:solidFill>
+                  <a:srgbClr val="212121"/>
+                </a:solidFill>
+                <a:latin typeface="Freesentation"/>
+              </a:rPr>
+              <a:t>• Redis 캐시 + CDN 적용</a:t>
+            </a:r>
+          </a:p>
+          <a:p>
+            <a:pPr algn="l"/>
+            <a:r>
+              <a:rPr lang="ko-KR" sz="1300" b="0">
+                <a:solidFill>
+                  <a:srgbClr val="212121"/>
+                </a:solidFill>
+                <a:latin typeface="Freesentation"/>
+              </a:rPr>
+              <a:t>• MSK 비동기 이벤트 기반</a:t>
+            </a:r>
+          </a:p>
+          <a:p>
+            <a:pPr algn="l"/>
+            <a:r>
+              <a:rPr lang="ko-KR" sz="1300" b="0">
+                <a:solidFill>
+                  <a:srgbClr val="212121"/>
+                </a:solidFill>
+                <a:latin typeface="Freesentation"/>
+              </a:rPr>
+              <a:t>• Blue/Green 무중단 배포</a:t>
+            </a:r>
+          </a:p>
+        </p:txBody>
+      </p:sp>
+      <p:sp>
+        <p:nvSpPr>
+          <p:cNvPr id="27" name="RRect L12 Change Badge"/>
+          <p:cNvSpPr/>
+          <p:nvPr/>
+        </p:nvSpPr>
+        <p:spPr>
+          <a:xfrm>
+            <a:off x="5318760" y="5029200"/>
+            <a:ext cx="1554480" cy="274320"/>
+          </a:xfrm>
+          <a:prstGeom prst="roundRect">
+            <a:avLst>
+              <a:gd name="adj" fmla="val 16667"/>
+            </a:avLst>
+          </a:prstGeom>
+          <a:solidFill>
+            <a:srgbClr val="0043DA"/>
+          </a:solidFill>
+          <a:ln>
+            <a:solidFill>
+              <a:srgbClr val="0043DA"/>
+            </a:solidFill>
+          </a:ln>
+        </p:spPr>
+        <p:txBody>
+          <a:bodyPr anchor="ctr"/>
+          <a:lstStyle/>
+          <a:p/>
+        </p:txBody>
+      </p:sp>
+      <p:sp>
+        <p:nvSpPr>
+          <p:cNvPr id="28" name="TextBox L12 Change Badge Text"/>
+          <p:cNvSpPr txBox="1"/>
+          <p:nvPr/>
+        </p:nvSpPr>
+        <p:spPr>
+          <a:xfrm>
+            <a:off x="5318760" y="5029200"/>
+            <a:ext cx="1554480" cy="274320"/>
+          </a:xfrm>
+          <a:prstGeom prst="rect">
+            <a:avLst/>
+          </a:prstGeom>
+          <a:noFill/>
+          <a:ln>
+            <a:noFill/>
+          </a:ln>
+        </p:spPr>
+        <p:txBody>
+          <a:bodyPr wrap="square">
+            <a:spAutoFit/>
+          </a:bodyPr>
+          <a:lstStyle/>
+          <a:p>
+            <a:pPr algn="ctr"/>
+            <a:r>
+              <a:rPr lang="ko-KR" sz="1100" b="1">
+                <a:solidFill>
+                  <a:srgbClr val="FFFFFF"/>
+                </a:solidFill>
+                <a:latin typeface="프리젠테이션 7 Bold"/>
+              </a:rPr>
+              <a:t>▼ 75% 개선</a:t>
+            </a:r>
+          </a:p>
+        </p:txBody>
+      </p:sp>
+      <p:pic>
+        <p:nvPicPr>
+          <p:cNvPr id="29" name="Icon L12 Before"/>
+          <p:cNvPicPr>
+            <a:picLocks noChangeAspect="1"/>
+          </p:cNvPicPr>
+          <p:nvPr/>
+        </p:nvPicPr>
+        <p:blipFill>
+          <a:blip r:embed="rId22"/>
+          <a:stretch>
+            <a:fillRect/>
+          </a:stretch>
+        </p:blipFill>
+        <p:spPr>
+          <a:xfrm>
+            <a:off x="5047200" y="6087600"/>
+            <a:ext cx="411480" cy="411480"/>
+          </a:xfrm>
+          <a:prstGeom prst="rect">
+            <a:avLst/>
+          </a:prstGeom>
+          <a:ln>
+            <a:noFill/>
+          </a:ln>
+        </p:spPr>
+      </p:pic>
+      <p:pic>
+        <p:nvPicPr>
+          <p:cNvPr id="30" name="Icon L12 After"/>
+          <p:cNvPicPr>
+            <a:picLocks noChangeAspect="1"/>
+          </p:cNvPicPr>
+          <p:nvPr/>
+        </p:nvPicPr>
+        <p:blipFill>
+          <a:blip r:embed="rId23"/>
+          <a:stretch>
+            <a:fillRect/>
+          </a:stretch>
+        </p:blipFill>
+        <p:spPr>
+          <a:xfrm>
+            <a:off x="11021280" y="6087600"/>
+            <a:ext cx="411480" cy="411480"/>
+          </a:xfrm>
+          <a:prstGeom prst="rect">
+            <a:avLst/>
+          </a:prstGeom>
+          <a:ln>
+            <a:noFill/>
+          </a:ln>
+        </p:spPr>
+      </p:pic>
+      <p:sp>
+        <p:nvSpPr>
+          <p:cNvPr id="31" name="TextBox 30"/>
+          <p:cNvSpPr txBox="1"/>
+          <p:nvPr/>
+        </p:nvSpPr>
+        <p:spPr>
+          <a:xfrm>
+            <a:off x="354787" y="557784"/>
+            <a:ext cx="2720340" cy="932688"/>
+          </a:xfrm>
+          <a:prstGeom prst="rect">
+            <a:avLst/>
+          </a:prstGeom>
+          <a:noFill/>
+        </p:spPr>
+        <p:txBody>
+          <a:bodyPr wrap="none" lIns="0" rIns="0" tIns="0" bIns="0">
+            <a:spAutoFit/>
+          </a:bodyPr>
+          <a:lstStyle/>
+          <a:p>
+            <a:r>
+              <a:rPr sz="2000" b="1">
+                <a:latin typeface="Freesentation"/>
+              </a:rPr>
+              <a:t>L12. Before/After</a:t>
+            </a:r>
+          </a:p>
+        </p:txBody>
+      </p:sp>
+      <p:sp>
+        <p:nvSpPr>
+          <p:cNvPr id="32" name="TextBox 31"/>
+          <p:cNvSpPr txBox="1"/>
+          <p:nvPr/>
+        </p:nvSpPr>
+        <p:spPr>
+          <a:xfrm>
+            <a:off x="3762756" y="558698"/>
+            <a:ext cx="7550200" cy="938174"/>
+          </a:xfrm>
+          <a:prstGeom prst="rect">
+            <a:avLst/>
+          </a:prstGeom>
+          <a:noFill/>
+        </p:spPr>
+        <p:txBody>
+          <a:bodyPr wrap="none" lIns="0" rIns="0" tIns="0" bIns="0">
+            <a:spAutoFit/>
+          </a:bodyPr>
+          <a:lstStyle/>
+          <a:p>
+            <a:r>
+              <a:rPr sz="1300">
+                <a:latin typeface="Freesentation"/>
+              </a:rPr>
+              <a:t>KPI 수치 중심 시간 비교 — 변화량 강조</a:t>
+            </a:r>
+          </a:p>
+        </p:txBody>
+      </p:sp>
+    </p:spTree>
+  </p:cSld>
+  <p:clrMapOvr>
+    <a:masterClrMapping/>
+  </p:clrMapOvr>
+</p:sld>
+</file>
+
+<file path=ppt/slides/slide15.xml><?xml version="1.0" encoding="utf-8"?>
 <p:sld xmlns:a="http://schemas.openxmlformats.org/drawingml/2006/main" xmlns:r="http://schemas.openxmlformats.org/officeDocument/2006/relationships" xmlns:p="http://schemas.openxmlformats.org/presentationml/2006/main">
   <p:cSld>
     <p:spTree>
@@ -7467,7 +9570,7 @@
           </a:ln>
         </p:spPr>
         <p:txBody>
-          <a:bodyPr wrap="square">
+          <a:bodyPr wrap="square" lIns="0" rIns="0" tIns="0" bIns="0">
             <a:spAutoFit/>
           </a:bodyPr>
           <a:lstStyle/>
@@ -9137,7 +11240,7 @@
           </a:ln>
         </p:spPr>
         <p:txBody>
-          <a:bodyPr wrap="square">
+          <a:bodyPr wrap="square" lIns="0" rIns="0" tIns="0" bIns="0">
             <a:spAutoFit/>
           </a:bodyPr>
           <a:lstStyle/>
@@ -10000,7 +12103,7 @@
           </a:ln>
         </p:spPr>
         <p:txBody>
-          <a:bodyPr wrap="square">
+          <a:bodyPr wrap="square" lIns="0" rIns="0" tIns="0" bIns="0">
             <a:spAutoFit/>
           </a:bodyPr>
           <a:lstStyle/>
@@ -10831,7 +12934,7 @@
           </a:ln>
         </p:spPr>
         <p:txBody>
-          <a:bodyPr wrap="square">
+          <a:bodyPr wrap="square" lIns="0" rIns="0" tIns="0" bIns="0">
             <a:spAutoFit/>
           </a:bodyPr>
           <a:lstStyle/>
@@ -11750,7 +13853,7 @@
           </a:ln>
         </p:spPr>
         <p:txBody>
-          <a:bodyPr wrap="square">
+          <a:bodyPr wrap="square" lIns="0" rIns="0" tIns="0" bIns="0">
             <a:spAutoFit/>
           </a:bodyPr>
           <a:lstStyle/>
@@ -13265,7 +15368,7 @@
           <a:noFill/>
         </p:spPr>
         <p:txBody>
-          <a:bodyPr wrap="square">
+          <a:bodyPr wrap="square" lIns="0" rIns="0" tIns="0" bIns="0">
             <a:spAutoFit/>
           </a:bodyPr>
           <a:lstStyle/>

--- a/results/pptx/AWS_MSK_Expert_Intro.pptx
+++ b/results/pptx/AWS_MSK_Expert_Intro.pptx
@@ -5,10 +5,10 @@
     <p:sldMasterId id="2147483648" r:id="rId1"/>
   </p:sldMasterIdLst>
   <p:notesMasterIdLst>
-    <p:notesMasterId r:id="rId10"/>
+    <p:notesMasterId r:id="rId17"/>
   </p:notesMasterIdLst>
   <p:handoutMasterIdLst>
-    <p:handoutMasterId r:id="rId11"/>
+    <p:handoutMasterId r:id="rId18"/>
   </p:handoutMasterIdLst>
   <p:sldIdLst>
     <p:sldId id="358" r:id="rId2"/>
@@ -18,14 +18,22 @@
     <p:sldId id="365" r:id="rId6"/>
     <p:sldId id="366" r:id="rId7"/>
     <p:sldId id="367" r:id="rId8"/>
-    <p:sldId id="374" r:id="rId20"/>
-    <p:sldId id="369" r:id="rId16"/>
-    <p:sldId id="371" r:id="rId18"/>
-    <p:sldId id="372" r:id="rId17"/>
-    <p:sldId id="373" r:id="rId19"/>
-    <p:sldId id="375" r:id="rId21"/>
-    <p:sldId id="376" r:id="rId24"/>
-    <p:sldId id="356" r:id="rId9"/>
+    <p:sldId id="374" r:id="rId9"/>
+    <p:sldId id="369" r:id="rId10"/>
+    <p:sldId id="371" r:id="rId11"/>
+    <p:sldId id="372" r:id="rId12"/>
+    <p:sldId id="373" r:id="rId13"/>
+    <p:sldId id="375" r:id="rId14"/>
+    <p:sldId id="376" r:id="rId15"/>
+    <p:sldId id="377" r:id="rId23"/>
+    <p:sldId id="378" r:id="rId24"/>
+    <p:sldId id="379" r:id="rId25"/>
+    <p:sldId id="380" r:id="rId26"/>
+    <p:sldId id="381" r:id="rId27"/>
+    <p:sldId id="382" r:id="rId28"/>
+    <p:sldId id="383" r:id="rId29"/>
+    <p:sldId id="384" r:id="rId30"/>
+    <p:sldId id="356" r:id="rId16"/>
   </p:sldIdLst>
   <p:sldSz cx="12192000" cy="6858000"/>
   <p:notesSz cx="6858000" cy="9144000"/>
@@ -144,6 +152,13 @@
             <p14:sldId id="365"/>
             <p14:sldId id="366"/>
             <p14:sldId id="367"/>
+            <p14:sldId id="374"/>
+            <p14:sldId id="369"/>
+            <p14:sldId id="371"/>
+            <p14:sldId id="372"/>
+            <p14:sldId id="373"/>
+            <p14:sldId id="375"/>
+            <p14:sldId id="376"/>
           </p14:sldIdLst>
         </p14:section>
         <p14:section name="끝맺음" id="{C9A1EC51-E183-4528-B5C9-C551F42A7D16}">
@@ -245,7 +260,7 @@
           <a:p>
             <a:fld id="{F130D723-4A74-427C-8704-F358CE22FDDC}" type="datetimeFigureOut">
               <a:rPr lang="ko-KR" altLang="en-US" smtClean="0"/>
-              <a:t>2026. 4. 16.</a:t>
+              <a:t>2026. 4. 20.</a:t>
             </a:fld>
             <a:endParaRPr lang="ko-KR" altLang="en-US"/>
           </a:p>
@@ -376,7 +391,7 @@
           <a:p>
             <a:fld id="{A3378F70-37B2-44B5-9F4B-14A4EA9C44E7}" type="datetimeFigureOut">
               <a:rPr lang="ko-KR" altLang="en-US" smtClean="0"/>
-              <a:t>2026. 4. 16.</a:t>
+              <a:t>2026. 4. 20.</a:t>
             </a:fld>
             <a:endParaRPr lang="ko-KR" altLang="en-US"/>
           </a:p>
@@ -3698,7 +3713,7 @@
 </file>
 
 <file path=ppt/slides/slide10.xml><?xml version="1.0" encoding="utf-8"?>
-<p:sld xmlns:a="http://schemas.openxmlformats.org/drawingml/2006/main" xmlns:p="http://schemas.openxmlformats.org/presentationml/2006/main" xmlns:r="http://schemas.openxmlformats.org/officeDocument/2006/relationships">
+<p:sld xmlns:a="http://schemas.openxmlformats.org/drawingml/2006/main" xmlns:r="http://schemas.openxmlformats.org/officeDocument/2006/relationships" xmlns:p="http://schemas.openxmlformats.org/presentationml/2006/main">
   <p:cSld>
     <p:spTree>
       <p:nvGrpSpPr>
@@ -3706,7 +3721,14 @@
         <p:cNvGrpSpPr/>
         <p:nvPr/>
       </p:nvGrpSpPr>
-      <p:grpSpPr/>
+      <p:grpSpPr>
+        <a:xfrm>
+          <a:off x="0" y="0"/>
+          <a:ext cx="0" cy="0"/>
+          <a:chOff x="0" y="0"/>
+          <a:chExt cx="0" cy="0"/>
+        </a:xfrm>
+      </p:grpSpPr>
       <p:sp>
         <p:nvSpPr>
           <p:cNvPr id="2" name="Text Placeholder 1"/>
@@ -3714,14 +3736,16 @@
             <a:spLocks noGrp="1"/>
           </p:cNvSpPr>
           <p:nvPr>
-            <p:ph type="body" idx="10" sz="quarter"/>
+            <p:ph type="body" sz="quarter" idx="10"/>
           </p:nvPr>
         </p:nvSpPr>
         <p:spPr/>
         <p:txBody>
           <a:bodyPr/>
           <a:lstStyle/>
-          <a:p/>
+          <a:p>
+            <a:endParaRPr/>
+          </a:p>
         </p:txBody>
       </p:sp>
       <p:sp>
@@ -3741,7 +3765,7 @@
           <a:noFill/>
         </p:spPr>
         <p:txBody>
-          <a:bodyPr anchor="t" lIns="0" tIns="0" rIns="0" bIns="0"/>
+          <a:bodyPr lIns="0" tIns="0" rIns="0" bIns="0" anchor="t"/>
           <a:lstStyle/>
           <a:p>
             <a:r>
@@ -3773,7 +3797,7 @@
           <a:noFill/>
         </p:spPr>
         <p:txBody>
-          <a:bodyPr wrap="square" lIns="0" rIns="0" tIns="0" bIns="0">
+          <a:bodyPr wrap="square" lIns="0" tIns="0" rIns="0" bIns="0">
             <a:spAutoFit/>
           </a:bodyPr>
           <a:lstStyle/>
@@ -3897,6 +3921,7 @@
           <a:lstStyle/>
           <a:p>
             <a:pPr algn="ctr"/>
+            <a:endParaRPr/>
           </a:p>
         </p:txBody>
       </p:sp>
@@ -3942,6 +3967,7 @@
           <a:lstStyle/>
           <a:p>
             <a:pPr algn="ctr"/>
+            <a:endParaRPr/>
           </a:p>
         </p:txBody>
       </p:sp>
@@ -3987,6 +4013,7 @@
           <a:lstStyle/>
           <a:p>
             <a:pPr algn="ctr"/>
+            <a:endParaRPr/>
           </a:p>
         </p:txBody>
       </p:sp>
@@ -4032,6 +4059,7 @@
           <a:lstStyle/>
           <a:p>
             <a:pPr algn="ctr"/>
+            <a:endParaRPr/>
           </a:p>
         </p:txBody>
       </p:sp>
@@ -4077,6 +4105,7 @@
           <a:lstStyle/>
           <a:p>
             <a:pPr algn="ctr"/>
+            <a:endParaRPr/>
           </a:p>
         </p:txBody>
       </p:sp>
@@ -4494,7 +4523,7 @@
 </file>
 
 <file path=ppt/slides/slide11.xml><?xml version="1.0" encoding="utf-8"?>
-<p:sld xmlns:a="http://schemas.openxmlformats.org/drawingml/2006/main" xmlns:p="http://schemas.openxmlformats.org/presentationml/2006/main" xmlns:r="http://schemas.openxmlformats.org/officeDocument/2006/relationships">
+<p:sld xmlns:a="http://schemas.openxmlformats.org/drawingml/2006/main" xmlns:r="http://schemas.openxmlformats.org/officeDocument/2006/relationships" xmlns:p="http://schemas.openxmlformats.org/presentationml/2006/main">
   <p:cSld>
     <p:spTree>
       <p:nvGrpSpPr>
@@ -4502,7 +4531,14 @@
         <p:cNvGrpSpPr/>
         <p:nvPr/>
       </p:nvGrpSpPr>
-      <p:grpSpPr/>
+      <p:grpSpPr>
+        <a:xfrm>
+          <a:off x="0" y="0"/>
+          <a:ext cx="0" cy="0"/>
+          <a:chOff x="0" y="0"/>
+          <a:chExt cx="0" cy="0"/>
+        </a:xfrm>
+      </p:grpSpPr>
       <p:sp>
         <p:nvSpPr>
           <p:cNvPr id="2" name="Text Placeholder 1"/>
@@ -4568,6 +4604,7 @@
           <a:lstStyle/>
           <a:p>
             <a:pPr algn="ctr"/>
+            <a:endParaRPr/>
           </a:p>
         </p:txBody>
       </p:sp>
@@ -4613,6 +4650,7 @@
           <a:lstStyle/>
           <a:p>
             <a:pPr algn="ctr"/>
+            <a:endParaRPr/>
           </a:p>
         </p:txBody>
       </p:sp>
@@ -4658,6 +4696,7 @@
           <a:lstStyle/>
           <a:p>
             <a:pPr algn="ctr"/>
+            <a:endParaRPr/>
           </a:p>
         </p:txBody>
       </p:sp>
@@ -4703,6 +4742,7 @@
           <a:lstStyle/>
           <a:p>
             <a:pPr algn="ctr"/>
+            <a:endParaRPr/>
           </a:p>
         </p:txBody>
       </p:sp>
@@ -4748,6 +4788,7 @@
           <a:lstStyle/>
           <a:p>
             <a:pPr algn="ctr"/>
+            <a:endParaRPr/>
           </a:p>
         </p:txBody>
       </p:sp>
@@ -4768,7 +4809,7 @@
           <a:noFill/>
         </p:spPr>
         <p:txBody>
-          <a:bodyPr anchor="t" lIns="0" tIns="0" rIns="0" bIns="0"/>
+          <a:bodyPr lIns="0" tIns="0" rIns="0" bIns="0" anchor="t"/>
           <a:lstStyle/>
           <a:p>
             <a:r>
@@ -4800,7 +4841,7 @@
           <a:noFill/>
         </p:spPr>
         <p:txBody>
-          <a:bodyPr wrap="square" lIns="0" rIns="0" tIns="0" bIns="0">
+          <a:bodyPr wrap="square" lIns="0" tIns="0" rIns="0" bIns="0">
             <a:spAutoFit/>
           </a:bodyPr>
           <a:lstStyle/>
@@ -4808,12 +4849,6 @@
             <a:r>
               <a:rPr sz="1200" b="0">
                 <a:latin typeface="Freesentation"/>
-                <a:solidFill>
-                  <a:schemeClr val="tx1">
-                    <a:lumMod val="75000"/>
-                    <a:lumOff val="25000"/>
-                  </a:schemeClr>
-                </a:solidFill>
               </a:rPr>
               <a:t>현황/문제 → 개선/해결 대비 레이아웃 — 2컬럼 챌린지·솔루션 구조</a:t>
             </a:r>
@@ -5217,7 +5252,7 @@
 </file>
 
 <file path=ppt/slides/slide12.xml><?xml version="1.0" encoding="utf-8"?>
-<p:sld xmlns:a="http://schemas.openxmlformats.org/drawingml/2006/main" xmlns:p="http://schemas.openxmlformats.org/presentationml/2006/main" xmlns:r="http://schemas.openxmlformats.org/officeDocument/2006/relationships">
+<p:sld xmlns:a="http://schemas.openxmlformats.org/drawingml/2006/main" xmlns:r="http://schemas.openxmlformats.org/officeDocument/2006/relationships" xmlns:p="http://schemas.openxmlformats.org/presentationml/2006/main">
   <p:cSld>
     <p:spTree>
       <p:nvGrpSpPr>
@@ -5225,7 +5260,14 @@
         <p:cNvGrpSpPr/>
         <p:nvPr/>
       </p:nvGrpSpPr>
-      <p:grpSpPr/>
+      <p:grpSpPr>
+        <a:xfrm>
+          <a:off x="0" y="0"/>
+          <a:ext cx="0" cy="0"/>
+          <a:chOff x="0" y="0"/>
+          <a:chExt cx="0" cy="0"/>
+        </a:xfrm>
+      </p:grpSpPr>
       <p:sp>
         <p:nvSpPr>
           <p:cNvPr id="2" name="Text Placeholder 1"/>
@@ -5233,7 +5275,7 @@
             <a:spLocks noGrp="1"/>
           </p:cNvSpPr>
           <p:nvPr>
-            <p:ph type="body" idx="10" sz="quarter"/>
+            <p:ph type="body" sz="quarter" idx="10"/>
           </p:nvPr>
         </p:nvSpPr>
         <p:spPr/>
@@ -5241,10 +5283,7 @@
           <a:bodyPr/>
           <a:lstStyle/>
           <a:p>
-            <a:r>
-              <a:rPr lang="ko-KR" altLang="en-US" dirty="0" b="1"/>
-              <a:t/>
-            </a:r>
+            <a:endParaRPr/>
           </a:p>
         </p:txBody>
       </p:sp>
@@ -5290,6 +5329,7 @@
           <a:lstStyle/>
           <a:p>
             <a:pPr algn="ctr"/>
+            <a:endParaRPr/>
           </a:p>
         </p:txBody>
       </p:sp>
@@ -5335,6 +5375,7 @@
           <a:lstStyle/>
           <a:p>
             <a:pPr algn="ctr"/>
+            <a:endParaRPr/>
           </a:p>
         </p:txBody>
       </p:sp>
@@ -5474,7 +5515,6 @@
               </a:rPr>
               <a:t>초기 비용</a:t>
             </a:r>
-            <a:defRPr sz="1100" b="0"/>
           </a:p>
           <a:p>
             <a:pPr algn="l"/>
@@ -5487,10 +5527,15 @@
               </a:rPr>
               <a:t>서버 구매 ₩5억+</a:t>
             </a:r>
-            <a:defRPr sz="1400" b="1"/>
           </a:p>
           <a:p>
             <a:pPr algn="l"/>
+            <a:endParaRPr sz="1400" b="1">
+              <a:solidFill>
+                <a:srgbClr val="212121"/>
+              </a:solidFill>
+              <a:latin typeface="Freesentation"/>
+            </a:endParaRPr>
           </a:p>
           <a:p>
             <a:pPr algn="l"/>
@@ -5503,7 +5548,6 @@
               </a:rPr>
               <a:t>운영 관리</a:t>
             </a:r>
-            <a:defRPr sz="1100" b="0"/>
           </a:p>
           <a:p>
             <a:pPr algn="l"/>
@@ -5516,10 +5560,15 @@
               </a:rPr>
               <a:t>전담 인력 2~3명 필요</a:t>
             </a:r>
-            <a:defRPr sz="1400" b="1"/>
           </a:p>
           <a:p>
             <a:pPr algn="l"/>
+            <a:endParaRPr sz="1400" b="1">
+              <a:solidFill>
+                <a:srgbClr val="212121"/>
+              </a:solidFill>
+              <a:latin typeface="Freesentation"/>
+            </a:endParaRPr>
           </a:p>
           <a:p>
             <a:pPr algn="l"/>
@@ -5532,7 +5581,6 @@
               </a:rPr>
               <a:t>가용성</a:t>
             </a:r>
-            <a:defRPr sz="1100" b="0"/>
           </a:p>
           <a:p>
             <a:pPr algn="l"/>
@@ -5545,10 +5593,15 @@
               </a:rPr>
               <a:t>자체 HA 구성 필요</a:t>
             </a:r>
-            <a:defRPr sz="1400" b="1"/>
           </a:p>
           <a:p>
             <a:pPr algn="l"/>
+            <a:endParaRPr sz="1400" b="1">
+              <a:solidFill>
+                <a:srgbClr val="212121"/>
+              </a:solidFill>
+              <a:latin typeface="Freesentation"/>
+            </a:endParaRPr>
           </a:p>
           <a:p>
             <a:pPr algn="l"/>
@@ -5561,7 +5614,6 @@
               </a:rPr>
               <a:t>확장성</a:t>
             </a:r>
-            <a:defRPr sz="1100" b="0"/>
           </a:p>
           <a:p>
             <a:pPr algn="l"/>
@@ -5574,7 +5626,6 @@
               </a:rPr>
               <a:t>용량 증설에 수 주 소요</a:t>
             </a:r>
-            <a:defRPr sz="1400" b="1"/>
           </a:p>
         </p:txBody>
       </p:sp>
@@ -5610,7 +5661,6 @@
               </a:rPr>
               <a:t>초기 비용</a:t>
             </a:r>
-            <a:defRPr sz="1100" b="0"/>
           </a:p>
           <a:p>
             <a:pPr algn="l"/>
@@ -5623,10 +5673,15 @@
               </a:rPr>
               <a:t>초기 투자 0원</a:t>
             </a:r>
-            <a:defRPr sz="1400" b="1"/>
           </a:p>
           <a:p>
             <a:pPr algn="l"/>
+            <a:endParaRPr sz="1400" b="1">
+              <a:solidFill>
+                <a:srgbClr val="0043DA"/>
+              </a:solidFill>
+              <a:latin typeface="Freesentation"/>
+            </a:endParaRPr>
           </a:p>
           <a:p>
             <a:pPr algn="l"/>
@@ -5639,7 +5694,6 @@
               </a:rPr>
               <a:t>운영 관리</a:t>
             </a:r>
-            <a:defRPr sz="1100" b="0"/>
           </a:p>
           <a:p>
             <a:pPr algn="l"/>
@@ -5652,10 +5706,15 @@
               </a:rPr>
               <a:t>AWS 완전 관리형</a:t>
             </a:r>
-            <a:defRPr sz="1400" b="1"/>
           </a:p>
           <a:p>
             <a:pPr algn="l"/>
+            <a:endParaRPr sz="1400" b="1">
+              <a:solidFill>
+                <a:srgbClr val="0043DA"/>
+              </a:solidFill>
+              <a:latin typeface="Freesentation"/>
+            </a:endParaRPr>
           </a:p>
           <a:p>
             <a:pPr algn="l"/>
@@ -5668,7 +5727,6 @@
               </a:rPr>
               <a:t>가용성</a:t>
             </a:r>
-            <a:defRPr sz="1100" b="0"/>
           </a:p>
           <a:p>
             <a:pPr algn="l"/>
@@ -5681,10 +5739,15 @@
               </a:rPr>
               <a:t>99.9% SLA 보장</a:t>
             </a:r>
-            <a:defRPr sz="1400" b="1"/>
           </a:p>
           <a:p>
             <a:pPr algn="l"/>
+            <a:endParaRPr sz="1400" b="1">
+              <a:solidFill>
+                <a:srgbClr val="0043DA"/>
+              </a:solidFill>
+              <a:latin typeface="Freesentation"/>
+            </a:endParaRPr>
           </a:p>
           <a:p>
             <a:pPr algn="l"/>
@@ -5697,7 +5760,6 @@
               </a:rPr>
               <a:t>확장성</a:t>
             </a:r>
-            <a:defRPr sz="1100" b="0"/>
           </a:p>
           <a:p>
             <a:pPr algn="l"/>
@@ -5710,7 +5772,6 @@
               </a:rPr>
               <a:t>수분 내 스케일 아웃</a:t>
             </a:r>
-            <a:defRPr sz="1400" b="1"/>
           </a:p>
         </p:txBody>
       </p:sp>
@@ -5779,7 +5840,7 @@
           <a:noFill/>
         </p:spPr>
         <p:txBody>
-          <a:bodyPr anchor="t" lIns="0" tIns="0" rIns="0" bIns="0"/>
+          <a:bodyPr lIns="0" tIns="0" rIns="0" bIns="0" anchor="t"/>
           <a:lstStyle/>
           <a:p>
             <a:r>
@@ -5811,7 +5872,7 @@
           <a:noFill/>
         </p:spPr>
         <p:txBody>
-          <a:bodyPr wrap="square" lIns="0" rIns="0" tIns="0" bIns="0">
+          <a:bodyPr wrap="square" lIns="0" tIns="0" rIns="0" bIns="0">
             <a:spAutoFit/>
           </a:bodyPr>
           <a:lstStyle/>
@@ -5910,7 +5971,7 @@
 </file>
 
 <file path=ppt/slides/slide13.xml><?xml version="1.0" encoding="utf-8"?>
-<p:sld xmlns:p="http://schemas.openxmlformats.org/presentationml/2006/main" xmlns:a="http://schemas.openxmlformats.org/drawingml/2006/main" xmlns:r="http://schemas.openxmlformats.org/officeDocument/2006/relationships">
+<p:sld xmlns:a="http://schemas.openxmlformats.org/drawingml/2006/main" xmlns:r="http://schemas.openxmlformats.org/officeDocument/2006/relationships" xmlns:p="http://schemas.openxmlformats.org/presentationml/2006/main">
   <p:cSld>
     <p:spTree>
       <p:nvGrpSpPr>
@@ -5918,7 +5979,14 @@
         <p:cNvGrpSpPr/>
         <p:nvPr/>
       </p:nvGrpSpPr>
-      <p:grpSpPr/>
+      <p:grpSpPr>
+        <a:xfrm>
+          <a:off x="0" y="0"/>
+          <a:ext cx="0" cy="0"/>
+          <a:chOff x="0" y="0"/>
+          <a:chExt cx="0" cy="0"/>
+        </a:xfrm>
+      </p:grpSpPr>
       <p:sp>
         <p:nvSpPr>
           <p:cNvPr id="2" name="Text Placeholder 1"/>
@@ -5926,14 +5994,16 @@
             <a:spLocks noGrp="1"/>
           </p:cNvSpPr>
           <p:nvPr>
-            <p:ph type="body" idx="10" sz="quarter"/>
+            <p:ph type="body" sz="quarter" idx="10"/>
           </p:nvPr>
         </p:nvSpPr>
         <p:spPr/>
         <p:txBody>
           <a:bodyPr/>
           <a:lstStyle/>
-          <a:p/>
+          <a:p>
+            <a:endParaRPr/>
+          </a:p>
         </p:txBody>
       </p:sp>
       <p:sp>
@@ -6027,20 +6097,44 @@
         <a:graphic>
           <a:graphicData uri="http://schemas.openxmlformats.org/drawingml/2006/table">
             <a:tbl>
-              <a:tblPr firstRow="1" bandRow="0">
+              <a:tblPr firstRow="1">
                 <a:noFill/>
                 <a:tableStyleId>{5C22544A-7EE6-4342-B048-85BDC9FD1C3A}</a:tableStyleId>
               </a:tblPr>
               <a:tblGrid>
-                <a:gridCol w="2560320"/>
-                <a:gridCol w="2905760"/>
-                <a:gridCol w="2905760"/>
-                <a:gridCol w="2905760"/>
+                <a:gridCol w="2560320">
+                  <a:extLst>
+                    <a:ext uri="{9D8B030D-6E8A-4147-A177-3AD203B41FA5}">
+                      <a16:colId xmlns:a16="http://schemas.microsoft.com/office/drawing/2014/main" val="20000"/>
+                    </a:ext>
+                  </a:extLst>
+                </a:gridCol>
+                <a:gridCol w="2905760">
+                  <a:extLst>
+                    <a:ext uri="{9D8B030D-6E8A-4147-A177-3AD203B41FA5}">
+                      <a16:colId xmlns:a16="http://schemas.microsoft.com/office/drawing/2014/main" val="20001"/>
+                    </a:ext>
+                  </a:extLst>
+                </a:gridCol>
+                <a:gridCol w="2905760">
+                  <a:extLst>
+                    <a:ext uri="{9D8B030D-6E8A-4147-A177-3AD203B41FA5}">
+                      <a16:colId xmlns:a16="http://schemas.microsoft.com/office/drawing/2014/main" val="20002"/>
+                    </a:ext>
+                  </a:extLst>
+                </a:gridCol>
+                <a:gridCol w="2905760">
+                  <a:extLst>
+                    <a:ext uri="{9D8B030D-6E8A-4147-A177-3AD203B41FA5}">
+                      <a16:colId xmlns:a16="http://schemas.microsoft.com/office/drawing/2014/main" val="20003"/>
+                    </a:ext>
+                  </a:extLst>
+                </a:gridCol>
               </a:tblGrid>
               <a:tr h="457200">
                 <a:tc>
                   <a:txBody>
-                    <a:bodyPr anchor="ctr"/>
+                    <a:bodyPr/>
                     <a:lstStyle/>
                     <a:p>
                       <a:pPr algn="ctr"/>
@@ -6083,7 +6177,7 @@
                 </a:tc>
                 <a:tc>
                   <a:txBody>
-                    <a:bodyPr anchor="ctr"/>
+                    <a:bodyPr/>
                     <a:lstStyle/>
                     <a:p>
                       <a:pPr algn="ctr"/>
@@ -6126,7 +6220,7 @@
                 </a:tc>
                 <a:tc>
                   <a:txBody>
-                    <a:bodyPr anchor="ctr"/>
+                    <a:bodyPr/>
                     <a:lstStyle/>
                     <a:p>
                       <a:pPr algn="ctr"/>
@@ -6169,7 +6263,7 @@
                 </a:tc>
                 <a:tc>
                   <a:txBody>
-                    <a:bodyPr anchor="ctr"/>
+                    <a:bodyPr/>
                     <a:lstStyle/>
                     <a:p>
                       <a:pPr algn="ctr"/>
@@ -6210,11 +6304,16 @@
                     </a:solidFill>
                   </a:tcPr>
                 </a:tc>
+                <a:extLst>
+                  <a:ext uri="{0D108BD9-81ED-4DB2-BD59-A6C34878D82A}">
+                    <a16:rowId xmlns:a16="http://schemas.microsoft.com/office/drawing/2014/main" val="10000"/>
+                  </a:ext>
+                </a:extLst>
               </a:tr>
               <a:tr h="759024">
                 <a:tc>
                   <a:txBody>
-                    <a:bodyPr anchor="ctr"/>
+                    <a:bodyPr/>
                     <a:lstStyle/>
                     <a:p>
                       <a:pPr algn="l"/>
@@ -6257,7 +6356,7 @@
                 </a:tc>
                 <a:tc>
                   <a:txBody>
-                    <a:bodyPr anchor="ctr"/>
+                    <a:bodyPr/>
                     <a:lstStyle/>
                     <a:p>
                       <a:pPr algn="ctr"/>
@@ -6300,7 +6399,7 @@
                 </a:tc>
                 <a:tc>
                   <a:txBody>
-                    <a:bodyPr anchor="ctr"/>
+                    <a:bodyPr/>
                     <a:lstStyle/>
                     <a:p>
                       <a:pPr algn="ctr"/>
@@ -6343,7 +6442,7 @@
                 </a:tc>
                 <a:tc>
                   <a:txBody>
-                    <a:bodyPr anchor="ctr"/>
+                    <a:bodyPr/>
                     <a:lstStyle/>
                     <a:p>
                       <a:pPr algn="ctr"/>
@@ -6384,11 +6483,16 @@
                     </a:solidFill>
                   </a:tcPr>
                 </a:tc>
+                <a:extLst>
+                  <a:ext uri="{0D108BD9-81ED-4DB2-BD59-A6C34878D82A}">
+                    <a16:rowId xmlns:a16="http://schemas.microsoft.com/office/drawing/2014/main" val="10001"/>
+                  </a:ext>
+                </a:extLst>
               </a:tr>
               <a:tr h="759024">
                 <a:tc>
                   <a:txBody>
-                    <a:bodyPr anchor="ctr"/>
+                    <a:bodyPr/>
                     <a:lstStyle/>
                     <a:p>
                       <a:pPr algn="l"/>
@@ -6431,7 +6535,7 @@
                 </a:tc>
                 <a:tc>
                   <a:txBody>
-                    <a:bodyPr anchor="ctr"/>
+                    <a:bodyPr/>
                     <a:lstStyle/>
                     <a:p>
                       <a:pPr algn="ctr"/>
@@ -6474,7 +6578,7 @@
                 </a:tc>
                 <a:tc>
                   <a:txBody>
-                    <a:bodyPr anchor="ctr"/>
+                    <a:bodyPr/>
                     <a:lstStyle/>
                     <a:p>
                       <a:pPr algn="ctr"/>
@@ -6517,7 +6621,7 @@
                 </a:tc>
                 <a:tc>
                   <a:txBody>
-                    <a:bodyPr anchor="ctr"/>
+                    <a:bodyPr/>
                     <a:lstStyle/>
                     <a:p>
                       <a:pPr algn="ctr"/>
@@ -6558,11 +6662,16 @@
                     </a:solidFill>
                   </a:tcPr>
                 </a:tc>
+                <a:extLst>
+                  <a:ext uri="{0D108BD9-81ED-4DB2-BD59-A6C34878D82A}">
+                    <a16:rowId xmlns:a16="http://schemas.microsoft.com/office/drawing/2014/main" val="10002"/>
+                  </a:ext>
+                </a:extLst>
               </a:tr>
               <a:tr h="759024">
                 <a:tc>
                   <a:txBody>
-                    <a:bodyPr anchor="ctr"/>
+                    <a:bodyPr/>
                     <a:lstStyle/>
                     <a:p>
                       <a:pPr algn="l"/>
@@ -6605,7 +6714,7 @@
                 </a:tc>
                 <a:tc>
                   <a:txBody>
-                    <a:bodyPr anchor="ctr"/>
+                    <a:bodyPr/>
                     <a:lstStyle/>
                     <a:p>
                       <a:pPr algn="ctr"/>
@@ -6648,7 +6757,7 @@
                 </a:tc>
                 <a:tc>
                   <a:txBody>
-                    <a:bodyPr anchor="ctr"/>
+                    <a:bodyPr/>
                     <a:lstStyle/>
                     <a:p>
                       <a:pPr algn="ctr"/>
@@ -6691,7 +6800,7 @@
                 </a:tc>
                 <a:tc>
                   <a:txBody>
-                    <a:bodyPr anchor="ctr"/>
+                    <a:bodyPr/>
                     <a:lstStyle/>
                     <a:p>
                       <a:pPr algn="ctr"/>
@@ -6732,11 +6841,16 @@
                     </a:solidFill>
                   </a:tcPr>
                 </a:tc>
+                <a:extLst>
+                  <a:ext uri="{0D108BD9-81ED-4DB2-BD59-A6C34878D82A}">
+                    <a16:rowId xmlns:a16="http://schemas.microsoft.com/office/drawing/2014/main" val="10003"/>
+                  </a:ext>
+                </a:extLst>
               </a:tr>
               <a:tr h="759024">
                 <a:tc>
                   <a:txBody>
-                    <a:bodyPr anchor="ctr"/>
+                    <a:bodyPr/>
                     <a:lstStyle/>
                     <a:p>
                       <a:pPr algn="l"/>
@@ -6779,7 +6893,7 @@
                 </a:tc>
                 <a:tc>
                   <a:txBody>
-                    <a:bodyPr anchor="ctr"/>
+                    <a:bodyPr/>
                     <a:lstStyle/>
                     <a:p>
                       <a:pPr algn="ctr"/>
@@ -6822,7 +6936,7 @@
                 </a:tc>
                 <a:tc>
                   <a:txBody>
-                    <a:bodyPr anchor="ctr"/>
+                    <a:bodyPr/>
                     <a:lstStyle/>
                     <a:p>
                       <a:pPr algn="ctr"/>
@@ -6865,7 +6979,7 @@
                 </a:tc>
                 <a:tc>
                   <a:txBody>
-                    <a:bodyPr anchor="ctr"/>
+                    <a:bodyPr/>
                     <a:lstStyle/>
                     <a:p>
                       <a:pPr algn="ctr"/>
@@ -6906,11 +7020,16 @@
                     </a:solidFill>
                   </a:tcPr>
                 </a:tc>
+                <a:extLst>
+                  <a:ext uri="{0D108BD9-81ED-4DB2-BD59-A6C34878D82A}">
+                    <a16:rowId xmlns:a16="http://schemas.microsoft.com/office/drawing/2014/main" val="10004"/>
+                  </a:ext>
+                </a:extLst>
               </a:tr>
               <a:tr h="759024">
                 <a:tc>
                   <a:txBody>
-                    <a:bodyPr anchor="ctr"/>
+                    <a:bodyPr/>
                     <a:lstStyle/>
                     <a:p>
                       <a:pPr algn="l"/>
@@ -6953,7 +7072,7 @@
                 </a:tc>
                 <a:tc>
                   <a:txBody>
-                    <a:bodyPr anchor="ctr"/>
+                    <a:bodyPr/>
                     <a:lstStyle/>
                     <a:p>
                       <a:pPr algn="ctr"/>
@@ -6996,7 +7115,7 @@
                 </a:tc>
                 <a:tc>
                   <a:txBody>
-                    <a:bodyPr anchor="ctr"/>
+                    <a:bodyPr/>
                     <a:lstStyle/>
                     <a:p>
                       <a:pPr algn="ctr"/>
@@ -7039,7 +7158,7 @@
                 </a:tc>
                 <a:tc>
                   <a:txBody>
-                    <a:bodyPr anchor="ctr"/>
+                    <a:bodyPr/>
                     <a:lstStyle/>
                     <a:p>
                       <a:pPr algn="ctr"/>
@@ -7080,6 +7199,11 @@
                     </a:solidFill>
                   </a:tcPr>
                 </a:tc>
+                <a:extLst>
+                  <a:ext uri="{0D108BD9-81ED-4DB2-BD59-A6C34878D82A}">
+                    <a16:rowId xmlns:a16="http://schemas.microsoft.com/office/drawing/2014/main" val="10005"/>
+                  </a:ext>
+                </a:extLst>
               </a:tr>
             </a:tbl>
           </a:graphicData>
@@ -7102,7 +7226,7 @@
           <a:noFill/>
         </p:spPr>
         <p:txBody>
-          <a:bodyPr wrap="none" lIns="0" rIns="0" tIns="0" bIns="0">
+          <a:bodyPr wrap="none" lIns="0" tIns="0" rIns="0" bIns="0">
             <a:spAutoFit/>
           </a:bodyPr>
           <a:lstStyle/>
@@ -7133,7 +7257,7 @@
           <a:noFill/>
         </p:spPr>
         <p:txBody>
-          <a:bodyPr wrap="none" lIns="0" rIns="0" tIns="0" bIns="0">
+          <a:bodyPr wrap="none" lIns="0" tIns="0" rIns="0" bIns="0">
             <a:spAutoFit/>
           </a:bodyPr>
           <a:lstStyle/>
@@ -7156,861 +7280,6 @@
 </file>
 
 <file path=ppt/slides/slide14.xml><?xml version="1.0" encoding="utf-8"?>
-<p:sld xmlns:p="http://schemas.openxmlformats.org/presentationml/2006/main" xmlns:a="http://schemas.openxmlformats.org/drawingml/2006/main" xmlns:r="http://schemas.openxmlformats.org/officeDocument/2006/relationships">
-  <p:cSld>
-    <p:spTree>
-      <p:nvGrpSpPr>
-        <p:cNvPr id="1" name=""/>
-        <p:cNvGrpSpPr/>
-        <p:nvPr/>
-      </p:nvGrpSpPr>
-      <p:grpSpPr/>
-      <p:sp>
-        <p:nvSpPr>
-          <p:cNvPr id="2" name="Text Placeholder 1"/>
-          <p:cNvSpPr>
-            <a:spLocks noGrp="1"/>
-          </p:cNvSpPr>
-          <p:nvPr>
-            <p:ph type="body" idx="10" sz="quarter"/>
-          </p:nvPr>
-        </p:nvSpPr>
-        <p:spPr/>
-        <p:txBody>
-          <a:bodyPr/>
-          <a:lstStyle/>
-          <a:p/>
-        </p:txBody>
-      </p:sp>
-      <p:sp>
-        <p:nvSpPr>
-          <p:cNvPr id="10" name="TextBox L12 Title"/>
-          <p:cNvSpPr txBox="1"/>
-          <p:nvPr/>
-        </p:nvSpPr>
-        <p:spPr>
-          <a:xfrm>
-            <a:off x="457200" y="1600200"/>
-            <a:ext cx="11277600" cy="320040"/>
-          </a:xfrm>
-          <a:prstGeom prst="rect">
-            <a:avLst/>
-          </a:prstGeom>
-          <a:noFill/>
-          <a:ln>
-            <a:noFill/>
-          </a:ln>
-        </p:spPr>
-        <p:txBody>
-          <a:bodyPr wrap="square">
-            <a:spAutoFit/>
-          </a:bodyPr>
-          <a:lstStyle/>
-          <a:p>
-            <a:pPr algn="l"/>
-            <a:r>
-              <a:rPr lang="ko-KR" sz="1600" b="1">
-                <a:solidFill>
-                  <a:srgbClr val="0043DA"/>
-                </a:solidFill>
-                <a:latin typeface="Freesentation"/>
-              </a:rPr>
-              <a:t>API 응답 시간 개선 — MSK 이벤트 기반 아키텍처 전환 효과</a:t>
-            </a:r>
-          </a:p>
-        </p:txBody>
-      </p:sp>
-      <p:sp>
-        <p:nvSpPr>
-          <p:cNvPr id="11" name="TextBox L12 Desc"/>
-          <p:cNvSpPr txBox="1"/>
-          <p:nvPr/>
-        </p:nvSpPr>
-        <p:spPr>
-          <a:xfrm>
-            <a:off x="457200" y="1965960"/>
-            <a:ext cx="11277600" cy="274320"/>
-          </a:xfrm>
-          <a:prstGeom prst="rect">
-            <a:avLst/>
-          </a:prstGeom>
-          <a:noFill/>
-          <a:ln>
-            <a:noFill/>
-          </a:ln>
-        </p:spPr>
-        <p:txBody>
-          <a:bodyPr wrap="square">
-            <a:spAutoFit/>
-          </a:bodyPr>
-          <a:lstStyle/>
-          <a:p>
-            <a:pPr algn="l"/>
-            <a:r>
-              <a:rPr lang="ko-KR" sz="1300" b="0">
-                <a:solidFill>
-                  <a:srgbClr val="212121"/>
-                </a:solidFill>
-                <a:latin typeface="Freesentation"/>
-              </a:rPr>
-              <a:t>2026년 1분기 실측 기준. 동일 트래픽(10K RPS) 조건 A/B 테스트 결과</a:t>
-            </a:r>
-          </a:p>
-        </p:txBody>
-      </p:sp>
-      <p:sp>
-        <p:nvSpPr>
-          <p:cNvPr id="12" name="RRect L12 Badge Before"/>
-          <p:cNvSpPr/>
-          <p:nvPr/>
-        </p:nvSpPr>
-        <p:spPr>
-          <a:xfrm>
-            <a:off x="637160" y="2423160"/>
-            <a:ext cx="1371600" cy="274320"/>
-          </a:xfrm>
-          <a:prstGeom prst="roundRect">
-            <a:avLst>
-              <a:gd name="adj" fmla="val 16667"/>
-            </a:avLst>
-          </a:prstGeom>
-          <a:solidFill>
-            <a:srgbClr val="212121"/>
-          </a:solidFill>
-          <a:ln>
-            <a:solidFill>
-              <a:srgbClr val="212121"/>
-            </a:solidFill>
-          </a:ln>
-        </p:spPr>
-        <p:txBody>
-          <a:bodyPr anchor="ctr"/>
-          <a:lstStyle/>
-          <a:p/>
-        </p:txBody>
-      </p:sp>
-      <p:sp>
-        <p:nvSpPr>
-          <p:cNvPr id="13" name="RRect L12 Badge After"/>
-          <p:cNvSpPr/>
-          <p:nvPr/>
-        </p:nvSpPr>
-        <p:spPr>
-          <a:xfrm>
-            <a:off x="6611040" y="2423160"/>
-            <a:ext cx="1371600" cy="274320"/>
-          </a:xfrm>
-          <a:prstGeom prst="roundRect">
-            <a:avLst>
-              <a:gd name="adj" fmla="val 16667"/>
-            </a:avLst>
-          </a:prstGeom>
-          <a:solidFill>
-            <a:srgbClr val="0043DA"/>
-          </a:solidFill>
-          <a:ln>
-            <a:solidFill>
-              <a:srgbClr val="0043DA"/>
-            </a:solidFill>
-          </a:ln>
-        </p:spPr>
-        <p:txBody>
-          <a:bodyPr anchor="ctr"/>
-          <a:lstStyle/>
-          <a:p/>
-        </p:txBody>
-      </p:sp>
-      <p:sp>
-        <p:nvSpPr>
-          <p:cNvPr id="14" name="TextBox L12 Badge Before Text"/>
-          <p:cNvSpPr txBox="1"/>
-          <p:nvPr/>
-        </p:nvSpPr>
-        <p:spPr>
-          <a:xfrm>
-            <a:off x="637160" y="2423160"/>
-            <a:ext cx="1371600" cy="274320"/>
-          </a:xfrm>
-          <a:prstGeom prst="rect">
-            <a:avLst/>
-          </a:prstGeom>
-          <a:noFill/>
-          <a:ln>
-            <a:noFill/>
-          </a:ln>
-        </p:spPr>
-        <p:txBody>
-          <a:bodyPr wrap="square">
-            <a:spAutoFit/>
-          </a:bodyPr>
-          <a:lstStyle/>
-          <a:p>
-            <a:pPr algn="ctr"/>
-            <a:r>
-              <a:rPr lang="ko-KR" sz="1100" b="1">
-                <a:solidFill>
-                  <a:srgbClr val="FFFFFF"/>
-                </a:solidFill>
-                <a:latin typeface="Freesentation"/>
-              </a:rPr>
-              <a:t>BEFORE</a:t>
-            </a:r>
-          </a:p>
-        </p:txBody>
-      </p:sp>
-      <p:sp>
-        <p:nvSpPr>
-          <p:cNvPr id="15" name="TextBox L12 Badge After Text"/>
-          <p:cNvSpPr txBox="1"/>
-          <p:nvPr/>
-        </p:nvSpPr>
-        <p:spPr>
-          <a:xfrm>
-            <a:off x="6611040" y="2423160"/>
-            <a:ext cx="1371600" cy="274320"/>
-          </a:xfrm>
-          <a:prstGeom prst="rect">
-            <a:avLst/>
-          </a:prstGeom>
-          <a:noFill/>
-          <a:ln>
-            <a:noFill/>
-          </a:ln>
-        </p:spPr>
-        <p:txBody>
-          <a:bodyPr wrap="square">
-            <a:spAutoFit/>
-          </a:bodyPr>
-          <a:lstStyle/>
-          <a:p>
-            <a:pPr algn="ctr"/>
-            <a:r>
-              <a:rPr lang="ko-KR" sz="1100" b="1">
-                <a:solidFill>
-                  <a:srgbClr val="FFFFFF"/>
-                </a:solidFill>
-                <a:latin typeface="Freesentation"/>
-              </a:rPr>
-              <a:t>AFTER</a:t>
-            </a:r>
-          </a:p>
-        </p:txBody>
-      </p:sp>
-      <p:sp>
-        <p:nvSpPr>
-          <p:cNvPr id="16" name="RRect L12 Panel Before"/>
-          <p:cNvSpPr/>
-          <p:nvPr/>
-        </p:nvSpPr>
-        <p:spPr>
-          <a:xfrm>
-            <a:off x="457200" y="2789820"/>
-            <a:ext cx="5303520" cy="3885660"/>
-          </a:xfrm>
-          <a:prstGeom prst="roundRect">
-            <a:avLst>
-              <a:gd name="adj" fmla="val 16667"/>
-            </a:avLst>
-          </a:prstGeom>
-          <a:solidFill>
-            <a:srgbClr val="F8F9FA"/>
-          </a:solidFill>
-          <a:ln>
-            <a:solidFill>
-              <a:srgbClr val="F8F9FA"/>
-            </a:solidFill>
-          </a:ln>
-        </p:spPr>
-        <p:txBody>
-          <a:bodyPr anchor="ctr"/>
-          <a:lstStyle/>
-          <a:p/>
-        </p:txBody>
-      </p:sp>
-      <p:sp>
-        <p:nvSpPr>
-          <p:cNvPr id="17" name="RRect L12 Panel After"/>
-          <p:cNvSpPr/>
-          <p:nvPr/>
-        </p:nvSpPr>
-        <p:spPr>
-          <a:xfrm>
-            <a:off x="6431280" y="2789820"/>
-            <a:ext cx="5303520" cy="3885660"/>
-          </a:xfrm>
-          <a:prstGeom prst="roundRect">
-            <a:avLst>
-              <a:gd name="adj" fmla="val 16667"/>
-            </a:avLst>
-          </a:prstGeom>
-          <a:solidFill>
-            <a:srgbClr val="E6F0FF"/>
-          </a:solidFill>
-          <a:ln>
-            <a:solidFill>
-              <a:srgbClr val="E6F0FF"/>
-            </a:solidFill>
-          </a:ln>
-        </p:spPr>
-        <p:txBody>
-          <a:bodyPr anchor="ctr"/>
-          <a:lstStyle/>
-          <a:p/>
-        </p:txBody>
-      </p:sp>
-      <p:sp>
-        <p:nvSpPr>
-          <p:cNvPr id="18" name="Arrow L12 Transition"/>
-          <p:cNvSpPr/>
-          <p:nvPr/>
-        </p:nvSpPr>
-        <p:spPr>
-          <a:xfrm>
-            <a:off x="5944440" y="4594980"/>
-            <a:ext cx="411480" cy="274320"/>
-          </a:xfrm>
-          <a:prstGeom prst="rightArrow">
-            <a:avLst/>
-          </a:prstGeom>
-          <a:solidFill>
-            <a:srgbClr val="0043DA"/>
-          </a:solidFill>
-          <a:ln>
-            <a:solidFill>
-              <a:srgbClr val="0043DA"/>
-            </a:solidFill>
-          </a:ln>
-        </p:spPr>
-        <p:txBody>
-          <a:bodyPr/>
-          <a:lstStyle/>
-          <a:p/>
-        </p:txBody>
-      </p:sp>
-      <p:sp>
-        <p:nvSpPr>
-          <p:cNvPr id="19" name="TextBox L12 KPI Before Value"/>
-          <p:cNvSpPr txBox="1"/>
-          <p:nvPr/>
-        </p:nvSpPr>
-        <p:spPr>
-          <a:xfrm>
-            <a:off x="637160" y="2897580"/>
-            <a:ext cx="4941840" cy="457200"/>
-          </a:xfrm>
-          <a:prstGeom prst="rect">
-            <a:avLst/>
-          </a:prstGeom>
-          <a:noFill/>
-          <a:ln>
-            <a:noFill/>
-          </a:ln>
-        </p:spPr>
-        <p:txBody>
-          <a:bodyPr wrap="square">
-            <a:spAutoFit/>
-          </a:bodyPr>
-          <a:lstStyle/>
-          <a:p>
-            <a:pPr algn="ctr"/>
-            <a:r>
-              <a:rPr lang="ko-KR" sz="2400" b="1">
-                <a:solidFill>
-                  <a:srgbClr val="212121"/>
-                </a:solidFill>
-                <a:latin typeface="프리젠테이션 7 Bold"/>
-              </a:rPr>
-              <a:t>3.2초</a:t>
-            </a:r>
-          </a:p>
-        </p:txBody>
-      </p:sp>
-      <p:sp>
-        <p:nvSpPr>
-          <p:cNvPr id="20" name="TextBox L12 KPI After Value"/>
-          <p:cNvSpPr txBox="1"/>
-          <p:nvPr/>
-        </p:nvSpPr>
-        <p:spPr>
-          <a:xfrm>
-            <a:off x="6611040" y="2897580"/>
-            <a:ext cx="4941840" cy="457200"/>
-          </a:xfrm>
-          <a:prstGeom prst="rect">
-            <a:avLst/>
-          </a:prstGeom>
-          <a:noFill/>
-          <a:ln>
-            <a:noFill/>
-          </a:ln>
-        </p:spPr>
-        <p:txBody>
-          <a:bodyPr wrap="square">
-            <a:spAutoFit/>
-          </a:bodyPr>
-          <a:lstStyle/>
-          <a:p>
-            <a:pPr algn="ctr"/>
-            <a:r>
-              <a:rPr lang="ko-KR" sz="2400" b="1">
-                <a:solidFill>
-                  <a:srgbClr val="0043DA"/>
-                </a:solidFill>
-                <a:latin typeface="프리젠테이션 7 Bold"/>
-              </a:rPr>
-              <a:t>0.8초</a:t>
-            </a:r>
-          </a:p>
-        </p:txBody>
-      </p:sp>
-      <p:sp>
-        <p:nvSpPr>
-          <p:cNvPr id="21" name="TextBox L12 KPI Before Label"/>
-          <p:cNvSpPr txBox="1"/>
-          <p:nvPr/>
-        </p:nvSpPr>
-        <p:spPr>
-          <a:xfrm>
-            <a:off x="637160" y="3354780"/>
-            <a:ext cx="4941840" cy="228600"/>
-          </a:xfrm>
-          <a:prstGeom prst="rect">
-            <a:avLst/>
-          </a:prstGeom>
-          <a:noFill/>
-          <a:ln>
-            <a:noFill/>
-          </a:ln>
-        </p:spPr>
-        <p:txBody>
-          <a:bodyPr wrap="square">
-            <a:spAutoFit/>
-          </a:bodyPr>
-          <a:lstStyle/>
-          <a:p>
-            <a:pPr algn="ctr"/>
-            <a:r>
-              <a:rPr lang="ko-KR" sz="1100" b="0">
-                <a:solidFill>
-                  <a:srgbClr val="505050"/>
-                </a:solidFill>
-                <a:latin typeface="Freesentation"/>
-              </a:rPr>
-              <a:t>평균 응답 시간</a:t>
-            </a:r>
-          </a:p>
-        </p:txBody>
-      </p:sp>
-      <p:sp>
-        <p:nvSpPr>
-          <p:cNvPr id="22" name="TextBox L12 KPI After Label"/>
-          <p:cNvSpPr txBox="1"/>
-          <p:nvPr/>
-        </p:nvSpPr>
-        <p:spPr>
-          <a:xfrm>
-            <a:off x="6611040" y="3354780"/>
-            <a:ext cx="4941840" cy="228600"/>
-          </a:xfrm>
-          <a:prstGeom prst="rect">
-            <a:avLst/>
-          </a:prstGeom>
-          <a:noFill/>
-          <a:ln>
-            <a:noFill/>
-          </a:ln>
-        </p:spPr>
-        <p:txBody>
-          <a:bodyPr wrap="square">
-            <a:spAutoFit/>
-          </a:bodyPr>
-          <a:lstStyle/>
-          <a:p>
-            <a:pPr algn="ctr"/>
-            <a:r>
-              <a:rPr lang="ko-KR" sz="1100" b="0">
-                <a:solidFill>
-                  <a:srgbClr val="505050"/>
-                </a:solidFill>
-                <a:latin typeface="Freesentation"/>
-              </a:rPr>
-              <a:t>평균 응답 시간</a:t>
-            </a:r>
-          </a:p>
-        </p:txBody>
-      </p:sp>
-      <p:sp>
-        <p:nvSpPr>
-          <p:cNvPr id="23" name="Line L12 Divider Before"/>
-          <p:cNvSpPr txBox="0"/>
-          <p:nvPr/>
-        </p:nvSpPr>
-        <p:spPr>
-          <a:xfrm>
-            <a:off x="637160" y="3674820"/>
-            <a:ext cx="4941840" cy="0"/>
-          </a:xfrm>
-          <a:prstGeom prst="line">
-            <a:avLst/>
-          </a:prstGeom>
-          <a:noFill/>
-          <a:ln w="12700">
-            <a:solidFill>
-              <a:srgbClr val="DCDCDC"/>
-            </a:solidFill>
-          </a:ln>
-        </p:spPr>
-        <p:txBody>
-          <a:bodyPr/>
-          <a:lstStyle/>
-          <a:p/>
-        </p:txBody>
-      </p:sp>
-      <p:sp>
-        <p:nvSpPr>
-          <p:cNvPr id="24" name="Line L12 Divider After"/>
-          <p:cNvSpPr txBox="0"/>
-          <p:nvPr/>
-        </p:nvSpPr>
-        <p:spPr>
-          <a:xfrm>
-            <a:off x="6611040" y="3674820"/>
-            <a:ext cx="4941840" cy="0"/>
-          </a:xfrm>
-          <a:prstGeom prst="line">
-            <a:avLst/>
-          </a:prstGeom>
-          <a:noFill/>
-          <a:ln w="12700">
-            <a:solidFill>
-              <a:srgbClr val="DCDCDC"/>
-            </a:solidFill>
-          </a:ln>
-        </p:spPr>
-        <p:txBody>
-          <a:bodyPr/>
-          <a:lstStyle/>
-          <a:p/>
-        </p:txBody>
-      </p:sp>
-      <p:sp>
-        <p:nvSpPr>
-          <p:cNvPr id="25" name="TextBox L12 Content Before"/>
-          <p:cNvSpPr txBox="1"/>
-          <p:nvPr/>
-        </p:nvSpPr>
-        <p:spPr>
-          <a:xfrm>
-            <a:off x="637160" y="3766260"/>
-            <a:ext cx="4484640" cy="1947040"/>
-          </a:xfrm>
-          <a:prstGeom prst="rect">
-            <a:avLst/>
-          </a:prstGeom>
-          <a:noFill/>
-          <a:ln>
-            <a:noFill/>
-          </a:ln>
-        </p:spPr>
-        <p:txBody>
-          <a:bodyPr wrap="square">
-            <a:spAutoFit/>
-          </a:bodyPr>
-          <a:lstStyle/>
-          <a:p>
-            <a:pPr algn="l"/>
-            <a:r>
-              <a:rPr lang="ko-KR" sz="1300" b="0">
-                <a:solidFill>
-                  <a:srgbClr val="212121"/>
-                </a:solidFill>
-                <a:latin typeface="Freesentation"/>
-              </a:rPr>
-              <a:t>• 단일 서버 동기 처리</a:t>
-            </a:r>
-          </a:p>
-          <a:p>
-            <a:pPr algn="l"/>
-            <a:r>
-              <a:rPr lang="ko-KR" sz="1300" b="0">
-                <a:solidFill>
-                  <a:srgbClr val="212121"/>
-                </a:solidFill>
-                <a:latin typeface="Freesentation"/>
-              </a:rPr>
-              <a:t>• REST API 직접 호출</a:t>
-            </a:r>
-          </a:p>
-          <a:p>
-            <a:pPr algn="l"/>
-            <a:r>
-              <a:rPr lang="ko-KR" sz="1300" b="0">
-                <a:solidFill>
-                  <a:srgbClr val="212121"/>
-                </a:solidFill>
-                <a:latin typeface="Freesentation"/>
-              </a:rPr>
-              <a:t>• 무중단 배포 미지원</a:t>
-            </a:r>
-          </a:p>
-        </p:txBody>
-      </p:sp>
-      <p:sp>
-        <p:nvSpPr>
-          <p:cNvPr id="26" name="TextBox L12 Content After"/>
-          <p:cNvSpPr txBox="1"/>
-          <p:nvPr/>
-        </p:nvSpPr>
-        <p:spPr>
-          <a:xfrm>
-            <a:off x="6611040" y="3766260"/>
-            <a:ext cx="4484640" cy="1947040"/>
-          </a:xfrm>
-          <a:prstGeom prst="rect">
-            <a:avLst/>
-          </a:prstGeom>
-          <a:noFill/>
-          <a:ln>
-            <a:noFill/>
-          </a:ln>
-        </p:spPr>
-        <p:txBody>
-          <a:bodyPr wrap="square">
-            <a:spAutoFit/>
-          </a:bodyPr>
-          <a:lstStyle/>
-          <a:p>
-            <a:pPr algn="l"/>
-            <a:r>
-              <a:rPr lang="ko-KR" sz="1300" b="0">
-                <a:solidFill>
-                  <a:srgbClr val="212121"/>
-                </a:solidFill>
-                <a:latin typeface="Freesentation"/>
-              </a:rPr>
-              <a:t>• Redis 캐시 + CDN 적용</a:t>
-            </a:r>
-          </a:p>
-          <a:p>
-            <a:pPr algn="l"/>
-            <a:r>
-              <a:rPr lang="ko-KR" sz="1300" b="0">
-                <a:solidFill>
-                  <a:srgbClr val="212121"/>
-                </a:solidFill>
-                <a:latin typeface="Freesentation"/>
-              </a:rPr>
-              <a:t>• MSK 비동기 이벤트 기반</a:t>
-            </a:r>
-          </a:p>
-          <a:p>
-            <a:pPr algn="l"/>
-            <a:r>
-              <a:rPr lang="ko-KR" sz="1300" b="0">
-                <a:solidFill>
-                  <a:srgbClr val="212121"/>
-                </a:solidFill>
-                <a:latin typeface="Freesentation"/>
-              </a:rPr>
-              <a:t>• Blue/Green 무중단 배포</a:t>
-            </a:r>
-          </a:p>
-        </p:txBody>
-      </p:sp>
-      <p:sp>
-        <p:nvSpPr>
-          <p:cNvPr id="27" name="RRect L12 Change Badge"/>
-          <p:cNvSpPr/>
-          <p:nvPr/>
-        </p:nvSpPr>
-        <p:spPr>
-          <a:xfrm>
-            <a:off x="5318760" y="5029200"/>
-            <a:ext cx="1554480" cy="274320"/>
-          </a:xfrm>
-          <a:prstGeom prst="roundRect">
-            <a:avLst>
-              <a:gd name="adj" fmla="val 16667"/>
-            </a:avLst>
-          </a:prstGeom>
-          <a:solidFill>
-            <a:srgbClr val="0043DA"/>
-          </a:solidFill>
-          <a:ln>
-            <a:solidFill>
-              <a:srgbClr val="0043DA"/>
-            </a:solidFill>
-          </a:ln>
-        </p:spPr>
-        <p:txBody>
-          <a:bodyPr anchor="ctr"/>
-          <a:lstStyle/>
-          <a:p/>
-        </p:txBody>
-      </p:sp>
-      <p:sp>
-        <p:nvSpPr>
-          <p:cNvPr id="28" name="TextBox L12 Change Badge Text"/>
-          <p:cNvSpPr txBox="1"/>
-          <p:nvPr/>
-        </p:nvSpPr>
-        <p:spPr>
-          <a:xfrm>
-            <a:off x="5318760" y="5029200"/>
-            <a:ext cx="1554480" cy="274320"/>
-          </a:xfrm>
-          <a:prstGeom prst="rect">
-            <a:avLst/>
-          </a:prstGeom>
-          <a:noFill/>
-          <a:ln>
-            <a:noFill/>
-          </a:ln>
-        </p:spPr>
-        <p:txBody>
-          <a:bodyPr wrap="square">
-            <a:spAutoFit/>
-          </a:bodyPr>
-          <a:lstStyle/>
-          <a:p>
-            <a:pPr algn="ctr"/>
-            <a:r>
-              <a:rPr lang="ko-KR" sz="1100" b="1">
-                <a:solidFill>
-                  <a:srgbClr val="FFFFFF"/>
-                </a:solidFill>
-                <a:latin typeface="프리젠테이션 7 Bold"/>
-              </a:rPr>
-              <a:t>▼ 75% 개선</a:t>
-            </a:r>
-          </a:p>
-        </p:txBody>
-      </p:sp>
-      <p:pic>
-        <p:nvPicPr>
-          <p:cNvPr id="29" name="Icon L12 Before"/>
-          <p:cNvPicPr>
-            <a:picLocks noChangeAspect="1"/>
-          </p:cNvPicPr>
-          <p:nvPr/>
-        </p:nvPicPr>
-        <p:blipFill>
-          <a:blip r:embed="rId22"/>
-          <a:stretch>
-            <a:fillRect/>
-          </a:stretch>
-        </p:blipFill>
-        <p:spPr>
-          <a:xfrm>
-            <a:off x="5047200" y="6087600"/>
-            <a:ext cx="411480" cy="411480"/>
-          </a:xfrm>
-          <a:prstGeom prst="rect">
-            <a:avLst/>
-          </a:prstGeom>
-          <a:ln>
-            <a:noFill/>
-          </a:ln>
-        </p:spPr>
-      </p:pic>
-      <p:pic>
-        <p:nvPicPr>
-          <p:cNvPr id="30" name="Icon L12 After"/>
-          <p:cNvPicPr>
-            <a:picLocks noChangeAspect="1"/>
-          </p:cNvPicPr>
-          <p:nvPr/>
-        </p:nvPicPr>
-        <p:blipFill>
-          <a:blip r:embed="rId23"/>
-          <a:stretch>
-            <a:fillRect/>
-          </a:stretch>
-        </p:blipFill>
-        <p:spPr>
-          <a:xfrm>
-            <a:off x="11021280" y="6087600"/>
-            <a:ext cx="411480" cy="411480"/>
-          </a:xfrm>
-          <a:prstGeom prst="rect">
-            <a:avLst/>
-          </a:prstGeom>
-          <a:ln>
-            <a:noFill/>
-          </a:ln>
-        </p:spPr>
-      </p:pic>
-      <p:sp>
-        <p:nvSpPr>
-          <p:cNvPr id="31" name="TextBox 30"/>
-          <p:cNvSpPr txBox="1"/>
-          <p:nvPr/>
-        </p:nvSpPr>
-        <p:spPr>
-          <a:xfrm>
-            <a:off x="354787" y="557784"/>
-            <a:ext cx="2720340" cy="932688"/>
-          </a:xfrm>
-          <a:prstGeom prst="rect">
-            <a:avLst/>
-          </a:prstGeom>
-          <a:noFill/>
-        </p:spPr>
-        <p:txBody>
-          <a:bodyPr wrap="none" lIns="0" rIns="0" tIns="0" bIns="0">
-            <a:spAutoFit/>
-          </a:bodyPr>
-          <a:lstStyle/>
-          <a:p>
-            <a:r>
-              <a:rPr sz="2000" b="1">
-                <a:latin typeface="Freesentation"/>
-              </a:rPr>
-              <a:t>L12. Before/After</a:t>
-            </a:r>
-          </a:p>
-        </p:txBody>
-      </p:sp>
-      <p:sp>
-        <p:nvSpPr>
-          <p:cNvPr id="32" name="TextBox 31"/>
-          <p:cNvSpPr txBox="1"/>
-          <p:nvPr/>
-        </p:nvSpPr>
-        <p:spPr>
-          <a:xfrm>
-            <a:off x="3762756" y="558698"/>
-            <a:ext cx="7550200" cy="938174"/>
-          </a:xfrm>
-          <a:prstGeom prst="rect">
-            <a:avLst/>
-          </a:prstGeom>
-          <a:noFill/>
-        </p:spPr>
-        <p:txBody>
-          <a:bodyPr wrap="none" lIns="0" rIns="0" tIns="0" bIns="0">
-            <a:spAutoFit/>
-          </a:bodyPr>
-          <a:lstStyle/>
-          <a:p>
-            <a:r>
-              <a:rPr sz="1300">
-                <a:latin typeface="Freesentation"/>
-              </a:rPr>
-              <a:t>KPI 수치 중심 시간 비교 — 변화량 강조</a:t>
-            </a:r>
-          </a:p>
-        </p:txBody>
-      </p:sp>
-    </p:spTree>
-  </p:cSld>
-  <p:clrMapOvr>
-    <a:masterClrMapping/>
-  </p:clrMapOvr>
-</p:sld>
-</file>
-
-<file path=ppt/slides/slide15.xml><?xml version="1.0" encoding="utf-8"?>
 <p:sld xmlns:a="http://schemas.openxmlformats.org/drawingml/2006/main" xmlns:r="http://schemas.openxmlformats.org/officeDocument/2006/relationships" xmlns:p="http://schemas.openxmlformats.org/presentationml/2006/main">
   <p:cSld>
     <p:spTree>
@@ -8029,16 +7298,33 @@
       </p:grpSpPr>
       <p:sp>
         <p:nvSpPr>
-          <p:cNvPr id="2" name="Google Shape;679;p32"/>
-          <p:cNvSpPr txBox="1">
-            <a:spLocks/>
+          <p:cNvPr id="2" name="Text Placeholder 1"/>
+          <p:cNvSpPr>
+            <a:spLocks noGrp="1"/>
           </p:cNvSpPr>
-          <p:nvPr/>
-        </p:nvSpPr>
-        <p:spPr>
-          <a:xfrm>
-            <a:off x="0" y="2699114"/>
-            <a:ext cx="12192000" cy="1019175"/>
+          <p:nvPr>
+            <p:ph type="body" sz="quarter" idx="10"/>
+          </p:nvPr>
+        </p:nvSpPr>
+        <p:spPr/>
+        <p:txBody>
+          <a:bodyPr/>
+          <a:lstStyle/>
+          <a:p>
+            <a:endParaRPr/>
+          </a:p>
+        </p:txBody>
+      </p:sp>
+      <p:sp>
+        <p:nvSpPr>
+          <p:cNvPr id="10" name="TextBox L12 Title"/>
+          <p:cNvSpPr txBox="1"/>
+          <p:nvPr/>
+        </p:nvSpPr>
+        <p:spPr>
+          <a:xfrm>
+            <a:off x="457200" y="1600200"/>
+            <a:ext cx="11277600" cy="320040"/>
           </a:xfrm>
           <a:prstGeom prst="rect">
             <a:avLst/>
@@ -8049,237 +7335,770 @@
           </a:ln>
         </p:spPr>
         <p:txBody>
-          <a:bodyPr spcFirstLastPara="1" wrap="square" lIns="91425" tIns="45700" rIns="91425" bIns="45700" anchor="ctr" anchorCtr="0">
-            <a:normAutofit/>
+          <a:bodyPr wrap="square">
+            <a:spAutoFit/>
           </a:bodyPr>
-          <a:lstStyle>
-            <a:lvl1pPr marL="228600" indent="-228600" algn="l" defTabSz="914400" rtl="0" eaLnBrk="1" latinLnBrk="1" hangingPunct="1">
-              <a:lnSpc>
-                <a:spcPct val="90000"/>
-              </a:lnSpc>
-              <a:spcBef>
-                <a:spcPts val="1000"/>
-              </a:spcBef>
-              <a:buFont typeface="Arial" panose="020B0604020202020204" pitchFamily="34" charset="0"/>
-              <a:buChar char="•"/>
-              <a:defRPr sz="2800" kern="1200">
-                <a:solidFill>
-                  <a:schemeClr val="tx1"/>
-                </a:solidFill>
-                <a:latin typeface="+mn-lt"/>
-                <a:ea typeface="+mn-ea"/>
-                <a:cs typeface="+mn-cs"/>
-              </a:defRPr>
-            </a:lvl1pPr>
-            <a:lvl2pPr marL="685800" indent="-228600" algn="l" defTabSz="914400" rtl="0" eaLnBrk="1" latinLnBrk="1" hangingPunct="1">
-              <a:lnSpc>
-                <a:spcPct val="90000"/>
-              </a:lnSpc>
-              <a:spcBef>
-                <a:spcPts val="500"/>
-              </a:spcBef>
-              <a:buFont typeface="Arial" panose="020B0604020202020204" pitchFamily="34" charset="0"/>
-              <a:buChar char="•"/>
-              <a:defRPr sz="2400" kern="1200">
-                <a:solidFill>
-                  <a:schemeClr val="tx1"/>
-                </a:solidFill>
-                <a:latin typeface="+mn-lt"/>
-                <a:ea typeface="+mn-ea"/>
-                <a:cs typeface="+mn-cs"/>
-              </a:defRPr>
-            </a:lvl2pPr>
-            <a:lvl3pPr marL="1143000" indent="-228600" algn="l" defTabSz="914400" rtl="0" eaLnBrk="1" latinLnBrk="1" hangingPunct="1">
-              <a:lnSpc>
-                <a:spcPct val="90000"/>
-              </a:lnSpc>
-              <a:spcBef>
-                <a:spcPts val="500"/>
-              </a:spcBef>
-              <a:buFont typeface="Arial" panose="020B0604020202020204" pitchFamily="34" charset="0"/>
-              <a:buChar char="•"/>
-              <a:defRPr sz="2000" kern="1200">
-                <a:solidFill>
-                  <a:schemeClr val="tx1"/>
-                </a:solidFill>
-                <a:latin typeface="+mn-lt"/>
-                <a:ea typeface="+mn-ea"/>
-                <a:cs typeface="+mn-cs"/>
-              </a:defRPr>
-            </a:lvl3pPr>
-            <a:lvl4pPr marL="1600200" indent="-228600" algn="l" defTabSz="914400" rtl="0" eaLnBrk="1" latinLnBrk="1" hangingPunct="1">
-              <a:lnSpc>
-                <a:spcPct val="90000"/>
-              </a:lnSpc>
-              <a:spcBef>
-                <a:spcPts val="500"/>
-              </a:spcBef>
-              <a:buFont typeface="Arial" panose="020B0604020202020204" pitchFamily="34" charset="0"/>
-              <a:buChar char="•"/>
-              <a:defRPr sz="1800" kern="1200">
-                <a:solidFill>
-                  <a:schemeClr val="tx1"/>
-                </a:solidFill>
-                <a:latin typeface="+mn-lt"/>
-                <a:ea typeface="+mn-ea"/>
-                <a:cs typeface="+mn-cs"/>
-              </a:defRPr>
-            </a:lvl4pPr>
-            <a:lvl5pPr marL="2057400" indent="-228600" algn="l" defTabSz="914400" rtl="0" eaLnBrk="1" latinLnBrk="1" hangingPunct="1">
-              <a:lnSpc>
-                <a:spcPct val="90000"/>
-              </a:lnSpc>
-              <a:spcBef>
-                <a:spcPts val="500"/>
-              </a:spcBef>
-              <a:buFont typeface="Arial" panose="020B0604020202020204" pitchFamily="34" charset="0"/>
-              <a:buChar char="•"/>
-              <a:defRPr sz="1800" kern="1200">
-                <a:solidFill>
-                  <a:schemeClr val="tx1"/>
-                </a:solidFill>
-                <a:latin typeface="+mn-lt"/>
-                <a:ea typeface="+mn-ea"/>
-                <a:cs typeface="+mn-cs"/>
-              </a:defRPr>
-            </a:lvl5pPr>
-            <a:lvl6pPr marL="2514600" indent="-228600" algn="l" defTabSz="914400" rtl="0" eaLnBrk="1" latinLnBrk="1" hangingPunct="1">
-              <a:lnSpc>
-                <a:spcPct val="90000"/>
-              </a:lnSpc>
-              <a:spcBef>
-                <a:spcPts val="500"/>
-              </a:spcBef>
-              <a:buFont typeface="Arial" panose="020B0604020202020204" pitchFamily="34" charset="0"/>
-              <a:buChar char="•"/>
-              <a:defRPr sz="1800" kern="1200">
-                <a:solidFill>
-                  <a:schemeClr val="tx1"/>
-                </a:solidFill>
-                <a:latin typeface="+mn-lt"/>
-                <a:ea typeface="+mn-ea"/>
-                <a:cs typeface="+mn-cs"/>
-              </a:defRPr>
-            </a:lvl6pPr>
-            <a:lvl7pPr marL="2971800" indent="-228600" algn="l" defTabSz="914400" rtl="0" eaLnBrk="1" latinLnBrk="1" hangingPunct="1">
-              <a:lnSpc>
-                <a:spcPct val="90000"/>
-              </a:lnSpc>
-              <a:spcBef>
-                <a:spcPts val="500"/>
-              </a:spcBef>
-              <a:buFont typeface="Arial" panose="020B0604020202020204" pitchFamily="34" charset="0"/>
-              <a:buChar char="•"/>
-              <a:defRPr sz="1800" kern="1200">
-                <a:solidFill>
-                  <a:schemeClr val="tx1"/>
-                </a:solidFill>
-                <a:latin typeface="+mn-lt"/>
-                <a:ea typeface="+mn-ea"/>
-                <a:cs typeface="+mn-cs"/>
-              </a:defRPr>
-            </a:lvl7pPr>
-            <a:lvl8pPr marL="3429000" indent="-228600" algn="l" defTabSz="914400" rtl="0" eaLnBrk="1" latinLnBrk="1" hangingPunct="1">
-              <a:lnSpc>
-                <a:spcPct val="90000"/>
-              </a:lnSpc>
-              <a:spcBef>
-                <a:spcPts val="500"/>
-              </a:spcBef>
-              <a:buFont typeface="Arial" panose="020B0604020202020204" pitchFamily="34" charset="0"/>
-              <a:buChar char="•"/>
-              <a:defRPr sz="1800" kern="1200">
-                <a:solidFill>
-                  <a:schemeClr val="tx1"/>
-                </a:solidFill>
-                <a:latin typeface="+mn-lt"/>
-                <a:ea typeface="+mn-ea"/>
-                <a:cs typeface="+mn-cs"/>
-              </a:defRPr>
-            </a:lvl8pPr>
-            <a:lvl9pPr marL="3886200" indent="-228600" algn="l" defTabSz="914400" rtl="0" eaLnBrk="1" latinLnBrk="1" hangingPunct="1">
-              <a:lnSpc>
-                <a:spcPct val="90000"/>
-              </a:lnSpc>
-              <a:spcBef>
-                <a:spcPts val="500"/>
-              </a:spcBef>
-              <a:buFont typeface="Arial" panose="020B0604020202020204" pitchFamily="34" charset="0"/>
-              <a:buChar char="•"/>
-              <a:defRPr sz="1800" kern="1200">
-                <a:solidFill>
-                  <a:schemeClr val="tx1"/>
-                </a:solidFill>
-                <a:latin typeface="+mn-lt"/>
-                <a:ea typeface="+mn-ea"/>
-                <a:cs typeface="+mn-cs"/>
-              </a:defRPr>
-            </a:lvl9pPr>
-          </a:lstStyle>
-          <a:p>
-            <a:pPr marL="0" indent="0" algn="ctr">
-              <a:spcBef>
-                <a:spcPts val="0"/>
-              </a:spcBef>
-              <a:buClr>
-                <a:schemeClr val="lt1"/>
-              </a:buClr>
-              <a:buSzPts val="4000"/>
-              <a:buNone/>
-            </a:pPr>
-            <a:r>
-              <a:rPr lang="en-US" altLang="ko-KR" sz="6000" dirty="0">
-                <a:solidFill>
-                  <a:schemeClr val="bg1"/>
-                </a:solidFill>
-                <a:latin typeface="프리젠테이션 7 Bold" pitchFamily="2" charset="-127"/>
-                <a:ea typeface="프리젠테이션 7 Bold" pitchFamily="2" charset="-127"/>
-              </a:rPr>
-              <a:t>Thank You</a:t>
+          <a:lstStyle/>
+          <a:p>
+            <a:pPr algn="l"/>
+            <a:r>
+              <a:rPr lang="ko-KR" sz="1600" b="1">
+                <a:solidFill>
+                  <a:srgbClr val="0043DA"/>
+                </a:solidFill>
+                <a:latin typeface="Freesentation"/>
+              </a:rPr>
+              <a:t>API 응답 시간 개선 — MSK 이벤트 기반 아키텍처 전환 효과</a:t>
+            </a:r>
+          </a:p>
+        </p:txBody>
+      </p:sp>
+      <p:sp>
+        <p:nvSpPr>
+          <p:cNvPr id="11" name="TextBox L12 Desc"/>
+          <p:cNvSpPr txBox="1"/>
+          <p:nvPr/>
+        </p:nvSpPr>
+        <p:spPr>
+          <a:xfrm>
+            <a:off x="457200" y="1965960"/>
+            <a:ext cx="11277600" cy="274320"/>
+          </a:xfrm>
+          <a:prstGeom prst="rect">
+            <a:avLst/>
+          </a:prstGeom>
+          <a:noFill/>
+          <a:ln>
+            <a:noFill/>
+          </a:ln>
+        </p:spPr>
+        <p:txBody>
+          <a:bodyPr wrap="square">
+            <a:spAutoFit/>
+          </a:bodyPr>
+          <a:lstStyle/>
+          <a:p>
+            <a:pPr algn="l"/>
+            <a:r>
+              <a:rPr lang="ko-KR" sz="1300" b="0">
+                <a:solidFill>
+                  <a:srgbClr val="212121"/>
+                </a:solidFill>
+                <a:latin typeface="Freesentation"/>
+              </a:rPr>
+              <a:t>2026년 1분기 실측 기준. 동일 트래픽(10K RPS) 조건 A/B 테스트 결과</a:t>
+            </a:r>
+          </a:p>
+        </p:txBody>
+      </p:sp>
+      <p:sp>
+        <p:nvSpPr>
+          <p:cNvPr id="12" name="RRect L12 Badge Before"/>
+          <p:cNvSpPr/>
+          <p:nvPr/>
+        </p:nvSpPr>
+        <p:spPr>
+          <a:xfrm>
+            <a:off x="637160" y="2423160"/>
+            <a:ext cx="1371600" cy="274320"/>
+          </a:xfrm>
+          <a:prstGeom prst="roundRect">
+            <a:avLst>
+              <a:gd name="adj" fmla="val 16667"/>
+            </a:avLst>
+          </a:prstGeom>
+          <a:solidFill>
+            <a:srgbClr val="212121"/>
+          </a:solidFill>
+          <a:ln>
+            <a:solidFill>
+              <a:srgbClr val="212121"/>
+            </a:solidFill>
+          </a:ln>
+        </p:spPr>
+        <p:txBody>
+          <a:bodyPr anchor="ctr"/>
+          <a:lstStyle/>
+          <a:p>
+            <a:endParaRPr/>
+          </a:p>
+        </p:txBody>
+      </p:sp>
+      <p:sp>
+        <p:nvSpPr>
+          <p:cNvPr id="13" name="RRect L12 Badge After"/>
+          <p:cNvSpPr/>
+          <p:nvPr/>
+        </p:nvSpPr>
+        <p:spPr>
+          <a:xfrm>
+            <a:off x="6611040" y="2423160"/>
+            <a:ext cx="1371600" cy="274320"/>
+          </a:xfrm>
+          <a:prstGeom prst="roundRect">
+            <a:avLst>
+              <a:gd name="adj" fmla="val 16667"/>
+            </a:avLst>
+          </a:prstGeom>
+          <a:solidFill>
+            <a:srgbClr val="0043DA"/>
+          </a:solidFill>
+          <a:ln>
+            <a:solidFill>
+              <a:srgbClr val="0043DA"/>
+            </a:solidFill>
+          </a:ln>
+        </p:spPr>
+        <p:txBody>
+          <a:bodyPr anchor="ctr"/>
+          <a:lstStyle/>
+          <a:p>
+            <a:endParaRPr/>
+          </a:p>
+        </p:txBody>
+      </p:sp>
+      <p:sp>
+        <p:nvSpPr>
+          <p:cNvPr id="14" name="TextBox L12 Badge Before Text"/>
+          <p:cNvSpPr txBox="1"/>
+          <p:nvPr/>
+        </p:nvSpPr>
+        <p:spPr>
+          <a:xfrm>
+            <a:off x="637160" y="2423160"/>
+            <a:ext cx="1371600" cy="274320"/>
+          </a:xfrm>
+          <a:prstGeom prst="rect">
+            <a:avLst/>
+          </a:prstGeom>
+          <a:noFill/>
+          <a:ln>
+            <a:noFill/>
+          </a:ln>
+        </p:spPr>
+        <p:txBody>
+          <a:bodyPr wrap="square">
+            <a:spAutoFit/>
+          </a:bodyPr>
+          <a:lstStyle/>
+          <a:p>
+            <a:pPr algn="ctr"/>
+            <a:r>
+              <a:rPr lang="ko-KR" sz="1100" b="1">
+                <a:solidFill>
+                  <a:srgbClr val="FFFFFF"/>
+                </a:solidFill>
+                <a:latin typeface="Freesentation"/>
+              </a:rPr>
+              <a:t>BEFORE</a:t>
+            </a:r>
+          </a:p>
+        </p:txBody>
+      </p:sp>
+      <p:sp>
+        <p:nvSpPr>
+          <p:cNvPr id="15" name="TextBox L12 Badge After Text"/>
+          <p:cNvSpPr txBox="1"/>
+          <p:nvPr/>
+        </p:nvSpPr>
+        <p:spPr>
+          <a:xfrm>
+            <a:off x="6611040" y="2423160"/>
+            <a:ext cx="1371600" cy="274320"/>
+          </a:xfrm>
+          <a:prstGeom prst="rect">
+            <a:avLst/>
+          </a:prstGeom>
+          <a:noFill/>
+          <a:ln>
+            <a:noFill/>
+          </a:ln>
+        </p:spPr>
+        <p:txBody>
+          <a:bodyPr wrap="square">
+            <a:spAutoFit/>
+          </a:bodyPr>
+          <a:lstStyle/>
+          <a:p>
+            <a:pPr algn="ctr"/>
+            <a:r>
+              <a:rPr lang="ko-KR" sz="1100" b="1">
+                <a:solidFill>
+                  <a:srgbClr val="FFFFFF"/>
+                </a:solidFill>
+                <a:latin typeface="Freesentation"/>
+              </a:rPr>
+              <a:t>AFTER</a:t>
+            </a:r>
+          </a:p>
+        </p:txBody>
+      </p:sp>
+      <p:sp>
+        <p:nvSpPr>
+          <p:cNvPr id="16" name="RRect L12 Panel Before"/>
+          <p:cNvSpPr/>
+          <p:nvPr/>
+        </p:nvSpPr>
+        <p:spPr>
+          <a:xfrm>
+            <a:off x="457200" y="2789820"/>
+            <a:ext cx="5303520" cy="3885660"/>
+          </a:xfrm>
+          <a:prstGeom prst="roundRect">
+            <a:avLst>
+              <a:gd name="adj" fmla="val 16667"/>
+            </a:avLst>
+          </a:prstGeom>
+          <a:solidFill>
+            <a:srgbClr val="F8F9FA"/>
+          </a:solidFill>
+          <a:ln>
+            <a:solidFill>
+              <a:srgbClr val="F8F9FA"/>
+            </a:solidFill>
+          </a:ln>
+        </p:spPr>
+        <p:txBody>
+          <a:bodyPr anchor="ctr"/>
+          <a:lstStyle/>
+          <a:p>
+            <a:endParaRPr/>
+          </a:p>
+        </p:txBody>
+      </p:sp>
+      <p:sp>
+        <p:nvSpPr>
+          <p:cNvPr id="17" name="RRect L12 Panel After"/>
+          <p:cNvSpPr/>
+          <p:nvPr/>
+        </p:nvSpPr>
+        <p:spPr>
+          <a:xfrm>
+            <a:off x="6431280" y="2789820"/>
+            <a:ext cx="5303520" cy="3885660"/>
+          </a:xfrm>
+          <a:prstGeom prst="roundRect">
+            <a:avLst>
+              <a:gd name="adj" fmla="val 16667"/>
+            </a:avLst>
+          </a:prstGeom>
+          <a:solidFill>
+            <a:srgbClr val="E6F0FF"/>
+          </a:solidFill>
+          <a:ln>
+            <a:solidFill>
+              <a:srgbClr val="E6F0FF"/>
+            </a:solidFill>
+          </a:ln>
+        </p:spPr>
+        <p:txBody>
+          <a:bodyPr anchor="ctr"/>
+          <a:lstStyle/>
+          <a:p>
+            <a:endParaRPr/>
+          </a:p>
+        </p:txBody>
+      </p:sp>
+      <p:sp>
+        <p:nvSpPr>
+          <p:cNvPr id="18" name="Arrow L12 Transition"/>
+          <p:cNvSpPr/>
+          <p:nvPr/>
+        </p:nvSpPr>
+        <p:spPr>
+          <a:xfrm>
+            <a:off x="5944440" y="4594980"/>
+            <a:ext cx="411480" cy="274320"/>
+          </a:xfrm>
+          <a:prstGeom prst="rightArrow">
+            <a:avLst/>
+          </a:prstGeom>
+          <a:solidFill>
+            <a:srgbClr val="0043DA"/>
+          </a:solidFill>
+          <a:ln>
+            <a:solidFill>
+              <a:srgbClr val="0043DA"/>
+            </a:solidFill>
+          </a:ln>
+        </p:spPr>
+        <p:txBody>
+          <a:bodyPr/>
+          <a:lstStyle/>
+          <a:p>
+            <a:endParaRPr/>
+          </a:p>
+        </p:txBody>
+      </p:sp>
+      <p:sp>
+        <p:nvSpPr>
+          <p:cNvPr id="19" name="TextBox L12 KPI Before Value"/>
+          <p:cNvSpPr txBox="1"/>
+          <p:nvPr/>
+        </p:nvSpPr>
+        <p:spPr>
+          <a:xfrm>
+            <a:off x="637160" y="2897580"/>
+            <a:ext cx="4941840" cy="457200"/>
+          </a:xfrm>
+          <a:prstGeom prst="rect">
+            <a:avLst/>
+          </a:prstGeom>
+          <a:noFill/>
+          <a:ln>
+            <a:noFill/>
+          </a:ln>
+        </p:spPr>
+        <p:txBody>
+          <a:bodyPr wrap="square">
+            <a:spAutoFit/>
+          </a:bodyPr>
+          <a:lstStyle/>
+          <a:p>
+            <a:pPr algn="ctr"/>
+            <a:r>
+              <a:rPr lang="ko-KR" sz="2400" b="1">
+                <a:solidFill>
+                  <a:srgbClr val="212121"/>
+                </a:solidFill>
+                <a:latin typeface="프리젠테이션 7 Bold"/>
+              </a:rPr>
+              <a:t>3.2초</a:t>
+            </a:r>
+          </a:p>
+        </p:txBody>
+      </p:sp>
+      <p:sp>
+        <p:nvSpPr>
+          <p:cNvPr id="20" name="TextBox L12 KPI After Value"/>
+          <p:cNvSpPr txBox="1"/>
+          <p:nvPr/>
+        </p:nvSpPr>
+        <p:spPr>
+          <a:xfrm>
+            <a:off x="6611040" y="2897580"/>
+            <a:ext cx="4941840" cy="457200"/>
+          </a:xfrm>
+          <a:prstGeom prst="rect">
+            <a:avLst/>
+          </a:prstGeom>
+          <a:noFill/>
+          <a:ln>
+            <a:noFill/>
+          </a:ln>
+        </p:spPr>
+        <p:txBody>
+          <a:bodyPr wrap="square">
+            <a:spAutoFit/>
+          </a:bodyPr>
+          <a:lstStyle/>
+          <a:p>
+            <a:pPr algn="ctr"/>
+            <a:r>
+              <a:rPr lang="ko-KR" sz="2400" b="1">
+                <a:solidFill>
+                  <a:srgbClr val="0043DA"/>
+                </a:solidFill>
+                <a:latin typeface="프리젠테이션 7 Bold"/>
+              </a:rPr>
+              <a:t>0.8초</a:t>
+            </a:r>
+          </a:p>
+        </p:txBody>
+      </p:sp>
+      <p:sp>
+        <p:nvSpPr>
+          <p:cNvPr id="21" name="TextBox L12 KPI Before Label"/>
+          <p:cNvSpPr txBox="1"/>
+          <p:nvPr/>
+        </p:nvSpPr>
+        <p:spPr>
+          <a:xfrm>
+            <a:off x="637160" y="3354780"/>
+            <a:ext cx="4941840" cy="228600"/>
+          </a:xfrm>
+          <a:prstGeom prst="rect">
+            <a:avLst/>
+          </a:prstGeom>
+          <a:noFill/>
+          <a:ln>
+            <a:noFill/>
+          </a:ln>
+        </p:spPr>
+        <p:txBody>
+          <a:bodyPr wrap="square">
+            <a:spAutoFit/>
+          </a:bodyPr>
+          <a:lstStyle/>
+          <a:p>
+            <a:pPr algn="ctr"/>
+            <a:r>
+              <a:rPr lang="ko-KR" sz="1100" b="0">
+                <a:solidFill>
+                  <a:srgbClr val="505050"/>
+                </a:solidFill>
+                <a:latin typeface="Freesentation"/>
+              </a:rPr>
+              <a:t>평균 응답 시간</a:t>
+            </a:r>
+          </a:p>
+        </p:txBody>
+      </p:sp>
+      <p:sp>
+        <p:nvSpPr>
+          <p:cNvPr id="22" name="TextBox L12 KPI After Label"/>
+          <p:cNvSpPr txBox="1"/>
+          <p:nvPr/>
+        </p:nvSpPr>
+        <p:spPr>
+          <a:xfrm>
+            <a:off x="6611040" y="3354780"/>
+            <a:ext cx="4941840" cy="228600"/>
+          </a:xfrm>
+          <a:prstGeom prst="rect">
+            <a:avLst/>
+          </a:prstGeom>
+          <a:noFill/>
+          <a:ln>
+            <a:noFill/>
+          </a:ln>
+        </p:spPr>
+        <p:txBody>
+          <a:bodyPr wrap="square">
+            <a:spAutoFit/>
+          </a:bodyPr>
+          <a:lstStyle/>
+          <a:p>
+            <a:pPr algn="ctr"/>
+            <a:r>
+              <a:rPr lang="ko-KR" sz="1100" b="0">
+                <a:solidFill>
+                  <a:srgbClr val="505050"/>
+                </a:solidFill>
+                <a:latin typeface="Freesentation"/>
+              </a:rPr>
+              <a:t>평균 응답 시간</a:t>
+            </a:r>
+          </a:p>
+        </p:txBody>
+      </p:sp>
+      <p:sp>
+        <p:nvSpPr>
+          <p:cNvPr id="23" name="Line L12 Divider Before"/>
+          <p:cNvSpPr/>
+          <p:nvPr/>
+        </p:nvSpPr>
+        <p:spPr>
+          <a:xfrm>
+            <a:off x="637160" y="3674820"/>
+            <a:ext cx="4941840" cy="0"/>
+          </a:xfrm>
+          <a:prstGeom prst="line">
+            <a:avLst/>
+          </a:prstGeom>
+          <a:noFill/>
+          <a:ln w="12700">
+            <a:solidFill>
+              <a:srgbClr val="DCDCDC"/>
+            </a:solidFill>
+          </a:ln>
+        </p:spPr>
+        <p:txBody>
+          <a:bodyPr/>
+          <a:lstStyle/>
+          <a:p>
+            <a:endParaRPr/>
+          </a:p>
+        </p:txBody>
+      </p:sp>
+      <p:sp>
+        <p:nvSpPr>
+          <p:cNvPr id="24" name="Line L12 Divider After"/>
+          <p:cNvSpPr/>
+          <p:nvPr/>
+        </p:nvSpPr>
+        <p:spPr>
+          <a:xfrm>
+            <a:off x="6611040" y="3674820"/>
+            <a:ext cx="4941840" cy="0"/>
+          </a:xfrm>
+          <a:prstGeom prst="line">
+            <a:avLst/>
+          </a:prstGeom>
+          <a:noFill/>
+          <a:ln w="12700">
+            <a:solidFill>
+              <a:srgbClr val="DCDCDC"/>
+            </a:solidFill>
+          </a:ln>
+        </p:spPr>
+        <p:txBody>
+          <a:bodyPr/>
+          <a:lstStyle/>
+          <a:p>
+            <a:endParaRPr/>
+          </a:p>
+        </p:txBody>
+      </p:sp>
+      <p:sp>
+        <p:nvSpPr>
+          <p:cNvPr id="25" name="TextBox L12 Content Before"/>
+          <p:cNvSpPr txBox="1"/>
+          <p:nvPr/>
+        </p:nvSpPr>
+        <p:spPr>
+          <a:xfrm>
+            <a:off x="637160" y="3766260"/>
+            <a:ext cx="4484640" cy="1947040"/>
+          </a:xfrm>
+          <a:prstGeom prst="rect">
+            <a:avLst/>
+          </a:prstGeom>
+          <a:noFill/>
+          <a:ln>
+            <a:noFill/>
+          </a:ln>
+        </p:spPr>
+        <p:txBody>
+          <a:bodyPr wrap="square">
+            <a:spAutoFit/>
+          </a:bodyPr>
+          <a:lstStyle/>
+          <a:p>
+            <a:pPr algn="l"/>
+            <a:r>
+              <a:rPr lang="ko-KR" sz="1300" b="0">
+                <a:solidFill>
+                  <a:srgbClr val="212121"/>
+                </a:solidFill>
+                <a:latin typeface="Freesentation"/>
+              </a:rPr>
+              <a:t>• 단일 서버 동기 처리</a:t>
+            </a:r>
+          </a:p>
+          <a:p>
+            <a:pPr algn="l"/>
+            <a:r>
+              <a:rPr lang="ko-KR" sz="1300" b="0">
+                <a:solidFill>
+                  <a:srgbClr val="212121"/>
+                </a:solidFill>
+                <a:latin typeface="Freesentation"/>
+              </a:rPr>
+              <a:t>• REST API 직접 호출</a:t>
+            </a:r>
+          </a:p>
+          <a:p>
+            <a:pPr algn="l"/>
+            <a:r>
+              <a:rPr lang="ko-KR" sz="1300" b="0">
+                <a:solidFill>
+                  <a:srgbClr val="212121"/>
+                </a:solidFill>
+                <a:latin typeface="Freesentation"/>
+              </a:rPr>
+              <a:t>• 무중단 배포 미지원</a:t>
+            </a:r>
+          </a:p>
+        </p:txBody>
+      </p:sp>
+      <p:sp>
+        <p:nvSpPr>
+          <p:cNvPr id="26" name="TextBox L12 Content After"/>
+          <p:cNvSpPr txBox="1"/>
+          <p:nvPr/>
+        </p:nvSpPr>
+        <p:spPr>
+          <a:xfrm>
+            <a:off x="6611040" y="3766260"/>
+            <a:ext cx="4484640" cy="1947040"/>
+          </a:xfrm>
+          <a:prstGeom prst="rect">
+            <a:avLst/>
+          </a:prstGeom>
+          <a:noFill/>
+          <a:ln>
+            <a:noFill/>
+          </a:ln>
+        </p:spPr>
+        <p:txBody>
+          <a:bodyPr wrap="square">
+            <a:spAutoFit/>
+          </a:bodyPr>
+          <a:lstStyle/>
+          <a:p>
+            <a:pPr algn="l"/>
+            <a:r>
+              <a:rPr lang="ko-KR" sz="1300" b="0">
+                <a:solidFill>
+                  <a:srgbClr val="212121"/>
+                </a:solidFill>
+                <a:latin typeface="Freesentation"/>
+              </a:rPr>
+              <a:t>• Redis 캐시 + CDN 적용</a:t>
+            </a:r>
+          </a:p>
+          <a:p>
+            <a:pPr algn="l"/>
+            <a:r>
+              <a:rPr lang="ko-KR" sz="1300" b="0">
+                <a:solidFill>
+                  <a:srgbClr val="212121"/>
+                </a:solidFill>
+                <a:latin typeface="Freesentation"/>
+              </a:rPr>
+              <a:t>• MSK 비동기 이벤트 기반</a:t>
+            </a:r>
+          </a:p>
+          <a:p>
+            <a:pPr algn="l"/>
+            <a:r>
+              <a:rPr lang="ko-KR" sz="1300" b="0">
+                <a:solidFill>
+                  <a:srgbClr val="212121"/>
+                </a:solidFill>
+                <a:latin typeface="Freesentation"/>
+              </a:rPr>
+              <a:t>• Blue/Green 무중단 배포</a:t>
+            </a:r>
+          </a:p>
+        </p:txBody>
+      </p:sp>
+      <p:sp>
+        <p:nvSpPr>
+          <p:cNvPr id="27" name="RRect L12 Change Badge"/>
+          <p:cNvSpPr/>
+          <p:nvPr/>
+        </p:nvSpPr>
+        <p:spPr>
+          <a:xfrm>
+            <a:off x="5318760" y="5029200"/>
+            <a:ext cx="1554480" cy="274320"/>
+          </a:xfrm>
+          <a:prstGeom prst="roundRect">
+            <a:avLst>
+              <a:gd name="adj" fmla="val 16667"/>
+            </a:avLst>
+          </a:prstGeom>
+          <a:solidFill>
+            <a:srgbClr val="0043DA"/>
+          </a:solidFill>
+          <a:ln>
+            <a:solidFill>
+              <a:srgbClr val="0043DA"/>
+            </a:solidFill>
+          </a:ln>
+        </p:spPr>
+        <p:txBody>
+          <a:bodyPr anchor="ctr"/>
+          <a:lstStyle/>
+          <a:p>
+            <a:endParaRPr/>
+          </a:p>
+        </p:txBody>
+      </p:sp>
+      <p:sp>
+        <p:nvSpPr>
+          <p:cNvPr id="28" name="TextBox L12 Change Badge Text"/>
+          <p:cNvSpPr txBox="1"/>
+          <p:nvPr/>
+        </p:nvSpPr>
+        <p:spPr>
+          <a:xfrm>
+            <a:off x="5318760" y="5029200"/>
+            <a:ext cx="1554480" cy="274320"/>
+          </a:xfrm>
+          <a:prstGeom prst="rect">
+            <a:avLst/>
+          </a:prstGeom>
+          <a:noFill/>
+          <a:ln>
+            <a:noFill/>
+          </a:ln>
+        </p:spPr>
+        <p:txBody>
+          <a:bodyPr wrap="square">
+            <a:spAutoFit/>
+          </a:bodyPr>
+          <a:lstStyle/>
+          <a:p>
+            <a:pPr algn="ctr"/>
+            <a:r>
+              <a:rPr lang="ko-KR" sz="1100" b="1">
+                <a:solidFill>
+                  <a:srgbClr val="FFFFFF"/>
+                </a:solidFill>
+                <a:latin typeface="프리젠테이션 7 Bold"/>
+              </a:rPr>
+              <a:t>▼ 75% 개선</a:t>
             </a:r>
           </a:p>
         </p:txBody>
       </p:sp>
       <p:pic>
         <p:nvPicPr>
-          <p:cNvPr id="28" name="그림 27"/>
+          <p:cNvPr id="29" name="Icon L12 Before"/>
           <p:cNvPicPr>
             <a:picLocks noChangeAspect="1"/>
           </p:cNvPicPr>
           <p:nvPr/>
         </p:nvPicPr>
         <p:blipFill>
-          <a:blip r:embed="rId2" cstate="print">
-            <a:extLst>
-              <a:ext uri="{28A0092B-C50C-407E-A947-70E740481C1C}">
-                <a14:useLocalDpi xmlns:a14="http://schemas.microsoft.com/office/drawing/2010/main" val="0"/>
-              </a:ext>
-            </a:extLst>
-          </a:blip>
+          <a:blip r:embed="rId2"/>
           <a:stretch>
             <a:fillRect/>
           </a:stretch>
         </p:blipFill>
         <p:spPr>
           <a:xfrm>
-            <a:off x="5402036" y="378400"/>
-            <a:ext cx="1329872" cy="330546"/>
-          </a:xfrm>
-          <a:prstGeom prst="rect">
-            <a:avLst/>
-          </a:prstGeom>
+            <a:off x="5047200" y="6087600"/>
+            <a:ext cx="411480" cy="411480"/>
+          </a:xfrm>
+          <a:prstGeom prst="rect">
+            <a:avLst/>
+          </a:prstGeom>
+          <a:ln>
+            <a:noFill/>
+          </a:ln>
         </p:spPr>
       </p:pic>
-      <p:sp>
-        <p:nvSpPr>
-          <p:cNvPr id="35" name="TextBox 34"/>
+      <p:pic>
+        <p:nvPicPr>
+          <p:cNvPr id="30" name="Icon L12 After"/>
+          <p:cNvPicPr>
+            <a:picLocks noChangeAspect="1"/>
+          </p:cNvPicPr>
+          <p:nvPr/>
+        </p:nvPicPr>
+        <p:blipFill>
+          <a:blip r:embed="rId3"/>
+          <a:stretch>
+            <a:fillRect/>
+          </a:stretch>
+        </p:blipFill>
+        <p:spPr>
+          <a:xfrm>
+            <a:off x="11021280" y="6087600"/>
+            <a:ext cx="411480" cy="411480"/>
+          </a:xfrm>
+          <a:prstGeom prst="rect">
+            <a:avLst/>
+          </a:prstGeom>
+          <a:ln>
+            <a:noFill/>
+          </a:ln>
+        </p:spPr>
+      </p:pic>
+      <p:sp>
+        <p:nvSpPr>
+          <p:cNvPr id="31" name="TextBox 30"/>
           <p:cNvSpPr txBox="1"/>
           <p:nvPr/>
         </p:nvSpPr>
         <p:spPr>
           <a:xfrm>
-            <a:off x="3398157" y="3870726"/>
-            <a:ext cx="5395685" cy="543635"/>
+            <a:off x="354787" y="557784"/>
+            <a:ext cx="2720340" cy="932688"/>
           </a:xfrm>
           <a:prstGeom prst="rect">
             <a:avLst/>
@@ -8287,165 +8106,3259 @@
           <a:noFill/>
         </p:spPr>
         <p:txBody>
-          <a:bodyPr wrap="square" lIns="0" tIns="0" rIns="0" bIns="0" rtlCol="0" anchor="ctr" anchorCtr="0">
-            <a:noAutofit/>
+          <a:bodyPr wrap="none" lIns="0" tIns="0" rIns="0" bIns="0">
+            <a:spAutoFit/>
           </a:bodyPr>
           <a:lstStyle/>
           <a:p>
-            <a:pPr latinLnBrk="0"/>
-            <a:r>
-              <a:rPr lang="en-US" altLang="ko-KR" sz="1600" dirty="0">
-                <a:ln>
-                  <a:solidFill>
-                    <a:schemeClr val="accent1">
-                      <a:alpha val="0"/>
-                    </a:schemeClr>
-                  </a:solidFill>
-                </a:ln>
-                <a:solidFill>
-                  <a:schemeClr val="bg1"/>
-                </a:solidFill>
-                <a:latin typeface="프리젠테이션 4 Regular" pitchFamily="2" charset="-127"/>
-                <a:ea typeface="프리젠테이션 4 Regular" pitchFamily="2" charset="-127"/>
-                <a:cs typeface="Pretendard" panose="02000503000000020004" pitchFamily="2" charset="-127"/>
-              </a:rPr>
-              <a:t>GS</a:t>
-            </a:r>
-            <a:r>
-              <a:rPr lang="ko-KR" altLang="en-US" sz="1600" dirty="0" err="1">
-                <a:ln>
-                  <a:solidFill>
-                    <a:schemeClr val="accent1">
-                      <a:alpha val="0"/>
-                    </a:schemeClr>
-                  </a:solidFill>
-                </a:ln>
-                <a:solidFill>
-                  <a:schemeClr val="bg1"/>
-                </a:solidFill>
-                <a:latin typeface="프리젠테이션 4 Regular" pitchFamily="2" charset="-127"/>
-                <a:ea typeface="프리젠테이션 4 Regular" pitchFamily="2" charset="-127"/>
-                <a:cs typeface="Pretendard" panose="02000503000000020004" pitchFamily="2" charset="-127"/>
-              </a:rPr>
-              <a:t>네오텍의</a:t>
-            </a:r>
-            <a:r>
-              <a:rPr lang="ko-KR" altLang="en-US" sz="1600" dirty="0">
-                <a:ln>
-                  <a:solidFill>
-                    <a:schemeClr val="accent1">
-                      <a:alpha val="0"/>
-                    </a:schemeClr>
-                  </a:solidFill>
-                </a:ln>
-                <a:solidFill>
-                  <a:schemeClr val="bg1"/>
-                </a:solidFill>
-                <a:latin typeface="프리젠테이션 4 Regular" pitchFamily="2" charset="-127"/>
-                <a:ea typeface="프리젠테이션 4 Regular" pitchFamily="2" charset="-127"/>
-                <a:cs typeface="Pretendard" panose="02000503000000020004" pitchFamily="2" charset="-127"/>
-              </a:rPr>
-              <a:t> </a:t>
-            </a:r>
-            <a:r>
-              <a:rPr lang="en-US" altLang="ko-KR" sz="1600" dirty="0">
-                <a:ln>
-                  <a:solidFill>
-                    <a:schemeClr val="accent1">
-                      <a:alpha val="0"/>
-                    </a:schemeClr>
-                  </a:solidFill>
-                </a:ln>
-                <a:solidFill>
-                  <a:schemeClr val="bg1"/>
-                </a:solidFill>
-                <a:latin typeface="프리젠테이션 4 Regular" pitchFamily="2" charset="-127"/>
-                <a:ea typeface="프리젠테이션 4 Regular" pitchFamily="2" charset="-127"/>
-                <a:cs typeface="Pretendard" panose="02000503000000020004" pitchFamily="2" charset="-127"/>
-              </a:rPr>
-              <a:t>IT</a:t>
-            </a:r>
-            <a:r>
-              <a:rPr lang="ko-KR" altLang="en-US" sz="1600" dirty="0">
-                <a:ln>
-                  <a:solidFill>
-                    <a:schemeClr val="accent1">
-                      <a:alpha val="0"/>
-                    </a:schemeClr>
-                  </a:solidFill>
-                </a:ln>
-                <a:solidFill>
-                  <a:schemeClr val="bg1"/>
-                </a:solidFill>
-                <a:latin typeface="프리젠테이션 4 Regular" pitchFamily="2" charset="-127"/>
-                <a:ea typeface="프리젠테이션 4 Regular" pitchFamily="2" charset="-127"/>
-                <a:cs typeface="Pretendard" panose="02000503000000020004" pitchFamily="2" charset="-127"/>
-              </a:rPr>
-              <a:t>서비스 브랜드 </a:t>
-            </a:r>
-            <a:r>
-              <a:rPr lang="en-US" altLang="ko-KR" sz="1600" dirty="0" err="1">
-                <a:ln>
-                  <a:solidFill>
-                    <a:schemeClr val="accent1">
-                      <a:alpha val="0"/>
-                    </a:schemeClr>
-                  </a:solidFill>
-                </a:ln>
-                <a:solidFill>
-                  <a:schemeClr val="bg1"/>
-                </a:solidFill>
-                <a:latin typeface="프리젠테이션 4 Regular" pitchFamily="2" charset="-127"/>
-                <a:ea typeface="프리젠테이션 4 Regular" pitchFamily="2" charset="-127"/>
-                <a:cs typeface="Pretendard" panose="02000503000000020004" pitchFamily="2" charset="-127"/>
-              </a:rPr>
-              <a:t>WiseN</a:t>
-            </a:r>
-            <a:r>
-              <a:rPr lang="ko-KR" altLang="en-US" sz="1600" dirty="0">
-                <a:ln>
-                  <a:solidFill>
-                    <a:schemeClr val="accent1">
-                      <a:alpha val="0"/>
-                    </a:schemeClr>
-                  </a:solidFill>
-                </a:ln>
-                <a:solidFill>
-                  <a:schemeClr val="bg1"/>
-                </a:solidFill>
-                <a:latin typeface="프리젠테이션 4 Regular" pitchFamily="2" charset="-127"/>
-                <a:ea typeface="프리젠테이션 4 Regular" pitchFamily="2" charset="-127"/>
-                <a:cs typeface="Pretendard" panose="02000503000000020004" pitchFamily="2" charset="-127"/>
-              </a:rPr>
-              <a:t>으로 진정한 프리미엄을 경험하세요</a:t>
-            </a:r>
-            <a:r>
-              <a:rPr lang="en-US" altLang="ko-KR" sz="1600" dirty="0">
-                <a:ln>
-                  <a:solidFill>
-                    <a:schemeClr val="accent1">
-                      <a:alpha val="0"/>
-                    </a:schemeClr>
-                  </a:solidFill>
-                </a:ln>
-                <a:solidFill>
-                  <a:schemeClr val="bg1"/>
-                </a:solidFill>
-                <a:latin typeface="프리젠테이션 4 Regular" pitchFamily="2" charset="-127"/>
-                <a:ea typeface="프리젠테이션 4 Regular" pitchFamily="2" charset="-127"/>
-                <a:cs typeface="Pretendard" panose="02000503000000020004" pitchFamily="2" charset="-127"/>
-              </a:rPr>
-              <a:t>.</a:t>
+            <a:r>
+              <a:rPr sz="2000" b="1">
+                <a:latin typeface="Freesentation"/>
+              </a:rPr>
+              <a:t>L12. Before/After</a:t>
+            </a:r>
+          </a:p>
+        </p:txBody>
+      </p:sp>
+      <p:sp>
+        <p:nvSpPr>
+          <p:cNvPr id="32" name="TextBox 31"/>
+          <p:cNvSpPr txBox="1"/>
+          <p:nvPr/>
+        </p:nvSpPr>
+        <p:spPr>
+          <a:xfrm>
+            <a:off x="3762756" y="558698"/>
+            <a:ext cx="7550200" cy="938174"/>
+          </a:xfrm>
+          <a:prstGeom prst="rect">
+            <a:avLst/>
+          </a:prstGeom>
+          <a:noFill/>
+        </p:spPr>
+        <p:txBody>
+          <a:bodyPr wrap="none" lIns="0" tIns="0" rIns="0" bIns="0">
+            <a:spAutoFit/>
+          </a:bodyPr>
+          <a:lstStyle/>
+          <a:p>
+            <a:r>
+              <a:rPr sz="1300">
+                <a:latin typeface="Freesentation"/>
+              </a:rPr>
+              <a:t>KPI 수치 중심 시간 비교 — 변화량 강조</a:t>
             </a:r>
           </a:p>
         </p:txBody>
       </p:sp>
     </p:spTree>
-    <p:extLst>
-      <p:ext uri="{BB962C8B-B14F-4D97-AF65-F5344CB8AC3E}">
-        <p14:creationId xmlns:p14="http://schemas.microsoft.com/office/powerpoint/2010/main" val="3722360403"/>
-      </p:ext>
-    </p:extLst>
+  </p:cSld>
+  <p:clrMapOvr>
+    <a:masterClrMapping/>
+  </p:clrMapOvr>
+</p:sld>
+</file>
+
+<file path=ppt/slides/slide15.xml><?xml version="1.0" encoding="utf-8"?>
+<p:sld xmlns:a="http://schemas.openxmlformats.org/drawingml/2006/main" xmlns:p="http://schemas.openxmlformats.org/presentationml/2006/main" xmlns:r="http://schemas.openxmlformats.org/officeDocument/2006/relationships">
+  <p:cSld>
+    <p:spTree>
+      <p:nvGrpSpPr>
+        <p:cNvPr id="1" name=""/>
+        <p:cNvGrpSpPr/>
+        <p:nvPr/>
+      </p:nvGrpSpPr>
+      <p:grpSpPr/>
+      <p:sp>
+        <p:nvSpPr>
+          <p:cNvPr id="2" name="Text Placeholder 1"/>
+          <p:cNvSpPr>
+            <a:spLocks noGrp="1"/>
+          </p:cNvSpPr>
+          <p:nvPr>
+            <p:ph type="body" idx="10" sz="quarter"/>
+          </p:nvPr>
+        </p:nvSpPr>
+        <p:spPr/>
+        <p:txBody>
+          <a:bodyPr/>
+          <a:lstStyle/>
+          <a:p/>
+        </p:txBody>
+      </p:sp>
+      <p:sp>
+        <p:nvSpPr>
+          <p:cNvPr id="3" name="TextBox 2"/>
+          <p:cNvSpPr txBox="1"/>
+          <p:nvPr/>
+        </p:nvSpPr>
+        <p:spPr>
+          <a:xfrm>
+            <a:off x="354288" y="557760"/>
+            <a:ext cx="2719800" cy="500000"/>
+          </a:xfrm>
+          <a:prstGeom prst="rect">
+            <a:avLst/>
+          </a:prstGeom>
+          <a:noFill/>
+        </p:spPr>
+        <p:txBody>
+          <a:bodyPr wrap="square" lIns="0" rIns="0" tIns="0" bIns="0">
+            <a:spAutoFit/>
+          </a:bodyPr>
+          <a:lstStyle/>
+          <a:p>
+            <a:r>
+              <a:rPr sz="2000" b="1">
+                <a:solidFill>
+                  <a:srgbClr val="000000"/>
+                </a:solidFill>
+                <a:latin typeface="Freesentation"/>
+              </a:rPr>
+              <a:t>L13. Pros &amp; Cons</a:t>
+            </a:r>
+          </a:p>
+        </p:txBody>
+      </p:sp>
+      <p:sp>
+        <p:nvSpPr>
+          <p:cNvPr id="4" name="TextBox 3"/>
+          <p:cNvSpPr txBox="1"/>
+          <p:nvPr/>
+        </p:nvSpPr>
+        <p:spPr>
+          <a:xfrm>
+            <a:off x="3761040" y="558624"/>
+            <a:ext cx="7549368" cy="500000"/>
+          </a:xfrm>
+          <a:prstGeom prst="rect">
+            <a:avLst/>
+          </a:prstGeom>
+          <a:noFill/>
+        </p:spPr>
+        <p:txBody>
+          <a:bodyPr wrap="square" lIns="0" rIns="0" tIns="0" bIns="0">
+            <a:spAutoFit/>
+          </a:bodyPr>
+          <a:lstStyle/>
+          <a:p>
+            <a:r>
+              <a:rPr sz="1200" b="0">
+                <a:solidFill>
+                  <a:srgbClr val="212121"/>
+                </a:solidFill>
+                <a:latin typeface="Freesentation"/>
+              </a:rPr>
+              <a:t>AWS MSK 도입 검토 — 장단점 분석 및 종합 판단</a:t>
+            </a:r>
+          </a:p>
+        </p:txBody>
+      </p:sp>
+      <p:sp>
+        <p:nvSpPr>
+          <p:cNvPr id="5" name="TextBox 4"/>
+          <p:cNvSpPr txBox="1"/>
+          <p:nvPr/>
+        </p:nvSpPr>
+        <p:spPr>
+          <a:xfrm>
+            <a:off x="457200" y="1600200"/>
+            <a:ext cx="11277600" cy="274320"/>
+          </a:xfrm>
+          <a:prstGeom prst="rect">
+            <a:avLst/>
+          </a:prstGeom>
+          <a:noFill/>
+        </p:spPr>
+        <p:txBody>
+          <a:bodyPr wrap="square">
+            <a:spAutoFit/>
+          </a:bodyPr>
+          <a:lstStyle/>
+          <a:p>
+            <a:r>
+              <a:rPr sz="1600" b="1">
+                <a:solidFill>
+                  <a:srgbClr val="0043DA"/>
+                </a:solidFill>
+                <a:latin typeface="Freesentation"/>
+              </a:rPr>
+              <a:t>AWS MSK 도입 검토 — 장단점 분석</a:t>
+            </a:r>
+          </a:p>
+        </p:txBody>
+      </p:sp>
+      <p:sp>
+        <p:nvSpPr>
+          <p:cNvPr id="6" name="TextBox 5"/>
+          <p:cNvSpPr txBox="1"/>
+          <p:nvPr/>
+        </p:nvSpPr>
+        <p:spPr>
+          <a:xfrm>
+            <a:off x="457200" y="1965960"/>
+            <a:ext cx="11277600" cy="228600"/>
+          </a:xfrm>
+          <a:prstGeom prst="rect">
+            <a:avLst/>
+          </a:prstGeom>
+          <a:noFill/>
+        </p:spPr>
+        <p:txBody>
+          <a:bodyPr wrap="square">
+            <a:spAutoFit/>
+          </a:bodyPr>
+          <a:lstStyle/>
+          <a:p>
+            <a:r>
+              <a:rPr sz="1300" b="0">
+                <a:solidFill>
+                  <a:srgbClr val="212121"/>
+                </a:solidFill>
+                <a:latin typeface="Freesentation"/>
+              </a:rPr>
+              <a:t>클라우드 메시징 솔루션 전환 시 고려사항 (2026-Q1 기준)</a:t>
+            </a:r>
+          </a:p>
+        </p:txBody>
+      </p:sp>
+      <p:sp>
+        <p:nvSpPr>
+          <p:cNvPr id="7" name="Rounded Rectangle 6"/>
+          <p:cNvSpPr/>
+          <p:nvPr/>
+        </p:nvSpPr>
+        <p:spPr>
+          <a:xfrm>
+            <a:off x="457200" y="2423160"/>
+            <a:ext cx="5486400" cy="3657600"/>
+          </a:xfrm>
+          <a:prstGeom prst="roundRect">
+            <a:avLst>
+              <a:gd name="adj" fmla="val 4000"/>
+            </a:avLst>
+          </a:prstGeom>
+          <a:solidFill>
+            <a:srgbClr val="B2D9CD"/>
+          </a:solidFill>
+          <a:ln w="6350">
+            <a:solidFill>
+              <a:srgbClr val="4CB88F"/>
+            </a:solidFill>
+          </a:ln>
+        </p:spPr>
+        <p:style>
+          <a:lnRef idx="1">
+            <a:schemeClr val="accent1"/>
+          </a:lnRef>
+          <a:fillRef idx="3">
+            <a:schemeClr val="accent1"/>
+          </a:fillRef>
+          <a:effectRef idx="2">
+            <a:schemeClr val="accent1"/>
+          </a:effectRef>
+          <a:fontRef idx="minor">
+            <a:schemeClr val="lt1"/>
+          </a:fontRef>
+        </p:style>
+        <p:txBody>
+          <a:bodyPr rtlCol="0" anchor="ctr"/>
+          <a:lstStyle/>
+          <a:p>
+            <a:pPr algn="ctr"/>
+          </a:p>
+        </p:txBody>
+      </p:sp>
+      <p:sp>
+        <p:nvSpPr>
+          <p:cNvPr id="8" name="TextBox 7"/>
+          <p:cNvSpPr txBox="1"/>
+          <p:nvPr/>
+        </p:nvSpPr>
+        <p:spPr>
+          <a:xfrm>
+            <a:off x="1209960" y="2603120"/>
+            <a:ext cx="4551840" cy="274320"/>
+          </a:xfrm>
+          <a:prstGeom prst="rect">
+            <a:avLst/>
+          </a:prstGeom>
+          <a:noFill/>
+        </p:spPr>
+        <p:txBody>
+          <a:bodyPr wrap="square" lIns="0" rIns="0" tIns="0" bIns="0">
+            <a:spAutoFit/>
+          </a:bodyPr>
+          <a:lstStyle/>
+          <a:p>
+            <a:r>
+              <a:rPr sz="1400" b="1">
+                <a:solidFill>
+                  <a:srgbClr val="212121"/>
+                </a:solidFill>
+                <a:latin typeface="Freesentation"/>
+              </a:rPr>
+              <a:t>✅  Pros (장점)</a:t>
+            </a:r>
+          </a:p>
+        </p:txBody>
+      </p:sp>
+      <p:sp>
+        <p:nvSpPr>
+          <p:cNvPr id="9" name="TextBox 8"/>
+          <p:cNvSpPr txBox="1"/>
+          <p:nvPr/>
+        </p:nvSpPr>
+        <p:spPr>
+          <a:xfrm>
+            <a:off x="637160" y="2968800"/>
+            <a:ext cx="5124480" cy="2930160"/>
+          </a:xfrm>
+          <a:prstGeom prst="rect">
+            <a:avLst/>
+          </a:prstGeom>
+          <a:noFill/>
+        </p:spPr>
+        <p:txBody>
+          <a:bodyPr wrap="square" lIns="0" rIns="0" tIns="0" bIns="0">
+            <a:spAutoFit/>
+          </a:bodyPr>
+          <a:lstStyle/>
+          <a:p>
+            <a:r>
+              <a:rPr sz="1300" b="1">
+                <a:solidFill>
+                  <a:srgbClr val="0043DA"/>
+                </a:solidFill>
+                <a:latin typeface="Freesentation"/>
+              </a:rPr>
+              <a:t/>
+            </a:r>
+            <a:r>
+              <a:rPr sz="1300" b="1">
+                <a:solidFill>
+                  <a:srgbClr val="0043DA"/>
+                </a:solidFill>
+                <a:latin typeface="Freesentation"/>
+              </a:rPr>
+              <a:t>★ 관리 부담 80% 감소</a:t>
+            </a:r>
+          </a:p>
+          <a:p>
+            <a:pPr lvl="1"/>
+            <a:r>
+              <a:rPr sz="1300" b="0">
+                <a:solidFill>
+                  <a:srgbClr val="212121"/>
+                </a:solidFill>
+                <a:latin typeface="Freesentation"/>
+              </a:rPr>
+              <a:t>Kafka 클러스터 운영 자동화 (AWS 실측)</a:t>
+            </a:r>
+          </a:p>
+          <a:p>
+            <a:pPr>
+              <a:spcBef>
+                <a:spcPts val="400"/>
+              </a:spcBef>
+            </a:pPr>
+            <a:r>
+              <a:rPr sz="1300" b="0">
+                <a:solidFill>
+                  <a:srgbClr val="212121"/>
+                </a:solidFill>
+                <a:latin typeface="Freesentation"/>
+              </a:rPr>
+              <a:t>• 고가용성 99.9% SLA</a:t>
+            </a:r>
+          </a:p>
+          <a:p>
+            <a:pPr lvl="1"/>
+            <a:r>
+              <a:rPr sz="1300" b="0">
+                <a:solidFill>
+                  <a:srgbClr val="212121"/>
+                </a:solidFill>
+                <a:latin typeface="Freesentation"/>
+              </a:rPr>
+              <a:t>Multi-AZ 자동 복제, 장애 복구 &lt; 5분</a:t>
+            </a:r>
+          </a:p>
+          <a:p>
+            <a:pPr>
+              <a:spcBef>
+                <a:spcPts val="400"/>
+              </a:spcBef>
+            </a:pPr>
+            <a:r>
+              <a:rPr sz="1300" b="0">
+                <a:solidFill>
+                  <a:srgbClr val="212121"/>
+                </a:solidFill>
+                <a:latin typeface="Freesentation"/>
+              </a:rPr>
+              <a:t>• ROI 240% (12개월)</a:t>
+            </a:r>
+          </a:p>
+          <a:p>
+            <a:pPr lvl="1"/>
+            <a:r>
+              <a:rPr sz="1300" b="0">
+                <a:solidFill>
+                  <a:srgbClr val="212121"/>
+                </a:solidFill>
+                <a:latin typeface="Freesentation"/>
+              </a:rPr>
+              <a:t>인력 비용 ₩1.8억/년 절감 vs 서비스 비용 ₩0.75억/년</a:t>
+            </a:r>
+          </a:p>
+        </p:txBody>
+      </p:sp>
+      <p:sp>
+        <p:nvSpPr>
+          <p:cNvPr id="10" name="Rounded Rectangle 9"/>
+          <p:cNvSpPr/>
+          <p:nvPr/>
+        </p:nvSpPr>
+        <p:spPr>
+          <a:xfrm>
+            <a:off x="6291360" y="2423160"/>
+            <a:ext cx="5486400" cy="3657600"/>
+          </a:xfrm>
+          <a:prstGeom prst="roundRect">
+            <a:avLst>
+              <a:gd name="adj" fmla="val 4000"/>
+            </a:avLst>
+          </a:prstGeom>
+          <a:solidFill>
+            <a:srgbClr val="F6C0A8"/>
+          </a:solidFill>
+          <a:ln w="6350">
+            <a:solidFill>
+              <a:srgbClr val="EE8150"/>
+            </a:solidFill>
+          </a:ln>
+        </p:spPr>
+        <p:style>
+          <a:lnRef idx="1">
+            <a:schemeClr val="accent1"/>
+          </a:lnRef>
+          <a:fillRef idx="3">
+            <a:schemeClr val="accent1"/>
+          </a:fillRef>
+          <a:effectRef idx="2">
+            <a:schemeClr val="accent1"/>
+          </a:effectRef>
+          <a:fontRef idx="minor">
+            <a:schemeClr val="lt1"/>
+          </a:fontRef>
+        </p:style>
+        <p:txBody>
+          <a:bodyPr rtlCol="0" anchor="ctr"/>
+          <a:lstStyle/>
+          <a:p>
+            <a:pPr algn="ctr"/>
+          </a:p>
+        </p:txBody>
+      </p:sp>
+      <p:sp>
+        <p:nvSpPr>
+          <p:cNvPr id="11" name="TextBox 10"/>
+          <p:cNvSpPr txBox="1"/>
+          <p:nvPr/>
+        </p:nvSpPr>
+        <p:spPr>
+          <a:xfrm>
+            <a:off x="7044120" y="2603120"/>
+            <a:ext cx="4551840" cy="274320"/>
+          </a:xfrm>
+          <a:prstGeom prst="rect">
+            <a:avLst/>
+          </a:prstGeom>
+          <a:noFill/>
+        </p:spPr>
+        <p:txBody>
+          <a:bodyPr wrap="square" lIns="0" rIns="0" tIns="0" bIns="0">
+            <a:spAutoFit/>
+          </a:bodyPr>
+          <a:lstStyle/>
+          <a:p>
+            <a:r>
+              <a:rPr sz="1400" b="1">
+                <a:solidFill>
+                  <a:srgbClr val="212121"/>
+                </a:solidFill>
+                <a:latin typeface="Freesentation"/>
+              </a:rPr>
+              <a:t>⚠️  Cons (단점)</a:t>
+            </a:r>
+          </a:p>
+        </p:txBody>
+      </p:sp>
+      <p:sp>
+        <p:nvSpPr>
+          <p:cNvPr id="12" name="TextBox 11"/>
+          <p:cNvSpPr txBox="1"/>
+          <p:nvPr/>
+        </p:nvSpPr>
+        <p:spPr>
+          <a:xfrm>
+            <a:off x="6471320" y="2968800"/>
+            <a:ext cx="5124480" cy="2930160"/>
+          </a:xfrm>
+          <a:prstGeom prst="rect">
+            <a:avLst/>
+          </a:prstGeom>
+          <a:noFill/>
+        </p:spPr>
+        <p:txBody>
+          <a:bodyPr wrap="square" lIns="0" rIns="0" tIns="0" bIns="0">
+            <a:spAutoFit/>
+          </a:bodyPr>
+          <a:lstStyle/>
+          <a:p>
+            <a:r>
+              <a:rPr sz="1300" b="0">
+                <a:solidFill>
+                  <a:srgbClr val="212121"/>
+                </a:solidFill>
+                <a:latin typeface="Freesentation"/>
+              </a:rPr>
+              <a:t/>
+            </a:r>
+            <a:r>
+              <a:rPr sz="1300" b="0">
+                <a:solidFill>
+                  <a:srgbClr val="212121"/>
+                </a:solidFill>
+                <a:latin typeface="Freesentation"/>
+              </a:rPr>
+              <a:t>• 초기 마이그레이션 비용</a:t>
+            </a:r>
+          </a:p>
+          <a:p>
+            <a:pPr lvl="1"/>
+            <a:r>
+              <a:rPr sz="1300" b="0">
+                <a:solidFill>
+                  <a:srgbClr val="212121"/>
+                </a:solidFill>
+                <a:latin typeface="Freesentation"/>
+              </a:rPr>
+              <a:t>데이터 전환 + 검증 ₩5,000만 (1회)</a:t>
+            </a:r>
+          </a:p>
+          <a:p>
+            <a:pPr lvl="1"/>
+            <a:r>
+              <a:rPr sz="1300" b="0">
+                <a:solidFill>
+                  <a:srgbClr val="0043DA"/>
+                </a:solidFill>
+                <a:latin typeface="Freesentation"/>
+              </a:rPr>
+              <a:t>→ 단계별 이관으로 리스크 분산 (3개월)</a:t>
+            </a:r>
+          </a:p>
+          <a:p>
+            <a:pPr>
+              <a:spcBef>
+                <a:spcPts val="400"/>
+              </a:spcBef>
+            </a:pPr>
+            <a:r>
+              <a:rPr sz="1300" b="0">
+                <a:solidFill>
+                  <a:srgbClr val="212121"/>
+                </a:solidFill>
+                <a:latin typeface="Freesentation"/>
+              </a:rPr>
+              <a:t>• 벤더 종속성</a:t>
+            </a:r>
+          </a:p>
+          <a:p>
+            <a:pPr lvl="1"/>
+            <a:r>
+              <a:rPr sz="1300" b="0">
+                <a:solidFill>
+                  <a:srgbClr val="212121"/>
+                </a:solidFill>
+                <a:latin typeface="Freesentation"/>
+              </a:rPr>
+              <a:t>AWS 서비스에 강하게 결합</a:t>
+            </a:r>
+          </a:p>
+          <a:p>
+            <a:pPr lvl="1"/>
+            <a:r>
+              <a:rPr sz="1300" b="0">
+                <a:solidFill>
+                  <a:srgbClr val="0043DA"/>
+                </a:solidFill>
+                <a:latin typeface="Freesentation"/>
+              </a:rPr>
+              <a:t>→ Kafka 표준 API 유지로 이식성 확보</a:t>
+            </a:r>
+          </a:p>
+          <a:p>
+            <a:pPr>
+              <a:spcBef>
+                <a:spcPts val="400"/>
+              </a:spcBef>
+            </a:pPr>
+            <a:r>
+              <a:rPr sz="1300" b="0">
+                <a:solidFill>
+                  <a:srgbClr val="212121"/>
+                </a:solidFill>
+                <a:latin typeface="Freesentation"/>
+              </a:rPr>
+              <a:t>• on-premises 대비 15% 높은 월 비용</a:t>
+            </a:r>
+          </a:p>
+          <a:p>
+            <a:pPr lvl="1"/>
+            <a:r>
+              <a:rPr sz="1300" b="0">
+                <a:solidFill>
+                  <a:srgbClr val="212121"/>
+                </a:solidFill>
+                <a:latin typeface="Freesentation"/>
+              </a:rPr>
+              <a:t>₩750만/월 vs 자체 운영 ₩650만/월</a:t>
+            </a:r>
+          </a:p>
+          <a:p>
+            <a:pPr lvl="1"/>
+            <a:r>
+              <a:rPr sz="1300" b="0">
+                <a:solidFill>
+                  <a:srgbClr val="0043DA"/>
+                </a:solidFill>
+                <a:latin typeface="Freesentation"/>
+              </a:rPr>
+              <a:t>→ 운영 인력 포함 TCO 기준 35% 절감</a:t>
+            </a:r>
+          </a:p>
+        </p:txBody>
+      </p:sp>
+      <p:sp>
+        <p:nvSpPr>
+          <p:cNvPr id="13" name="Rounded Rectangle 12"/>
+          <p:cNvSpPr/>
+          <p:nvPr/>
+        </p:nvSpPr>
+        <p:spPr>
+          <a:xfrm>
+            <a:off x="457200" y="6172200"/>
+            <a:ext cx="11320560" cy="457200"/>
+          </a:xfrm>
+          <a:prstGeom prst="roundRect">
+            <a:avLst>
+              <a:gd name="adj" fmla="val 4000"/>
+            </a:avLst>
+          </a:prstGeom>
+          <a:solidFill>
+            <a:srgbClr val="0043DA"/>
+          </a:solidFill>
+          <a:ln>
+            <a:noFill/>
+          </a:ln>
+        </p:spPr>
+        <p:style>
+          <a:lnRef idx="1">
+            <a:schemeClr val="accent1"/>
+          </a:lnRef>
+          <a:fillRef idx="3">
+            <a:schemeClr val="accent1"/>
+          </a:fillRef>
+          <a:effectRef idx="2">
+            <a:schemeClr val="accent1"/>
+          </a:effectRef>
+          <a:fontRef idx="minor">
+            <a:schemeClr val="lt1"/>
+          </a:fontRef>
+        </p:style>
+        <p:txBody>
+          <a:bodyPr rtlCol="0" anchor="ctr"/>
+          <a:lstStyle/>
+          <a:p>
+            <a:pPr algn="ctr"/>
+          </a:p>
+        </p:txBody>
+      </p:sp>
+      <p:sp>
+        <p:nvSpPr>
+          <p:cNvPr id="14" name="TextBox 13"/>
+          <p:cNvSpPr txBox="1"/>
+          <p:nvPr/>
+        </p:nvSpPr>
+        <p:spPr>
+          <a:xfrm>
+            <a:off x="637160" y="6217920"/>
+            <a:ext cx="10960200" cy="365760"/>
+          </a:xfrm>
+          <a:prstGeom prst="rect">
+            <a:avLst/>
+          </a:prstGeom>
+          <a:noFill/>
+        </p:spPr>
+        <p:txBody>
+          <a:bodyPr wrap="square" lIns="0" rIns="0" tIns="0" bIns="0">
+            <a:spAutoFit/>
+          </a:bodyPr>
+          <a:lstStyle/>
+          <a:p>
+            <a:r>
+              <a:rPr sz="1400" b="1">
+                <a:solidFill>
+                  <a:srgbClr val="FFFFFF"/>
+                </a:solidFill>
+                <a:latin typeface="Freesentation"/>
+              </a:rPr>
+              <a:t/>
+            </a:r>
+            <a:r>
+              <a:rPr sz="1400" b="1">
+                <a:solidFill>
+                  <a:srgbClr val="FFFFFF"/>
+                </a:solidFill>
+                <a:latin typeface="Freesentation"/>
+              </a:rPr>
+              <a:t>📋 종합 판단: 도입 권장 — Pros ROI 240%가 Cons를 상회, 모든 단점 완화 가능</a:t>
+            </a:r>
+          </a:p>
+          <a:p>
+            <a:pPr/>
+            <a:r>
+              <a:rPr sz="1300" b="0">
+                <a:solidFill>
+                  <a:srgbClr val="FFFFFF"/>
+                </a:solidFill>
+                <a:latin typeface="Freesentation"/>
+              </a:rPr>
+              <a:t>Action: 2026-Q2 PoC 착수 승인 요청 (예산 ₩5,000만, 기간 3개월)</a:t>
+            </a:r>
+          </a:p>
+        </p:txBody>
+      </p:sp>
+    </p:spTree>
+  </p:cSld>
+  <p:clrMapOvr>
+    <a:masterClrMapping/>
+  </p:clrMapOvr>
+</p:sld>
+</file>
+
+<file path=ppt/slides/slide16.xml><?xml version="1.0" encoding="utf-8"?>
+<p:sld xmlns:a="http://schemas.openxmlformats.org/drawingml/2006/main" xmlns:p="http://schemas.openxmlformats.org/presentationml/2006/main" xmlns:r="http://schemas.openxmlformats.org/officeDocument/2006/relationships">
+  <p:cSld>
+    <p:spTree>
+      <p:nvGrpSpPr>
+        <p:cNvPr id="1" name=""/>
+        <p:cNvGrpSpPr/>
+        <p:nvPr/>
+      </p:nvGrpSpPr>
+      <p:grpSpPr/>
+      <p:sp>
+        <p:nvSpPr>
+          <p:cNvPr id="2" name="Text Placeholder 1"/>
+          <p:cNvSpPr>
+            <a:spLocks noGrp="1"/>
+          </p:cNvSpPr>
+          <p:nvPr>
+            <p:ph type="body" idx="10" sz="quarter"/>
+          </p:nvPr>
+        </p:nvSpPr>
+        <p:spPr/>
+        <p:txBody>
+          <a:bodyPr/>
+          <a:lstStyle/>
+          <a:p/>
+        </p:txBody>
+      </p:sp>
+      <p:sp>
+        <p:nvSpPr>
+          <p:cNvPr id="3" name="TextBox 2"/>
+          <p:cNvSpPr txBox="1"/>
+          <p:nvPr/>
+        </p:nvSpPr>
+        <p:spPr>
+          <a:xfrm>
+            <a:off x="354288" y="557760"/>
+            <a:ext cx="2719800" cy="500000"/>
+          </a:xfrm>
+          <a:prstGeom prst="rect">
+            <a:avLst/>
+          </a:prstGeom>
+          <a:noFill/>
+        </p:spPr>
+        <p:txBody>
+          <a:bodyPr wrap="square" lIns="0" rIns="0" tIns="0" bIns="0">
+            <a:spAutoFit/>
+          </a:bodyPr>
+          <a:lstStyle/>
+          <a:p>
+            <a:r>
+              <a:rPr sz="2000" b="1">
+                <a:solidFill>
+                  <a:srgbClr val="000000"/>
+                </a:solidFill>
+                <a:latin typeface="Freesentation"/>
+              </a:rPr>
+              <a:t>L14. Do / Don't</a:t>
+            </a:r>
+          </a:p>
+        </p:txBody>
+      </p:sp>
+      <p:sp>
+        <p:nvSpPr>
+          <p:cNvPr id="4" name="TextBox 3"/>
+          <p:cNvSpPr txBox="1"/>
+          <p:nvPr/>
+        </p:nvSpPr>
+        <p:spPr>
+          <a:xfrm>
+            <a:off x="3761040" y="558624"/>
+            <a:ext cx="7549368" cy="500000"/>
+          </a:xfrm>
+          <a:prstGeom prst="rect">
+            <a:avLst/>
+          </a:prstGeom>
+          <a:noFill/>
+        </p:spPr>
+        <p:txBody>
+          <a:bodyPr wrap="square" lIns="0" rIns="0" tIns="0" bIns="0">
+            <a:spAutoFit/>
+          </a:bodyPr>
+          <a:lstStyle/>
+          <a:p>
+            <a:r>
+              <a:rPr sz="1200" b="0">
+                <a:solidFill>
+                  <a:srgbClr val="212121"/>
+                </a:solidFill>
+                <a:latin typeface="Freesentation"/>
+              </a:rPr>
+              <a:t>MSK 아키텍처 설계 가이드라인 — 프로덕션 환경 필수 체크리스트</a:t>
+            </a:r>
+          </a:p>
+        </p:txBody>
+      </p:sp>
+      <p:sp>
+        <p:nvSpPr>
+          <p:cNvPr id="5" name="TextBox 4"/>
+          <p:cNvSpPr txBox="1"/>
+          <p:nvPr/>
+        </p:nvSpPr>
+        <p:spPr>
+          <a:xfrm>
+            <a:off x="457200" y="1600200"/>
+            <a:ext cx="11277600" cy="274320"/>
+          </a:xfrm>
+          <a:prstGeom prst="rect">
+            <a:avLst/>
+          </a:prstGeom>
+          <a:noFill/>
+        </p:spPr>
+        <p:txBody>
+          <a:bodyPr wrap="square">
+            <a:spAutoFit/>
+          </a:bodyPr>
+          <a:lstStyle/>
+          <a:p>
+            <a:r>
+              <a:rPr sz="1600" b="1">
+                <a:solidFill>
+                  <a:srgbClr val="0043DA"/>
+                </a:solidFill>
+                <a:latin typeface="Freesentation"/>
+              </a:rPr>
+              <a:t>MSK 아키텍처 설계 가이드라인</a:t>
+            </a:r>
+          </a:p>
+        </p:txBody>
+      </p:sp>
+      <p:sp>
+        <p:nvSpPr>
+          <p:cNvPr id="6" name="TextBox 5"/>
+          <p:cNvSpPr txBox="1"/>
+          <p:nvPr/>
+        </p:nvSpPr>
+        <p:spPr>
+          <a:xfrm>
+            <a:off x="457200" y="1965960"/>
+            <a:ext cx="11277600" cy="228600"/>
+          </a:xfrm>
+          <a:prstGeom prst="rect">
+            <a:avLst/>
+          </a:prstGeom>
+          <a:noFill/>
+        </p:spPr>
+        <p:txBody>
+          <a:bodyPr wrap="square">
+            <a:spAutoFit/>
+          </a:bodyPr>
+          <a:lstStyle/>
+          <a:p>
+            <a:r>
+              <a:rPr sz="1300" b="0">
+                <a:solidFill>
+                  <a:srgbClr val="212121"/>
+                </a:solidFill>
+                <a:latin typeface="Freesentation"/>
+              </a:rPr>
+              <a:t>프로덕션 환경 구성 시 필수 체크리스트 (2026-Q1 기준)</a:t>
+            </a:r>
+          </a:p>
+        </p:txBody>
+      </p:sp>
+      <p:sp>
+        <p:nvSpPr>
+          <p:cNvPr id="7" name="Rounded Rectangle 6"/>
+          <p:cNvSpPr/>
+          <p:nvPr/>
+        </p:nvSpPr>
+        <p:spPr>
+          <a:xfrm>
+            <a:off x="457200" y="2423160"/>
+            <a:ext cx="5486400" cy="3657600"/>
+          </a:xfrm>
+          <a:prstGeom prst="roundRect">
+            <a:avLst>
+              <a:gd name="adj" fmla="val 4000"/>
+            </a:avLst>
+          </a:prstGeom>
+          <a:solidFill>
+            <a:srgbClr val="B2D9CD"/>
+          </a:solidFill>
+          <a:ln w="6350">
+            <a:solidFill>
+              <a:srgbClr val="4CB88F"/>
+            </a:solidFill>
+          </a:ln>
+        </p:spPr>
+        <p:style>
+          <a:lnRef idx="1">
+            <a:schemeClr val="accent1"/>
+          </a:lnRef>
+          <a:fillRef idx="3">
+            <a:schemeClr val="accent1"/>
+          </a:fillRef>
+          <a:effectRef idx="2">
+            <a:schemeClr val="accent1"/>
+          </a:effectRef>
+          <a:fontRef idx="minor">
+            <a:schemeClr val="lt1"/>
+          </a:fontRef>
+        </p:style>
+        <p:txBody>
+          <a:bodyPr rtlCol="0" anchor="ctr"/>
+          <a:lstStyle/>
+          <a:p>
+            <a:pPr algn="ctr"/>
+          </a:p>
+        </p:txBody>
+      </p:sp>
+      <p:sp>
+        <p:nvSpPr>
+          <p:cNvPr id="8" name="TextBox 7"/>
+          <p:cNvSpPr txBox="1"/>
+          <p:nvPr/>
+        </p:nvSpPr>
+        <p:spPr>
+          <a:xfrm>
+            <a:off x="1209960" y="2603120"/>
+            <a:ext cx="4551840" cy="274320"/>
+          </a:xfrm>
+          <a:prstGeom prst="rect">
+            <a:avLst/>
+          </a:prstGeom>
+          <a:noFill/>
+        </p:spPr>
+        <p:txBody>
+          <a:bodyPr wrap="square" lIns="0" rIns="0" tIns="0" bIns="0">
+            <a:spAutoFit/>
+          </a:bodyPr>
+          <a:lstStyle/>
+          <a:p>
+            <a:r>
+              <a:rPr sz="1400" b="1">
+                <a:solidFill>
+                  <a:srgbClr val="212121"/>
+                </a:solidFill>
+                <a:latin typeface="Freesentation"/>
+              </a:rPr>
+              <a:t>✅  DO (권장)</a:t>
+            </a:r>
+          </a:p>
+        </p:txBody>
+      </p:sp>
+      <p:sp>
+        <p:nvSpPr>
+          <p:cNvPr id="9" name="TextBox 8"/>
+          <p:cNvSpPr txBox="1"/>
+          <p:nvPr/>
+        </p:nvSpPr>
+        <p:spPr>
+          <a:xfrm>
+            <a:off x="637160" y="2968800"/>
+            <a:ext cx="5124480" cy="2930160"/>
+          </a:xfrm>
+          <a:prstGeom prst="rect">
+            <a:avLst/>
+          </a:prstGeom>
+          <a:noFill/>
+        </p:spPr>
+        <p:txBody>
+          <a:bodyPr wrap="square" lIns="0" rIns="0" tIns="0" bIns="0">
+            <a:spAutoFit/>
+          </a:bodyPr>
+          <a:lstStyle/>
+          <a:p>
+            <a:r>
+              <a:rPr sz="1300" b="0">
+                <a:solidFill>
+                  <a:srgbClr val="212121"/>
+                </a:solidFill>
+                <a:latin typeface="Freesentation"/>
+              </a:rPr>
+              <a:t/>
+            </a:r>
+            <a:r>
+              <a:rPr sz="1300" b="0">
+                <a:solidFill>
+                  <a:srgbClr val="212121"/>
+                </a:solidFill>
+                <a:latin typeface="Freesentation"/>
+              </a:rPr>
+              <a:t>• Multi-AZ 배포</a:t>
+            </a:r>
+          </a:p>
+          <a:p>
+            <a:pPr lvl="1"/>
+            <a:r>
+              <a:rPr sz="1300" b="0">
+                <a:solidFill>
+                  <a:srgbClr val="212121"/>
+                </a:solidFill>
+                <a:latin typeface="Freesentation"/>
+              </a:rPr>
+              <a:t>가용성 99.9% 보장, 장애 시 자동 failover &lt; 5분</a:t>
+            </a:r>
+          </a:p>
+          <a:p>
+            <a:pPr>
+              <a:spcBef>
+                <a:spcPts val="400"/>
+              </a:spcBef>
+            </a:pPr>
+            <a:r>
+              <a:rPr sz="1300" b="0">
+                <a:solidFill>
+                  <a:srgbClr val="212121"/>
+                </a:solidFill>
+                <a:latin typeface="Freesentation"/>
+              </a:rPr>
+              <a:t>• VPC Endpoint 사용</a:t>
+            </a:r>
+          </a:p>
+          <a:p>
+            <a:pPr lvl="1"/>
+            <a:r>
+              <a:rPr sz="1300" b="0">
+                <a:solidFill>
+                  <a:srgbClr val="212121"/>
+                </a:solidFill>
+                <a:latin typeface="Freesentation"/>
+              </a:rPr>
+              <a:t>인터넷 경유 금지 → 네트워크 지연 70% 감소 (실측)</a:t>
+            </a:r>
+          </a:p>
+          <a:p>
+            <a:pPr>
+              <a:spcBef>
+                <a:spcPts val="400"/>
+              </a:spcBef>
+            </a:pPr>
+            <a:r>
+              <a:rPr sz="1300" b="0">
+                <a:solidFill>
+                  <a:srgbClr val="212121"/>
+                </a:solidFill>
+                <a:latin typeface="Freesentation"/>
+              </a:rPr>
+              <a:t>• CloudWatch 알람 설정</a:t>
+            </a:r>
+          </a:p>
+          <a:p>
+            <a:pPr lvl="1"/>
+            <a:r>
+              <a:rPr sz="1300" b="0">
+                <a:solidFill>
+                  <a:srgbClr val="212121"/>
+                </a:solidFill>
+                <a:latin typeface="Freesentation"/>
+              </a:rPr>
+              <a:t>CPU &gt; 70%, Disk &gt; 80% 임계치 모니터링</a:t>
+            </a:r>
+          </a:p>
+        </p:txBody>
+      </p:sp>
+      <p:sp>
+        <p:nvSpPr>
+          <p:cNvPr id="10" name="Rounded Rectangle 9"/>
+          <p:cNvSpPr/>
+          <p:nvPr/>
+        </p:nvSpPr>
+        <p:spPr>
+          <a:xfrm>
+            <a:off x="6291360" y="2423160"/>
+            <a:ext cx="5486400" cy="3657600"/>
+          </a:xfrm>
+          <a:prstGeom prst="roundRect">
+            <a:avLst>
+              <a:gd name="adj" fmla="val 4000"/>
+            </a:avLst>
+          </a:prstGeom>
+          <a:solidFill>
+            <a:srgbClr val="C62828"/>
+          </a:solidFill>
+          <a:ln w="6350">
+            <a:solidFill>
+              <a:srgbClr val="D32F2F"/>
+            </a:solidFill>
+          </a:ln>
+        </p:spPr>
+        <p:style>
+          <a:lnRef idx="1">
+            <a:schemeClr val="accent1"/>
+          </a:lnRef>
+          <a:fillRef idx="3">
+            <a:schemeClr val="accent1"/>
+          </a:fillRef>
+          <a:effectRef idx="2">
+            <a:schemeClr val="accent1"/>
+          </a:effectRef>
+          <a:fontRef idx="minor">
+            <a:schemeClr val="lt1"/>
+          </a:fontRef>
+        </p:style>
+        <p:txBody>
+          <a:bodyPr rtlCol="0" anchor="ctr"/>
+          <a:lstStyle/>
+          <a:p>
+            <a:pPr algn="ctr"/>
+          </a:p>
+        </p:txBody>
+      </p:sp>
+      <p:sp>
+        <p:nvSpPr>
+          <p:cNvPr id="11" name="TextBox 10"/>
+          <p:cNvSpPr txBox="1"/>
+          <p:nvPr/>
+        </p:nvSpPr>
+        <p:spPr>
+          <a:xfrm>
+            <a:off x="7044120" y="2603120"/>
+            <a:ext cx="4551840" cy="274320"/>
+          </a:xfrm>
+          <a:prstGeom prst="rect">
+            <a:avLst/>
+          </a:prstGeom>
+          <a:noFill/>
+        </p:spPr>
+        <p:txBody>
+          <a:bodyPr wrap="square" lIns="0" rIns="0" tIns="0" bIns="0">
+            <a:spAutoFit/>
+          </a:bodyPr>
+          <a:lstStyle/>
+          <a:p>
+            <a:r>
+              <a:rPr sz="1400" b="1">
+                <a:solidFill>
+                  <a:srgbClr val="FFFFFF"/>
+                </a:solidFill>
+                <a:latin typeface="Freesentation"/>
+              </a:rPr>
+              <a:t>❌  DON'T (비권장)</a:t>
+            </a:r>
+          </a:p>
+        </p:txBody>
+      </p:sp>
+      <p:sp>
+        <p:nvSpPr>
+          <p:cNvPr id="12" name="TextBox 11"/>
+          <p:cNvSpPr txBox="1"/>
+          <p:nvPr/>
+        </p:nvSpPr>
+        <p:spPr>
+          <a:xfrm>
+            <a:off x="6471320" y="2968800"/>
+            <a:ext cx="5124480" cy="2930160"/>
+          </a:xfrm>
+          <a:prstGeom prst="rect">
+            <a:avLst/>
+          </a:prstGeom>
+          <a:noFill/>
+        </p:spPr>
+        <p:txBody>
+          <a:bodyPr wrap="square" lIns="0" rIns="0" tIns="0" bIns="0">
+            <a:spAutoFit/>
+          </a:bodyPr>
+          <a:lstStyle/>
+          <a:p>
+            <a:r>
+              <a:rPr sz="1300" b="1">
+                <a:solidFill>
+                  <a:srgbClr val="FFFFFF"/>
+                </a:solidFill>
+                <a:latin typeface="Freesentation"/>
+              </a:rPr>
+              <a:t/>
+            </a:r>
+            <a:r>
+              <a:rPr sz="1300" b="1">
+                <a:solidFill>
+                  <a:srgbClr val="FFFFFF"/>
+                </a:solidFill>
+                <a:latin typeface="Freesentation"/>
+              </a:rPr>
+              <a:t>🔴 Single-AZ 배포</a:t>
+            </a:r>
+          </a:p>
+          <a:p>
+            <a:pPr lvl="1"/>
+            <a:r>
+              <a:rPr sz="1300" b="0">
+                <a:solidFill>
+                  <a:srgbClr val="FFFFFF"/>
+                </a:solidFill>
+                <a:latin typeface="Freesentation"/>
+              </a:rPr>
+              <a:t>AZ 장애 시 서비스 전체 중단</a:t>
+            </a:r>
+          </a:p>
+          <a:p>
+            <a:pPr lvl="1"/>
+            <a:r>
+              <a:rPr sz="1300" b="0">
+                <a:solidFill>
+                  <a:srgbClr val="FFFFFF"/>
+                </a:solidFill>
+                <a:latin typeface="Freesentation"/>
+              </a:rPr>
+              <a:t>⚡ 2025-Q4 서울 AZ-A 장애 — 3시간 다운타임</a:t>
+            </a:r>
+          </a:p>
+          <a:p>
+            <a:pPr lvl="1"/>
+            <a:r>
+              <a:rPr sz="1300" b="0">
+                <a:solidFill>
+                  <a:srgbClr val="FFFFFF"/>
+                </a:solidFill>
+                <a:latin typeface="Freesentation"/>
+              </a:rPr>
+              <a:t>✅ 대신: Multi-AZ 배포 (99.9% SLA)</a:t>
+            </a:r>
+          </a:p>
+          <a:p>
+            <a:pPr>
+              <a:spcBef>
+                <a:spcPts val="400"/>
+              </a:spcBef>
+            </a:pPr>
+            <a:r>
+              <a:rPr sz="1300" b="1">
+                <a:solidFill>
+                  <a:srgbClr val="FFFFFF"/>
+                </a:solidFill>
+                <a:latin typeface="Freesentation"/>
+              </a:rPr>
+              <a:t>🔴 Public Subnet 배치</a:t>
+            </a:r>
+          </a:p>
+          <a:p>
+            <a:pPr lvl="1"/>
+            <a:r>
+              <a:rPr sz="1300" b="0">
+                <a:solidFill>
+                  <a:srgbClr val="FFFFFF"/>
+                </a:solidFill>
+                <a:latin typeface="Freesentation"/>
+              </a:rPr>
+              <a:t>외부 공격 노출, 데이터 유출 위험</a:t>
+            </a:r>
+          </a:p>
+          <a:p>
+            <a:pPr lvl="1"/>
+            <a:r>
+              <a:rPr sz="1300" b="0">
+                <a:solidFill>
+                  <a:srgbClr val="FFFFFF"/>
+                </a:solidFill>
+                <a:latin typeface="Freesentation"/>
+              </a:rPr>
+              <a:t>⚡ 보안 감사 지적 사항 1순위</a:t>
+            </a:r>
+          </a:p>
+          <a:p>
+            <a:pPr lvl="1"/>
+            <a:r>
+              <a:rPr sz="1300" b="0">
+                <a:solidFill>
+                  <a:srgbClr val="FFFFFF"/>
+                </a:solidFill>
+                <a:latin typeface="Freesentation"/>
+              </a:rPr>
+              <a:t>✅ 대신: Private Subnet + VPC Endpoint</a:t>
+            </a:r>
+          </a:p>
+          <a:p>
+            <a:pPr>
+              <a:spcBef>
+                <a:spcPts val="400"/>
+              </a:spcBef>
+            </a:pPr>
+            <a:r>
+              <a:rPr sz="1300" b="0">
+                <a:solidFill>
+                  <a:srgbClr val="FFFFFF"/>
+                </a:solidFill>
+                <a:latin typeface="Freesentation"/>
+              </a:rPr>
+              <a:t>⚠️ default 보안그룹 사용</a:t>
+            </a:r>
+          </a:p>
+          <a:p>
+            <a:pPr lvl="1"/>
+            <a:r>
+              <a:rPr sz="1300" b="0">
+                <a:solidFill>
+                  <a:srgbClr val="FFFFFF"/>
+                </a:solidFill>
+                <a:latin typeface="Freesentation"/>
+              </a:rPr>
+              <a:t>0.0.0.0/0 허용 → 무단 접근 가능</a:t>
+            </a:r>
+          </a:p>
+          <a:p>
+            <a:pPr lvl="1"/>
+            <a:r>
+              <a:rPr sz="1300" b="0">
+                <a:solidFill>
+                  <a:srgbClr val="FFFFFF"/>
+                </a:solidFill>
+                <a:latin typeface="Freesentation"/>
+              </a:rPr>
+              <a:t>✅ 대신: 최소 권한 보안그룹 (필요 포트만)</a:t>
+            </a:r>
+          </a:p>
+        </p:txBody>
+      </p:sp>
+      <p:sp>
+        <p:nvSpPr>
+          <p:cNvPr id="13" name="Rounded Rectangle 12"/>
+          <p:cNvSpPr/>
+          <p:nvPr/>
+        </p:nvSpPr>
+        <p:spPr>
+          <a:xfrm>
+            <a:off x="457200" y="6172200"/>
+            <a:ext cx="11320560" cy="457200"/>
+          </a:xfrm>
+          <a:prstGeom prst="roundRect">
+            <a:avLst>
+              <a:gd name="adj" fmla="val 4000"/>
+            </a:avLst>
+          </a:prstGeom>
+          <a:solidFill>
+            <a:srgbClr val="F8F9FA"/>
+          </a:solidFill>
+          <a:ln w="6350">
+            <a:solidFill>
+              <a:srgbClr val="DCDCDC"/>
+            </a:solidFill>
+          </a:ln>
+        </p:spPr>
+        <p:style>
+          <a:lnRef idx="1">
+            <a:schemeClr val="accent1"/>
+          </a:lnRef>
+          <a:fillRef idx="3">
+            <a:schemeClr val="accent1"/>
+          </a:fillRef>
+          <a:effectRef idx="2">
+            <a:schemeClr val="accent1"/>
+          </a:effectRef>
+          <a:fontRef idx="minor">
+            <a:schemeClr val="lt1"/>
+          </a:fontRef>
+        </p:style>
+        <p:txBody>
+          <a:bodyPr rtlCol="0" anchor="ctr"/>
+          <a:lstStyle/>
+          <a:p>
+            <a:pPr algn="ctr"/>
+          </a:p>
+        </p:txBody>
+      </p:sp>
+      <p:sp>
+        <p:nvSpPr>
+          <p:cNvPr id="14" name="TextBox 13"/>
+          <p:cNvSpPr txBox="1"/>
+          <p:nvPr/>
+        </p:nvSpPr>
+        <p:spPr>
+          <a:xfrm>
+            <a:off x="637160" y="6217920"/>
+            <a:ext cx="10960200" cy="365760"/>
+          </a:xfrm>
+          <a:prstGeom prst="rect">
+            <a:avLst/>
+          </a:prstGeom>
+          <a:noFill/>
+        </p:spPr>
+        <p:txBody>
+          <a:bodyPr wrap="square" lIns="0" rIns="0" tIns="0" bIns="0">
+            <a:spAutoFit/>
+          </a:bodyPr>
+          <a:lstStyle/>
+          <a:p>
+            <a:r>
+              <a:rPr sz="1400" b="1">
+                <a:solidFill>
+                  <a:srgbClr val="212121"/>
+                </a:solidFill>
+                <a:latin typeface="Freesentation"/>
+              </a:rPr>
+              <a:t/>
+            </a:r>
+            <a:r>
+              <a:rPr sz="1300" b="0">
+                <a:solidFill>
+                  <a:srgbClr val="212121"/>
+                </a:solidFill>
+                <a:latin typeface="Freesentation"/>
+              </a:rPr>
+              <a:t>📋 준수 현황: 3/6 항목 준수 (50%) — 미준수 항목 (Single-AZ, Public Subnet, default SG) 즉시 조치 필요</a:t>
+            </a:r>
+          </a:p>
+        </p:txBody>
+      </p:sp>
+    </p:spTree>
+  </p:cSld>
+  <p:clrMapOvr>
+    <a:masterClrMapping/>
+  </p:clrMapOvr>
+</p:sld>
+</file>
+
+<file path=ppt/slides/slide17.xml><?xml version="1.0" encoding="utf-8"?>
+<p:sld xmlns:a="http://schemas.openxmlformats.org/drawingml/2006/main" xmlns:p="http://schemas.openxmlformats.org/presentationml/2006/main" xmlns:r="http://schemas.openxmlformats.org/officeDocument/2006/relationships">
+  <p:cSld>
+    <p:spTree>
+      <p:nvGrpSpPr>
+        <p:cNvPr id="1" name=""/>
+        <p:cNvGrpSpPr/>
+        <p:nvPr/>
+      </p:nvGrpSpPr>
+      <p:grpSpPr/>
+      <p:sp>
+        <p:nvSpPr>
+          <p:cNvPr id="2" name="Text Placeholder 1"/>
+          <p:cNvSpPr>
+            <a:spLocks noGrp="1"/>
+          </p:cNvSpPr>
+          <p:nvPr>
+            <p:ph type="body" idx="10" sz="quarter"/>
+          </p:nvPr>
+        </p:nvSpPr>
+        <p:spPr/>
+        <p:txBody>
+          <a:bodyPr/>
+          <a:lstStyle/>
+          <a:p/>
+        </p:txBody>
+      </p:sp>
+      <p:sp>
+        <p:nvSpPr>
+          <p:cNvPr id="3" name="TextBox 2"/>
+          <p:cNvSpPr txBox="1"/>
+          <p:nvPr/>
+        </p:nvSpPr>
+        <p:spPr>
+          <a:xfrm>
+            <a:off x="354288" y="557760"/>
+            <a:ext cx="2719800" cy="500000"/>
+          </a:xfrm>
+          <a:prstGeom prst="rect">
+            <a:avLst/>
+          </a:prstGeom>
+          <a:noFill/>
+        </p:spPr>
+        <p:txBody>
+          <a:bodyPr wrap="square" lIns="0" rIns="0" tIns="0" bIns="0">
+            <a:spAutoFit/>
+          </a:bodyPr>
+          <a:lstStyle/>
+          <a:p>
+            <a:r>
+              <a:rPr sz="2000" b="1">
+                <a:solidFill>
+                  <a:srgbClr val="000000"/>
+                </a:solidFill>
+                <a:latin typeface="Freesentation"/>
+              </a:rPr>
+              <a:t>L15. SWOT Matrix</a:t>
+            </a:r>
+          </a:p>
+        </p:txBody>
+      </p:sp>
+      <p:sp>
+        <p:nvSpPr>
+          <p:cNvPr id="4" name="TextBox 3"/>
+          <p:cNvSpPr txBox="1"/>
+          <p:nvPr/>
+        </p:nvSpPr>
+        <p:spPr>
+          <a:xfrm>
+            <a:off x="3761040" y="558624"/>
+            <a:ext cx="7549368" cy="500000"/>
+          </a:xfrm>
+          <a:prstGeom prst="rect">
+            <a:avLst/>
+          </a:prstGeom>
+          <a:noFill/>
+        </p:spPr>
+        <p:txBody>
+          <a:bodyPr wrap="square" lIns="0" rIns="0" tIns="0" bIns="0">
+            <a:spAutoFit/>
+          </a:bodyPr>
+          <a:lstStyle/>
+          <a:p>
+            <a:r>
+              <a:rPr sz="1200" b="0">
+                <a:solidFill>
+                  <a:srgbClr val="212121"/>
+                </a:solidFill>
+                <a:latin typeface="Freesentation"/>
+              </a:rPr>
+              <a:t>AWS MSK 사업 진출 SWOT 분석 — SO전략 집중</a:t>
+            </a:r>
+          </a:p>
+        </p:txBody>
+      </p:sp>
+      <p:sp>
+        <p:nvSpPr>
+          <p:cNvPr id="5" name="TextBox 4"/>
+          <p:cNvSpPr txBox="1"/>
+          <p:nvPr/>
+        </p:nvSpPr>
+        <p:spPr>
+          <a:xfrm>
+            <a:off x="457200" y="1600200"/>
+            <a:ext cx="11277600" cy="274320"/>
+          </a:xfrm>
+          <a:prstGeom prst="rect">
+            <a:avLst/>
+          </a:prstGeom>
+          <a:noFill/>
+        </p:spPr>
+        <p:txBody>
+          <a:bodyPr wrap="square">
+            <a:spAutoFit/>
+          </a:bodyPr>
+          <a:lstStyle/>
+          <a:p>
+            <a:r>
+              <a:rPr sz="1600" b="1">
+                <a:solidFill>
+                  <a:srgbClr val="0043DA"/>
+                </a:solidFill>
+                <a:latin typeface="Freesentation"/>
+              </a:rPr>
+              <a:t>AWS MSK 사업 진출 SWOT 분석 — SO전략 집중</a:t>
+            </a:r>
+          </a:p>
+        </p:txBody>
+      </p:sp>
+      <p:sp>
+        <p:nvSpPr>
+          <p:cNvPr id="6" name="TextBox 5"/>
+          <p:cNvSpPr txBox="1"/>
+          <p:nvPr/>
+        </p:nvSpPr>
+        <p:spPr>
+          <a:xfrm>
+            <a:off x="457200" y="1965960"/>
+            <a:ext cx="11277600" cy="228600"/>
+          </a:xfrm>
+          <a:prstGeom prst="rect">
+            <a:avLst/>
+          </a:prstGeom>
+          <a:noFill/>
+        </p:spPr>
+        <p:txBody>
+          <a:bodyPr wrap="square">
+            <a:spAutoFit/>
+          </a:bodyPr>
+          <a:lstStyle/>
+          <a:p>
+            <a:r>
+              <a:rPr sz="1300" b="0">
+                <a:solidFill>
+                  <a:srgbClr val="212121"/>
+                </a:solidFill>
+                <a:latin typeface="Freesentation"/>
+              </a:rPr>
+              <a:t>클라우드 메시징 서비스 시장 진입 타당성 검토 (2026-Q1)</a:t>
+            </a:r>
+          </a:p>
+        </p:txBody>
+      </p:sp>
+      <p:sp>
+        <p:nvSpPr>
+          <p:cNvPr id="7" name="TextBox 6"/>
+          <p:cNvSpPr txBox="1"/>
+          <p:nvPr/>
+        </p:nvSpPr>
+        <p:spPr>
+          <a:xfrm>
+            <a:off x="457200" y="2331720"/>
+            <a:ext cx="5669280" cy="182880"/>
+          </a:xfrm>
+          <a:prstGeom prst="rect">
+            <a:avLst/>
+          </a:prstGeom>
+          <a:noFill/>
+        </p:spPr>
+        <p:txBody>
+          <a:bodyPr wrap="square" lIns="0" rIns="0" tIns="0" bIns="0">
+            <a:spAutoFit/>
+          </a:bodyPr>
+          <a:lstStyle/>
+          <a:p>
+            <a:pPr algn="ctr"/>
+            <a:r>
+              <a:rPr sz="1100" b="0">
+                <a:solidFill>
+                  <a:srgbClr val="505050"/>
+                </a:solidFill>
+                <a:latin typeface="Freesentation"/>
+              </a:rPr>
+              <a:t>내부 요인</a:t>
+            </a:r>
+          </a:p>
+        </p:txBody>
+      </p:sp>
+      <p:sp>
+        <p:nvSpPr>
+          <p:cNvPr id="8" name="TextBox 7"/>
+          <p:cNvSpPr txBox="1"/>
+          <p:nvPr/>
+        </p:nvSpPr>
+        <p:spPr>
+          <a:xfrm>
+            <a:off x="6217920" y="2331720"/>
+            <a:ext cx="5516880" cy="182880"/>
+          </a:xfrm>
+          <a:prstGeom prst="rect">
+            <a:avLst/>
+          </a:prstGeom>
+          <a:noFill/>
+        </p:spPr>
+        <p:txBody>
+          <a:bodyPr wrap="square" lIns="0" rIns="0" tIns="0" bIns="0">
+            <a:spAutoFit/>
+          </a:bodyPr>
+          <a:lstStyle/>
+          <a:p>
+            <a:pPr algn="ctr"/>
+            <a:r>
+              <a:rPr sz="1100" b="0">
+                <a:solidFill>
+                  <a:srgbClr val="505050"/>
+                </a:solidFill>
+                <a:latin typeface="Freesentation"/>
+              </a:rPr>
+              <a:t>외부 요인</a:t>
+            </a:r>
+          </a:p>
+        </p:txBody>
+      </p:sp>
+      <p:sp>
+        <p:nvSpPr>
+          <p:cNvPr id="9" name="Rounded Rectangle 8"/>
+          <p:cNvSpPr/>
+          <p:nvPr/>
+        </p:nvSpPr>
+        <p:spPr>
+          <a:xfrm>
+            <a:off x="457200" y="2514600"/>
+            <a:ext cx="5669280" cy="1737360"/>
+          </a:xfrm>
+          <a:prstGeom prst="roundRect">
+            <a:avLst>
+              <a:gd name="adj" fmla="val 4000"/>
+            </a:avLst>
+          </a:prstGeom>
+          <a:solidFill>
+            <a:srgbClr val="DBF1E9"/>
+          </a:solidFill>
+          <a:ln w="12700">
+            <a:solidFill>
+              <a:srgbClr val="DCDCDC"/>
+            </a:solidFill>
+          </a:ln>
+        </p:spPr>
+        <p:style>
+          <a:lnRef idx="1">
+            <a:schemeClr val="accent1"/>
+          </a:lnRef>
+          <a:fillRef idx="3">
+            <a:schemeClr val="accent1"/>
+          </a:fillRef>
+          <a:effectRef idx="2">
+            <a:schemeClr val="accent1"/>
+          </a:effectRef>
+          <a:fontRef idx="minor">
+            <a:schemeClr val="lt1"/>
+          </a:fontRef>
+        </p:style>
+        <p:txBody>
+          <a:bodyPr rtlCol="0" anchor="ctr"/>
+          <a:lstStyle/>
+          <a:p>
+            <a:pPr algn="ctr"/>
+          </a:p>
+        </p:txBody>
+      </p:sp>
+      <p:sp>
+        <p:nvSpPr>
+          <p:cNvPr id="10" name="TextBox 9"/>
+          <p:cNvSpPr txBox="1"/>
+          <p:nvPr/>
+        </p:nvSpPr>
+        <p:spPr>
+          <a:xfrm>
+            <a:off x="637160" y="2572200"/>
+            <a:ext cx="5124480" cy="274320"/>
+          </a:xfrm>
+          <a:prstGeom prst="rect">
+            <a:avLst/>
+          </a:prstGeom>
+          <a:noFill/>
+        </p:spPr>
+        <p:txBody>
+          <a:bodyPr wrap="square" lIns="0" rIns="0" tIns="0" bIns="0">
+            <a:spAutoFit/>
+          </a:bodyPr>
+          <a:lstStyle/>
+          <a:p>
+            <a:r>
+              <a:rPr sz="1400" b="1">
+                <a:solidFill>
+                  <a:srgbClr val="212121"/>
+                </a:solidFill>
+                <a:latin typeface="Freesentation"/>
+              </a:rPr>
+              <a:t>💪  강점 (Strengths)</a:t>
+            </a:r>
+          </a:p>
+        </p:txBody>
+      </p:sp>
+      <p:sp>
+        <p:nvSpPr>
+          <p:cNvPr id="11" name="TextBox 10"/>
+          <p:cNvSpPr txBox="1"/>
+          <p:nvPr/>
+        </p:nvSpPr>
+        <p:spPr>
+          <a:xfrm>
+            <a:off x="637160" y="2846520"/>
+            <a:ext cx="5124480" cy="1314000"/>
+          </a:xfrm>
+          <a:prstGeom prst="rect">
+            <a:avLst/>
+          </a:prstGeom>
+          <a:noFill/>
+        </p:spPr>
+        <p:txBody>
+          <a:bodyPr wrap="square" lIns="0" rIns="0" tIns="0" bIns="0">
+            <a:spAutoFit/>
+          </a:bodyPr>
+          <a:lstStyle/>
+          <a:p>
+            <a:r>
+              <a:rPr sz="1300" b="0">
+                <a:solidFill>
+                  <a:srgbClr val="212121"/>
+                </a:solidFill>
+                <a:latin typeface="Freesentation"/>
+              </a:rPr>
+              <a:t/>
+            </a:r>
+            <a:r>
+              <a:rPr sz="1300" b="0">
+                <a:solidFill>
+                  <a:srgbClr val="212121"/>
+                </a:solidFill>
+                <a:latin typeface="Freesentation"/>
+              </a:rPr>
+              <a:t>• AWS Premier 파트너십</a:t>
+            </a:r>
+          </a:p>
+          <a:p>
+            <a:pPr lvl="1"/>
+            <a:r>
+              <a:rPr sz="1300" b="0">
+                <a:solidFill>
+                  <a:srgbClr val="212121"/>
+                </a:solidFill>
+                <a:latin typeface="Freesentation"/>
+              </a:rPr>
+              <a:t>기술 지원 우선 + 공동 마케팅 기회</a:t>
+            </a:r>
+          </a:p>
+          <a:p>
+            <a:pPr>
+              <a:spcBef>
+                <a:spcPts val="300"/>
+              </a:spcBef>
+            </a:pPr>
+            <a:r>
+              <a:rPr sz="1300" b="0">
+                <a:solidFill>
+                  <a:srgbClr val="212121"/>
+                </a:solidFill>
+                <a:latin typeface="Freesentation"/>
+              </a:rPr>
+              <a:t>• Kafka 10년 운영 경험</a:t>
+            </a:r>
+          </a:p>
+          <a:p>
+            <a:pPr lvl="1"/>
+            <a:r>
+              <a:rPr sz="1300" b="0">
+                <a:solidFill>
+                  <a:srgbClr val="212121"/>
+                </a:solidFill>
+                <a:latin typeface="Freesentation"/>
+              </a:rPr>
+              <a:t>국내 금융권 구축 실적 15건</a:t>
+            </a:r>
+          </a:p>
+          <a:p>
+            <a:pPr>
+              <a:spcBef>
+                <a:spcPts val="300"/>
+              </a:spcBef>
+            </a:pPr>
+            <a:r>
+              <a:rPr sz="1300" b="0">
+                <a:solidFill>
+                  <a:srgbClr val="212121"/>
+                </a:solidFill>
+                <a:latin typeface="Freesentation"/>
+              </a:rPr>
+              <a:t>• 24/7 전담 엔지니어 12명</a:t>
+            </a:r>
+          </a:p>
+          <a:p>
+            <a:pPr lvl="1"/>
+            <a:r>
+              <a:rPr sz="1300" b="0">
+                <a:solidFill>
+                  <a:srgbClr val="212121"/>
+                </a:solidFill>
+                <a:latin typeface="Freesentation"/>
+              </a:rPr>
+              <a:t>평균 경력 7년, SLA 99.9% 실적</a:t>
+            </a:r>
+          </a:p>
+        </p:txBody>
+      </p:sp>
+      <p:sp>
+        <p:nvSpPr>
+          <p:cNvPr id="12" name="Rounded Rectangle 11"/>
+          <p:cNvSpPr/>
+          <p:nvPr/>
+        </p:nvSpPr>
+        <p:spPr>
+          <a:xfrm>
+            <a:off x="6217920" y="2514600"/>
+            <a:ext cx="5516880" cy="1737360"/>
+          </a:xfrm>
+          <a:prstGeom prst="roundRect">
+            <a:avLst>
+              <a:gd name="adj" fmla="val 4000"/>
+            </a:avLst>
+          </a:prstGeom>
+          <a:solidFill>
+            <a:srgbClr val="E6EDFA"/>
+          </a:solidFill>
+          <a:ln w="12700">
+            <a:solidFill>
+              <a:srgbClr val="DCDCDC"/>
+            </a:solidFill>
+          </a:ln>
+        </p:spPr>
+        <p:style>
+          <a:lnRef idx="1">
+            <a:schemeClr val="accent1"/>
+          </a:lnRef>
+          <a:fillRef idx="3">
+            <a:schemeClr val="accent1"/>
+          </a:fillRef>
+          <a:effectRef idx="2">
+            <a:schemeClr val="accent1"/>
+          </a:effectRef>
+          <a:fontRef idx="minor">
+            <a:schemeClr val="lt1"/>
+          </a:fontRef>
+        </p:style>
+        <p:txBody>
+          <a:bodyPr rtlCol="0" anchor="ctr"/>
+          <a:lstStyle/>
+          <a:p>
+            <a:pPr algn="ctr"/>
+          </a:p>
+        </p:txBody>
+      </p:sp>
+      <p:sp>
+        <p:nvSpPr>
+          <p:cNvPr id="13" name="TextBox 12"/>
+          <p:cNvSpPr txBox="1"/>
+          <p:nvPr/>
+        </p:nvSpPr>
+        <p:spPr>
+          <a:xfrm>
+            <a:off x="6397880" y="2572200"/>
+            <a:ext cx="5124480" cy="274320"/>
+          </a:xfrm>
+          <a:prstGeom prst="rect">
+            <a:avLst/>
+          </a:prstGeom>
+          <a:noFill/>
+        </p:spPr>
+        <p:txBody>
+          <a:bodyPr wrap="square" lIns="0" rIns="0" tIns="0" bIns="0">
+            <a:spAutoFit/>
+          </a:bodyPr>
+          <a:lstStyle/>
+          <a:p>
+            <a:r>
+              <a:rPr sz="1400" b="1">
+                <a:solidFill>
+                  <a:srgbClr val="212121"/>
+                </a:solidFill>
+                <a:latin typeface="Freesentation"/>
+              </a:rPr>
+              <a:t>🎯  기회 (Opportunities)</a:t>
+            </a:r>
+          </a:p>
+        </p:txBody>
+      </p:sp>
+      <p:sp>
+        <p:nvSpPr>
+          <p:cNvPr id="14" name="TextBox 13"/>
+          <p:cNvSpPr txBox="1"/>
+          <p:nvPr/>
+        </p:nvSpPr>
+        <p:spPr>
+          <a:xfrm>
+            <a:off x="6397880" y="2846520"/>
+            <a:ext cx="5124480" cy="1314000"/>
+          </a:xfrm>
+          <a:prstGeom prst="rect">
+            <a:avLst/>
+          </a:prstGeom>
+          <a:noFill/>
+        </p:spPr>
+        <p:txBody>
+          <a:bodyPr wrap="square" lIns="0" rIns="0" tIns="0" bIns="0">
+            <a:spAutoFit/>
+          </a:bodyPr>
+          <a:lstStyle/>
+          <a:p>
+            <a:r>
+              <a:rPr sz="1300" b="0">
+                <a:solidFill>
+                  <a:srgbClr val="212121"/>
+                </a:solidFill>
+                <a:latin typeface="Freesentation"/>
+              </a:rPr>
+              <a:t/>
+            </a:r>
+            <a:r>
+              <a:rPr sz="1300" b="1">
+                <a:solidFill>
+                  <a:srgbClr val="0043DA"/>
+                </a:solidFill>
+                <a:latin typeface="Freesentation"/>
+              </a:rPr>
+              <a:t>• 시장 CAGR 28%</a:t>
+            </a:r>
+          </a:p>
+          <a:p>
+            <a:pPr lvl="1"/>
+            <a:r>
+              <a:rPr sz="1300" b="0">
+                <a:solidFill>
+                  <a:srgbClr val="212121"/>
+                </a:solidFill>
+                <a:latin typeface="Freesentation"/>
+              </a:rPr>
+              <a:t>2026~2028 IDC 전망, ₩3,200억 규모</a:t>
+            </a:r>
+          </a:p>
+          <a:p>
+            <a:pPr>
+              <a:spcBef>
+                <a:spcPts val="300"/>
+              </a:spcBef>
+            </a:pPr>
+            <a:r>
+              <a:rPr sz="1300" b="0">
+                <a:solidFill>
+                  <a:srgbClr val="212121"/>
+                </a:solidFill>
+                <a:latin typeface="Freesentation"/>
+              </a:rPr>
+              <a:t>• 금융권 클라우드 전환</a:t>
+            </a:r>
+          </a:p>
+          <a:p>
+            <a:pPr lvl="1"/>
+            <a:r>
+              <a:rPr sz="1300" b="0">
+                <a:solidFill>
+                  <a:srgbClr val="212121"/>
+                </a:solidFill>
+                <a:latin typeface="Freesentation"/>
+              </a:rPr>
+              <a:t>2025년 규제 완화, 수요 급증</a:t>
+            </a:r>
+          </a:p>
+          <a:p>
+            <a:pPr>
+              <a:spcBef>
+                <a:spcPts val="300"/>
+              </a:spcBef>
+            </a:pPr>
+            <a:r>
+              <a:rPr sz="1300" b="0">
+                <a:solidFill>
+                  <a:srgbClr val="212121"/>
+                </a:solidFill>
+                <a:latin typeface="Freesentation"/>
+              </a:rPr>
+              <a:t>• 레거시 MQ 대체 수요</a:t>
+            </a:r>
+          </a:p>
+          <a:p>
+            <a:pPr lvl="1"/>
+            <a:r>
+              <a:rPr sz="1300" b="0">
+                <a:solidFill>
+                  <a:srgbClr val="212121"/>
+                </a:solidFill>
+                <a:latin typeface="Freesentation"/>
+              </a:rPr>
+              <a:t>WebSphere MQ EOL 2027, 전환 시급</a:t>
+            </a:r>
+          </a:p>
+        </p:txBody>
+      </p:sp>
+      <p:sp>
+        <p:nvSpPr>
+          <p:cNvPr id="15" name="Rounded Rectangle 14"/>
+          <p:cNvSpPr/>
+          <p:nvPr/>
+        </p:nvSpPr>
+        <p:spPr>
+          <a:xfrm>
+            <a:off x="457200" y="4343400"/>
+            <a:ext cx="5669280" cy="1828800"/>
+          </a:xfrm>
+          <a:prstGeom prst="roundRect">
+            <a:avLst>
+              <a:gd name="adj" fmla="val 4000"/>
+            </a:avLst>
+          </a:prstGeom>
+          <a:solidFill>
+            <a:srgbClr val="FBD9CC"/>
+          </a:solidFill>
+          <a:ln w="12700">
+            <a:solidFill>
+              <a:srgbClr val="DCDCDC"/>
+            </a:solidFill>
+          </a:ln>
+        </p:spPr>
+        <p:style>
+          <a:lnRef idx="1">
+            <a:schemeClr val="accent1"/>
+          </a:lnRef>
+          <a:fillRef idx="3">
+            <a:schemeClr val="accent1"/>
+          </a:fillRef>
+          <a:effectRef idx="2">
+            <a:schemeClr val="accent1"/>
+          </a:effectRef>
+          <a:fontRef idx="minor">
+            <a:schemeClr val="lt1"/>
+          </a:fontRef>
+        </p:style>
+        <p:txBody>
+          <a:bodyPr rtlCol="0" anchor="ctr"/>
+          <a:lstStyle/>
+          <a:p>
+            <a:pPr algn="ctr"/>
+          </a:p>
+        </p:txBody>
+      </p:sp>
+      <p:sp>
+        <p:nvSpPr>
+          <p:cNvPr id="16" name="TextBox 15"/>
+          <p:cNvSpPr txBox="1"/>
+          <p:nvPr/>
+        </p:nvSpPr>
+        <p:spPr>
+          <a:xfrm>
+            <a:off x="637160" y="4401000"/>
+            <a:ext cx="5124480" cy="274320"/>
+          </a:xfrm>
+          <a:prstGeom prst="rect">
+            <a:avLst/>
+          </a:prstGeom>
+          <a:noFill/>
+        </p:spPr>
+        <p:txBody>
+          <a:bodyPr wrap="square" lIns="0" rIns="0" tIns="0" bIns="0">
+            <a:spAutoFit/>
+          </a:bodyPr>
+          <a:lstStyle/>
+          <a:p>
+            <a:r>
+              <a:rPr sz="1400" b="1">
+                <a:solidFill>
+                  <a:srgbClr val="212121"/>
+                </a:solidFill>
+                <a:latin typeface="Freesentation"/>
+              </a:rPr>
+              <a:t>⚠️  약점 (Weaknesses)</a:t>
+            </a:r>
+          </a:p>
+        </p:txBody>
+      </p:sp>
+      <p:sp>
+        <p:nvSpPr>
+          <p:cNvPr id="17" name="TextBox 16"/>
+          <p:cNvSpPr txBox="1"/>
+          <p:nvPr/>
+        </p:nvSpPr>
+        <p:spPr>
+          <a:xfrm>
+            <a:off x="637160" y="4675320"/>
+            <a:ext cx="5124480" cy="1404000"/>
+          </a:xfrm>
+          <a:prstGeom prst="rect">
+            <a:avLst/>
+          </a:prstGeom>
+          <a:noFill/>
+        </p:spPr>
+        <p:txBody>
+          <a:bodyPr wrap="square" lIns="0" rIns="0" tIns="0" bIns="0">
+            <a:spAutoFit/>
+          </a:bodyPr>
+          <a:lstStyle/>
+          <a:p>
+            <a:r>
+              <a:rPr sz="1300" b="0">
+                <a:solidFill>
+                  <a:srgbClr val="212121"/>
+                </a:solidFill>
+                <a:latin typeface="Freesentation"/>
+              </a:rPr>
+              <a:t/>
+            </a:r>
+            <a:r>
+              <a:rPr sz="1300" b="0">
+                <a:solidFill>
+                  <a:srgbClr val="212121"/>
+                </a:solidFill>
+                <a:latin typeface="Freesentation"/>
+              </a:rPr>
+              <a:t>• 초기 투자 ₩8억</a:t>
+            </a:r>
+          </a:p>
+          <a:p>
+            <a:pPr lvl="1"/>
+            <a:r>
+              <a:rPr sz="1300" b="0">
+                <a:solidFill>
+                  <a:srgbClr val="212121"/>
+                </a:solidFill>
+                <a:latin typeface="Freesentation"/>
+              </a:rPr>
+              <a:t>인프라 + 인력 + 마케팅 비용</a:t>
+            </a:r>
+          </a:p>
+          <a:p>
+            <a:pPr lvl="1"/>
+            <a:r>
+              <a:rPr sz="1300" b="0">
+                <a:solidFill>
+                  <a:srgbClr val="0043DA"/>
+                </a:solidFill>
+                <a:latin typeface="Freesentation"/>
+              </a:rPr>
+              <a:t>→ 단계별 투자 12개월 계획</a:t>
+            </a:r>
+          </a:p>
+          <a:p>
+            <a:pPr>
+              <a:spcBef>
+                <a:spcPts val="300"/>
+              </a:spcBef>
+            </a:pPr>
+            <a:r>
+              <a:rPr sz="1300" b="0">
+                <a:solidFill>
+                  <a:srgbClr val="212121"/>
+                </a:solidFill>
+                <a:latin typeface="Freesentation"/>
+              </a:rPr>
+              <a:t>• ISO 27001 미취득</a:t>
+            </a:r>
+          </a:p>
+          <a:p>
+            <a:pPr lvl="1"/>
+            <a:r>
+              <a:rPr sz="1300" b="0">
+                <a:solidFill>
+                  <a:srgbClr val="212121"/>
+                </a:solidFill>
+                <a:latin typeface="Freesentation"/>
+              </a:rPr>
+              <a:t>금융권 필수 인증, 6개월 소요 예정</a:t>
+            </a:r>
+          </a:p>
+          <a:p>
+            <a:pPr lvl="1"/>
+            <a:r>
+              <a:rPr sz="1300" b="0">
+                <a:solidFill>
+                  <a:srgbClr val="0043DA"/>
+                </a:solidFill>
+                <a:latin typeface="Freesentation"/>
+              </a:rPr>
+              <a:t>→ Q2 완료 목표, 임시 파트너 인증 활용</a:t>
+            </a:r>
+          </a:p>
+        </p:txBody>
+      </p:sp>
+      <p:sp>
+        <p:nvSpPr>
+          <p:cNvPr id="18" name="Rounded Rectangle 17"/>
+          <p:cNvSpPr/>
+          <p:nvPr/>
+        </p:nvSpPr>
+        <p:spPr>
+          <a:xfrm>
+            <a:off x="6217920" y="4343400"/>
+            <a:ext cx="5516880" cy="1828800"/>
+          </a:xfrm>
+          <a:prstGeom prst="roundRect">
+            <a:avLst>
+              <a:gd name="adj" fmla="val 4000"/>
+            </a:avLst>
+          </a:prstGeom>
+          <a:solidFill>
+            <a:srgbClr val="F5CCCC"/>
+          </a:solidFill>
+          <a:ln w="12700">
+            <a:solidFill>
+              <a:srgbClr val="DCDCDC"/>
+            </a:solidFill>
+          </a:ln>
+        </p:spPr>
+        <p:style>
+          <a:lnRef idx="1">
+            <a:schemeClr val="accent1"/>
+          </a:lnRef>
+          <a:fillRef idx="3">
+            <a:schemeClr val="accent1"/>
+          </a:fillRef>
+          <a:effectRef idx="2">
+            <a:schemeClr val="accent1"/>
+          </a:effectRef>
+          <a:fontRef idx="minor">
+            <a:schemeClr val="lt1"/>
+          </a:fontRef>
+        </p:style>
+        <p:txBody>
+          <a:bodyPr rtlCol="0" anchor="ctr"/>
+          <a:lstStyle/>
+          <a:p>
+            <a:pPr algn="ctr"/>
+          </a:p>
+        </p:txBody>
+      </p:sp>
+      <p:sp>
+        <p:nvSpPr>
+          <p:cNvPr id="19" name="TextBox 18"/>
+          <p:cNvSpPr txBox="1"/>
+          <p:nvPr/>
+        </p:nvSpPr>
+        <p:spPr>
+          <a:xfrm>
+            <a:off x="6397880" y="4401000"/>
+            <a:ext cx="5124480" cy="274320"/>
+          </a:xfrm>
+          <a:prstGeom prst="rect">
+            <a:avLst/>
+          </a:prstGeom>
+          <a:noFill/>
+        </p:spPr>
+        <p:txBody>
+          <a:bodyPr wrap="square" lIns="0" rIns="0" tIns="0" bIns="0">
+            <a:spAutoFit/>
+          </a:bodyPr>
+          <a:lstStyle/>
+          <a:p>
+            <a:r>
+              <a:rPr sz="1400" b="1">
+                <a:solidFill>
+                  <a:srgbClr val="212121"/>
+                </a:solidFill>
+                <a:latin typeface="Freesentation"/>
+              </a:rPr>
+              <a:t>⛔  위협 (Threats)</a:t>
+            </a:r>
+          </a:p>
+        </p:txBody>
+      </p:sp>
+      <p:sp>
+        <p:nvSpPr>
+          <p:cNvPr id="20" name="TextBox 19"/>
+          <p:cNvSpPr txBox="1"/>
+          <p:nvPr/>
+        </p:nvSpPr>
+        <p:spPr>
+          <a:xfrm>
+            <a:off x="6397880" y="4675320"/>
+            <a:ext cx="5124480" cy="1404000"/>
+          </a:xfrm>
+          <a:prstGeom prst="rect">
+            <a:avLst/>
+          </a:prstGeom>
+          <a:noFill/>
+        </p:spPr>
+        <p:txBody>
+          <a:bodyPr wrap="square" lIns="0" rIns="0" tIns="0" bIns="0">
+            <a:spAutoFit/>
+          </a:bodyPr>
+          <a:lstStyle/>
+          <a:p>
+            <a:r>
+              <a:rPr sz="1300" b="0">
+                <a:solidFill>
+                  <a:srgbClr val="212121"/>
+                </a:solidFill>
+                <a:latin typeface="Freesentation"/>
+              </a:rPr>
+              <a:t/>
+            </a:r>
+            <a:r>
+              <a:rPr sz="1300" b="0">
+                <a:solidFill>
+                  <a:srgbClr val="212121"/>
+                </a:solidFill>
+                <a:latin typeface="Freesentation"/>
+              </a:rPr>
+              <a:t>• Confluent 국내 점유 22%</a:t>
+            </a:r>
+          </a:p>
+          <a:p>
+            <a:pPr lvl="1"/>
+            <a:r>
+              <a:rPr sz="1300" b="0">
+                <a:solidFill>
+                  <a:srgbClr val="212121"/>
+                </a:solidFill>
+                <a:latin typeface="Freesentation"/>
+              </a:rPr>
+              <a:t>2025년 서울 리전 오픈, 점유 확대 중</a:t>
+            </a:r>
+          </a:p>
+          <a:p>
+            <a:pPr lvl="1"/>
+            <a:r>
+              <a:rPr sz="1300" b="0">
+                <a:solidFill>
+                  <a:srgbClr val="0043DA"/>
+                </a:solidFill>
+                <a:latin typeface="Freesentation"/>
+              </a:rPr>
+              <a:t>→ AWS 네이티브 통합 + 가격 경쟁력 강조</a:t>
+            </a:r>
+          </a:p>
+          <a:p>
+            <a:pPr>
+              <a:spcBef>
+                <a:spcPts val="300"/>
+              </a:spcBef>
+            </a:pPr>
+            <a:r>
+              <a:rPr sz="1300" b="0">
+                <a:solidFill>
+                  <a:srgbClr val="212121"/>
+                </a:solidFill>
+                <a:latin typeface="Freesentation"/>
+              </a:rPr>
+              <a:t>• IT 예산 감축 -5%</a:t>
+            </a:r>
+          </a:p>
+          <a:p>
+            <a:pPr lvl="1"/>
+            <a:r>
+              <a:rPr sz="1300" b="0">
+                <a:solidFill>
+                  <a:srgbClr val="212121"/>
+                </a:solidFill>
+                <a:latin typeface="Freesentation"/>
+              </a:rPr>
+              <a:t>2026 Gartner 전망, 신규 도입 보수화</a:t>
+            </a:r>
+          </a:p>
+          <a:p>
+            <a:pPr lvl="1"/>
+            <a:r>
+              <a:rPr sz="1300" b="0">
+                <a:solidFill>
+                  <a:srgbClr val="0043DA"/>
+                </a:solidFill>
+                <a:latin typeface="Freesentation"/>
+              </a:rPr>
+              <a:t>→ ROI 마케팅 — TCO 35% 절감 실증</a:t>
+            </a:r>
+          </a:p>
+        </p:txBody>
+      </p:sp>
+      <p:sp>
+        <p:nvSpPr>
+          <p:cNvPr id="21" name="Rounded Rectangle 20"/>
+          <p:cNvSpPr/>
+          <p:nvPr/>
+        </p:nvSpPr>
+        <p:spPr>
+          <a:xfrm>
+            <a:off x="457200" y="6263640"/>
+            <a:ext cx="11277600" cy="457200"/>
+          </a:xfrm>
+          <a:prstGeom prst="roundRect">
+            <a:avLst>
+              <a:gd name="adj" fmla="val 4000"/>
+            </a:avLst>
+          </a:prstGeom>
+          <a:solidFill>
+            <a:srgbClr val="0043DA"/>
+          </a:solidFill>
+          <a:ln>
+            <a:noFill/>
+          </a:ln>
+        </p:spPr>
+        <p:style>
+          <a:lnRef idx="1">
+            <a:schemeClr val="accent1"/>
+          </a:lnRef>
+          <a:fillRef idx="3">
+            <a:schemeClr val="accent1"/>
+          </a:fillRef>
+          <a:effectRef idx="2">
+            <a:schemeClr val="accent1"/>
+          </a:effectRef>
+          <a:fontRef idx="minor">
+            <a:schemeClr val="lt1"/>
+          </a:fontRef>
+        </p:style>
+        <p:txBody>
+          <a:bodyPr rtlCol="0" anchor="ctr"/>
+          <a:lstStyle/>
+          <a:p>
+            <a:pPr algn="ctr"/>
+          </a:p>
+        </p:txBody>
+      </p:sp>
+      <p:sp>
+        <p:nvSpPr>
+          <p:cNvPr id="22" name="TextBox 21"/>
+          <p:cNvSpPr txBox="1"/>
+          <p:nvPr/>
+        </p:nvSpPr>
+        <p:spPr>
+          <a:xfrm>
+            <a:off x="637160" y="6309360"/>
+            <a:ext cx="11069640" cy="365760"/>
+          </a:xfrm>
+          <a:prstGeom prst="rect">
+            <a:avLst/>
+          </a:prstGeom>
+          <a:noFill/>
+        </p:spPr>
+        <p:txBody>
+          <a:bodyPr wrap="square" lIns="0" rIns="0" tIns="0" bIns="0">
+            <a:spAutoFit/>
+          </a:bodyPr>
+          <a:lstStyle/>
+          <a:p>
+            <a:r>
+              <a:rPr sz="1400" b="1">
+                <a:solidFill>
+                  <a:srgbClr val="FFFFFF"/>
+                </a:solidFill>
+                <a:latin typeface="Freesentation"/>
+              </a:rPr>
+              <a:t/>
+            </a:r>
+            <a:r>
+              <a:rPr sz="1400" b="1">
+                <a:solidFill>
+                  <a:srgbClr val="FFFFFF"/>
+                </a:solidFill>
+                <a:latin typeface="Freesentation"/>
+              </a:rPr>
+              <a:t>📋 전략 방향: SO전략 집중 — AWS 파트너십(S) × 금융권 클라우드 수요(O)로 MSK 시장 선점</a:t>
+            </a:r>
+          </a:p>
+          <a:p>
+            <a:pPr/>
+            <a:r>
+              <a:rPr sz="1300" b="0">
+                <a:solidFill>
+                  <a:srgbClr val="FFFFFF"/>
+                </a:solidFill>
+                <a:latin typeface="Freesentation"/>
+              </a:rPr>
+              <a:t>WO: ISO 27001 Q2 인증 완료 → 금융권 진입 장벽 해소 | 초기 투자 단계별 분산으로 리스크 최소화</a:t>
+            </a:r>
+          </a:p>
+        </p:txBody>
+      </p:sp>
+    </p:spTree>
+  </p:cSld>
+  <p:clrMapOvr>
+    <a:masterClrMapping/>
+  </p:clrMapOvr>
+</p:sld>
+</file>
+
+<file path=ppt/slides/slide18.xml><?xml version="1.0" encoding="utf-8"?>
+<p:sld xmlns:a="http://schemas.openxmlformats.org/drawingml/2006/main" xmlns:p="http://schemas.openxmlformats.org/presentationml/2006/main" xmlns:r="http://schemas.openxmlformats.org/officeDocument/2006/relationships">
+  <p:cSld>
+    <p:spTree>
+      <p:nvGrpSpPr>
+        <p:cNvPr id="1" name=""/>
+        <p:cNvGrpSpPr/>
+        <p:nvPr/>
+      </p:nvGrpSpPr>
+      <p:grpSpPr/>
+      <p:sp>
+        <p:nvSpPr>
+          <p:cNvPr id="2" name="Text Placeholder 1"/>
+          <p:cNvSpPr>
+            <a:spLocks noGrp="1"/>
+          </p:cNvSpPr>
+          <p:nvPr>
+            <p:ph type="body" idx="10" sz="quarter"/>
+          </p:nvPr>
+        </p:nvSpPr>
+        <p:spPr/>
+        <p:txBody>
+          <a:bodyPr/>
+          <a:lstStyle/>
+          <a:p/>
+        </p:txBody>
+      </p:sp>
+      <p:sp>
+        <p:nvSpPr>
+          <p:cNvPr id="3" name="TextBox 2"/>
+          <p:cNvSpPr txBox="1"/>
+          <p:nvPr/>
+        </p:nvSpPr>
+        <p:spPr>
+          <a:xfrm>
+            <a:off x="354288" y="557760"/>
+            <a:ext cx="2719800" cy="932280"/>
+          </a:xfrm>
+          <a:prstGeom prst="rect">
+            <a:avLst/>
+          </a:prstGeom>
+          <a:noFill/>
+        </p:spPr>
+        <p:txBody>
+          <a:bodyPr wrap="square" lIns="0" rIns="0" tIns="0" bIns="0">
+            <a:spAutoFit/>
+          </a:bodyPr>
+          <a:lstStyle/>
+          <a:p>
+            <a:pPr algn="l"/>
+            <a:r>
+              <a:rPr sz="2000" b="1">
+                <a:solidFill>
+                  <a:srgbClr val="000000"/>
+                </a:solidFill>
+                <a:latin typeface="Freesentation"/>
+              </a:rPr>
+              <a:t>L16. Detail Image</a:t>
+            </a:r>
+          </a:p>
+        </p:txBody>
+      </p:sp>
+      <p:sp>
+        <p:nvSpPr>
+          <p:cNvPr id="4" name="TextBox 3"/>
+          <p:cNvSpPr txBox="1"/>
+          <p:nvPr/>
+        </p:nvSpPr>
+        <p:spPr>
+          <a:xfrm>
+            <a:off x="3761040" y="558624"/>
+            <a:ext cx="7549368" cy="938088"/>
+          </a:xfrm>
+          <a:prstGeom prst="rect">
+            <a:avLst/>
+          </a:prstGeom>
+          <a:noFill/>
+        </p:spPr>
+        <p:txBody>
+          <a:bodyPr wrap="square" lIns="0" rIns="0" tIns="0" bIns="0">
+            <a:spAutoFit/>
+          </a:bodyPr>
+          <a:lstStyle/>
+          <a:p>
+            <a:pPr algn="l"/>
+            <a:r>
+              <a:rPr sz="1200" b="0">
+                <a:solidFill>
+                  <a:srgbClr val="212121"/>
+                </a:solidFill>
+                <a:latin typeface="Freesentation"/>
+              </a:rPr>
+              <a:t>이미지+설명 레이아웃 — 스크린샷·다이어그램 + 상세 해설</a:t>
+            </a:r>
+          </a:p>
+        </p:txBody>
+      </p:sp>
+      <p:sp>
+        <p:nvSpPr>
+          <p:cNvPr id="5" name="TextBox 4"/>
+          <p:cNvSpPr txBox="1"/>
+          <p:nvPr/>
+        </p:nvSpPr>
+        <p:spPr>
+          <a:xfrm>
+            <a:off x="457200" y="1600200"/>
+            <a:ext cx="11277600" cy="274320"/>
+          </a:xfrm>
+          <a:prstGeom prst="rect">
+            <a:avLst/>
+          </a:prstGeom>
+          <a:noFill/>
+        </p:spPr>
+        <p:txBody>
+          <a:bodyPr wrap="square">
+            <a:spAutoFit/>
+          </a:bodyPr>
+          <a:lstStyle/>
+          <a:p>
+            <a:pPr algn="l"/>
+            <a:r>
+              <a:rPr sz="1600" b="1">
+                <a:solidFill>
+                  <a:srgbClr val="0043DA"/>
+                </a:solidFill>
+                <a:latin typeface="Freesentation"/>
+              </a:rPr>
+              <a:t>AWS MSK 콘솔 — 클러스터 모니터링 구성</a:t>
+            </a:r>
+          </a:p>
+        </p:txBody>
+      </p:sp>
+      <p:sp>
+        <p:nvSpPr>
+          <p:cNvPr id="6" name="TextBox 5"/>
+          <p:cNvSpPr txBox="1"/>
+          <p:nvPr/>
+        </p:nvSpPr>
+        <p:spPr>
+          <a:xfrm>
+            <a:off x="457200" y="1965960"/>
+            <a:ext cx="11277600" cy="228600"/>
+          </a:xfrm>
+          <a:prstGeom prst="rect">
+            <a:avLst/>
+          </a:prstGeom>
+          <a:noFill/>
+        </p:spPr>
+        <p:txBody>
+          <a:bodyPr wrap="square">
+            <a:spAutoFit/>
+          </a:bodyPr>
+          <a:lstStyle/>
+          <a:p>
+            <a:pPr algn="l"/>
+            <a:r>
+              <a:rPr sz="1300" b="0">
+                <a:solidFill>
+                  <a:srgbClr val="212121"/>
+                </a:solidFill>
+                <a:latin typeface="Freesentation"/>
+              </a:rPr>
+              <a:t>CloudWatch 지표 기반 실시간 모니터링 (2026년 4월 기준)</a:t>
+            </a:r>
+          </a:p>
+        </p:txBody>
+      </p:sp>
+      <p:sp>
+        <p:nvSpPr>
+          <p:cNvPr id="7" name="TextBox 6"/>
+          <p:cNvSpPr txBox="1"/>
+          <p:nvPr/>
+        </p:nvSpPr>
+        <p:spPr>
+          <a:xfrm>
+            <a:off x="457200" y="2423160"/>
+            <a:ext cx="11277600" cy="1097280"/>
+          </a:xfrm>
+          <a:prstGeom prst="rect">
+            <a:avLst/>
+          </a:prstGeom>
+          <a:noFill/>
+        </p:spPr>
+        <p:txBody>
+          <a:bodyPr wrap="square">
+            <a:spAutoFit/>
+          </a:bodyPr>
+          <a:lstStyle/>
+          <a:p>
+            <a:r>
+              <a:rPr sz="1300" b="0">
+                <a:solidFill>
+                  <a:srgbClr val="212121"/>
+                </a:solidFill>
+                <a:latin typeface="Freesentation"/>
+              </a:rPr>
+              <a:t>① CloudWatch 콘솔 → MSK 클러스터 선택 → 모니터링 탭 확인</a:t>
+            </a:r>
+          </a:p>
+          <a:p>
+            <a:r>
+              <a:rPr sz="1300" b="0">
+                <a:solidFill>
+                  <a:srgbClr val="212121"/>
+                </a:solidFill>
+                <a:latin typeface="Freesentation"/>
+              </a:rPr>
+              <a:t>② BytesInPerSec / BytesOutPerSec 지표로 처리량 실시간 모니터링</a:t>
+            </a:r>
+          </a:p>
+          <a:p>
+            <a:r>
+              <a:rPr sz="1300" b="0">
+                <a:solidFill>
+                  <a:srgbClr val="212121"/>
+                </a:solidFill>
+                <a:latin typeface="Freesentation"/>
+              </a:rPr>
+              <a:t>③ UnderReplicatedPartitions &gt; 0 시 즉시 알람 — 복제 장애 자동 감지</a:t>
+            </a:r>
+          </a:p>
+        </p:txBody>
+      </p:sp>
+      <p:sp>
+        <p:nvSpPr>
+          <p:cNvPr id="8" name="Rectangle 7"/>
+          <p:cNvSpPr/>
+          <p:nvPr/>
+        </p:nvSpPr>
+        <p:spPr>
+          <a:xfrm>
+            <a:off x="457200" y="3657360"/>
+            <a:ext cx="11277600" cy="2926080"/>
+          </a:xfrm>
+          <a:prstGeom prst="rect">
+            <a:avLst/>
+          </a:prstGeom>
+          <a:solidFill>
+            <a:srgbClr val="E8EFFD"/>
+          </a:solidFill>
+          <a:ln w="6350">
+            <a:solidFill>
+              <a:srgbClr val="DCDCDC"/>
+            </a:solidFill>
+          </a:ln>
+        </p:spPr>
+        <p:style>
+          <a:lnRef idx="1">
+            <a:schemeClr val="accent1"/>
+          </a:lnRef>
+          <a:fillRef idx="3">
+            <a:schemeClr val="accent1"/>
+          </a:fillRef>
+          <a:effectRef idx="2">
+            <a:schemeClr val="accent1"/>
+          </a:effectRef>
+          <a:fontRef idx="minor">
+            <a:schemeClr val="lt1"/>
+          </a:fontRef>
+        </p:style>
+        <p:txBody>
+          <a:bodyPr rtlCol="0" anchor="ctr"/>
+          <a:lstStyle/>
+          <a:p>
+            <a:pPr algn="ctr"/>
+          </a:p>
+        </p:txBody>
+      </p:sp>
+      <p:sp>
+        <p:nvSpPr>
+          <p:cNvPr id="9" name="TextBox 8"/>
+          <p:cNvSpPr txBox="1"/>
+          <p:nvPr/>
+        </p:nvSpPr>
+        <p:spPr>
+          <a:xfrm>
+            <a:off x="457200" y="4846080"/>
+            <a:ext cx="11277600" cy="548640"/>
+          </a:xfrm>
+          <a:prstGeom prst="rect">
+            <a:avLst/>
+          </a:prstGeom>
+          <a:noFill/>
+        </p:spPr>
+        <p:txBody>
+          <a:bodyPr wrap="square">
+            <a:spAutoFit/>
+          </a:bodyPr>
+          <a:lstStyle/>
+          <a:p>
+            <a:pPr algn="ctr"/>
+            <a:r>
+              <a:rPr sz="1400" b="0">
+                <a:solidFill>
+                  <a:srgbClr val="9E9E9E"/>
+                </a:solidFill>
+                <a:latin typeface="Freesentation"/>
+              </a:rPr>
+              <a:t>[CloudWatch MSK 모니터링 화면]</a:t>
+            </a:r>
+          </a:p>
+        </p:txBody>
+      </p:sp>
+    </p:spTree>
+  </p:cSld>
+  <p:clrMapOvr>
+    <a:masterClrMapping/>
+  </p:clrMapOvr>
+</p:sld>
+</file>
+
+<file path=ppt/slides/slide19.xml><?xml version="1.0" encoding="utf-8"?>
+<p:sld xmlns:a="http://schemas.openxmlformats.org/drawingml/2006/main" xmlns:p="http://schemas.openxmlformats.org/presentationml/2006/main" xmlns:r="http://schemas.openxmlformats.org/officeDocument/2006/relationships">
+  <p:cSld>
+    <p:spTree>
+      <p:nvGrpSpPr>
+        <p:cNvPr id="1" name=""/>
+        <p:cNvGrpSpPr/>
+        <p:nvPr/>
+      </p:nvGrpSpPr>
+      <p:grpSpPr/>
+      <p:sp>
+        <p:nvSpPr>
+          <p:cNvPr id="2" name="Text Placeholder 1"/>
+          <p:cNvSpPr>
+            <a:spLocks noGrp="1"/>
+          </p:cNvSpPr>
+          <p:nvPr>
+            <p:ph type="body" idx="10" sz="quarter"/>
+          </p:nvPr>
+        </p:nvSpPr>
+        <p:spPr/>
+        <p:txBody>
+          <a:bodyPr/>
+          <a:lstStyle/>
+          <a:p/>
+        </p:txBody>
+      </p:sp>
+      <p:sp>
+        <p:nvSpPr>
+          <p:cNvPr id="3" name="TextBox 2"/>
+          <p:cNvSpPr txBox="1"/>
+          <p:nvPr/>
+        </p:nvSpPr>
+        <p:spPr>
+          <a:xfrm>
+            <a:off x="354288" y="557760"/>
+            <a:ext cx="2719800" cy="932280"/>
+          </a:xfrm>
+          <a:prstGeom prst="rect">
+            <a:avLst/>
+          </a:prstGeom>
+          <a:noFill/>
+        </p:spPr>
+        <p:txBody>
+          <a:bodyPr wrap="square" lIns="0" rIns="0" tIns="0" bIns="0">
+            <a:spAutoFit/>
+          </a:bodyPr>
+          <a:lstStyle/>
+          <a:p>
+            <a:pPr algn="l"/>
+            <a:r>
+              <a:rPr sz="2000" b="1">
+                <a:solidFill>
+                  <a:srgbClr val="000000"/>
+                </a:solidFill>
+                <a:latin typeface="Freesentation"/>
+              </a:rPr>
+              <a:t>L17. Image Left</a:t>
+            </a:r>
+          </a:p>
+        </p:txBody>
+      </p:sp>
+      <p:sp>
+        <p:nvSpPr>
+          <p:cNvPr id="4" name="TextBox 3"/>
+          <p:cNvSpPr txBox="1"/>
+          <p:nvPr/>
+        </p:nvSpPr>
+        <p:spPr>
+          <a:xfrm>
+            <a:off x="3761040" y="558624"/>
+            <a:ext cx="7549368" cy="938088"/>
+          </a:xfrm>
+          <a:prstGeom prst="rect">
+            <a:avLst/>
+          </a:prstGeom>
+          <a:noFill/>
+        </p:spPr>
+        <p:txBody>
+          <a:bodyPr wrap="square" lIns="0" rIns="0" tIns="0" bIns="0">
+            <a:spAutoFit/>
+          </a:bodyPr>
+          <a:lstStyle/>
+          <a:p>
+            <a:pPr algn="l"/>
+            <a:r>
+              <a:rPr sz="1200" b="0">
+                <a:solidFill>
+                  <a:srgbClr val="212121"/>
+                </a:solidFill>
+                <a:latin typeface="Freesentation"/>
+              </a:rPr>
+              <a:t>이미지+불릿 2컬럼 레이아웃 — 좌 시각자료 + 우 설명</a:t>
+            </a:r>
+          </a:p>
+        </p:txBody>
+      </p:sp>
+      <p:sp>
+        <p:nvSpPr>
+          <p:cNvPr id="5" name="TextBox 4"/>
+          <p:cNvSpPr txBox="1"/>
+          <p:nvPr/>
+        </p:nvSpPr>
+        <p:spPr>
+          <a:xfrm>
+            <a:off x="457200" y="1600200"/>
+            <a:ext cx="11277600" cy="274320"/>
+          </a:xfrm>
+          <a:prstGeom prst="rect">
+            <a:avLst/>
+          </a:prstGeom>
+          <a:noFill/>
+        </p:spPr>
+        <p:txBody>
+          <a:bodyPr wrap="square">
+            <a:spAutoFit/>
+          </a:bodyPr>
+          <a:lstStyle/>
+          <a:p>
+            <a:pPr algn="l"/>
+            <a:r>
+              <a:rPr sz="1600" b="1">
+                <a:solidFill>
+                  <a:srgbClr val="0043DA"/>
+                </a:solidFill>
+                <a:latin typeface="Freesentation"/>
+              </a:rPr>
+              <a:t>AWS MSK VPC 네트워크 아키텍처</a:t>
+            </a:r>
+          </a:p>
+        </p:txBody>
+      </p:sp>
+      <p:sp>
+        <p:nvSpPr>
+          <p:cNvPr id="6" name="TextBox 5"/>
+          <p:cNvSpPr txBox="1"/>
+          <p:nvPr/>
+        </p:nvSpPr>
+        <p:spPr>
+          <a:xfrm>
+            <a:off x="457200" y="1965960"/>
+            <a:ext cx="11277600" cy="228600"/>
+          </a:xfrm>
+          <a:prstGeom prst="rect">
+            <a:avLst/>
+          </a:prstGeom>
+          <a:noFill/>
+        </p:spPr>
+        <p:txBody>
+          <a:bodyPr wrap="square">
+            <a:spAutoFit/>
+          </a:bodyPr>
+          <a:lstStyle/>
+          <a:p>
+            <a:pPr algn="l"/>
+            <a:r>
+              <a:rPr sz="1300" b="0">
+                <a:solidFill>
+                  <a:srgbClr val="212121"/>
+                </a:solidFill>
+                <a:latin typeface="Freesentation"/>
+              </a:rPr>
+              <a:t>Private Subnet 격리 구성 — 3-Tier 보안 모델</a:t>
+            </a:r>
+          </a:p>
+        </p:txBody>
+      </p:sp>
+      <p:sp>
+        <p:nvSpPr>
+          <p:cNvPr id="7" name="Rectangle 6"/>
+          <p:cNvSpPr/>
+          <p:nvPr/>
+        </p:nvSpPr>
+        <p:spPr>
+          <a:xfrm>
+            <a:off x="457200" y="2468880"/>
+            <a:ext cx="5486400" cy="4114800"/>
+          </a:xfrm>
+          <a:prstGeom prst="rect">
+            <a:avLst/>
+          </a:prstGeom>
+          <a:solidFill>
+            <a:srgbClr val="E8EFFD"/>
+          </a:solidFill>
+          <a:ln w="6350">
+            <a:solidFill>
+              <a:srgbClr val="DCDCDC"/>
+            </a:solidFill>
+          </a:ln>
+        </p:spPr>
+        <p:style>
+          <a:lnRef idx="1">
+            <a:schemeClr val="accent1"/>
+          </a:lnRef>
+          <a:fillRef idx="3">
+            <a:schemeClr val="accent1"/>
+          </a:fillRef>
+          <a:effectRef idx="2">
+            <a:schemeClr val="accent1"/>
+          </a:effectRef>
+          <a:fontRef idx="minor">
+            <a:schemeClr val="lt1"/>
+          </a:fontRef>
+        </p:style>
+        <p:txBody>
+          <a:bodyPr rtlCol="0" anchor="ctr"/>
+          <a:lstStyle/>
+          <a:p>
+            <a:pPr algn="ctr"/>
+          </a:p>
+        </p:txBody>
+      </p:sp>
+      <p:sp>
+        <p:nvSpPr>
+          <p:cNvPr id="8" name="TextBox 7"/>
+          <p:cNvSpPr txBox="1"/>
+          <p:nvPr/>
+        </p:nvSpPr>
+        <p:spPr>
+          <a:xfrm>
+            <a:off x="457200" y="4251960"/>
+            <a:ext cx="5486400" cy="548640"/>
+          </a:xfrm>
+          <a:prstGeom prst="rect">
+            <a:avLst/>
+          </a:prstGeom>
+          <a:noFill/>
+        </p:spPr>
+        <p:txBody>
+          <a:bodyPr wrap="square">
+            <a:spAutoFit/>
+          </a:bodyPr>
+          <a:lstStyle/>
+          <a:p>
+            <a:pPr algn="ctr"/>
+            <a:r>
+              <a:rPr sz="1400" b="0">
+                <a:solidFill>
+                  <a:srgbClr val="9E9E9E"/>
+                </a:solidFill>
+                <a:latin typeface="Freesentation"/>
+              </a:rPr>
+              <a:t>[VPC 네트워크 구성도]</a:t>
+            </a:r>
+          </a:p>
+        </p:txBody>
+      </p:sp>
+      <p:sp>
+        <p:nvSpPr>
+          <p:cNvPr id="9" name="TextBox 8"/>
+          <p:cNvSpPr txBox="1"/>
+          <p:nvPr/>
+        </p:nvSpPr>
+        <p:spPr>
+          <a:xfrm>
+            <a:off x="6126000" y="2468880"/>
+            <a:ext cx="5608800" cy="4114800"/>
+          </a:xfrm>
+          <a:prstGeom prst="rect">
+            <a:avLst/>
+          </a:prstGeom>
+          <a:noFill/>
+        </p:spPr>
+        <p:txBody>
+          <a:bodyPr wrap="square">
+            <a:spAutoFit/>
+          </a:bodyPr>
+          <a:lstStyle/>
+          <a:p>
+            <a:r>
+              <a:rPr sz="1300" b="0">
+                <a:solidFill>
+                  <a:srgbClr val="212121"/>
+                </a:solidFill>
+                <a:latin typeface="Freesentation"/>
+              </a:rPr>
+              <a:t>• Public Subnet (10.0.1.0/24)</a:t>
+            </a:r>
+          </a:p>
+          <a:p>
+            <a:r>
+              <a:rPr sz="1300" b="0">
+                <a:solidFill>
+                  <a:srgbClr val="212121"/>
+                </a:solidFill>
+                <a:latin typeface="Freesentation"/>
+              </a:rPr>
+              <a:t>  ALB, NAT Gateway 배치 — 외부 트래픽 수신</a:t>
+            </a:r>
+          </a:p>
+          <a:p>
+            <a:r>
+              <a:rPr sz="1300" b="0">
+                <a:solidFill>
+                  <a:srgbClr val="212121"/>
+                </a:solidFill>
+                <a:latin typeface="Freesentation"/>
+              </a:rPr>
+              <a:t/>
+            </a:r>
+          </a:p>
+          <a:p>
+            <a:r>
+              <a:rPr sz="1300" b="0">
+                <a:solidFill>
+                  <a:srgbClr val="212121"/>
+                </a:solidFill>
+                <a:latin typeface="Freesentation"/>
+              </a:rPr>
+              <a:t>• Private Subnet (10.0.10.0/24)</a:t>
+            </a:r>
+          </a:p>
+          <a:p>
+            <a:r>
+              <a:rPr sz="1300" b="0">
+                <a:solidFill>
+                  <a:srgbClr val="212121"/>
+                </a:solidFill>
+                <a:latin typeface="Freesentation"/>
+              </a:rPr>
+              <a:t>  MSK 브로커 배치 (포트 9092/9094)</a:t>
+            </a:r>
+          </a:p>
+          <a:p>
+            <a:r>
+              <a:rPr sz="1300" b="0">
+                <a:solidFill>
+                  <a:srgbClr val="212121"/>
+                </a:solidFill>
+                <a:latin typeface="Freesentation"/>
+              </a:rPr>
+              <a:t/>
+            </a:r>
+          </a:p>
+          <a:p>
+            <a:r>
+              <a:rPr sz="1300" b="0">
+                <a:solidFill>
+                  <a:srgbClr val="212121"/>
+                </a:solidFill>
+                <a:latin typeface="Freesentation"/>
+              </a:rPr>
+              <a:t>• DB Subnet (10.0.20.0/24)</a:t>
+            </a:r>
+          </a:p>
+          <a:p>
+            <a:r>
+              <a:rPr sz="1300" b="0">
+                <a:solidFill>
+                  <a:srgbClr val="212121"/>
+                </a:solidFill>
+                <a:latin typeface="Freesentation"/>
+              </a:rPr>
+              <a:t>  S3/RDS 오프로드 — 앱서버에서만 접근</a:t>
+            </a:r>
+          </a:p>
+          <a:p>
+            <a:r>
+              <a:rPr sz="1300" b="0">
+                <a:solidFill>
+                  <a:srgbClr val="212121"/>
+                </a:solidFill>
+                <a:latin typeface="Freesentation"/>
+              </a:rPr>
+              <a:t/>
+            </a:r>
+          </a:p>
+          <a:p>
+            <a:r>
+              <a:rPr sz="1300" b="0">
+                <a:solidFill>
+                  <a:srgbClr val="212121"/>
+                </a:solidFill>
+                <a:latin typeface="Freesentation"/>
+              </a:rPr>
+              <a:t>• 보안그룹 규칙</a:t>
+            </a:r>
+          </a:p>
+          <a:p>
+            <a:r>
+              <a:rPr sz="1300" b="0">
+                <a:solidFill>
+                  <a:srgbClr val="212121"/>
+                </a:solidFill>
+                <a:latin typeface="Freesentation"/>
+              </a:rPr>
+              <a:t>  App→MSK(9092), MSK→S3(443) 허용</a:t>
+            </a:r>
+          </a:p>
+        </p:txBody>
+      </p:sp>
+    </p:spTree>
   </p:cSld>
   <p:clrMapOvr>
     <a:masterClrMapping/>
@@ -9067,6 +11980,2396 @@
 </p:sld>
 </file>
 
+<file path=ppt/slides/slide20.xml><?xml version="1.0" encoding="utf-8"?>
+<p:sld xmlns:a="http://schemas.openxmlformats.org/drawingml/2006/main" xmlns:p="http://schemas.openxmlformats.org/presentationml/2006/main" xmlns:r="http://schemas.openxmlformats.org/officeDocument/2006/relationships">
+  <p:cSld>
+    <p:spTree>
+      <p:nvGrpSpPr>
+        <p:cNvPr id="1" name=""/>
+        <p:cNvGrpSpPr/>
+        <p:nvPr/>
+      </p:nvGrpSpPr>
+      <p:grpSpPr/>
+      <p:sp>
+        <p:nvSpPr>
+          <p:cNvPr id="5" name="Rectangle 4"/>
+          <p:cNvSpPr/>
+          <p:nvPr/>
+        </p:nvSpPr>
+        <p:spPr>
+          <a:xfrm>
+            <a:off x="0" y="1600200"/>
+            <a:ext cx="12192000" cy="5257800"/>
+          </a:xfrm>
+          <a:prstGeom prst="rect">
+            <a:avLst/>
+          </a:prstGeom>
+          <a:solidFill>
+            <a:srgbClr val="1A234E"/>
+          </a:solidFill>
+          <a:ln>
+            <a:noFill/>
+          </a:ln>
+        </p:spPr>
+        <p:style>
+          <a:lnRef idx="1">
+            <a:schemeClr val="accent1"/>
+          </a:lnRef>
+          <a:fillRef idx="3">
+            <a:schemeClr val="accent1"/>
+          </a:fillRef>
+          <a:effectRef idx="2">
+            <a:schemeClr val="accent1"/>
+          </a:effectRef>
+          <a:fontRef idx="minor">
+            <a:schemeClr val="lt1"/>
+          </a:fontRef>
+        </p:style>
+        <p:txBody>
+          <a:bodyPr rtlCol="0" anchor="ctr"/>
+          <a:lstStyle/>
+          <a:p>
+            <a:pPr algn="ctr"/>
+          </a:p>
+        </p:txBody>
+      </p:sp>
+      <p:sp>
+        <p:nvSpPr>
+          <p:cNvPr id="2" name="Text Placeholder 1"/>
+          <p:cNvSpPr>
+            <a:spLocks noGrp="1"/>
+          </p:cNvSpPr>
+          <p:nvPr>
+            <p:ph type="body" idx="10" sz="quarter"/>
+          </p:nvPr>
+        </p:nvSpPr>
+        <p:spPr/>
+        <p:txBody>
+          <a:bodyPr/>
+          <a:lstStyle/>
+          <a:p/>
+        </p:txBody>
+      </p:sp>
+      <p:sp>
+        <p:nvSpPr>
+          <p:cNvPr id="3" name="TextBox 2"/>
+          <p:cNvSpPr txBox="1"/>
+          <p:nvPr/>
+        </p:nvSpPr>
+        <p:spPr>
+          <a:xfrm>
+            <a:off x="354288" y="557760"/>
+            <a:ext cx="2719800" cy="932280"/>
+          </a:xfrm>
+          <a:prstGeom prst="rect">
+            <a:avLst/>
+          </a:prstGeom>
+          <a:noFill/>
+        </p:spPr>
+        <p:txBody>
+          <a:bodyPr wrap="square" lIns="0" rIns="0" tIns="0" bIns="0">
+            <a:spAutoFit/>
+          </a:bodyPr>
+          <a:lstStyle/>
+          <a:p>
+            <a:pPr algn="l"/>
+            <a:r>
+              <a:rPr sz="2000" b="1">
+                <a:solidFill>
+                  <a:srgbClr val="000000"/>
+                </a:solidFill>
+                <a:latin typeface="Freesentation"/>
+              </a:rPr>
+              <a:t>L18. Full Image</a:t>
+            </a:r>
+          </a:p>
+        </p:txBody>
+      </p:sp>
+      <p:sp>
+        <p:nvSpPr>
+          <p:cNvPr id="4" name="TextBox 3"/>
+          <p:cNvSpPr txBox="1"/>
+          <p:nvPr/>
+        </p:nvSpPr>
+        <p:spPr>
+          <a:xfrm>
+            <a:off x="3761040" y="558624"/>
+            <a:ext cx="7549368" cy="938088"/>
+          </a:xfrm>
+          <a:prstGeom prst="rect">
+            <a:avLst/>
+          </a:prstGeom>
+          <a:noFill/>
+        </p:spPr>
+        <p:txBody>
+          <a:bodyPr wrap="square" lIns="0" rIns="0" tIns="0" bIns="0">
+            <a:spAutoFit/>
+          </a:bodyPr>
+          <a:lstStyle/>
+          <a:p>
+            <a:pPr algn="l"/>
+            <a:r>
+              <a:rPr sz="1200" b="0">
+                <a:solidFill>
+                  <a:srgbClr val="212121"/>
+                </a:solidFill>
+                <a:latin typeface="Freesentation"/>
+              </a:rPr>
+              <a:t>풀와이드 이미지 레이아웃 — 배경 + 캡션 오버레이</a:t>
+            </a:r>
+          </a:p>
+        </p:txBody>
+      </p:sp>
+      <p:sp>
+        <p:nvSpPr>
+          <p:cNvPr id="6" name="Rounded Rectangle 5"/>
+          <p:cNvSpPr/>
+          <p:nvPr/>
+        </p:nvSpPr>
+        <p:spPr>
+          <a:xfrm>
+            <a:off x="457200" y="1828800"/>
+            <a:ext cx="5486400" cy="1371600"/>
+          </a:xfrm>
+          <a:prstGeom prst="roundRect">
+            <a:avLst>
+              <a:gd name="adj" fmla="val 16667"/>
+            </a:avLst>
+          </a:prstGeom>
+          <a:solidFill>
+            <a:srgbClr val="212121"/>
+          </a:solidFill>
+          <a:ln>
+            <a:noFill/>
+          </a:ln>
+        </p:spPr>
+        <p:style>
+          <a:lnRef idx="1">
+            <a:schemeClr val="accent1"/>
+          </a:lnRef>
+          <a:fillRef idx="3">
+            <a:schemeClr val="accent1"/>
+          </a:fillRef>
+          <a:effectRef idx="2">
+            <a:schemeClr val="accent1"/>
+          </a:effectRef>
+          <a:fontRef idx="minor">
+            <a:schemeClr val="lt1"/>
+          </a:fontRef>
+        </p:style>
+        <p:txBody>
+          <a:bodyPr rtlCol="0" anchor="ctr"/>
+          <a:lstStyle/>
+          <a:p>
+            <a:pPr algn="ctr"/>
+          </a:p>
+        </p:txBody>
+      </p:sp>
+      <p:sp>
+        <p:nvSpPr>
+          <p:cNvPr id="7" name="TextBox 6"/>
+          <p:cNvSpPr txBox="1"/>
+          <p:nvPr/>
+        </p:nvSpPr>
+        <p:spPr>
+          <a:xfrm>
+            <a:off x="640080" y="2011680"/>
+            <a:ext cx="5120640" cy="548640"/>
+          </a:xfrm>
+          <a:prstGeom prst="rect">
+            <a:avLst/>
+          </a:prstGeom>
+          <a:noFill/>
+        </p:spPr>
+        <p:txBody>
+          <a:bodyPr wrap="square">
+            <a:spAutoFit/>
+          </a:bodyPr>
+          <a:lstStyle/>
+          <a:p>
+            <a:pPr algn="l"/>
+            <a:r>
+              <a:rPr sz="2400" b="1">
+                <a:solidFill>
+                  <a:srgbClr val="FFFFFF"/>
+                </a:solidFill>
+                <a:latin typeface="Freesentation"/>
+              </a:rPr>
+              <a:t>AWS MSK 클라우드 전환 전략 2026</a:t>
+            </a:r>
+          </a:p>
+        </p:txBody>
+      </p:sp>
+      <p:sp>
+        <p:nvSpPr>
+          <p:cNvPr id="8" name="TextBox 7"/>
+          <p:cNvSpPr txBox="1"/>
+          <p:nvPr/>
+        </p:nvSpPr>
+        <p:spPr>
+          <a:xfrm>
+            <a:off x="640080" y="2651760"/>
+            <a:ext cx="5120640" cy="365760"/>
+          </a:xfrm>
+          <a:prstGeom prst="rect">
+            <a:avLst/>
+          </a:prstGeom>
+          <a:noFill/>
+        </p:spPr>
+        <p:txBody>
+          <a:bodyPr wrap="square">
+            <a:spAutoFit/>
+          </a:bodyPr>
+          <a:lstStyle/>
+          <a:p>
+            <a:pPr algn="l"/>
+            <a:r>
+              <a:rPr sz="1400" b="0">
+                <a:solidFill>
+                  <a:srgbClr val="FFFFFF"/>
+                </a:solidFill>
+                <a:latin typeface="Freesentation"/>
+              </a:rPr>
+              <a:t>금융·공공 분야 실시간 이벤트 스트리밍 선도</a:t>
+            </a:r>
+          </a:p>
+        </p:txBody>
+      </p:sp>
+    </p:spTree>
+  </p:cSld>
+  <p:clrMapOvr>
+    <a:masterClrMapping/>
+  </p:clrMapOvr>
+</p:sld>
+</file>
+
+<file path=ppt/slides/slide21.xml><?xml version="1.0" encoding="utf-8"?>
+<p:sld xmlns:a="http://schemas.openxmlformats.org/drawingml/2006/main" xmlns:p="http://schemas.openxmlformats.org/presentationml/2006/main" xmlns:r="http://schemas.openxmlformats.org/officeDocument/2006/relationships">
+  <p:cSld>
+    <p:spTree>
+      <p:nvGrpSpPr>
+        <p:cNvPr id="1" name=""/>
+        <p:cNvGrpSpPr/>
+        <p:nvPr/>
+      </p:nvGrpSpPr>
+      <p:grpSpPr/>
+      <p:sp>
+        <p:nvSpPr>
+          <p:cNvPr id="2" name="Text Placeholder 1"/>
+          <p:cNvSpPr>
+            <a:spLocks noGrp="1"/>
+          </p:cNvSpPr>
+          <p:nvPr>
+            <p:ph type="body" idx="10" sz="quarter"/>
+          </p:nvPr>
+        </p:nvSpPr>
+        <p:spPr/>
+        <p:txBody>
+          <a:bodyPr/>
+          <a:lstStyle/>
+          <a:p/>
+        </p:txBody>
+      </p:sp>
+      <p:sp>
+        <p:nvSpPr>
+          <p:cNvPr id="3" name="TextBox 2"/>
+          <p:cNvSpPr txBox="1"/>
+          <p:nvPr/>
+        </p:nvSpPr>
+        <p:spPr>
+          <a:xfrm>
+            <a:off x="354288" y="557760"/>
+            <a:ext cx="2719800" cy="932280"/>
+          </a:xfrm>
+          <a:prstGeom prst="rect">
+            <a:avLst/>
+          </a:prstGeom>
+          <a:noFill/>
+        </p:spPr>
+        <p:txBody>
+          <a:bodyPr wrap="square" lIns="0" rIns="0" tIns="0" bIns="0">
+            <a:spAutoFit/>
+          </a:bodyPr>
+          <a:lstStyle/>
+          <a:p>
+            <a:pPr algn="l"/>
+            <a:r>
+              <a:rPr sz="2000" b="1">
+                <a:solidFill>
+                  <a:srgbClr val="000000"/>
+                </a:solidFill>
+                <a:latin typeface="Freesentation"/>
+              </a:rPr>
+              <a:t>L19. Icon Grid</a:t>
+            </a:r>
+          </a:p>
+        </p:txBody>
+      </p:sp>
+      <p:sp>
+        <p:nvSpPr>
+          <p:cNvPr id="4" name="TextBox 3"/>
+          <p:cNvSpPr txBox="1"/>
+          <p:nvPr/>
+        </p:nvSpPr>
+        <p:spPr>
+          <a:xfrm>
+            <a:off x="3761040" y="558624"/>
+            <a:ext cx="7549368" cy="938088"/>
+          </a:xfrm>
+          <a:prstGeom prst="rect">
+            <a:avLst/>
+          </a:prstGeom>
+          <a:noFill/>
+        </p:spPr>
+        <p:txBody>
+          <a:bodyPr wrap="square" lIns="0" rIns="0" tIns="0" bIns="0">
+            <a:spAutoFit/>
+          </a:bodyPr>
+          <a:lstStyle/>
+          <a:p>
+            <a:pPr algn="l"/>
+            <a:r>
+              <a:rPr sz="1200" b="0">
+                <a:solidFill>
+                  <a:srgbClr val="212121"/>
+                </a:solidFill>
+                <a:latin typeface="Freesentation"/>
+              </a:rPr>
+              <a:t>아이콘 그리드 레이아웃 — 3×2 기술 스택 시각화</a:t>
+            </a:r>
+          </a:p>
+        </p:txBody>
+      </p:sp>
+      <p:sp>
+        <p:nvSpPr>
+          <p:cNvPr id="5" name="TextBox 4"/>
+          <p:cNvSpPr txBox="1"/>
+          <p:nvPr/>
+        </p:nvSpPr>
+        <p:spPr>
+          <a:xfrm>
+            <a:off x="457200" y="1600200"/>
+            <a:ext cx="11277600" cy="274320"/>
+          </a:xfrm>
+          <a:prstGeom prst="rect">
+            <a:avLst/>
+          </a:prstGeom>
+          <a:noFill/>
+        </p:spPr>
+        <p:txBody>
+          <a:bodyPr wrap="square">
+            <a:spAutoFit/>
+          </a:bodyPr>
+          <a:lstStyle/>
+          <a:p>
+            <a:pPr algn="l"/>
+            <a:r>
+              <a:rPr sz="1600" b="1">
+                <a:solidFill>
+                  <a:srgbClr val="0043DA"/>
+                </a:solidFill>
+                <a:latin typeface="Freesentation"/>
+              </a:rPr>
+              <a:t>AWS MSK 통합 기술 스택</a:t>
+            </a:r>
+          </a:p>
+        </p:txBody>
+      </p:sp>
+      <p:sp>
+        <p:nvSpPr>
+          <p:cNvPr id="6" name="TextBox 5"/>
+          <p:cNvSpPr txBox="1"/>
+          <p:nvPr/>
+        </p:nvSpPr>
+        <p:spPr>
+          <a:xfrm>
+            <a:off x="457200" y="1965960"/>
+            <a:ext cx="11277600" cy="228600"/>
+          </a:xfrm>
+          <a:prstGeom prst="rect">
+            <a:avLst/>
+          </a:prstGeom>
+          <a:noFill/>
+        </p:spPr>
+        <p:txBody>
+          <a:bodyPr wrap="square">
+            <a:spAutoFit/>
+          </a:bodyPr>
+          <a:lstStyle/>
+          <a:p>
+            <a:pPr algn="l"/>
+            <a:r>
+              <a:rPr sz="1300" b="0">
+                <a:solidFill>
+                  <a:srgbClr val="212121"/>
+                </a:solidFill>
+                <a:latin typeface="Freesentation"/>
+              </a:rPr>
+              <a:t>메시징 플랫폼 핵심 구성요소 (2026년 4월 기준)</a:t>
+            </a:r>
+          </a:p>
+        </p:txBody>
+      </p:sp>
+      <p:sp>
+        <p:nvSpPr>
+          <p:cNvPr id="7" name="Rounded Rectangle 6"/>
+          <p:cNvSpPr/>
+          <p:nvPr/>
+        </p:nvSpPr>
+        <p:spPr>
+          <a:xfrm>
+            <a:off x="457200" y="2606040"/>
+            <a:ext cx="3637280" cy="1828800"/>
+          </a:xfrm>
+          <a:prstGeom prst="roundRect">
+            <a:avLst>
+              <a:gd name="adj" fmla="val 16667"/>
+            </a:avLst>
+          </a:prstGeom>
+          <a:solidFill>
+            <a:srgbClr val="F8F9FA"/>
+          </a:solidFill>
+          <a:ln w="6350">
+            <a:solidFill>
+              <a:srgbClr val="DCDCDC"/>
+            </a:solidFill>
+          </a:ln>
+        </p:spPr>
+        <p:style>
+          <a:lnRef idx="1">
+            <a:schemeClr val="accent1"/>
+          </a:lnRef>
+          <a:fillRef idx="3">
+            <a:schemeClr val="accent1"/>
+          </a:fillRef>
+          <a:effectRef idx="2">
+            <a:schemeClr val="accent1"/>
+          </a:effectRef>
+          <a:fontRef idx="minor">
+            <a:schemeClr val="lt1"/>
+          </a:fontRef>
+        </p:style>
+        <p:txBody>
+          <a:bodyPr rtlCol="0" anchor="ctr"/>
+          <a:lstStyle/>
+          <a:p>
+            <a:pPr algn="ctr"/>
+          </a:p>
+        </p:txBody>
+      </p:sp>
+      <p:pic>
+        <p:nvPicPr>
+          <p:cNvPr id="8" name="Picture 7" descr="image.png"/>
+          <p:cNvPicPr>
+            <a:picLocks noChangeAspect="1"/>
+          </p:cNvPicPr>
+          <p:nvPr/>
+        </p:nvPicPr>
+        <p:blipFill>
+          <a:blip r:embed="rId2"/>
+          <a:stretch>
+            <a:fillRect/>
+          </a:stretch>
+        </p:blipFill>
+        <p:spPr>
+          <a:xfrm>
+            <a:off x="731520" y="2880360"/>
+            <a:ext cx="548640" cy="548640"/>
+          </a:xfrm>
+          <a:prstGeom prst="rect">
+            <a:avLst/>
+          </a:prstGeom>
+        </p:spPr>
+      </p:pic>
+      <p:sp>
+        <p:nvSpPr>
+          <p:cNvPr id="9" name="TextBox 8"/>
+          <p:cNvSpPr txBox="1"/>
+          <p:nvPr/>
+        </p:nvSpPr>
+        <p:spPr>
+          <a:xfrm>
+            <a:off x="1371600" y="2926080"/>
+            <a:ext cx="2631920" cy="365760"/>
+          </a:xfrm>
+          <a:prstGeom prst="rect">
+            <a:avLst/>
+          </a:prstGeom>
+          <a:noFill/>
+        </p:spPr>
+        <p:txBody>
+          <a:bodyPr wrap="square">
+            <a:spAutoFit/>
+          </a:bodyPr>
+          <a:lstStyle/>
+          <a:p>
+            <a:pPr algn="l"/>
+            <a:r>
+              <a:rPr sz="1400" b="1">
+                <a:solidFill>
+                  <a:srgbClr val="0043DA"/>
+                </a:solidFill>
+                <a:latin typeface="Freesentation"/>
+              </a:rPr>
+              <a:t>Apache Kafka</a:t>
+            </a:r>
+          </a:p>
+        </p:txBody>
+      </p:sp>
+      <p:sp>
+        <p:nvSpPr>
+          <p:cNvPr id="10" name="TextBox 9"/>
+          <p:cNvSpPr txBox="1"/>
+          <p:nvPr/>
+        </p:nvSpPr>
+        <p:spPr>
+          <a:xfrm>
+            <a:off x="731520" y="3611880"/>
+            <a:ext cx="3180080" cy="548640"/>
+          </a:xfrm>
+          <a:prstGeom prst="rect">
+            <a:avLst/>
+          </a:prstGeom>
+          <a:noFill/>
+        </p:spPr>
+        <p:txBody>
+          <a:bodyPr wrap="square">
+            <a:spAutoFit/>
+          </a:bodyPr>
+          <a:lstStyle/>
+          <a:p>
+            <a:pPr algn="l"/>
+            <a:r>
+              <a:rPr sz="1200" b="0">
+                <a:solidFill>
+                  <a:srgbClr val="212121"/>
+                </a:solidFill>
+                <a:latin typeface="Freesentation"/>
+              </a:rPr>
+              <a:t>분산 스트리밍 플랫폼 — 메시지 브로커 코어</a:t>
+            </a:r>
+          </a:p>
+        </p:txBody>
+      </p:sp>
+      <p:sp>
+        <p:nvSpPr>
+          <p:cNvPr id="11" name="Rounded Rectangle 10"/>
+          <p:cNvSpPr/>
+          <p:nvPr/>
+        </p:nvSpPr>
+        <p:spPr>
+          <a:xfrm>
+            <a:off x="4277360" y="2606040"/>
+            <a:ext cx="3637280" cy="1828800"/>
+          </a:xfrm>
+          <a:prstGeom prst="roundRect">
+            <a:avLst>
+              <a:gd name="adj" fmla="val 16667"/>
+            </a:avLst>
+          </a:prstGeom>
+          <a:solidFill>
+            <a:srgbClr val="F8F9FA"/>
+          </a:solidFill>
+          <a:ln w="6350">
+            <a:solidFill>
+              <a:srgbClr val="DCDCDC"/>
+            </a:solidFill>
+          </a:ln>
+        </p:spPr>
+        <p:style>
+          <a:lnRef idx="1">
+            <a:schemeClr val="accent1"/>
+          </a:lnRef>
+          <a:fillRef idx="3">
+            <a:schemeClr val="accent1"/>
+          </a:fillRef>
+          <a:effectRef idx="2">
+            <a:schemeClr val="accent1"/>
+          </a:effectRef>
+          <a:fontRef idx="minor">
+            <a:schemeClr val="lt1"/>
+          </a:fontRef>
+        </p:style>
+        <p:txBody>
+          <a:bodyPr rtlCol="0" anchor="ctr"/>
+          <a:lstStyle/>
+          <a:p>
+            <a:pPr algn="ctr"/>
+          </a:p>
+        </p:txBody>
+      </p:sp>
+      <p:pic>
+        <p:nvPicPr>
+          <p:cNvPr id="12" name="Picture 11" descr="image.png"/>
+          <p:cNvPicPr>
+            <a:picLocks noChangeAspect="1"/>
+          </p:cNvPicPr>
+          <p:nvPr/>
+        </p:nvPicPr>
+        <p:blipFill>
+          <a:blip r:embed="rId3"/>
+          <a:stretch>
+            <a:fillRect/>
+          </a:stretch>
+        </p:blipFill>
+        <p:spPr>
+          <a:xfrm>
+            <a:off x="4551680" y="2880360"/>
+            <a:ext cx="548640" cy="548640"/>
+          </a:xfrm>
+          <a:prstGeom prst="rect">
+            <a:avLst/>
+          </a:prstGeom>
+        </p:spPr>
+      </p:pic>
+      <p:sp>
+        <p:nvSpPr>
+          <p:cNvPr id="13" name="TextBox 12"/>
+          <p:cNvSpPr txBox="1"/>
+          <p:nvPr/>
+        </p:nvSpPr>
+        <p:spPr>
+          <a:xfrm>
+            <a:off x="5191760" y="2926080"/>
+            <a:ext cx="2631920" cy="365760"/>
+          </a:xfrm>
+          <a:prstGeom prst="rect">
+            <a:avLst/>
+          </a:prstGeom>
+          <a:noFill/>
+        </p:spPr>
+        <p:txBody>
+          <a:bodyPr wrap="square">
+            <a:spAutoFit/>
+          </a:bodyPr>
+          <a:lstStyle/>
+          <a:p>
+            <a:pPr algn="l"/>
+            <a:r>
+              <a:rPr sz="1400" b="1">
+                <a:solidFill>
+                  <a:srgbClr val="0043DA"/>
+                </a:solidFill>
+                <a:latin typeface="Freesentation"/>
+              </a:rPr>
+              <a:t>Zookeeper</a:t>
+            </a:r>
+          </a:p>
+        </p:txBody>
+      </p:sp>
+      <p:sp>
+        <p:nvSpPr>
+          <p:cNvPr id="14" name="TextBox 13"/>
+          <p:cNvSpPr txBox="1"/>
+          <p:nvPr/>
+        </p:nvSpPr>
+        <p:spPr>
+          <a:xfrm>
+            <a:off x="4551680" y="3611880"/>
+            <a:ext cx="3180080" cy="548640"/>
+          </a:xfrm>
+          <a:prstGeom prst="rect">
+            <a:avLst/>
+          </a:prstGeom>
+          <a:noFill/>
+        </p:spPr>
+        <p:txBody>
+          <a:bodyPr wrap="square">
+            <a:spAutoFit/>
+          </a:bodyPr>
+          <a:lstStyle/>
+          <a:p>
+            <a:pPr algn="l"/>
+            <a:r>
+              <a:rPr sz="1200" b="0">
+                <a:solidFill>
+                  <a:srgbClr val="212121"/>
+                </a:solidFill>
+                <a:latin typeface="Freesentation"/>
+              </a:rPr>
+              <a:t>클러스터 메타데이터 관리 (KRaft 전환 가능)</a:t>
+            </a:r>
+          </a:p>
+        </p:txBody>
+      </p:sp>
+      <p:sp>
+        <p:nvSpPr>
+          <p:cNvPr id="15" name="Rounded Rectangle 14"/>
+          <p:cNvSpPr/>
+          <p:nvPr/>
+        </p:nvSpPr>
+        <p:spPr>
+          <a:xfrm>
+            <a:off x="8097520" y="2606040"/>
+            <a:ext cx="3637280" cy="1828800"/>
+          </a:xfrm>
+          <a:prstGeom prst="roundRect">
+            <a:avLst>
+              <a:gd name="adj" fmla="val 16667"/>
+            </a:avLst>
+          </a:prstGeom>
+          <a:solidFill>
+            <a:srgbClr val="F8F9FA"/>
+          </a:solidFill>
+          <a:ln w="6350">
+            <a:solidFill>
+              <a:srgbClr val="DCDCDC"/>
+            </a:solidFill>
+          </a:ln>
+        </p:spPr>
+        <p:style>
+          <a:lnRef idx="1">
+            <a:schemeClr val="accent1"/>
+          </a:lnRef>
+          <a:fillRef idx="3">
+            <a:schemeClr val="accent1"/>
+          </a:fillRef>
+          <a:effectRef idx="2">
+            <a:schemeClr val="accent1"/>
+          </a:effectRef>
+          <a:fontRef idx="minor">
+            <a:schemeClr val="lt1"/>
+          </a:fontRef>
+        </p:style>
+        <p:txBody>
+          <a:bodyPr rtlCol="0" anchor="ctr"/>
+          <a:lstStyle/>
+          <a:p>
+            <a:pPr algn="ctr"/>
+          </a:p>
+        </p:txBody>
+      </p:sp>
+      <p:pic>
+        <p:nvPicPr>
+          <p:cNvPr id="16" name="Picture 15" descr="image.png"/>
+          <p:cNvPicPr>
+            <a:picLocks noChangeAspect="1"/>
+          </p:cNvPicPr>
+          <p:nvPr/>
+        </p:nvPicPr>
+        <p:blipFill>
+          <a:blip r:embed="rId4"/>
+          <a:stretch>
+            <a:fillRect/>
+          </a:stretch>
+        </p:blipFill>
+        <p:spPr>
+          <a:xfrm>
+            <a:off x="8371840" y="2880360"/>
+            <a:ext cx="548640" cy="548640"/>
+          </a:xfrm>
+          <a:prstGeom prst="rect">
+            <a:avLst/>
+          </a:prstGeom>
+        </p:spPr>
+      </p:pic>
+      <p:sp>
+        <p:nvSpPr>
+          <p:cNvPr id="17" name="TextBox 16"/>
+          <p:cNvSpPr txBox="1"/>
+          <p:nvPr/>
+        </p:nvSpPr>
+        <p:spPr>
+          <a:xfrm>
+            <a:off x="9011920" y="2926080"/>
+            <a:ext cx="2631920" cy="365760"/>
+          </a:xfrm>
+          <a:prstGeom prst="rect">
+            <a:avLst/>
+          </a:prstGeom>
+          <a:noFill/>
+        </p:spPr>
+        <p:txBody>
+          <a:bodyPr wrap="square">
+            <a:spAutoFit/>
+          </a:bodyPr>
+          <a:lstStyle/>
+          <a:p>
+            <a:pPr algn="l"/>
+            <a:r>
+              <a:rPr sz="1400" b="1">
+                <a:solidFill>
+                  <a:srgbClr val="0043DA"/>
+                </a:solidFill>
+                <a:latin typeface="Freesentation"/>
+              </a:rPr>
+              <a:t>Kafka Connect</a:t>
+            </a:r>
+          </a:p>
+        </p:txBody>
+      </p:sp>
+      <p:sp>
+        <p:nvSpPr>
+          <p:cNvPr id="18" name="TextBox 17"/>
+          <p:cNvSpPr txBox="1"/>
+          <p:nvPr/>
+        </p:nvSpPr>
+        <p:spPr>
+          <a:xfrm>
+            <a:off x="8371840" y="3611880"/>
+            <a:ext cx="3180080" cy="548640"/>
+          </a:xfrm>
+          <a:prstGeom prst="rect">
+            <a:avLst/>
+          </a:prstGeom>
+          <a:noFill/>
+        </p:spPr>
+        <p:txBody>
+          <a:bodyPr wrap="square">
+            <a:spAutoFit/>
+          </a:bodyPr>
+          <a:lstStyle/>
+          <a:p>
+            <a:pPr algn="l"/>
+            <a:r>
+              <a:rPr sz="1200" b="0">
+                <a:solidFill>
+                  <a:srgbClr val="212121"/>
+                </a:solidFill>
+                <a:latin typeface="Freesentation"/>
+              </a:rPr>
+              <a:t>Source/Sink 커넥터 — 외부 시스템 통합</a:t>
+            </a:r>
+          </a:p>
+        </p:txBody>
+      </p:sp>
+      <p:sp>
+        <p:nvSpPr>
+          <p:cNvPr id="19" name="Rounded Rectangle 18"/>
+          <p:cNvSpPr/>
+          <p:nvPr/>
+        </p:nvSpPr>
+        <p:spPr>
+          <a:xfrm>
+            <a:off x="457200" y="4617720"/>
+            <a:ext cx="3637280" cy="1828800"/>
+          </a:xfrm>
+          <a:prstGeom prst="roundRect">
+            <a:avLst>
+              <a:gd name="adj" fmla="val 16667"/>
+            </a:avLst>
+          </a:prstGeom>
+          <a:solidFill>
+            <a:srgbClr val="F8F9FA"/>
+          </a:solidFill>
+          <a:ln w="6350">
+            <a:solidFill>
+              <a:srgbClr val="DCDCDC"/>
+            </a:solidFill>
+          </a:ln>
+        </p:spPr>
+        <p:style>
+          <a:lnRef idx="1">
+            <a:schemeClr val="accent1"/>
+          </a:lnRef>
+          <a:fillRef idx="3">
+            <a:schemeClr val="accent1"/>
+          </a:fillRef>
+          <a:effectRef idx="2">
+            <a:schemeClr val="accent1"/>
+          </a:effectRef>
+          <a:fontRef idx="minor">
+            <a:schemeClr val="lt1"/>
+          </a:fontRef>
+        </p:style>
+        <p:txBody>
+          <a:bodyPr rtlCol="0" anchor="ctr"/>
+          <a:lstStyle/>
+          <a:p>
+            <a:pPr algn="ctr"/>
+          </a:p>
+        </p:txBody>
+      </p:sp>
+      <p:pic>
+        <p:nvPicPr>
+          <p:cNvPr id="20" name="Picture 19" descr="database.png"/>
+          <p:cNvPicPr>
+            <a:picLocks noChangeAspect="1"/>
+          </p:cNvPicPr>
+          <p:nvPr/>
+        </p:nvPicPr>
+        <p:blipFill>
+          <a:blip r:embed="rId5"/>
+          <a:stretch>
+            <a:fillRect/>
+          </a:stretch>
+        </p:blipFill>
+        <p:spPr>
+          <a:xfrm>
+            <a:off x="731520" y="4892040"/>
+            <a:ext cx="548640" cy="548640"/>
+          </a:xfrm>
+          <a:prstGeom prst="rect">
+            <a:avLst/>
+          </a:prstGeom>
+        </p:spPr>
+      </p:pic>
+      <p:sp>
+        <p:nvSpPr>
+          <p:cNvPr id="21" name="TextBox 20"/>
+          <p:cNvSpPr txBox="1"/>
+          <p:nvPr/>
+        </p:nvSpPr>
+        <p:spPr>
+          <a:xfrm>
+            <a:off x="1371600" y="4937760"/>
+            <a:ext cx="2631920" cy="365760"/>
+          </a:xfrm>
+          <a:prstGeom prst="rect">
+            <a:avLst/>
+          </a:prstGeom>
+          <a:noFill/>
+        </p:spPr>
+        <p:txBody>
+          <a:bodyPr wrap="square">
+            <a:spAutoFit/>
+          </a:bodyPr>
+          <a:lstStyle/>
+          <a:p>
+            <a:pPr algn="l"/>
+            <a:r>
+              <a:rPr sz="1400" b="1">
+                <a:solidFill>
+                  <a:srgbClr val="0043DA"/>
+                </a:solidFill>
+                <a:latin typeface="Freesentation"/>
+              </a:rPr>
+              <a:t>Schema Registry</a:t>
+            </a:r>
+          </a:p>
+        </p:txBody>
+      </p:sp>
+      <p:sp>
+        <p:nvSpPr>
+          <p:cNvPr id="22" name="TextBox 21"/>
+          <p:cNvSpPr txBox="1"/>
+          <p:nvPr/>
+        </p:nvSpPr>
+        <p:spPr>
+          <a:xfrm>
+            <a:off x="731520" y="5623560"/>
+            <a:ext cx="3180080" cy="548640"/>
+          </a:xfrm>
+          <a:prstGeom prst="rect">
+            <a:avLst/>
+          </a:prstGeom>
+          <a:noFill/>
+        </p:spPr>
+        <p:txBody>
+          <a:bodyPr wrap="square">
+            <a:spAutoFit/>
+          </a:bodyPr>
+          <a:lstStyle/>
+          <a:p>
+            <a:pPr algn="l"/>
+            <a:r>
+              <a:rPr sz="1200" b="0">
+                <a:solidFill>
+                  <a:srgbClr val="212121"/>
+                </a:solidFill>
+                <a:latin typeface="Freesentation"/>
+              </a:rPr>
+              <a:t>Avro/Protobuf 스키마 중앙 관리</a:t>
+            </a:r>
+          </a:p>
+        </p:txBody>
+      </p:sp>
+      <p:sp>
+        <p:nvSpPr>
+          <p:cNvPr id="23" name="Rounded Rectangle 22"/>
+          <p:cNvSpPr/>
+          <p:nvPr/>
+        </p:nvSpPr>
+        <p:spPr>
+          <a:xfrm>
+            <a:off x="4277360" y="4617720"/>
+            <a:ext cx="3637280" cy="1828800"/>
+          </a:xfrm>
+          <a:prstGeom prst="roundRect">
+            <a:avLst>
+              <a:gd name="adj" fmla="val 16667"/>
+            </a:avLst>
+          </a:prstGeom>
+          <a:solidFill>
+            <a:srgbClr val="F8F9FA"/>
+          </a:solidFill>
+          <a:ln w="6350">
+            <a:solidFill>
+              <a:srgbClr val="DCDCDC"/>
+            </a:solidFill>
+          </a:ln>
+        </p:spPr>
+        <p:style>
+          <a:lnRef idx="1">
+            <a:schemeClr val="accent1"/>
+          </a:lnRef>
+          <a:fillRef idx="3">
+            <a:schemeClr val="accent1"/>
+          </a:fillRef>
+          <a:effectRef idx="2">
+            <a:schemeClr val="accent1"/>
+          </a:effectRef>
+          <a:fontRef idx="minor">
+            <a:schemeClr val="lt1"/>
+          </a:fontRef>
+        </p:style>
+        <p:txBody>
+          <a:bodyPr rtlCol="0" anchor="ctr"/>
+          <a:lstStyle/>
+          <a:p>
+            <a:pPr algn="ctr"/>
+          </a:p>
+        </p:txBody>
+      </p:sp>
+      <p:pic>
+        <p:nvPicPr>
+          <p:cNvPr id="24" name="Picture 23" descr="image.png"/>
+          <p:cNvPicPr>
+            <a:picLocks noChangeAspect="1"/>
+          </p:cNvPicPr>
+          <p:nvPr/>
+        </p:nvPicPr>
+        <p:blipFill>
+          <a:blip r:embed="rId6"/>
+          <a:stretch>
+            <a:fillRect/>
+          </a:stretch>
+        </p:blipFill>
+        <p:spPr>
+          <a:xfrm>
+            <a:off x="4551680" y="4892040"/>
+            <a:ext cx="548640" cy="548640"/>
+          </a:xfrm>
+          <a:prstGeom prst="rect">
+            <a:avLst/>
+          </a:prstGeom>
+        </p:spPr>
+      </p:pic>
+      <p:sp>
+        <p:nvSpPr>
+          <p:cNvPr id="25" name="TextBox 24"/>
+          <p:cNvSpPr txBox="1"/>
+          <p:nvPr/>
+        </p:nvSpPr>
+        <p:spPr>
+          <a:xfrm>
+            <a:off x="5191760" y="4937760"/>
+            <a:ext cx="2631920" cy="365760"/>
+          </a:xfrm>
+          <a:prstGeom prst="rect">
+            <a:avLst/>
+          </a:prstGeom>
+          <a:noFill/>
+        </p:spPr>
+        <p:txBody>
+          <a:bodyPr wrap="square">
+            <a:spAutoFit/>
+          </a:bodyPr>
+          <a:lstStyle/>
+          <a:p>
+            <a:pPr algn="l"/>
+            <a:r>
+              <a:rPr sz="1400" b="1">
+                <a:solidFill>
+                  <a:srgbClr val="0043DA"/>
+                </a:solidFill>
+                <a:latin typeface="Freesentation"/>
+              </a:rPr>
+              <a:t>CloudWatch</a:t>
+            </a:r>
+          </a:p>
+        </p:txBody>
+      </p:sp>
+      <p:sp>
+        <p:nvSpPr>
+          <p:cNvPr id="26" name="TextBox 25"/>
+          <p:cNvSpPr txBox="1"/>
+          <p:nvPr/>
+        </p:nvSpPr>
+        <p:spPr>
+          <a:xfrm>
+            <a:off x="4551680" y="5623560"/>
+            <a:ext cx="3180080" cy="548640"/>
+          </a:xfrm>
+          <a:prstGeom prst="rect">
+            <a:avLst/>
+          </a:prstGeom>
+          <a:noFill/>
+        </p:spPr>
+        <p:txBody>
+          <a:bodyPr wrap="square">
+            <a:spAutoFit/>
+          </a:bodyPr>
+          <a:lstStyle/>
+          <a:p>
+            <a:pPr algn="l"/>
+            <a:r>
+              <a:rPr sz="1200" b="0">
+                <a:solidFill>
+                  <a:srgbClr val="212121"/>
+                </a:solidFill>
+                <a:latin typeface="Freesentation"/>
+              </a:rPr>
+              <a:t>브로커·토픽 메트릭 실시간 모니터링</a:t>
+            </a:r>
+          </a:p>
+        </p:txBody>
+      </p:sp>
+      <p:sp>
+        <p:nvSpPr>
+          <p:cNvPr id="27" name="Rounded Rectangle 26"/>
+          <p:cNvSpPr/>
+          <p:nvPr/>
+        </p:nvSpPr>
+        <p:spPr>
+          <a:xfrm>
+            <a:off x="8097520" y="4617720"/>
+            <a:ext cx="3637280" cy="1828800"/>
+          </a:xfrm>
+          <a:prstGeom prst="roundRect">
+            <a:avLst>
+              <a:gd name="adj" fmla="val 16667"/>
+            </a:avLst>
+          </a:prstGeom>
+          <a:solidFill>
+            <a:srgbClr val="F8F9FA"/>
+          </a:solidFill>
+          <a:ln w="6350">
+            <a:solidFill>
+              <a:srgbClr val="DCDCDC"/>
+            </a:solidFill>
+          </a:ln>
+        </p:spPr>
+        <p:style>
+          <a:lnRef idx="1">
+            <a:schemeClr val="accent1"/>
+          </a:lnRef>
+          <a:fillRef idx="3">
+            <a:schemeClr val="accent1"/>
+          </a:fillRef>
+          <a:effectRef idx="2">
+            <a:schemeClr val="accent1"/>
+          </a:effectRef>
+          <a:fontRef idx="minor">
+            <a:schemeClr val="lt1"/>
+          </a:fontRef>
+        </p:style>
+        <p:txBody>
+          <a:bodyPr rtlCol="0" anchor="ctr"/>
+          <a:lstStyle/>
+          <a:p>
+            <a:pPr algn="ctr"/>
+          </a:p>
+        </p:txBody>
+      </p:sp>
+      <p:pic>
+        <p:nvPicPr>
+          <p:cNvPr id="28" name="Picture 27" descr="security.png"/>
+          <p:cNvPicPr>
+            <a:picLocks noChangeAspect="1"/>
+          </p:cNvPicPr>
+          <p:nvPr/>
+        </p:nvPicPr>
+        <p:blipFill>
+          <a:blip r:embed="rId7"/>
+          <a:stretch>
+            <a:fillRect/>
+          </a:stretch>
+        </p:blipFill>
+        <p:spPr>
+          <a:xfrm>
+            <a:off x="8371840" y="4892040"/>
+            <a:ext cx="548640" cy="548640"/>
+          </a:xfrm>
+          <a:prstGeom prst="rect">
+            <a:avLst/>
+          </a:prstGeom>
+        </p:spPr>
+      </p:pic>
+      <p:sp>
+        <p:nvSpPr>
+          <p:cNvPr id="29" name="TextBox 28"/>
+          <p:cNvSpPr txBox="1"/>
+          <p:nvPr/>
+        </p:nvSpPr>
+        <p:spPr>
+          <a:xfrm>
+            <a:off x="9011920" y="4937760"/>
+            <a:ext cx="2631920" cy="365760"/>
+          </a:xfrm>
+          <a:prstGeom prst="rect">
+            <a:avLst/>
+          </a:prstGeom>
+          <a:noFill/>
+        </p:spPr>
+        <p:txBody>
+          <a:bodyPr wrap="square">
+            <a:spAutoFit/>
+          </a:bodyPr>
+          <a:lstStyle/>
+          <a:p>
+            <a:pPr algn="l"/>
+            <a:r>
+              <a:rPr sz="1400" b="1">
+                <a:solidFill>
+                  <a:srgbClr val="0043DA"/>
+                </a:solidFill>
+                <a:latin typeface="Freesentation"/>
+              </a:rPr>
+              <a:t>IAM/mTLS</a:t>
+            </a:r>
+          </a:p>
+        </p:txBody>
+      </p:sp>
+      <p:sp>
+        <p:nvSpPr>
+          <p:cNvPr id="30" name="TextBox 29"/>
+          <p:cNvSpPr txBox="1"/>
+          <p:nvPr/>
+        </p:nvSpPr>
+        <p:spPr>
+          <a:xfrm>
+            <a:off x="8371840" y="5623560"/>
+            <a:ext cx="3180080" cy="548640"/>
+          </a:xfrm>
+          <a:prstGeom prst="rect">
+            <a:avLst/>
+          </a:prstGeom>
+          <a:noFill/>
+        </p:spPr>
+        <p:txBody>
+          <a:bodyPr wrap="square">
+            <a:spAutoFit/>
+          </a:bodyPr>
+          <a:lstStyle/>
+          <a:p>
+            <a:pPr algn="l"/>
+            <a:r>
+              <a:rPr sz="1200" b="0">
+                <a:solidFill>
+                  <a:srgbClr val="212121"/>
+                </a:solidFill>
+                <a:latin typeface="Freesentation"/>
+              </a:rPr>
+              <a:t>인증·암호화 — 보안 통신 계층</a:t>
+            </a:r>
+          </a:p>
+        </p:txBody>
+      </p:sp>
+    </p:spTree>
+  </p:cSld>
+  <p:clrMapOvr>
+    <a:masterClrMapping/>
+  </p:clrMapOvr>
+</p:sld>
+</file>
+
+<file path=ppt/slides/slide22.xml><?xml version="1.0" encoding="utf-8"?>
+<p:sld xmlns:a="http://schemas.openxmlformats.org/drawingml/2006/main" xmlns:p="http://schemas.openxmlformats.org/presentationml/2006/main" xmlns:r="http://schemas.openxmlformats.org/officeDocument/2006/relationships">
+  <p:cSld>
+    <p:spTree>
+      <p:nvGrpSpPr>
+        <p:cNvPr id="1" name=""/>
+        <p:cNvGrpSpPr/>
+        <p:nvPr/>
+      </p:nvGrpSpPr>
+      <p:grpSpPr/>
+      <p:sp>
+        <p:nvSpPr>
+          <p:cNvPr id="2" name="Text Placeholder 1"/>
+          <p:cNvSpPr>
+            <a:spLocks noGrp="1"/>
+          </p:cNvSpPr>
+          <p:nvPr>
+            <p:ph type="body" idx="10" sz="quarter"/>
+          </p:nvPr>
+        </p:nvSpPr>
+        <p:spPr/>
+        <p:txBody>
+          <a:bodyPr/>
+          <a:lstStyle/>
+          <a:p/>
+        </p:txBody>
+      </p:sp>
+      <p:sp>
+        <p:nvSpPr>
+          <p:cNvPr id="3" name="TextBox 2"/>
+          <p:cNvSpPr txBox="1"/>
+          <p:nvPr/>
+        </p:nvSpPr>
+        <p:spPr>
+          <a:xfrm>
+            <a:off x="354288" y="557760"/>
+            <a:ext cx="2719800" cy="932280"/>
+          </a:xfrm>
+          <a:prstGeom prst="rect">
+            <a:avLst/>
+          </a:prstGeom>
+          <a:noFill/>
+        </p:spPr>
+        <p:txBody>
+          <a:bodyPr wrap="square" lIns="0" rIns="0" tIns="0" bIns="0">
+            <a:spAutoFit/>
+          </a:bodyPr>
+          <a:lstStyle/>
+          <a:p>
+            <a:pPr algn="l"/>
+            <a:r>
+              <a:rPr sz="2000" b="1">
+                <a:solidFill>
+                  <a:srgbClr val="000000"/>
+                </a:solidFill>
+                <a:latin typeface="Freesentation"/>
+              </a:rPr>
+              <a:t>L20. Numbered List</a:t>
+            </a:r>
+          </a:p>
+        </p:txBody>
+      </p:sp>
+      <p:sp>
+        <p:nvSpPr>
+          <p:cNvPr id="4" name="TextBox 3"/>
+          <p:cNvSpPr txBox="1"/>
+          <p:nvPr/>
+        </p:nvSpPr>
+        <p:spPr>
+          <a:xfrm>
+            <a:off x="3761040" y="558624"/>
+            <a:ext cx="7549368" cy="938088"/>
+          </a:xfrm>
+          <a:prstGeom prst="rect">
+            <a:avLst/>
+          </a:prstGeom>
+          <a:noFill/>
+        </p:spPr>
+        <p:txBody>
+          <a:bodyPr wrap="square" lIns="0" rIns="0" tIns="0" bIns="0">
+            <a:spAutoFit/>
+          </a:bodyPr>
+          <a:lstStyle/>
+          <a:p>
+            <a:pPr algn="l"/>
+            <a:r>
+              <a:rPr sz="1200" b="0">
+                <a:solidFill>
+                  <a:srgbClr val="212121"/>
+                </a:solidFill>
+                <a:latin typeface="Freesentation"/>
+              </a:rPr>
+              <a:t>번호 리스트 레이아웃 — 순서 강조 단계별 절차</a:t>
+            </a:r>
+          </a:p>
+        </p:txBody>
+      </p:sp>
+      <p:sp>
+        <p:nvSpPr>
+          <p:cNvPr id="5" name="TextBox 4"/>
+          <p:cNvSpPr txBox="1"/>
+          <p:nvPr/>
+        </p:nvSpPr>
+        <p:spPr>
+          <a:xfrm>
+            <a:off x="457200" y="1600200"/>
+            <a:ext cx="11277600" cy="274320"/>
+          </a:xfrm>
+          <a:prstGeom prst="rect">
+            <a:avLst/>
+          </a:prstGeom>
+          <a:noFill/>
+        </p:spPr>
+        <p:txBody>
+          <a:bodyPr wrap="square">
+            <a:spAutoFit/>
+          </a:bodyPr>
+          <a:lstStyle/>
+          <a:p>
+            <a:pPr algn="l"/>
+            <a:r>
+              <a:rPr sz="1600" b="1">
+                <a:solidFill>
+                  <a:srgbClr val="0043DA"/>
+                </a:solidFill>
+                <a:latin typeface="Freesentation"/>
+              </a:rPr>
+              <a:t>AWS MSK 클러스터 구축 4단계</a:t>
+            </a:r>
+          </a:p>
+        </p:txBody>
+      </p:sp>
+      <p:sp>
+        <p:nvSpPr>
+          <p:cNvPr id="6" name="TextBox 5"/>
+          <p:cNvSpPr txBox="1"/>
+          <p:nvPr/>
+        </p:nvSpPr>
+        <p:spPr>
+          <a:xfrm>
+            <a:off x="457200" y="1965960"/>
+            <a:ext cx="11277600" cy="228600"/>
+          </a:xfrm>
+          <a:prstGeom prst="rect">
+            <a:avLst/>
+          </a:prstGeom>
+          <a:noFill/>
+        </p:spPr>
+        <p:txBody>
+          <a:bodyPr wrap="square">
+            <a:spAutoFit/>
+          </a:bodyPr>
+          <a:lstStyle/>
+          <a:p>
+            <a:pPr algn="l"/>
+            <a:r>
+              <a:rPr sz="1300" b="0">
+                <a:solidFill>
+                  <a:srgbClr val="212121"/>
+                </a:solidFill>
+                <a:latin typeface="Freesentation"/>
+              </a:rPr>
+              <a:t>프로덕션 환경 배포 절차 (2026년 4월 기준)</a:t>
+            </a:r>
+          </a:p>
+        </p:txBody>
+      </p:sp>
+      <p:sp>
+        <p:nvSpPr>
+          <p:cNvPr id="7" name="Oval 6"/>
+          <p:cNvSpPr/>
+          <p:nvPr/>
+        </p:nvSpPr>
+        <p:spPr>
+          <a:xfrm>
+            <a:off x="457200" y="2434590"/>
+            <a:ext cx="457200" cy="457200"/>
+          </a:xfrm>
+          <a:prstGeom prst="ellipse">
+            <a:avLst/>
+          </a:prstGeom>
+          <a:solidFill>
+            <a:srgbClr val="0043DA"/>
+          </a:solidFill>
+          <a:ln>
+            <a:noFill/>
+          </a:ln>
+        </p:spPr>
+        <p:style>
+          <a:lnRef idx="1">
+            <a:schemeClr val="accent1"/>
+          </a:lnRef>
+          <a:fillRef idx="3">
+            <a:schemeClr val="accent1"/>
+          </a:fillRef>
+          <a:effectRef idx="2">
+            <a:schemeClr val="accent1"/>
+          </a:effectRef>
+          <a:fontRef idx="minor">
+            <a:schemeClr val="lt1"/>
+          </a:fontRef>
+        </p:style>
+        <p:txBody>
+          <a:bodyPr rtlCol="0" anchor="ctr" lIns="0" rIns="0" tIns="0" bIns="0"/>
+          <a:lstStyle/>
+          <a:p>
+            <a:pPr algn="ctr"/>
+            <a:r>
+              <a:rPr sz="1800" b="1">
+                <a:solidFill>
+                  <a:srgbClr val="FFFFFF"/>
+                </a:solidFill>
+                <a:latin typeface="Freesentation 7"/>
+              </a:rPr>
+              <a:t>1</a:t>
+            </a:r>
+          </a:p>
+        </p:txBody>
+      </p:sp>
+      <p:sp>
+        <p:nvSpPr>
+          <p:cNvPr id="8" name="TextBox 7"/>
+          <p:cNvSpPr txBox="1"/>
+          <p:nvPr/>
+        </p:nvSpPr>
+        <p:spPr>
+          <a:xfrm>
+            <a:off x="1097280" y="2503170"/>
+            <a:ext cx="10637520" cy="320040"/>
+          </a:xfrm>
+          <a:prstGeom prst="rect">
+            <a:avLst/>
+          </a:prstGeom>
+          <a:noFill/>
+        </p:spPr>
+        <p:txBody>
+          <a:bodyPr wrap="square">
+            <a:spAutoFit/>
+          </a:bodyPr>
+          <a:lstStyle/>
+          <a:p>
+            <a:pPr algn="l"/>
+            <a:r>
+              <a:rPr sz="1400" b="1">
+                <a:solidFill>
+                  <a:srgbClr val="0043DA"/>
+                </a:solidFill>
+                <a:latin typeface="Freesentation"/>
+              </a:rPr>
+              <a:t>VPC 및 Subnet 설계</a:t>
+            </a:r>
+          </a:p>
+        </p:txBody>
+      </p:sp>
+      <p:sp>
+        <p:nvSpPr>
+          <p:cNvPr id="9" name="TextBox 8"/>
+          <p:cNvSpPr txBox="1"/>
+          <p:nvPr/>
+        </p:nvSpPr>
+        <p:spPr>
+          <a:xfrm>
+            <a:off x="1097280" y="2868930"/>
+            <a:ext cx="10637520" cy="457200"/>
+          </a:xfrm>
+          <a:prstGeom prst="rect">
+            <a:avLst/>
+          </a:prstGeom>
+          <a:noFill/>
+        </p:spPr>
+        <p:txBody>
+          <a:bodyPr wrap="square">
+            <a:spAutoFit/>
+          </a:bodyPr>
+          <a:lstStyle/>
+          <a:p>
+            <a:pPr algn="l"/>
+            <a:r>
+              <a:rPr sz="1300" b="0">
+                <a:solidFill>
+                  <a:srgbClr val="212121"/>
+                </a:solidFill>
+                <a:latin typeface="Freesentation"/>
+              </a:rPr>
+              <a:t>Private Subnet 3개(AZ-a/b/c) 생성, CIDR 대역 분리, 라우팅 테이블 설정</a:t>
+            </a:r>
+          </a:p>
+        </p:txBody>
+      </p:sp>
+      <p:sp>
+        <p:nvSpPr>
+          <p:cNvPr id="10" name="Oval 9"/>
+          <p:cNvSpPr/>
+          <p:nvPr/>
+        </p:nvSpPr>
+        <p:spPr>
+          <a:xfrm>
+            <a:off x="457200" y="3531870"/>
+            <a:ext cx="457200" cy="457200"/>
+          </a:xfrm>
+          <a:prstGeom prst="ellipse">
+            <a:avLst/>
+          </a:prstGeom>
+          <a:solidFill>
+            <a:srgbClr val="0043DA"/>
+          </a:solidFill>
+          <a:ln>
+            <a:noFill/>
+          </a:ln>
+        </p:spPr>
+        <p:style>
+          <a:lnRef idx="1">
+            <a:schemeClr val="accent1"/>
+          </a:lnRef>
+          <a:fillRef idx="3">
+            <a:schemeClr val="accent1"/>
+          </a:fillRef>
+          <a:effectRef idx="2">
+            <a:schemeClr val="accent1"/>
+          </a:effectRef>
+          <a:fontRef idx="minor">
+            <a:schemeClr val="lt1"/>
+          </a:fontRef>
+        </p:style>
+        <p:txBody>
+          <a:bodyPr rtlCol="0" anchor="ctr" lIns="0" rIns="0" tIns="0" bIns="0"/>
+          <a:lstStyle/>
+          <a:p>
+            <a:pPr algn="ctr"/>
+            <a:r>
+              <a:rPr sz="1800" b="1">
+                <a:solidFill>
+                  <a:srgbClr val="FFFFFF"/>
+                </a:solidFill>
+                <a:latin typeface="Freesentation 7"/>
+              </a:rPr>
+              <a:t>2</a:t>
+            </a:r>
+          </a:p>
+        </p:txBody>
+      </p:sp>
+      <p:sp>
+        <p:nvSpPr>
+          <p:cNvPr id="11" name="TextBox 10"/>
+          <p:cNvSpPr txBox="1"/>
+          <p:nvPr/>
+        </p:nvSpPr>
+        <p:spPr>
+          <a:xfrm>
+            <a:off x="1097280" y="3600450"/>
+            <a:ext cx="10637520" cy="320040"/>
+          </a:xfrm>
+          <a:prstGeom prst="rect">
+            <a:avLst/>
+          </a:prstGeom>
+          <a:noFill/>
+        </p:spPr>
+        <p:txBody>
+          <a:bodyPr wrap="square">
+            <a:spAutoFit/>
+          </a:bodyPr>
+          <a:lstStyle/>
+          <a:p>
+            <a:pPr algn="l"/>
+            <a:r>
+              <a:rPr sz="1400" b="1">
+                <a:solidFill>
+                  <a:srgbClr val="0043DA"/>
+                </a:solidFill>
+                <a:latin typeface="Freesentation"/>
+              </a:rPr>
+              <a:t>MSK 클러스터 프로비저닝</a:t>
+            </a:r>
+          </a:p>
+        </p:txBody>
+      </p:sp>
+      <p:sp>
+        <p:nvSpPr>
+          <p:cNvPr id="12" name="TextBox 11"/>
+          <p:cNvSpPr txBox="1"/>
+          <p:nvPr/>
+        </p:nvSpPr>
+        <p:spPr>
+          <a:xfrm>
+            <a:off x="1097280" y="3966210"/>
+            <a:ext cx="10637520" cy="457200"/>
+          </a:xfrm>
+          <a:prstGeom prst="rect">
+            <a:avLst/>
+          </a:prstGeom>
+          <a:noFill/>
+        </p:spPr>
+        <p:txBody>
+          <a:bodyPr wrap="square">
+            <a:spAutoFit/>
+          </a:bodyPr>
+          <a:lstStyle/>
+          <a:p>
+            <a:pPr algn="l"/>
+            <a:r>
+              <a:rPr sz="1300" b="0">
+                <a:solidFill>
+                  <a:srgbClr val="212121"/>
+                </a:solidFill>
+                <a:latin typeface="Freesentation"/>
+              </a:rPr>
+              <a:t>kafka.m5.large 3 브로커, EBS gp3 100GB, Multi-AZ 배치 설정</a:t>
+            </a:r>
+          </a:p>
+        </p:txBody>
+      </p:sp>
+      <p:sp>
+        <p:nvSpPr>
+          <p:cNvPr id="13" name="Oval 12"/>
+          <p:cNvSpPr/>
+          <p:nvPr/>
+        </p:nvSpPr>
+        <p:spPr>
+          <a:xfrm>
+            <a:off x="457200" y="4629150"/>
+            <a:ext cx="457200" cy="457200"/>
+          </a:xfrm>
+          <a:prstGeom prst="ellipse">
+            <a:avLst/>
+          </a:prstGeom>
+          <a:solidFill>
+            <a:srgbClr val="0043DA"/>
+          </a:solidFill>
+          <a:ln>
+            <a:noFill/>
+          </a:ln>
+        </p:spPr>
+        <p:style>
+          <a:lnRef idx="1">
+            <a:schemeClr val="accent1"/>
+          </a:lnRef>
+          <a:fillRef idx="3">
+            <a:schemeClr val="accent1"/>
+          </a:fillRef>
+          <a:effectRef idx="2">
+            <a:schemeClr val="accent1"/>
+          </a:effectRef>
+          <a:fontRef idx="minor">
+            <a:schemeClr val="lt1"/>
+          </a:fontRef>
+        </p:style>
+        <p:txBody>
+          <a:bodyPr rtlCol="0" anchor="ctr" lIns="0" rIns="0" tIns="0" bIns="0"/>
+          <a:lstStyle/>
+          <a:p>
+            <a:pPr algn="ctr"/>
+            <a:r>
+              <a:rPr sz="1800" b="1">
+                <a:solidFill>
+                  <a:srgbClr val="FFFFFF"/>
+                </a:solidFill>
+                <a:latin typeface="Freesentation 7"/>
+              </a:rPr>
+              <a:t>3</a:t>
+            </a:r>
+          </a:p>
+        </p:txBody>
+      </p:sp>
+      <p:sp>
+        <p:nvSpPr>
+          <p:cNvPr id="14" name="TextBox 13"/>
+          <p:cNvSpPr txBox="1"/>
+          <p:nvPr/>
+        </p:nvSpPr>
+        <p:spPr>
+          <a:xfrm>
+            <a:off x="1097280" y="4697730"/>
+            <a:ext cx="10637520" cy="320040"/>
+          </a:xfrm>
+          <a:prstGeom prst="rect">
+            <a:avLst/>
+          </a:prstGeom>
+          <a:noFill/>
+        </p:spPr>
+        <p:txBody>
+          <a:bodyPr wrap="square">
+            <a:spAutoFit/>
+          </a:bodyPr>
+          <a:lstStyle/>
+          <a:p>
+            <a:pPr algn="l"/>
+            <a:r>
+              <a:rPr sz="1400" b="1">
+                <a:solidFill>
+                  <a:srgbClr val="0043DA"/>
+                </a:solidFill>
+                <a:latin typeface="Freesentation"/>
+              </a:rPr>
+              <a:t>보안 그룹 및 IAM 정책 구성</a:t>
+            </a:r>
+          </a:p>
+        </p:txBody>
+      </p:sp>
+      <p:sp>
+        <p:nvSpPr>
+          <p:cNvPr id="15" name="TextBox 14"/>
+          <p:cNvSpPr txBox="1"/>
+          <p:nvPr/>
+        </p:nvSpPr>
+        <p:spPr>
+          <a:xfrm>
+            <a:off x="1097280" y="5063490"/>
+            <a:ext cx="10637520" cy="457200"/>
+          </a:xfrm>
+          <a:prstGeom prst="rect">
+            <a:avLst/>
+          </a:prstGeom>
+          <a:noFill/>
+        </p:spPr>
+        <p:txBody>
+          <a:bodyPr wrap="square">
+            <a:spAutoFit/>
+          </a:bodyPr>
+          <a:lstStyle/>
+          <a:p>
+            <a:pPr algn="l"/>
+            <a:r>
+              <a:rPr sz="1300" b="0">
+                <a:solidFill>
+                  <a:srgbClr val="212121"/>
+                </a:solidFill>
+                <a:latin typeface="Freesentation"/>
+              </a:rPr>
+              <a:t>포트 9092/9094 허용, IAM 정책으로 Topic 권한 제어, TLS 암호화 활성화</a:t>
+            </a:r>
+          </a:p>
+        </p:txBody>
+      </p:sp>
+      <p:sp>
+        <p:nvSpPr>
+          <p:cNvPr id="16" name="Oval 15"/>
+          <p:cNvSpPr/>
+          <p:nvPr/>
+        </p:nvSpPr>
+        <p:spPr>
+          <a:xfrm>
+            <a:off x="457200" y="5726430"/>
+            <a:ext cx="457200" cy="457200"/>
+          </a:xfrm>
+          <a:prstGeom prst="ellipse">
+            <a:avLst/>
+          </a:prstGeom>
+          <a:solidFill>
+            <a:srgbClr val="0043DA"/>
+          </a:solidFill>
+          <a:ln>
+            <a:noFill/>
+          </a:ln>
+        </p:spPr>
+        <p:style>
+          <a:lnRef idx="1">
+            <a:schemeClr val="accent1"/>
+          </a:lnRef>
+          <a:fillRef idx="3">
+            <a:schemeClr val="accent1"/>
+          </a:fillRef>
+          <a:effectRef idx="2">
+            <a:schemeClr val="accent1"/>
+          </a:effectRef>
+          <a:fontRef idx="minor">
+            <a:schemeClr val="lt1"/>
+          </a:fontRef>
+        </p:style>
+        <p:txBody>
+          <a:bodyPr rtlCol="0" anchor="ctr" lIns="0" rIns="0" tIns="0" bIns="0"/>
+          <a:lstStyle/>
+          <a:p>
+            <a:pPr algn="ctr"/>
+            <a:r>
+              <a:rPr sz="1800" b="1">
+                <a:solidFill>
+                  <a:srgbClr val="FFFFFF"/>
+                </a:solidFill>
+                <a:latin typeface="Freesentation 7"/>
+              </a:rPr>
+              <a:t>4</a:t>
+            </a:r>
+          </a:p>
+        </p:txBody>
+      </p:sp>
+      <p:sp>
+        <p:nvSpPr>
+          <p:cNvPr id="17" name="TextBox 16"/>
+          <p:cNvSpPr txBox="1"/>
+          <p:nvPr/>
+        </p:nvSpPr>
+        <p:spPr>
+          <a:xfrm>
+            <a:off x="1097280" y="5795010"/>
+            <a:ext cx="10637520" cy="320040"/>
+          </a:xfrm>
+          <a:prstGeom prst="rect">
+            <a:avLst/>
+          </a:prstGeom>
+          <a:noFill/>
+        </p:spPr>
+        <p:txBody>
+          <a:bodyPr wrap="square">
+            <a:spAutoFit/>
+          </a:bodyPr>
+          <a:lstStyle/>
+          <a:p>
+            <a:pPr algn="l"/>
+            <a:r>
+              <a:rPr sz="1400" b="1">
+                <a:solidFill>
+                  <a:srgbClr val="0043DA"/>
+                </a:solidFill>
+                <a:latin typeface="Freesentation"/>
+              </a:rPr>
+              <a:t>모니터링 및 알람 설정</a:t>
+            </a:r>
+          </a:p>
+        </p:txBody>
+      </p:sp>
+      <p:sp>
+        <p:nvSpPr>
+          <p:cNvPr id="18" name="TextBox 17"/>
+          <p:cNvSpPr txBox="1"/>
+          <p:nvPr/>
+        </p:nvSpPr>
+        <p:spPr>
+          <a:xfrm>
+            <a:off x="1097280" y="6160770"/>
+            <a:ext cx="10637520" cy="457200"/>
+          </a:xfrm>
+          <a:prstGeom prst="rect">
+            <a:avLst/>
+          </a:prstGeom>
+          <a:noFill/>
+        </p:spPr>
+        <p:txBody>
+          <a:bodyPr wrap="square">
+            <a:spAutoFit/>
+          </a:bodyPr>
+          <a:lstStyle/>
+          <a:p>
+            <a:pPr algn="l"/>
+            <a:r>
+              <a:rPr sz="1300" b="0">
+                <a:solidFill>
+                  <a:srgbClr val="212121"/>
+                </a:solidFill>
+                <a:latin typeface="Freesentation"/>
+              </a:rPr>
+              <a:t>CloudWatch 지표 활성화, CPU/Disk 임계치 알람, SNS 통보 설정</a:t>
+            </a:r>
+          </a:p>
+        </p:txBody>
+      </p:sp>
+    </p:spTree>
+  </p:cSld>
+  <p:clrMapOvr>
+    <a:masterClrMapping/>
+  </p:clrMapOvr>
+</p:sld>
+</file>
+
+<file path=ppt/slides/slide23.xml><?xml version="1.0" encoding="utf-8"?>
+<p:sld xmlns:a="http://schemas.openxmlformats.org/drawingml/2006/main" xmlns:r="http://schemas.openxmlformats.org/officeDocument/2006/relationships" xmlns:p="http://schemas.openxmlformats.org/presentationml/2006/main">
+  <p:cSld>
+    <p:spTree>
+      <p:nvGrpSpPr>
+        <p:cNvPr id="1" name=""/>
+        <p:cNvGrpSpPr/>
+        <p:nvPr/>
+      </p:nvGrpSpPr>
+      <p:grpSpPr>
+        <a:xfrm>
+          <a:off x="0" y="0"/>
+          <a:ext cx="0" cy="0"/>
+          <a:chOff x="0" y="0"/>
+          <a:chExt cx="0" cy="0"/>
+        </a:xfrm>
+      </p:grpSpPr>
+      <p:sp>
+        <p:nvSpPr>
+          <p:cNvPr id="2" name="Google Shape;679;p32"/>
+          <p:cNvSpPr txBox="1">
+            <a:spLocks/>
+          </p:cNvSpPr>
+          <p:nvPr/>
+        </p:nvSpPr>
+        <p:spPr>
+          <a:xfrm>
+            <a:off x="0" y="2699114"/>
+            <a:ext cx="12192000" cy="1019175"/>
+          </a:xfrm>
+          <a:prstGeom prst="rect">
+            <a:avLst/>
+          </a:prstGeom>
+          <a:noFill/>
+          <a:ln>
+            <a:noFill/>
+          </a:ln>
+        </p:spPr>
+        <p:txBody>
+          <a:bodyPr spcFirstLastPara="1" wrap="square" lIns="91425" tIns="45700" rIns="91425" bIns="45700" anchor="ctr" anchorCtr="0">
+            <a:normAutofit/>
+          </a:bodyPr>
+          <a:lstStyle>
+            <a:lvl1pPr marL="228600" indent="-228600" algn="l" defTabSz="914400" rtl="0" eaLnBrk="1" latinLnBrk="1" hangingPunct="1">
+              <a:lnSpc>
+                <a:spcPct val="90000"/>
+              </a:lnSpc>
+              <a:spcBef>
+                <a:spcPts val="1000"/>
+              </a:spcBef>
+              <a:buFont typeface="Arial" panose="020B0604020202020204" pitchFamily="34" charset="0"/>
+              <a:buChar char="•"/>
+              <a:defRPr sz="2800" kern="1200">
+                <a:solidFill>
+                  <a:schemeClr val="tx1"/>
+                </a:solidFill>
+                <a:latin typeface="+mn-lt"/>
+                <a:ea typeface="+mn-ea"/>
+                <a:cs typeface="+mn-cs"/>
+              </a:defRPr>
+            </a:lvl1pPr>
+            <a:lvl2pPr marL="685800" indent="-228600" algn="l" defTabSz="914400" rtl="0" eaLnBrk="1" latinLnBrk="1" hangingPunct="1">
+              <a:lnSpc>
+                <a:spcPct val="90000"/>
+              </a:lnSpc>
+              <a:spcBef>
+                <a:spcPts val="500"/>
+              </a:spcBef>
+              <a:buFont typeface="Arial" panose="020B0604020202020204" pitchFamily="34" charset="0"/>
+              <a:buChar char="•"/>
+              <a:defRPr sz="2400" kern="1200">
+                <a:solidFill>
+                  <a:schemeClr val="tx1"/>
+                </a:solidFill>
+                <a:latin typeface="+mn-lt"/>
+                <a:ea typeface="+mn-ea"/>
+                <a:cs typeface="+mn-cs"/>
+              </a:defRPr>
+            </a:lvl2pPr>
+            <a:lvl3pPr marL="1143000" indent="-228600" algn="l" defTabSz="914400" rtl="0" eaLnBrk="1" latinLnBrk="1" hangingPunct="1">
+              <a:lnSpc>
+                <a:spcPct val="90000"/>
+              </a:lnSpc>
+              <a:spcBef>
+                <a:spcPts val="500"/>
+              </a:spcBef>
+              <a:buFont typeface="Arial" panose="020B0604020202020204" pitchFamily="34" charset="0"/>
+              <a:buChar char="•"/>
+              <a:defRPr sz="2000" kern="1200">
+                <a:solidFill>
+                  <a:schemeClr val="tx1"/>
+                </a:solidFill>
+                <a:latin typeface="+mn-lt"/>
+                <a:ea typeface="+mn-ea"/>
+                <a:cs typeface="+mn-cs"/>
+              </a:defRPr>
+            </a:lvl3pPr>
+            <a:lvl4pPr marL="1600200" indent="-228600" algn="l" defTabSz="914400" rtl="0" eaLnBrk="1" latinLnBrk="1" hangingPunct="1">
+              <a:lnSpc>
+                <a:spcPct val="90000"/>
+              </a:lnSpc>
+              <a:spcBef>
+                <a:spcPts val="500"/>
+              </a:spcBef>
+              <a:buFont typeface="Arial" panose="020B0604020202020204" pitchFamily="34" charset="0"/>
+              <a:buChar char="•"/>
+              <a:defRPr sz="1800" kern="1200">
+                <a:solidFill>
+                  <a:schemeClr val="tx1"/>
+                </a:solidFill>
+                <a:latin typeface="+mn-lt"/>
+                <a:ea typeface="+mn-ea"/>
+                <a:cs typeface="+mn-cs"/>
+              </a:defRPr>
+            </a:lvl4pPr>
+            <a:lvl5pPr marL="2057400" indent="-228600" algn="l" defTabSz="914400" rtl="0" eaLnBrk="1" latinLnBrk="1" hangingPunct="1">
+              <a:lnSpc>
+                <a:spcPct val="90000"/>
+              </a:lnSpc>
+              <a:spcBef>
+                <a:spcPts val="500"/>
+              </a:spcBef>
+              <a:buFont typeface="Arial" panose="020B0604020202020204" pitchFamily="34" charset="0"/>
+              <a:buChar char="•"/>
+              <a:defRPr sz="1800" kern="1200">
+                <a:solidFill>
+                  <a:schemeClr val="tx1"/>
+                </a:solidFill>
+                <a:latin typeface="+mn-lt"/>
+                <a:ea typeface="+mn-ea"/>
+                <a:cs typeface="+mn-cs"/>
+              </a:defRPr>
+            </a:lvl5pPr>
+            <a:lvl6pPr marL="2514600" indent="-228600" algn="l" defTabSz="914400" rtl="0" eaLnBrk="1" latinLnBrk="1" hangingPunct="1">
+              <a:lnSpc>
+                <a:spcPct val="90000"/>
+              </a:lnSpc>
+              <a:spcBef>
+                <a:spcPts val="500"/>
+              </a:spcBef>
+              <a:buFont typeface="Arial" panose="020B0604020202020204" pitchFamily="34" charset="0"/>
+              <a:buChar char="•"/>
+              <a:defRPr sz="1800" kern="1200">
+                <a:solidFill>
+                  <a:schemeClr val="tx1"/>
+                </a:solidFill>
+                <a:latin typeface="+mn-lt"/>
+                <a:ea typeface="+mn-ea"/>
+                <a:cs typeface="+mn-cs"/>
+              </a:defRPr>
+            </a:lvl6pPr>
+            <a:lvl7pPr marL="2971800" indent="-228600" algn="l" defTabSz="914400" rtl="0" eaLnBrk="1" latinLnBrk="1" hangingPunct="1">
+              <a:lnSpc>
+                <a:spcPct val="90000"/>
+              </a:lnSpc>
+              <a:spcBef>
+                <a:spcPts val="500"/>
+              </a:spcBef>
+              <a:buFont typeface="Arial" panose="020B0604020202020204" pitchFamily="34" charset="0"/>
+              <a:buChar char="•"/>
+              <a:defRPr sz="1800" kern="1200">
+                <a:solidFill>
+                  <a:schemeClr val="tx1"/>
+                </a:solidFill>
+                <a:latin typeface="+mn-lt"/>
+                <a:ea typeface="+mn-ea"/>
+                <a:cs typeface="+mn-cs"/>
+              </a:defRPr>
+            </a:lvl7pPr>
+            <a:lvl8pPr marL="3429000" indent="-228600" algn="l" defTabSz="914400" rtl="0" eaLnBrk="1" latinLnBrk="1" hangingPunct="1">
+              <a:lnSpc>
+                <a:spcPct val="90000"/>
+              </a:lnSpc>
+              <a:spcBef>
+                <a:spcPts val="500"/>
+              </a:spcBef>
+              <a:buFont typeface="Arial" panose="020B0604020202020204" pitchFamily="34" charset="0"/>
+              <a:buChar char="•"/>
+              <a:defRPr sz="1800" kern="1200">
+                <a:solidFill>
+                  <a:schemeClr val="tx1"/>
+                </a:solidFill>
+                <a:latin typeface="+mn-lt"/>
+                <a:ea typeface="+mn-ea"/>
+                <a:cs typeface="+mn-cs"/>
+              </a:defRPr>
+            </a:lvl8pPr>
+            <a:lvl9pPr marL="3886200" indent="-228600" algn="l" defTabSz="914400" rtl="0" eaLnBrk="1" latinLnBrk="1" hangingPunct="1">
+              <a:lnSpc>
+                <a:spcPct val="90000"/>
+              </a:lnSpc>
+              <a:spcBef>
+                <a:spcPts val="500"/>
+              </a:spcBef>
+              <a:buFont typeface="Arial" panose="020B0604020202020204" pitchFamily="34" charset="0"/>
+              <a:buChar char="•"/>
+              <a:defRPr sz="1800" kern="1200">
+                <a:solidFill>
+                  <a:schemeClr val="tx1"/>
+                </a:solidFill>
+                <a:latin typeface="+mn-lt"/>
+                <a:ea typeface="+mn-ea"/>
+                <a:cs typeface="+mn-cs"/>
+              </a:defRPr>
+            </a:lvl9pPr>
+          </a:lstStyle>
+          <a:p>
+            <a:pPr marL="0" indent="0" algn="ctr">
+              <a:spcBef>
+                <a:spcPts val="0"/>
+              </a:spcBef>
+              <a:buClr>
+                <a:schemeClr val="lt1"/>
+              </a:buClr>
+              <a:buSzPts val="4000"/>
+              <a:buNone/>
+            </a:pPr>
+            <a:r>
+              <a:rPr lang="en-US" altLang="ko-KR" sz="6000" dirty="0">
+                <a:solidFill>
+                  <a:schemeClr val="bg1"/>
+                </a:solidFill>
+                <a:latin typeface="프리젠테이션 7 Bold" pitchFamily="2" charset="-127"/>
+                <a:ea typeface="프리젠테이션 7 Bold" pitchFamily="2" charset="-127"/>
+              </a:rPr>
+              <a:t>Thank You</a:t>
+            </a:r>
+          </a:p>
+        </p:txBody>
+      </p:sp>
+      <p:pic>
+        <p:nvPicPr>
+          <p:cNvPr id="28" name="그림 27"/>
+          <p:cNvPicPr>
+            <a:picLocks noChangeAspect="1"/>
+          </p:cNvPicPr>
+          <p:nvPr/>
+        </p:nvPicPr>
+        <p:blipFill>
+          <a:blip r:embed="rId2" cstate="print">
+            <a:extLst>
+              <a:ext uri="{28A0092B-C50C-407E-A947-70E740481C1C}">
+                <a14:useLocalDpi xmlns:a14="http://schemas.microsoft.com/office/drawing/2010/main" val="0"/>
+              </a:ext>
+            </a:extLst>
+          </a:blip>
+          <a:stretch>
+            <a:fillRect/>
+          </a:stretch>
+        </p:blipFill>
+        <p:spPr>
+          <a:xfrm>
+            <a:off x="5402036" y="378400"/>
+            <a:ext cx="1329872" cy="330546"/>
+          </a:xfrm>
+          <a:prstGeom prst="rect">
+            <a:avLst/>
+          </a:prstGeom>
+        </p:spPr>
+      </p:pic>
+      <p:sp>
+        <p:nvSpPr>
+          <p:cNvPr id="35" name="TextBox 34"/>
+          <p:cNvSpPr txBox="1"/>
+          <p:nvPr/>
+        </p:nvSpPr>
+        <p:spPr>
+          <a:xfrm>
+            <a:off x="3398157" y="3870726"/>
+            <a:ext cx="5395685" cy="543635"/>
+          </a:xfrm>
+          <a:prstGeom prst="rect">
+            <a:avLst/>
+          </a:prstGeom>
+          <a:noFill/>
+        </p:spPr>
+        <p:txBody>
+          <a:bodyPr wrap="square" lIns="0" tIns="0" rIns="0" bIns="0" rtlCol="0" anchor="ctr" anchorCtr="0">
+            <a:noAutofit/>
+          </a:bodyPr>
+          <a:lstStyle/>
+          <a:p>
+            <a:pPr latinLnBrk="0"/>
+            <a:r>
+              <a:rPr lang="en-US" altLang="ko-KR" sz="1600" dirty="0">
+                <a:ln>
+                  <a:solidFill>
+                    <a:schemeClr val="accent1">
+                      <a:alpha val="0"/>
+                    </a:schemeClr>
+                  </a:solidFill>
+                </a:ln>
+                <a:solidFill>
+                  <a:schemeClr val="bg1"/>
+                </a:solidFill>
+                <a:latin typeface="프리젠테이션 4 Regular" pitchFamily="2" charset="-127"/>
+                <a:ea typeface="프리젠테이션 4 Regular" pitchFamily="2" charset="-127"/>
+                <a:cs typeface="Pretendard" panose="02000503000000020004" pitchFamily="2" charset="-127"/>
+              </a:rPr>
+              <a:t>GS</a:t>
+            </a:r>
+            <a:r>
+              <a:rPr lang="ko-KR" altLang="en-US" sz="1600" dirty="0" err="1">
+                <a:ln>
+                  <a:solidFill>
+                    <a:schemeClr val="accent1">
+                      <a:alpha val="0"/>
+                    </a:schemeClr>
+                  </a:solidFill>
+                </a:ln>
+                <a:solidFill>
+                  <a:schemeClr val="bg1"/>
+                </a:solidFill>
+                <a:latin typeface="프리젠테이션 4 Regular" pitchFamily="2" charset="-127"/>
+                <a:ea typeface="프리젠테이션 4 Regular" pitchFamily="2" charset="-127"/>
+                <a:cs typeface="Pretendard" panose="02000503000000020004" pitchFamily="2" charset="-127"/>
+              </a:rPr>
+              <a:t>네오텍의</a:t>
+            </a:r>
+            <a:r>
+              <a:rPr lang="ko-KR" altLang="en-US" sz="1600" dirty="0">
+                <a:ln>
+                  <a:solidFill>
+                    <a:schemeClr val="accent1">
+                      <a:alpha val="0"/>
+                    </a:schemeClr>
+                  </a:solidFill>
+                </a:ln>
+                <a:solidFill>
+                  <a:schemeClr val="bg1"/>
+                </a:solidFill>
+                <a:latin typeface="프리젠테이션 4 Regular" pitchFamily="2" charset="-127"/>
+                <a:ea typeface="프리젠테이션 4 Regular" pitchFamily="2" charset="-127"/>
+                <a:cs typeface="Pretendard" panose="02000503000000020004" pitchFamily="2" charset="-127"/>
+              </a:rPr>
+              <a:t> </a:t>
+            </a:r>
+            <a:r>
+              <a:rPr lang="en-US" altLang="ko-KR" sz="1600" dirty="0">
+                <a:ln>
+                  <a:solidFill>
+                    <a:schemeClr val="accent1">
+                      <a:alpha val="0"/>
+                    </a:schemeClr>
+                  </a:solidFill>
+                </a:ln>
+                <a:solidFill>
+                  <a:schemeClr val="bg1"/>
+                </a:solidFill>
+                <a:latin typeface="프리젠테이션 4 Regular" pitchFamily="2" charset="-127"/>
+                <a:ea typeface="프리젠테이션 4 Regular" pitchFamily="2" charset="-127"/>
+                <a:cs typeface="Pretendard" panose="02000503000000020004" pitchFamily="2" charset="-127"/>
+              </a:rPr>
+              <a:t>IT</a:t>
+            </a:r>
+            <a:r>
+              <a:rPr lang="ko-KR" altLang="en-US" sz="1600" dirty="0">
+                <a:ln>
+                  <a:solidFill>
+                    <a:schemeClr val="accent1">
+                      <a:alpha val="0"/>
+                    </a:schemeClr>
+                  </a:solidFill>
+                </a:ln>
+                <a:solidFill>
+                  <a:schemeClr val="bg1"/>
+                </a:solidFill>
+                <a:latin typeface="프리젠테이션 4 Regular" pitchFamily="2" charset="-127"/>
+                <a:ea typeface="프리젠테이션 4 Regular" pitchFamily="2" charset="-127"/>
+                <a:cs typeface="Pretendard" panose="02000503000000020004" pitchFamily="2" charset="-127"/>
+              </a:rPr>
+              <a:t>서비스 브랜드 </a:t>
+            </a:r>
+            <a:r>
+              <a:rPr lang="en-US" altLang="ko-KR" sz="1600" dirty="0" err="1">
+                <a:ln>
+                  <a:solidFill>
+                    <a:schemeClr val="accent1">
+                      <a:alpha val="0"/>
+                    </a:schemeClr>
+                  </a:solidFill>
+                </a:ln>
+                <a:solidFill>
+                  <a:schemeClr val="bg1"/>
+                </a:solidFill>
+                <a:latin typeface="프리젠테이션 4 Regular" pitchFamily="2" charset="-127"/>
+                <a:ea typeface="프리젠테이션 4 Regular" pitchFamily="2" charset="-127"/>
+                <a:cs typeface="Pretendard" panose="02000503000000020004" pitchFamily="2" charset="-127"/>
+              </a:rPr>
+              <a:t>WiseN</a:t>
+            </a:r>
+            <a:r>
+              <a:rPr lang="ko-KR" altLang="en-US" sz="1600" dirty="0">
+                <a:ln>
+                  <a:solidFill>
+                    <a:schemeClr val="accent1">
+                      <a:alpha val="0"/>
+                    </a:schemeClr>
+                  </a:solidFill>
+                </a:ln>
+                <a:solidFill>
+                  <a:schemeClr val="bg1"/>
+                </a:solidFill>
+                <a:latin typeface="프리젠테이션 4 Regular" pitchFamily="2" charset="-127"/>
+                <a:ea typeface="프리젠테이션 4 Regular" pitchFamily="2" charset="-127"/>
+                <a:cs typeface="Pretendard" panose="02000503000000020004" pitchFamily="2" charset="-127"/>
+              </a:rPr>
+              <a:t>으로 진정한 프리미엄을 경험하세요</a:t>
+            </a:r>
+            <a:r>
+              <a:rPr lang="en-US" altLang="ko-KR" sz="1600" dirty="0">
+                <a:ln>
+                  <a:solidFill>
+                    <a:schemeClr val="accent1">
+                      <a:alpha val="0"/>
+                    </a:schemeClr>
+                  </a:solidFill>
+                </a:ln>
+                <a:solidFill>
+                  <a:schemeClr val="bg1"/>
+                </a:solidFill>
+                <a:latin typeface="프리젠테이션 4 Regular" pitchFamily="2" charset="-127"/>
+                <a:ea typeface="프리젠테이션 4 Regular" pitchFamily="2" charset="-127"/>
+                <a:cs typeface="Pretendard" panose="02000503000000020004" pitchFamily="2" charset="-127"/>
+              </a:rPr>
+              <a:t>.</a:t>
+            </a:r>
+          </a:p>
+        </p:txBody>
+      </p:sp>
+    </p:spTree>
+    <p:extLst>
+      <p:ext uri="{BB962C8B-B14F-4D97-AF65-F5344CB8AC3E}">
+        <p14:creationId xmlns:p14="http://schemas.microsoft.com/office/powerpoint/2010/main" val="3722360403"/>
+      </p:ext>
+    </p:extLst>
+  </p:cSld>
+  <p:clrMapOvr>
+    <a:masterClrMapping/>
+  </p:clrMapOvr>
+</p:sld>
+</file>
+
 <file path=ppt/slides/slide3.xml><?xml version="1.0" encoding="utf-8"?>
 <p:sld xmlns:a="http://schemas.openxmlformats.org/drawingml/2006/main" xmlns:r="http://schemas.openxmlformats.org/officeDocument/2006/relationships" xmlns:p="http://schemas.openxmlformats.org/presentationml/2006/main">
   <p:cSld>
@@ -9535,7 +14838,7 @@
           </a:ln>
         </p:spPr>
         <p:txBody>
-          <a:bodyPr anchor="t" lIns="0" tIns="0" rIns="0" bIns="0"/>
+          <a:bodyPr lIns="0" tIns="0" rIns="0" bIns="0" anchor="t"/>
           <a:lstStyle/>
           <a:p>
             <a:r>
@@ -9570,7 +14873,7 @@
           </a:ln>
         </p:spPr>
         <p:txBody>
-          <a:bodyPr wrap="square" lIns="0" rIns="0" tIns="0" bIns="0">
+          <a:bodyPr wrap="square" lIns="0" tIns="0" rIns="0" bIns="0">
             <a:spAutoFit/>
           </a:bodyPr>
           <a:lstStyle/>
@@ -9578,12 +14881,6 @@
             <a:r>
               <a:rPr sz="1200" dirty="0">
                 <a:latin typeface="Freesentation"/>
-                <a:solidFill>
-                  <a:schemeClr val="tx1">
-                    <a:lumMod val="75000"/>
-                    <a:lumOff val="25000"/>
-                  </a:schemeClr>
-                </a:solidFill>
               </a:rPr>
               <a:t>좌 50% + 우 2분할 레이아웃 테스트</a:t>
             </a:r>
@@ -10436,9 +15733,6 @@
             <a:r>
               <a:rPr sz="1300" b="1">
                 <a:latin typeface="Freesentation"/>
-                <a:solidFill>
-                  <a:srgbClr val="1B3A5C"/>
-                </a:solidFill>
               </a:rPr>
               <a:t>MSK Cluster (Multi-AZ Brokers)</a:t>
             </a:r>
@@ -11205,7 +16499,7 @@
           </a:ln>
         </p:spPr>
         <p:txBody>
-          <a:bodyPr anchor="t" lIns="0" tIns="0" rIns="0" bIns="0"/>
+          <a:bodyPr lIns="0" tIns="0" rIns="0" bIns="0" anchor="t"/>
           <a:lstStyle/>
           <a:p>
             <a:r>
@@ -11240,7 +16534,7 @@
           </a:ln>
         </p:spPr>
         <p:txBody>
-          <a:bodyPr wrap="square" lIns="0" rIns="0" tIns="0" bIns="0">
+          <a:bodyPr wrap="square" lIns="0" tIns="0" rIns="0" bIns="0">
             <a:spAutoFit/>
           </a:bodyPr>
           <a:lstStyle/>
@@ -11248,12 +16542,6 @@
             <a:r>
               <a:rPr sz="1200" dirty="0">
                 <a:latin typeface="Freesentation"/>
-                <a:solidFill>
-                  <a:schemeClr val="tx1">
-                    <a:lumMod val="75000"/>
-                    <a:lumOff val="25000"/>
-                  </a:schemeClr>
-                </a:solidFill>
               </a:rPr>
               <a:t>3열 카드 레이아웃 테스트</a:t>
             </a:r>
@@ -11392,8 +16680,8 @@
         </p:nvSpPr>
         <p:spPr>
           <a:xfrm>
-            <a:off x="564093" y="2628900"/>
-            <a:ext cx="5394960" cy="1828800"/>
+            <a:off x="457200" y="2628900"/>
+            <a:ext cx="5501853" cy="1828800"/>
           </a:xfrm>
           <a:prstGeom prst="roundRect">
             <a:avLst/>
@@ -11439,7 +16727,7 @@
         <p:spPr>
           <a:xfrm>
             <a:off x="6233190" y="2628900"/>
-            <a:ext cx="5394960" cy="1828800"/>
+            <a:ext cx="5501610" cy="1828800"/>
           </a:xfrm>
           <a:prstGeom prst="roundRect">
             <a:avLst/>
@@ -11484,8 +16772,8 @@
         </p:nvSpPr>
         <p:spPr>
           <a:xfrm>
-            <a:off x="564093" y="4732020"/>
-            <a:ext cx="5394960" cy="1737360"/>
+            <a:off x="457200" y="4732020"/>
+            <a:ext cx="5501853" cy="1737360"/>
           </a:xfrm>
           <a:prstGeom prst="roundRect">
             <a:avLst/>
@@ -11531,7 +16819,7 @@
         <p:spPr>
           <a:xfrm>
             <a:off x="6233190" y="4732020"/>
-            <a:ext cx="5394960" cy="1737360"/>
+            <a:ext cx="5501610" cy="1737360"/>
           </a:xfrm>
           <a:prstGeom prst="roundRect">
             <a:avLst/>
@@ -11576,7 +16864,7 @@
         </p:nvSpPr>
         <p:spPr>
           <a:xfrm>
-            <a:off x="744093" y="2691622"/>
+            <a:off x="637200" y="2691622"/>
             <a:ext cx="5034960" cy="365760"/>
           </a:xfrm>
           <a:prstGeom prst="rect">
@@ -11614,7 +16902,7 @@
         <p:spPr>
           <a:xfrm>
             <a:off x="6413190" y="2691622"/>
-            <a:ext cx="5034960" cy="365760"/>
+            <a:ext cx="5141610" cy="365760"/>
           </a:xfrm>
           <a:prstGeom prst="rect">
             <a:avLst/>
@@ -11650,7 +16938,7 @@
         </p:nvSpPr>
         <p:spPr>
           <a:xfrm>
-            <a:off x="744093" y="4789548"/>
+            <a:off x="637200" y="4789548"/>
             <a:ext cx="5034960" cy="365760"/>
           </a:xfrm>
           <a:prstGeom prst="rect">
@@ -11688,7 +16976,7 @@
         <p:spPr>
           <a:xfrm>
             <a:off x="6413190" y="4789548"/>
-            <a:ext cx="5034960" cy="365760"/>
+            <a:ext cx="5141610" cy="365760"/>
           </a:xfrm>
           <a:prstGeom prst="rect">
             <a:avLst/>
@@ -11724,7 +17012,7 @@
         </p:nvSpPr>
         <p:spPr>
           <a:xfrm>
-            <a:off x="744093" y="3165382"/>
+            <a:off x="637200" y="3165382"/>
             <a:ext cx="5034960" cy="1097280"/>
           </a:xfrm>
           <a:prstGeom prst="rect">
@@ -11784,7 +17072,7 @@
         <p:spPr>
           <a:xfrm>
             <a:off x="6413190" y="3165382"/>
-            <a:ext cx="5034960" cy="1097280"/>
+            <a:ext cx="5141610" cy="1097280"/>
           </a:xfrm>
           <a:prstGeom prst="rect">
             <a:avLst/>
@@ -11842,7 +17130,7 @@
         </p:nvSpPr>
         <p:spPr>
           <a:xfrm>
-            <a:off x="744093" y="5263308"/>
+            <a:off x="637200" y="5263308"/>
             <a:ext cx="5034960" cy="1097280"/>
           </a:xfrm>
           <a:prstGeom prst="rect">
@@ -11902,7 +17190,7 @@
         <p:spPr>
           <a:xfrm>
             <a:off x="6413190" y="5263308"/>
-            <a:ext cx="5034960" cy="1097280"/>
+            <a:ext cx="5141610" cy="1097280"/>
           </a:xfrm>
           <a:prstGeom prst="rect">
             <a:avLst/>
@@ -11992,7 +17280,7 @@
         </p:blipFill>
         <p:spPr>
           <a:xfrm>
-            <a:off x="11034064" y="2766060"/>
+            <a:off x="11140714" y="2766060"/>
             <a:ext cx="411480" cy="411480"/>
           </a:xfrm>
           <a:prstGeom prst="rect">
@@ -12040,7 +17328,7 @@
         </p:blipFill>
         <p:spPr>
           <a:xfrm>
-            <a:off x="11034064" y="4869180"/>
+            <a:off x="11140714" y="4869180"/>
             <a:ext cx="411480" cy="411480"/>
           </a:xfrm>
           <a:prstGeom prst="rect">
@@ -12068,7 +17356,7 @@
           </a:ln>
         </p:spPr>
         <p:txBody>
-          <a:bodyPr anchor="t" lIns="0" tIns="0" rIns="0" bIns="0"/>
+          <a:bodyPr lIns="0" tIns="0" rIns="0" bIns="0" anchor="t"/>
           <a:lstStyle/>
           <a:p>
             <a:r>
@@ -12103,7 +17391,7 @@
           </a:ln>
         </p:spPr>
         <p:txBody>
-          <a:bodyPr wrap="square" lIns="0" rIns="0" tIns="0" bIns="0">
+          <a:bodyPr wrap="square" lIns="0" tIns="0" rIns="0" bIns="0">
             <a:spAutoFit/>
           </a:bodyPr>
           <a:lstStyle/>
@@ -12111,12 +17399,6 @@
             <a:r>
               <a:rPr sz="1200" dirty="0">
                 <a:latin typeface="Freesentation"/>
-                <a:solidFill>
-                  <a:schemeClr val="tx1">
-                    <a:lumMod val="75000"/>
-                    <a:lumOff val="25000"/>
-                  </a:schemeClr>
-                </a:solidFill>
               </a:rPr>
               <a:t>2x2 카드 그리드 레이아웃 테스트</a:t>
             </a:r>
@@ -12899,7 +18181,7 @@
           </a:ln>
         </p:spPr>
         <p:txBody>
-          <a:bodyPr anchor="t" lIns="0" tIns="0" rIns="0" bIns="0"/>
+          <a:bodyPr lIns="0" tIns="0" rIns="0" bIns="0" anchor="t"/>
           <a:lstStyle/>
           <a:p>
             <a:r>
@@ -12934,7 +18216,7 @@
           </a:ln>
         </p:spPr>
         <p:txBody>
-          <a:bodyPr wrap="square" lIns="0" rIns="0" tIns="0" bIns="0">
+          <a:bodyPr wrap="square" lIns="0" tIns="0" rIns="0" bIns="0">
             <a:spAutoFit/>
           </a:bodyPr>
           <a:lstStyle/>
@@ -12942,12 +18224,6 @@
             <a:r>
               <a:rPr sz="1200" dirty="0">
                 <a:latin typeface="Freesentation"/>
-                <a:solidFill>
-                  <a:schemeClr val="tx1">
-                    <a:lumMod val="75000"/>
-                    <a:lumOff val="25000"/>
-                  </a:schemeClr>
-                </a:solidFill>
               </a:rPr>
               <a:t>4단계 프로세스 화살표 레이아웃 테스트</a:t>
             </a:r>
@@ -13818,7 +19094,7 @@
           </a:ln>
         </p:spPr>
         <p:txBody>
-          <a:bodyPr anchor="t" lIns="0" tIns="0" rIns="0" bIns="0"/>
+          <a:bodyPr lIns="0" tIns="0" rIns="0" bIns="0" anchor="t"/>
           <a:lstStyle/>
           <a:p>
             <a:r>
@@ -13853,7 +19129,7 @@
           </a:ln>
         </p:spPr>
         <p:txBody>
-          <a:bodyPr wrap="square" lIns="0" rIns="0" tIns="0" bIns="0">
+          <a:bodyPr wrap="square" lIns="0" tIns="0" rIns="0" bIns="0">
             <a:spAutoFit/>
           </a:bodyPr>
           <a:lstStyle/>
@@ -13861,12 +19137,6 @@
             <a:r>
               <a:rPr sz="1200" dirty="0">
                 <a:latin typeface="Freesentation"/>
-                <a:solidFill>
-                  <a:schemeClr val="tx1">
-                    <a:lumMod val="75000"/>
-                    <a:lumOff val="25000"/>
-                  </a:schemeClr>
-                </a:solidFill>
               </a:rPr>
               <a:t>단계별 그라데이션 컬럼 레이아웃 테스트</a:t>
             </a:r>
@@ -14106,7 +19376,7 @@
           <a:noFill/>
         </p:spPr>
         <p:txBody>
-          <a:bodyPr anchor="t" lIns="0" tIns="0" rIns="0" bIns="0"/>
+          <a:bodyPr lIns="0" tIns="0" rIns="0" bIns="0" anchor="t"/>
           <a:lstStyle/>
           <a:p>
             <a:pPr>
@@ -14144,7 +19414,7 @@
           <a:noFill/>
         </p:spPr>
         <p:txBody>
-          <a:bodyPr anchor="t" lIns="0" tIns="0" rIns="0" bIns="0"/>
+          <a:bodyPr lIns="0" tIns="0" rIns="0" bIns="0" anchor="t"/>
           <a:lstStyle/>
           <a:p>
             <a:pPr>
@@ -14190,7 +19460,7 @@
           </a:ln>
         </p:spPr>
         <p:txBody>
-          <a:bodyPr wrap="square" lIns="0" rIns="0" tIns="0" bIns="0"/>
+          <a:bodyPr wrap="square" lIns="0" tIns="0" rIns="0" bIns="0"/>
           <a:lstStyle/>
           <a:p>
             <a:r>
@@ -14227,7 +19497,7 @@
           </a:ln>
         </p:spPr>
         <p:txBody>
-          <a:bodyPr wrap="square" lIns="0" rIns="0" tIns="0" bIns="0"/>
+          <a:bodyPr wrap="square" lIns="0" tIns="0" rIns="0" bIns="0"/>
           <a:lstStyle/>
           <a:p>
             <a:r>
@@ -14250,7 +19520,7 @@
         </p:nvSpPr>
         <p:spPr>
           <a:xfrm>
-            <a:off x="457200" y="4640220"/>
+            <a:off x="457200" y="4548780"/>
             <a:ext cx="11277295" cy="18288"/>
           </a:xfrm>
           <a:prstGeom prst="rect">
@@ -14284,6 +19554,7 @@
           <a:lstStyle/>
           <a:p>
             <a:pPr algn="ctr"/>
+            <a:endParaRPr/>
           </a:p>
         </p:txBody>
       </p:sp>
@@ -14295,7 +19566,7 @@
         </p:nvSpPr>
         <p:spPr>
           <a:xfrm>
-            <a:off x="1798625" y="2628900"/>
+            <a:off x="1798625" y="2537460"/>
             <a:ext cx="1828800" cy="1143000"/>
           </a:xfrm>
           <a:prstGeom prst="roundRect">
@@ -14329,6 +19600,7 @@
           <a:lstStyle/>
           <a:p>
             <a:pPr algn="ctr"/>
+            <a:endParaRPr/>
           </a:p>
         </p:txBody>
       </p:sp>
@@ -14340,7 +19612,7 @@
         </p:nvSpPr>
         <p:spPr>
           <a:xfrm>
-            <a:off x="4053535" y="5509260"/>
+            <a:off x="4053535" y="5417820"/>
             <a:ext cx="1828800" cy="1143000"/>
           </a:xfrm>
           <a:prstGeom prst="roundRect">
@@ -14374,6 +19646,7 @@
           <a:lstStyle/>
           <a:p>
             <a:pPr algn="ctr"/>
+            <a:endParaRPr/>
           </a:p>
         </p:txBody>
       </p:sp>
@@ -14385,7 +19658,7 @@
         </p:nvSpPr>
         <p:spPr>
           <a:xfrm>
-            <a:off x="6309360" y="2628900"/>
+            <a:off x="6309360" y="2537460"/>
             <a:ext cx="1828800" cy="1143000"/>
           </a:xfrm>
           <a:prstGeom prst="roundRect">
@@ -14417,6 +19690,7 @@
           <a:lstStyle/>
           <a:p>
             <a:pPr algn="ctr"/>
+            <a:endParaRPr/>
           </a:p>
         </p:txBody>
       </p:sp>
@@ -14428,7 +19702,7 @@
         </p:nvSpPr>
         <p:spPr>
           <a:xfrm>
-            <a:off x="8564270" y="5509260"/>
+            <a:off x="8564270" y="5417820"/>
             <a:ext cx="1828800" cy="1143000"/>
           </a:xfrm>
           <a:prstGeom prst="roundRect">
@@ -14460,6 +19734,7 @@
           <a:lstStyle/>
           <a:p>
             <a:pPr algn="ctr"/>
+            <a:endParaRPr/>
           </a:p>
         </p:txBody>
       </p:sp>
@@ -14471,7 +19746,7 @@
         </p:nvSpPr>
         <p:spPr>
           <a:xfrm>
-            <a:off x="1890065" y="2720340"/>
+            <a:off x="1890065" y="2628900"/>
             <a:ext cx="1234440" cy="320040"/>
           </a:xfrm>
           <a:prstGeom prst="rect">
@@ -14504,7 +19779,7 @@
         </p:nvSpPr>
         <p:spPr>
           <a:xfrm>
-            <a:off x="4144975" y="5600700"/>
+            <a:off x="4144975" y="5509260"/>
             <a:ext cx="1234440" cy="320040"/>
           </a:xfrm>
           <a:prstGeom prst="rect">
@@ -14537,7 +19812,7 @@
         </p:nvSpPr>
         <p:spPr>
           <a:xfrm>
-            <a:off x="6400800" y="2720340"/>
+            <a:off x="6400800" y="2628900"/>
             <a:ext cx="1234440" cy="320040"/>
           </a:xfrm>
           <a:prstGeom prst="rect">
@@ -14570,7 +19845,7 @@
         </p:nvSpPr>
         <p:spPr>
           <a:xfrm>
-            <a:off x="8655710" y="5600700"/>
+            <a:off x="8655710" y="5509260"/>
             <a:ext cx="1234440" cy="320040"/>
           </a:xfrm>
           <a:prstGeom prst="rect">
@@ -14603,7 +19878,7 @@
         </p:nvSpPr>
         <p:spPr>
           <a:xfrm>
-            <a:off x="1890065" y="3086100"/>
+            <a:off x="1890065" y="2994660"/>
             <a:ext cx="1645920" cy="640080"/>
           </a:xfrm>
           <a:prstGeom prst="rect">
@@ -14656,7 +19931,7 @@
         </p:nvSpPr>
         <p:spPr>
           <a:xfrm>
-            <a:off x="4144975" y="5966460"/>
+            <a:off x="4144975" y="5875020"/>
             <a:ext cx="1645920" cy="640080"/>
           </a:xfrm>
           <a:prstGeom prst="rect">
@@ -14709,7 +19984,7 @@
         </p:nvSpPr>
         <p:spPr>
           <a:xfrm>
-            <a:off x="6400800" y="3086100"/>
+            <a:off x="6400800" y="2994660"/>
             <a:ext cx="1645920" cy="640080"/>
           </a:xfrm>
           <a:prstGeom prst="rect">
@@ -14762,7 +20037,7 @@
         </p:nvSpPr>
         <p:spPr>
           <a:xfrm>
-            <a:off x="8655710" y="5966460"/>
+            <a:off x="8655710" y="5875020"/>
             <a:ext cx="1645920" cy="640080"/>
           </a:xfrm>
           <a:prstGeom prst="rect">
@@ -14823,7 +20098,7 @@
         </p:blipFill>
         <p:spPr>
           <a:xfrm>
-            <a:off x="3170225" y="2720340"/>
+            <a:off x="3170225" y="2628900"/>
             <a:ext cx="365760" cy="365760"/>
           </a:xfrm>
           <a:prstGeom prst="rect">
@@ -14847,7 +20122,7 @@
         </p:blipFill>
         <p:spPr>
           <a:xfrm>
-            <a:off x="5425135" y="5600700"/>
+            <a:off x="5425135" y="5509260"/>
             <a:ext cx="365760" cy="365760"/>
           </a:xfrm>
           <a:prstGeom prst="rect">
@@ -14864,14 +20139,14 @@
           <p:nvPr/>
         </p:nvPicPr>
         <p:blipFill>
-          <a:blip r:embed="rId4"/>
+          <a:blip r:embed="rId3"/>
           <a:stretch>
             <a:fillRect/>
           </a:stretch>
         </p:blipFill>
         <p:spPr>
           <a:xfrm>
-            <a:off x="7680960" y="2720340"/>
+            <a:off x="7680960" y="2628900"/>
             <a:ext cx="365760" cy="365760"/>
           </a:xfrm>
           <a:prstGeom prst="rect">
@@ -14888,14 +20163,14 @@
           <p:nvPr/>
         </p:nvPicPr>
         <p:blipFill>
-          <a:blip r:embed="rId5"/>
+          <a:blip r:embed="rId4"/>
           <a:stretch>
             <a:fillRect/>
           </a:stretch>
         </p:blipFill>
         <p:spPr>
           <a:xfrm>
-            <a:off x="9935870" y="5600700"/>
+            <a:off x="9935870" y="5509260"/>
             <a:ext cx="365760" cy="365760"/>
           </a:xfrm>
           <a:prstGeom prst="rect">
@@ -14911,7 +20186,7 @@
         </p:nvSpPr>
         <p:spPr>
           <a:xfrm>
-            <a:off x="4510918" y="5052060"/>
+            <a:off x="4510918" y="4960620"/>
             <a:ext cx="914400" cy="320040"/>
           </a:xfrm>
           <a:prstGeom prst="roundRect">
@@ -14959,7 +20234,7 @@
         </p:nvSpPr>
         <p:spPr>
           <a:xfrm>
-            <a:off x="9021836" y="5052060"/>
+            <a:off x="9021836" y="4960620"/>
             <a:ext cx="914400" cy="320040"/>
           </a:xfrm>
           <a:prstGeom prst="roundRect">
@@ -15007,7 +20282,7 @@
         </p:nvSpPr>
         <p:spPr>
           <a:xfrm>
-            <a:off x="2255459" y="3909060"/>
+            <a:off x="2255459" y="3817620"/>
             <a:ext cx="914400" cy="320040"/>
           </a:xfrm>
           <a:prstGeom prst="roundRect">
@@ -15055,7 +20330,7 @@
         </p:nvSpPr>
         <p:spPr>
           <a:xfrm>
-            <a:off x="6766377" y="3909060"/>
+            <a:off x="6766377" y="3817620"/>
             <a:ext cx="914400" cy="320040"/>
           </a:xfrm>
           <a:prstGeom prst="roundRect">
@@ -15103,7 +20378,7 @@
         </p:nvSpPr>
         <p:spPr>
           <a:xfrm>
-            <a:off x="2511857" y="4439412"/>
+            <a:off x="2511857" y="4347972"/>
             <a:ext cx="402336" cy="402336"/>
           </a:xfrm>
           <a:prstGeom prst="ellipse">
@@ -15151,7 +20426,7 @@
         </p:nvSpPr>
         <p:spPr>
           <a:xfrm>
-            <a:off x="4766767" y="4439412"/>
+            <a:off x="4766767" y="4347972"/>
             <a:ext cx="402336" cy="402336"/>
           </a:xfrm>
           <a:prstGeom prst="ellipse">
@@ -15199,7 +20474,7 @@
         </p:nvSpPr>
         <p:spPr>
           <a:xfrm>
-            <a:off x="7022592" y="4439412"/>
+            <a:off x="7022592" y="4347972"/>
             <a:ext cx="402336" cy="402336"/>
           </a:xfrm>
           <a:prstGeom prst="ellipse">
@@ -15247,7 +20522,7 @@
         </p:nvSpPr>
         <p:spPr>
           <a:xfrm>
-            <a:off x="9277502" y="4439412"/>
+            <a:off x="9277502" y="4347972"/>
             <a:ext cx="402336" cy="402336"/>
           </a:xfrm>
           <a:prstGeom prst="ellipse">
@@ -15289,11 +20564,14 @@
       </p:sp>
     </p:spTree>
   </p:cSld>
+  <p:clrMapOvr>
+    <a:masterClrMapping/>
+  </p:clrMapOvr>
 </p:sld>
 </file>
 
 <file path=ppt/slides/slide9.xml><?xml version="1.0" encoding="utf-8"?>
-<p:sld xmlns:a="http://schemas.openxmlformats.org/drawingml/2006/main" xmlns:p="http://schemas.openxmlformats.org/presentationml/2006/main" xmlns:r="http://schemas.openxmlformats.org/officeDocument/2006/relationships">
+<p:sld xmlns:a="http://schemas.openxmlformats.org/drawingml/2006/main" xmlns:r="http://schemas.openxmlformats.org/officeDocument/2006/relationships" xmlns:p="http://schemas.openxmlformats.org/presentationml/2006/main">
   <p:cSld>
     <p:spTree>
       <p:nvGrpSpPr>
@@ -15301,7 +20579,14 @@
         <p:cNvGrpSpPr/>
         <p:nvPr/>
       </p:nvGrpSpPr>
-      <p:grpSpPr/>
+      <p:grpSpPr>
+        <a:xfrm>
+          <a:off x="0" y="0"/>
+          <a:ext cx="0" cy="0"/>
+          <a:chOff x="0" y="0"/>
+          <a:chExt cx="0" cy="0"/>
+        </a:xfrm>
+      </p:grpSpPr>
       <p:sp>
         <p:nvSpPr>
           <p:cNvPr id="2" name="Text Placeholder 1"/>
@@ -15309,14 +20594,16 @@
             <a:spLocks noGrp="1"/>
           </p:cNvSpPr>
           <p:nvPr>
-            <p:ph type="body" idx="10" sz="quarter"/>
+            <p:ph type="body" sz="quarter" idx="10"/>
           </p:nvPr>
         </p:nvSpPr>
         <p:spPr/>
         <p:txBody>
           <a:bodyPr/>
           <a:lstStyle/>
-          <a:p/>
+          <a:p>
+            <a:endParaRPr/>
+          </a:p>
         </p:txBody>
       </p:sp>
       <p:sp>
@@ -15336,7 +20623,7 @@
           <a:noFill/>
         </p:spPr>
         <p:txBody>
-          <a:bodyPr anchor="t" lIns="0" tIns="0" rIns="0" bIns="0"/>
+          <a:bodyPr lIns="0" tIns="0" rIns="0" bIns="0" anchor="t"/>
           <a:lstStyle/>
           <a:p>
             <a:r>
@@ -15368,7 +20655,7 @@
           <a:noFill/>
         </p:spPr>
         <p:txBody>
-          <a:bodyPr wrap="square" lIns="0" rIns="0" tIns="0" bIns="0">
+          <a:bodyPr wrap="square" lIns="0" tIns="0" rIns="0" bIns="0">
             <a:spAutoFit/>
           </a:bodyPr>
           <a:lstStyle/>
@@ -15379,51 +20666,6 @@
               </a:rPr>
               <a:t>수영장 레인 구조 — 복수 워크스트림 병렬 진행</a:t>
             </a:r>
-          </a:p>
-        </p:txBody>
-      </p:sp>
-      <p:sp>
-        <p:nvSpPr>
-          <p:cNvPr id="5" name="Rectangle 4"/>
-          <p:cNvSpPr/>
-          <p:nvPr/>
-        </p:nvSpPr>
-        <p:spPr>
-          <a:xfrm>
-            <a:off x="355610" y="1496689"/>
-            <a:ext cx="11480292" cy="9144"/>
-          </a:xfrm>
-          <a:prstGeom prst="rect">
-            <a:avLst/>
-          </a:prstGeom>
-          <a:solidFill>
-            <a:srgbClr val="DCDCDC"/>
-          </a:solidFill>
-          <a:ln>
-            <a:solidFill>
-              <a:srgbClr val="DCDCDC"/>
-            </a:solidFill>
-          </a:ln>
-        </p:spPr>
-        <p:style>
-          <a:lnRef idx="1">
-            <a:schemeClr val="accent1"/>
-          </a:lnRef>
-          <a:fillRef idx="3">
-            <a:schemeClr val="accent1"/>
-          </a:fillRef>
-          <a:effectRef idx="2">
-            <a:schemeClr val="accent1"/>
-          </a:effectRef>
-          <a:fontRef idx="minor">
-            <a:schemeClr val="lt1"/>
-          </a:fontRef>
-        </p:style>
-        <p:txBody>
-          <a:bodyPr rtlCol="0" anchor="ctr"/>
-          <a:lstStyle/>
-          <a:p>
-            <a:pPr algn="ctr"/>
           </a:p>
         </p:txBody>
       </p:sp>

--- a/results/pptx/AWS_MSK_Expert_Intro.pptx
+++ b/results/pptx/AWS_MSK_Expert_Intro.pptx
@@ -33,6 +33,9 @@
     <p:sldId id="382" r:id="rId28"/>
     <p:sldId id="383" r:id="rId29"/>
     <p:sldId id="384" r:id="rId30"/>
+    <p:sldId id="385" r:id="rId31"/>
+    <p:sldId id="386" r:id="rId32"/>
+    <p:sldId id="387" r:id="rId33"/>
     <p:sldId id="356" r:id="rId16"/>
   </p:sldIdLst>
   <p:sldSz cx="12192000" cy="6858000"/>
@@ -13928,6 +13931,2267 @@
 </file>
 
 <file path=ppt/slides/slide23.xml><?xml version="1.0" encoding="utf-8"?>
+<p:sld xmlns:a="http://schemas.openxmlformats.org/drawingml/2006/main" xmlns:p="http://schemas.openxmlformats.org/presentationml/2006/main" xmlns:r="http://schemas.openxmlformats.org/officeDocument/2006/relationships">
+  <p:cSld>
+    <p:spTree>
+      <p:nvGrpSpPr>
+        <p:cNvPr id="1" name=""/>
+        <p:cNvGrpSpPr/>
+        <p:nvPr/>
+      </p:nvGrpSpPr>
+      <p:grpSpPr/>
+      <p:sp>
+        <p:nvSpPr>
+          <p:cNvPr id="2" name="Text Placeholder 1"/>
+          <p:cNvSpPr>
+            <a:spLocks noGrp="1"/>
+          </p:cNvSpPr>
+          <p:nvPr>
+            <p:ph type="body" idx="10" sz="quarter"/>
+          </p:nvPr>
+        </p:nvSpPr>
+        <p:spPr/>
+        <p:txBody>
+          <a:bodyPr/>
+          <a:lstStyle/>
+          <a:p>
+            <a:r>
+              <a:t>L21. Quote Highlight</a:t>
+            </a:r>
+          </a:p>
+        </p:txBody>
+      </p:sp>
+      <p:sp>
+        <p:nvSpPr>
+          <p:cNvPr id="3" name="TextBox 2"/>
+          <p:cNvSpPr txBox="1"/>
+          <p:nvPr/>
+        </p:nvSpPr>
+        <p:spPr>
+          <a:xfrm>
+            <a:off x="353872" y="557784"/>
+            <a:ext cx="2717596" cy="320040"/>
+          </a:xfrm>
+          <a:prstGeom prst="rect">
+            <a:avLst/>
+          </a:prstGeom>
+          <a:noFill/>
+        </p:spPr>
+        <p:txBody>
+          <a:bodyPr wrap="square">
+            <a:spAutoFit/>
+          </a:bodyPr>
+          <a:lstStyle/>
+          <a:p>
+            <a:r>
+              <a:rPr sz="2000" b="1">
+                <a:solidFill>
+                  <a:srgbClr val="000000"/>
+                </a:solidFill>
+                <a:latin typeface="Freesentation"/>
+              </a:rPr>
+              <a:t>L21. Quote Highlight</a:t>
+            </a:r>
+          </a:p>
+        </p:txBody>
+      </p:sp>
+      <p:sp>
+        <p:nvSpPr>
+          <p:cNvPr id="4" name="TextBox 3"/>
+          <p:cNvSpPr txBox="1"/>
+          <p:nvPr/>
+        </p:nvSpPr>
+        <p:spPr>
+          <a:xfrm>
+            <a:off x="353872" y="896112"/>
+            <a:ext cx="2717596" cy="274320"/>
+          </a:xfrm>
+          <a:prstGeom prst="rect">
+            <a:avLst/>
+          </a:prstGeom>
+          <a:noFill/>
+        </p:spPr>
+        <p:txBody>
+          <a:bodyPr wrap="square">
+            <a:spAutoFit/>
+          </a:bodyPr>
+          <a:lstStyle/>
+          <a:p>
+            <a:r>
+              <a:rPr sz="1100">
+                <a:solidFill>
+                  <a:srgbClr val="505050"/>
+                </a:solidFill>
+                <a:latin typeface="Freesentation"/>
+              </a:rPr>
+              <a:t>강조 인용문 레이아웃 — 인용 + 컨텍스트</a:t>
+            </a:r>
+          </a:p>
+        </p:txBody>
+      </p:sp>
+      <p:sp>
+        <p:nvSpPr>
+          <p:cNvPr id="5" name="TextBox 4"/>
+          <p:cNvSpPr txBox="1"/>
+          <p:nvPr/>
+        </p:nvSpPr>
+        <p:spPr>
+          <a:xfrm>
+            <a:off x="3760012" y="558698"/>
+            <a:ext cx="7546543" cy="365760"/>
+          </a:xfrm>
+          <a:prstGeom prst="rect">
+            <a:avLst/>
+          </a:prstGeom>
+          <a:noFill/>
+        </p:spPr>
+        <p:txBody>
+          <a:bodyPr wrap="square">
+            <a:spAutoFit/>
+          </a:bodyPr>
+          <a:lstStyle/>
+          <a:p>
+            <a:r>
+              <a:rPr sz="1200">
+                <a:solidFill>
+                  <a:srgbClr val="505050"/>
+                </a:solidFill>
+                <a:latin typeface="Freesentation"/>
+              </a:rPr>
+              <a:t>클라우드 전환 리더십 메시지</a:t>
+            </a:r>
+          </a:p>
+        </p:txBody>
+      </p:sp>
+      <p:sp>
+        <p:nvSpPr>
+          <p:cNvPr id="6" name="TextBox 5"/>
+          <p:cNvSpPr txBox="1"/>
+          <p:nvPr/>
+        </p:nvSpPr>
+        <p:spPr>
+          <a:xfrm>
+            <a:off x="457200" y="1600200"/>
+            <a:ext cx="11277295" cy="274320"/>
+          </a:xfrm>
+          <a:prstGeom prst="rect">
+            <a:avLst/>
+          </a:prstGeom>
+          <a:noFill/>
+        </p:spPr>
+        <p:txBody>
+          <a:bodyPr wrap="square">
+            <a:spAutoFit/>
+          </a:bodyPr>
+          <a:lstStyle/>
+          <a:p>
+            <a:r>
+              <a:rPr sz="1600" b="1">
+                <a:solidFill>
+                  <a:srgbClr val="0043DA"/>
+                </a:solidFill>
+                <a:latin typeface="Freesentation"/>
+              </a:rPr>
+              <a:t>클라우드 전환 추진 방향</a:t>
+            </a:r>
+          </a:p>
+        </p:txBody>
+      </p:sp>
+      <p:sp>
+        <p:nvSpPr>
+          <p:cNvPr id="7" name="TextBox 6"/>
+          <p:cNvSpPr txBox="1"/>
+          <p:nvPr/>
+        </p:nvSpPr>
+        <p:spPr>
+          <a:xfrm>
+            <a:off x="457200" y="1965960"/>
+            <a:ext cx="11277295" cy="228600"/>
+          </a:xfrm>
+          <a:prstGeom prst="rect">
+            <a:avLst/>
+          </a:prstGeom>
+          <a:noFill/>
+        </p:spPr>
+        <p:txBody>
+          <a:bodyPr wrap="square">
+            <a:spAutoFit/>
+          </a:bodyPr>
+          <a:lstStyle/>
+          <a:p>
+            <a:r>
+              <a:rPr sz="1300">
+                <a:solidFill>
+                  <a:srgbClr val="212121"/>
+                </a:solidFill>
+                <a:latin typeface="Freesentation"/>
+              </a:rPr>
+              <a:t>CTO 메시지 (2026년 1분기 전사 회의)</a:t>
+            </a:r>
+          </a:p>
+        </p:txBody>
+      </p:sp>
+      <p:sp>
+        <p:nvSpPr>
+          <p:cNvPr id="8" name="Rounded Rectangle 7"/>
+          <p:cNvSpPr/>
+          <p:nvPr/>
+        </p:nvSpPr>
+        <p:spPr>
+          <a:xfrm>
+            <a:off x="457200" y="2423160"/>
+            <a:ext cx="7315200" cy="3657600"/>
+          </a:xfrm>
+          <a:prstGeom prst="roundRect">
+            <a:avLst/>
+          </a:prstGeom>
+          <a:solidFill>
+            <a:srgbClr val="F8F9FA"/>
+          </a:solidFill>
+          <a:ln w="6350">
+            <a:solidFill>
+              <a:srgbClr val="0043DA"/>
+            </a:solidFill>
+          </a:ln>
+        </p:spPr>
+        <p:style>
+          <a:lnRef idx="1">
+            <a:schemeClr val="accent1"/>
+          </a:lnRef>
+          <a:fillRef idx="3">
+            <a:schemeClr val="accent1"/>
+          </a:fillRef>
+          <a:effectRef idx="2">
+            <a:schemeClr val="accent1"/>
+          </a:effectRef>
+          <a:fontRef idx="minor">
+            <a:schemeClr val="lt1"/>
+          </a:fontRef>
+        </p:style>
+        <p:txBody>
+          <a:bodyPr rtlCol="0" anchor="ctr"/>
+          <a:lstStyle/>
+          <a:p>
+            <a:pPr algn="ctr"/>
+          </a:p>
+        </p:txBody>
+      </p:sp>
+      <p:sp>
+        <p:nvSpPr>
+          <p:cNvPr id="9" name="Rounded Rectangle 8"/>
+          <p:cNvSpPr/>
+          <p:nvPr/>
+        </p:nvSpPr>
+        <p:spPr>
+          <a:xfrm>
+            <a:off x="7909560" y="2423160"/>
+            <a:ext cx="3822191" cy="3657600"/>
+          </a:xfrm>
+          <a:prstGeom prst="roundRect">
+            <a:avLst/>
+          </a:prstGeom>
+          <a:solidFill>
+            <a:srgbClr val="F8F9FA"/>
+          </a:solidFill>
+          <a:ln w="6350">
+            <a:solidFill>
+              <a:srgbClr val="DCDCDC"/>
+            </a:solidFill>
+          </a:ln>
+        </p:spPr>
+        <p:style>
+          <a:lnRef idx="1">
+            <a:schemeClr val="accent1"/>
+          </a:lnRef>
+          <a:fillRef idx="3">
+            <a:schemeClr val="accent1"/>
+          </a:fillRef>
+          <a:effectRef idx="2">
+            <a:schemeClr val="accent1"/>
+          </a:effectRef>
+          <a:fontRef idx="minor">
+            <a:schemeClr val="lt1"/>
+          </a:fontRef>
+        </p:style>
+        <p:txBody>
+          <a:bodyPr rtlCol="0" anchor="ctr"/>
+          <a:lstStyle/>
+          <a:p>
+            <a:pPr algn="ctr"/>
+          </a:p>
+        </p:txBody>
+      </p:sp>
+      <p:sp>
+        <p:nvSpPr>
+          <p:cNvPr id="10" name="Rounded Rectangle 9"/>
+          <p:cNvSpPr/>
+          <p:nvPr/>
+        </p:nvSpPr>
+        <p:spPr>
+          <a:xfrm>
+            <a:off x="457200" y="6172200"/>
+            <a:ext cx="11277295" cy="457200"/>
+          </a:xfrm>
+          <a:prstGeom prst="roundRect">
+            <a:avLst/>
+          </a:prstGeom>
+          <a:solidFill>
+            <a:srgbClr val="0043DA"/>
+          </a:solidFill>
+          <a:ln>
+            <a:solidFill>
+              <a:srgbClr val="0043DA"/>
+            </a:solidFill>
+          </a:ln>
+        </p:spPr>
+        <p:style>
+          <a:lnRef idx="1">
+            <a:schemeClr val="accent1"/>
+          </a:lnRef>
+          <a:fillRef idx="3">
+            <a:schemeClr val="accent1"/>
+          </a:fillRef>
+          <a:effectRef idx="2">
+            <a:schemeClr val="accent1"/>
+          </a:effectRef>
+          <a:fontRef idx="minor">
+            <a:schemeClr val="lt1"/>
+          </a:fontRef>
+        </p:style>
+        <p:txBody>
+          <a:bodyPr rtlCol="0" anchor="ctr"/>
+          <a:lstStyle/>
+          <a:p>
+            <a:pPr algn="ctr"/>
+          </a:p>
+        </p:txBody>
+      </p:sp>
+      <p:sp>
+        <p:nvSpPr>
+          <p:cNvPr id="11" name="TextBox 10"/>
+          <p:cNvSpPr txBox="1"/>
+          <p:nvPr/>
+        </p:nvSpPr>
+        <p:spPr>
+          <a:xfrm>
+            <a:off x="640080" y="2606040"/>
+            <a:ext cx="640080" cy="594360"/>
+          </a:xfrm>
+          <a:prstGeom prst="rect">
+            <a:avLst/>
+          </a:prstGeom>
+          <a:noFill/>
+        </p:spPr>
+        <p:txBody>
+          <a:bodyPr wrap="square">
+            <a:spAutoFit/>
+          </a:bodyPr>
+          <a:lstStyle/>
+          <a:p>
+            <a:r>
+              <a:rPr sz="4800">
+                <a:solidFill>
+                  <a:srgbClr val="0043DA"/>
+                </a:solidFill>
+              </a:rPr>
+              <a:t>❝</a:t>
+            </a:r>
+          </a:p>
+        </p:txBody>
+      </p:sp>
+      <p:sp>
+        <p:nvSpPr>
+          <p:cNvPr id="12" name="TextBox 11"/>
+          <p:cNvSpPr txBox="1"/>
+          <p:nvPr/>
+        </p:nvSpPr>
+        <p:spPr>
+          <a:xfrm>
+            <a:off x="640080" y="3246120"/>
+            <a:ext cx="6949440" cy="1645920"/>
+          </a:xfrm>
+          <a:prstGeom prst="rect">
+            <a:avLst/>
+          </a:prstGeom>
+          <a:noFill/>
+        </p:spPr>
+        <p:txBody>
+          <a:bodyPr wrap="square">
+            <a:spAutoFit/>
+          </a:bodyPr>
+          <a:lstStyle/>
+          <a:p>
+            <a:r>
+              <a:rPr sz="1800" i="1">
+                <a:solidFill>
+                  <a:srgbClr val="212121"/>
+                </a:solidFill>
+                <a:latin typeface="Freesentation"/>
+              </a:rPr>
+              <a:t>우리는 2026년까지 레거시 시스템의 80%를 클라우드로 전환합니다. 이는 단순한 인프라 이전이 아닌, 비즈니스 민첩성 확보를 위한 전략적 투자입니다.</a:t>
+            </a:r>
+          </a:p>
+        </p:txBody>
+      </p:sp>
+      <p:sp>
+        <p:nvSpPr>
+          <p:cNvPr id="13" name="TextBox 12"/>
+          <p:cNvSpPr txBox="1"/>
+          <p:nvPr/>
+        </p:nvSpPr>
+        <p:spPr>
+          <a:xfrm>
+            <a:off x="4389120" y="5029200"/>
+            <a:ext cx="3200400" cy="365760"/>
+          </a:xfrm>
+          <a:prstGeom prst="rect">
+            <a:avLst/>
+          </a:prstGeom>
+          <a:noFill/>
+        </p:spPr>
+        <p:txBody>
+          <a:bodyPr wrap="square">
+            <a:spAutoFit/>
+          </a:bodyPr>
+          <a:lstStyle/>
+          <a:p>
+            <a:pPr algn="r"/>
+            <a:r>
+              <a:rPr sz="1200">
+                <a:solidFill>
+                  <a:srgbClr val="505050"/>
+                </a:solidFill>
+                <a:latin typeface="Freesentation"/>
+              </a:rPr>
+              <a:t>— 김철수, CTO  (GS네오텍)</a:t>
+            </a:r>
+          </a:p>
+        </p:txBody>
+      </p:sp>
+      <p:sp>
+        <p:nvSpPr>
+          <p:cNvPr id="14" name="TextBox 13"/>
+          <p:cNvSpPr txBox="1"/>
+          <p:nvPr/>
+        </p:nvSpPr>
+        <p:spPr>
+          <a:xfrm>
+            <a:off x="8092440" y="2606040"/>
+            <a:ext cx="3474720" cy="320040"/>
+          </a:xfrm>
+          <a:prstGeom prst="rect">
+            <a:avLst/>
+          </a:prstGeom>
+          <a:noFill/>
+        </p:spPr>
+        <p:txBody>
+          <a:bodyPr wrap="square">
+            <a:spAutoFit/>
+          </a:bodyPr>
+          <a:lstStyle/>
+          <a:p>
+            <a:r>
+              <a:rPr sz="1400" b="1">
+                <a:solidFill>
+                  <a:srgbClr val="0043DA"/>
+                </a:solidFill>
+                <a:latin typeface="Freesentation"/>
+              </a:rPr>
+              <a:t>📊 컨텍스트</a:t>
+            </a:r>
+          </a:p>
+        </p:txBody>
+      </p:sp>
+      <p:sp>
+        <p:nvSpPr>
+          <p:cNvPr id="15" name="TextBox 14"/>
+          <p:cNvSpPr txBox="1"/>
+          <p:nvPr/>
+        </p:nvSpPr>
+        <p:spPr>
+          <a:xfrm>
+            <a:off x="8092440" y="3017520"/>
+            <a:ext cx="3474720" cy="2926080"/>
+          </a:xfrm>
+          <a:prstGeom prst="rect">
+            <a:avLst/>
+          </a:prstGeom>
+          <a:noFill/>
+        </p:spPr>
+        <p:txBody>
+          <a:bodyPr wrap="square">
+            <a:spAutoFit/>
+          </a:bodyPr>
+          <a:lstStyle/>
+          <a:p>
+            <a:r>
+              <a:rPr sz="1200">
+                <a:solidFill>
+                  <a:srgbClr val="212121"/>
+                </a:solidFill>
+                <a:latin typeface="Freesentation"/>
+              </a:rPr>
+              <a:t>₩3.2억/년 절감</a:t>
+            </a:r>
+          </a:p>
+          <a:p>
+            <a:r>
+              <a:rPr sz="1200">
+                <a:solidFill>
+                  <a:srgbClr val="212121"/>
+                </a:solidFill>
+                <a:latin typeface="Freesentation"/>
+              </a:rPr>
+              <a:t>인프라+인력 합산 (2025 실측)</a:t>
+            </a:r>
+          </a:p>
+          <a:p/>
+          <a:p>
+            <a:r>
+              <a:rPr sz="1200">
+                <a:solidFill>
+                  <a:srgbClr val="212121"/>
+                </a:solidFill>
+                <a:latin typeface="Freesentation"/>
+              </a:rPr>
+              <a:t>레거시 42개 시스템</a:t>
+            </a:r>
+          </a:p>
+          <a:p>
+            <a:r>
+              <a:rPr sz="1200">
+                <a:solidFill>
+                  <a:srgbClr val="212121"/>
+                </a:solidFill>
+                <a:latin typeface="Freesentation"/>
+              </a:rPr>
+              <a:t>전환 대상, 목표 전환율 80%</a:t>
+            </a:r>
+          </a:p>
+          <a:p/>
+          <a:p>
+            <a:r>
+              <a:rPr sz="1200">
+                <a:solidFill>
+                  <a:srgbClr val="212121"/>
+                </a:solidFill>
+                <a:latin typeface="Freesentation"/>
+              </a:rPr>
+              <a:t>2026-Q4 완료 기한</a:t>
+            </a:r>
+          </a:p>
+          <a:p>
+            <a:r>
+              <a:rPr sz="1200">
+                <a:solidFill>
+                  <a:srgbClr val="212121"/>
+                </a:solidFill>
+                <a:latin typeface="Freesentation"/>
+              </a:rPr>
+              <a:t>1차 마감 2026-Q2</a:t>
+            </a:r>
+          </a:p>
+          <a:p/>
+          <a:p>
+            <a:r>
+              <a:rPr sz="1200">
+                <a:solidFill>
+                  <a:srgbClr val="212121"/>
+                </a:solidFill>
+                <a:latin typeface="Freesentation"/>
+              </a:rPr>
+              <a:t>TTM -40%</a:t>
+            </a:r>
+          </a:p>
+          <a:p>
+            <a:r>
+              <a:rPr sz="1200">
+                <a:solidFill>
+                  <a:srgbClr val="212121"/>
+                </a:solidFill>
+                <a:latin typeface="Freesentation"/>
+              </a:rPr>
+              <a:t>클라우드 전환 후 제품 출시 단축</a:t>
+            </a:r>
+          </a:p>
+        </p:txBody>
+      </p:sp>
+      <p:sp>
+        <p:nvSpPr>
+          <p:cNvPr id="16" name="TextBox 15"/>
+          <p:cNvSpPr txBox="1"/>
+          <p:nvPr/>
+        </p:nvSpPr>
+        <p:spPr>
+          <a:xfrm>
+            <a:off x="640080" y="6217920"/>
+            <a:ext cx="10881360" cy="365760"/>
+          </a:xfrm>
+          <a:prstGeom prst="rect">
+            <a:avLst/>
+          </a:prstGeom>
+          <a:noFill/>
+        </p:spPr>
+        <p:txBody>
+          <a:bodyPr wrap="square">
+            <a:spAutoFit/>
+          </a:bodyPr>
+          <a:lstStyle/>
+          <a:p>
+            <a:r>
+              <a:rPr sz="1300" b="1">
+                <a:solidFill>
+                  <a:srgbClr val="FFFFFF"/>
+                </a:solidFill>
+                <a:latin typeface="Freesentation"/>
+              </a:rPr>
+              <a:t>💡 핵심: 클라우드 전환은 비용 절감이 아닌 민첩성 확보 — 경쟁사 대비 TTM 40% 단축 목표</a:t>
+            </a:r>
+          </a:p>
+        </p:txBody>
+      </p:sp>
+    </p:spTree>
+  </p:cSld>
+  <p:clrMapOvr>
+    <a:masterClrMapping/>
+  </p:clrMapOvr>
+</p:sld>
+</file>
+
+<file path=ppt/slides/slide24.xml><?xml version="1.0" encoding="utf-8"?>
+<p:sld xmlns:a="http://schemas.openxmlformats.org/drawingml/2006/main" xmlns:p="http://schemas.openxmlformats.org/presentationml/2006/main" xmlns:r="http://schemas.openxmlformats.org/officeDocument/2006/relationships">
+  <p:cSld>
+    <p:spTree>
+      <p:nvGrpSpPr>
+        <p:cNvPr id="1" name=""/>
+        <p:cNvGrpSpPr/>
+        <p:nvPr/>
+      </p:nvGrpSpPr>
+      <p:grpSpPr/>
+      <p:sp>
+        <p:nvSpPr>
+          <p:cNvPr id="2" name="Text Placeholder 1"/>
+          <p:cNvSpPr>
+            <a:spLocks noGrp="1"/>
+          </p:cNvSpPr>
+          <p:nvPr>
+            <p:ph type="body" idx="10" sz="quarter"/>
+          </p:nvPr>
+        </p:nvSpPr>
+        <p:spPr/>
+        <p:txBody>
+          <a:bodyPr/>
+          <a:lstStyle/>
+          <a:p>
+            <a:r>
+              <a:t>L22. Split Text+Code</a:t>
+            </a:r>
+          </a:p>
+        </p:txBody>
+      </p:sp>
+      <p:sp>
+        <p:nvSpPr>
+          <p:cNvPr id="3" name="TextBox 2"/>
+          <p:cNvSpPr txBox="1"/>
+          <p:nvPr/>
+        </p:nvSpPr>
+        <p:spPr>
+          <a:xfrm>
+            <a:off x="353872" y="557784"/>
+            <a:ext cx="2717596" cy="320040"/>
+          </a:xfrm>
+          <a:prstGeom prst="rect">
+            <a:avLst/>
+          </a:prstGeom>
+          <a:noFill/>
+        </p:spPr>
+        <p:txBody>
+          <a:bodyPr wrap="square">
+            <a:spAutoFit/>
+          </a:bodyPr>
+          <a:lstStyle/>
+          <a:p>
+            <a:r>
+              <a:rPr sz="2000" b="1">
+                <a:solidFill>
+                  <a:srgbClr val="000000"/>
+                </a:solidFill>
+                <a:latin typeface="Freesentation"/>
+              </a:rPr>
+              <a:t>L22. Split Text+Code</a:t>
+            </a:r>
+          </a:p>
+        </p:txBody>
+      </p:sp>
+      <p:sp>
+        <p:nvSpPr>
+          <p:cNvPr id="4" name="TextBox 3"/>
+          <p:cNvSpPr txBox="1"/>
+          <p:nvPr/>
+        </p:nvSpPr>
+        <p:spPr>
+          <a:xfrm>
+            <a:off x="353872" y="896112"/>
+            <a:ext cx="2717596" cy="274320"/>
+          </a:xfrm>
+          <a:prstGeom prst="rect">
+            <a:avLst/>
+          </a:prstGeom>
+          <a:noFill/>
+        </p:spPr>
+        <p:txBody>
+          <a:bodyPr wrap="square">
+            <a:spAutoFit/>
+          </a:bodyPr>
+          <a:lstStyle/>
+          <a:p>
+            <a:r>
+              <a:rPr sz="1100">
+                <a:solidFill>
+                  <a:srgbClr val="505050"/>
+                </a:solidFill>
+                <a:latin typeface="Freesentation"/>
+              </a:rPr>
+              <a:t>배포 절차 실습 가이드 — 단계+코드+확인</a:t>
+            </a:r>
+          </a:p>
+        </p:txBody>
+      </p:sp>
+      <p:sp>
+        <p:nvSpPr>
+          <p:cNvPr id="5" name="TextBox 4"/>
+          <p:cNvSpPr txBox="1"/>
+          <p:nvPr/>
+        </p:nvSpPr>
+        <p:spPr>
+          <a:xfrm>
+            <a:off x="3760012" y="558698"/>
+            <a:ext cx="7546543" cy="365760"/>
+          </a:xfrm>
+          <a:prstGeom prst="rect">
+            <a:avLst/>
+          </a:prstGeom>
+          <a:noFill/>
+        </p:spPr>
+        <p:txBody>
+          <a:bodyPr wrap="square">
+            <a:spAutoFit/>
+          </a:bodyPr>
+          <a:lstStyle/>
+          <a:p>
+            <a:r>
+              <a:rPr sz="1200">
+                <a:solidFill>
+                  <a:srgbClr val="505050"/>
+                </a:solidFill>
+                <a:latin typeface="Freesentation"/>
+              </a:rPr>
+              <a:t>AWS CLI 기반 MSK 프로비저닝</a:t>
+            </a:r>
+          </a:p>
+        </p:txBody>
+      </p:sp>
+      <p:sp>
+        <p:nvSpPr>
+          <p:cNvPr id="6" name="TextBox 5"/>
+          <p:cNvSpPr txBox="1"/>
+          <p:nvPr/>
+        </p:nvSpPr>
+        <p:spPr>
+          <a:xfrm>
+            <a:off x="457200" y="1600200"/>
+            <a:ext cx="11277295" cy="274320"/>
+          </a:xfrm>
+          <a:prstGeom prst="rect">
+            <a:avLst/>
+          </a:prstGeom>
+          <a:noFill/>
+        </p:spPr>
+        <p:txBody>
+          <a:bodyPr wrap="square">
+            <a:spAutoFit/>
+          </a:bodyPr>
+          <a:lstStyle/>
+          <a:p>
+            <a:r>
+              <a:rPr sz="1600" b="1">
+                <a:solidFill>
+                  <a:srgbClr val="0043DA"/>
+                </a:solidFill>
+                <a:latin typeface="Freesentation"/>
+              </a:rPr>
+              <a:t>AWS CLI로 MSK 클러스터 생성</a:t>
+            </a:r>
+          </a:p>
+        </p:txBody>
+      </p:sp>
+      <p:sp>
+        <p:nvSpPr>
+          <p:cNvPr id="7" name="TextBox 6"/>
+          <p:cNvSpPr txBox="1"/>
+          <p:nvPr/>
+        </p:nvSpPr>
+        <p:spPr>
+          <a:xfrm>
+            <a:off x="457200" y="1965960"/>
+            <a:ext cx="11277295" cy="228600"/>
+          </a:xfrm>
+          <a:prstGeom prst="rect">
+            <a:avLst/>
+          </a:prstGeom>
+          <a:noFill/>
+        </p:spPr>
+        <p:txBody>
+          <a:bodyPr wrap="square">
+            <a:spAutoFit/>
+          </a:bodyPr>
+          <a:lstStyle/>
+          <a:p>
+            <a:r>
+              <a:rPr sz="1300">
+                <a:solidFill>
+                  <a:srgbClr val="212121"/>
+                </a:solidFill>
+                <a:latin typeface="Freesentation"/>
+              </a:rPr>
+              <a:t>명령줄 기반 프로비저닝 절차 (2026년 4월 기준)</a:t>
+            </a:r>
+          </a:p>
+        </p:txBody>
+      </p:sp>
+      <p:sp>
+        <p:nvSpPr>
+          <p:cNvPr id="8" name="TextBox 7"/>
+          <p:cNvSpPr txBox="1"/>
+          <p:nvPr/>
+        </p:nvSpPr>
+        <p:spPr>
+          <a:xfrm>
+            <a:off x="457200" y="2423160"/>
+            <a:ext cx="5394960" cy="3657600"/>
+          </a:xfrm>
+          <a:prstGeom prst="rect">
+            <a:avLst/>
+          </a:prstGeom>
+          <a:noFill/>
+        </p:spPr>
+        <p:txBody>
+          <a:bodyPr wrap="square">
+            <a:spAutoFit/>
+          </a:bodyPr>
+          <a:lstStyle/>
+          <a:p>
+            <a:r>
+              <a:rPr sz="1300">
+                <a:solidFill>
+                  <a:srgbClr val="212121"/>
+                </a:solidFill>
+                <a:latin typeface="Freesentation"/>
+              </a:rPr>
+              <a:t>① 클러스터 설정 JSON 작성</a:t>
+            </a:r>
+          </a:p>
+          <a:p>
+            <a:r>
+              <a:rPr sz="1300">
+                <a:solidFill>
+                  <a:srgbClr val="212121"/>
+                </a:solidFill>
+                <a:latin typeface="Freesentation"/>
+              </a:rPr>
+              <a:t>   broker-node-group-info, kafka-version,</a:t>
+            </a:r>
+          </a:p>
+          <a:p>
+            <a:r>
+              <a:rPr sz="1300">
+                <a:solidFill>
+                  <a:srgbClr val="212121"/>
+                </a:solidFill>
+                <a:latin typeface="Freesentation"/>
+              </a:rPr>
+              <a:t>   cluster-name 필수 항목</a:t>
+            </a:r>
+          </a:p>
+          <a:p/>
+          <a:p>
+            <a:r>
+              <a:rPr sz="1300">
+                <a:solidFill>
+                  <a:srgbClr val="212121"/>
+                </a:solidFill>
+                <a:latin typeface="Freesentation"/>
+              </a:rPr>
+              <a:t>② VPC Subnet ID 확인</a:t>
+            </a:r>
+          </a:p>
+          <a:p>
+            <a:r>
+              <a:rPr sz="1300">
+                <a:solidFill>
+                  <a:srgbClr val="212121"/>
+                </a:solidFill>
+                <a:latin typeface="Freesentation"/>
+              </a:rPr>
+              <a:t>   Private Subnet 3개 (AZ-a/b/c) ID 확보</a:t>
+            </a:r>
+          </a:p>
+          <a:p>
+            <a:r>
+              <a:rPr sz="1300">
+                <a:solidFill>
+                  <a:srgbClr val="212121"/>
+                </a:solidFill>
+                <a:latin typeface="Freesentation"/>
+              </a:rPr>
+              <a:t>   aws ec2 describe-subnets 명령 활용</a:t>
+            </a:r>
+          </a:p>
+          <a:p/>
+          <a:p>
+            <a:r>
+              <a:rPr sz="1300">
+                <a:solidFill>
+                  <a:srgbClr val="212121"/>
+                </a:solidFill>
+                <a:latin typeface="Freesentation"/>
+              </a:rPr>
+              <a:t>③ 생성 명령 실행</a:t>
+            </a:r>
+          </a:p>
+          <a:p>
+            <a:r>
+              <a:rPr sz="1300">
+                <a:solidFill>
+                  <a:srgbClr val="212121"/>
+                </a:solidFill>
+                <a:latin typeface="Freesentation"/>
+              </a:rPr>
+              <a:t>   create-cluster 명령어 + 설정 파일 참조</a:t>
+            </a:r>
+          </a:p>
+          <a:p>
+            <a:r>
+              <a:rPr sz="1300">
+                <a:solidFill>
+                  <a:srgbClr val="212121"/>
+                </a:solidFill>
+                <a:latin typeface="Freesentation"/>
+              </a:rPr>
+              <a:t>   완료까지 5~10분 소요</a:t>
+            </a:r>
+          </a:p>
+          <a:p/>
+          <a:p>
+            <a:r>
+              <a:rPr sz="1300">
+                <a:solidFill>
+                  <a:srgbClr val="212121"/>
+                </a:solidFill>
+                <a:latin typeface="Freesentation"/>
+              </a:rPr>
+              <a:t>④ 생성 완료 확인</a:t>
+            </a:r>
+          </a:p>
+          <a:p>
+            <a:r>
+              <a:rPr sz="1300">
+                <a:solidFill>
+                  <a:srgbClr val="212121"/>
+                </a:solidFill>
+                <a:latin typeface="Freesentation"/>
+              </a:rPr>
+              <a:t>   describe-cluster 응답 State="ACTIVE" 확인</a:t>
+            </a:r>
+          </a:p>
+          <a:p>
+            <a:r>
+              <a:rPr sz="1300">
+                <a:solidFill>
+                  <a:srgbClr val="212121"/>
+                </a:solidFill>
+                <a:latin typeface="Freesentation"/>
+              </a:rPr>
+              <a:t>   CloudWatch 메트릭 수집 시작 확인</a:t>
+            </a:r>
+          </a:p>
+        </p:txBody>
+      </p:sp>
+      <p:sp>
+        <p:nvSpPr>
+          <p:cNvPr id="9" name="Rounded Rectangle 8"/>
+          <p:cNvSpPr/>
+          <p:nvPr/>
+        </p:nvSpPr>
+        <p:spPr>
+          <a:xfrm>
+            <a:off x="6126480" y="2423160"/>
+            <a:ext cx="5608015" cy="3657600"/>
+          </a:xfrm>
+          <a:prstGeom prst="rect">
+            <a:avLst/>
+          </a:prstGeom>
+          <a:solidFill>
+            <a:srgbClr val="300A24"/>
+          </a:solidFill>
+          <a:ln w="9525">
+            <a:noFill/>
+          </a:ln>
+        </p:spPr>
+        <p:style>
+          <a:lnRef idx="1">
+            <a:schemeClr val="accent1"/>
+          </a:lnRef>
+          <a:fillRef idx="3">
+            <a:schemeClr val="accent1"/>
+          </a:fillRef>
+          <a:effectRef idx="2">
+            <a:schemeClr val="accent1"/>
+          </a:effectRef>
+          <a:fontRef idx="minor">
+            <a:schemeClr val="lt1"/>
+          </a:fontRef>
+        </p:style>
+        <p:txBody>
+          <a:bodyPr rtlCol="0" anchor="ctr"/>
+          <a:lstStyle/>
+          <a:p>
+            <a:pPr algn="ctr"/>
+          </a:p>
+        </p:txBody>
+      </p:sp>
+      <p:sp>
+        <p:nvSpPr>
+          <p:cNvPr id="10" name="Rectangle 9"/>
+          <p:cNvSpPr/>
+          <p:nvPr/>
+        </p:nvSpPr>
+        <p:spPr>
+          <a:xfrm>
+            <a:off x="6126480" y="2423160"/>
+            <a:ext cx="5608015" cy="274320"/>
+          </a:xfrm>
+          <a:prstGeom prst="rect">
+            <a:avLst/>
+          </a:prstGeom>
+          <a:solidFill>
+            <a:srgbClr val="2C001E"/>
+          </a:solidFill>
+          <a:ln>
+            <a:solidFill>
+              <a:srgbClr val="2D2D2D"/>
+            </a:solidFill>
+          </a:ln>
+        </p:spPr>
+        <p:style>
+          <a:lnRef idx="1">
+            <a:schemeClr val="accent1"/>
+          </a:lnRef>
+          <a:fillRef idx="3">
+            <a:schemeClr val="accent1"/>
+          </a:fillRef>
+          <a:effectRef idx="2">
+            <a:schemeClr val="accent1"/>
+          </a:effectRef>
+          <a:fontRef idx="minor">
+            <a:schemeClr val="lt1"/>
+          </a:fontRef>
+        </p:style>
+        <p:txBody>
+          <a:bodyPr rtlCol="0" anchor="ctr"/>
+          <a:lstStyle/>
+          <a:p>
+            <a:pPr algn="ctr"/>
+            <a:r>
+              <a:rPr sz="1000" b="0">
+                <a:solidFill>
+                  <a:srgbClr val="D0D0D0"/>
+                </a:solidFill>
+                <a:latin typeface="Courier New"/>
+              </a:rPr>
+              <a:t>ubuntu@msk-cluster: ~ — bash</a:t>
+            </a:r>
+          </a:p>
+        </p:txBody>
+      </p:sp>
+      <p:sp>
+        <p:nvSpPr>
+          <p:cNvPr id="11" name="Rounded Rectangle 10"/>
+          <p:cNvSpPr/>
+          <p:nvPr/>
+        </p:nvSpPr>
+        <p:spPr>
+          <a:xfrm>
+            <a:off x="457200" y="6172200"/>
+            <a:ext cx="11277295" cy="457200"/>
+          </a:xfrm>
+          <a:prstGeom prst="rect">
+            <a:avLst/>
+          </a:prstGeom>
+          <a:solidFill>
+            <a:srgbClr val="F8F9FA"/>
+          </a:solidFill>
+          <a:ln w="6350">
+            <a:solidFill>
+              <a:srgbClr val="4CB88F"/>
+            </a:solidFill>
+          </a:ln>
+        </p:spPr>
+        <p:style>
+          <a:lnRef idx="1">
+            <a:schemeClr val="accent1"/>
+          </a:lnRef>
+          <a:fillRef idx="3">
+            <a:schemeClr val="accent1"/>
+          </a:fillRef>
+          <a:effectRef idx="2">
+            <a:schemeClr val="accent1"/>
+          </a:effectRef>
+          <a:fontRef idx="minor">
+            <a:schemeClr val="lt1"/>
+          </a:fontRef>
+        </p:style>
+        <p:txBody>
+          <a:bodyPr rtlCol="0" anchor="ctr"/>
+          <a:lstStyle/>
+          <a:p>
+            <a:pPr algn="ctr"/>
+          </a:p>
+        </p:txBody>
+      </p:sp>
+      <p:sp>
+        <p:nvSpPr>
+          <p:cNvPr id="12" name="TextBox 11"/>
+          <p:cNvSpPr txBox="1"/>
+          <p:nvPr/>
+        </p:nvSpPr>
+        <p:spPr>
+          <a:xfrm>
+            <a:off x="6309360" y="2743200"/>
+            <a:ext cx="5212080" cy="3200400"/>
+          </a:xfrm>
+          <a:prstGeom prst="rect">
+            <a:avLst/>
+          </a:prstGeom>
+          <a:noFill/>
+        </p:spPr>
+        <p:txBody>
+          <a:bodyPr wrap="square">
+            <a:spAutoFit/>
+          </a:bodyPr>
+          <a:lstStyle/>
+          <a:p>
+            <a:r>
+              <a:rPr sz="1100">
+                <a:solidFill>
+                  <a:srgbClr val="FFFFFF"/>
+                </a:solidFill>
+                <a:latin typeface="Courier New"/>
+              </a:rPr>
+              <a:t>ubuntu@msk-cluster:~$ aws kafka create-cluster \
+  --cluster-name my-msk-cluster \
+  --broker-node-group-info file://broker-info.json \
+  --kafka-version 3.5.1 \
+  --number-of-broker-nodes 3 \
+  --region ap-northeast-2
+# 응답 예시
+{
+  "ClusterArn": "arn:aws:kafka:ap-northeast-2:...",
+  "ClusterName": "my-msk-cluster",
+  "State": "CREATING"
+}
+ubuntu@msk-cluster:~$ aws kafka describe-cluster --cluster-arn &lt;ARN&gt;</a:t>
+            </a:r>
+          </a:p>
+        </p:txBody>
+      </p:sp>
+      <p:sp>
+        <p:nvSpPr>
+          <p:cNvPr id="13" name="TextBox 12"/>
+          <p:cNvSpPr txBox="1"/>
+          <p:nvPr/>
+        </p:nvSpPr>
+        <p:spPr>
+          <a:xfrm>
+            <a:off x="640080" y="6217920"/>
+            <a:ext cx="10881360" cy="365760"/>
+          </a:xfrm>
+          <a:prstGeom prst="rect">
+            <a:avLst/>
+          </a:prstGeom>
+          <a:noFill/>
+        </p:spPr>
+        <p:txBody>
+          <a:bodyPr wrap="square">
+            <a:spAutoFit/>
+          </a:bodyPr>
+          <a:lstStyle/>
+          <a:p>
+            <a:r>
+              <a:rPr sz="1200">
+                <a:solidFill>
+                  <a:srgbClr val="212121"/>
+                </a:solidFill>
+                <a:latin typeface="Freesentation"/>
+              </a:rPr>
+              <a:t>✅ 확인: aws kafka describe-cluster 응답에서 State="ACTIVE" 확인   |   소요시간: 5~10분   |   실패 시: CloudWatch /aws/msk/ 로그 확인</a:t>
+            </a:r>
+          </a:p>
+        </p:txBody>
+      </p:sp>
+      <p:sp>
+        <p:nvSpPr>
+          <p:cNvPr id="14" name="Oval 13"/>
+          <p:cNvSpPr/>
+          <p:nvPr/>
+        </p:nvSpPr>
+        <p:spPr>
+          <a:xfrm>
+            <a:off x="6263640" y="2514600"/>
+            <a:ext cx="91440" cy="91440"/>
+          </a:xfrm>
+          <a:prstGeom prst="ellipse">
+            <a:avLst/>
+          </a:prstGeom>
+          <a:solidFill>
+            <a:srgbClr val="FF5F57"/>
+          </a:solidFill>
+          <a:ln>
+            <a:noFill/>
+          </a:ln>
+        </p:spPr>
+        <p:style>
+          <a:lnRef idx="1">
+            <a:schemeClr val="accent1"/>
+          </a:lnRef>
+          <a:fillRef idx="3">
+            <a:schemeClr val="accent1"/>
+          </a:fillRef>
+          <a:effectRef idx="2">
+            <a:schemeClr val="accent1"/>
+          </a:effectRef>
+          <a:fontRef idx="minor">
+            <a:schemeClr val="lt1"/>
+          </a:fontRef>
+        </p:style>
+        <p:txBody>
+          <a:bodyPr rtlCol="0" anchor="ctr"/>
+          <a:lstStyle/>
+          <a:p>
+            <a:pPr algn="ctr"/>
+          </a:p>
+        </p:txBody>
+      </p:sp>
+      <p:sp>
+        <p:nvSpPr>
+          <p:cNvPr id="15" name="Oval 14"/>
+          <p:cNvSpPr/>
+          <p:nvPr/>
+        </p:nvSpPr>
+        <p:spPr>
+          <a:xfrm>
+            <a:off x="6423660" y="2514600"/>
+            <a:ext cx="91440" cy="91440"/>
+          </a:xfrm>
+          <a:prstGeom prst="ellipse">
+            <a:avLst/>
+          </a:prstGeom>
+          <a:solidFill>
+            <a:srgbClr val="FEBC2E"/>
+          </a:solidFill>
+          <a:ln>
+            <a:noFill/>
+          </a:ln>
+        </p:spPr>
+        <p:style>
+          <a:lnRef idx="1">
+            <a:schemeClr val="accent1"/>
+          </a:lnRef>
+          <a:fillRef idx="3">
+            <a:schemeClr val="accent1"/>
+          </a:fillRef>
+          <a:effectRef idx="2">
+            <a:schemeClr val="accent1"/>
+          </a:effectRef>
+          <a:fontRef idx="minor">
+            <a:schemeClr val="lt1"/>
+          </a:fontRef>
+        </p:style>
+        <p:txBody>
+          <a:bodyPr rtlCol="0" anchor="ctr"/>
+          <a:lstStyle/>
+          <a:p>
+            <a:pPr algn="ctr"/>
+          </a:p>
+        </p:txBody>
+      </p:sp>
+      <p:sp>
+        <p:nvSpPr>
+          <p:cNvPr id="16" name="Oval 15"/>
+          <p:cNvSpPr/>
+          <p:nvPr/>
+        </p:nvSpPr>
+        <p:spPr>
+          <a:xfrm>
+            <a:off x="6583680" y="2514600"/>
+            <a:ext cx="91440" cy="91440"/>
+          </a:xfrm>
+          <a:prstGeom prst="ellipse">
+            <a:avLst/>
+          </a:prstGeom>
+          <a:solidFill>
+            <a:srgbClr val="28C840"/>
+          </a:solidFill>
+          <a:ln>
+            <a:noFill/>
+          </a:ln>
+        </p:spPr>
+        <p:style>
+          <a:lnRef idx="1">
+            <a:schemeClr val="accent1"/>
+          </a:lnRef>
+          <a:fillRef idx="3">
+            <a:schemeClr val="accent1"/>
+          </a:fillRef>
+          <a:effectRef idx="2">
+            <a:schemeClr val="accent1"/>
+          </a:effectRef>
+          <a:fontRef idx="minor">
+            <a:schemeClr val="lt1"/>
+          </a:fontRef>
+        </p:style>
+        <p:txBody>
+          <a:bodyPr rtlCol="0" anchor="ctr"/>
+          <a:lstStyle/>
+          <a:p>
+            <a:pPr algn="ctr"/>
+          </a:p>
+        </p:txBody>
+      </p:sp>
+    </p:spTree>
+  </p:cSld>
+  <p:clrMapOvr>
+    <a:masterClrMapping/>
+  </p:clrMapOvr>
+</p:sld>
+</file>
+
+<file path=ppt/slides/slide25.xml><?xml version="1.0" encoding="utf-8"?>
+<p:sld xmlns:a="http://schemas.openxmlformats.org/drawingml/2006/main" xmlns:p="http://schemas.openxmlformats.org/presentationml/2006/main" xmlns:r="http://schemas.openxmlformats.org/officeDocument/2006/relationships">
+  <p:cSld>
+    <p:spTree>
+      <p:nvGrpSpPr>
+        <p:cNvPr id="1" name=""/>
+        <p:cNvGrpSpPr/>
+        <p:nvPr/>
+      </p:nvGrpSpPr>
+      <p:grpSpPr/>
+      <p:sp>
+        <p:nvSpPr>
+          <p:cNvPr id="2" name="Text Placeholder 1"/>
+          <p:cNvSpPr>
+            <a:spLocks noGrp="1"/>
+          </p:cNvSpPr>
+          <p:nvPr>
+            <p:ph type="body" idx="10" sz="quarter"/>
+          </p:nvPr>
+        </p:nvSpPr>
+        <p:spPr/>
+        <p:txBody>
+          <a:bodyPr/>
+          <a:lstStyle/>
+          <a:p>
+            <a:r>
+              <a:t>L23. Stats Dashboard</a:t>
+            </a:r>
+          </a:p>
+        </p:txBody>
+      </p:sp>
+      <p:sp>
+        <p:nvSpPr>
+          <p:cNvPr id="3" name="TextBox 2"/>
+          <p:cNvSpPr txBox="1"/>
+          <p:nvPr/>
+        </p:nvSpPr>
+        <p:spPr>
+          <a:xfrm>
+            <a:off x="353872" y="557784"/>
+            <a:ext cx="2717596" cy="320040"/>
+          </a:xfrm>
+          <a:prstGeom prst="rect">
+            <a:avLst/>
+          </a:prstGeom>
+          <a:noFill/>
+        </p:spPr>
+        <p:txBody>
+          <a:bodyPr wrap="square">
+            <a:spAutoFit/>
+          </a:bodyPr>
+          <a:lstStyle/>
+          <a:p>
+            <a:r>
+              <a:rPr sz="2000" b="1">
+                <a:solidFill>
+                  <a:srgbClr val="000000"/>
+                </a:solidFill>
+                <a:latin typeface="Freesentation"/>
+              </a:rPr>
+              <a:t>L23. Stats Dashboard</a:t>
+            </a:r>
+          </a:p>
+        </p:txBody>
+      </p:sp>
+      <p:sp>
+        <p:nvSpPr>
+          <p:cNvPr id="4" name="TextBox 3"/>
+          <p:cNvSpPr txBox="1"/>
+          <p:nvPr/>
+        </p:nvSpPr>
+        <p:spPr>
+          <a:xfrm>
+            <a:off x="353872" y="896112"/>
+            <a:ext cx="2717596" cy="274320"/>
+          </a:xfrm>
+          <a:prstGeom prst="rect">
+            <a:avLst/>
+          </a:prstGeom>
+          <a:noFill/>
+        </p:spPr>
+        <p:txBody>
+          <a:bodyPr wrap="square">
+            <a:spAutoFit/>
+          </a:bodyPr>
+          <a:lstStyle/>
+          <a:p>
+            <a:r>
+              <a:rPr sz="1100">
+                <a:solidFill>
+                  <a:srgbClr val="505050"/>
+                </a:solidFill>
+                <a:latin typeface="Freesentation"/>
+              </a:rPr>
+              <a:t>KPI 대시보드 — 수치+트렌드+근거</a:t>
+            </a:r>
+          </a:p>
+        </p:txBody>
+      </p:sp>
+      <p:sp>
+        <p:nvSpPr>
+          <p:cNvPr id="5" name="TextBox 4"/>
+          <p:cNvSpPr txBox="1"/>
+          <p:nvPr/>
+        </p:nvSpPr>
+        <p:spPr>
+          <a:xfrm>
+            <a:off x="3760012" y="558698"/>
+            <a:ext cx="7546543" cy="365760"/>
+          </a:xfrm>
+          <a:prstGeom prst="rect">
+            <a:avLst/>
+          </a:prstGeom>
+          <a:noFill/>
+        </p:spPr>
+        <p:txBody>
+          <a:bodyPr wrap="square">
+            <a:spAutoFit/>
+          </a:bodyPr>
+          <a:lstStyle/>
+          <a:p>
+            <a:r>
+              <a:rPr sz="1200">
+                <a:solidFill>
+                  <a:srgbClr val="505050"/>
+                </a:solidFill>
+                <a:latin typeface="Freesentation"/>
+              </a:rPr>
+              <a:t>MSK 도입 성과 지표</a:t>
+            </a:r>
+          </a:p>
+        </p:txBody>
+      </p:sp>
+      <p:sp>
+        <p:nvSpPr>
+          <p:cNvPr id="6" name="TextBox 5"/>
+          <p:cNvSpPr txBox="1"/>
+          <p:nvPr/>
+        </p:nvSpPr>
+        <p:spPr>
+          <a:xfrm>
+            <a:off x="457200" y="1600200"/>
+            <a:ext cx="11277295" cy="274320"/>
+          </a:xfrm>
+          <a:prstGeom prst="rect">
+            <a:avLst/>
+          </a:prstGeom>
+          <a:noFill/>
+        </p:spPr>
+        <p:txBody>
+          <a:bodyPr wrap="square">
+            <a:spAutoFit/>
+          </a:bodyPr>
+          <a:lstStyle/>
+          <a:p>
+            <a:r>
+              <a:rPr sz="1600" b="1">
+                <a:solidFill>
+                  <a:srgbClr val="0043DA"/>
+                </a:solidFill>
+                <a:latin typeface="Freesentation"/>
+              </a:rPr>
+              <a:t>AWS MSK 도입 효과 — 핵심 성과 지표</a:t>
+            </a:r>
+          </a:p>
+        </p:txBody>
+      </p:sp>
+      <p:sp>
+        <p:nvSpPr>
+          <p:cNvPr id="7" name="TextBox 6"/>
+          <p:cNvSpPr txBox="1"/>
+          <p:nvPr/>
+        </p:nvSpPr>
+        <p:spPr>
+          <a:xfrm>
+            <a:off x="457200" y="1965960"/>
+            <a:ext cx="11277295" cy="228600"/>
+          </a:xfrm>
+          <a:prstGeom prst="rect">
+            <a:avLst/>
+          </a:prstGeom>
+          <a:noFill/>
+        </p:spPr>
+        <p:txBody>
+          <a:bodyPr wrap="square">
+            <a:spAutoFit/>
+          </a:bodyPr>
+          <a:lstStyle/>
+          <a:p>
+            <a:r>
+              <a:rPr sz="1300">
+                <a:solidFill>
+                  <a:srgbClr val="212121"/>
+                </a:solidFill>
+                <a:latin typeface="Freesentation"/>
+              </a:rPr>
+              <a:t>2026년 1분기 실측 기준 (운영 6개월 후)</a:t>
+            </a:r>
+          </a:p>
+        </p:txBody>
+      </p:sp>
+      <p:sp>
+        <p:nvSpPr>
+          <p:cNvPr id="8" name="Rounded Rectangle 7"/>
+          <p:cNvSpPr/>
+          <p:nvPr/>
+        </p:nvSpPr>
+        <p:spPr>
+          <a:xfrm>
+            <a:off x="457200" y="2423160"/>
+            <a:ext cx="3566160" cy="3291840"/>
+          </a:xfrm>
+          <a:prstGeom prst="roundRect">
+            <a:avLst/>
+          </a:prstGeom>
+          <a:solidFill>
+            <a:srgbClr val="F8F9FA"/>
+          </a:solidFill>
+          <a:ln w="9525">
+            <a:solidFill>
+              <a:srgbClr val="0043DA"/>
+            </a:solidFill>
+          </a:ln>
+        </p:spPr>
+        <p:style>
+          <a:lnRef idx="1">
+            <a:schemeClr val="accent1"/>
+          </a:lnRef>
+          <a:fillRef idx="3">
+            <a:schemeClr val="accent1"/>
+          </a:fillRef>
+          <a:effectRef idx="2">
+            <a:schemeClr val="accent1"/>
+          </a:effectRef>
+          <a:fontRef idx="minor">
+            <a:schemeClr val="lt1"/>
+          </a:fontRef>
+        </p:style>
+        <p:txBody>
+          <a:bodyPr rtlCol="0" anchor="ctr"/>
+          <a:lstStyle/>
+          <a:p>
+            <a:pPr algn="ctr"/>
+          </a:p>
+        </p:txBody>
+      </p:sp>
+      <p:sp>
+        <p:nvSpPr>
+          <p:cNvPr id="9" name="Rounded Rectangle 8"/>
+          <p:cNvSpPr/>
+          <p:nvPr/>
+        </p:nvSpPr>
+        <p:spPr>
+          <a:xfrm>
+            <a:off x="4206240" y="2423160"/>
+            <a:ext cx="3566160" cy="3291840"/>
+          </a:xfrm>
+          <a:prstGeom prst="roundRect">
+            <a:avLst/>
+          </a:prstGeom>
+          <a:solidFill>
+            <a:srgbClr val="F8F9FA"/>
+          </a:solidFill>
+          <a:ln w="9525">
+            <a:solidFill>
+              <a:srgbClr val="0043DA"/>
+            </a:solidFill>
+          </a:ln>
+        </p:spPr>
+        <p:style>
+          <a:lnRef idx="1">
+            <a:schemeClr val="accent1"/>
+          </a:lnRef>
+          <a:fillRef idx="3">
+            <a:schemeClr val="accent1"/>
+          </a:fillRef>
+          <a:effectRef idx="2">
+            <a:schemeClr val="accent1"/>
+          </a:effectRef>
+          <a:fontRef idx="minor">
+            <a:schemeClr val="lt1"/>
+          </a:fontRef>
+        </p:style>
+        <p:txBody>
+          <a:bodyPr rtlCol="0" anchor="ctr"/>
+          <a:lstStyle/>
+          <a:p>
+            <a:pPr algn="ctr"/>
+          </a:p>
+        </p:txBody>
+      </p:sp>
+      <p:sp>
+        <p:nvSpPr>
+          <p:cNvPr id="10" name="Rounded Rectangle 9"/>
+          <p:cNvSpPr/>
+          <p:nvPr/>
+        </p:nvSpPr>
+        <p:spPr>
+          <a:xfrm>
+            <a:off x="7955279" y="2423160"/>
+            <a:ext cx="3566160" cy="3291840"/>
+          </a:xfrm>
+          <a:prstGeom prst="roundRect">
+            <a:avLst/>
+          </a:prstGeom>
+          <a:solidFill>
+            <a:srgbClr val="F8F9FA"/>
+          </a:solidFill>
+          <a:ln w="9525">
+            <a:solidFill>
+              <a:srgbClr val="0043DA"/>
+            </a:solidFill>
+          </a:ln>
+        </p:spPr>
+        <p:style>
+          <a:lnRef idx="1">
+            <a:schemeClr val="accent1"/>
+          </a:lnRef>
+          <a:fillRef idx="3">
+            <a:schemeClr val="accent1"/>
+          </a:fillRef>
+          <a:effectRef idx="2">
+            <a:schemeClr val="accent1"/>
+          </a:effectRef>
+          <a:fontRef idx="minor">
+            <a:schemeClr val="lt1"/>
+          </a:fontRef>
+        </p:style>
+        <p:txBody>
+          <a:bodyPr rtlCol="0" anchor="ctr"/>
+          <a:lstStyle/>
+          <a:p>
+            <a:pPr algn="ctr"/>
+          </a:p>
+        </p:txBody>
+      </p:sp>
+      <p:sp>
+        <p:nvSpPr>
+          <p:cNvPr id="11" name="Rounded Rectangle 10"/>
+          <p:cNvSpPr/>
+          <p:nvPr/>
+        </p:nvSpPr>
+        <p:spPr>
+          <a:xfrm>
+            <a:off x="457200" y="5897880"/>
+            <a:ext cx="11277295" cy="548640"/>
+          </a:xfrm>
+          <a:prstGeom prst="roundRect">
+            <a:avLst/>
+          </a:prstGeom>
+          <a:solidFill>
+            <a:srgbClr val="0043DA"/>
+          </a:solidFill>
+          <a:ln>
+            <a:solidFill>
+              <a:srgbClr val="0043DA"/>
+            </a:solidFill>
+          </a:ln>
+        </p:spPr>
+        <p:style>
+          <a:lnRef idx="1">
+            <a:schemeClr val="accent1"/>
+          </a:lnRef>
+          <a:fillRef idx="3">
+            <a:schemeClr val="accent1"/>
+          </a:fillRef>
+          <a:effectRef idx="2">
+            <a:schemeClr val="accent1"/>
+          </a:effectRef>
+          <a:fontRef idx="minor">
+            <a:schemeClr val="lt1"/>
+          </a:fontRef>
+        </p:style>
+        <p:txBody>
+          <a:bodyPr rtlCol="0" anchor="ctr"/>
+          <a:lstStyle/>
+          <a:p>
+            <a:pPr algn="ctr"/>
+          </a:p>
+        </p:txBody>
+      </p:sp>
+      <p:sp>
+        <p:nvSpPr>
+          <p:cNvPr id="12" name="TextBox 11"/>
+          <p:cNvSpPr txBox="1"/>
+          <p:nvPr/>
+        </p:nvSpPr>
+        <p:spPr>
+          <a:xfrm>
+            <a:off x="594360" y="2606040"/>
+            <a:ext cx="3291840" cy="502920"/>
+          </a:xfrm>
+          <a:prstGeom prst="rect">
+            <a:avLst/>
+          </a:prstGeom>
+          <a:noFill/>
+        </p:spPr>
+        <p:txBody>
+          <a:bodyPr wrap="square">
+            <a:spAutoFit/>
+          </a:bodyPr>
+          <a:lstStyle/>
+          <a:p>
+            <a:pPr algn="ctr"/>
+            <a:r>
+              <a:rPr sz="2600" b="1">
+                <a:solidFill>
+                  <a:srgbClr val="0043DA"/>
+                </a:solidFill>
+                <a:latin typeface="Freesentation"/>
+              </a:rPr>
+              <a:t>▼  ₩1.8억/년</a:t>
+            </a:r>
+          </a:p>
+        </p:txBody>
+      </p:sp>
+      <p:sp>
+        <p:nvSpPr>
+          <p:cNvPr id="13" name="TextBox 12"/>
+          <p:cNvSpPr txBox="1"/>
+          <p:nvPr/>
+        </p:nvSpPr>
+        <p:spPr>
+          <a:xfrm>
+            <a:off x="594360" y="3200400"/>
+            <a:ext cx="3291840" cy="320040"/>
+          </a:xfrm>
+          <a:prstGeom prst="rect">
+            <a:avLst/>
+          </a:prstGeom>
+          <a:noFill/>
+        </p:spPr>
+        <p:txBody>
+          <a:bodyPr wrap="square">
+            <a:spAutoFit/>
+          </a:bodyPr>
+          <a:lstStyle/>
+          <a:p>
+            <a:pPr algn="ctr"/>
+            <a:r>
+              <a:rPr sz="1400" b="1">
+                <a:solidFill>
+                  <a:srgbClr val="212121"/>
+                </a:solidFill>
+                <a:latin typeface="Freesentation"/>
+              </a:rPr>
+              <a:t>비용 절감</a:t>
+            </a:r>
+          </a:p>
+        </p:txBody>
+      </p:sp>
+      <p:sp>
+        <p:nvSpPr>
+          <p:cNvPr id="14" name="TextBox 13"/>
+          <p:cNvSpPr txBox="1"/>
+          <p:nvPr/>
+        </p:nvSpPr>
+        <p:spPr>
+          <a:xfrm>
+            <a:off x="594360" y="3611880"/>
+            <a:ext cx="3291840" cy="1371600"/>
+          </a:xfrm>
+          <a:prstGeom prst="rect">
+            <a:avLst/>
+          </a:prstGeom>
+          <a:noFill/>
+        </p:spPr>
+        <p:txBody>
+          <a:bodyPr wrap="square">
+            <a:spAutoFit/>
+          </a:bodyPr>
+          <a:lstStyle/>
+          <a:p>
+            <a:pPr algn="ctr"/>
+            <a:r>
+              <a:rPr sz="1200">
+                <a:solidFill>
+                  <a:srgbClr val="212121"/>
+                </a:solidFill>
+                <a:latin typeface="Freesentation"/>
+              </a:rPr>
+              <a:t>운영 인력 2명 절감</a:t>
+            </a:r>
+          </a:p>
+          <a:p>
+            <a:pPr algn="ctr"/>
+            <a:r>
+              <a:rPr sz="1200">
+                <a:solidFill>
+                  <a:srgbClr val="212121"/>
+                </a:solidFill>
+                <a:latin typeface="Freesentation"/>
+              </a:rPr>
+              <a:t>+ 인프라 비용 감소</a:t>
+            </a:r>
+          </a:p>
+          <a:p>
+            <a:pPr algn="ctr"/>
+            <a:r>
+              <a:rPr sz="1200">
+                <a:solidFill>
+                  <a:srgbClr val="212121"/>
+                </a:solidFill>
+                <a:latin typeface="Freesentation"/>
+              </a:rPr>
+              <a:t>(MSK vs 자체 Kafka 운영)</a:t>
+            </a:r>
+          </a:p>
+        </p:txBody>
+      </p:sp>
+      <p:sp>
+        <p:nvSpPr>
+          <p:cNvPr id="15" name="TextBox 14"/>
+          <p:cNvSpPr txBox="1"/>
+          <p:nvPr/>
+        </p:nvSpPr>
+        <p:spPr>
+          <a:xfrm>
+            <a:off x="594360" y="5349240"/>
+            <a:ext cx="3291840" cy="274320"/>
+          </a:xfrm>
+          <a:prstGeom prst="rect">
+            <a:avLst/>
+          </a:prstGeom>
+          <a:noFill/>
+        </p:spPr>
+        <p:txBody>
+          <a:bodyPr wrap="square">
+            <a:spAutoFit/>
+          </a:bodyPr>
+          <a:lstStyle/>
+          <a:p>
+            <a:pPr algn="ctr"/>
+            <a:r>
+              <a:rPr sz="1100">
+                <a:solidFill>
+                  <a:srgbClr val="505050"/>
+                </a:solidFill>
+                <a:latin typeface="Freesentation"/>
+              </a:rPr>
+              <a:t>2026-Q1 실측</a:t>
+            </a:r>
+          </a:p>
+        </p:txBody>
+      </p:sp>
+      <p:sp>
+        <p:nvSpPr>
+          <p:cNvPr id="16" name="TextBox 15"/>
+          <p:cNvSpPr txBox="1"/>
+          <p:nvPr/>
+        </p:nvSpPr>
+        <p:spPr>
+          <a:xfrm>
+            <a:off x="4343400" y="2606040"/>
+            <a:ext cx="3291840" cy="502920"/>
+          </a:xfrm>
+          <a:prstGeom prst="rect">
+            <a:avLst/>
+          </a:prstGeom>
+          <a:noFill/>
+        </p:spPr>
+        <p:txBody>
+          <a:bodyPr wrap="square">
+            <a:spAutoFit/>
+          </a:bodyPr>
+          <a:lstStyle/>
+          <a:p>
+            <a:pPr algn="ctr"/>
+            <a:r>
+              <a:rPr sz="2600" b="1">
+                <a:solidFill>
+                  <a:srgbClr val="4CB88F"/>
+                </a:solidFill>
+                <a:latin typeface="Freesentation"/>
+              </a:rPr>
+              <a:t>▲  +320%</a:t>
+            </a:r>
+          </a:p>
+        </p:txBody>
+      </p:sp>
+      <p:sp>
+        <p:nvSpPr>
+          <p:cNvPr id="17" name="TextBox 16"/>
+          <p:cNvSpPr txBox="1"/>
+          <p:nvPr/>
+        </p:nvSpPr>
+        <p:spPr>
+          <a:xfrm>
+            <a:off x="4343400" y="3200400"/>
+            <a:ext cx="3291840" cy="320040"/>
+          </a:xfrm>
+          <a:prstGeom prst="rect">
+            <a:avLst/>
+          </a:prstGeom>
+          <a:noFill/>
+        </p:spPr>
+        <p:txBody>
+          <a:bodyPr wrap="square">
+            <a:spAutoFit/>
+          </a:bodyPr>
+          <a:lstStyle/>
+          <a:p>
+            <a:pPr algn="ctr"/>
+            <a:r>
+              <a:rPr sz="1400" b="1">
+                <a:solidFill>
+                  <a:srgbClr val="212121"/>
+                </a:solidFill>
+                <a:latin typeface="Freesentation"/>
+              </a:rPr>
+              <a:t>처리량 증가</a:t>
+            </a:r>
+          </a:p>
+        </p:txBody>
+      </p:sp>
+      <p:sp>
+        <p:nvSpPr>
+          <p:cNvPr id="18" name="TextBox 17"/>
+          <p:cNvSpPr txBox="1"/>
+          <p:nvPr/>
+        </p:nvSpPr>
+        <p:spPr>
+          <a:xfrm>
+            <a:off x="4343400" y="3611880"/>
+            <a:ext cx="3291840" cy="1371600"/>
+          </a:xfrm>
+          <a:prstGeom prst="rect">
+            <a:avLst/>
+          </a:prstGeom>
+          <a:noFill/>
+        </p:spPr>
+        <p:txBody>
+          <a:bodyPr wrap="square">
+            <a:spAutoFit/>
+          </a:bodyPr>
+          <a:lstStyle/>
+          <a:p>
+            <a:pPr algn="ctr"/>
+            <a:r>
+              <a:rPr sz="1200">
+                <a:solidFill>
+                  <a:srgbClr val="212121"/>
+                </a:solidFill>
+                <a:latin typeface="Freesentation"/>
+              </a:rPr>
+              <a:t>10K → 42K msg/s</a:t>
+            </a:r>
+          </a:p>
+          <a:p>
+            <a:pPr algn="ctr"/>
+            <a:r>
+              <a:rPr sz="1200">
+                <a:solidFill>
+                  <a:srgbClr val="212121"/>
+                </a:solidFill>
+                <a:latin typeface="Freesentation"/>
+              </a:rPr>
+              <a:t>Multi-AZ 자동 스케일</a:t>
+            </a:r>
+          </a:p>
+          <a:p>
+            <a:pPr algn="ctr"/>
+            <a:r>
+              <a:rPr sz="1200">
+                <a:solidFill>
+                  <a:srgbClr val="212121"/>
+                </a:solidFill>
+                <a:latin typeface="Freesentation"/>
+              </a:rPr>
+              <a:t>(피크 트래픽 실측)</a:t>
+            </a:r>
+          </a:p>
+        </p:txBody>
+      </p:sp>
+      <p:sp>
+        <p:nvSpPr>
+          <p:cNvPr id="19" name="TextBox 18"/>
+          <p:cNvSpPr txBox="1"/>
+          <p:nvPr/>
+        </p:nvSpPr>
+        <p:spPr>
+          <a:xfrm>
+            <a:off x="4343400" y="5349240"/>
+            <a:ext cx="3291840" cy="274320"/>
+          </a:xfrm>
+          <a:prstGeom prst="rect">
+            <a:avLst/>
+          </a:prstGeom>
+          <a:noFill/>
+        </p:spPr>
+        <p:txBody>
+          <a:bodyPr wrap="square">
+            <a:spAutoFit/>
+          </a:bodyPr>
+          <a:lstStyle/>
+          <a:p>
+            <a:pPr algn="ctr"/>
+            <a:r>
+              <a:rPr sz="1100">
+                <a:solidFill>
+                  <a:srgbClr val="505050"/>
+                </a:solidFill>
+                <a:latin typeface="Freesentation"/>
+              </a:rPr>
+              <a:t>피크 트래픽 기준</a:t>
+            </a:r>
+          </a:p>
+        </p:txBody>
+      </p:sp>
+      <p:sp>
+        <p:nvSpPr>
+          <p:cNvPr id="20" name="TextBox 19"/>
+          <p:cNvSpPr txBox="1"/>
+          <p:nvPr/>
+        </p:nvSpPr>
+        <p:spPr>
+          <a:xfrm>
+            <a:off x="8092440" y="2606040"/>
+            <a:ext cx="3291840" cy="502920"/>
+          </a:xfrm>
+          <a:prstGeom prst="rect">
+            <a:avLst/>
+          </a:prstGeom>
+          <a:noFill/>
+        </p:spPr>
+        <p:txBody>
+          <a:bodyPr wrap="square">
+            <a:spAutoFit/>
+          </a:bodyPr>
+          <a:lstStyle/>
+          <a:p>
+            <a:pPr algn="ctr"/>
+            <a:r>
+              <a:rPr sz="2600" b="1">
+                <a:solidFill>
+                  <a:srgbClr val="0043DA"/>
+                </a:solidFill>
+                <a:latin typeface="Freesentation"/>
+              </a:rPr>
+              <a:t>▼  -75%</a:t>
+            </a:r>
+          </a:p>
+        </p:txBody>
+      </p:sp>
+      <p:sp>
+        <p:nvSpPr>
+          <p:cNvPr id="21" name="TextBox 20"/>
+          <p:cNvSpPr txBox="1"/>
+          <p:nvPr/>
+        </p:nvSpPr>
+        <p:spPr>
+          <a:xfrm>
+            <a:off x="8092440" y="3200400"/>
+            <a:ext cx="3291840" cy="320040"/>
+          </a:xfrm>
+          <a:prstGeom prst="rect">
+            <a:avLst/>
+          </a:prstGeom>
+          <a:noFill/>
+        </p:spPr>
+        <p:txBody>
+          <a:bodyPr wrap="square">
+            <a:spAutoFit/>
+          </a:bodyPr>
+          <a:lstStyle/>
+          <a:p>
+            <a:pPr algn="ctr"/>
+            <a:r>
+              <a:rPr sz="1400" b="1">
+                <a:solidFill>
+                  <a:srgbClr val="212121"/>
+                </a:solidFill>
+                <a:latin typeface="Freesentation"/>
+              </a:rPr>
+              <a:t>지연시간 감소</a:t>
+            </a:r>
+          </a:p>
+        </p:txBody>
+      </p:sp>
+      <p:sp>
+        <p:nvSpPr>
+          <p:cNvPr id="22" name="TextBox 21"/>
+          <p:cNvSpPr txBox="1"/>
+          <p:nvPr/>
+        </p:nvSpPr>
+        <p:spPr>
+          <a:xfrm>
+            <a:off x="8092440" y="3611880"/>
+            <a:ext cx="3291840" cy="1371600"/>
+          </a:xfrm>
+          <a:prstGeom prst="rect">
+            <a:avLst/>
+          </a:prstGeom>
+          <a:noFill/>
+        </p:spPr>
+        <p:txBody>
+          <a:bodyPr wrap="square">
+            <a:spAutoFit/>
+          </a:bodyPr>
+          <a:lstStyle/>
+          <a:p>
+            <a:pPr algn="ctr"/>
+            <a:r>
+              <a:rPr sz="1200">
+                <a:solidFill>
+                  <a:srgbClr val="212121"/>
+                </a:solidFill>
+                <a:latin typeface="Freesentation"/>
+              </a:rPr>
+              <a:t>200ms → 50ms</a:t>
+            </a:r>
+          </a:p>
+          <a:p>
+            <a:pPr algn="ctr"/>
+            <a:r>
+              <a:rPr sz="1200">
+                <a:solidFill>
+                  <a:srgbClr val="212121"/>
+                </a:solidFill>
+                <a:latin typeface="Freesentation"/>
+              </a:rPr>
+              <a:t>VPC Endpoint 적용</a:t>
+            </a:r>
+          </a:p>
+          <a:p>
+            <a:pPr algn="ctr"/>
+            <a:r>
+              <a:rPr sz="1200">
+                <a:solidFill>
+                  <a:srgbClr val="212121"/>
+                </a:solidFill>
+                <a:latin typeface="Freesentation"/>
+              </a:rPr>
+              <a:t>(평균 레이턴시 실측)</a:t>
+            </a:r>
+          </a:p>
+        </p:txBody>
+      </p:sp>
+      <p:sp>
+        <p:nvSpPr>
+          <p:cNvPr id="23" name="TextBox 22"/>
+          <p:cNvSpPr txBox="1"/>
+          <p:nvPr/>
+        </p:nvSpPr>
+        <p:spPr>
+          <a:xfrm>
+            <a:off x="8092440" y="5349240"/>
+            <a:ext cx="3291840" cy="274320"/>
+          </a:xfrm>
+          <a:prstGeom prst="rect">
+            <a:avLst/>
+          </a:prstGeom>
+          <a:noFill/>
+        </p:spPr>
+        <p:txBody>
+          <a:bodyPr wrap="square">
+            <a:spAutoFit/>
+          </a:bodyPr>
+          <a:lstStyle/>
+          <a:p>
+            <a:pPr algn="ctr"/>
+            <a:r>
+              <a:rPr sz="1100">
+                <a:solidFill>
+                  <a:srgbClr val="505050"/>
+                </a:solidFill>
+                <a:latin typeface="Freesentation"/>
+              </a:rPr>
+              <a:t>평균 레이턴시</a:t>
+            </a:r>
+          </a:p>
+        </p:txBody>
+      </p:sp>
+      <p:sp>
+        <p:nvSpPr>
+          <p:cNvPr id="24" name="TextBox 23"/>
+          <p:cNvSpPr txBox="1"/>
+          <p:nvPr/>
+        </p:nvSpPr>
+        <p:spPr>
+          <a:xfrm>
+            <a:off x="640080" y="5971032"/>
+            <a:ext cx="10881360" cy="365760"/>
+          </a:xfrm>
+          <a:prstGeom prst="rect">
+            <a:avLst/>
+          </a:prstGeom>
+          <a:noFill/>
+        </p:spPr>
+        <p:txBody>
+          <a:bodyPr wrap="square">
+            <a:spAutoFit/>
+          </a:bodyPr>
+          <a:lstStyle/>
+          <a:p>
+            <a:r>
+              <a:rPr sz="1300" b="1">
+                <a:solidFill>
+                  <a:srgbClr val="FFFFFF"/>
+                </a:solidFill>
+                <a:latin typeface="Freesentation"/>
+              </a:rPr>
+              <a:t>📊 종합: MSK 도입 6개월 만에 ROI 240% 달성 — 연간 순이익 ₩1.05억 (절감 ₩1.8억 - 서비스 비용 ₩0.75억)</a:t>
+            </a:r>
+          </a:p>
+        </p:txBody>
+      </p:sp>
+    </p:spTree>
+  </p:cSld>
+  <p:clrMapOvr>
+    <a:masterClrMapping/>
+  </p:clrMapOvr>
+</p:sld>
+</file>
+
+<file path=ppt/slides/slide26.xml><?xml version="1.0" encoding="utf-8"?>
 <p:sld xmlns:a="http://schemas.openxmlformats.org/drawingml/2006/main" xmlns:r="http://schemas.openxmlformats.org/officeDocument/2006/relationships" xmlns:p="http://schemas.openxmlformats.org/presentationml/2006/main">
   <p:cSld>
     <p:spTree>

--- a/results/pptx/AWS_MSK_Expert_Intro.pptx
+++ b/results/pptx/AWS_MSK_Expert_Intro.pptx
@@ -4148,7 +4148,7 @@
           <a:p>
             <a:pPr algn="ctr"/>
             <a:r>
-              <a:rPr sz="1300" b="1">
+              <a:rPr sz="1100" b="1">
                 <a:solidFill>
                   <a:srgbClr val="0043DA"/>
                 </a:solidFill>
@@ -4183,7 +4183,7 @@
           <a:p>
             <a:pPr algn="ctr"/>
             <a:r>
-              <a:rPr sz="1300" b="1">
+              <a:rPr sz="1100" b="1">
                 <a:solidFill>
                   <a:srgbClr val="0043DA"/>
                 </a:solidFill>
@@ -4195,7 +4195,7 @@
           <a:p>
             <a:pPr algn="ctr"/>
             <a:r>
-              <a:rPr sz="1300" b="1">
+              <a:rPr sz="1100" b="1">
                 <a:solidFill>
                   <a:srgbClr val="0043DA"/>
                 </a:solidFill>
@@ -4230,7 +4230,7 @@
           <a:p>
             <a:pPr algn="ctr"/>
             <a:r>
-              <a:rPr sz="1300" b="1">
+              <a:rPr sz="1100" b="1">
                 <a:solidFill>
                   <a:srgbClr val="FFFFFF"/>
                 </a:solidFill>
@@ -4242,7 +4242,7 @@
           <a:p>
             <a:pPr algn="ctr"/>
             <a:r>
-              <a:rPr sz="1300" b="1">
+              <a:rPr sz="1100" b="1">
                 <a:solidFill>
                   <a:srgbClr val="FFFFFF"/>
                 </a:solidFill>
@@ -4289,7 +4289,7 @@
           <a:p>
             <a:pPr algn="ctr"/>
             <a:r>
-              <a:rPr sz="1300" b="1">
+              <a:rPr sz="1100" b="1">
                 <a:solidFill>
                   <a:srgbClr val="FFFFFF"/>
                 </a:solidFill>
@@ -4582,9 +4582,9 @@
           <a:solidFill>
             <a:srgbClr val="F8F9FA"/>
           </a:solidFill>
-          <a:ln>
+          <a:ln w="9525">
             <a:solidFill>
-              <a:srgbClr val="F8F9FA"/>
+              <a:srgbClr val="DCDCDC"/>
             </a:solidFill>
           </a:ln>
         </p:spPr>
@@ -4628,9 +4628,9 @@
           <a:solidFill>
             <a:srgbClr val="E6F0FF"/>
           </a:solidFill>
-          <a:ln>
+          <a:ln w="9525">
             <a:solidFill>
-              <a:srgbClr val="E6F0FF"/>
+              <a:srgbClr val="0043DA"/>
             </a:solidFill>
           </a:ln>
         </p:spPr>
@@ -4882,7 +4882,7 @@
           <a:p>
             <a:pPr algn="ctr"/>
             <a:r>
-              <a:rPr sz="1100" b="1">
+              <a:rPr sz="1300" b="1">
                 <a:solidFill>
                   <a:srgbClr val="FFFFFF"/>
                 </a:solidFill>
@@ -4917,7 +4917,7 @@
           <a:p>
             <a:pPr algn="ctr"/>
             <a:r>
-              <a:rPr sz="1100" b="1">
+              <a:rPr sz="1300" b="1">
                 <a:solidFill>
                   <a:srgbClr val="FFFFFF"/>
                 </a:solidFill>
@@ -5355,7 +5355,7 @@
           </a:solidFill>
           <a:ln w="9525">
             <a:solidFill>
-              <a:srgbClr val="E6F0FF"/>
+              <a:srgbClr val="0043DA"/>
             </a:solidFill>
           </a:ln>
         </p:spPr>
@@ -5424,7 +5424,7 @@
           <a:lstStyle/>
           <a:p>
             <a:r>
-              <a:rPr sz="1300">
+              <a:rPr sz="1300" b="1">
                 <a:solidFill>
                   <a:srgbClr val="FFFFFF"/>
                 </a:solidFill>
@@ -5476,7 +5476,7 @@
           <a:lstStyle/>
           <a:p>
             <a:r>
-              <a:rPr sz="1300">
+              <a:rPr sz="1300" b="1">
                 <a:solidFill>
                   <a:srgbClr val="FFFFFF"/>
                 </a:solidFill>
@@ -6140,9 +6140,9 @@
                     <a:bodyPr/>
                     <a:lstStyle/>
                     <a:p>
-                      <a:pPr algn="ctr"/>
+                      <a:pPr algn="l"/>
                       <a:r>
-                        <a:rPr lang="ko-KR" sz="1100" b="1">
+                        <a:rPr lang="ko-KR" sz="1400" b="1">
                           <a:solidFill>
                             <a:srgbClr val="FFFFFF"/>
                           </a:solidFill>
@@ -6185,7 +6185,7 @@
                     <a:p>
                       <a:pPr algn="ctr"/>
                       <a:r>
-                        <a:rPr lang="ko-KR" sz="1100" b="1">
+                        <a:rPr lang="ko-KR" sz="1400" b="1">
                           <a:solidFill>
                             <a:srgbClr val="FFFFFF"/>
                           </a:solidFill>
@@ -6228,7 +6228,7 @@
                     <a:p>
                       <a:pPr algn="ctr"/>
                       <a:r>
-                        <a:rPr lang="ko-KR" sz="1100" b="1">
+                        <a:rPr lang="ko-KR" sz="1400" b="1">
                           <a:solidFill>
                             <a:srgbClr val="FFFFFF"/>
                           </a:solidFill>
@@ -6271,7 +6271,7 @@
                     <a:p>
                       <a:pPr algn="ctr"/>
                       <a:r>
-                        <a:rPr lang="ko-KR" sz="1100" b="1">
+                        <a:rPr lang="ko-KR" sz="1400" b="1">
                           <a:solidFill>
                             <a:srgbClr val="FFFFFF"/>
                           </a:solidFill>
@@ -7266,7 +7266,7 @@
           <a:lstStyle/>
           <a:p>
             <a:r>
-              <a:rPr sz="1300">
+              <a:rPr sz="1200">
                 <a:latin typeface="Freesentation"/>
               </a:rPr>
               <a:t>3+ 옵션 비교 테이블 — 항목별 교차 평가</a:t>
@@ -7487,7 +7487,7 @@
           <a:p>
             <a:pPr algn="ctr"/>
             <a:r>
-              <a:rPr lang="ko-KR" sz="1100" b="1">
+              <a:rPr lang="ko-KR" sz="1300" b="1">
                 <a:solidFill>
                   <a:srgbClr val="FFFFFF"/>
                 </a:solidFill>
@@ -7525,7 +7525,7 @@
           <a:p>
             <a:pPr algn="ctr"/>
             <a:r>
-              <a:rPr lang="ko-KR" sz="1100" b="1">
+              <a:rPr lang="ko-KR" sz="1300" b="1">
                 <a:solidFill>
                   <a:srgbClr val="FFFFFF"/>
                 </a:solidFill>
@@ -7555,9 +7555,9 @@
           <a:solidFill>
             <a:srgbClr val="F8F9FA"/>
           </a:solidFill>
-          <a:ln>
+          <a:ln w="9525">
             <a:solidFill>
-              <a:srgbClr val="F8F9FA"/>
+              <a:srgbClr val="DCDCDC"/>
             </a:solidFill>
           </a:ln>
         </p:spPr>
@@ -7588,9 +7588,9 @@
           <a:solidFill>
             <a:srgbClr val="E6F0FF"/>
           </a:solidFill>
-          <a:ln>
+          <a:ln w="9525">
             <a:solidFill>
-              <a:srgbClr val="E6F0FF"/>
+              <a:srgbClr val="0043DA"/>
             </a:solidFill>
           </a:ln>
         </p:spPr>
@@ -8009,25 +8009,27 @@
         <p:spPr>
           <a:xfrm>
             <a:off x="5318760" y="5029200"/>
-            <a:ext cx="1554480" cy="274320"/>
-          </a:xfrm>
-          <a:prstGeom prst="rect">
-            <a:avLst/>
-          </a:prstGeom>
-          <a:noFill/>
+            <a:ext cx="1554480" cy="457200"/>
+          </a:xfrm>
+          <a:prstGeom prst="roundRect">
+            <a:avLst>
+              <a:gd name="adj" fmla="val 16667"/>
+            </a:avLst>
+          </a:prstGeom>
+          <a:solidFill>
+            <a:srgbClr val="0043DA"/>
+          </a:solidFill>
           <a:ln>
             <a:noFill/>
           </a:ln>
         </p:spPr>
         <p:txBody>
-          <a:bodyPr wrap="square">
-            <a:spAutoFit/>
-          </a:bodyPr>
+          <a:bodyPr wrap="square" anchor="ctr"/>
           <a:lstStyle/>
           <a:p>
             <a:pPr algn="ctr"/>
             <a:r>
-              <a:rPr lang="ko-KR" sz="1100" b="1">
+              <a:rPr lang="ko-KR" sz="2000" b="1">
                 <a:solidFill>
                   <a:srgbClr val="FFFFFF"/>
                 </a:solidFill>
@@ -8146,7 +8148,7 @@
           <a:lstStyle/>
           <a:p>
             <a:r>
-              <a:rPr sz="1300">
+              <a:rPr sz="1200">
                 <a:latin typeface="Freesentation"/>
               </a:rPr>
               <a:t>KPI 수치 중심 시간 비교 — 변화량 강조</a:t>
@@ -8428,6 +8430,7 @@
           </a:bodyPr>
           <a:lstStyle/>
           <a:p>
+            <a:pPr algn="l"/>
             <a:r>
               <a:rPr sz="1300" b="1">
                 <a:solidFill>
@@ -8448,7 +8451,7 @@
             </a:r>
           </a:p>
           <a:p>
-            <a:pPr lvl="1"/>
+            <a:pPr algn="l"/>
             <a:r>
               <a:rPr sz="1300" b="0">
                 <a:solidFill>
@@ -8456,11 +8459,11 @@
                 </a:solidFill>
                 <a:latin typeface="Freesentation"/>
               </a:rPr>
-              <a:t>Kafka 클러스터 운영 자동화 (AWS 실측)</a:t>
-            </a:r>
-          </a:p>
-          <a:p>
-            <a:pPr>
+              <a:t>  Kafka 클러스터 운영 자동화 (AWS 실측)</a:t>
+            </a:r>
+          </a:p>
+          <a:p>
+            <a:pPr algn="l">
               <a:spcBef>
                 <a:spcPts val="400"/>
               </a:spcBef>
@@ -8476,7 +8479,7 @@
             </a:r>
           </a:p>
           <a:p>
-            <a:pPr lvl="1"/>
+            <a:pPr algn="l"/>
             <a:r>
               <a:rPr sz="1300" b="0">
                 <a:solidFill>
@@ -8484,11 +8487,11 @@
                 </a:solidFill>
                 <a:latin typeface="Freesentation"/>
               </a:rPr>
-              <a:t>Multi-AZ 자동 복제, 장애 복구 &lt; 5분</a:t>
-            </a:r>
-          </a:p>
-          <a:p>
-            <a:pPr>
+              <a:t>  Multi-AZ 자동 복제, 장애 복구 &lt; 5분</a:t>
+            </a:r>
+          </a:p>
+          <a:p>
+            <a:pPr algn="l">
               <a:spcBef>
                 <a:spcPts val="400"/>
               </a:spcBef>
@@ -8504,7 +8507,7 @@
             </a:r>
           </a:p>
           <a:p>
-            <a:pPr lvl="1"/>
+            <a:pPr algn="l"/>
             <a:r>
               <a:rPr sz="1300" b="0">
                 <a:solidFill>
@@ -8512,7 +8515,7 @@
                 </a:solidFill>
                 <a:latin typeface="Freesentation"/>
               </a:rPr>
-              <a:t>인력 비용 ₩1.8억/년 절감 vs 서비스 비용 ₩0.75억/년</a:t>
+              <a:t>  인력 비용 ₩1.8억/년 절감 vs 서비스 비용 ₩0.75억/년</a:t>
             </a:r>
           </a:p>
         </p:txBody>
@@ -8620,6 +8623,7 @@
           </a:bodyPr>
           <a:lstStyle/>
           <a:p>
+            <a:pPr algn="l"/>
             <a:r>
               <a:rPr sz="1300" b="0">
                 <a:solidFill>
@@ -8640,7 +8644,7 @@
             </a:r>
           </a:p>
           <a:p>
-            <a:pPr lvl="1"/>
+            <a:pPr algn="l"/>
             <a:r>
               <a:rPr sz="1300" b="0">
                 <a:solidFill>
@@ -8648,11 +8652,11 @@
                 </a:solidFill>
                 <a:latin typeface="Freesentation"/>
               </a:rPr>
-              <a:t>데이터 전환 + 검증 ₩5,000만 (1회)</a:t>
-            </a:r>
-          </a:p>
-          <a:p>
-            <a:pPr lvl="1"/>
+              <a:t>  데이터 전환 + 검증 ₩5,000만 (1회)</a:t>
+            </a:r>
+          </a:p>
+          <a:p>
+            <a:pPr algn="l"/>
             <a:r>
               <a:rPr sz="1300" b="0">
                 <a:solidFill>
@@ -8660,11 +8664,11 @@
                 </a:solidFill>
                 <a:latin typeface="Freesentation"/>
               </a:rPr>
-              <a:t>→ 단계별 이관으로 리스크 분산 (3개월)</a:t>
-            </a:r>
-          </a:p>
-          <a:p>
-            <a:pPr>
+              <a:t>  → 단계별 이관으로 리스크 분산 (3개월)</a:t>
+            </a:r>
+          </a:p>
+          <a:p>
+            <a:pPr algn="l">
               <a:spcBef>
                 <a:spcPts val="400"/>
               </a:spcBef>
@@ -8680,7 +8684,7 @@
             </a:r>
           </a:p>
           <a:p>
-            <a:pPr lvl="1"/>
+            <a:pPr algn="l"/>
             <a:r>
               <a:rPr sz="1300" b="0">
                 <a:solidFill>
@@ -8688,11 +8692,11 @@
                 </a:solidFill>
                 <a:latin typeface="Freesentation"/>
               </a:rPr>
-              <a:t>AWS 서비스에 강하게 결합</a:t>
-            </a:r>
-          </a:p>
-          <a:p>
-            <a:pPr lvl="1"/>
+              <a:t>  AWS 서비스에 강하게 결합</a:t>
+            </a:r>
+          </a:p>
+          <a:p>
+            <a:pPr algn="l"/>
             <a:r>
               <a:rPr sz="1300" b="0">
                 <a:solidFill>
@@ -8700,11 +8704,11 @@
                 </a:solidFill>
                 <a:latin typeface="Freesentation"/>
               </a:rPr>
-              <a:t>→ Kafka 표준 API 유지로 이식성 확보</a:t>
-            </a:r>
-          </a:p>
-          <a:p>
-            <a:pPr>
+              <a:t>  → Kafka 표준 API 유지로 이식성 확보</a:t>
+            </a:r>
+          </a:p>
+          <a:p>
+            <a:pPr algn="l">
               <a:spcBef>
                 <a:spcPts val="400"/>
               </a:spcBef>
@@ -8720,7 +8724,7 @@
             </a:r>
           </a:p>
           <a:p>
-            <a:pPr lvl="1"/>
+            <a:pPr algn="l"/>
             <a:r>
               <a:rPr sz="1300" b="0">
                 <a:solidFill>
@@ -8728,11 +8732,11 @@
                 </a:solidFill>
                 <a:latin typeface="Freesentation"/>
               </a:rPr>
-              <a:t>₩750만/월 vs 자체 운영 ₩650만/월</a:t>
-            </a:r>
-          </a:p>
-          <a:p>
-            <a:pPr lvl="1"/>
+              <a:t>  ₩750만/월 vs 자체 운영 ₩650만/월</a:t>
+            </a:r>
+          </a:p>
+          <a:p>
+            <a:pPr algn="l"/>
             <a:r>
               <a:rPr sz="1300" b="0">
                 <a:solidFill>
@@ -8740,7 +8744,7 @@
                 </a:solidFill>
                 <a:latin typeface="Freesentation"/>
               </a:rPr>
-              <a:t>→ 운영 인력 포함 TCO 기준 35% 절감</a:t>
+              <a:t>  → 운영 인력 포함 TCO 기준 35% 절감</a:t>
             </a:r>
           </a:p>
         </p:txBody>
@@ -9119,6 +9123,7 @@
           </a:bodyPr>
           <a:lstStyle/>
           <a:p>
+            <a:pPr algn="l"/>
             <a:r>
               <a:rPr sz="1300" b="0">
                 <a:solidFill>
@@ -9139,7 +9144,7 @@
             </a:r>
           </a:p>
           <a:p>
-            <a:pPr lvl="1"/>
+            <a:pPr algn="l"/>
             <a:r>
               <a:rPr sz="1300" b="0">
                 <a:solidFill>
@@ -9147,11 +9152,11 @@
                 </a:solidFill>
                 <a:latin typeface="Freesentation"/>
               </a:rPr>
-              <a:t>가용성 99.9% 보장, 장애 시 자동 failover &lt; 5분</a:t>
-            </a:r>
-          </a:p>
-          <a:p>
-            <a:pPr>
+              <a:t>  가용성 99.9% 보장, 장애 시 자동 failover &lt; 5분</a:t>
+            </a:r>
+          </a:p>
+          <a:p>
+            <a:pPr algn="l">
               <a:spcBef>
                 <a:spcPts val="400"/>
               </a:spcBef>
@@ -9167,7 +9172,7 @@
             </a:r>
           </a:p>
           <a:p>
-            <a:pPr lvl="1"/>
+            <a:pPr algn="l"/>
             <a:r>
               <a:rPr sz="1300" b="0">
                 <a:solidFill>
@@ -9175,11 +9180,11 @@
                 </a:solidFill>
                 <a:latin typeface="Freesentation"/>
               </a:rPr>
-              <a:t>인터넷 경유 금지 → 네트워크 지연 70% 감소 (실측)</a:t>
-            </a:r>
-          </a:p>
-          <a:p>
-            <a:pPr>
+              <a:t>  인터넷 경유 금지 → 네트워크 지연 70% 감소 (실측)</a:t>
+            </a:r>
+          </a:p>
+          <a:p>
+            <a:pPr algn="l">
               <a:spcBef>
                 <a:spcPts val="400"/>
               </a:spcBef>
@@ -9195,7 +9200,7 @@
             </a:r>
           </a:p>
           <a:p>
-            <a:pPr lvl="1"/>
+            <a:pPr algn="l"/>
             <a:r>
               <a:rPr sz="1300" b="0">
                 <a:solidFill>
@@ -9203,7 +9208,7 @@
                 </a:solidFill>
                 <a:latin typeface="Freesentation"/>
               </a:rPr>
-              <a:t>CPU &gt; 70%, Disk &gt; 80% 임계치 모니터링</a:t>
+              <a:t>  CPU &gt; 70%, Disk &gt; 80% 임계치 모니터링</a:t>
             </a:r>
           </a:p>
         </p:txBody>
@@ -9227,9 +9232,9 @@
           <a:solidFill>
             <a:srgbClr val="C62828"/>
           </a:solidFill>
-          <a:ln w="6350">
+          <a:ln w="9525">
             <a:solidFill>
-              <a:srgbClr val="D32F2F"/>
+              <a:srgbClr val="C62828"/>
             </a:solidFill>
           </a:ln>
         </p:spPr>
@@ -9311,6 +9316,7 @@
           </a:bodyPr>
           <a:lstStyle/>
           <a:p>
+            <a:pPr algn="l"/>
             <a:r>
               <a:rPr sz="1300" b="1">
                 <a:solidFill>
@@ -9331,7 +9337,7 @@
             </a:r>
           </a:p>
           <a:p>
-            <a:pPr lvl="1"/>
+            <a:pPr algn="l"/>
             <a:r>
               <a:rPr sz="1300" b="0">
                 <a:solidFill>
@@ -9339,11 +9345,11 @@
                 </a:solidFill>
                 <a:latin typeface="Freesentation"/>
               </a:rPr>
-              <a:t>AZ 장애 시 서비스 전체 중단</a:t>
-            </a:r>
-          </a:p>
-          <a:p>
-            <a:pPr lvl="1"/>
+              <a:t>  AZ 장애 시 서비스 전체 중단</a:t>
+            </a:r>
+          </a:p>
+          <a:p>
+            <a:pPr algn="l"/>
             <a:r>
               <a:rPr sz="1300" b="0">
                 <a:solidFill>
@@ -9351,11 +9357,11 @@
                 </a:solidFill>
                 <a:latin typeface="Freesentation"/>
               </a:rPr>
-              <a:t>⚡ 2025-Q4 서울 AZ-A 장애 — 3시간 다운타임</a:t>
-            </a:r>
-          </a:p>
-          <a:p>
-            <a:pPr lvl="1"/>
+              <a:t>  ⚡ 2025-Q4 서울 AZ-A 장애 — 3시간 다운타임</a:t>
+            </a:r>
+          </a:p>
+          <a:p>
+            <a:pPr algn="l"/>
             <a:r>
               <a:rPr sz="1300" b="0">
                 <a:solidFill>
@@ -9363,11 +9369,11 @@
                 </a:solidFill>
                 <a:latin typeface="Freesentation"/>
               </a:rPr>
-              <a:t>✅ 대신: Multi-AZ 배포 (99.9% SLA)</a:t>
-            </a:r>
-          </a:p>
-          <a:p>
-            <a:pPr>
+              <a:t>  ✅ 대신: Multi-AZ 배포 (99.9% SLA)</a:t>
+            </a:r>
+          </a:p>
+          <a:p>
+            <a:pPr algn="l">
               <a:spcBef>
                 <a:spcPts val="400"/>
               </a:spcBef>
@@ -9383,7 +9389,7 @@
             </a:r>
           </a:p>
           <a:p>
-            <a:pPr lvl="1"/>
+            <a:pPr algn="l"/>
             <a:r>
               <a:rPr sz="1300" b="0">
                 <a:solidFill>
@@ -9391,11 +9397,11 @@
                 </a:solidFill>
                 <a:latin typeface="Freesentation"/>
               </a:rPr>
-              <a:t>외부 공격 노출, 데이터 유출 위험</a:t>
-            </a:r>
-          </a:p>
-          <a:p>
-            <a:pPr lvl="1"/>
+              <a:t>  외부 공격 노출, 데이터 유출 위험</a:t>
+            </a:r>
+          </a:p>
+          <a:p>
+            <a:pPr algn="l"/>
             <a:r>
               <a:rPr sz="1300" b="0">
                 <a:solidFill>
@@ -9403,11 +9409,11 @@
                 </a:solidFill>
                 <a:latin typeface="Freesentation"/>
               </a:rPr>
-              <a:t>⚡ 보안 감사 지적 사항 1순위</a:t>
-            </a:r>
-          </a:p>
-          <a:p>
-            <a:pPr lvl="1"/>
+              <a:t>  ⚡ 보안 감사 지적 사항 1순위</a:t>
+            </a:r>
+          </a:p>
+          <a:p>
+            <a:pPr algn="l"/>
             <a:r>
               <a:rPr sz="1300" b="0">
                 <a:solidFill>
@@ -9415,11 +9421,11 @@
                 </a:solidFill>
                 <a:latin typeface="Freesentation"/>
               </a:rPr>
-              <a:t>✅ 대신: Private Subnet + VPC Endpoint</a:t>
-            </a:r>
-          </a:p>
-          <a:p>
-            <a:pPr>
+              <a:t>  ✅ 대신: Private Subnet + VPC Endpoint</a:t>
+            </a:r>
+          </a:p>
+          <a:p>
+            <a:pPr algn="l">
               <a:spcBef>
                 <a:spcPts val="400"/>
               </a:spcBef>
@@ -9435,7 +9441,7 @@
             </a:r>
           </a:p>
           <a:p>
-            <a:pPr lvl="1"/>
+            <a:pPr algn="l"/>
             <a:r>
               <a:rPr sz="1300" b="0">
                 <a:solidFill>
@@ -9443,11 +9449,11 @@
                 </a:solidFill>
                 <a:latin typeface="Freesentation"/>
               </a:rPr>
-              <a:t>0.0.0.0/0 허용 → 무단 접근 가능</a:t>
-            </a:r>
-          </a:p>
-          <a:p>
-            <a:pPr lvl="1"/>
+              <a:t>  0.0.0.0/0 허용 → 무단 접근 가능</a:t>
+            </a:r>
+          </a:p>
+          <a:p>
+            <a:pPr algn="l"/>
             <a:r>
               <a:rPr sz="1300" b="0">
                 <a:solidFill>
@@ -9455,7 +9461,7 @@
                 </a:solidFill>
                 <a:latin typeface="Freesentation"/>
               </a:rPr>
-              <a:t>✅ 대신: 최소 권한 보안그룹 (필요 포트만)</a:t>
+              <a:t>  ✅ 대신: 최소 권한 보안그룹 (필요 포트만)</a:t>
             </a:r>
           </a:p>
         </p:txBody>
@@ -9539,7 +9545,7 @@
               <a:t/>
             </a:r>
             <a:r>
-              <a:rPr sz="1300" b="0">
+              <a:rPr sz="1400" b="1">
                 <a:solidFill>
                   <a:srgbClr val="212121"/>
                 </a:solidFill>
@@ -10951,7 +10957,7 @@
           <a:p>
             <a:pPr algn="ctr"/>
             <a:r>
-              <a:rPr sz="1400" b="0">
+              <a:rPr sz="1300" b="0">
                 <a:solidFill>
                   <a:srgbClr val="9E9E9E"/>
                 </a:solidFill>
@@ -11206,7 +11212,7 @@
           <a:p>
             <a:pPr algn="ctr"/>
             <a:r>
-              <a:rPr sz="1400" b="0">
+              <a:rPr sz="1300" b="0">
                 <a:solidFill>
                   <a:srgbClr val="9E9E9E"/>
                 </a:solidFill>
@@ -11240,13 +11246,24 @@
           <a:lstStyle/>
           <a:p>
             <a:r>
+              <a:rPr sz="1400" b="1">
+                <a:solidFill>
+                  <a:srgbClr val="212121"/>
+                </a:solidFill>
+                <a:latin typeface="Freesentation"/>
+              </a:rPr>
+              <a:t>• Public Subnet (10.0.1.0/24)</a:t>
+            </a:r>
+          </a:p>
+          <a:p>
+            <a:r>
               <a:rPr sz="1300" b="0">
                 <a:solidFill>
                   <a:srgbClr val="212121"/>
                 </a:solidFill>
                 <a:latin typeface="Freesentation"/>
               </a:rPr>
-              <a:t>• Public Subnet (10.0.1.0/24)</a:t>
+              <a:t>  ALB, NAT Gateway 배치 — 외부 트래픽 수신</a:t>
             </a:r>
           </a:p>
           <a:p>
@@ -11257,7 +11274,18 @@
                 </a:solidFill>
                 <a:latin typeface="Freesentation"/>
               </a:rPr>
-              <a:t>  ALB, NAT Gateway 배치 — 외부 트래픽 수신</a:t>
+              <a:t/>
+            </a:r>
+          </a:p>
+          <a:p>
+            <a:r>
+              <a:rPr sz="1400" b="1">
+                <a:solidFill>
+                  <a:srgbClr val="212121"/>
+                </a:solidFill>
+                <a:latin typeface="Freesentation"/>
+              </a:rPr>
+              <a:t>• Private Subnet (10.0.10.0/24)</a:t>
             </a:r>
           </a:p>
           <a:p>
@@ -11268,18 +11296,40 @@
                 </a:solidFill>
                 <a:latin typeface="Freesentation"/>
               </a:rPr>
+              <a:t>  MSK 브로커 배치 (포트 9092/9094)</a:t>
+            </a:r>
+          </a:p>
+          <a:p>
+            <a:r>
+              <a:rPr sz="1300" b="0">
+                <a:solidFill>
+                  <a:srgbClr val="212121"/>
+                </a:solidFill>
+                <a:latin typeface="Freesentation"/>
+              </a:rPr>
               <a:t/>
             </a:r>
           </a:p>
           <a:p>
             <a:r>
+              <a:rPr sz="1400" b="1">
+                <a:solidFill>
+                  <a:srgbClr val="212121"/>
+                </a:solidFill>
+                <a:latin typeface="Freesentation"/>
+              </a:rPr>
+              <a:t>• DB Subnet (10.0.20.0/24)</a:t>
+            </a:r>
+          </a:p>
+          <a:p>
+            <a:r>
               <a:rPr sz="1300" b="0">
                 <a:solidFill>
                   <a:srgbClr val="212121"/>
                 </a:solidFill>
                 <a:latin typeface="Freesentation"/>
               </a:rPr>
-              <a:t>• Private Subnet (10.0.10.0/24)</a:t>
+              <a:t>  S3/RDS 오프로드 — 앱서버에서만 접근</a:t>
             </a:r>
           </a:p>
           <a:p>
@@ -11290,56 +11340,12 @@
                 </a:solidFill>
                 <a:latin typeface="Freesentation"/>
               </a:rPr>
-              <a:t>  MSK 브로커 배치 (포트 9092/9094)</a:t>
-            </a:r>
-          </a:p>
-          <a:p>
-            <a:r>
-              <a:rPr sz="1300" b="0">
-                <a:solidFill>
-                  <a:srgbClr val="212121"/>
-                </a:solidFill>
-                <a:latin typeface="Freesentation"/>
-              </a:rPr>
               <a:t/>
             </a:r>
           </a:p>
           <a:p>
             <a:r>
-              <a:rPr sz="1300" b="0">
-                <a:solidFill>
-                  <a:srgbClr val="212121"/>
-                </a:solidFill>
-                <a:latin typeface="Freesentation"/>
-              </a:rPr>
-              <a:t>• DB Subnet (10.0.20.0/24)</a:t>
-            </a:r>
-          </a:p>
-          <a:p>
-            <a:r>
-              <a:rPr sz="1300" b="0">
-                <a:solidFill>
-                  <a:srgbClr val="212121"/>
-                </a:solidFill>
-                <a:latin typeface="Freesentation"/>
-              </a:rPr>
-              <a:t>  S3/RDS 오프로드 — 앱서버에서만 접근</a:t>
-            </a:r>
-          </a:p>
-          <a:p>
-            <a:r>
-              <a:rPr sz="1300" b="0">
-                <a:solidFill>
-                  <a:srgbClr val="212121"/>
-                </a:solidFill>
-                <a:latin typeface="Freesentation"/>
-              </a:rPr>
-              <a:t/>
-            </a:r>
-          </a:p>
-          <a:p>
-            <a:r>
-              <a:rPr sz="1300" b="0">
+              <a:rPr sz="1400" b="1">
                 <a:solidFill>
                   <a:srgbClr val="212121"/>
                 </a:solidFill>
@@ -12421,8 +12427,8 @@
         </p:nvSpPr>
         <p:spPr>
           <a:xfrm>
-            <a:off x="457200" y="2606040"/>
-            <a:ext cx="3637280" cy="1828800"/>
+            <a:off x="457200" y="2423160"/>
+            <a:ext cx="3566400" cy="1828800"/>
           </a:xfrm>
           <a:prstGeom prst="roundRect">
             <a:avLst>
@@ -12476,7 +12482,7 @@
         </p:blipFill>
         <p:spPr>
           <a:xfrm>
-            <a:off x="731520" y="2880360"/>
+            <a:off x="731520" y="2697480"/>
             <a:ext cx="548640" cy="548640"/>
           </a:xfrm>
           <a:prstGeom prst="rect">
@@ -12492,7 +12498,7 @@
         </p:nvSpPr>
         <p:spPr>
           <a:xfrm>
-            <a:off x="1371600" y="2926080"/>
+            <a:off x="1371600" y="2743200"/>
             <a:ext cx="2631920" cy="365760"/>
           </a:xfrm>
           <a:prstGeom prst="rect">
@@ -12527,7 +12533,7 @@
         </p:nvSpPr>
         <p:spPr>
           <a:xfrm>
-            <a:off x="731520" y="3611880"/>
+            <a:off x="731520" y="3429000"/>
             <a:ext cx="3180080" cy="548640"/>
           </a:xfrm>
           <a:prstGeom prst="rect">
@@ -12543,7 +12549,7 @@
           <a:p>
             <a:pPr algn="l"/>
             <a:r>
-              <a:rPr sz="1200" b="0">
+              <a:rPr sz="1300" b="0">
                 <a:solidFill>
                   <a:srgbClr val="212121"/>
                 </a:solidFill>
@@ -12562,8 +12568,8 @@
         </p:nvSpPr>
         <p:spPr>
           <a:xfrm>
-            <a:off x="4277360" y="2606040"/>
-            <a:ext cx="3637280" cy="1828800"/>
+            <a:off x="4312800" y="2423160"/>
+            <a:ext cx="3566400" cy="1828800"/>
           </a:xfrm>
           <a:prstGeom prst="roundRect">
             <a:avLst>
@@ -12617,7 +12623,7 @@
         </p:blipFill>
         <p:spPr>
           <a:xfrm>
-            <a:off x="4551680" y="2880360"/>
+            <a:off x="4587120" y="2697480"/>
             <a:ext cx="548640" cy="548640"/>
           </a:xfrm>
           <a:prstGeom prst="rect">
@@ -12633,7 +12639,7 @@
         </p:nvSpPr>
         <p:spPr>
           <a:xfrm>
-            <a:off x="5191760" y="2926080"/>
+            <a:off x="5227200" y="2743200"/>
             <a:ext cx="2631920" cy="365760"/>
           </a:xfrm>
           <a:prstGeom prst="rect">
@@ -12668,7 +12674,7 @@
         </p:nvSpPr>
         <p:spPr>
           <a:xfrm>
-            <a:off x="4551680" y="3611880"/>
+            <a:off x="4587120" y="3429000"/>
             <a:ext cx="3180080" cy="548640"/>
           </a:xfrm>
           <a:prstGeom prst="rect">
@@ -12684,7 +12690,7 @@
           <a:p>
             <a:pPr algn="l"/>
             <a:r>
-              <a:rPr sz="1200" b="0">
+              <a:rPr sz="1300" b="0">
                 <a:solidFill>
                   <a:srgbClr val="212121"/>
                 </a:solidFill>
@@ -12703,8 +12709,8 @@
         </p:nvSpPr>
         <p:spPr>
           <a:xfrm>
-            <a:off x="8097520" y="2606040"/>
-            <a:ext cx="3637280" cy="1828800"/>
+            <a:off x="8168400" y="2423160"/>
+            <a:ext cx="3566400" cy="1828800"/>
           </a:xfrm>
           <a:prstGeom prst="roundRect">
             <a:avLst>
@@ -12758,7 +12764,7 @@
         </p:blipFill>
         <p:spPr>
           <a:xfrm>
-            <a:off x="8371840" y="2880360"/>
+            <a:off x="8442720" y="2697480"/>
             <a:ext cx="548640" cy="548640"/>
           </a:xfrm>
           <a:prstGeom prst="rect">
@@ -12774,7 +12780,7 @@
         </p:nvSpPr>
         <p:spPr>
           <a:xfrm>
-            <a:off x="9011920" y="2926080"/>
+            <a:off x="9082800" y="2743200"/>
             <a:ext cx="2631920" cy="365760"/>
           </a:xfrm>
           <a:prstGeom prst="rect">
@@ -12809,7 +12815,7 @@
         </p:nvSpPr>
         <p:spPr>
           <a:xfrm>
-            <a:off x="8371840" y="3611880"/>
+            <a:off x="8442720" y="3429000"/>
             <a:ext cx="3180080" cy="548640"/>
           </a:xfrm>
           <a:prstGeom prst="rect">
@@ -12825,7 +12831,7 @@
           <a:p>
             <a:pPr algn="l"/>
             <a:r>
-              <a:rPr sz="1200" b="0">
+              <a:rPr sz="1300" b="0">
                 <a:solidFill>
                   <a:srgbClr val="212121"/>
                 </a:solidFill>
@@ -12844,8 +12850,8 @@
         </p:nvSpPr>
         <p:spPr>
           <a:xfrm>
-            <a:off x="457200" y="4617720"/>
-            <a:ext cx="3637280" cy="1828800"/>
+            <a:off x="457200" y="4434840"/>
+            <a:ext cx="3566400" cy="1828800"/>
           </a:xfrm>
           <a:prstGeom prst="roundRect">
             <a:avLst>
@@ -12899,7 +12905,7 @@
         </p:blipFill>
         <p:spPr>
           <a:xfrm>
-            <a:off x="731520" y="4892040"/>
+            <a:off x="731520" y="4709160"/>
             <a:ext cx="548640" cy="548640"/>
           </a:xfrm>
           <a:prstGeom prst="rect">
@@ -12915,7 +12921,7 @@
         </p:nvSpPr>
         <p:spPr>
           <a:xfrm>
-            <a:off x="1371600" y="4937760"/>
+            <a:off x="1371600" y="4754880"/>
             <a:ext cx="2631920" cy="365760"/>
           </a:xfrm>
           <a:prstGeom prst="rect">
@@ -12950,7 +12956,7 @@
         </p:nvSpPr>
         <p:spPr>
           <a:xfrm>
-            <a:off x="731520" y="5623560"/>
+            <a:off x="731520" y="5440680"/>
             <a:ext cx="3180080" cy="548640"/>
           </a:xfrm>
           <a:prstGeom prst="rect">
@@ -12966,7 +12972,7 @@
           <a:p>
             <a:pPr algn="l"/>
             <a:r>
-              <a:rPr sz="1200" b="0">
+              <a:rPr sz="1300" b="0">
                 <a:solidFill>
                   <a:srgbClr val="212121"/>
                 </a:solidFill>
@@ -12985,8 +12991,8 @@
         </p:nvSpPr>
         <p:spPr>
           <a:xfrm>
-            <a:off x="4277360" y="4617720"/>
-            <a:ext cx="3637280" cy="1828800"/>
+            <a:off x="4312800" y="4434840"/>
+            <a:ext cx="3566400" cy="1828800"/>
           </a:xfrm>
           <a:prstGeom prst="roundRect">
             <a:avLst>
@@ -13040,7 +13046,7 @@
         </p:blipFill>
         <p:spPr>
           <a:xfrm>
-            <a:off x="4551680" y="4892040"/>
+            <a:off x="4587120" y="4709160"/>
             <a:ext cx="548640" cy="548640"/>
           </a:xfrm>
           <a:prstGeom prst="rect">
@@ -13056,7 +13062,7 @@
         </p:nvSpPr>
         <p:spPr>
           <a:xfrm>
-            <a:off x="5191760" y="4937760"/>
+            <a:off x="5227200" y="4754880"/>
             <a:ext cx="2631920" cy="365760"/>
           </a:xfrm>
           <a:prstGeom prst="rect">
@@ -13091,7 +13097,7 @@
         </p:nvSpPr>
         <p:spPr>
           <a:xfrm>
-            <a:off x="4551680" y="5623560"/>
+            <a:off x="4587120" y="5440680"/>
             <a:ext cx="3180080" cy="548640"/>
           </a:xfrm>
           <a:prstGeom prst="rect">
@@ -13107,7 +13113,7 @@
           <a:p>
             <a:pPr algn="l"/>
             <a:r>
-              <a:rPr sz="1200" b="0">
+              <a:rPr sz="1300" b="0">
                 <a:solidFill>
                   <a:srgbClr val="212121"/>
                 </a:solidFill>
@@ -13126,8 +13132,8 @@
         </p:nvSpPr>
         <p:spPr>
           <a:xfrm>
-            <a:off x="8097520" y="4617720"/>
-            <a:ext cx="3637280" cy="1828800"/>
+            <a:off x="8168400" y="4434840"/>
+            <a:ext cx="3566400" cy="1828800"/>
           </a:xfrm>
           <a:prstGeom prst="roundRect">
             <a:avLst>
@@ -13181,7 +13187,7 @@
         </p:blipFill>
         <p:spPr>
           <a:xfrm>
-            <a:off x="8371840" y="4892040"/>
+            <a:off x="8442720" y="4709160"/>
             <a:ext cx="548640" cy="548640"/>
           </a:xfrm>
           <a:prstGeom prst="rect">
@@ -13197,7 +13203,7 @@
         </p:nvSpPr>
         <p:spPr>
           <a:xfrm>
-            <a:off x="9011920" y="4937760"/>
+            <a:off x="9082800" y="4754880"/>
             <a:ext cx="2631920" cy="365760"/>
           </a:xfrm>
           <a:prstGeom prst="rect">
@@ -13232,7 +13238,7 @@
         </p:nvSpPr>
         <p:spPr>
           <a:xfrm>
-            <a:off x="8371840" y="5623560"/>
+            <a:off x="8442720" y="5440680"/>
             <a:ext cx="3180080" cy="548640"/>
           </a:xfrm>
           <a:prstGeom prst="rect">
@@ -13248,7 +13254,7 @@
           <a:p>
             <a:pPr algn="l"/>
             <a:r>
-              <a:rPr sz="1200" b="0">
+              <a:rPr sz="1300" b="0">
                 <a:solidFill>
                   <a:srgbClr val="212121"/>
                 </a:solidFill>
@@ -13956,7 +13962,7 @@
           <a:lstStyle/>
           <a:p>
             <a:r>
-              <a:t>L21. Quote Highlight</a:t>
+              <a:t/>
             </a:r>
           </a:p>
         </p:txBody>
@@ -14024,7 +14030,7 @@
                 </a:solidFill>
                 <a:latin typeface="Freesentation"/>
               </a:rPr>
-              <a:t>강조 인용문 레이아웃 — 인용 + 컨텍스트</a:t>
+              <a:t/>
             </a:r>
           </a:p>
         </p:txBody>
@@ -14322,7 +14328,7 @@
           <a:lstStyle/>
           <a:p>
             <a:r>
-              <a:rPr sz="1800" i="1">
+              <a:rPr sz="2000" i="1">
                 <a:solidFill>
                   <a:srgbClr val="212121"/>
                 </a:solidFill>
@@ -14357,7 +14363,7 @@
           <a:p>
             <a:pPr algn="r"/>
             <a:r>
-              <a:rPr sz="1200">
+              <a:rPr sz="1300" b="1">
                 <a:solidFill>
                   <a:srgbClr val="505050"/>
                 </a:solidFill>
@@ -14425,7 +14431,7 @@
           <a:lstStyle/>
           <a:p>
             <a:r>
-              <a:rPr sz="1200">
+              <a:rPr sz="1300">
                 <a:solidFill>
                   <a:srgbClr val="212121"/>
                 </a:solidFill>
@@ -14436,7 +14442,7 @@
           </a:p>
           <a:p>
             <a:r>
-              <a:rPr sz="1200">
+              <a:rPr sz="1300">
                 <a:solidFill>
                   <a:srgbClr val="212121"/>
                 </a:solidFill>
@@ -14448,7 +14454,7 @@
           <a:p/>
           <a:p>
             <a:r>
-              <a:rPr sz="1200">
+              <a:rPr sz="1300">
                 <a:solidFill>
                   <a:srgbClr val="212121"/>
                 </a:solidFill>
@@ -14459,7 +14465,7 @@
           </a:p>
           <a:p>
             <a:r>
-              <a:rPr sz="1200">
+              <a:rPr sz="1300">
                 <a:solidFill>
                   <a:srgbClr val="212121"/>
                 </a:solidFill>
@@ -14471,7 +14477,7 @@
           <a:p/>
           <a:p>
             <a:r>
-              <a:rPr sz="1200">
+              <a:rPr sz="1300">
                 <a:solidFill>
                   <a:srgbClr val="212121"/>
                 </a:solidFill>
@@ -14482,7 +14488,7 @@
           </a:p>
           <a:p>
             <a:r>
-              <a:rPr sz="1200">
+              <a:rPr sz="1300">
                 <a:solidFill>
                   <a:srgbClr val="212121"/>
                 </a:solidFill>
@@ -14494,7 +14500,7 @@
           <a:p/>
           <a:p>
             <a:r>
-              <a:rPr sz="1200">
+              <a:rPr sz="1300">
                 <a:solidFill>
                   <a:srgbClr val="212121"/>
                 </a:solidFill>
@@ -14505,7 +14511,7 @@
           </a:p>
           <a:p>
             <a:r>
-              <a:rPr sz="1200">
+              <a:rPr sz="1300">
                 <a:solidFill>
                   <a:srgbClr val="212121"/>
                 </a:solidFill>
@@ -14584,7 +14590,7 @@
           <a:lstStyle/>
           <a:p>
             <a:r>
-              <a:t>L22. Split Text+Code</a:t>
+              <a:t/>
             </a:r>
           </a:p>
         </p:txBody>
@@ -14652,7 +14658,7 @@
                 </a:solidFill>
                 <a:latin typeface="Freesentation"/>
               </a:rPr>
-              <a:t>배포 절차 실습 가이드 — 단계+코드+확인</a:t>
+              <a:t/>
             </a:r>
           </a:p>
         </p:txBody>
@@ -14782,13 +14788,24 @@
           <a:lstStyle/>
           <a:p>
             <a:r>
+              <a:rPr sz="1400" b="1">
+                <a:solidFill>
+                  <a:srgbClr val="212121"/>
+                </a:solidFill>
+                <a:latin typeface="Freesentation"/>
+              </a:rPr>
+              <a:t>① 클러스터 설정 JSON 작성</a:t>
+            </a:r>
+          </a:p>
+          <a:p>
+            <a:r>
               <a:rPr sz="1300">
                 <a:solidFill>
                   <a:srgbClr val="212121"/>
                 </a:solidFill>
                 <a:latin typeface="Freesentation"/>
               </a:rPr>
-              <a:t>① 클러스터 설정 JSON 작성</a:t>
+              <a:t>   broker-node-group-info, kafka-version,</a:t>
             </a:r>
           </a:p>
           <a:p>
@@ -14799,7 +14816,19 @@
                 </a:solidFill>
                 <a:latin typeface="Freesentation"/>
               </a:rPr>
-              <a:t>   broker-node-group-info, kafka-version,</a:t>
+              <a:t>   cluster-name 필수 항목</a:t>
+            </a:r>
+          </a:p>
+          <a:p/>
+          <a:p>
+            <a:r>
+              <a:rPr sz="1400" b="1">
+                <a:solidFill>
+                  <a:srgbClr val="212121"/>
+                </a:solidFill>
+                <a:latin typeface="Freesentation"/>
+              </a:rPr>
+              <a:t>② VPC Subnet ID 확인</a:t>
             </a:r>
           </a:p>
           <a:p>
@@ -14810,19 +14839,41 @@
                 </a:solidFill>
                 <a:latin typeface="Freesentation"/>
               </a:rPr>
-              <a:t>   cluster-name 필수 항목</a:t>
+              <a:t>   Private Subnet 3개 (AZ-a/b/c) ID 확보</a:t>
+            </a:r>
+          </a:p>
+          <a:p>
+            <a:r>
+              <a:rPr sz="1300">
+                <a:solidFill>
+                  <a:srgbClr val="212121"/>
+                </a:solidFill>
+                <a:latin typeface="Freesentation"/>
+              </a:rPr>
+              <a:t>   aws ec2 describe-subnets 명령 활용</a:t>
             </a:r>
           </a:p>
           <a:p/>
           <a:p>
             <a:r>
+              <a:rPr sz="1400" b="1">
+                <a:solidFill>
+                  <a:srgbClr val="212121"/>
+                </a:solidFill>
+                <a:latin typeface="Freesentation"/>
+              </a:rPr>
+              <a:t>③ 생성 명령 실행</a:t>
+            </a:r>
+          </a:p>
+          <a:p>
+            <a:r>
               <a:rPr sz="1300">
                 <a:solidFill>
                   <a:srgbClr val="212121"/>
                 </a:solidFill>
                 <a:latin typeface="Freesentation"/>
               </a:rPr>
-              <a:t>② VPC Subnet ID 확인</a:t>
+              <a:t>   create-cluster 명령어 + 설정 파일 참조</a:t>
             </a:r>
           </a:p>
           <a:p>
@@ -14833,58 +14884,13 @@
                 </a:solidFill>
                 <a:latin typeface="Freesentation"/>
               </a:rPr>
-              <a:t>   Private Subnet 3개 (AZ-a/b/c) ID 확보</a:t>
-            </a:r>
-          </a:p>
-          <a:p>
-            <a:r>
-              <a:rPr sz="1300">
-                <a:solidFill>
-                  <a:srgbClr val="212121"/>
-                </a:solidFill>
-                <a:latin typeface="Freesentation"/>
-              </a:rPr>
-              <a:t>   aws ec2 describe-subnets 명령 활용</a:t>
+              <a:t>   완료까지 5~10분 소요</a:t>
             </a:r>
           </a:p>
           <a:p/>
           <a:p>
             <a:r>
-              <a:rPr sz="1300">
-                <a:solidFill>
-                  <a:srgbClr val="212121"/>
-                </a:solidFill>
-                <a:latin typeface="Freesentation"/>
-              </a:rPr>
-              <a:t>③ 생성 명령 실행</a:t>
-            </a:r>
-          </a:p>
-          <a:p>
-            <a:r>
-              <a:rPr sz="1300">
-                <a:solidFill>
-                  <a:srgbClr val="212121"/>
-                </a:solidFill>
-                <a:latin typeface="Freesentation"/>
-              </a:rPr>
-              <a:t>   create-cluster 명령어 + 설정 파일 참조</a:t>
-            </a:r>
-          </a:p>
-          <a:p>
-            <a:r>
-              <a:rPr sz="1300">
-                <a:solidFill>
-                  <a:srgbClr val="212121"/>
-                </a:solidFill>
-                <a:latin typeface="Freesentation"/>
-              </a:rPr>
-              <a:t>   완료까지 5~10분 소요</a:t>
-            </a:r>
-          </a:p>
-          <a:p/>
-          <a:p>
-            <a:r>
-              <a:rPr sz="1300">
+              <a:rPr sz="1400" b="1">
                 <a:solidFill>
                   <a:srgbClr val="212121"/>
                 </a:solidFill>
@@ -14932,7 +14938,7 @@
             <a:avLst/>
           </a:prstGeom>
           <a:solidFill>
-            <a:srgbClr val="300A24"/>
+            <a:srgbClr val="1E1E1E"/>
           </a:solidFill>
           <a:ln w="9525">
             <a:noFill/>
@@ -15302,7 +15308,7 @@
           <a:lstStyle/>
           <a:p>
             <a:r>
-              <a:t>L23. Stats Dashboard</a:t>
+              <a:t/>
             </a:r>
           </a:p>
         </p:txBody>
@@ -15370,7 +15376,7 @@
                 </a:solidFill>
                 <a:latin typeface="Freesentation"/>
               </a:rPr>
-              <a:t>KPI 대시보드 — 수치+트렌드+근거</a:t>
+              <a:t/>
             </a:r>
           </a:p>
         </p:txBody>
@@ -15681,7 +15687,7 @@
           <a:p>
             <a:pPr algn="ctr"/>
             <a:r>
-              <a:rPr sz="2600" b="1">
+              <a:rPr sz="2800" b="1">
                 <a:solidFill>
                   <a:srgbClr val="0043DA"/>
                 </a:solidFill>
@@ -15751,7 +15757,7 @@
           <a:p>
             <a:pPr algn="ctr"/>
             <a:r>
-              <a:rPr sz="1200">
+              <a:rPr sz="1300" b="0">
                 <a:solidFill>
                   <a:srgbClr val="212121"/>
                 </a:solidFill>
@@ -15763,7 +15769,7 @@
           <a:p>
             <a:pPr algn="ctr"/>
             <a:r>
-              <a:rPr sz="1200">
+              <a:rPr sz="1300" b="0">
                 <a:solidFill>
                   <a:srgbClr val="212121"/>
                 </a:solidFill>
@@ -15775,7 +15781,7 @@
           <a:p>
             <a:pPr algn="ctr"/>
             <a:r>
-              <a:rPr sz="1200">
+              <a:rPr sz="1300" b="0">
                 <a:solidFill>
                   <a:srgbClr val="212121"/>
                 </a:solidFill>
@@ -15845,7 +15851,7 @@
           <a:p>
             <a:pPr algn="ctr"/>
             <a:r>
-              <a:rPr sz="2600" b="1">
+              <a:rPr sz="2800" b="1">
                 <a:solidFill>
                   <a:srgbClr val="4CB88F"/>
                 </a:solidFill>
@@ -15915,7 +15921,7 @@
           <a:p>
             <a:pPr algn="ctr"/>
             <a:r>
-              <a:rPr sz="1200">
+              <a:rPr sz="1300" b="0">
                 <a:solidFill>
                   <a:srgbClr val="212121"/>
                 </a:solidFill>
@@ -15927,7 +15933,7 @@
           <a:p>
             <a:pPr algn="ctr"/>
             <a:r>
-              <a:rPr sz="1200">
+              <a:rPr sz="1300" b="0">
                 <a:solidFill>
                   <a:srgbClr val="212121"/>
                 </a:solidFill>
@@ -15939,7 +15945,7 @@
           <a:p>
             <a:pPr algn="ctr"/>
             <a:r>
-              <a:rPr sz="1200">
+              <a:rPr sz="1300" b="0">
                 <a:solidFill>
                   <a:srgbClr val="212121"/>
                 </a:solidFill>
@@ -16009,7 +16015,7 @@
           <a:p>
             <a:pPr algn="ctr"/>
             <a:r>
-              <a:rPr sz="2600" b="1">
+              <a:rPr sz="2800" b="1">
                 <a:solidFill>
                   <a:srgbClr val="0043DA"/>
                 </a:solidFill>
@@ -16079,7 +16085,7 @@
           <a:p>
             <a:pPr algn="ctr"/>
             <a:r>
-              <a:rPr sz="1200">
+              <a:rPr sz="1300" b="0">
                 <a:solidFill>
                   <a:srgbClr val="212121"/>
                 </a:solidFill>
@@ -16091,7 +16097,7 @@
           <a:p>
             <a:pPr algn="ctr"/>
             <a:r>
-              <a:rPr sz="1200">
+              <a:rPr sz="1300" b="0">
                 <a:solidFill>
                   <a:srgbClr val="212121"/>
                 </a:solidFill>
@@ -16103,7 +16109,7 @@
           <a:p>
             <a:pPr algn="ctr"/>
             <a:r>
-              <a:rPr sz="1200">
+              <a:rPr sz="1300" b="0">
                 <a:solidFill>
                   <a:srgbClr val="212121"/>
                 </a:solidFill>
@@ -17692,7 +17698,7 @@
           <a:p>
             <a:pPr algn="ctr"/>
             <a:r>
-              <a:rPr sz="1000">
+              <a:rPr sz="1000" b="0">
                 <a:solidFill>
                   <a:srgbClr val="4A4A4A"/>
                 </a:solidFill>
@@ -17730,7 +17736,7 @@
           <a:p>
             <a:pPr algn="ctr"/>
             <a:r>
-              <a:rPr sz="1000">
+              <a:rPr sz="1000" b="0">
                 <a:solidFill>
                   <a:srgbClr val="4A4A4A"/>
                 </a:solidFill>
@@ -17768,7 +17774,7 @@
           <a:p>
             <a:pPr algn="ctr"/>
             <a:r>
-              <a:rPr sz="1000">
+              <a:rPr sz="1000" b="0">
                 <a:solidFill>
                   <a:srgbClr val="4A4A4A"/>
                 </a:solidFill>
@@ -17996,6 +18002,9 @@
             <a:pPr algn="ctr"/>
             <a:r>
               <a:rPr sz="1300" b="1">
+                <a:solidFill>
+                  <a:srgbClr val="1B3A5C"/>
+                </a:solidFill>
                 <a:latin typeface="Freesentation"/>
               </a:rPr>
               <a:t>MSK Cluster (Multi-AZ Brokers)</a:t>
@@ -18944,8 +18953,8 @@
         </p:nvSpPr>
         <p:spPr>
           <a:xfrm>
-            <a:off x="457200" y="2628900"/>
-            <a:ext cx="5501853" cy="1828800"/>
+            <a:off x="564093" y="2628900"/>
+            <a:ext cx="5394960" cy="1828800"/>
           </a:xfrm>
           <a:prstGeom prst="roundRect">
             <a:avLst/>
@@ -18991,7 +19000,7 @@
         <p:spPr>
           <a:xfrm>
             <a:off x="6233190" y="2628900"/>
-            <a:ext cx="5501610" cy="1828800"/>
+            <a:ext cx="5394960" cy="1828800"/>
           </a:xfrm>
           <a:prstGeom prst="roundRect">
             <a:avLst/>
@@ -19036,8 +19045,8 @@
         </p:nvSpPr>
         <p:spPr>
           <a:xfrm>
-            <a:off x="457200" y="4732020"/>
-            <a:ext cx="5501853" cy="1737360"/>
+            <a:off x="564093" y="4732020"/>
+            <a:ext cx="5394960" cy="1737360"/>
           </a:xfrm>
           <a:prstGeom prst="roundRect">
             <a:avLst/>
@@ -19083,7 +19092,7 @@
         <p:spPr>
           <a:xfrm>
             <a:off x="6233190" y="4732020"/>
-            <a:ext cx="5501610" cy="1737360"/>
+            <a:ext cx="5394960" cy="1737360"/>
           </a:xfrm>
           <a:prstGeom prst="roundRect">
             <a:avLst/>
@@ -19128,7 +19137,7 @@
         </p:nvSpPr>
         <p:spPr>
           <a:xfrm>
-            <a:off x="637200" y="2691622"/>
+            <a:off x="744093" y="2691622"/>
             <a:ext cx="5034960" cy="365760"/>
           </a:xfrm>
           <a:prstGeom prst="rect">
@@ -19166,7 +19175,7 @@
         <p:spPr>
           <a:xfrm>
             <a:off x="6413190" y="2691622"/>
-            <a:ext cx="5141610" cy="365760"/>
+            <a:ext cx="5034960" cy="365760"/>
           </a:xfrm>
           <a:prstGeom prst="rect">
             <a:avLst/>
@@ -19202,7 +19211,7 @@
         </p:nvSpPr>
         <p:spPr>
           <a:xfrm>
-            <a:off x="637200" y="4789548"/>
+            <a:off x="744093" y="4789548"/>
             <a:ext cx="5034960" cy="365760"/>
           </a:xfrm>
           <a:prstGeom prst="rect">
@@ -19240,7 +19249,7 @@
         <p:spPr>
           <a:xfrm>
             <a:off x="6413190" y="4789548"/>
-            <a:ext cx="5141610" cy="365760"/>
+            <a:ext cx="5034960" cy="365760"/>
           </a:xfrm>
           <a:prstGeom prst="rect">
             <a:avLst/>
@@ -19276,7 +19285,7 @@
         </p:nvSpPr>
         <p:spPr>
           <a:xfrm>
-            <a:off x="637200" y="3165382"/>
+            <a:off x="744093" y="3165382"/>
             <a:ext cx="5034960" cy="1097280"/>
           </a:xfrm>
           <a:prstGeom prst="rect">
@@ -19294,7 +19303,7 @@
           <a:lstStyle/>
           <a:p>
             <a:r>
-              <a:rPr sz="1300">
+              <a:rPr sz="1300" b="0">
                 <a:solidFill>
                   <a:srgbClr val="4A4A4A"/>
                 </a:solidFill>
@@ -19305,7 +19314,7 @@
           </a:p>
           <a:p>
             <a:r>
-              <a:rPr sz="1300">
+              <a:rPr sz="1300" b="0">
                 <a:solidFill>
                   <a:srgbClr val="4A4A4A"/>
                 </a:solidFill>
@@ -19316,7 +19325,7 @@
           </a:p>
           <a:p>
             <a:r>
-              <a:rPr sz="1300">
+              <a:rPr sz="1300" b="0">
                 <a:solidFill>
                   <a:srgbClr val="4A4A4A"/>
                 </a:solidFill>
@@ -19336,7 +19345,7 @@
         <p:spPr>
           <a:xfrm>
             <a:off x="6413190" y="3165382"/>
-            <a:ext cx="5141610" cy="1097280"/>
+            <a:ext cx="5034960" cy="1097280"/>
           </a:xfrm>
           <a:prstGeom prst="rect">
             <a:avLst/>
@@ -19353,7 +19362,7 @@
           <a:lstStyle/>
           <a:p>
             <a:r>
-              <a:rPr sz="1300">
+              <a:rPr sz="1300" b="0">
                 <a:solidFill>
                   <a:srgbClr val="4A4A4A"/>
                 </a:solidFill>
@@ -19364,7 +19373,7 @@
           </a:p>
           <a:p>
             <a:r>
-              <a:rPr sz="1300">
+              <a:rPr sz="1300" b="0">
                 <a:solidFill>
                   <a:srgbClr val="4A4A4A"/>
                 </a:solidFill>
@@ -19375,7 +19384,7 @@
           </a:p>
           <a:p>
             <a:r>
-              <a:rPr sz="1300">
+              <a:rPr sz="1300" b="0">
                 <a:solidFill>
                   <a:srgbClr val="4A4A4A"/>
                 </a:solidFill>
@@ -19394,7 +19403,7 @@
         </p:nvSpPr>
         <p:spPr>
           <a:xfrm>
-            <a:off x="637200" y="5263308"/>
+            <a:off x="744093" y="5263308"/>
             <a:ext cx="5034960" cy="1097280"/>
           </a:xfrm>
           <a:prstGeom prst="rect">
@@ -19454,7 +19463,7 @@
         <p:spPr>
           <a:xfrm>
             <a:off x="6413190" y="5263308"/>
-            <a:ext cx="5141610" cy="1097280"/>
+            <a:ext cx="5034960" cy="1097280"/>
           </a:xfrm>
           <a:prstGeom prst="rect">
             <a:avLst/>
@@ -19544,7 +19553,7 @@
         </p:blipFill>
         <p:spPr>
           <a:xfrm>
-            <a:off x="11140714" y="2766060"/>
+            <a:off x="11034064" y="2766060"/>
             <a:ext cx="411480" cy="411480"/>
           </a:xfrm>
           <a:prstGeom prst="rect">
@@ -19592,7 +19601,7 @@
         </p:blipFill>
         <p:spPr>
           <a:xfrm>
-            <a:off x="11140714" y="4869180"/>
+            <a:off x="11034064" y="4869180"/>
             <a:ext cx="411480" cy="411480"/>
           </a:xfrm>
           <a:prstGeom prst="rect">
@@ -19836,7 +19845,7 @@
           <a:p>
             <a:pPr algn="ctr"/>
             <a:r>
-              <a:rPr sz="1400">
+              <a:rPr sz="1400" b="1">
                 <a:solidFill>
                   <a:srgbClr val="FFFFFF"/>
                 </a:solidFill>
@@ -19889,7 +19898,7 @@
           <a:p>
             <a:pPr algn="ctr"/>
             <a:r>
-              <a:rPr sz="1400">
+              <a:rPr sz="1400" b="1">
                 <a:solidFill>
                   <a:srgbClr val="FFFFFF"/>
                 </a:solidFill>
@@ -19942,7 +19951,7 @@
           <a:p>
             <a:pPr algn="ctr"/>
             <a:r>
-              <a:rPr sz="1400">
+              <a:rPr sz="1400" b="1">
                 <a:solidFill>
                   <a:srgbClr val="FFFFFF"/>
                 </a:solidFill>
@@ -19995,7 +20004,7 @@
           <a:p>
             <a:pPr algn="ctr"/>
             <a:r>
-              <a:rPr sz="1400">
+              <a:rPr sz="1400" b="1">
                 <a:solidFill>
                   <a:srgbClr val="FFFFFF"/>
                 </a:solidFill>
@@ -20755,7 +20764,7 @@
           <a:p>
             <a:pPr algn="ctr"/>
             <a:r>
-              <a:rPr sz="1300">
+              <a:rPr sz="1400" b="1">
                 <a:solidFill>
                   <a:srgbClr val="FFFFFF"/>
                 </a:solidFill>
@@ -20806,7 +20815,7 @@
           <a:p>
             <a:pPr algn="ctr"/>
             <a:r>
-              <a:rPr sz="1300">
+              <a:rPr sz="1400" b="1">
                 <a:solidFill>
                   <a:srgbClr val="FFFFFF"/>
                 </a:solidFill>
@@ -20857,7 +20866,7 @@
           <a:p>
             <a:pPr algn="ctr"/>
             <a:r>
-              <a:rPr sz="1300">
+              <a:rPr sz="1400" b="1">
                 <a:solidFill>
                   <a:srgbClr val="000000"/>
                 </a:solidFill>
@@ -20908,7 +20917,7 @@
           <a:p>
             <a:pPr algn="ctr"/>
             <a:r>
-              <a:rPr sz="1300">
+              <a:rPr sz="1400" b="1">
                 <a:solidFill>
                   <a:srgbClr val="000000"/>
                 </a:solidFill>
@@ -22480,7 +22489,7 @@
           <a:p>
             <a:pPr algn="ctr"/>
             <a:r>
-              <a:rPr sz="1100">
+              <a:rPr sz="1100" b="1">
                 <a:solidFill>
                   <a:srgbClr val="FFFFFF"/>
                 </a:solidFill>
@@ -22528,7 +22537,7 @@
           <a:p>
             <a:pPr algn="ctr"/>
             <a:r>
-              <a:rPr sz="1100">
+              <a:rPr sz="1100" b="1">
                 <a:solidFill>
                   <a:srgbClr val="FFFFFF"/>
                 </a:solidFill>
@@ -22576,7 +22585,7 @@
           <a:p>
             <a:pPr algn="ctr"/>
             <a:r>
-              <a:rPr sz="1100">
+              <a:rPr sz="1100" b="1">
                 <a:solidFill>
                   <a:srgbClr val="FFFFFF"/>
                 </a:solidFill>
@@ -22624,7 +22633,7 @@
           <a:p>
             <a:pPr algn="ctr"/>
             <a:r>
-              <a:rPr sz="1100">
+              <a:rPr sz="1100" b="1">
                 <a:solidFill>
                   <a:srgbClr val="FFFFFF"/>
                 </a:solidFill>
@@ -22642,8 +22651,8 @@
         </p:nvSpPr>
         <p:spPr>
           <a:xfrm>
-            <a:off x="2511857" y="4347972"/>
-            <a:ext cx="402336" cy="402336"/>
+            <a:off x="2438705" y="4274820"/>
+            <a:ext cx="548640" cy="548640"/>
           </a:xfrm>
           <a:prstGeom prst="ellipse">
             <a:avLst/>
@@ -22690,8 +22699,8 @@
         </p:nvSpPr>
         <p:spPr>
           <a:xfrm>
-            <a:off x="4766767" y="4347972"/>
-            <a:ext cx="402336" cy="402336"/>
+            <a:off x="4693615" y="4274820"/>
+            <a:ext cx="548640" cy="548640"/>
           </a:xfrm>
           <a:prstGeom prst="ellipse">
             <a:avLst/>
@@ -22738,8 +22747,8 @@
         </p:nvSpPr>
         <p:spPr>
           <a:xfrm>
-            <a:off x="7022592" y="4347972"/>
-            <a:ext cx="402336" cy="402336"/>
+            <a:off x="6949440" y="4274820"/>
+            <a:ext cx="548640" cy="548640"/>
           </a:xfrm>
           <a:prstGeom prst="ellipse">
             <a:avLst/>
@@ -22786,8 +22795,8 @@
         </p:nvSpPr>
         <p:spPr>
           <a:xfrm>
-            <a:off x="9277502" y="4347972"/>
-            <a:ext cx="402336" cy="402336"/>
+            <a:off x="9204350" y="4274820"/>
+            <a:ext cx="548640" cy="548640"/>
           </a:xfrm>
           <a:prstGeom prst="ellipse">
             <a:avLst/>
@@ -22975,7 +22984,7 @@
           <a:lstStyle/>
           <a:p>
             <a:r>
-              <a:rPr sz="1300">
+              <a:rPr sz="1200" b="1">
                 <a:solidFill>
                   <a:srgbClr val="0043DA"/>
                 </a:solidFill>
@@ -23028,7 +23037,7 @@
           <a:lstStyle/>
           <a:p>
             <a:r>
-              <a:rPr sz="1300">
+              <a:rPr sz="1200" b="1">
                 <a:solidFill>
                   <a:srgbClr val="0043DA"/>
                 </a:solidFill>
@@ -23081,7 +23090,7 @@
           <a:lstStyle/>
           <a:p>
             <a:r>
-              <a:rPr sz="1300">
+              <a:rPr sz="1200" b="1">
                 <a:solidFill>
                   <a:srgbClr val="0043DA"/>
                 </a:solidFill>
@@ -23134,7 +23143,7 @@
           <a:lstStyle/>
           <a:p>
             <a:r>
-              <a:rPr sz="1300">
+              <a:rPr sz="1200" b="1">
                 <a:solidFill>
                   <a:srgbClr val="0043DA"/>
                 </a:solidFill>
@@ -23187,7 +23196,7 @@
           <a:lstStyle/>
           <a:p>
             <a:r>
-              <a:rPr sz="1300">
+              <a:rPr sz="1300" b="1">
                 <a:solidFill>
                   <a:srgbClr val="404040"/>
                 </a:solidFill>
@@ -23239,7 +23248,7 @@
           <a:lstStyle/>
           <a:p>
             <a:r>
-              <a:rPr sz="1300">
+              <a:rPr sz="1300" b="1">
                 <a:solidFill>
                   <a:srgbClr val="404040"/>
                 </a:solidFill>
@@ -23291,7 +23300,7 @@
           <a:lstStyle/>
           <a:p>
             <a:r>
-              <a:rPr sz="1300">
+              <a:rPr sz="1300" b="1">
                 <a:solidFill>
                   <a:srgbClr val="404040"/>
                 </a:solidFill>
@@ -23343,7 +23352,7 @@
           <a:lstStyle/>
           <a:p>
             <a:r>
-              <a:rPr sz="1100">
+              <a:rPr sz="1300" b="1">
                 <a:solidFill>
                   <a:srgbClr val="404040"/>
                 </a:solidFill>

--- a/results/pptx/AWS_MSK_Expert_Intro.pptx
+++ b/results/pptx/AWS_MSK_Expert_Intro.pptx
@@ -30,6 +30,7 @@
     <p:sldId id="379" r:id="rId25"/>
     <p:sldId id="380" r:id="rId26"/>
     <p:sldId id="381" r:id="rId27"/>
+    <p:sldId id="388" r:id="rId34"/>
     <p:sldId id="382" r:id="rId28"/>
     <p:sldId id="383" r:id="rId29"/>
     <p:sldId id="384" r:id="rId30"/>
@@ -11998,36 +11999,47 @@
         <p:cNvGrpSpPr/>
         <p:nvPr/>
       </p:nvGrpSpPr>
-      <p:grpSpPr/>
-      <p:sp>
-        <p:nvSpPr>
-          <p:cNvPr id="5" name="Rectangle 4"/>
+      <p:grpSpPr>
+        <a:xfrm>
+          <a:off x="0" y="0"/>
+          <a:ext cx="0" cy="0"/>
+          <a:chOff x="0" y="0"/>
+          <a:chExt cx="0" cy="0"/>
+        </a:xfrm>
+      </p:grpSpPr>
+      <p:sp>
+        <p:nvSpPr>
+          <p:cNvPr id="59" name="직사각형 58"/>
           <p:cNvSpPr/>
           <p:nvPr/>
         </p:nvSpPr>
         <p:spPr>
           <a:xfrm>
-            <a:off x="0" y="1600200"/>
-            <a:ext cx="12192000" cy="5257800"/>
+            <a:off x="5454814" y="1560692"/>
+            <a:ext cx="6461651" cy="1543780"/>
           </a:xfrm>
           <a:prstGeom prst="rect">
             <a:avLst/>
           </a:prstGeom>
           <a:solidFill>
-            <a:srgbClr val="1A234E"/>
+            <a:srgbClr val="2A6FDE">
+              <a:alpha val="7000"/>
+            </a:srgbClr>
           </a:solidFill>
           <a:ln>
             <a:noFill/>
           </a:ln>
         </p:spPr>
         <p:style>
-          <a:lnRef idx="1">
-            <a:schemeClr val="accent1"/>
+          <a:lnRef idx="2">
+            <a:schemeClr val="accent1">
+              <a:shade val="50000"/>
+            </a:schemeClr>
           </a:lnRef>
-          <a:fillRef idx="3">
+          <a:fillRef idx="1">
             <a:schemeClr val="accent1"/>
           </a:fillRef>
-          <a:effectRef idx="2">
+          <a:effectRef idx="0">
             <a:schemeClr val="accent1"/>
           </a:effectRef>
           <a:fontRef idx="minor">
@@ -12039,36 +12051,26 @@
           <a:lstStyle/>
           <a:p>
             <a:pPr algn="ctr"/>
-          </a:p>
-        </p:txBody>
-      </p:sp>
-      <p:sp>
-        <p:nvSpPr>
-          <p:cNvPr id="2" name="Text Placeholder 1"/>
-          <p:cNvSpPr>
-            <a:spLocks noGrp="1"/>
-          </p:cNvSpPr>
-          <p:nvPr>
-            <p:ph type="body" idx="10" sz="quarter"/>
-          </p:nvPr>
-        </p:nvSpPr>
-        <p:spPr/>
-        <p:txBody>
-          <a:bodyPr/>
-          <a:lstStyle/>
-          <a:p/>
-        </p:txBody>
-      </p:sp>
-      <p:sp>
-        <p:nvSpPr>
-          <p:cNvPr id="3" name="TextBox 2"/>
+            <a:endParaRPr lang="ko-KR" altLang="en-US"/>
+          </a:p>
+        </p:txBody>
+      </p:sp>
+      <p:sp>
+        <p:nvSpPr>
+          <p:cNvPr id="50" name="TextBox 49">
+            <a:extLst>
+              <a:ext uri="{FF2B5EF4-FFF2-40B4-BE49-F238E27FC236}">
+                <a16:creationId xmlns:a16="http://schemas.microsoft.com/office/drawing/2014/main" id="{B4F1CD8C-B1D4-7464-AA76-B85D3FD34B41}"/>
+              </a:ext>
+            </a:extLst>
+          </p:cNvPr>
           <p:cNvSpPr txBox="1"/>
           <p:nvPr/>
         </p:nvSpPr>
         <p:spPr>
           <a:xfrm>
-            <a:off x="354288" y="557760"/>
-            <a:ext cx="2719800" cy="932280"/>
+            <a:off x="5532230" y="1560692"/>
+            <a:ext cx="1251848" cy="1543780"/>
           </a:xfrm>
           <a:prstGeom prst="rect">
             <a:avLst/>
@@ -12076,34 +12078,48 @@
           <a:noFill/>
         </p:spPr>
         <p:txBody>
-          <a:bodyPr wrap="square" lIns="0" rIns="0" tIns="0" bIns="0">
-            <a:spAutoFit/>
+          <a:bodyPr wrap="square" lIns="0" tIns="0" rIns="0" bIns="0" rtlCol="0" anchor="ctr">
+            <a:noAutofit/>
           </a:bodyPr>
           <a:lstStyle/>
           <a:p>
-            <a:pPr algn="l"/>
-            <a:r>
-              <a:rPr sz="2000" b="1">
-                <a:solidFill>
-                  <a:srgbClr val="000000"/>
-                </a:solidFill>
-                <a:latin typeface="Freesentation"/>
-              </a:rPr>
-              <a:t>L18. Full Image</a:t>
-            </a:r>
-          </a:p>
-        </p:txBody>
-      </p:sp>
-      <p:sp>
-        <p:nvSpPr>
-          <p:cNvPr id="4" name="TextBox 3"/>
+            <a:pPr algn="ctr"/>
+            <a:r>
+              <a:rPr kumimoji="1" lang="en-US" altLang="ko-KR" sz="1200" b="1" dirty="0">
+                <a:solidFill>
+                  <a:srgbClr val="2A6FDE"/>
+                </a:solidFill>
+                <a:latin typeface="프리젠테이션 7 Bold" pitchFamily="2" charset="-127"/>
+                <a:ea typeface="프리젠테이션 7 Bold" pitchFamily="2" charset="-127"/>
+              </a:rPr>
+              <a:t>CHALLENGE</a:t>
+            </a:r>
+            <a:endParaRPr kumimoji="1" lang="ko-KR" altLang="en-US" sz="1200" b="1" dirty="0">
+              <a:solidFill>
+                <a:srgbClr val="2A6FDE"/>
+              </a:solidFill>
+              <a:latin typeface="프리젠테이션 7 Bold" pitchFamily="2" charset="-127"/>
+              <a:ea typeface="프리젠테이션 7 Bold" pitchFamily="2" charset="-127"/>
+            </a:endParaRPr>
+          </a:p>
+        </p:txBody>
+      </p:sp>
+      <p:sp>
+        <p:nvSpPr>
+          <p:cNvPr id="51" name="TextBox 50">
+            <a:extLst>
+              <a:ext uri="{FF2B5EF4-FFF2-40B4-BE49-F238E27FC236}">
+                <a16:creationId xmlns:a16="http://schemas.microsoft.com/office/drawing/2014/main" id="{87BB32EE-1742-12E7-BFF9-906AF589AC67}"/>
+              </a:ext>
+            </a:extLst>
+          </p:cNvPr>
           <p:cNvSpPr txBox="1"/>
           <p:nvPr/>
         </p:nvSpPr>
         <p:spPr>
           <a:xfrm>
-            <a:off x="3761040" y="558624"/>
-            <a:ext cx="7549368" cy="938088"/>
+            <a:off x="6950765" y="1560691"/>
+            <a:ext cx="4965700" cy="1543780"/>
           </a:xfrm>
           <a:prstGeom prst="rect">
             <a:avLst/>
@@ -12111,55 +12127,155 @@
           <a:noFill/>
         </p:spPr>
         <p:txBody>
-          <a:bodyPr wrap="square" lIns="0" rIns="0" tIns="0" bIns="0">
-            <a:spAutoFit/>
+          <a:bodyPr wrap="square" lIns="0" tIns="0" rIns="0" bIns="0" rtlCol="0" anchor="ctr">
+            <a:noAutofit/>
           </a:bodyPr>
           <a:lstStyle/>
           <a:p>
-            <a:pPr algn="l"/>
-            <a:r>
-              <a:rPr sz="1200" b="0">
-                <a:solidFill>
-                  <a:srgbClr val="212121"/>
-                </a:solidFill>
-                <a:latin typeface="Freesentation"/>
-              </a:rPr>
-              <a:t>풀와이드 이미지 레이아웃 — 배경 + 캡션 오버레이</a:t>
-            </a:r>
-          </a:p>
-        </p:txBody>
-      </p:sp>
-      <p:sp>
-        <p:nvSpPr>
-          <p:cNvPr id="6" name="Rounded Rectangle 5"/>
+            <a:pPr marL="171450" indent="-171450">
+              <a:lnSpc>
+                <a:spcPct val="150000"/>
+              </a:lnSpc>
+              <a:buFont typeface="Arial" panose="020B0604020202020204" pitchFamily="34" charset="0"/>
+              <a:buChar char="•"/>
+            </a:pPr>
+            <a:r>
+              <a:rPr kumimoji="1" lang="ko-KR" altLang="en-US" sz="1100" dirty="0">
+                <a:latin typeface="프리젠테이션 4 Regular" pitchFamily="2" charset="-127"/>
+                <a:ea typeface="프리젠테이션 4 Regular" pitchFamily="2" charset="-127"/>
+              </a:rPr>
+              <a:t>상담사 숙련도에 따라서 전화 응대 후 후처리로 남기는 내용에 대한 품질이 상이함</a:t>
+            </a:r>
+          </a:p>
+          <a:p>
+            <a:pPr marL="171450" indent="-171450">
+              <a:lnSpc>
+                <a:spcPct val="150000"/>
+              </a:lnSpc>
+              <a:buFont typeface="Arial" panose="020B0604020202020204" pitchFamily="34" charset="0"/>
+              <a:buChar char="•"/>
+            </a:pPr>
+            <a:r>
+              <a:rPr kumimoji="1" lang="ko-KR" altLang="en-US" sz="1100" dirty="0">
+                <a:latin typeface="프리젠테이션 4 Regular" pitchFamily="2" charset="-127"/>
+                <a:ea typeface="프리젠테이션 4 Regular" pitchFamily="2" charset="-127"/>
+              </a:rPr>
+              <a:t>통화가 길어지면 통화 내용에 대해서 전체적으로 기억하기 어려움</a:t>
+            </a:r>
+          </a:p>
+          <a:p>
+            <a:pPr marL="171450" indent="-171450">
+              <a:lnSpc>
+                <a:spcPct val="150000"/>
+              </a:lnSpc>
+              <a:buFont typeface="Arial" panose="020B0604020202020204" pitchFamily="34" charset="0"/>
+              <a:buChar char="•"/>
+            </a:pPr>
+            <a:r>
+              <a:rPr kumimoji="1" lang="ko-KR" altLang="en-US" sz="1100" dirty="0">
+                <a:latin typeface="프리젠테이션 4 Regular" pitchFamily="2" charset="-127"/>
+                <a:ea typeface="프리젠테이션 4 Regular" pitchFamily="2" charset="-127"/>
+              </a:rPr>
+              <a:t>객관적으로 고객의 감정상태를 파악하기 어려움</a:t>
+            </a:r>
+          </a:p>
+          <a:p>
+            <a:pPr marL="171450" indent="-171450">
+              <a:lnSpc>
+                <a:spcPct val="150000"/>
+              </a:lnSpc>
+              <a:buFont typeface="Arial" panose="020B0604020202020204" pitchFamily="34" charset="0"/>
+              <a:buChar char="•"/>
+            </a:pPr>
+            <a:r>
+              <a:rPr kumimoji="1" lang="ko-KR" altLang="en-US" sz="1100" dirty="0">
+                <a:latin typeface="프리젠테이션 4 Regular" pitchFamily="2" charset="-127"/>
+                <a:ea typeface="프리젠테이션 4 Regular" pitchFamily="2" charset="-127"/>
+              </a:rPr>
+              <a:t>수기로 후처리를 남기면 상담 업무 생산성이 </a:t>
+            </a:r>
+            <a:r>
+              <a:rPr kumimoji="1" lang="ko-KR" altLang="en-US" sz="1100" dirty="0" smtClean="0">
+                <a:latin typeface="프리젠테이션 4 Regular" pitchFamily="2" charset="-127"/>
+                <a:ea typeface="프리젠테이션 4 Regular" pitchFamily="2" charset="-127"/>
+              </a:rPr>
+              <a:t>떨어짐</a:t>
+            </a:r>
+            <a:endParaRPr kumimoji="1" lang="en-US" altLang="ko-KR" sz="1100" dirty="0">
+              <a:latin typeface="프리젠테이션 4 Regular" pitchFamily="2" charset="-127"/>
+              <a:ea typeface="프리젠테이션 4 Regular" pitchFamily="2" charset="-127"/>
+            </a:endParaRPr>
+          </a:p>
+        </p:txBody>
+      </p:sp>
+      <p:cxnSp>
+        <p:nvCxnSpPr>
+          <p:cNvPr id="41" name="직선 연결선 40"/>
+          <p:cNvCxnSpPr/>
+          <p:nvPr/>
+        </p:nvCxnSpPr>
+        <p:spPr>
+          <a:xfrm flipV="1">
+            <a:off x="5454815" y="1560691"/>
+            <a:ext cx="6461650" cy="21252"/>
+          </a:xfrm>
+          <a:prstGeom prst="line">
+            <a:avLst/>
+          </a:prstGeom>
+          <a:ln w="12700">
+            <a:solidFill>
+              <a:srgbClr val="0043DA"/>
+            </a:solidFill>
+          </a:ln>
+        </p:spPr>
+        <p:style>
+          <a:lnRef idx="1">
+            <a:schemeClr val="accent1"/>
+          </a:lnRef>
+          <a:fillRef idx="0">
+            <a:schemeClr val="accent1"/>
+          </a:fillRef>
+          <a:effectRef idx="0">
+            <a:schemeClr val="accent1"/>
+          </a:effectRef>
+          <a:fontRef idx="minor">
+            <a:schemeClr val="tx1"/>
+          </a:fontRef>
+        </p:style>
+      </p:cxnSp>
+      <p:sp>
+        <p:nvSpPr>
+          <p:cNvPr id="62" name="직사각형 61"/>
           <p:cNvSpPr/>
           <p:nvPr/>
         </p:nvSpPr>
         <p:spPr>
           <a:xfrm>
-            <a:off x="457200" y="1828800"/>
-            <a:ext cx="5486400" cy="1371600"/>
-          </a:xfrm>
-          <a:prstGeom prst="roundRect">
-            <a:avLst>
-              <a:gd name="adj" fmla="val 16667"/>
-            </a:avLst>
+            <a:off x="5454813" y="3275389"/>
+            <a:ext cx="6461651" cy="1543780"/>
+          </a:xfrm>
+          <a:prstGeom prst="rect">
+            <a:avLst/>
           </a:prstGeom>
           <a:solidFill>
-            <a:srgbClr val="212121"/>
+            <a:srgbClr val="4CB88F">
+              <a:alpha val="7000"/>
+            </a:srgbClr>
           </a:solidFill>
           <a:ln>
             <a:noFill/>
           </a:ln>
         </p:spPr>
         <p:style>
-          <a:lnRef idx="1">
-            <a:schemeClr val="accent1"/>
+          <a:lnRef idx="2">
+            <a:schemeClr val="accent1">
+              <a:shade val="50000"/>
+            </a:schemeClr>
           </a:lnRef>
-          <a:fillRef idx="3">
+          <a:fillRef idx="1">
             <a:schemeClr val="accent1"/>
           </a:fillRef>
-          <a:effectRef idx="2">
+          <a:effectRef idx="0">
             <a:schemeClr val="accent1"/>
           </a:effectRef>
           <a:fontRef idx="minor">
@@ -12171,19 +12287,26 @@
           <a:lstStyle/>
           <a:p>
             <a:pPr algn="ctr"/>
-          </a:p>
-        </p:txBody>
-      </p:sp>
-      <p:sp>
-        <p:nvSpPr>
-          <p:cNvPr id="7" name="TextBox 6"/>
+            <a:endParaRPr lang="ko-KR" altLang="en-US"/>
+          </a:p>
+        </p:txBody>
+      </p:sp>
+      <p:sp>
+        <p:nvSpPr>
+          <p:cNvPr id="63" name="TextBox 62">
+            <a:extLst>
+              <a:ext uri="{FF2B5EF4-FFF2-40B4-BE49-F238E27FC236}">
+                <a16:creationId xmlns:a16="http://schemas.microsoft.com/office/drawing/2014/main" id="{B4F1CD8C-B1D4-7464-AA76-B85D3FD34B41}"/>
+              </a:ext>
+            </a:extLst>
+          </p:cNvPr>
           <p:cNvSpPr txBox="1"/>
           <p:nvPr/>
         </p:nvSpPr>
         <p:spPr>
           <a:xfrm>
-            <a:off x="640080" y="2011680"/>
-            <a:ext cx="5120640" cy="548640"/>
+            <a:off x="5532229" y="3275389"/>
+            <a:ext cx="1251848" cy="1543780"/>
           </a:xfrm>
           <a:prstGeom prst="rect">
             <a:avLst/>
@@ -12191,34 +12314,41 @@
           <a:noFill/>
         </p:spPr>
         <p:txBody>
-          <a:bodyPr wrap="square">
-            <a:spAutoFit/>
+          <a:bodyPr wrap="square" lIns="0" tIns="0" rIns="0" bIns="0" rtlCol="0" anchor="ctr">
+            <a:noAutofit/>
           </a:bodyPr>
           <a:lstStyle/>
           <a:p>
-            <a:pPr algn="l"/>
-            <a:r>
-              <a:rPr sz="2400" b="1">
-                <a:solidFill>
-                  <a:srgbClr val="FFFFFF"/>
-                </a:solidFill>
-                <a:latin typeface="Freesentation"/>
-              </a:rPr>
-              <a:t>AWS MSK 클라우드 전환 전략 2026</a:t>
-            </a:r>
-          </a:p>
-        </p:txBody>
-      </p:sp>
-      <p:sp>
-        <p:nvSpPr>
-          <p:cNvPr id="8" name="TextBox 7"/>
+            <a:pPr algn="ctr"/>
+            <a:r>
+              <a:rPr kumimoji="1" lang="en-US" altLang="ko-KR" sz="1200" b="1" dirty="0">
+                <a:solidFill>
+                  <a:srgbClr val="4CB88F"/>
+                </a:solidFill>
+                <a:latin typeface="프리젠테이션 7 Bold" pitchFamily="2" charset="-127"/>
+                <a:ea typeface="프리젠테이션 7 Bold" pitchFamily="2" charset="-127"/>
+              </a:rPr>
+              <a:t>SOLUTION</a:t>
+            </a:r>
+          </a:p>
+        </p:txBody>
+      </p:sp>
+      <p:sp>
+        <p:nvSpPr>
+          <p:cNvPr id="64" name="TextBox 63">
+            <a:extLst>
+              <a:ext uri="{FF2B5EF4-FFF2-40B4-BE49-F238E27FC236}">
+                <a16:creationId xmlns:a16="http://schemas.microsoft.com/office/drawing/2014/main" id="{87BB32EE-1742-12E7-BFF9-906AF589AC67}"/>
+              </a:ext>
+            </a:extLst>
+          </p:cNvPr>
           <p:cNvSpPr txBox="1"/>
           <p:nvPr/>
         </p:nvSpPr>
         <p:spPr>
           <a:xfrm>
-            <a:off x="640080" y="2651760"/>
-            <a:ext cx="5120640" cy="365760"/>
+            <a:off x="6950764" y="3275388"/>
+            <a:ext cx="4965700" cy="1543780"/>
           </a:xfrm>
           <a:prstGeom prst="rect">
             <a:avLst/>
@@ -12226,21 +12356,1036 @@
           <a:noFill/>
         </p:spPr>
         <p:txBody>
-          <a:bodyPr wrap="square">
-            <a:spAutoFit/>
+          <a:bodyPr wrap="square" lIns="0" tIns="0" rIns="0" bIns="0" rtlCol="0" anchor="ctr">
+            <a:noAutofit/>
           </a:bodyPr>
           <a:lstStyle/>
           <a:p>
-            <a:pPr algn="l"/>
-            <a:r>
-              <a:rPr sz="1400" b="0">
-                <a:solidFill>
-                  <a:srgbClr val="FFFFFF"/>
-                </a:solidFill>
-                <a:latin typeface="Freesentation"/>
-              </a:rPr>
-              <a:t>금융·공공 분야 실시간 이벤트 스트리밍 선도</a:t>
-            </a:r>
+            <a:pPr marL="171450" indent="-171450">
+              <a:lnSpc>
+                <a:spcPct val="150000"/>
+              </a:lnSpc>
+              <a:buFont typeface="Arial" panose="020B0604020202020204" pitchFamily="34" charset="0"/>
+              <a:buChar char="•"/>
+            </a:pPr>
+            <a:r>
+              <a:rPr kumimoji="1" lang="en" altLang="ko-KR" sz="1100" dirty="0">
+                <a:latin typeface="프리젠테이션 4 Regular" pitchFamily="2" charset="-127"/>
+                <a:ea typeface="프리젠테이션 4 Regular" pitchFamily="2" charset="-127"/>
+              </a:rPr>
+              <a:t>STT(Speech-to-Text)</a:t>
+            </a:r>
+            <a:r>
+              <a:rPr kumimoji="1" lang="ko-KR" altLang="en-US" sz="1100" dirty="0">
+                <a:latin typeface="프리젠테이션 4 Regular" pitchFamily="2" charset="-127"/>
+                <a:ea typeface="프리젠테이션 4 Regular" pitchFamily="2" charset="-127"/>
+              </a:rPr>
+              <a:t>를 도입하여 </a:t>
+            </a:r>
+            <a:r>
+              <a:rPr kumimoji="1" lang="ko-KR" altLang="en-US" sz="1100" dirty="0" err="1">
+                <a:latin typeface="프리젠테이션 4 Regular" pitchFamily="2" charset="-127"/>
+                <a:ea typeface="프리젠테이션 4 Regular" pitchFamily="2" charset="-127"/>
+              </a:rPr>
+              <a:t>화자별</a:t>
+            </a:r>
+            <a:r>
+              <a:rPr kumimoji="1" lang="ko-KR" altLang="en-US" sz="1100" dirty="0">
+                <a:latin typeface="프리젠테이션 4 Regular" pitchFamily="2" charset="-127"/>
+                <a:ea typeface="프리젠테이션 4 Regular" pitchFamily="2" charset="-127"/>
+              </a:rPr>
+              <a:t> 대화 분리</a:t>
+            </a:r>
+          </a:p>
+          <a:p>
+            <a:pPr marL="171450" indent="-171450">
+              <a:lnSpc>
+                <a:spcPct val="150000"/>
+              </a:lnSpc>
+              <a:buFont typeface="Arial" panose="020B0604020202020204" pitchFamily="34" charset="0"/>
+              <a:buChar char="•"/>
+            </a:pPr>
+            <a:r>
+              <a:rPr kumimoji="1" lang="ko-KR" altLang="en-US" sz="1100" dirty="0" err="1">
+                <a:latin typeface="프리젠테이션 4 Regular" pitchFamily="2" charset="-127"/>
+                <a:ea typeface="프리젠테이션 4 Regular" pitchFamily="2" charset="-127"/>
+              </a:rPr>
+              <a:t>생성형</a:t>
+            </a:r>
+            <a:r>
+              <a:rPr kumimoji="1" lang="ko-KR" altLang="en-US" sz="1100" dirty="0">
+                <a:latin typeface="프리젠테이션 4 Regular" pitchFamily="2" charset="-127"/>
+                <a:ea typeface="프리젠테이션 4 Regular" pitchFamily="2" charset="-127"/>
+              </a:rPr>
+              <a:t> </a:t>
+            </a:r>
+            <a:r>
+              <a:rPr kumimoji="1" lang="en" altLang="ko-KR" sz="1100" dirty="0">
+                <a:latin typeface="프리젠테이션 4 Regular" pitchFamily="2" charset="-127"/>
+                <a:ea typeface="프리젠테이션 4 Regular" pitchFamily="2" charset="-127"/>
+              </a:rPr>
+              <a:t>AI</a:t>
+            </a:r>
+            <a:r>
+              <a:rPr kumimoji="1" lang="ko-KR" altLang="en-US" sz="1100" dirty="0">
+                <a:latin typeface="프리젠테이션 4 Regular" pitchFamily="2" charset="-127"/>
+                <a:ea typeface="프리젠테이션 4 Regular" pitchFamily="2" charset="-127"/>
+              </a:rPr>
+              <a:t>와 </a:t>
+            </a:r>
+            <a:r>
+              <a:rPr kumimoji="1" lang="en" altLang="ko-KR" sz="1100" dirty="0">
+                <a:latin typeface="프리젠테이션 4 Regular" pitchFamily="2" charset="-127"/>
+                <a:ea typeface="프리젠테이션 4 Regular" pitchFamily="2" charset="-127"/>
+              </a:rPr>
+              <a:t>STT(Speech-to-Text)</a:t>
+            </a:r>
+            <a:r>
+              <a:rPr kumimoji="1" lang="ko-KR" altLang="en-US" sz="1100" dirty="0" err="1">
+                <a:latin typeface="프리젠테이션 4 Regular" pitchFamily="2" charset="-127"/>
+                <a:ea typeface="프리젠테이션 4 Regular" pitchFamily="2" charset="-127"/>
+              </a:rPr>
+              <a:t>를</a:t>
+            </a:r>
+            <a:r>
+              <a:rPr kumimoji="1" lang="ko-KR" altLang="en-US" sz="1100" dirty="0">
+                <a:latin typeface="프리젠테이션 4 Regular" pitchFamily="2" charset="-127"/>
+                <a:ea typeface="프리젠테이션 4 Regular" pitchFamily="2" charset="-127"/>
+              </a:rPr>
+              <a:t> 도입하여 </a:t>
+            </a:r>
+            <a:r>
+              <a:rPr kumimoji="1" lang="ko-KR" altLang="en-US" sz="1100" dirty="0" err="1">
+                <a:latin typeface="프리젠테이션 4 Regular" pitchFamily="2" charset="-127"/>
+                <a:ea typeface="프리젠테이션 4 Regular" pitchFamily="2" charset="-127"/>
+              </a:rPr>
+              <a:t>상담사와</a:t>
+            </a:r>
+            <a:r>
+              <a:rPr kumimoji="1" lang="ko-KR" altLang="en-US" sz="1100" dirty="0">
+                <a:latin typeface="프리젠테이션 4 Regular" pitchFamily="2" charset="-127"/>
+                <a:ea typeface="프리젠테이션 4 Regular" pitchFamily="2" charset="-127"/>
+              </a:rPr>
+              <a:t> 고객의 대화를 요약하고</a:t>
+            </a:r>
+            <a:r>
+              <a:rPr kumimoji="1" lang="en-US" altLang="ko-KR" sz="1100" dirty="0">
+                <a:latin typeface="프리젠테이션 4 Regular" pitchFamily="2" charset="-127"/>
+                <a:ea typeface="프리젠테이션 4 Regular" pitchFamily="2" charset="-127"/>
+              </a:rPr>
+              <a:t>, </a:t>
+            </a:r>
+            <a:br>
+              <a:rPr kumimoji="1" lang="en-US" altLang="ko-KR" sz="1100" dirty="0">
+                <a:latin typeface="프리젠테이션 4 Regular" pitchFamily="2" charset="-127"/>
+                <a:ea typeface="프리젠테이션 4 Regular" pitchFamily="2" charset="-127"/>
+              </a:rPr>
+            </a:br>
+            <a:r>
+              <a:rPr kumimoji="1" lang="ko-KR" altLang="en-US" sz="1100" dirty="0">
+                <a:latin typeface="프리젠테이션 4 Regular" pitchFamily="2" charset="-127"/>
+                <a:ea typeface="프리젠테이션 4 Regular" pitchFamily="2" charset="-127"/>
+              </a:rPr>
+              <a:t>고객의 감정을 분류</a:t>
+            </a:r>
+            <a:r>
+              <a:rPr kumimoji="1" lang="en-US" altLang="ko-KR" sz="1100" dirty="0">
+                <a:latin typeface="프리젠테이션 4 Regular" pitchFamily="2" charset="-127"/>
+                <a:ea typeface="프리젠테이션 4 Regular" pitchFamily="2" charset="-127"/>
+              </a:rPr>
+              <a:t>,</a:t>
+            </a:r>
+            <a:r>
+              <a:rPr kumimoji="1" lang="ko-KR" altLang="en-US" sz="1100" dirty="0">
+                <a:latin typeface="프리젠테이션 4 Regular" pitchFamily="2" charset="-127"/>
+                <a:ea typeface="프리젠테이션 4 Regular" pitchFamily="2" charset="-127"/>
+              </a:rPr>
+              <a:t> 문의 유형 분류</a:t>
+            </a:r>
+          </a:p>
+        </p:txBody>
+      </p:sp>
+      <p:sp>
+        <p:nvSpPr>
+          <p:cNvPr id="67" name="직사각형 66"/>
+          <p:cNvSpPr/>
+          <p:nvPr/>
+        </p:nvSpPr>
+        <p:spPr>
+          <a:xfrm>
+            <a:off x="5454812" y="4987648"/>
+            <a:ext cx="6461651" cy="1543780"/>
+          </a:xfrm>
+          <a:prstGeom prst="rect">
+            <a:avLst/>
+          </a:prstGeom>
+          <a:solidFill>
+            <a:srgbClr val="EE8150">
+              <a:alpha val="7000"/>
+            </a:srgbClr>
+          </a:solidFill>
+          <a:ln>
+            <a:noFill/>
+          </a:ln>
+        </p:spPr>
+        <p:style>
+          <a:lnRef idx="2">
+            <a:schemeClr val="accent1">
+              <a:shade val="50000"/>
+            </a:schemeClr>
+          </a:lnRef>
+          <a:fillRef idx="1">
+            <a:schemeClr val="accent1"/>
+          </a:fillRef>
+          <a:effectRef idx="0">
+            <a:schemeClr val="accent1"/>
+          </a:effectRef>
+          <a:fontRef idx="minor">
+            <a:schemeClr val="lt1"/>
+          </a:fontRef>
+        </p:style>
+        <p:txBody>
+          <a:bodyPr rtlCol="0" anchor="ctr"/>
+          <a:lstStyle/>
+          <a:p>
+            <a:pPr algn="ctr"/>
+            <a:endParaRPr lang="ko-KR" altLang="en-US"/>
+          </a:p>
+        </p:txBody>
+      </p:sp>
+      <p:sp>
+        <p:nvSpPr>
+          <p:cNvPr id="68" name="TextBox 67">
+            <a:extLst>
+              <a:ext uri="{FF2B5EF4-FFF2-40B4-BE49-F238E27FC236}">
+                <a16:creationId xmlns:a16="http://schemas.microsoft.com/office/drawing/2014/main" id="{B4F1CD8C-B1D4-7464-AA76-B85D3FD34B41}"/>
+              </a:ext>
+            </a:extLst>
+          </p:cNvPr>
+          <p:cNvSpPr txBox="1"/>
+          <p:nvPr/>
+        </p:nvSpPr>
+        <p:spPr>
+          <a:xfrm>
+            <a:off x="5532228" y="4987648"/>
+            <a:ext cx="1251848" cy="1543780"/>
+          </a:xfrm>
+          <a:prstGeom prst="rect">
+            <a:avLst/>
+          </a:prstGeom>
+          <a:noFill/>
+        </p:spPr>
+        <p:txBody>
+          <a:bodyPr wrap="square" lIns="0" tIns="0" rIns="0" bIns="0" rtlCol="0" anchor="ctr">
+            <a:noAutofit/>
+          </a:bodyPr>
+          <a:lstStyle/>
+          <a:p>
+            <a:pPr algn="ctr"/>
+            <a:r>
+              <a:rPr kumimoji="1" lang="en-US" altLang="ko-KR" sz="1200" b="1" dirty="0">
+                <a:solidFill>
+                  <a:srgbClr val="EE8150"/>
+                </a:solidFill>
+                <a:latin typeface="프리젠테이션 7 Bold" pitchFamily="2" charset="-127"/>
+                <a:ea typeface="프리젠테이션 7 Bold" pitchFamily="2" charset="-127"/>
+              </a:rPr>
+              <a:t>CHALLENGE</a:t>
+            </a:r>
+            <a:endParaRPr kumimoji="1" lang="ko-KR" altLang="en-US" sz="1200" b="1" dirty="0">
+              <a:solidFill>
+                <a:srgbClr val="EE8150"/>
+              </a:solidFill>
+              <a:latin typeface="프리젠테이션 7 Bold" pitchFamily="2" charset="-127"/>
+              <a:ea typeface="프리젠테이션 7 Bold" pitchFamily="2" charset="-127"/>
+            </a:endParaRPr>
+          </a:p>
+        </p:txBody>
+      </p:sp>
+      <p:sp>
+        <p:nvSpPr>
+          <p:cNvPr id="69" name="TextBox 68">
+            <a:extLst>
+              <a:ext uri="{FF2B5EF4-FFF2-40B4-BE49-F238E27FC236}">
+                <a16:creationId xmlns:a16="http://schemas.microsoft.com/office/drawing/2014/main" id="{87BB32EE-1742-12E7-BFF9-906AF589AC67}"/>
+              </a:ext>
+            </a:extLst>
+          </p:cNvPr>
+          <p:cNvSpPr txBox="1"/>
+          <p:nvPr/>
+        </p:nvSpPr>
+        <p:spPr>
+          <a:xfrm>
+            <a:off x="6950763" y="4987647"/>
+            <a:ext cx="4965700" cy="1543780"/>
+          </a:xfrm>
+          <a:prstGeom prst="rect">
+            <a:avLst/>
+          </a:prstGeom>
+          <a:noFill/>
+        </p:spPr>
+        <p:txBody>
+          <a:bodyPr wrap="square" lIns="0" tIns="0" rIns="0" bIns="0" rtlCol="0" anchor="ctr">
+            <a:noAutofit/>
+          </a:bodyPr>
+          <a:lstStyle/>
+          <a:p>
+            <a:pPr marL="171450" indent="-171450">
+              <a:lnSpc>
+                <a:spcPct val="150000"/>
+              </a:lnSpc>
+              <a:buFont typeface="Arial" panose="020B0604020202020204" pitchFamily="34" charset="0"/>
+              <a:buChar char="•"/>
+            </a:pPr>
+            <a:r>
+              <a:rPr kumimoji="1" lang="ko-KR" altLang="en-US" sz="1100" dirty="0">
+                <a:latin typeface="프리젠테이션 4 Regular" pitchFamily="2" charset="-127"/>
+                <a:ea typeface="프리젠테이션 4 Regular" pitchFamily="2" charset="-127"/>
+              </a:rPr>
+              <a:t>업무 효율성 향상</a:t>
+            </a:r>
+            <a:r>
+              <a:rPr kumimoji="1" lang="en-US" altLang="ko-KR" sz="1100" dirty="0">
+                <a:latin typeface="프리젠테이션 4 Regular" pitchFamily="2" charset="-127"/>
+                <a:ea typeface="프리젠테이션 4 Regular" pitchFamily="2" charset="-127"/>
+              </a:rPr>
+              <a:t>:</a:t>
+            </a:r>
+            <a:r>
+              <a:rPr kumimoji="1" lang="ko-KR" altLang="en-US" sz="1100" dirty="0">
+                <a:latin typeface="프리젠테이션 4 Regular" pitchFamily="2" charset="-127"/>
+                <a:ea typeface="프리젠테이션 4 Regular" pitchFamily="2" charset="-127"/>
+              </a:rPr>
+              <a:t> 후처리 시간 감소 및 고객 응대에 대한 집중도 향상</a:t>
+            </a:r>
+          </a:p>
+          <a:p>
+            <a:pPr marL="171450" indent="-171450">
+              <a:lnSpc>
+                <a:spcPct val="150000"/>
+              </a:lnSpc>
+              <a:buFont typeface="Arial" panose="020B0604020202020204" pitchFamily="34" charset="0"/>
+              <a:buChar char="•"/>
+            </a:pPr>
+            <a:r>
+              <a:rPr kumimoji="1" lang="ko-KR" altLang="en-US" sz="1100" dirty="0">
+                <a:latin typeface="프리젠테이션 4 Regular" pitchFamily="2" charset="-127"/>
+                <a:ea typeface="프리젠테이션 4 Regular" pitchFamily="2" charset="-127"/>
+              </a:rPr>
+              <a:t>품질 개선 </a:t>
+            </a:r>
+            <a:r>
+              <a:rPr kumimoji="1" lang="en-US" altLang="ko-KR" sz="1100" dirty="0">
+                <a:latin typeface="프리젠테이션 4 Regular" pitchFamily="2" charset="-127"/>
+                <a:ea typeface="프리젠테이션 4 Regular" pitchFamily="2" charset="-127"/>
+              </a:rPr>
+              <a:t>:</a:t>
+            </a:r>
+            <a:r>
+              <a:rPr kumimoji="1" lang="ko-KR" altLang="en-US" sz="1100" dirty="0">
+                <a:latin typeface="프리젠테이션 4 Regular" pitchFamily="2" charset="-127"/>
+                <a:ea typeface="프리젠테이션 4 Regular" pitchFamily="2" charset="-127"/>
+              </a:rPr>
+              <a:t> </a:t>
+            </a:r>
+            <a:r>
+              <a:rPr kumimoji="1" lang="ko-KR" altLang="en-US" sz="1100" dirty="0" err="1">
+                <a:latin typeface="프리젠테이션 4 Regular" pitchFamily="2" charset="-127"/>
+                <a:ea typeface="프리젠테이션 4 Regular" pitchFamily="2" charset="-127"/>
+              </a:rPr>
+              <a:t>대화요약에</a:t>
+            </a:r>
+            <a:r>
+              <a:rPr kumimoji="1" lang="ko-KR" altLang="en-US" sz="1100" dirty="0">
+                <a:latin typeface="프리젠테이션 4 Regular" pitchFamily="2" charset="-127"/>
+                <a:ea typeface="프리젠테이션 4 Regular" pitchFamily="2" charset="-127"/>
+              </a:rPr>
+              <a:t> 대한 일관성과 신뢰도 증가 </a:t>
+            </a:r>
+          </a:p>
+          <a:p>
+            <a:pPr marL="171450" indent="-171450">
+              <a:lnSpc>
+                <a:spcPct val="150000"/>
+              </a:lnSpc>
+              <a:buFont typeface="Arial" panose="020B0604020202020204" pitchFamily="34" charset="0"/>
+              <a:buChar char="•"/>
+            </a:pPr>
+            <a:r>
+              <a:rPr kumimoji="1" lang="ko-KR" altLang="en-US" sz="1100" dirty="0">
+                <a:latin typeface="프리젠테이션 4 Regular" pitchFamily="2" charset="-127"/>
+                <a:ea typeface="프리젠테이션 4 Regular" pitchFamily="2" charset="-127"/>
+              </a:rPr>
+              <a:t>비즈니스 성과 </a:t>
+            </a:r>
+            <a:r>
+              <a:rPr kumimoji="1" lang="en-US" altLang="ko-KR" sz="1100" dirty="0">
+                <a:latin typeface="프리젠테이션 4 Regular" pitchFamily="2" charset="-127"/>
+                <a:ea typeface="프리젠테이션 4 Regular" pitchFamily="2" charset="-127"/>
+              </a:rPr>
+              <a:t>:</a:t>
+            </a:r>
+            <a:r>
+              <a:rPr kumimoji="1" lang="ko-KR" altLang="en-US" sz="1100" dirty="0">
+                <a:latin typeface="프리젠테이션 4 Regular" pitchFamily="2" charset="-127"/>
+                <a:ea typeface="프리젠테이션 4 Regular" pitchFamily="2" charset="-127"/>
+              </a:rPr>
+              <a:t> </a:t>
+            </a:r>
+            <a:r>
+              <a:rPr kumimoji="1" lang="ko-KR" altLang="en-US" sz="1100" dirty="0" err="1">
+                <a:latin typeface="프리젠테이션 4 Regular" pitchFamily="2" charset="-127"/>
+                <a:ea typeface="프리젠테이션 4 Regular" pitchFamily="2" charset="-127"/>
+              </a:rPr>
+              <a:t>상담사</a:t>
+            </a:r>
+            <a:r>
+              <a:rPr kumimoji="1" lang="ko-KR" altLang="en-US" sz="1100" dirty="0">
+                <a:latin typeface="프리젠테이션 4 Regular" pitchFamily="2" charset="-127"/>
+                <a:ea typeface="프리젠테이션 4 Regular" pitchFamily="2" charset="-127"/>
+              </a:rPr>
+              <a:t> 업무 처리량 증가 및 고객 대기 시간 감소</a:t>
+            </a:r>
+          </a:p>
+        </p:txBody>
+      </p:sp>
+      <p:sp>
+        <p:nvSpPr>
+          <p:cNvPr id="72" name="직사각형 71"/>
+          <p:cNvSpPr/>
+          <p:nvPr/>
+        </p:nvSpPr>
+        <p:spPr>
+          <a:xfrm>
+            <a:off x="344974" y="1581170"/>
+            <a:ext cx="4943151" cy="4949482"/>
+          </a:xfrm>
+          <a:prstGeom prst="rect">
+            <a:avLst/>
+          </a:prstGeom>
+          <a:solidFill>
+            <a:schemeClr val="bg1">
+              <a:lumMod val="95000"/>
+              <a:alpha val="60000"/>
+            </a:schemeClr>
+          </a:solidFill>
+          <a:ln>
+            <a:noFill/>
+          </a:ln>
+        </p:spPr>
+        <p:style>
+          <a:lnRef idx="2">
+            <a:schemeClr val="accent1">
+              <a:shade val="50000"/>
+            </a:schemeClr>
+          </a:lnRef>
+          <a:fillRef idx="1">
+            <a:schemeClr val="accent1"/>
+          </a:fillRef>
+          <a:effectRef idx="0">
+            <a:schemeClr val="accent1"/>
+          </a:effectRef>
+          <a:fontRef idx="minor">
+            <a:schemeClr val="lt1"/>
+          </a:fontRef>
+        </p:style>
+        <p:txBody>
+          <a:bodyPr rtlCol="0" anchor="ctr"/>
+          <a:lstStyle/>
+          <a:p>
+            <a:pPr algn="ctr">
+              <a:lnSpc>
+                <a:spcPct val="130000"/>
+              </a:lnSpc>
+            </a:pPr>
+            <a:r>
+              <a:rPr lang="ko-KR" altLang="en-US" sz="4400" dirty="0">
+                <a:solidFill>
+                  <a:schemeClr val="bg2">
+                    <a:lumMod val="10000"/>
+                  </a:schemeClr>
+                </a:solidFill>
+                <a:latin typeface="프리젠테이션 7 Bold" pitchFamily="2" charset="-127"/>
+                <a:ea typeface="프리젠테이션 7 Bold" pitchFamily="2" charset="-127"/>
+              </a:rPr>
+              <a:t>이미지</a:t>
+            </a:r>
+            <a:r>
+              <a:rPr lang="en-US" altLang="ko-KR" sz="4400" dirty="0">
+                <a:solidFill>
+                  <a:schemeClr val="bg2">
+                    <a:lumMod val="10000"/>
+                  </a:schemeClr>
+                </a:solidFill>
+                <a:latin typeface="프리젠테이션 7 Bold" pitchFamily="2" charset="-127"/>
+                <a:ea typeface="프리젠테이션 7 Bold" pitchFamily="2" charset="-127"/>
+              </a:rPr>
+              <a:t>, </a:t>
+            </a:r>
+            <a:r>
+              <a:rPr lang="ko-KR" altLang="en-US" sz="4400" dirty="0">
+                <a:solidFill>
+                  <a:schemeClr val="bg2">
+                    <a:lumMod val="10000"/>
+                  </a:schemeClr>
+                </a:solidFill>
+                <a:latin typeface="프리젠테이션 7 Bold" pitchFamily="2" charset="-127"/>
+                <a:ea typeface="프리젠테이션 7 Bold" pitchFamily="2" charset="-127"/>
+              </a:rPr>
+              <a:t>내용</a:t>
+            </a:r>
+          </a:p>
+        </p:txBody>
+      </p:sp>
+      <p:cxnSp>
+        <p:nvCxnSpPr>
+          <p:cNvPr id="34" name="직선 연결선 33"/>
+          <p:cNvCxnSpPr/>
+          <p:nvPr/>
+        </p:nvCxnSpPr>
+        <p:spPr>
+          <a:xfrm flipV="1">
+            <a:off x="5454815" y="3249791"/>
+            <a:ext cx="6461650" cy="21252"/>
+          </a:xfrm>
+          <a:prstGeom prst="line">
+            <a:avLst/>
+          </a:prstGeom>
+          <a:ln w="12700">
+            <a:solidFill>
+              <a:srgbClr val="4CB88F"/>
+            </a:solidFill>
+          </a:ln>
+        </p:spPr>
+        <p:style>
+          <a:lnRef idx="1">
+            <a:schemeClr val="accent1"/>
+          </a:lnRef>
+          <a:fillRef idx="0">
+            <a:schemeClr val="accent1"/>
+          </a:fillRef>
+          <a:effectRef idx="0">
+            <a:schemeClr val="accent1"/>
+          </a:effectRef>
+          <a:fontRef idx="minor">
+            <a:schemeClr val="tx1"/>
+          </a:fontRef>
+        </p:style>
+      </p:cxnSp>
+      <p:cxnSp>
+        <p:nvCxnSpPr>
+          <p:cNvPr id="35" name="직선 연결선 34"/>
+          <p:cNvCxnSpPr/>
+          <p:nvPr/>
+        </p:nvCxnSpPr>
+        <p:spPr>
+          <a:xfrm flipV="1">
+            <a:off x="5454815" y="4976991"/>
+            <a:ext cx="6461650" cy="21252"/>
+          </a:xfrm>
+          <a:prstGeom prst="line">
+            <a:avLst/>
+          </a:prstGeom>
+          <a:ln w="12700">
+            <a:solidFill>
+              <a:srgbClr val="EE8150"/>
+            </a:solidFill>
+          </a:ln>
+        </p:spPr>
+        <p:style>
+          <a:lnRef idx="1">
+            <a:schemeClr val="accent1"/>
+          </a:lnRef>
+          <a:fillRef idx="0">
+            <a:schemeClr val="accent1"/>
+          </a:fillRef>
+          <a:effectRef idx="0">
+            <a:schemeClr val="accent1"/>
+          </a:effectRef>
+          <a:fontRef idx="minor">
+            <a:schemeClr val="tx1"/>
+          </a:fontRef>
+        </p:style>
+      </p:cxnSp>
+      <p:sp>
+        <p:nvSpPr>
+          <p:cNvPr id="3" name="텍스트 개체 틀 2"/>
+          <p:cNvSpPr>
+            <a:spLocks noGrp="1"/>
+          </p:cNvSpPr>
+          <p:nvPr>
+            <p:ph type="body" sz="quarter" idx="10"/>
+          </p:nvPr>
+        </p:nvSpPr>
+        <p:spPr/>
+        <p:txBody>
+          <a:bodyPr/>
+          <a:lstStyle/>
+          <a:p>
+            <a:endParaRPr lang="ko-KR" altLang="en-US"/>
+          </a:p>
+        </p:txBody>
+      </p:sp>
+      <p:sp>
+        <p:nvSpPr>
+          <p:cNvPr id="18" name="TextBox 17"/>
+          <p:cNvSpPr txBox="1"/>
+          <p:nvPr/>
+        </p:nvSpPr>
+        <p:spPr>
+          <a:xfrm>
+            <a:off x="354806" y="557906"/>
+            <a:ext cx="2720317" cy="932614"/>
+          </a:xfrm>
+          <a:prstGeom prst="rect">
+            <a:avLst/>
+          </a:prstGeom>
+          <a:noFill/>
+        </p:spPr>
+        <p:txBody>
+          <a:bodyPr wrap="square" lIns="0" tIns="0" rIns="0" bIns="0" rtlCol="0" anchor="t" anchorCtr="0">
+            <a:noAutofit/>
+          </a:bodyPr>
+          <a:lstStyle/>
+          <a:p>
+            <a:r>
+              <a:rPr lang="ko-KR" altLang="en-US" sz="2000" dirty="0" err="1">
+                <a:latin typeface="프리젠테이션 7 Bold" pitchFamily="2" charset="-127"/>
+                <a:ea typeface="프리젠테이션 7 Bold" pitchFamily="2" charset="-127"/>
+                <a:cs typeface="Pretendard ExtraBold" panose="02000903000000020004" pitchFamily="2" charset="-127"/>
+              </a:rPr>
+              <a:t>L17-1. Image Left-1</a:t>
+            </a:r>
+          </a:p>
+        </p:txBody>
+      </p:sp>
+      <p:sp>
+        <p:nvSpPr>
+          <p:cNvPr id="19" name="TextBox 18"/>
+          <p:cNvSpPr txBox="1"/>
+          <p:nvPr/>
+        </p:nvSpPr>
+        <p:spPr>
+          <a:xfrm>
+            <a:off x="3763700" y="558800"/>
+            <a:ext cx="7551483" cy="937918"/>
+          </a:xfrm>
+          <a:prstGeom prst="rect">
+            <a:avLst/>
+          </a:prstGeom>
+          <a:noFill/>
+        </p:spPr>
+        <p:txBody>
+          <a:bodyPr wrap="square" lIns="0" tIns="0" rIns="0" bIns="0" rtlCol="0" anchor="t" anchorCtr="0">
+            <a:noAutofit/>
+          </a:bodyPr>
+          <a:lstStyle/>
+          <a:p>
+            <a:pPr latinLnBrk="0">
+              <a:lnSpc>
+                <a:spcPct val="150000"/>
+              </a:lnSpc>
+            </a:pPr>
+            <a:r>
+              <a:rPr lang="ko-KR" altLang="en-US" sz="1200" dirty="0" err="1">
+                <a:ln>
+                  <a:solidFill>
+                    <a:schemeClr val="accent1">
+                      <a:alpha val="0"/>
+                    </a:schemeClr>
+                  </a:solidFill>
+                </a:ln>
+                <a:solidFill>
+                  <a:schemeClr val="tx1">
+                    <a:lumMod val="75000"/>
+                    <a:lumOff val="25000"/>
+                  </a:schemeClr>
+                </a:solidFill>
+                <a:latin typeface="프리젠테이션 5 Medium" pitchFamily="2" charset="-127"/>
+                <a:ea typeface="프리젠테이션 5 Medium" pitchFamily="2" charset="-127"/>
+                <a:cs typeface="Pretendard" panose="02000503000000020004" pitchFamily="2" charset="-127"/>
+              </a:rPr>
+              <a:t>설명글을</a:t>
+            </a:r>
+            <a:r>
+              <a:rPr lang="ko-KR" altLang="en-US" sz="1200" dirty="0">
+                <a:ln>
+                  <a:solidFill>
+                    <a:schemeClr val="accent1">
+                      <a:alpha val="0"/>
+                    </a:schemeClr>
+                  </a:solidFill>
+                </a:ln>
+                <a:solidFill>
+                  <a:schemeClr val="tx1">
+                    <a:lumMod val="75000"/>
+                    <a:lumOff val="25000"/>
+                  </a:schemeClr>
+                </a:solidFill>
+                <a:latin typeface="프리젠테이션 5 Medium" pitchFamily="2" charset="-127"/>
+                <a:ea typeface="프리젠테이션 5 Medium" pitchFamily="2" charset="-127"/>
+                <a:cs typeface="Pretendard" panose="02000503000000020004" pitchFamily="2" charset="-127"/>
+              </a:rPr>
+              <a:t> 적어주세요</a:t>
+            </a:r>
+            <a:r>
+              <a:rPr lang="en-US" altLang="ko-KR" sz="1200" b="1" dirty="0">
+                <a:ln>
+                  <a:solidFill>
+                    <a:schemeClr val="accent1">
+                      <a:alpha val="0"/>
+                    </a:schemeClr>
+                  </a:solidFill>
+                </a:ln>
+                <a:solidFill>
+                  <a:schemeClr val="tx1">
+                    <a:lumMod val="75000"/>
+                    <a:lumOff val="25000"/>
+                  </a:schemeClr>
+                </a:solidFill>
+                <a:latin typeface="프리젠테이션 5 Medium" pitchFamily="2" charset="-127"/>
+                <a:ea typeface="프리젠테이션 5 Medium" pitchFamily="2" charset="-127"/>
+                <a:cs typeface="Pretendard" panose="02000503000000020004" pitchFamily="2" charset="-127"/>
+              </a:rPr>
+              <a:t>. </a:t>
+            </a:r>
+            <a:r>
+              <a:rPr lang="ko-KR" altLang="en-US" sz="1200" b="1" dirty="0">
+                <a:ln>
+                  <a:solidFill>
+                    <a:schemeClr val="accent1">
+                      <a:alpha val="0"/>
+                    </a:schemeClr>
+                  </a:solidFill>
+                </a:ln>
+                <a:solidFill>
+                  <a:srgbClr val="0043DA"/>
+                </a:solidFill>
+                <a:latin typeface="프리젠테이션 7 Bold" pitchFamily="2" charset="-127"/>
+                <a:ea typeface="프리젠테이션 7 Bold" pitchFamily="2" charset="-127"/>
+                <a:cs typeface="Pretendard" panose="02000503000000020004" pitchFamily="2" charset="-127"/>
+              </a:rPr>
+              <a:t>강조 텍스트</a:t>
+            </a:r>
+            <a:r>
+              <a:rPr lang="en-US" altLang="ko-KR" sz="1200" b="1" dirty="0">
+                <a:ln>
+                  <a:solidFill>
+                    <a:schemeClr val="accent1">
+                      <a:alpha val="0"/>
+                    </a:schemeClr>
+                  </a:solidFill>
+                </a:ln>
+                <a:solidFill>
+                  <a:srgbClr val="0043DA"/>
+                </a:solidFill>
+                <a:latin typeface="프리젠테이션 7 Bold" pitchFamily="2" charset="-127"/>
+                <a:ea typeface="프리젠테이션 7 Bold" pitchFamily="2" charset="-127"/>
+                <a:cs typeface="Pretendard" panose="02000503000000020004" pitchFamily="2" charset="-127"/>
+              </a:rPr>
+              <a:t>(</a:t>
+            </a:r>
+            <a:r>
+              <a:rPr lang="ko-KR" altLang="en-US" sz="1200" b="1" dirty="0" err="1">
+                <a:ln>
+                  <a:solidFill>
+                    <a:schemeClr val="accent1">
+                      <a:alpha val="0"/>
+                    </a:schemeClr>
+                  </a:solidFill>
+                </a:ln>
+                <a:solidFill>
+                  <a:srgbClr val="0043DA"/>
+                </a:solidFill>
+                <a:latin typeface="프리젠테이션 7 Bold" pitchFamily="2" charset="-127"/>
+                <a:ea typeface="프리젠테이션 7 Bold" pitchFamily="2" charset="-127"/>
+                <a:cs typeface="Pretendard" panose="02000503000000020004" pitchFamily="2" charset="-127"/>
+              </a:rPr>
+              <a:t>프리젠테이션</a:t>
+            </a:r>
+            <a:r>
+              <a:rPr lang="ko-KR" altLang="en-US" sz="1200" b="1" dirty="0">
+                <a:ln>
+                  <a:solidFill>
+                    <a:schemeClr val="accent1">
+                      <a:alpha val="0"/>
+                    </a:schemeClr>
+                  </a:solidFill>
+                </a:ln>
+                <a:solidFill>
+                  <a:srgbClr val="0043DA"/>
+                </a:solidFill>
+                <a:latin typeface="프리젠테이션 7 Bold" pitchFamily="2" charset="-127"/>
+                <a:ea typeface="프리젠테이션 7 Bold" pitchFamily="2" charset="-127"/>
+                <a:cs typeface="Pretendard" panose="02000503000000020004" pitchFamily="2" charset="-127"/>
+              </a:rPr>
+              <a:t> </a:t>
+            </a:r>
+            <a:r>
+              <a:rPr lang="en-US" altLang="ko-KR" sz="1200" b="1" dirty="0">
+                <a:ln>
+                  <a:solidFill>
+                    <a:schemeClr val="accent1">
+                      <a:alpha val="0"/>
+                    </a:schemeClr>
+                  </a:solidFill>
+                </a:ln>
+                <a:solidFill>
+                  <a:srgbClr val="0043DA"/>
+                </a:solidFill>
+                <a:latin typeface="프리젠테이션 7 Bold" pitchFamily="2" charset="-127"/>
+                <a:ea typeface="프리젠테이션 7 Bold" pitchFamily="2" charset="-127"/>
+                <a:cs typeface="Pretendard" panose="02000503000000020004" pitchFamily="2" charset="-127"/>
+              </a:rPr>
+              <a:t>7 Bold, </a:t>
+            </a:r>
+            <a:r>
+              <a:rPr lang="ko-KR" altLang="en-US" sz="1200" b="1" dirty="0">
+                <a:ln>
+                  <a:solidFill>
+                    <a:schemeClr val="accent1">
+                      <a:alpha val="0"/>
+                    </a:schemeClr>
+                  </a:solidFill>
+                </a:ln>
+                <a:solidFill>
+                  <a:srgbClr val="0043DA"/>
+                </a:solidFill>
+                <a:latin typeface="프리젠테이션 7 Bold" pitchFamily="2" charset="-127"/>
+                <a:ea typeface="프리젠테이션 7 Bold" pitchFamily="2" charset="-127"/>
+                <a:cs typeface="Pretendard" panose="02000503000000020004" pitchFamily="2" charset="-127"/>
+              </a:rPr>
+              <a:t>메인 컬러</a:t>
+            </a:r>
+            <a:r>
+              <a:rPr lang="en-US" altLang="ko-KR" sz="1200" b="1" dirty="0" smtClean="0">
+                <a:ln>
+                  <a:solidFill>
+                    <a:schemeClr val="accent1">
+                      <a:alpha val="0"/>
+                    </a:schemeClr>
+                  </a:solidFill>
+                </a:ln>
+                <a:solidFill>
+                  <a:srgbClr val="0043DA"/>
+                </a:solidFill>
+                <a:latin typeface="프리젠테이션 7 Bold" pitchFamily="2" charset="-127"/>
+                <a:ea typeface="프리젠테이션 7 Bold" pitchFamily="2" charset="-127"/>
+                <a:cs typeface="Pretendard" panose="02000503000000020004" pitchFamily="2" charset="-127"/>
+              </a:rPr>
+              <a:t>)</a:t>
+            </a:r>
+          </a:p>
+          <a:p>
+            <a:pPr latinLnBrk="0">
+              <a:lnSpc>
+                <a:spcPct val="150000"/>
+              </a:lnSpc>
+            </a:pPr>
+            <a:r>
+              <a:rPr lang="ko-KR" altLang="en-US" sz="1200" dirty="0" smtClean="0">
+                <a:ln>
+                  <a:solidFill>
+                    <a:schemeClr val="accent1">
+                      <a:alpha val="0"/>
+                    </a:schemeClr>
+                  </a:solidFill>
+                </a:ln>
+                <a:solidFill>
+                  <a:schemeClr val="tx1">
+                    <a:lumMod val="75000"/>
+                    <a:lumOff val="25000"/>
+                  </a:schemeClr>
+                </a:solidFill>
+                <a:latin typeface="프리젠테이션 5 Medium" pitchFamily="2" charset="-127"/>
+                <a:ea typeface="프리젠테이션 5 Medium" pitchFamily="2" charset="-127"/>
+                <a:cs typeface="Pretendard" panose="02000503000000020004" pitchFamily="2" charset="-127"/>
+              </a:rPr>
+              <a:t>폰트 </a:t>
+            </a:r>
+            <a:r>
+              <a:rPr lang="en-US" altLang="ko-KR" sz="1200" dirty="0" smtClean="0">
+                <a:ln>
+                  <a:solidFill>
+                    <a:schemeClr val="accent1">
+                      <a:alpha val="0"/>
+                    </a:schemeClr>
+                  </a:solidFill>
+                </a:ln>
+                <a:solidFill>
+                  <a:schemeClr val="tx1">
+                    <a:lumMod val="75000"/>
+                    <a:lumOff val="25000"/>
+                  </a:schemeClr>
+                </a:solidFill>
+                <a:latin typeface="프리젠테이션 5 Medium" pitchFamily="2" charset="-127"/>
+                <a:ea typeface="프리젠테이션 5 Medium" pitchFamily="2" charset="-127"/>
+                <a:cs typeface="Pretendard" panose="02000503000000020004" pitchFamily="2" charset="-127"/>
+              </a:rPr>
+              <a:t>: </a:t>
+            </a:r>
+            <a:r>
+              <a:rPr lang="ko-KR" altLang="en-US" sz="1200" dirty="0" err="1" smtClean="0">
+                <a:ln>
+                  <a:solidFill>
+                    <a:schemeClr val="accent1">
+                      <a:alpha val="0"/>
+                    </a:schemeClr>
+                  </a:solidFill>
+                </a:ln>
+                <a:solidFill>
+                  <a:schemeClr val="tx1">
+                    <a:lumMod val="75000"/>
+                    <a:lumOff val="25000"/>
+                  </a:schemeClr>
+                </a:solidFill>
+                <a:latin typeface="프리젠테이션 5 Medium" pitchFamily="2" charset="-127"/>
+                <a:ea typeface="프리젠테이션 5 Medium" pitchFamily="2" charset="-127"/>
+                <a:cs typeface="Pretendard" panose="02000503000000020004" pitchFamily="2" charset="-127"/>
+              </a:rPr>
+              <a:t>프리젠테이션</a:t>
+            </a:r>
+            <a:r>
+              <a:rPr lang="ko-KR" altLang="en-US" sz="1200" dirty="0" smtClean="0">
+                <a:ln>
+                  <a:solidFill>
+                    <a:schemeClr val="accent1">
+                      <a:alpha val="0"/>
+                    </a:schemeClr>
+                  </a:solidFill>
+                </a:ln>
+                <a:solidFill>
+                  <a:schemeClr val="tx1">
+                    <a:lumMod val="75000"/>
+                    <a:lumOff val="25000"/>
+                  </a:schemeClr>
+                </a:solidFill>
+                <a:latin typeface="프리젠테이션 5 Medium" pitchFamily="2" charset="-127"/>
+                <a:ea typeface="프리젠테이션 5 Medium" pitchFamily="2" charset="-127"/>
+                <a:cs typeface="Pretendard" panose="02000503000000020004" pitchFamily="2" charset="-127"/>
+              </a:rPr>
+              <a:t> </a:t>
+            </a:r>
+            <a:r>
+              <a:rPr lang="en-US" altLang="ko-KR" sz="1200" dirty="0" smtClean="0">
+                <a:ln>
+                  <a:solidFill>
+                    <a:schemeClr val="accent1">
+                      <a:alpha val="0"/>
+                    </a:schemeClr>
+                  </a:solidFill>
+                </a:ln>
+                <a:solidFill>
+                  <a:schemeClr val="tx1">
+                    <a:lumMod val="75000"/>
+                    <a:lumOff val="25000"/>
+                  </a:schemeClr>
+                </a:solidFill>
+                <a:latin typeface="프리젠테이션 5 Medium" pitchFamily="2" charset="-127"/>
+                <a:ea typeface="프리젠테이션 5 Medium" pitchFamily="2" charset="-127"/>
+                <a:cs typeface="Pretendard" panose="02000503000000020004" pitchFamily="2" charset="-127"/>
+              </a:rPr>
+              <a:t>5 Medium 12pt  </a:t>
+            </a:r>
+            <a:r>
+              <a:rPr lang="ko-KR" altLang="en-US" sz="1200" dirty="0" smtClean="0">
+                <a:ln>
+                  <a:solidFill>
+                    <a:schemeClr val="accent1">
+                      <a:alpha val="0"/>
+                    </a:schemeClr>
+                  </a:solidFill>
+                </a:ln>
+                <a:solidFill>
+                  <a:schemeClr val="tx1">
+                    <a:lumMod val="75000"/>
+                    <a:lumOff val="25000"/>
+                  </a:schemeClr>
+                </a:solidFill>
+                <a:latin typeface="프리젠테이션 5 Medium" pitchFamily="2" charset="-127"/>
+                <a:ea typeface="프리젠테이션 5 Medium" pitchFamily="2" charset="-127"/>
+                <a:cs typeface="Pretendard" panose="02000503000000020004" pitchFamily="2" charset="-127"/>
+              </a:rPr>
+              <a:t>최대 </a:t>
+            </a:r>
+            <a:r>
+              <a:rPr lang="en-US" altLang="ko-KR" sz="1200" dirty="0" smtClean="0">
+                <a:ln>
+                  <a:solidFill>
+                    <a:schemeClr val="accent1">
+                      <a:alpha val="0"/>
+                    </a:schemeClr>
+                  </a:solidFill>
+                </a:ln>
+                <a:solidFill>
+                  <a:schemeClr val="tx1">
+                    <a:lumMod val="75000"/>
+                    <a:lumOff val="25000"/>
+                  </a:schemeClr>
+                </a:solidFill>
+                <a:latin typeface="프리젠테이션 5 Medium" pitchFamily="2" charset="-127"/>
+                <a:ea typeface="프리젠테이션 5 Medium" pitchFamily="2" charset="-127"/>
+                <a:cs typeface="Pretendard" panose="02000503000000020004" pitchFamily="2" charset="-127"/>
+              </a:rPr>
+              <a:t>3</a:t>
+            </a:r>
+            <a:r>
+              <a:rPr lang="ko-KR" altLang="en-US" sz="1200" dirty="0" smtClean="0">
+                <a:ln>
+                  <a:solidFill>
+                    <a:schemeClr val="accent1">
+                      <a:alpha val="0"/>
+                    </a:schemeClr>
+                  </a:solidFill>
+                </a:ln>
+                <a:solidFill>
+                  <a:schemeClr val="tx1">
+                    <a:lumMod val="75000"/>
+                    <a:lumOff val="25000"/>
+                  </a:schemeClr>
+                </a:solidFill>
+                <a:latin typeface="프리젠테이션 5 Medium" pitchFamily="2" charset="-127"/>
+                <a:ea typeface="프리젠테이션 5 Medium" pitchFamily="2" charset="-127"/>
+                <a:cs typeface="Pretendard" panose="02000503000000020004" pitchFamily="2" charset="-127"/>
+              </a:rPr>
+              <a:t>줄까지 작성 가능합니다</a:t>
+            </a:r>
+            <a:r>
+              <a:rPr lang="en-US" altLang="ko-KR" sz="1200" dirty="0" smtClean="0">
+                <a:ln>
+                  <a:solidFill>
+                    <a:schemeClr val="accent1">
+                      <a:alpha val="0"/>
+                    </a:schemeClr>
+                  </a:solidFill>
+                </a:ln>
+                <a:solidFill>
+                  <a:schemeClr val="tx1">
+                    <a:lumMod val="75000"/>
+                    <a:lumOff val="25000"/>
+                  </a:schemeClr>
+                </a:solidFill>
+                <a:latin typeface="프리젠테이션 5 Medium" pitchFamily="2" charset="-127"/>
+                <a:ea typeface="프리젠테이션 5 Medium" pitchFamily="2" charset="-127"/>
+                <a:cs typeface="Pretendard" panose="02000503000000020004" pitchFamily="2" charset="-127"/>
+              </a:rPr>
+              <a:t>.</a:t>
+            </a:r>
+            <a:endParaRPr lang="en-US" altLang="ko-KR" sz="1200" dirty="0">
+              <a:ln>
+                <a:solidFill>
+                  <a:schemeClr val="accent1">
+                    <a:alpha val="0"/>
+                  </a:schemeClr>
+                </a:solidFill>
+              </a:ln>
+              <a:solidFill>
+                <a:srgbClr val="2765E1"/>
+              </a:solidFill>
+              <a:latin typeface="프리젠테이션 5 Medium" pitchFamily="2" charset="-127"/>
+              <a:ea typeface="프리젠테이션 5 Medium" pitchFamily="2" charset="-127"/>
+              <a:cs typeface="Pretendard" panose="02000503000000020004" pitchFamily="2" charset="-127"/>
+            </a:endParaRPr>
           </a:p>
         </p:txBody>
       </p:sp>
@@ -12264,6 +13409,49 @@
       <p:grpSpPr/>
       <p:sp>
         <p:nvSpPr>
+          <p:cNvPr id="5" name="Rectangle 4"/>
+          <p:cNvSpPr/>
+          <p:nvPr/>
+        </p:nvSpPr>
+        <p:spPr>
+          <a:xfrm>
+            <a:off x="0" y="1600200"/>
+            <a:ext cx="12192000" cy="5257800"/>
+          </a:xfrm>
+          <a:prstGeom prst="rect">
+            <a:avLst/>
+          </a:prstGeom>
+          <a:solidFill>
+            <a:srgbClr val="1A234E"/>
+          </a:solidFill>
+          <a:ln>
+            <a:noFill/>
+          </a:ln>
+        </p:spPr>
+        <p:style>
+          <a:lnRef idx="1">
+            <a:schemeClr val="accent1"/>
+          </a:lnRef>
+          <a:fillRef idx="3">
+            <a:schemeClr val="accent1"/>
+          </a:fillRef>
+          <a:effectRef idx="2">
+            <a:schemeClr val="accent1"/>
+          </a:effectRef>
+          <a:fontRef idx="minor">
+            <a:schemeClr val="lt1"/>
+          </a:fontRef>
+        </p:style>
+        <p:txBody>
+          <a:bodyPr rtlCol="0" anchor="ctr"/>
+          <a:lstStyle/>
+          <a:p>
+            <a:pPr algn="ctr"/>
+          </a:p>
+        </p:txBody>
+      </p:sp>
+      <p:sp>
+        <p:nvSpPr>
           <p:cNvPr id="2" name="Text Placeholder 1"/>
           <p:cNvSpPr>
             <a:spLocks noGrp="1"/>
@@ -12309,7 +13497,7 @@
                 </a:solidFill>
                 <a:latin typeface="Freesentation"/>
               </a:rPr>
-              <a:t>L19. Icon Grid</a:t>
+              <a:t>L18. Full Image</a:t>
             </a:r>
           </a:p>
         </p:txBody>
@@ -12344,91 +13532,21 @@
                 </a:solidFill>
                 <a:latin typeface="Freesentation"/>
               </a:rPr>
-              <a:t>아이콘 그리드 레이아웃 — 3×2 기술 스택 시각화</a:t>
-            </a:r>
-          </a:p>
-        </p:txBody>
-      </p:sp>
-      <p:sp>
-        <p:nvSpPr>
-          <p:cNvPr id="5" name="TextBox 4"/>
-          <p:cNvSpPr txBox="1"/>
-          <p:nvPr/>
-        </p:nvSpPr>
-        <p:spPr>
-          <a:xfrm>
-            <a:off x="457200" y="1600200"/>
-            <a:ext cx="11277600" cy="274320"/>
-          </a:xfrm>
-          <a:prstGeom prst="rect">
-            <a:avLst/>
-          </a:prstGeom>
-          <a:noFill/>
-        </p:spPr>
-        <p:txBody>
-          <a:bodyPr wrap="square">
-            <a:spAutoFit/>
-          </a:bodyPr>
-          <a:lstStyle/>
-          <a:p>
-            <a:pPr algn="l"/>
-            <a:r>
-              <a:rPr sz="1600" b="1">
-                <a:solidFill>
-                  <a:srgbClr val="0043DA"/>
-                </a:solidFill>
-                <a:latin typeface="Freesentation"/>
-              </a:rPr>
-              <a:t>AWS MSK 통합 기술 스택</a:t>
-            </a:r>
-          </a:p>
-        </p:txBody>
-      </p:sp>
-      <p:sp>
-        <p:nvSpPr>
-          <p:cNvPr id="6" name="TextBox 5"/>
-          <p:cNvSpPr txBox="1"/>
-          <p:nvPr/>
-        </p:nvSpPr>
-        <p:spPr>
-          <a:xfrm>
-            <a:off x="457200" y="1965960"/>
-            <a:ext cx="11277600" cy="228600"/>
-          </a:xfrm>
-          <a:prstGeom prst="rect">
-            <a:avLst/>
-          </a:prstGeom>
-          <a:noFill/>
-        </p:spPr>
-        <p:txBody>
-          <a:bodyPr wrap="square">
-            <a:spAutoFit/>
-          </a:bodyPr>
-          <a:lstStyle/>
-          <a:p>
-            <a:pPr algn="l"/>
-            <a:r>
-              <a:rPr sz="1300" b="0">
-                <a:solidFill>
-                  <a:srgbClr val="212121"/>
-                </a:solidFill>
-                <a:latin typeface="Freesentation"/>
-              </a:rPr>
-              <a:t>메시징 플랫폼 핵심 구성요소 (2026년 4월 기준)</a:t>
-            </a:r>
-          </a:p>
-        </p:txBody>
-      </p:sp>
-      <p:sp>
-        <p:nvSpPr>
-          <p:cNvPr id="7" name="Rounded Rectangle 6"/>
+              <a:t>풀와이드 이미지 레이아웃 — 배경 + 캡션 오버레이</a:t>
+            </a:r>
+          </a:p>
+        </p:txBody>
+      </p:sp>
+      <p:sp>
+        <p:nvSpPr>
+          <p:cNvPr id="6" name="Rounded Rectangle 5"/>
           <p:cNvSpPr/>
           <p:nvPr/>
         </p:nvSpPr>
         <p:spPr>
           <a:xfrm>
-            <a:off x="457200" y="2423160"/>
-            <a:ext cx="3566400" cy="1828800"/>
+            <a:off x="457200" y="1828800"/>
+            <a:ext cx="5486400" cy="1371600"/>
           </a:xfrm>
           <a:prstGeom prst="roundRect">
             <a:avLst>
@@ -12436,12 +13554,10 @@
             </a:avLst>
           </a:prstGeom>
           <a:solidFill>
-            <a:srgbClr val="F8F9FA"/>
+            <a:srgbClr val="212121"/>
           </a:solidFill>
-          <a:ln w="6350">
-            <a:solidFill>
-              <a:srgbClr val="DCDCDC"/>
-            </a:solidFill>
+          <a:ln>
+            <a:noFill/>
           </a:ln>
         </p:spPr>
         <p:style>
@@ -12466,40 +13582,16 @@
           </a:p>
         </p:txBody>
       </p:sp>
-      <p:pic>
-        <p:nvPicPr>
-          <p:cNvPr id="8" name="Picture 7" descr="image.png"/>
-          <p:cNvPicPr>
-            <a:picLocks noChangeAspect="1"/>
-          </p:cNvPicPr>
-          <p:nvPr/>
-        </p:nvPicPr>
-        <p:blipFill>
-          <a:blip r:embed="rId2"/>
-          <a:stretch>
-            <a:fillRect/>
-          </a:stretch>
-        </p:blipFill>
-        <p:spPr>
-          <a:xfrm>
-            <a:off x="731520" y="2697480"/>
-            <a:ext cx="548640" cy="548640"/>
-          </a:xfrm>
-          <a:prstGeom prst="rect">
-            <a:avLst/>
-          </a:prstGeom>
-        </p:spPr>
-      </p:pic>
-      <p:sp>
-        <p:nvSpPr>
-          <p:cNvPr id="9" name="TextBox 8"/>
+      <p:sp>
+        <p:nvSpPr>
+          <p:cNvPr id="7" name="TextBox 6"/>
           <p:cNvSpPr txBox="1"/>
           <p:nvPr/>
         </p:nvSpPr>
         <p:spPr>
           <a:xfrm>
-            <a:off x="1371600" y="2743200"/>
-            <a:ext cx="2631920" cy="365760"/>
+            <a:off x="640080" y="2011680"/>
+            <a:ext cx="5120640" cy="548640"/>
           </a:xfrm>
           <a:prstGeom prst="rect">
             <a:avLst/>
@@ -12514,27 +13606,27 @@
           <a:p>
             <a:pPr algn="l"/>
             <a:r>
-              <a:rPr sz="1400" b="1">
-                <a:solidFill>
-                  <a:srgbClr val="0043DA"/>
-                </a:solidFill>
-                <a:latin typeface="Freesentation"/>
-              </a:rPr>
-              <a:t>Apache Kafka</a:t>
-            </a:r>
-          </a:p>
-        </p:txBody>
-      </p:sp>
-      <p:sp>
-        <p:nvSpPr>
-          <p:cNvPr id="10" name="TextBox 9"/>
+              <a:rPr sz="2400" b="1">
+                <a:solidFill>
+                  <a:srgbClr val="FFFFFF"/>
+                </a:solidFill>
+                <a:latin typeface="Freesentation"/>
+              </a:rPr>
+              <a:t>AWS MSK 클라우드 전환 전략 2026</a:t>
+            </a:r>
+          </a:p>
+        </p:txBody>
+      </p:sp>
+      <p:sp>
+        <p:nvSpPr>
+          <p:cNvPr id="8" name="TextBox 7"/>
           <p:cNvSpPr txBox="1"/>
           <p:nvPr/>
         </p:nvSpPr>
         <p:spPr>
           <a:xfrm>
-            <a:off x="731520" y="3429000"/>
-            <a:ext cx="3180080" cy="548640"/>
+            <a:off x="640080" y="2651760"/>
+            <a:ext cx="5120640" cy="365760"/>
           </a:xfrm>
           <a:prstGeom prst="rect">
             <a:avLst/>
@@ -12549,718 +13641,13 @@
           <a:p>
             <a:pPr algn="l"/>
             <a:r>
-              <a:rPr sz="1300" b="0">
-                <a:solidFill>
-                  <a:srgbClr val="212121"/>
-                </a:solidFill>
-                <a:latin typeface="Freesentation"/>
-              </a:rPr>
-              <a:t>분산 스트리밍 플랫폼 — 메시지 브로커 코어</a:t>
-            </a:r>
-          </a:p>
-        </p:txBody>
-      </p:sp>
-      <p:sp>
-        <p:nvSpPr>
-          <p:cNvPr id="11" name="Rounded Rectangle 10"/>
-          <p:cNvSpPr/>
-          <p:nvPr/>
-        </p:nvSpPr>
-        <p:spPr>
-          <a:xfrm>
-            <a:off x="4312800" y="2423160"/>
-            <a:ext cx="3566400" cy="1828800"/>
-          </a:xfrm>
-          <a:prstGeom prst="roundRect">
-            <a:avLst>
-              <a:gd name="adj" fmla="val 16667"/>
-            </a:avLst>
-          </a:prstGeom>
-          <a:solidFill>
-            <a:srgbClr val="F8F9FA"/>
-          </a:solidFill>
-          <a:ln w="6350">
-            <a:solidFill>
-              <a:srgbClr val="DCDCDC"/>
-            </a:solidFill>
-          </a:ln>
-        </p:spPr>
-        <p:style>
-          <a:lnRef idx="1">
-            <a:schemeClr val="accent1"/>
-          </a:lnRef>
-          <a:fillRef idx="3">
-            <a:schemeClr val="accent1"/>
-          </a:fillRef>
-          <a:effectRef idx="2">
-            <a:schemeClr val="accent1"/>
-          </a:effectRef>
-          <a:fontRef idx="minor">
-            <a:schemeClr val="lt1"/>
-          </a:fontRef>
-        </p:style>
-        <p:txBody>
-          <a:bodyPr rtlCol="0" anchor="ctr"/>
-          <a:lstStyle/>
-          <a:p>
-            <a:pPr algn="ctr"/>
-          </a:p>
-        </p:txBody>
-      </p:sp>
-      <p:pic>
-        <p:nvPicPr>
-          <p:cNvPr id="12" name="Picture 11" descr="image.png"/>
-          <p:cNvPicPr>
-            <a:picLocks noChangeAspect="1"/>
-          </p:cNvPicPr>
-          <p:nvPr/>
-        </p:nvPicPr>
-        <p:blipFill>
-          <a:blip r:embed="rId3"/>
-          <a:stretch>
-            <a:fillRect/>
-          </a:stretch>
-        </p:blipFill>
-        <p:spPr>
-          <a:xfrm>
-            <a:off x="4587120" y="2697480"/>
-            <a:ext cx="548640" cy="548640"/>
-          </a:xfrm>
-          <a:prstGeom prst="rect">
-            <a:avLst/>
-          </a:prstGeom>
-        </p:spPr>
-      </p:pic>
-      <p:sp>
-        <p:nvSpPr>
-          <p:cNvPr id="13" name="TextBox 12"/>
-          <p:cNvSpPr txBox="1"/>
-          <p:nvPr/>
-        </p:nvSpPr>
-        <p:spPr>
-          <a:xfrm>
-            <a:off x="5227200" y="2743200"/>
-            <a:ext cx="2631920" cy="365760"/>
-          </a:xfrm>
-          <a:prstGeom prst="rect">
-            <a:avLst/>
-          </a:prstGeom>
-          <a:noFill/>
-        </p:spPr>
-        <p:txBody>
-          <a:bodyPr wrap="square">
-            <a:spAutoFit/>
-          </a:bodyPr>
-          <a:lstStyle/>
-          <a:p>
-            <a:pPr algn="l"/>
-            <a:r>
-              <a:rPr sz="1400" b="1">
-                <a:solidFill>
-                  <a:srgbClr val="0043DA"/>
-                </a:solidFill>
-                <a:latin typeface="Freesentation"/>
-              </a:rPr>
-              <a:t>Zookeeper</a:t>
-            </a:r>
-          </a:p>
-        </p:txBody>
-      </p:sp>
-      <p:sp>
-        <p:nvSpPr>
-          <p:cNvPr id="14" name="TextBox 13"/>
-          <p:cNvSpPr txBox="1"/>
-          <p:nvPr/>
-        </p:nvSpPr>
-        <p:spPr>
-          <a:xfrm>
-            <a:off x="4587120" y="3429000"/>
-            <a:ext cx="3180080" cy="548640"/>
-          </a:xfrm>
-          <a:prstGeom prst="rect">
-            <a:avLst/>
-          </a:prstGeom>
-          <a:noFill/>
-        </p:spPr>
-        <p:txBody>
-          <a:bodyPr wrap="square">
-            <a:spAutoFit/>
-          </a:bodyPr>
-          <a:lstStyle/>
-          <a:p>
-            <a:pPr algn="l"/>
-            <a:r>
-              <a:rPr sz="1300" b="0">
-                <a:solidFill>
-                  <a:srgbClr val="212121"/>
-                </a:solidFill>
-                <a:latin typeface="Freesentation"/>
-              </a:rPr>
-              <a:t>클러스터 메타데이터 관리 (KRaft 전환 가능)</a:t>
-            </a:r>
-          </a:p>
-        </p:txBody>
-      </p:sp>
-      <p:sp>
-        <p:nvSpPr>
-          <p:cNvPr id="15" name="Rounded Rectangle 14"/>
-          <p:cNvSpPr/>
-          <p:nvPr/>
-        </p:nvSpPr>
-        <p:spPr>
-          <a:xfrm>
-            <a:off x="8168400" y="2423160"/>
-            <a:ext cx="3566400" cy="1828800"/>
-          </a:xfrm>
-          <a:prstGeom prst="roundRect">
-            <a:avLst>
-              <a:gd name="adj" fmla="val 16667"/>
-            </a:avLst>
-          </a:prstGeom>
-          <a:solidFill>
-            <a:srgbClr val="F8F9FA"/>
-          </a:solidFill>
-          <a:ln w="6350">
-            <a:solidFill>
-              <a:srgbClr val="DCDCDC"/>
-            </a:solidFill>
-          </a:ln>
-        </p:spPr>
-        <p:style>
-          <a:lnRef idx="1">
-            <a:schemeClr val="accent1"/>
-          </a:lnRef>
-          <a:fillRef idx="3">
-            <a:schemeClr val="accent1"/>
-          </a:fillRef>
-          <a:effectRef idx="2">
-            <a:schemeClr val="accent1"/>
-          </a:effectRef>
-          <a:fontRef idx="minor">
-            <a:schemeClr val="lt1"/>
-          </a:fontRef>
-        </p:style>
-        <p:txBody>
-          <a:bodyPr rtlCol="0" anchor="ctr"/>
-          <a:lstStyle/>
-          <a:p>
-            <a:pPr algn="ctr"/>
-          </a:p>
-        </p:txBody>
-      </p:sp>
-      <p:pic>
-        <p:nvPicPr>
-          <p:cNvPr id="16" name="Picture 15" descr="image.png"/>
-          <p:cNvPicPr>
-            <a:picLocks noChangeAspect="1"/>
-          </p:cNvPicPr>
-          <p:nvPr/>
-        </p:nvPicPr>
-        <p:blipFill>
-          <a:blip r:embed="rId4"/>
-          <a:stretch>
-            <a:fillRect/>
-          </a:stretch>
-        </p:blipFill>
-        <p:spPr>
-          <a:xfrm>
-            <a:off x="8442720" y="2697480"/>
-            <a:ext cx="548640" cy="548640"/>
-          </a:xfrm>
-          <a:prstGeom prst="rect">
-            <a:avLst/>
-          </a:prstGeom>
-        </p:spPr>
-      </p:pic>
-      <p:sp>
-        <p:nvSpPr>
-          <p:cNvPr id="17" name="TextBox 16"/>
-          <p:cNvSpPr txBox="1"/>
-          <p:nvPr/>
-        </p:nvSpPr>
-        <p:spPr>
-          <a:xfrm>
-            <a:off x="9082800" y="2743200"/>
-            <a:ext cx="2631920" cy="365760"/>
-          </a:xfrm>
-          <a:prstGeom prst="rect">
-            <a:avLst/>
-          </a:prstGeom>
-          <a:noFill/>
-        </p:spPr>
-        <p:txBody>
-          <a:bodyPr wrap="square">
-            <a:spAutoFit/>
-          </a:bodyPr>
-          <a:lstStyle/>
-          <a:p>
-            <a:pPr algn="l"/>
-            <a:r>
-              <a:rPr sz="1400" b="1">
-                <a:solidFill>
-                  <a:srgbClr val="0043DA"/>
-                </a:solidFill>
-                <a:latin typeface="Freesentation"/>
-              </a:rPr>
-              <a:t>Kafka Connect</a:t>
-            </a:r>
-          </a:p>
-        </p:txBody>
-      </p:sp>
-      <p:sp>
-        <p:nvSpPr>
-          <p:cNvPr id="18" name="TextBox 17"/>
-          <p:cNvSpPr txBox="1"/>
-          <p:nvPr/>
-        </p:nvSpPr>
-        <p:spPr>
-          <a:xfrm>
-            <a:off x="8442720" y="3429000"/>
-            <a:ext cx="3180080" cy="548640"/>
-          </a:xfrm>
-          <a:prstGeom prst="rect">
-            <a:avLst/>
-          </a:prstGeom>
-          <a:noFill/>
-        </p:spPr>
-        <p:txBody>
-          <a:bodyPr wrap="square">
-            <a:spAutoFit/>
-          </a:bodyPr>
-          <a:lstStyle/>
-          <a:p>
-            <a:pPr algn="l"/>
-            <a:r>
-              <a:rPr sz="1300" b="0">
-                <a:solidFill>
-                  <a:srgbClr val="212121"/>
-                </a:solidFill>
-                <a:latin typeface="Freesentation"/>
-              </a:rPr>
-              <a:t>Source/Sink 커넥터 — 외부 시스템 통합</a:t>
-            </a:r>
-          </a:p>
-        </p:txBody>
-      </p:sp>
-      <p:sp>
-        <p:nvSpPr>
-          <p:cNvPr id="19" name="Rounded Rectangle 18"/>
-          <p:cNvSpPr/>
-          <p:nvPr/>
-        </p:nvSpPr>
-        <p:spPr>
-          <a:xfrm>
-            <a:off x="457200" y="4434840"/>
-            <a:ext cx="3566400" cy="1828800"/>
-          </a:xfrm>
-          <a:prstGeom prst="roundRect">
-            <a:avLst>
-              <a:gd name="adj" fmla="val 16667"/>
-            </a:avLst>
-          </a:prstGeom>
-          <a:solidFill>
-            <a:srgbClr val="F8F9FA"/>
-          </a:solidFill>
-          <a:ln w="6350">
-            <a:solidFill>
-              <a:srgbClr val="DCDCDC"/>
-            </a:solidFill>
-          </a:ln>
-        </p:spPr>
-        <p:style>
-          <a:lnRef idx="1">
-            <a:schemeClr val="accent1"/>
-          </a:lnRef>
-          <a:fillRef idx="3">
-            <a:schemeClr val="accent1"/>
-          </a:fillRef>
-          <a:effectRef idx="2">
-            <a:schemeClr val="accent1"/>
-          </a:effectRef>
-          <a:fontRef idx="minor">
-            <a:schemeClr val="lt1"/>
-          </a:fontRef>
-        </p:style>
-        <p:txBody>
-          <a:bodyPr rtlCol="0" anchor="ctr"/>
-          <a:lstStyle/>
-          <a:p>
-            <a:pPr algn="ctr"/>
-          </a:p>
-        </p:txBody>
-      </p:sp>
-      <p:pic>
-        <p:nvPicPr>
-          <p:cNvPr id="20" name="Picture 19" descr="database.png"/>
-          <p:cNvPicPr>
-            <a:picLocks noChangeAspect="1"/>
-          </p:cNvPicPr>
-          <p:nvPr/>
-        </p:nvPicPr>
-        <p:blipFill>
-          <a:blip r:embed="rId5"/>
-          <a:stretch>
-            <a:fillRect/>
-          </a:stretch>
-        </p:blipFill>
-        <p:spPr>
-          <a:xfrm>
-            <a:off x="731520" y="4709160"/>
-            <a:ext cx="548640" cy="548640"/>
-          </a:xfrm>
-          <a:prstGeom prst="rect">
-            <a:avLst/>
-          </a:prstGeom>
-        </p:spPr>
-      </p:pic>
-      <p:sp>
-        <p:nvSpPr>
-          <p:cNvPr id="21" name="TextBox 20"/>
-          <p:cNvSpPr txBox="1"/>
-          <p:nvPr/>
-        </p:nvSpPr>
-        <p:spPr>
-          <a:xfrm>
-            <a:off x="1371600" y="4754880"/>
-            <a:ext cx="2631920" cy="365760"/>
-          </a:xfrm>
-          <a:prstGeom prst="rect">
-            <a:avLst/>
-          </a:prstGeom>
-          <a:noFill/>
-        </p:spPr>
-        <p:txBody>
-          <a:bodyPr wrap="square">
-            <a:spAutoFit/>
-          </a:bodyPr>
-          <a:lstStyle/>
-          <a:p>
-            <a:pPr algn="l"/>
-            <a:r>
-              <a:rPr sz="1400" b="1">
-                <a:solidFill>
-                  <a:srgbClr val="0043DA"/>
-                </a:solidFill>
-                <a:latin typeface="Freesentation"/>
-              </a:rPr>
-              <a:t>Schema Registry</a:t>
-            </a:r>
-          </a:p>
-        </p:txBody>
-      </p:sp>
-      <p:sp>
-        <p:nvSpPr>
-          <p:cNvPr id="22" name="TextBox 21"/>
-          <p:cNvSpPr txBox="1"/>
-          <p:nvPr/>
-        </p:nvSpPr>
-        <p:spPr>
-          <a:xfrm>
-            <a:off x="731520" y="5440680"/>
-            <a:ext cx="3180080" cy="548640"/>
-          </a:xfrm>
-          <a:prstGeom prst="rect">
-            <a:avLst/>
-          </a:prstGeom>
-          <a:noFill/>
-        </p:spPr>
-        <p:txBody>
-          <a:bodyPr wrap="square">
-            <a:spAutoFit/>
-          </a:bodyPr>
-          <a:lstStyle/>
-          <a:p>
-            <a:pPr algn="l"/>
-            <a:r>
-              <a:rPr sz="1300" b="0">
-                <a:solidFill>
-                  <a:srgbClr val="212121"/>
-                </a:solidFill>
-                <a:latin typeface="Freesentation"/>
-              </a:rPr>
-              <a:t>Avro/Protobuf 스키마 중앙 관리</a:t>
-            </a:r>
-          </a:p>
-        </p:txBody>
-      </p:sp>
-      <p:sp>
-        <p:nvSpPr>
-          <p:cNvPr id="23" name="Rounded Rectangle 22"/>
-          <p:cNvSpPr/>
-          <p:nvPr/>
-        </p:nvSpPr>
-        <p:spPr>
-          <a:xfrm>
-            <a:off x="4312800" y="4434840"/>
-            <a:ext cx="3566400" cy="1828800"/>
-          </a:xfrm>
-          <a:prstGeom prst="roundRect">
-            <a:avLst>
-              <a:gd name="adj" fmla="val 16667"/>
-            </a:avLst>
-          </a:prstGeom>
-          <a:solidFill>
-            <a:srgbClr val="F8F9FA"/>
-          </a:solidFill>
-          <a:ln w="6350">
-            <a:solidFill>
-              <a:srgbClr val="DCDCDC"/>
-            </a:solidFill>
-          </a:ln>
-        </p:spPr>
-        <p:style>
-          <a:lnRef idx="1">
-            <a:schemeClr val="accent1"/>
-          </a:lnRef>
-          <a:fillRef idx="3">
-            <a:schemeClr val="accent1"/>
-          </a:fillRef>
-          <a:effectRef idx="2">
-            <a:schemeClr val="accent1"/>
-          </a:effectRef>
-          <a:fontRef idx="minor">
-            <a:schemeClr val="lt1"/>
-          </a:fontRef>
-        </p:style>
-        <p:txBody>
-          <a:bodyPr rtlCol="0" anchor="ctr"/>
-          <a:lstStyle/>
-          <a:p>
-            <a:pPr algn="ctr"/>
-          </a:p>
-        </p:txBody>
-      </p:sp>
-      <p:pic>
-        <p:nvPicPr>
-          <p:cNvPr id="24" name="Picture 23" descr="image.png"/>
-          <p:cNvPicPr>
-            <a:picLocks noChangeAspect="1"/>
-          </p:cNvPicPr>
-          <p:nvPr/>
-        </p:nvPicPr>
-        <p:blipFill>
-          <a:blip r:embed="rId6"/>
-          <a:stretch>
-            <a:fillRect/>
-          </a:stretch>
-        </p:blipFill>
-        <p:spPr>
-          <a:xfrm>
-            <a:off x="4587120" y="4709160"/>
-            <a:ext cx="548640" cy="548640"/>
-          </a:xfrm>
-          <a:prstGeom prst="rect">
-            <a:avLst/>
-          </a:prstGeom>
-        </p:spPr>
-      </p:pic>
-      <p:sp>
-        <p:nvSpPr>
-          <p:cNvPr id="25" name="TextBox 24"/>
-          <p:cNvSpPr txBox="1"/>
-          <p:nvPr/>
-        </p:nvSpPr>
-        <p:spPr>
-          <a:xfrm>
-            <a:off x="5227200" y="4754880"/>
-            <a:ext cx="2631920" cy="365760"/>
-          </a:xfrm>
-          <a:prstGeom prst="rect">
-            <a:avLst/>
-          </a:prstGeom>
-          <a:noFill/>
-        </p:spPr>
-        <p:txBody>
-          <a:bodyPr wrap="square">
-            <a:spAutoFit/>
-          </a:bodyPr>
-          <a:lstStyle/>
-          <a:p>
-            <a:pPr algn="l"/>
-            <a:r>
-              <a:rPr sz="1400" b="1">
-                <a:solidFill>
-                  <a:srgbClr val="0043DA"/>
-                </a:solidFill>
-                <a:latin typeface="Freesentation"/>
-              </a:rPr>
-              <a:t>CloudWatch</a:t>
-            </a:r>
-          </a:p>
-        </p:txBody>
-      </p:sp>
-      <p:sp>
-        <p:nvSpPr>
-          <p:cNvPr id="26" name="TextBox 25"/>
-          <p:cNvSpPr txBox="1"/>
-          <p:nvPr/>
-        </p:nvSpPr>
-        <p:spPr>
-          <a:xfrm>
-            <a:off x="4587120" y="5440680"/>
-            <a:ext cx="3180080" cy="548640"/>
-          </a:xfrm>
-          <a:prstGeom prst="rect">
-            <a:avLst/>
-          </a:prstGeom>
-          <a:noFill/>
-        </p:spPr>
-        <p:txBody>
-          <a:bodyPr wrap="square">
-            <a:spAutoFit/>
-          </a:bodyPr>
-          <a:lstStyle/>
-          <a:p>
-            <a:pPr algn="l"/>
-            <a:r>
-              <a:rPr sz="1300" b="0">
-                <a:solidFill>
-                  <a:srgbClr val="212121"/>
-                </a:solidFill>
-                <a:latin typeface="Freesentation"/>
-              </a:rPr>
-              <a:t>브로커·토픽 메트릭 실시간 모니터링</a:t>
-            </a:r>
-          </a:p>
-        </p:txBody>
-      </p:sp>
-      <p:sp>
-        <p:nvSpPr>
-          <p:cNvPr id="27" name="Rounded Rectangle 26"/>
-          <p:cNvSpPr/>
-          <p:nvPr/>
-        </p:nvSpPr>
-        <p:spPr>
-          <a:xfrm>
-            <a:off x="8168400" y="4434840"/>
-            <a:ext cx="3566400" cy="1828800"/>
-          </a:xfrm>
-          <a:prstGeom prst="roundRect">
-            <a:avLst>
-              <a:gd name="adj" fmla="val 16667"/>
-            </a:avLst>
-          </a:prstGeom>
-          <a:solidFill>
-            <a:srgbClr val="F8F9FA"/>
-          </a:solidFill>
-          <a:ln w="6350">
-            <a:solidFill>
-              <a:srgbClr val="DCDCDC"/>
-            </a:solidFill>
-          </a:ln>
-        </p:spPr>
-        <p:style>
-          <a:lnRef idx="1">
-            <a:schemeClr val="accent1"/>
-          </a:lnRef>
-          <a:fillRef idx="3">
-            <a:schemeClr val="accent1"/>
-          </a:fillRef>
-          <a:effectRef idx="2">
-            <a:schemeClr val="accent1"/>
-          </a:effectRef>
-          <a:fontRef idx="minor">
-            <a:schemeClr val="lt1"/>
-          </a:fontRef>
-        </p:style>
-        <p:txBody>
-          <a:bodyPr rtlCol="0" anchor="ctr"/>
-          <a:lstStyle/>
-          <a:p>
-            <a:pPr algn="ctr"/>
-          </a:p>
-        </p:txBody>
-      </p:sp>
-      <p:pic>
-        <p:nvPicPr>
-          <p:cNvPr id="28" name="Picture 27" descr="security.png"/>
-          <p:cNvPicPr>
-            <a:picLocks noChangeAspect="1"/>
-          </p:cNvPicPr>
-          <p:nvPr/>
-        </p:nvPicPr>
-        <p:blipFill>
-          <a:blip r:embed="rId7"/>
-          <a:stretch>
-            <a:fillRect/>
-          </a:stretch>
-        </p:blipFill>
-        <p:spPr>
-          <a:xfrm>
-            <a:off x="8442720" y="4709160"/>
-            <a:ext cx="548640" cy="548640"/>
-          </a:xfrm>
-          <a:prstGeom prst="rect">
-            <a:avLst/>
-          </a:prstGeom>
-        </p:spPr>
-      </p:pic>
-      <p:sp>
-        <p:nvSpPr>
-          <p:cNvPr id="29" name="TextBox 28"/>
-          <p:cNvSpPr txBox="1"/>
-          <p:nvPr/>
-        </p:nvSpPr>
-        <p:spPr>
-          <a:xfrm>
-            <a:off x="9082800" y="4754880"/>
-            <a:ext cx="2631920" cy="365760"/>
-          </a:xfrm>
-          <a:prstGeom prst="rect">
-            <a:avLst/>
-          </a:prstGeom>
-          <a:noFill/>
-        </p:spPr>
-        <p:txBody>
-          <a:bodyPr wrap="square">
-            <a:spAutoFit/>
-          </a:bodyPr>
-          <a:lstStyle/>
-          <a:p>
-            <a:pPr algn="l"/>
-            <a:r>
-              <a:rPr sz="1400" b="1">
-                <a:solidFill>
-                  <a:srgbClr val="0043DA"/>
-                </a:solidFill>
-                <a:latin typeface="Freesentation"/>
-              </a:rPr>
-              <a:t>IAM/mTLS</a:t>
-            </a:r>
-          </a:p>
-        </p:txBody>
-      </p:sp>
-      <p:sp>
-        <p:nvSpPr>
-          <p:cNvPr id="30" name="TextBox 29"/>
-          <p:cNvSpPr txBox="1"/>
-          <p:nvPr/>
-        </p:nvSpPr>
-        <p:spPr>
-          <a:xfrm>
-            <a:off x="8442720" y="5440680"/>
-            <a:ext cx="3180080" cy="548640"/>
-          </a:xfrm>
-          <a:prstGeom prst="rect">
-            <a:avLst/>
-          </a:prstGeom>
-          <a:noFill/>
-        </p:spPr>
-        <p:txBody>
-          <a:bodyPr wrap="square">
-            <a:spAutoFit/>
-          </a:bodyPr>
-          <a:lstStyle/>
-          <a:p>
-            <a:pPr algn="l"/>
-            <a:r>
-              <a:rPr sz="1300" b="0">
-                <a:solidFill>
-                  <a:srgbClr val="212121"/>
-                </a:solidFill>
-                <a:latin typeface="Freesentation"/>
-              </a:rPr>
-              <a:t>인증·암호화 — 보안 통신 계층</a:t>
+              <a:rPr sz="1400" b="0">
+                <a:solidFill>
+                  <a:srgbClr val="FFFFFF"/>
+                </a:solidFill>
+                <a:latin typeface="Freesentation"/>
+              </a:rPr>
+              <a:t>금융·공공 분야 실시간 이벤트 스트리밍 선도</a:t>
             </a:r>
           </a:p>
         </p:txBody>
@@ -13330,7 +13717,7 @@
                 </a:solidFill>
                 <a:latin typeface="Freesentation"/>
               </a:rPr>
-              <a:t>L20. Numbered List</a:t>
+              <a:t>L19. Icon Grid</a:t>
             </a:r>
           </a:p>
         </p:txBody>
@@ -13365,7 +13752,7 @@
                 </a:solidFill>
                 <a:latin typeface="Freesentation"/>
               </a:rPr>
-              <a:t>번호 리스트 레이아웃 — 순서 강조 단계별 절차</a:t>
+              <a:t>아이콘 그리드 레이아웃 — 3×2 기술 스택 시각화</a:t>
             </a:r>
           </a:p>
         </p:txBody>
@@ -13400,7 +13787,7 @@
                 </a:solidFill>
                 <a:latin typeface="Freesentation"/>
               </a:rPr>
-              <a:t>AWS MSK 클러스터 구축 4단계</a:t>
+              <a:t>AWS MSK 통합 기술 스택</a:t>
             </a:r>
           </a:p>
         </p:txBody>
@@ -13435,30 +13822,34 @@
                 </a:solidFill>
                 <a:latin typeface="Freesentation"/>
               </a:rPr>
-              <a:t>프로덕션 환경 배포 절차 (2026년 4월 기준)</a:t>
-            </a:r>
-          </a:p>
-        </p:txBody>
-      </p:sp>
-      <p:sp>
-        <p:nvSpPr>
-          <p:cNvPr id="7" name="Oval 6"/>
+              <a:t>메시징 플랫폼 핵심 구성요소 (2026년 4월 기준)</a:t>
+            </a:r>
+          </a:p>
+        </p:txBody>
+      </p:sp>
+      <p:sp>
+        <p:nvSpPr>
+          <p:cNvPr id="7" name="Rounded Rectangle 6"/>
           <p:cNvSpPr/>
           <p:nvPr/>
         </p:nvSpPr>
         <p:spPr>
           <a:xfrm>
-            <a:off x="457200" y="2434590"/>
-            <a:ext cx="457200" cy="457200"/>
-          </a:xfrm>
-          <a:prstGeom prst="ellipse">
-            <a:avLst/>
+            <a:off x="457200" y="2423160"/>
+            <a:ext cx="3566400" cy="1828800"/>
+          </a:xfrm>
+          <a:prstGeom prst="roundRect">
+            <a:avLst>
+              <a:gd name="adj" fmla="val 16667"/>
+            </a:avLst>
           </a:prstGeom>
           <a:solidFill>
-            <a:srgbClr val="0043DA"/>
+            <a:srgbClr val="F8F9FA"/>
           </a:solidFill>
-          <a:ln>
-            <a:noFill/>
+          <a:ln w="6350">
+            <a:solidFill>
+              <a:srgbClr val="DCDCDC"/>
+            </a:solidFill>
           </a:ln>
         </p:spPr>
         <p:style>
@@ -13476,32 +13867,47 @@
           </a:fontRef>
         </p:style>
         <p:txBody>
-          <a:bodyPr rtlCol="0" anchor="ctr" lIns="0" rIns="0" tIns="0" bIns="0"/>
+          <a:bodyPr rtlCol="0" anchor="ctr"/>
           <a:lstStyle/>
           <a:p>
             <a:pPr algn="ctr"/>
-            <a:r>
-              <a:rPr sz="1800" b="1">
-                <a:solidFill>
-                  <a:srgbClr val="FFFFFF"/>
-                </a:solidFill>
-                <a:latin typeface="Freesentation 7"/>
-              </a:rPr>
-              <a:t>1</a:t>
-            </a:r>
-          </a:p>
-        </p:txBody>
-      </p:sp>
-      <p:sp>
-        <p:nvSpPr>
-          <p:cNvPr id="8" name="TextBox 7"/>
+          </a:p>
+        </p:txBody>
+      </p:sp>
+      <p:pic>
+        <p:nvPicPr>
+          <p:cNvPr id="8" name="Picture 7" descr="image.png"/>
+          <p:cNvPicPr>
+            <a:picLocks noChangeAspect="1"/>
+          </p:cNvPicPr>
+          <p:nvPr/>
+        </p:nvPicPr>
+        <p:blipFill>
+          <a:blip r:embed="rId2"/>
+          <a:stretch>
+            <a:fillRect/>
+          </a:stretch>
+        </p:blipFill>
+        <p:spPr>
+          <a:xfrm>
+            <a:off x="731520" y="2697480"/>
+            <a:ext cx="548640" cy="548640"/>
+          </a:xfrm>
+          <a:prstGeom prst="rect">
+            <a:avLst/>
+          </a:prstGeom>
+        </p:spPr>
+      </p:pic>
+      <p:sp>
+        <p:nvSpPr>
+          <p:cNvPr id="9" name="TextBox 8"/>
           <p:cNvSpPr txBox="1"/>
           <p:nvPr/>
         </p:nvSpPr>
         <p:spPr>
           <a:xfrm>
-            <a:off x="1097280" y="2503170"/>
-            <a:ext cx="10637520" cy="320040"/>
+            <a:off x="1371600" y="2743200"/>
+            <a:ext cx="2631920" cy="365760"/>
           </a:xfrm>
           <a:prstGeom prst="rect">
             <a:avLst/>
@@ -13522,21 +13928,21 @@
                 </a:solidFill>
                 <a:latin typeface="Freesentation"/>
               </a:rPr>
-              <a:t>VPC 및 Subnet 설계</a:t>
-            </a:r>
-          </a:p>
-        </p:txBody>
-      </p:sp>
-      <p:sp>
-        <p:nvSpPr>
-          <p:cNvPr id="9" name="TextBox 8"/>
+              <a:t>Apache Kafka</a:t>
+            </a:r>
+          </a:p>
+        </p:txBody>
+      </p:sp>
+      <p:sp>
+        <p:nvSpPr>
+          <p:cNvPr id="10" name="TextBox 9"/>
           <p:cNvSpPr txBox="1"/>
           <p:nvPr/>
         </p:nvSpPr>
         <p:spPr>
           <a:xfrm>
-            <a:off x="1097280" y="2868930"/>
-            <a:ext cx="10637520" cy="457200"/>
+            <a:off x="731520" y="3429000"/>
+            <a:ext cx="3180080" cy="548640"/>
           </a:xfrm>
           <a:prstGeom prst="rect">
             <a:avLst/>
@@ -13557,30 +13963,34 @@
                 </a:solidFill>
                 <a:latin typeface="Freesentation"/>
               </a:rPr>
-              <a:t>Private Subnet 3개(AZ-a/b/c) 생성, CIDR 대역 분리, 라우팅 테이블 설정</a:t>
-            </a:r>
-          </a:p>
-        </p:txBody>
-      </p:sp>
-      <p:sp>
-        <p:nvSpPr>
-          <p:cNvPr id="10" name="Oval 9"/>
+              <a:t>분산 스트리밍 플랫폼 — 메시지 브로커 코어</a:t>
+            </a:r>
+          </a:p>
+        </p:txBody>
+      </p:sp>
+      <p:sp>
+        <p:nvSpPr>
+          <p:cNvPr id="11" name="Rounded Rectangle 10"/>
           <p:cNvSpPr/>
           <p:nvPr/>
         </p:nvSpPr>
         <p:spPr>
           <a:xfrm>
-            <a:off x="457200" y="3531870"/>
-            <a:ext cx="457200" cy="457200"/>
-          </a:xfrm>
-          <a:prstGeom prst="ellipse">
-            <a:avLst/>
+            <a:off x="4312800" y="2423160"/>
+            <a:ext cx="3566400" cy="1828800"/>
+          </a:xfrm>
+          <a:prstGeom prst="roundRect">
+            <a:avLst>
+              <a:gd name="adj" fmla="val 16667"/>
+            </a:avLst>
           </a:prstGeom>
           <a:solidFill>
-            <a:srgbClr val="0043DA"/>
+            <a:srgbClr val="F8F9FA"/>
           </a:solidFill>
-          <a:ln>
-            <a:noFill/>
+          <a:ln w="6350">
+            <a:solidFill>
+              <a:srgbClr val="DCDCDC"/>
+            </a:solidFill>
           </a:ln>
         </p:spPr>
         <p:style>
@@ -13598,32 +14008,47 @@
           </a:fontRef>
         </p:style>
         <p:txBody>
-          <a:bodyPr rtlCol="0" anchor="ctr" lIns="0" rIns="0" tIns="0" bIns="0"/>
+          <a:bodyPr rtlCol="0" anchor="ctr"/>
           <a:lstStyle/>
           <a:p>
             <a:pPr algn="ctr"/>
-            <a:r>
-              <a:rPr sz="1800" b="1">
-                <a:solidFill>
-                  <a:srgbClr val="FFFFFF"/>
-                </a:solidFill>
-                <a:latin typeface="Freesentation 7"/>
-              </a:rPr>
-              <a:t>2</a:t>
-            </a:r>
-          </a:p>
-        </p:txBody>
-      </p:sp>
-      <p:sp>
-        <p:nvSpPr>
-          <p:cNvPr id="11" name="TextBox 10"/>
+          </a:p>
+        </p:txBody>
+      </p:sp>
+      <p:pic>
+        <p:nvPicPr>
+          <p:cNvPr id="12" name="Picture 11" descr="image.png"/>
+          <p:cNvPicPr>
+            <a:picLocks noChangeAspect="1"/>
+          </p:cNvPicPr>
+          <p:nvPr/>
+        </p:nvPicPr>
+        <p:blipFill>
+          <a:blip r:embed="rId3"/>
+          <a:stretch>
+            <a:fillRect/>
+          </a:stretch>
+        </p:blipFill>
+        <p:spPr>
+          <a:xfrm>
+            <a:off x="4587120" y="2697480"/>
+            <a:ext cx="548640" cy="548640"/>
+          </a:xfrm>
+          <a:prstGeom prst="rect">
+            <a:avLst/>
+          </a:prstGeom>
+        </p:spPr>
+      </p:pic>
+      <p:sp>
+        <p:nvSpPr>
+          <p:cNvPr id="13" name="TextBox 12"/>
           <p:cNvSpPr txBox="1"/>
           <p:nvPr/>
         </p:nvSpPr>
         <p:spPr>
           <a:xfrm>
-            <a:off x="1097280" y="3600450"/>
-            <a:ext cx="10637520" cy="320040"/>
+            <a:off x="5227200" y="2743200"/>
+            <a:ext cx="2631920" cy="365760"/>
           </a:xfrm>
           <a:prstGeom prst="rect">
             <a:avLst/>
@@ -13644,21 +14069,21 @@
                 </a:solidFill>
                 <a:latin typeface="Freesentation"/>
               </a:rPr>
-              <a:t>MSK 클러스터 프로비저닝</a:t>
-            </a:r>
-          </a:p>
-        </p:txBody>
-      </p:sp>
-      <p:sp>
-        <p:nvSpPr>
-          <p:cNvPr id="12" name="TextBox 11"/>
+              <a:t>Zookeeper</a:t>
+            </a:r>
+          </a:p>
+        </p:txBody>
+      </p:sp>
+      <p:sp>
+        <p:nvSpPr>
+          <p:cNvPr id="14" name="TextBox 13"/>
           <p:cNvSpPr txBox="1"/>
           <p:nvPr/>
         </p:nvSpPr>
         <p:spPr>
           <a:xfrm>
-            <a:off x="1097280" y="3966210"/>
-            <a:ext cx="10637520" cy="457200"/>
+            <a:off x="4587120" y="3429000"/>
+            <a:ext cx="3180080" cy="548640"/>
           </a:xfrm>
           <a:prstGeom prst="rect">
             <a:avLst/>
@@ -13679,30 +14104,34 @@
                 </a:solidFill>
                 <a:latin typeface="Freesentation"/>
               </a:rPr>
-              <a:t>kafka.m5.large 3 브로커, EBS gp3 100GB, Multi-AZ 배치 설정</a:t>
-            </a:r>
-          </a:p>
-        </p:txBody>
-      </p:sp>
-      <p:sp>
-        <p:nvSpPr>
-          <p:cNvPr id="13" name="Oval 12"/>
+              <a:t>클러스터 메타데이터 관리 (KRaft 전환 가능)</a:t>
+            </a:r>
+          </a:p>
+        </p:txBody>
+      </p:sp>
+      <p:sp>
+        <p:nvSpPr>
+          <p:cNvPr id="15" name="Rounded Rectangle 14"/>
           <p:cNvSpPr/>
           <p:nvPr/>
         </p:nvSpPr>
         <p:spPr>
           <a:xfrm>
-            <a:off x="457200" y="4629150"/>
-            <a:ext cx="457200" cy="457200"/>
-          </a:xfrm>
-          <a:prstGeom prst="ellipse">
-            <a:avLst/>
+            <a:off x="8168400" y="2423160"/>
+            <a:ext cx="3566400" cy="1828800"/>
+          </a:xfrm>
+          <a:prstGeom prst="roundRect">
+            <a:avLst>
+              <a:gd name="adj" fmla="val 16667"/>
+            </a:avLst>
           </a:prstGeom>
           <a:solidFill>
-            <a:srgbClr val="0043DA"/>
+            <a:srgbClr val="F8F9FA"/>
           </a:solidFill>
-          <a:ln>
-            <a:noFill/>
+          <a:ln w="6350">
+            <a:solidFill>
+              <a:srgbClr val="DCDCDC"/>
+            </a:solidFill>
           </a:ln>
         </p:spPr>
         <p:style>
@@ -13720,32 +14149,47 @@
           </a:fontRef>
         </p:style>
         <p:txBody>
-          <a:bodyPr rtlCol="0" anchor="ctr" lIns="0" rIns="0" tIns="0" bIns="0"/>
+          <a:bodyPr rtlCol="0" anchor="ctr"/>
           <a:lstStyle/>
           <a:p>
             <a:pPr algn="ctr"/>
-            <a:r>
-              <a:rPr sz="1800" b="1">
-                <a:solidFill>
-                  <a:srgbClr val="FFFFFF"/>
-                </a:solidFill>
-                <a:latin typeface="Freesentation 7"/>
-              </a:rPr>
-              <a:t>3</a:t>
-            </a:r>
-          </a:p>
-        </p:txBody>
-      </p:sp>
-      <p:sp>
-        <p:nvSpPr>
-          <p:cNvPr id="14" name="TextBox 13"/>
+          </a:p>
+        </p:txBody>
+      </p:sp>
+      <p:pic>
+        <p:nvPicPr>
+          <p:cNvPr id="16" name="Picture 15" descr="image.png"/>
+          <p:cNvPicPr>
+            <a:picLocks noChangeAspect="1"/>
+          </p:cNvPicPr>
+          <p:nvPr/>
+        </p:nvPicPr>
+        <p:blipFill>
+          <a:blip r:embed="rId4"/>
+          <a:stretch>
+            <a:fillRect/>
+          </a:stretch>
+        </p:blipFill>
+        <p:spPr>
+          <a:xfrm>
+            <a:off x="8442720" y="2697480"/>
+            <a:ext cx="548640" cy="548640"/>
+          </a:xfrm>
+          <a:prstGeom prst="rect">
+            <a:avLst/>
+          </a:prstGeom>
+        </p:spPr>
+      </p:pic>
+      <p:sp>
+        <p:nvSpPr>
+          <p:cNvPr id="17" name="TextBox 16"/>
           <p:cNvSpPr txBox="1"/>
           <p:nvPr/>
         </p:nvSpPr>
         <p:spPr>
           <a:xfrm>
-            <a:off x="1097280" y="4697730"/>
-            <a:ext cx="10637520" cy="320040"/>
+            <a:off x="9082800" y="2743200"/>
+            <a:ext cx="2631920" cy="365760"/>
           </a:xfrm>
           <a:prstGeom prst="rect">
             <a:avLst/>
@@ -13766,21 +14210,21 @@
                 </a:solidFill>
                 <a:latin typeface="Freesentation"/>
               </a:rPr>
-              <a:t>보안 그룹 및 IAM 정책 구성</a:t>
-            </a:r>
-          </a:p>
-        </p:txBody>
-      </p:sp>
-      <p:sp>
-        <p:nvSpPr>
-          <p:cNvPr id="15" name="TextBox 14"/>
+              <a:t>Kafka Connect</a:t>
+            </a:r>
+          </a:p>
+        </p:txBody>
+      </p:sp>
+      <p:sp>
+        <p:nvSpPr>
+          <p:cNvPr id="18" name="TextBox 17"/>
           <p:cNvSpPr txBox="1"/>
           <p:nvPr/>
         </p:nvSpPr>
         <p:spPr>
           <a:xfrm>
-            <a:off x="1097280" y="5063490"/>
-            <a:ext cx="10637520" cy="457200"/>
+            <a:off x="8442720" y="3429000"/>
+            <a:ext cx="3180080" cy="548640"/>
           </a:xfrm>
           <a:prstGeom prst="rect">
             <a:avLst/>
@@ -13801,30 +14245,34 @@
                 </a:solidFill>
                 <a:latin typeface="Freesentation"/>
               </a:rPr>
-              <a:t>포트 9092/9094 허용, IAM 정책으로 Topic 권한 제어, TLS 암호화 활성화</a:t>
-            </a:r>
-          </a:p>
-        </p:txBody>
-      </p:sp>
-      <p:sp>
-        <p:nvSpPr>
-          <p:cNvPr id="16" name="Oval 15"/>
+              <a:t>Source/Sink 커넥터 — 외부 시스템 통합</a:t>
+            </a:r>
+          </a:p>
+        </p:txBody>
+      </p:sp>
+      <p:sp>
+        <p:nvSpPr>
+          <p:cNvPr id="19" name="Rounded Rectangle 18"/>
           <p:cNvSpPr/>
           <p:nvPr/>
         </p:nvSpPr>
         <p:spPr>
           <a:xfrm>
-            <a:off x="457200" y="5726430"/>
-            <a:ext cx="457200" cy="457200"/>
-          </a:xfrm>
-          <a:prstGeom prst="ellipse">
-            <a:avLst/>
+            <a:off x="457200" y="4434840"/>
+            <a:ext cx="3566400" cy="1828800"/>
+          </a:xfrm>
+          <a:prstGeom prst="roundRect">
+            <a:avLst>
+              <a:gd name="adj" fmla="val 16667"/>
+            </a:avLst>
           </a:prstGeom>
           <a:solidFill>
-            <a:srgbClr val="0043DA"/>
+            <a:srgbClr val="F8F9FA"/>
           </a:solidFill>
-          <a:ln>
-            <a:noFill/>
+          <a:ln w="6350">
+            <a:solidFill>
+              <a:srgbClr val="DCDCDC"/>
+            </a:solidFill>
           </a:ln>
         </p:spPr>
         <p:style>
@@ -13842,32 +14290,47 @@
           </a:fontRef>
         </p:style>
         <p:txBody>
-          <a:bodyPr rtlCol="0" anchor="ctr" lIns="0" rIns="0" tIns="0" bIns="0"/>
+          <a:bodyPr rtlCol="0" anchor="ctr"/>
           <a:lstStyle/>
           <a:p>
             <a:pPr algn="ctr"/>
-            <a:r>
-              <a:rPr sz="1800" b="1">
-                <a:solidFill>
-                  <a:srgbClr val="FFFFFF"/>
-                </a:solidFill>
-                <a:latin typeface="Freesentation 7"/>
-              </a:rPr>
-              <a:t>4</a:t>
-            </a:r>
-          </a:p>
-        </p:txBody>
-      </p:sp>
-      <p:sp>
-        <p:nvSpPr>
-          <p:cNvPr id="17" name="TextBox 16"/>
+          </a:p>
+        </p:txBody>
+      </p:sp>
+      <p:pic>
+        <p:nvPicPr>
+          <p:cNvPr id="20" name="Picture 19" descr="database.png"/>
+          <p:cNvPicPr>
+            <a:picLocks noChangeAspect="1"/>
+          </p:cNvPicPr>
+          <p:nvPr/>
+        </p:nvPicPr>
+        <p:blipFill>
+          <a:blip r:embed="rId5"/>
+          <a:stretch>
+            <a:fillRect/>
+          </a:stretch>
+        </p:blipFill>
+        <p:spPr>
+          <a:xfrm>
+            <a:off x="731520" y="4709160"/>
+            <a:ext cx="548640" cy="548640"/>
+          </a:xfrm>
+          <a:prstGeom prst="rect">
+            <a:avLst/>
+          </a:prstGeom>
+        </p:spPr>
+      </p:pic>
+      <p:sp>
+        <p:nvSpPr>
+          <p:cNvPr id="21" name="TextBox 20"/>
           <p:cNvSpPr txBox="1"/>
           <p:nvPr/>
         </p:nvSpPr>
         <p:spPr>
           <a:xfrm>
-            <a:off x="1097280" y="5795010"/>
-            <a:ext cx="10637520" cy="320040"/>
+            <a:off x="1371600" y="4754880"/>
+            <a:ext cx="2631920" cy="365760"/>
           </a:xfrm>
           <a:prstGeom prst="rect">
             <a:avLst/>
@@ -13888,21 +14351,21 @@
                 </a:solidFill>
                 <a:latin typeface="Freesentation"/>
               </a:rPr>
-              <a:t>모니터링 및 알람 설정</a:t>
-            </a:r>
-          </a:p>
-        </p:txBody>
-      </p:sp>
-      <p:sp>
-        <p:nvSpPr>
-          <p:cNvPr id="18" name="TextBox 17"/>
+              <a:t>Schema Registry</a:t>
+            </a:r>
+          </a:p>
+        </p:txBody>
+      </p:sp>
+      <p:sp>
+        <p:nvSpPr>
+          <p:cNvPr id="22" name="TextBox 21"/>
           <p:cNvSpPr txBox="1"/>
           <p:nvPr/>
         </p:nvSpPr>
         <p:spPr>
           <a:xfrm>
-            <a:off x="1097280" y="6160770"/>
-            <a:ext cx="10637520" cy="457200"/>
+            <a:off x="731520" y="5440680"/>
+            <a:ext cx="3180080" cy="548640"/>
           </a:xfrm>
           <a:prstGeom prst="rect">
             <a:avLst/>
@@ -13923,7 +14386,289 @@
                 </a:solidFill>
                 <a:latin typeface="Freesentation"/>
               </a:rPr>
-              <a:t>CloudWatch 지표 활성화, CPU/Disk 임계치 알람, SNS 통보 설정</a:t>
+              <a:t>Avro/Protobuf 스키마 중앙 관리</a:t>
+            </a:r>
+          </a:p>
+        </p:txBody>
+      </p:sp>
+      <p:sp>
+        <p:nvSpPr>
+          <p:cNvPr id="23" name="Rounded Rectangle 22"/>
+          <p:cNvSpPr/>
+          <p:nvPr/>
+        </p:nvSpPr>
+        <p:spPr>
+          <a:xfrm>
+            <a:off x="4312800" y="4434840"/>
+            <a:ext cx="3566400" cy="1828800"/>
+          </a:xfrm>
+          <a:prstGeom prst="roundRect">
+            <a:avLst>
+              <a:gd name="adj" fmla="val 16667"/>
+            </a:avLst>
+          </a:prstGeom>
+          <a:solidFill>
+            <a:srgbClr val="F8F9FA"/>
+          </a:solidFill>
+          <a:ln w="6350">
+            <a:solidFill>
+              <a:srgbClr val="DCDCDC"/>
+            </a:solidFill>
+          </a:ln>
+        </p:spPr>
+        <p:style>
+          <a:lnRef idx="1">
+            <a:schemeClr val="accent1"/>
+          </a:lnRef>
+          <a:fillRef idx="3">
+            <a:schemeClr val="accent1"/>
+          </a:fillRef>
+          <a:effectRef idx="2">
+            <a:schemeClr val="accent1"/>
+          </a:effectRef>
+          <a:fontRef idx="minor">
+            <a:schemeClr val="lt1"/>
+          </a:fontRef>
+        </p:style>
+        <p:txBody>
+          <a:bodyPr rtlCol="0" anchor="ctr"/>
+          <a:lstStyle/>
+          <a:p>
+            <a:pPr algn="ctr"/>
+          </a:p>
+        </p:txBody>
+      </p:sp>
+      <p:pic>
+        <p:nvPicPr>
+          <p:cNvPr id="24" name="Picture 23" descr="image.png"/>
+          <p:cNvPicPr>
+            <a:picLocks noChangeAspect="1"/>
+          </p:cNvPicPr>
+          <p:nvPr/>
+        </p:nvPicPr>
+        <p:blipFill>
+          <a:blip r:embed="rId6"/>
+          <a:stretch>
+            <a:fillRect/>
+          </a:stretch>
+        </p:blipFill>
+        <p:spPr>
+          <a:xfrm>
+            <a:off x="4587120" y="4709160"/>
+            <a:ext cx="548640" cy="548640"/>
+          </a:xfrm>
+          <a:prstGeom prst="rect">
+            <a:avLst/>
+          </a:prstGeom>
+        </p:spPr>
+      </p:pic>
+      <p:sp>
+        <p:nvSpPr>
+          <p:cNvPr id="25" name="TextBox 24"/>
+          <p:cNvSpPr txBox="1"/>
+          <p:nvPr/>
+        </p:nvSpPr>
+        <p:spPr>
+          <a:xfrm>
+            <a:off x="5227200" y="4754880"/>
+            <a:ext cx="2631920" cy="365760"/>
+          </a:xfrm>
+          <a:prstGeom prst="rect">
+            <a:avLst/>
+          </a:prstGeom>
+          <a:noFill/>
+        </p:spPr>
+        <p:txBody>
+          <a:bodyPr wrap="square">
+            <a:spAutoFit/>
+          </a:bodyPr>
+          <a:lstStyle/>
+          <a:p>
+            <a:pPr algn="l"/>
+            <a:r>
+              <a:rPr sz="1400" b="1">
+                <a:solidFill>
+                  <a:srgbClr val="0043DA"/>
+                </a:solidFill>
+                <a:latin typeface="Freesentation"/>
+              </a:rPr>
+              <a:t>CloudWatch</a:t>
+            </a:r>
+          </a:p>
+        </p:txBody>
+      </p:sp>
+      <p:sp>
+        <p:nvSpPr>
+          <p:cNvPr id="26" name="TextBox 25"/>
+          <p:cNvSpPr txBox="1"/>
+          <p:nvPr/>
+        </p:nvSpPr>
+        <p:spPr>
+          <a:xfrm>
+            <a:off x="4587120" y="5440680"/>
+            <a:ext cx="3180080" cy="548640"/>
+          </a:xfrm>
+          <a:prstGeom prst="rect">
+            <a:avLst/>
+          </a:prstGeom>
+          <a:noFill/>
+        </p:spPr>
+        <p:txBody>
+          <a:bodyPr wrap="square">
+            <a:spAutoFit/>
+          </a:bodyPr>
+          <a:lstStyle/>
+          <a:p>
+            <a:pPr algn="l"/>
+            <a:r>
+              <a:rPr sz="1300" b="0">
+                <a:solidFill>
+                  <a:srgbClr val="212121"/>
+                </a:solidFill>
+                <a:latin typeface="Freesentation"/>
+              </a:rPr>
+              <a:t>브로커·토픽 메트릭 실시간 모니터링</a:t>
+            </a:r>
+          </a:p>
+        </p:txBody>
+      </p:sp>
+      <p:sp>
+        <p:nvSpPr>
+          <p:cNvPr id="27" name="Rounded Rectangle 26"/>
+          <p:cNvSpPr/>
+          <p:nvPr/>
+        </p:nvSpPr>
+        <p:spPr>
+          <a:xfrm>
+            <a:off x="8168400" y="4434840"/>
+            <a:ext cx="3566400" cy="1828800"/>
+          </a:xfrm>
+          <a:prstGeom prst="roundRect">
+            <a:avLst>
+              <a:gd name="adj" fmla="val 16667"/>
+            </a:avLst>
+          </a:prstGeom>
+          <a:solidFill>
+            <a:srgbClr val="F8F9FA"/>
+          </a:solidFill>
+          <a:ln w="6350">
+            <a:solidFill>
+              <a:srgbClr val="DCDCDC"/>
+            </a:solidFill>
+          </a:ln>
+        </p:spPr>
+        <p:style>
+          <a:lnRef idx="1">
+            <a:schemeClr val="accent1"/>
+          </a:lnRef>
+          <a:fillRef idx="3">
+            <a:schemeClr val="accent1"/>
+          </a:fillRef>
+          <a:effectRef idx="2">
+            <a:schemeClr val="accent1"/>
+          </a:effectRef>
+          <a:fontRef idx="minor">
+            <a:schemeClr val="lt1"/>
+          </a:fontRef>
+        </p:style>
+        <p:txBody>
+          <a:bodyPr rtlCol="0" anchor="ctr"/>
+          <a:lstStyle/>
+          <a:p>
+            <a:pPr algn="ctr"/>
+          </a:p>
+        </p:txBody>
+      </p:sp>
+      <p:pic>
+        <p:nvPicPr>
+          <p:cNvPr id="28" name="Picture 27" descr="security.png"/>
+          <p:cNvPicPr>
+            <a:picLocks noChangeAspect="1"/>
+          </p:cNvPicPr>
+          <p:nvPr/>
+        </p:nvPicPr>
+        <p:blipFill>
+          <a:blip r:embed="rId7"/>
+          <a:stretch>
+            <a:fillRect/>
+          </a:stretch>
+        </p:blipFill>
+        <p:spPr>
+          <a:xfrm>
+            <a:off x="8442720" y="4709160"/>
+            <a:ext cx="548640" cy="548640"/>
+          </a:xfrm>
+          <a:prstGeom prst="rect">
+            <a:avLst/>
+          </a:prstGeom>
+        </p:spPr>
+      </p:pic>
+      <p:sp>
+        <p:nvSpPr>
+          <p:cNvPr id="29" name="TextBox 28"/>
+          <p:cNvSpPr txBox="1"/>
+          <p:nvPr/>
+        </p:nvSpPr>
+        <p:spPr>
+          <a:xfrm>
+            <a:off x="9082800" y="4754880"/>
+            <a:ext cx="2631920" cy="365760"/>
+          </a:xfrm>
+          <a:prstGeom prst="rect">
+            <a:avLst/>
+          </a:prstGeom>
+          <a:noFill/>
+        </p:spPr>
+        <p:txBody>
+          <a:bodyPr wrap="square">
+            <a:spAutoFit/>
+          </a:bodyPr>
+          <a:lstStyle/>
+          <a:p>
+            <a:pPr algn="l"/>
+            <a:r>
+              <a:rPr sz="1400" b="1">
+                <a:solidFill>
+                  <a:srgbClr val="0043DA"/>
+                </a:solidFill>
+                <a:latin typeface="Freesentation"/>
+              </a:rPr>
+              <a:t>IAM/mTLS</a:t>
+            </a:r>
+          </a:p>
+        </p:txBody>
+      </p:sp>
+      <p:sp>
+        <p:nvSpPr>
+          <p:cNvPr id="30" name="TextBox 29"/>
+          <p:cNvSpPr txBox="1"/>
+          <p:nvPr/>
+        </p:nvSpPr>
+        <p:spPr>
+          <a:xfrm>
+            <a:off x="8442720" y="5440680"/>
+            <a:ext cx="3180080" cy="548640"/>
+          </a:xfrm>
+          <a:prstGeom prst="rect">
+            <a:avLst/>
+          </a:prstGeom>
+          <a:noFill/>
+        </p:spPr>
+        <p:txBody>
+          <a:bodyPr wrap="square">
+            <a:spAutoFit/>
+          </a:bodyPr>
+          <a:lstStyle/>
+          <a:p>
+            <a:pPr algn="l"/>
+            <a:r>
+              <a:rPr sz="1300" b="0">
+                <a:solidFill>
+                  <a:srgbClr val="212121"/>
+                </a:solidFill>
+                <a:latin typeface="Freesentation"/>
+              </a:rPr>
+              <a:t>인증·암호화 — 보안 통신 계층</a:t>
             </a:r>
           </a:p>
         </p:txBody>
@@ -13960,11 +14705,7 @@
         <p:txBody>
           <a:bodyPr/>
           <a:lstStyle/>
-          <a:p>
-            <a:r>
-              <a:t/>
-            </a:r>
-          </a:p>
+          <a:p/>
         </p:txBody>
       </p:sp>
       <p:sp>
@@ -13975,8 +14716,78 @@
         </p:nvSpPr>
         <p:spPr>
           <a:xfrm>
-            <a:off x="353872" y="557784"/>
-            <a:ext cx="2717596" cy="320040"/>
+            <a:off x="354288" y="557760"/>
+            <a:ext cx="2719800" cy="932280"/>
+          </a:xfrm>
+          <a:prstGeom prst="rect">
+            <a:avLst/>
+          </a:prstGeom>
+          <a:noFill/>
+        </p:spPr>
+        <p:txBody>
+          <a:bodyPr wrap="square" lIns="0" rIns="0" tIns="0" bIns="0">
+            <a:spAutoFit/>
+          </a:bodyPr>
+          <a:lstStyle/>
+          <a:p>
+            <a:pPr algn="l"/>
+            <a:r>
+              <a:rPr sz="2000" b="1">
+                <a:solidFill>
+                  <a:srgbClr val="000000"/>
+                </a:solidFill>
+                <a:latin typeface="Freesentation"/>
+              </a:rPr>
+              <a:t>L20. Numbered List</a:t>
+            </a:r>
+          </a:p>
+        </p:txBody>
+      </p:sp>
+      <p:sp>
+        <p:nvSpPr>
+          <p:cNvPr id="4" name="TextBox 3"/>
+          <p:cNvSpPr txBox="1"/>
+          <p:nvPr/>
+        </p:nvSpPr>
+        <p:spPr>
+          <a:xfrm>
+            <a:off x="3761040" y="558624"/>
+            <a:ext cx="7549368" cy="938088"/>
+          </a:xfrm>
+          <a:prstGeom prst="rect">
+            <a:avLst/>
+          </a:prstGeom>
+          <a:noFill/>
+        </p:spPr>
+        <p:txBody>
+          <a:bodyPr wrap="square" lIns="0" rIns="0" tIns="0" bIns="0">
+            <a:spAutoFit/>
+          </a:bodyPr>
+          <a:lstStyle/>
+          <a:p>
+            <a:pPr algn="l"/>
+            <a:r>
+              <a:rPr sz="1200" b="0">
+                <a:solidFill>
+                  <a:srgbClr val="212121"/>
+                </a:solidFill>
+                <a:latin typeface="Freesentation"/>
+              </a:rPr>
+              <a:t>번호 리스트 레이아웃 — 순서 강조 단계별 절차</a:t>
+            </a:r>
+          </a:p>
+        </p:txBody>
+      </p:sp>
+      <p:sp>
+        <p:nvSpPr>
+          <p:cNvPr id="5" name="TextBox 4"/>
+          <p:cNvSpPr txBox="1"/>
+          <p:nvPr/>
+        </p:nvSpPr>
+        <p:spPr>
+          <a:xfrm>
+            <a:off x="457200" y="1600200"/>
+            <a:ext cx="11277600" cy="274320"/>
           </a:xfrm>
           <a:prstGeom prst="rect">
             <a:avLst/>
@@ -13989,28 +14800,29 @@
           </a:bodyPr>
           <a:lstStyle/>
           <a:p>
-            <a:r>
-              <a:rPr sz="2000" b="1">
-                <a:solidFill>
-                  <a:srgbClr val="000000"/>
-                </a:solidFill>
-                <a:latin typeface="Freesentation"/>
-              </a:rPr>
-              <a:t>L21. Quote Highlight</a:t>
-            </a:r>
-          </a:p>
-        </p:txBody>
-      </p:sp>
-      <p:sp>
-        <p:nvSpPr>
-          <p:cNvPr id="4" name="TextBox 3"/>
+            <a:pPr algn="l"/>
+            <a:r>
+              <a:rPr sz="1600" b="1">
+                <a:solidFill>
+                  <a:srgbClr val="0043DA"/>
+                </a:solidFill>
+                <a:latin typeface="Freesentation"/>
+              </a:rPr>
+              <a:t>AWS MSK 클러스터 구축 4단계</a:t>
+            </a:r>
+          </a:p>
+        </p:txBody>
+      </p:sp>
+      <p:sp>
+        <p:nvSpPr>
+          <p:cNvPr id="6" name="TextBox 5"/>
           <p:cNvSpPr txBox="1"/>
           <p:nvPr/>
         </p:nvSpPr>
         <p:spPr>
           <a:xfrm>
-            <a:off x="353872" y="896112"/>
-            <a:ext cx="2717596" cy="274320"/>
+            <a:off x="457200" y="1965960"/>
+            <a:ext cx="11277600" cy="228600"/>
           </a:xfrm>
           <a:prstGeom prst="rect">
             <a:avLst/>
@@ -14023,141 +14835,38 @@
           </a:bodyPr>
           <a:lstStyle/>
           <a:p>
-            <a:r>
-              <a:rPr sz="1100">
-                <a:solidFill>
-                  <a:srgbClr val="505050"/>
-                </a:solidFill>
-                <a:latin typeface="Freesentation"/>
-              </a:rPr>
-              <a:t/>
-            </a:r>
-          </a:p>
-        </p:txBody>
-      </p:sp>
-      <p:sp>
-        <p:nvSpPr>
-          <p:cNvPr id="5" name="TextBox 4"/>
-          <p:cNvSpPr txBox="1"/>
-          <p:nvPr/>
-        </p:nvSpPr>
-        <p:spPr>
-          <a:xfrm>
-            <a:off x="3760012" y="558698"/>
-            <a:ext cx="7546543" cy="365760"/>
-          </a:xfrm>
-          <a:prstGeom prst="rect">
-            <a:avLst/>
-          </a:prstGeom>
-          <a:noFill/>
-        </p:spPr>
-        <p:txBody>
-          <a:bodyPr wrap="square">
-            <a:spAutoFit/>
-          </a:bodyPr>
-          <a:lstStyle/>
-          <a:p>
-            <a:r>
-              <a:rPr sz="1200">
-                <a:solidFill>
-                  <a:srgbClr val="505050"/>
-                </a:solidFill>
-                <a:latin typeface="Freesentation"/>
-              </a:rPr>
-              <a:t>클라우드 전환 리더십 메시지</a:t>
-            </a:r>
-          </a:p>
-        </p:txBody>
-      </p:sp>
-      <p:sp>
-        <p:nvSpPr>
-          <p:cNvPr id="6" name="TextBox 5"/>
-          <p:cNvSpPr txBox="1"/>
-          <p:nvPr/>
-        </p:nvSpPr>
-        <p:spPr>
-          <a:xfrm>
-            <a:off x="457200" y="1600200"/>
-            <a:ext cx="11277295" cy="274320"/>
-          </a:xfrm>
-          <a:prstGeom prst="rect">
-            <a:avLst/>
-          </a:prstGeom>
-          <a:noFill/>
-        </p:spPr>
-        <p:txBody>
-          <a:bodyPr wrap="square">
-            <a:spAutoFit/>
-          </a:bodyPr>
-          <a:lstStyle/>
-          <a:p>
-            <a:r>
-              <a:rPr sz="1600" b="1">
-                <a:solidFill>
-                  <a:srgbClr val="0043DA"/>
-                </a:solidFill>
-                <a:latin typeface="Freesentation"/>
-              </a:rPr>
-              <a:t>클라우드 전환 추진 방향</a:t>
-            </a:r>
-          </a:p>
-        </p:txBody>
-      </p:sp>
-      <p:sp>
-        <p:nvSpPr>
-          <p:cNvPr id="7" name="TextBox 6"/>
-          <p:cNvSpPr txBox="1"/>
-          <p:nvPr/>
-        </p:nvSpPr>
-        <p:spPr>
-          <a:xfrm>
-            <a:off x="457200" y="1965960"/>
-            <a:ext cx="11277295" cy="228600"/>
-          </a:xfrm>
-          <a:prstGeom prst="rect">
-            <a:avLst/>
-          </a:prstGeom>
-          <a:noFill/>
-        </p:spPr>
-        <p:txBody>
-          <a:bodyPr wrap="square">
-            <a:spAutoFit/>
-          </a:bodyPr>
-          <a:lstStyle/>
-          <a:p>
-            <a:r>
-              <a:rPr sz="1300">
+            <a:pPr algn="l"/>
+            <a:r>
+              <a:rPr sz="1300" b="0">
                 <a:solidFill>
                   <a:srgbClr val="212121"/>
                 </a:solidFill>
                 <a:latin typeface="Freesentation"/>
               </a:rPr>
-              <a:t>CTO 메시지 (2026년 1분기 전사 회의)</a:t>
-            </a:r>
-          </a:p>
-        </p:txBody>
-      </p:sp>
-      <p:sp>
-        <p:nvSpPr>
-          <p:cNvPr id="8" name="Rounded Rectangle 7"/>
+              <a:t>프로덕션 환경 배포 절차 (2026년 4월 기준)</a:t>
+            </a:r>
+          </a:p>
+        </p:txBody>
+      </p:sp>
+      <p:sp>
+        <p:nvSpPr>
+          <p:cNvPr id="7" name="Oval 6"/>
           <p:cNvSpPr/>
           <p:nvPr/>
         </p:nvSpPr>
         <p:spPr>
           <a:xfrm>
-            <a:off x="457200" y="2423160"/>
-            <a:ext cx="7315200" cy="3657600"/>
-          </a:xfrm>
-          <a:prstGeom prst="roundRect">
+            <a:off x="457200" y="2434590"/>
+            <a:ext cx="457200" cy="457200"/>
+          </a:xfrm>
+          <a:prstGeom prst="ellipse">
             <a:avLst/>
           </a:prstGeom>
           <a:solidFill>
-            <a:srgbClr val="F8F9FA"/>
+            <a:srgbClr val="0043DA"/>
           </a:solidFill>
-          <a:ln w="6350">
-            <a:solidFill>
-              <a:srgbClr val="0043DA"/>
-            </a:solidFill>
+          <a:ln>
+            <a:noFill/>
           </a:ln>
         </p:spPr>
         <p:style>
@@ -14175,34 +14884,111 @@
           </a:fontRef>
         </p:style>
         <p:txBody>
-          <a:bodyPr rtlCol="0" anchor="ctr"/>
+          <a:bodyPr rtlCol="0" anchor="ctr" lIns="0" rIns="0" tIns="0" bIns="0"/>
           <a:lstStyle/>
           <a:p>
             <a:pPr algn="ctr"/>
-          </a:p>
-        </p:txBody>
-      </p:sp>
-      <p:sp>
-        <p:nvSpPr>
-          <p:cNvPr id="9" name="Rounded Rectangle 8"/>
+            <a:r>
+              <a:rPr sz="1800" b="1">
+                <a:solidFill>
+                  <a:srgbClr val="FFFFFF"/>
+                </a:solidFill>
+                <a:latin typeface="Freesentation 7"/>
+              </a:rPr>
+              <a:t>1</a:t>
+            </a:r>
+          </a:p>
+        </p:txBody>
+      </p:sp>
+      <p:sp>
+        <p:nvSpPr>
+          <p:cNvPr id="8" name="TextBox 7"/>
+          <p:cNvSpPr txBox="1"/>
+          <p:nvPr/>
+        </p:nvSpPr>
+        <p:spPr>
+          <a:xfrm>
+            <a:off x="1097280" y="2503170"/>
+            <a:ext cx="10637520" cy="320040"/>
+          </a:xfrm>
+          <a:prstGeom prst="rect">
+            <a:avLst/>
+          </a:prstGeom>
+          <a:noFill/>
+        </p:spPr>
+        <p:txBody>
+          <a:bodyPr wrap="square">
+            <a:spAutoFit/>
+          </a:bodyPr>
+          <a:lstStyle/>
+          <a:p>
+            <a:pPr algn="l"/>
+            <a:r>
+              <a:rPr sz="1400" b="1">
+                <a:solidFill>
+                  <a:srgbClr val="0043DA"/>
+                </a:solidFill>
+                <a:latin typeface="Freesentation"/>
+              </a:rPr>
+              <a:t>VPC 및 Subnet 설계</a:t>
+            </a:r>
+          </a:p>
+        </p:txBody>
+      </p:sp>
+      <p:sp>
+        <p:nvSpPr>
+          <p:cNvPr id="9" name="TextBox 8"/>
+          <p:cNvSpPr txBox="1"/>
+          <p:nvPr/>
+        </p:nvSpPr>
+        <p:spPr>
+          <a:xfrm>
+            <a:off x="1097280" y="2868930"/>
+            <a:ext cx="10637520" cy="457200"/>
+          </a:xfrm>
+          <a:prstGeom prst="rect">
+            <a:avLst/>
+          </a:prstGeom>
+          <a:noFill/>
+        </p:spPr>
+        <p:txBody>
+          <a:bodyPr wrap="square">
+            <a:spAutoFit/>
+          </a:bodyPr>
+          <a:lstStyle/>
+          <a:p>
+            <a:pPr algn="l"/>
+            <a:r>
+              <a:rPr sz="1300" b="0">
+                <a:solidFill>
+                  <a:srgbClr val="212121"/>
+                </a:solidFill>
+                <a:latin typeface="Freesentation"/>
+              </a:rPr>
+              <a:t>Private Subnet 3개(AZ-a/b/c) 생성, CIDR 대역 분리, 라우팅 테이블 설정</a:t>
+            </a:r>
+          </a:p>
+        </p:txBody>
+      </p:sp>
+      <p:sp>
+        <p:nvSpPr>
+          <p:cNvPr id="10" name="Oval 9"/>
           <p:cNvSpPr/>
           <p:nvPr/>
         </p:nvSpPr>
         <p:spPr>
           <a:xfrm>
-            <a:off x="7909560" y="2423160"/>
-            <a:ext cx="3822191" cy="3657600"/>
-          </a:xfrm>
-          <a:prstGeom prst="roundRect">
+            <a:off x="457200" y="3531870"/>
+            <a:ext cx="457200" cy="457200"/>
+          </a:xfrm>
+          <a:prstGeom prst="ellipse">
             <a:avLst/>
           </a:prstGeom>
           <a:solidFill>
-            <a:srgbClr val="F8F9FA"/>
+            <a:srgbClr val="0043DA"/>
           </a:solidFill>
-          <a:ln w="6350">
-            <a:solidFill>
-              <a:srgbClr val="DCDCDC"/>
-            </a:solidFill>
+          <a:ln>
+            <a:noFill/>
           </a:ln>
         </p:spPr>
         <p:style>
@@ -14220,34 +15006,111 @@
           </a:fontRef>
         </p:style>
         <p:txBody>
-          <a:bodyPr rtlCol="0" anchor="ctr"/>
+          <a:bodyPr rtlCol="0" anchor="ctr" lIns="0" rIns="0" tIns="0" bIns="0"/>
           <a:lstStyle/>
           <a:p>
             <a:pPr algn="ctr"/>
-          </a:p>
-        </p:txBody>
-      </p:sp>
-      <p:sp>
-        <p:nvSpPr>
-          <p:cNvPr id="10" name="Rounded Rectangle 9"/>
+            <a:r>
+              <a:rPr sz="1800" b="1">
+                <a:solidFill>
+                  <a:srgbClr val="FFFFFF"/>
+                </a:solidFill>
+                <a:latin typeface="Freesentation 7"/>
+              </a:rPr>
+              <a:t>2</a:t>
+            </a:r>
+          </a:p>
+        </p:txBody>
+      </p:sp>
+      <p:sp>
+        <p:nvSpPr>
+          <p:cNvPr id="11" name="TextBox 10"/>
+          <p:cNvSpPr txBox="1"/>
+          <p:nvPr/>
+        </p:nvSpPr>
+        <p:spPr>
+          <a:xfrm>
+            <a:off x="1097280" y="3600450"/>
+            <a:ext cx="10637520" cy="320040"/>
+          </a:xfrm>
+          <a:prstGeom prst="rect">
+            <a:avLst/>
+          </a:prstGeom>
+          <a:noFill/>
+        </p:spPr>
+        <p:txBody>
+          <a:bodyPr wrap="square">
+            <a:spAutoFit/>
+          </a:bodyPr>
+          <a:lstStyle/>
+          <a:p>
+            <a:pPr algn="l"/>
+            <a:r>
+              <a:rPr sz="1400" b="1">
+                <a:solidFill>
+                  <a:srgbClr val="0043DA"/>
+                </a:solidFill>
+                <a:latin typeface="Freesentation"/>
+              </a:rPr>
+              <a:t>MSK 클러스터 프로비저닝</a:t>
+            </a:r>
+          </a:p>
+        </p:txBody>
+      </p:sp>
+      <p:sp>
+        <p:nvSpPr>
+          <p:cNvPr id="12" name="TextBox 11"/>
+          <p:cNvSpPr txBox="1"/>
+          <p:nvPr/>
+        </p:nvSpPr>
+        <p:spPr>
+          <a:xfrm>
+            <a:off x="1097280" y="3966210"/>
+            <a:ext cx="10637520" cy="457200"/>
+          </a:xfrm>
+          <a:prstGeom prst="rect">
+            <a:avLst/>
+          </a:prstGeom>
+          <a:noFill/>
+        </p:spPr>
+        <p:txBody>
+          <a:bodyPr wrap="square">
+            <a:spAutoFit/>
+          </a:bodyPr>
+          <a:lstStyle/>
+          <a:p>
+            <a:pPr algn="l"/>
+            <a:r>
+              <a:rPr sz="1300" b="0">
+                <a:solidFill>
+                  <a:srgbClr val="212121"/>
+                </a:solidFill>
+                <a:latin typeface="Freesentation"/>
+              </a:rPr>
+              <a:t>kafka.m5.large 3 브로커, EBS gp3 100GB, Multi-AZ 배치 설정</a:t>
+            </a:r>
+          </a:p>
+        </p:txBody>
+      </p:sp>
+      <p:sp>
+        <p:nvSpPr>
+          <p:cNvPr id="13" name="Oval 12"/>
           <p:cNvSpPr/>
           <p:nvPr/>
         </p:nvSpPr>
         <p:spPr>
           <a:xfrm>
-            <a:off x="457200" y="6172200"/>
-            <a:ext cx="11277295" cy="457200"/>
-          </a:xfrm>
-          <a:prstGeom prst="roundRect">
+            <a:off x="457200" y="4629150"/>
+            <a:ext cx="457200" cy="457200"/>
+          </a:xfrm>
+          <a:prstGeom prst="ellipse">
             <a:avLst/>
           </a:prstGeom>
           <a:solidFill>
             <a:srgbClr val="0043DA"/>
           </a:solidFill>
           <a:ln>
-            <a:solidFill>
-              <a:srgbClr val="0043DA"/>
-            </a:solidFill>
+            <a:noFill/>
           </a:ln>
         </p:spPr>
         <p:style>
@@ -14265,23 +15128,32 @@
           </a:fontRef>
         </p:style>
         <p:txBody>
-          <a:bodyPr rtlCol="0" anchor="ctr"/>
+          <a:bodyPr rtlCol="0" anchor="ctr" lIns="0" rIns="0" tIns="0" bIns="0"/>
           <a:lstStyle/>
           <a:p>
             <a:pPr algn="ctr"/>
-          </a:p>
-        </p:txBody>
-      </p:sp>
-      <p:sp>
-        <p:nvSpPr>
-          <p:cNvPr id="11" name="TextBox 10"/>
+            <a:r>
+              <a:rPr sz="1800" b="1">
+                <a:solidFill>
+                  <a:srgbClr val="FFFFFF"/>
+                </a:solidFill>
+                <a:latin typeface="Freesentation 7"/>
+              </a:rPr>
+              <a:t>3</a:t>
+            </a:r>
+          </a:p>
+        </p:txBody>
+      </p:sp>
+      <p:sp>
+        <p:nvSpPr>
+          <p:cNvPr id="14" name="TextBox 13"/>
           <p:cNvSpPr txBox="1"/>
           <p:nvPr/>
         </p:nvSpPr>
         <p:spPr>
           <a:xfrm>
-            <a:off x="640080" y="2606040"/>
-            <a:ext cx="640080" cy="594360"/>
+            <a:off x="1097280" y="4697730"/>
+            <a:ext cx="10637520" cy="320040"/>
           </a:xfrm>
           <a:prstGeom prst="rect">
             <a:avLst/>
@@ -14294,27 +15166,29 @@
           </a:bodyPr>
           <a:lstStyle/>
           <a:p>
-            <a:r>
-              <a:rPr sz="4800">
+            <a:pPr algn="l"/>
+            <a:r>
+              <a:rPr sz="1400" b="1">
                 <a:solidFill>
                   <a:srgbClr val="0043DA"/>
                 </a:solidFill>
-              </a:rPr>
-              <a:t>❝</a:t>
-            </a:r>
-          </a:p>
-        </p:txBody>
-      </p:sp>
-      <p:sp>
-        <p:nvSpPr>
-          <p:cNvPr id="12" name="TextBox 11"/>
+                <a:latin typeface="Freesentation"/>
+              </a:rPr>
+              <a:t>보안 그룹 및 IAM 정책 구성</a:t>
+            </a:r>
+          </a:p>
+        </p:txBody>
+      </p:sp>
+      <p:sp>
+        <p:nvSpPr>
+          <p:cNvPr id="15" name="TextBox 14"/>
           <p:cNvSpPr txBox="1"/>
           <p:nvPr/>
         </p:nvSpPr>
         <p:spPr>
           <a:xfrm>
-            <a:off x="640080" y="3246120"/>
-            <a:ext cx="6949440" cy="1645920"/>
+            <a:off x="1097280" y="5063490"/>
+            <a:ext cx="10637520" cy="457200"/>
           </a:xfrm>
           <a:prstGeom prst="rect">
             <a:avLst/>
@@ -14327,28 +15201,81 @@
           </a:bodyPr>
           <a:lstStyle/>
           <a:p>
-            <a:r>
-              <a:rPr sz="2000" i="1">
+            <a:pPr algn="l"/>
+            <a:r>
+              <a:rPr sz="1300" b="0">
                 <a:solidFill>
                   <a:srgbClr val="212121"/>
                 </a:solidFill>
                 <a:latin typeface="Freesentation"/>
               </a:rPr>
-              <a:t>우리는 2026년까지 레거시 시스템의 80%를 클라우드로 전환합니다. 이는 단순한 인프라 이전이 아닌, 비즈니스 민첩성 확보를 위한 전략적 투자입니다.</a:t>
-            </a:r>
-          </a:p>
-        </p:txBody>
-      </p:sp>
-      <p:sp>
-        <p:nvSpPr>
-          <p:cNvPr id="13" name="TextBox 12"/>
+              <a:t>포트 9092/9094 허용, IAM 정책으로 Topic 권한 제어, TLS 암호화 활성화</a:t>
+            </a:r>
+          </a:p>
+        </p:txBody>
+      </p:sp>
+      <p:sp>
+        <p:nvSpPr>
+          <p:cNvPr id="16" name="Oval 15"/>
+          <p:cNvSpPr/>
+          <p:nvPr/>
+        </p:nvSpPr>
+        <p:spPr>
+          <a:xfrm>
+            <a:off x="457200" y="5726430"/>
+            <a:ext cx="457200" cy="457200"/>
+          </a:xfrm>
+          <a:prstGeom prst="ellipse">
+            <a:avLst/>
+          </a:prstGeom>
+          <a:solidFill>
+            <a:srgbClr val="0043DA"/>
+          </a:solidFill>
+          <a:ln>
+            <a:noFill/>
+          </a:ln>
+        </p:spPr>
+        <p:style>
+          <a:lnRef idx="1">
+            <a:schemeClr val="accent1"/>
+          </a:lnRef>
+          <a:fillRef idx="3">
+            <a:schemeClr val="accent1"/>
+          </a:fillRef>
+          <a:effectRef idx="2">
+            <a:schemeClr val="accent1"/>
+          </a:effectRef>
+          <a:fontRef idx="minor">
+            <a:schemeClr val="lt1"/>
+          </a:fontRef>
+        </p:style>
+        <p:txBody>
+          <a:bodyPr rtlCol="0" anchor="ctr" lIns="0" rIns="0" tIns="0" bIns="0"/>
+          <a:lstStyle/>
+          <a:p>
+            <a:pPr algn="ctr"/>
+            <a:r>
+              <a:rPr sz="1800" b="1">
+                <a:solidFill>
+                  <a:srgbClr val="FFFFFF"/>
+                </a:solidFill>
+                <a:latin typeface="Freesentation 7"/>
+              </a:rPr>
+              <a:t>4</a:t>
+            </a:r>
+          </a:p>
+        </p:txBody>
+      </p:sp>
+      <p:sp>
+        <p:nvSpPr>
+          <p:cNvPr id="17" name="TextBox 16"/>
           <p:cNvSpPr txBox="1"/>
           <p:nvPr/>
         </p:nvSpPr>
         <p:spPr>
           <a:xfrm>
-            <a:off x="4389120" y="5029200"/>
-            <a:ext cx="3200400" cy="365760"/>
+            <a:off x="1097280" y="5795010"/>
+            <a:ext cx="10637520" cy="320040"/>
           </a:xfrm>
           <a:prstGeom prst="rect">
             <a:avLst/>
@@ -14361,29 +15288,29 @@
           </a:bodyPr>
           <a:lstStyle/>
           <a:p>
-            <a:pPr algn="r"/>
-            <a:r>
-              <a:rPr sz="1300" b="1">
-                <a:solidFill>
-                  <a:srgbClr val="505050"/>
-                </a:solidFill>
-                <a:latin typeface="Freesentation"/>
-              </a:rPr>
-              <a:t>— 김철수, CTO  (GS네오텍)</a:t>
-            </a:r>
-          </a:p>
-        </p:txBody>
-      </p:sp>
-      <p:sp>
-        <p:nvSpPr>
-          <p:cNvPr id="14" name="TextBox 13"/>
+            <a:pPr algn="l"/>
+            <a:r>
+              <a:rPr sz="1400" b="1">
+                <a:solidFill>
+                  <a:srgbClr val="0043DA"/>
+                </a:solidFill>
+                <a:latin typeface="Freesentation"/>
+              </a:rPr>
+              <a:t>모니터링 및 알람 설정</a:t>
+            </a:r>
+          </a:p>
+        </p:txBody>
+      </p:sp>
+      <p:sp>
+        <p:nvSpPr>
+          <p:cNvPr id="18" name="TextBox 17"/>
           <p:cNvSpPr txBox="1"/>
           <p:nvPr/>
         </p:nvSpPr>
         <p:spPr>
           <a:xfrm>
-            <a:off x="8092440" y="2606040"/>
-            <a:ext cx="3474720" cy="320040"/>
+            <a:off x="1097280" y="6160770"/>
+            <a:ext cx="10637520" cy="457200"/>
           </a:xfrm>
           <a:prstGeom prst="rect">
             <a:avLst/>
@@ -14396,162 +15323,15 @@
           </a:bodyPr>
           <a:lstStyle/>
           <a:p>
-            <a:r>
-              <a:rPr sz="1400" b="1">
-                <a:solidFill>
-                  <a:srgbClr val="0043DA"/>
-                </a:solidFill>
-                <a:latin typeface="Freesentation"/>
-              </a:rPr>
-              <a:t>📊 컨텍스트</a:t>
-            </a:r>
-          </a:p>
-        </p:txBody>
-      </p:sp>
-      <p:sp>
-        <p:nvSpPr>
-          <p:cNvPr id="15" name="TextBox 14"/>
-          <p:cNvSpPr txBox="1"/>
-          <p:nvPr/>
-        </p:nvSpPr>
-        <p:spPr>
-          <a:xfrm>
-            <a:off x="8092440" y="3017520"/>
-            <a:ext cx="3474720" cy="2926080"/>
-          </a:xfrm>
-          <a:prstGeom prst="rect">
-            <a:avLst/>
-          </a:prstGeom>
-          <a:noFill/>
-        </p:spPr>
-        <p:txBody>
-          <a:bodyPr wrap="square">
-            <a:spAutoFit/>
-          </a:bodyPr>
-          <a:lstStyle/>
-          <a:p>
-            <a:r>
-              <a:rPr sz="1300">
+            <a:pPr algn="l"/>
+            <a:r>
+              <a:rPr sz="1300" b="0">
                 <a:solidFill>
                   <a:srgbClr val="212121"/>
                 </a:solidFill>
                 <a:latin typeface="Freesentation"/>
               </a:rPr>
-              <a:t>₩3.2억/년 절감</a:t>
-            </a:r>
-          </a:p>
-          <a:p>
-            <a:r>
-              <a:rPr sz="1300">
-                <a:solidFill>
-                  <a:srgbClr val="212121"/>
-                </a:solidFill>
-                <a:latin typeface="Freesentation"/>
-              </a:rPr>
-              <a:t>인프라+인력 합산 (2025 실측)</a:t>
-            </a:r>
-          </a:p>
-          <a:p/>
-          <a:p>
-            <a:r>
-              <a:rPr sz="1300">
-                <a:solidFill>
-                  <a:srgbClr val="212121"/>
-                </a:solidFill>
-                <a:latin typeface="Freesentation"/>
-              </a:rPr>
-              <a:t>레거시 42개 시스템</a:t>
-            </a:r>
-          </a:p>
-          <a:p>
-            <a:r>
-              <a:rPr sz="1300">
-                <a:solidFill>
-                  <a:srgbClr val="212121"/>
-                </a:solidFill>
-                <a:latin typeface="Freesentation"/>
-              </a:rPr>
-              <a:t>전환 대상, 목표 전환율 80%</a:t>
-            </a:r>
-          </a:p>
-          <a:p/>
-          <a:p>
-            <a:r>
-              <a:rPr sz="1300">
-                <a:solidFill>
-                  <a:srgbClr val="212121"/>
-                </a:solidFill>
-                <a:latin typeface="Freesentation"/>
-              </a:rPr>
-              <a:t>2026-Q4 완료 기한</a:t>
-            </a:r>
-          </a:p>
-          <a:p>
-            <a:r>
-              <a:rPr sz="1300">
-                <a:solidFill>
-                  <a:srgbClr val="212121"/>
-                </a:solidFill>
-                <a:latin typeface="Freesentation"/>
-              </a:rPr>
-              <a:t>1차 마감 2026-Q2</a:t>
-            </a:r>
-          </a:p>
-          <a:p/>
-          <a:p>
-            <a:r>
-              <a:rPr sz="1300">
-                <a:solidFill>
-                  <a:srgbClr val="212121"/>
-                </a:solidFill>
-                <a:latin typeface="Freesentation"/>
-              </a:rPr>
-              <a:t>TTM -40%</a:t>
-            </a:r>
-          </a:p>
-          <a:p>
-            <a:r>
-              <a:rPr sz="1300">
-                <a:solidFill>
-                  <a:srgbClr val="212121"/>
-                </a:solidFill>
-                <a:latin typeface="Freesentation"/>
-              </a:rPr>
-              <a:t>클라우드 전환 후 제품 출시 단축</a:t>
-            </a:r>
-          </a:p>
-        </p:txBody>
-      </p:sp>
-      <p:sp>
-        <p:nvSpPr>
-          <p:cNvPr id="16" name="TextBox 15"/>
-          <p:cNvSpPr txBox="1"/>
-          <p:nvPr/>
-        </p:nvSpPr>
-        <p:spPr>
-          <a:xfrm>
-            <a:off x="640080" y="6217920"/>
-            <a:ext cx="10881360" cy="365760"/>
-          </a:xfrm>
-          <a:prstGeom prst="rect">
-            <a:avLst/>
-          </a:prstGeom>
-          <a:noFill/>
-        </p:spPr>
-        <p:txBody>
-          <a:bodyPr wrap="square">
-            <a:spAutoFit/>
-          </a:bodyPr>
-          <a:lstStyle/>
-          <a:p>
-            <a:r>
-              <a:rPr sz="1300" b="1">
-                <a:solidFill>
-                  <a:srgbClr val="FFFFFF"/>
-                </a:solidFill>
-                <a:latin typeface="Freesentation"/>
-              </a:rPr>
-              <a:t>💡 핵심: 클라우드 전환은 비용 절감이 아닌 민첩성 확보 — 경쟁사 대비 TTM 40% 단축 목표</a:t>
+              <a:t>CloudWatch 지표 활성화, CPU/Disk 임계치 알람, SNS 통보 설정</a:t>
             </a:r>
           </a:p>
         </p:txBody>
@@ -14624,7 +15404,7 @@
                 </a:solidFill>
                 <a:latin typeface="Freesentation"/>
               </a:rPr>
-              <a:t>L22. Split Text+Code</a:t>
+              <a:t>L21. Quote Highlight</a:t>
             </a:r>
           </a:p>
         </p:txBody>
@@ -14692,7 +15472,7 @@
                 </a:solidFill>
                 <a:latin typeface="Freesentation"/>
               </a:rPr>
-              <a:t>AWS CLI 기반 MSK 프로비저닝</a:t>
+              <a:t>클라우드 전환 리더십 메시지</a:t>
             </a:r>
           </a:p>
         </p:txBody>
@@ -14726,7 +15506,7 @@
                 </a:solidFill>
                 <a:latin typeface="Freesentation"/>
               </a:rPr>
-              <a:t>AWS CLI로 MSK 클러스터 생성</a:t>
+              <a:t>클라우드 전환 추진 방향</a:t>
             </a:r>
           </a:p>
         </p:txBody>
@@ -14760,188 +15540,32 @@
                 </a:solidFill>
                 <a:latin typeface="Freesentation"/>
               </a:rPr>
-              <a:t>명령줄 기반 프로비저닝 절차 (2026년 4월 기준)</a:t>
-            </a:r>
-          </a:p>
-        </p:txBody>
-      </p:sp>
-      <p:sp>
-        <p:nvSpPr>
-          <p:cNvPr id="8" name="TextBox 7"/>
-          <p:cNvSpPr txBox="1"/>
+              <a:t>CTO 메시지 (2026년 1분기 전사 회의)</a:t>
+            </a:r>
+          </a:p>
+        </p:txBody>
+      </p:sp>
+      <p:sp>
+        <p:nvSpPr>
+          <p:cNvPr id="8" name="Rounded Rectangle 7"/>
+          <p:cNvSpPr/>
           <p:nvPr/>
         </p:nvSpPr>
         <p:spPr>
           <a:xfrm>
             <a:off x="457200" y="2423160"/>
-            <a:ext cx="5394960" cy="3657600"/>
-          </a:xfrm>
-          <a:prstGeom prst="rect">
-            <a:avLst/>
-          </a:prstGeom>
-          <a:noFill/>
-        </p:spPr>
-        <p:txBody>
-          <a:bodyPr wrap="square">
-            <a:spAutoFit/>
-          </a:bodyPr>
-          <a:lstStyle/>
-          <a:p>
-            <a:r>
-              <a:rPr sz="1400" b="1">
-                <a:solidFill>
-                  <a:srgbClr val="212121"/>
-                </a:solidFill>
-                <a:latin typeface="Freesentation"/>
-              </a:rPr>
-              <a:t>① 클러스터 설정 JSON 작성</a:t>
-            </a:r>
-          </a:p>
-          <a:p>
-            <a:r>
-              <a:rPr sz="1300">
-                <a:solidFill>
-                  <a:srgbClr val="212121"/>
-                </a:solidFill>
-                <a:latin typeface="Freesentation"/>
-              </a:rPr>
-              <a:t>   broker-node-group-info, kafka-version,</a:t>
-            </a:r>
-          </a:p>
-          <a:p>
-            <a:r>
-              <a:rPr sz="1300">
-                <a:solidFill>
-                  <a:srgbClr val="212121"/>
-                </a:solidFill>
-                <a:latin typeface="Freesentation"/>
-              </a:rPr>
-              <a:t>   cluster-name 필수 항목</a:t>
-            </a:r>
-          </a:p>
-          <a:p/>
-          <a:p>
-            <a:r>
-              <a:rPr sz="1400" b="1">
-                <a:solidFill>
-                  <a:srgbClr val="212121"/>
-                </a:solidFill>
-                <a:latin typeface="Freesentation"/>
-              </a:rPr>
-              <a:t>② VPC Subnet ID 확인</a:t>
-            </a:r>
-          </a:p>
-          <a:p>
-            <a:r>
-              <a:rPr sz="1300">
-                <a:solidFill>
-                  <a:srgbClr val="212121"/>
-                </a:solidFill>
-                <a:latin typeface="Freesentation"/>
-              </a:rPr>
-              <a:t>   Private Subnet 3개 (AZ-a/b/c) ID 확보</a:t>
-            </a:r>
-          </a:p>
-          <a:p>
-            <a:r>
-              <a:rPr sz="1300">
-                <a:solidFill>
-                  <a:srgbClr val="212121"/>
-                </a:solidFill>
-                <a:latin typeface="Freesentation"/>
-              </a:rPr>
-              <a:t>   aws ec2 describe-subnets 명령 활용</a:t>
-            </a:r>
-          </a:p>
-          <a:p/>
-          <a:p>
-            <a:r>
-              <a:rPr sz="1400" b="1">
-                <a:solidFill>
-                  <a:srgbClr val="212121"/>
-                </a:solidFill>
-                <a:latin typeface="Freesentation"/>
-              </a:rPr>
-              <a:t>③ 생성 명령 실행</a:t>
-            </a:r>
-          </a:p>
-          <a:p>
-            <a:r>
-              <a:rPr sz="1300">
-                <a:solidFill>
-                  <a:srgbClr val="212121"/>
-                </a:solidFill>
-                <a:latin typeface="Freesentation"/>
-              </a:rPr>
-              <a:t>   create-cluster 명령어 + 설정 파일 참조</a:t>
-            </a:r>
-          </a:p>
-          <a:p>
-            <a:r>
-              <a:rPr sz="1300">
-                <a:solidFill>
-                  <a:srgbClr val="212121"/>
-                </a:solidFill>
-                <a:latin typeface="Freesentation"/>
-              </a:rPr>
-              <a:t>   완료까지 5~10분 소요</a:t>
-            </a:r>
-          </a:p>
-          <a:p/>
-          <a:p>
-            <a:r>
-              <a:rPr sz="1400" b="1">
-                <a:solidFill>
-                  <a:srgbClr val="212121"/>
-                </a:solidFill>
-                <a:latin typeface="Freesentation"/>
-              </a:rPr>
-              <a:t>④ 생성 완료 확인</a:t>
-            </a:r>
-          </a:p>
-          <a:p>
-            <a:r>
-              <a:rPr sz="1300">
-                <a:solidFill>
-                  <a:srgbClr val="212121"/>
-                </a:solidFill>
-                <a:latin typeface="Freesentation"/>
-              </a:rPr>
-              <a:t>   describe-cluster 응답 State="ACTIVE" 확인</a:t>
-            </a:r>
-          </a:p>
-          <a:p>
-            <a:r>
-              <a:rPr sz="1300">
-                <a:solidFill>
-                  <a:srgbClr val="212121"/>
-                </a:solidFill>
-                <a:latin typeface="Freesentation"/>
-              </a:rPr>
-              <a:t>   CloudWatch 메트릭 수집 시작 확인</a:t>
-            </a:r>
-          </a:p>
-        </p:txBody>
-      </p:sp>
-      <p:sp>
-        <p:nvSpPr>
-          <p:cNvPr id="9" name="Rounded Rectangle 8"/>
-          <p:cNvSpPr/>
-          <p:nvPr/>
-        </p:nvSpPr>
-        <p:spPr>
-          <a:xfrm>
-            <a:off x="6126480" y="2423160"/>
-            <a:ext cx="5608015" cy="3657600"/>
-          </a:xfrm>
-          <a:prstGeom prst="rect">
+            <a:ext cx="7315200" cy="3657600"/>
+          </a:xfrm>
+          <a:prstGeom prst="roundRect">
             <a:avLst/>
           </a:prstGeom>
           <a:solidFill>
-            <a:srgbClr val="1E1E1E"/>
+            <a:srgbClr val="F8F9FA"/>
           </a:solidFill>
-          <a:ln w="9525">
-            <a:noFill/>
+          <a:ln w="6350">
+            <a:solidFill>
+              <a:srgbClr val="0043DA"/>
+            </a:solidFill>
           </a:ln>
         </p:spPr>
         <p:style>
@@ -14968,24 +15592,24 @@
       </p:sp>
       <p:sp>
         <p:nvSpPr>
-          <p:cNvPr id="10" name="Rectangle 9"/>
+          <p:cNvPr id="9" name="Rounded Rectangle 8"/>
           <p:cNvSpPr/>
           <p:nvPr/>
         </p:nvSpPr>
         <p:spPr>
           <a:xfrm>
-            <a:off x="6126480" y="2423160"/>
-            <a:ext cx="5608015" cy="274320"/>
-          </a:xfrm>
-          <a:prstGeom prst="rect">
+            <a:off x="7909560" y="2423160"/>
+            <a:ext cx="3822191" cy="3657600"/>
+          </a:xfrm>
+          <a:prstGeom prst="roundRect">
             <a:avLst/>
           </a:prstGeom>
           <a:solidFill>
-            <a:srgbClr val="2C001E"/>
+            <a:srgbClr val="F8F9FA"/>
           </a:solidFill>
-          <a:ln>
+          <a:ln w="6350">
             <a:solidFill>
-              <a:srgbClr val="2D2D2D"/>
+              <a:srgbClr val="DCDCDC"/>
             </a:solidFill>
           </a:ln>
         </p:spPr>
@@ -15008,21 +15632,12 @@
           <a:lstStyle/>
           <a:p>
             <a:pPr algn="ctr"/>
-            <a:r>
-              <a:rPr sz="1000" b="0">
-                <a:solidFill>
-                  <a:srgbClr val="D0D0D0"/>
-                </a:solidFill>
-                <a:latin typeface="Courier New"/>
-              </a:rPr>
-              <a:t>ubuntu@msk-cluster: ~ — bash</a:t>
-            </a:r>
-          </a:p>
-        </p:txBody>
-      </p:sp>
-      <p:sp>
-        <p:nvSpPr>
-          <p:cNvPr id="11" name="Rounded Rectangle 10"/>
+          </a:p>
+        </p:txBody>
+      </p:sp>
+      <p:sp>
+        <p:nvSpPr>
+          <p:cNvPr id="10" name="Rounded Rectangle 9"/>
           <p:cNvSpPr/>
           <p:nvPr/>
         </p:nvSpPr>
@@ -15031,15 +15646,15 @@
             <a:off x="457200" y="6172200"/>
             <a:ext cx="11277295" cy="457200"/>
           </a:xfrm>
-          <a:prstGeom prst="rect">
+          <a:prstGeom prst="roundRect">
             <a:avLst/>
           </a:prstGeom>
           <a:solidFill>
-            <a:srgbClr val="F8F9FA"/>
+            <a:srgbClr val="0043DA"/>
           </a:solidFill>
-          <a:ln w="6350">
+          <a:ln>
             <a:solidFill>
-              <a:srgbClr val="4CB88F"/>
+              <a:srgbClr val="0043DA"/>
             </a:solidFill>
           </a:ln>
         </p:spPr>
@@ -15067,14 +15682,14 @@
       </p:sp>
       <p:sp>
         <p:nvSpPr>
-          <p:cNvPr id="12" name="TextBox 11"/>
+          <p:cNvPr id="11" name="TextBox 10"/>
           <p:cNvSpPr txBox="1"/>
           <p:nvPr/>
         </p:nvSpPr>
         <p:spPr>
           <a:xfrm>
-            <a:off x="6309360" y="2743200"/>
-            <a:ext cx="5212080" cy="3200400"/>
+            <a:off x="640080" y="2606040"/>
+            <a:ext cx="640080" cy="594360"/>
           </a:xfrm>
           <a:prstGeom prst="rect">
             <a:avLst/>
@@ -15088,39 +15703,26 @@
           <a:lstStyle/>
           <a:p>
             <a:r>
-              <a:rPr sz="1100">
-                <a:solidFill>
-                  <a:srgbClr val="FFFFFF"/>
-                </a:solidFill>
-                <a:latin typeface="Courier New"/>
-              </a:rPr>
-              <a:t>ubuntu@msk-cluster:~$ aws kafka create-cluster \
-  --cluster-name my-msk-cluster \
-  --broker-node-group-info file://broker-info.json \
-  --kafka-version 3.5.1 \
-  --number-of-broker-nodes 3 \
-  --region ap-northeast-2
-# 응답 예시
-{
-  "ClusterArn": "arn:aws:kafka:ap-northeast-2:...",
-  "ClusterName": "my-msk-cluster",
-  "State": "CREATING"
-}
-ubuntu@msk-cluster:~$ aws kafka describe-cluster --cluster-arn &lt;ARN&gt;</a:t>
-            </a:r>
-          </a:p>
-        </p:txBody>
-      </p:sp>
-      <p:sp>
-        <p:nvSpPr>
-          <p:cNvPr id="13" name="TextBox 12"/>
+              <a:rPr sz="4800">
+                <a:solidFill>
+                  <a:srgbClr val="0043DA"/>
+                </a:solidFill>
+              </a:rPr>
+              <a:t>❝</a:t>
+            </a:r>
+          </a:p>
+        </p:txBody>
+      </p:sp>
+      <p:sp>
+        <p:nvSpPr>
+          <p:cNvPr id="12" name="TextBox 11"/>
           <p:cNvSpPr txBox="1"/>
           <p:nvPr/>
         </p:nvSpPr>
         <p:spPr>
           <a:xfrm>
-            <a:off x="640080" y="6217920"/>
-            <a:ext cx="10881360" cy="365760"/>
+            <a:off x="640080" y="3246120"/>
+            <a:ext cx="6949440" cy="1645920"/>
           </a:xfrm>
           <a:prstGeom prst="rect">
             <a:avLst/>
@@ -15134,143 +15736,231 @@
           <a:lstStyle/>
           <a:p>
             <a:r>
-              <a:rPr sz="1200">
+              <a:rPr sz="2000" i="1">
                 <a:solidFill>
                   <a:srgbClr val="212121"/>
                 </a:solidFill>
                 <a:latin typeface="Freesentation"/>
               </a:rPr>
-              <a:t>✅ 확인: aws kafka describe-cluster 응답에서 State="ACTIVE" 확인   |   소요시간: 5~10분   |   실패 시: CloudWatch /aws/msk/ 로그 확인</a:t>
-            </a:r>
-          </a:p>
-        </p:txBody>
-      </p:sp>
-      <p:sp>
-        <p:nvSpPr>
-          <p:cNvPr id="14" name="Oval 13"/>
-          <p:cNvSpPr/>
-          <p:nvPr/>
-        </p:nvSpPr>
-        <p:spPr>
-          <a:xfrm>
-            <a:off x="6263640" y="2514600"/>
-            <a:ext cx="91440" cy="91440"/>
-          </a:xfrm>
-          <a:prstGeom prst="ellipse">
-            <a:avLst/>
-          </a:prstGeom>
-          <a:solidFill>
-            <a:srgbClr val="FF5F57"/>
-          </a:solidFill>
-          <a:ln>
-            <a:noFill/>
-          </a:ln>
-        </p:spPr>
-        <p:style>
-          <a:lnRef idx="1">
-            <a:schemeClr val="accent1"/>
-          </a:lnRef>
-          <a:fillRef idx="3">
-            <a:schemeClr val="accent1"/>
-          </a:fillRef>
-          <a:effectRef idx="2">
-            <a:schemeClr val="accent1"/>
-          </a:effectRef>
-          <a:fontRef idx="minor">
-            <a:schemeClr val="lt1"/>
-          </a:fontRef>
-        </p:style>
-        <p:txBody>
-          <a:bodyPr rtlCol="0" anchor="ctr"/>
-          <a:lstStyle/>
-          <a:p>
-            <a:pPr algn="ctr"/>
-          </a:p>
-        </p:txBody>
-      </p:sp>
-      <p:sp>
-        <p:nvSpPr>
-          <p:cNvPr id="15" name="Oval 14"/>
-          <p:cNvSpPr/>
-          <p:nvPr/>
-        </p:nvSpPr>
-        <p:spPr>
-          <a:xfrm>
-            <a:off x="6423660" y="2514600"/>
-            <a:ext cx="91440" cy="91440"/>
-          </a:xfrm>
-          <a:prstGeom prst="ellipse">
-            <a:avLst/>
-          </a:prstGeom>
-          <a:solidFill>
-            <a:srgbClr val="FEBC2E"/>
-          </a:solidFill>
-          <a:ln>
-            <a:noFill/>
-          </a:ln>
-        </p:spPr>
-        <p:style>
-          <a:lnRef idx="1">
-            <a:schemeClr val="accent1"/>
-          </a:lnRef>
-          <a:fillRef idx="3">
-            <a:schemeClr val="accent1"/>
-          </a:fillRef>
-          <a:effectRef idx="2">
-            <a:schemeClr val="accent1"/>
-          </a:effectRef>
-          <a:fontRef idx="minor">
-            <a:schemeClr val="lt1"/>
-          </a:fontRef>
-        </p:style>
-        <p:txBody>
-          <a:bodyPr rtlCol="0" anchor="ctr"/>
-          <a:lstStyle/>
-          <a:p>
-            <a:pPr algn="ctr"/>
-          </a:p>
-        </p:txBody>
-      </p:sp>
-      <p:sp>
-        <p:nvSpPr>
-          <p:cNvPr id="16" name="Oval 15"/>
-          <p:cNvSpPr/>
-          <p:nvPr/>
-        </p:nvSpPr>
-        <p:spPr>
-          <a:xfrm>
-            <a:off x="6583680" y="2514600"/>
-            <a:ext cx="91440" cy="91440"/>
-          </a:xfrm>
-          <a:prstGeom prst="ellipse">
-            <a:avLst/>
-          </a:prstGeom>
-          <a:solidFill>
-            <a:srgbClr val="28C840"/>
-          </a:solidFill>
-          <a:ln>
-            <a:noFill/>
-          </a:ln>
-        </p:spPr>
-        <p:style>
-          <a:lnRef idx="1">
-            <a:schemeClr val="accent1"/>
-          </a:lnRef>
-          <a:fillRef idx="3">
-            <a:schemeClr val="accent1"/>
-          </a:fillRef>
-          <a:effectRef idx="2">
-            <a:schemeClr val="accent1"/>
-          </a:effectRef>
-          <a:fontRef idx="minor">
-            <a:schemeClr val="lt1"/>
-          </a:fontRef>
-        </p:style>
-        <p:txBody>
-          <a:bodyPr rtlCol="0" anchor="ctr"/>
-          <a:lstStyle/>
-          <a:p>
-            <a:pPr algn="ctr"/>
+              <a:t>우리는 2026년까지 레거시 시스템의 80%를 클라우드로 전환합니다. 이는 단순한 인프라 이전이 아닌, 비즈니스 민첩성 확보를 위한 전략적 투자입니다.</a:t>
+            </a:r>
+          </a:p>
+        </p:txBody>
+      </p:sp>
+      <p:sp>
+        <p:nvSpPr>
+          <p:cNvPr id="13" name="TextBox 12"/>
+          <p:cNvSpPr txBox="1"/>
+          <p:nvPr/>
+        </p:nvSpPr>
+        <p:spPr>
+          <a:xfrm>
+            <a:off x="4389120" y="5029200"/>
+            <a:ext cx="3200400" cy="365760"/>
+          </a:xfrm>
+          <a:prstGeom prst="rect">
+            <a:avLst/>
+          </a:prstGeom>
+          <a:noFill/>
+        </p:spPr>
+        <p:txBody>
+          <a:bodyPr wrap="square">
+            <a:spAutoFit/>
+          </a:bodyPr>
+          <a:lstStyle/>
+          <a:p>
+            <a:pPr algn="r"/>
+            <a:r>
+              <a:rPr sz="1300" b="1">
+                <a:solidFill>
+                  <a:srgbClr val="505050"/>
+                </a:solidFill>
+                <a:latin typeface="Freesentation"/>
+              </a:rPr>
+              <a:t>— 김철수, CTO  (GS네오텍)</a:t>
+            </a:r>
+          </a:p>
+        </p:txBody>
+      </p:sp>
+      <p:sp>
+        <p:nvSpPr>
+          <p:cNvPr id="14" name="TextBox 13"/>
+          <p:cNvSpPr txBox="1"/>
+          <p:nvPr/>
+        </p:nvSpPr>
+        <p:spPr>
+          <a:xfrm>
+            <a:off x="8092440" y="2606040"/>
+            <a:ext cx="3474720" cy="320040"/>
+          </a:xfrm>
+          <a:prstGeom prst="rect">
+            <a:avLst/>
+          </a:prstGeom>
+          <a:noFill/>
+        </p:spPr>
+        <p:txBody>
+          <a:bodyPr wrap="square">
+            <a:spAutoFit/>
+          </a:bodyPr>
+          <a:lstStyle/>
+          <a:p>
+            <a:r>
+              <a:rPr sz="1400" b="1">
+                <a:solidFill>
+                  <a:srgbClr val="0043DA"/>
+                </a:solidFill>
+                <a:latin typeface="Freesentation"/>
+              </a:rPr>
+              <a:t>📊 컨텍스트</a:t>
+            </a:r>
+          </a:p>
+        </p:txBody>
+      </p:sp>
+      <p:sp>
+        <p:nvSpPr>
+          <p:cNvPr id="15" name="TextBox 14"/>
+          <p:cNvSpPr txBox="1"/>
+          <p:nvPr/>
+        </p:nvSpPr>
+        <p:spPr>
+          <a:xfrm>
+            <a:off x="8092440" y="3017520"/>
+            <a:ext cx="3474720" cy="2926080"/>
+          </a:xfrm>
+          <a:prstGeom prst="rect">
+            <a:avLst/>
+          </a:prstGeom>
+          <a:noFill/>
+        </p:spPr>
+        <p:txBody>
+          <a:bodyPr wrap="square">
+            <a:spAutoFit/>
+          </a:bodyPr>
+          <a:lstStyle/>
+          <a:p>
+            <a:r>
+              <a:rPr sz="1300">
+                <a:solidFill>
+                  <a:srgbClr val="212121"/>
+                </a:solidFill>
+                <a:latin typeface="Freesentation"/>
+              </a:rPr>
+              <a:t>₩3.2억/년 절감</a:t>
+            </a:r>
+          </a:p>
+          <a:p>
+            <a:r>
+              <a:rPr sz="1300">
+                <a:solidFill>
+                  <a:srgbClr val="212121"/>
+                </a:solidFill>
+                <a:latin typeface="Freesentation"/>
+              </a:rPr>
+              <a:t>인프라+인력 합산 (2025 실측)</a:t>
+            </a:r>
+          </a:p>
+          <a:p/>
+          <a:p>
+            <a:r>
+              <a:rPr sz="1300">
+                <a:solidFill>
+                  <a:srgbClr val="212121"/>
+                </a:solidFill>
+                <a:latin typeface="Freesentation"/>
+              </a:rPr>
+              <a:t>레거시 42개 시스템</a:t>
+            </a:r>
+          </a:p>
+          <a:p>
+            <a:r>
+              <a:rPr sz="1300">
+                <a:solidFill>
+                  <a:srgbClr val="212121"/>
+                </a:solidFill>
+                <a:latin typeface="Freesentation"/>
+              </a:rPr>
+              <a:t>전환 대상, 목표 전환율 80%</a:t>
+            </a:r>
+          </a:p>
+          <a:p/>
+          <a:p>
+            <a:r>
+              <a:rPr sz="1300">
+                <a:solidFill>
+                  <a:srgbClr val="212121"/>
+                </a:solidFill>
+                <a:latin typeface="Freesentation"/>
+              </a:rPr>
+              <a:t>2026-Q4 완료 기한</a:t>
+            </a:r>
+          </a:p>
+          <a:p>
+            <a:r>
+              <a:rPr sz="1300">
+                <a:solidFill>
+                  <a:srgbClr val="212121"/>
+                </a:solidFill>
+                <a:latin typeface="Freesentation"/>
+              </a:rPr>
+              <a:t>1차 마감 2026-Q2</a:t>
+            </a:r>
+          </a:p>
+          <a:p/>
+          <a:p>
+            <a:r>
+              <a:rPr sz="1300">
+                <a:solidFill>
+                  <a:srgbClr val="212121"/>
+                </a:solidFill>
+                <a:latin typeface="Freesentation"/>
+              </a:rPr>
+              <a:t>TTM -40%</a:t>
+            </a:r>
+          </a:p>
+          <a:p>
+            <a:r>
+              <a:rPr sz="1300">
+                <a:solidFill>
+                  <a:srgbClr val="212121"/>
+                </a:solidFill>
+                <a:latin typeface="Freesentation"/>
+              </a:rPr>
+              <a:t>클라우드 전환 후 제품 출시 단축</a:t>
+            </a:r>
+          </a:p>
+        </p:txBody>
+      </p:sp>
+      <p:sp>
+        <p:nvSpPr>
+          <p:cNvPr id="16" name="TextBox 15"/>
+          <p:cNvSpPr txBox="1"/>
+          <p:nvPr/>
+        </p:nvSpPr>
+        <p:spPr>
+          <a:xfrm>
+            <a:off x="640080" y="6217920"/>
+            <a:ext cx="10881360" cy="365760"/>
+          </a:xfrm>
+          <a:prstGeom prst="rect">
+            <a:avLst/>
+          </a:prstGeom>
+          <a:noFill/>
+        </p:spPr>
+        <p:txBody>
+          <a:bodyPr wrap="square">
+            <a:spAutoFit/>
+          </a:bodyPr>
+          <a:lstStyle/>
+          <a:p>
+            <a:r>
+              <a:rPr sz="1300" b="1">
+                <a:solidFill>
+                  <a:srgbClr val="FFFFFF"/>
+                </a:solidFill>
+                <a:latin typeface="Freesentation"/>
+              </a:rPr>
+              <a:t>💡 핵심: 클라우드 전환은 비용 절감이 아닌 민첩성 확보 — 경쟁사 대비 TTM 40% 단축 목표</a:t>
+            </a:r>
           </a:p>
         </p:txBody>
       </p:sp>
@@ -15342,7 +16032,7 @@
                 </a:solidFill>
                 <a:latin typeface="Freesentation"/>
               </a:rPr>
-              <a:t>L23. Stats Dashboard</a:t>
+              <a:t>L22. Split Text+Code</a:t>
             </a:r>
           </a:p>
         </p:txBody>
@@ -15410,7 +16100,7 @@
                 </a:solidFill>
                 <a:latin typeface="Freesentation"/>
               </a:rPr>
-              <a:t>MSK 도입 성과 지표</a:t>
+              <a:t>AWS CLI 기반 MSK 프로비저닝</a:t>
             </a:r>
           </a:p>
         </p:txBody>
@@ -15444,7 +16134,7 @@
                 </a:solidFill>
                 <a:latin typeface="Freesentation"/>
               </a:rPr>
-              <a:t>AWS MSK 도입 효과 — 핵심 성과 지표</a:t>
+              <a:t>AWS CLI로 MSK 클러스터 생성</a:t>
             </a:r>
           </a:p>
         </p:txBody>
@@ -15478,32 +16168,188 @@
                 </a:solidFill>
                 <a:latin typeface="Freesentation"/>
               </a:rPr>
-              <a:t>2026년 1분기 실측 기준 (운영 6개월 후)</a:t>
-            </a:r>
-          </a:p>
-        </p:txBody>
-      </p:sp>
-      <p:sp>
-        <p:nvSpPr>
-          <p:cNvPr id="8" name="Rounded Rectangle 7"/>
+              <a:t>명령줄 기반 프로비저닝 절차 (2026년 4월 기준)</a:t>
+            </a:r>
+          </a:p>
+        </p:txBody>
+      </p:sp>
+      <p:sp>
+        <p:nvSpPr>
+          <p:cNvPr id="8" name="TextBox 7"/>
+          <p:cNvSpPr txBox="1"/>
+          <p:nvPr/>
+        </p:nvSpPr>
+        <p:spPr>
+          <a:xfrm>
+            <a:off x="457200" y="2423160"/>
+            <a:ext cx="5394960" cy="3657600"/>
+          </a:xfrm>
+          <a:prstGeom prst="rect">
+            <a:avLst/>
+          </a:prstGeom>
+          <a:noFill/>
+        </p:spPr>
+        <p:txBody>
+          <a:bodyPr wrap="square">
+            <a:spAutoFit/>
+          </a:bodyPr>
+          <a:lstStyle/>
+          <a:p>
+            <a:r>
+              <a:rPr sz="1400" b="1">
+                <a:solidFill>
+                  <a:srgbClr val="212121"/>
+                </a:solidFill>
+                <a:latin typeface="Freesentation"/>
+              </a:rPr>
+              <a:t>① 클러스터 설정 JSON 작성</a:t>
+            </a:r>
+          </a:p>
+          <a:p>
+            <a:r>
+              <a:rPr sz="1300">
+                <a:solidFill>
+                  <a:srgbClr val="212121"/>
+                </a:solidFill>
+                <a:latin typeface="Freesentation"/>
+              </a:rPr>
+              <a:t>   broker-node-group-info, kafka-version,</a:t>
+            </a:r>
+          </a:p>
+          <a:p>
+            <a:r>
+              <a:rPr sz="1300">
+                <a:solidFill>
+                  <a:srgbClr val="212121"/>
+                </a:solidFill>
+                <a:latin typeface="Freesentation"/>
+              </a:rPr>
+              <a:t>   cluster-name 필수 항목</a:t>
+            </a:r>
+          </a:p>
+          <a:p/>
+          <a:p>
+            <a:r>
+              <a:rPr sz="1400" b="1">
+                <a:solidFill>
+                  <a:srgbClr val="212121"/>
+                </a:solidFill>
+                <a:latin typeface="Freesentation"/>
+              </a:rPr>
+              <a:t>② VPC Subnet ID 확인</a:t>
+            </a:r>
+          </a:p>
+          <a:p>
+            <a:r>
+              <a:rPr sz="1300">
+                <a:solidFill>
+                  <a:srgbClr val="212121"/>
+                </a:solidFill>
+                <a:latin typeface="Freesentation"/>
+              </a:rPr>
+              <a:t>   Private Subnet 3개 (AZ-a/b/c) ID 확보</a:t>
+            </a:r>
+          </a:p>
+          <a:p>
+            <a:r>
+              <a:rPr sz="1300">
+                <a:solidFill>
+                  <a:srgbClr val="212121"/>
+                </a:solidFill>
+                <a:latin typeface="Freesentation"/>
+              </a:rPr>
+              <a:t>   aws ec2 describe-subnets 명령 활용</a:t>
+            </a:r>
+          </a:p>
+          <a:p/>
+          <a:p>
+            <a:r>
+              <a:rPr sz="1400" b="1">
+                <a:solidFill>
+                  <a:srgbClr val="212121"/>
+                </a:solidFill>
+                <a:latin typeface="Freesentation"/>
+              </a:rPr>
+              <a:t>③ 생성 명령 실행</a:t>
+            </a:r>
+          </a:p>
+          <a:p>
+            <a:r>
+              <a:rPr sz="1300">
+                <a:solidFill>
+                  <a:srgbClr val="212121"/>
+                </a:solidFill>
+                <a:latin typeface="Freesentation"/>
+              </a:rPr>
+              <a:t>   create-cluster 명령어 + 설정 파일 참조</a:t>
+            </a:r>
+          </a:p>
+          <a:p>
+            <a:r>
+              <a:rPr sz="1300">
+                <a:solidFill>
+                  <a:srgbClr val="212121"/>
+                </a:solidFill>
+                <a:latin typeface="Freesentation"/>
+              </a:rPr>
+              <a:t>   완료까지 5~10분 소요</a:t>
+            </a:r>
+          </a:p>
+          <a:p/>
+          <a:p>
+            <a:r>
+              <a:rPr sz="1400" b="1">
+                <a:solidFill>
+                  <a:srgbClr val="212121"/>
+                </a:solidFill>
+                <a:latin typeface="Freesentation"/>
+              </a:rPr>
+              <a:t>④ 생성 완료 확인</a:t>
+            </a:r>
+          </a:p>
+          <a:p>
+            <a:r>
+              <a:rPr sz="1300">
+                <a:solidFill>
+                  <a:srgbClr val="212121"/>
+                </a:solidFill>
+                <a:latin typeface="Freesentation"/>
+              </a:rPr>
+              <a:t>   describe-cluster 응답 State="ACTIVE" 확인</a:t>
+            </a:r>
+          </a:p>
+          <a:p>
+            <a:r>
+              <a:rPr sz="1300">
+                <a:solidFill>
+                  <a:srgbClr val="212121"/>
+                </a:solidFill>
+                <a:latin typeface="Freesentation"/>
+              </a:rPr>
+              <a:t>   CloudWatch 메트릭 수집 시작 확인</a:t>
+            </a:r>
+          </a:p>
+        </p:txBody>
+      </p:sp>
+      <p:sp>
+        <p:nvSpPr>
+          <p:cNvPr id="9" name="Rounded Rectangle 8"/>
           <p:cNvSpPr/>
           <p:nvPr/>
         </p:nvSpPr>
         <p:spPr>
           <a:xfrm>
-            <a:off x="457200" y="2423160"/>
-            <a:ext cx="3566160" cy="3291840"/>
-          </a:xfrm>
-          <a:prstGeom prst="roundRect">
+            <a:off x="6126480" y="2423160"/>
+            <a:ext cx="5608015" cy="3657600"/>
+          </a:xfrm>
+          <a:prstGeom prst="rect">
             <a:avLst/>
           </a:prstGeom>
           <a:solidFill>
-            <a:srgbClr val="F8F9FA"/>
+            <a:srgbClr val="1E1E1E"/>
           </a:solidFill>
           <a:ln w="9525">
-            <a:solidFill>
-              <a:srgbClr val="0043DA"/>
-            </a:solidFill>
+            <a:noFill/>
           </a:ln>
         </p:spPr>
         <p:style>
@@ -15530,24 +16376,24 @@
       </p:sp>
       <p:sp>
         <p:nvSpPr>
-          <p:cNvPr id="9" name="Rounded Rectangle 8"/>
+          <p:cNvPr id="10" name="Rectangle 9"/>
           <p:cNvSpPr/>
           <p:nvPr/>
         </p:nvSpPr>
         <p:spPr>
           <a:xfrm>
-            <a:off x="4206240" y="2423160"/>
-            <a:ext cx="3566160" cy="3291840"/>
-          </a:xfrm>
-          <a:prstGeom prst="roundRect">
+            <a:off x="6126480" y="2423160"/>
+            <a:ext cx="5608015" cy="274320"/>
+          </a:xfrm>
+          <a:prstGeom prst="rect">
             <a:avLst/>
           </a:prstGeom>
           <a:solidFill>
-            <a:srgbClr val="F8F9FA"/>
+            <a:srgbClr val="2C001E"/>
           </a:solidFill>
-          <a:ln w="9525">
+          <a:ln>
             <a:solidFill>
-              <a:srgbClr val="0043DA"/>
+              <a:srgbClr val="2D2D2D"/>
             </a:solidFill>
           </a:ln>
         </p:spPr>
@@ -15570,29 +16416,38 @@
           <a:lstStyle/>
           <a:p>
             <a:pPr algn="ctr"/>
-          </a:p>
-        </p:txBody>
-      </p:sp>
-      <p:sp>
-        <p:nvSpPr>
-          <p:cNvPr id="10" name="Rounded Rectangle 9"/>
+            <a:r>
+              <a:rPr sz="1000" b="0">
+                <a:solidFill>
+                  <a:srgbClr val="D0D0D0"/>
+                </a:solidFill>
+                <a:latin typeface="Courier New"/>
+              </a:rPr>
+              <a:t>ubuntu@msk-cluster: ~ — bash</a:t>
+            </a:r>
+          </a:p>
+        </p:txBody>
+      </p:sp>
+      <p:sp>
+        <p:nvSpPr>
+          <p:cNvPr id="11" name="Rounded Rectangle 10"/>
           <p:cNvSpPr/>
           <p:nvPr/>
         </p:nvSpPr>
         <p:spPr>
           <a:xfrm>
-            <a:off x="7955279" y="2423160"/>
-            <a:ext cx="3566160" cy="3291840"/>
-          </a:xfrm>
-          <a:prstGeom prst="roundRect">
+            <a:off x="457200" y="6172200"/>
+            <a:ext cx="11277295" cy="457200"/>
+          </a:xfrm>
+          <a:prstGeom prst="rect">
             <a:avLst/>
           </a:prstGeom>
           <a:solidFill>
             <a:srgbClr val="F8F9FA"/>
           </a:solidFill>
-          <a:ln w="9525">
+          <a:ln w="6350">
             <a:solidFill>
-              <a:srgbClr val="0043DA"/>
+              <a:srgbClr val="4CB88F"/>
             </a:solidFill>
           </a:ln>
         </p:spPr>
@@ -15620,25 +16475,103 @@
       </p:sp>
       <p:sp>
         <p:nvSpPr>
-          <p:cNvPr id="11" name="Rounded Rectangle 10"/>
+          <p:cNvPr id="12" name="TextBox 11"/>
+          <p:cNvSpPr txBox="1"/>
+          <p:nvPr/>
+        </p:nvSpPr>
+        <p:spPr>
+          <a:xfrm>
+            <a:off x="6309360" y="2743200"/>
+            <a:ext cx="5212080" cy="3200400"/>
+          </a:xfrm>
+          <a:prstGeom prst="rect">
+            <a:avLst/>
+          </a:prstGeom>
+          <a:noFill/>
+        </p:spPr>
+        <p:txBody>
+          <a:bodyPr wrap="square">
+            <a:spAutoFit/>
+          </a:bodyPr>
+          <a:lstStyle/>
+          <a:p>
+            <a:r>
+              <a:rPr sz="1100">
+                <a:solidFill>
+                  <a:srgbClr val="FFFFFF"/>
+                </a:solidFill>
+                <a:latin typeface="Courier New"/>
+              </a:rPr>
+              <a:t>ubuntu@msk-cluster:~$ aws kafka create-cluster \
+  --cluster-name my-msk-cluster \
+  --broker-node-group-info file://broker-info.json \
+  --kafka-version 3.5.1 \
+  --number-of-broker-nodes 3 \
+  --region ap-northeast-2
+# 응답 예시
+{
+  "ClusterArn": "arn:aws:kafka:ap-northeast-2:...",
+  "ClusterName": "my-msk-cluster",
+  "State": "CREATING"
+}
+ubuntu@msk-cluster:~$ aws kafka describe-cluster --cluster-arn &lt;ARN&gt;</a:t>
+            </a:r>
+          </a:p>
+        </p:txBody>
+      </p:sp>
+      <p:sp>
+        <p:nvSpPr>
+          <p:cNvPr id="13" name="TextBox 12"/>
+          <p:cNvSpPr txBox="1"/>
+          <p:nvPr/>
+        </p:nvSpPr>
+        <p:spPr>
+          <a:xfrm>
+            <a:off x="640080" y="6217920"/>
+            <a:ext cx="10881360" cy="365760"/>
+          </a:xfrm>
+          <a:prstGeom prst="rect">
+            <a:avLst/>
+          </a:prstGeom>
+          <a:noFill/>
+        </p:spPr>
+        <p:txBody>
+          <a:bodyPr wrap="square">
+            <a:spAutoFit/>
+          </a:bodyPr>
+          <a:lstStyle/>
+          <a:p>
+            <a:r>
+              <a:rPr sz="1200">
+                <a:solidFill>
+                  <a:srgbClr val="212121"/>
+                </a:solidFill>
+                <a:latin typeface="Freesentation"/>
+              </a:rPr>
+              <a:t>✅ 확인: aws kafka describe-cluster 응답에서 State="ACTIVE" 확인   |   소요시간: 5~10분   |   실패 시: CloudWatch /aws/msk/ 로그 확인</a:t>
+            </a:r>
+          </a:p>
+        </p:txBody>
+      </p:sp>
+      <p:sp>
+        <p:nvSpPr>
+          <p:cNvPr id="14" name="Oval 13"/>
           <p:cNvSpPr/>
           <p:nvPr/>
         </p:nvSpPr>
         <p:spPr>
           <a:xfrm>
-            <a:off x="457200" y="5897880"/>
-            <a:ext cx="11277295" cy="548640"/>
-          </a:xfrm>
-          <a:prstGeom prst="roundRect">
+            <a:off x="6263640" y="2514600"/>
+            <a:ext cx="91440" cy="91440"/>
+          </a:xfrm>
+          <a:prstGeom prst="ellipse">
             <a:avLst/>
           </a:prstGeom>
           <a:solidFill>
-            <a:srgbClr val="0043DA"/>
+            <a:srgbClr val="FF5F57"/>
           </a:solidFill>
           <a:ln>
-            <a:solidFill>
-              <a:srgbClr val="0043DA"/>
-            </a:solidFill>
+            <a:noFill/>
           </a:ln>
         </p:spPr>
         <p:style>
@@ -15665,527 +16598,87 @@
       </p:sp>
       <p:sp>
         <p:nvSpPr>
-          <p:cNvPr id="12" name="TextBox 11"/>
-          <p:cNvSpPr txBox="1"/>
-          <p:nvPr/>
-        </p:nvSpPr>
-        <p:spPr>
-          <a:xfrm>
-            <a:off x="594360" y="2606040"/>
-            <a:ext cx="3291840" cy="502920"/>
-          </a:xfrm>
-          <a:prstGeom prst="rect">
-            <a:avLst/>
-          </a:prstGeom>
-          <a:noFill/>
-        </p:spPr>
-        <p:txBody>
-          <a:bodyPr wrap="square">
-            <a:spAutoFit/>
-          </a:bodyPr>
+          <p:cNvPr id="15" name="Oval 14"/>
+          <p:cNvSpPr/>
+          <p:nvPr/>
+        </p:nvSpPr>
+        <p:spPr>
+          <a:xfrm>
+            <a:off x="6423660" y="2514600"/>
+            <a:ext cx="91440" cy="91440"/>
+          </a:xfrm>
+          <a:prstGeom prst="ellipse">
+            <a:avLst/>
+          </a:prstGeom>
+          <a:solidFill>
+            <a:srgbClr val="FEBC2E"/>
+          </a:solidFill>
+          <a:ln>
+            <a:noFill/>
+          </a:ln>
+        </p:spPr>
+        <p:style>
+          <a:lnRef idx="1">
+            <a:schemeClr val="accent1"/>
+          </a:lnRef>
+          <a:fillRef idx="3">
+            <a:schemeClr val="accent1"/>
+          </a:fillRef>
+          <a:effectRef idx="2">
+            <a:schemeClr val="accent1"/>
+          </a:effectRef>
+          <a:fontRef idx="minor">
+            <a:schemeClr val="lt1"/>
+          </a:fontRef>
+        </p:style>
+        <p:txBody>
+          <a:bodyPr rtlCol="0" anchor="ctr"/>
           <a:lstStyle/>
           <a:p>
             <a:pPr algn="ctr"/>
-            <a:r>
-              <a:rPr sz="2800" b="1">
-                <a:solidFill>
-                  <a:srgbClr val="0043DA"/>
-                </a:solidFill>
-                <a:latin typeface="Freesentation"/>
-              </a:rPr>
-              <a:t>▼  ₩1.8억/년</a:t>
-            </a:r>
-          </a:p>
-        </p:txBody>
-      </p:sp>
-      <p:sp>
-        <p:nvSpPr>
-          <p:cNvPr id="13" name="TextBox 12"/>
-          <p:cNvSpPr txBox="1"/>
-          <p:nvPr/>
-        </p:nvSpPr>
-        <p:spPr>
-          <a:xfrm>
-            <a:off x="594360" y="3200400"/>
-            <a:ext cx="3291840" cy="320040"/>
-          </a:xfrm>
-          <a:prstGeom prst="rect">
-            <a:avLst/>
-          </a:prstGeom>
-          <a:noFill/>
-        </p:spPr>
-        <p:txBody>
-          <a:bodyPr wrap="square">
-            <a:spAutoFit/>
-          </a:bodyPr>
+          </a:p>
+        </p:txBody>
+      </p:sp>
+      <p:sp>
+        <p:nvSpPr>
+          <p:cNvPr id="16" name="Oval 15"/>
+          <p:cNvSpPr/>
+          <p:nvPr/>
+        </p:nvSpPr>
+        <p:spPr>
+          <a:xfrm>
+            <a:off x="6583680" y="2514600"/>
+            <a:ext cx="91440" cy="91440"/>
+          </a:xfrm>
+          <a:prstGeom prst="ellipse">
+            <a:avLst/>
+          </a:prstGeom>
+          <a:solidFill>
+            <a:srgbClr val="28C840"/>
+          </a:solidFill>
+          <a:ln>
+            <a:noFill/>
+          </a:ln>
+        </p:spPr>
+        <p:style>
+          <a:lnRef idx="1">
+            <a:schemeClr val="accent1"/>
+          </a:lnRef>
+          <a:fillRef idx="3">
+            <a:schemeClr val="accent1"/>
+          </a:fillRef>
+          <a:effectRef idx="2">
+            <a:schemeClr val="accent1"/>
+          </a:effectRef>
+          <a:fontRef idx="minor">
+            <a:schemeClr val="lt1"/>
+          </a:fontRef>
+        </p:style>
+        <p:txBody>
+          <a:bodyPr rtlCol="0" anchor="ctr"/>
           <a:lstStyle/>
           <a:p>
             <a:pPr algn="ctr"/>
-            <a:r>
-              <a:rPr sz="1400" b="1">
-                <a:solidFill>
-                  <a:srgbClr val="212121"/>
-                </a:solidFill>
-                <a:latin typeface="Freesentation"/>
-              </a:rPr>
-              <a:t>비용 절감</a:t>
-            </a:r>
-          </a:p>
-        </p:txBody>
-      </p:sp>
-      <p:sp>
-        <p:nvSpPr>
-          <p:cNvPr id="14" name="TextBox 13"/>
-          <p:cNvSpPr txBox="1"/>
-          <p:nvPr/>
-        </p:nvSpPr>
-        <p:spPr>
-          <a:xfrm>
-            <a:off x="594360" y="3611880"/>
-            <a:ext cx="3291840" cy="1371600"/>
-          </a:xfrm>
-          <a:prstGeom prst="rect">
-            <a:avLst/>
-          </a:prstGeom>
-          <a:noFill/>
-        </p:spPr>
-        <p:txBody>
-          <a:bodyPr wrap="square">
-            <a:spAutoFit/>
-          </a:bodyPr>
-          <a:lstStyle/>
-          <a:p>
-            <a:pPr algn="ctr"/>
-            <a:r>
-              <a:rPr sz="1300" b="0">
-                <a:solidFill>
-                  <a:srgbClr val="212121"/>
-                </a:solidFill>
-                <a:latin typeface="Freesentation"/>
-              </a:rPr>
-              <a:t>운영 인력 2명 절감</a:t>
-            </a:r>
-          </a:p>
-          <a:p>
-            <a:pPr algn="ctr"/>
-            <a:r>
-              <a:rPr sz="1300" b="0">
-                <a:solidFill>
-                  <a:srgbClr val="212121"/>
-                </a:solidFill>
-                <a:latin typeface="Freesentation"/>
-              </a:rPr>
-              <a:t>+ 인프라 비용 감소</a:t>
-            </a:r>
-          </a:p>
-          <a:p>
-            <a:pPr algn="ctr"/>
-            <a:r>
-              <a:rPr sz="1300" b="0">
-                <a:solidFill>
-                  <a:srgbClr val="212121"/>
-                </a:solidFill>
-                <a:latin typeface="Freesentation"/>
-              </a:rPr>
-              <a:t>(MSK vs 자체 Kafka 운영)</a:t>
-            </a:r>
-          </a:p>
-        </p:txBody>
-      </p:sp>
-      <p:sp>
-        <p:nvSpPr>
-          <p:cNvPr id="15" name="TextBox 14"/>
-          <p:cNvSpPr txBox="1"/>
-          <p:nvPr/>
-        </p:nvSpPr>
-        <p:spPr>
-          <a:xfrm>
-            <a:off x="594360" y="5349240"/>
-            <a:ext cx="3291840" cy="274320"/>
-          </a:xfrm>
-          <a:prstGeom prst="rect">
-            <a:avLst/>
-          </a:prstGeom>
-          <a:noFill/>
-        </p:spPr>
-        <p:txBody>
-          <a:bodyPr wrap="square">
-            <a:spAutoFit/>
-          </a:bodyPr>
-          <a:lstStyle/>
-          <a:p>
-            <a:pPr algn="ctr"/>
-            <a:r>
-              <a:rPr sz="1100">
-                <a:solidFill>
-                  <a:srgbClr val="505050"/>
-                </a:solidFill>
-                <a:latin typeface="Freesentation"/>
-              </a:rPr>
-              <a:t>2026-Q1 실측</a:t>
-            </a:r>
-          </a:p>
-        </p:txBody>
-      </p:sp>
-      <p:sp>
-        <p:nvSpPr>
-          <p:cNvPr id="16" name="TextBox 15"/>
-          <p:cNvSpPr txBox="1"/>
-          <p:nvPr/>
-        </p:nvSpPr>
-        <p:spPr>
-          <a:xfrm>
-            <a:off x="4343400" y="2606040"/>
-            <a:ext cx="3291840" cy="502920"/>
-          </a:xfrm>
-          <a:prstGeom prst="rect">
-            <a:avLst/>
-          </a:prstGeom>
-          <a:noFill/>
-        </p:spPr>
-        <p:txBody>
-          <a:bodyPr wrap="square">
-            <a:spAutoFit/>
-          </a:bodyPr>
-          <a:lstStyle/>
-          <a:p>
-            <a:pPr algn="ctr"/>
-            <a:r>
-              <a:rPr sz="2800" b="1">
-                <a:solidFill>
-                  <a:srgbClr val="4CB88F"/>
-                </a:solidFill>
-                <a:latin typeface="Freesentation"/>
-              </a:rPr>
-              <a:t>▲  +320%</a:t>
-            </a:r>
-          </a:p>
-        </p:txBody>
-      </p:sp>
-      <p:sp>
-        <p:nvSpPr>
-          <p:cNvPr id="17" name="TextBox 16"/>
-          <p:cNvSpPr txBox="1"/>
-          <p:nvPr/>
-        </p:nvSpPr>
-        <p:spPr>
-          <a:xfrm>
-            <a:off x="4343400" y="3200400"/>
-            <a:ext cx="3291840" cy="320040"/>
-          </a:xfrm>
-          <a:prstGeom prst="rect">
-            <a:avLst/>
-          </a:prstGeom>
-          <a:noFill/>
-        </p:spPr>
-        <p:txBody>
-          <a:bodyPr wrap="square">
-            <a:spAutoFit/>
-          </a:bodyPr>
-          <a:lstStyle/>
-          <a:p>
-            <a:pPr algn="ctr"/>
-            <a:r>
-              <a:rPr sz="1400" b="1">
-                <a:solidFill>
-                  <a:srgbClr val="212121"/>
-                </a:solidFill>
-                <a:latin typeface="Freesentation"/>
-              </a:rPr>
-              <a:t>처리량 증가</a:t>
-            </a:r>
-          </a:p>
-        </p:txBody>
-      </p:sp>
-      <p:sp>
-        <p:nvSpPr>
-          <p:cNvPr id="18" name="TextBox 17"/>
-          <p:cNvSpPr txBox="1"/>
-          <p:nvPr/>
-        </p:nvSpPr>
-        <p:spPr>
-          <a:xfrm>
-            <a:off x="4343400" y="3611880"/>
-            <a:ext cx="3291840" cy="1371600"/>
-          </a:xfrm>
-          <a:prstGeom prst="rect">
-            <a:avLst/>
-          </a:prstGeom>
-          <a:noFill/>
-        </p:spPr>
-        <p:txBody>
-          <a:bodyPr wrap="square">
-            <a:spAutoFit/>
-          </a:bodyPr>
-          <a:lstStyle/>
-          <a:p>
-            <a:pPr algn="ctr"/>
-            <a:r>
-              <a:rPr sz="1300" b="0">
-                <a:solidFill>
-                  <a:srgbClr val="212121"/>
-                </a:solidFill>
-                <a:latin typeface="Freesentation"/>
-              </a:rPr>
-              <a:t>10K → 42K msg/s</a:t>
-            </a:r>
-          </a:p>
-          <a:p>
-            <a:pPr algn="ctr"/>
-            <a:r>
-              <a:rPr sz="1300" b="0">
-                <a:solidFill>
-                  <a:srgbClr val="212121"/>
-                </a:solidFill>
-                <a:latin typeface="Freesentation"/>
-              </a:rPr>
-              <a:t>Multi-AZ 자동 스케일</a:t>
-            </a:r>
-          </a:p>
-          <a:p>
-            <a:pPr algn="ctr"/>
-            <a:r>
-              <a:rPr sz="1300" b="0">
-                <a:solidFill>
-                  <a:srgbClr val="212121"/>
-                </a:solidFill>
-                <a:latin typeface="Freesentation"/>
-              </a:rPr>
-              <a:t>(피크 트래픽 실측)</a:t>
-            </a:r>
-          </a:p>
-        </p:txBody>
-      </p:sp>
-      <p:sp>
-        <p:nvSpPr>
-          <p:cNvPr id="19" name="TextBox 18"/>
-          <p:cNvSpPr txBox="1"/>
-          <p:nvPr/>
-        </p:nvSpPr>
-        <p:spPr>
-          <a:xfrm>
-            <a:off x="4343400" y="5349240"/>
-            <a:ext cx="3291840" cy="274320"/>
-          </a:xfrm>
-          <a:prstGeom prst="rect">
-            <a:avLst/>
-          </a:prstGeom>
-          <a:noFill/>
-        </p:spPr>
-        <p:txBody>
-          <a:bodyPr wrap="square">
-            <a:spAutoFit/>
-          </a:bodyPr>
-          <a:lstStyle/>
-          <a:p>
-            <a:pPr algn="ctr"/>
-            <a:r>
-              <a:rPr sz="1100">
-                <a:solidFill>
-                  <a:srgbClr val="505050"/>
-                </a:solidFill>
-                <a:latin typeface="Freesentation"/>
-              </a:rPr>
-              <a:t>피크 트래픽 기준</a:t>
-            </a:r>
-          </a:p>
-        </p:txBody>
-      </p:sp>
-      <p:sp>
-        <p:nvSpPr>
-          <p:cNvPr id="20" name="TextBox 19"/>
-          <p:cNvSpPr txBox="1"/>
-          <p:nvPr/>
-        </p:nvSpPr>
-        <p:spPr>
-          <a:xfrm>
-            <a:off x="8092440" y="2606040"/>
-            <a:ext cx="3291840" cy="502920"/>
-          </a:xfrm>
-          <a:prstGeom prst="rect">
-            <a:avLst/>
-          </a:prstGeom>
-          <a:noFill/>
-        </p:spPr>
-        <p:txBody>
-          <a:bodyPr wrap="square">
-            <a:spAutoFit/>
-          </a:bodyPr>
-          <a:lstStyle/>
-          <a:p>
-            <a:pPr algn="ctr"/>
-            <a:r>
-              <a:rPr sz="2800" b="1">
-                <a:solidFill>
-                  <a:srgbClr val="0043DA"/>
-                </a:solidFill>
-                <a:latin typeface="Freesentation"/>
-              </a:rPr>
-              <a:t>▼  -75%</a:t>
-            </a:r>
-          </a:p>
-        </p:txBody>
-      </p:sp>
-      <p:sp>
-        <p:nvSpPr>
-          <p:cNvPr id="21" name="TextBox 20"/>
-          <p:cNvSpPr txBox="1"/>
-          <p:nvPr/>
-        </p:nvSpPr>
-        <p:spPr>
-          <a:xfrm>
-            <a:off x="8092440" y="3200400"/>
-            <a:ext cx="3291840" cy="320040"/>
-          </a:xfrm>
-          <a:prstGeom prst="rect">
-            <a:avLst/>
-          </a:prstGeom>
-          <a:noFill/>
-        </p:spPr>
-        <p:txBody>
-          <a:bodyPr wrap="square">
-            <a:spAutoFit/>
-          </a:bodyPr>
-          <a:lstStyle/>
-          <a:p>
-            <a:pPr algn="ctr"/>
-            <a:r>
-              <a:rPr sz="1400" b="1">
-                <a:solidFill>
-                  <a:srgbClr val="212121"/>
-                </a:solidFill>
-                <a:latin typeface="Freesentation"/>
-              </a:rPr>
-              <a:t>지연시간 감소</a:t>
-            </a:r>
-          </a:p>
-        </p:txBody>
-      </p:sp>
-      <p:sp>
-        <p:nvSpPr>
-          <p:cNvPr id="22" name="TextBox 21"/>
-          <p:cNvSpPr txBox="1"/>
-          <p:nvPr/>
-        </p:nvSpPr>
-        <p:spPr>
-          <a:xfrm>
-            <a:off x="8092440" y="3611880"/>
-            <a:ext cx="3291840" cy="1371600"/>
-          </a:xfrm>
-          <a:prstGeom prst="rect">
-            <a:avLst/>
-          </a:prstGeom>
-          <a:noFill/>
-        </p:spPr>
-        <p:txBody>
-          <a:bodyPr wrap="square">
-            <a:spAutoFit/>
-          </a:bodyPr>
-          <a:lstStyle/>
-          <a:p>
-            <a:pPr algn="ctr"/>
-            <a:r>
-              <a:rPr sz="1300" b="0">
-                <a:solidFill>
-                  <a:srgbClr val="212121"/>
-                </a:solidFill>
-                <a:latin typeface="Freesentation"/>
-              </a:rPr>
-              <a:t>200ms → 50ms</a:t>
-            </a:r>
-          </a:p>
-          <a:p>
-            <a:pPr algn="ctr"/>
-            <a:r>
-              <a:rPr sz="1300" b="0">
-                <a:solidFill>
-                  <a:srgbClr val="212121"/>
-                </a:solidFill>
-                <a:latin typeface="Freesentation"/>
-              </a:rPr>
-              <a:t>VPC Endpoint 적용</a:t>
-            </a:r>
-          </a:p>
-          <a:p>
-            <a:pPr algn="ctr"/>
-            <a:r>
-              <a:rPr sz="1300" b="0">
-                <a:solidFill>
-                  <a:srgbClr val="212121"/>
-                </a:solidFill>
-                <a:latin typeface="Freesentation"/>
-              </a:rPr>
-              <a:t>(평균 레이턴시 실측)</a:t>
-            </a:r>
-          </a:p>
-        </p:txBody>
-      </p:sp>
-      <p:sp>
-        <p:nvSpPr>
-          <p:cNvPr id="23" name="TextBox 22"/>
-          <p:cNvSpPr txBox="1"/>
-          <p:nvPr/>
-        </p:nvSpPr>
-        <p:spPr>
-          <a:xfrm>
-            <a:off x="8092440" y="5349240"/>
-            <a:ext cx="3291840" cy="274320"/>
-          </a:xfrm>
-          <a:prstGeom prst="rect">
-            <a:avLst/>
-          </a:prstGeom>
-          <a:noFill/>
-        </p:spPr>
-        <p:txBody>
-          <a:bodyPr wrap="square">
-            <a:spAutoFit/>
-          </a:bodyPr>
-          <a:lstStyle/>
-          <a:p>
-            <a:pPr algn="ctr"/>
-            <a:r>
-              <a:rPr sz="1100">
-                <a:solidFill>
-                  <a:srgbClr val="505050"/>
-                </a:solidFill>
-                <a:latin typeface="Freesentation"/>
-              </a:rPr>
-              <a:t>평균 레이턴시</a:t>
-            </a:r>
-          </a:p>
-        </p:txBody>
-      </p:sp>
-      <p:sp>
-        <p:nvSpPr>
-          <p:cNvPr id="24" name="TextBox 23"/>
-          <p:cNvSpPr txBox="1"/>
-          <p:nvPr/>
-        </p:nvSpPr>
-        <p:spPr>
-          <a:xfrm>
-            <a:off x="640080" y="5971032"/>
-            <a:ext cx="10881360" cy="365760"/>
-          </a:xfrm>
-          <a:prstGeom prst="rect">
-            <a:avLst/>
-          </a:prstGeom>
-          <a:noFill/>
-        </p:spPr>
-        <p:txBody>
-          <a:bodyPr wrap="square">
-            <a:spAutoFit/>
-          </a:bodyPr>
-          <a:lstStyle/>
-          <a:p>
-            <a:r>
-              <a:rPr sz="1300" b="1">
-                <a:solidFill>
-                  <a:srgbClr val="FFFFFF"/>
-                </a:solidFill>
-                <a:latin typeface="Freesentation"/>
-              </a:rPr>
-              <a:t>📊 종합: MSK 도입 6개월 만에 ROI 240% 달성 — 연간 순이익 ₩1.05억 (절감 ₩1.8억 - 서비스 비용 ₩0.75억)</a:t>
-            </a:r>
           </a:p>
         </p:txBody>
       </p:sp>
@@ -16198,6 +16691,921 @@
 </file>
 
 <file path=ppt/slides/slide26.xml><?xml version="1.0" encoding="utf-8"?>
+<p:sld xmlns:a="http://schemas.openxmlformats.org/drawingml/2006/main" xmlns:p="http://schemas.openxmlformats.org/presentationml/2006/main" xmlns:r="http://schemas.openxmlformats.org/officeDocument/2006/relationships">
+  <p:cSld>
+    <p:spTree>
+      <p:nvGrpSpPr>
+        <p:cNvPr id="1" name=""/>
+        <p:cNvGrpSpPr/>
+        <p:nvPr/>
+      </p:nvGrpSpPr>
+      <p:grpSpPr/>
+      <p:sp>
+        <p:nvSpPr>
+          <p:cNvPr id="2" name="Text Placeholder 1"/>
+          <p:cNvSpPr>
+            <a:spLocks noGrp="1"/>
+          </p:cNvSpPr>
+          <p:nvPr>
+            <p:ph type="body" idx="10" sz="quarter"/>
+          </p:nvPr>
+        </p:nvSpPr>
+        <p:spPr/>
+        <p:txBody>
+          <a:bodyPr/>
+          <a:lstStyle/>
+          <a:p>
+            <a:r>
+              <a:t/>
+            </a:r>
+          </a:p>
+        </p:txBody>
+      </p:sp>
+      <p:sp>
+        <p:nvSpPr>
+          <p:cNvPr id="3" name="TextBox 2"/>
+          <p:cNvSpPr txBox="1"/>
+          <p:nvPr/>
+        </p:nvSpPr>
+        <p:spPr>
+          <a:xfrm>
+            <a:off x="353872" y="557784"/>
+            <a:ext cx="2717596" cy="320040"/>
+          </a:xfrm>
+          <a:prstGeom prst="rect">
+            <a:avLst/>
+          </a:prstGeom>
+          <a:noFill/>
+        </p:spPr>
+        <p:txBody>
+          <a:bodyPr wrap="square">
+            <a:spAutoFit/>
+          </a:bodyPr>
+          <a:lstStyle/>
+          <a:p>
+            <a:r>
+              <a:rPr sz="2000" b="1">
+                <a:solidFill>
+                  <a:srgbClr val="000000"/>
+                </a:solidFill>
+                <a:latin typeface="Freesentation"/>
+              </a:rPr>
+              <a:t>L23. Stats Dashboard</a:t>
+            </a:r>
+          </a:p>
+        </p:txBody>
+      </p:sp>
+      <p:sp>
+        <p:nvSpPr>
+          <p:cNvPr id="4" name="TextBox 3"/>
+          <p:cNvSpPr txBox="1"/>
+          <p:nvPr/>
+        </p:nvSpPr>
+        <p:spPr>
+          <a:xfrm>
+            <a:off x="353872" y="896112"/>
+            <a:ext cx="2717596" cy="274320"/>
+          </a:xfrm>
+          <a:prstGeom prst="rect">
+            <a:avLst/>
+          </a:prstGeom>
+          <a:noFill/>
+        </p:spPr>
+        <p:txBody>
+          <a:bodyPr wrap="square">
+            <a:spAutoFit/>
+          </a:bodyPr>
+          <a:lstStyle/>
+          <a:p>
+            <a:r>
+              <a:rPr sz="1100">
+                <a:solidFill>
+                  <a:srgbClr val="505050"/>
+                </a:solidFill>
+                <a:latin typeface="Freesentation"/>
+              </a:rPr>
+              <a:t/>
+            </a:r>
+          </a:p>
+        </p:txBody>
+      </p:sp>
+      <p:sp>
+        <p:nvSpPr>
+          <p:cNvPr id="5" name="TextBox 4"/>
+          <p:cNvSpPr txBox="1"/>
+          <p:nvPr/>
+        </p:nvSpPr>
+        <p:spPr>
+          <a:xfrm>
+            <a:off x="3760012" y="558698"/>
+            <a:ext cx="7546543" cy="365760"/>
+          </a:xfrm>
+          <a:prstGeom prst="rect">
+            <a:avLst/>
+          </a:prstGeom>
+          <a:noFill/>
+        </p:spPr>
+        <p:txBody>
+          <a:bodyPr wrap="square">
+            <a:spAutoFit/>
+          </a:bodyPr>
+          <a:lstStyle/>
+          <a:p>
+            <a:r>
+              <a:rPr sz="1200">
+                <a:solidFill>
+                  <a:srgbClr val="505050"/>
+                </a:solidFill>
+                <a:latin typeface="Freesentation"/>
+              </a:rPr>
+              <a:t>MSK 도입 성과 지표</a:t>
+            </a:r>
+          </a:p>
+        </p:txBody>
+      </p:sp>
+      <p:sp>
+        <p:nvSpPr>
+          <p:cNvPr id="6" name="TextBox 5"/>
+          <p:cNvSpPr txBox="1"/>
+          <p:nvPr/>
+        </p:nvSpPr>
+        <p:spPr>
+          <a:xfrm>
+            <a:off x="457200" y="1600200"/>
+            <a:ext cx="11277295" cy="274320"/>
+          </a:xfrm>
+          <a:prstGeom prst="rect">
+            <a:avLst/>
+          </a:prstGeom>
+          <a:noFill/>
+        </p:spPr>
+        <p:txBody>
+          <a:bodyPr wrap="square">
+            <a:spAutoFit/>
+          </a:bodyPr>
+          <a:lstStyle/>
+          <a:p>
+            <a:r>
+              <a:rPr sz="1600" b="1">
+                <a:solidFill>
+                  <a:srgbClr val="0043DA"/>
+                </a:solidFill>
+                <a:latin typeface="Freesentation"/>
+              </a:rPr>
+              <a:t>AWS MSK 도입 효과 — 핵심 성과 지표</a:t>
+            </a:r>
+          </a:p>
+        </p:txBody>
+      </p:sp>
+      <p:sp>
+        <p:nvSpPr>
+          <p:cNvPr id="7" name="TextBox 6"/>
+          <p:cNvSpPr txBox="1"/>
+          <p:nvPr/>
+        </p:nvSpPr>
+        <p:spPr>
+          <a:xfrm>
+            <a:off x="457200" y="1965960"/>
+            <a:ext cx="11277295" cy="228600"/>
+          </a:xfrm>
+          <a:prstGeom prst="rect">
+            <a:avLst/>
+          </a:prstGeom>
+          <a:noFill/>
+        </p:spPr>
+        <p:txBody>
+          <a:bodyPr wrap="square">
+            <a:spAutoFit/>
+          </a:bodyPr>
+          <a:lstStyle/>
+          <a:p>
+            <a:r>
+              <a:rPr sz="1300">
+                <a:solidFill>
+                  <a:srgbClr val="212121"/>
+                </a:solidFill>
+                <a:latin typeface="Freesentation"/>
+              </a:rPr>
+              <a:t>2026년 1분기 실측 기준 (운영 6개월 후)</a:t>
+            </a:r>
+          </a:p>
+        </p:txBody>
+      </p:sp>
+      <p:sp>
+        <p:nvSpPr>
+          <p:cNvPr id="8" name="Rounded Rectangle 7"/>
+          <p:cNvSpPr/>
+          <p:nvPr/>
+        </p:nvSpPr>
+        <p:spPr>
+          <a:xfrm>
+            <a:off x="457200" y="2423160"/>
+            <a:ext cx="3566160" cy="3291840"/>
+          </a:xfrm>
+          <a:prstGeom prst="roundRect">
+            <a:avLst/>
+          </a:prstGeom>
+          <a:solidFill>
+            <a:srgbClr val="F8F9FA"/>
+          </a:solidFill>
+          <a:ln w="9525">
+            <a:solidFill>
+              <a:srgbClr val="0043DA"/>
+            </a:solidFill>
+          </a:ln>
+        </p:spPr>
+        <p:style>
+          <a:lnRef idx="1">
+            <a:schemeClr val="accent1"/>
+          </a:lnRef>
+          <a:fillRef idx="3">
+            <a:schemeClr val="accent1"/>
+          </a:fillRef>
+          <a:effectRef idx="2">
+            <a:schemeClr val="accent1"/>
+          </a:effectRef>
+          <a:fontRef idx="minor">
+            <a:schemeClr val="lt1"/>
+          </a:fontRef>
+        </p:style>
+        <p:txBody>
+          <a:bodyPr rtlCol="0" anchor="ctr"/>
+          <a:lstStyle/>
+          <a:p>
+            <a:pPr algn="ctr"/>
+          </a:p>
+        </p:txBody>
+      </p:sp>
+      <p:sp>
+        <p:nvSpPr>
+          <p:cNvPr id="9" name="Rounded Rectangle 8"/>
+          <p:cNvSpPr/>
+          <p:nvPr/>
+        </p:nvSpPr>
+        <p:spPr>
+          <a:xfrm>
+            <a:off x="4206240" y="2423160"/>
+            <a:ext cx="3566160" cy="3291840"/>
+          </a:xfrm>
+          <a:prstGeom prst="roundRect">
+            <a:avLst/>
+          </a:prstGeom>
+          <a:solidFill>
+            <a:srgbClr val="F8F9FA"/>
+          </a:solidFill>
+          <a:ln w="9525">
+            <a:solidFill>
+              <a:srgbClr val="0043DA"/>
+            </a:solidFill>
+          </a:ln>
+        </p:spPr>
+        <p:style>
+          <a:lnRef idx="1">
+            <a:schemeClr val="accent1"/>
+          </a:lnRef>
+          <a:fillRef idx="3">
+            <a:schemeClr val="accent1"/>
+          </a:fillRef>
+          <a:effectRef idx="2">
+            <a:schemeClr val="accent1"/>
+          </a:effectRef>
+          <a:fontRef idx="minor">
+            <a:schemeClr val="lt1"/>
+          </a:fontRef>
+        </p:style>
+        <p:txBody>
+          <a:bodyPr rtlCol="0" anchor="ctr"/>
+          <a:lstStyle/>
+          <a:p>
+            <a:pPr algn="ctr"/>
+          </a:p>
+        </p:txBody>
+      </p:sp>
+      <p:sp>
+        <p:nvSpPr>
+          <p:cNvPr id="10" name="Rounded Rectangle 9"/>
+          <p:cNvSpPr/>
+          <p:nvPr/>
+        </p:nvSpPr>
+        <p:spPr>
+          <a:xfrm>
+            <a:off x="7955279" y="2423160"/>
+            <a:ext cx="3566160" cy="3291840"/>
+          </a:xfrm>
+          <a:prstGeom prst="roundRect">
+            <a:avLst/>
+          </a:prstGeom>
+          <a:solidFill>
+            <a:srgbClr val="F8F9FA"/>
+          </a:solidFill>
+          <a:ln w="9525">
+            <a:solidFill>
+              <a:srgbClr val="0043DA"/>
+            </a:solidFill>
+          </a:ln>
+        </p:spPr>
+        <p:style>
+          <a:lnRef idx="1">
+            <a:schemeClr val="accent1"/>
+          </a:lnRef>
+          <a:fillRef idx="3">
+            <a:schemeClr val="accent1"/>
+          </a:fillRef>
+          <a:effectRef idx="2">
+            <a:schemeClr val="accent1"/>
+          </a:effectRef>
+          <a:fontRef idx="minor">
+            <a:schemeClr val="lt1"/>
+          </a:fontRef>
+        </p:style>
+        <p:txBody>
+          <a:bodyPr rtlCol="0" anchor="ctr"/>
+          <a:lstStyle/>
+          <a:p>
+            <a:pPr algn="ctr"/>
+          </a:p>
+        </p:txBody>
+      </p:sp>
+      <p:sp>
+        <p:nvSpPr>
+          <p:cNvPr id="11" name="Rounded Rectangle 10"/>
+          <p:cNvSpPr/>
+          <p:nvPr/>
+        </p:nvSpPr>
+        <p:spPr>
+          <a:xfrm>
+            <a:off x="457200" y="5897880"/>
+            <a:ext cx="11277295" cy="548640"/>
+          </a:xfrm>
+          <a:prstGeom prst="roundRect">
+            <a:avLst/>
+          </a:prstGeom>
+          <a:solidFill>
+            <a:srgbClr val="0043DA"/>
+          </a:solidFill>
+          <a:ln>
+            <a:solidFill>
+              <a:srgbClr val="0043DA"/>
+            </a:solidFill>
+          </a:ln>
+        </p:spPr>
+        <p:style>
+          <a:lnRef idx="1">
+            <a:schemeClr val="accent1"/>
+          </a:lnRef>
+          <a:fillRef idx="3">
+            <a:schemeClr val="accent1"/>
+          </a:fillRef>
+          <a:effectRef idx="2">
+            <a:schemeClr val="accent1"/>
+          </a:effectRef>
+          <a:fontRef idx="minor">
+            <a:schemeClr val="lt1"/>
+          </a:fontRef>
+        </p:style>
+        <p:txBody>
+          <a:bodyPr rtlCol="0" anchor="ctr"/>
+          <a:lstStyle/>
+          <a:p>
+            <a:pPr algn="ctr"/>
+          </a:p>
+        </p:txBody>
+      </p:sp>
+      <p:sp>
+        <p:nvSpPr>
+          <p:cNvPr id="12" name="TextBox 11"/>
+          <p:cNvSpPr txBox="1"/>
+          <p:nvPr/>
+        </p:nvSpPr>
+        <p:spPr>
+          <a:xfrm>
+            <a:off x="594360" y="2606040"/>
+            <a:ext cx="3291840" cy="502920"/>
+          </a:xfrm>
+          <a:prstGeom prst="rect">
+            <a:avLst/>
+          </a:prstGeom>
+          <a:noFill/>
+        </p:spPr>
+        <p:txBody>
+          <a:bodyPr wrap="square">
+            <a:spAutoFit/>
+          </a:bodyPr>
+          <a:lstStyle/>
+          <a:p>
+            <a:pPr algn="ctr"/>
+            <a:r>
+              <a:rPr sz="2800" b="1">
+                <a:solidFill>
+                  <a:srgbClr val="0043DA"/>
+                </a:solidFill>
+                <a:latin typeface="Freesentation"/>
+              </a:rPr>
+              <a:t>▼  ₩1.8억/년</a:t>
+            </a:r>
+          </a:p>
+        </p:txBody>
+      </p:sp>
+      <p:sp>
+        <p:nvSpPr>
+          <p:cNvPr id="13" name="TextBox 12"/>
+          <p:cNvSpPr txBox="1"/>
+          <p:nvPr/>
+        </p:nvSpPr>
+        <p:spPr>
+          <a:xfrm>
+            <a:off x="594360" y="3200400"/>
+            <a:ext cx="3291840" cy="320040"/>
+          </a:xfrm>
+          <a:prstGeom prst="rect">
+            <a:avLst/>
+          </a:prstGeom>
+          <a:noFill/>
+        </p:spPr>
+        <p:txBody>
+          <a:bodyPr wrap="square">
+            <a:spAutoFit/>
+          </a:bodyPr>
+          <a:lstStyle/>
+          <a:p>
+            <a:pPr algn="ctr"/>
+            <a:r>
+              <a:rPr sz="1400" b="1">
+                <a:solidFill>
+                  <a:srgbClr val="212121"/>
+                </a:solidFill>
+                <a:latin typeface="Freesentation"/>
+              </a:rPr>
+              <a:t>비용 절감</a:t>
+            </a:r>
+          </a:p>
+        </p:txBody>
+      </p:sp>
+      <p:sp>
+        <p:nvSpPr>
+          <p:cNvPr id="14" name="TextBox 13"/>
+          <p:cNvSpPr txBox="1"/>
+          <p:nvPr/>
+        </p:nvSpPr>
+        <p:spPr>
+          <a:xfrm>
+            <a:off x="594360" y="3611880"/>
+            <a:ext cx="3291840" cy="1371600"/>
+          </a:xfrm>
+          <a:prstGeom prst="rect">
+            <a:avLst/>
+          </a:prstGeom>
+          <a:noFill/>
+        </p:spPr>
+        <p:txBody>
+          <a:bodyPr wrap="square">
+            <a:spAutoFit/>
+          </a:bodyPr>
+          <a:lstStyle/>
+          <a:p>
+            <a:pPr algn="ctr"/>
+            <a:r>
+              <a:rPr sz="1300" b="0">
+                <a:solidFill>
+                  <a:srgbClr val="212121"/>
+                </a:solidFill>
+                <a:latin typeface="Freesentation"/>
+              </a:rPr>
+              <a:t>운영 인력 2명 절감</a:t>
+            </a:r>
+          </a:p>
+          <a:p>
+            <a:pPr algn="ctr"/>
+            <a:r>
+              <a:rPr sz="1300" b="0">
+                <a:solidFill>
+                  <a:srgbClr val="212121"/>
+                </a:solidFill>
+                <a:latin typeface="Freesentation"/>
+              </a:rPr>
+              <a:t>+ 인프라 비용 감소</a:t>
+            </a:r>
+          </a:p>
+          <a:p>
+            <a:pPr algn="ctr"/>
+            <a:r>
+              <a:rPr sz="1300" b="0">
+                <a:solidFill>
+                  <a:srgbClr val="212121"/>
+                </a:solidFill>
+                <a:latin typeface="Freesentation"/>
+              </a:rPr>
+              <a:t>(MSK vs 자체 Kafka 운영)</a:t>
+            </a:r>
+          </a:p>
+        </p:txBody>
+      </p:sp>
+      <p:sp>
+        <p:nvSpPr>
+          <p:cNvPr id="15" name="TextBox 14"/>
+          <p:cNvSpPr txBox="1"/>
+          <p:nvPr/>
+        </p:nvSpPr>
+        <p:spPr>
+          <a:xfrm>
+            <a:off x="594360" y="5349240"/>
+            <a:ext cx="3291840" cy="274320"/>
+          </a:xfrm>
+          <a:prstGeom prst="rect">
+            <a:avLst/>
+          </a:prstGeom>
+          <a:noFill/>
+        </p:spPr>
+        <p:txBody>
+          <a:bodyPr wrap="square">
+            <a:spAutoFit/>
+          </a:bodyPr>
+          <a:lstStyle/>
+          <a:p>
+            <a:pPr algn="ctr"/>
+            <a:r>
+              <a:rPr sz="1100">
+                <a:solidFill>
+                  <a:srgbClr val="505050"/>
+                </a:solidFill>
+                <a:latin typeface="Freesentation"/>
+              </a:rPr>
+              <a:t>2026-Q1 실측</a:t>
+            </a:r>
+          </a:p>
+        </p:txBody>
+      </p:sp>
+      <p:sp>
+        <p:nvSpPr>
+          <p:cNvPr id="16" name="TextBox 15"/>
+          <p:cNvSpPr txBox="1"/>
+          <p:nvPr/>
+        </p:nvSpPr>
+        <p:spPr>
+          <a:xfrm>
+            <a:off x="4343400" y="2606040"/>
+            <a:ext cx="3291840" cy="502920"/>
+          </a:xfrm>
+          <a:prstGeom prst="rect">
+            <a:avLst/>
+          </a:prstGeom>
+          <a:noFill/>
+        </p:spPr>
+        <p:txBody>
+          <a:bodyPr wrap="square">
+            <a:spAutoFit/>
+          </a:bodyPr>
+          <a:lstStyle/>
+          <a:p>
+            <a:pPr algn="ctr"/>
+            <a:r>
+              <a:rPr sz="2800" b="1">
+                <a:solidFill>
+                  <a:srgbClr val="4CB88F"/>
+                </a:solidFill>
+                <a:latin typeface="Freesentation"/>
+              </a:rPr>
+              <a:t>▲  +320%</a:t>
+            </a:r>
+          </a:p>
+        </p:txBody>
+      </p:sp>
+      <p:sp>
+        <p:nvSpPr>
+          <p:cNvPr id="17" name="TextBox 16"/>
+          <p:cNvSpPr txBox="1"/>
+          <p:nvPr/>
+        </p:nvSpPr>
+        <p:spPr>
+          <a:xfrm>
+            <a:off x="4343400" y="3200400"/>
+            <a:ext cx="3291840" cy="320040"/>
+          </a:xfrm>
+          <a:prstGeom prst="rect">
+            <a:avLst/>
+          </a:prstGeom>
+          <a:noFill/>
+        </p:spPr>
+        <p:txBody>
+          <a:bodyPr wrap="square">
+            <a:spAutoFit/>
+          </a:bodyPr>
+          <a:lstStyle/>
+          <a:p>
+            <a:pPr algn="ctr"/>
+            <a:r>
+              <a:rPr sz="1400" b="1">
+                <a:solidFill>
+                  <a:srgbClr val="212121"/>
+                </a:solidFill>
+                <a:latin typeface="Freesentation"/>
+              </a:rPr>
+              <a:t>처리량 증가</a:t>
+            </a:r>
+          </a:p>
+        </p:txBody>
+      </p:sp>
+      <p:sp>
+        <p:nvSpPr>
+          <p:cNvPr id="18" name="TextBox 17"/>
+          <p:cNvSpPr txBox="1"/>
+          <p:nvPr/>
+        </p:nvSpPr>
+        <p:spPr>
+          <a:xfrm>
+            <a:off x="4343400" y="3611880"/>
+            <a:ext cx="3291840" cy="1371600"/>
+          </a:xfrm>
+          <a:prstGeom prst="rect">
+            <a:avLst/>
+          </a:prstGeom>
+          <a:noFill/>
+        </p:spPr>
+        <p:txBody>
+          <a:bodyPr wrap="square">
+            <a:spAutoFit/>
+          </a:bodyPr>
+          <a:lstStyle/>
+          <a:p>
+            <a:pPr algn="ctr"/>
+            <a:r>
+              <a:rPr sz="1300" b="0">
+                <a:solidFill>
+                  <a:srgbClr val="212121"/>
+                </a:solidFill>
+                <a:latin typeface="Freesentation"/>
+              </a:rPr>
+              <a:t>10K → 42K msg/s</a:t>
+            </a:r>
+          </a:p>
+          <a:p>
+            <a:pPr algn="ctr"/>
+            <a:r>
+              <a:rPr sz="1300" b="0">
+                <a:solidFill>
+                  <a:srgbClr val="212121"/>
+                </a:solidFill>
+                <a:latin typeface="Freesentation"/>
+              </a:rPr>
+              <a:t>Multi-AZ 자동 스케일</a:t>
+            </a:r>
+          </a:p>
+          <a:p>
+            <a:pPr algn="ctr"/>
+            <a:r>
+              <a:rPr sz="1300" b="0">
+                <a:solidFill>
+                  <a:srgbClr val="212121"/>
+                </a:solidFill>
+                <a:latin typeface="Freesentation"/>
+              </a:rPr>
+              <a:t>(피크 트래픽 실측)</a:t>
+            </a:r>
+          </a:p>
+        </p:txBody>
+      </p:sp>
+      <p:sp>
+        <p:nvSpPr>
+          <p:cNvPr id="19" name="TextBox 18"/>
+          <p:cNvSpPr txBox="1"/>
+          <p:nvPr/>
+        </p:nvSpPr>
+        <p:spPr>
+          <a:xfrm>
+            <a:off x="4343400" y="5349240"/>
+            <a:ext cx="3291840" cy="274320"/>
+          </a:xfrm>
+          <a:prstGeom prst="rect">
+            <a:avLst/>
+          </a:prstGeom>
+          <a:noFill/>
+        </p:spPr>
+        <p:txBody>
+          <a:bodyPr wrap="square">
+            <a:spAutoFit/>
+          </a:bodyPr>
+          <a:lstStyle/>
+          <a:p>
+            <a:pPr algn="ctr"/>
+            <a:r>
+              <a:rPr sz="1100">
+                <a:solidFill>
+                  <a:srgbClr val="505050"/>
+                </a:solidFill>
+                <a:latin typeface="Freesentation"/>
+              </a:rPr>
+              <a:t>피크 트래픽 기준</a:t>
+            </a:r>
+          </a:p>
+        </p:txBody>
+      </p:sp>
+      <p:sp>
+        <p:nvSpPr>
+          <p:cNvPr id="20" name="TextBox 19"/>
+          <p:cNvSpPr txBox="1"/>
+          <p:nvPr/>
+        </p:nvSpPr>
+        <p:spPr>
+          <a:xfrm>
+            <a:off x="8092440" y="2606040"/>
+            <a:ext cx="3291840" cy="502920"/>
+          </a:xfrm>
+          <a:prstGeom prst="rect">
+            <a:avLst/>
+          </a:prstGeom>
+          <a:noFill/>
+        </p:spPr>
+        <p:txBody>
+          <a:bodyPr wrap="square">
+            <a:spAutoFit/>
+          </a:bodyPr>
+          <a:lstStyle/>
+          <a:p>
+            <a:pPr algn="ctr"/>
+            <a:r>
+              <a:rPr sz="2800" b="1">
+                <a:solidFill>
+                  <a:srgbClr val="0043DA"/>
+                </a:solidFill>
+                <a:latin typeface="Freesentation"/>
+              </a:rPr>
+              <a:t>▼  -75%</a:t>
+            </a:r>
+          </a:p>
+        </p:txBody>
+      </p:sp>
+      <p:sp>
+        <p:nvSpPr>
+          <p:cNvPr id="21" name="TextBox 20"/>
+          <p:cNvSpPr txBox="1"/>
+          <p:nvPr/>
+        </p:nvSpPr>
+        <p:spPr>
+          <a:xfrm>
+            <a:off x="8092440" y="3200400"/>
+            <a:ext cx="3291840" cy="320040"/>
+          </a:xfrm>
+          <a:prstGeom prst="rect">
+            <a:avLst/>
+          </a:prstGeom>
+          <a:noFill/>
+        </p:spPr>
+        <p:txBody>
+          <a:bodyPr wrap="square">
+            <a:spAutoFit/>
+          </a:bodyPr>
+          <a:lstStyle/>
+          <a:p>
+            <a:pPr algn="ctr"/>
+            <a:r>
+              <a:rPr sz="1400" b="1">
+                <a:solidFill>
+                  <a:srgbClr val="212121"/>
+                </a:solidFill>
+                <a:latin typeface="Freesentation"/>
+              </a:rPr>
+              <a:t>지연시간 감소</a:t>
+            </a:r>
+          </a:p>
+        </p:txBody>
+      </p:sp>
+      <p:sp>
+        <p:nvSpPr>
+          <p:cNvPr id="22" name="TextBox 21"/>
+          <p:cNvSpPr txBox="1"/>
+          <p:nvPr/>
+        </p:nvSpPr>
+        <p:spPr>
+          <a:xfrm>
+            <a:off x="8092440" y="3611880"/>
+            <a:ext cx="3291840" cy="1371600"/>
+          </a:xfrm>
+          <a:prstGeom prst="rect">
+            <a:avLst/>
+          </a:prstGeom>
+          <a:noFill/>
+        </p:spPr>
+        <p:txBody>
+          <a:bodyPr wrap="square">
+            <a:spAutoFit/>
+          </a:bodyPr>
+          <a:lstStyle/>
+          <a:p>
+            <a:pPr algn="ctr"/>
+            <a:r>
+              <a:rPr sz="1300" b="0">
+                <a:solidFill>
+                  <a:srgbClr val="212121"/>
+                </a:solidFill>
+                <a:latin typeface="Freesentation"/>
+              </a:rPr>
+              <a:t>200ms → 50ms</a:t>
+            </a:r>
+          </a:p>
+          <a:p>
+            <a:pPr algn="ctr"/>
+            <a:r>
+              <a:rPr sz="1300" b="0">
+                <a:solidFill>
+                  <a:srgbClr val="212121"/>
+                </a:solidFill>
+                <a:latin typeface="Freesentation"/>
+              </a:rPr>
+              <a:t>VPC Endpoint 적용</a:t>
+            </a:r>
+          </a:p>
+          <a:p>
+            <a:pPr algn="ctr"/>
+            <a:r>
+              <a:rPr sz="1300" b="0">
+                <a:solidFill>
+                  <a:srgbClr val="212121"/>
+                </a:solidFill>
+                <a:latin typeface="Freesentation"/>
+              </a:rPr>
+              <a:t>(평균 레이턴시 실측)</a:t>
+            </a:r>
+          </a:p>
+        </p:txBody>
+      </p:sp>
+      <p:sp>
+        <p:nvSpPr>
+          <p:cNvPr id="23" name="TextBox 22"/>
+          <p:cNvSpPr txBox="1"/>
+          <p:nvPr/>
+        </p:nvSpPr>
+        <p:spPr>
+          <a:xfrm>
+            <a:off x="8092440" y="5349240"/>
+            <a:ext cx="3291840" cy="274320"/>
+          </a:xfrm>
+          <a:prstGeom prst="rect">
+            <a:avLst/>
+          </a:prstGeom>
+          <a:noFill/>
+        </p:spPr>
+        <p:txBody>
+          <a:bodyPr wrap="square">
+            <a:spAutoFit/>
+          </a:bodyPr>
+          <a:lstStyle/>
+          <a:p>
+            <a:pPr algn="ctr"/>
+            <a:r>
+              <a:rPr sz="1100">
+                <a:solidFill>
+                  <a:srgbClr val="505050"/>
+                </a:solidFill>
+                <a:latin typeface="Freesentation"/>
+              </a:rPr>
+              <a:t>평균 레이턴시</a:t>
+            </a:r>
+          </a:p>
+        </p:txBody>
+      </p:sp>
+      <p:sp>
+        <p:nvSpPr>
+          <p:cNvPr id="24" name="TextBox 23"/>
+          <p:cNvSpPr txBox="1"/>
+          <p:nvPr/>
+        </p:nvSpPr>
+        <p:spPr>
+          <a:xfrm>
+            <a:off x="640080" y="5971032"/>
+            <a:ext cx="10881360" cy="365760"/>
+          </a:xfrm>
+          <a:prstGeom prst="rect">
+            <a:avLst/>
+          </a:prstGeom>
+          <a:noFill/>
+        </p:spPr>
+        <p:txBody>
+          <a:bodyPr wrap="square">
+            <a:spAutoFit/>
+          </a:bodyPr>
+          <a:lstStyle/>
+          <a:p>
+            <a:r>
+              <a:rPr sz="1300" b="1">
+                <a:solidFill>
+                  <a:srgbClr val="FFFFFF"/>
+                </a:solidFill>
+                <a:latin typeface="Freesentation"/>
+              </a:rPr>
+              <a:t>📊 종합: MSK 도입 6개월 만에 ROI 240% 달성 — 연간 순이익 ₩1.05억 (절감 ₩1.8억 - 서비스 비용 ₩0.75억)</a:t>
+            </a:r>
+          </a:p>
+        </p:txBody>
+      </p:sp>
+    </p:spTree>
+  </p:cSld>
+  <p:clrMapOvr>
+    <a:masterClrMapping/>
+  </p:clrMapOvr>
+</p:sld>
+</file>
+
+<file path=ppt/slides/slide27.xml><?xml version="1.0" encoding="utf-8"?>
 <p:sld xmlns:a="http://schemas.openxmlformats.org/drawingml/2006/main" xmlns:r="http://schemas.openxmlformats.org/officeDocument/2006/relationships" xmlns:p="http://schemas.openxmlformats.org/presentationml/2006/main">
   <p:cSld>
     <p:spTree>

--- a/results/pptx/AWS_MSK_Expert_Intro.pptx
+++ b/results/pptx/AWS_MSK_Expert_Intro.pptx
@@ -11994,6 +11994,344 @@
 <p:sld xmlns:a="http://schemas.openxmlformats.org/drawingml/2006/main" xmlns:p="http://schemas.openxmlformats.org/presentationml/2006/main" xmlns:r="http://schemas.openxmlformats.org/officeDocument/2006/relationships">
   <p:cSld>
     <p:spTree>
+      <p:sp>
+        <p:nvSpPr>
+          <p:cNvPr id="9" name="TextBox 8"/>
+          <p:cNvSpPr txBox="1"/>
+          <p:nvPr/>
+        </p:nvSpPr>
+        <p:spPr>
+          <a:xfrm>
+            <a:off x="6126000" y="2468880"/>
+            <a:ext cx="5608800" cy="4114800"/>
+          </a:xfrm>
+          <a:prstGeom prst="rect">
+            <a:avLst/>
+          </a:prstGeom>
+          <a:noFill/>
+        </p:spPr>
+        <p:txBody>
+          <a:bodyPr wrap="square">
+            <a:spAutoFit/>
+          </a:bodyPr>
+          <a:lstStyle/>
+          <a:p>
+            <a:r>
+              <a:rPr sz="1400" b="1">
+                <a:solidFill>
+                  <a:srgbClr val="212121"/>
+                </a:solidFill>
+                <a:latin typeface="Freesentation"/>
+              </a:rPr>
+              <a:t>• 브로커 배치 (3-AZ)</a:t>
+            </a:r>
+          </a:p>
+          <a:p>
+            <a:r>
+              <a:rPr sz="1400" b="1">
+                <a:solidFill>
+                  <a:srgbClr val="212121"/>
+                </a:solidFill>
+                <a:latin typeface="Freesentation"/>
+              </a:rPr>
+              <a:t>  ap-northeast-2a/2b/2c 각 AZ에 1개 브로커</a:t>
+            </a:r>
+          </a:p>
+          <a:p>
+            <a:r>
+              <a:rPr sz="1400" b="1">
+                <a:solidFill>
+                  <a:srgbClr val="212121"/>
+                </a:solidFill>
+                <a:latin typeface="Freesentation"/>
+              </a:rPr>
+              <a:t>  단일 AZ 장애 시 나머지 2개 브로커로 서비스 유지</a:t>
+            </a:r>
+          </a:p>
+          <a:p>
+            <a:r>
+              <a:rPr sz="1400" b="1">
+                <a:solidFill>
+                  <a:srgbClr val="212121"/>
+                </a:solidFill>
+                <a:latin typeface="Freesentation"/>
+              </a:rPr>
+              <a:t/>
+            </a:r>
+          </a:p>
+          <a:p>
+            <a:r>
+              <a:rPr sz="1400" b="1">
+                <a:solidFill>
+                  <a:srgbClr val="212121"/>
+                </a:solidFill>
+                <a:latin typeface="Freesentation"/>
+              </a:rPr>
+              <a:t>• 파티션 복제 전략</a:t>
+            </a:r>
+          </a:p>
+          <a:p>
+            <a:r>
+              <a:rPr sz="1400" b="1">
+                <a:solidFill>
+                  <a:srgbClr val="212121"/>
+                </a:solidFill>
+                <a:latin typeface="Freesentation"/>
+              </a:rPr>
+              <a:t>  replication.factor=3, min.insync.replicas=2</a:t>
+            </a:r>
+          </a:p>
+          <a:p>
+            <a:r>
+              <a:rPr sz="1400" b="1">
+                <a:solidFill>
+                  <a:srgbClr val="212121"/>
+                </a:solidFill>
+                <a:latin typeface="Freesentation"/>
+              </a:rPr>
+              <a:t>  ISR(In-Sync Replica) 기반 리더 자동 선출</a:t>
+            </a:r>
+          </a:p>
+          <a:p>
+            <a:r>
+              <a:rPr sz="1400" b="1">
+                <a:solidFill>
+                  <a:srgbClr val="212121"/>
+                </a:solidFill>
+                <a:latin typeface="Freesentation"/>
+              </a:rPr>
+              <a:t/>
+            </a:r>
+          </a:p>
+          <a:p>
+            <a:r>
+              <a:rPr sz="1400" b="1">
+                <a:solidFill>
+                  <a:srgbClr val="212121"/>
+                </a:solidFill>
+                <a:latin typeface="Freesentation"/>
+              </a:rPr>
+              <a:t>• MSK Managed Rebalancing</a:t>
+            </a:r>
+          </a:p>
+          <a:p>
+            <a:r>
+              <a:rPr sz="1400" b="1">
+                <a:solidFill>
+                  <a:srgbClr val="212121"/>
+                </a:solidFill>
+                <a:latin typeface="Freesentation"/>
+              </a:rPr>
+              <a:t>  브로커 추가·제거 시 파티션 자동 재배분</a:t>
+            </a:r>
+          </a:p>
+          <a:p>
+            <a:r>
+              <a:rPr sz="1400" b="1">
+                <a:solidFill>
+                  <a:srgbClr val="212121"/>
+                </a:solidFill>
+                <a:latin typeface="Freesentation"/>
+              </a:rPr>
+              <a:t>  Cruise Control 통합 — 부하 균등화 자동화</a:t>
+            </a:r>
+          </a:p>
+          <a:p>
+            <a:r>
+              <a:rPr sz="1400" b="1">
+                <a:solidFill>
+                  <a:srgbClr val="212121"/>
+                </a:solidFill>
+                <a:latin typeface="Freesentation"/>
+              </a:rPr>
+              <a:t/>
+            </a:r>
+          </a:p>
+          <a:p>
+            <a:r>
+              <a:rPr sz="1400" b="1">
+                <a:solidFill>
+                  <a:srgbClr val="212121"/>
+                </a:solidFill>
+                <a:latin typeface="Freesentation"/>
+              </a:rPr>
+              <a:t>• PrivateLink 연결</a:t>
+            </a:r>
+          </a:p>
+          <a:p>
+            <a:r>
+              <a:rPr sz="1400" b="1">
+                <a:solidFill>
+                  <a:srgbClr val="212121"/>
+                </a:solidFill>
+                <a:latin typeface="Freesentation"/>
+              </a:rPr>
+              <a:t>  VPC 외부 Consumer → PrivateLink 경유 접속</a:t>
+            </a:r>
+          </a:p>
+          <a:p>
+            <a:r>
+              <a:rPr sz="1400" b="1">
+                <a:solidFill>
+                  <a:srgbClr val="212121"/>
+                </a:solidFill>
+                <a:latin typeface="Freesentation"/>
+              </a:rPr>
+              <a:t>  IAM 인증 + TLS 1.2 암호화 강제 적용</a:t>
+            </a:r>
+          </a:p>
+        </p:txBody>
+      </p:sp>
+      <p:sp>
+        <p:nvSpPr>
+          <p:cNvPr id="8" name="TextBox 7"/>
+          <p:cNvSpPr txBox="1"/>
+          <p:nvPr/>
+        </p:nvSpPr>
+        <p:spPr>
+          <a:xfrm>
+            <a:off x="457200" y="4251960"/>
+            <a:ext cx="5486400" cy="548640"/>
+          </a:xfrm>
+          <a:prstGeom prst="rect">
+            <a:avLst/>
+          </a:prstGeom>
+          <a:noFill/>
+        </p:spPr>
+        <p:txBody>
+          <a:bodyPr wrap="square">
+            <a:spAutoFit/>
+          </a:bodyPr>
+          <a:lstStyle/>
+          <a:p>
+            <a:pPr algn="ctr"/>
+            <a:r>
+              <a:rPr sz="1300" b="0">
+                <a:solidFill>
+                  <a:srgbClr val="9E9E9E"/>
+                </a:solidFill>
+                <a:latin typeface="Freesentation"/>
+              </a:rPr>
+              <a:t>[MSK 멀티-AZ 브로커 배치도]</a:t>
+            </a:r>
+          </a:p>
+        </p:txBody>
+      </p:sp>
+      <p:sp>
+        <p:nvSpPr>
+          <p:cNvPr id="7" name="Rectangle 6"/>
+          <p:cNvSpPr/>
+          <p:nvPr/>
+        </p:nvSpPr>
+        <p:spPr>
+          <a:xfrm>
+            <a:off x="457200" y="2468880"/>
+            <a:ext cx="5486400" cy="4114800"/>
+          </a:xfrm>
+          <a:prstGeom prst="rect">
+            <a:avLst/>
+          </a:prstGeom>
+          <a:solidFill>
+            <a:srgbClr val="E8EFFD"/>
+          </a:solidFill>
+          <a:ln w="6350">
+            <a:solidFill>
+              <a:srgbClr val="DCDCDC"/>
+            </a:solidFill>
+          </a:ln>
+        </p:spPr>
+        <p:style>
+          <a:lnRef idx="1">
+            <a:schemeClr val="accent1"/>
+          </a:lnRef>
+          <a:fillRef idx="3">
+            <a:schemeClr val="accent1"/>
+          </a:fillRef>
+          <a:effectRef idx="2">
+            <a:schemeClr val="accent1"/>
+          </a:effectRef>
+          <a:fontRef idx="minor">
+            <a:schemeClr val="lt1"/>
+          </a:fontRef>
+        </p:style>
+        <p:txBody>
+          <a:bodyPr rtlCol="0" anchor="ctr"/>
+          <a:lstStyle/>
+          <a:p>
+            <a:pPr algn="ctr"/>
+          </a:p>
+        </p:txBody>
+      </p:sp>
+      <p:sp>
+        <p:nvSpPr>
+          <p:cNvPr id="6" name="TextBox 5"/>
+          <p:cNvSpPr txBox="1"/>
+          <p:nvPr/>
+        </p:nvSpPr>
+        <p:spPr>
+          <a:xfrm>
+            <a:off x="457200" y="1965960"/>
+            <a:ext cx="11277600" cy="228600"/>
+          </a:xfrm>
+          <a:prstGeom prst="rect">
+            <a:avLst/>
+          </a:prstGeom>
+          <a:noFill/>
+        </p:spPr>
+        <p:txBody>
+          <a:bodyPr wrap="square">
+            <a:spAutoFit/>
+          </a:bodyPr>
+          <a:lstStyle/>
+          <a:p>
+            <a:pPr algn="l"/>
+            <a:r>
+              <a:rPr sz="1300" b="0">
+                <a:solidFill>
+                  <a:srgbClr val="212121"/>
+                </a:solidFill>
+                <a:latin typeface="Freesentation"/>
+              </a:rPr>
+              <a:t>3-AZ 장애 격리 — 브로커 쿼럼 기반 자동 복구</a:t>
+            </a:r>
+          </a:p>
+        </p:txBody>
+      </p:sp>
+      <p:sp>
+        <p:nvSpPr>
+          <p:cNvPr id="5" name="TextBox 4"/>
+          <p:cNvSpPr txBox="1"/>
+          <p:nvPr/>
+        </p:nvSpPr>
+        <p:spPr>
+          <a:xfrm>
+            <a:off x="457200" y="1600200"/>
+            <a:ext cx="11277600" cy="274320"/>
+          </a:xfrm>
+          <a:prstGeom prst="rect">
+            <a:avLst/>
+          </a:prstGeom>
+          <a:noFill/>
+        </p:spPr>
+        <p:txBody>
+          <a:bodyPr wrap="square">
+            <a:spAutoFit/>
+          </a:bodyPr>
+          <a:lstStyle/>
+          <a:p>
+            <a:pPr algn="l"/>
+            <a:r>
+              <a:rPr sz="1600" b="1">
+                <a:solidFill>
+                  <a:srgbClr val="0043DA"/>
+                </a:solidFill>
+                <a:latin typeface="Freesentation"/>
+              </a:rPr>
+              <a:t>AWS MSK 멀티-AZ 브로커 복제 구성</a:t>
+            </a:r>
+          </a:p>
+        </p:txBody>
+      </p:sp>
       <p:nvGrpSpPr>
         <p:cNvPr id="1" name=""/>
         <p:cNvGrpSpPr/>
@@ -12009,925 +12347,6 @@
       </p:grpSpPr>
       <p:sp>
         <p:nvSpPr>
-          <p:cNvPr id="59" name="직사각형 58"/>
-          <p:cNvSpPr/>
-          <p:nvPr/>
-        </p:nvSpPr>
-        <p:spPr>
-          <a:xfrm>
-            <a:off x="5454814" y="1560692"/>
-            <a:ext cx="6461651" cy="1543780"/>
-          </a:xfrm>
-          <a:prstGeom prst="rect">
-            <a:avLst/>
-          </a:prstGeom>
-          <a:solidFill>
-            <a:srgbClr val="2A6FDE">
-              <a:alpha val="7000"/>
-            </a:srgbClr>
-          </a:solidFill>
-          <a:ln>
-            <a:noFill/>
-          </a:ln>
-        </p:spPr>
-        <p:style>
-          <a:lnRef idx="2">
-            <a:schemeClr val="accent1">
-              <a:shade val="50000"/>
-            </a:schemeClr>
-          </a:lnRef>
-          <a:fillRef idx="1">
-            <a:schemeClr val="accent1"/>
-          </a:fillRef>
-          <a:effectRef idx="0">
-            <a:schemeClr val="accent1"/>
-          </a:effectRef>
-          <a:fontRef idx="minor">
-            <a:schemeClr val="lt1"/>
-          </a:fontRef>
-        </p:style>
-        <p:txBody>
-          <a:bodyPr rtlCol="0" anchor="ctr"/>
-          <a:lstStyle/>
-          <a:p>
-            <a:pPr algn="ctr"/>
-            <a:endParaRPr lang="ko-KR" altLang="en-US"/>
-          </a:p>
-        </p:txBody>
-      </p:sp>
-      <p:sp>
-        <p:nvSpPr>
-          <p:cNvPr id="50" name="TextBox 49">
-            <a:extLst>
-              <a:ext uri="{FF2B5EF4-FFF2-40B4-BE49-F238E27FC236}">
-                <a16:creationId xmlns:a16="http://schemas.microsoft.com/office/drawing/2014/main" id="{B4F1CD8C-B1D4-7464-AA76-B85D3FD34B41}"/>
-              </a:ext>
-            </a:extLst>
-          </p:cNvPr>
-          <p:cNvSpPr txBox="1"/>
-          <p:nvPr/>
-        </p:nvSpPr>
-        <p:spPr>
-          <a:xfrm>
-            <a:off x="5532230" y="1560692"/>
-            <a:ext cx="1251848" cy="1543780"/>
-          </a:xfrm>
-          <a:prstGeom prst="rect">
-            <a:avLst/>
-          </a:prstGeom>
-          <a:noFill/>
-        </p:spPr>
-        <p:txBody>
-          <a:bodyPr wrap="square" lIns="0" tIns="0" rIns="0" bIns="0" rtlCol="0" anchor="ctr">
-            <a:noAutofit/>
-          </a:bodyPr>
-          <a:lstStyle/>
-          <a:p>
-            <a:pPr algn="ctr"/>
-            <a:r>
-              <a:rPr kumimoji="1" lang="en-US" altLang="ko-KR" sz="1200" b="1" dirty="0">
-                <a:solidFill>
-                  <a:srgbClr val="2A6FDE"/>
-                </a:solidFill>
-                <a:latin typeface="프리젠테이션 7 Bold" pitchFamily="2" charset="-127"/>
-                <a:ea typeface="프리젠테이션 7 Bold" pitchFamily="2" charset="-127"/>
-              </a:rPr>
-              <a:t>CHALLENGE</a:t>
-            </a:r>
-            <a:endParaRPr kumimoji="1" lang="ko-KR" altLang="en-US" sz="1200" b="1" dirty="0">
-              <a:solidFill>
-                <a:srgbClr val="2A6FDE"/>
-              </a:solidFill>
-              <a:latin typeface="프리젠테이션 7 Bold" pitchFamily="2" charset="-127"/>
-              <a:ea typeface="프리젠테이션 7 Bold" pitchFamily="2" charset="-127"/>
-            </a:endParaRPr>
-          </a:p>
-        </p:txBody>
-      </p:sp>
-      <p:sp>
-        <p:nvSpPr>
-          <p:cNvPr id="51" name="TextBox 50">
-            <a:extLst>
-              <a:ext uri="{FF2B5EF4-FFF2-40B4-BE49-F238E27FC236}">
-                <a16:creationId xmlns:a16="http://schemas.microsoft.com/office/drawing/2014/main" id="{87BB32EE-1742-12E7-BFF9-906AF589AC67}"/>
-              </a:ext>
-            </a:extLst>
-          </p:cNvPr>
-          <p:cNvSpPr txBox="1"/>
-          <p:nvPr/>
-        </p:nvSpPr>
-        <p:spPr>
-          <a:xfrm>
-            <a:off x="6950765" y="1560691"/>
-            <a:ext cx="4965700" cy="1543780"/>
-          </a:xfrm>
-          <a:prstGeom prst="rect">
-            <a:avLst/>
-          </a:prstGeom>
-          <a:noFill/>
-        </p:spPr>
-        <p:txBody>
-          <a:bodyPr wrap="square" lIns="0" tIns="0" rIns="0" bIns="0" rtlCol="0" anchor="ctr">
-            <a:noAutofit/>
-          </a:bodyPr>
-          <a:lstStyle/>
-          <a:p>
-            <a:pPr marL="171450" indent="-171450">
-              <a:lnSpc>
-                <a:spcPct val="150000"/>
-              </a:lnSpc>
-              <a:buFont typeface="Arial" panose="020B0604020202020204" pitchFamily="34" charset="0"/>
-              <a:buChar char="•"/>
-            </a:pPr>
-            <a:r>
-              <a:rPr kumimoji="1" lang="ko-KR" altLang="en-US" sz="1100" dirty="0">
-                <a:latin typeface="프리젠테이션 4 Regular" pitchFamily="2" charset="-127"/>
-                <a:ea typeface="프리젠테이션 4 Regular" pitchFamily="2" charset="-127"/>
-              </a:rPr>
-              <a:t>상담사 숙련도에 따라서 전화 응대 후 후처리로 남기는 내용에 대한 품질이 상이함</a:t>
-            </a:r>
-          </a:p>
-          <a:p>
-            <a:pPr marL="171450" indent="-171450">
-              <a:lnSpc>
-                <a:spcPct val="150000"/>
-              </a:lnSpc>
-              <a:buFont typeface="Arial" panose="020B0604020202020204" pitchFamily="34" charset="0"/>
-              <a:buChar char="•"/>
-            </a:pPr>
-            <a:r>
-              <a:rPr kumimoji="1" lang="ko-KR" altLang="en-US" sz="1100" dirty="0">
-                <a:latin typeface="프리젠테이션 4 Regular" pitchFamily="2" charset="-127"/>
-                <a:ea typeface="프리젠테이션 4 Regular" pitchFamily="2" charset="-127"/>
-              </a:rPr>
-              <a:t>통화가 길어지면 통화 내용에 대해서 전체적으로 기억하기 어려움</a:t>
-            </a:r>
-          </a:p>
-          <a:p>
-            <a:pPr marL="171450" indent="-171450">
-              <a:lnSpc>
-                <a:spcPct val="150000"/>
-              </a:lnSpc>
-              <a:buFont typeface="Arial" panose="020B0604020202020204" pitchFamily="34" charset="0"/>
-              <a:buChar char="•"/>
-            </a:pPr>
-            <a:r>
-              <a:rPr kumimoji="1" lang="ko-KR" altLang="en-US" sz="1100" dirty="0">
-                <a:latin typeface="프리젠테이션 4 Regular" pitchFamily="2" charset="-127"/>
-                <a:ea typeface="프리젠테이션 4 Regular" pitchFamily="2" charset="-127"/>
-              </a:rPr>
-              <a:t>객관적으로 고객의 감정상태를 파악하기 어려움</a:t>
-            </a:r>
-          </a:p>
-          <a:p>
-            <a:pPr marL="171450" indent="-171450">
-              <a:lnSpc>
-                <a:spcPct val="150000"/>
-              </a:lnSpc>
-              <a:buFont typeface="Arial" panose="020B0604020202020204" pitchFamily="34" charset="0"/>
-              <a:buChar char="•"/>
-            </a:pPr>
-            <a:r>
-              <a:rPr kumimoji="1" lang="ko-KR" altLang="en-US" sz="1100" dirty="0">
-                <a:latin typeface="프리젠테이션 4 Regular" pitchFamily="2" charset="-127"/>
-                <a:ea typeface="프리젠테이션 4 Regular" pitchFamily="2" charset="-127"/>
-              </a:rPr>
-              <a:t>수기로 후처리를 남기면 상담 업무 생산성이 </a:t>
-            </a:r>
-            <a:r>
-              <a:rPr kumimoji="1" lang="ko-KR" altLang="en-US" sz="1100" dirty="0" smtClean="0">
-                <a:latin typeface="프리젠테이션 4 Regular" pitchFamily="2" charset="-127"/>
-                <a:ea typeface="프리젠테이션 4 Regular" pitchFamily="2" charset="-127"/>
-              </a:rPr>
-              <a:t>떨어짐</a:t>
-            </a:r>
-            <a:endParaRPr kumimoji="1" lang="en-US" altLang="ko-KR" sz="1100" dirty="0">
-              <a:latin typeface="프리젠테이션 4 Regular" pitchFamily="2" charset="-127"/>
-              <a:ea typeface="프리젠테이션 4 Regular" pitchFamily="2" charset="-127"/>
-            </a:endParaRPr>
-          </a:p>
-        </p:txBody>
-      </p:sp>
-      <p:cxnSp>
-        <p:nvCxnSpPr>
-          <p:cNvPr id="41" name="직선 연결선 40"/>
-          <p:cNvCxnSpPr/>
-          <p:nvPr/>
-        </p:nvCxnSpPr>
-        <p:spPr>
-          <a:xfrm flipV="1">
-            <a:off x="5454815" y="1560691"/>
-            <a:ext cx="6461650" cy="21252"/>
-          </a:xfrm>
-          <a:prstGeom prst="line">
-            <a:avLst/>
-          </a:prstGeom>
-          <a:ln w="12700">
-            <a:solidFill>
-              <a:srgbClr val="0043DA"/>
-            </a:solidFill>
-          </a:ln>
-        </p:spPr>
-        <p:style>
-          <a:lnRef idx="1">
-            <a:schemeClr val="accent1"/>
-          </a:lnRef>
-          <a:fillRef idx="0">
-            <a:schemeClr val="accent1"/>
-          </a:fillRef>
-          <a:effectRef idx="0">
-            <a:schemeClr val="accent1"/>
-          </a:effectRef>
-          <a:fontRef idx="minor">
-            <a:schemeClr val="tx1"/>
-          </a:fontRef>
-        </p:style>
-      </p:cxnSp>
-      <p:sp>
-        <p:nvSpPr>
-          <p:cNvPr id="62" name="직사각형 61"/>
-          <p:cNvSpPr/>
-          <p:nvPr/>
-        </p:nvSpPr>
-        <p:spPr>
-          <a:xfrm>
-            <a:off x="5454813" y="3275389"/>
-            <a:ext cx="6461651" cy="1543780"/>
-          </a:xfrm>
-          <a:prstGeom prst="rect">
-            <a:avLst/>
-          </a:prstGeom>
-          <a:solidFill>
-            <a:srgbClr val="4CB88F">
-              <a:alpha val="7000"/>
-            </a:srgbClr>
-          </a:solidFill>
-          <a:ln>
-            <a:noFill/>
-          </a:ln>
-        </p:spPr>
-        <p:style>
-          <a:lnRef idx="2">
-            <a:schemeClr val="accent1">
-              <a:shade val="50000"/>
-            </a:schemeClr>
-          </a:lnRef>
-          <a:fillRef idx="1">
-            <a:schemeClr val="accent1"/>
-          </a:fillRef>
-          <a:effectRef idx="0">
-            <a:schemeClr val="accent1"/>
-          </a:effectRef>
-          <a:fontRef idx="minor">
-            <a:schemeClr val="lt1"/>
-          </a:fontRef>
-        </p:style>
-        <p:txBody>
-          <a:bodyPr rtlCol="0" anchor="ctr"/>
-          <a:lstStyle/>
-          <a:p>
-            <a:pPr algn="ctr"/>
-            <a:endParaRPr lang="ko-KR" altLang="en-US"/>
-          </a:p>
-        </p:txBody>
-      </p:sp>
-      <p:sp>
-        <p:nvSpPr>
-          <p:cNvPr id="63" name="TextBox 62">
-            <a:extLst>
-              <a:ext uri="{FF2B5EF4-FFF2-40B4-BE49-F238E27FC236}">
-                <a16:creationId xmlns:a16="http://schemas.microsoft.com/office/drawing/2014/main" id="{B4F1CD8C-B1D4-7464-AA76-B85D3FD34B41}"/>
-              </a:ext>
-            </a:extLst>
-          </p:cNvPr>
-          <p:cNvSpPr txBox="1"/>
-          <p:nvPr/>
-        </p:nvSpPr>
-        <p:spPr>
-          <a:xfrm>
-            <a:off x="5532229" y="3275389"/>
-            <a:ext cx="1251848" cy="1543780"/>
-          </a:xfrm>
-          <a:prstGeom prst="rect">
-            <a:avLst/>
-          </a:prstGeom>
-          <a:noFill/>
-        </p:spPr>
-        <p:txBody>
-          <a:bodyPr wrap="square" lIns="0" tIns="0" rIns="0" bIns="0" rtlCol="0" anchor="ctr">
-            <a:noAutofit/>
-          </a:bodyPr>
-          <a:lstStyle/>
-          <a:p>
-            <a:pPr algn="ctr"/>
-            <a:r>
-              <a:rPr kumimoji="1" lang="en-US" altLang="ko-KR" sz="1200" b="1" dirty="0">
-                <a:solidFill>
-                  <a:srgbClr val="4CB88F"/>
-                </a:solidFill>
-                <a:latin typeface="프리젠테이션 7 Bold" pitchFamily="2" charset="-127"/>
-                <a:ea typeface="프리젠테이션 7 Bold" pitchFamily="2" charset="-127"/>
-              </a:rPr>
-              <a:t>SOLUTION</a:t>
-            </a:r>
-          </a:p>
-        </p:txBody>
-      </p:sp>
-      <p:sp>
-        <p:nvSpPr>
-          <p:cNvPr id="64" name="TextBox 63">
-            <a:extLst>
-              <a:ext uri="{FF2B5EF4-FFF2-40B4-BE49-F238E27FC236}">
-                <a16:creationId xmlns:a16="http://schemas.microsoft.com/office/drawing/2014/main" id="{87BB32EE-1742-12E7-BFF9-906AF589AC67}"/>
-              </a:ext>
-            </a:extLst>
-          </p:cNvPr>
-          <p:cNvSpPr txBox="1"/>
-          <p:nvPr/>
-        </p:nvSpPr>
-        <p:spPr>
-          <a:xfrm>
-            <a:off x="6950764" y="3275388"/>
-            <a:ext cx="4965700" cy="1543780"/>
-          </a:xfrm>
-          <a:prstGeom prst="rect">
-            <a:avLst/>
-          </a:prstGeom>
-          <a:noFill/>
-        </p:spPr>
-        <p:txBody>
-          <a:bodyPr wrap="square" lIns="0" tIns="0" rIns="0" bIns="0" rtlCol="0" anchor="ctr">
-            <a:noAutofit/>
-          </a:bodyPr>
-          <a:lstStyle/>
-          <a:p>
-            <a:pPr marL="171450" indent="-171450">
-              <a:lnSpc>
-                <a:spcPct val="150000"/>
-              </a:lnSpc>
-              <a:buFont typeface="Arial" panose="020B0604020202020204" pitchFamily="34" charset="0"/>
-              <a:buChar char="•"/>
-            </a:pPr>
-            <a:r>
-              <a:rPr kumimoji="1" lang="en" altLang="ko-KR" sz="1100" dirty="0">
-                <a:latin typeface="프리젠테이션 4 Regular" pitchFamily="2" charset="-127"/>
-                <a:ea typeface="프리젠테이션 4 Regular" pitchFamily="2" charset="-127"/>
-              </a:rPr>
-              <a:t>STT(Speech-to-Text)</a:t>
-            </a:r>
-            <a:r>
-              <a:rPr kumimoji="1" lang="ko-KR" altLang="en-US" sz="1100" dirty="0">
-                <a:latin typeface="프리젠테이션 4 Regular" pitchFamily="2" charset="-127"/>
-                <a:ea typeface="프리젠테이션 4 Regular" pitchFamily="2" charset="-127"/>
-              </a:rPr>
-              <a:t>를 도입하여 </a:t>
-            </a:r>
-            <a:r>
-              <a:rPr kumimoji="1" lang="ko-KR" altLang="en-US" sz="1100" dirty="0" err="1">
-                <a:latin typeface="프리젠테이션 4 Regular" pitchFamily="2" charset="-127"/>
-                <a:ea typeface="프리젠테이션 4 Regular" pitchFamily="2" charset="-127"/>
-              </a:rPr>
-              <a:t>화자별</a:t>
-            </a:r>
-            <a:r>
-              <a:rPr kumimoji="1" lang="ko-KR" altLang="en-US" sz="1100" dirty="0">
-                <a:latin typeface="프리젠테이션 4 Regular" pitchFamily="2" charset="-127"/>
-                <a:ea typeface="프리젠테이션 4 Regular" pitchFamily="2" charset="-127"/>
-              </a:rPr>
-              <a:t> 대화 분리</a:t>
-            </a:r>
-          </a:p>
-          <a:p>
-            <a:pPr marL="171450" indent="-171450">
-              <a:lnSpc>
-                <a:spcPct val="150000"/>
-              </a:lnSpc>
-              <a:buFont typeface="Arial" panose="020B0604020202020204" pitchFamily="34" charset="0"/>
-              <a:buChar char="•"/>
-            </a:pPr>
-            <a:r>
-              <a:rPr kumimoji="1" lang="ko-KR" altLang="en-US" sz="1100" dirty="0" err="1">
-                <a:latin typeface="프리젠테이션 4 Regular" pitchFamily="2" charset="-127"/>
-                <a:ea typeface="프리젠테이션 4 Regular" pitchFamily="2" charset="-127"/>
-              </a:rPr>
-              <a:t>생성형</a:t>
-            </a:r>
-            <a:r>
-              <a:rPr kumimoji="1" lang="ko-KR" altLang="en-US" sz="1100" dirty="0">
-                <a:latin typeface="프리젠테이션 4 Regular" pitchFamily="2" charset="-127"/>
-                <a:ea typeface="프리젠테이션 4 Regular" pitchFamily="2" charset="-127"/>
-              </a:rPr>
-              <a:t> </a:t>
-            </a:r>
-            <a:r>
-              <a:rPr kumimoji="1" lang="en" altLang="ko-KR" sz="1100" dirty="0">
-                <a:latin typeface="프리젠테이션 4 Regular" pitchFamily="2" charset="-127"/>
-                <a:ea typeface="프리젠테이션 4 Regular" pitchFamily="2" charset="-127"/>
-              </a:rPr>
-              <a:t>AI</a:t>
-            </a:r>
-            <a:r>
-              <a:rPr kumimoji="1" lang="ko-KR" altLang="en-US" sz="1100" dirty="0">
-                <a:latin typeface="프리젠테이션 4 Regular" pitchFamily="2" charset="-127"/>
-                <a:ea typeface="프리젠테이션 4 Regular" pitchFamily="2" charset="-127"/>
-              </a:rPr>
-              <a:t>와 </a:t>
-            </a:r>
-            <a:r>
-              <a:rPr kumimoji="1" lang="en" altLang="ko-KR" sz="1100" dirty="0">
-                <a:latin typeface="프리젠테이션 4 Regular" pitchFamily="2" charset="-127"/>
-                <a:ea typeface="프리젠테이션 4 Regular" pitchFamily="2" charset="-127"/>
-              </a:rPr>
-              <a:t>STT(Speech-to-Text)</a:t>
-            </a:r>
-            <a:r>
-              <a:rPr kumimoji="1" lang="ko-KR" altLang="en-US" sz="1100" dirty="0" err="1">
-                <a:latin typeface="프리젠테이션 4 Regular" pitchFamily="2" charset="-127"/>
-                <a:ea typeface="프리젠테이션 4 Regular" pitchFamily="2" charset="-127"/>
-              </a:rPr>
-              <a:t>를</a:t>
-            </a:r>
-            <a:r>
-              <a:rPr kumimoji="1" lang="ko-KR" altLang="en-US" sz="1100" dirty="0">
-                <a:latin typeface="프리젠테이션 4 Regular" pitchFamily="2" charset="-127"/>
-                <a:ea typeface="프리젠테이션 4 Regular" pitchFamily="2" charset="-127"/>
-              </a:rPr>
-              <a:t> 도입하여 </a:t>
-            </a:r>
-            <a:r>
-              <a:rPr kumimoji="1" lang="ko-KR" altLang="en-US" sz="1100" dirty="0" err="1">
-                <a:latin typeface="프리젠테이션 4 Regular" pitchFamily="2" charset="-127"/>
-                <a:ea typeface="프리젠테이션 4 Regular" pitchFamily="2" charset="-127"/>
-              </a:rPr>
-              <a:t>상담사와</a:t>
-            </a:r>
-            <a:r>
-              <a:rPr kumimoji="1" lang="ko-KR" altLang="en-US" sz="1100" dirty="0">
-                <a:latin typeface="프리젠테이션 4 Regular" pitchFamily="2" charset="-127"/>
-                <a:ea typeface="프리젠테이션 4 Regular" pitchFamily="2" charset="-127"/>
-              </a:rPr>
-              <a:t> 고객의 대화를 요약하고</a:t>
-            </a:r>
-            <a:r>
-              <a:rPr kumimoji="1" lang="en-US" altLang="ko-KR" sz="1100" dirty="0">
-                <a:latin typeface="프리젠테이션 4 Regular" pitchFamily="2" charset="-127"/>
-                <a:ea typeface="프리젠테이션 4 Regular" pitchFamily="2" charset="-127"/>
-              </a:rPr>
-              <a:t>, </a:t>
-            </a:r>
-            <a:br>
-              <a:rPr kumimoji="1" lang="en-US" altLang="ko-KR" sz="1100" dirty="0">
-                <a:latin typeface="프리젠테이션 4 Regular" pitchFamily="2" charset="-127"/>
-                <a:ea typeface="프리젠테이션 4 Regular" pitchFamily="2" charset="-127"/>
-              </a:rPr>
-            </a:br>
-            <a:r>
-              <a:rPr kumimoji="1" lang="ko-KR" altLang="en-US" sz="1100" dirty="0">
-                <a:latin typeface="프리젠테이션 4 Regular" pitchFamily="2" charset="-127"/>
-                <a:ea typeface="프리젠테이션 4 Regular" pitchFamily="2" charset="-127"/>
-              </a:rPr>
-              <a:t>고객의 감정을 분류</a:t>
-            </a:r>
-            <a:r>
-              <a:rPr kumimoji="1" lang="en-US" altLang="ko-KR" sz="1100" dirty="0">
-                <a:latin typeface="프리젠테이션 4 Regular" pitchFamily="2" charset="-127"/>
-                <a:ea typeface="프리젠테이션 4 Regular" pitchFamily="2" charset="-127"/>
-              </a:rPr>
-              <a:t>,</a:t>
-            </a:r>
-            <a:r>
-              <a:rPr kumimoji="1" lang="ko-KR" altLang="en-US" sz="1100" dirty="0">
-                <a:latin typeface="프리젠테이션 4 Regular" pitchFamily="2" charset="-127"/>
-                <a:ea typeface="프리젠테이션 4 Regular" pitchFamily="2" charset="-127"/>
-              </a:rPr>
-              <a:t> 문의 유형 분류</a:t>
-            </a:r>
-          </a:p>
-        </p:txBody>
-      </p:sp>
-      <p:sp>
-        <p:nvSpPr>
-          <p:cNvPr id="67" name="직사각형 66"/>
-          <p:cNvSpPr/>
-          <p:nvPr/>
-        </p:nvSpPr>
-        <p:spPr>
-          <a:xfrm>
-            <a:off x="5454812" y="4987648"/>
-            <a:ext cx="6461651" cy="1543780"/>
-          </a:xfrm>
-          <a:prstGeom prst="rect">
-            <a:avLst/>
-          </a:prstGeom>
-          <a:solidFill>
-            <a:srgbClr val="EE8150">
-              <a:alpha val="7000"/>
-            </a:srgbClr>
-          </a:solidFill>
-          <a:ln>
-            <a:noFill/>
-          </a:ln>
-        </p:spPr>
-        <p:style>
-          <a:lnRef idx="2">
-            <a:schemeClr val="accent1">
-              <a:shade val="50000"/>
-            </a:schemeClr>
-          </a:lnRef>
-          <a:fillRef idx="1">
-            <a:schemeClr val="accent1"/>
-          </a:fillRef>
-          <a:effectRef idx="0">
-            <a:schemeClr val="accent1"/>
-          </a:effectRef>
-          <a:fontRef idx="minor">
-            <a:schemeClr val="lt1"/>
-          </a:fontRef>
-        </p:style>
-        <p:txBody>
-          <a:bodyPr rtlCol="0" anchor="ctr"/>
-          <a:lstStyle/>
-          <a:p>
-            <a:pPr algn="ctr"/>
-            <a:endParaRPr lang="ko-KR" altLang="en-US"/>
-          </a:p>
-        </p:txBody>
-      </p:sp>
-      <p:sp>
-        <p:nvSpPr>
-          <p:cNvPr id="68" name="TextBox 67">
-            <a:extLst>
-              <a:ext uri="{FF2B5EF4-FFF2-40B4-BE49-F238E27FC236}">
-                <a16:creationId xmlns:a16="http://schemas.microsoft.com/office/drawing/2014/main" id="{B4F1CD8C-B1D4-7464-AA76-B85D3FD34B41}"/>
-              </a:ext>
-            </a:extLst>
-          </p:cNvPr>
-          <p:cNvSpPr txBox="1"/>
-          <p:nvPr/>
-        </p:nvSpPr>
-        <p:spPr>
-          <a:xfrm>
-            <a:off x="5532228" y="4987648"/>
-            <a:ext cx="1251848" cy="1543780"/>
-          </a:xfrm>
-          <a:prstGeom prst="rect">
-            <a:avLst/>
-          </a:prstGeom>
-          <a:noFill/>
-        </p:spPr>
-        <p:txBody>
-          <a:bodyPr wrap="square" lIns="0" tIns="0" rIns="0" bIns="0" rtlCol="0" anchor="ctr">
-            <a:noAutofit/>
-          </a:bodyPr>
-          <a:lstStyle/>
-          <a:p>
-            <a:pPr algn="ctr"/>
-            <a:r>
-              <a:rPr kumimoji="1" lang="en-US" altLang="ko-KR" sz="1200" b="1" dirty="0">
-                <a:solidFill>
-                  <a:srgbClr val="EE8150"/>
-                </a:solidFill>
-                <a:latin typeface="프리젠테이션 7 Bold" pitchFamily="2" charset="-127"/>
-                <a:ea typeface="프리젠테이션 7 Bold" pitchFamily="2" charset="-127"/>
-              </a:rPr>
-              <a:t>CHALLENGE</a:t>
-            </a:r>
-            <a:endParaRPr kumimoji="1" lang="ko-KR" altLang="en-US" sz="1200" b="1" dirty="0">
-              <a:solidFill>
-                <a:srgbClr val="EE8150"/>
-              </a:solidFill>
-              <a:latin typeface="프리젠테이션 7 Bold" pitchFamily="2" charset="-127"/>
-              <a:ea typeface="프리젠테이션 7 Bold" pitchFamily="2" charset="-127"/>
-            </a:endParaRPr>
-          </a:p>
-        </p:txBody>
-      </p:sp>
-      <p:sp>
-        <p:nvSpPr>
-          <p:cNvPr id="69" name="TextBox 68">
-            <a:extLst>
-              <a:ext uri="{FF2B5EF4-FFF2-40B4-BE49-F238E27FC236}">
-                <a16:creationId xmlns:a16="http://schemas.microsoft.com/office/drawing/2014/main" id="{87BB32EE-1742-12E7-BFF9-906AF589AC67}"/>
-              </a:ext>
-            </a:extLst>
-          </p:cNvPr>
-          <p:cNvSpPr txBox="1"/>
-          <p:nvPr/>
-        </p:nvSpPr>
-        <p:spPr>
-          <a:xfrm>
-            <a:off x="6950763" y="4987647"/>
-            <a:ext cx="4965700" cy="1543780"/>
-          </a:xfrm>
-          <a:prstGeom prst="rect">
-            <a:avLst/>
-          </a:prstGeom>
-          <a:noFill/>
-        </p:spPr>
-        <p:txBody>
-          <a:bodyPr wrap="square" lIns="0" tIns="0" rIns="0" bIns="0" rtlCol="0" anchor="ctr">
-            <a:noAutofit/>
-          </a:bodyPr>
-          <a:lstStyle/>
-          <a:p>
-            <a:pPr marL="171450" indent="-171450">
-              <a:lnSpc>
-                <a:spcPct val="150000"/>
-              </a:lnSpc>
-              <a:buFont typeface="Arial" panose="020B0604020202020204" pitchFamily="34" charset="0"/>
-              <a:buChar char="•"/>
-            </a:pPr>
-            <a:r>
-              <a:rPr kumimoji="1" lang="ko-KR" altLang="en-US" sz="1100" dirty="0">
-                <a:latin typeface="프리젠테이션 4 Regular" pitchFamily="2" charset="-127"/>
-                <a:ea typeface="프리젠테이션 4 Regular" pitchFamily="2" charset="-127"/>
-              </a:rPr>
-              <a:t>업무 효율성 향상</a:t>
-            </a:r>
-            <a:r>
-              <a:rPr kumimoji="1" lang="en-US" altLang="ko-KR" sz="1100" dirty="0">
-                <a:latin typeface="프리젠테이션 4 Regular" pitchFamily="2" charset="-127"/>
-                <a:ea typeface="프리젠테이션 4 Regular" pitchFamily="2" charset="-127"/>
-              </a:rPr>
-              <a:t>:</a:t>
-            </a:r>
-            <a:r>
-              <a:rPr kumimoji="1" lang="ko-KR" altLang="en-US" sz="1100" dirty="0">
-                <a:latin typeface="프리젠테이션 4 Regular" pitchFamily="2" charset="-127"/>
-                <a:ea typeface="프리젠테이션 4 Regular" pitchFamily="2" charset="-127"/>
-              </a:rPr>
-              <a:t> 후처리 시간 감소 및 고객 응대에 대한 집중도 향상</a:t>
-            </a:r>
-          </a:p>
-          <a:p>
-            <a:pPr marL="171450" indent="-171450">
-              <a:lnSpc>
-                <a:spcPct val="150000"/>
-              </a:lnSpc>
-              <a:buFont typeface="Arial" panose="020B0604020202020204" pitchFamily="34" charset="0"/>
-              <a:buChar char="•"/>
-            </a:pPr>
-            <a:r>
-              <a:rPr kumimoji="1" lang="ko-KR" altLang="en-US" sz="1100" dirty="0">
-                <a:latin typeface="프리젠테이션 4 Regular" pitchFamily="2" charset="-127"/>
-                <a:ea typeface="프리젠테이션 4 Regular" pitchFamily="2" charset="-127"/>
-              </a:rPr>
-              <a:t>품질 개선 </a:t>
-            </a:r>
-            <a:r>
-              <a:rPr kumimoji="1" lang="en-US" altLang="ko-KR" sz="1100" dirty="0">
-                <a:latin typeface="프리젠테이션 4 Regular" pitchFamily="2" charset="-127"/>
-                <a:ea typeface="프리젠테이션 4 Regular" pitchFamily="2" charset="-127"/>
-              </a:rPr>
-              <a:t>:</a:t>
-            </a:r>
-            <a:r>
-              <a:rPr kumimoji="1" lang="ko-KR" altLang="en-US" sz="1100" dirty="0">
-                <a:latin typeface="프리젠테이션 4 Regular" pitchFamily="2" charset="-127"/>
-                <a:ea typeface="프리젠테이션 4 Regular" pitchFamily="2" charset="-127"/>
-              </a:rPr>
-              <a:t> </a:t>
-            </a:r>
-            <a:r>
-              <a:rPr kumimoji="1" lang="ko-KR" altLang="en-US" sz="1100" dirty="0" err="1">
-                <a:latin typeface="프리젠테이션 4 Regular" pitchFamily="2" charset="-127"/>
-                <a:ea typeface="프리젠테이션 4 Regular" pitchFamily="2" charset="-127"/>
-              </a:rPr>
-              <a:t>대화요약에</a:t>
-            </a:r>
-            <a:r>
-              <a:rPr kumimoji="1" lang="ko-KR" altLang="en-US" sz="1100" dirty="0">
-                <a:latin typeface="프리젠테이션 4 Regular" pitchFamily="2" charset="-127"/>
-                <a:ea typeface="프리젠테이션 4 Regular" pitchFamily="2" charset="-127"/>
-              </a:rPr>
-              <a:t> 대한 일관성과 신뢰도 증가 </a:t>
-            </a:r>
-          </a:p>
-          <a:p>
-            <a:pPr marL="171450" indent="-171450">
-              <a:lnSpc>
-                <a:spcPct val="150000"/>
-              </a:lnSpc>
-              <a:buFont typeface="Arial" panose="020B0604020202020204" pitchFamily="34" charset="0"/>
-              <a:buChar char="•"/>
-            </a:pPr>
-            <a:r>
-              <a:rPr kumimoji="1" lang="ko-KR" altLang="en-US" sz="1100" dirty="0">
-                <a:latin typeface="프리젠테이션 4 Regular" pitchFamily="2" charset="-127"/>
-                <a:ea typeface="프리젠테이션 4 Regular" pitchFamily="2" charset="-127"/>
-              </a:rPr>
-              <a:t>비즈니스 성과 </a:t>
-            </a:r>
-            <a:r>
-              <a:rPr kumimoji="1" lang="en-US" altLang="ko-KR" sz="1100" dirty="0">
-                <a:latin typeface="프리젠테이션 4 Regular" pitchFamily="2" charset="-127"/>
-                <a:ea typeface="프리젠테이션 4 Regular" pitchFamily="2" charset="-127"/>
-              </a:rPr>
-              <a:t>:</a:t>
-            </a:r>
-            <a:r>
-              <a:rPr kumimoji="1" lang="ko-KR" altLang="en-US" sz="1100" dirty="0">
-                <a:latin typeface="프리젠테이션 4 Regular" pitchFamily="2" charset="-127"/>
-                <a:ea typeface="프리젠테이션 4 Regular" pitchFamily="2" charset="-127"/>
-              </a:rPr>
-              <a:t> </a:t>
-            </a:r>
-            <a:r>
-              <a:rPr kumimoji="1" lang="ko-KR" altLang="en-US" sz="1100" dirty="0" err="1">
-                <a:latin typeface="프리젠테이션 4 Regular" pitchFamily="2" charset="-127"/>
-                <a:ea typeface="프리젠테이션 4 Regular" pitchFamily="2" charset="-127"/>
-              </a:rPr>
-              <a:t>상담사</a:t>
-            </a:r>
-            <a:r>
-              <a:rPr kumimoji="1" lang="ko-KR" altLang="en-US" sz="1100" dirty="0">
-                <a:latin typeface="프리젠테이션 4 Regular" pitchFamily="2" charset="-127"/>
-                <a:ea typeface="프리젠테이션 4 Regular" pitchFamily="2" charset="-127"/>
-              </a:rPr>
-              <a:t> 업무 처리량 증가 및 고객 대기 시간 감소</a:t>
-            </a:r>
-          </a:p>
-        </p:txBody>
-      </p:sp>
-      <p:sp>
-        <p:nvSpPr>
-          <p:cNvPr id="72" name="직사각형 71"/>
-          <p:cNvSpPr/>
-          <p:nvPr/>
-        </p:nvSpPr>
-        <p:spPr>
-          <a:xfrm>
-            <a:off x="344974" y="1581170"/>
-            <a:ext cx="4943151" cy="4949482"/>
-          </a:xfrm>
-          <a:prstGeom prst="rect">
-            <a:avLst/>
-          </a:prstGeom>
-          <a:solidFill>
-            <a:schemeClr val="bg1">
-              <a:lumMod val="95000"/>
-              <a:alpha val="60000"/>
-            </a:schemeClr>
-          </a:solidFill>
-          <a:ln>
-            <a:noFill/>
-          </a:ln>
-        </p:spPr>
-        <p:style>
-          <a:lnRef idx="2">
-            <a:schemeClr val="accent1">
-              <a:shade val="50000"/>
-            </a:schemeClr>
-          </a:lnRef>
-          <a:fillRef idx="1">
-            <a:schemeClr val="accent1"/>
-          </a:fillRef>
-          <a:effectRef idx="0">
-            <a:schemeClr val="accent1"/>
-          </a:effectRef>
-          <a:fontRef idx="minor">
-            <a:schemeClr val="lt1"/>
-          </a:fontRef>
-        </p:style>
-        <p:txBody>
-          <a:bodyPr rtlCol="0" anchor="ctr"/>
-          <a:lstStyle/>
-          <a:p>
-            <a:pPr algn="ctr">
-              <a:lnSpc>
-                <a:spcPct val="130000"/>
-              </a:lnSpc>
-            </a:pPr>
-            <a:r>
-              <a:rPr lang="ko-KR" altLang="en-US" sz="4400" dirty="0">
-                <a:solidFill>
-                  <a:schemeClr val="bg2">
-                    <a:lumMod val="10000"/>
-                  </a:schemeClr>
-                </a:solidFill>
-                <a:latin typeface="프리젠테이션 7 Bold" pitchFamily="2" charset="-127"/>
-                <a:ea typeface="프리젠테이션 7 Bold" pitchFamily="2" charset="-127"/>
-              </a:rPr>
-              <a:t>이미지</a:t>
-            </a:r>
-            <a:r>
-              <a:rPr lang="en-US" altLang="ko-KR" sz="4400" dirty="0">
-                <a:solidFill>
-                  <a:schemeClr val="bg2">
-                    <a:lumMod val="10000"/>
-                  </a:schemeClr>
-                </a:solidFill>
-                <a:latin typeface="프리젠테이션 7 Bold" pitchFamily="2" charset="-127"/>
-                <a:ea typeface="프리젠테이션 7 Bold" pitchFamily="2" charset="-127"/>
-              </a:rPr>
-              <a:t>, </a:t>
-            </a:r>
-            <a:r>
-              <a:rPr lang="ko-KR" altLang="en-US" sz="4400" dirty="0">
-                <a:solidFill>
-                  <a:schemeClr val="bg2">
-                    <a:lumMod val="10000"/>
-                  </a:schemeClr>
-                </a:solidFill>
-                <a:latin typeface="프리젠테이션 7 Bold" pitchFamily="2" charset="-127"/>
-                <a:ea typeface="프리젠테이션 7 Bold" pitchFamily="2" charset="-127"/>
-              </a:rPr>
-              <a:t>내용</a:t>
-            </a:r>
-          </a:p>
-        </p:txBody>
-      </p:sp>
-      <p:cxnSp>
-        <p:nvCxnSpPr>
-          <p:cNvPr id="34" name="직선 연결선 33"/>
-          <p:cNvCxnSpPr/>
-          <p:nvPr/>
-        </p:nvCxnSpPr>
-        <p:spPr>
-          <a:xfrm flipV="1">
-            <a:off x="5454815" y="3249791"/>
-            <a:ext cx="6461650" cy="21252"/>
-          </a:xfrm>
-          <a:prstGeom prst="line">
-            <a:avLst/>
-          </a:prstGeom>
-          <a:ln w="12700">
-            <a:solidFill>
-              <a:srgbClr val="4CB88F"/>
-            </a:solidFill>
-          </a:ln>
-        </p:spPr>
-        <p:style>
-          <a:lnRef idx="1">
-            <a:schemeClr val="accent1"/>
-          </a:lnRef>
-          <a:fillRef idx="0">
-            <a:schemeClr val="accent1"/>
-          </a:fillRef>
-          <a:effectRef idx="0">
-            <a:schemeClr val="accent1"/>
-          </a:effectRef>
-          <a:fontRef idx="minor">
-            <a:schemeClr val="tx1"/>
-          </a:fontRef>
-        </p:style>
-      </p:cxnSp>
-      <p:cxnSp>
-        <p:nvCxnSpPr>
-          <p:cNvPr id="35" name="직선 연결선 34"/>
-          <p:cNvCxnSpPr/>
-          <p:nvPr/>
-        </p:nvCxnSpPr>
-        <p:spPr>
-          <a:xfrm flipV="1">
-            <a:off x="5454815" y="4976991"/>
-            <a:ext cx="6461650" cy="21252"/>
-          </a:xfrm>
-          <a:prstGeom prst="line">
-            <a:avLst/>
-          </a:prstGeom>
-          <a:ln w="12700">
-            <a:solidFill>
-              <a:srgbClr val="EE8150"/>
-            </a:solidFill>
-          </a:ln>
-        </p:spPr>
-        <p:style>
-          <a:lnRef idx="1">
-            <a:schemeClr val="accent1"/>
-          </a:lnRef>
-          <a:fillRef idx="0">
-            <a:schemeClr val="accent1"/>
-          </a:fillRef>
-          <a:effectRef idx="0">
-            <a:schemeClr val="accent1"/>
-          </a:effectRef>
-          <a:fontRef idx="minor">
-            <a:schemeClr val="tx1"/>
-          </a:fontRef>
-        </p:style>
-      </p:cxnSp>
-      <p:sp>
-        <p:nvSpPr>
-          <p:cNvPr id="3" name="텍스트 개체 틀 2"/>
-          <p:cNvSpPr>
-            <a:spLocks noGrp="1"/>
-          </p:cNvSpPr>
-          <p:nvPr>
-            <p:ph type="body" sz="quarter" idx="10"/>
-          </p:nvPr>
-        </p:nvSpPr>
-        <p:spPr/>
-        <p:txBody>
-          <a:bodyPr/>
-          <a:lstStyle/>
-          <a:p>
-            <a:endParaRPr lang="ko-KR" altLang="en-US"/>
-          </a:p>
-        </p:txBody>
-      </p:sp>
-      <p:sp>
-        <p:nvSpPr>
           <p:cNvPr id="18" name="TextBox 17"/>
           <p:cNvSpPr txBox="1"/>
           <p:nvPr/>
@@ -12954,7 +12373,7 @@
                 <a:ea typeface="프리젠테이션 7 Bold" pitchFamily="2" charset="-127"/>
                 <a:cs typeface="Pretendard ExtraBold" panose="02000903000000020004" pitchFamily="2" charset="-127"/>
               </a:rPr>
-              <a:t>L17-1. Image Left-1</a:t>
+              <a:t>L17-1. Image Left</a:t>
             </a:r>
           </a:p>
         </p:txBody>
@@ -13005,7 +12424,7 @@
                 <a:ea typeface="프리젠테이션 5 Medium" pitchFamily="2" charset="-127"/>
                 <a:cs typeface="Pretendard" panose="02000503000000020004" pitchFamily="2" charset="-127"/>
               </a:rPr>
-              <a:t>설명글을</a:t>
+              <a:t>이미지+설명 2컬럼 레이아웃 — MSK 고가용성 심화</a:t>
             </a:r>
             <a:r>
               <a:rPr lang="ko-KR" altLang="en-US" sz="1200" dirty="0">
@@ -13026,7 +12445,7 @@
                 <a:ea typeface="프리젠테이션 5 Medium" pitchFamily="2" charset="-127"/>
                 <a:cs typeface="Pretendard" panose="02000503000000020004" pitchFamily="2" charset="-127"/>
               </a:rPr>
-              <a:t> 적어주세요</a:t>
+              <a:t/>
             </a:r>
             <a:r>
               <a:rPr lang="en-US" altLang="ko-KR" sz="1200" b="1" dirty="0">
@@ -13047,7 +12466,7 @@
                 <a:ea typeface="프리젠테이션 5 Medium" pitchFamily="2" charset="-127"/>
                 <a:cs typeface="Pretendard" panose="02000503000000020004" pitchFamily="2" charset="-127"/>
               </a:rPr>
-              <a:t>. </a:t>
+              <a:t/>
             </a:r>
             <a:r>
               <a:rPr lang="ko-KR" altLang="en-US" sz="1200" b="1" dirty="0">
@@ -13065,7 +12484,7 @@
                 <a:ea typeface="프리젠테이션 7 Bold" pitchFamily="2" charset="-127"/>
                 <a:cs typeface="Pretendard" panose="02000503000000020004" pitchFamily="2" charset="-127"/>
               </a:rPr>
-              <a:t>강조 텍스트</a:t>
+              <a:t/>
             </a:r>
             <a:r>
               <a:rPr lang="en-US" altLang="ko-KR" sz="1200" b="1" dirty="0">
@@ -13083,7 +12502,7 @@
                 <a:ea typeface="프리젠테이션 7 Bold" pitchFamily="2" charset="-127"/>
                 <a:cs typeface="Pretendard" panose="02000503000000020004" pitchFamily="2" charset="-127"/>
               </a:rPr>
-              <a:t>(</a:t>
+              <a:t/>
             </a:r>
             <a:r>
               <a:rPr lang="ko-KR" altLang="en-US" sz="1200" b="1" dirty="0" err="1">
@@ -13101,7 +12520,7 @@
                 <a:ea typeface="프리젠테이션 7 Bold" pitchFamily="2" charset="-127"/>
                 <a:cs typeface="Pretendard" panose="02000503000000020004" pitchFamily="2" charset="-127"/>
               </a:rPr>
-              <a:t>프리젠테이션</a:t>
+              <a:t/>
             </a:r>
             <a:r>
               <a:rPr lang="ko-KR" altLang="en-US" sz="1200" b="1" dirty="0">
@@ -13119,7 +12538,7 @@
                 <a:ea typeface="프리젠테이션 7 Bold" pitchFamily="2" charset="-127"/>
                 <a:cs typeface="Pretendard" panose="02000503000000020004" pitchFamily="2" charset="-127"/>
               </a:rPr>
-              <a:t> </a:t>
+              <a:t/>
             </a:r>
             <a:r>
               <a:rPr lang="en-US" altLang="ko-KR" sz="1200" b="1" dirty="0">
@@ -13137,7 +12556,7 @@
                 <a:ea typeface="프리젠테이션 7 Bold" pitchFamily="2" charset="-127"/>
                 <a:cs typeface="Pretendard" panose="02000503000000020004" pitchFamily="2" charset="-127"/>
               </a:rPr>
-              <a:t>7 Bold, </a:t>
+              <a:t/>
             </a:r>
             <a:r>
               <a:rPr lang="ko-KR" altLang="en-US" sz="1200" b="1" dirty="0">
@@ -13155,7 +12574,7 @@
                 <a:ea typeface="프리젠테이션 7 Bold" pitchFamily="2" charset="-127"/>
                 <a:cs typeface="Pretendard" panose="02000503000000020004" pitchFamily="2" charset="-127"/>
               </a:rPr>
-              <a:t>메인 컬러</a:t>
+              <a:t/>
             </a:r>
             <a:r>
               <a:rPr lang="en-US" altLang="ko-KR" sz="1200" b="1" dirty="0" smtClean="0">
@@ -13173,7 +12592,7 @@
                 <a:ea typeface="프리젠테이션 7 Bold" pitchFamily="2" charset="-127"/>
                 <a:cs typeface="Pretendard" panose="02000503000000020004" pitchFamily="2" charset="-127"/>
               </a:rPr>
-              <a:t>)</a:t>
+              <a:t/>
             </a:r>
           </a:p>
           <a:p>
@@ -13201,7 +12620,7 @@
                 <a:ea typeface="프리젠테이션 5 Medium" pitchFamily="2" charset="-127"/>
                 <a:cs typeface="Pretendard" panose="02000503000000020004" pitchFamily="2" charset="-127"/>
               </a:rPr>
-              <a:t>폰트 </a:t>
+              <a:t/>
             </a:r>
             <a:r>
               <a:rPr lang="en-US" altLang="ko-KR" sz="1200" dirty="0" smtClean="0">
@@ -13222,7 +12641,7 @@
                 <a:ea typeface="프리젠테이션 5 Medium" pitchFamily="2" charset="-127"/>
                 <a:cs typeface="Pretendard" panose="02000503000000020004" pitchFamily="2" charset="-127"/>
               </a:rPr>
-              <a:t>: </a:t>
+              <a:t/>
             </a:r>
             <a:r>
               <a:rPr lang="ko-KR" altLang="en-US" sz="1200" dirty="0" err="1" smtClean="0">
@@ -13243,7 +12662,7 @@
                 <a:ea typeface="프리젠테이션 5 Medium" pitchFamily="2" charset="-127"/>
                 <a:cs typeface="Pretendard" panose="02000503000000020004" pitchFamily="2" charset="-127"/>
               </a:rPr>
-              <a:t>프리젠테이션</a:t>
+              <a:t/>
             </a:r>
             <a:r>
               <a:rPr lang="ko-KR" altLang="en-US" sz="1200" dirty="0" smtClean="0">
@@ -13264,7 +12683,7 @@
                 <a:ea typeface="프리젠테이션 5 Medium" pitchFamily="2" charset="-127"/>
                 <a:cs typeface="Pretendard" panose="02000503000000020004" pitchFamily="2" charset="-127"/>
               </a:rPr>
-              <a:t> </a:t>
+              <a:t/>
             </a:r>
             <a:r>
               <a:rPr lang="en-US" altLang="ko-KR" sz="1200" dirty="0" smtClean="0">
@@ -13285,7 +12704,7 @@
                 <a:ea typeface="프리젠테이션 5 Medium" pitchFamily="2" charset="-127"/>
                 <a:cs typeface="Pretendard" panose="02000503000000020004" pitchFamily="2" charset="-127"/>
               </a:rPr>
-              <a:t>5 Medium 12pt  </a:t>
+              <a:t/>
             </a:r>
             <a:r>
               <a:rPr lang="ko-KR" altLang="en-US" sz="1200" dirty="0" smtClean="0">
@@ -13306,7 +12725,7 @@
                 <a:ea typeface="프리젠테이션 5 Medium" pitchFamily="2" charset="-127"/>
                 <a:cs typeface="Pretendard" panose="02000503000000020004" pitchFamily="2" charset="-127"/>
               </a:rPr>
-              <a:t>최대 </a:t>
+              <a:t/>
             </a:r>
             <a:r>
               <a:rPr lang="en-US" altLang="ko-KR" sz="1200" dirty="0" smtClean="0">
@@ -13327,7 +12746,7 @@
                 <a:ea typeface="프리젠테이션 5 Medium" pitchFamily="2" charset="-127"/>
                 <a:cs typeface="Pretendard" panose="02000503000000020004" pitchFamily="2" charset="-127"/>
               </a:rPr>
-              <a:t>3</a:t>
+              <a:t/>
             </a:r>
             <a:r>
               <a:rPr lang="ko-KR" altLang="en-US" sz="1200" dirty="0" smtClean="0">
@@ -13348,7 +12767,7 @@
                 <a:ea typeface="프리젠테이션 5 Medium" pitchFamily="2" charset="-127"/>
                 <a:cs typeface="Pretendard" panose="02000503000000020004" pitchFamily="2" charset="-127"/>
               </a:rPr>
-              <a:t>줄까지 작성 가능합니다</a:t>
+              <a:t/>
             </a:r>
             <a:r>
               <a:rPr lang="en-US" altLang="ko-KR" sz="1200" dirty="0" smtClean="0">
@@ -13369,7 +12788,7 @@
                 <a:ea typeface="프리젠테이션 5 Medium" pitchFamily="2" charset="-127"/>
                 <a:cs typeface="Pretendard" panose="02000503000000020004" pitchFamily="2" charset="-127"/>
               </a:rPr>
-              <a:t>.</a:t>
+              <a:t/>
             </a:r>
             <a:endParaRPr lang="en-US" altLang="ko-KR" sz="1200" dirty="0">
               <a:ln>

--- a/results/pptx/AWS_MSK_Expert_Intro.pptx
+++ b/results/pptx/AWS_MSK_Expert_Intro.pptx
@@ -11994,344 +11994,6 @@
 <p:sld xmlns:a="http://schemas.openxmlformats.org/drawingml/2006/main" xmlns:p="http://schemas.openxmlformats.org/presentationml/2006/main" xmlns:r="http://schemas.openxmlformats.org/officeDocument/2006/relationships">
   <p:cSld>
     <p:spTree>
-      <p:sp>
-        <p:nvSpPr>
-          <p:cNvPr id="9" name="TextBox 8"/>
-          <p:cNvSpPr txBox="1"/>
-          <p:nvPr/>
-        </p:nvSpPr>
-        <p:spPr>
-          <a:xfrm>
-            <a:off x="6126000" y="2468880"/>
-            <a:ext cx="5608800" cy="4114800"/>
-          </a:xfrm>
-          <a:prstGeom prst="rect">
-            <a:avLst/>
-          </a:prstGeom>
-          <a:noFill/>
-        </p:spPr>
-        <p:txBody>
-          <a:bodyPr wrap="square">
-            <a:spAutoFit/>
-          </a:bodyPr>
-          <a:lstStyle/>
-          <a:p>
-            <a:r>
-              <a:rPr sz="1400" b="1">
-                <a:solidFill>
-                  <a:srgbClr val="212121"/>
-                </a:solidFill>
-                <a:latin typeface="Freesentation"/>
-              </a:rPr>
-              <a:t>• 브로커 배치 (3-AZ)</a:t>
-            </a:r>
-          </a:p>
-          <a:p>
-            <a:r>
-              <a:rPr sz="1400" b="1">
-                <a:solidFill>
-                  <a:srgbClr val="212121"/>
-                </a:solidFill>
-                <a:latin typeface="Freesentation"/>
-              </a:rPr>
-              <a:t>  ap-northeast-2a/2b/2c 각 AZ에 1개 브로커</a:t>
-            </a:r>
-          </a:p>
-          <a:p>
-            <a:r>
-              <a:rPr sz="1400" b="1">
-                <a:solidFill>
-                  <a:srgbClr val="212121"/>
-                </a:solidFill>
-                <a:latin typeface="Freesentation"/>
-              </a:rPr>
-              <a:t>  단일 AZ 장애 시 나머지 2개 브로커로 서비스 유지</a:t>
-            </a:r>
-          </a:p>
-          <a:p>
-            <a:r>
-              <a:rPr sz="1400" b="1">
-                <a:solidFill>
-                  <a:srgbClr val="212121"/>
-                </a:solidFill>
-                <a:latin typeface="Freesentation"/>
-              </a:rPr>
-              <a:t/>
-            </a:r>
-          </a:p>
-          <a:p>
-            <a:r>
-              <a:rPr sz="1400" b="1">
-                <a:solidFill>
-                  <a:srgbClr val="212121"/>
-                </a:solidFill>
-                <a:latin typeface="Freesentation"/>
-              </a:rPr>
-              <a:t>• 파티션 복제 전략</a:t>
-            </a:r>
-          </a:p>
-          <a:p>
-            <a:r>
-              <a:rPr sz="1400" b="1">
-                <a:solidFill>
-                  <a:srgbClr val="212121"/>
-                </a:solidFill>
-                <a:latin typeface="Freesentation"/>
-              </a:rPr>
-              <a:t>  replication.factor=3, min.insync.replicas=2</a:t>
-            </a:r>
-          </a:p>
-          <a:p>
-            <a:r>
-              <a:rPr sz="1400" b="1">
-                <a:solidFill>
-                  <a:srgbClr val="212121"/>
-                </a:solidFill>
-                <a:latin typeface="Freesentation"/>
-              </a:rPr>
-              <a:t>  ISR(In-Sync Replica) 기반 리더 자동 선출</a:t>
-            </a:r>
-          </a:p>
-          <a:p>
-            <a:r>
-              <a:rPr sz="1400" b="1">
-                <a:solidFill>
-                  <a:srgbClr val="212121"/>
-                </a:solidFill>
-                <a:latin typeface="Freesentation"/>
-              </a:rPr>
-              <a:t/>
-            </a:r>
-          </a:p>
-          <a:p>
-            <a:r>
-              <a:rPr sz="1400" b="1">
-                <a:solidFill>
-                  <a:srgbClr val="212121"/>
-                </a:solidFill>
-                <a:latin typeface="Freesentation"/>
-              </a:rPr>
-              <a:t>• MSK Managed Rebalancing</a:t>
-            </a:r>
-          </a:p>
-          <a:p>
-            <a:r>
-              <a:rPr sz="1400" b="1">
-                <a:solidFill>
-                  <a:srgbClr val="212121"/>
-                </a:solidFill>
-                <a:latin typeface="Freesentation"/>
-              </a:rPr>
-              <a:t>  브로커 추가·제거 시 파티션 자동 재배분</a:t>
-            </a:r>
-          </a:p>
-          <a:p>
-            <a:r>
-              <a:rPr sz="1400" b="1">
-                <a:solidFill>
-                  <a:srgbClr val="212121"/>
-                </a:solidFill>
-                <a:latin typeface="Freesentation"/>
-              </a:rPr>
-              <a:t>  Cruise Control 통합 — 부하 균등화 자동화</a:t>
-            </a:r>
-          </a:p>
-          <a:p>
-            <a:r>
-              <a:rPr sz="1400" b="1">
-                <a:solidFill>
-                  <a:srgbClr val="212121"/>
-                </a:solidFill>
-                <a:latin typeface="Freesentation"/>
-              </a:rPr>
-              <a:t/>
-            </a:r>
-          </a:p>
-          <a:p>
-            <a:r>
-              <a:rPr sz="1400" b="1">
-                <a:solidFill>
-                  <a:srgbClr val="212121"/>
-                </a:solidFill>
-                <a:latin typeface="Freesentation"/>
-              </a:rPr>
-              <a:t>• PrivateLink 연결</a:t>
-            </a:r>
-          </a:p>
-          <a:p>
-            <a:r>
-              <a:rPr sz="1400" b="1">
-                <a:solidFill>
-                  <a:srgbClr val="212121"/>
-                </a:solidFill>
-                <a:latin typeface="Freesentation"/>
-              </a:rPr>
-              <a:t>  VPC 외부 Consumer → PrivateLink 경유 접속</a:t>
-            </a:r>
-          </a:p>
-          <a:p>
-            <a:r>
-              <a:rPr sz="1400" b="1">
-                <a:solidFill>
-                  <a:srgbClr val="212121"/>
-                </a:solidFill>
-                <a:latin typeface="Freesentation"/>
-              </a:rPr>
-              <a:t>  IAM 인증 + TLS 1.2 암호화 강제 적용</a:t>
-            </a:r>
-          </a:p>
-        </p:txBody>
-      </p:sp>
-      <p:sp>
-        <p:nvSpPr>
-          <p:cNvPr id="8" name="TextBox 7"/>
-          <p:cNvSpPr txBox="1"/>
-          <p:nvPr/>
-        </p:nvSpPr>
-        <p:spPr>
-          <a:xfrm>
-            <a:off x="457200" y="4251960"/>
-            <a:ext cx="5486400" cy="548640"/>
-          </a:xfrm>
-          <a:prstGeom prst="rect">
-            <a:avLst/>
-          </a:prstGeom>
-          <a:noFill/>
-        </p:spPr>
-        <p:txBody>
-          <a:bodyPr wrap="square">
-            <a:spAutoFit/>
-          </a:bodyPr>
-          <a:lstStyle/>
-          <a:p>
-            <a:pPr algn="ctr"/>
-            <a:r>
-              <a:rPr sz="1300" b="0">
-                <a:solidFill>
-                  <a:srgbClr val="9E9E9E"/>
-                </a:solidFill>
-                <a:latin typeface="Freesentation"/>
-              </a:rPr>
-              <a:t>[MSK 멀티-AZ 브로커 배치도]</a:t>
-            </a:r>
-          </a:p>
-        </p:txBody>
-      </p:sp>
-      <p:sp>
-        <p:nvSpPr>
-          <p:cNvPr id="7" name="Rectangle 6"/>
-          <p:cNvSpPr/>
-          <p:nvPr/>
-        </p:nvSpPr>
-        <p:spPr>
-          <a:xfrm>
-            <a:off x="457200" y="2468880"/>
-            <a:ext cx="5486400" cy="4114800"/>
-          </a:xfrm>
-          <a:prstGeom prst="rect">
-            <a:avLst/>
-          </a:prstGeom>
-          <a:solidFill>
-            <a:srgbClr val="E8EFFD"/>
-          </a:solidFill>
-          <a:ln w="6350">
-            <a:solidFill>
-              <a:srgbClr val="DCDCDC"/>
-            </a:solidFill>
-          </a:ln>
-        </p:spPr>
-        <p:style>
-          <a:lnRef idx="1">
-            <a:schemeClr val="accent1"/>
-          </a:lnRef>
-          <a:fillRef idx="3">
-            <a:schemeClr val="accent1"/>
-          </a:fillRef>
-          <a:effectRef idx="2">
-            <a:schemeClr val="accent1"/>
-          </a:effectRef>
-          <a:fontRef idx="minor">
-            <a:schemeClr val="lt1"/>
-          </a:fontRef>
-        </p:style>
-        <p:txBody>
-          <a:bodyPr rtlCol="0" anchor="ctr"/>
-          <a:lstStyle/>
-          <a:p>
-            <a:pPr algn="ctr"/>
-          </a:p>
-        </p:txBody>
-      </p:sp>
-      <p:sp>
-        <p:nvSpPr>
-          <p:cNvPr id="6" name="TextBox 5"/>
-          <p:cNvSpPr txBox="1"/>
-          <p:nvPr/>
-        </p:nvSpPr>
-        <p:spPr>
-          <a:xfrm>
-            <a:off x="457200" y="1965960"/>
-            <a:ext cx="11277600" cy="228600"/>
-          </a:xfrm>
-          <a:prstGeom prst="rect">
-            <a:avLst/>
-          </a:prstGeom>
-          <a:noFill/>
-        </p:spPr>
-        <p:txBody>
-          <a:bodyPr wrap="square">
-            <a:spAutoFit/>
-          </a:bodyPr>
-          <a:lstStyle/>
-          <a:p>
-            <a:pPr algn="l"/>
-            <a:r>
-              <a:rPr sz="1300" b="0">
-                <a:solidFill>
-                  <a:srgbClr val="212121"/>
-                </a:solidFill>
-                <a:latin typeface="Freesentation"/>
-              </a:rPr>
-              <a:t>3-AZ 장애 격리 — 브로커 쿼럼 기반 자동 복구</a:t>
-            </a:r>
-          </a:p>
-        </p:txBody>
-      </p:sp>
-      <p:sp>
-        <p:nvSpPr>
-          <p:cNvPr id="5" name="TextBox 4"/>
-          <p:cNvSpPr txBox="1"/>
-          <p:nvPr/>
-        </p:nvSpPr>
-        <p:spPr>
-          <a:xfrm>
-            <a:off x="457200" y="1600200"/>
-            <a:ext cx="11277600" cy="274320"/>
-          </a:xfrm>
-          <a:prstGeom prst="rect">
-            <a:avLst/>
-          </a:prstGeom>
-          <a:noFill/>
-        </p:spPr>
-        <p:txBody>
-          <a:bodyPr wrap="square">
-            <a:spAutoFit/>
-          </a:bodyPr>
-          <a:lstStyle/>
-          <a:p>
-            <a:pPr algn="l"/>
-            <a:r>
-              <a:rPr sz="1600" b="1">
-                <a:solidFill>
-                  <a:srgbClr val="0043DA"/>
-                </a:solidFill>
-                <a:latin typeface="Freesentation"/>
-              </a:rPr>
-              <a:t>AWS MSK 멀티-AZ 브로커 복제 구성</a:t>
-            </a:r>
-          </a:p>
-        </p:txBody>
-      </p:sp>
       <p:nvGrpSpPr>
         <p:cNvPr id="1" name=""/>
         <p:cNvGrpSpPr/>
@@ -12345,6 +12007,344 @@
           <a:chExt cx="0" cy="0"/>
         </a:xfrm>
       </p:grpSpPr>
+      <p:sp>
+        <p:nvSpPr>
+          <p:cNvPr id="9" name="TextBox 8"/>
+          <p:cNvSpPr txBox="1"/>
+          <p:nvPr/>
+        </p:nvSpPr>
+        <p:spPr>
+          <a:xfrm>
+            <a:off x="6126000" y="2468880"/>
+            <a:ext cx="5608800" cy="4114800"/>
+          </a:xfrm>
+          <a:prstGeom prst="rect">
+            <a:avLst/>
+          </a:prstGeom>
+          <a:noFill/>
+        </p:spPr>
+        <p:txBody>
+          <a:bodyPr wrap="square">
+            <a:spAutoFit/>
+          </a:bodyPr>
+          <a:lstStyle/>
+          <a:p>
+            <a:r>
+              <a:rPr sz="1400" b="1">
+                <a:solidFill>
+                  <a:srgbClr val="212121"/>
+                </a:solidFill>
+                <a:latin typeface="Freesentation"/>
+              </a:rPr>
+              <a:t>• 브로커 배치 (3-AZ)</a:t>
+            </a:r>
+          </a:p>
+          <a:p>
+            <a:r>
+              <a:rPr sz="1400" b="1">
+                <a:solidFill>
+                  <a:srgbClr val="212121"/>
+                </a:solidFill>
+                <a:latin typeface="Freesentation"/>
+              </a:rPr>
+              <a:t>  ap-northeast-2a/2b/2c 각 AZ에 1개 브로커</a:t>
+            </a:r>
+          </a:p>
+          <a:p>
+            <a:r>
+              <a:rPr sz="1400" b="1">
+                <a:solidFill>
+                  <a:srgbClr val="212121"/>
+                </a:solidFill>
+                <a:latin typeface="Freesentation"/>
+              </a:rPr>
+              <a:t>  단일 AZ 장애 시 나머지 2개 브로커로 서비스 유지</a:t>
+            </a:r>
+          </a:p>
+          <a:p>
+            <a:r>
+              <a:rPr sz="1400" b="1">
+                <a:solidFill>
+                  <a:srgbClr val="212121"/>
+                </a:solidFill>
+                <a:latin typeface="Freesentation"/>
+              </a:rPr>
+              <a:t/>
+            </a:r>
+          </a:p>
+          <a:p>
+            <a:r>
+              <a:rPr sz="1400" b="1">
+                <a:solidFill>
+                  <a:srgbClr val="212121"/>
+                </a:solidFill>
+                <a:latin typeface="Freesentation"/>
+              </a:rPr>
+              <a:t>• 파티션 복제 전략</a:t>
+            </a:r>
+          </a:p>
+          <a:p>
+            <a:r>
+              <a:rPr sz="1400" b="1">
+                <a:solidFill>
+                  <a:srgbClr val="212121"/>
+                </a:solidFill>
+                <a:latin typeface="Freesentation"/>
+              </a:rPr>
+              <a:t>  replication.factor=3, min.insync.replicas=2</a:t>
+            </a:r>
+          </a:p>
+          <a:p>
+            <a:r>
+              <a:rPr sz="1400" b="1">
+                <a:solidFill>
+                  <a:srgbClr val="212121"/>
+                </a:solidFill>
+                <a:latin typeface="Freesentation"/>
+              </a:rPr>
+              <a:t>  ISR(In-Sync Replica) 기반 리더 자동 선출</a:t>
+            </a:r>
+          </a:p>
+          <a:p>
+            <a:r>
+              <a:rPr sz="1400" b="1">
+                <a:solidFill>
+                  <a:srgbClr val="212121"/>
+                </a:solidFill>
+                <a:latin typeface="Freesentation"/>
+              </a:rPr>
+              <a:t/>
+            </a:r>
+          </a:p>
+          <a:p>
+            <a:r>
+              <a:rPr sz="1400" b="1">
+                <a:solidFill>
+                  <a:srgbClr val="212121"/>
+                </a:solidFill>
+                <a:latin typeface="Freesentation"/>
+              </a:rPr>
+              <a:t>• MSK Managed Rebalancing</a:t>
+            </a:r>
+          </a:p>
+          <a:p>
+            <a:r>
+              <a:rPr sz="1400" b="1">
+                <a:solidFill>
+                  <a:srgbClr val="212121"/>
+                </a:solidFill>
+                <a:latin typeface="Freesentation"/>
+              </a:rPr>
+              <a:t>  브로커 추가·제거 시 파티션 자동 재배분</a:t>
+            </a:r>
+          </a:p>
+          <a:p>
+            <a:r>
+              <a:rPr sz="1400" b="1">
+                <a:solidFill>
+                  <a:srgbClr val="212121"/>
+                </a:solidFill>
+                <a:latin typeface="Freesentation"/>
+              </a:rPr>
+              <a:t>  Cruise Control 통합 — 부하 균등화 자동화</a:t>
+            </a:r>
+          </a:p>
+          <a:p>
+            <a:r>
+              <a:rPr sz="1400" b="1">
+                <a:solidFill>
+                  <a:srgbClr val="212121"/>
+                </a:solidFill>
+                <a:latin typeface="Freesentation"/>
+              </a:rPr>
+              <a:t/>
+            </a:r>
+          </a:p>
+          <a:p>
+            <a:r>
+              <a:rPr sz="1400" b="1">
+                <a:solidFill>
+                  <a:srgbClr val="212121"/>
+                </a:solidFill>
+                <a:latin typeface="Freesentation"/>
+              </a:rPr>
+              <a:t>• PrivateLink 연결</a:t>
+            </a:r>
+          </a:p>
+          <a:p>
+            <a:r>
+              <a:rPr sz="1400" b="1">
+                <a:solidFill>
+                  <a:srgbClr val="212121"/>
+                </a:solidFill>
+                <a:latin typeface="Freesentation"/>
+              </a:rPr>
+              <a:t>  VPC 외부 Consumer → PrivateLink 경유 접속</a:t>
+            </a:r>
+          </a:p>
+          <a:p>
+            <a:r>
+              <a:rPr sz="1400" b="1">
+                <a:solidFill>
+                  <a:srgbClr val="212121"/>
+                </a:solidFill>
+                <a:latin typeface="Freesentation"/>
+              </a:rPr>
+              <a:t>  IAM 인증 + TLS 1.2 암호화 강제 적용</a:t>
+            </a:r>
+          </a:p>
+        </p:txBody>
+      </p:sp>
+      <p:sp>
+        <p:nvSpPr>
+          <p:cNvPr id="8" name="TextBox 7"/>
+          <p:cNvSpPr txBox="1"/>
+          <p:nvPr/>
+        </p:nvSpPr>
+        <p:spPr>
+          <a:xfrm>
+            <a:off x="457200" y="4251960"/>
+            <a:ext cx="5486400" cy="548640"/>
+          </a:xfrm>
+          <a:prstGeom prst="rect">
+            <a:avLst/>
+          </a:prstGeom>
+          <a:noFill/>
+        </p:spPr>
+        <p:txBody>
+          <a:bodyPr wrap="square">
+            <a:spAutoFit/>
+          </a:bodyPr>
+          <a:lstStyle/>
+          <a:p>
+            <a:pPr algn="ctr"/>
+            <a:r>
+              <a:rPr sz="1300" b="0">
+                <a:solidFill>
+                  <a:srgbClr val="9E9E9E"/>
+                </a:solidFill>
+                <a:latin typeface="Freesentation"/>
+              </a:rPr>
+              <a:t>[MSK 멀티-AZ 브로커 배치도]</a:t>
+            </a:r>
+          </a:p>
+        </p:txBody>
+      </p:sp>
+      <p:sp>
+        <p:nvSpPr>
+          <p:cNvPr id="7" name="Rectangle 6"/>
+          <p:cNvSpPr/>
+          <p:nvPr/>
+        </p:nvSpPr>
+        <p:spPr>
+          <a:xfrm>
+            <a:off x="457200" y="2468880"/>
+            <a:ext cx="5486400" cy="4114800"/>
+          </a:xfrm>
+          <a:prstGeom prst="rect">
+            <a:avLst/>
+          </a:prstGeom>
+          <a:solidFill>
+            <a:srgbClr val="E8EFFD"/>
+          </a:solidFill>
+          <a:ln w="6350">
+            <a:solidFill>
+              <a:srgbClr val="DCDCDC"/>
+            </a:solidFill>
+          </a:ln>
+        </p:spPr>
+        <p:style>
+          <a:lnRef idx="1">
+            <a:schemeClr val="accent1"/>
+          </a:lnRef>
+          <a:fillRef idx="3">
+            <a:schemeClr val="accent1"/>
+          </a:fillRef>
+          <a:effectRef idx="2">
+            <a:schemeClr val="accent1"/>
+          </a:effectRef>
+          <a:fontRef idx="minor">
+            <a:schemeClr val="lt1"/>
+          </a:fontRef>
+        </p:style>
+        <p:txBody>
+          <a:bodyPr rtlCol="0" anchor="ctr"/>
+          <a:lstStyle/>
+          <a:p>
+            <a:pPr algn="ctr"/>
+          </a:p>
+        </p:txBody>
+      </p:sp>
+      <p:sp>
+        <p:nvSpPr>
+          <p:cNvPr id="6" name="TextBox 5"/>
+          <p:cNvSpPr txBox="1"/>
+          <p:nvPr/>
+        </p:nvSpPr>
+        <p:spPr>
+          <a:xfrm>
+            <a:off x="457200" y="1965960"/>
+            <a:ext cx="11277600" cy="228600"/>
+          </a:xfrm>
+          <a:prstGeom prst="rect">
+            <a:avLst/>
+          </a:prstGeom>
+          <a:noFill/>
+        </p:spPr>
+        <p:txBody>
+          <a:bodyPr wrap="square">
+            <a:spAutoFit/>
+          </a:bodyPr>
+          <a:lstStyle/>
+          <a:p>
+            <a:pPr algn="l"/>
+            <a:r>
+              <a:rPr sz="1300" b="0">
+                <a:solidFill>
+                  <a:srgbClr val="212121"/>
+                </a:solidFill>
+                <a:latin typeface="Freesentation"/>
+              </a:rPr>
+              <a:t>3-AZ 장애 격리 — 브로커 쿼럼 기반 자동 복구</a:t>
+            </a:r>
+          </a:p>
+        </p:txBody>
+      </p:sp>
+      <p:sp>
+        <p:nvSpPr>
+          <p:cNvPr id="5" name="TextBox 4"/>
+          <p:cNvSpPr txBox="1"/>
+          <p:nvPr/>
+        </p:nvSpPr>
+        <p:spPr>
+          <a:xfrm>
+            <a:off x="457200" y="1600200"/>
+            <a:ext cx="11277600" cy="274320"/>
+          </a:xfrm>
+          <a:prstGeom prst="rect">
+            <a:avLst/>
+          </a:prstGeom>
+          <a:noFill/>
+        </p:spPr>
+        <p:txBody>
+          <a:bodyPr wrap="square">
+            <a:spAutoFit/>
+          </a:bodyPr>
+          <a:lstStyle/>
+          <a:p>
+            <a:pPr algn="l"/>
+            <a:r>
+              <a:rPr sz="1600" b="1">
+                <a:solidFill>
+                  <a:srgbClr val="0043DA"/>
+                </a:solidFill>
+                <a:latin typeface="Freesentation"/>
+              </a:rPr>
+              <a:t>AWS MSK 멀티-AZ 브로커 복제 구성</a:t>
+            </a:r>
+          </a:p>
+        </p:txBody>
+      </p:sp>
       <p:sp>
         <p:nvSpPr>
           <p:cNvPr id="18" name="TextBox 17"/>

--- a/results/pptx/AWS_MSK_Expert_Intro.pptx
+++ b/results/pptx/AWS_MSK_Expert_Intro.pptx
@@ -5,10 +5,10 @@
     <p:sldMasterId id="2147483648" r:id="rId1"/>
   </p:sldMasterIdLst>
   <p:notesMasterIdLst>
-    <p:notesMasterId r:id="rId17"/>
+    <p:notesMasterId r:id="rId29"/>
   </p:notesMasterIdLst>
   <p:handoutMasterIdLst>
-    <p:handoutMasterId r:id="rId18"/>
+    <p:handoutMasterId r:id="rId30"/>
   </p:handoutMasterIdLst>
   <p:sldIdLst>
     <p:sldId id="358" r:id="rId2"/>
@@ -25,19 +25,19 @@
     <p:sldId id="373" r:id="rId13"/>
     <p:sldId id="375" r:id="rId14"/>
     <p:sldId id="376" r:id="rId15"/>
-    <p:sldId id="377" r:id="rId23"/>
-    <p:sldId id="378" r:id="rId24"/>
-    <p:sldId id="379" r:id="rId25"/>
-    <p:sldId id="380" r:id="rId26"/>
-    <p:sldId id="381" r:id="rId27"/>
-    <p:sldId id="388" r:id="rId34"/>
-    <p:sldId id="382" r:id="rId28"/>
-    <p:sldId id="383" r:id="rId29"/>
-    <p:sldId id="384" r:id="rId30"/>
-    <p:sldId id="385" r:id="rId31"/>
-    <p:sldId id="386" r:id="rId32"/>
-    <p:sldId id="387" r:id="rId33"/>
-    <p:sldId id="356" r:id="rId16"/>
+    <p:sldId id="377" r:id="rId16"/>
+    <p:sldId id="378" r:id="rId17"/>
+    <p:sldId id="379" r:id="rId18"/>
+    <p:sldId id="380" r:id="rId19"/>
+    <p:sldId id="381" r:id="rId20"/>
+    <p:sldId id="314" r:id="rId21"/>
+    <p:sldId id="382" r:id="rId22"/>
+    <p:sldId id="383" r:id="rId23"/>
+    <p:sldId id="384" r:id="rId24"/>
+    <p:sldId id="385" r:id="rId25"/>
+    <p:sldId id="386" r:id="rId26"/>
+    <p:sldId id="387" r:id="rId27"/>
+    <p:sldId id="356" r:id="rId28"/>
   </p:sldIdLst>
   <p:sldSz cx="12192000" cy="6858000"/>
   <p:notesSz cx="6858000" cy="9144000"/>
@@ -163,6 +163,18 @@
             <p14:sldId id="373"/>
             <p14:sldId id="375"/>
             <p14:sldId id="376"/>
+            <p14:sldId id="377"/>
+            <p14:sldId id="378"/>
+            <p14:sldId id="379"/>
+            <p14:sldId id="380"/>
+            <p14:sldId id="381"/>
+            <p14:sldId id="314"/>
+            <p14:sldId id="382"/>
+            <p14:sldId id="383"/>
+            <p14:sldId id="384"/>
+            <p14:sldId id="385"/>
+            <p14:sldId id="386"/>
+            <p14:sldId id="387"/>
           </p14:sldIdLst>
         </p14:section>
         <p14:section name="끝맺음" id="{C9A1EC51-E183-4528-B5C9-C551F42A7D16}">
@@ -2851,7 +2863,7 @@
       </a:lvl9pPr>
     </p:otherStyle>
   </p:txStyles>
-  <p:extLst mod="1">
+  <p:extLst>
     <p:ext uri="{27BBF7A9-308A-43DC-89C8-2F10F3537804}">
       <p15:sldGuideLst xmlns:p15="http://schemas.microsoft.com/office/powerpoint/2012/main">
         <p15:guide id="1" orient="horz" pos="2160">
@@ -8166,7 +8178,7 @@
 </file>
 
 <file path=ppt/slides/slide15.xml><?xml version="1.0" encoding="utf-8"?>
-<p:sld xmlns:a="http://schemas.openxmlformats.org/drawingml/2006/main" xmlns:p="http://schemas.openxmlformats.org/presentationml/2006/main" xmlns:r="http://schemas.openxmlformats.org/officeDocument/2006/relationships">
+<p:sld xmlns:a="http://schemas.openxmlformats.org/drawingml/2006/main" xmlns:r="http://schemas.openxmlformats.org/officeDocument/2006/relationships" xmlns:p="http://schemas.openxmlformats.org/presentationml/2006/main">
   <p:cSld>
     <p:spTree>
       <p:nvGrpSpPr>
@@ -8174,7 +8186,14 @@
         <p:cNvGrpSpPr/>
         <p:nvPr/>
       </p:nvGrpSpPr>
-      <p:grpSpPr/>
+      <p:grpSpPr>
+        <a:xfrm>
+          <a:off x="0" y="0"/>
+          <a:ext cx="0" cy="0"/>
+          <a:chOff x="0" y="0"/>
+          <a:chExt cx="0" cy="0"/>
+        </a:xfrm>
+      </p:grpSpPr>
       <p:sp>
         <p:nvSpPr>
           <p:cNvPr id="2" name="Text Placeholder 1"/>
@@ -8182,14 +8201,16 @@
             <a:spLocks noGrp="1"/>
           </p:cNvSpPr>
           <p:nvPr>
-            <p:ph type="body" idx="10" sz="quarter"/>
+            <p:ph type="body" sz="quarter" idx="10"/>
           </p:nvPr>
         </p:nvSpPr>
         <p:spPr/>
         <p:txBody>
           <a:bodyPr/>
           <a:lstStyle/>
-          <a:p/>
+          <a:p>
+            <a:endParaRPr/>
+          </a:p>
         </p:txBody>
       </p:sp>
       <p:sp>
@@ -8209,7 +8230,7 @@
           <a:noFill/>
         </p:spPr>
         <p:txBody>
-          <a:bodyPr wrap="square" lIns="0" rIns="0" tIns="0" bIns="0">
+          <a:bodyPr wrap="square" lIns="0" tIns="0" rIns="0" bIns="0">
             <a:spAutoFit/>
           </a:bodyPr>
           <a:lstStyle/>
@@ -8243,7 +8264,7 @@
           <a:noFill/>
         </p:spPr>
         <p:txBody>
-          <a:bodyPr wrap="square" lIns="0" rIns="0" tIns="0" bIns="0">
+          <a:bodyPr wrap="square" lIns="0" tIns="0" rIns="0" bIns="0">
             <a:spAutoFit/>
           </a:bodyPr>
           <a:lstStyle/>
@@ -8372,6 +8393,7 @@
           <a:lstStyle/>
           <a:p>
             <a:pPr algn="ctr"/>
+            <a:endParaRPr/>
           </a:p>
         </p:txBody>
       </p:sp>
@@ -8392,7 +8414,7 @@
           <a:noFill/>
         </p:spPr>
         <p:txBody>
-          <a:bodyPr wrap="square" lIns="0" rIns="0" tIns="0" bIns="0">
+          <a:bodyPr wrap="square" lIns="0" tIns="0" rIns="0" bIns="0">
             <a:spAutoFit/>
           </a:bodyPr>
           <a:lstStyle/>
@@ -8426,21 +8448,12 @@
           <a:noFill/>
         </p:spPr>
         <p:txBody>
-          <a:bodyPr wrap="square" lIns="0" rIns="0" tIns="0" bIns="0">
+          <a:bodyPr wrap="square" lIns="0" tIns="0" rIns="0" bIns="0">
             <a:spAutoFit/>
           </a:bodyPr>
           <a:lstStyle/>
           <a:p>
             <a:pPr algn="l"/>
-            <a:r>
-              <a:rPr sz="1300" b="1">
-                <a:solidFill>
-                  <a:srgbClr val="0043DA"/>
-                </a:solidFill>
-                <a:latin typeface="Freesentation"/>
-              </a:rPr>
-              <a:t/>
-            </a:r>
             <a:r>
               <a:rPr sz="1300" b="1">
                 <a:solidFill>
@@ -8565,6 +8578,7 @@
           <a:lstStyle/>
           <a:p>
             <a:pPr algn="ctr"/>
+            <a:endParaRPr/>
           </a:p>
         </p:txBody>
       </p:sp>
@@ -8585,7 +8599,7 @@
           <a:noFill/>
         </p:spPr>
         <p:txBody>
-          <a:bodyPr wrap="square" lIns="0" rIns="0" tIns="0" bIns="0">
+          <a:bodyPr wrap="square" lIns="0" tIns="0" rIns="0" bIns="0">
             <a:spAutoFit/>
           </a:bodyPr>
           <a:lstStyle/>
@@ -8619,21 +8633,12 @@
           <a:noFill/>
         </p:spPr>
         <p:txBody>
-          <a:bodyPr wrap="square" lIns="0" rIns="0" tIns="0" bIns="0">
+          <a:bodyPr wrap="square" lIns="0" tIns="0" rIns="0" bIns="0">
             <a:spAutoFit/>
           </a:bodyPr>
           <a:lstStyle/>
           <a:p>
             <a:pPr algn="l"/>
-            <a:r>
-              <a:rPr sz="1300" b="0">
-                <a:solidFill>
-                  <a:srgbClr val="212121"/>
-                </a:solidFill>
-                <a:latin typeface="Freesentation"/>
-              </a:rPr>
-              <a:t/>
-            </a:r>
             <a:r>
               <a:rPr sz="1300" b="0">
                 <a:solidFill>
@@ -8792,6 +8797,7 @@
           <a:lstStyle/>
           <a:p>
             <a:pPr algn="ctr"/>
+            <a:endParaRPr/>
           </a:p>
         </p:txBody>
       </p:sp>
@@ -8812,7 +8818,7 @@
           <a:noFill/>
         </p:spPr>
         <p:txBody>
-          <a:bodyPr wrap="square" lIns="0" rIns="0" tIns="0" bIns="0">
+          <a:bodyPr wrap="square" lIns="0" tIns="0" rIns="0" bIns="0">
             <a:spAutoFit/>
           </a:bodyPr>
           <a:lstStyle/>
@@ -8824,20 +8830,10 @@
                 </a:solidFill>
                 <a:latin typeface="Freesentation"/>
               </a:rPr>
-              <a:t/>
-            </a:r>
-            <a:r>
-              <a:rPr sz="1400" b="1">
-                <a:solidFill>
-                  <a:srgbClr val="FFFFFF"/>
-                </a:solidFill>
-                <a:latin typeface="Freesentation"/>
-              </a:rPr>
               <a:t>📋 종합 판단: 도입 권장 — Pros ROI 240%가 Cons를 상회, 모든 단점 완화 가능</a:t>
             </a:r>
           </a:p>
           <a:p>
-            <a:pPr/>
             <a:r>
               <a:rPr sz="1300" b="0">
                 <a:solidFill>
@@ -8859,7 +8855,7 @@
 </file>
 
 <file path=ppt/slides/slide16.xml><?xml version="1.0" encoding="utf-8"?>
-<p:sld xmlns:a="http://schemas.openxmlformats.org/drawingml/2006/main" xmlns:p="http://schemas.openxmlformats.org/presentationml/2006/main" xmlns:r="http://schemas.openxmlformats.org/officeDocument/2006/relationships">
+<p:sld xmlns:a="http://schemas.openxmlformats.org/drawingml/2006/main" xmlns:r="http://schemas.openxmlformats.org/officeDocument/2006/relationships" xmlns:p="http://schemas.openxmlformats.org/presentationml/2006/main">
   <p:cSld>
     <p:spTree>
       <p:nvGrpSpPr>
@@ -8867,7 +8863,14 @@
         <p:cNvGrpSpPr/>
         <p:nvPr/>
       </p:nvGrpSpPr>
-      <p:grpSpPr/>
+      <p:grpSpPr>
+        <a:xfrm>
+          <a:off x="0" y="0"/>
+          <a:ext cx="0" cy="0"/>
+          <a:chOff x="0" y="0"/>
+          <a:chExt cx="0" cy="0"/>
+        </a:xfrm>
+      </p:grpSpPr>
       <p:sp>
         <p:nvSpPr>
           <p:cNvPr id="2" name="Text Placeholder 1"/>
@@ -8875,14 +8878,16 @@
             <a:spLocks noGrp="1"/>
           </p:cNvSpPr>
           <p:nvPr>
-            <p:ph type="body" idx="10" sz="quarter"/>
+            <p:ph type="body" sz="quarter" idx="10"/>
           </p:nvPr>
         </p:nvSpPr>
         <p:spPr/>
         <p:txBody>
           <a:bodyPr/>
           <a:lstStyle/>
-          <a:p/>
+          <a:p>
+            <a:endParaRPr/>
+          </a:p>
         </p:txBody>
       </p:sp>
       <p:sp>
@@ -8902,7 +8907,7 @@
           <a:noFill/>
         </p:spPr>
         <p:txBody>
-          <a:bodyPr wrap="square" lIns="0" rIns="0" tIns="0" bIns="0">
+          <a:bodyPr wrap="square" lIns="0" tIns="0" rIns="0" bIns="0">
             <a:spAutoFit/>
           </a:bodyPr>
           <a:lstStyle/>
@@ -8936,7 +8941,7 @@
           <a:noFill/>
         </p:spPr>
         <p:txBody>
-          <a:bodyPr wrap="square" lIns="0" rIns="0" tIns="0" bIns="0">
+          <a:bodyPr wrap="square" lIns="0" tIns="0" rIns="0" bIns="0">
             <a:spAutoFit/>
           </a:bodyPr>
           <a:lstStyle/>
@@ -9065,6 +9070,7 @@
           <a:lstStyle/>
           <a:p>
             <a:pPr algn="ctr"/>
+            <a:endParaRPr/>
           </a:p>
         </p:txBody>
       </p:sp>
@@ -9085,7 +9091,7 @@
           <a:noFill/>
         </p:spPr>
         <p:txBody>
-          <a:bodyPr wrap="square" lIns="0" rIns="0" tIns="0" bIns="0">
+          <a:bodyPr wrap="square" lIns="0" tIns="0" rIns="0" bIns="0">
             <a:spAutoFit/>
           </a:bodyPr>
           <a:lstStyle/>
@@ -9119,21 +9125,12 @@
           <a:noFill/>
         </p:spPr>
         <p:txBody>
-          <a:bodyPr wrap="square" lIns="0" rIns="0" tIns="0" bIns="0">
+          <a:bodyPr wrap="square" lIns="0" tIns="0" rIns="0" bIns="0">
             <a:spAutoFit/>
           </a:bodyPr>
           <a:lstStyle/>
           <a:p>
             <a:pPr algn="l"/>
-            <a:r>
-              <a:rPr sz="1300" b="0">
-                <a:solidFill>
-                  <a:srgbClr val="212121"/>
-                </a:solidFill>
-                <a:latin typeface="Freesentation"/>
-              </a:rPr>
-              <a:t/>
-            </a:r>
             <a:r>
               <a:rPr sz="1300" b="0">
                 <a:solidFill>
@@ -9258,6 +9255,7 @@
           <a:lstStyle/>
           <a:p>
             <a:pPr algn="ctr"/>
+            <a:endParaRPr/>
           </a:p>
         </p:txBody>
       </p:sp>
@@ -9278,7 +9276,7 @@
           <a:noFill/>
         </p:spPr>
         <p:txBody>
-          <a:bodyPr wrap="square" lIns="0" rIns="0" tIns="0" bIns="0">
+          <a:bodyPr wrap="square" lIns="0" tIns="0" rIns="0" bIns="0">
             <a:spAutoFit/>
           </a:bodyPr>
           <a:lstStyle/>
@@ -9312,21 +9310,12 @@
           <a:noFill/>
         </p:spPr>
         <p:txBody>
-          <a:bodyPr wrap="square" lIns="0" rIns="0" tIns="0" bIns="0">
+          <a:bodyPr wrap="square" lIns="0" tIns="0" rIns="0" bIns="0">
             <a:spAutoFit/>
           </a:bodyPr>
           <a:lstStyle/>
           <a:p>
             <a:pPr algn="l"/>
-            <a:r>
-              <a:rPr sz="1300" b="1">
-                <a:solidFill>
-                  <a:srgbClr val="FFFFFF"/>
-                </a:solidFill>
-                <a:latin typeface="Freesentation"/>
-              </a:rPr>
-              <a:t/>
-            </a:r>
             <a:r>
               <a:rPr sz="1300" b="1">
                 <a:solidFill>
@@ -9511,6 +9500,7 @@
           <a:lstStyle/>
           <a:p>
             <a:pPr algn="ctr"/>
+            <a:endParaRPr/>
           </a:p>
         </p:txBody>
       </p:sp>
@@ -9531,20 +9521,11 @@
           <a:noFill/>
         </p:spPr>
         <p:txBody>
-          <a:bodyPr wrap="square" lIns="0" rIns="0" tIns="0" bIns="0">
+          <a:bodyPr wrap="square" lIns="0" tIns="0" rIns="0" bIns="0">
             <a:spAutoFit/>
           </a:bodyPr>
           <a:lstStyle/>
           <a:p>
-            <a:r>
-              <a:rPr sz="1400" b="1">
-                <a:solidFill>
-                  <a:srgbClr val="212121"/>
-                </a:solidFill>
-                <a:latin typeface="Freesentation"/>
-              </a:rPr>
-              <a:t/>
-            </a:r>
             <a:r>
               <a:rPr sz="1400" b="1">
                 <a:solidFill>
@@ -9566,7 +9547,7 @@
 </file>
 
 <file path=ppt/slides/slide17.xml><?xml version="1.0" encoding="utf-8"?>
-<p:sld xmlns:a="http://schemas.openxmlformats.org/drawingml/2006/main" xmlns:p="http://schemas.openxmlformats.org/presentationml/2006/main" xmlns:r="http://schemas.openxmlformats.org/officeDocument/2006/relationships">
+<p:sld xmlns:a="http://schemas.openxmlformats.org/drawingml/2006/main" xmlns:r="http://schemas.openxmlformats.org/officeDocument/2006/relationships" xmlns:p="http://schemas.openxmlformats.org/presentationml/2006/main">
   <p:cSld>
     <p:spTree>
       <p:nvGrpSpPr>
@@ -9574,7 +9555,14 @@
         <p:cNvGrpSpPr/>
         <p:nvPr/>
       </p:nvGrpSpPr>
-      <p:grpSpPr/>
+      <p:grpSpPr>
+        <a:xfrm>
+          <a:off x="0" y="0"/>
+          <a:ext cx="0" cy="0"/>
+          <a:chOff x="0" y="0"/>
+          <a:chExt cx="0" cy="0"/>
+        </a:xfrm>
+      </p:grpSpPr>
       <p:sp>
         <p:nvSpPr>
           <p:cNvPr id="2" name="Text Placeholder 1"/>
@@ -9582,14 +9570,16 @@
             <a:spLocks noGrp="1"/>
           </p:cNvSpPr>
           <p:nvPr>
-            <p:ph type="body" idx="10" sz="quarter"/>
+            <p:ph type="body" sz="quarter" idx="10"/>
           </p:nvPr>
         </p:nvSpPr>
         <p:spPr/>
         <p:txBody>
           <a:bodyPr/>
           <a:lstStyle/>
-          <a:p/>
+          <a:p>
+            <a:endParaRPr/>
+          </a:p>
         </p:txBody>
       </p:sp>
       <p:sp>
@@ -9609,7 +9599,7 @@
           <a:noFill/>
         </p:spPr>
         <p:txBody>
-          <a:bodyPr wrap="square" lIns="0" rIns="0" tIns="0" bIns="0">
+          <a:bodyPr wrap="square" lIns="0" tIns="0" rIns="0" bIns="0">
             <a:spAutoFit/>
           </a:bodyPr>
           <a:lstStyle/>
@@ -9643,7 +9633,7 @@
           <a:noFill/>
         </p:spPr>
         <p:txBody>
-          <a:bodyPr wrap="square" lIns="0" rIns="0" tIns="0" bIns="0">
+          <a:bodyPr wrap="square" lIns="0" tIns="0" rIns="0" bIns="0">
             <a:spAutoFit/>
           </a:bodyPr>
           <a:lstStyle/>
@@ -9745,7 +9735,7 @@
           <a:noFill/>
         </p:spPr>
         <p:txBody>
-          <a:bodyPr wrap="square" lIns="0" rIns="0" tIns="0" bIns="0">
+          <a:bodyPr wrap="square" lIns="0" tIns="0" rIns="0" bIns="0">
             <a:spAutoFit/>
           </a:bodyPr>
           <a:lstStyle/>
@@ -9780,7 +9770,7 @@
           <a:noFill/>
         </p:spPr>
         <p:txBody>
-          <a:bodyPr wrap="square" lIns="0" rIns="0" tIns="0" bIns="0">
+          <a:bodyPr wrap="square" lIns="0" tIns="0" rIns="0" bIns="0">
             <a:spAutoFit/>
           </a:bodyPr>
           <a:lstStyle/>
@@ -9842,6 +9832,7 @@
           <a:lstStyle/>
           <a:p>
             <a:pPr algn="ctr"/>
+            <a:endParaRPr/>
           </a:p>
         </p:txBody>
       </p:sp>
@@ -9862,7 +9853,7 @@
           <a:noFill/>
         </p:spPr>
         <p:txBody>
-          <a:bodyPr wrap="square" lIns="0" rIns="0" tIns="0" bIns="0">
+          <a:bodyPr wrap="square" lIns="0" tIns="0" rIns="0" bIns="0">
             <a:spAutoFit/>
           </a:bodyPr>
           <a:lstStyle/>
@@ -9896,20 +9887,11 @@
           <a:noFill/>
         </p:spPr>
         <p:txBody>
-          <a:bodyPr wrap="square" lIns="0" rIns="0" tIns="0" bIns="0">
+          <a:bodyPr wrap="square" lIns="0" tIns="0" rIns="0" bIns="0">
             <a:spAutoFit/>
           </a:bodyPr>
           <a:lstStyle/>
           <a:p>
-            <a:r>
-              <a:rPr sz="1300" b="0">
-                <a:solidFill>
-                  <a:srgbClr val="212121"/>
-                </a:solidFill>
-                <a:latin typeface="Freesentation"/>
-              </a:rPr>
-              <a:t/>
-            </a:r>
             <a:r>
               <a:rPr sz="1300" b="0">
                 <a:solidFill>
@@ -10034,6 +10016,7 @@
           <a:lstStyle/>
           <a:p>
             <a:pPr algn="ctr"/>
+            <a:endParaRPr/>
           </a:p>
         </p:txBody>
       </p:sp>
@@ -10054,7 +10037,7 @@
           <a:noFill/>
         </p:spPr>
         <p:txBody>
-          <a:bodyPr wrap="square" lIns="0" rIns="0" tIns="0" bIns="0">
+          <a:bodyPr wrap="square" lIns="0" tIns="0" rIns="0" bIns="0">
             <a:spAutoFit/>
           </a:bodyPr>
           <a:lstStyle/>
@@ -10088,20 +10071,11 @@
           <a:noFill/>
         </p:spPr>
         <p:txBody>
-          <a:bodyPr wrap="square" lIns="0" rIns="0" tIns="0" bIns="0">
+          <a:bodyPr wrap="square" lIns="0" tIns="0" rIns="0" bIns="0">
             <a:spAutoFit/>
           </a:bodyPr>
           <a:lstStyle/>
           <a:p>
-            <a:r>
-              <a:rPr sz="1300" b="0">
-                <a:solidFill>
-                  <a:srgbClr val="212121"/>
-                </a:solidFill>
-                <a:latin typeface="Freesentation"/>
-              </a:rPr>
-              <a:t/>
-            </a:r>
             <a:r>
               <a:rPr sz="1300" b="1">
                 <a:solidFill>
@@ -10226,6 +10200,7 @@
           <a:lstStyle/>
           <a:p>
             <a:pPr algn="ctr"/>
+            <a:endParaRPr/>
           </a:p>
         </p:txBody>
       </p:sp>
@@ -10246,7 +10221,7 @@
           <a:noFill/>
         </p:spPr>
         <p:txBody>
-          <a:bodyPr wrap="square" lIns="0" rIns="0" tIns="0" bIns="0">
+          <a:bodyPr wrap="square" lIns="0" tIns="0" rIns="0" bIns="0">
             <a:spAutoFit/>
           </a:bodyPr>
           <a:lstStyle/>
@@ -10280,20 +10255,11 @@
           <a:noFill/>
         </p:spPr>
         <p:txBody>
-          <a:bodyPr wrap="square" lIns="0" rIns="0" tIns="0" bIns="0">
+          <a:bodyPr wrap="square" lIns="0" tIns="0" rIns="0" bIns="0">
             <a:spAutoFit/>
           </a:bodyPr>
           <a:lstStyle/>
           <a:p>
-            <a:r>
-              <a:rPr sz="1300" b="0">
-                <a:solidFill>
-                  <a:srgbClr val="212121"/>
-                </a:solidFill>
-                <a:latin typeface="Freesentation"/>
-              </a:rPr>
-              <a:t/>
-            </a:r>
             <a:r>
               <a:rPr sz="1300" b="0">
                 <a:solidFill>
@@ -10414,6 +10380,7 @@
           <a:lstStyle/>
           <a:p>
             <a:pPr algn="ctr"/>
+            <a:endParaRPr/>
           </a:p>
         </p:txBody>
       </p:sp>
@@ -10434,7 +10401,7 @@
           <a:noFill/>
         </p:spPr>
         <p:txBody>
-          <a:bodyPr wrap="square" lIns="0" rIns="0" tIns="0" bIns="0">
+          <a:bodyPr wrap="square" lIns="0" tIns="0" rIns="0" bIns="0">
             <a:spAutoFit/>
           </a:bodyPr>
           <a:lstStyle/>
@@ -10468,20 +10435,11 @@
           <a:noFill/>
         </p:spPr>
         <p:txBody>
-          <a:bodyPr wrap="square" lIns="0" rIns="0" tIns="0" bIns="0">
+          <a:bodyPr wrap="square" lIns="0" tIns="0" rIns="0" bIns="0">
             <a:spAutoFit/>
           </a:bodyPr>
           <a:lstStyle/>
           <a:p>
-            <a:r>
-              <a:rPr sz="1300" b="0">
-                <a:solidFill>
-                  <a:srgbClr val="212121"/>
-                </a:solidFill>
-                <a:latin typeface="Freesentation"/>
-              </a:rPr>
-              <a:t/>
-            </a:r>
             <a:r>
               <a:rPr sz="1300" b="0">
                 <a:solidFill>
@@ -10600,6 +10558,7 @@
           <a:lstStyle/>
           <a:p>
             <a:pPr algn="ctr"/>
+            <a:endParaRPr/>
           </a:p>
         </p:txBody>
       </p:sp>
@@ -10620,7 +10579,7 @@
           <a:noFill/>
         </p:spPr>
         <p:txBody>
-          <a:bodyPr wrap="square" lIns="0" rIns="0" tIns="0" bIns="0">
+          <a:bodyPr wrap="square" lIns="0" tIns="0" rIns="0" bIns="0">
             <a:spAutoFit/>
           </a:bodyPr>
           <a:lstStyle/>
@@ -10632,20 +10591,10 @@
                 </a:solidFill>
                 <a:latin typeface="Freesentation"/>
               </a:rPr>
-              <a:t/>
-            </a:r>
-            <a:r>
-              <a:rPr sz="1400" b="1">
-                <a:solidFill>
-                  <a:srgbClr val="FFFFFF"/>
-                </a:solidFill>
-                <a:latin typeface="Freesentation"/>
-              </a:rPr>
               <a:t>📋 전략 방향: SO전략 집중 — AWS 파트너십(S) × 금융권 클라우드 수요(O)로 MSK 시장 선점</a:t>
             </a:r>
           </a:p>
           <a:p>
-            <a:pPr/>
             <a:r>
               <a:rPr sz="1300" b="0">
                 <a:solidFill>
@@ -10667,7 +10616,7 @@
 </file>
 
 <file path=ppt/slides/slide18.xml><?xml version="1.0" encoding="utf-8"?>
-<p:sld xmlns:a="http://schemas.openxmlformats.org/drawingml/2006/main" xmlns:p="http://schemas.openxmlformats.org/presentationml/2006/main" xmlns:r="http://schemas.openxmlformats.org/officeDocument/2006/relationships">
+<p:sld xmlns:a="http://schemas.openxmlformats.org/drawingml/2006/main" xmlns:r="http://schemas.openxmlformats.org/officeDocument/2006/relationships" xmlns:p="http://schemas.openxmlformats.org/presentationml/2006/main">
   <p:cSld>
     <p:spTree>
       <p:nvGrpSpPr>
@@ -10675,7 +10624,14 @@
         <p:cNvGrpSpPr/>
         <p:nvPr/>
       </p:nvGrpSpPr>
-      <p:grpSpPr/>
+      <p:grpSpPr>
+        <a:xfrm>
+          <a:off x="0" y="0"/>
+          <a:ext cx="0" cy="0"/>
+          <a:chOff x="0" y="0"/>
+          <a:chExt cx="0" cy="0"/>
+        </a:xfrm>
+      </p:grpSpPr>
       <p:sp>
         <p:nvSpPr>
           <p:cNvPr id="2" name="Text Placeholder 1"/>
@@ -10683,14 +10639,16 @@
             <a:spLocks noGrp="1"/>
           </p:cNvSpPr>
           <p:nvPr>
-            <p:ph type="body" idx="10" sz="quarter"/>
+            <p:ph type="body" sz="quarter" idx="10"/>
           </p:nvPr>
         </p:nvSpPr>
         <p:spPr/>
         <p:txBody>
           <a:bodyPr/>
           <a:lstStyle/>
-          <a:p/>
+          <a:p>
+            <a:endParaRPr/>
+          </a:p>
         </p:txBody>
       </p:sp>
       <p:sp>
@@ -10710,7 +10668,7 @@
           <a:noFill/>
         </p:spPr>
         <p:txBody>
-          <a:bodyPr wrap="square" lIns="0" rIns="0" tIns="0" bIns="0">
+          <a:bodyPr wrap="square" lIns="0" tIns="0" rIns="0" bIns="0">
             <a:spAutoFit/>
           </a:bodyPr>
           <a:lstStyle/>
@@ -10745,7 +10703,7 @@
           <a:noFill/>
         </p:spPr>
         <p:txBody>
-          <a:bodyPr wrap="square" lIns="0" rIns="0" tIns="0" bIns="0">
+          <a:bodyPr wrap="square" lIns="0" tIns="0" rIns="0" bIns="0">
             <a:spAutoFit/>
           </a:bodyPr>
           <a:lstStyle/>
@@ -10931,6 +10889,7 @@
           <a:lstStyle/>
           <a:p>
             <a:pPr algn="ctr"/>
+            <a:endParaRPr/>
           </a:p>
         </p:txBody>
       </p:sp>
@@ -10978,7 +10937,7 @@
 </file>
 
 <file path=ppt/slides/slide19.xml><?xml version="1.0" encoding="utf-8"?>
-<p:sld xmlns:a="http://schemas.openxmlformats.org/drawingml/2006/main" xmlns:p="http://schemas.openxmlformats.org/presentationml/2006/main" xmlns:r="http://schemas.openxmlformats.org/officeDocument/2006/relationships">
+<p:sld xmlns:a="http://schemas.openxmlformats.org/drawingml/2006/main" xmlns:r="http://schemas.openxmlformats.org/officeDocument/2006/relationships" xmlns:p="http://schemas.openxmlformats.org/presentationml/2006/main">
   <p:cSld>
     <p:spTree>
       <p:nvGrpSpPr>
@@ -10986,7 +10945,14 @@
         <p:cNvGrpSpPr/>
         <p:nvPr/>
       </p:nvGrpSpPr>
-      <p:grpSpPr/>
+      <p:grpSpPr>
+        <a:xfrm>
+          <a:off x="0" y="0"/>
+          <a:ext cx="0" cy="0"/>
+          <a:chOff x="0" y="0"/>
+          <a:chExt cx="0" cy="0"/>
+        </a:xfrm>
+      </p:grpSpPr>
       <p:sp>
         <p:nvSpPr>
           <p:cNvPr id="2" name="Text Placeholder 1"/>
@@ -10994,14 +10960,16 @@
             <a:spLocks noGrp="1"/>
           </p:cNvSpPr>
           <p:nvPr>
-            <p:ph type="body" idx="10" sz="quarter"/>
+            <p:ph type="body" sz="quarter" idx="10"/>
           </p:nvPr>
         </p:nvSpPr>
         <p:spPr/>
         <p:txBody>
           <a:bodyPr/>
           <a:lstStyle/>
-          <a:p/>
+          <a:p>
+            <a:endParaRPr/>
+          </a:p>
         </p:txBody>
       </p:sp>
       <p:sp>
@@ -11021,7 +10989,7 @@
           <a:noFill/>
         </p:spPr>
         <p:txBody>
-          <a:bodyPr wrap="square" lIns="0" rIns="0" tIns="0" bIns="0">
+          <a:bodyPr wrap="square" lIns="0" tIns="0" rIns="0" bIns="0">
             <a:spAutoFit/>
           </a:bodyPr>
           <a:lstStyle/>
@@ -11056,7 +11024,7 @@
           <a:noFill/>
         </p:spPr>
         <p:txBody>
-          <a:bodyPr wrap="square" lIns="0" rIns="0" tIns="0" bIns="0">
+          <a:bodyPr wrap="square" lIns="0" tIns="0" rIns="0" bIns="0">
             <a:spAutoFit/>
           </a:bodyPr>
           <a:lstStyle/>
@@ -11186,6 +11154,7 @@
           <a:lstStyle/>
           <a:p>
             <a:pPr algn="ctr"/>
+            <a:endParaRPr/>
           </a:p>
         </p:txBody>
       </p:sp>
@@ -11213,13 +11182,49 @@
           <a:p>
             <a:pPr algn="ctr"/>
             <a:r>
-              <a:rPr sz="1300" b="0">
+              <a:rPr sz="1300" b="0" dirty="0">
                 <a:solidFill>
                   <a:srgbClr val="9E9E9E"/>
                 </a:solidFill>
                 <a:latin typeface="Freesentation"/>
               </a:rPr>
-              <a:t>[VPC 네트워크 구성도]</a:t>
+              <a:t>[VPC </a:t>
+            </a:r>
+            <a:r>
+              <a:rPr sz="1300" b="0" dirty="0" err="1">
+                <a:solidFill>
+                  <a:srgbClr val="9E9E9E"/>
+                </a:solidFill>
+                <a:latin typeface="Freesentation"/>
+              </a:rPr>
+              <a:t>네트워크</a:t>
+            </a:r>
+            <a:r>
+              <a:rPr sz="1300" b="0" dirty="0">
+                <a:solidFill>
+                  <a:srgbClr val="9E9E9E"/>
+                </a:solidFill>
+                <a:latin typeface="Freesentation"/>
+              </a:rPr>
+              <a:t> </a:t>
+            </a:r>
+            <a:r>
+              <a:rPr sz="1300" b="0" dirty="0" err="1">
+                <a:solidFill>
+                  <a:srgbClr val="9E9E9E"/>
+                </a:solidFill>
+                <a:latin typeface="Freesentation"/>
+              </a:rPr>
+              <a:t>구성도</a:t>
+            </a:r>
+            <a:r>
+              <a:rPr sz="1300" b="0" dirty="0">
+                <a:solidFill>
+                  <a:srgbClr val="9E9E9E"/>
+                </a:solidFill>
+                <a:latin typeface="Freesentation"/>
+              </a:rPr>
+              <a:t>]</a:t>
             </a:r>
           </a:p>
         </p:txBody>
@@ -11268,6 +11273,25 @@
             </a:r>
           </a:p>
           <a:p>
+            <a:endParaRPr sz="1300" b="0">
+              <a:solidFill>
+                <a:srgbClr val="212121"/>
+              </a:solidFill>
+              <a:latin typeface="Freesentation"/>
+            </a:endParaRPr>
+          </a:p>
+          <a:p>
+            <a:r>
+              <a:rPr sz="1400" b="1">
+                <a:solidFill>
+                  <a:srgbClr val="212121"/>
+                </a:solidFill>
+                <a:latin typeface="Freesentation"/>
+              </a:rPr>
+              <a:t>• Private Subnet (10.0.10.0/24)</a:t>
+            </a:r>
+          </a:p>
+          <a:p>
             <a:r>
               <a:rPr sz="1300" b="0">
                 <a:solidFill>
@@ -11275,8 +11299,16 @@
                 </a:solidFill>
                 <a:latin typeface="Freesentation"/>
               </a:rPr>
-              <a:t/>
-            </a:r>
+              <a:t>  MSK 브로커 배치 (포트 9092/9094)</a:t>
+            </a:r>
+          </a:p>
+          <a:p>
+            <a:endParaRPr sz="1300" b="0">
+              <a:solidFill>
+                <a:srgbClr val="212121"/>
+              </a:solidFill>
+              <a:latin typeface="Freesentation"/>
+            </a:endParaRPr>
           </a:p>
           <a:p>
             <a:r>
@@ -11286,7 +11318,7 @@
                 </a:solidFill>
                 <a:latin typeface="Freesentation"/>
               </a:rPr>
-              <a:t>• Private Subnet (10.0.10.0/24)</a:t>
+              <a:t>• DB Subnet (10.0.20.0/24)</a:t>
             </a:r>
           </a:p>
           <a:p>
@@ -11297,52 +11329,16 @@
                 </a:solidFill>
                 <a:latin typeface="Freesentation"/>
               </a:rPr>
-              <a:t>  MSK 브로커 배치 (포트 9092/9094)</a:t>
-            </a:r>
-          </a:p>
-          <a:p>
-            <a:r>
-              <a:rPr sz="1300" b="0">
-                <a:solidFill>
-                  <a:srgbClr val="212121"/>
-                </a:solidFill>
-                <a:latin typeface="Freesentation"/>
-              </a:rPr>
-              <a:t/>
-            </a:r>
-          </a:p>
-          <a:p>
-            <a:r>
-              <a:rPr sz="1400" b="1">
-                <a:solidFill>
-                  <a:srgbClr val="212121"/>
-                </a:solidFill>
-                <a:latin typeface="Freesentation"/>
-              </a:rPr>
-              <a:t>• DB Subnet (10.0.20.0/24)</a:t>
-            </a:r>
-          </a:p>
-          <a:p>
-            <a:r>
-              <a:rPr sz="1300" b="0">
-                <a:solidFill>
-                  <a:srgbClr val="212121"/>
-                </a:solidFill>
-                <a:latin typeface="Freesentation"/>
-              </a:rPr>
               <a:t>  S3/RDS 오프로드 — 앱서버에서만 접근</a:t>
             </a:r>
           </a:p>
           <a:p>
-            <a:r>
-              <a:rPr sz="1300" b="0">
-                <a:solidFill>
-                  <a:srgbClr val="212121"/>
-                </a:solidFill>
-                <a:latin typeface="Freesentation"/>
-              </a:rPr>
-              <a:t/>
-            </a:r>
+            <a:endParaRPr sz="1300" b="0">
+              <a:solidFill>
+                <a:srgbClr val="212121"/>
+              </a:solidFill>
+              <a:latin typeface="Freesentation"/>
+            </a:endParaRPr>
           </a:p>
           <a:p>
             <a:r>
@@ -11991,7 +11987,7 @@
 </file>
 
 <file path=ppt/slides/slide20.xml><?xml version="1.0" encoding="utf-8"?>
-<p:sld xmlns:a="http://schemas.openxmlformats.org/drawingml/2006/main" xmlns:p="http://schemas.openxmlformats.org/presentationml/2006/main" xmlns:r="http://schemas.openxmlformats.org/officeDocument/2006/relationships">
+<p:sld xmlns:a="http://schemas.openxmlformats.org/drawingml/2006/main" xmlns:r="http://schemas.openxmlformats.org/officeDocument/2006/relationships" xmlns:p="http://schemas.openxmlformats.org/presentationml/2006/main">
   <p:cSld>
     <p:spTree>
       <p:nvGrpSpPr>
@@ -12009,237 +12005,822 @@
       </p:grpSpPr>
       <p:sp>
         <p:nvSpPr>
-          <p:cNvPr id="9" name="TextBox 8"/>
+          <p:cNvPr id="59" name="직사각형 58"/>
+          <p:cNvSpPr/>
+          <p:nvPr/>
+        </p:nvSpPr>
+        <p:spPr>
+          <a:xfrm>
+            <a:off x="5454814" y="1560692"/>
+            <a:ext cx="6461651" cy="1543780"/>
+          </a:xfrm>
+          <a:prstGeom prst="rect">
+            <a:avLst/>
+          </a:prstGeom>
+          <a:solidFill>
+            <a:srgbClr val="2A6FDE">
+              <a:alpha val="7000"/>
+            </a:srgbClr>
+          </a:solidFill>
+          <a:ln>
+            <a:noFill/>
+          </a:ln>
+        </p:spPr>
+        <p:style>
+          <a:lnRef idx="2">
+            <a:schemeClr val="accent1">
+              <a:shade val="50000"/>
+            </a:schemeClr>
+          </a:lnRef>
+          <a:fillRef idx="1">
+            <a:schemeClr val="accent1"/>
+          </a:fillRef>
+          <a:effectRef idx="0">
+            <a:schemeClr val="accent1"/>
+          </a:effectRef>
+          <a:fontRef idx="minor">
+            <a:schemeClr val="lt1"/>
+          </a:fontRef>
+        </p:style>
+        <p:txBody>
+          <a:bodyPr rtlCol="0" anchor="ctr"/>
+          <a:lstStyle/>
+          <a:p>
+            <a:pPr algn="ctr"/>
+            <a:endParaRPr lang="ko-KR" altLang="en-US"/>
+          </a:p>
+        </p:txBody>
+      </p:sp>
+      <p:sp>
+        <p:nvSpPr>
+          <p:cNvPr id="50" name="TextBox 49">
+            <a:extLst>
+              <a:ext uri="{FF2B5EF4-FFF2-40B4-BE49-F238E27FC236}">
+                <a16:creationId xmlns:a16="http://schemas.microsoft.com/office/drawing/2014/main" id="{B4F1CD8C-B1D4-7464-AA76-B85D3FD34B41}"/>
+              </a:ext>
+            </a:extLst>
+          </p:cNvPr>
           <p:cNvSpPr txBox="1"/>
           <p:nvPr/>
         </p:nvSpPr>
         <p:spPr>
           <a:xfrm>
-            <a:off x="6126000" y="2468880"/>
-            <a:ext cx="5608800" cy="4114800"/>
-          </a:xfrm>
-          <a:prstGeom prst="rect">
-            <a:avLst/>
-          </a:prstGeom>
-          <a:noFill/>
-        </p:spPr>
-        <p:txBody>
-          <a:bodyPr wrap="square">
+            <a:off x="5532230" y="1560692"/>
+            <a:ext cx="1251848" cy="1543780"/>
+          </a:xfrm>
+          <a:prstGeom prst="rect">
+            <a:avLst/>
+          </a:prstGeom>
+          <a:noFill/>
+        </p:spPr>
+        <p:txBody>
+          <a:bodyPr wrap="square" lIns="0" tIns="0" rIns="0" bIns="0" rtlCol="0" anchor="ctr">
+            <a:noAutofit/>
+          </a:bodyPr>
+          <a:lstStyle/>
+          <a:p>
+            <a:pPr algn="ctr"/>
+            <a:r>
+              <a:rPr kumimoji="1" lang="en-US" altLang="ko-KR" sz="1200" b="1" dirty="0">
+                <a:solidFill>
+                  <a:srgbClr val="2A6FDE"/>
+                </a:solidFill>
+                <a:latin typeface="프리젠테이션 7 Bold" pitchFamily="2" charset="-127"/>
+                <a:ea typeface="프리젠테이션 7 Bold" pitchFamily="2" charset="-127"/>
+              </a:rPr>
+              <a:t>CHALLENGE</a:t>
+            </a:r>
+            <a:endParaRPr kumimoji="1" lang="ko-KR" altLang="en-US" sz="1200" b="1" dirty="0">
+              <a:solidFill>
+                <a:srgbClr val="2A6FDE"/>
+              </a:solidFill>
+              <a:latin typeface="프리젠테이션 7 Bold" pitchFamily="2" charset="-127"/>
+              <a:ea typeface="프리젠테이션 7 Bold" pitchFamily="2" charset="-127"/>
+            </a:endParaRPr>
+          </a:p>
+        </p:txBody>
+      </p:sp>
+      <p:sp>
+        <p:nvSpPr>
+          <p:cNvPr id="51" name="TextBox 50">
+            <a:extLst>
+              <a:ext uri="{FF2B5EF4-FFF2-40B4-BE49-F238E27FC236}">
+                <a16:creationId xmlns:a16="http://schemas.microsoft.com/office/drawing/2014/main" id="{87BB32EE-1742-12E7-BFF9-906AF589AC67}"/>
+              </a:ext>
+            </a:extLst>
+          </p:cNvPr>
+          <p:cNvSpPr txBox="1"/>
+          <p:nvPr/>
+        </p:nvSpPr>
+        <p:spPr>
+          <a:xfrm>
+            <a:off x="6950765" y="1560691"/>
+            <a:ext cx="4965700" cy="1543780"/>
+          </a:xfrm>
+          <a:prstGeom prst="rect">
+            <a:avLst/>
+          </a:prstGeom>
+          <a:noFill/>
+        </p:spPr>
+        <p:txBody>
+          <a:bodyPr wrap="square" lIns="0" tIns="0" rIns="0" bIns="0" rtlCol="0" anchor="ctr">
+            <a:noAutofit/>
+          </a:bodyPr>
+          <a:lstStyle/>
+          <a:p>
+            <a:pPr marL="171450" indent="-171450">
+              <a:lnSpc>
+                <a:spcPct val="150000"/>
+              </a:lnSpc>
+              <a:buFont typeface="Arial" panose="020B0604020202020204" pitchFamily="34" charset="0"/>
+              <a:buChar char="•"/>
+            </a:pPr>
+            <a:r>
+              <a:rPr kumimoji="1" lang="ko-KR" altLang="en-US" sz="1100" dirty="0">
+                <a:latin typeface="프리젠테이션 4 Regular" pitchFamily="2" charset="-127"/>
+                <a:ea typeface="프리젠테이션 4 Regular" pitchFamily="2" charset="-127"/>
+              </a:rPr>
+              <a:t>배치 처리(Batch) 기반 데이터 파이프라인 한계</a:t>
+            </a:r>
+          </a:p>
+          <a:p>
+            <a:pPr marL="171450" indent="-171450">
+              <a:lnSpc>
+                <a:spcPct val="150000"/>
+              </a:lnSpc>
+              <a:buFont typeface="Arial" panose="020B0604020202020204" pitchFamily="34" charset="0"/>
+              <a:buChar char="•"/>
+            </a:pPr>
+            <a:r>
+              <a:rPr kumimoji="1" lang="ko-KR" altLang="en-US" sz="1100" dirty="0">
+                <a:latin typeface="프리젠테이션 4 Regular" pitchFamily="2" charset="-127"/>
+                <a:ea typeface="프리젠테이션 4 Regular" pitchFamily="2" charset="-127"/>
+              </a:rPr>
+              <a:t>처리 지연 30분 이상 → 실시간 의사결정·알림 불가</a:t>
+            </a:r>
+          </a:p>
+          <a:p>
+            <a:pPr marL="171450" indent="-171450">
+              <a:lnSpc>
+                <a:spcPct val="150000"/>
+              </a:lnSpc>
+              <a:buFont typeface="Arial" panose="020B0604020202020204" pitchFamily="34" charset="0"/>
+              <a:buChar char="•"/>
+            </a:pPr>
+            <a:r>
+              <a:rPr kumimoji="1" lang="ko-KR" altLang="en-US" sz="1100" dirty="0">
+                <a:latin typeface="프리젠테이션 4 Regular" pitchFamily="2" charset="-127"/>
+                <a:ea typeface="프리젠테이션 4 Regular" pitchFamily="2" charset="-127"/>
+              </a:rPr>
+              <a:t>시스템 간 강결합 → 마이크로서비스 전환 구조적 장벽</a:t>
+            </a:r>
+          </a:p>
+          <a:p>
+            <a:pPr marL="171450" indent="-171450">
+              <a:lnSpc>
+                <a:spcPct val="150000"/>
+              </a:lnSpc>
+              <a:buFont typeface="Arial" panose="020B0604020202020204" pitchFamily="34" charset="0"/>
+              <a:buChar char="•"/>
+            </a:pPr>
+            <a:r>
+              <a:rPr kumimoji="1" lang="ko-KR" altLang="en-US" sz="1100" dirty="0">
+                <a:latin typeface="프리젠테이션 4 Regular" pitchFamily="2" charset="-127"/>
+                <a:ea typeface="프리젠테이션 4 Regular" pitchFamily="2" charset="-127"/>
+              </a:rPr>
+              <a:t>대용량 로그 적체 → 장애 감지·대응 지연 심화</a:t>
+            </a:r>
+          </a:p>
+        </p:txBody>
+      </p:sp>
+      <p:cxnSp>
+        <p:nvCxnSpPr>
+          <p:cNvPr id="41" name="직선 연결선 40"/>
+          <p:cNvCxnSpPr/>
+          <p:nvPr/>
+        </p:nvCxnSpPr>
+        <p:spPr>
+          <a:xfrm flipV="1">
+            <a:off x="5454815" y="1560691"/>
+            <a:ext cx="6461650" cy="21252"/>
+          </a:xfrm>
+          <a:prstGeom prst="line">
+            <a:avLst/>
+          </a:prstGeom>
+          <a:ln w="12700">
+            <a:solidFill>
+              <a:srgbClr val="0043DA"/>
+            </a:solidFill>
+          </a:ln>
+        </p:spPr>
+        <p:style>
+          <a:lnRef idx="1">
+            <a:schemeClr val="accent1"/>
+          </a:lnRef>
+          <a:fillRef idx="0">
+            <a:schemeClr val="accent1"/>
+          </a:fillRef>
+          <a:effectRef idx="0">
+            <a:schemeClr val="accent1"/>
+          </a:effectRef>
+          <a:fontRef idx="minor">
+            <a:schemeClr val="tx1"/>
+          </a:fontRef>
+        </p:style>
+      </p:cxnSp>
+      <p:sp>
+        <p:nvSpPr>
+          <p:cNvPr id="62" name="직사각형 61"/>
+          <p:cNvSpPr/>
+          <p:nvPr/>
+        </p:nvSpPr>
+        <p:spPr>
+          <a:xfrm>
+            <a:off x="5454813" y="3275389"/>
+            <a:ext cx="6461651" cy="1543780"/>
+          </a:xfrm>
+          <a:prstGeom prst="rect">
+            <a:avLst/>
+          </a:prstGeom>
+          <a:solidFill>
+            <a:srgbClr val="4CB88F">
+              <a:alpha val="7000"/>
+            </a:srgbClr>
+          </a:solidFill>
+          <a:ln>
+            <a:noFill/>
+          </a:ln>
+        </p:spPr>
+        <p:style>
+          <a:lnRef idx="2">
+            <a:schemeClr val="accent1">
+              <a:shade val="50000"/>
+            </a:schemeClr>
+          </a:lnRef>
+          <a:fillRef idx="1">
+            <a:schemeClr val="accent1"/>
+          </a:fillRef>
+          <a:effectRef idx="0">
+            <a:schemeClr val="accent1"/>
+          </a:effectRef>
+          <a:fontRef idx="minor">
+            <a:schemeClr val="lt1"/>
+          </a:fontRef>
+        </p:style>
+        <p:txBody>
+          <a:bodyPr rtlCol="0" anchor="ctr"/>
+          <a:lstStyle/>
+          <a:p>
+            <a:pPr algn="ctr"/>
+            <a:endParaRPr lang="ko-KR" altLang="en-US"/>
+          </a:p>
+        </p:txBody>
+      </p:sp>
+      <p:sp>
+        <p:nvSpPr>
+          <p:cNvPr id="63" name="TextBox 62">
+            <a:extLst>
+              <a:ext uri="{FF2B5EF4-FFF2-40B4-BE49-F238E27FC236}">
+                <a16:creationId xmlns:a16="http://schemas.microsoft.com/office/drawing/2014/main" id="{B4F1CD8C-B1D4-7464-AA76-B85D3FD34B41}"/>
+              </a:ext>
+            </a:extLst>
+          </p:cNvPr>
+          <p:cNvSpPr txBox="1"/>
+          <p:nvPr/>
+        </p:nvSpPr>
+        <p:spPr>
+          <a:xfrm>
+            <a:off x="5532229" y="3275389"/>
+            <a:ext cx="1251848" cy="1543780"/>
+          </a:xfrm>
+          <a:prstGeom prst="rect">
+            <a:avLst/>
+          </a:prstGeom>
+          <a:noFill/>
+        </p:spPr>
+        <p:txBody>
+          <a:bodyPr wrap="square" lIns="0" tIns="0" rIns="0" bIns="0" rtlCol="0" anchor="ctr">
+            <a:noAutofit/>
+          </a:bodyPr>
+          <a:lstStyle/>
+          <a:p>
+            <a:pPr algn="ctr"/>
+            <a:r>
+              <a:rPr kumimoji="1" lang="en-US" altLang="ko-KR" sz="1200" b="1" dirty="0">
+                <a:solidFill>
+                  <a:srgbClr val="4CB88F"/>
+                </a:solidFill>
+                <a:latin typeface="프리젠테이션 7 Bold" pitchFamily="2" charset="-127"/>
+                <a:ea typeface="프리젠테이션 7 Bold" pitchFamily="2" charset="-127"/>
+              </a:rPr>
+              <a:t>SOLUTION</a:t>
+            </a:r>
+          </a:p>
+        </p:txBody>
+      </p:sp>
+      <p:sp>
+        <p:nvSpPr>
+          <p:cNvPr id="64" name="TextBox 63">
+            <a:extLst>
+              <a:ext uri="{FF2B5EF4-FFF2-40B4-BE49-F238E27FC236}">
+                <a16:creationId xmlns:a16="http://schemas.microsoft.com/office/drawing/2014/main" id="{87BB32EE-1742-12E7-BFF9-906AF589AC67}"/>
+              </a:ext>
+            </a:extLst>
+          </p:cNvPr>
+          <p:cNvSpPr txBox="1"/>
+          <p:nvPr/>
+        </p:nvSpPr>
+        <p:spPr>
+          <a:xfrm>
+            <a:off x="6950764" y="3275388"/>
+            <a:ext cx="4965700" cy="1543780"/>
+          </a:xfrm>
+          <a:prstGeom prst="rect">
+            <a:avLst/>
+          </a:prstGeom>
+          <a:noFill/>
+        </p:spPr>
+        <p:txBody>
+          <a:bodyPr wrap="square" lIns="0" tIns="0" rIns="0" bIns="0" rtlCol="0" anchor="ctr">
+            <a:noAutofit/>
+          </a:bodyPr>
+          <a:lstStyle/>
+          <a:p>
+            <a:pPr marL="171450" indent="-171450">
+              <a:lnSpc>
+                <a:spcPct val="150000"/>
+              </a:lnSpc>
+              <a:buFont typeface="Arial" panose="020B0604020202020204" pitchFamily="34" charset="0"/>
+              <a:buChar char="•"/>
+            </a:pPr>
+            <a:r>
+              <a:rPr kumimoji="1" lang="en" altLang="ko-KR" sz="1100" dirty="0">
+                <a:latin typeface="프리젠테이션 4 Regular" pitchFamily="2" charset="-127"/>
+                <a:ea typeface="프리젠테이션 4 Regular" pitchFamily="2" charset="-127"/>
+              </a:rPr>
+              <a:t>AWS MSK 완전 관리형 Kafka 클러스터 도입</a:t>
+            </a:r>
+          </a:p>
+          <a:p>
+            <a:pPr marL="171450" indent="-171450">
+              <a:lnSpc>
+                <a:spcPct val="150000"/>
+              </a:lnSpc>
+              <a:buFont typeface="Arial" panose="020B0604020202020204" pitchFamily="34" charset="0"/>
+              <a:buChar char="•"/>
+            </a:pPr>
+            <a:r>
+              <a:rPr kumimoji="1" lang="en" altLang="ko-KR" sz="1100" dirty="0">
+                <a:latin typeface="프리젠테이션 4 Regular" pitchFamily="2" charset="-127"/>
+                <a:ea typeface="프리젠테이션 4 Regular" pitchFamily="2" charset="-127"/>
+              </a:rPr>
+              <a:t>초당 수십만 건 메시지 실시간 처리 · 분산 스트리밍</a:t>
+            </a:r>
+          </a:p>
+          <a:p>
+            <a:pPr marL="171450" indent="-171450">
+              <a:lnSpc>
+                <a:spcPct val="150000"/>
+              </a:lnSpc>
+              <a:buFont typeface="Arial" panose="020B0604020202020204" pitchFamily="34" charset="0"/>
+              <a:buChar char="•"/>
+            </a:pPr>
+            <a:r>
+              <a:rPr kumimoji="1" lang="en" altLang="ko-KR" sz="1100" dirty="0">
+                <a:latin typeface="프리젠테이션 4 Regular" pitchFamily="2" charset="-127"/>
+                <a:ea typeface="프리젠테이션 4 Regular" pitchFamily="2" charset="-127"/>
+              </a:rPr>
+              <a:t>VPC 격리 + IAM 인증 + TLS 1.2 — 엔터프라이즈 보안</a:t>
+            </a:r>
+          </a:p>
+          <a:p>
+            <a:pPr marL="171450" indent="-171450">
+              <a:lnSpc>
+                <a:spcPct val="150000"/>
+              </a:lnSpc>
+              <a:buFont typeface="Arial" panose="020B0604020202020204" pitchFamily="34" charset="0"/>
+              <a:buChar char="•"/>
+            </a:pPr>
+            <a:r>
+              <a:rPr kumimoji="1" lang="en" altLang="ko-KR" sz="1100" dirty="0">
+                <a:latin typeface="프리젠테이션 4 Regular" pitchFamily="2" charset="-127"/>
+                <a:ea typeface="프리젠테이션 4 Regular" pitchFamily="2" charset="-127"/>
+              </a:rPr>
+              <a:t>패치·스케일링·모니터링 자동화 → 운영 부담 제거</a:t>
+            </a:r>
+          </a:p>
+        </p:txBody>
+      </p:sp>
+      <p:sp>
+        <p:nvSpPr>
+          <p:cNvPr id="67" name="직사각형 66"/>
+          <p:cNvSpPr/>
+          <p:nvPr/>
+        </p:nvSpPr>
+        <p:spPr>
+          <a:xfrm>
+            <a:off x="5454812" y="4987648"/>
+            <a:ext cx="6461651" cy="1543780"/>
+          </a:xfrm>
+          <a:prstGeom prst="rect">
+            <a:avLst/>
+          </a:prstGeom>
+          <a:solidFill>
+            <a:srgbClr val="EE8150">
+              <a:alpha val="7000"/>
+            </a:srgbClr>
+          </a:solidFill>
+          <a:ln>
+            <a:noFill/>
+          </a:ln>
+        </p:spPr>
+        <p:style>
+          <a:lnRef idx="2">
+            <a:schemeClr val="accent1">
+              <a:shade val="50000"/>
+            </a:schemeClr>
+          </a:lnRef>
+          <a:fillRef idx="1">
+            <a:schemeClr val="accent1"/>
+          </a:fillRef>
+          <a:effectRef idx="0">
+            <a:schemeClr val="accent1"/>
+          </a:effectRef>
+          <a:fontRef idx="minor">
+            <a:schemeClr val="lt1"/>
+          </a:fontRef>
+        </p:style>
+        <p:txBody>
+          <a:bodyPr rtlCol="0" anchor="ctr"/>
+          <a:lstStyle/>
+          <a:p>
+            <a:pPr algn="ctr"/>
+            <a:endParaRPr lang="ko-KR" altLang="en-US"/>
+          </a:p>
+        </p:txBody>
+      </p:sp>
+      <p:sp>
+        <p:nvSpPr>
+          <p:cNvPr id="68" name="TextBox 67">
+            <a:extLst>
+              <a:ext uri="{FF2B5EF4-FFF2-40B4-BE49-F238E27FC236}">
+                <a16:creationId xmlns:a16="http://schemas.microsoft.com/office/drawing/2014/main" id="{B4F1CD8C-B1D4-7464-AA76-B85D3FD34B41}"/>
+              </a:ext>
+            </a:extLst>
+          </p:cNvPr>
+          <p:cNvSpPr txBox="1"/>
+          <p:nvPr/>
+        </p:nvSpPr>
+        <p:spPr>
+          <a:xfrm>
+            <a:off x="5532228" y="4987648"/>
+            <a:ext cx="1251848" cy="1543780"/>
+          </a:xfrm>
+          <a:prstGeom prst="rect">
+            <a:avLst/>
+          </a:prstGeom>
+          <a:noFill/>
+        </p:spPr>
+        <p:txBody>
+          <a:bodyPr wrap="square" lIns="0" tIns="0" rIns="0" bIns="0" rtlCol="0" anchor="ctr">
+            <a:noAutofit/>
+          </a:bodyPr>
+          <a:lstStyle/>
+          <a:p>
+            <a:pPr algn="ctr"/>
+            <a:r>
+              <a:rPr kumimoji="1" lang="en-US" altLang="ko-KR" sz="1200" b="1" dirty="0">
+                <a:solidFill>
+                  <a:srgbClr val="EE8150"/>
+                </a:solidFill>
+                <a:latin typeface="프리젠테이션 7 Bold" pitchFamily="2" charset="-127"/>
+                <a:ea typeface="프리젠테이션 7 Bold" pitchFamily="2" charset="-127"/>
+              </a:rPr>
+              <a:t>RESULT</a:t>
+            </a:r>
+            <a:endParaRPr kumimoji="1" lang="ko-KR" altLang="en-US" sz="1200" b="1" dirty="0">
+              <a:solidFill>
+                <a:srgbClr val="EE8150"/>
+              </a:solidFill>
+              <a:latin typeface="프리젠테이션 7 Bold" pitchFamily="2" charset="-127"/>
+              <a:ea typeface="프리젠테이션 7 Bold" pitchFamily="2" charset="-127"/>
+            </a:endParaRPr>
+          </a:p>
+        </p:txBody>
+      </p:sp>
+      <p:sp>
+        <p:nvSpPr>
+          <p:cNvPr id="69" name="TextBox 68">
+            <a:extLst>
+              <a:ext uri="{FF2B5EF4-FFF2-40B4-BE49-F238E27FC236}">
+                <a16:creationId xmlns:a16="http://schemas.microsoft.com/office/drawing/2014/main" id="{87BB32EE-1742-12E7-BFF9-906AF589AC67}"/>
+              </a:ext>
+            </a:extLst>
+          </p:cNvPr>
+          <p:cNvSpPr txBox="1"/>
+          <p:nvPr/>
+        </p:nvSpPr>
+        <p:spPr>
+          <a:xfrm>
+            <a:off x="6950763" y="4987647"/>
+            <a:ext cx="4965700" cy="1543780"/>
+          </a:xfrm>
+          <a:prstGeom prst="rect">
+            <a:avLst/>
+          </a:prstGeom>
+          <a:noFill/>
+        </p:spPr>
+        <p:txBody>
+          <a:bodyPr wrap="square" lIns="0" tIns="0" rIns="0" bIns="0" rtlCol="0" anchor="ctr">
+            <a:noAutofit/>
+          </a:bodyPr>
+          <a:lstStyle/>
+          <a:p>
+            <a:pPr marL="171450" indent="-171450">
+              <a:lnSpc>
+                <a:spcPct val="150000"/>
+              </a:lnSpc>
+              <a:buFont typeface="Arial" panose="020B0604020202020204" pitchFamily="34" charset="0"/>
+              <a:buChar char="•"/>
+            </a:pPr>
+            <a:r>
+              <a:rPr kumimoji="1" lang="ko-KR" altLang="en-US" sz="1100" dirty="0">
+                <a:latin typeface="프리젠테이션 4 Regular" pitchFamily="2" charset="-127"/>
+                <a:ea typeface="프리젠테이션 4 Regular" pitchFamily="2" charset="-127"/>
+              </a:rPr>
+              <a:t>실시간 처리 지연: 30분 → 500ms 이하 단축</a:t>
+            </a:r>
+          </a:p>
+          <a:p>
+            <a:pPr marL="171450" indent="-171450">
+              <a:lnSpc>
+                <a:spcPct val="150000"/>
+              </a:lnSpc>
+              <a:buFont typeface="Arial" panose="020B0604020202020204" pitchFamily="34" charset="0"/>
+              <a:buChar char="•"/>
+            </a:pPr>
+            <a:r>
+              <a:rPr kumimoji="1" lang="ko-KR" altLang="en-US" sz="1100" dirty="0">
+                <a:latin typeface="프리젠테이션 4 Regular" pitchFamily="2" charset="-127"/>
+                <a:ea typeface="프리젠테이션 4 Regular" pitchFamily="2" charset="-127"/>
+              </a:rPr>
+              <a:t>운영 비용 40% 절감 (관리형 서비스 전환)</a:t>
+            </a:r>
+          </a:p>
+          <a:p>
+            <a:pPr marL="171450" indent="-171450">
+              <a:lnSpc>
+                <a:spcPct val="150000"/>
+              </a:lnSpc>
+              <a:buFont typeface="Arial" panose="020B0604020202020204" pitchFamily="34" charset="0"/>
+              <a:buChar char="•"/>
+            </a:pPr>
+            <a:r>
+              <a:rPr kumimoji="1" lang="ko-KR" altLang="en-US" sz="1100" dirty="0">
+                <a:latin typeface="프리젠테이션 4 Regular" pitchFamily="2" charset="-127"/>
+                <a:ea typeface="프리젠테이션 4 Regular" pitchFamily="2" charset="-127"/>
+              </a:rPr>
+              <a:t>서비스 간 느슨한 결합 — 독립 배포·확장 가능</a:t>
+            </a:r>
+          </a:p>
+          <a:p>
+            <a:pPr marL="171450" indent="-171450">
+              <a:lnSpc>
+                <a:spcPct val="150000"/>
+              </a:lnSpc>
+              <a:buFont typeface="Arial" panose="020B0604020202020204" pitchFamily="34" charset="0"/>
+              <a:buChar char="•"/>
+            </a:pPr>
+            <a:r>
+              <a:rPr kumimoji="1" lang="ko-KR" altLang="en-US" sz="1100" dirty="0">
+                <a:latin typeface="프리젠테이션 4 Regular" pitchFamily="2" charset="-127"/>
+                <a:ea typeface="프리젠테이션 4 Regular" pitchFamily="2" charset="-127"/>
+              </a:rPr>
+              <a:t>장애 감지·대응 시간 90% 단축</a:t>
+            </a:r>
+          </a:p>
+        </p:txBody>
+      </p:sp>
+      <p:cxnSp>
+        <p:nvCxnSpPr>
+          <p:cNvPr id="34" name="직선 연결선 33"/>
+          <p:cNvCxnSpPr/>
+          <p:nvPr/>
+        </p:nvCxnSpPr>
+        <p:spPr>
+          <a:xfrm flipV="1">
+            <a:off x="5454815" y="3249791"/>
+            <a:ext cx="6461650" cy="21252"/>
+          </a:xfrm>
+          <a:prstGeom prst="line">
+            <a:avLst/>
+          </a:prstGeom>
+          <a:ln w="12700">
+            <a:solidFill>
+              <a:srgbClr val="4CB88F"/>
+            </a:solidFill>
+          </a:ln>
+        </p:spPr>
+        <p:style>
+          <a:lnRef idx="1">
+            <a:schemeClr val="accent1"/>
+          </a:lnRef>
+          <a:fillRef idx="0">
+            <a:schemeClr val="accent1"/>
+          </a:fillRef>
+          <a:effectRef idx="0">
+            <a:schemeClr val="accent1"/>
+          </a:effectRef>
+          <a:fontRef idx="minor">
+            <a:schemeClr val="tx1"/>
+          </a:fontRef>
+        </p:style>
+      </p:cxnSp>
+      <p:cxnSp>
+        <p:nvCxnSpPr>
+          <p:cNvPr id="35" name="직선 연결선 34"/>
+          <p:cNvCxnSpPr/>
+          <p:nvPr/>
+        </p:nvCxnSpPr>
+        <p:spPr>
+          <a:xfrm flipV="1">
+            <a:off x="5454815" y="4976991"/>
+            <a:ext cx="6461650" cy="21252"/>
+          </a:xfrm>
+          <a:prstGeom prst="line">
+            <a:avLst/>
+          </a:prstGeom>
+          <a:ln w="12700">
+            <a:solidFill>
+              <a:srgbClr val="EE8150"/>
+            </a:solidFill>
+          </a:ln>
+        </p:spPr>
+        <p:style>
+          <a:lnRef idx="1">
+            <a:schemeClr val="accent1"/>
+          </a:lnRef>
+          <a:fillRef idx="0">
+            <a:schemeClr val="accent1"/>
+          </a:fillRef>
+          <a:effectRef idx="0">
+            <a:schemeClr val="accent1"/>
+          </a:effectRef>
+          <a:fontRef idx="minor">
+            <a:schemeClr val="tx1"/>
+          </a:fontRef>
+        </p:style>
+      </p:cxnSp>
+      <p:sp>
+        <p:nvSpPr>
+          <p:cNvPr id="3" name="텍스트 개체 틀 2"/>
+          <p:cNvSpPr>
+            <a:spLocks noGrp="1"/>
+          </p:cNvSpPr>
+          <p:nvPr>
+            <p:ph type="body" sz="quarter" idx="10"/>
+          </p:nvPr>
+        </p:nvSpPr>
+        <p:spPr/>
+        <p:txBody>
+          <a:bodyPr/>
+          <a:lstStyle/>
+          <a:p>
+            <a:endParaRPr lang="ko-KR" altLang="en-US"/>
+          </a:p>
+        </p:txBody>
+      </p:sp>
+      <p:sp>
+        <p:nvSpPr>
+          <p:cNvPr id="2" name="TextBox 1">
+            <a:extLst>
+              <a:ext uri="{FF2B5EF4-FFF2-40B4-BE49-F238E27FC236}">
+                <a16:creationId xmlns:a16="http://schemas.microsoft.com/office/drawing/2014/main" id="{275545A5-8B1D-F9BC-90E3-B32618A37DC8}"/>
+              </a:ext>
+            </a:extLst>
+          </p:cNvPr>
+          <p:cNvSpPr txBox="1"/>
+          <p:nvPr/>
+        </p:nvSpPr>
+        <p:spPr>
+          <a:xfrm>
+            <a:off x="354288" y="557760"/>
+            <a:ext cx="2719800" cy="307777"/>
+          </a:xfrm>
+          <a:prstGeom prst="rect">
+            <a:avLst/>
+          </a:prstGeom>
+          <a:noFill/>
+        </p:spPr>
+        <p:txBody>
+          <a:bodyPr wrap="square" lIns="0" tIns="0" rIns="0" bIns="0">
             <a:spAutoFit/>
           </a:bodyPr>
           <a:lstStyle/>
           <a:p>
-            <a:r>
-              <a:rPr sz="1400" b="1">
-                <a:solidFill>
-                  <a:srgbClr val="212121"/>
-                </a:solidFill>
-                <a:latin typeface="Freesentation"/>
-              </a:rPr>
-              <a:t>• 브로커 배치 (3-AZ)</a:t>
-            </a:r>
-          </a:p>
-          <a:p>
-            <a:r>
-              <a:rPr sz="1400" b="1">
-                <a:solidFill>
-                  <a:srgbClr val="212121"/>
-                </a:solidFill>
-                <a:latin typeface="Freesentation"/>
-              </a:rPr>
-              <a:t>  ap-northeast-2a/2b/2c 각 AZ에 1개 브로커</a:t>
-            </a:r>
-          </a:p>
-          <a:p>
-            <a:r>
-              <a:rPr sz="1400" b="1">
-                <a:solidFill>
-                  <a:srgbClr val="212121"/>
-                </a:solidFill>
-                <a:latin typeface="Freesentation"/>
-              </a:rPr>
-              <a:t>  단일 AZ 장애 시 나머지 2개 브로커로 서비스 유지</a:t>
-            </a:r>
-          </a:p>
-          <a:p>
-            <a:r>
-              <a:rPr sz="1400" b="1">
-                <a:solidFill>
-                  <a:srgbClr val="212121"/>
-                </a:solidFill>
-                <a:latin typeface="Freesentation"/>
-              </a:rPr>
-              <a:t/>
-            </a:r>
-          </a:p>
-          <a:p>
-            <a:r>
-              <a:rPr sz="1400" b="1">
-                <a:solidFill>
-                  <a:srgbClr val="212121"/>
-                </a:solidFill>
-                <a:latin typeface="Freesentation"/>
-              </a:rPr>
-              <a:t>• 파티션 복제 전략</a:t>
-            </a:r>
-          </a:p>
-          <a:p>
-            <a:r>
-              <a:rPr sz="1400" b="1">
-                <a:solidFill>
-                  <a:srgbClr val="212121"/>
-                </a:solidFill>
-                <a:latin typeface="Freesentation"/>
-              </a:rPr>
-              <a:t>  replication.factor=3, min.insync.replicas=2</a:t>
-            </a:r>
-          </a:p>
-          <a:p>
-            <a:r>
-              <a:rPr sz="1400" b="1">
-                <a:solidFill>
-                  <a:srgbClr val="212121"/>
-                </a:solidFill>
-                <a:latin typeface="Freesentation"/>
-              </a:rPr>
-              <a:t>  ISR(In-Sync Replica) 기반 리더 자동 선출</a:t>
-            </a:r>
-          </a:p>
-          <a:p>
-            <a:r>
-              <a:rPr sz="1400" b="1">
-                <a:solidFill>
-                  <a:srgbClr val="212121"/>
-                </a:solidFill>
-                <a:latin typeface="Freesentation"/>
-              </a:rPr>
-              <a:t/>
-            </a:r>
-          </a:p>
-          <a:p>
-            <a:r>
-              <a:rPr sz="1400" b="1">
-                <a:solidFill>
-                  <a:srgbClr val="212121"/>
-                </a:solidFill>
-                <a:latin typeface="Freesentation"/>
-              </a:rPr>
-              <a:t>• MSK Managed Rebalancing</a:t>
-            </a:r>
-          </a:p>
-          <a:p>
-            <a:r>
-              <a:rPr sz="1400" b="1">
-                <a:solidFill>
-                  <a:srgbClr val="212121"/>
-                </a:solidFill>
-                <a:latin typeface="Freesentation"/>
-              </a:rPr>
-              <a:t>  브로커 추가·제거 시 파티션 자동 재배분</a:t>
-            </a:r>
-          </a:p>
-          <a:p>
-            <a:r>
-              <a:rPr sz="1400" b="1">
-                <a:solidFill>
-                  <a:srgbClr val="212121"/>
-                </a:solidFill>
-                <a:latin typeface="Freesentation"/>
-              </a:rPr>
-              <a:t>  Cruise Control 통합 — 부하 균등화 자동화</a:t>
-            </a:r>
-          </a:p>
-          <a:p>
-            <a:r>
-              <a:rPr sz="1400" b="1">
-                <a:solidFill>
-                  <a:srgbClr val="212121"/>
-                </a:solidFill>
-                <a:latin typeface="Freesentation"/>
-              </a:rPr>
-              <a:t/>
-            </a:r>
-          </a:p>
-          <a:p>
-            <a:r>
-              <a:rPr sz="1400" b="1">
-                <a:solidFill>
-                  <a:srgbClr val="212121"/>
-                </a:solidFill>
-                <a:latin typeface="Freesentation"/>
-              </a:rPr>
-              <a:t>• PrivateLink 연결</a:t>
-            </a:r>
-          </a:p>
-          <a:p>
-            <a:r>
-              <a:rPr sz="1400" b="1">
-                <a:solidFill>
-                  <a:srgbClr val="212121"/>
-                </a:solidFill>
-                <a:latin typeface="Freesentation"/>
-              </a:rPr>
-              <a:t>  VPC 외부 Consumer → PrivateLink 경유 접속</a:t>
-            </a:r>
-          </a:p>
-          <a:p>
-            <a:r>
-              <a:rPr sz="1400" b="1">
-                <a:solidFill>
-                  <a:srgbClr val="212121"/>
-                </a:solidFill>
-                <a:latin typeface="Freesentation"/>
-              </a:rPr>
-              <a:t>  IAM 인증 + TLS 1.2 암호화 강제 적용</a:t>
-            </a:r>
-          </a:p>
-        </p:txBody>
-      </p:sp>
-      <p:sp>
-        <p:nvSpPr>
-          <p:cNvPr id="8" name="TextBox 7"/>
+            <a:pPr algn="l"/>
+            <a:r>
+              <a:rPr sz="2000" b="1" dirty="0">
+                <a:solidFill>
+                  <a:srgbClr val="000000"/>
+                </a:solidFill>
+                <a:latin typeface="Freesentation"/>
+              </a:rPr>
+              <a:t>L17</a:t>
+            </a:r>
+            <a:r>
+              <a:rPr lang="en-US" altLang="ko-KR" sz="2000" b="1" dirty="0">
+                <a:solidFill>
+                  <a:srgbClr val="000000"/>
+                </a:solidFill>
+                <a:latin typeface="Freesentation"/>
+              </a:rPr>
+              <a:t>-1</a:t>
+            </a:r>
+            <a:r>
+              <a:rPr sz="2000" b="1" dirty="0">
+                <a:solidFill>
+                  <a:srgbClr val="000000"/>
+                </a:solidFill>
+                <a:latin typeface="Freesentation"/>
+              </a:rPr>
+              <a:t>. Image Left</a:t>
+            </a:r>
+            <a:r>
+              <a:rPr lang="en-US" altLang="ko-KR" sz="2000" b="1" dirty="0">
+                <a:solidFill>
+                  <a:srgbClr val="000000"/>
+                </a:solidFill>
+                <a:latin typeface="Freesentation"/>
+              </a:rPr>
+              <a:t>-1</a:t>
+            </a:r>
+            <a:endParaRPr sz="2000" b="1" dirty="0">
+              <a:solidFill>
+                <a:srgbClr val="000000"/>
+              </a:solidFill>
+              <a:latin typeface="Freesentation"/>
+            </a:endParaRPr>
+          </a:p>
+        </p:txBody>
+      </p:sp>
+      <p:sp>
+        <p:nvSpPr>
+          <p:cNvPr id="4" name="TextBox 3">
+            <a:extLst>
+              <a:ext uri="{FF2B5EF4-FFF2-40B4-BE49-F238E27FC236}">
+                <a16:creationId xmlns:a16="http://schemas.microsoft.com/office/drawing/2014/main" id="{16FA7F15-4806-D4C2-0C08-573E8EE768E6}"/>
+              </a:ext>
+            </a:extLst>
+          </p:cNvPr>
           <p:cNvSpPr txBox="1"/>
           <p:nvPr/>
         </p:nvSpPr>
         <p:spPr>
           <a:xfrm>
-            <a:off x="457200" y="4251960"/>
-            <a:ext cx="5486400" cy="548640"/>
-          </a:xfrm>
-          <a:prstGeom prst="rect">
-            <a:avLst/>
-          </a:prstGeom>
-          <a:noFill/>
-        </p:spPr>
-        <p:txBody>
-          <a:bodyPr wrap="square">
+            <a:off x="3761040" y="558624"/>
+            <a:ext cx="7549368" cy="938088"/>
+          </a:xfrm>
+          <a:prstGeom prst="rect">
+            <a:avLst/>
+          </a:prstGeom>
+          <a:noFill/>
+        </p:spPr>
+        <p:txBody>
+          <a:bodyPr wrap="square" lIns="0" tIns="0" rIns="0" bIns="0">
             <a:spAutoFit/>
           </a:bodyPr>
           <a:lstStyle/>
           <a:p>
-            <a:pPr algn="ctr"/>
-            <a:r>
-              <a:rPr sz="1300" b="0">
-                <a:solidFill>
-                  <a:srgbClr val="9E9E9E"/>
-                </a:solidFill>
-                <a:latin typeface="Freesentation"/>
-              </a:rPr>
-              <a:t>[MSK 멀티-AZ 브로커 배치도]</a:t>
-            </a:r>
-          </a:p>
-        </p:txBody>
-      </p:sp>
-      <p:sp>
-        <p:nvSpPr>
-          <p:cNvPr id="7" name="Rectangle 6"/>
+            <a:pPr algn="l"/>
+            <a:r>
+              <a:rPr sz="1200" b="0">
+                <a:solidFill>
+                  <a:srgbClr val="212121"/>
+                </a:solidFill>
+                <a:latin typeface="Freesentation"/>
+              </a:rPr>
+              <a:t>이미지+불릿 2컬럼 레이아웃 — 좌 시각자료 + 우 설명</a:t>
+            </a:r>
+          </a:p>
+        </p:txBody>
+      </p:sp>
+      <p:sp>
+        <p:nvSpPr>
+          <p:cNvPr id="7" name="Rectangle 6">
+            <a:extLst>
+              <a:ext uri="{FF2B5EF4-FFF2-40B4-BE49-F238E27FC236}">
+                <a16:creationId xmlns:a16="http://schemas.microsoft.com/office/drawing/2014/main" id="{4F87171A-1A94-A6F8-A062-8850F6BC18B4}"/>
+              </a:ext>
+            </a:extLst>
+          </p:cNvPr>
           <p:cNvSpPr/>
           <p:nvPr/>
         </p:nvSpPr>
         <p:spPr>
           <a:xfrm>
-            <a:off x="457200" y="2468880"/>
-            <a:ext cx="5486400" cy="4114800"/>
+            <a:off x="354288" y="1581943"/>
+            <a:ext cx="4933838" cy="4949484"/>
           </a:xfrm>
           <a:prstGeom prst="rect">
             <a:avLst/>
@@ -12272,19 +12853,26 @@
           <a:lstStyle/>
           <a:p>
             <a:pPr algn="ctr"/>
-          </a:p>
-        </p:txBody>
-      </p:sp>
-      <p:sp>
-        <p:nvSpPr>
-          <p:cNvPr id="6" name="TextBox 5"/>
+            <a:endParaRPr/>
+          </a:p>
+        </p:txBody>
+      </p:sp>
+      <p:sp>
+        <p:nvSpPr>
+          <p:cNvPr id="8" name="TextBox 7">
+            <a:extLst>
+              <a:ext uri="{FF2B5EF4-FFF2-40B4-BE49-F238E27FC236}">
+                <a16:creationId xmlns:a16="http://schemas.microsoft.com/office/drawing/2014/main" id="{6AB6466F-8EB5-A257-60CE-0DE7A243E6D7}"/>
+              </a:ext>
+            </a:extLst>
+          </p:cNvPr>
           <p:cNvSpPr txBox="1"/>
           <p:nvPr/>
         </p:nvSpPr>
         <p:spPr>
           <a:xfrm>
-            <a:off x="457200" y="1965960"/>
-            <a:ext cx="11277600" cy="228600"/>
+            <a:off x="354287" y="3910491"/>
+            <a:ext cx="4933838" cy="292388"/>
           </a:xfrm>
           <a:prstGeom prst="rect">
             <a:avLst/>
@@ -12297,518 +12885,61 @@
           </a:bodyPr>
           <a:lstStyle/>
           <a:p>
-            <a:pPr algn="l"/>
-            <a:r>
-              <a:rPr sz="1300" b="0">
-                <a:solidFill>
-                  <a:srgbClr val="212121"/>
-                </a:solidFill>
-                <a:latin typeface="Freesentation"/>
-              </a:rPr>
-              <a:t>3-AZ 장애 격리 — 브로커 쿼럼 기반 자동 복구</a:t>
-            </a:r>
-          </a:p>
-        </p:txBody>
-      </p:sp>
-      <p:sp>
-        <p:nvSpPr>
-          <p:cNvPr id="5" name="TextBox 4"/>
-          <p:cNvSpPr txBox="1"/>
-          <p:nvPr/>
-        </p:nvSpPr>
-        <p:spPr>
-          <a:xfrm>
-            <a:off x="457200" y="1600200"/>
-            <a:ext cx="11277600" cy="274320"/>
-          </a:xfrm>
-          <a:prstGeom prst="rect">
-            <a:avLst/>
-          </a:prstGeom>
-          <a:noFill/>
-        </p:spPr>
-        <p:txBody>
-          <a:bodyPr wrap="square">
-            <a:spAutoFit/>
-          </a:bodyPr>
-          <a:lstStyle/>
-          <a:p>
-            <a:pPr algn="l"/>
-            <a:r>
-              <a:rPr sz="1600" b="1">
-                <a:solidFill>
-                  <a:srgbClr val="0043DA"/>
-                </a:solidFill>
-                <a:latin typeface="Freesentation"/>
-              </a:rPr>
-              <a:t>AWS MSK 멀티-AZ 브로커 복제 구성</a:t>
-            </a:r>
-          </a:p>
-        </p:txBody>
-      </p:sp>
-      <p:sp>
-        <p:nvSpPr>
-          <p:cNvPr id="18" name="TextBox 17"/>
-          <p:cNvSpPr txBox="1"/>
-          <p:nvPr/>
-        </p:nvSpPr>
-        <p:spPr>
-          <a:xfrm>
-            <a:off x="354806" y="557906"/>
-            <a:ext cx="2720317" cy="932614"/>
-          </a:xfrm>
-          <a:prstGeom prst="rect">
-            <a:avLst/>
-          </a:prstGeom>
-          <a:noFill/>
-        </p:spPr>
-        <p:txBody>
-          <a:bodyPr wrap="square" lIns="0" tIns="0" rIns="0" bIns="0" rtlCol="0" anchor="t" anchorCtr="0">
-            <a:noAutofit/>
-          </a:bodyPr>
-          <a:lstStyle/>
-          <a:p>
-            <a:r>
-              <a:rPr lang="ko-KR" altLang="en-US" sz="2000" dirty="0" err="1">
-                <a:latin typeface="프리젠테이션 7 Bold" pitchFamily="2" charset="-127"/>
-                <a:ea typeface="프리젠테이션 7 Bold" pitchFamily="2" charset="-127"/>
-                <a:cs typeface="Pretendard ExtraBold" panose="02000903000000020004" pitchFamily="2" charset="-127"/>
-              </a:rPr>
-              <a:t>L17-1. Image Left</a:t>
-            </a:r>
-          </a:p>
-        </p:txBody>
-      </p:sp>
-      <p:sp>
-        <p:nvSpPr>
-          <p:cNvPr id="19" name="TextBox 18"/>
-          <p:cNvSpPr txBox="1"/>
-          <p:nvPr/>
-        </p:nvSpPr>
-        <p:spPr>
-          <a:xfrm>
-            <a:off x="3763700" y="558800"/>
-            <a:ext cx="7551483" cy="937918"/>
-          </a:xfrm>
-          <a:prstGeom prst="rect">
-            <a:avLst/>
-          </a:prstGeom>
-          <a:noFill/>
-        </p:spPr>
-        <p:txBody>
-          <a:bodyPr wrap="square" lIns="0" tIns="0" rIns="0" bIns="0" rtlCol="0" anchor="t" anchorCtr="0">
-            <a:noAutofit/>
-          </a:bodyPr>
-          <a:lstStyle/>
-          <a:p>
-            <a:pPr latinLnBrk="0">
-              <a:lnSpc>
-                <a:spcPct val="150000"/>
-              </a:lnSpc>
-            </a:pPr>
-            <a:r>
-              <a:rPr lang="ko-KR" altLang="en-US" sz="1200" dirty="0" err="1">
-                <a:ln>
-                  <a:solidFill>
-                    <a:schemeClr val="accent1">
-                      <a:alpha val="0"/>
-                    </a:schemeClr>
-                  </a:solidFill>
-                </a:ln>
-                <a:solidFill>
-                  <a:schemeClr val="tx1">
-                    <a:lumMod val="75000"/>
-                    <a:lumOff val="25000"/>
-                  </a:schemeClr>
-                </a:solidFill>
-                <a:latin typeface="프리젠테이션 5 Medium" pitchFamily="2" charset="-127"/>
-                <a:ea typeface="프리젠테이션 5 Medium" pitchFamily="2" charset="-127"/>
-                <a:cs typeface="Pretendard" panose="02000503000000020004" pitchFamily="2" charset="-127"/>
-              </a:rPr>
-              <a:t>이미지+설명 2컬럼 레이아웃 — MSK 고가용성 심화</a:t>
-            </a:r>
-            <a:r>
-              <a:rPr lang="ko-KR" altLang="en-US" sz="1200" dirty="0">
-                <a:ln>
-                  <a:solidFill>
-                    <a:schemeClr val="accent1">
-                      <a:alpha val="0"/>
-                    </a:schemeClr>
-                  </a:solidFill>
-                </a:ln>
-                <a:solidFill>
-                  <a:schemeClr val="tx1">
-                    <a:lumMod val="75000"/>
-                    <a:lumOff val="25000"/>
-                  </a:schemeClr>
-                </a:solidFill>
-                <a:latin typeface="프리젠테이션 5 Medium" pitchFamily="2" charset="-127"/>
-                <a:ea typeface="프리젠테이션 5 Medium" pitchFamily="2" charset="-127"/>
-                <a:cs typeface="Pretendard" panose="02000503000000020004" pitchFamily="2" charset="-127"/>
-              </a:rPr>
-              <a:t/>
-            </a:r>
-            <a:r>
-              <a:rPr lang="en-US" altLang="ko-KR" sz="1200" b="1" dirty="0">
-                <a:ln>
-                  <a:solidFill>
-                    <a:schemeClr val="accent1">
-                      <a:alpha val="0"/>
-                    </a:schemeClr>
-                  </a:solidFill>
-                </a:ln>
-                <a:solidFill>
-                  <a:schemeClr val="tx1">
-                    <a:lumMod val="75000"/>
-                    <a:lumOff val="25000"/>
-                  </a:schemeClr>
-                </a:solidFill>
-                <a:latin typeface="프리젠테이션 5 Medium" pitchFamily="2" charset="-127"/>
-                <a:ea typeface="프리젠테이션 5 Medium" pitchFamily="2" charset="-127"/>
-                <a:cs typeface="Pretendard" panose="02000503000000020004" pitchFamily="2" charset="-127"/>
-              </a:rPr>
-              <a:t/>
-            </a:r>
-            <a:r>
-              <a:rPr lang="ko-KR" altLang="en-US" sz="1200" b="1" dirty="0">
-                <a:ln>
-                  <a:solidFill>
-                    <a:schemeClr val="accent1">
-                      <a:alpha val="0"/>
-                    </a:schemeClr>
-                  </a:solidFill>
-                </a:ln>
-                <a:solidFill>
-                  <a:srgbClr val="0043DA"/>
-                </a:solidFill>
-                <a:latin typeface="프리젠테이션 7 Bold" pitchFamily="2" charset="-127"/>
-                <a:ea typeface="프리젠테이션 7 Bold" pitchFamily="2" charset="-127"/>
-                <a:cs typeface="Pretendard" panose="02000503000000020004" pitchFamily="2" charset="-127"/>
-              </a:rPr>
-              <a:t/>
-            </a:r>
-            <a:r>
-              <a:rPr lang="en-US" altLang="ko-KR" sz="1200" b="1" dirty="0">
-                <a:ln>
-                  <a:solidFill>
-                    <a:schemeClr val="accent1">
-                      <a:alpha val="0"/>
-                    </a:schemeClr>
-                  </a:solidFill>
-                </a:ln>
-                <a:solidFill>
-                  <a:srgbClr val="0043DA"/>
-                </a:solidFill>
-                <a:latin typeface="프리젠테이션 7 Bold" pitchFamily="2" charset="-127"/>
-                <a:ea typeface="프리젠테이션 7 Bold" pitchFamily="2" charset="-127"/>
-                <a:cs typeface="Pretendard" panose="02000503000000020004" pitchFamily="2" charset="-127"/>
-              </a:rPr>
-              <a:t/>
-            </a:r>
-            <a:r>
-              <a:rPr lang="ko-KR" altLang="en-US" sz="1200" b="1" dirty="0" err="1">
-                <a:ln>
-                  <a:solidFill>
-                    <a:schemeClr val="accent1">
-                      <a:alpha val="0"/>
-                    </a:schemeClr>
-                  </a:solidFill>
-                </a:ln>
-                <a:solidFill>
-                  <a:srgbClr val="0043DA"/>
-                </a:solidFill>
-                <a:latin typeface="프리젠테이션 7 Bold" pitchFamily="2" charset="-127"/>
-                <a:ea typeface="프리젠테이션 7 Bold" pitchFamily="2" charset="-127"/>
-                <a:cs typeface="Pretendard" panose="02000503000000020004" pitchFamily="2" charset="-127"/>
-              </a:rPr>
-              <a:t/>
-            </a:r>
-            <a:r>
-              <a:rPr lang="ko-KR" altLang="en-US" sz="1200" b="1" dirty="0">
-                <a:ln>
-                  <a:solidFill>
-                    <a:schemeClr val="accent1">
-                      <a:alpha val="0"/>
-                    </a:schemeClr>
-                  </a:solidFill>
-                </a:ln>
-                <a:solidFill>
-                  <a:srgbClr val="0043DA"/>
-                </a:solidFill>
-                <a:latin typeface="프리젠테이션 7 Bold" pitchFamily="2" charset="-127"/>
-                <a:ea typeface="프리젠테이션 7 Bold" pitchFamily="2" charset="-127"/>
-                <a:cs typeface="Pretendard" panose="02000503000000020004" pitchFamily="2" charset="-127"/>
-              </a:rPr>
-              <a:t/>
-            </a:r>
-            <a:r>
-              <a:rPr lang="en-US" altLang="ko-KR" sz="1200" b="1" dirty="0">
-                <a:ln>
-                  <a:solidFill>
-                    <a:schemeClr val="accent1">
-                      <a:alpha val="0"/>
-                    </a:schemeClr>
-                  </a:solidFill>
-                </a:ln>
-                <a:solidFill>
-                  <a:srgbClr val="0043DA"/>
-                </a:solidFill>
-                <a:latin typeface="프리젠테이션 7 Bold" pitchFamily="2" charset="-127"/>
-                <a:ea typeface="프리젠테이션 7 Bold" pitchFamily="2" charset="-127"/>
-                <a:cs typeface="Pretendard" panose="02000503000000020004" pitchFamily="2" charset="-127"/>
-              </a:rPr>
-              <a:t/>
-            </a:r>
-            <a:r>
-              <a:rPr lang="ko-KR" altLang="en-US" sz="1200" b="1" dirty="0">
-                <a:ln>
-                  <a:solidFill>
-                    <a:schemeClr val="accent1">
-                      <a:alpha val="0"/>
-                    </a:schemeClr>
-                  </a:solidFill>
-                </a:ln>
-                <a:solidFill>
-                  <a:srgbClr val="0043DA"/>
-                </a:solidFill>
-                <a:latin typeface="프리젠테이션 7 Bold" pitchFamily="2" charset="-127"/>
-                <a:ea typeface="프리젠테이션 7 Bold" pitchFamily="2" charset="-127"/>
-                <a:cs typeface="Pretendard" panose="02000503000000020004" pitchFamily="2" charset="-127"/>
-              </a:rPr>
-              <a:t/>
-            </a:r>
-            <a:r>
-              <a:rPr lang="en-US" altLang="ko-KR" sz="1200" b="1" dirty="0" smtClean="0">
-                <a:ln>
-                  <a:solidFill>
-                    <a:schemeClr val="accent1">
-                      <a:alpha val="0"/>
-                    </a:schemeClr>
-                  </a:solidFill>
-                </a:ln>
-                <a:solidFill>
-                  <a:srgbClr val="0043DA"/>
-                </a:solidFill>
-                <a:latin typeface="프리젠테이션 7 Bold" pitchFamily="2" charset="-127"/>
-                <a:ea typeface="프리젠테이션 7 Bold" pitchFamily="2" charset="-127"/>
-                <a:cs typeface="Pretendard" panose="02000503000000020004" pitchFamily="2" charset="-127"/>
-              </a:rPr>
-              <a:t/>
-            </a:r>
-          </a:p>
-          <a:p>
-            <a:pPr latinLnBrk="0">
-              <a:lnSpc>
-                <a:spcPct val="150000"/>
-              </a:lnSpc>
-            </a:pPr>
-            <a:r>
-              <a:rPr lang="ko-KR" altLang="en-US" sz="1200" dirty="0" smtClean="0">
-                <a:ln>
-                  <a:solidFill>
-                    <a:schemeClr val="accent1">
-                      <a:alpha val="0"/>
-                    </a:schemeClr>
-                  </a:solidFill>
-                </a:ln>
-                <a:solidFill>
-                  <a:schemeClr val="tx1">
-                    <a:lumMod val="75000"/>
-                    <a:lumOff val="25000"/>
-                  </a:schemeClr>
-                </a:solidFill>
-                <a:latin typeface="프리젠테이션 5 Medium" pitchFamily="2" charset="-127"/>
-                <a:ea typeface="프리젠테이션 5 Medium" pitchFamily="2" charset="-127"/>
-                <a:cs typeface="Pretendard" panose="02000503000000020004" pitchFamily="2" charset="-127"/>
-              </a:rPr>
-              <a:t/>
-            </a:r>
-            <a:r>
-              <a:rPr lang="en-US" altLang="ko-KR" sz="1200" dirty="0" smtClean="0">
-                <a:ln>
-                  <a:solidFill>
-                    <a:schemeClr val="accent1">
-                      <a:alpha val="0"/>
-                    </a:schemeClr>
-                  </a:solidFill>
-                </a:ln>
-                <a:solidFill>
-                  <a:schemeClr val="tx1">
-                    <a:lumMod val="75000"/>
-                    <a:lumOff val="25000"/>
-                  </a:schemeClr>
-                </a:solidFill>
-                <a:latin typeface="프리젠테이션 5 Medium" pitchFamily="2" charset="-127"/>
-                <a:ea typeface="프리젠테이션 5 Medium" pitchFamily="2" charset="-127"/>
-                <a:cs typeface="Pretendard" panose="02000503000000020004" pitchFamily="2" charset="-127"/>
-              </a:rPr>
-              <a:t/>
-            </a:r>
-            <a:r>
-              <a:rPr lang="ko-KR" altLang="en-US" sz="1200" dirty="0" err="1" smtClean="0">
-                <a:ln>
-                  <a:solidFill>
-                    <a:schemeClr val="accent1">
-                      <a:alpha val="0"/>
-                    </a:schemeClr>
-                  </a:solidFill>
-                </a:ln>
-                <a:solidFill>
-                  <a:schemeClr val="tx1">
-                    <a:lumMod val="75000"/>
-                    <a:lumOff val="25000"/>
-                  </a:schemeClr>
-                </a:solidFill>
-                <a:latin typeface="프리젠테이션 5 Medium" pitchFamily="2" charset="-127"/>
-                <a:ea typeface="프리젠테이션 5 Medium" pitchFamily="2" charset="-127"/>
-                <a:cs typeface="Pretendard" panose="02000503000000020004" pitchFamily="2" charset="-127"/>
-              </a:rPr>
-              <a:t/>
-            </a:r>
-            <a:r>
-              <a:rPr lang="ko-KR" altLang="en-US" sz="1200" dirty="0" smtClean="0">
-                <a:ln>
-                  <a:solidFill>
-                    <a:schemeClr val="accent1">
-                      <a:alpha val="0"/>
-                    </a:schemeClr>
-                  </a:solidFill>
-                </a:ln>
-                <a:solidFill>
-                  <a:schemeClr val="tx1">
-                    <a:lumMod val="75000"/>
-                    <a:lumOff val="25000"/>
-                  </a:schemeClr>
-                </a:solidFill>
-                <a:latin typeface="프리젠테이션 5 Medium" pitchFamily="2" charset="-127"/>
-                <a:ea typeface="프리젠테이션 5 Medium" pitchFamily="2" charset="-127"/>
-                <a:cs typeface="Pretendard" panose="02000503000000020004" pitchFamily="2" charset="-127"/>
-              </a:rPr>
-              <a:t/>
-            </a:r>
-            <a:r>
-              <a:rPr lang="en-US" altLang="ko-KR" sz="1200" dirty="0" smtClean="0">
-                <a:ln>
-                  <a:solidFill>
-                    <a:schemeClr val="accent1">
-                      <a:alpha val="0"/>
-                    </a:schemeClr>
-                  </a:solidFill>
-                </a:ln>
-                <a:solidFill>
-                  <a:schemeClr val="tx1">
-                    <a:lumMod val="75000"/>
-                    <a:lumOff val="25000"/>
-                  </a:schemeClr>
-                </a:solidFill>
-                <a:latin typeface="프리젠테이션 5 Medium" pitchFamily="2" charset="-127"/>
-                <a:ea typeface="프리젠테이션 5 Medium" pitchFamily="2" charset="-127"/>
-                <a:cs typeface="Pretendard" panose="02000503000000020004" pitchFamily="2" charset="-127"/>
-              </a:rPr>
-              <a:t/>
-            </a:r>
-            <a:r>
-              <a:rPr lang="ko-KR" altLang="en-US" sz="1200" dirty="0" smtClean="0">
-                <a:ln>
-                  <a:solidFill>
-                    <a:schemeClr val="accent1">
-                      <a:alpha val="0"/>
-                    </a:schemeClr>
-                  </a:solidFill>
-                </a:ln>
-                <a:solidFill>
-                  <a:schemeClr val="tx1">
-                    <a:lumMod val="75000"/>
-                    <a:lumOff val="25000"/>
-                  </a:schemeClr>
-                </a:solidFill>
-                <a:latin typeface="프리젠테이션 5 Medium" pitchFamily="2" charset="-127"/>
-                <a:ea typeface="프리젠테이션 5 Medium" pitchFamily="2" charset="-127"/>
-                <a:cs typeface="Pretendard" panose="02000503000000020004" pitchFamily="2" charset="-127"/>
-              </a:rPr>
-              <a:t/>
-            </a:r>
-            <a:r>
-              <a:rPr lang="en-US" altLang="ko-KR" sz="1200" dirty="0" smtClean="0">
-                <a:ln>
-                  <a:solidFill>
-                    <a:schemeClr val="accent1">
-                      <a:alpha val="0"/>
-                    </a:schemeClr>
-                  </a:solidFill>
-                </a:ln>
-                <a:solidFill>
-                  <a:schemeClr val="tx1">
-                    <a:lumMod val="75000"/>
-                    <a:lumOff val="25000"/>
-                  </a:schemeClr>
-                </a:solidFill>
-                <a:latin typeface="프리젠테이션 5 Medium" pitchFamily="2" charset="-127"/>
-                <a:ea typeface="프리젠테이션 5 Medium" pitchFamily="2" charset="-127"/>
-                <a:cs typeface="Pretendard" panose="02000503000000020004" pitchFamily="2" charset="-127"/>
-              </a:rPr>
-              <a:t/>
-            </a:r>
-            <a:r>
-              <a:rPr lang="ko-KR" altLang="en-US" sz="1200" dirty="0" smtClean="0">
-                <a:ln>
-                  <a:solidFill>
-                    <a:schemeClr val="accent1">
-                      <a:alpha val="0"/>
-                    </a:schemeClr>
-                  </a:solidFill>
-                </a:ln>
-                <a:solidFill>
-                  <a:schemeClr val="tx1">
-                    <a:lumMod val="75000"/>
-                    <a:lumOff val="25000"/>
-                  </a:schemeClr>
-                </a:solidFill>
-                <a:latin typeface="프리젠테이션 5 Medium" pitchFamily="2" charset="-127"/>
-                <a:ea typeface="프리젠테이션 5 Medium" pitchFamily="2" charset="-127"/>
-                <a:cs typeface="Pretendard" panose="02000503000000020004" pitchFamily="2" charset="-127"/>
-              </a:rPr>
-              <a:t/>
-            </a:r>
-            <a:r>
-              <a:rPr lang="en-US" altLang="ko-KR" sz="1200" dirty="0" smtClean="0">
-                <a:ln>
-                  <a:solidFill>
-                    <a:schemeClr val="accent1">
-                      <a:alpha val="0"/>
-                    </a:schemeClr>
-                  </a:solidFill>
-                </a:ln>
-                <a:solidFill>
-                  <a:schemeClr val="tx1">
-                    <a:lumMod val="75000"/>
-                    <a:lumOff val="25000"/>
-                  </a:schemeClr>
-                </a:solidFill>
-                <a:latin typeface="프리젠테이션 5 Medium" pitchFamily="2" charset="-127"/>
-                <a:ea typeface="프리젠테이션 5 Medium" pitchFamily="2" charset="-127"/>
-                <a:cs typeface="Pretendard" panose="02000503000000020004" pitchFamily="2" charset="-127"/>
-              </a:rPr>
-              <a:t/>
-            </a:r>
-            <a:endParaRPr lang="en-US" altLang="ko-KR" sz="1200" dirty="0">
-              <a:ln>
-                <a:solidFill>
-                  <a:schemeClr val="accent1">
-                    <a:alpha val="0"/>
-                  </a:schemeClr>
-                </a:solidFill>
-              </a:ln>
-              <a:solidFill>
-                <a:srgbClr val="2765E1"/>
-              </a:solidFill>
-              <a:latin typeface="프리젠테이션 5 Medium" pitchFamily="2" charset="-127"/>
-              <a:ea typeface="프리젠테이션 5 Medium" pitchFamily="2" charset="-127"/>
-              <a:cs typeface="Pretendard" panose="02000503000000020004" pitchFamily="2" charset="-127"/>
-            </a:endParaRPr>
+            <a:pPr algn="ctr"/>
+            <a:r>
+              <a:rPr sz="1300" b="0" dirty="0">
+                <a:solidFill>
+                  <a:srgbClr val="9E9E9E"/>
+                </a:solidFill>
+                <a:latin typeface="Freesentation"/>
+              </a:rPr>
+              <a:t>[VPC </a:t>
+            </a:r>
+            <a:r>
+              <a:rPr sz="1300" b="0" dirty="0" err="1">
+                <a:solidFill>
+                  <a:srgbClr val="9E9E9E"/>
+                </a:solidFill>
+                <a:latin typeface="Freesentation"/>
+              </a:rPr>
+              <a:t>네트워크</a:t>
+            </a:r>
+            <a:r>
+              <a:rPr sz="1300" b="0" dirty="0">
+                <a:solidFill>
+                  <a:srgbClr val="9E9E9E"/>
+                </a:solidFill>
+                <a:latin typeface="Freesentation"/>
+              </a:rPr>
+              <a:t> </a:t>
+            </a:r>
+            <a:r>
+              <a:rPr sz="1300" b="0" dirty="0" err="1">
+                <a:solidFill>
+                  <a:srgbClr val="9E9E9E"/>
+                </a:solidFill>
+                <a:latin typeface="Freesentation"/>
+              </a:rPr>
+              <a:t>구성도</a:t>
+            </a:r>
+            <a:r>
+              <a:rPr sz="1300" b="0" dirty="0">
+                <a:solidFill>
+                  <a:srgbClr val="9E9E9E"/>
+                </a:solidFill>
+                <a:latin typeface="Freesentation"/>
+              </a:rPr>
+              <a:t>]</a:t>
+            </a:r>
           </a:p>
         </p:txBody>
       </p:sp>
     </p:spTree>
+    <p:extLst>
+      <p:ext uri="{BB962C8B-B14F-4D97-AF65-F5344CB8AC3E}">
+        <p14:creationId xmlns:p14="http://schemas.microsoft.com/office/powerpoint/2010/main" val="2416297516"/>
+      </p:ext>
+    </p:extLst>
   </p:cSld>
   <p:clrMapOvr>
     <a:masterClrMapping/>
@@ -12817,7 +12948,7 @@
 </file>
 
 <file path=ppt/slides/slide21.xml><?xml version="1.0" encoding="utf-8"?>
-<p:sld xmlns:a="http://schemas.openxmlformats.org/drawingml/2006/main" xmlns:p="http://schemas.openxmlformats.org/presentationml/2006/main" xmlns:r="http://schemas.openxmlformats.org/officeDocument/2006/relationships">
+<p:sld xmlns:a="http://schemas.openxmlformats.org/drawingml/2006/main" xmlns:r="http://schemas.openxmlformats.org/officeDocument/2006/relationships" xmlns:p="http://schemas.openxmlformats.org/presentationml/2006/main">
   <p:cSld>
     <p:spTree>
       <p:nvGrpSpPr>
@@ -12825,7 +12956,14 @@
         <p:cNvGrpSpPr/>
         <p:nvPr/>
       </p:nvGrpSpPr>
-      <p:grpSpPr/>
+      <p:grpSpPr>
+        <a:xfrm>
+          <a:off x="0" y="0"/>
+          <a:ext cx="0" cy="0"/>
+          <a:chOff x="0" y="0"/>
+          <a:chExt cx="0" cy="0"/>
+        </a:xfrm>
+      </p:grpSpPr>
       <p:sp>
         <p:nvSpPr>
           <p:cNvPr id="5" name="Rectangle 4"/>
@@ -12866,6 +13004,7 @@
           <a:lstStyle/>
           <a:p>
             <a:pPr algn="ctr"/>
+            <a:endParaRPr/>
           </a:p>
         </p:txBody>
       </p:sp>
@@ -12876,14 +13015,16 @@
             <a:spLocks noGrp="1"/>
           </p:cNvSpPr>
           <p:nvPr>
-            <p:ph type="body" idx="10" sz="quarter"/>
+            <p:ph type="body" sz="quarter" idx="10"/>
           </p:nvPr>
         </p:nvSpPr>
         <p:spPr/>
         <p:txBody>
           <a:bodyPr/>
           <a:lstStyle/>
-          <a:p/>
+          <a:p>
+            <a:endParaRPr/>
+          </a:p>
         </p:txBody>
       </p:sp>
       <p:sp>
@@ -12903,7 +13044,7 @@
           <a:noFill/>
         </p:spPr>
         <p:txBody>
-          <a:bodyPr wrap="square" lIns="0" rIns="0" tIns="0" bIns="0">
+          <a:bodyPr wrap="square" lIns="0" tIns="0" rIns="0" bIns="0">
             <a:spAutoFit/>
           </a:bodyPr>
           <a:lstStyle/>
@@ -12938,7 +13079,7 @@
           <a:noFill/>
         </p:spPr>
         <p:txBody>
-          <a:bodyPr wrap="square" lIns="0" rIns="0" tIns="0" bIns="0">
+          <a:bodyPr wrap="square" lIns="0" tIns="0" rIns="0" bIns="0">
             <a:spAutoFit/>
           </a:bodyPr>
           <a:lstStyle/>
@@ -12998,6 +13139,7 @@
           <a:lstStyle/>
           <a:p>
             <a:pPr algn="ctr"/>
+            <a:endParaRPr/>
           </a:p>
         </p:txBody>
       </p:sp>
@@ -13080,7 +13222,7 @@
 </file>
 
 <file path=ppt/slides/slide22.xml><?xml version="1.0" encoding="utf-8"?>
-<p:sld xmlns:a="http://schemas.openxmlformats.org/drawingml/2006/main" xmlns:p="http://schemas.openxmlformats.org/presentationml/2006/main" xmlns:r="http://schemas.openxmlformats.org/officeDocument/2006/relationships">
+<p:sld xmlns:a="http://schemas.openxmlformats.org/drawingml/2006/main" xmlns:r="http://schemas.openxmlformats.org/officeDocument/2006/relationships" xmlns:p="http://schemas.openxmlformats.org/presentationml/2006/main">
   <p:cSld>
     <p:spTree>
       <p:nvGrpSpPr>
@@ -13088,7 +13230,14 @@
         <p:cNvGrpSpPr/>
         <p:nvPr/>
       </p:nvGrpSpPr>
-      <p:grpSpPr/>
+      <p:grpSpPr>
+        <a:xfrm>
+          <a:off x="0" y="0"/>
+          <a:ext cx="0" cy="0"/>
+          <a:chOff x="0" y="0"/>
+          <a:chExt cx="0" cy="0"/>
+        </a:xfrm>
+      </p:grpSpPr>
       <p:sp>
         <p:nvSpPr>
           <p:cNvPr id="2" name="Text Placeholder 1"/>
@@ -13096,14 +13245,16 @@
             <a:spLocks noGrp="1"/>
           </p:cNvSpPr>
           <p:nvPr>
-            <p:ph type="body" idx="10" sz="quarter"/>
+            <p:ph type="body" sz="quarter" idx="10"/>
           </p:nvPr>
         </p:nvSpPr>
         <p:spPr/>
         <p:txBody>
           <a:bodyPr/>
           <a:lstStyle/>
-          <a:p/>
+          <a:p>
+            <a:endParaRPr/>
+          </a:p>
         </p:txBody>
       </p:sp>
       <p:sp>
@@ -13123,7 +13274,7 @@
           <a:noFill/>
         </p:spPr>
         <p:txBody>
-          <a:bodyPr wrap="square" lIns="0" rIns="0" tIns="0" bIns="0">
+          <a:bodyPr wrap="square" lIns="0" tIns="0" rIns="0" bIns="0">
             <a:spAutoFit/>
           </a:bodyPr>
           <a:lstStyle/>
@@ -13158,7 +13309,7 @@
           <a:noFill/>
         </p:spPr>
         <p:txBody>
-          <a:bodyPr wrap="square" lIns="0" rIns="0" tIns="0" bIns="0">
+          <a:bodyPr wrap="square" lIns="0" tIns="0" rIns="0" bIns="0">
             <a:spAutoFit/>
           </a:bodyPr>
           <a:lstStyle/>
@@ -13290,6 +13441,7 @@
           <a:lstStyle/>
           <a:p>
             <a:pPr algn="ctr"/>
+            <a:endParaRPr/>
           </a:p>
         </p:txBody>
       </p:sp>
@@ -13431,6 +13583,7 @@
           <a:lstStyle/>
           <a:p>
             <a:pPr algn="ctr"/>
+            <a:endParaRPr/>
           </a:p>
         </p:txBody>
       </p:sp>
@@ -13572,6 +13725,7 @@
           <a:lstStyle/>
           <a:p>
             <a:pPr algn="ctr"/>
+            <a:endParaRPr/>
           </a:p>
         </p:txBody>
       </p:sp>
@@ -13713,6 +13867,7 @@
           <a:lstStyle/>
           <a:p>
             <a:pPr algn="ctr"/>
+            <a:endParaRPr/>
           </a:p>
         </p:txBody>
       </p:sp>
@@ -13854,6 +14009,7 @@
           <a:lstStyle/>
           <a:p>
             <a:pPr algn="ctr"/>
+            <a:endParaRPr/>
           </a:p>
         </p:txBody>
       </p:sp>
@@ -13995,6 +14151,7 @@
           <a:lstStyle/>
           <a:p>
             <a:pPr algn="ctr"/>
+            <a:endParaRPr/>
           </a:p>
         </p:txBody>
       </p:sp>
@@ -14101,7 +14258,7 @@
 </file>
 
 <file path=ppt/slides/slide23.xml><?xml version="1.0" encoding="utf-8"?>
-<p:sld xmlns:a="http://schemas.openxmlformats.org/drawingml/2006/main" xmlns:p="http://schemas.openxmlformats.org/presentationml/2006/main" xmlns:r="http://schemas.openxmlformats.org/officeDocument/2006/relationships">
+<p:sld xmlns:a="http://schemas.openxmlformats.org/drawingml/2006/main" xmlns:r="http://schemas.openxmlformats.org/officeDocument/2006/relationships" xmlns:p="http://schemas.openxmlformats.org/presentationml/2006/main">
   <p:cSld>
     <p:spTree>
       <p:nvGrpSpPr>
@@ -14109,7 +14266,14 @@
         <p:cNvGrpSpPr/>
         <p:nvPr/>
       </p:nvGrpSpPr>
-      <p:grpSpPr/>
+      <p:grpSpPr>
+        <a:xfrm>
+          <a:off x="0" y="0"/>
+          <a:ext cx="0" cy="0"/>
+          <a:chOff x="0" y="0"/>
+          <a:chExt cx="0" cy="0"/>
+        </a:xfrm>
+      </p:grpSpPr>
       <p:sp>
         <p:nvSpPr>
           <p:cNvPr id="2" name="Text Placeholder 1"/>
@@ -14117,14 +14281,16 @@
             <a:spLocks noGrp="1"/>
           </p:cNvSpPr>
           <p:nvPr>
-            <p:ph type="body" idx="10" sz="quarter"/>
+            <p:ph type="body" sz="quarter" idx="10"/>
           </p:nvPr>
         </p:nvSpPr>
         <p:spPr/>
         <p:txBody>
           <a:bodyPr/>
           <a:lstStyle/>
-          <a:p/>
+          <a:p>
+            <a:endParaRPr/>
+          </a:p>
         </p:txBody>
       </p:sp>
       <p:sp>
@@ -14144,7 +14310,7 @@
           <a:noFill/>
         </p:spPr>
         <p:txBody>
-          <a:bodyPr wrap="square" lIns="0" rIns="0" tIns="0" bIns="0">
+          <a:bodyPr wrap="square" lIns="0" tIns="0" rIns="0" bIns="0">
             <a:spAutoFit/>
           </a:bodyPr>
           <a:lstStyle/>
@@ -14179,7 +14345,7 @@
           <a:noFill/>
         </p:spPr>
         <p:txBody>
-          <a:bodyPr wrap="square" lIns="0" rIns="0" tIns="0" bIns="0">
+          <a:bodyPr wrap="square" lIns="0" tIns="0" rIns="0" bIns="0">
             <a:spAutoFit/>
           </a:bodyPr>
           <a:lstStyle/>
@@ -14303,7 +14469,7 @@
           </a:fontRef>
         </p:style>
         <p:txBody>
-          <a:bodyPr rtlCol="0" anchor="ctr" lIns="0" rIns="0" tIns="0" bIns="0"/>
+          <a:bodyPr lIns="0" tIns="0" rIns="0" bIns="0" rtlCol="0" anchor="ctr"/>
           <a:lstStyle/>
           <a:p>
             <a:pPr algn="ctr"/>
@@ -14312,7 +14478,7 @@
                 <a:solidFill>
                   <a:srgbClr val="FFFFFF"/>
                 </a:solidFill>
-                <a:latin typeface="Freesentation 7"/>
+                <a:latin typeface="Freesentation 7 Bold"/>
               </a:rPr>
               <a:t>1</a:t>
             </a:r>
@@ -14425,7 +14591,7 @@
           </a:fontRef>
         </p:style>
         <p:txBody>
-          <a:bodyPr rtlCol="0" anchor="ctr" lIns="0" rIns="0" tIns="0" bIns="0"/>
+          <a:bodyPr lIns="0" tIns="0" rIns="0" bIns="0" rtlCol="0" anchor="ctr"/>
           <a:lstStyle/>
           <a:p>
             <a:pPr algn="ctr"/>
@@ -14434,7 +14600,7 @@
                 <a:solidFill>
                   <a:srgbClr val="FFFFFF"/>
                 </a:solidFill>
-                <a:latin typeface="Freesentation 7"/>
+                <a:latin typeface="Freesentation 7 Bold"/>
               </a:rPr>
               <a:t>2</a:t>
             </a:r>
@@ -14547,7 +14713,7 @@
           </a:fontRef>
         </p:style>
         <p:txBody>
-          <a:bodyPr rtlCol="0" anchor="ctr" lIns="0" rIns="0" tIns="0" bIns="0"/>
+          <a:bodyPr lIns="0" tIns="0" rIns="0" bIns="0" rtlCol="0" anchor="ctr"/>
           <a:lstStyle/>
           <a:p>
             <a:pPr algn="ctr"/>
@@ -14556,7 +14722,7 @@
                 <a:solidFill>
                   <a:srgbClr val="FFFFFF"/>
                 </a:solidFill>
-                <a:latin typeface="Freesentation 7"/>
+                <a:latin typeface="Freesentation 7 Bold"/>
               </a:rPr>
               <a:t>3</a:t>
             </a:r>
@@ -14669,7 +14835,7 @@
           </a:fontRef>
         </p:style>
         <p:txBody>
-          <a:bodyPr rtlCol="0" anchor="ctr" lIns="0" rIns="0" tIns="0" bIns="0"/>
+          <a:bodyPr lIns="0" tIns="0" rIns="0" bIns="0" rtlCol="0" anchor="ctr"/>
           <a:lstStyle/>
           <a:p>
             <a:pPr algn="ctr"/>
@@ -14678,7 +14844,7 @@
                 <a:solidFill>
                   <a:srgbClr val="FFFFFF"/>
                 </a:solidFill>
-                <a:latin typeface="Freesentation 7"/>
+                <a:latin typeface="Freesentation 7 Bold"/>
               </a:rPr>
               <a:t>4</a:t>
             </a:r>
@@ -14764,7 +14930,7 @@
 </file>
 
 <file path=ppt/slides/slide24.xml><?xml version="1.0" encoding="utf-8"?>
-<p:sld xmlns:a="http://schemas.openxmlformats.org/drawingml/2006/main" xmlns:p="http://schemas.openxmlformats.org/presentationml/2006/main" xmlns:r="http://schemas.openxmlformats.org/officeDocument/2006/relationships">
+<p:sld xmlns:a="http://schemas.openxmlformats.org/drawingml/2006/main" xmlns:r="http://schemas.openxmlformats.org/officeDocument/2006/relationships" xmlns:p="http://schemas.openxmlformats.org/presentationml/2006/main">
   <p:cSld>
     <p:spTree>
       <p:nvGrpSpPr>
@@ -14772,7 +14938,14 @@
         <p:cNvGrpSpPr/>
         <p:nvPr/>
       </p:nvGrpSpPr>
-      <p:grpSpPr/>
+      <p:grpSpPr>
+        <a:xfrm>
+          <a:off x="0" y="0"/>
+          <a:ext cx="0" cy="0"/>
+          <a:chOff x="0" y="0"/>
+          <a:chExt cx="0" cy="0"/>
+        </a:xfrm>
+      </p:grpSpPr>
       <p:sp>
         <p:nvSpPr>
           <p:cNvPr id="2" name="Text Placeholder 1"/>
@@ -14780,7 +14953,7 @@
             <a:spLocks noGrp="1"/>
           </p:cNvSpPr>
           <p:nvPr>
-            <p:ph type="body" idx="10" sz="quarter"/>
+            <p:ph type="body" sz="quarter" idx="10"/>
           </p:nvPr>
         </p:nvSpPr>
         <p:spPr/>
@@ -14788,9 +14961,7 @@
           <a:bodyPr/>
           <a:lstStyle/>
           <a:p>
-            <a:r>
-              <a:t/>
-            </a:r>
+            <a:endParaRPr/>
           </a:p>
         </p:txBody>
       </p:sp>
@@ -14850,15 +15021,7 @@
           </a:bodyPr>
           <a:lstStyle/>
           <a:p>
-            <a:r>
-              <a:rPr sz="1100">
-                <a:solidFill>
-                  <a:srgbClr val="505050"/>
-                </a:solidFill>
-                <a:latin typeface="Freesentation"/>
-              </a:rPr>
-              <a:t/>
-            </a:r>
+            <a:endParaRPr/>
           </a:p>
         </p:txBody>
       </p:sp>
@@ -15006,6 +15169,7 @@
           <a:lstStyle/>
           <a:p>
             <a:pPr algn="ctr"/>
+            <a:endParaRPr/>
           </a:p>
         </p:txBody>
       </p:sp>
@@ -15051,6 +15215,7 @@
           <a:lstStyle/>
           <a:p>
             <a:pPr algn="ctr"/>
+            <a:endParaRPr/>
           </a:p>
         </p:txBody>
       </p:sp>
@@ -15096,6 +15261,7 @@
           <a:lstStyle/>
           <a:p>
             <a:pPr algn="ctr"/>
+            <a:endParaRPr/>
           </a:p>
         </p:txBody>
       </p:sp>
@@ -15278,7 +15444,14 @@
               <a:t>인프라+인력 합산 (2025 실측)</a:t>
             </a:r>
           </a:p>
-          <a:p/>
+          <a:p>
+            <a:endParaRPr sz="1300">
+              <a:solidFill>
+                <a:srgbClr val="212121"/>
+              </a:solidFill>
+              <a:latin typeface="Freesentation"/>
+            </a:endParaRPr>
+          </a:p>
           <a:p>
             <a:r>
               <a:rPr sz="1300">
@@ -15301,7 +15474,14 @@
               <a:t>전환 대상, 목표 전환율 80%</a:t>
             </a:r>
           </a:p>
-          <a:p/>
+          <a:p>
+            <a:endParaRPr sz="1300">
+              <a:solidFill>
+                <a:srgbClr val="212121"/>
+              </a:solidFill>
+              <a:latin typeface="Freesentation"/>
+            </a:endParaRPr>
+          </a:p>
           <a:p>
             <a:r>
               <a:rPr sz="1300">
@@ -15324,7 +15504,14 @@
               <a:t>1차 마감 2026-Q2</a:t>
             </a:r>
           </a:p>
-          <a:p/>
+          <a:p>
+            <a:endParaRPr sz="1300">
+              <a:solidFill>
+                <a:srgbClr val="212121"/>
+              </a:solidFill>
+              <a:latin typeface="Freesentation"/>
+            </a:endParaRPr>
+          </a:p>
           <a:p>
             <a:r>
               <a:rPr sz="1300">
@@ -15392,7 +15579,7 @@
 </file>
 
 <file path=ppt/slides/slide25.xml><?xml version="1.0" encoding="utf-8"?>
-<p:sld xmlns:a="http://schemas.openxmlformats.org/drawingml/2006/main" xmlns:p="http://schemas.openxmlformats.org/presentationml/2006/main" xmlns:r="http://schemas.openxmlformats.org/officeDocument/2006/relationships">
+<p:sld xmlns:a="http://schemas.openxmlformats.org/drawingml/2006/main" xmlns:r="http://schemas.openxmlformats.org/officeDocument/2006/relationships" xmlns:p="http://schemas.openxmlformats.org/presentationml/2006/main">
   <p:cSld>
     <p:spTree>
       <p:nvGrpSpPr>
@@ -15400,7 +15587,14 @@
         <p:cNvGrpSpPr/>
         <p:nvPr/>
       </p:nvGrpSpPr>
-      <p:grpSpPr/>
+      <p:grpSpPr>
+        <a:xfrm>
+          <a:off x="0" y="0"/>
+          <a:ext cx="0" cy="0"/>
+          <a:chOff x="0" y="0"/>
+          <a:chExt cx="0" cy="0"/>
+        </a:xfrm>
+      </p:grpSpPr>
       <p:sp>
         <p:nvSpPr>
           <p:cNvPr id="2" name="Text Placeholder 1"/>
@@ -15408,7 +15602,7 @@
             <a:spLocks noGrp="1"/>
           </p:cNvSpPr>
           <p:nvPr>
-            <p:ph type="body" idx="10" sz="quarter"/>
+            <p:ph type="body" sz="quarter" idx="10"/>
           </p:nvPr>
         </p:nvSpPr>
         <p:spPr/>
@@ -15416,9 +15610,7 @@
           <a:bodyPr/>
           <a:lstStyle/>
           <a:p>
-            <a:r>
-              <a:t/>
-            </a:r>
+            <a:endParaRPr/>
           </a:p>
         </p:txBody>
       </p:sp>
@@ -15478,15 +15670,7 @@
           </a:bodyPr>
           <a:lstStyle/>
           <a:p>
-            <a:r>
-              <a:rPr sz="1100">
-                <a:solidFill>
-                  <a:srgbClr val="505050"/>
-                </a:solidFill>
-                <a:latin typeface="Freesentation"/>
-              </a:rPr>
-              <a:t/>
-            </a:r>
+            <a:endParaRPr/>
           </a:p>
         </p:txBody>
       </p:sp>
@@ -15646,7 +15830,14 @@
               <a:t>   cluster-name 필수 항목</a:t>
             </a:r>
           </a:p>
-          <a:p/>
+          <a:p>
+            <a:endParaRPr sz="1300">
+              <a:solidFill>
+                <a:srgbClr val="212121"/>
+              </a:solidFill>
+              <a:latin typeface="Freesentation"/>
+            </a:endParaRPr>
+          </a:p>
           <a:p>
             <a:r>
               <a:rPr sz="1400" b="1">
@@ -15680,7 +15871,14 @@
               <a:t>   aws ec2 describe-subnets 명령 활용</a:t>
             </a:r>
           </a:p>
-          <a:p/>
+          <a:p>
+            <a:endParaRPr sz="1300">
+              <a:solidFill>
+                <a:srgbClr val="212121"/>
+              </a:solidFill>
+              <a:latin typeface="Freesentation"/>
+            </a:endParaRPr>
+          </a:p>
           <a:p>
             <a:r>
               <a:rPr sz="1400" b="1">
@@ -15714,7 +15912,14 @@
               <a:t>   완료까지 5~10분 소요</a:t>
             </a:r>
           </a:p>
-          <a:p/>
+          <a:p>
+            <a:endParaRPr sz="1300">
+              <a:solidFill>
+                <a:srgbClr val="212121"/>
+              </a:solidFill>
+              <a:latin typeface="Freesentation"/>
+            </a:endParaRPr>
+          </a:p>
           <a:p>
             <a:r>
               <a:rPr sz="1400" b="1">
@@ -15790,6 +15995,7 @@
           <a:lstStyle/>
           <a:p>
             <a:pPr algn="ctr"/>
+            <a:endParaRPr/>
           </a:p>
         </p:txBody>
       </p:sp>
@@ -15889,6 +16095,7 @@
           <a:lstStyle/>
           <a:p>
             <a:pPr algn="ctr"/>
+            <a:endParaRPr/>
           </a:p>
         </p:txBody>
       </p:sp>
@@ -16012,6 +16219,7 @@
           <a:lstStyle/>
           <a:p>
             <a:pPr algn="ctr"/>
+            <a:endParaRPr/>
           </a:p>
         </p:txBody>
       </p:sp>
@@ -16055,6 +16263,7 @@
           <a:lstStyle/>
           <a:p>
             <a:pPr algn="ctr"/>
+            <a:endParaRPr/>
           </a:p>
         </p:txBody>
       </p:sp>
@@ -16098,6 +16307,7 @@
           <a:lstStyle/>
           <a:p>
             <a:pPr algn="ctr"/>
+            <a:endParaRPr/>
           </a:p>
         </p:txBody>
       </p:sp>
@@ -16110,7 +16320,7 @@
 </file>
 
 <file path=ppt/slides/slide26.xml><?xml version="1.0" encoding="utf-8"?>
-<p:sld xmlns:a="http://schemas.openxmlformats.org/drawingml/2006/main" xmlns:p="http://schemas.openxmlformats.org/presentationml/2006/main" xmlns:r="http://schemas.openxmlformats.org/officeDocument/2006/relationships">
+<p:sld xmlns:a="http://schemas.openxmlformats.org/drawingml/2006/main" xmlns:r="http://schemas.openxmlformats.org/officeDocument/2006/relationships" xmlns:p="http://schemas.openxmlformats.org/presentationml/2006/main">
   <p:cSld>
     <p:spTree>
       <p:nvGrpSpPr>
@@ -16118,7 +16328,14 @@
         <p:cNvGrpSpPr/>
         <p:nvPr/>
       </p:nvGrpSpPr>
-      <p:grpSpPr/>
+      <p:grpSpPr>
+        <a:xfrm>
+          <a:off x="0" y="0"/>
+          <a:ext cx="0" cy="0"/>
+          <a:chOff x="0" y="0"/>
+          <a:chExt cx="0" cy="0"/>
+        </a:xfrm>
+      </p:grpSpPr>
       <p:sp>
         <p:nvSpPr>
           <p:cNvPr id="2" name="Text Placeholder 1"/>
@@ -16126,7 +16343,7 @@
             <a:spLocks noGrp="1"/>
           </p:cNvSpPr>
           <p:nvPr>
-            <p:ph type="body" idx="10" sz="quarter"/>
+            <p:ph type="body" sz="quarter" idx="10"/>
           </p:nvPr>
         </p:nvSpPr>
         <p:spPr/>
@@ -16134,9 +16351,7 @@
           <a:bodyPr/>
           <a:lstStyle/>
           <a:p>
-            <a:r>
-              <a:t/>
-            </a:r>
+            <a:endParaRPr/>
           </a:p>
         </p:txBody>
       </p:sp>
@@ -16196,15 +16411,7 @@
           </a:bodyPr>
           <a:lstStyle/>
           <a:p>
-            <a:r>
-              <a:rPr sz="1100">
-                <a:solidFill>
-                  <a:srgbClr val="505050"/>
-                </a:solidFill>
-                <a:latin typeface="Freesentation"/>
-              </a:rPr>
-              <a:t/>
-            </a:r>
+            <a:endParaRPr/>
           </a:p>
         </p:txBody>
       </p:sp>
@@ -16352,6 +16559,7 @@
           <a:lstStyle/>
           <a:p>
             <a:pPr algn="ctr"/>
+            <a:endParaRPr/>
           </a:p>
         </p:txBody>
       </p:sp>
@@ -16397,6 +16605,7 @@
           <a:lstStyle/>
           <a:p>
             <a:pPr algn="ctr"/>
+            <a:endParaRPr/>
           </a:p>
         </p:txBody>
       </p:sp>
@@ -16442,6 +16651,7 @@
           <a:lstStyle/>
           <a:p>
             <a:pPr algn="ctr"/>
+            <a:endParaRPr/>
           </a:p>
         </p:txBody>
       </p:sp>
@@ -16487,6 +16697,7 @@
           <a:lstStyle/>
           <a:p>
             <a:pPr algn="ctr"/>
+            <a:endParaRPr/>
           </a:p>
         </p:txBody>
       </p:sp>

--- a/results/pptx/AWS_MSK_Expert_Intro.pptx
+++ b/results/pptx/AWS_MSK_Expert_Intro.pptx
@@ -12081,7 +12081,7 @@
           <a:p>
             <a:pPr algn="ctr"/>
             <a:r>
-              <a:rPr kumimoji="1" lang="en-US" altLang="ko-KR" sz="1200" b="1" dirty="0">
+              <a:rPr kumimoji="1" lang="en-US" altLang="ko-KR" sz="1400" b="1" dirty="0">
                 <a:solidFill>
                   <a:srgbClr val="2A6FDE"/>
                 </a:solidFill>
@@ -12136,7 +12136,7 @@
               <a:buChar char="•"/>
             </a:pPr>
             <a:r>
-              <a:rPr kumimoji="1" lang="ko-KR" altLang="en-US" sz="1100" dirty="0">
+              <a:rPr kumimoji="1" lang="ko-KR" altLang="en-US" sz="1300" dirty="0">
                 <a:latin typeface="프리젠테이션 4 Regular" pitchFamily="2" charset="-127"/>
                 <a:ea typeface="프리젠테이션 4 Regular" pitchFamily="2" charset="-127"/>
               </a:rPr>
@@ -12152,7 +12152,7 @@
               <a:buChar char="•"/>
             </a:pPr>
             <a:r>
-              <a:rPr kumimoji="1" lang="ko-KR" altLang="en-US" sz="1100" dirty="0">
+              <a:rPr kumimoji="1" lang="ko-KR" altLang="en-US" sz="1300" dirty="0">
                 <a:latin typeface="프리젠테이션 4 Regular" pitchFamily="2" charset="-127"/>
                 <a:ea typeface="프리젠테이션 4 Regular" pitchFamily="2" charset="-127"/>
               </a:rPr>
@@ -12168,7 +12168,7 @@
               <a:buChar char="•"/>
             </a:pPr>
             <a:r>
-              <a:rPr kumimoji="1" lang="ko-KR" altLang="en-US" sz="1100" dirty="0">
+              <a:rPr kumimoji="1" lang="ko-KR" altLang="en-US" sz="1300" dirty="0">
                 <a:latin typeface="프리젠테이션 4 Regular" pitchFamily="2" charset="-127"/>
                 <a:ea typeface="프리젠테이션 4 Regular" pitchFamily="2" charset="-127"/>
               </a:rPr>
@@ -12184,7 +12184,7 @@
               <a:buChar char="•"/>
             </a:pPr>
             <a:r>
-              <a:rPr kumimoji="1" lang="ko-KR" altLang="en-US" sz="1100" dirty="0">
+              <a:rPr kumimoji="1" lang="ko-KR" altLang="en-US" sz="1300" dirty="0">
                 <a:latin typeface="프리젠테이션 4 Regular" pitchFamily="2" charset="-127"/>
                 <a:ea typeface="프리젠테이션 4 Regular" pitchFamily="2" charset="-127"/>
               </a:rPr>
@@ -12306,7 +12306,7 @@
           <a:p>
             <a:pPr algn="ctr"/>
             <a:r>
-              <a:rPr kumimoji="1" lang="en-US" altLang="ko-KR" sz="1200" b="1" dirty="0">
+              <a:rPr kumimoji="1" lang="en-US" altLang="ko-KR" sz="1400" b="1" dirty="0">
                 <a:solidFill>
                   <a:srgbClr val="4CB88F"/>
                 </a:solidFill>
@@ -12354,7 +12354,7 @@
               <a:buChar char="•"/>
             </a:pPr>
             <a:r>
-              <a:rPr kumimoji="1" lang="en" altLang="ko-KR" sz="1100" dirty="0">
+              <a:rPr kumimoji="1" lang="en" altLang="ko-KR" sz="1300" dirty="0">
                 <a:latin typeface="프리젠테이션 4 Regular" pitchFamily="2" charset="-127"/>
                 <a:ea typeface="프리젠테이션 4 Regular" pitchFamily="2" charset="-127"/>
               </a:rPr>
@@ -12370,7 +12370,7 @@
               <a:buChar char="•"/>
             </a:pPr>
             <a:r>
-              <a:rPr kumimoji="1" lang="en" altLang="ko-KR" sz="1100" dirty="0">
+              <a:rPr kumimoji="1" lang="en" altLang="ko-KR" sz="1300" dirty="0">
                 <a:latin typeface="프리젠테이션 4 Regular" pitchFamily="2" charset="-127"/>
                 <a:ea typeface="프리젠테이션 4 Regular" pitchFamily="2" charset="-127"/>
               </a:rPr>
@@ -12386,7 +12386,7 @@
               <a:buChar char="•"/>
             </a:pPr>
             <a:r>
-              <a:rPr kumimoji="1" lang="en" altLang="ko-KR" sz="1100" dirty="0">
+              <a:rPr kumimoji="1" lang="en" altLang="ko-KR" sz="1300" dirty="0">
                 <a:latin typeface="프리젠테이션 4 Regular" pitchFamily="2" charset="-127"/>
                 <a:ea typeface="프리젠테이션 4 Regular" pitchFamily="2" charset="-127"/>
               </a:rPr>
@@ -12402,7 +12402,7 @@
               <a:buChar char="•"/>
             </a:pPr>
             <a:r>
-              <a:rPr kumimoji="1" lang="en" altLang="ko-KR" sz="1100" dirty="0">
+              <a:rPr kumimoji="1" lang="en" altLang="ko-KR" sz="1300" dirty="0">
                 <a:latin typeface="프리젠테이션 4 Regular" pitchFamily="2" charset="-127"/>
                 <a:ea typeface="프리젠테이션 4 Regular" pitchFamily="2" charset="-127"/>
               </a:rPr>
@@ -12489,7 +12489,7 @@
           <a:p>
             <a:pPr algn="ctr"/>
             <a:r>
-              <a:rPr kumimoji="1" lang="en-US" altLang="ko-KR" sz="1200" b="1" dirty="0">
+              <a:rPr kumimoji="1" lang="en-US" altLang="ko-KR" sz="1400" b="1" dirty="0">
                 <a:solidFill>
                   <a:srgbClr val="EE8150"/>
                 </a:solidFill>
@@ -12544,7 +12544,7 @@
               <a:buChar char="•"/>
             </a:pPr>
             <a:r>
-              <a:rPr kumimoji="1" lang="ko-KR" altLang="en-US" sz="1100" dirty="0">
+              <a:rPr kumimoji="1" lang="ko-KR" altLang="en-US" sz="1300" dirty="0">
                 <a:latin typeface="프리젠테이션 4 Regular" pitchFamily="2" charset="-127"/>
                 <a:ea typeface="프리젠테이션 4 Regular" pitchFamily="2" charset="-127"/>
               </a:rPr>
@@ -12560,7 +12560,7 @@
               <a:buChar char="•"/>
             </a:pPr>
             <a:r>
-              <a:rPr kumimoji="1" lang="ko-KR" altLang="en-US" sz="1100" dirty="0">
+              <a:rPr kumimoji="1" lang="ko-KR" altLang="en-US" sz="1300" dirty="0">
                 <a:latin typeface="프리젠테이션 4 Regular" pitchFamily="2" charset="-127"/>
                 <a:ea typeface="프리젠테이션 4 Regular" pitchFamily="2" charset="-127"/>
               </a:rPr>
@@ -12576,7 +12576,7 @@
               <a:buChar char="•"/>
             </a:pPr>
             <a:r>
-              <a:rPr kumimoji="1" lang="ko-KR" altLang="en-US" sz="1100" dirty="0">
+              <a:rPr kumimoji="1" lang="ko-KR" altLang="en-US" sz="1300" dirty="0">
                 <a:latin typeface="프리젠테이션 4 Regular" pitchFamily="2" charset="-127"/>
                 <a:ea typeface="프리젠테이션 4 Regular" pitchFamily="2" charset="-127"/>
               </a:rPr>
@@ -12592,7 +12592,7 @@
               <a:buChar char="•"/>
             </a:pPr>
             <a:r>
-              <a:rPr kumimoji="1" lang="ko-KR" altLang="en-US" sz="1100" dirty="0">
+              <a:rPr kumimoji="1" lang="ko-KR" altLang="en-US" sz="1300" dirty="0">
                 <a:latin typeface="프리젠테이션 4 Regular" pitchFamily="2" charset="-127"/>
                 <a:ea typeface="프리젠테이션 4 Regular" pitchFamily="2" charset="-127"/>
               </a:rPr>
@@ -12800,7 +12800,7 @@
                 </a:solidFill>
                 <a:latin typeface="Freesentation"/>
               </a:rPr>
-              <a:t>이미지+불릿 2컬럼 레이아웃 — 좌 시각자료 + 우 설명</a:t>
+              <a:t>이미지+CSR 레이아웃 — 좌 이미지 + 우 CHALLENGE / SOLUTION / RESULT 3단 블록</a:t>
             </a:r>
           </a:p>
         </p:txBody>

--- a/results/pptx/AWS_MSK_Expert_Intro.pptx
+++ b/results/pptx/AWS_MSK_Expert_Intro.pptx
@@ -37,6 +37,11 @@
     <p:sldId id="385" r:id="rId25"/>
     <p:sldId id="386" r:id="rId26"/>
     <p:sldId id="387" r:id="rId27"/>
+    <p:sldId id="388" r:id="rId35"/>
+    <p:sldId id="389" r:id="rId36"/>
+    <p:sldId id="390" r:id="rId37"/>
+    <p:sldId id="391" r:id="rId38"/>
+    <p:sldId id="392" r:id="rId39"/>
     <p:sldId id="356" r:id="rId28"/>
   </p:sldIdLst>
   <p:sldSz cx="12192000" cy="6858000"/>
@@ -8405,8 +8410,8 @@
         </p:nvSpPr>
         <p:spPr>
           <a:xfrm>
-            <a:off x="1209960" y="2603120"/>
-            <a:ext cx="4551840" cy="274320"/>
+            <a:off x="637160" y="2603120"/>
+            <a:ext cx="5124640" cy="274320"/>
           </a:xfrm>
           <a:prstGeom prst="rect">
             <a:avLst/>
@@ -8590,8 +8595,8 @@
         </p:nvSpPr>
         <p:spPr>
           <a:xfrm>
-            <a:off x="7044120" y="2603120"/>
-            <a:ext cx="4551840" cy="274320"/>
+            <a:off x="6471320" y="2603120"/>
+            <a:ext cx="5124640" cy="274320"/>
           </a:xfrm>
           <a:prstGeom prst="rect">
             <a:avLst/>
@@ -9082,8 +9087,8 @@
         </p:nvSpPr>
         <p:spPr>
           <a:xfrm>
-            <a:off x="1209960" y="2603120"/>
-            <a:ext cx="4551840" cy="274320"/>
+            <a:off x="637160" y="2603120"/>
+            <a:ext cx="5124640" cy="274320"/>
           </a:xfrm>
           <a:prstGeom prst="rect">
             <a:avLst/>
@@ -9267,8 +9272,8 @@
         </p:nvSpPr>
         <p:spPr>
           <a:xfrm>
-            <a:off x="7044120" y="2603120"/>
-            <a:ext cx="4551840" cy="274320"/>
+            <a:off x="6471320" y="2603120"/>
+            <a:ext cx="5124640" cy="274320"/>
           </a:xfrm>
           <a:prstGeom prst="rect">
             <a:avLst/>
@@ -17254,257 +17259,1371 @@
       </p:grpSpPr>
       <p:sp>
         <p:nvSpPr>
-          <p:cNvPr id="2" name="Google Shape;679;p32"/>
-          <p:cNvSpPr txBox="1">
-            <a:spLocks/>
+          <p:cNvPr id="231" name="Verdict 바"/>
+          <p:cNvSpPr>
+            <a:spLocks noGrp="1"/>
           </p:cNvSpPr>
           <p:nvPr/>
         </p:nvSpPr>
         <p:spPr>
           <a:xfrm>
-            <a:off x="0" y="2699114"/>
-            <a:ext cx="12192000" cy="1019175"/>
-          </a:xfrm>
-          <a:prstGeom prst="rect">
-            <a:avLst/>
-          </a:prstGeom>
-          <a:noFill/>
+            <a:off x="457200" y="6172200"/>
+            <a:ext cx="11277600" cy="457200"/>
+          </a:xfrm>
+          <a:prstGeom prst="roundRect">
+            <a:avLst>
+              <a:gd name="adj" fmla="val 16667"/>
+            </a:avLst>
+          </a:prstGeom>
+          <a:solidFill>
+            <a:srgbClr val="4CB88F"/>
+          </a:solidFill>
           <a:ln>
             <a:noFill/>
           </a:ln>
         </p:spPr>
         <p:txBody>
-          <a:bodyPr spcFirstLastPara="1" wrap="square" lIns="91425" tIns="45700" rIns="91425" bIns="45700" anchor="ctr" anchorCtr="0">
-            <a:normAutofit/>
-          </a:bodyPr>
-          <a:lstStyle>
-            <a:lvl1pPr marL="228600" indent="-228600" algn="l" defTabSz="914400" rtl="0" eaLnBrk="1" latinLnBrk="1" hangingPunct="1">
-              <a:lnSpc>
-                <a:spcPct val="90000"/>
-              </a:lnSpc>
-              <a:spcBef>
-                <a:spcPts val="1000"/>
-              </a:spcBef>
-              <a:buFont typeface="Arial" panose="020B0604020202020204" pitchFamily="34" charset="0"/>
-              <a:buChar char="•"/>
-              <a:defRPr sz="2800" kern="1200">
-                <a:solidFill>
-                  <a:schemeClr val="tx1"/>
-                </a:solidFill>
-                <a:latin typeface="+mn-lt"/>
-                <a:ea typeface="+mn-ea"/>
-                <a:cs typeface="+mn-cs"/>
-              </a:defRPr>
-            </a:lvl1pPr>
-            <a:lvl2pPr marL="685800" indent="-228600" algn="l" defTabSz="914400" rtl="0" eaLnBrk="1" latinLnBrk="1" hangingPunct="1">
-              <a:lnSpc>
-                <a:spcPct val="90000"/>
-              </a:lnSpc>
-              <a:spcBef>
-                <a:spcPts val="500"/>
-              </a:spcBef>
-              <a:buFont typeface="Arial" panose="020B0604020202020204" pitchFamily="34" charset="0"/>
-              <a:buChar char="•"/>
-              <a:defRPr sz="2400" kern="1200">
-                <a:solidFill>
-                  <a:schemeClr val="tx1"/>
-                </a:solidFill>
-                <a:latin typeface="+mn-lt"/>
-                <a:ea typeface="+mn-ea"/>
-                <a:cs typeface="+mn-cs"/>
-              </a:defRPr>
-            </a:lvl2pPr>
-            <a:lvl3pPr marL="1143000" indent="-228600" algn="l" defTabSz="914400" rtl="0" eaLnBrk="1" latinLnBrk="1" hangingPunct="1">
-              <a:lnSpc>
-                <a:spcPct val="90000"/>
-              </a:lnSpc>
-              <a:spcBef>
-                <a:spcPts val="500"/>
-              </a:spcBef>
-              <a:buFont typeface="Arial" panose="020B0604020202020204" pitchFamily="34" charset="0"/>
-              <a:buChar char="•"/>
-              <a:defRPr sz="2000" kern="1200">
-                <a:solidFill>
-                  <a:schemeClr val="tx1"/>
-                </a:solidFill>
-                <a:latin typeface="+mn-lt"/>
-                <a:ea typeface="+mn-ea"/>
-                <a:cs typeface="+mn-cs"/>
-              </a:defRPr>
-            </a:lvl3pPr>
-            <a:lvl4pPr marL="1600200" indent="-228600" algn="l" defTabSz="914400" rtl="0" eaLnBrk="1" latinLnBrk="1" hangingPunct="1">
-              <a:lnSpc>
-                <a:spcPct val="90000"/>
-              </a:lnSpc>
-              <a:spcBef>
-                <a:spcPts val="500"/>
-              </a:spcBef>
-              <a:buFont typeface="Arial" panose="020B0604020202020204" pitchFamily="34" charset="0"/>
-              <a:buChar char="•"/>
-              <a:defRPr sz="1800" kern="1200">
-                <a:solidFill>
-                  <a:schemeClr val="tx1"/>
-                </a:solidFill>
-                <a:latin typeface="+mn-lt"/>
-                <a:ea typeface="+mn-ea"/>
-                <a:cs typeface="+mn-cs"/>
-              </a:defRPr>
-            </a:lvl4pPr>
-            <a:lvl5pPr marL="2057400" indent="-228600" algn="l" defTabSz="914400" rtl="0" eaLnBrk="1" latinLnBrk="1" hangingPunct="1">
-              <a:lnSpc>
-                <a:spcPct val="90000"/>
-              </a:lnSpc>
-              <a:spcBef>
-                <a:spcPts val="500"/>
-              </a:spcBef>
-              <a:buFont typeface="Arial" panose="020B0604020202020204" pitchFamily="34" charset="0"/>
-              <a:buChar char="•"/>
-              <a:defRPr sz="1800" kern="1200">
-                <a:solidFill>
-                  <a:schemeClr val="tx1"/>
-                </a:solidFill>
-                <a:latin typeface="+mn-lt"/>
-                <a:ea typeface="+mn-ea"/>
-                <a:cs typeface="+mn-cs"/>
-              </a:defRPr>
-            </a:lvl5pPr>
-            <a:lvl6pPr marL="2514600" indent="-228600" algn="l" defTabSz="914400" rtl="0" eaLnBrk="1" latinLnBrk="1" hangingPunct="1">
-              <a:lnSpc>
-                <a:spcPct val="90000"/>
-              </a:lnSpc>
-              <a:spcBef>
-                <a:spcPts val="500"/>
-              </a:spcBef>
-              <a:buFont typeface="Arial" panose="020B0604020202020204" pitchFamily="34" charset="0"/>
-              <a:buChar char="•"/>
-              <a:defRPr sz="1800" kern="1200">
-                <a:solidFill>
-                  <a:schemeClr val="tx1"/>
-                </a:solidFill>
-                <a:latin typeface="+mn-lt"/>
-                <a:ea typeface="+mn-ea"/>
-                <a:cs typeface="+mn-cs"/>
-              </a:defRPr>
-            </a:lvl6pPr>
-            <a:lvl7pPr marL="2971800" indent="-228600" algn="l" defTabSz="914400" rtl="0" eaLnBrk="1" latinLnBrk="1" hangingPunct="1">
-              <a:lnSpc>
-                <a:spcPct val="90000"/>
-              </a:lnSpc>
-              <a:spcBef>
-                <a:spcPts val="500"/>
-              </a:spcBef>
-              <a:buFont typeface="Arial" panose="020B0604020202020204" pitchFamily="34" charset="0"/>
-              <a:buChar char="•"/>
-              <a:defRPr sz="1800" kern="1200">
-                <a:solidFill>
-                  <a:schemeClr val="tx1"/>
-                </a:solidFill>
-                <a:latin typeface="+mn-lt"/>
-                <a:ea typeface="+mn-ea"/>
-                <a:cs typeface="+mn-cs"/>
-              </a:defRPr>
-            </a:lvl7pPr>
-            <a:lvl8pPr marL="3429000" indent="-228600" algn="l" defTabSz="914400" rtl="0" eaLnBrk="1" latinLnBrk="1" hangingPunct="1">
-              <a:lnSpc>
-                <a:spcPct val="90000"/>
-              </a:lnSpc>
-              <a:spcBef>
-                <a:spcPts val="500"/>
-              </a:spcBef>
-              <a:buFont typeface="Arial" panose="020B0604020202020204" pitchFamily="34" charset="0"/>
-              <a:buChar char="•"/>
-              <a:defRPr sz="1800" kern="1200">
-                <a:solidFill>
-                  <a:schemeClr val="tx1"/>
-                </a:solidFill>
-                <a:latin typeface="+mn-lt"/>
-                <a:ea typeface="+mn-ea"/>
-                <a:cs typeface="+mn-cs"/>
-              </a:defRPr>
-            </a:lvl8pPr>
-            <a:lvl9pPr marL="3886200" indent="-228600" algn="l" defTabSz="914400" rtl="0" eaLnBrk="1" latinLnBrk="1" hangingPunct="1">
-              <a:lnSpc>
-                <a:spcPct val="90000"/>
-              </a:lnSpc>
-              <a:spcBef>
-                <a:spcPts val="500"/>
-              </a:spcBef>
-              <a:buFont typeface="Arial" panose="020B0604020202020204" pitchFamily="34" charset="0"/>
-              <a:buChar char="•"/>
-              <a:defRPr sz="1800" kern="1200">
-                <a:solidFill>
-                  <a:schemeClr val="tx1"/>
-                </a:solidFill>
-                <a:latin typeface="+mn-lt"/>
-                <a:ea typeface="+mn-ea"/>
-                <a:cs typeface="+mn-cs"/>
-              </a:defRPr>
-            </a:lvl9pPr>
-          </a:lstStyle>
-          <a:p>
-            <a:pPr marL="0" indent="0" algn="ctr">
-              <a:spcBef>
-                <a:spcPts val="0"/>
-              </a:spcBef>
-              <a:buClr>
-                <a:schemeClr val="lt1"/>
-              </a:buClr>
-              <a:buSzPts val="4000"/>
-              <a:buNone/>
-            </a:pPr>
-            <a:r>
-              <a:rPr lang="en-US" altLang="ko-KR" sz="6000" dirty="0">
-                <a:solidFill>
-                  <a:schemeClr val="bg1"/>
-                </a:solidFill>
-                <a:latin typeface="프리젠테이션 7 Bold" pitchFamily="2" charset="-127"/>
-                <a:ea typeface="프리젠테이션 7 Bold" pitchFamily="2" charset="-127"/>
-              </a:rPr>
-              <a:t>Thank You</a:t>
-            </a:r>
-          </a:p>
-        </p:txBody>
-      </p:sp>
-      <p:pic>
-        <p:nvPicPr>
-          <p:cNvPr id="28" name="그림 27"/>
-          <p:cNvPicPr>
-            <a:picLocks noChangeAspect="1"/>
-          </p:cNvPicPr>
-          <p:nvPr/>
-        </p:nvPicPr>
-        <p:blipFill>
-          <a:blip r:embed="rId2" cstate="print">
-            <a:extLst>
-              <a:ext uri="{28A0092B-C50C-407E-A947-70E740481C1C}">
-                <a14:useLocalDpi xmlns:a14="http://schemas.microsoft.com/office/drawing/2010/main" val="0"/>
-              </a:ext>
-            </a:extLst>
-          </a:blip>
-          <a:stretch>
-            <a:fillRect/>
-          </a:stretch>
-        </p:blipFill>
-        <p:spPr>
-          <a:xfrm>
-            <a:off x="5402036" y="378400"/>
-            <a:ext cx="1329872" cy="330546"/>
-          </a:xfrm>
-          <a:prstGeom prst="rect">
-            <a:avLst/>
-          </a:prstGeom>
-        </p:spPr>
-      </p:pic>
-      <p:sp>
-        <p:nvSpPr>
-          <p:cNvPr id="35" name="TextBox 34"/>
+          <a:bodyPr anchor="ctr"/>
+          <a:lstStyle/>
+          <a:p>
+            <a:pPr algn="l"/>
+            <a:r>
+              <a:rPr lang="ko-KR" sz="1200" b="1">
+                <a:solidFill>
+                  <a:srgbClr val="FFFFFF"/>
+                </a:solidFill>
+                <a:latin typeface="프리젠테이션 7"/>
+              </a:rPr>
+              <a:t>✅ Verdict: 중형(Medium) 추천 — 월 ₩150만으로 프로덕션급 10K TPS, 3-AZ 가용성 확보. 3년 TCO ₩5,400만 (대형 대비 70% 절감)</a:t>
+            </a:r>
+          </a:p>
+        </p:txBody>
+      </p:sp>
+      <p:sp>
+        <p:nvSpPr>
+          <p:cNvPr id="230" name="셀_5_3"/>
+          <p:cNvSpPr>
+            <a:spLocks noGrp="1"/>
+          </p:cNvSpPr>
+          <p:nvPr/>
+        </p:nvSpPr>
+        <p:spPr>
+          <a:xfrm>
+            <a:off x="9438640" y="5558244"/>
+            <a:ext cx="2296160" cy="522514"/>
+          </a:xfrm>
+          <a:prstGeom prst="rect">
+            <a:avLst/>
+          </a:prstGeom>
+          <a:solidFill>
+            <a:srgbClr val="FFFFFF"/>
+          </a:solidFill>
+          <a:ln w="6350">
+            <a:solidFill>
+              <a:srgbClr val="DCDCDC"/>
+            </a:solidFill>
+          </a:ln>
+        </p:spPr>
+        <p:txBody>
+          <a:bodyPr anchor="ctr"/>
+          <a:lstStyle/>
+          <a:p>
+            <a:pPr algn="ctr"/>
+            <a:r>
+              <a:rPr lang="ko-KR" sz="1300">
+                <a:solidFill>
+                  <a:srgbClr val="212121"/>
+                </a:solidFill>
+                <a:latin typeface="프리젠테이션 7"/>
+              </a:rPr>
+              <a:t>대규모 스트리밍</a:t>
+            </a:r>
+          </a:p>
+        </p:txBody>
+      </p:sp>
+      <p:sp>
+        <p:nvSpPr>
+          <p:cNvPr id="229" name="셀_5_2"/>
+          <p:cNvSpPr>
+            <a:spLocks noGrp="1"/>
+          </p:cNvSpPr>
+          <p:nvPr/>
+        </p:nvSpPr>
+        <p:spPr>
+          <a:xfrm>
+            <a:off x="7142480" y="5558244"/>
+            <a:ext cx="2296160" cy="522514"/>
+          </a:xfrm>
+          <a:prstGeom prst="rect">
+            <a:avLst/>
+          </a:prstGeom>
+          <a:solidFill>
+            <a:srgbClr val="FFFFFF"/>
+          </a:solidFill>
+          <a:ln w="6350">
+            <a:solidFill>
+              <a:srgbClr val="DCDCDC"/>
+            </a:solidFill>
+          </a:ln>
+        </p:spPr>
+        <p:txBody>
+          <a:bodyPr anchor="ctr"/>
+          <a:lstStyle/>
+          <a:p>
+            <a:pPr algn="ctr"/>
+            <a:r>
+              <a:rPr lang="ko-KR" sz="1300" b="1">
+                <a:solidFill>
+                  <a:srgbClr val="0043DA"/>
+                </a:solidFill>
+                <a:latin typeface="프리젠테이션 7"/>
+              </a:rPr>
+              <a:t>프로덕션</a:t>
+            </a:r>
+          </a:p>
+        </p:txBody>
+      </p:sp>
+      <p:sp>
+        <p:nvSpPr>
+          <p:cNvPr id="228" name="셀_5_1"/>
+          <p:cNvSpPr>
+            <a:spLocks noGrp="1"/>
+          </p:cNvSpPr>
+          <p:nvPr/>
+        </p:nvSpPr>
+        <p:spPr>
+          <a:xfrm>
+            <a:off x="4846320" y="5558244"/>
+            <a:ext cx="2296160" cy="522514"/>
+          </a:xfrm>
+          <a:prstGeom prst="rect">
+            <a:avLst/>
+          </a:prstGeom>
+          <a:solidFill>
+            <a:srgbClr val="FFFFFF"/>
+          </a:solidFill>
+          <a:ln w="6350">
+            <a:solidFill>
+              <a:srgbClr val="DCDCDC"/>
+            </a:solidFill>
+          </a:ln>
+        </p:spPr>
+        <p:txBody>
+          <a:bodyPr anchor="ctr"/>
+          <a:lstStyle/>
+          <a:p>
+            <a:pPr algn="ctr"/>
+            <a:r>
+              <a:rPr lang="ko-KR" sz="1300">
+                <a:solidFill>
+                  <a:srgbClr val="212121"/>
+                </a:solidFill>
+                <a:latin typeface="프리젠테이션 7"/>
+              </a:rPr>
+              <a:t>개발/테스트</a:t>
+            </a:r>
+          </a:p>
+        </p:txBody>
+      </p:sp>
+      <p:sp>
+        <p:nvSpPr>
+          <p:cNvPr id="227" name="셀_5_0"/>
+          <p:cNvSpPr>
+            <a:spLocks noGrp="1"/>
+          </p:cNvSpPr>
+          <p:nvPr/>
+        </p:nvSpPr>
+        <p:spPr>
+          <a:xfrm>
+            <a:off x="2834640" y="5558244"/>
+            <a:ext cx="2011680" cy="522514"/>
+          </a:xfrm>
+          <a:prstGeom prst="rect">
+            <a:avLst/>
+          </a:prstGeom>
+          <a:solidFill>
+            <a:srgbClr val="FFFFFF"/>
+          </a:solidFill>
+          <a:ln w="6350">
+            <a:solidFill>
+              <a:srgbClr val="DCDCDC"/>
+            </a:solidFill>
+          </a:ln>
+        </p:spPr>
+        <p:txBody>
+          <a:bodyPr anchor="ctr"/>
+          <a:lstStyle/>
+          <a:p>
+            <a:pPr algn="ctr"/>
+            <a:r>
+              <a:rPr lang="ko-KR" sz="1300">
+                <a:solidFill>
+                  <a:srgbClr val="212121"/>
+                </a:solidFill>
+                <a:latin typeface="프리젠테이션 7"/>
+              </a:rPr>
+              <a:t>권장 용도</a:t>
+            </a:r>
+          </a:p>
+        </p:txBody>
+      </p:sp>
+      <p:sp>
+        <p:nvSpPr>
+          <p:cNvPr id="226" name="셀_4_3"/>
+          <p:cNvSpPr>
+            <a:spLocks noGrp="1"/>
+          </p:cNvSpPr>
+          <p:nvPr/>
+        </p:nvSpPr>
+        <p:spPr>
+          <a:xfrm>
+            <a:off x="9438640" y="5035730"/>
+            <a:ext cx="2296160" cy="522514"/>
+          </a:xfrm>
+          <a:prstGeom prst="rect">
+            <a:avLst/>
+          </a:prstGeom>
+          <a:solidFill>
+            <a:srgbClr val="F0F4FF"/>
+          </a:solidFill>
+          <a:ln w="6350">
+            <a:solidFill>
+              <a:srgbClr val="DCDCDC"/>
+            </a:solidFill>
+          </a:ln>
+        </p:spPr>
+        <p:txBody>
+          <a:bodyPr anchor="ctr"/>
+          <a:lstStyle/>
+          <a:p>
+            <a:pPr algn="ctr"/>
+            <a:r>
+              <a:rPr lang="ko-KR" sz="1300">
+                <a:solidFill>
+                  <a:srgbClr val="212121"/>
+                </a:solidFill>
+                <a:latin typeface="프리젠테이션 7"/>
+              </a:rPr>
+              <a:t>50K msg/s</a:t>
+            </a:r>
+          </a:p>
+        </p:txBody>
+      </p:sp>
+      <p:sp>
+        <p:nvSpPr>
+          <p:cNvPr id="225" name="셀_4_2"/>
+          <p:cNvSpPr>
+            <a:spLocks noGrp="1"/>
+          </p:cNvSpPr>
+          <p:nvPr/>
+        </p:nvSpPr>
+        <p:spPr>
+          <a:xfrm>
+            <a:off x="7142480" y="5035730"/>
+            <a:ext cx="2296160" cy="522514"/>
+          </a:xfrm>
+          <a:prstGeom prst="rect">
+            <a:avLst/>
+          </a:prstGeom>
+          <a:solidFill>
+            <a:srgbClr val="F0F4FF"/>
+          </a:solidFill>
+          <a:ln w="6350">
+            <a:solidFill>
+              <a:srgbClr val="DCDCDC"/>
+            </a:solidFill>
+          </a:ln>
+        </p:spPr>
+        <p:txBody>
+          <a:bodyPr anchor="ctr"/>
+          <a:lstStyle/>
+          <a:p>
+            <a:pPr algn="ctr"/>
+            <a:r>
+              <a:rPr lang="ko-KR" sz="1300" b="1">
+                <a:solidFill>
+                  <a:srgbClr val="0043DA"/>
+                </a:solidFill>
+                <a:latin typeface="프리젠테이션 7"/>
+              </a:rPr>
+              <a:t>10K msg/s</a:t>
+            </a:r>
+          </a:p>
+        </p:txBody>
+      </p:sp>
+      <p:sp>
+        <p:nvSpPr>
+          <p:cNvPr id="224" name="셀_4_1"/>
+          <p:cNvSpPr>
+            <a:spLocks noGrp="1"/>
+          </p:cNvSpPr>
+          <p:nvPr/>
+        </p:nvSpPr>
+        <p:spPr>
+          <a:xfrm>
+            <a:off x="4846320" y="5035730"/>
+            <a:ext cx="2296160" cy="522514"/>
+          </a:xfrm>
+          <a:prstGeom prst="rect">
+            <a:avLst/>
+          </a:prstGeom>
+          <a:solidFill>
+            <a:srgbClr val="F0F4FF"/>
+          </a:solidFill>
+          <a:ln w="6350">
+            <a:solidFill>
+              <a:srgbClr val="DCDCDC"/>
+            </a:solidFill>
+          </a:ln>
+        </p:spPr>
+        <p:txBody>
+          <a:bodyPr anchor="ctr"/>
+          <a:lstStyle/>
+          <a:p>
+            <a:pPr algn="ctr"/>
+            <a:r>
+              <a:rPr lang="ko-KR" sz="1300">
+                <a:solidFill>
+                  <a:srgbClr val="212121"/>
+                </a:solidFill>
+                <a:latin typeface="프리젠테이션 7"/>
+              </a:rPr>
+              <a:t>1K msg/s</a:t>
+            </a:r>
+          </a:p>
+        </p:txBody>
+      </p:sp>
+      <p:sp>
+        <p:nvSpPr>
+          <p:cNvPr id="223" name="셀_4_0"/>
+          <p:cNvSpPr>
+            <a:spLocks noGrp="1"/>
+          </p:cNvSpPr>
+          <p:nvPr/>
+        </p:nvSpPr>
+        <p:spPr>
+          <a:xfrm>
+            <a:off x="2834640" y="5035730"/>
+            <a:ext cx="2011680" cy="522514"/>
+          </a:xfrm>
+          <a:prstGeom prst="rect">
+            <a:avLst/>
+          </a:prstGeom>
+          <a:solidFill>
+            <a:srgbClr val="F0F4FF"/>
+          </a:solidFill>
+          <a:ln w="6350">
+            <a:solidFill>
+              <a:srgbClr val="DCDCDC"/>
+            </a:solidFill>
+          </a:ln>
+        </p:spPr>
+        <p:txBody>
+          <a:bodyPr anchor="ctr"/>
+          <a:lstStyle/>
+          <a:p>
+            <a:pPr algn="ctr"/>
+            <a:r>
+              <a:rPr lang="ko-KR" sz="1300">
+                <a:solidFill>
+                  <a:srgbClr val="212121"/>
+                </a:solidFill>
+                <a:latin typeface="프리젠테이션 7"/>
+              </a:rPr>
+              <a:t>처리량 (TPS)</a:t>
+            </a:r>
+          </a:p>
+        </p:txBody>
+      </p:sp>
+      <p:sp>
+        <p:nvSpPr>
+          <p:cNvPr id="222" name="셀_3_3"/>
+          <p:cNvSpPr>
+            <a:spLocks noGrp="1"/>
+          </p:cNvSpPr>
+          <p:nvPr/>
+        </p:nvSpPr>
+        <p:spPr>
+          <a:xfrm>
+            <a:off x="9438640" y="4513216"/>
+            <a:ext cx="2296160" cy="522514"/>
+          </a:xfrm>
+          <a:prstGeom prst="rect">
+            <a:avLst/>
+          </a:prstGeom>
+          <a:solidFill>
+            <a:srgbClr val="FFFFFF"/>
+          </a:solidFill>
+          <a:ln w="6350">
+            <a:solidFill>
+              <a:srgbClr val="DCDCDC"/>
+            </a:solidFill>
+          </a:ln>
+        </p:spPr>
+        <p:txBody>
+          <a:bodyPr anchor="ctr"/>
+          <a:lstStyle/>
+          <a:p>
+            <a:pPr algn="ctr"/>
+            <a:r>
+              <a:rPr lang="ko-KR" sz="1300">
+                <a:solidFill>
+                  <a:srgbClr val="212121"/>
+                </a:solidFill>
+                <a:latin typeface="프리젠테이션 7"/>
+              </a:rPr>
+              <a:t>₩600만</a:t>
+            </a:r>
+          </a:p>
+        </p:txBody>
+      </p:sp>
+      <p:sp>
+        <p:nvSpPr>
+          <p:cNvPr id="221" name="셀_3_2"/>
+          <p:cNvSpPr>
+            <a:spLocks noGrp="1"/>
+          </p:cNvSpPr>
+          <p:nvPr/>
+        </p:nvSpPr>
+        <p:spPr>
+          <a:xfrm>
+            <a:off x="7142480" y="4513216"/>
+            <a:ext cx="2296160" cy="522514"/>
+          </a:xfrm>
+          <a:prstGeom prst="rect">
+            <a:avLst/>
+          </a:prstGeom>
+          <a:solidFill>
+            <a:srgbClr val="FFFFFF"/>
+          </a:solidFill>
+          <a:ln w="6350">
+            <a:solidFill>
+              <a:srgbClr val="DCDCDC"/>
+            </a:solidFill>
+          </a:ln>
+        </p:spPr>
+        <p:txBody>
+          <a:bodyPr anchor="ctr"/>
+          <a:lstStyle/>
+          <a:p>
+            <a:pPr algn="ctr"/>
+            <a:r>
+              <a:rPr lang="ko-KR" sz="1300" b="1">
+                <a:solidFill>
+                  <a:srgbClr val="0043DA"/>
+                </a:solidFill>
+                <a:latin typeface="프리젠테이션 7"/>
+              </a:rPr>
+              <a:t>₩150만</a:t>
+            </a:r>
+          </a:p>
+        </p:txBody>
+      </p:sp>
+      <p:sp>
+        <p:nvSpPr>
+          <p:cNvPr id="220" name="셀_3_1"/>
+          <p:cNvSpPr>
+            <a:spLocks noGrp="1"/>
+          </p:cNvSpPr>
+          <p:nvPr/>
+        </p:nvSpPr>
+        <p:spPr>
+          <a:xfrm>
+            <a:off x="4846320" y="4513216"/>
+            <a:ext cx="2296160" cy="522514"/>
+          </a:xfrm>
+          <a:prstGeom prst="rect">
+            <a:avLst/>
+          </a:prstGeom>
+          <a:solidFill>
+            <a:srgbClr val="FFFFFF"/>
+          </a:solidFill>
+          <a:ln w="6350">
+            <a:solidFill>
+              <a:srgbClr val="DCDCDC"/>
+            </a:solidFill>
+          </a:ln>
+        </p:spPr>
+        <p:txBody>
+          <a:bodyPr anchor="ctr"/>
+          <a:lstStyle/>
+          <a:p>
+            <a:pPr algn="ctr"/>
+            <a:r>
+              <a:rPr lang="ko-KR" sz="1300">
+                <a:solidFill>
+                  <a:srgbClr val="212121"/>
+                </a:solidFill>
+                <a:latin typeface="프리젠테이션 7"/>
+              </a:rPr>
+              <a:t>₩50만</a:t>
+            </a:r>
+          </a:p>
+        </p:txBody>
+      </p:sp>
+      <p:sp>
+        <p:nvSpPr>
+          <p:cNvPr id="219" name="셀_3_0"/>
+          <p:cNvSpPr>
+            <a:spLocks noGrp="1"/>
+          </p:cNvSpPr>
+          <p:nvPr/>
+        </p:nvSpPr>
+        <p:spPr>
+          <a:xfrm>
+            <a:off x="2834640" y="4513216"/>
+            <a:ext cx="2011680" cy="522514"/>
+          </a:xfrm>
+          <a:prstGeom prst="rect">
+            <a:avLst/>
+          </a:prstGeom>
+          <a:solidFill>
+            <a:srgbClr val="FFFFFF"/>
+          </a:solidFill>
+          <a:ln w="6350">
+            <a:solidFill>
+              <a:srgbClr val="DCDCDC"/>
+            </a:solidFill>
+          </a:ln>
+        </p:spPr>
+        <p:txBody>
+          <a:bodyPr anchor="ctr"/>
+          <a:lstStyle/>
+          <a:p>
+            <a:pPr algn="ctr"/>
+            <a:r>
+              <a:rPr lang="ko-KR" sz="1300">
+                <a:solidFill>
+                  <a:srgbClr val="212121"/>
+                </a:solidFill>
+                <a:latin typeface="프리젠테이션 7"/>
+              </a:rPr>
+              <a:t>월 예상 비용</a:t>
+            </a:r>
+          </a:p>
+        </p:txBody>
+      </p:sp>
+      <p:sp>
+        <p:nvSpPr>
+          <p:cNvPr id="218" name="셀_2_3"/>
+          <p:cNvSpPr>
+            <a:spLocks noGrp="1"/>
+          </p:cNvSpPr>
+          <p:nvPr/>
+        </p:nvSpPr>
+        <p:spPr>
+          <a:xfrm>
+            <a:off x="9438640" y="3990702"/>
+            <a:ext cx="2296160" cy="522514"/>
+          </a:xfrm>
+          <a:prstGeom prst="rect">
+            <a:avLst/>
+          </a:prstGeom>
+          <a:solidFill>
+            <a:srgbClr val="F0F4FF"/>
+          </a:solidFill>
+          <a:ln w="6350">
+            <a:solidFill>
+              <a:srgbClr val="DCDCDC"/>
+            </a:solidFill>
+          </a:ln>
+        </p:spPr>
+        <p:txBody>
+          <a:bodyPr anchor="ctr"/>
+          <a:lstStyle/>
+          <a:p>
+            <a:pPr algn="ctr"/>
+            <a:r>
+              <a:rPr lang="ko-KR" sz="1300">
+                <a:solidFill>
+                  <a:srgbClr val="212121"/>
+                </a:solidFill>
+                <a:latin typeface="프리젠테이션 7"/>
+              </a:rPr>
+              <a:t>2 TB</a:t>
+            </a:r>
+          </a:p>
+        </p:txBody>
+      </p:sp>
+      <p:sp>
+        <p:nvSpPr>
+          <p:cNvPr id="217" name="셀_2_2"/>
+          <p:cNvSpPr>
+            <a:spLocks noGrp="1"/>
+          </p:cNvSpPr>
+          <p:nvPr/>
+        </p:nvSpPr>
+        <p:spPr>
+          <a:xfrm>
+            <a:off x="7142480" y="3990702"/>
+            <a:ext cx="2296160" cy="522514"/>
+          </a:xfrm>
+          <a:prstGeom prst="rect">
+            <a:avLst/>
+          </a:prstGeom>
+          <a:solidFill>
+            <a:srgbClr val="F0F4FF"/>
+          </a:solidFill>
+          <a:ln w="6350">
+            <a:solidFill>
+              <a:srgbClr val="DCDCDC"/>
+            </a:solidFill>
+          </a:ln>
+        </p:spPr>
+        <p:txBody>
+          <a:bodyPr anchor="ctr"/>
+          <a:lstStyle/>
+          <a:p>
+            <a:pPr algn="ctr"/>
+            <a:r>
+              <a:rPr lang="ko-KR" sz="1300" b="1">
+                <a:solidFill>
+                  <a:srgbClr val="0043DA"/>
+                </a:solidFill>
+                <a:latin typeface="프리젠테이션 7"/>
+              </a:rPr>
+              <a:t>500 GB</a:t>
+            </a:r>
+          </a:p>
+        </p:txBody>
+      </p:sp>
+      <p:sp>
+        <p:nvSpPr>
+          <p:cNvPr id="216" name="셀_2_1"/>
+          <p:cNvSpPr>
+            <a:spLocks noGrp="1"/>
+          </p:cNvSpPr>
+          <p:nvPr/>
+        </p:nvSpPr>
+        <p:spPr>
+          <a:xfrm>
+            <a:off x="4846320" y="3990702"/>
+            <a:ext cx="2296160" cy="522514"/>
+          </a:xfrm>
+          <a:prstGeom prst="rect">
+            <a:avLst/>
+          </a:prstGeom>
+          <a:solidFill>
+            <a:srgbClr val="F0F4FF"/>
+          </a:solidFill>
+          <a:ln w="6350">
+            <a:solidFill>
+              <a:srgbClr val="DCDCDC"/>
+            </a:solidFill>
+          </a:ln>
+        </p:spPr>
+        <p:txBody>
+          <a:bodyPr anchor="ctr"/>
+          <a:lstStyle/>
+          <a:p>
+            <a:pPr algn="ctr"/>
+            <a:r>
+              <a:rPr lang="ko-KR" sz="1300">
+                <a:solidFill>
+                  <a:srgbClr val="212121"/>
+                </a:solidFill>
+                <a:latin typeface="프리젠테이션 7"/>
+              </a:rPr>
+              <a:t>100 GB</a:t>
+            </a:r>
+          </a:p>
+        </p:txBody>
+      </p:sp>
+      <p:sp>
+        <p:nvSpPr>
+          <p:cNvPr id="215" name="셀_2_0"/>
+          <p:cNvSpPr>
+            <a:spLocks noGrp="1"/>
+          </p:cNvSpPr>
+          <p:nvPr/>
+        </p:nvSpPr>
+        <p:spPr>
+          <a:xfrm>
+            <a:off x="2834640" y="3990702"/>
+            <a:ext cx="2011680" cy="522514"/>
+          </a:xfrm>
+          <a:prstGeom prst="rect">
+            <a:avLst/>
+          </a:prstGeom>
+          <a:solidFill>
+            <a:srgbClr val="F0F4FF"/>
+          </a:solidFill>
+          <a:ln w="6350">
+            <a:solidFill>
+              <a:srgbClr val="DCDCDC"/>
+            </a:solidFill>
+          </a:ln>
+        </p:spPr>
+        <p:txBody>
+          <a:bodyPr anchor="ctr"/>
+          <a:lstStyle/>
+          <a:p>
+            <a:pPr algn="ctr"/>
+            <a:r>
+              <a:rPr lang="ko-KR" sz="1300">
+                <a:solidFill>
+                  <a:srgbClr val="212121"/>
+                </a:solidFill>
+                <a:latin typeface="프리젠테이션 7"/>
+              </a:rPr>
+              <a:t>EBS 스토리지</a:t>
+            </a:r>
+          </a:p>
+        </p:txBody>
+      </p:sp>
+      <p:sp>
+        <p:nvSpPr>
+          <p:cNvPr id="214" name="셀_1_3"/>
+          <p:cNvSpPr>
+            <a:spLocks noGrp="1"/>
+          </p:cNvSpPr>
+          <p:nvPr/>
+        </p:nvSpPr>
+        <p:spPr>
+          <a:xfrm>
+            <a:off x="9438640" y="3468188"/>
+            <a:ext cx="2296160" cy="522514"/>
+          </a:xfrm>
+          <a:prstGeom prst="rect">
+            <a:avLst/>
+          </a:prstGeom>
+          <a:solidFill>
+            <a:srgbClr val="FFFFFF"/>
+          </a:solidFill>
+          <a:ln w="6350">
+            <a:solidFill>
+              <a:srgbClr val="DCDCDC"/>
+            </a:solidFill>
+          </a:ln>
+        </p:spPr>
+        <p:txBody>
+          <a:bodyPr anchor="ctr"/>
+          <a:lstStyle/>
+          <a:p>
+            <a:pPr algn="ctr"/>
+            <a:r>
+              <a:rPr lang="ko-KR" sz="1300">
+                <a:solidFill>
+                  <a:srgbClr val="212121"/>
+                </a:solidFill>
+                <a:latin typeface="프리젠테이션 7"/>
+              </a:rPr>
+              <a:t>6개</a:t>
+            </a:r>
+          </a:p>
+        </p:txBody>
+      </p:sp>
+      <p:sp>
+        <p:nvSpPr>
+          <p:cNvPr id="213" name="셀_1_2"/>
+          <p:cNvSpPr>
+            <a:spLocks noGrp="1"/>
+          </p:cNvSpPr>
+          <p:nvPr/>
+        </p:nvSpPr>
+        <p:spPr>
+          <a:xfrm>
+            <a:off x="7142480" y="3468188"/>
+            <a:ext cx="2296160" cy="522514"/>
+          </a:xfrm>
+          <a:prstGeom prst="rect">
+            <a:avLst/>
+          </a:prstGeom>
+          <a:solidFill>
+            <a:srgbClr val="FFFFFF"/>
+          </a:solidFill>
+          <a:ln w="6350">
+            <a:solidFill>
+              <a:srgbClr val="DCDCDC"/>
+            </a:solidFill>
+          </a:ln>
+        </p:spPr>
+        <p:txBody>
+          <a:bodyPr anchor="ctr"/>
+          <a:lstStyle/>
+          <a:p>
+            <a:pPr algn="ctr"/>
+            <a:r>
+              <a:rPr lang="ko-KR" sz="1300" b="1">
+                <a:solidFill>
+                  <a:srgbClr val="0043DA"/>
+                </a:solidFill>
+                <a:latin typeface="프리젠테이션 7"/>
+              </a:rPr>
+              <a:t>3개</a:t>
+            </a:r>
+          </a:p>
+        </p:txBody>
+      </p:sp>
+      <p:sp>
+        <p:nvSpPr>
+          <p:cNvPr id="212" name="셀_1_1"/>
+          <p:cNvSpPr>
+            <a:spLocks noGrp="1"/>
+          </p:cNvSpPr>
+          <p:nvPr/>
+        </p:nvSpPr>
+        <p:spPr>
+          <a:xfrm>
+            <a:off x="4846320" y="3468188"/>
+            <a:ext cx="2296160" cy="522514"/>
+          </a:xfrm>
+          <a:prstGeom prst="rect">
+            <a:avLst/>
+          </a:prstGeom>
+          <a:solidFill>
+            <a:srgbClr val="FFFFFF"/>
+          </a:solidFill>
+          <a:ln w="6350">
+            <a:solidFill>
+              <a:srgbClr val="DCDCDC"/>
+            </a:solidFill>
+          </a:ln>
+        </p:spPr>
+        <p:txBody>
+          <a:bodyPr anchor="ctr"/>
+          <a:lstStyle/>
+          <a:p>
+            <a:pPr algn="ctr"/>
+            <a:r>
+              <a:rPr lang="ko-KR" sz="1300">
+                <a:solidFill>
+                  <a:srgbClr val="212121"/>
+                </a:solidFill>
+                <a:latin typeface="프리젠테이션 7"/>
+              </a:rPr>
+              <a:t>2개</a:t>
+            </a:r>
+          </a:p>
+        </p:txBody>
+      </p:sp>
+      <p:sp>
+        <p:nvSpPr>
+          <p:cNvPr id="211" name="셀_1_0"/>
+          <p:cNvSpPr>
+            <a:spLocks noGrp="1"/>
+          </p:cNvSpPr>
+          <p:nvPr/>
+        </p:nvSpPr>
+        <p:spPr>
+          <a:xfrm>
+            <a:off x="2834640" y="3468188"/>
+            <a:ext cx="2011680" cy="522514"/>
+          </a:xfrm>
+          <a:prstGeom prst="rect">
+            <a:avLst/>
+          </a:prstGeom>
+          <a:solidFill>
+            <a:srgbClr val="FFFFFF"/>
+          </a:solidFill>
+          <a:ln w="6350">
+            <a:solidFill>
+              <a:srgbClr val="DCDCDC"/>
+            </a:solidFill>
+          </a:ln>
+        </p:spPr>
+        <p:txBody>
+          <a:bodyPr anchor="ctr"/>
+          <a:lstStyle/>
+          <a:p>
+            <a:pPr algn="ctr"/>
+            <a:r>
+              <a:rPr lang="ko-KR" sz="1300">
+                <a:solidFill>
+                  <a:srgbClr val="212121"/>
+                </a:solidFill>
+                <a:latin typeface="프리젠테이션 7"/>
+              </a:rPr>
+              <a:t>브로커 수</a:t>
+            </a:r>
+          </a:p>
+        </p:txBody>
+      </p:sp>
+      <p:sp>
+        <p:nvSpPr>
+          <p:cNvPr id="210" name="셀_0_3"/>
+          <p:cNvSpPr>
+            <a:spLocks noGrp="1"/>
+          </p:cNvSpPr>
+          <p:nvPr/>
+        </p:nvSpPr>
+        <p:spPr>
+          <a:xfrm>
+            <a:off x="9438640" y="2945674"/>
+            <a:ext cx="2296160" cy="522514"/>
+          </a:xfrm>
+          <a:prstGeom prst="rect">
+            <a:avLst/>
+          </a:prstGeom>
+          <a:solidFill>
+            <a:srgbClr val="F0F4FF"/>
+          </a:solidFill>
+          <a:ln w="6350">
+            <a:solidFill>
+              <a:srgbClr val="DCDCDC"/>
+            </a:solidFill>
+          </a:ln>
+        </p:spPr>
+        <p:txBody>
+          <a:bodyPr anchor="ctr"/>
+          <a:lstStyle/>
+          <a:p>
+            <a:pPr algn="ctr"/>
+            <a:r>
+              <a:rPr lang="ko-KR" sz="1300">
+                <a:solidFill>
+                  <a:srgbClr val="212121"/>
+                </a:solidFill>
+                <a:latin typeface="프리젠테이션 7"/>
+              </a:rPr>
+              <a:t>kafka.m5.4xlarge</a:t>
+            </a:r>
+          </a:p>
+        </p:txBody>
+      </p:sp>
+      <p:sp>
+        <p:nvSpPr>
+          <p:cNvPr id="209" name="셀_0_2"/>
+          <p:cNvSpPr>
+            <a:spLocks noGrp="1"/>
+          </p:cNvSpPr>
+          <p:nvPr/>
+        </p:nvSpPr>
+        <p:spPr>
+          <a:xfrm>
+            <a:off x="7142480" y="2945674"/>
+            <a:ext cx="2296160" cy="522514"/>
+          </a:xfrm>
+          <a:prstGeom prst="rect">
+            <a:avLst/>
+          </a:prstGeom>
+          <a:solidFill>
+            <a:srgbClr val="F0F4FF"/>
+          </a:solidFill>
+          <a:ln w="6350">
+            <a:solidFill>
+              <a:srgbClr val="DCDCDC"/>
+            </a:solidFill>
+          </a:ln>
+        </p:spPr>
+        <p:txBody>
+          <a:bodyPr anchor="ctr"/>
+          <a:lstStyle/>
+          <a:p>
+            <a:pPr algn="ctr"/>
+            <a:r>
+              <a:rPr lang="ko-KR" sz="1300" b="1">
+                <a:solidFill>
+                  <a:srgbClr val="0043DA"/>
+                </a:solidFill>
+                <a:latin typeface="프리젠테이션 7"/>
+              </a:rPr>
+              <a:t>kafka.m5.large</a:t>
+            </a:r>
+          </a:p>
+        </p:txBody>
+      </p:sp>
+      <p:sp>
+        <p:nvSpPr>
+          <p:cNvPr id="208" name="셀_0_1"/>
+          <p:cNvSpPr>
+            <a:spLocks noGrp="1"/>
+          </p:cNvSpPr>
+          <p:nvPr/>
+        </p:nvSpPr>
+        <p:spPr>
+          <a:xfrm>
+            <a:off x="4846320" y="2945674"/>
+            <a:ext cx="2296160" cy="522514"/>
+          </a:xfrm>
+          <a:prstGeom prst="rect">
+            <a:avLst/>
+          </a:prstGeom>
+          <a:solidFill>
+            <a:srgbClr val="F0F4FF"/>
+          </a:solidFill>
+          <a:ln w="6350">
+            <a:solidFill>
+              <a:srgbClr val="DCDCDC"/>
+            </a:solidFill>
+          </a:ln>
+        </p:spPr>
+        <p:txBody>
+          <a:bodyPr anchor="ctr"/>
+          <a:lstStyle/>
+          <a:p>
+            <a:pPr algn="ctr"/>
+            <a:r>
+              <a:rPr lang="ko-KR" sz="1300">
+                <a:solidFill>
+                  <a:srgbClr val="212121"/>
+                </a:solidFill>
+                <a:latin typeface="프리젠테이션 7"/>
+              </a:rPr>
+              <a:t>kafka.t3.small</a:t>
+            </a:r>
+          </a:p>
+        </p:txBody>
+      </p:sp>
+      <p:sp>
+        <p:nvSpPr>
+          <p:cNvPr id="207" name="셀_0_0"/>
+          <p:cNvSpPr>
+            <a:spLocks noGrp="1"/>
+          </p:cNvSpPr>
+          <p:nvPr/>
+        </p:nvSpPr>
+        <p:spPr>
+          <a:xfrm>
+            <a:off x="2834640" y="2945674"/>
+            <a:ext cx="2011680" cy="522514"/>
+          </a:xfrm>
+          <a:prstGeom prst="rect">
+            <a:avLst/>
+          </a:prstGeom>
+          <a:solidFill>
+            <a:srgbClr val="F0F4FF"/>
+          </a:solidFill>
+          <a:ln w="6350">
+            <a:solidFill>
+              <a:srgbClr val="DCDCDC"/>
+            </a:solidFill>
+          </a:ln>
+        </p:spPr>
+        <p:txBody>
+          <a:bodyPr anchor="ctr"/>
+          <a:lstStyle/>
+          <a:p>
+            <a:pPr algn="ctr"/>
+            <a:r>
+              <a:rPr lang="ko-KR" sz="1300">
+                <a:solidFill>
+                  <a:srgbClr val="212121"/>
+                </a:solidFill>
+                <a:latin typeface="프리젠테이션 7"/>
+              </a:rPr>
+              <a:t>인스턴스 타입</a:t>
+            </a:r>
+          </a:p>
+        </p:txBody>
+      </p:sp>
+      <p:sp>
+        <p:nvSpPr>
+          <p:cNvPr id="206" name="헤더_3"/>
+          <p:cNvSpPr>
+            <a:spLocks noGrp="1"/>
+          </p:cNvSpPr>
+          <p:nvPr/>
+        </p:nvSpPr>
+        <p:spPr>
+          <a:xfrm>
+            <a:off x="9438640" y="2423160"/>
+            <a:ext cx="2296160" cy="522514"/>
+          </a:xfrm>
+          <a:prstGeom prst="rect">
+            <a:avLst/>
+          </a:prstGeom>
+          <a:solidFill>
+            <a:srgbClr val="0043DA"/>
+          </a:solidFill>
+          <a:ln w="6350">
+            <a:solidFill>
+              <a:srgbClr val="DCDCDC"/>
+            </a:solidFill>
+          </a:ln>
+        </p:spPr>
+        <p:txBody>
+          <a:bodyPr anchor="ctr"/>
+          <a:lstStyle/>
+          <a:p>
+            <a:pPr algn="ctr"/>
+            <a:r>
+              <a:rPr lang="ko-KR" sz="1400" b="1">
+                <a:solidFill>
+                  <a:srgbClr val="FFFFFF"/>
+                </a:solidFill>
+                <a:latin typeface="프리젠테이션 7"/>
+              </a:rPr>
+              <a:t>대형 (Large)</a:t>
+            </a:r>
+          </a:p>
+        </p:txBody>
+      </p:sp>
+      <p:sp>
+        <p:nvSpPr>
+          <p:cNvPr id="205" name="헤더_2"/>
+          <p:cNvSpPr>
+            <a:spLocks noGrp="1"/>
+          </p:cNvSpPr>
+          <p:nvPr/>
+        </p:nvSpPr>
+        <p:spPr>
+          <a:xfrm>
+            <a:off x="7142480" y="2423160"/>
+            <a:ext cx="2296160" cy="522514"/>
+          </a:xfrm>
+          <a:prstGeom prst="rect">
+            <a:avLst/>
+          </a:prstGeom>
+          <a:solidFill>
+            <a:srgbClr val="0043DA"/>
+          </a:solidFill>
+          <a:ln w="6350">
+            <a:solidFill>
+              <a:srgbClr val="DCDCDC"/>
+            </a:solidFill>
+          </a:ln>
+        </p:spPr>
+        <p:txBody>
+          <a:bodyPr anchor="ctr"/>
+          <a:lstStyle/>
+          <a:p>
+            <a:pPr algn="ctr"/>
+            <a:r>
+              <a:rPr lang="ko-KR" sz="1400" b="1">
+                <a:solidFill>
+                  <a:srgbClr val="FFFFFF"/>
+                </a:solidFill>
+                <a:latin typeface="프리젠테이션 7"/>
+              </a:rPr>
+              <a:t>중형 (Medium)</a:t>
+            </a:r>
+          </a:p>
+        </p:txBody>
+      </p:sp>
+      <p:sp>
+        <p:nvSpPr>
+          <p:cNvPr id="204" name="헤더_1"/>
+          <p:cNvSpPr>
+            <a:spLocks noGrp="1"/>
+          </p:cNvSpPr>
+          <p:nvPr/>
+        </p:nvSpPr>
+        <p:spPr>
+          <a:xfrm>
+            <a:off x="4846320" y="2423160"/>
+            <a:ext cx="2296160" cy="522514"/>
+          </a:xfrm>
+          <a:prstGeom prst="rect">
+            <a:avLst/>
+          </a:prstGeom>
+          <a:solidFill>
+            <a:srgbClr val="0043DA"/>
+          </a:solidFill>
+          <a:ln w="6350">
+            <a:solidFill>
+              <a:srgbClr val="DCDCDC"/>
+            </a:solidFill>
+          </a:ln>
+        </p:spPr>
+        <p:txBody>
+          <a:bodyPr anchor="ctr"/>
+          <a:lstStyle/>
+          <a:p>
+            <a:pPr algn="ctr"/>
+            <a:r>
+              <a:rPr lang="ko-KR" sz="1400" b="1">
+                <a:solidFill>
+                  <a:srgbClr val="FFFFFF"/>
+                </a:solidFill>
+                <a:latin typeface="프리젠테이션 7"/>
+              </a:rPr>
+              <a:t>소형 (Small)</a:t>
+            </a:r>
+          </a:p>
+        </p:txBody>
+      </p:sp>
+      <p:sp>
+        <p:nvSpPr>
+          <p:cNvPr id="203" name="헤더_0"/>
+          <p:cNvSpPr>
+            <a:spLocks noGrp="1"/>
+          </p:cNvSpPr>
+          <p:nvPr/>
+        </p:nvSpPr>
+        <p:spPr>
+          <a:xfrm>
+            <a:off x="2834640" y="2423160"/>
+            <a:ext cx="2011680" cy="522514"/>
+          </a:xfrm>
+          <a:prstGeom prst="rect">
+            <a:avLst/>
+          </a:prstGeom>
+          <a:solidFill>
+            <a:srgbClr val="0043DA"/>
+          </a:solidFill>
+          <a:ln w="6350">
+            <a:solidFill>
+              <a:srgbClr val="DCDCDC"/>
+            </a:solidFill>
+          </a:ln>
+        </p:spPr>
+        <p:txBody>
+          <a:bodyPr anchor="ctr"/>
+          <a:lstStyle/>
+          <a:p>
+            <a:pPr algn="ctr"/>
+            <a:r>
+              <a:rPr lang="ko-KR" sz="1400" b="1">
+                <a:solidFill>
+                  <a:srgbClr val="FFFFFF"/>
+                </a:solidFill>
+                <a:latin typeface="프리젠테이션 7"/>
+              </a:rPr>
+              <a:t>항목</a:t>
+            </a:r>
+          </a:p>
+        </p:txBody>
+      </p:sp>
+      <p:sp>
+        <p:nvSpPr>
+          <p:cNvPr id="202" name="추천 콜아웃"/>
+          <p:cNvSpPr>
+            <a:spLocks noGrp="1"/>
+          </p:cNvSpPr>
+          <p:nvPr/>
+        </p:nvSpPr>
+        <p:spPr>
+          <a:xfrm>
+            <a:off x="457200" y="2423160"/>
+            <a:ext cx="2194560" cy="3657600"/>
+          </a:xfrm>
+          <a:prstGeom prst="roundRect">
+            <a:avLst>
+              <a:gd name="adj" fmla="val 16667"/>
+            </a:avLst>
+          </a:prstGeom>
+          <a:solidFill>
+            <a:srgbClr val="4CB88F"/>
+          </a:solidFill>
+          <a:ln w="12700">
+            <a:solidFill>
+              <a:srgbClr val="4CB88F"/>
+            </a:solidFill>
+          </a:ln>
+        </p:spPr>
+        <p:txBody>
+          <a:bodyPr anchor="ctr"/>
+          <a:lstStyle/>
+          <a:p>
+            <a:pPr algn="ctr"/>
+            <a:r>
+              <a:rPr lang="ko-KR" sz="1200">
+                <a:solidFill>
+                  <a:srgbClr val="212121"/>
+                </a:solidFill>
+                <a:latin typeface="프리젠테이션 7"/>
+              </a:rPr>
+              <a:t>⭐ 추천
+중형 (Medium)
+━━━━━━━━
+프로덕션 워크로드 최적
+비용 대비 TPS 효율 1위
+한국 고객 78% 선택
+₩1,800만/년</a:t>
+            </a:r>
+          </a:p>
+        </p:txBody>
+      </p:sp>
+      <p:sp>
+        <p:nvSpPr>
+          <p:cNvPr id="201" name="본문 설명"/>
+          <p:cNvSpPr>
+            <a:spLocks noGrp="1"/>
+          </p:cNvSpPr>
+          <p:nvPr/>
+        </p:nvSpPr>
+        <p:spPr>
+          <a:xfrm>
+            <a:off x="457200" y="1965960"/>
+            <a:ext cx="11277295" cy="228600"/>
+          </a:xfrm>
+          <a:prstGeom prst="rect">
+            <a:avLst/>
+          </a:prstGeom>
+          <a:noFill/>
+        </p:spPr>
+        <p:txBody>
+          <a:bodyPr wrap="square" anchor="t"/>
+          <a:lstStyle/>
+          <a:p>
+            <a:pPr algn="l"/>
+            <a:r>
+              <a:rPr lang="ko-KR" altLang="en-US" sz="1300" dirty="0">
+                <a:solidFill>
+                  <a:srgbClr val="212121"/>
+                </a:solidFill>
+                <a:latin typeface="프리젠테이션 5"/>
+              </a:rPr>
+              <a:t>워크로드별 권장 사양 비교 (2026년 4월 기준, AWS 서울 리전)</a:t>
+            </a:r>
+          </a:p>
+        </p:txBody>
+      </p:sp>
+      <p:sp>
+        <p:nvSpPr>
+          <p:cNvPr id="200" name="본문 제목"/>
+          <p:cNvSpPr>
+            <a:spLocks noGrp="1"/>
+          </p:cNvSpPr>
+          <p:nvPr/>
+        </p:nvSpPr>
+        <p:spPr>
+          <a:xfrm>
+            <a:off x="457200" y="1600200"/>
+            <a:ext cx="11277295" cy="274320"/>
+          </a:xfrm>
+          <a:prstGeom prst="rect">
+            <a:avLst/>
+          </a:prstGeom>
+          <a:noFill/>
+        </p:spPr>
+        <p:txBody>
+          <a:bodyPr wrap="square" anchor="t"/>
+          <a:lstStyle/>
+          <a:p>
+            <a:pPr algn="l"/>
+            <a:r>
+              <a:rPr lang="ko-KR" altLang="en-US" sz="1600" b="1" dirty="0">
+                <a:solidFill>
+                  <a:srgbClr val="0043DA"/>
+                </a:solidFill>
+                <a:latin typeface="프리젠테이션 7"/>
+              </a:rPr>
+              <a:t>AWS MSK 클러스터 크기 선택 가이드</a:t>
+            </a:r>
+          </a:p>
+        </p:txBody>
+      </p:sp>
+      <p:sp>
+        <p:nvSpPr>
+          <p:cNvPr id="3" name="텍스트 개체 틀 2"/>
+          <p:cNvSpPr>
+            <a:spLocks noGrp="1"/>
+          </p:cNvSpPr>
+          <p:nvPr>
+            <p:ph type="body" sz="quarter" idx="10"/>
+          </p:nvPr>
+        </p:nvSpPr>
+        <p:spPr/>
+        <p:txBody>
+          <a:bodyPr/>
+          <a:lstStyle/>
+          <a:p>
+            <a:endParaRPr lang="ko-KR" altLang="en-US"/>
+          </a:p>
+        </p:txBody>
+      </p:sp>
+      <p:sp>
+        <p:nvSpPr>
+          <p:cNvPr id="18" name="TextBox 17"/>
           <p:cNvSpPr txBox="1"/>
           <p:nvPr/>
         </p:nvSpPr>
         <p:spPr>
           <a:xfrm>
-            <a:off x="3398157" y="3870726"/>
-            <a:ext cx="5395685" cy="543635"/>
+            <a:off x="354806" y="557906"/>
+            <a:ext cx="2720317" cy="932614"/>
           </a:xfrm>
           <a:prstGeom prst="rect">
             <a:avLst/>
@@ -17512,155 +18631,55 @@
           <a:noFill/>
         </p:spPr>
         <p:txBody>
-          <a:bodyPr wrap="square" lIns="0" tIns="0" rIns="0" bIns="0" rtlCol="0" anchor="ctr" anchorCtr="0">
+          <a:bodyPr wrap="square" lIns="0" tIns="0" rIns="0" bIns="0" rtlCol="0" anchor="t" anchorCtr="0">
             <a:noAutofit/>
           </a:bodyPr>
           <a:lstStyle/>
           <a:p>
-            <a:pPr latinLnBrk="0"/>
-            <a:r>
-              <a:rPr lang="en-US" altLang="ko-KR" sz="1600" dirty="0">
-                <a:ln>
-                  <a:solidFill>
-                    <a:schemeClr val="accent1">
-                      <a:alpha val="0"/>
-                    </a:schemeClr>
-                  </a:solidFill>
-                </a:ln>
-                <a:solidFill>
-                  <a:schemeClr val="bg1"/>
-                </a:solidFill>
-                <a:latin typeface="프리젠테이션 4 Regular" pitchFamily="2" charset="-127"/>
-                <a:ea typeface="프리젠테이션 4 Regular" pitchFamily="2" charset="-127"/>
-                <a:cs typeface="Pretendard" panose="02000503000000020004" pitchFamily="2" charset="-127"/>
-              </a:rPr>
-              <a:t>GS</a:t>
-            </a:r>
-            <a:r>
-              <a:rPr lang="ko-KR" altLang="en-US" sz="1600" dirty="0" err="1">
-                <a:ln>
-                  <a:solidFill>
-                    <a:schemeClr val="accent1">
-                      <a:alpha val="0"/>
-                    </a:schemeClr>
-                  </a:solidFill>
-                </a:ln>
-                <a:solidFill>
-                  <a:schemeClr val="bg1"/>
-                </a:solidFill>
-                <a:latin typeface="프리젠테이션 4 Regular" pitchFamily="2" charset="-127"/>
-                <a:ea typeface="프리젠테이션 4 Regular" pitchFamily="2" charset="-127"/>
-                <a:cs typeface="Pretendard" panose="02000503000000020004" pitchFamily="2" charset="-127"/>
-              </a:rPr>
-              <a:t>네오텍의</a:t>
-            </a:r>
-            <a:r>
-              <a:rPr lang="ko-KR" altLang="en-US" sz="1600" dirty="0">
-                <a:ln>
-                  <a:solidFill>
-                    <a:schemeClr val="accent1">
-                      <a:alpha val="0"/>
-                    </a:schemeClr>
-                  </a:solidFill>
-                </a:ln>
-                <a:solidFill>
-                  <a:schemeClr val="bg1"/>
-                </a:solidFill>
-                <a:latin typeface="프리젠테이션 4 Regular" pitchFamily="2" charset="-127"/>
-                <a:ea typeface="프리젠테이션 4 Regular" pitchFamily="2" charset="-127"/>
-                <a:cs typeface="Pretendard" panose="02000503000000020004" pitchFamily="2" charset="-127"/>
-              </a:rPr>
-              <a:t> </a:t>
-            </a:r>
-            <a:r>
-              <a:rPr lang="en-US" altLang="ko-KR" sz="1600" dirty="0">
-                <a:ln>
-                  <a:solidFill>
-                    <a:schemeClr val="accent1">
-                      <a:alpha val="0"/>
-                    </a:schemeClr>
-                  </a:solidFill>
-                </a:ln>
-                <a:solidFill>
-                  <a:schemeClr val="bg1"/>
-                </a:solidFill>
-                <a:latin typeface="프리젠테이션 4 Regular" pitchFamily="2" charset="-127"/>
-                <a:ea typeface="프리젠테이션 4 Regular" pitchFamily="2" charset="-127"/>
-                <a:cs typeface="Pretendard" panose="02000503000000020004" pitchFamily="2" charset="-127"/>
-              </a:rPr>
-              <a:t>IT</a:t>
-            </a:r>
-            <a:r>
-              <a:rPr lang="ko-KR" altLang="en-US" sz="1600" dirty="0">
-                <a:ln>
-                  <a:solidFill>
-                    <a:schemeClr val="accent1">
-                      <a:alpha val="0"/>
-                    </a:schemeClr>
-                  </a:solidFill>
-                </a:ln>
-                <a:solidFill>
-                  <a:schemeClr val="bg1"/>
-                </a:solidFill>
-                <a:latin typeface="프리젠테이션 4 Regular" pitchFamily="2" charset="-127"/>
-                <a:ea typeface="프리젠테이션 4 Regular" pitchFamily="2" charset="-127"/>
-                <a:cs typeface="Pretendard" panose="02000503000000020004" pitchFamily="2" charset="-127"/>
-              </a:rPr>
-              <a:t>서비스 브랜드 </a:t>
-            </a:r>
-            <a:r>
-              <a:rPr lang="en-US" altLang="ko-KR" sz="1600" dirty="0" err="1">
-                <a:ln>
-                  <a:solidFill>
-                    <a:schemeClr val="accent1">
-                      <a:alpha val="0"/>
-                    </a:schemeClr>
-                  </a:solidFill>
-                </a:ln>
-                <a:solidFill>
-                  <a:schemeClr val="bg1"/>
-                </a:solidFill>
-                <a:latin typeface="프리젠테이션 4 Regular" pitchFamily="2" charset="-127"/>
-                <a:ea typeface="프리젠테이션 4 Regular" pitchFamily="2" charset="-127"/>
-                <a:cs typeface="Pretendard" panose="02000503000000020004" pitchFamily="2" charset="-127"/>
-              </a:rPr>
-              <a:t>WiseN</a:t>
-            </a:r>
-            <a:r>
-              <a:rPr lang="ko-KR" altLang="en-US" sz="1600" dirty="0">
-                <a:ln>
-                  <a:solidFill>
-                    <a:schemeClr val="accent1">
-                      <a:alpha val="0"/>
-                    </a:schemeClr>
-                  </a:solidFill>
-                </a:ln>
-                <a:solidFill>
-                  <a:schemeClr val="bg1"/>
-                </a:solidFill>
-                <a:latin typeface="프리젠테이션 4 Regular" pitchFamily="2" charset="-127"/>
-                <a:ea typeface="프리젠테이션 4 Regular" pitchFamily="2" charset="-127"/>
-                <a:cs typeface="Pretendard" panose="02000503000000020004" pitchFamily="2" charset="-127"/>
-              </a:rPr>
-              <a:t>으로 진정한 프리미엄을 경험하세요</a:t>
-            </a:r>
-            <a:r>
-              <a:rPr lang="en-US" altLang="ko-KR" sz="1600" dirty="0">
-                <a:ln>
-                  <a:solidFill>
-                    <a:schemeClr val="accent1">
-                      <a:alpha val="0"/>
-                    </a:schemeClr>
-                  </a:solidFill>
-                </a:ln>
-                <a:solidFill>
-                  <a:schemeClr val="bg1"/>
-                </a:solidFill>
-                <a:latin typeface="프리젠테이션 4 Regular" pitchFamily="2" charset="-127"/>
-                <a:ea typeface="프리젠테이션 4 Regular" pitchFamily="2" charset="-127"/>
-                <a:cs typeface="Pretendard" panose="02000503000000020004" pitchFamily="2" charset="-127"/>
-              </a:rPr>
-              <a:t>.</a:t>
+            <a:pPr algn="l"/>
+            <a:r>
+              <a:rPr lang="ko-KR" altLang="en-US" dirty="0" sz="2000" b="1">
+                <a:solidFill>
+                  <a:srgbClr val="212121"/>
+                </a:solidFill>
+                <a:latin typeface="프리젠테이션 7"/>
+              </a:rPr>
+              <a:t>L24. Table Callout</a:t>
+            </a:r>
+          </a:p>
+        </p:txBody>
+      </p:sp>
+      <p:sp>
+        <p:nvSpPr>
+          <p:cNvPr id="19" name="TextBox 18"/>
+          <p:cNvSpPr txBox="1"/>
+          <p:nvPr/>
+        </p:nvSpPr>
+        <p:spPr>
+          <a:xfrm>
+            <a:off x="3763700" y="558800"/>
+            <a:ext cx="7551483" cy="937918"/>
+          </a:xfrm>
+          <a:prstGeom prst="rect">
+            <a:avLst/>
+          </a:prstGeom>
+          <a:noFill/>
+        </p:spPr>
+        <p:txBody>
+          <a:bodyPr wrap="square" lIns="0" tIns="0" rIns="0" bIns="0" rtlCol="0" anchor="t" anchorCtr="0">
+            <a:noAutofit/>
+          </a:bodyPr>
+          <a:lstStyle/>
+          <a:p>
+            <a:pPr algn="l"/>
+            <a:r>
+              <a:rPr lang="ko-KR" altLang="en-US" dirty="0" sz="1300">
+                <a:solidFill>
+                  <a:srgbClr val="212121"/>
+                </a:solidFill>
+                <a:latin typeface="프리젠테이션 7"/>
+              </a:rPr>
+              <a:t>MSK 클러스터 크기 선택 가이드</a:t>
             </a:r>
           </a:p>
         </p:txBody>
@@ -17668,13 +18687,829 @@
     </p:spTree>
     <p:extLst>
       <p:ext uri="{BB962C8B-B14F-4D97-AF65-F5344CB8AC3E}">
-        <p14:creationId xmlns:p14="http://schemas.microsoft.com/office/powerpoint/2010/main" val="3722360403"/>
+        <p14:creationId xmlns:p14="http://schemas.microsoft.com/office/powerpoint/2010/main" val="1246238572"/>
       </p:ext>
     </p:extLst>
   </p:cSld>
   <p:clrMapOvr>
     <a:masterClrMapping/>
   </p:clrMapOvr>
+  <p:timing>
+    <p:tnLst>
+      <p:par>
+        <p:cTn id="1" dur="indefinite" restart="never" nodeType="tmRoot"/>
+      </p:par>
+    </p:tnLst>
+  </p:timing>
+</p:sld>
+</file>
+
+<file path=ppt/slides/slide28.xml><?xml version="1.0" encoding="utf-8"?>
+<p:sld xmlns:a="http://schemas.openxmlformats.org/drawingml/2006/main" xmlns:r="http://schemas.openxmlformats.org/officeDocument/2006/relationships" xmlns:p="http://schemas.openxmlformats.org/presentationml/2006/main">
+  <p:cSld>
+    <p:spTree>
+      <p:nvGrpSpPr>
+        <p:cNvPr id="1" name=""/>
+        <p:cNvGrpSpPr/>
+        <p:nvPr/>
+      </p:nvGrpSpPr>
+      <p:grpSpPr>
+        <a:xfrm>
+          <a:off x="0" y="0"/>
+          <a:ext cx="0" cy="0"/>
+          <a:chOff x="0" y="0"/>
+          <a:chExt cx="0" cy="0"/>
+        </a:xfrm>
+      </p:grpSpPr>
+      <p:sp>
+        <p:nvSpPr>
+          <p:cNvPr id="306" name="기술스택 바"/>
+          <p:cNvSpPr>
+            <a:spLocks noGrp="1"/>
+          </p:cNvSpPr>
+          <p:nvPr/>
+        </p:nvSpPr>
+        <p:spPr>
+          <a:xfrm>
+            <a:off x="457200" y="6263640"/>
+            <a:ext cx="11277600" cy="365760"/>
+          </a:xfrm>
+          <a:prstGeom prst="rect">
+            <a:avLst/>
+          </a:prstGeom>
+          <a:solidFill>
+            <a:srgbClr val="F8F9FA"/>
+          </a:solidFill>
+          <a:ln w="6350">
+            <a:solidFill>
+              <a:srgbClr val="DCDCDC"/>
+            </a:solidFill>
+          </a:ln>
+        </p:spPr>
+        <p:txBody>
+          <a:bodyPr anchor="ctr"/>
+          <a:lstStyle/>
+          <a:p>
+            <a:pPr algn="l"/>
+            <a:r>
+              <a:rPr lang="ko-KR" sz="1200">
+                <a:solidFill>
+                  <a:srgbClr val="212121"/>
+                </a:solidFill>
+                <a:latin typeface="프리젠테이션 7"/>
+              </a:rPr>
+              <a:t>🔧 기술 스택: Kafka 3.6 | Java 21 | Terraform 1.7 | CloudWatch | Grafana 11</a:t>
+            </a:r>
+          </a:p>
+        </p:txBody>
+      </p:sp>
+      <p:sp>
+        <p:nvSpPr>
+          <p:cNvPr id="305" name="카드_📊 Consumer"/>
+          <p:cNvSpPr>
+            <a:spLocks noGrp="1"/>
+          </p:cNvSpPr>
+          <p:nvPr/>
+        </p:nvSpPr>
+        <p:spPr>
+          <a:xfrm>
+            <a:off x="7956240" y="4708320"/>
+            <a:ext cx="3566400" cy="1463040"/>
+          </a:xfrm>
+          <a:prstGeom prst="roundRect">
+            <a:avLst>
+              <a:gd name="adj" fmla="val 16667"/>
+            </a:avLst>
+          </a:prstGeom>
+          <a:solidFill>
+            <a:srgbClr val="F8F9FA"/>
+          </a:solidFill>
+          <a:ln w="6350">
+            <a:solidFill>
+              <a:srgbClr val="DCDCDC"/>
+            </a:solidFill>
+          </a:ln>
+        </p:spPr>
+        <p:txBody>
+          <a:bodyPr anchor="t"/>
+          <a:lstStyle/>
+          <a:p>
+            <a:pPr algn="l"/>
+            <a:r>
+              <a:rPr lang="ko-KR" sz="1100">
+                <a:solidFill>
+                  <a:srgbClr val="212121"/>
+                </a:solidFill>
+                <a:latin typeface="프리젠테이션 7"/>
+              </a:rPr>
+              <a:t>📊 Consumer 계층
+• Consumer Group 8개 (병렬 처리)
+• Kafka Streams + ksqlDB
+• 데이터 파이프라인 (S3/Redshift)
+처리 지연: &lt; 500ms (p99)</a:t>
+            </a:r>
+          </a:p>
+        </p:txBody>
+      </p:sp>
+      <p:sp>
+        <p:nvSpPr>
+          <p:cNvPr id="304" name="카드_⚙️ MSK 브로커"/>
+          <p:cNvSpPr>
+            <a:spLocks noGrp="1"/>
+          </p:cNvSpPr>
+          <p:nvPr/>
+        </p:nvSpPr>
+        <p:spPr>
+          <a:xfrm>
+            <a:off x="4206720" y="4708320"/>
+            <a:ext cx="3566400" cy="1463040"/>
+          </a:xfrm>
+          <a:prstGeom prst="roundRect">
+            <a:avLst>
+              <a:gd name="adj" fmla="val 16667"/>
+            </a:avLst>
+          </a:prstGeom>
+          <a:solidFill>
+            <a:srgbClr val="F8F9FA"/>
+          </a:solidFill>
+          <a:ln w="6350">
+            <a:solidFill>
+              <a:srgbClr val="DCDCDC"/>
+            </a:solidFill>
+          </a:ln>
+        </p:spPr>
+        <p:txBody>
+          <a:bodyPr anchor="t"/>
+          <a:lstStyle/>
+          <a:p>
+            <a:pPr algn="l"/>
+            <a:r>
+              <a:rPr lang="ko-KR" sz="1100">
+                <a:solidFill>
+                  <a:srgbClr val="212121"/>
+                </a:solidFill>
+                <a:latin typeface="프리젠테이션 7"/>
+              </a:rPr>
+              <a:t>⚙️ MSK 브로커 계층
+• Multi-AZ 3 브로커 (m5.large)
+• Topic 32개 / Partition 128개
+• Replication Factor 3 (durability)
+가용성: 99.95% SLA</a:t>
+            </a:r>
+          </a:p>
+        </p:txBody>
+      </p:sp>
+      <p:sp>
+        <p:nvSpPr>
+          <p:cNvPr id="303" name="카드_📡 Producer"/>
+          <p:cNvSpPr>
+            <a:spLocks noGrp="1"/>
+          </p:cNvSpPr>
+          <p:nvPr/>
+        </p:nvSpPr>
+        <p:spPr>
+          <a:xfrm>
+            <a:off x="457200" y="4708320"/>
+            <a:ext cx="3566400" cy="1463040"/>
+          </a:xfrm>
+          <a:prstGeom prst="roundRect">
+            <a:avLst>
+              <a:gd name="adj" fmla="val 16667"/>
+            </a:avLst>
+          </a:prstGeom>
+          <a:solidFill>
+            <a:srgbClr val="F8F9FA"/>
+          </a:solidFill>
+          <a:ln w="6350">
+            <a:solidFill>
+              <a:srgbClr val="DCDCDC"/>
+            </a:solidFill>
+          </a:ln>
+        </p:spPr>
+        <p:txBody>
+          <a:bodyPr anchor="t"/>
+          <a:lstStyle/>
+          <a:p>
+            <a:pPr algn="l"/>
+            <a:r>
+              <a:rPr lang="ko-KR" sz="1100">
+                <a:solidFill>
+                  <a:srgbClr val="212121"/>
+                </a:solidFill>
+                <a:latin typeface="프리젠테이션 7"/>
+              </a:rPr>
+              <a:t>📡 Producer 계층
+• 애플리케이션 서버 (EC2/Lambda)
+• Kafka Producer SDK v3.6
+• 비동기 메시지 발행 (at-least-once)
+발행량: 50K msg/s</a:t>
+            </a:r>
+          </a:p>
+        </p:txBody>
+      </p:sp>
+      <p:sp>
+        <p:nvSpPr>
+          <p:cNvPr id="302" name="다이어그램 영역"/>
+          <p:cNvSpPr>
+            <a:spLocks noGrp="1"/>
+          </p:cNvSpPr>
+          <p:nvPr/>
+        </p:nvSpPr>
+        <p:spPr>
+          <a:xfrm>
+            <a:off x="457200" y="2423160"/>
+            <a:ext cx="11277600" cy="2102640"/>
+          </a:xfrm>
+          <a:prstGeom prst="rect">
+            <a:avLst/>
+          </a:prstGeom>
+          <a:solidFill>
+            <a:srgbClr val="F8F9FA"/>
+          </a:solidFill>
+          <a:ln w="6350">
+            <a:solidFill>
+              <a:srgbClr val="DCDCDC"/>
+            </a:solidFill>
+          </a:ln>
+        </p:spPr>
+        <p:txBody>
+          <a:bodyPr anchor="ctr"/>
+          <a:lstStyle/>
+          <a:p>
+            <a:pPr algn="ctr"/>
+            <a:r>
+              <a:rPr lang="ko-KR" sz="1200">
+                <a:solidFill>
+                  <a:srgbClr val="505050"/>
+                </a:solidFill>
+                <a:latin typeface="프리젠테이션 7"/>
+              </a:rPr>
+              <a:t>[아키텍처 다이어그램: Producer → MSK Broker (3-AZ) → Consumer 3계층]</a:t>
+            </a:r>
+          </a:p>
+        </p:txBody>
+      </p:sp>
+      <p:sp>
+        <p:nvSpPr>
+          <p:cNvPr id="301" name="본문 설명"/>
+          <p:cNvSpPr>
+            <a:spLocks noGrp="1"/>
+          </p:cNvSpPr>
+          <p:nvPr/>
+        </p:nvSpPr>
+        <p:spPr>
+          <a:xfrm>
+            <a:off x="457200" y="1965960"/>
+            <a:ext cx="11277295" cy="228600"/>
+          </a:xfrm>
+          <a:prstGeom prst="rect">
+            <a:avLst/>
+          </a:prstGeom>
+          <a:noFill/>
+        </p:spPr>
+        <p:txBody>
+          <a:bodyPr wrap="square" anchor="t"/>
+          <a:lstStyle/>
+          <a:p>
+            <a:pPr algn="l"/>
+            <a:r>
+              <a:rPr lang="ko-KR" altLang="en-US" sz="1300" dirty="0">
+                <a:solidFill>
+                  <a:srgbClr val="212121"/>
+                </a:solidFill>
+                <a:latin typeface="프리젠테이션 5"/>
+              </a:rPr>
+              <a:t>Producer부터 Consumer까지 전체 데이터 흐름 (2026년 4월, 서울 리전)</a:t>
+            </a:r>
+          </a:p>
+        </p:txBody>
+      </p:sp>
+      <p:sp>
+        <p:nvSpPr>
+          <p:cNvPr id="300" name="본문 제목"/>
+          <p:cNvSpPr>
+            <a:spLocks noGrp="1"/>
+          </p:cNvSpPr>
+          <p:nvPr/>
+        </p:nvSpPr>
+        <p:spPr>
+          <a:xfrm>
+            <a:off x="457200" y="1600200"/>
+            <a:ext cx="11277295" cy="274320"/>
+          </a:xfrm>
+          <a:prstGeom prst="rect">
+            <a:avLst/>
+          </a:prstGeom>
+          <a:noFill/>
+        </p:spPr>
+        <p:txBody>
+          <a:bodyPr wrap="square" anchor="t"/>
+          <a:lstStyle/>
+          <a:p>
+            <a:pPr algn="l"/>
+            <a:r>
+              <a:rPr lang="ko-KR" altLang="en-US" sz="1600" b="1" dirty="0">
+                <a:solidFill>
+                  <a:srgbClr val="0043DA"/>
+                </a:solidFill>
+                <a:latin typeface="프리젠테이션 7"/>
+              </a:rPr>
+              <a:t>AWS MSK 전체 아키텍처 — 3계층 구조</a:t>
+            </a:r>
+          </a:p>
+        </p:txBody>
+      </p:sp>
+      <p:sp>
+        <p:nvSpPr>
+          <p:cNvPr id="3" name="텍스트 개체 틀 2"/>
+          <p:cNvSpPr>
+            <a:spLocks noGrp="1"/>
+          </p:cNvSpPr>
+          <p:nvPr>
+            <p:ph type="body" sz="quarter" idx="10"/>
+          </p:nvPr>
+        </p:nvSpPr>
+        <p:spPr/>
+        <p:txBody>
+          <a:bodyPr/>
+          <a:lstStyle/>
+          <a:p>
+            <a:endParaRPr lang="ko-KR" altLang="en-US"/>
+          </a:p>
+        </p:txBody>
+      </p:sp>
+      <p:sp>
+        <p:nvSpPr>
+          <p:cNvPr id="18" name="TextBox 17"/>
+          <p:cNvSpPr txBox="1"/>
+          <p:nvPr/>
+        </p:nvSpPr>
+        <p:spPr>
+          <a:xfrm>
+            <a:off x="354806" y="557906"/>
+            <a:ext cx="2720317" cy="932614"/>
+          </a:xfrm>
+          <a:prstGeom prst="rect">
+            <a:avLst/>
+          </a:prstGeom>
+          <a:noFill/>
+        </p:spPr>
+        <p:txBody>
+          <a:bodyPr wrap="square" lIns="0" tIns="0" rIns="0" bIns="0" rtlCol="0" anchor="t" anchorCtr="0">
+            <a:noAutofit/>
+          </a:bodyPr>
+          <a:lstStyle/>
+          <a:p>
+            <a:pPr algn="l"/>
+            <a:r>
+              <a:rPr lang="ko-KR" altLang="en-US" dirty="0" sz="2000" b="1">
+                <a:solidFill>
+                  <a:srgbClr val="212121"/>
+                </a:solidFill>
+                <a:latin typeface="프리젠테이션 7"/>
+              </a:rPr>
+              <a:t>L25. Architecture Wide</a:t>
+            </a:r>
+          </a:p>
+        </p:txBody>
+      </p:sp>
+      <p:sp>
+        <p:nvSpPr>
+          <p:cNvPr id="19" name="TextBox 18"/>
+          <p:cNvSpPr txBox="1"/>
+          <p:nvPr/>
+        </p:nvSpPr>
+        <p:spPr>
+          <a:xfrm>
+            <a:off x="3763700" y="558800"/>
+            <a:ext cx="7551483" cy="937918"/>
+          </a:xfrm>
+          <a:prstGeom prst="rect">
+            <a:avLst/>
+          </a:prstGeom>
+          <a:noFill/>
+        </p:spPr>
+        <p:txBody>
+          <a:bodyPr wrap="square" lIns="0" tIns="0" rIns="0" bIns="0" rtlCol="0" anchor="t" anchorCtr="0">
+            <a:noAutofit/>
+          </a:bodyPr>
+          <a:lstStyle/>
+          <a:p>
+            <a:pPr algn="l"/>
+            <a:r>
+              <a:rPr lang="ko-KR" altLang="en-US" dirty="0" sz="1300">
+                <a:solidFill>
+                  <a:srgbClr val="212121"/>
+                </a:solidFill>
+                <a:latin typeface="프리젠테이션 7"/>
+              </a:rPr>
+              <a:t>MSK 전체 아키텍처 — 3계층 구조</a:t>
+            </a:r>
+          </a:p>
+        </p:txBody>
+      </p:sp>
+    </p:spTree>
+    <p:extLst>
+      <p:ext uri="{BB962C8B-B14F-4D97-AF65-F5344CB8AC3E}">
+        <p14:creationId xmlns:p14="http://schemas.microsoft.com/office/powerpoint/2010/main" val="1401621130"/>
+      </p:ext>
+    </p:extLst>
+  </p:cSld>
+  <p:clrMapOvr>
+    <a:masterClrMapping/>
+  </p:clrMapOvr>
+  <p:timing>
+    <p:tnLst>
+      <p:par>
+        <p:cTn id="1" dur="indefinite" restart="never" nodeType="tmRoot"/>
+      </p:par>
+    </p:tnLst>
+  </p:timing>
+</p:sld>
+</file>
+
+<file path=ppt/slides/slide29.xml><?xml version="1.0" encoding="utf-8"?>
+<p:sld xmlns:a="http://schemas.openxmlformats.org/drawingml/2006/main" xmlns:r="http://schemas.openxmlformats.org/officeDocument/2006/relationships" xmlns:p="http://schemas.openxmlformats.org/presentationml/2006/main">
+  <p:cSld>
+    <p:spTree>
+      <p:nvGrpSpPr>
+        <p:cNvPr id="1" name=""/>
+        <p:cNvGrpSpPr/>
+        <p:nvPr/>
+      </p:nvGrpSpPr>
+      <p:grpSpPr>
+        <a:xfrm>
+          <a:off x="0" y="0"/>
+          <a:ext cx="0" cy="0"/>
+          <a:chOff x="0" y="0"/>
+          <a:chExt cx="0" cy="0"/>
+        </a:xfrm>
+      </p:grpSpPr>
+      <p:sp>
+        <p:nvSpPr>
+          <p:cNvPr id="405" name="다이어그램 영역"/>
+          <p:cNvSpPr>
+            <a:spLocks noGrp="1"/>
+          </p:cNvSpPr>
+          <p:nvPr/>
+        </p:nvSpPr>
+        <p:spPr>
+          <a:xfrm>
+            <a:off x="5029920" y="2423160"/>
+            <a:ext cx="6704880" cy="3748920"/>
+          </a:xfrm>
+          <a:prstGeom prst="roundRect">
+            <a:avLst>
+              <a:gd name="adj" fmla="val 16667"/>
+            </a:avLst>
+          </a:prstGeom>
+          <a:solidFill>
+            <a:srgbClr val="F8F9FA"/>
+          </a:solidFill>
+          <a:ln w="6350">
+            <a:solidFill>
+              <a:srgbClr val="DCDCDC"/>
+            </a:solidFill>
+          </a:ln>
+        </p:spPr>
+        <p:txBody>
+          <a:bodyPr anchor="ctr"/>
+          <a:lstStyle/>
+          <a:p>
+            <a:pPr algn="ctr"/>
+            <a:r>
+              <a:rPr lang="ko-KR" sz="1300">
+                <a:solidFill>
+                  <a:srgbClr val="505050"/>
+                </a:solidFill>
+                <a:latin typeface="프리젠테이션 7"/>
+              </a:rPr>
+              <a:t>[MSK 3계층 보안 구성도:
+IAM → TLS 1.2+ → VPC 격리]</a:t>
+            </a:r>
+          </a:p>
+        </p:txBody>
+      </p:sp>
+      <p:sp>
+        <p:nvSpPr>
+          <p:cNvPr id="404" name="섹션_⚠️ Conditi"/>
+          <p:cNvSpPr>
+            <a:spLocks noGrp="1"/>
+          </p:cNvSpPr>
+          <p:nvPr/>
+        </p:nvSpPr>
+        <p:spPr>
+          <a:xfrm>
+            <a:off x="457200" y="4983480"/>
+            <a:ext cx="4389600" cy="1188720"/>
+          </a:xfrm>
+          <a:prstGeom prst="roundRect">
+            <a:avLst>
+              <a:gd name="adj" fmla="val 16667"/>
+            </a:avLst>
+          </a:prstGeom>
+          <a:solidFill>
+            <a:srgbClr val="F8F9FA"/>
+          </a:solidFill>
+          <a:ln w="9525">
+            <a:solidFill>
+              <a:srgbClr val="DCDCDC"/>
+            </a:solidFill>
+          </a:ln>
+        </p:spPr>
+        <p:txBody>
+          <a:bodyPr anchor="t"/>
+          <a:lstStyle/>
+          <a:p>
+            <a:pPr algn="l"/>
+            <a:r>
+              <a:rPr lang="ko-KR" sz="1100">
+                <a:solidFill>
+                  <a:srgbClr val="212121"/>
+                </a:solidFill>
+                <a:latin typeface="프리젠테이션 7"/>
+              </a:rPr>
+              <a:t>⚠️ Condition
+SASL/SCRAM 대신 IAM 권장 (AWS 공식)
+KMS 키로 EBS 스토리지 암호화 (at-rest)
+Security Group: 9092/9094 포트만 허용
+규정 준수율: 100%</a:t>
+            </a:r>
+          </a:p>
+        </p:txBody>
+      </p:sp>
+      <p:sp>
+        <p:nvSpPr>
+          <p:cNvPr id="403" name="섹션_⭐ Highligh"/>
+          <p:cNvSpPr>
+            <a:spLocks noGrp="1"/>
+          </p:cNvSpPr>
+          <p:nvPr/>
+        </p:nvSpPr>
+        <p:spPr>
+          <a:xfrm>
+            <a:off x="457200" y="3703320"/>
+            <a:ext cx="4389600" cy="1188720"/>
+          </a:xfrm>
+          <a:prstGeom prst="roundRect">
+            <a:avLst>
+              <a:gd name="adj" fmla="val 16667"/>
+            </a:avLst>
+          </a:prstGeom>
+          <a:solidFill>
+            <a:srgbClr val="F8F9FA"/>
+          </a:solidFill>
+          <a:ln w="9525">
+            <a:solidFill>
+              <a:srgbClr val="DCDCDC"/>
+            </a:solidFill>
+          </a:ln>
+        </p:spPr>
+        <p:txBody>
+          <a:bodyPr anchor="t"/>
+          <a:lstStyle/>
+          <a:p>
+            <a:pPr algn="l"/>
+            <a:r>
+              <a:rPr lang="ko-KR" sz="1100">
+                <a:solidFill>
+                  <a:srgbClr val="212121"/>
+                </a:solidFill>
+                <a:latin typeface="프리젠테이션 7"/>
+              </a:rPr>
+              <a:t>⭐ Highlight
+Zero Trust 접근 — 기본 차단, 최소 권한
+mTLS 클라이언트 인증서 검증 (상호 인증)
+CloudTrail 감사 로그 자동 기록 (90일)
+취약점 발견: 0건 (최근 감사)</a:t>
+            </a:r>
+          </a:p>
+        </p:txBody>
+      </p:sp>
+      <p:sp>
+        <p:nvSpPr>
+          <p:cNvPr id="402" name="섹션_📋 Overview"/>
+          <p:cNvSpPr>
+            <a:spLocks noGrp="1"/>
+          </p:cNvSpPr>
+          <p:nvPr/>
+        </p:nvSpPr>
+        <p:spPr>
+          <a:xfrm>
+            <a:off x="457200" y="2423160"/>
+            <a:ext cx="4389600" cy="1188720"/>
+          </a:xfrm>
+          <a:prstGeom prst="roundRect">
+            <a:avLst>
+              <a:gd name="adj" fmla="val 16667"/>
+            </a:avLst>
+          </a:prstGeom>
+          <a:solidFill>
+            <a:srgbClr val="F8F9FA"/>
+          </a:solidFill>
+          <a:ln w="9525">
+            <a:solidFill>
+              <a:srgbClr val="DCDCDC"/>
+            </a:solidFill>
+          </a:ln>
+        </p:spPr>
+        <p:txBody>
+          <a:bodyPr anchor="t"/>
+          <a:lstStyle/>
+          <a:p>
+            <a:pPr algn="l"/>
+            <a:r>
+              <a:rPr lang="ko-KR" sz="1100">
+                <a:solidFill>
+                  <a:srgbClr val="212121"/>
+                </a:solidFill>
+                <a:latin typeface="프리젠테이션 7"/>
+              </a:rPr>
+              <a:t>📋 Overview
+IAM 기반 인증 (AWS 리소스 통합)
+TLS 1.2+ 전송 암호화 (in-transit)
+VPC 내부 Private Subnet 격리
+인증 방식: IAM + mTLS</a:t>
+            </a:r>
+          </a:p>
+        </p:txBody>
+      </p:sp>
+      <p:sp>
+        <p:nvSpPr>
+          <p:cNvPr id="401" name="본문 설명"/>
+          <p:cNvSpPr>
+            <a:spLocks noGrp="1"/>
+          </p:cNvSpPr>
+          <p:nvPr/>
+        </p:nvSpPr>
+        <p:spPr>
+          <a:xfrm>
+            <a:off x="457200" y="1965960"/>
+            <a:ext cx="11277295" cy="228600"/>
+          </a:xfrm>
+          <a:prstGeom prst="rect">
+            <a:avLst/>
+          </a:prstGeom>
+          <a:noFill/>
+        </p:spPr>
+        <p:txBody>
+          <a:bodyPr wrap="square" anchor="t"/>
+          <a:lstStyle/>
+          <a:p>
+            <a:pPr algn="l"/>
+            <a:r>
+              <a:rPr lang="ko-KR" altLang="en-US" sz="1300" dirty="0">
+                <a:solidFill>
+                  <a:srgbClr val="212121"/>
+                </a:solidFill>
+                <a:latin typeface="프리젠테이션 5"/>
+              </a:rPr>
+              <a:t>인증·암호화·접근제어 통합 구성 (2026년 4월 기준, ISMS-P 준거)</a:t>
+            </a:r>
+          </a:p>
+        </p:txBody>
+      </p:sp>
+      <p:sp>
+        <p:nvSpPr>
+          <p:cNvPr id="400" name="본문 제목"/>
+          <p:cNvSpPr>
+            <a:spLocks noGrp="1"/>
+          </p:cNvSpPr>
+          <p:nvPr/>
+        </p:nvSpPr>
+        <p:spPr>
+          <a:xfrm>
+            <a:off x="457200" y="1600200"/>
+            <a:ext cx="11277295" cy="274320"/>
+          </a:xfrm>
+          <a:prstGeom prst="rect">
+            <a:avLst/>
+          </a:prstGeom>
+          <a:noFill/>
+        </p:spPr>
+        <p:txBody>
+          <a:bodyPr wrap="square" anchor="t"/>
+          <a:lstStyle/>
+          <a:p>
+            <a:pPr algn="l"/>
+            <a:r>
+              <a:rPr lang="ko-KR" altLang="en-US" sz="1600" b="1" dirty="0">
+                <a:solidFill>
+                  <a:srgbClr val="0043DA"/>
+                </a:solidFill>
+                <a:latin typeface="프리젠테이션 7"/>
+              </a:rPr>
+              <a:t>AWS MSK 보안 아키텍처 — 3계층 보안 모델</a:t>
+            </a:r>
+          </a:p>
+        </p:txBody>
+      </p:sp>
+      <p:sp>
+        <p:nvSpPr>
+          <p:cNvPr id="3" name="텍스트 개체 틀 2"/>
+          <p:cNvSpPr>
+            <a:spLocks noGrp="1"/>
+          </p:cNvSpPr>
+          <p:nvPr>
+            <p:ph type="body" sz="quarter" idx="10"/>
+          </p:nvPr>
+        </p:nvSpPr>
+        <p:spPr/>
+        <p:txBody>
+          <a:bodyPr/>
+          <a:lstStyle/>
+          <a:p>
+            <a:endParaRPr lang="ko-KR" altLang="en-US"/>
+          </a:p>
+        </p:txBody>
+      </p:sp>
+      <p:sp>
+        <p:nvSpPr>
+          <p:cNvPr id="18" name="TextBox 17"/>
+          <p:cNvSpPr txBox="1"/>
+          <p:nvPr/>
+        </p:nvSpPr>
+        <p:spPr>
+          <a:xfrm>
+            <a:off x="354806" y="557906"/>
+            <a:ext cx="2720317" cy="932614"/>
+          </a:xfrm>
+          <a:prstGeom prst="rect">
+            <a:avLst/>
+          </a:prstGeom>
+          <a:noFill/>
+        </p:spPr>
+        <p:txBody>
+          <a:bodyPr wrap="square" lIns="0" tIns="0" rIns="0" bIns="0" rtlCol="0" anchor="t" anchorCtr="0">
+            <a:noAutofit/>
+          </a:bodyPr>
+          <a:lstStyle/>
+          <a:p>
+            <a:pPr algn="l"/>
+            <a:r>
+              <a:rPr lang="ko-KR" altLang="en-US" dirty="0" sz="2000" b="1">
+                <a:solidFill>
+                  <a:srgbClr val="212121"/>
+                </a:solidFill>
+                <a:latin typeface="프리젠테이션 7"/>
+              </a:rPr>
+              <a:t>L26. Detail Sections</a:t>
+            </a:r>
+          </a:p>
+        </p:txBody>
+      </p:sp>
+      <p:sp>
+        <p:nvSpPr>
+          <p:cNvPr id="19" name="TextBox 18"/>
+          <p:cNvSpPr txBox="1"/>
+          <p:nvPr/>
+        </p:nvSpPr>
+        <p:spPr>
+          <a:xfrm>
+            <a:off x="3763700" y="558800"/>
+            <a:ext cx="7551483" cy="937918"/>
+          </a:xfrm>
+          <a:prstGeom prst="rect">
+            <a:avLst/>
+          </a:prstGeom>
+          <a:noFill/>
+        </p:spPr>
+        <p:txBody>
+          <a:bodyPr wrap="square" lIns="0" tIns="0" rIns="0" bIns="0" rtlCol="0" anchor="t" anchorCtr="0">
+            <a:noAutofit/>
+          </a:bodyPr>
+          <a:lstStyle/>
+          <a:p>
+            <a:pPr algn="l"/>
+            <a:r>
+              <a:rPr lang="ko-KR" altLang="en-US" dirty="0" sz="1300">
+                <a:solidFill>
+                  <a:srgbClr val="212121"/>
+                </a:solidFill>
+                <a:latin typeface="프리젠테이션 7"/>
+              </a:rPr>
+              <a:t>MSK 보안 아키텍처 — 3계층 보안 모델</a:t>
+            </a:r>
+          </a:p>
+        </p:txBody>
+      </p:sp>
+    </p:spTree>
+    <p:extLst>
+      <p:ext uri="{BB962C8B-B14F-4D97-AF65-F5344CB8AC3E}">
+        <p14:creationId xmlns:p14="http://schemas.microsoft.com/office/powerpoint/2010/main" val="2054663690"/>
+      </p:ext>
+    </p:extLst>
+  </p:cSld>
+  <p:clrMapOvr>
+    <a:masterClrMapping/>
+  </p:clrMapOvr>
+  <p:timing>
+    <p:tnLst>
+      <p:par>
+        <p:cTn id="1" dur="indefinite" restart="never" nodeType="tmRoot"/>
+      </p:par>
+    </p:tnLst>
+  </p:timing>
 </p:sld>
 </file>
 
@@ -18824,6 +20659,1521 @@
         </p:txBody>
       </p:sp>
     </p:spTree>
+  </p:cSld>
+  <p:clrMapOvr>
+    <a:masterClrMapping/>
+  </p:clrMapOvr>
+</p:sld>
+</file>
+
+<file path=ppt/slides/slide30.xml><?xml version="1.0" encoding="utf-8"?>
+<p:sld xmlns:a="http://schemas.openxmlformats.org/drawingml/2006/main" xmlns:r="http://schemas.openxmlformats.org/officeDocument/2006/relationships" xmlns:p="http://schemas.openxmlformats.org/presentationml/2006/main">
+  <p:cSld>
+    <p:spTree>
+      <p:nvGrpSpPr>
+        <p:cNvPr id="1" name=""/>
+        <p:cNvGrpSpPr/>
+        <p:nvPr/>
+      </p:nvGrpSpPr>
+      <p:grpSpPr>
+        <a:xfrm>
+          <a:off x="0" y="0"/>
+          <a:ext cx="0" cy="0"/>
+          <a:chOff x="0" y="0"/>
+          <a:chExt cx="0" cy="0"/>
+        </a:xfrm>
+      </p:grpSpPr>
+      <p:sp>
+        <p:nvSpPr>
+          <p:cNvPr id="513" name="서브_모니터링 팀"/>
+          <p:cNvSpPr>
+            <a:spLocks noGrp="1"/>
+          </p:cNvSpPr>
+          <p:nvPr/>
+        </p:nvSpPr>
+        <p:spPr>
+          <a:xfrm>
+            <a:off x="8529120" y="4344480"/>
+            <a:ext cx="2651760" cy="1463040"/>
+          </a:xfrm>
+          <a:prstGeom prst="rect">
+            <a:avLst/>
+          </a:prstGeom>
+          <a:solidFill>
+            <a:srgbClr val="F8F9FA"/>
+          </a:solidFill>
+          <a:ln w="6350">
+            <a:solidFill>
+              <a:srgbClr val="DCDCDC"/>
+            </a:solidFill>
+          </a:ln>
+        </p:spPr>
+        <p:txBody>
+          <a:bodyPr anchor="t"/>
+          <a:lstStyle/>
+          <a:p>
+            <a:pPr algn="l"/>
+            <a:r>
+              <a:rPr lang="ko-KR" sz="1300">
+                <a:solidFill>
+                  <a:srgbClr val="212121"/>
+                </a:solidFill>
+                <a:latin typeface="프리젠테이션 7"/>
+              </a:rPr>
+              <a:t>역할: CloudWatch/Grafana 운영
+인원: 3명
+MTTR &lt; 30분</a:t>
+            </a:r>
+          </a:p>
+        </p:txBody>
+      </p:sp>
+      <p:sp>
+        <p:nvSpPr>
+          <p:cNvPr id="512" name="자식_모니터링 팀"/>
+          <p:cNvSpPr>
+            <a:spLocks noGrp="1"/>
+          </p:cNvSpPr>
+          <p:nvPr/>
+        </p:nvSpPr>
+        <p:spPr>
+          <a:xfrm>
+            <a:off x="8529120" y="3748680"/>
+            <a:ext cx="2651760" cy="457200"/>
+          </a:xfrm>
+          <a:prstGeom prst="rect">
+            <a:avLst/>
+          </a:prstGeom>
+          <a:solidFill>
+            <a:srgbClr val="4F7DE5"/>
+          </a:solidFill>
+          <a:ln>
+            <a:noFill/>
+          </a:ln>
+        </p:spPr>
+        <p:txBody>
+          <a:bodyPr anchor="ctr"/>
+          <a:lstStyle/>
+          <a:p>
+            <a:pPr algn="ctr"/>
+            <a:r>
+              <a:rPr lang="ko-KR" sz="1400" b="1">
+                <a:solidFill>
+                  <a:srgbClr val="FFFFFF"/>
+                </a:solidFill>
+                <a:latin typeface="프리젠테이션 7"/>
+              </a:rPr>
+              <a:t>모니터링 팀</a:t>
+            </a:r>
+          </a:p>
+        </p:txBody>
+      </p:sp>
+      <p:cxnSp>
+        <p:nvCxnSpPr>
+          <p:cNvPr id="511" name="선_모니터링 팀"/>
+          <p:cNvCxnSpPr/>
+          <p:nvPr/>
+        </p:nvCxnSpPr>
+        <p:spPr>
+          <a:xfrm>
+            <a:off x="8941003" y="3566160"/>
+            <a:ext cx="0" cy="182879"/>
+          </a:xfrm>
+          <a:prstGeom prst="line">
+            <a:avLst/>
+          </a:prstGeom>
+          <a:ln w="14288">
+            <a:solidFill>
+              <a:srgbClr val="AAAAAA"/>
+            </a:solidFill>
+          </a:ln>
+        </p:spPr>
+      </p:cxnSp>
+      <p:sp>
+        <p:nvSpPr>
+          <p:cNvPr id="510" name="서브_개발 팀"/>
+          <p:cNvSpPr>
+            <a:spLocks noGrp="1"/>
+          </p:cNvSpPr>
+          <p:nvPr/>
+        </p:nvSpPr>
+        <p:spPr>
+          <a:xfrm>
+            <a:off x="4770600" y="4344480"/>
+            <a:ext cx="2651760" cy="1463040"/>
+          </a:xfrm>
+          <a:prstGeom prst="rect">
+            <a:avLst/>
+          </a:prstGeom>
+          <a:solidFill>
+            <a:srgbClr val="F8F9FA"/>
+          </a:solidFill>
+          <a:ln w="6350">
+            <a:solidFill>
+              <a:srgbClr val="DCDCDC"/>
+            </a:solidFill>
+          </a:ln>
+        </p:spPr>
+        <p:txBody>
+          <a:bodyPr anchor="t"/>
+          <a:lstStyle/>
+          <a:p>
+            <a:pPr algn="l"/>
+            <a:r>
+              <a:rPr lang="ko-KR" sz="1300">
+                <a:solidFill>
+                  <a:srgbClr val="212121"/>
+                </a:solidFill>
+                <a:latin typeface="프리젠테이션 7"/>
+              </a:rPr>
+              <a:t>역할: Producer/Consumer SDK 개발
+인원: 6명
+SDK v3.6 유지보수</a:t>
+            </a:r>
+          </a:p>
+        </p:txBody>
+      </p:sp>
+      <p:sp>
+        <p:nvSpPr>
+          <p:cNvPr id="509" name="자식_개발 팀"/>
+          <p:cNvSpPr>
+            <a:spLocks noGrp="1"/>
+          </p:cNvSpPr>
+          <p:nvPr/>
+        </p:nvSpPr>
+        <p:spPr>
+          <a:xfrm>
+            <a:off x="4770600" y="3748680"/>
+            <a:ext cx="2651760" cy="457200"/>
+          </a:xfrm>
+          <a:prstGeom prst="rect">
+            <a:avLst/>
+          </a:prstGeom>
+          <a:solidFill>
+            <a:srgbClr val="4F7DE5"/>
+          </a:solidFill>
+          <a:ln>
+            <a:noFill/>
+          </a:ln>
+        </p:spPr>
+        <p:txBody>
+          <a:bodyPr anchor="ctr"/>
+          <a:lstStyle/>
+          <a:p>
+            <a:pPr algn="ctr"/>
+            <a:r>
+              <a:rPr lang="ko-KR" sz="1400" b="1">
+                <a:solidFill>
+                  <a:srgbClr val="FFFFFF"/>
+                </a:solidFill>
+                <a:latin typeface="프리젠테이션 7"/>
+              </a:rPr>
+              <a:t>개발 팀</a:t>
+            </a:r>
+          </a:p>
+        </p:txBody>
+      </p:sp>
+      <p:cxnSp>
+        <p:nvCxnSpPr>
+          <p:cNvPr id="508" name="선_개발 팀"/>
+          <p:cNvCxnSpPr/>
+          <p:nvPr/>
+        </p:nvCxnSpPr>
+        <p:spPr>
+          <a:xfrm>
+            <a:off x="5574182" y="3566160"/>
+            <a:ext cx="0" cy="182879"/>
+          </a:xfrm>
+          <a:prstGeom prst="line">
+            <a:avLst/>
+          </a:prstGeom>
+          <a:ln w="14288">
+            <a:solidFill>
+              <a:srgbClr val="AAAAAA"/>
+            </a:solidFill>
+          </a:ln>
+        </p:spPr>
+      </p:cxnSp>
+      <p:sp>
+        <p:nvSpPr>
+          <p:cNvPr id="507" name="서브_인프라 팀"/>
+          <p:cNvSpPr>
+            <a:spLocks noGrp="1"/>
+          </p:cNvSpPr>
+          <p:nvPr/>
+        </p:nvSpPr>
+        <p:spPr>
+          <a:xfrm>
+            <a:off x="1012800" y="4344480"/>
+            <a:ext cx="2651760" cy="1463040"/>
+          </a:xfrm>
+          <a:prstGeom prst="rect">
+            <a:avLst/>
+          </a:prstGeom>
+          <a:solidFill>
+            <a:srgbClr val="F8F9FA"/>
+          </a:solidFill>
+          <a:ln w="6350">
+            <a:solidFill>
+              <a:srgbClr val="DCDCDC"/>
+            </a:solidFill>
+          </a:ln>
+        </p:spPr>
+        <p:txBody>
+          <a:bodyPr anchor="t"/>
+          <a:lstStyle/>
+          <a:p>
+            <a:pPr algn="l"/>
+            <a:r>
+              <a:rPr lang="ko-KR" sz="1300">
+                <a:solidFill>
+                  <a:srgbClr val="212121"/>
+                </a:solidFill>
+                <a:latin typeface="프리젠테이션 7"/>
+              </a:rPr>
+              <a:t>역할: MSK 클러스터 관리·모니터링
+인원: 4명
+SLA 99.95% 유지</a:t>
+            </a:r>
+          </a:p>
+        </p:txBody>
+      </p:sp>
+      <p:sp>
+        <p:nvSpPr>
+          <p:cNvPr id="506" name="자식_인프라 팀"/>
+          <p:cNvSpPr>
+            <a:spLocks noGrp="1"/>
+          </p:cNvSpPr>
+          <p:nvPr/>
+        </p:nvSpPr>
+        <p:spPr>
+          <a:xfrm>
+            <a:off x="1012800" y="3748680"/>
+            <a:ext cx="2651760" cy="457200"/>
+          </a:xfrm>
+          <a:prstGeom prst="rect">
+            <a:avLst/>
+          </a:prstGeom>
+          <a:solidFill>
+            <a:srgbClr val="4F7DE5"/>
+          </a:solidFill>
+          <a:ln>
+            <a:noFill/>
+          </a:ln>
+        </p:spPr>
+        <p:txBody>
+          <a:bodyPr anchor="ctr"/>
+          <a:lstStyle/>
+          <a:p>
+            <a:pPr algn="ctr"/>
+            <a:r>
+              <a:rPr lang="ko-KR" sz="1400" b="1">
+                <a:solidFill>
+                  <a:srgbClr val="FFFFFF"/>
+                </a:solidFill>
+                <a:latin typeface="프리젠테이션 7"/>
+              </a:rPr>
+              <a:t>인프라 팀</a:t>
+            </a:r>
+          </a:p>
+        </p:txBody>
+      </p:sp>
+      <p:cxnSp>
+        <p:nvCxnSpPr>
+          <p:cNvPr id="505" name="선_인프라 팀"/>
+          <p:cNvCxnSpPr/>
+          <p:nvPr/>
+        </p:nvCxnSpPr>
+        <p:spPr>
+          <a:xfrm>
+            <a:off x="2180844" y="3566160"/>
+            <a:ext cx="0" cy="182879"/>
+          </a:xfrm>
+          <a:prstGeom prst="line">
+            <a:avLst/>
+          </a:prstGeom>
+          <a:ln w="14288">
+            <a:solidFill>
+              <a:srgbClr val="AAAAAA"/>
+            </a:solidFill>
+          </a:ln>
+        </p:spPr>
+      </p:cxnSp>
+      <p:cxnSp>
+        <p:nvCxnSpPr>
+          <p:cNvPr id="504" name="선_H바"/>
+          <p:cNvCxnSpPr/>
+          <p:nvPr/>
+        </p:nvCxnSpPr>
+        <p:spPr>
+          <a:xfrm>
+            <a:off x="2180844" y="3566160"/>
+            <a:ext cx="6760159" cy="0"/>
+          </a:xfrm>
+          <a:prstGeom prst="line">
+            <a:avLst/>
+          </a:prstGeom>
+          <a:ln w="14288">
+            <a:solidFill>
+              <a:srgbClr val="AAAAAA"/>
+            </a:solidFill>
+          </a:ln>
+        </p:spPr>
+      </p:cxnSp>
+      <p:cxnSp>
+        <p:nvCxnSpPr>
+          <p:cNvPr id="503" name="선_루트"/>
+          <p:cNvCxnSpPr/>
+          <p:nvPr/>
+        </p:nvCxnSpPr>
+        <p:spPr>
+          <a:xfrm>
+            <a:off x="5574182" y="3217773"/>
+            <a:ext cx="0" cy="348387"/>
+          </a:xfrm>
+          <a:prstGeom prst="line">
+            <a:avLst/>
+          </a:prstGeom>
+          <a:ln w="14288">
+            <a:solidFill>
+              <a:srgbClr val="AAAAAA"/>
+            </a:solidFill>
+          </a:ln>
+        </p:spPr>
+      </p:cxnSp>
+      <p:sp>
+        <p:nvSpPr>
+          <p:cNvPr id="502" name="루트 노드"/>
+          <p:cNvSpPr>
+            <a:spLocks noGrp="1"/>
+          </p:cNvSpPr>
+          <p:nvPr/>
+        </p:nvSpPr>
+        <p:spPr>
+          <a:xfrm>
+            <a:off x="4770600" y="2800000"/>
+            <a:ext cx="2651760" cy="457200"/>
+          </a:xfrm>
+          <a:prstGeom prst="rect">
+            <a:avLst/>
+          </a:prstGeom>
+          <a:solidFill>
+            <a:srgbClr val="0043DA"/>
+          </a:solidFill>
+          <a:ln>
+            <a:noFill/>
+          </a:ln>
+        </p:spPr>
+        <p:txBody>
+          <a:bodyPr anchor="ctr"/>
+          <a:lstStyle/>
+          <a:p>
+            <a:pPr algn="ctr"/>
+            <a:r>
+              <a:rPr lang="ko-KR" sz="1400" b="1">
+                <a:solidFill>
+                  <a:srgbClr val="FFFFFF"/>
+                </a:solidFill>
+                <a:latin typeface="프리젠테이션 7"/>
+              </a:rPr>
+              <a:t>메시징 플랫폼 TF</a:t>
+            </a:r>
+          </a:p>
+        </p:txBody>
+      </p:sp>
+      <p:sp>
+        <p:nvSpPr>
+          <p:cNvPr id="501" name="본문 설명"/>
+          <p:cNvSpPr>
+            <a:spLocks noGrp="1"/>
+          </p:cNvSpPr>
+          <p:nvPr/>
+        </p:nvSpPr>
+        <p:spPr>
+          <a:xfrm>
+            <a:off x="457200" y="1965960"/>
+            <a:ext cx="11277295" cy="228600"/>
+          </a:xfrm>
+          <a:prstGeom prst="rect">
+            <a:avLst/>
+          </a:prstGeom>
+          <a:noFill/>
+        </p:spPr>
+        <p:txBody>
+          <a:bodyPr wrap="square" anchor="t"/>
+          <a:lstStyle/>
+          <a:p>
+            <a:pPr algn="l"/>
+            <a:r>
+              <a:rPr lang="ko-KR" altLang="en-US" sz="1300" dirty="0">
+                <a:solidFill>
+                  <a:srgbClr val="212121"/>
+                </a:solidFill>
+                <a:latin typeface="프리젠테이션 5"/>
+              </a:rPr>
+              <a:t>메시징 플랫폼 운영팀 체계 (2026년 4월 기준, 총 15명)</a:t>
+            </a:r>
+          </a:p>
+        </p:txBody>
+      </p:sp>
+      <p:sp>
+        <p:nvSpPr>
+          <p:cNvPr id="500" name="본문 제목"/>
+          <p:cNvSpPr>
+            <a:spLocks noGrp="1"/>
+          </p:cNvSpPr>
+          <p:nvPr/>
+        </p:nvSpPr>
+        <p:spPr>
+          <a:xfrm>
+            <a:off x="457200" y="1600200"/>
+            <a:ext cx="11277295" cy="274320"/>
+          </a:xfrm>
+          <a:prstGeom prst="rect">
+            <a:avLst/>
+          </a:prstGeom>
+          <a:noFill/>
+        </p:spPr>
+        <p:txBody>
+          <a:bodyPr wrap="square" anchor="t"/>
+          <a:lstStyle/>
+          <a:p>
+            <a:pPr algn="l"/>
+            <a:r>
+              <a:rPr lang="ko-KR" altLang="en-US" sz="1600" b="1" dirty="0">
+                <a:solidFill>
+                  <a:srgbClr val="0043DA"/>
+                </a:solidFill>
+                <a:latin typeface="프리젠테이션 7"/>
+              </a:rPr>
+              <a:t>MSK 운영 조직 구조</a:t>
+            </a:r>
+          </a:p>
+        </p:txBody>
+      </p:sp>
+      <p:sp>
+        <p:nvSpPr>
+          <p:cNvPr id="3" name="텍스트 개체 틀 2"/>
+          <p:cNvSpPr>
+            <a:spLocks noGrp="1"/>
+          </p:cNvSpPr>
+          <p:nvPr>
+            <p:ph type="body" sz="quarter" idx="10"/>
+          </p:nvPr>
+        </p:nvSpPr>
+        <p:spPr/>
+        <p:txBody>
+          <a:bodyPr/>
+          <a:lstStyle/>
+          <a:p>
+            <a:endParaRPr lang="ko-KR" altLang="en-US"/>
+          </a:p>
+        </p:txBody>
+      </p:sp>
+      <p:sp>
+        <p:nvSpPr>
+          <p:cNvPr id="18" name="TextBox 17"/>
+          <p:cNvSpPr txBox="1"/>
+          <p:nvPr/>
+        </p:nvSpPr>
+        <p:spPr>
+          <a:xfrm>
+            <a:off x="354806" y="557906"/>
+            <a:ext cx="2720317" cy="932614"/>
+          </a:xfrm>
+          <a:prstGeom prst="rect">
+            <a:avLst/>
+          </a:prstGeom>
+          <a:noFill/>
+        </p:spPr>
+        <p:txBody>
+          <a:bodyPr wrap="square" lIns="0" tIns="0" rIns="0" bIns="0" rtlCol="0" anchor="t" anchorCtr="0">
+            <a:noAutofit/>
+          </a:bodyPr>
+          <a:lstStyle/>
+          <a:p>
+            <a:pPr algn="l"/>
+            <a:r>
+              <a:rPr lang="ko-KR" altLang="en-US" dirty="0" sz="2000" b="1">
+                <a:solidFill>
+                  <a:srgbClr val="212121"/>
+                </a:solidFill>
+                <a:latin typeface="프리젠테이션 7"/>
+              </a:rPr>
+              <a:t>L28. Org Chart</a:t>
+            </a:r>
+          </a:p>
+        </p:txBody>
+      </p:sp>
+      <p:sp>
+        <p:nvSpPr>
+          <p:cNvPr id="19" name="TextBox 18"/>
+          <p:cNvSpPr txBox="1"/>
+          <p:nvPr/>
+        </p:nvSpPr>
+        <p:spPr>
+          <a:xfrm>
+            <a:off x="3763700" y="558800"/>
+            <a:ext cx="7551483" cy="937918"/>
+          </a:xfrm>
+          <a:prstGeom prst="rect">
+            <a:avLst/>
+          </a:prstGeom>
+          <a:noFill/>
+        </p:spPr>
+        <p:txBody>
+          <a:bodyPr wrap="square" lIns="0" tIns="0" rIns="0" bIns="0" rtlCol="0" anchor="t" anchorCtr="0">
+            <a:noAutofit/>
+          </a:bodyPr>
+          <a:lstStyle/>
+          <a:p>
+            <a:pPr algn="l"/>
+            <a:r>
+              <a:rPr lang="ko-KR" altLang="en-US" dirty="0" sz="1300">
+                <a:solidFill>
+                  <a:srgbClr val="212121"/>
+                </a:solidFill>
+                <a:latin typeface="프리젠테이션 7"/>
+              </a:rPr>
+              <a:t>MSK 운영 조직 구조</a:t>
+            </a:r>
+          </a:p>
+        </p:txBody>
+      </p:sp>
+    </p:spTree>
+    <p:extLst>
+      <p:ext uri="{BB962C8B-B14F-4D97-AF65-F5344CB8AC3E}">
+        <p14:creationId xmlns:p14="http://schemas.microsoft.com/office/powerpoint/2010/main" val="1266982707"/>
+      </p:ext>
+    </p:extLst>
+  </p:cSld>
+  <p:clrMapOvr>
+    <a:masterClrMapping/>
+  </p:clrMapOvr>
+  <p:timing>
+    <p:tnLst>
+      <p:par>
+        <p:cTn id="1" dur="indefinite" restart="never" nodeType="tmRoot"/>
+      </p:par>
+    </p:tnLst>
+  </p:timing>
+</p:sld>
+</file>
+
+<file path=ppt/slides/slide31.xml><?xml version="1.0" encoding="utf-8"?>
+<p:sld xmlns:a="http://schemas.openxmlformats.org/drawingml/2006/main" xmlns:r="http://schemas.openxmlformats.org/officeDocument/2006/relationships" xmlns:p="http://schemas.openxmlformats.org/presentationml/2006/main">
+  <p:cSld>
+    <p:spTree>
+      <p:nvGrpSpPr>
+        <p:cNvPr id="1" name=""/>
+        <p:cNvGrpSpPr/>
+        <p:nvPr/>
+      </p:nvGrpSpPr>
+      <p:grpSpPr>
+        <a:xfrm>
+          <a:off x="0" y="0"/>
+          <a:ext cx="0" cy="0"/>
+          <a:chOff x="0" y="0"/>
+          <a:chExt cx="0" cy="0"/>
+        </a:xfrm>
+      </p:grpSpPr>
+      <p:sp>
+        <p:nvSpPr>
+          <p:cNvPr id="607" name="기초"/>
+          <p:cNvSpPr>
+            <a:spLocks noGrp="1"/>
+          </p:cNvSpPr>
+          <p:nvPr/>
+        </p:nvSpPr>
+        <p:spPr>
+          <a:xfrm>
+            <a:off x="457200" y="5622000"/>
+            <a:ext cx="11277600" cy="822960"/>
+          </a:xfrm>
+          <a:prstGeom prst="roundRect">
+            <a:avLst>
+              <a:gd name="adj" fmla="val 16667"/>
+            </a:avLst>
+          </a:prstGeom>
+          <a:solidFill>
+            <a:srgbClr val="F8F9FA"/>
+          </a:solidFill>
+          <a:ln w="6350">
+            <a:solidFill>
+              <a:srgbClr val="0043DA"/>
+            </a:solidFill>
+          </a:ln>
+        </p:spPr>
+        <p:txBody>
+          <a:bodyPr anchor="t"/>
+          <a:lstStyle/>
+          <a:p>
+            <a:pPr algn="l"/>
+            <a:r>
+              <a:rPr lang="ko-KR" sz="1200">
+                <a:solidFill>
+                  <a:srgbClr val="212121"/>
+                </a:solidFill>
+                <a:latin typeface="프리젠테이션 7"/>
+              </a:rPr>
+              <a:t>🏗️ Foundation: AWS 클라우드 네이티브 + DevOps 문화
+로드맵: Q2 기반 구축 → Q3 마이그레이션 (42개 레거시) → Q4 최적화·모니터링 고도화</a:t>
+            </a:r>
+          </a:p>
+        </p:txBody>
+      </p:sp>
+      <p:sp>
+        <p:nvSpPr>
+          <p:cNvPr id="606" name="기둥_비용 효율"/>
+          <p:cNvSpPr>
+            <a:spLocks noGrp="1"/>
+          </p:cNvSpPr>
+          <p:nvPr/>
+        </p:nvSpPr>
+        <p:spPr>
+          <a:xfrm>
+            <a:off x="8778960" y="3337320"/>
+            <a:ext cx="2194560" cy="2102640"/>
+          </a:xfrm>
+          <a:prstGeom prst="roundRect">
+            <a:avLst>
+              <a:gd name="adj" fmla="val 16667"/>
+            </a:avLst>
+          </a:prstGeom>
+          <a:solidFill>
+            <a:srgbClr val="E6ECFC"/>
+          </a:solidFill>
+          <a:ln w="6350">
+            <a:solidFill>
+              <a:srgbClr val="0043DA"/>
+            </a:solidFill>
+          </a:ln>
+        </p:spPr>
+        <p:txBody>
+          <a:bodyPr anchor="t"/>
+          <a:lstStyle/>
+          <a:p>
+            <a:pPr algn="ctr"/>
+            <a:r>
+              <a:rPr lang="ko-KR" sz="1200">
+                <a:solidFill>
+                  <a:srgbClr val="212121"/>
+                </a:solidFill>
+                <a:latin typeface="프리젠테이션 7"/>
+              </a:rPr>
+              <a:t>비용 효율
+완전 관리형으로
+운영 비용 절감
+────────
+TCO -35%
+온프레미스 대비 3년</a:t>
+            </a:r>
+          </a:p>
+        </p:txBody>
+      </p:sp>
+      <p:sp>
+        <p:nvSpPr>
+          <p:cNvPr id="605" name="기둥_보안"/>
+          <p:cNvSpPr>
+            <a:spLocks noGrp="1"/>
+          </p:cNvSpPr>
+          <p:nvPr/>
+        </p:nvSpPr>
+        <p:spPr>
+          <a:xfrm>
+            <a:off x="6218400" y="3337320"/>
+            <a:ext cx="2194560" cy="2102640"/>
+          </a:xfrm>
+          <a:prstGeom prst="roundRect">
+            <a:avLst>
+              <a:gd name="adj" fmla="val 16667"/>
+            </a:avLst>
+          </a:prstGeom>
+          <a:solidFill>
+            <a:srgbClr val="E6ECFC"/>
+          </a:solidFill>
+          <a:ln w="6350">
+            <a:solidFill>
+              <a:srgbClr val="0043DA"/>
+            </a:solidFill>
+          </a:ln>
+        </p:spPr>
+        <p:txBody>
+          <a:bodyPr anchor="t"/>
+          <a:lstStyle/>
+          <a:p>
+            <a:pPr algn="ctr"/>
+            <a:r>
+              <a:rPr lang="ko-KR" sz="1200">
+                <a:solidFill>
+                  <a:srgbClr val="212121"/>
+                </a:solidFill>
+                <a:latin typeface="프리젠테이션 7"/>
+              </a:rPr>
+              <a:t>보안
+Zero Trust: IAM
++ mTLS + KMS 3중 보호
+────────
+취약점 0건
+연간 보안 감사 기준</a:t>
+            </a:r>
+          </a:p>
+        </p:txBody>
+      </p:sp>
+      <p:sp>
+        <p:nvSpPr>
+          <p:cNvPr id="604" name="기둥_안정성"/>
+          <p:cNvSpPr>
+            <a:spLocks noGrp="1"/>
+          </p:cNvSpPr>
+          <p:nvPr/>
+        </p:nvSpPr>
+        <p:spPr>
+          <a:xfrm>
+            <a:off x="3657840" y="3337320"/>
+            <a:ext cx="2194560" cy="2102640"/>
+          </a:xfrm>
+          <a:prstGeom prst="roundRect">
+            <a:avLst>
+              <a:gd name="adj" fmla="val 16667"/>
+            </a:avLst>
+          </a:prstGeom>
+          <a:solidFill>
+            <a:srgbClr val="E6ECFC"/>
+          </a:solidFill>
+          <a:ln w="6350">
+            <a:solidFill>
+              <a:srgbClr val="0043DA"/>
+            </a:solidFill>
+          </a:ln>
+        </p:spPr>
+        <p:txBody>
+          <a:bodyPr anchor="t"/>
+          <a:lstStyle/>
+          <a:p>
+            <a:pPr algn="ctr"/>
+            <a:r>
+              <a:rPr lang="ko-KR" sz="1200">
+                <a:solidFill>
+                  <a:srgbClr val="212121"/>
+                </a:solidFill>
+                <a:latin typeface="프리젠테이션 7"/>
+              </a:rPr>
+              <a:t>안정성
+Multi-AZ 자동 복제
++ 자동 복구
+────────
+99.95% SLA
+가용성 목표</a:t>
+            </a:r>
+          </a:p>
+        </p:txBody>
+      </p:sp>
+      <p:sp>
+        <p:nvSpPr>
+          <p:cNvPr id="603" name="기둥_확장성"/>
+          <p:cNvSpPr>
+            <a:spLocks noGrp="1"/>
+          </p:cNvSpPr>
+          <p:nvPr/>
+        </p:nvSpPr>
+        <p:spPr>
+          <a:xfrm>
+            <a:off x="1097280" y="3337320"/>
+            <a:ext cx="2194560" cy="2102640"/>
+          </a:xfrm>
+          <a:prstGeom prst="roundRect">
+            <a:avLst>
+              <a:gd name="adj" fmla="val 16667"/>
+            </a:avLst>
+          </a:prstGeom>
+          <a:solidFill>
+            <a:srgbClr val="E6ECFC"/>
+          </a:solidFill>
+          <a:ln w="6350">
+            <a:solidFill>
+              <a:srgbClr val="0043DA"/>
+            </a:solidFill>
+          </a:ln>
+        </p:spPr>
+        <p:txBody>
+          <a:bodyPr anchor="t"/>
+          <a:lstStyle/>
+          <a:p>
+            <a:pPr algn="ctr"/>
+            <a:r>
+              <a:rPr lang="ko-KR" sz="1200">
+                <a:solidFill>
+                  <a:srgbClr val="212121"/>
+                </a:solidFill>
+                <a:latin typeface="프리젠테이션 7"/>
+              </a:rPr>
+              <a:t>확장성
+수평 스케일 아웃으로
+무한 처리량 확보
+────────
+50K→200K TPS
+2028 목표 처리량</a:t>
+            </a:r>
+          </a:p>
+        </p:txBody>
+      </p:sp>
+      <p:sp>
+        <p:nvSpPr>
+          <p:cNvPr id="602" name="지붕"/>
+          <p:cNvSpPr>
+            <a:spLocks noGrp="1"/>
+          </p:cNvSpPr>
+          <p:nvPr/>
+        </p:nvSpPr>
+        <p:spPr>
+          <a:xfrm>
+            <a:off x="457200" y="2423160"/>
+            <a:ext cx="11277600" cy="731520"/>
+          </a:xfrm>
+          <a:prstGeom prst="roundRect">
+            <a:avLst>
+              <a:gd name="adj" fmla="val 16667"/>
+            </a:avLst>
+          </a:prstGeom>
+          <a:solidFill>
+            <a:srgbClr val="0043DA"/>
+          </a:solidFill>
+          <a:ln>
+            <a:noFill/>
+          </a:ln>
+        </p:spPr>
+        <p:txBody>
+          <a:bodyPr anchor="ctr"/>
+          <a:lstStyle/>
+          <a:p>
+            <a:pPr algn="ctr"/>
+            <a:r>
+              <a:rPr lang="ko-KR" sz="1400" b="1">
+                <a:solidFill>
+                  <a:srgbClr val="FFFFFF"/>
+                </a:solidFill>
+                <a:latin typeface="프리젠테이션 7"/>
+              </a:rPr>
+              <a:t>🎯 Vision: 실시간 데이터 중심 비즈니스 혁신 — 2028년까지 전사 데이터 레이턴시 &lt; 1초 달성</a:t>
+            </a:r>
+          </a:p>
+        </p:txBody>
+      </p:sp>
+      <p:sp>
+        <p:nvSpPr>
+          <p:cNvPr id="601" name="본문 설명"/>
+          <p:cNvSpPr>
+            <a:spLocks noGrp="1"/>
+          </p:cNvSpPr>
+          <p:nvPr/>
+        </p:nvSpPr>
+        <p:spPr>
+          <a:xfrm>
+            <a:off x="457200" y="1965960"/>
+            <a:ext cx="11277295" cy="228600"/>
+          </a:xfrm>
+          <a:prstGeom prst="rect">
+            <a:avLst/>
+          </a:prstGeom>
+          <a:noFill/>
+        </p:spPr>
+        <p:txBody>
+          <a:bodyPr wrap="square" anchor="t"/>
+          <a:lstStyle/>
+          <a:p>
+            <a:pPr algn="l"/>
+            <a:r>
+              <a:rPr lang="ko-KR" altLang="en-US" sz="1300" dirty="0">
+                <a:solidFill>
+                  <a:srgbClr val="212121"/>
+                </a:solidFill>
+                <a:latin typeface="프리젠테이션 5"/>
+              </a:rPr>
+              <a:t>Vision부터 Foundation까지 통합 전략 (2026~2028, 3개년)</a:t>
+            </a:r>
+          </a:p>
+        </p:txBody>
+      </p:sp>
+      <p:sp>
+        <p:nvSpPr>
+          <p:cNvPr id="600" name="본문 제목"/>
+          <p:cNvSpPr>
+            <a:spLocks noGrp="1"/>
+          </p:cNvSpPr>
+          <p:nvPr/>
+        </p:nvSpPr>
+        <p:spPr>
+          <a:xfrm>
+            <a:off x="457200" y="1600200"/>
+            <a:ext cx="11277295" cy="274320"/>
+          </a:xfrm>
+          <a:prstGeom prst="rect">
+            <a:avLst/>
+          </a:prstGeom>
+          <a:noFill/>
+        </p:spPr>
+        <p:txBody>
+          <a:bodyPr wrap="square" anchor="t"/>
+          <a:lstStyle/>
+          <a:p>
+            <a:pPr algn="l"/>
+            <a:r>
+              <a:rPr lang="ko-KR" altLang="en-US" sz="1600" b="1" dirty="0">
+                <a:solidFill>
+                  <a:srgbClr val="0043DA"/>
+                </a:solidFill>
+                <a:latin typeface="프리젠테이션 7"/>
+              </a:rPr>
+              <a:t>MSK 플랫폼 전략 — Temple 구조</a:t>
+            </a:r>
+          </a:p>
+        </p:txBody>
+      </p:sp>
+      <p:sp>
+        <p:nvSpPr>
+          <p:cNvPr id="3" name="텍스트 개체 틀 2"/>
+          <p:cNvSpPr>
+            <a:spLocks noGrp="1"/>
+          </p:cNvSpPr>
+          <p:nvPr>
+            <p:ph type="body" sz="quarter" idx="10"/>
+          </p:nvPr>
+        </p:nvSpPr>
+        <p:spPr/>
+        <p:txBody>
+          <a:bodyPr/>
+          <a:lstStyle/>
+          <a:p>
+            <a:endParaRPr lang="ko-KR" altLang="en-US"/>
+          </a:p>
+        </p:txBody>
+      </p:sp>
+      <p:sp>
+        <p:nvSpPr>
+          <p:cNvPr id="18" name="TextBox 17"/>
+          <p:cNvSpPr txBox="1"/>
+          <p:nvPr/>
+        </p:nvSpPr>
+        <p:spPr>
+          <a:xfrm>
+            <a:off x="354806" y="557906"/>
+            <a:ext cx="2720317" cy="932614"/>
+          </a:xfrm>
+          <a:prstGeom prst="rect">
+            <a:avLst/>
+          </a:prstGeom>
+          <a:noFill/>
+        </p:spPr>
+        <p:txBody>
+          <a:bodyPr wrap="square" lIns="0" tIns="0" rIns="0" bIns="0" rtlCol="0" anchor="t" anchorCtr="0">
+            <a:noAutofit/>
+          </a:bodyPr>
+          <a:lstStyle/>
+          <a:p>
+            <a:pPr algn="l"/>
+            <a:r>
+              <a:rPr lang="ko-KR" altLang="en-US" dirty="0" sz="2000" b="1">
+                <a:solidFill>
+                  <a:srgbClr val="212121"/>
+                </a:solidFill>
+                <a:latin typeface="프리젠테이션 7"/>
+              </a:rPr>
+              <a:t>L29. Temple Pillars</a:t>
+            </a:r>
+          </a:p>
+        </p:txBody>
+      </p:sp>
+      <p:sp>
+        <p:nvSpPr>
+          <p:cNvPr id="19" name="TextBox 18"/>
+          <p:cNvSpPr txBox="1"/>
+          <p:nvPr/>
+        </p:nvSpPr>
+        <p:spPr>
+          <a:xfrm>
+            <a:off x="3763700" y="558800"/>
+            <a:ext cx="7551483" cy="937918"/>
+          </a:xfrm>
+          <a:prstGeom prst="rect">
+            <a:avLst/>
+          </a:prstGeom>
+          <a:noFill/>
+        </p:spPr>
+        <p:txBody>
+          <a:bodyPr wrap="square" lIns="0" tIns="0" rIns="0" bIns="0" rtlCol="0" anchor="t" anchorCtr="0">
+            <a:noAutofit/>
+          </a:bodyPr>
+          <a:lstStyle/>
+          <a:p>
+            <a:pPr algn="l"/>
+            <a:r>
+              <a:rPr lang="ko-KR" altLang="en-US" dirty="0" sz="1300">
+                <a:solidFill>
+                  <a:srgbClr val="212121"/>
+                </a:solidFill>
+                <a:latin typeface="프리젠테이션 7"/>
+              </a:rPr>
+              <a:t>MSK 플랫폼 전략 — Temple 구조</a:t>
+            </a:r>
+          </a:p>
+        </p:txBody>
+      </p:sp>
+    </p:spTree>
+    <p:extLst>
+      <p:ext uri="{BB962C8B-B14F-4D97-AF65-F5344CB8AC3E}">
+        <p14:creationId xmlns:p14="http://schemas.microsoft.com/office/powerpoint/2010/main" val="2750645875"/>
+      </p:ext>
+    </p:extLst>
+  </p:cSld>
+  <p:clrMapOvr>
+    <a:masterClrMapping/>
+  </p:clrMapOvr>
+  <p:timing>
+    <p:tnLst>
+      <p:par>
+        <p:cTn id="1" dur="indefinite" restart="never" nodeType="tmRoot"/>
+      </p:par>
+    </p:tnLst>
+  </p:timing>
+</p:sld>
+</file>
+
+<file path=ppt/slides/slide32.xml><?xml version="1.0" encoding="utf-8"?>
+<p:sld xmlns:a="http://schemas.openxmlformats.org/drawingml/2006/main" xmlns:r="http://schemas.openxmlformats.org/officeDocument/2006/relationships" xmlns:p="http://schemas.openxmlformats.org/presentationml/2006/main">
+  <p:cSld>
+    <p:spTree>
+      <p:nvGrpSpPr>
+        <p:cNvPr id="1" name=""/>
+        <p:cNvGrpSpPr/>
+        <p:nvPr/>
+      </p:nvGrpSpPr>
+      <p:grpSpPr>
+        <a:xfrm>
+          <a:off x="0" y="0"/>
+          <a:ext cx="0" cy="0"/>
+          <a:chOff x="0" y="0"/>
+          <a:chExt cx="0" cy="0"/>
+        </a:xfrm>
+      </p:grpSpPr>
+      <p:sp>
+        <p:nvSpPr>
+          <p:cNvPr id="2" name="Google Shape;679;p32"/>
+          <p:cNvSpPr txBox="1">
+            <a:spLocks/>
+          </p:cNvSpPr>
+          <p:nvPr/>
+        </p:nvSpPr>
+        <p:spPr>
+          <a:xfrm>
+            <a:off x="0" y="2699114"/>
+            <a:ext cx="12192000" cy="1019175"/>
+          </a:xfrm>
+          <a:prstGeom prst="rect">
+            <a:avLst/>
+          </a:prstGeom>
+          <a:noFill/>
+          <a:ln>
+            <a:noFill/>
+          </a:ln>
+        </p:spPr>
+        <p:txBody>
+          <a:bodyPr spcFirstLastPara="1" wrap="square" lIns="91425" tIns="45700" rIns="91425" bIns="45700" anchor="ctr" anchorCtr="0">
+            <a:normAutofit/>
+          </a:bodyPr>
+          <a:lstStyle>
+            <a:lvl1pPr marL="228600" indent="-228600" algn="l" defTabSz="914400" rtl="0" eaLnBrk="1" latinLnBrk="1" hangingPunct="1">
+              <a:lnSpc>
+                <a:spcPct val="90000"/>
+              </a:lnSpc>
+              <a:spcBef>
+                <a:spcPts val="1000"/>
+              </a:spcBef>
+              <a:buFont typeface="Arial" panose="020B0604020202020204" pitchFamily="34" charset="0"/>
+              <a:buChar char="•"/>
+              <a:defRPr sz="2800" kern="1200">
+                <a:solidFill>
+                  <a:schemeClr val="tx1"/>
+                </a:solidFill>
+                <a:latin typeface="+mn-lt"/>
+                <a:ea typeface="+mn-ea"/>
+                <a:cs typeface="+mn-cs"/>
+              </a:defRPr>
+            </a:lvl1pPr>
+            <a:lvl2pPr marL="685800" indent="-228600" algn="l" defTabSz="914400" rtl="0" eaLnBrk="1" latinLnBrk="1" hangingPunct="1">
+              <a:lnSpc>
+                <a:spcPct val="90000"/>
+              </a:lnSpc>
+              <a:spcBef>
+                <a:spcPts val="500"/>
+              </a:spcBef>
+              <a:buFont typeface="Arial" panose="020B0604020202020204" pitchFamily="34" charset="0"/>
+              <a:buChar char="•"/>
+              <a:defRPr sz="2400" kern="1200">
+                <a:solidFill>
+                  <a:schemeClr val="tx1"/>
+                </a:solidFill>
+                <a:latin typeface="+mn-lt"/>
+                <a:ea typeface="+mn-ea"/>
+                <a:cs typeface="+mn-cs"/>
+              </a:defRPr>
+            </a:lvl2pPr>
+            <a:lvl3pPr marL="1143000" indent="-228600" algn="l" defTabSz="914400" rtl="0" eaLnBrk="1" latinLnBrk="1" hangingPunct="1">
+              <a:lnSpc>
+                <a:spcPct val="90000"/>
+              </a:lnSpc>
+              <a:spcBef>
+                <a:spcPts val="500"/>
+              </a:spcBef>
+              <a:buFont typeface="Arial" panose="020B0604020202020204" pitchFamily="34" charset="0"/>
+              <a:buChar char="•"/>
+              <a:defRPr sz="2000" kern="1200">
+                <a:solidFill>
+                  <a:schemeClr val="tx1"/>
+                </a:solidFill>
+                <a:latin typeface="+mn-lt"/>
+                <a:ea typeface="+mn-ea"/>
+                <a:cs typeface="+mn-cs"/>
+              </a:defRPr>
+            </a:lvl3pPr>
+            <a:lvl4pPr marL="1600200" indent="-228600" algn="l" defTabSz="914400" rtl="0" eaLnBrk="1" latinLnBrk="1" hangingPunct="1">
+              <a:lnSpc>
+                <a:spcPct val="90000"/>
+              </a:lnSpc>
+              <a:spcBef>
+                <a:spcPts val="500"/>
+              </a:spcBef>
+              <a:buFont typeface="Arial" panose="020B0604020202020204" pitchFamily="34" charset="0"/>
+              <a:buChar char="•"/>
+              <a:defRPr sz="1800" kern="1200">
+                <a:solidFill>
+                  <a:schemeClr val="tx1"/>
+                </a:solidFill>
+                <a:latin typeface="+mn-lt"/>
+                <a:ea typeface="+mn-ea"/>
+                <a:cs typeface="+mn-cs"/>
+              </a:defRPr>
+            </a:lvl4pPr>
+            <a:lvl5pPr marL="2057400" indent="-228600" algn="l" defTabSz="914400" rtl="0" eaLnBrk="1" latinLnBrk="1" hangingPunct="1">
+              <a:lnSpc>
+                <a:spcPct val="90000"/>
+              </a:lnSpc>
+              <a:spcBef>
+                <a:spcPts val="500"/>
+              </a:spcBef>
+              <a:buFont typeface="Arial" panose="020B0604020202020204" pitchFamily="34" charset="0"/>
+              <a:buChar char="•"/>
+              <a:defRPr sz="1800" kern="1200">
+                <a:solidFill>
+                  <a:schemeClr val="tx1"/>
+                </a:solidFill>
+                <a:latin typeface="+mn-lt"/>
+                <a:ea typeface="+mn-ea"/>
+                <a:cs typeface="+mn-cs"/>
+              </a:defRPr>
+            </a:lvl5pPr>
+            <a:lvl6pPr marL="2514600" indent="-228600" algn="l" defTabSz="914400" rtl="0" eaLnBrk="1" latinLnBrk="1" hangingPunct="1">
+              <a:lnSpc>
+                <a:spcPct val="90000"/>
+              </a:lnSpc>
+              <a:spcBef>
+                <a:spcPts val="500"/>
+              </a:spcBef>
+              <a:buFont typeface="Arial" panose="020B0604020202020204" pitchFamily="34" charset="0"/>
+              <a:buChar char="•"/>
+              <a:defRPr sz="1800" kern="1200">
+                <a:solidFill>
+                  <a:schemeClr val="tx1"/>
+                </a:solidFill>
+                <a:latin typeface="+mn-lt"/>
+                <a:ea typeface="+mn-ea"/>
+                <a:cs typeface="+mn-cs"/>
+              </a:defRPr>
+            </a:lvl6pPr>
+            <a:lvl7pPr marL="2971800" indent="-228600" algn="l" defTabSz="914400" rtl="0" eaLnBrk="1" latinLnBrk="1" hangingPunct="1">
+              <a:lnSpc>
+                <a:spcPct val="90000"/>
+              </a:lnSpc>
+              <a:spcBef>
+                <a:spcPts val="500"/>
+              </a:spcBef>
+              <a:buFont typeface="Arial" panose="020B0604020202020204" pitchFamily="34" charset="0"/>
+              <a:buChar char="•"/>
+              <a:defRPr sz="1800" kern="1200">
+                <a:solidFill>
+                  <a:schemeClr val="tx1"/>
+                </a:solidFill>
+                <a:latin typeface="+mn-lt"/>
+                <a:ea typeface="+mn-ea"/>
+                <a:cs typeface="+mn-cs"/>
+              </a:defRPr>
+            </a:lvl7pPr>
+            <a:lvl8pPr marL="3429000" indent="-228600" algn="l" defTabSz="914400" rtl="0" eaLnBrk="1" latinLnBrk="1" hangingPunct="1">
+              <a:lnSpc>
+                <a:spcPct val="90000"/>
+              </a:lnSpc>
+              <a:spcBef>
+                <a:spcPts val="500"/>
+              </a:spcBef>
+              <a:buFont typeface="Arial" panose="020B0604020202020204" pitchFamily="34" charset="0"/>
+              <a:buChar char="•"/>
+              <a:defRPr sz="1800" kern="1200">
+                <a:solidFill>
+                  <a:schemeClr val="tx1"/>
+                </a:solidFill>
+                <a:latin typeface="+mn-lt"/>
+                <a:ea typeface="+mn-ea"/>
+                <a:cs typeface="+mn-cs"/>
+              </a:defRPr>
+            </a:lvl8pPr>
+            <a:lvl9pPr marL="3886200" indent="-228600" algn="l" defTabSz="914400" rtl="0" eaLnBrk="1" latinLnBrk="1" hangingPunct="1">
+              <a:lnSpc>
+                <a:spcPct val="90000"/>
+              </a:lnSpc>
+              <a:spcBef>
+                <a:spcPts val="500"/>
+              </a:spcBef>
+              <a:buFont typeface="Arial" panose="020B0604020202020204" pitchFamily="34" charset="0"/>
+              <a:buChar char="•"/>
+              <a:defRPr sz="1800" kern="1200">
+                <a:solidFill>
+                  <a:schemeClr val="tx1"/>
+                </a:solidFill>
+                <a:latin typeface="+mn-lt"/>
+                <a:ea typeface="+mn-ea"/>
+                <a:cs typeface="+mn-cs"/>
+              </a:defRPr>
+            </a:lvl9pPr>
+          </a:lstStyle>
+          <a:p>
+            <a:pPr marL="0" indent="0" algn="ctr">
+              <a:spcBef>
+                <a:spcPts val="0"/>
+              </a:spcBef>
+              <a:buClr>
+                <a:schemeClr val="lt1"/>
+              </a:buClr>
+              <a:buSzPts val="4000"/>
+              <a:buNone/>
+            </a:pPr>
+            <a:r>
+              <a:rPr lang="en-US" altLang="ko-KR" sz="6000" dirty="0">
+                <a:solidFill>
+                  <a:schemeClr val="bg1"/>
+                </a:solidFill>
+                <a:latin typeface="프리젠테이션 7 Bold" pitchFamily="2" charset="-127"/>
+                <a:ea typeface="프리젠테이션 7 Bold" pitchFamily="2" charset="-127"/>
+              </a:rPr>
+              <a:t>Thank You</a:t>
+            </a:r>
+          </a:p>
+        </p:txBody>
+      </p:sp>
+      <p:pic>
+        <p:nvPicPr>
+          <p:cNvPr id="28" name="그림 27"/>
+          <p:cNvPicPr>
+            <a:picLocks noChangeAspect="1"/>
+          </p:cNvPicPr>
+          <p:nvPr/>
+        </p:nvPicPr>
+        <p:blipFill>
+          <a:blip r:embed="rId2" cstate="print">
+            <a:extLst>
+              <a:ext uri="{28A0092B-C50C-407E-A947-70E740481C1C}">
+                <a14:useLocalDpi xmlns:a14="http://schemas.microsoft.com/office/drawing/2010/main" val="0"/>
+              </a:ext>
+            </a:extLst>
+          </a:blip>
+          <a:stretch>
+            <a:fillRect/>
+          </a:stretch>
+        </p:blipFill>
+        <p:spPr>
+          <a:xfrm>
+            <a:off x="5402036" y="378400"/>
+            <a:ext cx="1329872" cy="330546"/>
+          </a:xfrm>
+          <a:prstGeom prst="rect">
+            <a:avLst/>
+          </a:prstGeom>
+        </p:spPr>
+      </p:pic>
+      <p:sp>
+        <p:nvSpPr>
+          <p:cNvPr id="35" name="TextBox 34"/>
+          <p:cNvSpPr txBox="1"/>
+          <p:nvPr/>
+        </p:nvSpPr>
+        <p:spPr>
+          <a:xfrm>
+            <a:off x="3398157" y="3870726"/>
+            <a:ext cx="5395685" cy="543635"/>
+          </a:xfrm>
+          <a:prstGeom prst="rect">
+            <a:avLst/>
+          </a:prstGeom>
+          <a:noFill/>
+        </p:spPr>
+        <p:txBody>
+          <a:bodyPr wrap="square" lIns="0" tIns="0" rIns="0" bIns="0" rtlCol="0" anchor="ctr" anchorCtr="0">
+            <a:noAutofit/>
+          </a:bodyPr>
+          <a:lstStyle/>
+          <a:p>
+            <a:pPr latinLnBrk="0"/>
+            <a:r>
+              <a:rPr lang="en-US" altLang="ko-KR" sz="1600" dirty="0">
+                <a:ln>
+                  <a:solidFill>
+                    <a:schemeClr val="accent1">
+                      <a:alpha val="0"/>
+                    </a:schemeClr>
+                  </a:solidFill>
+                </a:ln>
+                <a:solidFill>
+                  <a:schemeClr val="bg1"/>
+                </a:solidFill>
+                <a:latin typeface="프리젠테이션 4 Regular" pitchFamily="2" charset="-127"/>
+                <a:ea typeface="프리젠테이션 4 Regular" pitchFamily="2" charset="-127"/>
+                <a:cs typeface="Pretendard" panose="02000503000000020004" pitchFamily="2" charset="-127"/>
+              </a:rPr>
+              <a:t>GS</a:t>
+            </a:r>
+            <a:r>
+              <a:rPr lang="ko-KR" altLang="en-US" sz="1600" dirty="0" err="1">
+                <a:ln>
+                  <a:solidFill>
+                    <a:schemeClr val="accent1">
+                      <a:alpha val="0"/>
+                    </a:schemeClr>
+                  </a:solidFill>
+                </a:ln>
+                <a:solidFill>
+                  <a:schemeClr val="bg1"/>
+                </a:solidFill>
+                <a:latin typeface="프리젠테이션 4 Regular" pitchFamily="2" charset="-127"/>
+                <a:ea typeface="프리젠테이션 4 Regular" pitchFamily="2" charset="-127"/>
+                <a:cs typeface="Pretendard" panose="02000503000000020004" pitchFamily="2" charset="-127"/>
+              </a:rPr>
+              <a:t>네오텍의</a:t>
+            </a:r>
+            <a:r>
+              <a:rPr lang="ko-KR" altLang="en-US" sz="1600" dirty="0">
+                <a:ln>
+                  <a:solidFill>
+                    <a:schemeClr val="accent1">
+                      <a:alpha val="0"/>
+                    </a:schemeClr>
+                  </a:solidFill>
+                </a:ln>
+                <a:solidFill>
+                  <a:schemeClr val="bg1"/>
+                </a:solidFill>
+                <a:latin typeface="프리젠테이션 4 Regular" pitchFamily="2" charset="-127"/>
+                <a:ea typeface="프리젠테이션 4 Regular" pitchFamily="2" charset="-127"/>
+                <a:cs typeface="Pretendard" panose="02000503000000020004" pitchFamily="2" charset="-127"/>
+              </a:rPr>
+              <a:t> </a:t>
+            </a:r>
+            <a:r>
+              <a:rPr lang="en-US" altLang="ko-KR" sz="1600" dirty="0">
+                <a:ln>
+                  <a:solidFill>
+                    <a:schemeClr val="accent1">
+                      <a:alpha val="0"/>
+                    </a:schemeClr>
+                  </a:solidFill>
+                </a:ln>
+                <a:solidFill>
+                  <a:schemeClr val="bg1"/>
+                </a:solidFill>
+                <a:latin typeface="프리젠테이션 4 Regular" pitchFamily="2" charset="-127"/>
+                <a:ea typeface="프리젠테이션 4 Regular" pitchFamily="2" charset="-127"/>
+                <a:cs typeface="Pretendard" panose="02000503000000020004" pitchFamily="2" charset="-127"/>
+              </a:rPr>
+              <a:t>IT</a:t>
+            </a:r>
+            <a:r>
+              <a:rPr lang="ko-KR" altLang="en-US" sz="1600" dirty="0">
+                <a:ln>
+                  <a:solidFill>
+                    <a:schemeClr val="accent1">
+                      <a:alpha val="0"/>
+                    </a:schemeClr>
+                  </a:solidFill>
+                </a:ln>
+                <a:solidFill>
+                  <a:schemeClr val="bg1"/>
+                </a:solidFill>
+                <a:latin typeface="프리젠테이션 4 Regular" pitchFamily="2" charset="-127"/>
+                <a:ea typeface="프리젠테이션 4 Regular" pitchFamily="2" charset="-127"/>
+                <a:cs typeface="Pretendard" panose="02000503000000020004" pitchFamily="2" charset="-127"/>
+              </a:rPr>
+              <a:t>서비스 브랜드 </a:t>
+            </a:r>
+            <a:r>
+              <a:rPr lang="en-US" altLang="ko-KR" sz="1600" dirty="0" err="1">
+                <a:ln>
+                  <a:solidFill>
+                    <a:schemeClr val="accent1">
+                      <a:alpha val="0"/>
+                    </a:schemeClr>
+                  </a:solidFill>
+                </a:ln>
+                <a:solidFill>
+                  <a:schemeClr val="bg1"/>
+                </a:solidFill>
+                <a:latin typeface="프리젠테이션 4 Regular" pitchFamily="2" charset="-127"/>
+                <a:ea typeface="프리젠테이션 4 Regular" pitchFamily="2" charset="-127"/>
+                <a:cs typeface="Pretendard" panose="02000503000000020004" pitchFamily="2" charset="-127"/>
+              </a:rPr>
+              <a:t>WiseN</a:t>
+            </a:r>
+            <a:r>
+              <a:rPr lang="ko-KR" altLang="en-US" sz="1600" dirty="0">
+                <a:ln>
+                  <a:solidFill>
+                    <a:schemeClr val="accent1">
+                      <a:alpha val="0"/>
+                    </a:schemeClr>
+                  </a:solidFill>
+                </a:ln>
+                <a:solidFill>
+                  <a:schemeClr val="bg1"/>
+                </a:solidFill>
+                <a:latin typeface="프리젠테이션 4 Regular" pitchFamily="2" charset="-127"/>
+                <a:ea typeface="프리젠테이션 4 Regular" pitchFamily="2" charset="-127"/>
+                <a:cs typeface="Pretendard" panose="02000503000000020004" pitchFamily="2" charset="-127"/>
+              </a:rPr>
+              <a:t>으로 진정한 프리미엄을 경험하세요</a:t>
+            </a:r>
+            <a:r>
+              <a:rPr lang="en-US" altLang="ko-KR" sz="1600" dirty="0">
+                <a:ln>
+                  <a:solidFill>
+                    <a:schemeClr val="accent1">
+                      <a:alpha val="0"/>
+                    </a:schemeClr>
+                  </a:solidFill>
+                </a:ln>
+                <a:solidFill>
+                  <a:schemeClr val="bg1"/>
+                </a:solidFill>
+                <a:latin typeface="프리젠테이션 4 Regular" pitchFamily="2" charset="-127"/>
+                <a:ea typeface="프리젠테이션 4 Regular" pitchFamily="2" charset="-127"/>
+                <a:cs typeface="Pretendard" panose="02000503000000020004" pitchFamily="2" charset="-127"/>
+              </a:rPr>
+              <a:t>.</a:t>
+            </a:r>
+          </a:p>
+        </p:txBody>
+      </p:sp>
+    </p:spTree>
+    <p:extLst>
+      <p:ext uri="{BB962C8B-B14F-4D97-AF65-F5344CB8AC3E}">
+        <p14:creationId xmlns:p14="http://schemas.microsoft.com/office/powerpoint/2010/main" val="3722360403"/>
+      </p:ext>
+    </p:extLst>
   </p:cSld>
   <p:clrMapOvr>
     <a:masterClrMapping/>

--- a/results/pptx/AWS_MSK_Expert_Intro.pptx
+++ b/results/pptx/AWS_MSK_Expert_Intro.pptx
@@ -14315,9 +14315,7 @@
           <a:noFill/>
         </p:spPr>
         <p:txBody>
-          <a:bodyPr wrap="square" lIns="0" tIns="0" rIns="0" bIns="0">
-            <a:spAutoFit/>
-          </a:bodyPr>
+          <a:bodyPr lIns="0" tIns="0" rIns="0" bIns="0" anchor="t"/>
           <a:lstStyle/>
           <a:p>
             <a:pPr algn="l"/>
@@ -14987,9 +14985,7 @@
           <a:noFill/>
         </p:spPr>
         <p:txBody>
-          <a:bodyPr wrap="square">
-            <a:spAutoFit/>
-          </a:bodyPr>
+          <a:bodyPr lIns="0" tIns="0" rIns="0" bIns="0" anchor="t"/>
           <a:lstStyle/>
           <a:p>
             <a:r>
@@ -15636,9 +15632,7 @@
           <a:noFill/>
         </p:spPr>
         <p:txBody>
-          <a:bodyPr wrap="square">
-            <a:spAutoFit/>
-          </a:bodyPr>
+          <a:bodyPr lIns="0" tIns="0" rIns="0" bIns="0" anchor="t"/>
           <a:lstStyle/>
           <a:p>
             <a:r>
